--- a/docs/thesis/defense/答辩PPT-北航模板版.pptx
+++ b/docs/thesis/defense/答辩PPT-北航模板版.pptx
@@ -21158,8 +21158,8 @@
         </p:nvSpPr>
         <p:spPr>
           <a:xfrm>
-            <a:off x="429768" y="219456"/>
-            <a:ext cx="91440" cy="512064"/>
+            <a:off x="1197864" y="2212848"/>
+            <a:ext cx="9866376" cy="20116"/>
           </a:xfrm>
           <a:prstGeom prst="rect">
             <a:avLst/>
@@ -21196,14 +21196,139 @@
       </p:sp>
       <p:sp>
         <p:nvSpPr>
-          <p:cNvPr id="3" name="Rectangle 2"/>
+          <p:cNvPr id="3" name="TextBox 2"/>
+          <p:cNvSpPr txBox="1"/>
+          <p:nvPr/>
+        </p:nvSpPr>
+        <p:spPr>
+          <a:xfrm>
+            <a:off x="914400" y="2395728"/>
+            <a:ext cx="10332720" cy="914400"/>
+          </a:xfrm>
+          <a:prstGeom prst="rect">
+            <a:avLst/>
+          </a:prstGeom>
+          <a:noFill/>
+        </p:spPr>
+        <p:txBody>
+          <a:bodyPr wrap="square" anchor="ctr" lIns="0" rIns="0" tIns="0" bIns="0">
+            <a:spAutoFit/>
+          </a:bodyPr>
+          <a:lstStyle/>
+          <a:p>
+            <a:pPr algn="ctr"/>
+            <a:r>
+              <a:rPr sz="3400" b="1">
+                <a:solidFill>
+                  <a:srgbClr val="113E6A"/>
+                </a:solidFill>
+                <a:latin typeface="Arial"/>
+                <a:ea typeface="微软雅黑"/>
+              </a:rPr>
+              <a:t>谢谢各位老师，请批评指正</a:t>
+            </a:r>
+          </a:p>
+        </p:txBody>
+      </p:sp>
+      <p:sp>
+        <p:nvSpPr>
+          <p:cNvPr id="4" name="TextBox 3"/>
+          <p:cNvSpPr txBox="1"/>
+          <p:nvPr/>
+        </p:nvSpPr>
+        <p:spPr>
+          <a:xfrm>
+            <a:off x="914400" y="3429000"/>
+            <a:ext cx="10332720" cy="457200"/>
+          </a:xfrm>
+          <a:prstGeom prst="rect">
+            <a:avLst/>
+          </a:prstGeom>
+          <a:noFill/>
+        </p:spPr>
+        <p:txBody>
+          <a:bodyPr wrap="square" anchor="t" lIns="0" rIns="0" tIns="0" bIns="0">
+            <a:spAutoFit/>
+          </a:bodyPr>
+          <a:lstStyle/>
+          <a:p>
+            <a:pPr algn="ctr"/>
+            <a:r>
+              <a:rPr sz="1600" b="0">
+                <a:solidFill>
+                  <a:srgbClr val="7F7F7F"/>
+                </a:solidFill>
+                <a:latin typeface="Arial"/>
+                <a:ea typeface="微软雅黑"/>
+              </a:rPr>
+              <a:t>基于 etcd 的分布式 Kubernetes 调度器研究与实现</a:t>
+            </a:r>
+          </a:p>
+        </p:txBody>
+      </p:sp>
+      <p:sp>
+        <p:nvSpPr>
+          <p:cNvPr id="5" name="TextBox 4"/>
+          <p:cNvSpPr txBox="1"/>
+          <p:nvPr/>
+        </p:nvSpPr>
+        <p:spPr>
+          <a:xfrm>
+            <a:off x="914400" y="4343400"/>
+            <a:ext cx="10332720" cy="731520"/>
+          </a:xfrm>
+          <a:prstGeom prst="rect">
+            <a:avLst/>
+          </a:prstGeom>
+          <a:noFill/>
+        </p:spPr>
+        <p:txBody>
+          <a:bodyPr wrap="square" anchor="t" lIns="0" rIns="0" tIns="0" bIns="0">
+            <a:spAutoFit/>
+          </a:bodyPr>
+          <a:lstStyle/>
+          <a:p>
+            <a:pPr algn="ctr"/>
+            <a:r>
+              <a:rPr sz="1300" b="0">
+                <a:solidFill>
+                  <a:srgbClr val="7F7F7F"/>
+                </a:solidFill>
+                <a:latin typeface="Arial"/>
+                <a:ea typeface="微软雅黑"/>
+              </a:rPr>
+              <a:t>答辩人：[姓名]</a:t>
+            </a:r>
+          </a:p>
+          <a:p>
+            <a:pPr algn="ctr">
+              <a:spcBef>
+                <a:spcPts val="400"/>
+              </a:spcBef>
+            </a:pPr>
+            <a:r>
+              <a:rPr sz="1300" b="0">
+                <a:solidFill>
+                  <a:srgbClr val="7F7F7F"/>
+                </a:solidFill>
+                <a:latin typeface="Arial"/>
+                <a:ea typeface="微软雅黑"/>
+              </a:rPr>
+              <a:t>联系方式：[邮箱]</a:t>
+            </a:r>
+          </a:p>
+        </p:txBody>
+      </p:sp>
+      <p:sp>
+        <p:nvSpPr>
+          <p:cNvPr id="6" name="Rectangle 5"/>
           <p:cNvSpPr/>
           <p:nvPr/>
         </p:nvSpPr>
         <p:spPr>
           <a:xfrm>
-            <a:off x="429768" y="219456"/>
-            <a:ext cx="274320" cy="91440"/>
+            <a:off x="1197864" y="5074920"/>
+            <a:ext cx="9866376" cy="20116"/>
           </a:xfrm>
           <a:prstGeom prst="rect">
             <a:avLst/>
@@ -21240,134 +21365,14 @@
       </p:sp>
       <p:sp>
         <p:nvSpPr>
-          <p:cNvPr id="4" name="TextBox 3"/>
-          <p:cNvSpPr txBox="1"/>
-          <p:nvPr/>
-        </p:nvSpPr>
-        <p:spPr>
-          <a:xfrm>
-            <a:off x="1014984" y="155448"/>
-            <a:ext cx="10424160" cy="621792"/>
-          </a:xfrm>
-          <a:prstGeom prst="rect">
-            <a:avLst/>
-          </a:prstGeom>
-          <a:noFill/>
-        </p:spPr>
-        <p:txBody>
-          <a:bodyPr wrap="square" anchor="ctr" lIns="0" rIns="0" tIns="0" bIns="0">
-            <a:spAutoFit/>
-          </a:bodyPr>
-          <a:lstStyle/>
-          <a:p>
-            <a:pPr algn="l">
-              <a:lnSpc>
-                <a:spcPct val="100000"/>
-              </a:lnSpc>
-            </a:pPr>
-            <a:r>
-              <a:rPr sz="3000" b="1">
-                <a:solidFill>
-                  <a:srgbClr val="113E6A"/>
-                </a:solidFill>
-                <a:latin typeface="Arial"/>
-                <a:ea typeface="微软雅黑"/>
-              </a:rPr>
-              <a:t>谢谢各位老师，请批评指正</a:t>
-            </a:r>
-          </a:p>
-        </p:txBody>
-      </p:sp>
-      <p:sp>
-        <p:nvSpPr>
-          <p:cNvPr id="5" name="Rectangle 4"/>
-          <p:cNvSpPr/>
-          <p:nvPr/>
-        </p:nvSpPr>
-        <p:spPr>
-          <a:xfrm>
-            <a:off x="1014984" y="1298448"/>
-            <a:ext cx="27432" cy="310896"/>
-          </a:xfrm>
-          <a:prstGeom prst="rect">
-            <a:avLst/>
-          </a:prstGeom>
-          <a:solidFill>
-            <a:srgbClr val="0070C0"/>
-          </a:solidFill>
-          <a:ln>
-            <a:noFill/>
-          </a:ln>
-          <a:effectLst/>
-        </p:spPr>
-        <p:style>
-          <a:lnRef idx="1">
-            <a:schemeClr val="accent1"/>
-          </a:lnRef>
-          <a:fillRef idx="3">
-            <a:schemeClr val="accent1"/>
-          </a:fillRef>
-          <a:effectRef idx="2">
-            <a:schemeClr val="accent1"/>
-          </a:effectRef>
-          <a:fontRef idx="minor">
-            <a:schemeClr val="lt1"/>
-          </a:fontRef>
-        </p:style>
-        <p:txBody>
-          <a:bodyPr rtlCol="0" anchor="ctr"/>
-          <a:lstStyle/>
-          <a:p>
-            <a:pPr algn="ctr"/>
-          </a:p>
-        </p:txBody>
-      </p:sp>
-      <p:sp>
-        <p:nvSpPr>
-          <p:cNvPr id="6" name="TextBox 5"/>
-          <p:cNvSpPr txBox="1"/>
-          <p:nvPr/>
-        </p:nvSpPr>
-        <p:spPr>
-          <a:xfrm>
-            <a:off x="1161288" y="1271016"/>
-            <a:ext cx="10241280" cy="384048"/>
-          </a:xfrm>
-          <a:prstGeom prst="rect">
-            <a:avLst/>
-          </a:prstGeom>
-          <a:noFill/>
-        </p:spPr>
-        <p:txBody>
-          <a:bodyPr wrap="square" anchor="ctr" lIns="0" rIns="0" tIns="0" bIns="0">
-            <a:spAutoFit/>
-          </a:bodyPr>
-          <a:lstStyle/>
-          <a:p>
-            <a:pPr algn="l"/>
-            <a:r>
-              <a:rPr sz="1550" b="1">
-                <a:solidFill>
-                  <a:srgbClr val="0070C0"/>
-                </a:solidFill>
-                <a:latin typeface="Arial"/>
-                <a:ea typeface="微软雅黑"/>
-              </a:rPr>
-              <a:t>基于 etcd 的分布式 Kubernetes 调度器研究与实现</a:t>
-            </a:r>
-          </a:p>
-        </p:txBody>
-      </p:sp>
-      <p:sp>
-        <p:nvSpPr>
           <p:cNvPr id="7" name="Rectangle 6"/>
           <p:cNvSpPr/>
           <p:nvPr/>
         </p:nvSpPr>
         <p:spPr>
           <a:xfrm>
-            <a:off x="1197864" y="2212848"/>
-            <a:ext cx="9866376" cy="20116"/>
+            <a:off x="36576" y="6748272"/>
+            <a:ext cx="12198096" cy="45720"/>
           </a:xfrm>
           <a:prstGeom prst="rect">
             <a:avLst/>
@@ -21405,219 +21410,6 @@
       <p:sp>
         <p:nvSpPr>
           <p:cNvPr id="8" name="TextBox 7"/>
-          <p:cNvSpPr txBox="1"/>
-          <p:nvPr/>
-        </p:nvSpPr>
-        <p:spPr>
-          <a:xfrm>
-            <a:off x="914400" y="2395728"/>
-            <a:ext cx="10332720" cy="914400"/>
-          </a:xfrm>
-          <a:prstGeom prst="rect">
-            <a:avLst/>
-          </a:prstGeom>
-          <a:noFill/>
-        </p:spPr>
-        <p:txBody>
-          <a:bodyPr wrap="square" anchor="ctr" lIns="0" rIns="0" tIns="0" bIns="0">
-            <a:spAutoFit/>
-          </a:bodyPr>
-          <a:lstStyle/>
-          <a:p>
-            <a:pPr algn="ctr"/>
-            <a:r>
-              <a:rPr sz="3400" b="1">
-                <a:solidFill>
-                  <a:srgbClr val="113E6A"/>
-                </a:solidFill>
-                <a:latin typeface="Arial"/>
-                <a:ea typeface="微软雅黑"/>
-              </a:rPr>
-              <a:t>谢谢各位老师，请批评指正</a:t>
-            </a:r>
-          </a:p>
-        </p:txBody>
-      </p:sp>
-      <p:sp>
-        <p:nvSpPr>
-          <p:cNvPr id="9" name="TextBox 8"/>
-          <p:cNvSpPr txBox="1"/>
-          <p:nvPr/>
-        </p:nvSpPr>
-        <p:spPr>
-          <a:xfrm>
-            <a:off x="914400" y="3429000"/>
-            <a:ext cx="10332720" cy="457200"/>
-          </a:xfrm>
-          <a:prstGeom prst="rect">
-            <a:avLst/>
-          </a:prstGeom>
-          <a:noFill/>
-        </p:spPr>
-        <p:txBody>
-          <a:bodyPr wrap="square" anchor="t" lIns="0" rIns="0" tIns="0" bIns="0">
-            <a:spAutoFit/>
-          </a:bodyPr>
-          <a:lstStyle/>
-          <a:p>
-            <a:pPr algn="ctr"/>
-            <a:r>
-              <a:rPr sz="1600" b="0">
-                <a:solidFill>
-                  <a:srgbClr val="7F7F7F"/>
-                </a:solidFill>
-                <a:latin typeface="Arial"/>
-                <a:ea typeface="微软雅黑"/>
-              </a:rPr>
-              <a:t>基于 etcd 的分布式 Kubernetes 调度器研究与实现</a:t>
-            </a:r>
-          </a:p>
-        </p:txBody>
-      </p:sp>
-      <p:sp>
-        <p:nvSpPr>
-          <p:cNvPr id="10" name="TextBox 9"/>
-          <p:cNvSpPr txBox="1"/>
-          <p:nvPr/>
-        </p:nvSpPr>
-        <p:spPr>
-          <a:xfrm>
-            <a:off x="914400" y="4343400"/>
-            <a:ext cx="10332720" cy="731520"/>
-          </a:xfrm>
-          <a:prstGeom prst="rect">
-            <a:avLst/>
-          </a:prstGeom>
-          <a:noFill/>
-        </p:spPr>
-        <p:txBody>
-          <a:bodyPr wrap="square" anchor="t" lIns="0" rIns="0" tIns="0" bIns="0">
-            <a:spAutoFit/>
-          </a:bodyPr>
-          <a:lstStyle/>
-          <a:p>
-            <a:pPr algn="ctr"/>
-            <a:r>
-              <a:rPr sz="1300" b="0">
-                <a:solidFill>
-                  <a:srgbClr val="7F7F7F"/>
-                </a:solidFill>
-                <a:latin typeface="Arial"/>
-                <a:ea typeface="微软雅黑"/>
-              </a:rPr>
-              <a:t>答辩人：[姓名]</a:t>
-            </a:r>
-          </a:p>
-          <a:p>
-            <a:pPr algn="ctr">
-              <a:spcBef>
-                <a:spcPts val="400"/>
-              </a:spcBef>
-            </a:pPr>
-            <a:r>
-              <a:rPr sz="1300" b="0">
-                <a:solidFill>
-                  <a:srgbClr val="7F7F7F"/>
-                </a:solidFill>
-                <a:latin typeface="Arial"/>
-                <a:ea typeface="微软雅黑"/>
-              </a:rPr>
-              <a:t>联系方式：[邮箱]</a:t>
-            </a:r>
-          </a:p>
-        </p:txBody>
-      </p:sp>
-      <p:sp>
-        <p:nvSpPr>
-          <p:cNvPr id="11" name="Rectangle 10"/>
-          <p:cNvSpPr/>
-          <p:nvPr/>
-        </p:nvSpPr>
-        <p:spPr>
-          <a:xfrm>
-            <a:off x="1197864" y="5074920"/>
-            <a:ext cx="9866376" cy="20116"/>
-          </a:xfrm>
-          <a:prstGeom prst="rect">
-            <a:avLst/>
-          </a:prstGeom>
-          <a:solidFill>
-            <a:srgbClr val="113E6A"/>
-          </a:solidFill>
-          <a:ln>
-            <a:noFill/>
-          </a:ln>
-          <a:effectLst/>
-        </p:spPr>
-        <p:style>
-          <a:lnRef idx="1">
-            <a:schemeClr val="accent1"/>
-          </a:lnRef>
-          <a:fillRef idx="3">
-            <a:schemeClr val="accent1"/>
-          </a:fillRef>
-          <a:effectRef idx="2">
-            <a:schemeClr val="accent1"/>
-          </a:effectRef>
-          <a:fontRef idx="minor">
-            <a:schemeClr val="lt1"/>
-          </a:fontRef>
-        </p:style>
-        <p:txBody>
-          <a:bodyPr rtlCol="0" anchor="ctr"/>
-          <a:lstStyle/>
-          <a:p>
-            <a:pPr algn="ctr"/>
-          </a:p>
-        </p:txBody>
-      </p:sp>
-      <p:sp>
-        <p:nvSpPr>
-          <p:cNvPr id="12" name="Rectangle 11"/>
-          <p:cNvSpPr/>
-          <p:nvPr/>
-        </p:nvSpPr>
-        <p:spPr>
-          <a:xfrm>
-            <a:off x="36576" y="6748272"/>
-            <a:ext cx="12198096" cy="45720"/>
-          </a:xfrm>
-          <a:prstGeom prst="rect">
-            <a:avLst/>
-          </a:prstGeom>
-          <a:solidFill>
-            <a:srgbClr val="113E6A"/>
-          </a:solidFill>
-          <a:ln>
-            <a:noFill/>
-          </a:ln>
-          <a:effectLst/>
-        </p:spPr>
-        <p:style>
-          <a:lnRef idx="1">
-            <a:schemeClr val="accent1"/>
-          </a:lnRef>
-          <a:fillRef idx="3">
-            <a:schemeClr val="accent1"/>
-          </a:fillRef>
-          <a:effectRef idx="2">
-            <a:schemeClr val="accent1"/>
-          </a:effectRef>
-          <a:fontRef idx="minor">
-            <a:schemeClr val="lt1"/>
-          </a:fontRef>
-        </p:style>
-        <p:txBody>
-          <a:bodyPr rtlCol="0" anchor="ctr"/>
-          <a:lstStyle/>
-          <a:p>
-            <a:pPr algn="ctr"/>
-          </a:p>
-        </p:txBody>
-      </p:sp>
-      <p:sp>
-        <p:nvSpPr>
-          <p:cNvPr id="13" name="TextBox 12"/>
           <p:cNvSpPr txBox="1"/>
           <p:nvPr/>
         </p:nvSpPr>

--- a/docs/thesis/defense/答辩PPT-北航模板版.pptx
+++ b/docs/thesis/defense/答辩PPT-北航模板版.pptx
@@ -8822,7 +8822,7 @@
         <p:spPr>
           <a:xfrm>
             <a:off x="36576" y="6748272"/>
-            <a:ext cx="12198096" cy="45720"/>
+            <a:ext cx="12088368" cy="45720"/>
           </a:xfrm>
           <a:prstGeom prst="rect">
             <a:avLst/>
@@ -21372,7 +21372,7 @@
         <p:spPr>
           <a:xfrm>
             <a:off x="36576" y="6748272"/>
-            <a:ext cx="12198096" cy="45720"/>
+            <a:ext cx="12088368" cy="45720"/>
           </a:xfrm>
           <a:prstGeom prst="rect">
             <a:avLst/>

--- a/docs/thesis/defense/答辩PPT-北航模板版.pptx
+++ b/docs/thesis/defense/答辩PPT-北航模板版.pptx
@@ -9877,11 +9877,11 @@
             <a:avLst/>
           </a:prstGeom>
           <a:solidFill>
-            <a:srgbClr val="EAEFF4"/>
+            <a:srgbClr val="FFFFFF"/>
           </a:solidFill>
           <a:ln w="9525">
             <a:solidFill>
-              <a:srgbClr val="D9DEE5"/>
+              <a:srgbClr val="D6E3F0"/>
             </a:solidFill>
           </a:ln>
           <a:effectLst/>
@@ -9951,7 +9951,7 @@
             <a:r>
               <a:rPr sz="1050" b="0">
                 <a:solidFill>
-                  <a:srgbClr val="7F7F7F"/>
+                  <a:srgbClr val="2E2C2C"/>
                 </a:solidFill>
                 <a:latin typeface="Arial"/>
                 <a:ea typeface="微软雅黑"/>
@@ -10075,11 +10075,11 @@
             <a:avLst/>
           </a:prstGeom>
           <a:solidFill>
-            <a:srgbClr val="EAEFF4"/>
+            <a:srgbClr val="FFFFFF"/>
           </a:solidFill>
           <a:ln w="9525">
             <a:solidFill>
-              <a:srgbClr val="D9DEE5"/>
+              <a:srgbClr val="D6E3F0"/>
             </a:solidFill>
           </a:ln>
           <a:effectLst/>
@@ -10149,7 +10149,7 @@
             <a:r>
               <a:rPr sz="1050" b="0">
                 <a:solidFill>
-                  <a:srgbClr val="7F7F7F"/>
+                  <a:srgbClr val="2E2C2C"/>
                 </a:solidFill>
                 <a:latin typeface="Arial"/>
                 <a:ea typeface="微软雅黑"/>
@@ -10273,11 +10273,11 @@
             <a:avLst/>
           </a:prstGeom>
           <a:solidFill>
-            <a:srgbClr val="EAEFF4"/>
+            <a:srgbClr val="FFFFFF"/>
           </a:solidFill>
           <a:ln w="9525">
             <a:solidFill>
-              <a:srgbClr val="D9DEE5"/>
+              <a:srgbClr val="D6E3F0"/>
             </a:solidFill>
           </a:ln>
           <a:effectLst/>
@@ -10347,7 +10347,7 @@
             <a:r>
               <a:rPr sz="1050" b="0">
                 <a:solidFill>
-                  <a:srgbClr val="7F7F7F"/>
+                  <a:srgbClr val="2E2C2C"/>
                 </a:solidFill>
                 <a:latin typeface="Arial"/>
                 <a:ea typeface="微软雅黑"/>
@@ -10471,11 +10471,11 @@
             <a:avLst/>
           </a:prstGeom>
           <a:solidFill>
-            <a:srgbClr val="EAEFF4"/>
+            <a:srgbClr val="FFFFFF"/>
           </a:solidFill>
           <a:ln w="9525">
             <a:solidFill>
-              <a:srgbClr val="D9DEE5"/>
+              <a:srgbClr val="D6E3F0"/>
             </a:solidFill>
           </a:ln>
           <a:effectLst/>
@@ -10545,7 +10545,7 @@
             <a:r>
               <a:rPr sz="1050" b="0">
                 <a:solidFill>
-                  <a:srgbClr val="7F7F7F"/>
+                  <a:srgbClr val="2E2C2C"/>
                 </a:solidFill>
                 <a:latin typeface="Arial"/>
                 <a:ea typeface="微软雅黑"/>
@@ -13384,11 +13384,11 @@
             <a:avLst/>
           </a:prstGeom>
           <a:solidFill>
-            <a:srgbClr val="EAEFF4"/>
+            <a:srgbClr val="FFFFFF"/>
           </a:solidFill>
           <a:ln w="9525">
             <a:solidFill>
-              <a:srgbClr val="D9DEE5"/>
+              <a:srgbClr val="D6E3F0"/>
             </a:solidFill>
           </a:ln>
           <a:effectLst/>
@@ -13546,11 +13546,11 @@
             <a:avLst/>
           </a:prstGeom>
           <a:solidFill>
-            <a:srgbClr val="EAEFF4"/>
+            <a:srgbClr val="FFFFFF"/>
           </a:solidFill>
           <a:ln w="9525">
             <a:solidFill>
-              <a:srgbClr val="D9DEE5"/>
+              <a:srgbClr val="D6E3F0"/>
             </a:solidFill>
           </a:ln>
           <a:effectLst/>
@@ -13708,11 +13708,11 @@
             <a:avLst/>
           </a:prstGeom>
           <a:solidFill>
-            <a:srgbClr val="EAEFF4"/>
+            <a:srgbClr val="FFFFFF"/>
           </a:solidFill>
           <a:ln w="9525">
             <a:solidFill>
-              <a:srgbClr val="D9DEE5"/>
+              <a:srgbClr val="D6E3F0"/>
             </a:solidFill>
           </a:ln>
           <a:effectLst/>
@@ -16873,11 +16873,11 @@
             <a:avLst/>
           </a:prstGeom>
           <a:solidFill>
-            <a:srgbClr val="EAEFF4"/>
+            <a:srgbClr val="FFFFFF"/>
           </a:solidFill>
           <a:ln w="9525">
             <a:solidFill>
-              <a:srgbClr val="D9DEE5"/>
+              <a:srgbClr val="D6E3F0"/>
             </a:solidFill>
           </a:ln>
           <a:effectLst/>
@@ -17004,7 +17004,7 @@
             <a:r>
               <a:rPr sz="1100" b="0">
                 <a:solidFill>
-                  <a:srgbClr val="7F7F7F"/>
+                  <a:srgbClr val="2E2C2C"/>
                 </a:solidFill>
                 <a:latin typeface="Arial"/>
                 <a:ea typeface="微软雅黑"/>
@@ -17029,11 +17029,11 @@
             <a:avLst/>
           </a:prstGeom>
           <a:solidFill>
-            <a:srgbClr val="EAEFF4"/>
+            <a:srgbClr val="FFFFFF"/>
           </a:solidFill>
           <a:ln w="9525">
             <a:solidFill>
-              <a:srgbClr val="D9DEE5"/>
+              <a:srgbClr val="D6E3F0"/>
             </a:solidFill>
           </a:ln>
           <a:effectLst/>
@@ -17160,7 +17160,7 @@
             <a:r>
               <a:rPr sz="1100" b="0">
                 <a:solidFill>
-                  <a:srgbClr val="7F7F7F"/>
+                  <a:srgbClr val="2E2C2C"/>
                 </a:solidFill>
                 <a:latin typeface="Arial"/>
                 <a:ea typeface="微软雅黑"/>
@@ -17185,11 +17185,11 @@
             <a:avLst/>
           </a:prstGeom>
           <a:solidFill>
-            <a:srgbClr val="EAEFF4"/>
+            <a:srgbClr val="FFFFFF"/>
           </a:solidFill>
           <a:ln w="9525">
             <a:solidFill>
-              <a:srgbClr val="D9DEE5"/>
+              <a:srgbClr val="D6E3F0"/>
             </a:solidFill>
           </a:ln>
           <a:effectLst/>
@@ -17316,7 +17316,7 @@
             <a:r>
               <a:rPr sz="1100" b="0">
                 <a:solidFill>
-                  <a:srgbClr val="7F7F7F"/>
+                  <a:srgbClr val="2E2C2C"/>
                 </a:solidFill>
                 <a:latin typeface="Arial"/>
                 <a:ea typeface="微软雅黑"/>
@@ -21031,11 +21031,11 @@
             <a:avLst/>
           </a:prstGeom>
           <a:solidFill>
-            <a:srgbClr val="EAEFF4"/>
+            <a:srgbClr val="FFFFFF"/>
           </a:solidFill>
           <a:ln w="9525">
             <a:solidFill>
-              <a:srgbClr val="D9DEE5"/>
+              <a:srgbClr val="D6E3F0"/>
             </a:solidFill>
           </a:ln>
           <a:effectLst/>
@@ -21162,7 +21162,7 @@
             <a:r>
               <a:rPr sz="1100" b="0">
                 <a:solidFill>
-                  <a:srgbClr val="7F7F7F"/>
+                  <a:srgbClr val="2E2C2C"/>
                 </a:solidFill>
                 <a:latin typeface="Arial"/>
                 <a:ea typeface="微软雅黑"/>
@@ -21187,11 +21187,11 @@
             <a:avLst/>
           </a:prstGeom>
           <a:solidFill>
-            <a:srgbClr val="EAEFF4"/>
+            <a:srgbClr val="FFFFFF"/>
           </a:solidFill>
           <a:ln w="9525">
             <a:solidFill>
-              <a:srgbClr val="D9DEE5"/>
+              <a:srgbClr val="D6E3F0"/>
             </a:solidFill>
           </a:ln>
           <a:effectLst/>
@@ -21318,7 +21318,7 @@
             <a:r>
               <a:rPr sz="1100" b="0">
                 <a:solidFill>
-                  <a:srgbClr val="7F7F7F"/>
+                  <a:srgbClr val="2E2C2C"/>
                 </a:solidFill>
                 <a:latin typeface="Arial"/>
                 <a:ea typeface="微软雅黑"/>
@@ -21343,11 +21343,11 @@
             <a:avLst/>
           </a:prstGeom>
           <a:solidFill>
-            <a:srgbClr val="EAEFF4"/>
+            <a:srgbClr val="FFFFFF"/>
           </a:solidFill>
           <a:ln w="9525">
             <a:solidFill>
-              <a:srgbClr val="D9DEE5"/>
+              <a:srgbClr val="D6E3F0"/>
             </a:solidFill>
           </a:ln>
           <a:effectLst/>
@@ -21474,7 +21474,7 @@
             <a:r>
               <a:rPr sz="1100" b="0">
                 <a:solidFill>
-                  <a:srgbClr val="7F7F7F"/>
+                  <a:srgbClr val="2E2C2C"/>
                 </a:solidFill>
                 <a:latin typeface="Arial"/>
                 <a:ea typeface="微软雅黑"/>
@@ -21499,11 +21499,11 @@
             <a:avLst/>
           </a:prstGeom>
           <a:solidFill>
-            <a:srgbClr val="EAEFF4"/>
+            <a:srgbClr val="FFFFFF"/>
           </a:solidFill>
           <a:ln w="9525">
             <a:solidFill>
-              <a:srgbClr val="D9DEE5"/>
+              <a:srgbClr val="D6E3F0"/>
             </a:solidFill>
           </a:ln>
           <a:effectLst/>
@@ -21630,7 +21630,7 @@
             <a:r>
               <a:rPr sz="1100" b="0">
                 <a:solidFill>
-                  <a:srgbClr val="7F7F7F"/>
+                  <a:srgbClr val="2E2C2C"/>
                 </a:solidFill>
                 <a:latin typeface="Arial"/>
                 <a:ea typeface="微软雅黑"/>
@@ -21655,11 +21655,11 @@
             <a:avLst/>
           </a:prstGeom>
           <a:solidFill>
-            <a:srgbClr val="EAEFF4"/>
+            <a:srgbClr val="FFFFFF"/>
           </a:solidFill>
           <a:ln w="9525">
             <a:solidFill>
-              <a:srgbClr val="D9DEE5"/>
+              <a:srgbClr val="D6E3F0"/>
             </a:solidFill>
           </a:ln>
           <a:effectLst/>
@@ -21786,7 +21786,7 @@
             <a:r>
               <a:rPr sz="1100" b="0">
                 <a:solidFill>
-                  <a:srgbClr val="7F7F7F"/>
+                  <a:srgbClr val="2E2C2C"/>
                 </a:solidFill>
                 <a:latin typeface="Arial"/>
                 <a:ea typeface="微软雅黑"/>
@@ -21811,11 +21811,11 @@
             <a:avLst/>
           </a:prstGeom>
           <a:solidFill>
-            <a:srgbClr val="EAEFF4"/>
+            <a:srgbClr val="FFFFFF"/>
           </a:solidFill>
           <a:ln w="9525">
             <a:solidFill>
-              <a:srgbClr val="D9DEE5"/>
+              <a:srgbClr val="D6E3F0"/>
             </a:solidFill>
           </a:ln>
           <a:effectLst/>
@@ -21942,7 +21942,7 @@
             <a:r>
               <a:rPr sz="1100" b="0">
                 <a:solidFill>
-                  <a:srgbClr val="7F7F7F"/>
+                  <a:srgbClr val="2E2C2C"/>
                 </a:solidFill>
                 <a:latin typeface="Arial"/>
                 <a:ea typeface="微软雅黑"/>
@@ -22346,11 +22346,11 @@
             <a:avLst/>
           </a:prstGeom>
           <a:solidFill>
-            <a:srgbClr val="EAEFF4"/>
+            <a:srgbClr val="FFFFFF"/>
           </a:solidFill>
           <a:ln w="9525">
             <a:solidFill>
-              <a:srgbClr val="D9DEE5"/>
+              <a:srgbClr val="D6E3F0"/>
             </a:solidFill>
           </a:ln>
           <a:effectLst/>
@@ -22477,7 +22477,7 @@
             <a:r>
               <a:rPr sz="1100" b="0">
                 <a:solidFill>
-                  <a:srgbClr val="7F7F7F"/>
+                  <a:srgbClr val="2E2C2C"/>
                 </a:solidFill>
                 <a:latin typeface="Arial"/>
                 <a:ea typeface="微软雅黑"/>
@@ -22502,11 +22502,11 @@
             <a:avLst/>
           </a:prstGeom>
           <a:solidFill>
-            <a:srgbClr val="EAEFF4"/>
+            <a:srgbClr val="FFFFFF"/>
           </a:solidFill>
           <a:ln w="9525">
             <a:solidFill>
-              <a:srgbClr val="D9DEE5"/>
+              <a:srgbClr val="D6E3F0"/>
             </a:solidFill>
           </a:ln>
           <a:effectLst/>
@@ -22633,7 +22633,7 @@
             <a:r>
               <a:rPr sz="1100" b="0">
                 <a:solidFill>
-                  <a:srgbClr val="7F7F7F"/>
+                  <a:srgbClr val="2E2C2C"/>
                 </a:solidFill>
                 <a:latin typeface="Arial"/>
                 <a:ea typeface="微软雅黑"/>
@@ -22658,11 +22658,11 @@
             <a:avLst/>
           </a:prstGeom>
           <a:solidFill>
-            <a:srgbClr val="EAEFF4"/>
+            <a:srgbClr val="FFFFFF"/>
           </a:solidFill>
           <a:ln w="9525">
             <a:solidFill>
-              <a:srgbClr val="D9DEE5"/>
+              <a:srgbClr val="D6E3F0"/>
             </a:solidFill>
           </a:ln>
           <a:effectLst/>
@@ -22789,7 +22789,7 @@
             <a:r>
               <a:rPr sz="1100" b="0">
                 <a:solidFill>
-                  <a:srgbClr val="7F7F7F"/>
+                  <a:srgbClr val="2E2C2C"/>
                 </a:solidFill>
                 <a:latin typeface="Arial"/>
                 <a:ea typeface="微软雅黑"/>
@@ -22814,11 +22814,11 @@
             <a:avLst/>
           </a:prstGeom>
           <a:solidFill>
-            <a:srgbClr val="EAEFF4"/>
+            <a:srgbClr val="FFFFFF"/>
           </a:solidFill>
           <a:ln w="9525">
             <a:solidFill>
-              <a:srgbClr val="D9DEE5"/>
+              <a:srgbClr val="D6E3F0"/>
             </a:solidFill>
           </a:ln>
           <a:effectLst/>
@@ -22945,7 +22945,7 @@
             <a:r>
               <a:rPr sz="1100" b="0">
                 <a:solidFill>
-                  <a:srgbClr val="7F7F7F"/>
+                  <a:srgbClr val="2E2C2C"/>
                 </a:solidFill>
                 <a:latin typeface="Arial"/>
                 <a:ea typeface="微软雅黑"/>
@@ -22970,11 +22970,11 @@
             <a:avLst/>
           </a:prstGeom>
           <a:solidFill>
-            <a:srgbClr val="EAEFF4"/>
+            <a:srgbClr val="FFFFFF"/>
           </a:solidFill>
           <a:ln w="9525">
             <a:solidFill>
-              <a:srgbClr val="D9DEE5"/>
+              <a:srgbClr val="D6E3F0"/>
             </a:solidFill>
           </a:ln>
           <a:effectLst/>
@@ -23101,7 +23101,7 @@
             <a:r>
               <a:rPr sz="1100" b="0">
                 <a:solidFill>
-                  <a:srgbClr val="7F7F7F"/>
+                  <a:srgbClr val="2E2C2C"/>
                 </a:solidFill>
                 <a:latin typeface="Arial"/>
                 <a:ea typeface="微软雅黑"/>
@@ -23126,11 +23126,11 @@
             <a:avLst/>
           </a:prstGeom>
           <a:solidFill>
-            <a:srgbClr val="EAEFF4"/>
+            <a:srgbClr val="FFFFFF"/>
           </a:solidFill>
           <a:ln w="9525">
             <a:solidFill>
-              <a:srgbClr val="D9DEE5"/>
+              <a:srgbClr val="D6E3F0"/>
             </a:solidFill>
           </a:ln>
           <a:effectLst/>
@@ -23257,7 +23257,7 @@
             <a:r>
               <a:rPr sz="1100" b="0">
                 <a:solidFill>
-                  <a:srgbClr val="7F7F7F"/>
+                  <a:srgbClr val="2E2C2C"/>
                 </a:solidFill>
                 <a:latin typeface="Arial"/>
                 <a:ea typeface="微软雅黑"/>
@@ -30447,11 +30447,11 @@
             <a:avLst/>
           </a:prstGeom>
           <a:solidFill>
-            <a:srgbClr val="EAEFF4"/>
+            <a:srgbClr val="FFFFFF"/>
           </a:solidFill>
           <a:ln w="9525">
             <a:solidFill>
-              <a:srgbClr val="D9DEE5"/>
+              <a:srgbClr val="D6E3F0"/>
             </a:solidFill>
           </a:ln>
           <a:effectLst/>
@@ -30578,7 +30578,7 @@
             <a:r>
               <a:rPr sz="1100" b="0">
                 <a:solidFill>
-                  <a:srgbClr val="7F7F7F"/>
+                  <a:srgbClr val="2E2C2C"/>
                 </a:solidFill>
                 <a:latin typeface="Arial"/>
                 <a:ea typeface="微软雅黑"/>
@@ -30603,11 +30603,11 @@
             <a:avLst/>
           </a:prstGeom>
           <a:solidFill>
-            <a:srgbClr val="EAEFF4"/>
+            <a:srgbClr val="FFFFFF"/>
           </a:solidFill>
           <a:ln w="9525">
             <a:solidFill>
-              <a:srgbClr val="D9DEE5"/>
+              <a:srgbClr val="D6E3F0"/>
             </a:solidFill>
           </a:ln>
           <a:effectLst/>
@@ -30734,7 +30734,7 @@
             <a:r>
               <a:rPr sz="1100" b="0">
                 <a:solidFill>
-                  <a:srgbClr val="7F7F7F"/>
+                  <a:srgbClr val="2E2C2C"/>
                 </a:solidFill>
                 <a:latin typeface="Arial"/>
                 <a:ea typeface="微软雅黑"/>

--- a/docs/thesis/defense/答辩PPT-北航模板版.pptx
+++ b/docs/thesis/defense/答辩PPT-北航模板版.pptx
@@ -8803,7 +8803,7 @@
             <a:r>
               <a:rPr sz="1500" b="0">
                 <a:solidFill>
-                  <a:srgbClr val="7F7F7F"/>
+                  <a:srgbClr val="636363"/>
                 </a:solidFill>
                 <a:latin typeface="Arial"/>
                 <a:ea typeface="微软雅黑"/>
@@ -8883,7 +8883,7 @@
             <a:r>
               <a:rPr sz="950" b="0">
                 <a:solidFill>
-                  <a:srgbClr val="7F7F7F"/>
+                  <a:srgbClr val="636363"/>
                 </a:solidFill>
                 <a:latin typeface="Arial"/>
                 <a:ea typeface="微软雅黑"/>
@@ -9366,7 +9366,7 @@
             <a:r>
               <a:rPr sz="950" b="0">
                 <a:solidFill>
-                  <a:srgbClr val="7F7F7F"/>
+                  <a:srgbClr val="636363"/>
                 </a:solidFill>
                 <a:latin typeface="Arial"/>
                 <a:ea typeface="微软雅黑"/>
@@ -9852,7 +9852,7 @@
             <a:r>
               <a:rPr sz="1050" b="0">
                 <a:solidFill>
-                  <a:srgbClr val="7F7F7F"/>
+                  <a:srgbClr val="636363"/>
                 </a:solidFill>
                 <a:latin typeface="Arial"/>
                 <a:ea typeface="微软雅黑"/>
@@ -10050,7 +10050,7 @@
             <a:r>
               <a:rPr sz="1050" b="0">
                 <a:solidFill>
-                  <a:srgbClr val="7F7F7F"/>
+                  <a:srgbClr val="636363"/>
                 </a:solidFill>
                 <a:latin typeface="Arial"/>
                 <a:ea typeface="微软雅黑"/>
@@ -10248,7 +10248,7 @@
             <a:r>
               <a:rPr sz="1050" b="0">
                 <a:solidFill>
-                  <a:srgbClr val="7F7F7F"/>
+                  <a:srgbClr val="636363"/>
                 </a:solidFill>
                 <a:latin typeface="Arial"/>
                 <a:ea typeface="微软雅黑"/>
@@ -10446,7 +10446,7 @@
             <a:r>
               <a:rPr sz="1050" b="0">
                 <a:solidFill>
-                  <a:srgbClr val="7F7F7F"/>
+                  <a:srgbClr val="636363"/>
                 </a:solidFill>
                 <a:latin typeface="Arial"/>
                 <a:ea typeface="微软雅黑"/>
@@ -10581,7 +10581,7 @@
             <a:r>
               <a:rPr sz="950" b="0">
                 <a:solidFill>
-                  <a:srgbClr val="7F7F7F"/>
+                  <a:srgbClr val="636363"/>
                 </a:solidFill>
                 <a:latin typeface="Arial"/>
                 <a:ea typeface="微软雅黑"/>
@@ -11064,7 +11064,7 @@
             <a:r>
               <a:rPr sz="950" b="0">
                 <a:solidFill>
-                  <a:srgbClr val="7F7F7F"/>
+                  <a:srgbClr val="636363"/>
                 </a:solidFill>
                 <a:latin typeface="Arial"/>
                 <a:ea typeface="微软雅黑"/>
@@ -11849,7 +11849,7 @@
             <a:r>
               <a:rPr sz="950" b="0">
                 <a:solidFill>
-                  <a:srgbClr val="7F7F7F"/>
+                  <a:srgbClr val="636363"/>
                 </a:solidFill>
                 <a:latin typeface="Arial"/>
                 <a:ea typeface="微软雅黑"/>
@@ -12252,7 +12252,7 @@
             <a:r>
               <a:rPr sz="950" b="0">
                 <a:solidFill>
-                  <a:srgbClr val="7F7F7F"/>
+                  <a:srgbClr val="636363"/>
                 </a:solidFill>
                 <a:latin typeface="Arial"/>
                 <a:ea typeface="微软雅黑"/>
@@ -12434,7 +12434,7 @@
             <a:r>
               <a:rPr sz="800" b="0">
                 <a:solidFill>
-                  <a:srgbClr val="7F7F7F"/>
+                  <a:srgbClr val="636363"/>
                 </a:solidFill>
                 <a:latin typeface="Arial"/>
                 <a:ea typeface="微软雅黑"/>
@@ -12536,7 +12536,7 @@
             <a:r>
               <a:rPr sz="800" b="0">
                 <a:solidFill>
-                  <a:srgbClr val="7F7F7F"/>
+                  <a:srgbClr val="636363"/>
                 </a:solidFill>
                 <a:latin typeface="Arial"/>
                 <a:ea typeface="微软雅黑"/>
@@ -12638,7 +12638,7 @@
             <a:r>
               <a:rPr sz="800" b="0">
                 <a:solidFill>
-                  <a:srgbClr val="7F7F7F"/>
+                  <a:srgbClr val="636363"/>
                 </a:solidFill>
                 <a:latin typeface="Arial"/>
                 <a:ea typeface="微软雅黑"/>
@@ -12740,7 +12740,7 @@
             <a:r>
               <a:rPr sz="800" b="0">
                 <a:solidFill>
-                  <a:srgbClr val="7F7F7F"/>
+                  <a:srgbClr val="636363"/>
                 </a:solidFill>
                 <a:latin typeface="Arial"/>
                 <a:ea typeface="微软雅黑"/>
@@ -12842,7 +12842,7 @@
             <a:r>
               <a:rPr sz="800" b="0">
                 <a:solidFill>
-                  <a:srgbClr val="7F7F7F"/>
+                  <a:srgbClr val="636363"/>
                 </a:solidFill>
                 <a:latin typeface="Arial"/>
                 <a:ea typeface="微软雅黑"/>
@@ -12944,7 +12944,7 @@
             <a:r>
               <a:rPr sz="800" b="0">
                 <a:solidFill>
-                  <a:srgbClr val="7F7F7F"/>
+                  <a:srgbClr val="636363"/>
                 </a:solidFill>
                 <a:latin typeface="Arial"/>
                 <a:ea typeface="微软雅黑"/>
@@ -12980,7 +12980,7 @@
             <a:r>
               <a:rPr sz="850" b="0">
                 <a:solidFill>
-                  <a:srgbClr val="7F7F7F"/>
+                  <a:srgbClr val="636363"/>
                 </a:solidFill>
                 <a:latin typeface="Arial"/>
                 <a:ea typeface="微软雅黑"/>
@@ -13016,7 +13016,7 @@
             <a:r>
               <a:rPr sz="950" b="0">
                 <a:solidFill>
-                  <a:srgbClr val="7F7F7F"/>
+                  <a:srgbClr val="636363"/>
                 </a:solidFill>
                 <a:latin typeface="Arial"/>
                 <a:ea typeface="微软雅黑"/>
@@ -13521,7 +13521,7 @@
             <a:r>
               <a:rPr sz="1200" b="0">
                 <a:solidFill>
-                  <a:srgbClr val="7F7F7F"/>
+                  <a:srgbClr val="636363"/>
                 </a:solidFill>
                 <a:latin typeface="Arial"/>
                 <a:ea typeface="微软雅黑"/>
@@ -13683,7 +13683,7 @@
             <a:r>
               <a:rPr sz="1200" b="0">
                 <a:solidFill>
-                  <a:srgbClr val="7F7F7F"/>
+                  <a:srgbClr val="636363"/>
                 </a:solidFill>
                 <a:latin typeface="Arial"/>
                 <a:ea typeface="微软雅黑"/>
@@ -13845,7 +13845,7 @@
             <a:r>
               <a:rPr sz="1200" b="0">
                 <a:solidFill>
-                  <a:srgbClr val="7F7F7F"/>
+                  <a:srgbClr val="636363"/>
                 </a:solidFill>
                 <a:latin typeface="Arial"/>
                 <a:ea typeface="微软雅黑"/>
@@ -13961,7 +13961,7 @@
             <a:r>
               <a:rPr sz="950" b="0">
                 <a:solidFill>
-                  <a:srgbClr val="7F7F7F"/>
+                  <a:srgbClr val="636363"/>
                 </a:solidFill>
                 <a:latin typeface="Arial"/>
                 <a:ea typeface="微软雅黑"/>
@@ -14444,7 +14444,7 @@
             <a:r>
               <a:rPr sz="850" b="0">
                 <a:solidFill>
-                  <a:srgbClr val="7F7F7F"/>
+                  <a:srgbClr val="636363"/>
                 </a:solidFill>
                 <a:latin typeface="Arial"/>
                 <a:ea typeface="微软雅黑"/>
@@ -14480,7 +14480,7 @@
             <a:r>
               <a:rPr sz="950" b="0">
                 <a:solidFill>
-                  <a:srgbClr val="7F7F7F"/>
+                  <a:srgbClr val="636363"/>
                 </a:solidFill>
                 <a:latin typeface="Arial"/>
                 <a:ea typeface="微软雅黑"/>
@@ -14963,7 +14963,7 @@
             <a:r>
               <a:rPr sz="850" b="0">
                 <a:solidFill>
-                  <a:srgbClr val="7F7F7F"/>
+                  <a:srgbClr val="636363"/>
                 </a:solidFill>
                 <a:latin typeface="Arial"/>
                 <a:ea typeface="微软雅黑"/>
@@ -14999,7 +14999,7 @@
             <a:r>
               <a:rPr sz="950" b="0">
                 <a:solidFill>
-                  <a:srgbClr val="7F7F7F"/>
+                  <a:srgbClr val="636363"/>
                 </a:solidFill>
                 <a:latin typeface="Arial"/>
                 <a:ea typeface="微软雅黑"/>
@@ -15950,7 +15950,7 @@
             <a:r>
               <a:rPr sz="850" b="0">
                 <a:solidFill>
-                  <a:srgbClr val="7F7F7F"/>
+                  <a:srgbClr val="636363"/>
                 </a:solidFill>
                 <a:latin typeface="Arial"/>
                 <a:ea typeface="微软雅黑"/>
@@ -15986,7 +15986,7 @@
             <a:r>
               <a:rPr sz="950" b="0">
                 <a:solidFill>
-                  <a:srgbClr val="7F7F7F"/>
+                  <a:srgbClr val="636363"/>
                 </a:solidFill>
                 <a:latin typeface="Arial"/>
                 <a:ea typeface="微软雅黑"/>
@@ -16469,7 +16469,7 @@
             <a:r>
               <a:rPr sz="850" b="0">
                 <a:solidFill>
-                  <a:srgbClr val="7F7F7F"/>
+                  <a:srgbClr val="636363"/>
                 </a:solidFill>
                 <a:latin typeface="Arial"/>
                 <a:ea typeface="微软雅黑"/>
@@ -16505,7 +16505,7 @@
             <a:r>
               <a:rPr sz="950" b="0">
                 <a:solidFill>
-                  <a:srgbClr val="7F7F7F"/>
+                  <a:srgbClr val="636363"/>
                 </a:solidFill>
                 <a:latin typeface="Arial"/>
                 <a:ea typeface="微软雅黑"/>
@@ -17482,7 +17482,7 @@
             <a:r>
               <a:rPr sz="950" b="0">
                 <a:solidFill>
-                  <a:srgbClr val="7F7F7F"/>
+                  <a:srgbClr val="636363"/>
                 </a:solidFill>
                 <a:latin typeface="Arial"/>
                 <a:ea typeface="微软雅黑"/>
@@ -17965,7 +17965,7 @@
             <a:r>
               <a:rPr sz="850" b="0">
                 <a:solidFill>
-                  <a:srgbClr val="7F7F7F"/>
+                  <a:srgbClr val="636363"/>
                 </a:solidFill>
                 <a:latin typeface="Arial"/>
                 <a:ea typeface="微软雅黑"/>
@@ -18001,7 +18001,7 @@
             <a:r>
               <a:rPr sz="950" b="0">
                 <a:solidFill>
-                  <a:srgbClr val="7F7F7F"/>
+                  <a:srgbClr val="636363"/>
                 </a:solidFill>
                 <a:latin typeface="Arial"/>
                 <a:ea typeface="微软雅黑"/>
@@ -18727,7 +18727,7 @@
             <a:r>
               <a:rPr sz="950" b="0">
                 <a:solidFill>
-                  <a:srgbClr val="7F7F7F"/>
+                  <a:srgbClr val="636363"/>
                 </a:solidFill>
                 <a:latin typeface="Arial"/>
                 <a:ea typeface="微软雅黑"/>
@@ -18843,7 +18843,7 @@
             <a:r>
               <a:rPr sz="850" b="0">
                 <a:solidFill>
-                  <a:srgbClr val="7F7F7F"/>
+                  <a:srgbClr val="636363"/>
                 </a:solidFill>
                 <a:latin typeface="Arial"/>
                 <a:ea typeface="微软雅黑"/>
@@ -18879,7 +18879,7 @@
             <a:r>
               <a:rPr sz="950" b="0">
                 <a:solidFill>
-                  <a:srgbClr val="7F7F7F"/>
+                  <a:srgbClr val="636363"/>
                 </a:solidFill>
                 <a:latin typeface="Arial"/>
                 <a:ea typeface="微软雅黑"/>
@@ -19735,7 +19735,7 @@
             <a:r>
               <a:rPr sz="850" b="0">
                 <a:solidFill>
-                  <a:srgbClr val="7F7F7F"/>
+                  <a:srgbClr val="636363"/>
                 </a:solidFill>
                 <a:latin typeface="Arial"/>
                 <a:ea typeface="微软雅黑"/>
@@ -19771,7 +19771,7 @@
             <a:r>
               <a:rPr sz="950" b="0">
                 <a:solidFill>
-                  <a:srgbClr val="7F7F7F"/>
+                  <a:srgbClr val="636363"/>
                 </a:solidFill>
                 <a:latin typeface="Arial"/>
                 <a:ea typeface="微软雅黑"/>
@@ -20627,7 +20627,7 @@
             <a:r>
               <a:rPr sz="850" b="0">
                 <a:solidFill>
-                  <a:srgbClr val="7F7F7F"/>
+                  <a:srgbClr val="636363"/>
                 </a:solidFill>
                 <a:latin typeface="Arial"/>
                 <a:ea typeface="微软雅黑"/>
@@ -20663,7 +20663,7 @@
             <a:r>
               <a:rPr sz="950" b="0">
                 <a:solidFill>
-                  <a:srgbClr val="7F7F7F"/>
+                  <a:srgbClr val="636363"/>
                 </a:solidFill>
                 <a:latin typeface="Arial"/>
                 <a:ea typeface="微软雅黑"/>
@@ -21978,7 +21978,7 @@
             <a:r>
               <a:rPr sz="950" b="0">
                 <a:solidFill>
-                  <a:srgbClr val="7F7F7F"/>
+                  <a:srgbClr val="636363"/>
                 </a:solidFill>
                 <a:latin typeface="Arial"/>
                 <a:ea typeface="微软雅黑"/>
@@ -23293,7 +23293,7 @@
             <a:r>
               <a:rPr sz="950" b="0">
                 <a:solidFill>
-                  <a:srgbClr val="7F7F7F"/>
+                  <a:srgbClr val="636363"/>
                 </a:solidFill>
                 <a:latin typeface="Arial"/>
                 <a:ea typeface="微软雅黑"/>
@@ -23435,7 +23435,7 @@
             <a:r>
               <a:rPr sz="1600" b="0">
                 <a:solidFill>
-                  <a:srgbClr val="7F7F7F"/>
+                  <a:srgbClr val="636363"/>
                 </a:solidFill>
                 <a:latin typeface="Arial"/>
                 <a:ea typeface="微软雅黑"/>
@@ -23471,7 +23471,7 @@
             <a:r>
               <a:rPr sz="1300" b="0">
                 <a:solidFill>
-                  <a:srgbClr val="7F7F7F"/>
+                  <a:srgbClr val="636363"/>
                 </a:solidFill>
                 <a:latin typeface="Arial"/>
                 <a:ea typeface="微软雅黑"/>
@@ -23488,7 +23488,7 @@
             <a:r>
               <a:rPr sz="1300" b="0">
                 <a:solidFill>
-                  <a:srgbClr val="7F7F7F"/>
+                  <a:srgbClr val="636363"/>
                 </a:solidFill>
                 <a:latin typeface="Arial"/>
                 <a:ea typeface="微软雅黑"/>
@@ -23612,7 +23612,7 @@
             <a:r>
               <a:rPr sz="950" b="0">
                 <a:solidFill>
-                  <a:srgbClr val="7F7F7F"/>
+                  <a:srgbClr val="636363"/>
                 </a:solidFill>
                 <a:latin typeface="Arial"/>
                 <a:ea typeface="微软雅黑"/>
@@ -24954,7 +24954,7 @@
             <a:r>
               <a:rPr sz="950" b="0">
                 <a:solidFill>
-                  <a:srgbClr val="7F7F7F"/>
+                  <a:srgbClr val="636363"/>
                 </a:solidFill>
                 <a:latin typeface="Arial"/>
                 <a:ea typeface="微软雅黑"/>
@@ -25958,7 +25958,7 @@
             <a:r>
               <a:rPr sz="950" b="0">
                 <a:solidFill>
-                  <a:srgbClr val="7F7F7F"/>
+                  <a:srgbClr val="636363"/>
                 </a:solidFill>
                 <a:latin typeface="Arial"/>
                 <a:ea typeface="微软雅黑"/>
@@ -26417,7 +26417,7 @@
             <a:r>
               <a:rPr sz="950" b="0">
                 <a:solidFill>
-                  <a:srgbClr val="7F7F7F"/>
+                  <a:srgbClr val="636363"/>
                 </a:solidFill>
                 <a:latin typeface="Arial"/>
                 <a:ea typeface="微软雅黑"/>
@@ -27688,7 +27688,7 @@
             <a:r>
               <a:rPr sz="950" b="0">
                 <a:solidFill>
-                  <a:srgbClr val="7F7F7F"/>
+                  <a:srgbClr val="636363"/>
                 </a:solidFill>
                 <a:latin typeface="Arial"/>
                 <a:ea typeface="微软雅黑"/>
@@ -28664,7 +28664,7 @@
             <a:r>
               <a:rPr sz="950" b="0">
                 <a:solidFill>
-                  <a:srgbClr val="7F7F7F"/>
+                  <a:srgbClr val="636363"/>
                 </a:solidFill>
                 <a:latin typeface="Arial"/>
                 <a:ea typeface="微软雅黑"/>
@@ -29123,7 +29123,7 @@
             <a:r>
               <a:rPr sz="950" b="0">
                 <a:solidFill>
-                  <a:srgbClr val="7F7F7F"/>
+                  <a:srgbClr val="636363"/>
                 </a:solidFill>
                 <a:latin typeface="Arial"/>
                 <a:ea typeface="微软雅黑"/>
@@ -29582,7 +29582,7 @@
             <a:r>
               <a:rPr sz="950" b="0">
                 <a:solidFill>
-                  <a:srgbClr val="7F7F7F"/>
+                  <a:srgbClr val="636363"/>
                 </a:solidFill>
                 <a:latin typeface="Arial"/>
                 <a:ea typeface="微软雅黑"/>
@@ -30079,7 +30079,7 @@
             <a:r>
               <a:rPr sz="950" b="0">
                 <a:solidFill>
-                  <a:srgbClr val="7F7F7F"/>
+                  <a:srgbClr val="636363"/>
                 </a:solidFill>
                 <a:latin typeface="Arial"/>
                 <a:ea typeface="微软雅黑"/>
@@ -30900,7 +30900,7 @@
             <a:r>
               <a:rPr sz="950" b="0">
                 <a:solidFill>
-                  <a:srgbClr val="7F7F7F"/>
+                  <a:srgbClr val="636363"/>
                 </a:solidFill>
                 <a:latin typeface="Arial"/>
                 <a:ea typeface="微软雅黑"/>
@@ -31383,7 +31383,7 @@
             <a:r>
               <a:rPr sz="950" b="0">
                 <a:solidFill>
-                  <a:srgbClr val="7F7F7F"/>
+                  <a:srgbClr val="636363"/>
                 </a:solidFill>
                 <a:latin typeface="Arial"/>
                 <a:ea typeface="微软雅黑"/>
@@ -31866,7 +31866,7 @@
             <a:r>
               <a:rPr sz="950" b="0">
                 <a:solidFill>
-                  <a:srgbClr val="7F7F7F"/>
+                  <a:srgbClr val="636363"/>
                 </a:solidFill>
                 <a:latin typeface="Arial"/>
                 <a:ea typeface="微软雅黑"/>
@@ -32349,7 +32349,7 @@
             <a:r>
               <a:rPr sz="950" b="0">
                 <a:solidFill>
-                  <a:srgbClr val="7F7F7F"/>
+                  <a:srgbClr val="636363"/>
                 </a:solidFill>
                 <a:latin typeface="Arial"/>
                 <a:ea typeface="微软雅黑"/>
@@ -32832,7 +32832,7 @@
             <a:r>
               <a:rPr sz="950" b="0">
                 <a:solidFill>
-                  <a:srgbClr val="7F7F7F"/>
+                  <a:srgbClr val="636363"/>
                 </a:solidFill>
                 <a:latin typeface="Arial"/>
                 <a:ea typeface="微软雅黑"/>
@@ -33329,7 +33329,7 @@
             <a:r>
               <a:rPr sz="950" b="0">
                 <a:solidFill>
-                  <a:srgbClr val="7F7F7F"/>
+                  <a:srgbClr val="636363"/>
                 </a:solidFill>
                 <a:latin typeface="Arial"/>
                 <a:ea typeface="微软雅黑"/>

--- a/docs/thesis/defense/答辩PPT-北航模板版.pptx
+++ b/docs/thesis/defense/答辩PPT-北航模板版.pptx
@@ -6090,17 +6090,6 @@
 <file path=ppt/slideLayouts/slideLayout7.xml><?xml version="1.0" encoding="utf-8"?>
 <p:sldLayout xmlns:a="http://schemas.openxmlformats.org/drawingml/2006/main" xmlns:r="http://schemas.openxmlformats.org/officeDocument/2006/relationships" xmlns:p="http://schemas.openxmlformats.org/presentationml/2006/main" type="blank" preserve="1">
   <p:cSld name="空白">
-    <p:bg>
-      <p:bgPr>
-        <a:blipFill rotWithShape="0">
-          <a:blip r:embed="rId2" cstate="print"/>
-          <a:stretch>
-            <a:fillRect/>
-          </a:stretch>
-        </a:blipFill>
-        <a:effectLst/>
-      </p:bgPr>
-    </p:bg>
     <p:spTree>
       <p:nvGrpSpPr>
         <p:cNvPr id="1" name=""/>
@@ -6115,222 +6104,6 @@
           <a:chExt cx="0" cy="0"/>
         </a:xfrm>
       </p:grpSpPr>
-      <p:pic>
-        <p:nvPicPr>
-          <p:cNvPr id="3074" name="图片 3"/>
-          <p:cNvPicPr>
-            <a:picLocks noChangeAspect="1"/>
-          </p:cNvPicPr>
-          <p:nvPr userDrawn="1"/>
-        </p:nvPicPr>
-        <p:blipFill>
-          <a:blip r:embed="rId3" cstate="print"/>
-          <a:srcRect t="14301" b="13251"/>
-          <a:stretch>
-            <a:fillRect/>
-          </a:stretch>
-        </p:blipFill>
-        <p:spPr>
-          <a:xfrm>
-            <a:off x="0" y="0"/>
-            <a:ext cx="12196763" cy="6858000"/>
-          </a:xfrm>
-          <a:prstGeom prst="rect">
-            <a:avLst/>
-          </a:prstGeom>
-          <a:noFill/>
-          <a:ln w="9525">
-            <a:noFill/>
-          </a:ln>
-        </p:spPr>
-      </p:pic>
-      <p:sp>
-        <p:nvSpPr>
-          <p:cNvPr id="5" name="矩形 4"/>
-          <p:cNvSpPr>
-            <a:spLocks noChangeArrowheads="1"/>
-          </p:cNvSpPr>
-          <p:nvPr/>
-        </p:nvSpPr>
-        <p:spPr bwMode="auto">
-          <a:xfrm>
-            <a:off x="0" y="0"/>
-            <a:ext cx="12196763" cy="6858000"/>
-          </a:xfrm>
-          <a:prstGeom prst="rect">
-            <a:avLst/>
-          </a:prstGeom>
-          <a:solidFill>
-            <a:srgbClr val="003366">
-              <a:alpha val="85881"/>
-            </a:srgbClr>
-          </a:solidFill>
-          <a:ln>
-            <a:noFill/>
-          </a:ln>
-          <a:extLst>
-            <a:ext uri="{91240B29-F687-4F45-9708-019B960494DF}">
-              <a14:hiddenLine xmlns:a14="http://schemas.microsoft.com/office/drawing/2010/main" w="9525">
-                <a:solidFill>
-                  <a:srgbClr val="000000"/>
-                </a:solidFill>
-                <a:round/>
-              </a14:hiddenLine>
-            </a:ext>
-          </a:extLst>
-        </p:spPr>
-        <p:txBody>
-          <a:bodyPr/>
-          <a:lstStyle>
-            <a:lvl1pPr>
-              <a:buFont typeface="Arial" panose="020B0604020202020204" pitchFamily="34" charset="0"/>
-              <a:defRPr>
-                <a:solidFill>
-                  <a:schemeClr val="tx1"/>
-                </a:solidFill>
-                <a:latin typeface="Arial" panose="020B0604020202020204" pitchFamily="34" charset="0"/>
-                <a:ea typeface="宋体" panose="02010600030101010101" pitchFamily="2" charset="-122"/>
-              </a:defRPr>
-            </a:lvl1pPr>
-            <a:lvl2pPr marL="742950" indent="-285750">
-              <a:buFont typeface="Arial" panose="020B0604020202020204" pitchFamily="34" charset="0"/>
-              <a:defRPr>
-                <a:solidFill>
-                  <a:schemeClr val="tx1"/>
-                </a:solidFill>
-                <a:latin typeface="Arial" panose="020B0604020202020204" pitchFamily="34" charset="0"/>
-                <a:ea typeface="宋体" panose="02010600030101010101" pitchFamily="2" charset="-122"/>
-              </a:defRPr>
-            </a:lvl2pPr>
-            <a:lvl3pPr marL="1143000" indent="-228600">
-              <a:buFont typeface="Arial" panose="020B0604020202020204" pitchFamily="34" charset="0"/>
-              <a:defRPr>
-                <a:solidFill>
-                  <a:schemeClr val="tx1"/>
-                </a:solidFill>
-                <a:latin typeface="Arial" panose="020B0604020202020204" pitchFamily="34" charset="0"/>
-                <a:ea typeface="宋体" panose="02010600030101010101" pitchFamily="2" charset="-122"/>
-              </a:defRPr>
-            </a:lvl3pPr>
-            <a:lvl4pPr marL="1600200" indent="-228600">
-              <a:buFont typeface="Arial" panose="020B0604020202020204" pitchFamily="34" charset="0"/>
-              <a:defRPr>
-                <a:solidFill>
-                  <a:schemeClr val="tx1"/>
-                </a:solidFill>
-                <a:latin typeface="Arial" panose="020B0604020202020204" pitchFamily="34" charset="0"/>
-                <a:ea typeface="宋体" panose="02010600030101010101" pitchFamily="2" charset="-122"/>
-              </a:defRPr>
-            </a:lvl4pPr>
-            <a:lvl5pPr marL="2057400" indent="-228600">
-              <a:buFont typeface="Arial" panose="020B0604020202020204" pitchFamily="34" charset="0"/>
-              <a:defRPr>
-                <a:solidFill>
-                  <a:schemeClr val="tx1"/>
-                </a:solidFill>
-                <a:latin typeface="Arial" panose="020B0604020202020204" pitchFamily="34" charset="0"/>
-                <a:ea typeface="宋体" panose="02010600030101010101" pitchFamily="2" charset="-122"/>
-              </a:defRPr>
-            </a:lvl5pPr>
-            <a:lvl6pPr marL="2514600" indent="-228600" eaLnBrk="0" fontAlgn="base" hangingPunct="0">
-              <a:spcBef>
-                <a:spcPct val="0"/>
-              </a:spcBef>
-              <a:spcAft>
-                <a:spcPct val="0"/>
-              </a:spcAft>
-              <a:buFont typeface="Arial" panose="020B0604020202020204" pitchFamily="34" charset="0"/>
-              <a:defRPr>
-                <a:solidFill>
-                  <a:schemeClr val="tx1"/>
-                </a:solidFill>
-                <a:latin typeface="Arial" panose="020B0604020202020204" pitchFamily="34" charset="0"/>
-                <a:ea typeface="宋体" panose="02010600030101010101" pitchFamily="2" charset="-122"/>
-              </a:defRPr>
-            </a:lvl6pPr>
-            <a:lvl7pPr marL="2971800" indent="-228600" eaLnBrk="0" fontAlgn="base" hangingPunct="0">
-              <a:spcBef>
-                <a:spcPct val="0"/>
-              </a:spcBef>
-              <a:spcAft>
-                <a:spcPct val="0"/>
-              </a:spcAft>
-              <a:buFont typeface="Arial" panose="020B0604020202020204" pitchFamily="34" charset="0"/>
-              <a:defRPr>
-                <a:solidFill>
-                  <a:schemeClr val="tx1"/>
-                </a:solidFill>
-                <a:latin typeface="Arial" panose="020B0604020202020204" pitchFamily="34" charset="0"/>
-                <a:ea typeface="宋体" panose="02010600030101010101" pitchFamily="2" charset="-122"/>
-              </a:defRPr>
-            </a:lvl7pPr>
-            <a:lvl8pPr marL="3429000" indent="-228600" eaLnBrk="0" fontAlgn="base" hangingPunct="0">
-              <a:spcBef>
-                <a:spcPct val="0"/>
-              </a:spcBef>
-              <a:spcAft>
-                <a:spcPct val="0"/>
-              </a:spcAft>
-              <a:buFont typeface="Arial" panose="020B0604020202020204" pitchFamily="34" charset="0"/>
-              <a:defRPr>
-                <a:solidFill>
-                  <a:schemeClr val="tx1"/>
-                </a:solidFill>
-                <a:latin typeface="Arial" panose="020B0604020202020204" pitchFamily="34" charset="0"/>
-                <a:ea typeface="宋体" panose="02010600030101010101" pitchFamily="2" charset="-122"/>
-              </a:defRPr>
-            </a:lvl8pPr>
-            <a:lvl9pPr marL="3886200" indent="-228600" eaLnBrk="0" fontAlgn="base" hangingPunct="0">
-              <a:spcBef>
-                <a:spcPct val="0"/>
-              </a:spcBef>
-              <a:spcAft>
-                <a:spcPct val="0"/>
-              </a:spcAft>
-              <a:buFont typeface="Arial" panose="020B0604020202020204" pitchFamily="34" charset="0"/>
-              <a:defRPr>
-                <a:solidFill>
-                  <a:schemeClr val="tx1"/>
-                </a:solidFill>
-                <a:latin typeface="Arial" panose="020B0604020202020204" pitchFamily="34" charset="0"/>
-                <a:ea typeface="宋体" panose="02010600030101010101" pitchFamily="2" charset="-122"/>
-              </a:defRPr>
-            </a:lvl9pPr>
-          </a:lstStyle>
-          <a:p>
-            <a:pPr marL="0" marR="0" lvl="0" indent="0" algn="l" defTabSz="914400" rtl="0" eaLnBrk="1" fontAlgn="base" latinLnBrk="0" hangingPunct="1">
-              <a:lnSpc>
-                <a:spcPct val="100000"/>
-              </a:lnSpc>
-              <a:spcBef>
-                <a:spcPct val="0"/>
-              </a:spcBef>
-              <a:spcAft>
-                <a:spcPct val="0"/>
-              </a:spcAft>
-              <a:buClrTx/>
-              <a:buSzTx/>
-              <a:buFont typeface="Arial" panose="020B0604020202020204" pitchFamily="34" charset="0"/>
-              <a:buNone/>
-              <a:defRPr/>
-            </a:pPr>
-            <a:endParaRPr kumimoji="0" lang="zh-CN" altLang="en-US" sz="1800" b="0" i="0" u="none" strike="noStrike" kern="1200" cap="none" spc="0" normalizeH="0" baseline="0" noProof="0">
-              <a:ln>
-                <a:noFill/>
-              </a:ln>
-              <a:solidFill>
-                <a:schemeClr val="tx1"/>
-              </a:solidFill>
-              <a:effectLst/>
-              <a:uLnTx/>
-              <a:uFillTx/>
-              <a:latin typeface="Arial" panose="020B0604020202020204" pitchFamily="34" charset="0"/>
-              <a:ea typeface="宋体" panose="02010600030101010101" pitchFamily="2" charset="-122"/>
-              <a:cs typeface="+mn-cs"/>
-            </a:endParaRPr>
-          </a:p>
-        </p:txBody>
-      </p:sp>
     </p:spTree>
   </p:cSld>
   <p:clrMapOvr>
@@ -6342,17 +6115,6 @@
 <file path=ppt/slideLayouts/slideLayout8.xml><?xml version="1.0" encoding="utf-8"?>
 <p:sldLayout xmlns:a="http://schemas.openxmlformats.org/drawingml/2006/main" xmlns:r="http://schemas.openxmlformats.org/officeDocument/2006/relationships" xmlns:p="http://schemas.openxmlformats.org/presentationml/2006/main" type="blank" preserve="1">
   <p:cSld name="1_空白">
-    <p:bg>
-      <p:bgPr>
-        <a:blipFill rotWithShape="0">
-          <a:blip r:embed="rId2" cstate="print"/>
-          <a:stretch>
-            <a:fillRect/>
-          </a:stretch>
-        </a:blipFill>
-        <a:effectLst/>
-      </p:bgPr>
-    </p:bg>
     <p:spTree>
       <p:nvGrpSpPr>
         <p:cNvPr id="1" name=""/>
@@ -6367,397 +6129,6 @@
           <a:chExt cx="0" cy="0"/>
         </a:xfrm>
       </p:grpSpPr>
-      <p:pic>
-        <p:nvPicPr>
-          <p:cNvPr id="4098" name="图片 3"/>
-          <p:cNvPicPr>
-            <a:picLocks noChangeAspect="1"/>
-          </p:cNvPicPr>
-          <p:nvPr userDrawn="1"/>
-        </p:nvPicPr>
-        <p:blipFill>
-          <a:blip r:embed="rId3" cstate="print"/>
-          <a:srcRect t="14301" b="13251"/>
-          <a:stretch>
-            <a:fillRect/>
-          </a:stretch>
-        </p:blipFill>
-        <p:spPr>
-          <a:xfrm>
-            <a:off x="0" y="0"/>
-            <a:ext cx="12196763" cy="6858000"/>
-          </a:xfrm>
-          <a:prstGeom prst="rect">
-            <a:avLst/>
-          </a:prstGeom>
-          <a:noFill/>
-          <a:ln w="9525">
-            <a:noFill/>
-          </a:ln>
-        </p:spPr>
-      </p:pic>
-      <p:sp>
-        <p:nvSpPr>
-          <p:cNvPr id="5" name="矩形 4"/>
-          <p:cNvSpPr>
-            <a:spLocks noChangeArrowheads="1"/>
-          </p:cNvSpPr>
-          <p:nvPr/>
-        </p:nvSpPr>
-        <p:spPr bwMode="auto">
-          <a:xfrm>
-            <a:off x="0" y="0"/>
-            <a:ext cx="12196763" cy="6858000"/>
-          </a:xfrm>
-          <a:prstGeom prst="rect">
-            <a:avLst/>
-          </a:prstGeom>
-          <a:solidFill>
-            <a:srgbClr val="003366">
-              <a:alpha val="85881"/>
-            </a:srgbClr>
-          </a:solidFill>
-          <a:ln>
-            <a:noFill/>
-          </a:ln>
-          <a:extLst>
-            <a:ext uri="{91240B29-F687-4F45-9708-019B960494DF}">
-              <a14:hiddenLine xmlns:a14="http://schemas.microsoft.com/office/drawing/2010/main" w="9525">
-                <a:solidFill>
-                  <a:srgbClr val="000000"/>
-                </a:solidFill>
-                <a:round/>
-              </a14:hiddenLine>
-            </a:ext>
-          </a:extLst>
-        </p:spPr>
-        <p:txBody>
-          <a:bodyPr/>
-          <a:lstStyle>
-            <a:lvl1pPr>
-              <a:buFont typeface="Arial" panose="020B0604020202020204" pitchFamily="34" charset="0"/>
-              <a:defRPr>
-                <a:solidFill>
-                  <a:schemeClr val="tx1"/>
-                </a:solidFill>
-                <a:latin typeface="Arial" panose="020B0604020202020204" pitchFamily="34" charset="0"/>
-                <a:ea typeface="宋体" panose="02010600030101010101" pitchFamily="2" charset="-122"/>
-              </a:defRPr>
-            </a:lvl1pPr>
-            <a:lvl2pPr marL="742950" indent="-285750">
-              <a:buFont typeface="Arial" panose="020B0604020202020204" pitchFamily="34" charset="0"/>
-              <a:defRPr>
-                <a:solidFill>
-                  <a:schemeClr val="tx1"/>
-                </a:solidFill>
-                <a:latin typeface="Arial" panose="020B0604020202020204" pitchFamily="34" charset="0"/>
-                <a:ea typeface="宋体" panose="02010600030101010101" pitchFamily="2" charset="-122"/>
-              </a:defRPr>
-            </a:lvl2pPr>
-            <a:lvl3pPr marL="1143000" indent="-228600">
-              <a:buFont typeface="Arial" panose="020B0604020202020204" pitchFamily="34" charset="0"/>
-              <a:defRPr>
-                <a:solidFill>
-                  <a:schemeClr val="tx1"/>
-                </a:solidFill>
-                <a:latin typeface="Arial" panose="020B0604020202020204" pitchFamily="34" charset="0"/>
-                <a:ea typeface="宋体" panose="02010600030101010101" pitchFamily="2" charset="-122"/>
-              </a:defRPr>
-            </a:lvl3pPr>
-            <a:lvl4pPr marL="1600200" indent="-228600">
-              <a:buFont typeface="Arial" panose="020B0604020202020204" pitchFamily="34" charset="0"/>
-              <a:defRPr>
-                <a:solidFill>
-                  <a:schemeClr val="tx1"/>
-                </a:solidFill>
-                <a:latin typeface="Arial" panose="020B0604020202020204" pitchFamily="34" charset="0"/>
-                <a:ea typeface="宋体" panose="02010600030101010101" pitchFamily="2" charset="-122"/>
-              </a:defRPr>
-            </a:lvl4pPr>
-            <a:lvl5pPr marL="2057400" indent="-228600">
-              <a:buFont typeface="Arial" panose="020B0604020202020204" pitchFamily="34" charset="0"/>
-              <a:defRPr>
-                <a:solidFill>
-                  <a:schemeClr val="tx1"/>
-                </a:solidFill>
-                <a:latin typeface="Arial" panose="020B0604020202020204" pitchFamily="34" charset="0"/>
-                <a:ea typeface="宋体" panose="02010600030101010101" pitchFamily="2" charset="-122"/>
-              </a:defRPr>
-            </a:lvl5pPr>
-            <a:lvl6pPr marL="2514600" indent="-228600" eaLnBrk="0" fontAlgn="base" hangingPunct="0">
-              <a:spcBef>
-                <a:spcPct val="0"/>
-              </a:spcBef>
-              <a:spcAft>
-                <a:spcPct val="0"/>
-              </a:spcAft>
-              <a:buFont typeface="Arial" panose="020B0604020202020204" pitchFamily="34" charset="0"/>
-              <a:defRPr>
-                <a:solidFill>
-                  <a:schemeClr val="tx1"/>
-                </a:solidFill>
-                <a:latin typeface="Arial" panose="020B0604020202020204" pitchFamily="34" charset="0"/>
-                <a:ea typeface="宋体" panose="02010600030101010101" pitchFamily="2" charset="-122"/>
-              </a:defRPr>
-            </a:lvl6pPr>
-            <a:lvl7pPr marL="2971800" indent="-228600" eaLnBrk="0" fontAlgn="base" hangingPunct="0">
-              <a:spcBef>
-                <a:spcPct val="0"/>
-              </a:spcBef>
-              <a:spcAft>
-                <a:spcPct val="0"/>
-              </a:spcAft>
-              <a:buFont typeface="Arial" panose="020B0604020202020204" pitchFamily="34" charset="0"/>
-              <a:defRPr>
-                <a:solidFill>
-                  <a:schemeClr val="tx1"/>
-                </a:solidFill>
-                <a:latin typeface="Arial" panose="020B0604020202020204" pitchFamily="34" charset="0"/>
-                <a:ea typeface="宋体" panose="02010600030101010101" pitchFamily="2" charset="-122"/>
-              </a:defRPr>
-            </a:lvl7pPr>
-            <a:lvl8pPr marL="3429000" indent="-228600" eaLnBrk="0" fontAlgn="base" hangingPunct="0">
-              <a:spcBef>
-                <a:spcPct val="0"/>
-              </a:spcBef>
-              <a:spcAft>
-                <a:spcPct val="0"/>
-              </a:spcAft>
-              <a:buFont typeface="Arial" panose="020B0604020202020204" pitchFamily="34" charset="0"/>
-              <a:defRPr>
-                <a:solidFill>
-                  <a:schemeClr val="tx1"/>
-                </a:solidFill>
-                <a:latin typeface="Arial" panose="020B0604020202020204" pitchFamily="34" charset="0"/>
-                <a:ea typeface="宋体" panose="02010600030101010101" pitchFamily="2" charset="-122"/>
-              </a:defRPr>
-            </a:lvl8pPr>
-            <a:lvl9pPr marL="3886200" indent="-228600" eaLnBrk="0" fontAlgn="base" hangingPunct="0">
-              <a:spcBef>
-                <a:spcPct val="0"/>
-              </a:spcBef>
-              <a:spcAft>
-                <a:spcPct val="0"/>
-              </a:spcAft>
-              <a:buFont typeface="Arial" panose="020B0604020202020204" pitchFamily="34" charset="0"/>
-              <a:defRPr>
-                <a:solidFill>
-                  <a:schemeClr val="tx1"/>
-                </a:solidFill>
-                <a:latin typeface="Arial" panose="020B0604020202020204" pitchFamily="34" charset="0"/>
-                <a:ea typeface="宋体" panose="02010600030101010101" pitchFamily="2" charset="-122"/>
-              </a:defRPr>
-            </a:lvl9pPr>
-          </a:lstStyle>
-          <a:p>
-            <a:pPr marL="0" marR="0" lvl="0" indent="0" algn="l" defTabSz="914400" rtl="0" eaLnBrk="1" fontAlgn="base" latinLnBrk="0" hangingPunct="1">
-              <a:lnSpc>
-                <a:spcPct val="100000"/>
-              </a:lnSpc>
-              <a:spcBef>
-                <a:spcPct val="0"/>
-              </a:spcBef>
-              <a:spcAft>
-                <a:spcPct val="0"/>
-              </a:spcAft>
-              <a:buClrTx/>
-              <a:buSzTx/>
-              <a:buFont typeface="Arial" panose="020B0604020202020204" pitchFamily="34" charset="0"/>
-              <a:buNone/>
-              <a:defRPr/>
-            </a:pPr>
-            <a:endParaRPr kumimoji="0" lang="zh-CN" altLang="en-US" sz="1800" b="0" i="0" u="none" strike="noStrike" kern="1200" cap="none" spc="0" normalizeH="0" baseline="0" noProof="0">
-              <a:ln>
-                <a:noFill/>
-              </a:ln>
-              <a:solidFill>
-                <a:schemeClr val="tx1"/>
-              </a:solidFill>
-              <a:effectLst/>
-              <a:uLnTx/>
-              <a:uFillTx/>
-              <a:latin typeface="Arial" panose="020B0604020202020204" pitchFamily="34" charset="0"/>
-              <a:ea typeface="宋体" panose="02010600030101010101" pitchFamily="2" charset="-122"/>
-              <a:cs typeface="+mn-cs"/>
-            </a:endParaRPr>
-          </a:p>
-        </p:txBody>
-      </p:sp>
-      <p:sp>
-        <p:nvSpPr>
-          <p:cNvPr id="6" name="矩形 5"/>
-          <p:cNvSpPr>
-            <a:spLocks noChangeArrowheads="1"/>
-          </p:cNvSpPr>
-          <p:nvPr/>
-        </p:nvSpPr>
-        <p:spPr bwMode="auto">
-          <a:xfrm>
-            <a:off x="5522913" y="0"/>
-            <a:ext cx="6673850" cy="6858000"/>
-          </a:xfrm>
-          <a:prstGeom prst="rect">
-            <a:avLst/>
-          </a:prstGeom>
-          <a:solidFill>
-            <a:srgbClr val="F8F8F8"/>
-          </a:solidFill>
-          <a:ln>
-            <a:noFill/>
-          </a:ln>
-        </p:spPr>
-        <p:txBody>
-          <a:bodyPr/>
-          <a:lstStyle>
-            <a:lvl1pPr>
-              <a:buFont typeface="Arial" panose="020B0604020202020204" pitchFamily="34" charset="0"/>
-              <a:defRPr>
-                <a:solidFill>
-                  <a:schemeClr val="tx1"/>
-                </a:solidFill>
-                <a:latin typeface="Arial" panose="020B0604020202020204" pitchFamily="34" charset="0"/>
-                <a:ea typeface="宋体" panose="02010600030101010101" pitchFamily="2" charset="-122"/>
-              </a:defRPr>
-            </a:lvl1pPr>
-            <a:lvl2pPr marL="742950" indent="-285750">
-              <a:buFont typeface="Arial" panose="020B0604020202020204" pitchFamily="34" charset="0"/>
-              <a:defRPr>
-                <a:solidFill>
-                  <a:schemeClr val="tx1"/>
-                </a:solidFill>
-                <a:latin typeface="Arial" panose="020B0604020202020204" pitchFamily="34" charset="0"/>
-                <a:ea typeface="宋体" panose="02010600030101010101" pitchFamily="2" charset="-122"/>
-              </a:defRPr>
-            </a:lvl2pPr>
-            <a:lvl3pPr marL="1143000" indent="-228600">
-              <a:buFont typeface="Arial" panose="020B0604020202020204" pitchFamily="34" charset="0"/>
-              <a:defRPr>
-                <a:solidFill>
-                  <a:schemeClr val="tx1"/>
-                </a:solidFill>
-                <a:latin typeface="Arial" panose="020B0604020202020204" pitchFamily="34" charset="0"/>
-                <a:ea typeface="宋体" panose="02010600030101010101" pitchFamily="2" charset="-122"/>
-              </a:defRPr>
-            </a:lvl3pPr>
-            <a:lvl4pPr marL="1600200" indent="-228600">
-              <a:buFont typeface="Arial" panose="020B0604020202020204" pitchFamily="34" charset="0"/>
-              <a:defRPr>
-                <a:solidFill>
-                  <a:schemeClr val="tx1"/>
-                </a:solidFill>
-                <a:latin typeface="Arial" panose="020B0604020202020204" pitchFamily="34" charset="0"/>
-                <a:ea typeface="宋体" panose="02010600030101010101" pitchFamily="2" charset="-122"/>
-              </a:defRPr>
-            </a:lvl4pPr>
-            <a:lvl5pPr marL="2057400" indent="-228600">
-              <a:buFont typeface="Arial" panose="020B0604020202020204" pitchFamily="34" charset="0"/>
-              <a:defRPr>
-                <a:solidFill>
-                  <a:schemeClr val="tx1"/>
-                </a:solidFill>
-                <a:latin typeface="Arial" panose="020B0604020202020204" pitchFamily="34" charset="0"/>
-                <a:ea typeface="宋体" panose="02010600030101010101" pitchFamily="2" charset="-122"/>
-              </a:defRPr>
-            </a:lvl5pPr>
-            <a:lvl6pPr marL="2514600" indent="-228600" eaLnBrk="0" fontAlgn="base" hangingPunct="0">
-              <a:spcBef>
-                <a:spcPct val="0"/>
-              </a:spcBef>
-              <a:spcAft>
-                <a:spcPct val="0"/>
-              </a:spcAft>
-              <a:buFont typeface="Arial" panose="020B0604020202020204" pitchFamily="34" charset="0"/>
-              <a:defRPr>
-                <a:solidFill>
-                  <a:schemeClr val="tx1"/>
-                </a:solidFill>
-                <a:latin typeface="Arial" panose="020B0604020202020204" pitchFamily="34" charset="0"/>
-                <a:ea typeface="宋体" panose="02010600030101010101" pitchFamily="2" charset="-122"/>
-              </a:defRPr>
-            </a:lvl6pPr>
-            <a:lvl7pPr marL="2971800" indent="-228600" eaLnBrk="0" fontAlgn="base" hangingPunct="0">
-              <a:spcBef>
-                <a:spcPct val="0"/>
-              </a:spcBef>
-              <a:spcAft>
-                <a:spcPct val="0"/>
-              </a:spcAft>
-              <a:buFont typeface="Arial" panose="020B0604020202020204" pitchFamily="34" charset="0"/>
-              <a:defRPr>
-                <a:solidFill>
-                  <a:schemeClr val="tx1"/>
-                </a:solidFill>
-                <a:latin typeface="Arial" panose="020B0604020202020204" pitchFamily="34" charset="0"/>
-                <a:ea typeface="宋体" panose="02010600030101010101" pitchFamily="2" charset="-122"/>
-              </a:defRPr>
-            </a:lvl7pPr>
-            <a:lvl8pPr marL="3429000" indent="-228600" eaLnBrk="0" fontAlgn="base" hangingPunct="0">
-              <a:spcBef>
-                <a:spcPct val="0"/>
-              </a:spcBef>
-              <a:spcAft>
-                <a:spcPct val="0"/>
-              </a:spcAft>
-              <a:buFont typeface="Arial" panose="020B0604020202020204" pitchFamily="34" charset="0"/>
-              <a:defRPr>
-                <a:solidFill>
-                  <a:schemeClr val="tx1"/>
-                </a:solidFill>
-                <a:latin typeface="Arial" panose="020B0604020202020204" pitchFamily="34" charset="0"/>
-                <a:ea typeface="宋体" panose="02010600030101010101" pitchFamily="2" charset="-122"/>
-              </a:defRPr>
-            </a:lvl8pPr>
-            <a:lvl9pPr marL="3886200" indent="-228600" eaLnBrk="0" fontAlgn="base" hangingPunct="0">
-              <a:spcBef>
-                <a:spcPct val="0"/>
-              </a:spcBef>
-              <a:spcAft>
-                <a:spcPct val="0"/>
-              </a:spcAft>
-              <a:buFont typeface="Arial" panose="020B0604020202020204" pitchFamily="34" charset="0"/>
-              <a:defRPr>
-                <a:solidFill>
-                  <a:schemeClr val="tx1"/>
-                </a:solidFill>
-                <a:latin typeface="Arial" panose="020B0604020202020204" pitchFamily="34" charset="0"/>
-                <a:ea typeface="宋体" panose="02010600030101010101" pitchFamily="2" charset="-122"/>
-              </a:defRPr>
-            </a:lvl9pPr>
-          </a:lstStyle>
-          <a:p>
-            <a:pPr marL="0" marR="0" lvl="0" indent="0" algn="l" defTabSz="914400" rtl="0" eaLnBrk="1" fontAlgn="base" latinLnBrk="0" hangingPunct="1">
-              <a:lnSpc>
-                <a:spcPct val="100000"/>
-              </a:lnSpc>
-              <a:spcBef>
-                <a:spcPct val="0"/>
-              </a:spcBef>
-              <a:spcAft>
-                <a:spcPct val="0"/>
-              </a:spcAft>
-              <a:buClrTx/>
-              <a:buSzTx/>
-              <a:buFont typeface="Arial" panose="020B0604020202020204" pitchFamily="34" charset="0"/>
-              <a:buNone/>
-              <a:defRPr/>
-            </a:pPr>
-            <a:endParaRPr kumimoji="0" lang="zh-CN" altLang="en-US" sz="1800" b="0" i="0" u="none" strike="noStrike" kern="1200" cap="none" spc="0" normalizeH="0" baseline="0" noProof="0">
-              <a:ln>
-                <a:noFill/>
-              </a:ln>
-              <a:solidFill>
-                <a:schemeClr val="tx1"/>
-              </a:solidFill>
-              <a:effectLst/>
-              <a:uLnTx/>
-              <a:uFillTx/>
-              <a:latin typeface="Arial" panose="020B0604020202020204" pitchFamily="34" charset="0"/>
-              <a:ea typeface="宋体" panose="02010600030101010101" pitchFamily="2" charset="-122"/>
-              <a:cs typeface="+mn-cs"/>
-            </a:endParaRPr>
-          </a:p>
-        </p:txBody>
-      </p:sp>
     </p:spTree>
   </p:cSld>
   <p:clrMapOvr>
@@ -6975,17 +6346,6 @@
 <file path=ppt/slideMasters/slideMaster1.xml><?xml version="1.0" encoding="utf-8"?>
 <p:sldMaster xmlns:a="http://schemas.openxmlformats.org/drawingml/2006/main" xmlns:r="http://schemas.openxmlformats.org/officeDocument/2006/relationships" xmlns:p="http://schemas.openxmlformats.org/presentationml/2006/main">
   <p:cSld>
-    <p:bg>
-      <p:bgPr>
-        <a:blipFill rotWithShape="0">
-          <a:blip r:embed="rId14" cstate="print"/>
-          <a:stretch>
-            <a:fillRect/>
-          </a:stretch>
-        </a:blipFill>
-        <a:effectLst/>
-      </p:bgPr>
-    </p:bg>
     <p:spTree>
       <p:nvGrpSpPr>
         <p:cNvPr id="1" name=""/>
@@ -7495,17 +6855,6 @@
 <file path=ppt/slideMasters/slideMaster2.xml><?xml version="1.0" encoding="utf-8"?>
 <p:sldMaster xmlns:a="http://schemas.openxmlformats.org/drawingml/2006/main" xmlns:r="http://schemas.openxmlformats.org/officeDocument/2006/relationships" xmlns:p="http://schemas.openxmlformats.org/presentationml/2006/main">
   <p:cSld>
-    <p:bg>
-      <p:bgPr>
-        <a:blipFill rotWithShape="0">
-          <a:blip r:embed="rId13" cstate="print"/>
-          <a:stretch>
-            <a:fillRect/>
-          </a:stretch>
-        </a:blipFill>
-        <a:effectLst/>
-      </p:bgPr>
-    </p:bg>
     <p:spTree>
       <p:nvGrpSpPr>
         <p:cNvPr id="1" name=""/>
@@ -7522,184 +6871,18 @@
       </p:grpSpPr>
       <p:sp>
         <p:nvSpPr>
-          <p:cNvPr id="3074" name="矩形 3"/>
+          <p:cNvPr id="2052" name="Rectangle 2"/>
           <p:cNvSpPr>
-            <a:spLocks noChangeArrowheads="1"/>
+            <a:spLocks noGrp="1"/>
           </p:cNvSpPr>
-          <p:nvPr/>
-        </p:nvSpPr>
-        <p:spPr bwMode="auto">
-          <a:xfrm>
-            <a:off x="11582400" y="6381750"/>
-            <a:ext cx="492125" cy="396875"/>
-          </a:xfrm>
-          <a:prstGeom prst="rect">
-            <a:avLst/>
-          </a:prstGeom>
-          <a:solidFill>
-            <a:srgbClr val="0F3D68"/>
-          </a:solidFill>
-          <a:ln>
-            <a:noFill/>
-          </a:ln>
-        </p:spPr>
-        <p:txBody>
-          <a:bodyPr/>
-          <a:lstStyle>
-            <a:lvl1pPr eaLnBrk="0" hangingPunct="0">
-              <a:defRPr>
-                <a:solidFill>
-                  <a:schemeClr val="tx1"/>
-                </a:solidFill>
-                <a:latin typeface="Arial" panose="020B0604020202020204" pitchFamily="34" charset="0"/>
-                <a:ea typeface="宋体" panose="02010600030101010101" pitchFamily="2" charset="-122"/>
-              </a:defRPr>
-            </a:lvl1pPr>
-            <a:lvl2pPr marL="742950" indent="-285750" eaLnBrk="0" hangingPunct="0">
-              <a:defRPr>
-                <a:solidFill>
-                  <a:schemeClr val="tx1"/>
-                </a:solidFill>
-                <a:latin typeface="Arial" panose="020B0604020202020204" pitchFamily="34" charset="0"/>
-                <a:ea typeface="宋体" panose="02010600030101010101" pitchFamily="2" charset="-122"/>
-              </a:defRPr>
-            </a:lvl2pPr>
-            <a:lvl3pPr marL="1143000" indent="-228600" eaLnBrk="0" hangingPunct="0">
-              <a:defRPr>
-                <a:solidFill>
-                  <a:schemeClr val="tx1"/>
-                </a:solidFill>
-                <a:latin typeface="Arial" panose="020B0604020202020204" pitchFamily="34" charset="0"/>
-                <a:ea typeface="宋体" panose="02010600030101010101" pitchFamily="2" charset="-122"/>
-              </a:defRPr>
-            </a:lvl3pPr>
-            <a:lvl4pPr marL="1600200" indent="-228600" eaLnBrk="0" hangingPunct="0">
-              <a:defRPr>
-                <a:solidFill>
-                  <a:schemeClr val="tx1"/>
-                </a:solidFill>
-                <a:latin typeface="Arial" panose="020B0604020202020204" pitchFamily="34" charset="0"/>
-                <a:ea typeface="宋体" panose="02010600030101010101" pitchFamily="2" charset="-122"/>
-              </a:defRPr>
-            </a:lvl4pPr>
-            <a:lvl5pPr marL="2057400" indent="-228600" eaLnBrk="0" hangingPunct="0">
-              <a:defRPr>
-                <a:solidFill>
-                  <a:schemeClr val="tx1"/>
-                </a:solidFill>
-                <a:latin typeface="Arial" panose="020B0604020202020204" pitchFamily="34" charset="0"/>
-                <a:ea typeface="宋体" panose="02010600030101010101" pitchFamily="2" charset="-122"/>
-              </a:defRPr>
-            </a:lvl5pPr>
-            <a:lvl6pPr marL="2514600" indent="-228600" eaLnBrk="0" fontAlgn="base" hangingPunct="0">
-              <a:spcBef>
-                <a:spcPct val="0"/>
-              </a:spcBef>
-              <a:spcAft>
-                <a:spcPct val="0"/>
-              </a:spcAft>
-              <a:buFont typeface="Arial" panose="020B0604020202020204" pitchFamily="34" charset="0"/>
-              <a:defRPr>
-                <a:solidFill>
-                  <a:schemeClr val="tx1"/>
-                </a:solidFill>
-                <a:latin typeface="Arial" panose="020B0604020202020204" pitchFamily="34" charset="0"/>
-                <a:ea typeface="宋体" panose="02010600030101010101" pitchFamily="2" charset="-122"/>
-              </a:defRPr>
-            </a:lvl6pPr>
-            <a:lvl7pPr marL="2971800" indent="-228600" eaLnBrk="0" fontAlgn="base" hangingPunct="0">
-              <a:spcBef>
-                <a:spcPct val="0"/>
-              </a:spcBef>
-              <a:spcAft>
-                <a:spcPct val="0"/>
-              </a:spcAft>
-              <a:buFont typeface="Arial" panose="020B0604020202020204" pitchFamily="34" charset="0"/>
-              <a:defRPr>
-                <a:solidFill>
-                  <a:schemeClr val="tx1"/>
-                </a:solidFill>
-                <a:latin typeface="Arial" panose="020B0604020202020204" pitchFamily="34" charset="0"/>
-                <a:ea typeface="宋体" panose="02010600030101010101" pitchFamily="2" charset="-122"/>
-              </a:defRPr>
-            </a:lvl7pPr>
-            <a:lvl8pPr marL="3429000" indent="-228600" eaLnBrk="0" fontAlgn="base" hangingPunct="0">
-              <a:spcBef>
-                <a:spcPct val="0"/>
-              </a:spcBef>
-              <a:spcAft>
-                <a:spcPct val="0"/>
-              </a:spcAft>
-              <a:buFont typeface="Arial" panose="020B0604020202020204" pitchFamily="34" charset="0"/>
-              <a:defRPr>
-                <a:solidFill>
-                  <a:schemeClr val="tx1"/>
-                </a:solidFill>
-                <a:latin typeface="Arial" panose="020B0604020202020204" pitchFamily="34" charset="0"/>
-                <a:ea typeface="宋体" panose="02010600030101010101" pitchFamily="2" charset="-122"/>
-              </a:defRPr>
-            </a:lvl8pPr>
-            <a:lvl9pPr marL="3886200" indent="-228600" eaLnBrk="0" fontAlgn="base" hangingPunct="0">
-              <a:spcBef>
-                <a:spcPct val="0"/>
-              </a:spcBef>
-              <a:spcAft>
-                <a:spcPct val="0"/>
-              </a:spcAft>
-              <a:buFont typeface="Arial" panose="020B0604020202020204" pitchFamily="34" charset="0"/>
-              <a:defRPr>
-                <a:solidFill>
-                  <a:schemeClr val="tx1"/>
-                </a:solidFill>
-                <a:latin typeface="Arial" panose="020B0604020202020204" pitchFamily="34" charset="0"/>
-                <a:ea typeface="宋体" panose="02010600030101010101" pitchFamily="2" charset="-122"/>
-              </a:defRPr>
-            </a:lvl9pPr>
-          </a:lstStyle>
-          <a:p>
-            <a:pPr marL="0" marR="0" lvl="0" indent="0" algn="l" defTabSz="914400" rtl="0" eaLnBrk="1" fontAlgn="base" latinLnBrk="0" hangingPunct="1">
-              <a:lnSpc>
-                <a:spcPct val="100000"/>
-              </a:lnSpc>
-              <a:spcBef>
-                <a:spcPct val="0"/>
-              </a:spcBef>
-              <a:spcAft>
-                <a:spcPct val="0"/>
-              </a:spcAft>
-              <a:buClrTx/>
-              <a:buSzTx/>
-              <a:buFont typeface="Arial" panose="020B0604020202020204" pitchFamily="34" charset="0"/>
-              <a:buNone/>
-              <a:defRPr/>
-            </a:pPr>
-            <a:endParaRPr kumimoji="0" lang="zh-CN" altLang="en-US" sz="1800" b="0" i="0" u="none" strike="noStrike" kern="1200" cap="none" spc="0" normalizeH="0" baseline="0" noProof="0">
-              <a:ln>
-                <a:noFill/>
-              </a:ln>
-              <a:solidFill>
-                <a:schemeClr val="tx1"/>
-              </a:solidFill>
-              <a:effectLst/>
-              <a:uLnTx/>
-              <a:uFillTx/>
-              <a:latin typeface="Arial" panose="020B0604020202020204" pitchFamily="34" charset="0"/>
-              <a:ea typeface="宋体" panose="02010600030101010101" pitchFamily="2" charset="-122"/>
-              <a:cs typeface="+mn-cs"/>
-            </a:endParaRPr>
-          </a:p>
-        </p:txBody>
-      </p:sp>
-      <p:sp>
-        <p:nvSpPr>
-          <p:cNvPr id="3075" name="TextBox 4"/>
-          <p:cNvSpPr txBox="1"/>
-          <p:nvPr/>
-        </p:nvSpPr>
-        <p:spPr>
-          <a:xfrm>
-            <a:off x="11609388" y="6410325"/>
-            <a:ext cx="436562" cy="339725"/>
+          <p:nvPr>
+            <p:ph type="title"/>
+          </p:nvPr>
+        </p:nvSpPr>
+        <p:spPr>
+          <a:xfrm>
+            <a:off x="609600" y="908050"/>
+            <a:ext cx="10977563" cy="635000"/>
           </a:xfrm>
           <a:prstGeom prst="rect">
             <a:avLst/>
@@ -7710,47 +6893,31 @@
           </a:ln>
         </p:spPr>
         <p:txBody>
-          <a:bodyPr wrap="none" anchor="t">
-            <a:spAutoFit/>
-          </a:bodyPr>
-          <a:lstStyle/>
-          <a:p>
-            <a:pPr lvl="0" indent="0" algn="ctr"/>
-            <a:fld id="{9A0DB2DC-4C9A-4742-B13C-FB6460FD3503}" type="slidenum">
-              <a:rPr lang="zh-CN" altLang="en-US" sz="1600" dirty="0">
-                <a:solidFill>
-                  <a:schemeClr val="accent2"/>
-                </a:solidFill>
-                <a:latin typeface="Arial" panose="020B0604020202020204" pitchFamily="34" charset="0"/>
-                <a:ea typeface="宋体" panose="02010600030101010101" pitchFamily="2" charset="-122"/>
-              </a:rPr>
-              <a:pPr lvl="0" indent="0" algn="ctr"/>
-              <a:t>‹#›</a:t>
-            </a:fld>
-            <a:endParaRPr lang="zh-CN" altLang="en-US" sz="1600" dirty="0">
-              <a:solidFill>
-                <a:schemeClr val="accent2"/>
-              </a:solidFill>
-              <a:latin typeface="Arial" panose="020B0604020202020204" pitchFamily="34" charset="0"/>
-              <a:ea typeface="宋体" panose="02010600030101010101" pitchFamily="2" charset="-122"/>
-            </a:endParaRPr>
-          </a:p>
-        </p:txBody>
-      </p:sp>
-      <p:sp>
-        <p:nvSpPr>
-          <p:cNvPr id="2052" name="Rectangle 2"/>
+          <a:bodyPr anchor="ctr"/>
+          <a:lstStyle/>
+          <a:p>
+            <a:pPr lvl="0"/>
+            <a:r>
+              <a:rPr lang="zh-CN" altLang="zh-CN" dirty="0"/>
+              <a:t>单击此处编辑母版标题样式</a:t>
+            </a:r>
+          </a:p>
+        </p:txBody>
+      </p:sp>
+      <p:sp>
+        <p:nvSpPr>
+          <p:cNvPr id="2053" name="Rectangle 3"/>
           <p:cNvSpPr>
             <a:spLocks noGrp="1"/>
           </p:cNvSpPr>
           <p:nvPr>
-            <p:ph type="title"/>
+            <p:ph type="body"/>
           </p:nvPr>
         </p:nvSpPr>
         <p:spPr>
           <a:xfrm>
-            <a:off x="609600" y="908050"/>
-            <a:ext cx="10977563" cy="635000"/>
+            <a:off x="609600" y="1600200"/>
+            <a:ext cx="10977563" cy="4525963"/>
           </a:xfrm>
           <a:prstGeom prst="rect">
             <a:avLst/>
@@ -7761,41 +6928,6 @@
           </a:ln>
         </p:spPr>
         <p:txBody>
-          <a:bodyPr anchor="ctr"/>
-          <a:lstStyle/>
-          <a:p>
-            <a:pPr lvl="0"/>
-            <a:r>
-              <a:rPr lang="zh-CN" altLang="zh-CN" dirty="0"/>
-              <a:t>单击此处编辑母版标题样式</a:t>
-            </a:r>
-          </a:p>
-        </p:txBody>
-      </p:sp>
-      <p:sp>
-        <p:nvSpPr>
-          <p:cNvPr id="2053" name="Rectangle 3"/>
-          <p:cNvSpPr>
-            <a:spLocks noGrp="1"/>
-          </p:cNvSpPr>
-          <p:nvPr>
-            <p:ph type="body"/>
-          </p:nvPr>
-        </p:nvSpPr>
-        <p:spPr>
-          <a:xfrm>
-            <a:off x="609600" y="1600200"/>
-            <a:ext cx="10977563" cy="4525963"/>
-          </a:xfrm>
-          <a:prstGeom prst="rect">
-            <a:avLst/>
-          </a:prstGeom>
-          <a:noFill/>
-          <a:ln w="9525">
-            <a:noFill/>
-          </a:ln>
-        </p:spPr>
-        <p:txBody>
           <a:bodyPr anchor="t"/>
           <a:lstStyle/>
           <a:p>
@@ -7811,191 +6943,6 @@
               <a:rPr lang="zh-CN" altLang="zh-CN" dirty="0"/>
               <a:t>第二级</a:t>
             </a:r>
-          </a:p>
-        </p:txBody>
-      </p:sp>
-      <p:sp>
-        <p:nvSpPr>
-          <p:cNvPr id="2054" name="矩形 1"/>
-          <p:cNvSpPr>
-            <a:spLocks noChangeArrowheads="1"/>
-          </p:cNvSpPr>
-          <p:nvPr/>
-        </p:nvSpPr>
-        <p:spPr bwMode="auto">
-          <a:xfrm>
-            <a:off x="0" y="6713538"/>
-            <a:ext cx="12196763" cy="144463"/>
-          </a:xfrm>
-          <a:prstGeom prst="rect">
-            <a:avLst/>
-          </a:prstGeom>
-          <a:solidFill>
-            <a:srgbClr val="0F3D68"/>
-          </a:solidFill>
-          <a:ln>
-            <a:noFill/>
-          </a:ln>
-          <a:extLst>
-            <a:ext uri="{91240B29-F687-4F45-9708-019B960494DF}">
-              <a14:hiddenLine xmlns:a14="http://schemas.microsoft.com/office/drawing/2010/main" w="9525">
-                <a:solidFill>
-                  <a:srgbClr val="000000"/>
-                </a:solidFill>
-                <a:round/>
-              </a14:hiddenLine>
-            </a:ext>
-          </a:extLst>
-        </p:spPr>
-        <p:txBody>
-          <a:bodyPr/>
-          <a:lstStyle>
-            <a:lvl1pPr>
-              <a:buFont typeface="Arial" panose="020B0604020202020204" pitchFamily="34" charset="0"/>
-              <a:defRPr>
-                <a:solidFill>
-                  <a:schemeClr val="tx1"/>
-                </a:solidFill>
-                <a:latin typeface="Arial" panose="020B0604020202020204" pitchFamily="34" charset="0"/>
-                <a:ea typeface="宋体" panose="02010600030101010101" pitchFamily="2" charset="-122"/>
-              </a:defRPr>
-            </a:lvl1pPr>
-            <a:lvl2pPr marL="742950" indent="-285750">
-              <a:buFont typeface="Arial" panose="020B0604020202020204" pitchFamily="34" charset="0"/>
-              <a:defRPr>
-                <a:solidFill>
-                  <a:schemeClr val="tx1"/>
-                </a:solidFill>
-                <a:latin typeface="Arial" panose="020B0604020202020204" pitchFamily="34" charset="0"/>
-                <a:ea typeface="宋体" panose="02010600030101010101" pitchFamily="2" charset="-122"/>
-              </a:defRPr>
-            </a:lvl2pPr>
-            <a:lvl3pPr marL="1143000" indent="-228600">
-              <a:buFont typeface="Arial" panose="020B0604020202020204" pitchFamily="34" charset="0"/>
-              <a:defRPr>
-                <a:solidFill>
-                  <a:schemeClr val="tx1"/>
-                </a:solidFill>
-                <a:latin typeface="Arial" panose="020B0604020202020204" pitchFamily="34" charset="0"/>
-                <a:ea typeface="宋体" panose="02010600030101010101" pitchFamily="2" charset="-122"/>
-              </a:defRPr>
-            </a:lvl3pPr>
-            <a:lvl4pPr marL="1600200" indent="-228600">
-              <a:buFont typeface="Arial" panose="020B0604020202020204" pitchFamily="34" charset="0"/>
-              <a:defRPr>
-                <a:solidFill>
-                  <a:schemeClr val="tx1"/>
-                </a:solidFill>
-                <a:latin typeface="Arial" panose="020B0604020202020204" pitchFamily="34" charset="0"/>
-                <a:ea typeface="宋体" panose="02010600030101010101" pitchFamily="2" charset="-122"/>
-              </a:defRPr>
-            </a:lvl4pPr>
-            <a:lvl5pPr marL="2057400" indent="-228600">
-              <a:buFont typeface="Arial" panose="020B0604020202020204" pitchFamily="34" charset="0"/>
-              <a:defRPr>
-                <a:solidFill>
-                  <a:schemeClr val="tx1"/>
-                </a:solidFill>
-                <a:latin typeface="Arial" panose="020B0604020202020204" pitchFamily="34" charset="0"/>
-                <a:ea typeface="宋体" panose="02010600030101010101" pitchFamily="2" charset="-122"/>
-              </a:defRPr>
-            </a:lvl5pPr>
-            <a:lvl6pPr marL="2514600" indent="-228600" eaLnBrk="0" fontAlgn="base" hangingPunct="0">
-              <a:spcBef>
-                <a:spcPct val="0"/>
-              </a:spcBef>
-              <a:spcAft>
-                <a:spcPct val="0"/>
-              </a:spcAft>
-              <a:buFont typeface="Arial" panose="020B0604020202020204" pitchFamily="34" charset="0"/>
-              <a:defRPr>
-                <a:solidFill>
-                  <a:schemeClr val="tx1"/>
-                </a:solidFill>
-                <a:latin typeface="Arial" panose="020B0604020202020204" pitchFamily="34" charset="0"/>
-                <a:ea typeface="宋体" panose="02010600030101010101" pitchFamily="2" charset="-122"/>
-              </a:defRPr>
-            </a:lvl6pPr>
-            <a:lvl7pPr marL="2971800" indent="-228600" eaLnBrk="0" fontAlgn="base" hangingPunct="0">
-              <a:spcBef>
-                <a:spcPct val="0"/>
-              </a:spcBef>
-              <a:spcAft>
-                <a:spcPct val="0"/>
-              </a:spcAft>
-              <a:buFont typeface="Arial" panose="020B0604020202020204" pitchFamily="34" charset="0"/>
-              <a:defRPr>
-                <a:solidFill>
-                  <a:schemeClr val="tx1"/>
-                </a:solidFill>
-                <a:latin typeface="Arial" panose="020B0604020202020204" pitchFamily="34" charset="0"/>
-                <a:ea typeface="宋体" panose="02010600030101010101" pitchFamily="2" charset="-122"/>
-              </a:defRPr>
-            </a:lvl7pPr>
-            <a:lvl8pPr marL="3429000" indent="-228600" eaLnBrk="0" fontAlgn="base" hangingPunct="0">
-              <a:spcBef>
-                <a:spcPct val="0"/>
-              </a:spcBef>
-              <a:spcAft>
-                <a:spcPct val="0"/>
-              </a:spcAft>
-              <a:buFont typeface="Arial" panose="020B0604020202020204" pitchFamily="34" charset="0"/>
-              <a:defRPr>
-                <a:solidFill>
-                  <a:schemeClr val="tx1"/>
-                </a:solidFill>
-                <a:latin typeface="Arial" panose="020B0604020202020204" pitchFamily="34" charset="0"/>
-                <a:ea typeface="宋体" panose="02010600030101010101" pitchFamily="2" charset="-122"/>
-              </a:defRPr>
-            </a:lvl8pPr>
-            <a:lvl9pPr marL="3886200" indent="-228600" eaLnBrk="0" fontAlgn="base" hangingPunct="0">
-              <a:spcBef>
-                <a:spcPct val="0"/>
-              </a:spcBef>
-              <a:spcAft>
-                <a:spcPct val="0"/>
-              </a:spcAft>
-              <a:buFont typeface="Arial" panose="020B0604020202020204" pitchFamily="34" charset="0"/>
-              <a:defRPr>
-                <a:solidFill>
-                  <a:schemeClr val="tx1"/>
-                </a:solidFill>
-                <a:latin typeface="Arial" panose="020B0604020202020204" pitchFamily="34" charset="0"/>
-                <a:ea typeface="宋体" panose="02010600030101010101" pitchFamily="2" charset="-122"/>
-              </a:defRPr>
-            </a:lvl9pPr>
-          </a:lstStyle>
-          <a:p>
-            <a:pPr marL="0" marR="0" lvl="0" indent="0" algn="l" defTabSz="914400" rtl="0" eaLnBrk="1" fontAlgn="base" latinLnBrk="0" hangingPunct="1">
-              <a:lnSpc>
-                <a:spcPct val="100000"/>
-              </a:lnSpc>
-              <a:spcBef>
-                <a:spcPct val="0"/>
-              </a:spcBef>
-              <a:spcAft>
-                <a:spcPct val="0"/>
-              </a:spcAft>
-              <a:buClrTx/>
-              <a:buSzTx/>
-              <a:buFont typeface="Arial" panose="020B0604020202020204" pitchFamily="34" charset="0"/>
-              <a:buNone/>
-              <a:defRPr/>
-            </a:pPr>
-            <a:endParaRPr kumimoji="0" lang="zh-CN" altLang="en-US" sz="1800" b="0" i="0" u="none" strike="noStrike" kern="1200" cap="none" spc="0" normalizeH="0" baseline="0" noProof="0">
-              <a:ln>
-                <a:noFill/>
-              </a:ln>
-              <a:solidFill>
-                <a:schemeClr val="tx1"/>
-              </a:solidFill>
-              <a:effectLst/>
-              <a:uLnTx/>
-              <a:uFillTx/>
-              <a:latin typeface="Arial" panose="020B0604020202020204" pitchFamily="34" charset="0"/>
-              <a:ea typeface="宋体" panose="02010600030101010101" pitchFamily="2" charset="-122"/>
-              <a:cs typeface="+mn-cs"/>
-            </a:endParaRPr>
           </a:p>
         </p:txBody>
       </p:sp>

--- a/docs/thesis/defense/答辩PPT-北航模板版.pptx
+++ b/docs/thesis/defense/答辩PPT-北航模板版.pptx
@@ -8063,16 +8063,40 @@
           </a:p>
         </p:txBody>
       </p:sp>
-      <p:sp>
-        <p:nvSpPr>
-          <p:cNvPr id="9001" name="TextBox 9000"/>
+      <p:pic>
+        <p:nvPicPr>
+          <p:cNvPr id="9001" name="Picture 9000" descr="beihang-logo.png"/>
+          <p:cNvPicPr>
+            <a:picLocks noChangeAspect="1"/>
+          </p:cNvPicPr>
+          <p:nvPr/>
+        </p:nvPicPr>
+        <p:blipFill>
+          <a:blip r:embed="rId2"/>
+          <a:stretch>
+            <a:fillRect/>
+          </a:stretch>
+        </p:blipFill>
+        <p:spPr>
+          <a:xfrm>
+            <a:off x="9336024" y="91665"/>
+            <a:ext cx="2642616" cy="502469"/>
+          </a:xfrm>
+          <a:prstGeom prst="rect">
+            <a:avLst/>
+          </a:prstGeom>
+        </p:spPr>
+      </p:pic>
+      <p:sp>
+        <p:nvSpPr>
+          <p:cNvPr id="9002" name="TextBox 9001"/>
           <p:cNvSpPr txBox="1"/>
           <p:nvPr/>
         </p:nvSpPr>
         <p:spPr>
           <a:xfrm>
             <a:off x="1014984" y="155448"/>
-            <a:ext cx="10424160" cy="621792"/>
+            <a:ext cx="8001000" cy="621792"/>
           </a:xfrm>
           <a:prstGeom prst="rect">
             <a:avLst/>
@@ -8105,7 +8129,7 @@
       </p:sp>
       <p:sp>
         <p:nvSpPr>
-          <p:cNvPr id="9002" name="Rectangle 9001"/>
+          <p:cNvPr id="9003" name="Rectangle 9002"/>
           <p:cNvSpPr/>
           <p:nvPr/>
         </p:nvSpPr>
@@ -8149,7 +8173,7 @@
       </p:sp>
       <p:sp>
         <p:nvSpPr>
-          <p:cNvPr id="9003" name="TextBox 9002"/>
+          <p:cNvPr id="9004" name="TextBox 9003"/>
           <p:cNvSpPr txBox="1"/>
           <p:nvPr/>
         </p:nvSpPr>
@@ -8185,14 +8209,14 @@
       </p:sp>
       <p:pic>
         <p:nvPicPr>
-          <p:cNvPr id="9004" name="Picture 9003" descr="fig5-2-cache-zero-copy.png"/>
+          <p:cNvPr id="9005" name="Picture 9004" descr="fig5-2-cache-zero-copy.png"/>
           <p:cNvPicPr>
             <a:picLocks noChangeAspect="1"/>
           </p:cNvPicPr>
           <p:nvPr/>
         </p:nvPicPr>
         <p:blipFill>
-          <a:blip r:embed="rId2"/>
+          <a:blip r:embed="rId3"/>
           <a:stretch>
             <a:fillRect/>
           </a:stretch>
@@ -8209,7 +8233,7 @@
       </p:pic>
       <p:sp>
         <p:nvSpPr>
-          <p:cNvPr id="9005" name="TextBox 9004"/>
+          <p:cNvPr id="9006" name="TextBox 9005"/>
           <p:cNvSpPr txBox="1"/>
           <p:nvPr/>
         </p:nvSpPr>
@@ -8289,7 +8313,7 @@
       </p:sp>
       <p:sp>
         <p:nvSpPr>
-          <p:cNvPr id="9006" name="TextBox 9005"/>
+          <p:cNvPr id="9007" name="TextBox 9006"/>
           <p:cNvSpPr txBox="1"/>
           <p:nvPr/>
         </p:nvSpPr>
@@ -8546,16 +8570,40 @@
           </a:p>
         </p:txBody>
       </p:sp>
-      <p:sp>
-        <p:nvSpPr>
-          <p:cNvPr id="9001" name="TextBox 9000"/>
+      <p:pic>
+        <p:nvPicPr>
+          <p:cNvPr id="9001" name="Picture 9000" descr="beihang-logo.png"/>
+          <p:cNvPicPr>
+            <a:picLocks noChangeAspect="1"/>
+          </p:cNvPicPr>
+          <p:nvPr/>
+        </p:nvPicPr>
+        <p:blipFill>
+          <a:blip r:embed="rId2"/>
+          <a:stretch>
+            <a:fillRect/>
+          </a:stretch>
+        </p:blipFill>
+        <p:spPr>
+          <a:xfrm>
+            <a:off x="9336024" y="91665"/>
+            <a:ext cx="2642616" cy="502469"/>
+          </a:xfrm>
+          <a:prstGeom prst="rect">
+            <a:avLst/>
+          </a:prstGeom>
+        </p:spPr>
+      </p:pic>
+      <p:sp>
+        <p:nvSpPr>
+          <p:cNvPr id="9002" name="TextBox 9001"/>
           <p:cNvSpPr txBox="1"/>
           <p:nvPr/>
         </p:nvSpPr>
         <p:spPr>
           <a:xfrm>
             <a:off x="1014984" y="155448"/>
-            <a:ext cx="10424160" cy="621792"/>
+            <a:ext cx="8001000" cy="621792"/>
           </a:xfrm>
           <a:prstGeom prst="rect">
             <a:avLst/>
@@ -8588,7 +8636,7 @@
       </p:sp>
       <p:sp>
         <p:nvSpPr>
-          <p:cNvPr id="9002" name="Rectangle 9001"/>
+          <p:cNvPr id="9003" name="Rectangle 9002"/>
           <p:cNvSpPr/>
           <p:nvPr/>
         </p:nvSpPr>
@@ -8632,7 +8680,7 @@
       </p:sp>
       <p:sp>
         <p:nvSpPr>
-          <p:cNvPr id="9003" name="TextBox 9002"/>
+          <p:cNvPr id="9004" name="TextBox 9003"/>
           <p:cNvSpPr txBox="1"/>
           <p:nvPr/>
         </p:nvSpPr>
@@ -8668,7 +8716,7 @@
       </p:sp>
       <p:sp>
         <p:nvSpPr>
-          <p:cNvPr id="9004" name="Rectangle 9003"/>
+          <p:cNvPr id="9005" name="Rectangle 9004"/>
           <p:cNvSpPr/>
           <p:nvPr/>
         </p:nvSpPr>
@@ -8712,7 +8760,7 @@
       </p:sp>
       <p:sp>
         <p:nvSpPr>
-          <p:cNvPr id="9005" name="Oval 9004"/>
+          <p:cNvPr id="9006" name="Oval 9005"/>
           <p:cNvSpPr/>
           <p:nvPr/>
         </p:nvSpPr>
@@ -8758,7 +8806,7 @@
       </p:sp>
       <p:sp>
         <p:nvSpPr>
-          <p:cNvPr id="9006" name="TextBox 9005"/>
+          <p:cNvPr id="9007" name="TextBox 9006"/>
           <p:cNvSpPr txBox="1"/>
           <p:nvPr/>
         </p:nvSpPr>
@@ -8811,7 +8859,7 @@
       </p:sp>
       <p:sp>
         <p:nvSpPr>
-          <p:cNvPr id="9007" name="Rounded Rectangle 9006"/>
+          <p:cNvPr id="9008" name="Rounded Rectangle 9007"/>
           <p:cNvSpPr/>
           <p:nvPr/>
         </p:nvSpPr>
@@ -8857,7 +8905,7 @@
       </p:sp>
       <p:sp>
         <p:nvSpPr>
-          <p:cNvPr id="9008" name="TextBox 9007"/>
+          <p:cNvPr id="9009" name="TextBox 9008"/>
           <p:cNvSpPr txBox="1"/>
           <p:nvPr/>
         </p:nvSpPr>
@@ -8910,7 +8958,7 @@
       </p:sp>
       <p:sp>
         <p:nvSpPr>
-          <p:cNvPr id="9009" name="Oval 9008"/>
+          <p:cNvPr id="9010" name="Oval 9009"/>
           <p:cNvSpPr/>
           <p:nvPr/>
         </p:nvSpPr>
@@ -8956,7 +9004,7 @@
       </p:sp>
       <p:sp>
         <p:nvSpPr>
-          <p:cNvPr id="9010" name="TextBox 9009"/>
+          <p:cNvPr id="9011" name="TextBox 9010"/>
           <p:cNvSpPr txBox="1"/>
           <p:nvPr/>
         </p:nvSpPr>
@@ -9009,7 +9057,7 @@
       </p:sp>
       <p:sp>
         <p:nvSpPr>
-          <p:cNvPr id="9011" name="Rounded Rectangle 9010"/>
+          <p:cNvPr id="9012" name="Rounded Rectangle 9011"/>
           <p:cNvSpPr/>
           <p:nvPr/>
         </p:nvSpPr>
@@ -9055,7 +9103,7 @@
       </p:sp>
       <p:sp>
         <p:nvSpPr>
-          <p:cNvPr id="9012" name="TextBox 9011"/>
+          <p:cNvPr id="9013" name="TextBox 9012"/>
           <p:cNvSpPr txBox="1"/>
           <p:nvPr/>
         </p:nvSpPr>
@@ -9108,7 +9156,7 @@
       </p:sp>
       <p:sp>
         <p:nvSpPr>
-          <p:cNvPr id="9013" name="Oval 9012"/>
+          <p:cNvPr id="9014" name="Oval 9013"/>
           <p:cNvSpPr/>
           <p:nvPr/>
         </p:nvSpPr>
@@ -9154,7 +9202,7 @@
       </p:sp>
       <p:sp>
         <p:nvSpPr>
-          <p:cNvPr id="9014" name="TextBox 9013"/>
+          <p:cNvPr id="9015" name="TextBox 9014"/>
           <p:cNvSpPr txBox="1"/>
           <p:nvPr/>
         </p:nvSpPr>
@@ -9207,7 +9255,7 @@
       </p:sp>
       <p:sp>
         <p:nvSpPr>
-          <p:cNvPr id="9015" name="Rounded Rectangle 9014"/>
+          <p:cNvPr id="9016" name="Rounded Rectangle 9015"/>
           <p:cNvSpPr/>
           <p:nvPr/>
         </p:nvSpPr>
@@ -9253,7 +9301,7 @@
       </p:sp>
       <p:sp>
         <p:nvSpPr>
-          <p:cNvPr id="9016" name="TextBox 9015"/>
+          <p:cNvPr id="9017" name="TextBox 9016"/>
           <p:cNvSpPr txBox="1"/>
           <p:nvPr/>
         </p:nvSpPr>
@@ -9306,7 +9354,7 @@
       </p:sp>
       <p:sp>
         <p:nvSpPr>
-          <p:cNvPr id="9017" name="Oval 9016"/>
+          <p:cNvPr id="9018" name="Oval 9017"/>
           <p:cNvSpPr/>
           <p:nvPr/>
         </p:nvSpPr>
@@ -9352,7 +9400,7 @@
       </p:sp>
       <p:sp>
         <p:nvSpPr>
-          <p:cNvPr id="9018" name="TextBox 9017"/>
+          <p:cNvPr id="9019" name="TextBox 9018"/>
           <p:cNvSpPr txBox="1"/>
           <p:nvPr/>
         </p:nvSpPr>
@@ -9405,7 +9453,7 @@
       </p:sp>
       <p:sp>
         <p:nvSpPr>
-          <p:cNvPr id="9019" name="Rounded Rectangle 9018"/>
+          <p:cNvPr id="9020" name="Rounded Rectangle 9019"/>
           <p:cNvSpPr/>
           <p:nvPr/>
         </p:nvSpPr>
@@ -9451,7 +9499,7 @@
       </p:sp>
       <p:sp>
         <p:nvSpPr>
-          <p:cNvPr id="9020" name="TextBox 9019"/>
+          <p:cNvPr id="9021" name="TextBox 9020"/>
           <p:cNvSpPr txBox="1"/>
           <p:nvPr/>
         </p:nvSpPr>
@@ -9504,7 +9552,7 @@
       </p:sp>
       <p:sp>
         <p:nvSpPr>
-          <p:cNvPr id="9021" name="TextBox 9020"/>
+          <p:cNvPr id="9022" name="TextBox 9021"/>
           <p:cNvSpPr txBox="1"/>
           <p:nvPr/>
         </p:nvSpPr>
@@ -9761,16 +9809,40 @@
           </a:p>
         </p:txBody>
       </p:sp>
-      <p:sp>
-        <p:nvSpPr>
-          <p:cNvPr id="9001" name="TextBox 9000"/>
+      <p:pic>
+        <p:nvPicPr>
+          <p:cNvPr id="9001" name="Picture 9000" descr="beihang-logo.png"/>
+          <p:cNvPicPr>
+            <a:picLocks noChangeAspect="1"/>
+          </p:cNvPicPr>
+          <p:nvPr/>
+        </p:nvPicPr>
+        <p:blipFill>
+          <a:blip r:embed="rId2"/>
+          <a:stretch>
+            <a:fillRect/>
+          </a:stretch>
+        </p:blipFill>
+        <p:spPr>
+          <a:xfrm>
+            <a:off x="9336024" y="91665"/>
+            <a:ext cx="2642616" cy="502469"/>
+          </a:xfrm>
+          <a:prstGeom prst="rect">
+            <a:avLst/>
+          </a:prstGeom>
+        </p:spPr>
+      </p:pic>
+      <p:sp>
+        <p:nvSpPr>
+          <p:cNvPr id="9002" name="TextBox 9001"/>
           <p:cNvSpPr txBox="1"/>
           <p:nvPr/>
         </p:nvSpPr>
         <p:spPr>
           <a:xfrm>
             <a:off x="1014984" y="155448"/>
-            <a:ext cx="10424160" cy="621792"/>
+            <a:ext cx="8001000" cy="621792"/>
           </a:xfrm>
           <a:prstGeom prst="rect">
             <a:avLst/>
@@ -9803,7 +9875,7 @@
       </p:sp>
       <p:sp>
         <p:nvSpPr>
-          <p:cNvPr id="9002" name="Rectangle 9001"/>
+          <p:cNvPr id="9003" name="Rectangle 9002"/>
           <p:cNvSpPr/>
           <p:nvPr/>
         </p:nvSpPr>
@@ -9847,7 +9919,7 @@
       </p:sp>
       <p:sp>
         <p:nvSpPr>
-          <p:cNvPr id="9003" name="TextBox 9002"/>
+          <p:cNvPr id="9004" name="TextBox 9003"/>
           <p:cNvSpPr txBox="1"/>
           <p:nvPr/>
         </p:nvSpPr>
@@ -9883,7 +9955,7 @@
       </p:sp>
       <p:sp>
         <p:nvSpPr>
-          <p:cNvPr id="9004" name="TextBox 9003"/>
+          <p:cNvPr id="9005" name="TextBox 9004"/>
           <p:cNvSpPr txBox="1"/>
           <p:nvPr/>
         </p:nvSpPr>
@@ -9963,14 +10035,14 @@
       </p:sp>
       <p:pic>
         <p:nvPicPr>
-          <p:cNvPr id="9005" name="Picture 9004" descr="fig4-3-consistency-invariant.png"/>
+          <p:cNvPr id="9006" name="Picture 9005" descr="fig4-3-consistency-invariant.png"/>
           <p:cNvPicPr>
             <a:picLocks noChangeAspect="1"/>
           </p:cNvPicPr>
           <p:nvPr/>
         </p:nvPicPr>
         <p:blipFill>
-          <a:blip r:embed="rId2"/>
+          <a:blip r:embed="rId3"/>
           <a:stretch>
             <a:fillRect/>
           </a:stretch>
@@ -9987,7 +10059,7 @@
       </p:pic>
       <p:sp>
         <p:nvSpPr>
-          <p:cNvPr id="9006" name="TextBox 9005"/>
+          <p:cNvPr id="9007" name="TextBox 9006"/>
           <p:cNvSpPr txBox="1"/>
           <p:nvPr/>
         </p:nvSpPr>
@@ -10244,16 +10316,40 @@
           </a:p>
         </p:txBody>
       </p:sp>
-      <p:sp>
-        <p:nvSpPr>
-          <p:cNvPr id="9001" name="TextBox 9000"/>
+      <p:pic>
+        <p:nvPicPr>
+          <p:cNvPr id="9001" name="Picture 9000" descr="beihang-logo.png"/>
+          <p:cNvPicPr>
+            <a:picLocks noChangeAspect="1"/>
+          </p:cNvPicPr>
+          <p:nvPr/>
+        </p:nvPicPr>
+        <p:blipFill>
+          <a:blip r:embed="rId2"/>
+          <a:stretch>
+            <a:fillRect/>
+          </a:stretch>
+        </p:blipFill>
+        <p:spPr>
+          <a:xfrm>
+            <a:off x="9336024" y="91665"/>
+            <a:ext cx="2642616" cy="502469"/>
+          </a:xfrm>
+          <a:prstGeom prst="rect">
+            <a:avLst/>
+          </a:prstGeom>
+        </p:spPr>
+      </p:pic>
+      <p:sp>
+        <p:nvSpPr>
+          <p:cNvPr id="9002" name="TextBox 9001"/>
           <p:cNvSpPr txBox="1"/>
           <p:nvPr/>
         </p:nvSpPr>
         <p:spPr>
           <a:xfrm>
             <a:off x="1014984" y="155448"/>
-            <a:ext cx="10424160" cy="621792"/>
+            <a:ext cx="8001000" cy="621792"/>
           </a:xfrm>
           <a:prstGeom prst="rect">
             <a:avLst/>
@@ -10286,7 +10382,7 @@
       </p:sp>
       <p:sp>
         <p:nvSpPr>
-          <p:cNvPr id="9002" name="Rectangle 9001"/>
+          <p:cNvPr id="9003" name="Rectangle 9002"/>
           <p:cNvSpPr/>
           <p:nvPr/>
         </p:nvSpPr>
@@ -10330,7 +10426,7 @@
       </p:sp>
       <p:sp>
         <p:nvSpPr>
-          <p:cNvPr id="9003" name="TextBox 9002"/>
+          <p:cNvPr id="9004" name="TextBox 9003"/>
           <p:cNvSpPr txBox="1"/>
           <p:nvPr/>
         </p:nvSpPr>
@@ -10366,7 +10462,7 @@
       </p:sp>
       <p:graphicFrame>
         <p:nvGraphicFramePr>
-          <p:cNvPr id="9004" name="Table 9003"/>
+          <p:cNvPr id="9005" name="Table 9004"/>
           <p:cNvGraphicFramePr>
             <a:graphicFrameLocks noGrp="1"/>
           </p:cNvGraphicFramePr>
@@ -10692,7 +10788,7 @@
       </p:graphicFrame>
       <p:sp>
         <p:nvSpPr>
-          <p:cNvPr id="9005" name="TextBox 9004"/>
+          <p:cNvPr id="9006" name="TextBox 9005"/>
           <p:cNvSpPr txBox="1"/>
           <p:nvPr/>
         </p:nvSpPr>
@@ -10772,7 +10868,7 @@
       </p:sp>
       <p:sp>
         <p:nvSpPr>
-          <p:cNvPr id="9006" name="TextBox 9005"/>
+          <p:cNvPr id="9007" name="TextBox 9006"/>
           <p:cNvSpPr txBox="1"/>
           <p:nvPr/>
         </p:nvSpPr>
@@ -11029,16 +11125,40 @@
           </a:p>
         </p:txBody>
       </p:sp>
-      <p:sp>
-        <p:nvSpPr>
-          <p:cNvPr id="9001" name="TextBox 9000"/>
+      <p:pic>
+        <p:nvPicPr>
+          <p:cNvPr id="9001" name="Picture 9000" descr="beihang-logo.png"/>
+          <p:cNvPicPr>
+            <a:picLocks noChangeAspect="1"/>
+          </p:cNvPicPr>
+          <p:nvPr/>
+        </p:nvPicPr>
+        <p:blipFill>
+          <a:blip r:embed="rId2"/>
+          <a:stretch>
+            <a:fillRect/>
+          </a:stretch>
+        </p:blipFill>
+        <p:spPr>
+          <a:xfrm>
+            <a:off x="9336024" y="91665"/>
+            <a:ext cx="2642616" cy="502469"/>
+          </a:xfrm>
+          <a:prstGeom prst="rect">
+            <a:avLst/>
+          </a:prstGeom>
+        </p:spPr>
+      </p:pic>
+      <p:sp>
+        <p:nvSpPr>
+          <p:cNvPr id="9002" name="TextBox 9001"/>
           <p:cNvSpPr txBox="1"/>
           <p:nvPr/>
         </p:nvSpPr>
         <p:spPr>
           <a:xfrm>
             <a:off x="1014984" y="155448"/>
-            <a:ext cx="10424160" cy="621792"/>
+            <a:ext cx="8001000" cy="621792"/>
           </a:xfrm>
           <a:prstGeom prst="rect">
             <a:avLst/>
@@ -11071,7 +11191,7 @@
       </p:sp>
       <p:sp>
         <p:nvSpPr>
-          <p:cNvPr id="9002" name="Rectangle 9001"/>
+          <p:cNvPr id="9003" name="Rectangle 9002"/>
           <p:cNvSpPr/>
           <p:nvPr/>
         </p:nvSpPr>
@@ -11115,7 +11235,7 @@
       </p:sp>
       <p:sp>
         <p:nvSpPr>
-          <p:cNvPr id="9003" name="TextBox 9002"/>
+          <p:cNvPr id="9004" name="TextBox 9003"/>
           <p:cNvSpPr txBox="1"/>
           <p:nvPr/>
         </p:nvSpPr>
@@ -11151,14 +11271,14 @@
       </p:sp>
       <p:pic>
         <p:nvPicPr>
-          <p:cNvPr id="9004" name="Picture 9003" descr="fig6-throughput-s2-w3.png"/>
+          <p:cNvPr id="9005" name="Picture 9004" descr="fig6-throughput-s2-w3.png"/>
           <p:cNvPicPr>
             <a:picLocks noChangeAspect="1"/>
           </p:cNvPicPr>
           <p:nvPr/>
         </p:nvPicPr>
         <p:blipFill>
-          <a:blip r:embed="rId2"/>
+          <a:blip r:embed="rId3"/>
           <a:stretch>
             <a:fillRect/>
           </a:stretch>
@@ -11175,7 +11295,7 @@
       </p:pic>
       <p:sp>
         <p:nvSpPr>
-          <p:cNvPr id="9005" name="TextBox 9004"/>
+          <p:cNvPr id="9006" name="TextBox 9005"/>
           <p:cNvSpPr txBox="1"/>
           <p:nvPr/>
         </p:nvSpPr>
@@ -11211,7 +11331,7 @@
       </p:sp>
       <p:sp>
         <p:nvSpPr>
-          <p:cNvPr id="9006" name="TextBox 9005"/>
+          <p:cNvPr id="9007" name="TextBox 9006"/>
           <p:cNvSpPr txBox="1"/>
           <p:nvPr/>
         </p:nvSpPr>
@@ -11291,7 +11411,7 @@
       </p:sp>
       <p:sp>
         <p:nvSpPr>
-          <p:cNvPr id="9007" name="Rounded Rectangle 9006"/>
+          <p:cNvPr id="9008" name="Rounded Rectangle 9007"/>
           <p:cNvSpPr/>
           <p:nvPr/>
         </p:nvSpPr>
@@ -11337,7 +11457,7 @@
       </p:sp>
       <p:sp>
         <p:nvSpPr>
-          <p:cNvPr id="9008" name="TextBox 9007"/>
+          <p:cNvPr id="9009" name="TextBox 9008"/>
           <p:cNvSpPr txBox="1"/>
           <p:nvPr/>
         </p:nvSpPr>
@@ -11393,7 +11513,7 @@
       </p:sp>
       <p:sp>
         <p:nvSpPr>
-          <p:cNvPr id="9009" name="Rounded Rectangle 9008"/>
+          <p:cNvPr id="9010" name="Rounded Rectangle 9009"/>
           <p:cNvSpPr/>
           <p:nvPr/>
         </p:nvSpPr>
@@ -11439,7 +11559,7 @@
       </p:sp>
       <p:sp>
         <p:nvSpPr>
-          <p:cNvPr id="9010" name="TextBox 9009"/>
+          <p:cNvPr id="9011" name="TextBox 9010"/>
           <p:cNvSpPr txBox="1"/>
           <p:nvPr/>
         </p:nvSpPr>
@@ -11495,7 +11615,7 @@
       </p:sp>
       <p:sp>
         <p:nvSpPr>
-          <p:cNvPr id="9011" name="Rounded Rectangle 9010"/>
+          <p:cNvPr id="9012" name="Rounded Rectangle 9011"/>
           <p:cNvSpPr/>
           <p:nvPr/>
         </p:nvSpPr>
@@ -11541,7 +11661,7 @@
       </p:sp>
       <p:sp>
         <p:nvSpPr>
-          <p:cNvPr id="9012" name="TextBox 9011"/>
+          <p:cNvPr id="9013" name="TextBox 9012"/>
           <p:cNvSpPr txBox="1"/>
           <p:nvPr/>
         </p:nvSpPr>
@@ -11597,7 +11717,7 @@
       </p:sp>
       <p:sp>
         <p:nvSpPr>
-          <p:cNvPr id="9013" name="Rounded Rectangle 9012"/>
+          <p:cNvPr id="9014" name="Rounded Rectangle 9013"/>
           <p:cNvSpPr/>
           <p:nvPr/>
         </p:nvSpPr>
@@ -11643,7 +11763,7 @@
       </p:sp>
       <p:sp>
         <p:nvSpPr>
-          <p:cNvPr id="9014" name="TextBox 9013"/>
+          <p:cNvPr id="9015" name="TextBox 9014"/>
           <p:cNvSpPr txBox="1"/>
           <p:nvPr/>
         </p:nvSpPr>
@@ -11699,7 +11819,7 @@
       </p:sp>
       <p:sp>
         <p:nvSpPr>
-          <p:cNvPr id="9015" name="Rounded Rectangle 9014"/>
+          <p:cNvPr id="9016" name="Rounded Rectangle 9015"/>
           <p:cNvSpPr/>
           <p:nvPr/>
         </p:nvSpPr>
@@ -11745,7 +11865,7 @@
       </p:sp>
       <p:sp>
         <p:nvSpPr>
-          <p:cNvPr id="9016" name="TextBox 9015"/>
+          <p:cNvPr id="9017" name="TextBox 9016"/>
           <p:cNvSpPr txBox="1"/>
           <p:nvPr/>
         </p:nvSpPr>
@@ -11801,7 +11921,7 @@
       </p:sp>
       <p:sp>
         <p:nvSpPr>
-          <p:cNvPr id="9017" name="Rounded Rectangle 9016"/>
+          <p:cNvPr id="9018" name="Rounded Rectangle 9017"/>
           <p:cNvSpPr/>
           <p:nvPr/>
         </p:nvSpPr>
@@ -11847,7 +11967,7 @@
       </p:sp>
       <p:sp>
         <p:nvSpPr>
-          <p:cNvPr id="9018" name="TextBox 9017"/>
+          <p:cNvPr id="9019" name="TextBox 9018"/>
           <p:cNvSpPr txBox="1"/>
           <p:nvPr/>
         </p:nvSpPr>
@@ -11903,7 +12023,7 @@
       </p:sp>
       <p:sp>
         <p:nvSpPr>
-          <p:cNvPr id="9019" name="TextBox 9018"/>
+          <p:cNvPr id="9020" name="TextBox 9019"/>
           <p:cNvSpPr txBox="1"/>
           <p:nvPr/>
         </p:nvSpPr>
@@ -11939,7 +12059,7 @@
       </p:sp>
       <p:sp>
         <p:nvSpPr>
-          <p:cNvPr id="9020" name="TextBox 9019"/>
+          <p:cNvPr id="9021" name="TextBox 9020"/>
           <p:cNvSpPr txBox="1"/>
           <p:nvPr/>
         </p:nvSpPr>
@@ -12196,16 +12316,40 @@
           </a:p>
         </p:txBody>
       </p:sp>
-      <p:sp>
-        <p:nvSpPr>
-          <p:cNvPr id="9001" name="TextBox 9000"/>
+      <p:pic>
+        <p:nvPicPr>
+          <p:cNvPr id="9001" name="Picture 9000" descr="beihang-logo.png"/>
+          <p:cNvPicPr>
+            <a:picLocks noChangeAspect="1"/>
+          </p:cNvPicPr>
+          <p:nvPr/>
+        </p:nvPicPr>
+        <p:blipFill>
+          <a:blip r:embed="rId2"/>
+          <a:stretch>
+            <a:fillRect/>
+          </a:stretch>
+        </p:blipFill>
+        <p:spPr>
+          <a:xfrm>
+            <a:off x="9336024" y="91665"/>
+            <a:ext cx="2642616" cy="502469"/>
+          </a:xfrm>
+          <a:prstGeom prst="rect">
+            <a:avLst/>
+          </a:prstGeom>
+        </p:spPr>
+      </p:pic>
+      <p:sp>
+        <p:nvSpPr>
+          <p:cNvPr id="9002" name="TextBox 9001"/>
           <p:cNvSpPr txBox="1"/>
           <p:nvPr/>
         </p:nvSpPr>
         <p:spPr>
           <a:xfrm>
             <a:off x="1014984" y="155448"/>
-            <a:ext cx="10424160" cy="621792"/>
+            <a:ext cx="8001000" cy="621792"/>
           </a:xfrm>
           <a:prstGeom prst="rect">
             <a:avLst/>
@@ -12238,7 +12382,7 @@
       </p:sp>
       <p:sp>
         <p:nvSpPr>
-          <p:cNvPr id="9002" name="Rectangle 9001"/>
+          <p:cNvPr id="9003" name="Rectangle 9002"/>
           <p:cNvSpPr/>
           <p:nvPr/>
         </p:nvSpPr>
@@ -12282,7 +12426,7 @@
       </p:sp>
       <p:sp>
         <p:nvSpPr>
-          <p:cNvPr id="9003" name="TextBox 9002"/>
+          <p:cNvPr id="9004" name="TextBox 9003"/>
           <p:cNvSpPr txBox="1"/>
           <p:nvPr/>
         </p:nvSpPr>
@@ -12318,7 +12462,7 @@
       </p:sp>
       <p:sp>
         <p:nvSpPr>
-          <p:cNvPr id="9004" name="Rounded Rectangle 9003"/>
+          <p:cNvPr id="9005" name="Rounded Rectangle 9004"/>
           <p:cNvSpPr/>
           <p:nvPr/>
         </p:nvSpPr>
@@ -12364,7 +12508,7 @@
       </p:sp>
       <p:sp>
         <p:nvSpPr>
-          <p:cNvPr id="9005" name="Rectangle 9004"/>
+          <p:cNvPr id="9006" name="Rectangle 9005"/>
           <p:cNvSpPr/>
           <p:nvPr/>
         </p:nvSpPr>
@@ -12408,7 +12552,7 @@
       </p:sp>
       <p:sp>
         <p:nvSpPr>
-          <p:cNvPr id="9006" name="TextBox 9005"/>
+          <p:cNvPr id="9007" name="TextBox 9006"/>
           <p:cNvSpPr txBox="1"/>
           <p:nvPr/>
         </p:nvSpPr>
@@ -12444,7 +12588,7 @@
       </p:sp>
       <p:sp>
         <p:nvSpPr>
-          <p:cNvPr id="9007" name="TextBox 9006"/>
+          <p:cNvPr id="9008" name="TextBox 9007"/>
           <p:cNvSpPr txBox="1"/>
           <p:nvPr/>
         </p:nvSpPr>
@@ -12480,7 +12624,7 @@
       </p:sp>
       <p:sp>
         <p:nvSpPr>
-          <p:cNvPr id="9008" name="Rounded Rectangle 9007"/>
+          <p:cNvPr id="9009" name="Rounded Rectangle 9008"/>
           <p:cNvSpPr/>
           <p:nvPr/>
         </p:nvSpPr>
@@ -12526,7 +12670,7 @@
       </p:sp>
       <p:sp>
         <p:nvSpPr>
-          <p:cNvPr id="9009" name="Rectangle 9008"/>
+          <p:cNvPr id="9010" name="Rectangle 9009"/>
           <p:cNvSpPr/>
           <p:nvPr/>
         </p:nvSpPr>
@@ -12570,7 +12714,7 @@
       </p:sp>
       <p:sp>
         <p:nvSpPr>
-          <p:cNvPr id="9010" name="TextBox 9009"/>
+          <p:cNvPr id="9011" name="TextBox 9010"/>
           <p:cNvSpPr txBox="1"/>
           <p:nvPr/>
         </p:nvSpPr>
@@ -12606,7 +12750,7 @@
       </p:sp>
       <p:sp>
         <p:nvSpPr>
-          <p:cNvPr id="9011" name="TextBox 9010"/>
+          <p:cNvPr id="9012" name="TextBox 9011"/>
           <p:cNvSpPr txBox="1"/>
           <p:nvPr/>
         </p:nvSpPr>
@@ -12642,7 +12786,7 @@
       </p:sp>
       <p:sp>
         <p:nvSpPr>
-          <p:cNvPr id="9012" name="Rounded Rectangle 9011"/>
+          <p:cNvPr id="9013" name="Rounded Rectangle 9012"/>
           <p:cNvSpPr/>
           <p:nvPr/>
         </p:nvSpPr>
@@ -12688,7 +12832,7 @@
       </p:sp>
       <p:sp>
         <p:nvSpPr>
-          <p:cNvPr id="9013" name="Rectangle 9012"/>
+          <p:cNvPr id="9014" name="Rectangle 9013"/>
           <p:cNvSpPr/>
           <p:nvPr/>
         </p:nvSpPr>
@@ -12732,7 +12876,7 @@
       </p:sp>
       <p:sp>
         <p:nvSpPr>
-          <p:cNvPr id="9014" name="TextBox 9013"/>
+          <p:cNvPr id="9015" name="TextBox 9014"/>
           <p:cNvSpPr txBox="1"/>
           <p:nvPr/>
         </p:nvSpPr>
@@ -12768,7 +12912,7 @@
       </p:sp>
       <p:sp>
         <p:nvSpPr>
-          <p:cNvPr id="9015" name="TextBox 9014"/>
+          <p:cNvPr id="9016" name="TextBox 9015"/>
           <p:cNvSpPr txBox="1"/>
           <p:nvPr/>
         </p:nvSpPr>
@@ -12804,7 +12948,7 @@
       </p:sp>
       <p:sp>
         <p:nvSpPr>
-          <p:cNvPr id="9016" name="TextBox 9015"/>
+          <p:cNvPr id="9017" name="TextBox 9016"/>
           <p:cNvSpPr txBox="1"/>
           <p:nvPr/>
         </p:nvSpPr>
@@ -12884,7 +13028,7 @@
       </p:sp>
       <p:sp>
         <p:nvSpPr>
-          <p:cNvPr id="9017" name="TextBox 9016"/>
+          <p:cNvPr id="9018" name="TextBox 9017"/>
           <p:cNvSpPr txBox="1"/>
           <p:nvPr/>
         </p:nvSpPr>
@@ -13141,16 +13285,40 @@
           </a:p>
         </p:txBody>
       </p:sp>
-      <p:sp>
-        <p:nvSpPr>
-          <p:cNvPr id="9001" name="TextBox 9000"/>
+      <p:pic>
+        <p:nvPicPr>
+          <p:cNvPr id="9001" name="Picture 9000" descr="beihang-logo.png"/>
+          <p:cNvPicPr>
+            <a:picLocks noChangeAspect="1"/>
+          </p:cNvPicPr>
+          <p:nvPr/>
+        </p:nvPicPr>
+        <p:blipFill>
+          <a:blip r:embed="rId2"/>
+          <a:stretch>
+            <a:fillRect/>
+          </a:stretch>
+        </p:blipFill>
+        <p:spPr>
+          <a:xfrm>
+            <a:off x="9336024" y="91665"/>
+            <a:ext cx="2642616" cy="502469"/>
+          </a:xfrm>
+          <a:prstGeom prst="rect">
+            <a:avLst/>
+          </a:prstGeom>
+        </p:spPr>
+      </p:pic>
+      <p:sp>
+        <p:nvSpPr>
+          <p:cNvPr id="9002" name="TextBox 9001"/>
           <p:cNvSpPr txBox="1"/>
           <p:nvPr/>
         </p:nvSpPr>
         <p:spPr>
           <a:xfrm>
             <a:off x="1014984" y="155448"/>
-            <a:ext cx="10424160" cy="621792"/>
+            <a:ext cx="8001000" cy="621792"/>
           </a:xfrm>
           <a:prstGeom prst="rect">
             <a:avLst/>
@@ -13183,7 +13351,7 @@
       </p:sp>
       <p:sp>
         <p:nvSpPr>
-          <p:cNvPr id="9002" name="Rectangle 9001"/>
+          <p:cNvPr id="9003" name="Rectangle 9002"/>
           <p:cNvSpPr/>
           <p:nvPr/>
         </p:nvSpPr>
@@ -13227,7 +13395,7 @@
       </p:sp>
       <p:sp>
         <p:nvSpPr>
-          <p:cNvPr id="9003" name="TextBox 9002"/>
+          <p:cNvPr id="9004" name="TextBox 9003"/>
           <p:cNvSpPr txBox="1"/>
           <p:nvPr/>
         </p:nvSpPr>
@@ -13263,14 +13431,14 @@
       </p:sp>
       <p:pic>
         <p:nvPicPr>
-          <p:cNvPr id="9004" name="Picture 9003" descr="fig6-29a-layer0-timeseries.png"/>
+          <p:cNvPr id="9005" name="Picture 9004" descr="fig6-29a-layer0-timeseries.png"/>
           <p:cNvPicPr>
             <a:picLocks noChangeAspect="1"/>
           </p:cNvPicPr>
           <p:nvPr/>
         </p:nvPicPr>
         <p:blipFill>
-          <a:blip r:embed="rId2"/>
+          <a:blip r:embed="rId3"/>
           <a:stretch>
             <a:fillRect/>
           </a:stretch>
@@ -13287,7 +13455,7 @@
       </p:pic>
       <p:sp>
         <p:nvSpPr>
-          <p:cNvPr id="9005" name="TextBox 9004"/>
+          <p:cNvPr id="9006" name="TextBox 9005"/>
           <p:cNvSpPr txBox="1"/>
           <p:nvPr/>
         </p:nvSpPr>
@@ -13367,7 +13535,7 @@
       </p:sp>
       <p:sp>
         <p:nvSpPr>
-          <p:cNvPr id="9006" name="TextBox 9005"/>
+          <p:cNvPr id="9007" name="TextBox 9006"/>
           <p:cNvSpPr txBox="1"/>
           <p:nvPr/>
         </p:nvSpPr>
@@ -13403,7 +13571,7 @@
       </p:sp>
       <p:sp>
         <p:nvSpPr>
-          <p:cNvPr id="9007" name="TextBox 9006"/>
+          <p:cNvPr id="9008" name="TextBox 9007"/>
           <p:cNvSpPr txBox="1"/>
           <p:nvPr/>
         </p:nvSpPr>
@@ -13660,16 +13828,40 @@
           </a:p>
         </p:txBody>
       </p:sp>
-      <p:sp>
-        <p:nvSpPr>
-          <p:cNvPr id="9001" name="TextBox 9000"/>
+      <p:pic>
+        <p:nvPicPr>
+          <p:cNvPr id="9001" name="Picture 9000" descr="beihang-logo.png"/>
+          <p:cNvPicPr>
+            <a:picLocks noChangeAspect="1"/>
+          </p:cNvPicPr>
+          <p:nvPr/>
+        </p:nvPicPr>
+        <p:blipFill>
+          <a:blip r:embed="rId2"/>
+          <a:stretch>
+            <a:fillRect/>
+          </a:stretch>
+        </p:blipFill>
+        <p:spPr>
+          <a:xfrm>
+            <a:off x="9336024" y="91665"/>
+            <a:ext cx="2642616" cy="502469"/>
+          </a:xfrm>
+          <a:prstGeom prst="rect">
+            <a:avLst/>
+          </a:prstGeom>
+        </p:spPr>
+      </p:pic>
+      <p:sp>
+        <p:nvSpPr>
+          <p:cNvPr id="9002" name="TextBox 9001"/>
           <p:cNvSpPr txBox="1"/>
           <p:nvPr/>
         </p:nvSpPr>
         <p:spPr>
           <a:xfrm>
             <a:off x="1014984" y="155448"/>
-            <a:ext cx="10424160" cy="621792"/>
+            <a:ext cx="8001000" cy="621792"/>
           </a:xfrm>
           <a:prstGeom prst="rect">
             <a:avLst/>
@@ -13702,7 +13894,7 @@
       </p:sp>
       <p:sp>
         <p:nvSpPr>
-          <p:cNvPr id="9002" name="Rectangle 9001"/>
+          <p:cNvPr id="9003" name="Rectangle 9002"/>
           <p:cNvSpPr/>
           <p:nvPr/>
         </p:nvSpPr>
@@ -13746,7 +13938,7 @@
       </p:sp>
       <p:sp>
         <p:nvSpPr>
-          <p:cNvPr id="9003" name="TextBox 9002"/>
+          <p:cNvPr id="9004" name="TextBox 9003"/>
           <p:cNvSpPr txBox="1"/>
           <p:nvPr/>
         </p:nvSpPr>
@@ -13782,14 +13974,14 @@
       </p:sp>
       <p:pic>
         <p:nvPicPr>
-          <p:cNvPr id="9004" name="Picture 9003" descr="fig6-29b-layer3-timeseries.png"/>
+          <p:cNvPr id="9005" name="Picture 9004" descr="fig6-29b-layer3-timeseries.png"/>
           <p:cNvPicPr>
             <a:picLocks noChangeAspect="1"/>
           </p:cNvPicPr>
           <p:nvPr/>
         </p:nvPicPr>
         <p:blipFill>
-          <a:blip r:embed="rId2"/>
+          <a:blip r:embed="rId3"/>
           <a:stretch>
             <a:fillRect/>
           </a:stretch>
@@ -13806,7 +13998,7 @@
       </p:pic>
       <p:sp>
         <p:nvSpPr>
-          <p:cNvPr id="9005" name="TextBox 9004"/>
+          <p:cNvPr id="9006" name="TextBox 9005"/>
           <p:cNvSpPr txBox="1"/>
           <p:nvPr/>
         </p:nvSpPr>
@@ -13886,7 +14078,7 @@
       </p:sp>
       <p:sp>
         <p:nvSpPr>
-          <p:cNvPr id="9006" name="TextBox 9005"/>
+          <p:cNvPr id="9007" name="TextBox 9006"/>
           <p:cNvSpPr txBox="1"/>
           <p:nvPr/>
         </p:nvSpPr>
@@ -13922,7 +14114,7 @@
       </p:sp>
       <p:sp>
         <p:nvSpPr>
-          <p:cNvPr id="9007" name="TextBox 9006"/>
+          <p:cNvPr id="9008" name="TextBox 9007"/>
           <p:cNvSpPr txBox="1"/>
           <p:nvPr/>
         </p:nvSpPr>
@@ -14179,16 +14371,40 @@
           </a:p>
         </p:txBody>
       </p:sp>
-      <p:sp>
-        <p:nvSpPr>
-          <p:cNvPr id="9001" name="TextBox 9000"/>
+      <p:pic>
+        <p:nvPicPr>
+          <p:cNvPr id="9001" name="Picture 9000" descr="beihang-logo.png"/>
+          <p:cNvPicPr>
+            <a:picLocks noChangeAspect="1"/>
+          </p:cNvPicPr>
+          <p:nvPr/>
+        </p:nvPicPr>
+        <p:blipFill>
+          <a:blip r:embed="rId2"/>
+          <a:stretch>
+            <a:fillRect/>
+          </a:stretch>
+        </p:blipFill>
+        <p:spPr>
+          <a:xfrm>
+            <a:off x="9336024" y="91665"/>
+            <a:ext cx="2642616" cy="502469"/>
+          </a:xfrm>
+          <a:prstGeom prst="rect">
+            <a:avLst/>
+          </a:prstGeom>
+        </p:spPr>
+      </p:pic>
+      <p:sp>
+        <p:nvSpPr>
+          <p:cNvPr id="9002" name="TextBox 9001"/>
           <p:cNvSpPr txBox="1"/>
           <p:nvPr/>
         </p:nvSpPr>
         <p:spPr>
           <a:xfrm>
             <a:off x="1014984" y="155448"/>
-            <a:ext cx="10424160" cy="621792"/>
+            <a:ext cx="8001000" cy="621792"/>
           </a:xfrm>
           <a:prstGeom prst="rect">
             <a:avLst/>
@@ -14221,7 +14437,7 @@
       </p:sp>
       <p:sp>
         <p:nvSpPr>
-          <p:cNvPr id="9002" name="Rectangle 9001"/>
+          <p:cNvPr id="9003" name="Rectangle 9002"/>
           <p:cNvSpPr/>
           <p:nvPr/>
         </p:nvSpPr>
@@ -14265,7 +14481,7 @@
       </p:sp>
       <p:sp>
         <p:nvSpPr>
-          <p:cNvPr id="9003" name="TextBox 9002"/>
+          <p:cNvPr id="9004" name="TextBox 9003"/>
           <p:cNvSpPr txBox="1"/>
           <p:nvPr/>
         </p:nvSpPr>
@@ -14301,14 +14517,14 @@
       </p:sp>
       <p:pic>
         <p:nvPicPr>
-          <p:cNvPr id="9004" name="Picture 9003" descr="fig6-3-throughput-5group.png"/>
+          <p:cNvPr id="9005" name="Picture 9004" descr="fig6-3-throughput-5group.png"/>
           <p:cNvPicPr>
             <a:picLocks noChangeAspect="1"/>
           </p:cNvPicPr>
           <p:nvPr/>
         </p:nvPicPr>
         <p:blipFill>
-          <a:blip r:embed="rId2"/>
+          <a:blip r:embed="rId3"/>
           <a:stretch>
             <a:fillRect/>
           </a:stretch>
@@ -14325,7 +14541,7 @@
       </p:pic>
       <p:sp>
         <p:nvSpPr>
-          <p:cNvPr id="9005" name="TextBox 9004"/>
+          <p:cNvPr id="9006" name="TextBox 9005"/>
           <p:cNvSpPr txBox="1"/>
           <p:nvPr/>
         </p:nvSpPr>
@@ -14405,7 +14621,7 @@
       </p:sp>
       <p:graphicFrame>
         <p:nvGraphicFramePr>
-          <p:cNvPr id="9006" name="Table 9005"/>
+          <p:cNvPr id="9007" name="Table 9006"/>
           <p:cNvGraphicFramePr>
             <a:graphicFrameLocks noGrp="1"/>
           </p:cNvGraphicFramePr>
@@ -14873,7 +15089,7 @@
       </p:graphicFrame>
       <p:sp>
         <p:nvSpPr>
-          <p:cNvPr id="9007" name="TextBox 9006"/>
+          <p:cNvPr id="9008" name="TextBox 9007"/>
           <p:cNvSpPr txBox="1"/>
           <p:nvPr/>
         </p:nvSpPr>
@@ -14909,7 +15125,7 @@
       </p:sp>
       <p:sp>
         <p:nvSpPr>
-          <p:cNvPr id="9008" name="TextBox 9007"/>
+          <p:cNvPr id="9009" name="TextBox 9008"/>
           <p:cNvSpPr txBox="1"/>
           <p:nvPr/>
         </p:nvSpPr>
@@ -15166,16 +15382,40 @@
           </a:p>
         </p:txBody>
       </p:sp>
-      <p:sp>
-        <p:nvSpPr>
-          <p:cNvPr id="9001" name="TextBox 9000"/>
+      <p:pic>
+        <p:nvPicPr>
+          <p:cNvPr id="9001" name="Picture 9000" descr="beihang-logo.png"/>
+          <p:cNvPicPr>
+            <a:picLocks noChangeAspect="1"/>
+          </p:cNvPicPr>
+          <p:nvPr/>
+        </p:nvPicPr>
+        <p:blipFill>
+          <a:blip r:embed="rId2"/>
+          <a:stretch>
+            <a:fillRect/>
+          </a:stretch>
+        </p:blipFill>
+        <p:spPr>
+          <a:xfrm>
+            <a:off x="9336024" y="91665"/>
+            <a:ext cx="2642616" cy="502469"/>
+          </a:xfrm>
+          <a:prstGeom prst="rect">
+            <a:avLst/>
+          </a:prstGeom>
+        </p:spPr>
+      </p:pic>
+      <p:sp>
+        <p:nvSpPr>
+          <p:cNvPr id="9002" name="TextBox 9001"/>
           <p:cNvSpPr txBox="1"/>
           <p:nvPr/>
         </p:nvSpPr>
         <p:spPr>
           <a:xfrm>
             <a:off x="1014984" y="155448"/>
-            <a:ext cx="10424160" cy="621792"/>
+            <a:ext cx="8001000" cy="621792"/>
           </a:xfrm>
           <a:prstGeom prst="rect">
             <a:avLst/>
@@ -15208,7 +15448,7 @@
       </p:sp>
       <p:sp>
         <p:nvSpPr>
-          <p:cNvPr id="9002" name="Rectangle 9001"/>
+          <p:cNvPr id="9003" name="Rectangle 9002"/>
           <p:cNvSpPr/>
           <p:nvPr/>
         </p:nvSpPr>
@@ -15252,7 +15492,7 @@
       </p:sp>
       <p:sp>
         <p:nvSpPr>
-          <p:cNvPr id="9003" name="TextBox 9002"/>
+          <p:cNvPr id="9004" name="TextBox 9003"/>
           <p:cNvSpPr txBox="1"/>
           <p:nvPr/>
         </p:nvSpPr>
@@ -15288,14 +15528,14 @@
       </p:sp>
       <p:pic>
         <p:nvPicPr>
-          <p:cNvPr id="9004" name="Picture 9003" descr="fig6-2-effective-throughput.png"/>
+          <p:cNvPr id="9005" name="Picture 9004" descr="fig6-2-effective-throughput.png"/>
           <p:cNvPicPr>
             <a:picLocks noChangeAspect="1"/>
           </p:cNvPicPr>
           <p:nvPr/>
         </p:nvPicPr>
         <p:blipFill>
-          <a:blip r:embed="rId2"/>
+          <a:blip r:embed="rId3"/>
           <a:stretch>
             <a:fillRect/>
           </a:stretch>
@@ -15312,7 +15552,7 @@
       </p:pic>
       <p:sp>
         <p:nvSpPr>
-          <p:cNvPr id="9005" name="TextBox 9004"/>
+          <p:cNvPr id="9006" name="TextBox 9005"/>
           <p:cNvSpPr txBox="1"/>
           <p:nvPr/>
         </p:nvSpPr>
@@ -15392,7 +15632,7 @@
       </p:sp>
       <p:sp>
         <p:nvSpPr>
-          <p:cNvPr id="9006" name="TextBox 9005"/>
+          <p:cNvPr id="9007" name="TextBox 9006"/>
           <p:cNvSpPr txBox="1"/>
           <p:nvPr/>
         </p:nvSpPr>
@@ -15428,7 +15668,7 @@
       </p:sp>
       <p:sp>
         <p:nvSpPr>
-          <p:cNvPr id="9007" name="TextBox 9006"/>
+          <p:cNvPr id="9008" name="TextBox 9007"/>
           <p:cNvSpPr txBox="1"/>
           <p:nvPr/>
         </p:nvSpPr>
@@ -15685,16 +15925,40 @@
           </a:p>
         </p:txBody>
       </p:sp>
-      <p:sp>
-        <p:nvSpPr>
-          <p:cNvPr id="9001" name="TextBox 9000"/>
+      <p:pic>
+        <p:nvPicPr>
+          <p:cNvPr id="9001" name="Picture 9000" descr="beihang-logo.png"/>
+          <p:cNvPicPr>
+            <a:picLocks noChangeAspect="1"/>
+          </p:cNvPicPr>
+          <p:nvPr/>
+        </p:nvPicPr>
+        <p:blipFill>
+          <a:blip r:embed="rId2"/>
+          <a:stretch>
+            <a:fillRect/>
+          </a:stretch>
+        </p:blipFill>
+        <p:spPr>
+          <a:xfrm>
+            <a:off x="9336024" y="91665"/>
+            <a:ext cx="2642616" cy="502469"/>
+          </a:xfrm>
+          <a:prstGeom prst="rect">
+            <a:avLst/>
+          </a:prstGeom>
+        </p:spPr>
+      </p:pic>
+      <p:sp>
+        <p:nvSpPr>
+          <p:cNvPr id="9002" name="TextBox 9001"/>
           <p:cNvSpPr txBox="1"/>
           <p:nvPr/>
         </p:nvSpPr>
         <p:spPr>
           <a:xfrm>
             <a:off x="1014984" y="155448"/>
-            <a:ext cx="10424160" cy="621792"/>
+            <a:ext cx="8001000" cy="621792"/>
           </a:xfrm>
           <a:prstGeom prst="rect">
             <a:avLst/>
@@ -15713,7 +15977,7 @@
               </a:lnSpc>
             </a:pPr>
             <a:r>
-              <a:rPr sz="3000" b="1">
+              <a:rPr sz="2400" b="1">
                 <a:solidFill>
                   <a:srgbClr val="113E6A"/>
                 </a:solidFill>
@@ -15727,7 +15991,7 @@
       </p:sp>
       <p:sp>
         <p:nvSpPr>
-          <p:cNvPr id="9002" name="Rectangle 9001"/>
+          <p:cNvPr id="9003" name="Rectangle 9002"/>
           <p:cNvSpPr/>
           <p:nvPr/>
         </p:nvSpPr>
@@ -15771,7 +16035,7 @@
       </p:sp>
       <p:sp>
         <p:nvSpPr>
-          <p:cNvPr id="9003" name="TextBox 9002"/>
+          <p:cNvPr id="9004" name="TextBox 9003"/>
           <p:cNvSpPr txBox="1"/>
           <p:nvPr/>
         </p:nvSpPr>
@@ -15807,7 +16071,7 @@
       </p:sp>
       <p:sp>
         <p:nvSpPr>
-          <p:cNvPr id="9004" name="Rounded Rectangle 9003"/>
+          <p:cNvPr id="9005" name="Rounded Rectangle 9004"/>
           <p:cNvSpPr/>
           <p:nvPr/>
         </p:nvSpPr>
@@ -15853,7 +16117,7 @@
       </p:sp>
       <p:sp>
         <p:nvSpPr>
-          <p:cNvPr id="9005" name="Oval 9004"/>
+          <p:cNvPr id="9006" name="Oval 9005"/>
           <p:cNvSpPr/>
           <p:nvPr/>
         </p:nvSpPr>
@@ -15907,7 +16171,7 @@
       </p:sp>
       <p:sp>
         <p:nvSpPr>
-          <p:cNvPr id="9006" name="TextBox 9005"/>
+          <p:cNvPr id="9007" name="TextBox 9006"/>
           <p:cNvSpPr txBox="1"/>
           <p:nvPr/>
         </p:nvSpPr>
@@ -15963,7 +16227,7 @@
       </p:sp>
       <p:sp>
         <p:nvSpPr>
-          <p:cNvPr id="9007" name="Rounded Rectangle 9006"/>
+          <p:cNvPr id="9008" name="Rounded Rectangle 9007"/>
           <p:cNvSpPr/>
           <p:nvPr/>
         </p:nvSpPr>
@@ -16009,7 +16273,7 @@
       </p:sp>
       <p:sp>
         <p:nvSpPr>
-          <p:cNvPr id="9008" name="Oval 9007"/>
+          <p:cNvPr id="9009" name="Oval 9008"/>
           <p:cNvSpPr/>
           <p:nvPr/>
         </p:nvSpPr>
@@ -16063,7 +16327,7 @@
       </p:sp>
       <p:sp>
         <p:nvSpPr>
-          <p:cNvPr id="9009" name="TextBox 9008"/>
+          <p:cNvPr id="9010" name="TextBox 9009"/>
           <p:cNvSpPr txBox="1"/>
           <p:nvPr/>
         </p:nvSpPr>
@@ -16119,7 +16383,7 @@
       </p:sp>
       <p:sp>
         <p:nvSpPr>
-          <p:cNvPr id="9010" name="Rounded Rectangle 9009"/>
+          <p:cNvPr id="9011" name="Rounded Rectangle 9010"/>
           <p:cNvSpPr/>
           <p:nvPr/>
         </p:nvSpPr>
@@ -16165,7 +16429,7 @@
       </p:sp>
       <p:sp>
         <p:nvSpPr>
-          <p:cNvPr id="9011" name="Oval 9010"/>
+          <p:cNvPr id="9012" name="Oval 9011"/>
           <p:cNvSpPr/>
           <p:nvPr/>
         </p:nvSpPr>
@@ -16219,7 +16483,7 @@
       </p:sp>
       <p:sp>
         <p:nvSpPr>
-          <p:cNvPr id="9012" name="TextBox 9011"/>
+          <p:cNvPr id="9013" name="TextBox 9012"/>
           <p:cNvSpPr txBox="1"/>
           <p:nvPr/>
         </p:nvSpPr>
@@ -16275,7 +16539,7 @@
       </p:sp>
       <p:sp>
         <p:nvSpPr>
-          <p:cNvPr id="9013" name="Rounded Rectangle 9012"/>
+          <p:cNvPr id="9014" name="Rounded Rectangle 9013"/>
           <p:cNvSpPr/>
           <p:nvPr/>
         </p:nvSpPr>
@@ -16321,7 +16585,7 @@
       </p:sp>
       <p:sp>
         <p:nvSpPr>
-          <p:cNvPr id="9014" name="Rectangle 9013"/>
+          <p:cNvPr id="9015" name="Rectangle 9014"/>
           <p:cNvSpPr/>
           <p:nvPr/>
         </p:nvSpPr>
@@ -16365,7 +16629,7 @@
       </p:sp>
       <p:sp>
         <p:nvSpPr>
-          <p:cNvPr id="9015" name="TextBox 9014"/>
+          <p:cNvPr id="9016" name="TextBox 9015"/>
           <p:cNvSpPr txBox="1"/>
           <p:nvPr/>
         </p:nvSpPr>
@@ -16405,7 +16669,7 @@
       </p:sp>
       <p:sp>
         <p:nvSpPr>
-          <p:cNvPr id="9016" name="TextBox 9015"/>
+          <p:cNvPr id="9017" name="TextBox 9016"/>
           <p:cNvSpPr txBox="1"/>
           <p:nvPr/>
         </p:nvSpPr>
@@ -16662,16 +16926,40 @@
           </a:p>
         </p:txBody>
       </p:sp>
-      <p:sp>
-        <p:nvSpPr>
-          <p:cNvPr id="9001" name="TextBox 9000"/>
+      <p:pic>
+        <p:nvPicPr>
+          <p:cNvPr id="9001" name="Picture 9000" descr="beihang-logo.png"/>
+          <p:cNvPicPr>
+            <a:picLocks noChangeAspect="1"/>
+          </p:cNvPicPr>
+          <p:nvPr/>
+        </p:nvPicPr>
+        <p:blipFill>
+          <a:blip r:embed="rId2"/>
+          <a:stretch>
+            <a:fillRect/>
+          </a:stretch>
+        </p:blipFill>
+        <p:spPr>
+          <a:xfrm>
+            <a:off x="9336024" y="91665"/>
+            <a:ext cx="2642616" cy="502469"/>
+          </a:xfrm>
+          <a:prstGeom prst="rect">
+            <a:avLst/>
+          </a:prstGeom>
+        </p:spPr>
+      </p:pic>
+      <p:sp>
+        <p:nvSpPr>
+          <p:cNvPr id="9002" name="TextBox 9001"/>
           <p:cNvSpPr txBox="1"/>
           <p:nvPr/>
         </p:nvSpPr>
         <p:spPr>
           <a:xfrm>
             <a:off x="1014984" y="155448"/>
-            <a:ext cx="10424160" cy="621792"/>
+            <a:ext cx="8001000" cy="621792"/>
           </a:xfrm>
           <a:prstGeom prst="rect">
             <a:avLst/>
@@ -16704,7 +16992,7 @@
       </p:sp>
       <p:sp>
         <p:nvSpPr>
-          <p:cNvPr id="9002" name="Rectangle 9001"/>
+          <p:cNvPr id="9003" name="Rectangle 9002"/>
           <p:cNvSpPr/>
           <p:nvPr/>
         </p:nvSpPr>
@@ -16748,7 +17036,7 @@
       </p:sp>
       <p:sp>
         <p:nvSpPr>
-          <p:cNvPr id="9003" name="TextBox 9002"/>
+          <p:cNvPr id="9004" name="TextBox 9003"/>
           <p:cNvSpPr txBox="1"/>
           <p:nvPr/>
         </p:nvSpPr>
@@ -16784,14 +17072,14 @@
       </p:sp>
       <p:pic>
         <p:nvPicPr>
-          <p:cNvPr id="9004" name="Picture 9003" descr="fig6-4-latency-p99-all.png"/>
+          <p:cNvPr id="9005" name="Picture 9004" descr="fig6-4-latency-p99-all.png"/>
           <p:cNvPicPr>
             <a:picLocks noChangeAspect="1"/>
           </p:cNvPicPr>
           <p:nvPr/>
         </p:nvPicPr>
         <p:blipFill>
-          <a:blip r:embed="rId2"/>
+          <a:blip r:embed="rId3"/>
           <a:stretch>
             <a:fillRect/>
           </a:stretch>
@@ -16808,7 +17096,7 @@
       </p:pic>
       <p:sp>
         <p:nvSpPr>
-          <p:cNvPr id="9005" name="TextBox 9004"/>
+          <p:cNvPr id="9006" name="TextBox 9005"/>
           <p:cNvSpPr txBox="1"/>
           <p:nvPr/>
         </p:nvSpPr>
@@ -16888,7 +17176,7 @@
       </p:sp>
       <p:sp>
         <p:nvSpPr>
-          <p:cNvPr id="9006" name="TextBox 9005"/>
+          <p:cNvPr id="9007" name="TextBox 9006"/>
           <p:cNvSpPr txBox="1"/>
           <p:nvPr/>
         </p:nvSpPr>
@@ -16924,7 +17212,7 @@
       </p:sp>
       <p:sp>
         <p:nvSpPr>
-          <p:cNvPr id="9007" name="TextBox 9006"/>
+          <p:cNvPr id="9008" name="TextBox 9007"/>
           <p:cNvSpPr txBox="1"/>
           <p:nvPr/>
         </p:nvSpPr>
@@ -17181,16 +17469,40 @@
           </a:p>
         </p:txBody>
       </p:sp>
-      <p:sp>
-        <p:nvSpPr>
-          <p:cNvPr id="9001" name="TextBox 9000"/>
+      <p:pic>
+        <p:nvPicPr>
+          <p:cNvPr id="9001" name="Picture 9000" descr="beihang-logo.png"/>
+          <p:cNvPicPr>
+            <a:picLocks noChangeAspect="1"/>
+          </p:cNvPicPr>
+          <p:nvPr/>
+        </p:nvPicPr>
+        <p:blipFill>
+          <a:blip r:embed="rId2"/>
+          <a:stretch>
+            <a:fillRect/>
+          </a:stretch>
+        </p:blipFill>
+        <p:spPr>
+          <a:xfrm>
+            <a:off x="9336024" y="91665"/>
+            <a:ext cx="2642616" cy="502469"/>
+          </a:xfrm>
+          <a:prstGeom prst="rect">
+            <a:avLst/>
+          </a:prstGeom>
+        </p:spPr>
+      </p:pic>
+      <p:sp>
+        <p:nvSpPr>
+          <p:cNvPr id="9002" name="TextBox 9001"/>
           <p:cNvSpPr txBox="1"/>
           <p:nvPr/>
         </p:nvSpPr>
         <p:spPr>
           <a:xfrm>
             <a:off x="1014984" y="155448"/>
-            <a:ext cx="10424160" cy="621792"/>
+            <a:ext cx="8001000" cy="621792"/>
           </a:xfrm>
           <a:prstGeom prst="rect">
             <a:avLst/>
@@ -17223,7 +17535,7 @@
       </p:sp>
       <p:sp>
         <p:nvSpPr>
-          <p:cNvPr id="9002" name="Rectangle 9001"/>
+          <p:cNvPr id="9003" name="Rectangle 9002"/>
           <p:cNvSpPr/>
           <p:nvPr/>
         </p:nvSpPr>
@@ -17267,7 +17579,7 @@
       </p:sp>
       <p:sp>
         <p:nvSpPr>
-          <p:cNvPr id="9003" name="TextBox 9002"/>
+          <p:cNvPr id="9004" name="TextBox 9003"/>
           <p:cNvSpPr txBox="1"/>
           <p:nvPr/>
         </p:nvSpPr>
@@ -17303,7 +17615,7 @@
       </p:sp>
       <p:graphicFrame>
         <p:nvGraphicFramePr>
-          <p:cNvPr id="9004" name="Table 9003"/>
+          <p:cNvPr id="9005" name="Table 9004"/>
           <p:cNvGraphicFramePr>
             <a:graphicFrameLocks noGrp="1"/>
           </p:cNvGraphicFramePr>
@@ -17626,14 +17938,14 @@
       </p:graphicFrame>
       <p:pic>
         <p:nvPicPr>
-          <p:cNvPr id="9005" name="Picture 9004" descr="fig6-16-throughput-s3-w3-inst3.png"/>
+          <p:cNvPr id="9006" name="Picture 9005" descr="fig6-16-throughput-s3-w3-inst3.png"/>
           <p:cNvPicPr>
             <a:picLocks noChangeAspect="1"/>
           </p:cNvPicPr>
           <p:nvPr/>
         </p:nvPicPr>
         <p:blipFill>
-          <a:blip r:embed="rId2"/>
+          <a:blip r:embed="rId3"/>
           <a:stretch>
             <a:fillRect/>
           </a:stretch>
@@ -17650,7 +17962,7 @@
       </p:pic>
       <p:sp>
         <p:nvSpPr>
-          <p:cNvPr id="9006" name="TextBox 9005"/>
+          <p:cNvPr id="9007" name="TextBox 9006"/>
           <p:cNvSpPr txBox="1"/>
           <p:nvPr/>
         </p:nvSpPr>
@@ -17686,7 +17998,7 @@
       </p:sp>
       <p:sp>
         <p:nvSpPr>
-          <p:cNvPr id="9007" name="TextBox 9006"/>
+          <p:cNvPr id="9008" name="TextBox 9007"/>
           <p:cNvSpPr txBox="1"/>
           <p:nvPr/>
         </p:nvSpPr>
@@ -17766,7 +18078,7 @@
       </p:sp>
       <p:sp>
         <p:nvSpPr>
-          <p:cNvPr id="9008" name="TextBox 9007"/>
+          <p:cNvPr id="9009" name="TextBox 9008"/>
           <p:cNvSpPr txBox="1"/>
           <p:nvPr/>
         </p:nvSpPr>
@@ -17802,7 +18114,7 @@
       </p:sp>
       <p:sp>
         <p:nvSpPr>
-          <p:cNvPr id="9009" name="TextBox 9008"/>
+          <p:cNvPr id="9010" name="TextBox 9009"/>
           <p:cNvSpPr txBox="1"/>
           <p:nvPr/>
         </p:nvSpPr>
@@ -18059,16 +18371,40 @@
           </a:p>
         </p:txBody>
       </p:sp>
-      <p:sp>
-        <p:nvSpPr>
-          <p:cNvPr id="9001" name="TextBox 9000"/>
+      <p:pic>
+        <p:nvPicPr>
+          <p:cNvPr id="9001" name="Picture 9000" descr="beihang-logo.png"/>
+          <p:cNvPicPr>
+            <a:picLocks noChangeAspect="1"/>
+          </p:cNvPicPr>
+          <p:nvPr/>
+        </p:nvPicPr>
+        <p:blipFill>
+          <a:blip r:embed="rId2"/>
+          <a:stretch>
+            <a:fillRect/>
+          </a:stretch>
+        </p:blipFill>
+        <p:spPr>
+          <a:xfrm>
+            <a:off x="9336024" y="91665"/>
+            <a:ext cx="2642616" cy="502469"/>
+          </a:xfrm>
+          <a:prstGeom prst="rect">
+            <a:avLst/>
+          </a:prstGeom>
+        </p:spPr>
+      </p:pic>
+      <p:sp>
+        <p:nvSpPr>
+          <p:cNvPr id="9002" name="TextBox 9001"/>
           <p:cNvSpPr txBox="1"/>
           <p:nvPr/>
         </p:nvSpPr>
         <p:spPr>
           <a:xfrm>
             <a:off x="1014984" y="155448"/>
-            <a:ext cx="10424160" cy="621792"/>
+            <a:ext cx="8001000" cy="621792"/>
           </a:xfrm>
           <a:prstGeom prst="rect">
             <a:avLst/>
@@ -18101,7 +18437,7 @@
       </p:sp>
       <p:sp>
         <p:nvSpPr>
-          <p:cNvPr id="9002" name="Rectangle 9001"/>
+          <p:cNvPr id="9003" name="Rectangle 9002"/>
           <p:cNvSpPr/>
           <p:nvPr/>
         </p:nvSpPr>
@@ -18145,7 +18481,7 @@
       </p:sp>
       <p:sp>
         <p:nvSpPr>
-          <p:cNvPr id="9003" name="TextBox 9002"/>
+          <p:cNvPr id="9004" name="TextBox 9003"/>
           <p:cNvSpPr txBox="1"/>
           <p:nvPr/>
         </p:nvSpPr>
@@ -18181,7 +18517,7 @@
       </p:sp>
       <p:graphicFrame>
         <p:nvGraphicFramePr>
-          <p:cNvPr id="9004" name="Table 9003"/>
+          <p:cNvPr id="9005" name="Table 9004"/>
           <p:cNvGraphicFramePr>
             <a:graphicFrameLocks noGrp="1"/>
           </p:cNvGraphicFramePr>
@@ -18578,7 +18914,7 @@
       </p:graphicFrame>
       <p:sp>
         <p:nvSpPr>
-          <p:cNvPr id="9005" name="TextBox 9004"/>
+          <p:cNvPr id="9006" name="TextBox 9005"/>
           <p:cNvSpPr txBox="1"/>
           <p:nvPr/>
         </p:nvSpPr>
@@ -18658,7 +18994,7 @@
       </p:sp>
       <p:sp>
         <p:nvSpPr>
-          <p:cNvPr id="9006" name="TextBox 9005"/>
+          <p:cNvPr id="9007" name="TextBox 9006"/>
           <p:cNvSpPr txBox="1"/>
           <p:nvPr/>
         </p:nvSpPr>
@@ -18694,7 +19030,7 @@
       </p:sp>
       <p:sp>
         <p:nvSpPr>
-          <p:cNvPr id="9007" name="TextBox 9006"/>
+          <p:cNvPr id="9008" name="TextBox 9007"/>
           <p:cNvSpPr txBox="1"/>
           <p:nvPr/>
         </p:nvSpPr>
@@ -18951,16 +19287,40 @@
           </a:p>
         </p:txBody>
       </p:sp>
-      <p:sp>
-        <p:nvSpPr>
-          <p:cNvPr id="9001" name="TextBox 9000"/>
+      <p:pic>
+        <p:nvPicPr>
+          <p:cNvPr id="9001" name="Picture 9000" descr="beihang-logo.png"/>
+          <p:cNvPicPr>
+            <a:picLocks noChangeAspect="1"/>
+          </p:cNvPicPr>
+          <p:nvPr/>
+        </p:nvPicPr>
+        <p:blipFill>
+          <a:blip r:embed="rId2"/>
+          <a:stretch>
+            <a:fillRect/>
+          </a:stretch>
+        </p:blipFill>
+        <p:spPr>
+          <a:xfrm>
+            <a:off x="9336024" y="91665"/>
+            <a:ext cx="2642616" cy="502469"/>
+          </a:xfrm>
+          <a:prstGeom prst="rect">
+            <a:avLst/>
+          </a:prstGeom>
+        </p:spPr>
+      </p:pic>
+      <p:sp>
+        <p:nvSpPr>
+          <p:cNvPr id="9002" name="TextBox 9001"/>
           <p:cNvSpPr txBox="1"/>
           <p:nvPr/>
         </p:nvSpPr>
         <p:spPr>
           <a:xfrm>
             <a:off x="1014984" y="155448"/>
-            <a:ext cx="10424160" cy="621792"/>
+            <a:ext cx="8001000" cy="621792"/>
           </a:xfrm>
           <a:prstGeom prst="rect">
             <a:avLst/>
@@ -18993,7 +19353,7 @@
       </p:sp>
       <p:sp>
         <p:nvSpPr>
-          <p:cNvPr id="9002" name="Rectangle 9001"/>
+          <p:cNvPr id="9003" name="Rectangle 9002"/>
           <p:cNvSpPr/>
           <p:nvPr/>
         </p:nvSpPr>
@@ -19037,7 +19397,7 @@
       </p:sp>
       <p:sp>
         <p:nvSpPr>
-          <p:cNvPr id="9003" name="TextBox 9002"/>
+          <p:cNvPr id="9004" name="TextBox 9003"/>
           <p:cNvSpPr txBox="1"/>
           <p:nvPr/>
         </p:nvSpPr>
@@ -19073,7 +19433,7 @@
       </p:sp>
       <p:graphicFrame>
         <p:nvGraphicFramePr>
-          <p:cNvPr id="9004" name="Table 9003"/>
+          <p:cNvPr id="9005" name="Table 9004"/>
           <p:cNvGraphicFramePr>
             <a:graphicFrameLocks noGrp="1"/>
           </p:cNvGraphicFramePr>
@@ -19470,7 +19830,7 @@
       </p:graphicFrame>
       <p:sp>
         <p:nvSpPr>
-          <p:cNvPr id="9005" name="TextBox 9004"/>
+          <p:cNvPr id="9006" name="TextBox 9005"/>
           <p:cNvSpPr txBox="1"/>
           <p:nvPr/>
         </p:nvSpPr>
@@ -19550,7 +19910,7 @@
       </p:sp>
       <p:sp>
         <p:nvSpPr>
-          <p:cNvPr id="9006" name="TextBox 9005"/>
+          <p:cNvPr id="9007" name="TextBox 9006"/>
           <p:cNvSpPr txBox="1"/>
           <p:nvPr/>
         </p:nvSpPr>
@@ -19586,7 +19946,7 @@
       </p:sp>
       <p:sp>
         <p:nvSpPr>
-          <p:cNvPr id="9007" name="TextBox 9006"/>
+          <p:cNvPr id="9008" name="TextBox 9007"/>
           <p:cNvSpPr txBox="1"/>
           <p:nvPr/>
         </p:nvSpPr>
@@ -19843,16 +20203,40 @@
           </a:p>
         </p:txBody>
       </p:sp>
-      <p:sp>
-        <p:nvSpPr>
-          <p:cNvPr id="9001" name="TextBox 9000"/>
+      <p:pic>
+        <p:nvPicPr>
+          <p:cNvPr id="9001" name="Picture 9000" descr="beihang-logo.png"/>
+          <p:cNvPicPr>
+            <a:picLocks noChangeAspect="1"/>
+          </p:cNvPicPr>
+          <p:nvPr/>
+        </p:nvPicPr>
+        <p:blipFill>
+          <a:blip r:embed="rId2"/>
+          <a:stretch>
+            <a:fillRect/>
+          </a:stretch>
+        </p:blipFill>
+        <p:spPr>
+          <a:xfrm>
+            <a:off x="9336024" y="91665"/>
+            <a:ext cx="2642616" cy="502469"/>
+          </a:xfrm>
+          <a:prstGeom prst="rect">
+            <a:avLst/>
+          </a:prstGeom>
+        </p:spPr>
+      </p:pic>
+      <p:sp>
+        <p:nvSpPr>
+          <p:cNvPr id="9002" name="TextBox 9001"/>
           <p:cNvSpPr txBox="1"/>
           <p:nvPr/>
         </p:nvSpPr>
         <p:spPr>
           <a:xfrm>
             <a:off x="1014984" y="155448"/>
-            <a:ext cx="10424160" cy="621792"/>
+            <a:ext cx="8001000" cy="621792"/>
           </a:xfrm>
           <a:prstGeom prst="rect">
             <a:avLst/>
@@ -19885,7 +20269,7 @@
       </p:sp>
       <p:sp>
         <p:nvSpPr>
-          <p:cNvPr id="9002" name="Rectangle 9001"/>
+          <p:cNvPr id="9003" name="Rectangle 9002"/>
           <p:cNvSpPr/>
           <p:nvPr/>
         </p:nvSpPr>
@@ -19929,7 +20313,7 @@
       </p:sp>
       <p:sp>
         <p:nvSpPr>
-          <p:cNvPr id="9003" name="TextBox 9002"/>
+          <p:cNvPr id="9004" name="TextBox 9003"/>
           <p:cNvSpPr txBox="1"/>
           <p:nvPr/>
         </p:nvSpPr>
@@ -19965,7 +20349,7 @@
       </p:sp>
       <p:sp>
         <p:nvSpPr>
-          <p:cNvPr id="9004" name="Rounded Rectangle 9003"/>
+          <p:cNvPr id="9005" name="Rounded Rectangle 9004"/>
           <p:cNvSpPr/>
           <p:nvPr/>
         </p:nvSpPr>
@@ -20011,7 +20395,7 @@
       </p:sp>
       <p:sp>
         <p:nvSpPr>
-          <p:cNvPr id="9005" name="Oval 9004"/>
+          <p:cNvPr id="9006" name="Oval 9005"/>
           <p:cNvSpPr/>
           <p:nvPr/>
         </p:nvSpPr>
@@ -20065,7 +20449,7 @@
       </p:sp>
       <p:sp>
         <p:nvSpPr>
-          <p:cNvPr id="9006" name="TextBox 9005"/>
+          <p:cNvPr id="9007" name="TextBox 9006"/>
           <p:cNvSpPr txBox="1"/>
           <p:nvPr/>
         </p:nvSpPr>
@@ -20121,7 +20505,7 @@
       </p:sp>
       <p:sp>
         <p:nvSpPr>
-          <p:cNvPr id="9007" name="Rounded Rectangle 9006"/>
+          <p:cNvPr id="9008" name="Rounded Rectangle 9007"/>
           <p:cNvSpPr/>
           <p:nvPr/>
         </p:nvSpPr>
@@ -20167,7 +20551,7 @@
       </p:sp>
       <p:sp>
         <p:nvSpPr>
-          <p:cNvPr id="9008" name="Oval 9007"/>
+          <p:cNvPr id="9009" name="Oval 9008"/>
           <p:cNvSpPr/>
           <p:nvPr/>
         </p:nvSpPr>
@@ -20221,7 +20605,7 @@
       </p:sp>
       <p:sp>
         <p:nvSpPr>
-          <p:cNvPr id="9009" name="TextBox 9008"/>
+          <p:cNvPr id="9010" name="TextBox 9009"/>
           <p:cNvSpPr txBox="1"/>
           <p:nvPr/>
         </p:nvSpPr>
@@ -20277,7 +20661,7 @@
       </p:sp>
       <p:sp>
         <p:nvSpPr>
-          <p:cNvPr id="9010" name="Rounded Rectangle 9009"/>
+          <p:cNvPr id="9011" name="Rounded Rectangle 9010"/>
           <p:cNvSpPr/>
           <p:nvPr/>
         </p:nvSpPr>
@@ -20323,7 +20707,7 @@
       </p:sp>
       <p:sp>
         <p:nvSpPr>
-          <p:cNvPr id="9011" name="Oval 9010"/>
+          <p:cNvPr id="9012" name="Oval 9011"/>
           <p:cNvSpPr/>
           <p:nvPr/>
         </p:nvSpPr>
@@ -20377,7 +20761,7 @@
       </p:sp>
       <p:sp>
         <p:nvSpPr>
-          <p:cNvPr id="9012" name="TextBox 9011"/>
+          <p:cNvPr id="9013" name="TextBox 9012"/>
           <p:cNvSpPr txBox="1"/>
           <p:nvPr/>
         </p:nvSpPr>
@@ -20433,7 +20817,7 @@
       </p:sp>
       <p:sp>
         <p:nvSpPr>
-          <p:cNvPr id="9013" name="Rounded Rectangle 9012"/>
+          <p:cNvPr id="9014" name="Rounded Rectangle 9013"/>
           <p:cNvSpPr/>
           <p:nvPr/>
         </p:nvSpPr>
@@ -20479,7 +20863,7 @@
       </p:sp>
       <p:sp>
         <p:nvSpPr>
-          <p:cNvPr id="9014" name="Oval 9013"/>
+          <p:cNvPr id="9015" name="Oval 9014"/>
           <p:cNvSpPr/>
           <p:nvPr/>
         </p:nvSpPr>
@@ -20533,7 +20917,7 @@
       </p:sp>
       <p:sp>
         <p:nvSpPr>
-          <p:cNvPr id="9015" name="TextBox 9014"/>
+          <p:cNvPr id="9016" name="TextBox 9015"/>
           <p:cNvSpPr txBox="1"/>
           <p:nvPr/>
         </p:nvSpPr>
@@ -20589,7 +20973,7 @@
       </p:sp>
       <p:sp>
         <p:nvSpPr>
-          <p:cNvPr id="9016" name="Rounded Rectangle 9015"/>
+          <p:cNvPr id="9017" name="Rounded Rectangle 9016"/>
           <p:cNvSpPr/>
           <p:nvPr/>
         </p:nvSpPr>
@@ -20635,7 +21019,7 @@
       </p:sp>
       <p:sp>
         <p:nvSpPr>
-          <p:cNvPr id="9017" name="Oval 9016"/>
+          <p:cNvPr id="9018" name="Oval 9017"/>
           <p:cNvSpPr/>
           <p:nvPr/>
         </p:nvSpPr>
@@ -20689,7 +21073,7 @@
       </p:sp>
       <p:sp>
         <p:nvSpPr>
-          <p:cNvPr id="9018" name="TextBox 9017"/>
+          <p:cNvPr id="9019" name="TextBox 9018"/>
           <p:cNvSpPr txBox="1"/>
           <p:nvPr/>
         </p:nvSpPr>
@@ -20745,7 +21129,7 @@
       </p:sp>
       <p:sp>
         <p:nvSpPr>
-          <p:cNvPr id="9019" name="Rounded Rectangle 9018"/>
+          <p:cNvPr id="9020" name="Rounded Rectangle 9019"/>
           <p:cNvSpPr/>
           <p:nvPr/>
         </p:nvSpPr>
@@ -20791,7 +21175,7 @@
       </p:sp>
       <p:sp>
         <p:nvSpPr>
-          <p:cNvPr id="9020" name="Oval 9019"/>
+          <p:cNvPr id="9021" name="Oval 9020"/>
           <p:cNvSpPr/>
           <p:nvPr/>
         </p:nvSpPr>
@@ -20845,7 +21229,7 @@
       </p:sp>
       <p:sp>
         <p:nvSpPr>
-          <p:cNvPr id="9021" name="TextBox 9020"/>
+          <p:cNvPr id="9022" name="TextBox 9021"/>
           <p:cNvSpPr txBox="1"/>
           <p:nvPr/>
         </p:nvSpPr>
@@ -20901,7 +21285,7 @@
       </p:sp>
       <p:sp>
         <p:nvSpPr>
-          <p:cNvPr id="9022" name="TextBox 9021"/>
+          <p:cNvPr id="9023" name="TextBox 9022"/>
           <p:cNvSpPr txBox="1"/>
           <p:nvPr/>
         </p:nvSpPr>
@@ -21158,16 +21542,40 @@
           </a:p>
         </p:txBody>
       </p:sp>
-      <p:sp>
-        <p:nvSpPr>
-          <p:cNvPr id="9001" name="TextBox 9000"/>
+      <p:pic>
+        <p:nvPicPr>
+          <p:cNvPr id="9001" name="Picture 9000" descr="beihang-logo.png"/>
+          <p:cNvPicPr>
+            <a:picLocks noChangeAspect="1"/>
+          </p:cNvPicPr>
+          <p:nvPr/>
+        </p:nvPicPr>
+        <p:blipFill>
+          <a:blip r:embed="rId2"/>
+          <a:stretch>
+            <a:fillRect/>
+          </a:stretch>
+        </p:blipFill>
+        <p:spPr>
+          <a:xfrm>
+            <a:off x="9336024" y="91665"/>
+            <a:ext cx="2642616" cy="502469"/>
+          </a:xfrm>
+          <a:prstGeom prst="rect">
+            <a:avLst/>
+          </a:prstGeom>
+        </p:spPr>
+      </p:pic>
+      <p:sp>
+        <p:nvSpPr>
+          <p:cNvPr id="9002" name="TextBox 9001"/>
           <p:cNvSpPr txBox="1"/>
           <p:nvPr/>
         </p:nvSpPr>
         <p:spPr>
           <a:xfrm>
             <a:off x="1014984" y="155448"/>
-            <a:ext cx="10424160" cy="621792"/>
+            <a:ext cx="8001000" cy="621792"/>
           </a:xfrm>
           <a:prstGeom prst="rect">
             <a:avLst/>
@@ -21200,7 +21608,7 @@
       </p:sp>
       <p:sp>
         <p:nvSpPr>
-          <p:cNvPr id="9002" name="Rectangle 9001"/>
+          <p:cNvPr id="9003" name="Rectangle 9002"/>
           <p:cNvSpPr/>
           <p:nvPr/>
         </p:nvSpPr>
@@ -21244,7 +21652,7 @@
       </p:sp>
       <p:sp>
         <p:nvSpPr>
-          <p:cNvPr id="9003" name="TextBox 9002"/>
+          <p:cNvPr id="9004" name="TextBox 9003"/>
           <p:cNvSpPr txBox="1"/>
           <p:nvPr/>
         </p:nvSpPr>
@@ -21280,7 +21688,7 @@
       </p:sp>
       <p:sp>
         <p:nvSpPr>
-          <p:cNvPr id="9004" name="Rounded Rectangle 9003"/>
+          <p:cNvPr id="9005" name="Rounded Rectangle 9004"/>
           <p:cNvSpPr/>
           <p:nvPr/>
         </p:nvSpPr>
@@ -21326,7 +21734,7 @@
       </p:sp>
       <p:sp>
         <p:nvSpPr>
-          <p:cNvPr id="9005" name="Oval 9004"/>
+          <p:cNvPr id="9006" name="Oval 9005"/>
           <p:cNvSpPr/>
           <p:nvPr/>
         </p:nvSpPr>
@@ -21380,7 +21788,7 @@
       </p:sp>
       <p:sp>
         <p:nvSpPr>
-          <p:cNvPr id="9006" name="TextBox 9005"/>
+          <p:cNvPr id="9007" name="TextBox 9006"/>
           <p:cNvSpPr txBox="1"/>
           <p:nvPr/>
         </p:nvSpPr>
@@ -21436,7 +21844,7 @@
       </p:sp>
       <p:sp>
         <p:nvSpPr>
-          <p:cNvPr id="9007" name="Rounded Rectangle 9006"/>
+          <p:cNvPr id="9008" name="Rounded Rectangle 9007"/>
           <p:cNvSpPr/>
           <p:nvPr/>
         </p:nvSpPr>
@@ -21482,7 +21890,7 @@
       </p:sp>
       <p:sp>
         <p:nvSpPr>
-          <p:cNvPr id="9008" name="Oval 9007"/>
+          <p:cNvPr id="9009" name="Oval 9008"/>
           <p:cNvSpPr/>
           <p:nvPr/>
         </p:nvSpPr>
@@ -21536,7 +21944,7 @@
       </p:sp>
       <p:sp>
         <p:nvSpPr>
-          <p:cNvPr id="9009" name="TextBox 9008"/>
+          <p:cNvPr id="9010" name="TextBox 9009"/>
           <p:cNvSpPr txBox="1"/>
           <p:nvPr/>
         </p:nvSpPr>
@@ -21592,7 +22000,7 @@
       </p:sp>
       <p:sp>
         <p:nvSpPr>
-          <p:cNvPr id="9010" name="Rounded Rectangle 9009"/>
+          <p:cNvPr id="9011" name="Rounded Rectangle 9010"/>
           <p:cNvSpPr/>
           <p:nvPr/>
         </p:nvSpPr>
@@ -21638,7 +22046,7 @@
       </p:sp>
       <p:sp>
         <p:nvSpPr>
-          <p:cNvPr id="9011" name="Oval 9010"/>
+          <p:cNvPr id="9012" name="Oval 9011"/>
           <p:cNvSpPr/>
           <p:nvPr/>
         </p:nvSpPr>
@@ -21692,7 +22100,7 @@
       </p:sp>
       <p:sp>
         <p:nvSpPr>
-          <p:cNvPr id="9012" name="TextBox 9011"/>
+          <p:cNvPr id="9013" name="TextBox 9012"/>
           <p:cNvSpPr txBox="1"/>
           <p:nvPr/>
         </p:nvSpPr>
@@ -21748,7 +22156,7 @@
       </p:sp>
       <p:sp>
         <p:nvSpPr>
-          <p:cNvPr id="9013" name="Rounded Rectangle 9012"/>
+          <p:cNvPr id="9014" name="Rounded Rectangle 9013"/>
           <p:cNvSpPr/>
           <p:nvPr/>
         </p:nvSpPr>
@@ -21794,7 +22202,7 @@
       </p:sp>
       <p:sp>
         <p:nvSpPr>
-          <p:cNvPr id="9014" name="Oval 9013"/>
+          <p:cNvPr id="9015" name="Oval 9014"/>
           <p:cNvSpPr/>
           <p:nvPr/>
         </p:nvSpPr>
@@ -21848,7 +22256,7 @@
       </p:sp>
       <p:sp>
         <p:nvSpPr>
-          <p:cNvPr id="9015" name="TextBox 9014"/>
+          <p:cNvPr id="9016" name="TextBox 9015"/>
           <p:cNvSpPr txBox="1"/>
           <p:nvPr/>
         </p:nvSpPr>
@@ -21904,7 +22312,7 @@
       </p:sp>
       <p:sp>
         <p:nvSpPr>
-          <p:cNvPr id="9016" name="Rounded Rectangle 9015"/>
+          <p:cNvPr id="9017" name="Rounded Rectangle 9016"/>
           <p:cNvSpPr/>
           <p:nvPr/>
         </p:nvSpPr>
@@ -21950,7 +22358,7 @@
       </p:sp>
       <p:sp>
         <p:nvSpPr>
-          <p:cNvPr id="9017" name="Oval 9016"/>
+          <p:cNvPr id="9018" name="Oval 9017"/>
           <p:cNvSpPr/>
           <p:nvPr/>
         </p:nvSpPr>
@@ -22004,7 +22412,7 @@
       </p:sp>
       <p:sp>
         <p:nvSpPr>
-          <p:cNvPr id="9018" name="TextBox 9017"/>
+          <p:cNvPr id="9019" name="TextBox 9018"/>
           <p:cNvSpPr txBox="1"/>
           <p:nvPr/>
         </p:nvSpPr>
@@ -22060,7 +22468,7 @@
       </p:sp>
       <p:sp>
         <p:nvSpPr>
-          <p:cNvPr id="9019" name="Rounded Rectangle 9018"/>
+          <p:cNvPr id="9020" name="Rounded Rectangle 9019"/>
           <p:cNvSpPr/>
           <p:nvPr/>
         </p:nvSpPr>
@@ -22106,7 +22514,7 @@
       </p:sp>
       <p:sp>
         <p:nvSpPr>
-          <p:cNvPr id="9020" name="Oval 9019"/>
+          <p:cNvPr id="9021" name="Oval 9020"/>
           <p:cNvSpPr/>
           <p:nvPr/>
         </p:nvSpPr>
@@ -22160,7 +22568,7 @@
       </p:sp>
       <p:sp>
         <p:nvSpPr>
-          <p:cNvPr id="9021" name="TextBox 9020"/>
+          <p:cNvPr id="9022" name="TextBox 9021"/>
           <p:cNvSpPr txBox="1"/>
           <p:nvPr/>
         </p:nvSpPr>
@@ -22216,7 +22624,7 @@
       </p:sp>
       <p:sp>
         <p:nvSpPr>
-          <p:cNvPr id="9022" name="TextBox 9021"/>
+          <p:cNvPr id="9023" name="TextBox 9022"/>
           <p:cNvSpPr txBox="1"/>
           <p:nvPr/>
         </p:nvSpPr>
@@ -22276,9 +22684,33 @@
         <p:nvPr/>
       </p:nvGrpSpPr>
       <p:grpSpPr/>
-      <p:sp>
-        <p:nvSpPr>
-          <p:cNvPr id="2" name="Rectangle 1"/>
+      <p:pic>
+        <p:nvPicPr>
+          <p:cNvPr id="2" name="Picture 1" descr="beihang-logo.png"/>
+          <p:cNvPicPr>
+            <a:picLocks noChangeAspect="1"/>
+          </p:cNvPicPr>
+          <p:nvPr/>
+        </p:nvPicPr>
+        <p:blipFill>
+          <a:blip r:embed="rId2"/>
+          <a:stretch>
+            <a:fillRect/>
+          </a:stretch>
+        </p:blipFill>
+        <p:spPr>
+          <a:xfrm>
+            <a:off x="9336024" y="91665"/>
+            <a:ext cx="2642616" cy="502469"/>
+          </a:xfrm>
+          <a:prstGeom prst="rect">
+            <a:avLst/>
+          </a:prstGeom>
+        </p:spPr>
+      </p:pic>
+      <p:sp>
+        <p:nvSpPr>
+          <p:cNvPr id="3" name="Rectangle 2"/>
           <p:cNvSpPr/>
           <p:nvPr/>
         </p:nvSpPr>
@@ -22322,7 +22754,7 @@
       </p:sp>
       <p:sp>
         <p:nvSpPr>
-          <p:cNvPr id="3" name="TextBox 2"/>
+          <p:cNvPr id="4" name="TextBox 3"/>
           <p:cNvSpPr txBox="1"/>
           <p:nvPr/>
         </p:nvSpPr>
@@ -22358,7 +22790,7 @@
       </p:sp>
       <p:sp>
         <p:nvSpPr>
-          <p:cNvPr id="4" name="TextBox 3"/>
+          <p:cNvPr id="5" name="TextBox 4"/>
           <p:cNvSpPr txBox="1"/>
           <p:nvPr/>
         </p:nvSpPr>
@@ -22394,7 +22826,7 @@
       </p:sp>
       <p:sp>
         <p:nvSpPr>
-          <p:cNvPr id="5" name="TextBox 4"/>
+          <p:cNvPr id="6" name="TextBox 5"/>
           <p:cNvSpPr txBox="1"/>
           <p:nvPr/>
         </p:nvSpPr>
@@ -22447,7 +22879,7 @@
       </p:sp>
       <p:sp>
         <p:nvSpPr>
-          <p:cNvPr id="6" name="Rectangle 5"/>
+          <p:cNvPr id="7" name="Rectangle 6"/>
           <p:cNvSpPr/>
           <p:nvPr/>
         </p:nvSpPr>
@@ -22491,7 +22923,7 @@
       </p:sp>
       <p:sp>
         <p:nvSpPr>
-          <p:cNvPr id="7" name="Rectangle 6"/>
+          <p:cNvPr id="8" name="Rectangle 7"/>
           <p:cNvSpPr/>
           <p:nvPr/>
         </p:nvSpPr>
@@ -22535,7 +22967,7 @@
       </p:sp>
       <p:sp>
         <p:nvSpPr>
-          <p:cNvPr id="8" name="TextBox 7"/>
+          <p:cNvPr id="9" name="TextBox 8"/>
           <p:cNvSpPr txBox="1"/>
           <p:nvPr/>
         </p:nvSpPr>
@@ -22792,16 +23224,40 @@
           </a:p>
         </p:txBody>
       </p:sp>
-      <p:sp>
-        <p:nvSpPr>
-          <p:cNvPr id="9001" name="TextBox 9000"/>
+      <p:pic>
+        <p:nvPicPr>
+          <p:cNvPr id="9001" name="Picture 9000" descr="beihang-logo.png"/>
+          <p:cNvPicPr>
+            <a:picLocks noChangeAspect="1"/>
+          </p:cNvPicPr>
+          <p:nvPr/>
+        </p:nvPicPr>
+        <p:blipFill>
+          <a:blip r:embed="rId2"/>
+          <a:stretch>
+            <a:fillRect/>
+          </a:stretch>
+        </p:blipFill>
+        <p:spPr>
+          <a:xfrm>
+            <a:off x="9336024" y="91665"/>
+            <a:ext cx="2642616" cy="502469"/>
+          </a:xfrm>
+          <a:prstGeom prst="rect">
+            <a:avLst/>
+          </a:prstGeom>
+        </p:spPr>
+      </p:pic>
+      <p:sp>
+        <p:nvSpPr>
+          <p:cNvPr id="9002" name="TextBox 9001"/>
           <p:cNvSpPr txBox="1"/>
           <p:nvPr/>
         </p:nvSpPr>
         <p:spPr>
           <a:xfrm>
             <a:off x="1014984" y="155448"/>
-            <a:ext cx="10424160" cy="621792"/>
+            <a:ext cx="8001000" cy="621792"/>
           </a:xfrm>
           <a:prstGeom prst="rect">
             <a:avLst/>
@@ -22834,7 +23290,7 @@
       </p:sp>
       <p:sp>
         <p:nvSpPr>
-          <p:cNvPr id="9002" name="Rectangle 9001"/>
+          <p:cNvPr id="9003" name="Rectangle 9002"/>
           <p:cNvSpPr/>
           <p:nvPr/>
         </p:nvSpPr>
@@ -22878,7 +23334,7 @@
       </p:sp>
       <p:sp>
         <p:nvSpPr>
-          <p:cNvPr id="9003" name="TextBox 9002"/>
+          <p:cNvPr id="9004" name="TextBox 9003"/>
           <p:cNvSpPr txBox="1"/>
           <p:nvPr/>
         </p:nvSpPr>
@@ -22914,7 +23370,7 @@
       </p:sp>
       <p:graphicFrame>
         <p:nvGraphicFramePr>
-          <p:cNvPr id="9004" name="Table 9003"/>
+          <p:cNvPr id="9005" name="Table 9004"/>
           <p:cNvGraphicFramePr>
             <a:graphicFrameLocks noGrp="1"/>
           </p:cNvGraphicFramePr>
@@ -23797,7 +24253,7 @@
       </p:graphicFrame>
       <p:sp>
         <p:nvSpPr>
-          <p:cNvPr id="9005" name="TextBox 9004"/>
+          <p:cNvPr id="9006" name="TextBox 9005"/>
           <p:cNvSpPr txBox="1"/>
           <p:nvPr/>
         </p:nvSpPr>
@@ -23877,7 +24333,7 @@
       </p:sp>
       <p:sp>
         <p:nvSpPr>
-          <p:cNvPr id="9006" name="TextBox 9005"/>
+          <p:cNvPr id="9007" name="TextBox 9006"/>
           <p:cNvSpPr txBox="1"/>
           <p:nvPr/>
         </p:nvSpPr>
@@ -24134,16 +24590,40 @@
           </a:p>
         </p:txBody>
       </p:sp>
-      <p:sp>
-        <p:nvSpPr>
-          <p:cNvPr id="9001" name="TextBox 9000"/>
+      <p:pic>
+        <p:nvPicPr>
+          <p:cNvPr id="9001" name="Picture 9000" descr="beihang-logo.png"/>
+          <p:cNvPicPr>
+            <a:picLocks noChangeAspect="1"/>
+          </p:cNvPicPr>
+          <p:nvPr/>
+        </p:nvPicPr>
+        <p:blipFill>
+          <a:blip r:embed="rId2"/>
+          <a:stretch>
+            <a:fillRect/>
+          </a:stretch>
+        </p:blipFill>
+        <p:spPr>
+          <a:xfrm>
+            <a:off x="9336024" y="91665"/>
+            <a:ext cx="2642616" cy="502469"/>
+          </a:xfrm>
+          <a:prstGeom prst="rect">
+            <a:avLst/>
+          </a:prstGeom>
+        </p:spPr>
+      </p:pic>
+      <p:sp>
+        <p:nvSpPr>
+          <p:cNvPr id="9002" name="TextBox 9001"/>
           <p:cNvSpPr txBox="1"/>
           <p:nvPr/>
         </p:nvSpPr>
         <p:spPr>
           <a:xfrm>
             <a:off x="1014984" y="155448"/>
-            <a:ext cx="10424160" cy="621792"/>
+            <a:ext cx="8001000" cy="621792"/>
           </a:xfrm>
           <a:prstGeom prst="rect">
             <a:avLst/>
@@ -24176,7 +24656,7 @@
       </p:sp>
       <p:sp>
         <p:nvSpPr>
-          <p:cNvPr id="9002" name="Rectangle 9001"/>
+          <p:cNvPr id="9003" name="Rectangle 9002"/>
           <p:cNvSpPr/>
           <p:nvPr/>
         </p:nvSpPr>
@@ -24220,7 +24700,7 @@
       </p:sp>
       <p:sp>
         <p:nvSpPr>
-          <p:cNvPr id="9003" name="TextBox 9002"/>
+          <p:cNvPr id="9004" name="TextBox 9003"/>
           <p:cNvSpPr txBox="1"/>
           <p:nvPr/>
         </p:nvSpPr>
@@ -24256,7 +24736,7 @@
       </p:sp>
       <p:graphicFrame>
         <p:nvGraphicFramePr>
-          <p:cNvPr id="9004" name="Table 9003"/>
+          <p:cNvPr id="9005" name="Table 9004"/>
           <p:cNvGraphicFramePr>
             <a:graphicFrameLocks noGrp="1"/>
           </p:cNvGraphicFramePr>
@@ -24801,7 +25281,7 @@
       </p:graphicFrame>
       <p:sp>
         <p:nvSpPr>
-          <p:cNvPr id="9005" name="TextBox 9004"/>
+          <p:cNvPr id="9006" name="TextBox 9005"/>
           <p:cNvSpPr txBox="1"/>
           <p:nvPr/>
         </p:nvSpPr>
@@ -24881,7 +25361,7 @@
       </p:sp>
       <p:sp>
         <p:nvSpPr>
-          <p:cNvPr id="9006" name="TextBox 9005"/>
+          <p:cNvPr id="9007" name="TextBox 9006"/>
           <p:cNvSpPr txBox="1"/>
           <p:nvPr/>
         </p:nvSpPr>
@@ -25138,16 +25618,40 @@
           </a:p>
         </p:txBody>
       </p:sp>
-      <p:sp>
-        <p:nvSpPr>
-          <p:cNvPr id="9001" name="TextBox 9000"/>
+      <p:pic>
+        <p:nvPicPr>
+          <p:cNvPr id="9001" name="Picture 9000" descr="beihang-logo.png"/>
+          <p:cNvPicPr>
+            <a:picLocks noChangeAspect="1"/>
+          </p:cNvPicPr>
+          <p:nvPr/>
+        </p:nvPicPr>
+        <p:blipFill>
+          <a:blip r:embed="rId2"/>
+          <a:stretch>
+            <a:fillRect/>
+          </a:stretch>
+        </p:blipFill>
+        <p:spPr>
+          <a:xfrm>
+            <a:off x="9336024" y="91665"/>
+            <a:ext cx="2642616" cy="502469"/>
+          </a:xfrm>
+          <a:prstGeom prst="rect">
+            <a:avLst/>
+          </a:prstGeom>
+        </p:spPr>
+      </p:pic>
+      <p:sp>
+        <p:nvSpPr>
+          <p:cNvPr id="9002" name="TextBox 9001"/>
           <p:cNvSpPr txBox="1"/>
           <p:nvPr/>
         </p:nvSpPr>
         <p:spPr>
           <a:xfrm>
             <a:off x="1014984" y="155448"/>
-            <a:ext cx="10424160" cy="621792"/>
+            <a:ext cx="8001000" cy="621792"/>
           </a:xfrm>
           <a:prstGeom prst="rect">
             <a:avLst/>
@@ -25166,7 +25670,7 @@
               </a:lnSpc>
             </a:pPr>
             <a:r>
-              <a:rPr sz="3000" b="1">
+              <a:rPr sz="2400" b="1">
                 <a:solidFill>
                   <a:srgbClr val="113E6A"/>
                 </a:solidFill>
@@ -25180,7 +25684,7 @@
       </p:sp>
       <p:sp>
         <p:nvSpPr>
-          <p:cNvPr id="9002" name="Rectangle 9001"/>
+          <p:cNvPr id="9003" name="Rectangle 9002"/>
           <p:cNvSpPr/>
           <p:nvPr/>
         </p:nvSpPr>
@@ -25224,7 +25728,7 @@
       </p:sp>
       <p:sp>
         <p:nvSpPr>
-          <p:cNvPr id="9003" name="TextBox 9002"/>
+          <p:cNvPr id="9004" name="TextBox 9003"/>
           <p:cNvSpPr txBox="1"/>
           <p:nvPr/>
         </p:nvSpPr>
@@ -25260,7 +25764,7 @@
       </p:sp>
       <p:sp>
         <p:nvSpPr>
-          <p:cNvPr id="9004" name="TextBox 9003"/>
+          <p:cNvPr id="9005" name="TextBox 9004"/>
           <p:cNvSpPr txBox="1"/>
           <p:nvPr/>
         </p:nvSpPr>
@@ -25340,7 +25844,7 @@
       </p:sp>
       <p:sp>
         <p:nvSpPr>
-          <p:cNvPr id="9005" name="TextBox 9004"/>
+          <p:cNvPr id="9006" name="TextBox 9005"/>
           <p:cNvSpPr txBox="1"/>
           <p:nvPr/>
         </p:nvSpPr>
@@ -25597,16 +26101,40 @@
           </a:p>
         </p:txBody>
       </p:sp>
-      <p:sp>
-        <p:nvSpPr>
-          <p:cNvPr id="9001" name="TextBox 9000"/>
+      <p:pic>
+        <p:nvPicPr>
+          <p:cNvPr id="9001" name="Picture 9000" descr="beihang-logo.png"/>
+          <p:cNvPicPr>
+            <a:picLocks noChangeAspect="1"/>
+          </p:cNvPicPr>
+          <p:nvPr/>
+        </p:nvPicPr>
+        <p:blipFill>
+          <a:blip r:embed="rId2"/>
+          <a:stretch>
+            <a:fillRect/>
+          </a:stretch>
+        </p:blipFill>
+        <p:spPr>
+          <a:xfrm>
+            <a:off x="9336024" y="91665"/>
+            <a:ext cx="2642616" cy="502469"/>
+          </a:xfrm>
+          <a:prstGeom prst="rect">
+            <a:avLst/>
+          </a:prstGeom>
+        </p:spPr>
+      </p:pic>
+      <p:sp>
+        <p:nvSpPr>
+          <p:cNvPr id="9002" name="TextBox 9001"/>
           <p:cNvSpPr txBox="1"/>
           <p:nvPr/>
         </p:nvSpPr>
         <p:spPr>
           <a:xfrm>
             <a:off x="1014984" y="155448"/>
-            <a:ext cx="10424160" cy="621792"/>
+            <a:ext cx="8001000" cy="621792"/>
           </a:xfrm>
           <a:prstGeom prst="rect">
             <a:avLst/>
@@ -25639,7 +26167,7 @@
       </p:sp>
       <p:sp>
         <p:nvSpPr>
-          <p:cNvPr id="9002" name="Rectangle 9001"/>
+          <p:cNvPr id="9003" name="Rectangle 9002"/>
           <p:cNvSpPr/>
           <p:nvPr/>
         </p:nvSpPr>
@@ -25683,7 +26211,7 @@
       </p:sp>
       <p:sp>
         <p:nvSpPr>
-          <p:cNvPr id="9003" name="TextBox 9002"/>
+          <p:cNvPr id="9004" name="TextBox 9003"/>
           <p:cNvSpPr txBox="1"/>
           <p:nvPr/>
         </p:nvSpPr>
@@ -25719,7 +26247,7 @@
       </p:sp>
       <p:graphicFrame>
         <p:nvGraphicFramePr>
-          <p:cNvPr id="9004" name="Table 9003"/>
+          <p:cNvPr id="9005" name="Table 9004"/>
           <p:cNvGraphicFramePr>
             <a:graphicFrameLocks noGrp="1"/>
           </p:cNvGraphicFramePr>
@@ -26531,7 +27059,7 @@
       </p:graphicFrame>
       <p:sp>
         <p:nvSpPr>
-          <p:cNvPr id="9005" name="TextBox 9004"/>
+          <p:cNvPr id="9006" name="TextBox 9005"/>
           <p:cNvSpPr txBox="1"/>
           <p:nvPr/>
         </p:nvSpPr>
@@ -26611,7 +27139,7 @@
       </p:sp>
       <p:sp>
         <p:nvSpPr>
-          <p:cNvPr id="9006" name="TextBox 9005"/>
+          <p:cNvPr id="9007" name="TextBox 9006"/>
           <p:cNvSpPr txBox="1"/>
           <p:nvPr/>
         </p:nvSpPr>
@@ -26868,16 +27396,40 @@
           </a:p>
         </p:txBody>
       </p:sp>
-      <p:sp>
-        <p:nvSpPr>
-          <p:cNvPr id="9001" name="TextBox 9000"/>
+      <p:pic>
+        <p:nvPicPr>
+          <p:cNvPr id="9001" name="Picture 9000" descr="beihang-logo.png"/>
+          <p:cNvPicPr>
+            <a:picLocks noChangeAspect="1"/>
+          </p:cNvPicPr>
+          <p:nvPr/>
+        </p:nvPicPr>
+        <p:blipFill>
+          <a:blip r:embed="rId2"/>
+          <a:stretch>
+            <a:fillRect/>
+          </a:stretch>
+        </p:blipFill>
+        <p:spPr>
+          <a:xfrm>
+            <a:off x="9336024" y="91665"/>
+            <a:ext cx="2642616" cy="502469"/>
+          </a:xfrm>
+          <a:prstGeom prst="rect">
+            <a:avLst/>
+          </a:prstGeom>
+        </p:spPr>
+      </p:pic>
+      <p:sp>
+        <p:nvSpPr>
+          <p:cNvPr id="9002" name="TextBox 9001"/>
           <p:cNvSpPr txBox="1"/>
           <p:nvPr/>
         </p:nvSpPr>
         <p:spPr>
           <a:xfrm>
             <a:off x="1014984" y="155448"/>
-            <a:ext cx="10424160" cy="621792"/>
+            <a:ext cx="8001000" cy="621792"/>
           </a:xfrm>
           <a:prstGeom prst="rect">
             <a:avLst/>
@@ -26896,7 +27448,7 @@
               </a:lnSpc>
             </a:pPr>
             <a:r>
-              <a:rPr sz="3000" b="1">
+              <a:rPr sz="2400" b="1">
                 <a:solidFill>
                   <a:srgbClr val="113E6A"/>
                 </a:solidFill>
@@ -26910,7 +27462,7 @@
       </p:sp>
       <p:sp>
         <p:nvSpPr>
-          <p:cNvPr id="9002" name="Rectangle 9001"/>
+          <p:cNvPr id="9003" name="Rectangle 9002"/>
           <p:cNvSpPr/>
           <p:nvPr/>
         </p:nvSpPr>
@@ -26954,7 +27506,7 @@
       </p:sp>
       <p:sp>
         <p:nvSpPr>
-          <p:cNvPr id="9003" name="TextBox 9002"/>
+          <p:cNvPr id="9004" name="TextBox 9003"/>
           <p:cNvSpPr txBox="1"/>
           <p:nvPr/>
         </p:nvSpPr>
@@ -26990,7 +27542,7 @@
       </p:sp>
       <p:graphicFrame>
         <p:nvGraphicFramePr>
-          <p:cNvPr id="9004" name="Table 9003"/>
+          <p:cNvPr id="9005" name="Table 9004"/>
           <p:cNvGraphicFramePr>
             <a:graphicFrameLocks noGrp="1"/>
           </p:cNvGraphicFramePr>
@@ -27507,7 +28059,7 @@
       </p:graphicFrame>
       <p:sp>
         <p:nvSpPr>
-          <p:cNvPr id="9005" name="TextBox 9004"/>
+          <p:cNvPr id="9006" name="TextBox 9005"/>
           <p:cNvSpPr txBox="1"/>
           <p:nvPr/>
         </p:nvSpPr>
@@ -27587,7 +28139,7 @@
       </p:sp>
       <p:sp>
         <p:nvSpPr>
-          <p:cNvPr id="9006" name="TextBox 9005"/>
+          <p:cNvPr id="9007" name="TextBox 9006"/>
           <p:cNvSpPr txBox="1"/>
           <p:nvPr/>
         </p:nvSpPr>
@@ -27844,16 +28396,40 @@
           </a:p>
         </p:txBody>
       </p:sp>
-      <p:sp>
-        <p:nvSpPr>
-          <p:cNvPr id="9001" name="TextBox 9000"/>
+      <p:pic>
+        <p:nvPicPr>
+          <p:cNvPr id="9001" name="Picture 9000" descr="beihang-logo.png"/>
+          <p:cNvPicPr>
+            <a:picLocks noChangeAspect="1"/>
+          </p:cNvPicPr>
+          <p:nvPr/>
+        </p:nvPicPr>
+        <p:blipFill>
+          <a:blip r:embed="rId2"/>
+          <a:stretch>
+            <a:fillRect/>
+          </a:stretch>
+        </p:blipFill>
+        <p:spPr>
+          <a:xfrm>
+            <a:off x="9336024" y="91665"/>
+            <a:ext cx="2642616" cy="502469"/>
+          </a:xfrm>
+          <a:prstGeom prst="rect">
+            <a:avLst/>
+          </a:prstGeom>
+        </p:spPr>
+      </p:pic>
+      <p:sp>
+        <p:nvSpPr>
+          <p:cNvPr id="9002" name="TextBox 9001"/>
           <p:cNvSpPr txBox="1"/>
           <p:nvPr/>
         </p:nvSpPr>
         <p:spPr>
           <a:xfrm>
             <a:off x="1014984" y="155448"/>
-            <a:ext cx="10424160" cy="621792"/>
+            <a:ext cx="8001000" cy="621792"/>
           </a:xfrm>
           <a:prstGeom prst="rect">
             <a:avLst/>
@@ -27886,7 +28462,7 @@
       </p:sp>
       <p:sp>
         <p:nvSpPr>
-          <p:cNvPr id="9002" name="Rectangle 9001"/>
+          <p:cNvPr id="9003" name="Rectangle 9002"/>
           <p:cNvSpPr/>
           <p:nvPr/>
         </p:nvSpPr>
@@ -27930,7 +28506,7 @@
       </p:sp>
       <p:sp>
         <p:nvSpPr>
-          <p:cNvPr id="9003" name="TextBox 9002"/>
+          <p:cNvPr id="9004" name="TextBox 9003"/>
           <p:cNvSpPr txBox="1"/>
           <p:nvPr/>
         </p:nvSpPr>
@@ -27966,7 +28542,7 @@
       </p:sp>
       <p:sp>
         <p:nvSpPr>
-          <p:cNvPr id="9004" name="TextBox 9003"/>
+          <p:cNvPr id="9005" name="TextBox 9004"/>
           <p:cNvSpPr txBox="1"/>
           <p:nvPr/>
         </p:nvSpPr>
@@ -28046,7 +28622,7 @@
       </p:sp>
       <p:sp>
         <p:nvSpPr>
-          <p:cNvPr id="9005" name="TextBox 9004"/>
+          <p:cNvPr id="9006" name="TextBox 9005"/>
           <p:cNvSpPr txBox="1"/>
           <p:nvPr/>
         </p:nvSpPr>
@@ -28303,16 +28879,40 @@
           </a:p>
         </p:txBody>
       </p:sp>
-      <p:sp>
-        <p:nvSpPr>
-          <p:cNvPr id="9001" name="TextBox 9000"/>
+      <p:pic>
+        <p:nvPicPr>
+          <p:cNvPr id="9001" name="Picture 9000" descr="beihang-logo.png"/>
+          <p:cNvPicPr>
+            <a:picLocks noChangeAspect="1"/>
+          </p:cNvPicPr>
+          <p:nvPr/>
+        </p:nvPicPr>
+        <p:blipFill>
+          <a:blip r:embed="rId2"/>
+          <a:stretch>
+            <a:fillRect/>
+          </a:stretch>
+        </p:blipFill>
+        <p:spPr>
+          <a:xfrm>
+            <a:off x="9336024" y="91665"/>
+            <a:ext cx="2642616" cy="502469"/>
+          </a:xfrm>
+          <a:prstGeom prst="rect">
+            <a:avLst/>
+          </a:prstGeom>
+        </p:spPr>
+      </p:pic>
+      <p:sp>
+        <p:nvSpPr>
+          <p:cNvPr id="9002" name="TextBox 9001"/>
           <p:cNvSpPr txBox="1"/>
           <p:nvPr/>
         </p:nvSpPr>
         <p:spPr>
           <a:xfrm>
             <a:off x="1014984" y="155448"/>
-            <a:ext cx="10424160" cy="621792"/>
+            <a:ext cx="8001000" cy="621792"/>
           </a:xfrm>
           <a:prstGeom prst="rect">
             <a:avLst/>
@@ -28345,7 +28945,7 @@
       </p:sp>
       <p:sp>
         <p:nvSpPr>
-          <p:cNvPr id="9002" name="Rectangle 9001"/>
+          <p:cNvPr id="9003" name="Rectangle 9002"/>
           <p:cNvSpPr/>
           <p:nvPr/>
         </p:nvSpPr>
@@ -28389,7 +28989,7 @@
       </p:sp>
       <p:sp>
         <p:nvSpPr>
-          <p:cNvPr id="9003" name="TextBox 9002"/>
+          <p:cNvPr id="9004" name="TextBox 9003"/>
           <p:cNvSpPr txBox="1"/>
           <p:nvPr/>
         </p:nvSpPr>
@@ -28425,7 +29025,7 @@
       </p:sp>
       <p:sp>
         <p:nvSpPr>
-          <p:cNvPr id="9004" name="TextBox 9003"/>
+          <p:cNvPr id="9005" name="TextBox 9004"/>
           <p:cNvSpPr txBox="1"/>
           <p:nvPr/>
         </p:nvSpPr>
@@ -28505,7 +29105,7 @@
       </p:sp>
       <p:sp>
         <p:nvSpPr>
-          <p:cNvPr id="9005" name="TextBox 9004"/>
+          <p:cNvPr id="9006" name="TextBox 9005"/>
           <p:cNvSpPr txBox="1"/>
           <p:nvPr/>
         </p:nvSpPr>
@@ -28762,16 +29362,40 @@
           </a:p>
         </p:txBody>
       </p:sp>
-      <p:sp>
-        <p:nvSpPr>
-          <p:cNvPr id="9001" name="TextBox 9000"/>
+      <p:pic>
+        <p:nvPicPr>
+          <p:cNvPr id="9001" name="Picture 9000" descr="beihang-logo.png"/>
+          <p:cNvPicPr>
+            <a:picLocks noChangeAspect="1"/>
+          </p:cNvPicPr>
+          <p:nvPr/>
+        </p:nvPicPr>
+        <p:blipFill>
+          <a:blip r:embed="rId2"/>
+          <a:stretch>
+            <a:fillRect/>
+          </a:stretch>
+        </p:blipFill>
+        <p:spPr>
+          <a:xfrm>
+            <a:off x="9336024" y="91665"/>
+            <a:ext cx="2642616" cy="502469"/>
+          </a:xfrm>
+          <a:prstGeom prst="rect">
+            <a:avLst/>
+          </a:prstGeom>
+        </p:spPr>
+      </p:pic>
+      <p:sp>
+        <p:nvSpPr>
+          <p:cNvPr id="9002" name="TextBox 9001"/>
           <p:cNvSpPr txBox="1"/>
           <p:nvPr/>
         </p:nvSpPr>
         <p:spPr>
           <a:xfrm>
             <a:off x="1014984" y="155448"/>
-            <a:ext cx="10424160" cy="621792"/>
+            <a:ext cx="8001000" cy="621792"/>
           </a:xfrm>
           <a:prstGeom prst="rect">
             <a:avLst/>
@@ -28790,7 +29414,7 @@
               </a:lnSpc>
             </a:pPr>
             <a:r>
-              <a:rPr sz="3000" b="1">
+              <a:rPr sz="2400" b="1">
                 <a:solidFill>
                   <a:srgbClr val="113E6A"/>
                 </a:solidFill>
@@ -28804,7 +29428,7 @@
       </p:sp>
       <p:sp>
         <p:nvSpPr>
-          <p:cNvPr id="9002" name="Rectangle 9001"/>
+          <p:cNvPr id="9003" name="Rectangle 9002"/>
           <p:cNvSpPr/>
           <p:nvPr/>
         </p:nvSpPr>
@@ -28848,7 +29472,7 @@
       </p:sp>
       <p:sp>
         <p:nvSpPr>
-          <p:cNvPr id="9003" name="TextBox 9002"/>
+          <p:cNvPr id="9004" name="TextBox 9003"/>
           <p:cNvSpPr txBox="1"/>
           <p:nvPr/>
         </p:nvSpPr>
@@ -28884,31 +29508,7 @@
       </p:sp>
       <p:pic>
         <p:nvPicPr>
-          <p:cNvPr id="9004" name="Picture 9003" descr="fig6-throughput-s3-w3.png"/>
-          <p:cNvPicPr>
-            <a:picLocks noChangeAspect="1"/>
-          </p:cNvPicPr>
-          <p:nvPr/>
-        </p:nvPicPr>
-        <p:blipFill>
-          <a:blip r:embed="rId2"/>
-          <a:stretch>
-            <a:fillRect/>
-          </a:stretch>
-        </p:blipFill>
-        <p:spPr>
-          <a:xfrm>
-            <a:off x="566928" y="2322730"/>
-            <a:ext cx="5394960" cy="2212539"/>
-          </a:xfrm>
-          <a:prstGeom prst="rect">
-            <a:avLst/>
-          </a:prstGeom>
-        </p:spPr>
-      </p:pic>
-      <p:pic>
-        <p:nvPicPr>
-          <p:cNvPr id="9005" name="Picture 9004" descr="fig6-6-latency-p99-s3-w3.png"/>
+          <p:cNvPr id="9005" name="Picture 9004" descr="fig6-throughput-s3-w3.png"/>
           <p:cNvPicPr>
             <a:picLocks noChangeAspect="1"/>
           </p:cNvPicPr>
@@ -28922,6 +29522,30 @@
         </p:blipFill>
         <p:spPr>
           <a:xfrm>
+            <a:off x="566928" y="2322730"/>
+            <a:ext cx="5394960" cy="2212539"/>
+          </a:xfrm>
+          <a:prstGeom prst="rect">
+            <a:avLst/>
+          </a:prstGeom>
+        </p:spPr>
+      </p:pic>
+      <p:pic>
+        <p:nvPicPr>
+          <p:cNvPr id="9006" name="Picture 9005" descr="fig6-6-latency-p99-s3-w3.png"/>
+          <p:cNvPicPr>
+            <a:picLocks noChangeAspect="1"/>
+          </p:cNvPicPr>
+          <p:nvPr/>
+        </p:nvPicPr>
+        <p:blipFill>
+          <a:blip r:embed="rId4"/>
+          <a:stretch>
+            <a:fillRect/>
+          </a:stretch>
+        </p:blipFill>
+        <p:spPr>
+          <a:xfrm>
             <a:off x="6172200" y="2323351"/>
             <a:ext cx="5394960" cy="2211297"/>
           </a:xfrm>
@@ -28932,7 +29556,7 @@
       </p:pic>
       <p:sp>
         <p:nvSpPr>
-          <p:cNvPr id="9006" name="TextBox 9005"/>
+          <p:cNvPr id="9007" name="TextBox 9006"/>
           <p:cNvSpPr txBox="1"/>
           <p:nvPr/>
         </p:nvSpPr>
@@ -29002,7 +29626,7 @@
       </p:sp>
       <p:sp>
         <p:nvSpPr>
-          <p:cNvPr id="9007" name="TextBox 9006"/>
+          <p:cNvPr id="9008" name="TextBox 9007"/>
           <p:cNvSpPr txBox="1"/>
           <p:nvPr/>
         </p:nvSpPr>
@@ -29259,16 +29883,40 @@
           </a:p>
         </p:txBody>
       </p:sp>
-      <p:sp>
-        <p:nvSpPr>
-          <p:cNvPr id="9001" name="TextBox 9000"/>
+      <p:pic>
+        <p:nvPicPr>
+          <p:cNvPr id="9001" name="Picture 9000" descr="beihang-logo.png"/>
+          <p:cNvPicPr>
+            <a:picLocks noChangeAspect="1"/>
+          </p:cNvPicPr>
+          <p:nvPr/>
+        </p:nvPicPr>
+        <p:blipFill>
+          <a:blip r:embed="rId2"/>
+          <a:stretch>
+            <a:fillRect/>
+          </a:stretch>
+        </p:blipFill>
+        <p:spPr>
+          <a:xfrm>
+            <a:off x="9336024" y="91665"/>
+            <a:ext cx="2642616" cy="502469"/>
+          </a:xfrm>
+          <a:prstGeom prst="rect">
+            <a:avLst/>
+          </a:prstGeom>
+        </p:spPr>
+      </p:pic>
+      <p:sp>
+        <p:nvSpPr>
+          <p:cNvPr id="9002" name="TextBox 9001"/>
           <p:cNvSpPr txBox="1"/>
           <p:nvPr/>
         </p:nvSpPr>
         <p:spPr>
           <a:xfrm>
             <a:off x="1014984" y="155448"/>
-            <a:ext cx="10424160" cy="621792"/>
+            <a:ext cx="8001000" cy="621792"/>
           </a:xfrm>
           <a:prstGeom prst="rect">
             <a:avLst/>
@@ -29301,7 +29949,7 @@
       </p:sp>
       <p:sp>
         <p:nvSpPr>
-          <p:cNvPr id="9002" name="Rectangle 9001"/>
+          <p:cNvPr id="9003" name="Rectangle 9002"/>
           <p:cNvSpPr/>
           <p:nvPr/>
         </p:nvSpPr>
@@ -29345,7 +29993,7 @@
       </p:sp>
       <p:sp>
         <p:nvSpPr>
-          <p:cNvPr id="9003" name="TextBox 9002"/>
+          <p:cNvPr id="9004" name="TextBox 9003"/>
           <p:cNvSpPr txBox="1"/>
           <p:nvPr/>
         </p:nvSpPr>
@@ -29381,7 +30029,7 @@
       </p:sp>
       <p:sp>
         <p:nvSpPr>
-          <p:cNvPr id="9004" name="Rounded Rectangle 9003"/>
+          <p:cNvPr id="9005" name="Rounded Rectangle 9004"/>
           <p:cNvSpPr/>
           <p:nvPr/>
         </p:nvSpPr>
@@ -29427,7 +30075,7 @@
       </p:sp>
       <p:sp>
         <p:nvSpPr>
-          <p:cNvPr id="9005" name="Oval 9004"/>
+          <p:cNvPr id="9006" name="Oval 9005"/>
           <p:cNvSpPr/>
           <p:nvPr/>
         </p:nvSpPr>
@@ -29481,7 +30129,7 @@
       </p:sp>
       <p:sp>
         <p:nvSpPr>
-          <p:cNvPr id="9006" name="TextBox 9005"/>
+          <p:cNvPr id="9007" name="TextBox 9006"/>
           <p:cNvSpPr txBox="1"/>
           <p:nvPr/>
         </p:nvSpPr>
@@ -29537,7 +30185,7 @@
       </p:sp>
       <p:sp>
         <p:nvSpPr>
-          <p:cNvPr id="9007" name="Rounded Rectangle 9006"/>
+          <p:cNvPr id="9008" name="Rounded Rectangle 9007"/>
           <p:cNvSpPr/>
           <p:nvPr/>
         </p:nvSpPr>
@@ -29583,7 +30231,7 @@
       </p:sp>
       <p:sp>
         <p:nvSpPr>
-          <p:cNvPr id="9008" name="Oval 9007"/>
+          <p:cNvPr id="9009" name="Oval 9008"/>
           <p:cNvSpPr/>
           <p:nvPr/>
         </p:nvSpPr>
@@ -29637,7 +30285,7 @@
       </p:sp>
       <p:sp>
         <p:nvSpPr>
-          <p:cNvPr id="9009" name="TextBox 9008"/>
+          <p:cNvPr id="9010" name="TextBox 9009"/>
           <p:cNvSpPr txBox="1"/>
           <p:nvPr/>
         </p:nvSpPr>
@@ -29693,7 +30341,7 @@
       </p:sp>
       <p:sp>
         <p:nvSpPr>
-          <p:cNvPr id="9010" name="Rounded Rectangle 9009"/>
+          <p:cNvPr id="9011" name="Rounded Rectangle 9010"/>
           <p:cNvSpPr/>
           <p:nvPr/>
         </p:nvSpPr>
@@ -29739,7 +30387,7 @@
       </p:sp>
       <p:sp>
         <p:nvSpPr>
-          <p:cNvPr id="9011" name="Rectangle 9010"/>
+          <p:cNvPr id="9012" name="Rectangle 9011"/>
           <p:cNvSpPr/>
           <p:nvPr/>
         </p:nvSpPr>
@@ -29783,7 +30431,7 @@
       </p:sp>
       <p:sp>
         <p:nvSpPr>
-          <p:cNvPr id="9012" name="TextBox 9011"/>
+          <p:cNvPr id="9013" name="TextBox 9012"/>
           <p:cNvSpPr txBox="1"/>
           <p:nvPr/>
         </p:nvSpPr>
@@ -29823,7 +30471,7 @@
       </p:sp>
       <p:sp>
         <p:nvSpPr>
-          <p:cNvPr id="9013" name="TextBox 9012"/>
+          <p:cNvPr id="9014" name="TextBox 9013"/>
           <p:cNvSpPr txBox="1"/>
           <p:nvPr/>
         </p:nvSpPr>
@@ -30080,16 +30728,40 @@
           </a:p>
         </p:txBody>
       </p:sp>
-      <p:sp>
-        <p:nvSpPr>
-          <p:cNvPr id="9001" name="TextBox 9000"/>
+      <p:pic>
+        <p:nvPicPr>
+          <p:cNvPr id="9001" name="Picture 9000" descr="beihang-logo.png"/>
+          <p:cNvPicPr>
+            <a:picLocks noChangeAspect="1"/>
+          </p:cNvPicPr>
+          <p:nvPr/>
+        </p:nvPicPr>
+        <p:blipFill>
+          <a:blip r:embed="rId2"/>
+          <a:stretch>
+            <a:fillRect/>
+          </a:stretch>
+        </p:blipFill>
+        <p:spPr>
+          <a:xfrm>
+            <a:off x="9336024" y="91665"/>
+            <a:ext cx="2642616" cy="502469"/>
+          </a:xfrm>
+          <a:prstGeom prst="rect">
+            <a:avLst/>
+          </a:prstGeom>
+        </p:spPr>
+      </p:pic>
+      <p:sp>
+        <p:nvSpPr>
+          <p:cNvPr id="9002" name="TextBox 9001"/>
           <p:cNvSpPr txBox="1"/>
           <p:nvPr/>
         </p:nvSpPr>
         <p:spPr>
           <a:xfrm>
             <a:off x="1014984" y="155448"/>
-            <a:ext cx="10424160" cy="621792"/>
+            <a:ext cx="8001000" cy="621792"/>
           </a:xfrm>
           <a:prstGeom prst="rect">
             <a:avLst/>
@@ -30122,7 +30794,7 @@
       </p:sp>
       <p:sp>
         <p:nvSpPr>
-          <p:cNvPr id="9002" name="Rectangle 9001"/>
+          <p:cNvPr id="9003" name="Rectangle 9002"/>
           <p:cNvSpPr/>
           <p:nvPr/>
         </p:nvSpPr>
@@ -30166,7 +30838,7 @@
       </p:sp>
       <p:sp>
         <p:nvSpPr>
-          <p:cNvPr id="9003" name="TextBox 9002"/>
+          <p:cNvPr id="9004" name="TextBox 9003"/>
           <p:cNvSpPr txBox="1"/>
           <p:nvPr/>
         </p:nvSpPr>
@@ -30202,14 +30874,14 @@
       </p:sp>
       <p:pic>
         <p:nvPicPr>
-          <p:cNvPr id="9004" name="Picture 9003" descr="fig5-1a-shared-binder.png"/>
+          <p:cNvPr id="9005" name="Picture 9004" descr="fig5-1a-shared-binder.png"/>
           <p:cNvPicPr>
             <a:picLocks noChangeAspect="1"/>
           </p:cNvPicPr>
           <p:nvPr/>
         </p:nvPicPr>
         <p:blipFill>
-          <a:blip r:embed="rId2"/>
+          <a:blip r:embed="rId3"/>
           <a:stretch>
             <a:fillRect/>
           </a:stretch>
@@ -30226,7 +30898,7 @@
       </p:pic>
       <p:sp>
         <p:nvSpPr>
-          <p:cNvPr id="9005" name="TextBox 9004"/>
+          <p:cNvPr id="9006" name="TextBox 9005"/>
           <p:cNvSpPr txBox="1"/>
           <p:nvPr/>
         </p:nvSpPr>
@@ -30306,7 +30978,7 @@
       </p:sp>
       <p:sp>
         <p:nvSpPr>
-          <p:cNvPr id="9006" name="TextBox 9005"/>
+          <p:cNvPr id="9007" name="TextBox 9006"/>
           <p:cNvSpPr txBox="1"/>
           <p:nvPr/>
         </p:nvSpPr>
@@ -30563,16 +31235,40 @@
           </a:p>
         </p:txBody>
       </p:sp>
-      <p:sp>
-        <p:nvSpPr>
-          <p:cNvPr id="9001" name="TextBox 9000"/>
+      <p:pic>
+        <p:nvPicPr>
+          <p:cNvPr id="9001" name="Picture 9000" descr="beihang-logo.png"/>
+          <p:cNvPicPr>
+            <a:picLocks noChangeAspect="1"/>
+          </p:cNvPicPr>
+          <p:nvPr/>
+        </p:nvPicPr>
+        <p:blipFill>
+          <a:blip r:embed="rId2"/>
+          <a:stretch>
+            <a:fillRect/>
+          </a:stretch>
+        </p:blipFill>
+        <p:spPr>
+          <a:xfrm>
+            <a:off x="9336024" y="91665"/>
+            <a:ext cx="2642616" cy="502469"/>
+          </a:xfrm>
+          <a:prstGeom prst="rect">
+            <a:avLst/>
+          </a:prstGeom>
+        </p:spPr>
+      </p:pic>
+      <p:sp>
+        <p:nvSpPr>
+          <p:cNvPr id="9002" name="TextBox 9001"/>
           <p:cNvSpPr txBox="1"/>
           <p:nvPr/>
         </p:nvSpPr>
         <p:spPr>
           <a:xfrm>
             <a:off x="1014984" y="155448"/>
-            <a:ext cx="10424160" cy="621792"/>
+            <a:ext cx="8001000" cy="621792"/>
           </a:xfrm>
           <a:prstGeom prst="rect">
             <a:avLst/>
@@ -30605,7 +31301,7 @@
       </p:sp>
       <p:sp>
         <p:nvSpPr>
-          <p:cNvPr id="9002" name="Rectangle 9001"/>
+          <p:cNvPr id="9003" name="Rectangle 9002"/>
           <p:cNvSpPr/>
           <p:nvPr/>
         </p:nvSpPr>
@@ -30649,7 +31345,7 @@
       </p:sp>
       <p:sp>
         <p:nvSpPr>
-          <p:cNvPr id="9003" name="TextBox 9002"/>
+          <p:cNvPr id="9004" name="TextBox 9003"/>
           <p:cNvSpPr txBox="1"/>
           <p:nvPr/>
         </p:nvSpPr>
@@ -30685,14 +31381,14 @@
       </p:sp>
       <p:pic>
         <p:nvPicPr>
-          <p:cNvPr id="9004" name="Picture 9003" descr="fig3-1-system-arch.png"/>
+          <p:cNvPr id="9005" name="Picture 9004" descr="fig3-1-system-arch.png"/>
           <p:cNvPicPr>
             <a:picLocks noChangeAspect="1"/>
           </p:cNvPicPr>
           <p:nvPr/>
         </p:nvPicPr>
         <p:blipFill>
-          <a:blip r:embed="rId2"/>
+          <a:blip r:embed="rId3"/>
           <a:stretch>
             <a:fillRect/>
           </a:stretch>
@@ -30709,7 +31405,7 @@
       </p:pic>
       <p:sp>
         <p:nvSpPr>
-          <p:cNvPr id="9005" name="TextBox 9004"/>
+          <p:cNvPr id="9006" name="TextBox 9005"/>
           <p:cNvSpPr txBox="1"/>
           <p:nvPr/>
         </p:nvSpPr>
@@ -30789,7 +31485,7 @@
       </p:sp>
       <p:sp>
         <p:nvSpPr>
-          <p:cNvPr id="9006" name="TextBox 9005"/>
+          <p:cNvPr id="9007" name="TextBox 9006"/>
           <p:cNvSpPr txBox="1"/>
           <p:nvPr/>
         </p:nvSpPr>
@@ -31046,16 +31742,40 @@
           </a:p>
         </p:txBody>
       </p:sp>
-      <p:sp>
-        <p:nvSpPr>
-          <p:cNvPr id="9001" name="TextBox 9000"/>
+      <p:pic>
+        <p:nvPicPr>
+          <p:cNvPr id="9001" name="Picture 9000" descr="beihang-logo.png"/>
+          <p:cNvPicPr>
+            <a:picLocks noChangeAspect="1"/>
+          </p:cNvPicPr>
+          <p:nvPr/>
+        </p:nvPicPr>
+        <p:blipFill>
+          <a:blip r:embed="rId2"/>
+          <a:stretch>
+            <a:fillRect/>
+          </a:stretch>
+        </p:blipFill>
+        <p:spPr>
+          <a:xfrm>
+            <a:off x="9336024" y="91665"/>
+            <a:ext cx="2642616" cy="502469"/>
+          </a:xfrm>
+          <a:prstGeom prst="rect">
+            <a:avLst/>
+          </a:prstGeom>
+        </p:spPr>
+      </p:pic>
+      <p:sp>
+        <p:nvSpPr>
+          <p:cNvPr id="9002" name="TextBox 9001"/>
           <p:cNvSpPr txBox="1"/>
           <p:nvPr/>
         </p:nvSpPr>
         <p:spPr>
           <a:xfrm>
             <a:off x="1014984" y="155448"/>
-            <a:ext cx="10424160" cy="621792"/>
+            <a:ext cx="8001000" cy="621792"/>
           </a:xfrm>
           <a:prstGeom prst="rect">
             <a:avLst/>
@@ -31088,7 +31808,7 @@
       </p:sp>
       <p:sp>
         <p:nvSpPr>
-          <p:cNvPr id="9002" name="Rectangle 9001"/>
+          <p:cNvPr id="9003" name="Rectangle 9002"/>
           <p:cNvSpPr/>
           <p:nvPr/>
         </p:nvSpPr>
@@ -31132,7 +31852,7 @@
       </p:sp>
       <p:sp>
         <p:nvSpPr>
-          <p:cNvPr id="9003" name="TextBox 9002"/>
+          <p:cNvPr id="9004" name="TextBox 9003"/>
           <p:cNvSpPr txBox="1"/>
           <p:nvPr/>
         </p:nvSpPr>
@@ -31168,14 +31888,14 @@
       </p:sp>
       <p:pic>
         <p:nvPicPr>
-          <p:cNvPr id="9004" name="Picture 9003" descr="fig3-3-dispatcher-flow.png"/>
+          <p:cNvPr id="9005" name="Picture 9004" descr="fig3-3-dispatcher-flow.png"/>
           <p:cNvPicPr>
             <a:picLocks noChangeAspect="1"/>
           </p:cNvPicPr>
           <p:nvPr/>
         </p:nvPicPr>
         <p:blipFill>
-          <a:blip r:embed="rId2"/>
+          <a:blip r:embed="rId3"/>
           <a:stretch>
             <a:fillRect/>
           </a:stretch>
@@ -31192,7 +31912,7 @@
       </p:pic>
       <p:sp>
         <p:nvSpPr>
-          <p:cNvPr id="9005" name="TextBox 9004"/>
+          <p:cNvPr id="9006" name="TextBox 9005"/>
           <p:cNvSpPr txBox="1"/>
           <p:nvPr/>
         </p:nvSpPr>
@@ -31272,7 +31992,7 @@
       </p:sp>
       <p:sp>
         <p:nvSpPr>
-          <p:cNvPr id="9006" name="TextBox 9005"/>
+          <p:cNvPr id="9007" name="TextBox 9006"/>
           <p:cNvSpPr txBox="1"/>
           <p:nvPr/>
         </p:nvSpPr>
@@ -31529,16 +32249,40 @@
           </a:p>
         </p:txBody>
       </p:sp>
-      <p:sp>
-        <p:nvSpPr>
-          <p:cNvPr id="9001" name="TextBox 9000"/>
+      <p:pic>
+        <p:nvPicPr>
+          <p:cNvPr id="9001" name="Picture 9000" descr="beihang-logo.png"/>
+          <p:cNvPicPr>
+            <a:picLocks noChangeAspect="1"/>
+          </p:cNvPicPr>
+          <p:nvPr/>
+        </p:nvPicPr>
+        <p:blipFill>
+          <a:blip r:embed="rId2"/>
+          <a:stretch>
+            <a:fillRect/>
+          </a:stretch>
+        </p:blipFill>
+        <p:spPr>
+          <a:xfrm>
+            <a:off x="9336024" y="91665"/>
+            <a:ext cx="2642616" cy="502469"/>
+          </a:xfrm>
+          <a:prstGeom prst="rect">
+            <a:avLst/>
+          </a:prstGeom>
+        </p:spPr>
+      </p:pic>
+      <p:sp>
+        <p:nvSpPr>
+          <p:cNvPr id="9002" name="TextBox 9001"/>
           <p:cNvSpPr txBox="1"/>
           <p:nvPr/>
         </p:nvSpPr>
         <p:spPr>
           <a:xfrm>
             <a:off x="1014984" y="155448"/>
-            <a:ext cx="10424160" cy="621792"/>
+            <a:ext cx="8001000" cy="621792"/>
           </a:xfrm>
           <a:prstGeom prst="rect">
             <a:avLst/>
@@ -31571,7 +32315,7 @@
       </p:sp>
       <p:sp>
         <p:nvSpPr>
-          <p:cNvPr id="9002" name="Rectangle 9001"/>
+          <p:cNvPr id="9003" name="Rectangle 9002"/>
           <p:cNvSpPr/>
           <p:nvPr/>
         </p:nvSpPr>
@@ -31615,7 +32359,7 @@
       </p:sp>
       <p:sp>
         <p:nvSpPr>
-          <p:cNvPr id="9003" name="TextBox 9002"/>
+          <p:cNvPr id="9004" name="TextBox 9003"/>
           <p:cNvSpPr txBox="1"/>
           <p:nvPr/>
         </p:nvSpPr>
@@ -31651,14 +32395,14 @@
       </p:sp>
       <p:pic>
         <p:nvPicPr>
-          <p:cNvPr id="9004" name="Picture 9003" descr="fig3-4-scheduler-flow.png"/>
+          <p:cNvPr id="9005" name="Picture 9004" descr="fig3-4-scheduler-flow.png"/>
           <p:cNvPicPr>
             <a:picLocks noChangeAspect="1"/>
           </p:cNvPicPr>
           <p:nvPr/>
         </p:nvPicPr>
         <p:blipFill>
-          <a:blip r:embed="rId2"/>
+          <a:blip r:embed="rId3"/>
           <a:stretch>
             <a:fillRect/>
           </a:stretch>
@@ -31675,7 +32419,7 @@
       </p:pic>
       <p:sp>
         <p:nvSpPr>
-          <p:cNvPr id="9005" name="TextBox 9004"/>
+          <p:cNvPr id="9006" name="TextBox 9005"/>
           <p:cNvSpPr txBox="1"/>
           <p:nvPr/>
         </p:nvSpPr>
@@ -31755,7 +32499,7 @@
       </p:sp>
       <p:sp>
         <p:nvSpPr>
-          <p:cNvPr id="9006" name="TextBox 9005"/>
+          <p:cNvPr id="9007" name="TextBox 9006"/>
           <p:cNvSpPr txBox="1"/>
           <p:nvPr/>
         </p:nvSpPr>
@@ -32012,16 +32756,40 @@
           </a:p>
         </p:txBody>
       </p:sp>
-      <p:sp>
-        <p:nvSpPr>
-          <p:cNvPr id="9001" name="TextBox 9000"/>
+      <p:pic>
+        <p:nvPicPr>
+          <p:cNvPr id="9001" name="Picture 9000" descr="beihang-logo.png"/>
+          <p:cNvPicPr>
+            <a:picLocks noChangeAspect="1"/>
+          </p:cNvPicPr>
+          <p:nvPr/>
+        </p:nvPicPr>
+        <p:blipFill>
+          <a:blip r:embed="rId2"/>
+          <a:stretch>
+            <a:fillRect/>
+          </a:stretch>
+        </p:blipFill>
+        <p:spPr>
+          <a:xfrm>
+            <a:off x="9336024" y="91665"/>
+            <a:ext cx="2642616" cy="502469"/>
+          </a:xfrm>
+          <a:prstGeom prst="rect">
+            <a:avLst/>
+          </a:prstGeom>
+        </p:spPr>
+      </p:pic>
+      <p:sp>
+        <p:nvSpPr>
+          <p:cNvPr id="9002" name="TextBox 9001"/>
           <p:cNvSpPr txBox="1"/>
           <p:nvPr/>
         </p:nvSpPr>
         <p:spPr>
           <a:xfrm>
             <a:off x="1014984" y="155448"/>
-            <a:ext cx="10424160" cy="621792"/>
+            <a:ext cx="8001000" cy="621792"/>
           </a:xfrm>
           <a:prstGeom prst="rect">
             <a:avLst/>
@@ -32054,7 +32822,7 @@
       </p:sp>
       <p:sp>
         <p:nvSpPr>
-          <p:cNvPr id="9002" name="Rectangle 9001"/>
+          <p:cNvPr id="9003" name="Rectangle 9002"/>
           <p:cNvSpPr/>
           <p:nvPr/>
         </p:nvSpPr>
@@ -32098,7 +32866,7 @@
       </p:sp>
       <p:sp>
         <p:nvSpPr>
-          <p:cNvPr id="9003" name="TextBox 9002"/>
+          <p:cNvPr id="9004" name="TextBox 9003"/>
           <p:cNvSpPr txBox="1"/>
           <p:nvPr/>
         </p:nvSpPr>
@@ -32134,31 +32902,7 @@
       </p:sp>
       <p:pic>
         <p:nvPicPr>
-          <p:cNvPr id="9004" name="Picture 9003" descr="fig5-1a-shared-binder.png"/>
-          <p:cNvPicPr>
-            <a:picLocks noChangeAspect="1"/>
-          </p:cNvPicPr>
-          <p:nvPr/>
-        </p:nvPicPr>
-        <p:blipFill>
-          <a:blip r:embed="rId2"/>
-          <a:stretch>
-            <a:fillRect/>
-          </a:stretch>
-        </p:blipFill>
-        <p:spPr>
-          <a:xfrm>
-            <a:off x="1388676" y="1828800"/>
-            <a:ext cx="3751462" cy="3200400"/>
-          </a:xfrm>
-          <a:prstGeom prst="rect">
-            <a:avLst/>
-          </a:prstGeom>
-        </p:spPr>
-      </p:pic>
-      <p:pic>
-        <p:nvPicPr>
-          <p:cNvPr id="9005" name="Picture 9004" descr="fig5-1b-eno-arch.png"/>
+          <p:cNvPr id="9005" name="Picture 9004" descr="fig5-1a-shared-binder.png"/>
           <p:cNvPicPr>
             <a:picLocks noChangeAspect="1"/>
           </p:cNvPicPr>
@@ -32172,6 +32916,30 @@
         </p:blipFill>
         <p:spPr>
           <a:xfrm>
+            <a:off x="1388676" y="1828800"/>
+            <a:ext cx="3751462" cy="3200400"/>
+          </a:xfrm>
+          <a:prstGeom prst="rect">
+            <a:avLst/>
+          </a:prstGeom>
+        </p:spPr>
+      </p:pic>
+      <p:pic>
+        <p:nvPicPr>
+          <p:cNvPr id="9006" name="Picture 9005" descr="fig5-1b-eno-arch.png"/>
+          <p:cNvPicPr>
+            <a:picLocks noChangeAspect="1"/>
+          </p:cNvPicPr>
+          <p:nvPr/>
+        </p:nvPicPr>
+        <p:blipFill>
+          <a:blip r:embed="rId4"/>
+          <a:stretch>
+            <a:fillRect/>
+          </a:stretch>
+        </p:blipFill>
+        <p:spPr>
+          <a:xfrm>
             <a:off x="8079354" y="1828800"/>
             <a:ext cx="1580651" cy="3200400"/>
           </a:xfrm>
@@ -32182,7 +32950,7 @@
       </p:pic>
       <p:sp>
         <p:nvSpPr>
-          <p:cNvPr id="9006" name="TextBox 9005"/>
+          <p:cNvPr id="9007" name="TextBox 9006"/>
           <p:cNvSpPr txBox="1"/>
           <p:nvPr/>
         </p:nvSpPr>
@@ -32252,7 +33020,7 @@
       </p:sp>
       <p:sp>
         <p:nvSpPr>
-          <p:cNvPr id="9007" name="TextBox 9006"/>
+          <p:cNvPr id="9008" name="TextBox 9007"/>
           <p:cNvSpPr txBox="1"/>
           <p:nvPr/>
         </p:nvSpPr>

--- a/docs/thesis/defense/答辩PPT-北航模板版.pptx
+++ b/docs/thesis/defense/答辩PPT-北航模板版.pptx
@@ -7538,7 +7538,7 @@
       <p:grpSpPr/>
       <p:pic>
         <p:nvPicPr>
-          <p:cNvPr id="2" name="Picture 1" descr="beihang-logo.png"/>
+          <p:cNvPr id="2" name="Picture 1" descr="beihang-logo-navy.png"/>
           <p:cNvPicPr>
             <a:picLocks noChangeAspect="1"/>
           </p:cNvPicPr>
@@ -8065,7 +8065,7 @@
       </p:sp>
       <p:pic>
         <p:nvPicPr>
-          <p:cNvPr id="9001" name="Picture 9000" descr="beihang-logo.png"/>
+          <p:cNvPr id="9001" name="Picture 9000" descr="beihang-logo-navy.png"/>
           <p:cNvPicPr>
             <a:picLocks noChangeAspect="1"/>
           </p:cNvPicPr>
@@ -8572,7 +8572,7 @@
       </p:sp>
       <p:pic>
         <p:nvPicPr>
-          <p:cNvPr id="9001" name="Picture 9000" descr="beihang-logo.png"/>
+          <p:cNvPr id="9001" name="Picture 9000" descr="beihang-logo-navy.png"/>
           <p:cNvPicPr>
             <a:picLocks noChangeAspect="1"/>
           </p:cNvPicPr>
@@ -9811,7 +9811,7 @@
       </p:sp>
       <p:pic>
         <p:nvPicPr>
-          <p:cNvPr id="9001" name="Picture 9000" descr="beihang-logo.png"/>
+          <p:cNvPr id="9001" name="Picture 9000" descr="beihang-logo-navy.png"/>
           <p:cNvPicPr>
             <a:picLocks noChangeAspect="1"/>
           </p:cNvPicPr>
@@ -10318,7 +10318,7 @@
       </p:sp>
       <p:pic>
         <p:nvPicPr>
-          <p:cNvPr id="9001" name="Picture 9000" descr="beihang-logo.png"/>
+          <p:cNvPr id="9001" name="Picture 9000" descr="beihang-logo-navy.png"/>
           <p:cNvPicPr>
             <a:picLocks noChangeAspect="1"/>
           </p:cNvPicPr>
@@ -11127,7 +11127,7 @@
       </p:sp>
       <p:pic>
         <p:nvPicPr>
-          <p:cNvPr id="9001" name="Picture 9000" descr="beihang-logo.png"/>
+          <p:cNvPr id="9001" name="Picture 9000" descr="beihang-logo-navy.png"/>
           <p:cNvPicPr>
             <a:picLocks noChangeAspect="1"/>
           </p:cNvPicPr>
@@ -12318,7 +12318,7 @@
       </p:sp>
       <p:pic>
         <p:nvPicPr>
-          <p:cNvPr id="9001" name="Picture 9000" descr="beihang-logo.png"/>
+          <p:cNvPr id="9001" name="Picture 9000" descr="beihang-logo-navy.png"/>
           <p:cNvPicPr>
             <a:picLocks noChangeAspect="1"/>
           </p:cNvPicPr>
@@ -13287,7 +13287,7 @@
       </p:sp>
       <p:pic>
         <p:nvPicPr>
-          <p:cNvPr id="9001" name="Picture 9000" descr="beihang-logo.png"/>
+          <p:cNvPr id="9001" name="Picture 9000" descr="beihang-logo-navy.png"/>
           <p:cNvPicPr>
             <a:picLocks noChangeAspect="1"/>
           </p:cNvPicPr>
@@ -13830,7 +13830,7 @@
       </p:sp>
       <p:pic>
         <p:nvPicPr>
-          <p:cNvPr id="9001" name="Picture 9000" descr="beihang-logo.png"/>
+          <p:cNvPr id="9001" name="Picture 9000" descr="beihang-logo-navy.png"/>
           <p:cNvPicPr>
             <a:picLocks noChangeAspect="1"/>
           </p:cNvPicPr>
@@ -14373,7 +14373,7 @@
       </p:sp>
       <p:pic>
         <p:nvPicPr>
-          <p:cNvPr id="9001" name="Picture 9000" descr="beihang-logo.png"/>
+          <p:cNvPr id="9001" name="Picture 9000" descr="beihang-logo-navy.png"/>
           <p:cNvPicPr>
             <a:picLocks noChangeAspect="1"/>
           </p:cNvPicPr>
@@ -15384,7 +15384,7 @@
       </p:sp>
       <p:pic>
         <p:nvPicPr>
-          <p:cNvPr id="9001" name="Picture 9000" descr="beihang-logo.png"/>
+          <p:cNvPr id="9001" name="Picture 9000" descr="beihang-logo-navy.png"/>
           <p:cNvPicPr>
             <a:picLocks noChangeAspect="1"/>
           </p:cNvPicPr>
@@ -15927,7 +15927,7 @@
       </p:sp>
       <p:pic>
         <p:nvPicPr>
-          <p:cNvPr id="9001" name="Picture 9000" descr="beihang-logo.png"/>
+          <p:cNvPr id="9001" name="Picture 9000" descr="beihang-logo-navy.png"/>
           <p:cNvPicPr>
             <a:picLocks noChangeAspect="1"/>
           </p:cNvPicPr>
@@ -16928,7 +16928,7 @@
       </p:sp>
       <p:pic>
         <p:nvPicPr>
-          <p:cNvPr id="9001" name="Picture 9000" descr="beihang-logo.png"/>
+          <p:cNvPr id="9001" name="Picture 9000" descr="beihang-logo-navy.png"/>
           <p:cNvPicPr>
             <a:picLocks noChangeAspect="1"/>
           </p:cNvPicPr>
@@ -17471,7 +17471,7 @@
       </p:sp>
       <p:pic>
         <p:nvPicPr>
-          <p:cNvPr id="9001" name="Picture 9000" descr="beihang-logo.png"/>
+          <p:cNvPr id="9001" name="Picture 9000" descr="beihang-logo-navy.png"/>
           <p:cNvPicPr>
             <a:picLocks noChangeAspect="1"/>
           </p:cNvPicPr>
@@ -18373,7 +18373,7 @@
       </p:sp>
       <p:pic>
         <p:nvPicPr>
-          <p:cNvPr id="9001" name="Picture 9000" descr="beihang-logo.png"/>
+          <p:cNvPr id="9001" name="Picture 9000" descr="beihang-logo-navy.png"/>
           <p:cNvPicPr>
             <a:picLocks noChangeAspect="1"/>
           </p:cNvPicPr>
@@ -19289,7 +19289,7 @@
       </p:sp>
       <p:pic>
         <p:nvPicPr>
-          <p:cNvPr id="9001" name="Picture 9000" descr="beihang-logo.png"/>
+          <p:cNvPr id="9001" name="Picture 9000" descr="beihang-logo-navy.png"/>
           <p:cNvPicPr>
             <a:picLocks noChangeAspect="1"/>
           </p:cNvPicPr>
@@ -20205,7 +20205,7 @@
       </p:sp>
       <p:pic>
         <p:nvPicPr>
-          <p:cNvPr id="9001" name="Picture 9000" descr="beihang-logo.png"/>
+          <p:cNvPr id="9001" name="Picture 9000" descr="beihang-logo-navy.png"/>
           <p:cNvPicPr>
             <a:picLocks noChangeAspect="1"/>
           </p:cNvPicPr>
@@ -21544,7 +21544,7 @@
       </p:sp>
       <p:pic>
         <p:nvPicPr>
-          <p:cNvPr id="9001" name="Picture 9000" descr="beihang-logo.png"/>
+          <p:cNvPr id="9001" name="Picture 9000" descr="beihang-logo-navy.png"/>
           <p:cNvPicPr>
             <a:picLocks noChangeAspect="1"/>
           </p:cNvPicPr>
@@ -22686,7 +22686,7 @@
       <p:grpSpPr/>
       <p:pic>
         <p:nvPicPr>
-          <p:cNvPr id="2" name="Picture 1" descr="beihang-logo.png"/>
+          <p:cNvPr id="2" name="Picture 1" descr="beihang-logo-navy.png"/>
           <p:cNvPicPr>
             <a:picLocks noChangeAspect="1"/>
           </p:cNvPicPr>
@@ -23226,7 +23226,7 @@
       </p:sp>
       <p:pic>
         <p:nvPicPr>
-          <p:cNvPr id="9001" name="Picture 9000" descr="beihang-logo.png"/>
+          <p:cNvPr id="9001" name="Picture 9000" descr="beihang-logo-navy.png"/>
           <p:cNvPicPr>
             <a:picLocks noChangeAspect="1"/>
           </p:cNvPicPr>
@@ -24592,7 +24592,7 @@
       </p:sp>
       <p:pic>
         <p:nvPicPr>
-          <p:cNvPr id="9001" name="Picture 9000" descr="beihang-logo.png"/>
+          <p:cNvPr id="9001" name="Picture 9000" descr="beihang-logo-navy.png"/>
           <p:cNvPicPr>
             <a:picLocks noChangeAspect="1"/>
           </p:cNvPicPr>
@@ -25620,7 +25620,7 @@
       </p:sp>
       <p:pic>
         <p:nvPicPr>
-          <p:cNvPr id="9001" name="Picture 9000" descr="beihang-logo.png"/>
+          <p:cNvPr id="9001" name="Picture 9000" descr="beihang-logo-navy.png"/>
           <p:cNvPicPr>
             <a:picLocks noChangeAspect="1"/>
           </p:cNvPicPr>
@@ -26103,7 +26103,7 @@
       </p:sp>
       <p:pic>
         <p:nvPicPr>
-          <p:cNvPr id="9001" name="Picture 9000" descr="beihang-logo.png"/>
+          <p:cNvPr id="9001" name="Picture 9000" descr="beihang-logo-navy.png"/>
           <p:cNvPicPr>
             <a:picLocks noChangeAspect="1"/>
           </p:cNvPicPr>
@@ -27398,7 +27398,7 @@
       </p:sp>
       <p:pic>
         <p:nvPicPr>
-          <p:cNvPr id="9001" name="Picture 9000" descr="beihang-logo.png"/>
+          <p:cNvPr id="9001" name="Picture 9000" descr="beihang-logo-navy.png"/>
           <p:cNvPicPr>
             <a:picLocks noChangeAspect="1"/>
           </p:cNvPicPr>
@@ -28398,7 +28398,7 @@
       </p:sp>
       <p:pic>
         <p:nvPicPr>
-          <p:cNvPr id="9001" name="Picture 9000" descr="beihang-logo.png"/>
+          <p:cNvPr id="9001" name="Picture 9000" descr="beihang-logo-navy.png"/>
           <p:cNvPicPr>
             <a:picLocks noChangeAspect="1"/>
           </p:cNvPicPr>
@@ -28881,7 +28881,7 @@
       </p:sp>
       <p:pic>
         <p:nvPicPr>
-          <p:cNvPr id="9001" name="Picture 9000" descr="beihang-logo.png"/>
+          <p:cNvPr id="9001" name="Picture 9000" descr="beihang-logo-navy.png"/>
           <p:cNvPicPr>
             <a:picLocks noChangeAspect="1"/>
           </p:cNvPicPr>
@@ -29364,7 +29364,7 @@
       </p:sp>
       <p:pic>
         <p:nvPicPr>
-          <p:cNvPr id="9001" name="Picture 9000" descr="beihang-logo.png"/>
+          <p:cNvPr id="9001" name="Picture 9000" descr="beihang-logo-navy.png"/>
           <p:cNvPicPr>
             <a:picLocks noChangeAspect="1"/>
           </p:cNvPicPr>
@@ -29885,7 +29885,7 @@
       </p:sp>
       <p:pic>
         <p:nvPicPr>
-          <p:cNvPr id="9001" name="Picture 9000" descr="beihang-logo.png"/>
+          <p:cNvPr id="9001" name="Picture 9000" descr="beihang-logo-navy.png"/>
           <p:cNvPicPr>
             <a:picLocks noChangeAspect="1"/>
           </p:cNvPicPr>
@@ -30730,7 +30730,7 @@
       </p:sp>
       <p:pic>
         <p:nvPicPr>
-          <p:cNvPr id="9001" name="Picture 9000" descr="beihang-logo.png"/>
+          <p:cNvPr id="9001" name="Picture 9000" descr="beihang-logo-navy.png"/>
           <p:cNvPicPr>
             <a:picLocks noChangeAspect="1"/>
           </p:cNvPicPr>
@@ -31237,7 +31237,7 @@
       </p:sp>
       <p:pic>
         <p:nvPicPr>
-          <p:cNvPr id="9001" name="Picture 9000" descr="beihang-logo.png"/>
+          <p:cNvPr id="9001" name="Picture 9000" descr="beihang-logo-navy.png"/>
           <p:cNvPicPr>
             <a:picLocks noChangeAspect="1"/>
           </p:cNvPicPr>
@@ -31744,7 +31744,7 @@
       </p:sp>
       <p:pic>
         <p:nvPicPr>
-          <p:cNvPr id="9001" name="Picture 9000" descr="beihang-logo.png"/>
+          <p:cNvPr id="9001" name="Picture 9000" descr="beihang-logo-navy.png"/>
           <p:cNvPicPr>
             <a:picLocks noChangeAspect="1"/>
           </p:cNvPicPr>
@@ -32251,7 +32251,7 @@
       </p:sp>
       <p:pic>
         <p:nvPicPr>
-          <p:cNvPr id="9001" name="Picture 9000" descr="beihang-logo.png"/>
+          <p:cNvPr id="9001" name="Picture 9000" descr="beihang-logo-navy.png"/>
           <p:cNvPicPr>
             <a:picLocks noChangeAspect="1"/>
           </p:cNvPicPr>
@@ -32758,7 +32758,7 @@
       </p:sp>
       <p:pic>
         <p:nvPicPr>
-          <p:cNvPr id="9001" name="Picture 9000" descr="beihang-logo.png"/>
+          <p:cNvPr id="9001" name="Picture 9000" descr="beihang-logo-navy.png"/>
           <p:cNvPicPr>
             <a:picLocks noChangeAspect="1"/>
           </p:cNvPicPr>

--- a/docs/thesis/defense/答辩PPT-北航模板版.pptx
+++ b/docs/thesis/defense/答辩PPT-北航模板版.pptx
@@ -15977,14 +15977,14 @@
               </a:lnSpc>
             </a:pPr>
             <a:r>
-              <a:rPr sz="2400" b="1">
+              <a:rPr sz="3000" b="1">
                 <a:solidFill>
                   <a:srgbClr val="113E6A"/>
                 </a:solidFill>
                 <a:latin typeface="Arial"/>
                 <a:ea typeface="微软雅黑"/>
               </a:rPr>
-              <a:t>万节点规模下，吞吐上限与单点风险同时暴露</a:t>
+              <a:t>研究背景</a:t>
             </a:r>
           </a:p>
         </p:txBody>
@@ -16064,7 +16064,7 @@
                 <a:latin typeface="Arial"/>
                 <a:ea typeface="微软雅黑"/>
               </a:rPr>
-              <a:t>业务要求秒级承接海量 Pod，又不能因单点中断；单实例架构在两头受制</a:t>
+              <a:t>生产集群进入万节点量级，单实例架构在吞吐与高可用上同时受制</a:t>
             </a:r>
           </a:p>
         </p:txBody>

--- a/docs/thesis/defense/答辩PPT-北航模板版.pptx
+++ b/docs/thesis/defense/答辩PPT-北航模板版.pptx
@@ -16071,14 +16071,54 @@
       </p:sp>
       <p:sp>
         <p:nvSpPr>
-          <p:cNvPr id="9005" name="Rounded Rectangle 9004"/>
+          <p:cNvPr id="9005" name="TextBox 9004"/>
+          <p:cNvSpPr txBox="1"/>
+          <p:nvPr/>
+        </p:nvSpPr>
+        <p:spPr>
+          <a:xfrm>
+            <a:off x="1014984" y="1719072"/>
+            <a:ext cx="10058400" cy="960120"/>
+          </a:xfrm>
+          <a:prstGeom prst="rect">
+            <a:avLst/>
+          </a:prstGeom>
+          <a:noFill/>
+        </p:spPr>
+        <p:txBody>
+          <a:bodyPr wrap="square" anchor="t" lIns="0" rIns="0" tIns="0" bIns="0">
+            <a:spAutoFit/>
+          </a:bodyPr>
+          <a:lstStyle/>
+          <a:p>
+            <a:pPr algn="l">
+              <a:lnSpc>
+                <a:spcPct val="135000"/>
+              </a:lnSpc>
+            </a:pPr>
+            <a:r>
+              <a:rPr sz="1300" b="0">
+                <a:solidFill>
+                  <a:srgbClr val="2E2C2C"/>
+                </a:solidFill>
+                <a:latin typeface="Arial"/>
+                <a:ea typeface="微软雅黑"/>
+              </a:rPr>
+              <a:t>Kubernetes 已成为云原生的事实标准，调度器处在 Pod 生命周期的关键路径上：它的吞吐与延迟直接决定集群资源利用率与业务响应速度。千节点规模下单实例尚可支撑，集群进入万节点量级后，三个瓶颈同时显现。</a:t>
+            </a:r>
+          </a:p>
+        </p:txBody>
+      </p:sp>
+      <p:sp>
+        <p:nvSpPr>
+          <p:cNvPr id="9006" name="Rounded Rectangle 9005"/>
           <p:cNvSpPr/>
           <p:nvPr/>
         </p:nvSpPr>
         <p:spPr>
           <a:xfrm>
-            <a:off x="566928" y="1874519"/>
-            <a:ext cx="3517391" cy="1371600"/>
+            <a:off x="566928" y="2834640"/>
+            <a:ext cx="3517391" cy="1353312"/>
           </a:xfrm>
           <a:prstGeom prst="roundRect">
             <a:avLst/>
@@ -16117,13 +16157,13 @@
       </p:sp>
       <p:sp>
         <p:nvSpPr>
-          <p:cNvPr id="9006" name="Oval 9005"/>
+          <p:cNvPr id="9007" name="Oval 9006"/>
           <p:cNvSpPr/>
           <p:nvPr/>
         </p:nvSpPr>
         <p:spPr>
           <a:xfrm>
-            <a:off x="713232" y="2011679"/>
+            <a:off x="713232" y="2971800"/>
             <a:ext cx="274320" cy="274320"/>
           </a:xfrm>
           <a:prstGeom prst="ellipse">
@@ -16171,14 +16211,14 @@
       </p:sp>
       <p:sp>
         <p:nvSpPr>
-          <p:cNvPr id="9007" name="TextBox 9006"/>
+          <p:cNvPr id="9008" name="TextBox 9007"/>
           <p:cNvSpPr txBox="1"/>
           <p:nvPr/>
         </p:nvSpPr>
         <p:spPr>
           <a:xfrm>
-            <a:off x="1078992" y="2011679"/>
-            <a:ext cx="2877312" cy="1170432"/>
+            <a:off x="1078992" y="2971800"/>
+            <a:ext cx="2877312" cy="1152144"/>
           </a:xfrm>
           <a:prstGeom prst="rect">
             <a:avLst/>
@@ -16200,7 +16240,7 @@
                 <a:latin typeface="Arial"/>
                 <a:ea typeface="微软雅黑"/>
               </a:rPr>
-              <a:t>规模</a:t>
+              <a:t>吞吐存在上限</a:t>
             </a:r>
           </a:p>
           <a:p>
@@ -16220,21 +16260,21 @@
                 <a:latin typeface="Arial"/>
                 <a:ea typeface="微软雅黑"/>
               </a:rPr>
-              <a:t>生产集群已进入万节点级，规模仍在增长</a:t>
-            </a:r>
-          </a:p>
-        </p:txBody>
-      </p:sp>
-      <p:sp>
-        <p:nvSpPr>
-          <p:cNvPr id="9008" name="Rounded Rectangle 9007"/>
+              <a:t>activeQ 串行处理 Pod，大规模弹性伸缩与批任务启动被拖慢</a:t>
+            </a:r>
+          </a:p>
+        </p:txBody>
+      </p:sp>
+      <p:sp>
+        <p:nvSpPr>
+          <p:cNvPr id="9009" name="Rounded Rectangle 9008"/>
           <p:cNvSpPr/>
           <p:nvPr/>
         </p:nvSpPr>
         <p:spPr>
           <a:xfrm>
-            <a:off x="4340351" y="1874519"/>
-            <a:ext cx="3517391" cy="1371600"/>
+            <a:off x="4340351" y="2834640"/>
+            <a:ext cx="3517391" cy="1353312"/>
           </a:xfrm>
           <a:prstGeom prst="roundRect">
             <a:avLst/>
@@ -16273,13 +16313,13 @@
       </p:sp>
       <p:sp>
         <p:nvSpPr>
-          <p:cNvPr id="9009" name="Oval 9008"/>
+          <p:cNvPr id="9010" name="Oval 9009"/>
           <p:cNvSpPr/>
           <p:nvPr/>
         </p:nvSpPr>
         <p:spPr>
           <a:xfrm>
-            <a:off x="4486656" y="2011679"/>
+            <a:off x="4486656" y="2971800"/>
             <a:ext cx="274320" cy="274320"/>
           </a:xfrm>
           <a:prstGeom prst="ellipse">
@@ -16327,14 +16367,14 @@
       </p:sp>
       <p:sp>
         <p:nvSpPr>
-          <p:cNvPr id="9010" name="TextBox 9009"/>
+          <p:cNvPr id="9011" name="TextBox 9010"/>
           <p:cNvSpPr txBox="1"/>
           <p:nvPr/>
         </p:nvSpPr>
         <p:spPr>
           <a:xfrm>
-            <a:off x="4852416" y="2011679"/>
-            <a:ext cx="2877312" cy="1170432"/>
+            <a:off x="4852416" y="2971800"/>
+            <a:ext cx="2877312" cy="1152144"/>
           </a:xfrm>
           <a:prstGeom prst="rect">
             <a:avLst/>
@@ -16356,7 +16396,7 @@
                 <a:latin typeface="Arial"/>
                 <a:ea typeface="微软雅黑"/>
               </a:rPr>
-              <a:t>吞吐</a:t>
+              <a:t>尾延迟持续抬升</a:t>
             </a:r>
           </a:p>
           <a:p>
@@ -16376,21 +16416,21 @@
                 <a:latin typeface="Arial"/>
                 <a:ea typeface="微软雅黑"/>
               </a:rPr>
-              <a:t>业务要求秒级承接海量 Pod</a:t>
-            </a:r>
-          </a:p>
-        </p:txBody>
-      </p:sp>
-      <p:sp>
-        <p:nvSpPr>
-          <p:cNvPr id="9011" name="Rounded Rectangle 9010"/>
+              <a:t>Filter/Score 遍历节点开销随规模线性上升，5000 节点下 P99 明显恶化</a:t>
+            </a:r>
+          </a:p>
+        </p:txBody>
+      </p:sp>
+      <p:sp>
+        <p:nvSpPr>
+          <p:cNvPr id="9012" name="Rounded Rectangle 9011"/>
           <p:cNvSpPr/>
           <p:nvPr/>
         </p:nvSpPr>
         <p:spPr>
           <a:xfrm>
-            <a:off x="8113775" y="1874519"/>
-            <a:ext cx="3517391" cy="1371600"/>
+            <a:off x="8113775" y="2834640"/>
+            <a:ext cx="3517391" cy="1353312"/>
           </a:xfrm>
           <a:prstGeom prst="roundRect">
             <a:avLst/>
@@ -16429,13 +16469,13 @@
       </p:sp>
       <p:sp>
         <p:nvSpPr>
-          <p:cNvPr id="9012" name="Oval 9011"/>
+          <p:cNvPr id="9013" name="Oval 9012"/>
           <p:cNvSpPr/>
           <p:nvPr/>
         </p:nvSpPr>
         <p:spPr>
           <a:xfrm>
-            <a:off x="8260079" y="2011679"/>
+            <a:off x="8260079" y="2971800"/>
             <a:ext cx="274320" cy="274320"/>
           </a:xfrm>
           <a:prstGeom prst="ellipse">
@@ -16483,14 +16523,14 @@
       </p:sp>
       <p:sp>
         <p:nvSpPr>
-          <p:cNvPr id="9013" name="TextBox 9012"/>
+          <p:cNvPr id="9014" name="TextBox 9013"/>
           <p:cNvSpPr txBox="1"/>
           <p:nvPr/>
         </p:nvSpPr>
         <p:spPr>
           <a:xfrm>
-            <a:off x="8625839" y="2011679"/>
-            <a:ext cx="2877312" cy="1170432"/>
+            <a:off x="8625839" y="2971800"/>
+            <a:ext cx="2877312" cy="1152144"/>
           </a:xfrm>
           <a:prstGeom prst="rect">
             <a:avLst/>
@@ -16512,7 +16552,7 @@
                 <a:latin typeface="Arial"/>
                 <a:ea typeface="微软雅黑"/>
               </a:rPr>
-              <a:t>可用性</a:t>
+              <a:t>单点故障风险</a:t>
             </a:r>
           </a:p>
           <a:p>
@@ -16532,20 +16572,20 @@
                 <a:latin typeface="Arial"/>
                 <a:ea typeface="微软雅黑"/>
               </a:rPr>
-              <a:t>长期运行不能因单点失效中断服务</a:t>
-            </a:r>
-          </a:p>
-        </p:txBody>
-      </p:sp>
-      <p:sp>
-        <p:nvSpPr>
-          <p:cNvPr id="9014" name="Rounded Rectangle 9013"/>
+              <a:t>Leader 崩溃后需等待 Standby 接管，这段窗口内集群完全无法调度</a:t>
+            </a:r>
+          </a:p>
+        </p:txBody>
+      </p:sp>
+      <p:sp>
+        <p:nvSpPr>
+          <p:cNvPr id="9015" name="Rounded Rectangle 9014"/>
           <p:cNvSpPr/>
           <p:nvPr/>
         </p:nvSpPr>
         <p:spPr>
           <a:xfrm>
-            <a:off x="566928" y="3657600"/>
+            <a:off x="566928" y="4617720"/>
             <a:ext cx="11064240" cy="868680"/>
           </a:xfrm>
           <a:prstGeom prst="roundRect">
@@ -16585,13 +16625,13 @@
       </p:sp>
       <p:sp>
         <p:nvSpPr>
-          <p:cNvPr id="9015" name="Rectangle 9014"/>
+          <p:cNvPr id="9016" name="Rectangle 9015"/>
           <p:cNvSpPr/>
           <p:nvPr/>
         </p:nvSpPr>
         <p:spPr>
           <a:xfrm>
-            <a:off x="566928" y="3657600"/>
+            <a:off x="566928" y="4617720"/>
             <a:ext cx="73152" cy="868680"/>
           </a:xfrm>
           <a:prstGeom prst="rect">
@@ -16629,13 +16669,13 @@
       </p:sp>
       <p:sp>
         <p:nvSpPr>
-          <p:cNvPr id="9016" name="TextBox 9015"/>
+          <p:cNvPr id="9017" name="TextBox 9016"/>
           <p:cNvSpPr txBox="1"/>
           <p:nvPr/>
         </p:nvSpPr>
         <p:spPr>
           <a:xfrm>
-            <a:off x="786384" y="3749039"/>
+            <a:off x="786384" y="4709159"/>
             <a:ext cx="10607040" cy="685800"/>
           </a:xfrm>
           <a:prstGeom prst="rect">
@@ -16662,14 +16702,14 @@
                 <a:latin typeface="Arial"/>
                 <a:ea typeface="微软雅黑"/>
               </a:rPr>
-              <a:t>单实例架构难以同时满足高吞吐与高可用，分布式改造成为必然；但改造会带来新的一致性难题。</a:t>
-            </a:r>
-          </a:p>
-        </p:txBody>
-      </p:sp>
-      <p:sp>
-        <p:nvSpPr>
-          <p:cNvPr id="9017" name="TextBox 9016"/>
+              <a:t>分布式改造是必然选择；但多实例并发又把“任一 Pod 至多绑定一次”推到设计前台。</a:t>
+            </a:r>
+          </a:p>
+        </p:txBody>
+      </p:sp>
+      <p:sp>
+        <p:nvSpPr>
+          <p:cNvPr id="9018" name="TextBox 9017"/>
           <p:cNvSpPr txBox="1"/>
           <p:nvPr/>
         </p:nvSpPr>

--- a/docs/thesis/defense/答辩PPT-北航模板版.pptx
+++ b/docs/thesis/defense/答辩PPT-北航模板版.pptx
@@ -16078,7 +16078,7 @@
         <p:spPr>
           <a:xfrm>
             <a:off x="1014984" y="1719072"/>
-            <a:ext cx="10058400" cy="960120"/>
+            <a:ext cx="10058400" cy="1143000"/>
           </a:xfrm>
           <a:prstGeom prst="rect">
             <a:avLst/>
@@ -16093,11 +16093,11 @@
           <a:p>
             <a:pPr algn="l">
               <a:lnSpc>
-                <a:spcPct val="135000"/>
+                <a:spcPct val="140000"/>
               </a:lnSpc>
             </a:pPr>
             <a:r>
-              <a:rPr sz="1300" b="0">
+              <a:rPr sz="1350" b="0">
                 <a:solidFill>
                   <a:srgbClr val="2E2C2C"/>
                 </a:solidFill>
@@ -16117,8 +16117,8 @@
         </p:nvSpPr>
         <p:spPr>
           <a:xfrm>
-            <a:off x="566928" y="2834640"/>
-            <a:ext cx="3517391" cy="1353312"/>
+            <a:off x="566928" y="2880360"/>
+            <a:ext cx="3517391" cy="2103120"/>
           </a:xfrm>
           <a:prstGeom prst="roundRect">
             <a:avLst/>
@@ -16163,7 +16163,7 @@
         </p:nvSpPr>
         <p:spPr>
           <a:xfrm>
-            <a:off x="713232" y="2971800"/>
+            <a:off x="713232" y="3017520"/>
             <a:ext cx="274320" cy="274320"/>
           </a:xfrm>
           <a:prstGeom prst="ellipse">
@@ -16217,8 +16217,8 @@
         </p:nvSpPr>
         <p:spPr>
           <a:xfrm>
-            <a:off x="1078992" y="2971800"/>
-            <a:ext cx="2877312" cy="1152144"/>
+            <a:off x="1078992" y="3017520"/>
+            <a:ext cx="2877312" cy="1901951"/>
           </a:xfrm>
           <a:prstGeom prst="rect">
             <a:avLst/>
@@ -16226,7 +16226,7 @@
           <a:noFill/>
         </p:spPr>
         <p:txBody>
-          <a:bodyPr wrap="square" anchor="t" lIns="0" rIns="0" tIns="0" bIns="0">
+          <a:bodyPr wrap="square" anchor="ctr" lIns="0" rIns="0" tIns="0" bIns="0">
             <a:spAutoFit/>
           </a:bodyPr>
           <a:lstStyle/>
@@ -16273,8 +16273,8 @@
         </p:nvSpPr>
         <p:spPr>
           <a:xfrm>
-            <a:off x="4340351" y="2834640"/>
-            <a:ext cx="3517391" cy="1353312"/>
+            <a:off x="4340351" y="2880360"/>
+            <a:ext cx="3517391" cy="2103120"/>
           </a:xfrm>
           <a:prstGeom prst="roundRect">
             <a:avLst/>
@@ -16319,7 +16319,7 @@
         </p:nvSpPr>
         <p:spPr>
           <a:xfrm>
-            <a:off x="4486656" y="2971800"/>
+            <a:off x="4486656" y="3017520"/>
             <a:ext cx="274320" cy="274320"/>
           </a:xfrm>
           <a:prstGeom prst="ellipse">
@@ -16373,8 +16373,8 @@
         </p:nvSpPr>
         <p:spPr>
           <a:xfrm>
-            <a:off x="4852416" y="2971800"/>
-            <a:ext cx="2877312" cy="1152144"/>
+            <a:off x="4852416" y="3017520"/>
+            <a:ext cx="2877312" cy="1901951"/>
           </a:xfrm>
           <a:prstGeom prst="rect">
             <a:avLst/>
@@ -16382,7 +16382,7 @@
           <a:noFill/>
         </p:spPr>
         <p:txBody>
-          <a:bodyPr wrap="square" anchor="t" lIns="0" rIns="0" tIns="0" bIns="0">
+          <a:bodyPr wrap="square" anchor="ctr" lIns="0" rIns="0" tIns="0" bIns="0">
             <a:spAutoFit/>
           </a:bodyPr>
           <a:lstStyle/>
@@ -16429,8 +16429,8 @@
         </p:nvSpPr>
         <p:spPr>
           <a:xfrm>
-            <a:off x="8113775" y="2834640"/>
-            <a:ext cx="3517391" cy="1353312"/>
+            <a:off x="8113775" y="2880360"/>
+            <a:ext cx="3517391" cy="2103120"/>
           </a:xfrm>
           <a:prstGeom prst="roundRect">
             <a:avLst/>
@@ -16475,7 +16475,7 @@
         </p:nvSpPr>
         <p:spPr>
           <a:xfrm>
-            <a:off x="8260079" y="2971800"/>
+            <a:off x="8260079" y="3017520"/>
             <a:ext cx="274320" cy="274320"/>
           </a:xfrm>
           <a:prstGeom prst="ellipse">
@@ -16529,8 +16529,8 @@
         </p:nvSpPr>
         <p:spPr>
           <a:xfrm>
-            <a:off x="8625839" y="2971800"/>
-            <a:ext cx="2877312" cy="1152144"/>
+            <a:off x="8625839" y="3017520"/>
+            <a:ext cx="2877312" cy="1901951"/>
           </a:xfrm>
           <a:prstGeom prst="rect">
             <a:avLst/>
@@ -16538,7 +16538,7 @@
           <a:noFill/>
         </p:spPr>
         <p:txBody>
-          <a:bodyPr wrap="square" anchor="t" lIns="0" rIns="0" tIns="0" bIns="0">
+          <a:bodyPr wrap="square" anchor="ctr" lIns="0" rIns="0" tIns="0" bIns="0">
             <a:spAutoFit/>
           </a:bodyPr>
           <a:lstStyle/>
@@ -16579,137 +16579,7 @@
       </p:sp>
       <p:sp>
         <p:nvSpPr>
-          <p:cNvPr id="9015" name="Rounded Rectangle 9014"/>
-          <p:cNvSpPr/>
-          <p:nvPr/>
-        </p:nvSpPr>
-        <p:spPr>
-          <a:xfrm>
-            <a:off x="566928" y="4617720"/>
-            <a:ext cx="11064240" cy="868680"/>
-          </a:xfrm>
-          <a:prstGeom prst="roundRect">
-            <a:avLst/>
-          </a:prstGeom>
-          <a:solidFill>
-            <a:srgbClr val="F2F4F7"/>
-          </a:solidFill>
-          <a:ln w="9525">
-            <a:solidFill>
-              <a:srgbClr val="D9DEE5"/>
-            </a:solidFill>
-          </a:ln>
-          <a:effectLst/>
-        </p:spPr>
-        <p:style>
-          <a:lnRef idx="1">
-            <a:schemeClr val="accent1"/>
-          </a:lnRef>
-          <a:fillRef idx="3">
-            <a:schemeClr val="accent1"/>
-          </a:fillRef>
-          <a:effectRef idx="2">
-            <a:schemeClr val="accent1"/>
-          </a:effectRef>
-          <a:fontRef idx="minor">
-            <a:schemeClr val="lt1"/>
-          </a:fontRef>
-        </p:style>
-        <p:txBody>
-          <a:bodyPr rtlCol="0" anchor="ctr"/>
-          <a:lstStyle/>
-          <a:p>
-            <a:pPr algn="ctr"/>
-          </a:p>
-        </p:txBody>
-      </p:sp>
-      <p:sp>
-        <p:nvSpPr>
-          <p:cNvPr id="9016" name="Rectangle 9015"/>
-          <p:cNvSpPr/>
-          <p:nvPr/>
-        </p:nvSpPr>
-        <p:spPr>
-          <a:xfrm>
-            <a:off x="566928" y="4617720"/>
-            <a:ext cx="73152" cy="868680"/>
-          </a:xfrm>
-          <a:prstGeom prst="rect">
-            <a:avLst/>
-          </a:prstGeom>
-          <a:solidFill>
-            <a:srgbClr val="0070C0"/>
-          </a:solidFill>
-          <a:ln>
-            <a:noFill/>
-          </a:ln>
-          <a:effectLst/>
-        </p:spPr>
-        <p:style>
-          <a:lnRef idx="1">
-            <a:schemeClr val="accent1"/>
-          </a:lnRef>
-          <a:fillRef idx="3">
-            <a:schemeClr val="accent1"/>
-          </a:fillRef>
-          <a:effectRef idx="2">
-            <a:schemeClr val="accent1"/>
-          </a:effectRef>
-          <a:fontRef idx="minor">
-            <a:schemeClr val="lt1"/>
-          </a:fontRef>
-        </p:style>
-        <p:txBody>
-          <a:bodyPr rtlCol="0" anchor="ctr"/>
-          <a:lstStyle/>
-          <a:p>
-            <a:pPr algn="ctr"/>
-          </a:p>
-        </p:txBody>
-      </p:sp>
-      <p:sp>
-        <p:nvSpPr>
-          <p:cNvPr id="9017" name="TextBox 9016"/>
-          <p:cNvSpPr txBox="1"/>
-          <p:nvPr/>
-        </p:nvSpPr>
-        <p:spPr>
-          <a:xfrm>
-            <a:off x="786384" y="4709159"/>
-            <a:ext cx="10607040" cy="685800"/>
-          </a:xfrm>
-          <a:prstGeom prst="rect">
-            <a:avLst/>
-          </a:prstGeom>
-          <a:noFill/>
-        </p:spPr>
-        <p:txBody>
-          <a:bodyPr wrap="square" anchor="ctr" lIns="0" rIns="0" tIns="0" bIns="0">
-            <a:spAutoFit/>
-          </a:bodyPr>
-          <a:lstStyle/>
-          <a:p>
-            <a:pPr algn="l">
-              <a:lnSpc>
-                <a:spcPct val="115000"/>
-              </a:lnSpc>
-            </a:pPr>
-            <a:r>
-              <a:rPr sz="1500" b="1">
-                <a:solidFill>
-                  <a:srgbClr val="113E6A"/>
-                </a:solidFill>
-                <a:latin typeface="Arial"/>
-                <a:ea typeface="微软雅黑"/>
-              </a:rPr>
-              <a:t>分布式改造是必然选择；但多实例并发又把“任一 Pod 至多绑定一次”推到设计前台。</a:t>
-            </a:r>
-          </a:p>
-        </p:txBody>
-      </p:sp>
-      <p:sp>
-        <p:nvSpPr>
-          <p:cNvPr id="9018" name="TextBox 9017"/>
+          <p:cNvPr id="9015" name="TextBox 9014"/>
           <p:cNvSpPr txBox="1"/>
           <p:nvPr/>
         </p:nvSpPr>
@@ -30184,7 +30054,7 @@
           <a:noFill/>
         </p:spPr>
         <p:txBody>
-          <a:bodyPr wrap="square" anchor="t" lIns="0" rIns="0" tIns="0" bIns="0">
+          <a:bodyPr wrap="square" anchor="ctr" lIns="0" rIns="0" tIns="0" bIns="0">
             <a:spAutoFit/>
           </a:bodyPr>
           <a:lstStyle/>
@@ -30340,7 +30210,7 @@
           <a:noFill/>
         </p:spPr>
         <p:txBody>
-          <a:bodyPr wrap="square" anchor="t" lIns="0" rIns="0" tIns="0" bIns="0">
+          <a:bodyPr wrap="square" anchor="ctr" lIns="0" rIns="0" tIns="0" bIns="0">
             <a:spAutoFit/>
           </a:bodyPr>
           <a:lstStyle/>

--- a/docs/thesis/defense/答辩PPT-北航模板版.pptx
+++ b/docs/thesis/defense/答辩PPT-北航模板版.pptx
@@ -7874,8 +7874,8 @@
         </p:nvSpPr>
         <p:spPr>
           <a:xfrm>
-            <a:off x="427038" y="220663"/>
-            <a:ext cx="474662" cy="560387"/>
+            <a:off x="182880" y="274320"/>
+            <a:ext cx="310896" cy="402336"/>
           </a:xfrm>
           <a:custGeom>
             <a:avLst/>
@@ -8095,8 +8095,8 @@
         </p:nvSpPr>
         <p:spPr>
           <a:xfrm>
-            <a:off x="1014984" y="155448"/>
-            <a:ext cx="8001000" cy="621792"/>
+            <a:off x="566928" y="155448"/>
+            <a:ext cx="8549640" cy="621792"/>
           </a:xfrm>
           <a:prstGeom prst="rect">
             <a:avLst/>
@@ -8129,58 +8129,14 @@
       </p:sp>
       <p:sp>
         <p:nvSpPr>
-          <p:cNvPr id="9003" name="Rectangle 9002"/>
-          <p:cNvSpPr/>
-          <p:nvPr/>
-        </p:nvSpPr>
-        <p:spPr>
-          <a:xfrm>
-            <a:off x="1014984" y="1298448"/>
-            <a:ext cx="27432" cy="310896"/>
-          </a:xfrm>
-          <a:prstGeom prst="rect">
-            <a:avLst/>
-          </a:prstGeom>
-          <a:solidFill>
-            <a:srgbClr val="0070C0"/>
-          </a:solidFill>
-          <a:ln>
-            <a:noFill/>
-          </a:ln>
-          <a:effectLst/>
-        </p:spPr>
-        <p:style>
-          <a:lnRef idx="1">
-            <a:schemeClr val="accent1"/>
-          </a:lnRef>
-          <a:fillRef idx="3">
-            <a:schemeClr val="accent1"/>
-          </a:fillRef>
-          <a:effectRef idx="2">
-            <a:schemeClr val="accent1"/>
-          </a:effectRef>
-          <a:fontRef idx="minor">
-            <a:schemeClr val="lt1"/>
-          </a:fontRef>
-        </p:style>
-        <p:txBody>
-          <a:bodyPr rtlCol="0" anchor="ctr"/>
-          <a:lstStyle/>
-          <a:p>
-            <a:pPr algn="ctr"/>
-          </a:p>
-        </p:txBody>
-      </p:sp>
-      <p:sp>
-        <p:nvSpPr>
-          <p:cNvPr id="9004" name="TextBox 9003"/>
+          <p:cNvPr id="9003" name="TextBox 9002"/>
           <p:cNvSpPr txBox="1"/>
           <p:nvPr/>
         </p:nvSpPr>
         <p:spPr>
           <a:xfrm>
-            <a:off x="1161288" y="1271016"/>
-            <a:ext cx="10241280" cy="384048"/>
+            <a:off x="566928" y="1261872"/>
+            <a:ext cx="10881360" cy="438912"/>
           </a:xfrm>
           <a:prstGeom prst="rect">
             <a:avLst/>
@@ -8193,9 +8149,13 @@
           </a:bodyPr>
           <a:lstStyle/>
           <a:p>
-            <a:pPr algn="l"/>
-            <a:r>
-              <a:rPr sz="1550" b="1">
+            <a:pPr algn="l">
+              <a:lnSpc>
+                <a:spcPct val="110000"/>
+              </a:lnSpc>
+            </a:pPr>
+            <a:r>
+              <a:rPr sz="1800" b="1">
                 <a:solidFill>
                   <a:srgbClr val="0070C0"/>
                 </a:solidFill>
@@ -8209,7 +8169,7 @@
       </p:sp>
       <p:pic>
         <p:nvPicPr>
-          <p:cNvPr id="9005" name="Picture 9004" descr="fig5-2-cache-zero-copy.png"/>
+          <p:cNvPr id="9004" name="Picture 9003" descr="fig5-2-cache-zero-copy.png"/>
           <p:cNvPicPr>
             <a:picLocks noChangeAspect="1"/>
           </p:cNvPicPr>
@@ -8233,7 +8193,7 @@
       </p:pic>
       <p:sp>
         <p:nvSpPr>
-          <p:cNvPr id="9006" name="TextBox 9005"/>
+          <p:cNvPr id="9005" name="TextBox 9004"/>
           <p:cNvSpPr txBox="1"/>
           <p:nvPr/>
         </p:nvSpPr>
@@ -8313,7 +8273,7 @@
       </p:sp>
       <p:sp>
         <p:nvSpPr>
-          <p:cNvPr id="9007" name="TextBox 9006"/>
+          <p:cNvPr id="9006" name="TextBox 9005"/>
           <p:cNvSpPr txBox="1"/>
           <p:nvPr/>
         </p:nvSpPr>
@@ -8381,8 +8341,8 @@
         </p:nvSpPr>
         <p:spPr>
           <a:xfrm>
-            <a:off x="427038" y="220663"/>
-            <a:ext cx="474662" cy="560387"/>
+            <a:off x="182880" y="274320"/>
+            <a:ext cx="310896" cy="402336"/>
           </a:xfrm>
           <a:custGeom>
             <a:avLst/>
@@ -8602,8 +8562,8 @@
         </p:nvSpPr>
         <p:spPr>
           <a:xfrm>
-            <a:off x="1014984" y="155448"/>
-            <a:ext cx="8001000" cy="621792"/>
+            <a:off x="566928" y="155448"/>
+            <a:ext cx="8549640" cy="621792"/>
           </a:xfrm>
           <a:prstGeom prst="rect">
             <a:avLst/>
@@ -8636,20 +8596,60 @@
       </p:sp>
       <p:sp>
         <p:nvSpPr>
-          <p:cNvPr id="9003" name="Rectangle 9002"/>
+          <p:cNvPr id="9003" name="TextBox 9002"/>
+          <p:cNvSpPr txBox="1"/>
+          <p:nvPr/>
+        </p:nvSpPr>
+        <p:spPr>
+          <a:xfrm>
+            <a:off x="566928" y="1261872"/>
+            <a:ext cx="10881360" cy="438912"/>
+          </a:xfrm>
+          <a:prstGeom prst="rect">
+            <a:avLst/>
+          </a:prstGeom>
+          <a:noFill/>
+        </p:spPr>
+        <p:txBody>
+          <a:bodyPr wrap="square" anchor="ctr" lIns="0" rIns="0" tIns="0" bIns="0">
+            <a:spAutoFit/>
+          </a:bodyPr>
+          <a:lstStyle/>
+          <a:p>
+            <a:pPr algn="l">
+              <a:lnSpc>
+                <a:spcPct val="110000"/>
+              </a:lnSpc>
+            </a:pPr>
+            <a:r>
+              <a:rPr sz="1800" b="1">
+                <a:solidFill>
+                  <a:srgbClr val="0070C0"/>
+                </a:solidFill>
+                <a:latin typeface="Arial"/>
+                <a:ea typeface="微软雅黑"/>
+              </a:rPr>
+              <a:t>每一层对应一类威胁，并分别依赖一种 etcd 原子语义</a:t>
+            </a:r>
+          </a:p>
+        </p:txBody>
+      </p:sp>
+      <p:sp>
+        <p:nvSpPr>
+          <p:cNvPr id="9004" name="Rectangle 9003"/>
           <p:cNvSpPr/>
           <p:nvPr/>
         </p:nvSpPr>
         <p:spPr>
           <a:xfrm>
-            <a:off x="1014984" y="1298448"/>
-            <a:ext cx="27432" cy="310896"/>
+            <a:off x="2212848" y="1920240"/>
+            <a:ext cx="25603" cy="3968496"/>
           </a:xfrm>
           <a:prstGeom prst="rect">
             <a:avLst/>
           </a:prstGeom>
           <a:solidFill>
-            <a:srgbClr val="0070C0"/>
+            <a:srgbClr val="113E6A"/>
           </a:solidFill>
           <a:ln>
             <a:noFill/>
@@ -8680,59 +8680,25 @@
       </p:sp>
       <p:sp>
         <p:nvSpPr>
-          <p:cNvPr id="9004" name="TextBox 9003"/>
-          <p:cNvSpPr txBox="1"/>
-          <p:nvPr/>
-        </p:nvSpPr>
-        <p:spPr>
-          <a:xfrm>
-            <a:off x="1161288" y="1271016"/>
-            <a:ext cx="10241280" cy="384048"/>
-          </a:xfrm>
-          <a:prstGeom prst="rect">
-            <a:avLst/>
-          </a:prstGeom>
-          <a:noFill/>
-        </p:spPr>
-        <p:txBody>
-          <a:bodyPr wrap="square" anchor="ctr" lIns="0" rIns="0" tIns="0" bIns="0">
-            <a:spAutoFit/>
-          </a:bodyPr>
-          <a:lstStyle/>
-          <a:p>
-            <a:pPr algn="l"/>
-            <a:r>
-              <a:rPr sz="1550" b="1">
-                <a:solidFill>
-                  <a:srgbClr val="0070C0"/>
-                </a:solidFill>
-                <a:latin typeface="Arial"/>
-                <a:ea typeface="微软雅黑"/>
-              </a:rPr>
-              <a:t>每一层对应一类威胁，并分别依赖一种 etcd 原子语义</a:t>
-            </a:r>
-          </a:p>
-        </p:txBody>
-      </p:sp>
-      <p:sp>
-        <p:nvSpPr>
-          <p:cNvPr id="9005" name="Rectangle 9004"/>
+          <p:cNvPr id="9005" name="Oval 9004"/>
           <p:cNvSpPr/>
           <p:nvPr/>
         </p:nvSpPr>
         <p:spPr>
           <a:xfrm>
-            <a:off x="2212848" y="1920240"/>
-            <a:ext cx="25603" cy="3968496"/>
-          </a:xfrm>
-          <a:prstGeom prst="rect">
+            <a:off x="2139696" y="2194560"/>
+            <a:ext cx="201168" cy="201168"/>
+          </a:xfrm>
+          <a:prstGeom prst="ellipse">
             <a:avLst/>
           </a:prstGeom>
           <a:solidFill>
             <a:srgbClr val="113E6A"/>
           </a:solidFill>
-          <a:ln>
-            <a:noFill/>
+          <a:ln w="25400">
+            <a:solidFill>
+              <a:srgbClr val="FFFFFF"/>
+            </a:solidFill>
           </a:ln>
           <a:effectLst/>
         </p:spPr>
@@ -8760,24 +8726,77 @@
       </p:sp>
       <p:sp>
         <p:nvSpPr>
-          <p:cNvPr id="9006" name="Oval 9005"/>
+          <p:cNvPr id="9006" name="TextBox 9005"/>
+          <p:cNvSpPr txBox="1"/>
+          <p:nvPr/>
+        </p:nvSpPr>
+        <p:spPr>
+          <a:xfrm>
+            <a:off x="566928" y="2029968"/>
+            <a:ext cx="1444752" cy="658368"/>
+          </a:xfrm>
+          <a:prstGeom prst="rect">
+            <a:avLst/>
+          </a:prstGeom>
+          <a:noFill/>
+        </p:spPr>
+        <p:txBody>
+          <a:bodyPr wrap="square" anchor="t" lIns="0" rIns="0" tIns="0" bIns="0">
+            <a:spAutoFit/>
+          </a:bodyPr>
+          <a:lstStyle/>
+          <a:p>
+            <a:pPr algn="r"/>
+            <a:r>
+              <a:rPr sz="1350" b="1">
+                <a:solidFill>
+                  <a:srgbClr val="113E6A"/>
+                </a:solidFill>
+                <a:latin typeface="Arial"/>
+                <a:ea typeface="微软雅黑"/>
+              </a:rPr>
+              <a:t>Layer 0</a:t>
+            </a:r>
+          </a:p>
+          <a:p>
+            <a:pPr algn="r">
+              <a:spcBef>
+                <a:spcPts val="100"/>
+              </a:spcBef>
+            </a:pPr>
+            <a:r>
+              <a:rPr sz="1050" b="0">
+                <a:solidFill>
+                  <a:srgbClr val="636363"/>
+                </a:solidFill>
+                <a:latin typeface="Arial"/>
+                <a:ea typeface="微软雅黑"/>
+              </a:rPr>
+              <a:t>预防</a:t>
+            </a:r>
+          </a:p>
+        </p:txBody>
+      </p:sp>
+      <p:sp>
+        <p:nvSpPr>
+          <p:cNvPr id="9007" name="Rounded Rectangle 9006"/>
           <p:cNvSpPr/>
           <p:nvPr/>
         </p:nvSpPr>
         <p:spPr>
           <a:xfrm>
-            <a:off x="2139696" y="2194560"/>
-            <a:ext cx="201168" cy="201168"/>
-          </a:xfrm>
-          <a:prstGeom prst="ellipse">
+            <a:off x="2450592" y="1938528"/>
+            <a:ext cx="8961120" cy="841248"/>
+          </a:xfrm>
+          <a:prstGeom prst="roundRect">
             <a:avLst/>
           </a:prstGeom>
           <a:solidFill>
-            <a:srgbClr val="113E6A"/>
+            <a:srgbClr val="FFFFFF"/>
           </a:solidFill>
-          <a:ln w="25400">
+          <a:ln w="9525">
             <a:solidFill>
-              <a:srgbClr val="FFFFFF"/>
+              <a:srgbClr val="D6E3F0"/>
             </a:solidFill>
           </a:ln>
           <a:effectLst/>
@@ -8806,14 +8825,14 @@
       </p:sp>
       <p:sp>
         <p:nvSpPr>
-          <p:cNvPr id="9007" name="TextBox 9006"/>
+          <p:cNvPr id="9008" name="TextBox 9007"/>
           <p:cNvSpPr txBox="1"/>
           <p:nvPr/>
         </p:nvSpPr>
         <p:spPr>
           <a:xfrm>
-            <a:off x="566928" y="2029968"/>
-            <a:ext cx="1444752" cy="658368"/>
+            <a:off x="2615184" y="2039112"/>
+            <a:ext cx="8641080" cy="658368"/>
           </a:xfrm>
           <a:prstGeom prst="rect">
             <a:avLst/>
@@ -8826,57 +8845,57 @@
           </a:bodyPr>
           <a:lstStyle/>
           <a:p>
-            <a:pPr algn="r"/>
-            <a:r>
-              <a:rPr sz="1350" b="1">
+            <a:pPr algn="l"/>
+            <a:r>
+              <a:rPr sz="1150" b="0">
                 <a:solidFill>
-                  <a:srgbClr val="113E6A"/>
+                  <a:srgbClr val="2E2C2C"/>
                 </a:solidFill>
                 <a:latin typeface="Arial"/>
                 <a:ea typeface="微软雅黑"/>
               </a:rPr>
-              <a:t>Layer 0</a:t>
-            </a:r>
-          </a:p>
-          <a:p>
-            <a:pPr algn="r">
+              <a:t>威胁：分区归属漂移</a:t>
+            </a:r>
+          </a:p>
+          <a:p>
+            <a:pPr algn="l">
               <a:spcBef>
-                <a:spcPts val="100"/>
+                <a:spcPts val="200"/>
               </a:spcBef>
             </a:pPr>
             <a:r>
               <a:rPr sz="1050" b="0">
                 <a:solidFill>
-                  <a:srgbClr val="636363"/>
+                  <a:srgbClr val="2E2C2C"/>
                 </a:solidFill>
                 <a:latin typeface="Arial"/>
                 <a:ea typeface="微软雅黑"/>
               </a:rPr>
-              <a:t>预防</a:t>
-            </a:r>
-          </a:p>
-        </p:txBody>
-      </p:sp>
-      <p:sp>
-        <p:nvSpPr>
-          <p:cNvPr id="9008" name="Rounded Rectangle 9007"/>
+              <a:t>etcd：resourceVersion 乐观并发</a:t>
+            </a:r>
+          </a:p>
+        </p:txBody>
+      </p:sp>
+      <p:sp>
+        <p:nvSpPr>
+          <p:cNvPr id="9009" name="Oval 9008"/>
           <p:cNvSpPr/>
           <p:nvPr/>
         </p:nvSpPr>
         <p:spPr>
           <a:xfrm>
-            <a:off x="2450592" y="1938528"/>
-            <a:ext cx="8961120" cy="841248"/>
-          </a:xfrm>
-          <a:prstGeom prst="roundRect">
+            <a:off x="2139696" y="3172968"/>
+            <a:ext cx="201168" cy="201168"/>
+          </a:xfrm>
+          <a:prstGeom prst="ellipse">
             <a:avLst/>
           </a:prstGeom>
           <a:solidFill>
-            <a:srgbClr val="FFFFFF"/>
+            <a:srgbClr val="113E6A"/>
           </a:solidFill>
-          <a:ln w="9525">
+          <a:ln w="25400">
             <a:solidFill>
-              <a:srgbClr val="D6E3F0"/>
+              <a:srgbClr val="FFFFFF"/>
             </a:solidFill>
           </a:ln>
           <a:effectLst/>
@@ -8905,14 +8924,14 @@
       </p:sp>
       <p:sp>
         <p:nvSpPr>
-          <p:cNvPr id="9009" name="TextBox 9008"/>
+          <p:cNvPr id="9010" name="TextBox 9009"/>
           <p:cNvSpPr txBox="1"/>
           <p:nvPr/>
         </p:nvSpPr>
         <p:spPr>
           <a:xfrm>
-            <a:off x="2615184" y="2039112"/>
-            <a:ext cx="8641080" cy="658368"/>
+            <a:off x="566928" y="3008376"/>
+            <a:ext cx="1444752" cy="658368"/>
           </a:xfrm>
           <a:prstGeom prst="rect">
             <a:avLst/>
@@ -8925,57 +8944,57 @@
           </a:bodyPr>
           <a:lstStyle/>
           <a:p>
-            <a:pPr algn="l"/>
-            <a:r>
-              <a:rPr sz="1150" b="0">
+            <a:pPr algn="r"/>
+            <a:r>
+              <a:rPr sz="1350" b="1">
                 <a:solidFill>
-                  <a:srgbClr val="2E2C2C"/>
+                  <a:srgbClr val="113E6A"/>
                 </a:solidFill>
                 <a:latin typeface="Arial"/>
                 <a:ea typeface="微软雅黑"/>
               </a:rPr>
-              <a:t>威胁：分区归属漂移</a:t>
-            </a:r>
-          </a:p>
-          <a:p>
-            <a:pPr algn="l">
+              <a:t>Layer 1</a:t>
+            </a:r>
+          </a:p>
+          <a:p>
+            <a:pPr algn="r">
               <a:spcBef>
-                <a:spcPts val="200"/>
+                <a:spcPts val="100"/>
               </a:spcBef>
             </a:pPr>
             <a:r>
               <a:rPr sz="1050" b="0">
                 <a:solidFill>
-                  <a:srgbClr val="2E2C2C"/>
+                  <a:srgbClr val="636363"/>
                 </a:solidFill>
                 <a:latin typeface="Arial"/>
                 <a:ea typeface="微软雅黑"/>
               </a:rPr>
-              <a:t>etcd：resourceVersion 乐观并发</a:t>
-            </a:r>
-          </a:p>
-        </p:txBody>
-      </p:sp>
-      <p:sp>
-        <p:nvSpPr>
-          <p:cNvPr id="9010" name="Oval 9009"/>
+              <a:t>即时恢复</a:t>
+            </a:r>
+          </a:p>
+        </p:txBody>
+      </p:sp>
+      <p:sp>
+        <p:nvSpPr>
+          <p:cNvPr id="9011" name="Rounded Rectangle 9010"/>
           <p:cNvSpPr/>
           <p:nvPr/>
         </p:nvSpPr>
         <p:spPr>
           <a:xfrm>
-            <a:off x="2139696" y="3172968"/>
-            <a:ext cx="201168" cy="201168"/>
-          </a:xfrm>
-          <a:prstGeom prst="ellipse">
+            <a:off x="2450592" y="2916936"/>
+            <a:ext cx="8961120" cy="841248"/>
+          </a:xfrm>
+          <a:prstGeom prst="roundRect">
             <a:avLst/>
           </a:prstGeom>
           <a:solidFill>
-            <a:srgbClr val="113E6A"/>
+            <a:srgbClr val="FFFFFF"/>
           </a:solidFill>
-          <a:ln w="25400">
+          <a:ln w="9525">
             <a:solidFill>
-              <a:srgbClr val="FFFFFF"/>
+              <a:srgbClr val="D6E3F0"/>
             </a:solidFill>
           </a:ln>
           <a:effectLst/>
@@ -9004,14 +9023,14 @@
       </p:sp>
       <p:sp>
         <p:nvSpPr>
-          <p:cNvPr id="9011" name="TextBox 9010"/>
+          <p:cNvPr id="9012" name="TextBox 9011"/>
           <p:cNvSpPr txBox="1"/>
           <p:nvPr/>
         </p:nvSpPr>
         <p:spPr>
           <a:xfrm>
-            <a:off x="566928" y="3008376"/>
-            <a:ext cx="1444752" cy="658368"/>
+            <a:off x="2615184" y="3017520"/>
+            <a:ext cx="8641080" cy="658368"/>
           </a:xfrm>
           <a:prstGeom prst="rect">
             <a:avLst/>
@@ -9024,57 +9043,57 @@
           </a:bodyPr>
           <a:lstStyle/>
           <a:p>
-            <a:pPr algn="r"/>
-            <a:r>
-              <a:rPr sz="1350" b="1">
+            <a:pPr algn="l"/>
+            <a:r>
+              <a:rPr sz="1150" b="0">
                 <a:solidFill>
-                  <a:srgbClr val="113E6A"/>
+                  <a:srgbClr val="2E2C2C"/>
                 </a:solidFill>
                 <a:latin typeface="Arial"/>
                 <a:ea typeface="微软雅黑"/>
               </a:rPr>
-              <a:t>Layer 1</a:t>
-            </a:r>
-          </a:p>
-          <a:p>
-            <a:pPr algn="r">
+              <a:t>威胁：apiserver 暂态错误</a:t>
+            </a:r>
+          </a:p>
+          <a:p>
+            <a:pPr algn="l">
               <a:spcBef>
-                <a:spcPts val="100"/>
+                <a:spcPts val="200"/>
               </a:spcBef>
             </a:pPr>
             <a:r>
               <a:rPr sz="1050" b="0">
                 <a:solidFill>
-                  <a:srgbClr val="636363"/>
+                  <a:srgbClr val="2E2C2C"/>
                 </a:solidFill>
                 <a:latin typeface="Arial"/>
                 <a:ea typeface="微软雅黑"/>
               </a:rPr>
-              <a:t>即时恢复</a:t>
-            </a:r>
-          </a:p>
-        </p:txBody>
-      </p:sp>
-      <p:sp>
-        <p:nvSpPr>
-          <p:cNvPr id="9012" name="Rounded Rectangle 9011"/>
+              <a:t>etcd：Bind 原子写 / 409 冲突</a:t>
+            </a:r>
+          </a:p>
+        </p:txBody>
+      </p:sp>
+      <p:sp>
+        <p:nvSpPr>
+          <p:cNvPr id="9013" name="Oval 9012"/>
           <p:cNvSpPr/>
           <p:nvPr/>
         </p:nvSpPr>
         <p:spPr>
           <a:xfrm>
-            <a:off x="2450592" y="2916936"/>
-            <a:ext cx="8961120" cy="841248"/>
-          </a:xfrm>
-          <a:prstGeom prst="roundRect">
+            <a:off x="2139696" y="4151376"/>
+            <a:ext cx="201168" cy="201168"/>
+          </a:xfrm>
+          <a:prstGeom prst="ellipse">
             <a:avLst/>
           </a:prstGeom>
           <a:solidFill>
-            <a:srgbClr val="FFFFFF"/>
+            <a:srgbClr val="113E6A"/>
           </a:solidFill>
-          <a:ln w="9525">
+          <a:ln w="25400">
             <a:solidFill>
-              <a:srgbClr val="D6E3F0"/>
+              <a:srgbClr val="FFFFFF"/>
             </a:solidFill>
           </a:ln>
           <a:effectLst/>
@@ -9103,14 +9122,14 @@
       </p:sp>
       <p:sp>
         <p:nvSpPr>
-          <p:cNvPr id="9013" name="TextBox 9012"/>
+          <p:cNvPr id="9014" name="TextBox 9013"/>
           <p:cNvSpPr txBox="1"/>
           <p:nvPr/>
         </p:nvSpPr>
         <p:spPr>
           <a:xfrm>
-            <a:off x="2615184" y="3017520"/>
-            <a:ext cx="8641080" cy="658368"/>
+            <a:off x="566928" y="3986783"/>
+            <a:ext cx="1444752" cy="658368"/>
           </a:xfrm>
           <a:prstGeom prst="rect">
             <a:avLst/>
@@ -9123,57 +9142,57 @@
           </a:bodyPr>
           <a:lstStyle/>
           <a:p>
-            <a:pPr algn="l"/>
-            <a:r>
-              <a:rPr sz="1150" b="0">
+            <a:pPr algn="r"/>
+            <a:r>
+              <a:rPr sz="1350" b="1">
                 <a:solidFill>
-                  <a:srgbClr val="2E2C2C"/>
+                  <a:srgbClr val="113E6A"/>
                 </a:solidFill>
                 <a:latin typeface="Arial"/>
                 <a:ea typeface="微软雅黑"/>
               </a:rPr>
-              <a:t>威胁：apiserver 暂态错误</a:t>
-            </a:r>
-          </a:p>
-          <a:p>
-            <a:pPr algn="l">
+              <a:t>Layer 2</a:t>
+            </a:r>
+          </a:p>
+          <a:p>
+            <a:pPr algn="r">
               <a:spcBef>
-                <a:spcPts val="200"/>
+                <a:spcPts val="100"/>
               </a:spcBef>
             </a:pPr>
             <a:r>
               <a:rPr sz="1050" b="0">
                 <a:solidFill>
-                  <a:srgbClr val="2E2C2C"/>
+                  <a:srgbClr val="636363"/>
                 </a:solidFill>
                 <a:latin typeface="Arial"/>
                 <a:ea typeface="微软雅黑"/>
               </a:rPr>
-              <a:t>etcd：Bind 原子写 / 409 冲突</a:t>
-            </a:r>
-          </a:p>
-        </p:txBody>
-      </p:sp>
-      <p:sp>
-        <p:nvSpPr>
-          <p:cNvPr id="9014" name="Oval 9013"/>
+              <a:t>后台回收</a:t>
+            </a:r>
+          </a:p>
+        </p:txBody>
+      </p:sp>
+      <p:sp>
+        <p:nvSpPr>
+          <p:cNvPr id="9015" name="Rounded Rectangle 9014"/>
           <p:cNvSpPr/>
           <p:nvPr/>
         </p:nvSpPr>
         <p:spPr>
           <a:xfrm>
-            <a:off x="2139696" y="4151376"/>
-            <a:ext cx="201168" cy="201168"/>
-          </a:xfrm>
-          <a:prstGeom prst="ellipse">
+            <a:off x="2450592" y="3895344"/>
+            <a:ext cx="8961120" cy="841248"/>
+          </a:xfrm>
+          <a:prstGeom prst="roundRect">
             <a:avLst/>
           </a:prstGeom>
           <a:solidFill>
-            <a:srgbClr val="113E6A"/>
+            <a:srgbClr val="FFFFFF"/>
           </a:solidFill>
-          <a:ln w="25400">
+          <a:ln w="9525">
             <a:solidFill>
-              <a:srgbClr val="FFFFFF"/>
+              <a:srgbClr val="D6E3F0"/>
             </a:solidFill>
           </a:ln>
           <a:effectLst/>
@@ -9202,14 +9221,14 @@
       </p:sp>
       <p:sp>
         <p:nvSpPr>
-          <p:cNvPr id="9015" name="TextBox 9014"/>
+          <p:cNvPr id="9016" name="TextBox 9015"/>
           <p:cNvSpPr txBox="1"/>
           <p:nvPr/>
         </p:nvSpPr>
         <p:spPr>
           <a:xfrm>
-            <a:off x="566928" y="3986783"/>
-            <a:ext cx="1444752" cy="658368"/>
+            <a:off x="2615184" y="3995928"/>
+            <a:ext cx="8641080" cy="658368"/>
           </a:xfrm>
           <a:prstGeom prst="rect">
             <a:avLst/>
@@ -9222,57 +9241,57 @@
           </a:bodyPr>
           <a:lstStyle/>
           <a:p>
-            <a:pPr algn="r"/>
-            <a:r>
-              <a:rPr sz="1350" b="1">
+            <a:pPr algn="l"/>
+            <a:r>
+              <a:rPr sz="1150" b="0">
                 <a:solidFill>
-                  <a:srgbClr val="113E6A"/>
+                  <a:srgbClr val="2E2C2C"/>
                 </a:solidFill>
                 <a:latin typeface="Arial"/>
                 <a:ea typeface="微软雅黑"/>
               </a:rPr>
-              <a:t>Layer 2</a:t>
-            </a:r>
-          </a:p>
-          <a:p>
-            <a:pPr algn="r">
+              <a:t>威胁：孤儿 Assumed 状态</a:t>
+            </a:r>
+          </a:p>
+          <a:p>
+            <a:pPr algn="l">
               <a:spcBef>
-                <a:spcPts val="100"/>
+                <a:spcPts val="200"/>
               </a:spcBef>
             </a:pPr>
             <a:r>
               <a:rPr sz="1050" b="0">
                 <a:solidFill>
-                  <a:srgbClr val="636363"/>
+                  <a:srgbClr val="2E2C2C"/>
                 </a:solidFill>
                 <a:latin typeface="Arial"/>
                 <a:ea typeface="微软雅黑"/>
               </a:rPr>
-              <a:t>后台回收</a:t>
-            </a:r>
-          </a:p>
-        </p:txBody>
-      </p:sp>
-      <p:sp>
-        <p:nvSpPr>
-          <p:cNvPr id="9016" name="Rounded Rectangle 9015"/>
+              <a:t>etcd：Watch 一致性视图</a:t>
+            </a:r>
+          </a:p>
+        </p:txBody>
+      </p:sp>
+      <p:sp>
+        <p:nvSpPr>
+          <p:cNvPr id="9017" name="Oval 9016"/>
           <p:cNvSpPr/>
           <p:nvPr/>
         </p:nvSpPr>
         <p:spPr>
           <a:xfrm>
-            <a:off x="2450592" y="3895344"/>
-            <a:ext cx="8961120" cy="841248"/>
-          </a:xfrm>
-          <a:prstGeom prst="roundRect">
+            <a:off x="2139696" y="5129784"/>
+            <a:ext cx="201168" cy="201168"/>
+          </a:xfrm>
+          <a:prstGeom prst="ellipse">
             <a:avLst/>
           </a:prstGeom>
           <a:solidFill>
-            <a:srgbClr val="FFFFFF"/>
+            <a:srgbClr val="113E6A"/>
           </a:solidFill>
-          <a:ln w="9525">
+          <a:ln w="25400">
             <a:solidFill>
-              <a:srgbClr val="D6E3F0"/>
+              <a:srgbClr val="FFFFFF"/>
             </a:solidFill>
           </a:ln>
           <a:effectLst/>
@@ -9301,14 +9320,14 @@
       </p:sp>
       <p:sp>
         <p:nvSpPr>
-          <p:cNvPr id="9017" name="TextBox 9016"/>
+          <p:cNvPr id="9018" name="TextBox 9017"/>
           <p:cNvSpPr txBox="1"/>
           <p:nvPr/>
         </p:nvSpPr>
         <p:spPr>
           <a:xfrm>
-            <a:off x="2615184" y="3995928"/>
-            <a:ext cx="8641080" cy="658368"/>
+            <a:off x="566928" y="4965192"/>
+            <a:ext cx="1444752" cy="658368"/>
           </a:xfrm>
           <a:prstGeom prst="rect">
             <a:avLst/>
@@ -9321,57 +9340,57 @@
           </a:bodyPr>
           <a:lstStyle/>
           <a:p>
-            <a:pPr algn="l"/>
-            <a:r>
-              <a:rPr sz="1150" b="0">
+            <a:pPr algn="r"/>
+            <a:r>
+              <a:rPr sz="1350" b="1">
                 <a:solidFill>
-                  <a:srgbClr val="2E2C2C"/>
+                  <a:srgbClr val="113E6A"/>
                 </a:solidFill>
                 <a:latin typeface="Arial"/>
                 <a:ea typeface="微软雅黑"/>
               </a:rPr>
-              <a:t>威胁：孤儿 Assumed 状态</a:t>
-            </a:r>
-          </a:p>
-          <a:p>
-            <a:pPr algn="l">
+              <a:t>Layer 3</a:t>
+            </a:r>
+          </a:p>
+          <a:p>
+            <a:pPr algn="r">
               <a:spcBef>
-                <a:spcPts val="200"/>
+                <a:spcPts val="100"/>
               </a:spcBef>
             </a:pPr>
             <a:r>
               <a:rPr sz="1050" b="0">
                 <a:solidFill>
-                  <a:srgbClr val="2E2C2C"/>
+                  <a:srgbClr val="636363"/>
                 </a:solidFill>
                 <a:latin typeface="Arial"/>
                 <a:ea typeface="微软雅黑"/>
               </a:rPr>
-              <a:t>etcd：Watch 一致性视图</a:t>
-            </a:r>
-          </a:p>
-        </p:txBody>
-      </p:sp>
-      <p:sp>
-        <p:nvSpPr>
-          <p:cNvPr id="9018" name="Oval 9017"/>
+              <a:t>全局回退</a:t>
+            </a:r>
+          </a:p>
+        </p:txBody>
+      </p:sp>
+      <p:sp>
+        <p:nvSpPr>
+          <p:cNvPr id="9019" name="Rounded Rectangle 9018"/>
           <p:cNvSpPr/>
           <p:nvPr/>
         </p:nvSpPr>
         <p:spPr>
           <a:xfrm>
-            <a:off x="2139696" y="5129784"/>
-            <a:ext cx="201168" cy="201168"/>
-          </a:xfrm>
-          <a:prstGeom prst="ellipse">
+            <a:off x="2450592" y="4873752"/>
+            <a:ext cx="8961120" cy="841248"/>
+          </a:xfrm>
+          <a:prstGeom prst="roundRect">
             <a:avLst/>
           </a:prstGeom>
           <a:solidFill>
-            <a:srgbClr val="113E6A"/>
+            <a:srgbClr val="FFFFFF"/>
           </a:solidFill>
-          <a:ln w="25400">
+          <a:ln w="9525">
             <a:solidFill>
-              <a:srgbClr val="FFFFFF"/>
+              <a:srgbClr val="D6E3F0"/>
             </a:solidFill>
           </a:ln>
           <a:effectLst/>
@@ -9400,106 +9419,7 @@
       </p:sp>
       <p:sp>
         <p:nvSpPr>
-          <p:cNvPr id="9019" name="TextBox 9018"/>
-          <p:cNvSpPr txBox="1"/>
-          <p:nvPr/>
-        </p:nvSpPr>
-        <p:spPr>
-          <a:xfrm>
-            <a:off x="566928" y="4965192"/>
-            <a:ext cx="1444752" cy="658368"/>
-          </a:xfrm>
-          <a:prstGeom prst="rect">
-            <a:avLst/>
-          </a:prstGeom>
-          <a:noFill/>
-        </p:spPr>
-        <p:txBody>
-          <a:bodyPr wrap="square" anchor="t" lIns="0" rIns="0" tIns="0" bIns="0">
-            <a:spAutoFit/>
-          </a:bodyPr>
-          <a:lstStyle/>
-          <a:p>
-            <a:pPr algn="r"/>
-            <a:r>
-              <a:rPr sz="1350" b="1">
-                <a:solidFill>
-                  <a:srgbClr val="113E6A"/>
-                </a:solidFill>
-                <a:latin typeface="Arial"/>
-                <a:ea typeface="微软雅黑"/>
-              </a:rPr>
-              <a:t>Layer 3</a:t>
-            </a:r>
-          </a:p>
-          <a:p>
-            <a:pPr algn="r">
-              <a:spcBef>
-                <a:spcPts val="100"/>
-              </a:spcBef>
-            </a:pPr>
-            <a:r>
-              <a:rPr sz="1050" b="0">
-                <a:solidFill>
-                  <a:srgbClr val="636363"/>
-                </a:solidFill>
-                <a:latin typeface="Arial"/>
-                <a:ea typeface="微软雅黑"/>
-              </a:rPr>
-              <a:t>全局回退</a:t>
-            </a:r>
-          </a:p>
-        </p:txBody>
-      </p:sp>
-      <p:sp>
-        <p:nvSpPr>
-          <p:cNvPr id="9020" name="Rounded Rectangle 9019"/>
-          <p:cNvSpPr/>
-          <p:nvPr/>
-        </p:nvSpPr>
-        <p:spPr>
-          <a:xfrm>
-            <a:off x="2450592" y="4873752"/>
-            <a:ext cx="8961120" cy="841248"/>
-          </a:xfrm>
-          <a:prstGeom prst="roundRect">
-            <a:avLst/>
-          </a:prstGeom>
-          <a:solidFill>
-            <a:srgbClr val="FFFFFF"/>
-          </a:solidFill>
-          <a:ln w="9525">
-            <a:solidFill>
-              <a:srgbClr val="D6E3F0"/>
-            </a:solidFill>
-          </a:ln>
-          <a:effectLst/>
-        </p:spPr>
-        <p:style>
-          <a:lnRef idx="1">
-            <a:schemeClr val="accent1"/>
-          </a:lnRef>
-          <a:fillRef idx="3">
-            <a:schemeClr val="accent1"/>
-          </a:fillRef>
-          <a:effectRef idx="2">
-            <a:schemeClr val="accent1"/>
-          </a:effectRef>
-          <a:fontRef idx="minor">
-            <a:schemeClr val="lt1"/>
-          </a:fontRef>
-        </p:style>
-        <p:txBody>
-          <a:bodyPr rtlCol="0" anchor="ctr"/>
-          <a:lstStyle/>
-          <a:p>
-            <a:pPr algn="ctr"/>
-          </a:p>
-        </p:txBody>
-      </p:sp>
-      <p:sp>
-        <p:nvSpPr>
-          <p:cNvPr id="9021" name="TextBox 9020"/>
+          <p:cNvPr id="9020" name="TextBox 9019"/>
           <p:cNvSpPr txBox="1"/>
           <p:nvPr/>
         </p:nvSpPr>
@@ -9552,7 +9472,7 @@
       </p:sp>
       <p:sp>
         <p:nvSpPr>
-          <p:cNvPr id="9022" name="TextBox 9021"/>
+          <p:cNvPr id="9021" name="TextBox 9020"/>
           <p:cNvSpPr txBox="1"/>
           <p:nvPr/>
         </p:nvSpPr>
@@ -9620,8 +9540,8 @@
         </p:nvSpPr>
         <p:spPr>
           <a:xfrm>
-            <a:off x="427038" y="220663"/>
-            <a:ext cx="474662" cy="560387"/>
+            <a:off x="182880" y="274320"/>
+            <a:ext cx="310896" cy="402336"/>
           </a:xfrm>
           <a:custGeom>
             <a:avLst/>
@@ -9841,8 +9761,8 @@
         </p:nvSpPr>
         <p:spPr>
           <a:xfrm>
-            <a:off x="1014984" y="155448"/>
-            <a:ext cx="8001000" cy="621792"/>
+            <a:off x="566928" y="155448"/>
+            <a:ext cx="8549640" cy="621792"/>
           </a:xfrm>
           <a:prstGeom prst="rect">
             <a:avLst/>
@@ -9875,58 +9795,14 @@
       </p:sp>
       <p:sp>
         <p:nvSpPr>
-          <p:cNvPr id="9003" name="Rectangle 9002"/>
-          <p:cNvSpPr/>
-          <p:nvPr/>
-        </p:nvSpPr>
-        <p:spPr>
-          <a:xfrm>
-            <a:off x="1014984" y="1298448"/>
-            <a:ext cx="27432" cy="310896"/>
-          </a:xfrm>
-          <a:prstGeom prst="rect">
-            <a:avLst/>
-          </a:prstGeom>
-          <a:solidFill>
-            <a:srgbClr val="0070C0"/>
-          </a:solidFill>
-          <a:ln>
-            <a:noFill/>
-          </a:ln>
-          <a:effectLst/>
-        </p:spPr>
-        <p:style>
-          <a:lnRef idx="1">
-            <a:schemeClr val="accent1"/>
-          </a:lnRef>
-          <a:fillRef idx="3">
-            <a:schemeClr val="accent1"/>
-          </a:fillRef>
-          <a:effectRef idx="2">
-            <a:schemeClr val="accent1"/>
-          </a:effectRef>
-          <a:fontRef idx="minor">
-            <a:schemeClr val="lt1"/>
-          </a:fontRef>
-        </p:style>
-        <p:txBody>
-          <a:bodyPr rtlCol="0" anchor="ctr"/>
-          <a:lstStyle/>
-          <a:p>
-            <a:pPr algn="ctr"/>
-          </a:p>
-        </p:txBody>
-      </p:sp>
-      <p:sp>
-        <p:nvSpPr>
-          <p:cNvPr id="9004" name="TextBox 9003"/>
+          <p:cNvPr id="9003" name="TextBox 9002"/>
           <p:cNvSpPr txBox="1"/>
           <p:nvPr/>
         </p:nvSpPr>
         <p:spPr>
           <a:xfrm>
-            <a:off x="1161288" y="1271016"/>
-            <a:ext cx="10241280" cy="384048"/>
+            <a:off x="566928" y="1261872"/>
+            <a:ext cx="10881360" cy="438912"/>
           </a:xfrm>
           <a:prstGeom prst="rect">
             <a:avLst/>
@@ -9939,9 +9815,13 @@
           </a:bodyPr>
           <a:lstStyle/>
           <a:p>
-            <a:pPr algn="l"/>
-            <a:r>
-              <a:rPr sz="1550" b="1">
+            <a:pPr algn="l">
+              <a:lnSpc>
+                <a:spcPct val="110000"/>
+              </a:lnSpc>
+            </a:pPr>
+            <a:r>
+              <a:rPr sz="1800" b="1">
                 <a:solidFill>
                   <a:srgbClr val="0070C0"/>
                 </a:solidFill>
@@ -9955,7 +9835,7 @@
       </p:sp>
       <p:sp>
         <p:nvSpPr>
-          <p:cNvPr id="9005" name="TextBox 9004"/>
+          <p:cNvPr id="9004" name="TextBox 9003"/>
           <p:cNvSpPr txBox="1"/>
           <p:nvPr/>
         </p:nvSpPr>
@@ -10035,7 +9915,7 @@
       </p:sp>
       <p:pic>
         <p:nvPicPr>
-          <p:cNvPr id="9006" name="Picture 9005" descr="fig4-3-consistency-invariant.png"/>
+          <p:cNvPr id="9005" name="Picture 9004" descr="fig4-3-consistency-invariant.png"/>
           <p:cNvPicPr>
             <a:picLocks noChangeAspect="1"/>
           </p:cNvPicPr>
@@ -10059,7 +9939,7 @@
       </p:pic>
       <p:sp>
         <p:nvSpPr>
-          <p:cNvPr id="9007" name="TextBox 9006"/>
+          <p:cNvPr id="9006" name="TextBox 9005"/>
           <p:cNvSpPr txBox="1"/>
           <p:nvPr/>
         </p:nvSpPr>
@@ -10127,8 +10007,8 @@
         </p:nvSpPr>
         <p:spPr>
           <a:xfrm>
-            <a:off x="427038" y="220663"/>
-            <a:ext cx="474662" cy="560387"/>
+            <a:off x="182880" y="274320"/>
+            <a:ext cx="310896" cy="402336"/>
           </a:xfrm>
           <a:custGeom>
             <a:avLst/>
@@ -10348,8 +10228,8 @@
         </p:nvSpPr>
         <p:spPr>
           <a:xfrm>
-            <a:off x="1014984" y="155448"/>
-            <a:ext cx="8001000" cy="621792"/>
+            <a:off x="566928" y="155448"/>
+            <a:ext cx="8549640" cy="621792"/>
           </a:xfrm>
           <a:prstGeom prst="rect">
             <a:avLst/>
@@ -10382,58 +10262,14 @@
       </p:sp>
       <p:sp>
         <p:nvSpPr>
-          <p:cNvPr id="9003" name="Rectangle 9002"/>
-          <p:cNvSpPr/>
-          <p:nvPr/>
-        </p:nvSpPr>
-        <p:spPr>
-          <a:xfrm>
-            <a:off x="1014984" y="1298448"/>
-            <a:ext cx="27432" cy="310896"/>
-          </a:xfrm>
-          <a:prstGeom prst="rect">
-            <a:avLst/>
-          </a:prstGeom>
-          <a:solidFill>
-            <a:srgbClr val="0070C0"/>
-          </a:solidFill>
-          <a:ln>
-            <a:noFill/>
-          </a:ln>
-          <a:effectLst/>
-        </p:spPr>
-        <p:style>
-          <a:lnRef idx="1">
-            <a:schemeClr val="accent1"/>
-          </a:lnRef>
-          <a:fillRef idx="3">
-            <a:schemeClr val="accent1"/>
-          </a:fillRef>
-          <a:effectRef idx="2">
-            <a:schemeClr val="accent1"/>
-          </a:effectRef>
-          <a:fontRef idx="minor">
-            <a:schemeClr val="lt1"/>
-          </a:fontRef>
-        </p:style>
-        <p:txBody>
-          <a:bodyPr rtlCol="0" anchor="ctr"/>
-          <a:lstStyle/>
-          <a:p>
-            <a:pPr algn="ctr"/>
-          </a:p>
-        </p:txBody>
-      </p:sp>
-      <p:sp>
-        <p:nvSpPr>
-          <p:cNvPr id="9004" name="TextBox 9003"/>
+          <p:cNvPr id="9003" name="TextBox 9002"/>
           <p:cNvSpPr txBox="1"/>
           <p:nvPr/>
         </p:nvSpPr>
         <p:spPr>
           <a:xfrm>
-            <a:off x="1161288" y="1271016"/>
-            <a:ext cx="10241280" cy="384048"/>
+            <a:off x="566928" y="1261872"/>
+            <a:ext cx="10881360" cy="438912"/>
           </a:xfrm>
           <a:prstGeom prst="rect">
             <a:avLst/>
@@ -10446,9 +10282,13 @@
           </a:bodyPr>
           <a:lstStyle/>
           <a:p>
-            <a:pPr algn="l"/>
-            <a:r>
-              <a:rPr sz="1550" b="1">
+            <a:pPr algn="l">
+              <a:lnSpc>
+                <a:spcPct val="110000"/>
+              </a:lnSpc>
+            </a:pPr>
+            <a:r>
+              <a:rPr sz="1800" b="1">
                 <a:solidFill>
                   <a:srgbClr val="0070C0"/>
                 </a:solidFill>
@@ -10462,7 +10302,7 @@
       </p:sp>
       <p:graphicFrame>
         <p:nvGraphicFramePr>
-          <p:cNvPr id="9005" name="Table 9004"/>
+          <p:cNvPr id="9004" name="Table 9003"/>
           <p:cNvGraphicFramePr>
             <a:graphicFrameLocks noGrp="1"/>
           </p:cNvGraphicFramePr>
@@ -10788,7 +10628,7 @@
       </p:graphicFrame>
       <p:sp>
         <p:nvSpPr>
-          <p:cNvPr id="9006" name="TextBox 9005"/>
+          <p:cNvPr id="9005" name="TextBox 9004"/>
           <p:cNvSpPr txBox="1"/>
           <p:nvPr/>
         </p:nvSpPr>
@@ -10868,7 +10708,7 @@
       </p:sp>
       <p:sp>
         <p:nvSpPr>
-          <p:cNvPr id="9007" name="TextBox 9006"/>
+          <p:cNvPr id="9006" name="TextBox 9005"/>
           <p:cNvSpPr txBox="1"/>
           <p:nvPr/>
         </p:nvSpPr>
@@ -10936,8 +10776,8 @@
         </p:nvSpPr>
         <p:spPr>
           <a:xfrm>
-            <a:off x="427038" y="220663"/>
-            <a:ext cx="474662" cy="560387"/>
+            <a:off x="182880" y="274320"/>
+            <a:ext cx="310896" cy="402336"/>
           </a:xfrm>
           <a:custGeom>
             <a:avLst/>
@@ -11157,8 +10997,8 @@
         </p:nvSpPr>
         <p:spPr>
           <a:xfrm>
-            <a:off x="1014984" y="155448"/>
-            <a:ext cx="8001000" cy="621792"/>
+            <a:off x="566928" y="155448"/>
+            <a:ext cx="8549640" cy="621792"/>
           </a:xfrm>
           <a:prstGeom prst="rect">
             <a:avLst/>
@@ -11191,23 +11031,205 @@
       </p:sp>
       <p:sp>
         <p:nvSpPr>
-          <p:cNvPr id="9003" name="Rectangle 9002"/>
-          <p:cNvSpPr/>
+          <p:cNvPr id="9003" name="TextBox 9002"/>
+          <p:cNvSpPr txBox="1"/>
           <p:nvPr/>
         </p:nvSpPr>
         <p:spPr>
           <a:xfrm>
-            <a:off x="1014984" y="1298448"/>
-            <a:ext cx="27432" cy="310896"/>
+            <a:off x="566928" y="1261872"/>
+            <a:ext cx="10881360" cy="438912"/>
           </a:xfrm>
           <a:prstGeom prst="rect">
             <a:avLst/>
           </a:prstGeom>
+          <a:noFill/>
+        </p:spPr>
+        <p:txBody>
+          <a:bodyPr wrap="square" anchor="ctr" lIns="0" rIns="0" tIns="0" bIns="0">
+            <a:spAutoFit/>
+          </a:bodyPr>
+          <a:lstStyle/>
+          <a:p>
+            <a:pPr algn="l">
+              <a:lnSpc>
+                <a:spcPct val="110000"/>
+              </a:lnSpc>
+            </a:pPr>
+            <a:r>
+              <a:rPr sz="1800" b="1">
+                <a:solidFill>
+                  <a:srgbClr val="0070C0"/>
+                </a:solidFill>
+                <a:latin typeface="Arial"/>
+                <a:ea typeface="微软雅黑"/>
+              </a:rPr>
+              <a:t>吞吐时序会“归零”，只有“总工作量 ÷ 总完成时间”跨场景可比</a:t>
+            </a:r>
+          </a:p>
+        </p:txBody>
+      </p:sp>
+      <p:pic>
+        <p:nvPicPr>
+          <p:cNvPr id="9004" name="Picture 9003" descr="fig6-throughput-s2-w3.png"/>
+          <p:cNvPicPr>
+            <a:picLocks noChangeAspect="1"/>
+          </p:cNvPicPr>
+          <p:nvPr/>
+        </p:nvPicPr>
+        <p:blipFill>
+          <a:blip r:embed="rId3"/>
+          <a:stretch>
+            <a:fillRect/>
+          </a:stretch>
+        </p:blipFill>
+        <p:spPr>
+          <a:xfrm>
+            <a:off x="568493" y="1755647"/>
+            <a:ext cx="7357788" cy="3017520"/>
+          </a:xfrm>
+          <a:prstGeom prst="rect">
+            <a:avLst/>
+          </a:prstGeom>
+        </p:spPr>
+      </p:pic>
+      <p:sp>
+        <p:nvSpPr>
+          <p:cNvPr id="9005" name="TextBox 9004"/>
+          <p:cNvSpPr txBox="1"/>
+          <p:nvPr/>
+        </p:nvSpPr>
+        <p:spPr>
+          <a:xfrm>
+            <a:off x="566928" y="4809744"/>
+            <a:ext cx="7360920" cy="237744"/>
+          </a:xfrm>
+          <a:prstGeom prst="rect">
+            <a:avLst/>
+          </a:prstGeom>
+          <a:noFill/>
+        </p:spPr>
+        <p:txBody>
+          <a:bodyPr wrap="square" anchor="t" lIns="0" rIns="0" tIns="0" bIns="0">
+            <a:spAutoFit/>
+          </a:bodyPr>
+          <a:lstStyle/>
+          <a:p>
+            <a:pPr algn="ctr"/>
+            <a:r>
+              <a:rPr sz="950" b="0">
+                <a:solidFill>
+                  <a:srgbClr val="636363"/>
+                </a:solidFill>
+                <a:latin typeface="Arial"/>
+                <a:ea typeface="微软雅黑"/>
+              </a:rPr>
+              <a:t>s2/w3 吞吐时序：爬升—平台—归零</a:t>
+            </a:r>
+          </a:p>
+        </p:txBody>
+      </p:sp>
+      <p:sp>
+        <p:nvSpPr>
+          <p:cNvPr id="9006" name="TextBox 9005"/>
+          <p:cNvSpPr txBox="1"/>
+          <p:nvPr/>
+        </p:nvSpPr>
+        <p:spPr>
+          <a:xfrm>
+            <a:off x="8138160" y="1828800"/>
+            <a:ext cx="3474720" cy="2834640"/>
+          </a:xfrm>
+          <a:prstGeom prst="rect">
+            <a:avLst/>
+          </a:prstGeom>
+          <a:noFill/>
+        </p:spPr>
+        <p:txBody>
+          <a:bodyPr wrap="square" anchor="t" lIns="0" rIns="0" tIns="0" bIns="0">
+            <a:spAutoFit/>
+          </a:bodyPr>
+          <a:lstStyle/>
+          <a:p>
+            <a:pPr algn="l">
+              <a:lnSpc>
+                <a:spcPct val="115000"/>
+              </a:lnSpc>
+            </a:pPr>
+            <a:r>
+              <a:rPr sz="1100" b="0">
+                <a:solidFill>
+                  <a:srgbClr val="2E2C2C"/>
+                </a:solidFill>
+                <a:latin typeface="Arial"/>
+                <a:ea typeface="微软雅黑"/>
+              </a:rPr>
+              <a:t>▪  三段结构：爬升—平台—归零，均值被尾段零值稀释</a:t>
+            </a:r>
+          </a:p>
+          <a:p>
+            <a:pPr algn="l">
+              <a:lnSpc>
+                <a:spcPct val="115000"/>
+              </a:lnSpc>
+              <a:spcBef>
+                <a:spcPts val="800"/>
+              </a:spcBef>
+            </a:pPr>
+            <a:r>
+              <a:rPr sz="1100" b="0">
+                <a:solidFill>
+                  <a:srgbClr val="2E2C2C"/>
+                </a:solidFill>
+                <a:latin typeface="Arial"/>
+                <a:ea typeface="微软雅黑"/>
+              </a:rPr>
+              <a:t>▪  时序类：3 run 逐点中位数，再去首尾各 2 点（约 30 s）</a:t>
+            </a:r>
+          </a:p>
+          <a:p>
+            <a:pPr algn="l">
+              <a:lnSpc>
+                <a:spcPct val="115000"/>
+              </a:lnSpc>
+              <a:spcBef>
+                <a:spcPts val="800"/>
+              </a:spcBef>
+            </a:pPr>
+            <a:r>
+              <a:rPr sz="1100" b="0">
+                <a:solidFill>
+                  <a:srgbClr val="2E2C2C"/>
+                </a:solidFill>
+                <a:latin typeface="Arial"/>
+                <a:ea typeface="微软雅黑"/>
+              </a:rPr>
+              <a:t>▪  c/d/e 单实例过载存在幸存者偏差，只与 a/b 比吞吐、队列、成功率</a:t>
+            </a:r>
+          </a:p>
+        </p:txBody>
+      </p:sp>
+      <p:sp>
+        <p:nvSpPr>
+          <p:cNvPr id="9007" name="Rounded Rectangle 9006"/>
+          <p:cNvSpPr/>
+          <p:nvPr/>
+        </p:nvSpPr>
+        <p:spPr>
+          <a:xfrm>
+            <a:off x="566928" y="4956048"/>
+            <a:ext cx="1744980" cy="841248"/>
+          </a:xfrm>
+          <a:prstGeom prst="roundRect">
+            <a:avLst/>
+          </a:prstGeom>
           <a:solidFill>
-            <a:srgbClr val="0070C0"/>
+            <a:srgbClr val="F2F4F7"/>
           </a:solidFill>
-          <a:ln>
-            <a:noFill/>
+          <a:ln w="9525">
+            <a:solidFill>
+              <a:srgbClr val="D9DEE5"/>
+            </a:solidFill>
           </a:ln>
           <a:effectLst/>
         </p:spPr>
@@ -11235,14 +11257,14 @@
       </p:sp>
       <p:sp>
         <p:nvSpPr>
-          <p:cNvPr id="9004" name="TextBox 9003"/>
+          <p:cNvPr id="9008" name="TextBox 9007"/>
           <p:cNvSpPr txBox="1"/>
           <p:nvPr/>
         </p:nvSpPr>
         <p:spPr>
           <a:xfrm>
-            <a:off x="1161288" y="1271016"/>
-            <a:ext cx="10241280" cy="384048"/>
+            <a:off x="658368" y="5029200"/>
+            <a:ext cx="1598676" cy="713232"/>
           </a:xfrm>
           <a:prstGeom prst="rect">
             <a:avLst/>
@@ -11250,174 +11272,54 @@
           <a:noFill/>
         </p:spPr>
         <p:txBody>
-          <a:bodyPr wrap="square" anchor="ctr" lIns="0" rIns="0" tIns="0" bIns="0">
+          <a:bodyPr wrap="square" anchor="t" lIns="0" rIns="0" tIns="0" bIns="0">
             <a:spAutoFit/>
           </a:bodyPr>
           <a:lstStyle/>
           <a:p>
             <a:pPr algn="l"/>
             <a:r>
-              <a:rPr sz="1550" b="1">
+              <a:rPr sz="950" b="1">
                 <a:solidFill>
-                  <a:srgbClr val="0070C0"/>
+                  <a:srgbClr val="113E6A"/>
                 </a:solidFill>
                 <a:latin typeface="Arial"/>
                 <a:ea typeface="微软雅黑"/>
               </a:rPr>
-              <a:t>吞吐时序会“归零”，只有“总工作量 ÷ 总完成时间”跨场景可比</a:t>
-            </a:r>
-          </a:p>
-        </p:txBody>
-      </p:sp>
-      <p:pic>
-        <p:nvPicPr>
-          <p:cNvPr id="9005" name="Picture 9004" descr="fig6-throughput-s2-w3.png"/>
-          <p:cNvPicPr>
-            <a:picLocks noChangeAspect="1"/>
-          </p:cNvPicPr>
-          <p:nvPr/>
-        </p:nvPicPr>
-        <p:blipFill>
-          <a:blip r:embed="rId3"/>
-          <a:stretch>
-            <a:fillRect/>
-          </a:stretch>
-        </p:blipFill>
-        <p:spPr>
-          <a:xfrm>
-            <a:off x="568493" y="1755647"/>
-            <a:ext cx="7357788" cy="3017520"/>
-          </a:xfrm>
-          <a:prstGeom prst="rect">
-            <a:avLst/>
-          </a:prstGeom>
-        </p:spPr>
-      </p:pic>
-      <p:sp>
-        <p:nvSpPr>
-          <p:cNvPr id="9006" name="TextBox 9005"/>
-          <p:cNvSpPr txBox="1"/>
-          <p:nvPr/>
-        </p:nvSpPr>
-        <p:spPr>
-          <a:xfrm>
-            <a:off x="566928" y="4809744"/>
-            <a:ext cx="7360920" cy="237744"/>
-          </a:xfrm>
-          <a:prstGeom prst="rect">
-            <a:avLst/>
-          </a:prstGeom>
-          <a:noFill/>
-        </p:spPr>
-        <p:txBody>
-          <a:bodyPr wrap="square" anchor="t" lIns="0" rIns="0" tIns="0" bIns="0">
-            <a:spAutoFit/>
-          </a:bodyPr>
-          <a:lstStyle/>
-          <a:p>
-            <a:pPr algn="ctr"/>
-            <a:r>
-              <a:rPr sz="950" b="0">
+              <a:t>有效吞吐 pods/s</a:t>
+            </a:r>
+          </a:p>
+          <a:p>
+            <a:pPr algn="l">
+              <a:lnSpc>
+                <a:spcPct val="105000"/>
+              </a:lnSpc>
+              <a:spcBef>
+                <a:spcPts val="100"/>
+              </a:spcBef>
+            </a:pPr>
+            <a:r>
+              <a:rPr sz="800" b="0">
                 <a:solidFill>
                   <a:srgbClr val="636363"/>
                 </a:solidFill>
                 <a:latin typeface="Arial"/>
                 <a:ea typeface="微软雅黑"/>
               </a:rPr>
-              <a:t>s2/w3 吞吐时序：爬升—平台—归零</a:t>
-            </a:r>
-          </a:p>
-        </p:txBody>
-      </p:sp>
-      <p:sp>
-        <p:nvSpPr>
-          <p:cNvPr id="9007" name="TextBox 9006"/>
-          <p:cNvSpPr txBox="1"/>
-          <p:nvPr/>
-        </p:nvSpPr>
-        <p:spPr>
-          <a:xfrm>
-            <a:off x="8138160" y="1828800"/>
-            <a:ext cx="3474720" cy="2834640"/>
-          </a:xfrm>
-          <a:prstGeom prst="rect">
-            <a:avLst/>
-          </a:prstGeom>
-          <a:noFill/>
-        </p:spPr>
-        <p:txBody>
-          <a:bodyPr wrap="square" anchor="t" lIns="0" rIns="0" tIns="0" bIns="0">
-            <a:spAutoFit/>
-          </a:bodyPr>
-          <a:lstStyle/>
-          <a:p>
-            <a:pPr algn="l">
-              <a:lnSpc>
-                <a:spcPct val="115000"/>
-              </a:lnSpc>
-            </a:pPr>
-            <a:r>
-              <a:rPr sz="1100" b="0">
-                <a:solidFill>
-                  <a:srgbClr val="2E2C2C"/>
-                </a:solidFill>
-                <a:latin typeface="Arial"/>
-                <a:ea typeface="微软雅黑"/>
-              </a:rPr>
-              <a:t>▪  三段结构：爬升—平台—归零，均值被尾段零值稀释</a:t>
-            </a:r>
-          </a:p>
-          <a:p>
-            <a:pPr algn="l">
-              <a:lnSpc>
-                <a:spcPct val="115000"/>
-              </a:lnSpc>
-              <a:spcBef>
-                <a:spcPts val="800"/>
-              </a:spcBef>
-            </a:pPr>
-            <a:r>
-              <a:rPr sz="1100" b="0">
-                <a:solidFill>
-                  <a:srgbClr val="2E2C2C"/>
-                </a:solidFill>
-                <a:latin typeface="Arial"/>
-                <a:ea typeface="微软雅黑"/>
-              </a:rPr>
-              <a:t>▪  时序类：3 run 逐点中位数，再去首尾各 2 点（约 30 s）</a:t>
-            </a:r>
-          </a:p>
-          <a:p>
-            <a:pPr algn="l">
-              <a:lnSpc>
-                <a:spcPct val="115000"/>
-              </a:lnSpc>
-              <a:spcBef>
-                <a:spcPts val="800"/>
-              </a:spcBef>
-            </a:pPr>
-            <a:r>
-              <a:rPr sz="1100" b="0">
-                <a:solidFill>
-                  <a:srgbClr val="2E2C2C"/>
-                </a:solidFill>
-                <a:latin typeface="Arial"/>
-                <a:ea typeface="微软雅黑"/>
-              </a:rPr>
-              <a:t>▪  c/d/e 单实例过载存在幸存者偏差，只与 a/b 比吞吐、队列、成功率</a:t>
-            </a:r>
-          </a:p>
-        </p:txBody>
-      </p:sp>
-      <p:sp>
-        <p:nvSpPr>
-          <p:cNvPr id="9008" name="Rounded Rectangle 9007"/>
+              <a:t>名义工作量 ÷ 完成时间（主口径）</a:t>
+            </a:r>
+          </a:p>
+        </p:txBody>
+      </p:sp>
+      <p:sp>
+        <p:nvSpPr>
+          <p:cNvPr id="9009" name="Rounded Rectangle 9008"/>
           <p:cNvSpPr/>
           <p:nvPr/>
         </p:nvSpPr>
         <p:spPr>
           <a:xfrm>
-            <a:off x="566928" y="4956048"/>
+            <a:off x="2430780" y="4956048"/>
             <a:ext cx="1744980" cy="841248"/>
           </a:xfrm>
           <a:prstGeom prst="roundRect">
@@ -11457,13 +11359,13 @@
       </p:sp>
       <p:sp>
         <p:nvSpPr>
-          <p:cNvPr id="9009" name="TextBox 9008"/>
+          <p:cNvPr id="9010" name="TextBox 9009"/>
           <p:cNvSpPr txBox="1"/>
           <p:nvPr/>
         </p:nvSpPr>
         <p:spPr>
           <a:xfrm>
-            <a:off x="658368" y="5029200"/>
+            <a:off x="2522220" y="5029200"/>
             <a:ext cx="1598676" cy="713232"/>
           </a:xfrm>
           <a:prstGeom prst="rect">
@@ -11486,7 +11388,7 @@
                 <a:latin typeface="Arial"/>
                 <a:ea typeface="微软雅黑"/>
               </a:rPr>
-              <a:t>有效吞吐 pods/s</a:t>
+              <a:t>峰值吞吐 pods/s</a:t>
             </a:r>
           </a:p>
           <a:p>
@@ -11506,20 +11408,20 @@
                 <a:latin typeface="Arial"/>
                 <a:ea typeface="微软雅黑"/>
               </a:rPr>
-              <a:t>名义工作量 ÷ 完成时间（主口径）</a:t>
-            </a:r>
-          </a:p>
-        </p:txBody>
-      </p:sp>
-      <p:sp>
-        <p:nvSpPr>
-          <p:cNvPr id="9010" name="Rounded Rectangle 9009"/>
+              <a:t>过程中的最高瞬时调度速率</a:t>
+            </a:r>
+          </a:p>
+        </p:txBody>
+      </p:sp>
+      <p:sp>
+        <p:nvSpPr>
+          <p:cNvPr id="9011" name="Rounded Rectangle 9010"/>
           <p:cNvSpPr/>
           <p:nvPr/>
         </p:nvSpPr>
         <p:spPr>
           <a:xfrm>
-            <a:off x="2430780" y="4956048"/>
+            <a:off x="4294632" y="4956048"/>
             <a:ext cx="1744980" cy="841248"/>
           </a:xfrm>
           <a:prstGeom prst="roundRect">
@@ -11559,13 +11461,13 @@
       </p:sp>
       <p:sp>
         <p:nvSpPr>
-          <p:cNvPr id="9011" name="TextBox 9010"/>
+          <p:cNvPr id="9012" name="TextBox 9011"/>
           <p:cNvSpPr txBox="1"/>
           <p:nvPr/>
         </p:nvSpPr>
         <p:spPr>
           <a:xfrm>
-            <a:off x="2522220" y="5029200"/>
+            <a:off x="4386071" y="5029200"/>
             <a:ext cx="1598676" cy="713232"/>
           </a:xfrm>
           <a:prstGeom prst="rect">
@@ -11588,7 +11490,7 @@
                 <a:latin typeface="Arial"/>
                 <a:ea typeface="微软雅黑"/>
               </a:rPr>
-              <a:t>峰值吞吐 pods/s</a:t>
+              <a:t>P90 / P99 延迟 s</a:t>
             </a:r>
           </a:p>
           <a:p>
@@ -11608,20 +11510,20 @@
                 <a:latin typeface="Arial"/>
                 <a:ea typeface="微软雅黑"/>
               </a:rPr>
-              <a:t>过程中的最高瞬时调度速率</a:t>
-            </a:r>
-          </a:p>
-        </p:txBody>
-      </p:sp>
-      <p:sp>
-        <p:nvSpPr>
-          <p:cNvPr id="9012" name="Rounded Rectangle 9011"/>
+              <a:t>入 activeQ 到 Bind 完成</a:t>
+            </a:r>
+          </a:p>
+        </p:txBody>
+      </p:sp>
+      <p:sp>
+        <p:nvSpPr>
+          <p:cNvPr id="9013" name="Rounded Rectangle 9012"/>
           <p:cNvSpPr/>
           <p:nvPr/>
         </p:nvSpPr>
         <p:spPr>
           <a:xfrm>
-            <a:off x="4294632" y="4956048"/>
+            <a:off x="6158483" y="4956048"/>
             <a:ext cx="1744980" cy="841248"/>
           </a:xfrm>
           <a:prstGeom prst="roundRect">
@@ -11661,13 +11563,13 @@
       </p:sp>
       <p:sp>
         <p:nvSpPr>
-          <p:cNvPr id="9013" name="TextBox 9012"/>
+          <p:cNvPr id="9014" name="TextBox 9013"/>
           <p:cNvSpPr txBox="1"/>
           <p:nvPr/>
         </p:nvSpPr>
         <p:spPr>
           <a:xfrm>
-            <a:off x="4386071" y="5029200"/>
+            <a:off x="6249923" y="5029200"/>
             <a:ext cx="1598676" cy="713232"/>
           </a:xfrm>
           <a:prstGeom prst="rect">
@@ -11690,7 +11592,7 @@
                 <a:latin typeface="Arial"/>
                 <a:ea typeface="微软雅黑"/>
               </a:rPr>
-              <a:t>P90 / P99 延迟 s</a:t>
+              <a:t>Pod E2E P99 s</a:t>
             </a:r>
           </a:p>
           <a:p>
@@ -11710,20 +11612,20 @@
                 <a:latin typeface="Arial"/>
                 <a:ea typeface="微软雅黑"/>
               </a:rPr>
-              <a:t>入 activeQ 到 Bind 完成</a:t>
-            </a:r>
-          </a:p>
-        </p:txBody>
-      </p:sp>
-      <p:sp>
-        <p:nvSpPr>
-          <p:cNvPr id="9014" name="Rounded Rectangle 9013"/>
+              <a:t>Dispatcher 观察到绑定完成</a:t>
+            </a:r>
+          </a:p>
+        </p:txBody>
+      </p:sp>
+      <p:sp>
+        <p:nvSpPr>
+          <p:cNvPr id="9015" name="Rounded Rectangle 9014"/>
           <p:cNvSpPr/>
           <p:nvPr/>
         </p:nvSpPr>
         <p:spPr>
           <a:xfrm>
-            <a:off x="6158483" y="4956048"/>
+            <a:off x="8022335" y="4956048"/>
             <a:ext cx="1744980" cy="841248"/>
           </a:xfrm>
           <a:prstGeom prst="roundRect">
@@ -11763,13 +11665,13 @@
       </p:sp>
       <p:sp>
         <p:nvSpPr>
-          <p:cNvPr id="9015" name="TextBox 9014"/>
+          <p:cNvPr id="9016" name="TextBox 9015"/>
           <p:cNvSpPr txBox="1"/>
           <p:nvPr/>
         </p:nvSpPr>
         <p:spPr>
           <a:xfrm>
-            <a:off x="6249923" y="5029200"/>
+            <a:off x="8113775" y="5029200"/>
             <a:ext cx="1598676" cy="713232"/>
           </a:xfrm>
           <a:prstGeom prst="rect">
@@ -11792,7 +11694,7 @@
                 <a:latin typeface="Arial"/>
                 <a:ea typeface="微软雅黑"/>
               </a:rPr>
-              <a:t>Pod E2E P99 s</a:t>
+              <a:t>绑定成功率</a:t>
             </a:r>
           </a:p>
           <a:p>
@@ -11812,20 +11714,20 @@
                 <a:latin typeface="Arial"/>
                 <a:ea typeface="微软雅黑"/>
               </a:rPr>
-              <a:t>Dispatcher 观察到绑定完成</a:t>
-            </a:r>
-          </a:p>
-        </p:txBody>
-      </p:sp>
-      <p:sp>
-        <p:nvSpPr>
-          <p:cNvPr id="9016" name="Rounded Rectangle 9015"/>
+              <a:t>Bind 成功 / Bind 尝试</a:t>
+            </a:r>
+          </a:p>
+        </p:txBody>
+      </p:sp>
+      <p:sp>
+        <p:nvSpPr>
+          <p:cNvPr id="9017" name="Rounded Rectangle 9016"/>
           <p:cNvSpPr/>
           <p:nvPr/>
         </p:nvSpPr>
         <p:spPr>
           <a:xfrm>
-            <a:off x="8022335" y="4956048"/>
+            <a:off x="9886188" y="4956048"/>
             <a:ext cx="1744980" cy="841248"/>
           </a:xfrm>
           <a:prstGeom prst="roundRect">
@@ -11865,13 +11767,13 @@
       </p:sp>
       <p:sp>
         <p:nvSpPr>
-          <p:cNvPr id="9017" name="TextBox 9016"/>
+          <p:cNvPr id="9018" name="TextBox 9017"/>
           <p:cNvSpPr txBox="1"/>
           <p:nvPr/>
         </p:nvSpPr>
         <p:spPr>
           <a:xfrm>
-            <a:off x="8113775" y="5029200"/>
+            <a:off x="9977627" y="5029200"/>
             <a:ext cx="1598676" cy="713232"/>
           </a:xfrm>
           <a:prstGeom prst="rect">
@@ -11894,7 +11796,7 @@
                 <a:latin typeface="Arial"/>
                 <a:ea typeface="微软雅黑"/>
               </a:rPr>
-              <a:t>绑定成功率</a:t>
+              <a:t>队列堆积峰值 pods</a:t>
             </a:r>
           </a:p>
           <a:p>
@@ -11914,116 +11816,14 @@
                 <a:latin typeface="Arial"/>
                 <a:ea typeface="微软雅黑"/>
               </a:rPr>
-              <a:t>Bind 成功 / Bind 尝试</a:t>
-            </a:r>
-          </a:p>
-        </p:txBody>
-      </p:sp>
-      <p:sp>
-        <p:nvSpPr>
-          <p:cNvPr id="9018" name="Rounded Rectangle 9017"/>
-          <p:cNvSpPr/>
-          <p:nvPr/>
-        </p:nvSpPr>
-        <p:spPr>
-          <a:xfrm>
-            <a:off x="9886188" y="4956048"/>
-            <a:ext cx="1744980" cy="841248"/>
-          </a:xfrm>
-          <a:prstGeom prst="roundRect">
-            <a:avLst/>
-          </a:prstGeom>
-          <a:solidFill>
-            <a:srgbClr val="F2F4F7"/>
-          </a:solidFill>
-          <a:ln w="9525">
-            <a:solidFill>
-              <a:srgbClr val="D9DEE5"/>
-            </a:solidFill>
-          </a:ln>
-          <a:effectLst/>
-        </p:spPr>
-        <p:style>
-          <a:lnRef idx="1">
-            <a:schemeClr val="accent1"/>
-          </a:lnRef>
-          <a:fillRef idx="3">
-            <a:schemeClr val="accent1"/>
-          </a:fillRef>
-          <a:effectRef idx="2">
-            <a:schemeClr val="accent1"/>
-          </a:effectRef>
-          <a:fontRef idx="minor">
-            <a:schemeClr val="lt1"/>
-          </a:fontRef>
-        </p:style>
-        <p:txBody>
-          <a:bodyPr rtlCol="0" anchor="ctr"/>
-          <a:lstStyle/>
-          <a:p>
-            <a:pPr algn="ctr"/>
+              <a:t>pending_pods 最大值</a:t>
+            </a:r>
           </a:p>
         </p:txBody>
       </p:sp>
       <p:sp>
         <p:nvSpPr>
           <p:cNvPr id="9019" name="TextBox 9018"/>
-          <p:cNvSpPr txBox="1"/>
-          <p:nvPr/>
-        </p:nvSpPr>
-        <p:spPr>
-          <a:xfrm>
-            <a:off x="9977627" y="5029200"/>
-            <a:ext cx="1598676" cy="713232"/>
-          </a:xfrm>
-          <a:prstGeom prst="rect">
-            <a:avLst/>
-          </a:prstGeom>
-          <a:noFill/>
-        </p:spPr>
-        <p:txBody>
-          <a:bodyPr wrap="square" anchor="t" lIns="0" rIns="0" tIns="0" bIns="0">
-            <a:spAutoFit/>
-          </a:bodyPr>
-          <a:lstStyle/>
-          <a:p>
-            <a:pPr algn="l"/>
-            <a:r>
-              <a:rPr sz="950" b="1">
-                <a:solidFill>
-                  <a:srgbClr val="113E6A"/>
-                </a:solidFill>
-                <a:latin typeface="Arial"/>
-                <a:ea typeface="微软雅黑"/>
-              </a:rPr>
-              <a:t>队列堆积峰值 pods</a:t>
-            </a:r>
-          </a:p>
-          <a:p>
-            <a:pPr algn="l">
-              <a:lnSpc>
-                <a:spcPct val="105000"/>
-              </a:lnSpc>
-              <a:spcBef>
-                <a:spcPts val="100"/>
-              </a:spcBef>
-            </a:pPr>
-            <a:r>
-              <a:rPr sz="800" b="0">
-                <a:solidFill>
-                  <a:srgbClr val="636363"/>
-                </a:solidFill>
-                <a:latin typeface="Arial"/>
-                <a:ea typeface="微软雅黑"/>
-              </a:rPr>
-              <a:t>pending_pods 最大值</a:t>
-            </a:r>
-          </a:p>
-        </p:txBody>
-      </p:sp>
-      <p:sp>
-        <p:nvSpPr>
-          <p:cNvPr id="9020" name="TextBox 9019"/>
           <p:cNvSpPr txBox="1"/>
           <p:nvPr/>
         </p:nvSpPr>
@@ -12059,7 +11859,7 @@
       </p:sp>
       <p:sp>
         <p:nvSpPr>
-          <p:cNvPr id="9021" name="TextBox 9020"/>
+          <p:cNvPr id="9020" name="TextBox 9019"/>
           <p:cNvSpPr txBox="1"/>
           <p:nvPr/>
         </p:nvSpPr>
@@ -12127,8 +11927,8 @@
         </p:nvSpPr>
         <p:spPr>
           <a:xfrm>
-            <a:off x="427038" y="220663"/>
-            <a:ext cx="474662" cy="560387"/>
+            <a:off x="182880" y="274320"/>
+            <a:ext cx="310896" cy="402336"/>
           </a:xfrm>
           <a:custGeom>
             <a:avLst/>
@@ -12348,8 +12148,8 @@
         </p:nvSpPr>
         <p:spPr>
           <a:xfrm>
-            <a:off x="1014984" y="155448"/>
-            <a:ext cx="8001000" cy="621792"/>
+            <a:off x="566928" y="155448"/>
+            <a:ext cx="8549640" cy="621792"/>
           </a:xfrm>
           <a:prstGeom prst="rect">
             <a:avLst/>
@@ -12382,23 +12182,65 @@
       </p:sp>
       <p:sp>
         <p:nvSpPr>
-          <p:cNvPr id="9003" name="Rectangle 9002"/>
-          <p:cNvSpPr/>
+          <p:cNvPr id="9003" name="TextBox 9002"/>
+          <p:cNvSpPr txBox="1"/>
           <p:nvPr/>
         </p:nvSpPr>
         <p:spPr>
           <a:xfrm>
-            <a:off x="1014984" y="1298448"/>
-            <a:ext cx="27432" cy="310896"/>
+            <a:off x="566928" y="1261872"/>
+            <a:ext cx="10881360" cy="438912"/>
           </a:xfrm>
           <a:prstGeom prst="rect">
             <a:avLst/>
           </a:prstGeom>
+          <a:noFill/>
+        </p:spPr>
+        <p:txBody>
+          <a:bodyPr wrap="square" anchor="ctr" lIns="0" rIns="0" tIns="0" bIns="0">
+            <a:spAutoFit/>
+          </a:bodyPr>
+          <a:lstStyle/>
+          <a:p>
+            <a:pPr algn="l">
+              <a:lnSpc>
+                <a:spcPct val="110000"/>
+              </a:lnSpc>
+            </a:pPr>
+            <a:r>
+              <a:rPr sz="1800" b="1">
+                <a:solidFill>
+                  <a:srgbClr val="0070C0"/>
+                </a:solidFill>
+                <a:latin typeface="Arial"/>
+                <a:ea typeface="微软雅黑"/>
+              </a:rPr>
+              <a:t>144 次 run 的 apiserver 断言全部通过：unbound = 0 且 dup = 0</a:t>
+            </a:r>
+          </a:p>
+        </p:txBody>
+      </p:sp>
+      <p:sp>
+        <p:nvSpPr>
+          <p:cNvPr id="9004" name="Rounded Rectangle 9003"/>
+          <p:cNvSpPr/>
+          <p:nvPr/>
+        </p:nvSpPr>
+        <p:spPr>
+          <a:xfrm>
+            <a:off x="658368" y="1783080"/>
+            <a:ext cx="3413760" cy="1417320"/>
+          </a:xfrm>
+          <a:prstGeom prst="roundRect">
+            <a:avLst/>
+          </a:prstGeom>
           <a:solidFill>
-            <a:srgbClr val="0070C0"/>
+            <a:srgbClr val="FFFFFF"/>
           </a:solidFill>
-          <a:ln>
-            <a:noFill/>
+          <a:ln w="9525">
+            <a:solidFill>
+              <a:srgbClr val="D6E3F0"/>
+            </a:solidFill>
           </a:ln>
           <a:effectLst/>
         </p:spPr>
@@ -12426,61 +12268,23 @@
       </p:sp>
       <p:sp>
         <p:nvSpPr>
-          <p:cNvPr id="9004" name="TextBox 9003"/>
-          <p:cNvSpPr txBox="1"/>
+          <p:cNvPr id="9005" name="Rectangle 9004"/>
+          <p:cNvSpPr/>
           <p:nvPr/>
         </p:nvSpPr>
         <p:spPr>
           <a:xfrm>
-            <a:off x="1161288" y="1271016"/>
-            <a:ext cx="10241280" cy="384048"/>
+            <a:off x="658368" y="1783080"/>
+            <a:ext cx="3413760" cy="45720"/>
           </a:xfrm>
           <a:prstGeom prst="rect">
             <a:avLst/>
           </a:prstGeom>
-          <a:noFill/>
-        </p:spPr>
-        <p:txBody>
-          <a:bodyPr wrap="square" anchor="ctr" lIns="0" rIns="0" tIns="0" bIns="0">
-            <a:spAutoFit/>
-          </a:bodyPr>
-          <a:lstStyle/>
-          <a:p>
-            <a:pPr algn="l"/>
-            <a:r>
-              <a:rPr sz="1550" b="1">
-                <a:solidFill>
-                  <a:srgbClr val="0070C0"/>
-                </a:solidFill>
-                <a:latin typeface="Arial"/>
-                <a:ea typeface="微软雅黑"/>
-              </a:rPr>
-              <a:t>144 次 run 的 apiserver 断言全部通过：unbound = 0 且 dup = 0</a:t>
-            </a:r>
-          </a:p>
-        </p:txBody>
-      </p:sp>
-      <p:sp>
-        <p:nvSpPr>
-          <p:cNvPr id="9005" name="Rounded Rectangle 9004"/>
-          <p:cNvSpPr/>
-          <p:nvPr/>
-        </p:nvSpPr>
-        <p:spPr>
-          <a:xfrm>
-            <a:off x="658368" y="1783080"/>
-            <a:ext cx="3413760" cy="1417320"/>
-          </a:xfrm>
-          <a:prstGeom prst="roundRect">
-            <a:avLst/>
-          </a:prstGeom>
           <a:solidFill>
-            <a:srgbClr val="FFFFFF"/>
+            <a:srgbClr val="113E6A"/>
           </a:solidFill>
-          <a:ln w="9525">
-            <a:solidFill>
-              <a:srgbClr val="D6E3F0"/>
-            </a:solidFill>
+          <a:ln>
+            <a:noFill/>
           </a:ln>
           <a:effectLst/>
         </p:spPr>
@@ -12508,23 +12312,97 @@
       </p:sp>
       <p:sp>
         <p:nvSpPr>
-          <p:cNvPr id="9006" name="Rectangle 9005"/>
-          <p:cNvSpPr/>
+          <p:cNvPr id="9006" name="TextBox 9005"/>
+          <p:cNvSpPr txBox="1"/>
           <p:nvPr/>
         </p:nvSpPr>
         <p:spPr>
           <a:xfrm>
-            <a:off x="658368" y="1783080"/>
-            <a:ext cx="3413760" cy="45720"/>
+            <a:off x="658368" y="1911095"/>
+            <a:ext cx="3413760" cy="841248"/>
           </a:xfrm>
           <a:prstGeom prst="rect">
             <a:avLst/>
           </a:prstGeom>
+          <a:noFill/>
+        </p:spPr>
+        <p:txBody>
+          <a:bodyPr wrap="square" anchor="ctr" lIns="0" rIns="0" tIns="0" bIns="0">
+            <a:spAutoFit/>
+          </a:bodyPr>
+          <a:lstStyle/>
+          <a:p>
+            <a:pPr algn="ctr"/>
+            <a:r>
+              <a:rPr sz="4600" b="1">
+                <a:solidFill>
+                  <a:srgbClr val="113E6A"/>
+                </a:solidFill>
+                <a:latin typeface="Arial"/>
+                <a:ea typeface="微软雅黑"/>
+              </a:rPr>
+              <a:t>100%</a:t>
+            </a:r>
+          </a:p>
+        </p:txBody>
+      </p:sp>
+      <p:sp>
+        <p:nvSpPr>
+          <p:cNvPr id="9007" name="TextBox 9006"/>
+          <p:cNvSpPr txBox="1"/>
+          <p:nvPr/>
+        </p:nvSpPr>
+        <p:spPr>
+          <a:xfrm>
+            <a:off x="658368" y="2816352"/>
+            <a:ext cx="3413760" cy="274320"/>
+          </a:xfrm>
+          <a:prstGeom prst="rect">
+            <a:avLst/>
+          </a:prstGeom>
+          <a:noFill/>
+        </p:spPr>
+        <p:txBody>
+          <a:bodyPr wrap="square" anchor="t" lIns="0" rIns="0" tIns="0" bIns="0">
+            <a:spAutoFit/>
+          </a:bodyPr>
+          <a:lstStyle/>
+          <a:p>
+            <a:pPr algn="ctr"/>
+            <a:r>
+              <a:rPr sz="1200" b="0">
+                <a:solidFill>
+                  <a:srgbClr val="636363"/>
+                </a:solidFill>
+                <a:latin typeface="Arial"/>
+                <a:ea typeface="微软雅黑"/>
+              </a:rPr>
+              <a:t>绑定成功率</a:t>
+            </a:r>
+          </a:p>
+        </p:txBody>
+      </p:sp>
+      <p:sp>
+        <p:nvSpPr>
+          <p:cNvPr id="9008" name="Rounded Rectangle 9007"/>
+          <p:cNvSpPr/>
+          <p:nvPr/>
+        </p:nvSpPr>
+        <p:spPr>
+          <a:xfrm>
+            <a:off x="4392168" y="1783080"/>
+            <a:ext cx="3413760" cy="1417320"/>
+          </a:xfrm>
+          <a:prstGeom prst="roundRect">
+            <a:avLst/>
+          </a:prstGeom>
           <a:solidFill>
-            <a:srgbClr val="113E6A"/>
+            <a:srgbClr val="FFFFFF"/>
           </a:solidFill>
-          <a:ln>
-            <a:noFill/>
+          <a:ln w="9525">
+            <a:solidFill>
+              <a:srgbClr val="D6E3F0"/>
+            </a:solidFill>
           </a:ln>
           <a:effectLst/>
         </p:spPr>
@@ -12552,97 +12430,23 @@
       </p:sp>
       <p:sp>
         <p:nvSpPr>
-          <p:cNvPr id="9007" name="TextBox 9006"/>
-          <p:cNvSpPr txBox="1"/>
+          <p:cNvPr id="9009" name="Rectangle 9008"/>
+          <p:cNvSpPr/>
           <p:nvPr/>
         </p:nvSpPr>
         <p:spPr>
           <a:xfrm>
-            <a:off x="658368" y="1911095"/>
-            <a:ext cx="3413760" cy="841248"/>
+            <a:off x="4392168" y="1783080"/>
+            <a:ext cx="3413760" cy="45720"/>
           </a:xfrm>
           <a:prstGeom prst="rect">
             <a:avLst/>
           </a:prstGeom>
-          <a:noFill/>
-        </p:spPr>
-        <p:txBody>
-          <a:bodyPr wrap="square" anchor="ctr" lIns="0" rIns="0" tIns="0" bIns="0">
-            <a:spAutoFit/>
-          </a:bodyPr>
-          <a:lstStyle/>
-          <a:p>
-            <a:pPr algn="ctr"/>
-            <a:r>
-              <a:rPr sz="4600" b="1">
-                <a:solidFill>
-                  <a:srgbClr val="113E6A"/>
-                </a:solidFill>
-                <a:latin typeface="Arial"/>
-                <a:ea typeface="微软雅黑"/>
-              </a:rPr>
-              <a:t>100%</a:t>
-            </a:r>
-          </a:p>
-        </p:txBody>
-      </p:sp>
-      <p:sp>
-        <p:nvSpPr>
-          <p:cNvPr id="9008" name="TextBox 9007"/>
-          <p:cNvSpPr txBox="1"/>
-          <p:nvPr/>
-        </p:nvSpPr>
-        <p:spPr>
-          <a:xfrm>
-            <a:off x="658368" y="2816352"/>
-            <a:ext cx="3413760" cy="274320"/>
-          </a:xfrm>
-          <a:prstGeom prst="rect">
-            <a:avLst/>
-          </a:prstGeom>
-          <a:noFill/>
-        </p:spPr>
-        <p:txBody>
-          <a:bodyPr wrap="square" anchor="t" lIns="0" rIns="0" tIns="0" bIns="0">
-            <a:spAutoFit/>
-          </a:bodyPr>
-          <a:lstStyle/>
-          <a:p>
-            <a:pPr algn="ctr"/>
-            <a:r>
-              <a:rPr sz="1200" b="0">
-                <a:solidFill>
-                  <a:srgbClr val="636363"/>
-                </a:solidFill>
-                <a:latin typeface="Arial"/>
-                <a:ea typeface="微软雅黑"/>
-              </a:rPr>
-              <a:t>绑定成功率</a:t>
-            </a:r>
-          </a:p>
-        </p:txBody>
-      </p:sp>
-      <p:sp>
-        <p:nvSpPr>
-          <p:cNvPr id="9009" name="Rounded Rectangle 9008"/>
-          <p:cNvSpPr/>
-          <p:nvPr/>
-        </p:nvSpPr>
-        <p:spPr>
-          <a:xfrm>
-            <a:off x="4392168" y="1783080"/>
-            <a:ext cx="3413760" cy="1417320"/>
-          </a:xfrm>
-          <a:prstGeom prst="roundRect">
-            <a:avLst/>
-          </a:prstGeom>
           <a:solidFill>
-            <a:srgbClr val="FFFFFF"/>
+            <a:srgbClr val="113E6A"/>
           </a:solidFill>
-          <a:ln w="9525">
-            <a:solidFill>
-              <a:srgbClr val="D6E3F0"/>
-            </a:solidFill>
+          <a:ln>
+            <a:noFill/>
           </a:ln>
           <a:effectLst/>
         </p:spPr>
@@ -12670,23 +12474,97 @@
       </p:sp>
       <p:sp>
         <p:nvSpPr>
-          <p:cNvPr id="9010" name="Rectangle 9009"/>
-          <p:cNvSpPr/>
+          <p:cNvPr id="9010" name="TextBox 9009"/>
+          <p:cNvSpPr txBox="1"/>
           <p:nvPr/>
         </p:nvSpPr>
         <p:spPr>
           <a:xfrm>
-            <a:off x="4392168" y="1783080"/>
-            <a:ext cx="3413760" cy="45720"/>
+            <a:off x="4392168" y="1911095"/>
+            <a:ext cx="3413760" cy="841248"/>
           </a:xfrm>
           <a:prstGeom prst="rect">
             <a:avLst/>
           </a:prstGeom>
+          <a:noFill/>
+        </p:spPr>
+        <p:txBody>
+          <a:bodyPr wrap="square" anchor="ctr" lIns="0" rIns="0" tIns="0" bIns="0">
+            <a:spAutoFit/>
+          </a:bodyPr>
+          <a:lstStyle/>
+          <a:p>
+            <a:pPr algn="ctr"/>
+            <a:r>
+              <a:rPr sz="4600" b="1">
+                <a:solidFill>
+                  <a:srgbClr val="113E6A"/>
+                </a:solidFill>
+                <a:latin typeface="Arial"/>
+                <a:ea typeface="微软雅黑"/>
+              </a:rPr>
+              <a:t>144</a:t>
+            </a:r>
+          </a:p>
+        </p:txBody>
+      </p:sp>
+      <p:sp>
+        <p:nvSpPr>
+          <p:cNvPr id="9011" name="TextBox 9010"/>
+          <p:cNvSpPr txBox="1"/>
+          <p:nvPr/>
+        </p:nvSpPr>
+        <p:spPr>
+          <a:xfrm>
+            <a:off x="4392168" y="2816352"/>
+            <a:ext cx="3413760" cy="274320"/>
+          </a:xfrm>
+          <a:prstGeom prst="rect">
+            <a:avLst/>
+          </a:prstGeom>
+          <a:noFill/>
+        </p:spPr>
+        <p:txBody>
+          <a:bodyPr wrap="square" anchor="t" lIns="0" rIns="0" tIns="0" bIns="0">
+            <a:spAutoFit/>
+          </a:bodyPr>
+          <a:lstStyle/>
+          <a:p>
+            <a:pPr algn="ctr"/>
+            <a:r>
+              <a:rPr sz="1200" b="0">
+                <a:solidFill>
+                  <a:srgbClr val="636363"/>
+                </a:solidFill>
+                <a:latin typeface="Arial"/>
+                <a:ea typeface="微软雅黑"/>
+              </a:rPr>
+              <a:t>次 run 全部通过</a:t>
+            </a:r>
+          </a:p>
+        </p:txBody>
+      </p:sp>
+      <p:sp>
+        <p:nvSpPr>
+          <p:cNvPr id="9012" name="Rounded Rectangle 9011"/>
+          <p:cNvSpPr/>
+          <p:nvPr/>
+        </p:nvSpPr>
+        <p:spPr>
+          <a:xfrm>
+            <a:off x="8125968" y="1783080"/>
+            <a:ext cx="3413760" cy="1417320"/>
+          </a:xfrm>
+          <a:prstGeom prst="roundRect">
+            <a:avLst/>
+          </a:prstGeom>
           <a:solidFill>
-            <a:srgbClr val="113E6A"/>
+            <a:srgbClr val="FFFFFF"/>
           </a:solidFill>
-          <a:ln>
-            <a:noFill/>
+          <a:ln w="9525">
+            <a:solidFill>
+              <a:srgbClr val="D6E3F0"/>
+            </a:solidFill>
           </a:ln>
           <a:effectLst/>
         </p:spPr>
@@ -12714,97 +12592,23 @@
       </p:sp>
       <p:sp>
         <p:nvSpPr>
-          <p:cNvPr id="9011" name="TextBox 9010"/>
-          <p:cNvSpPr txBox="1"/>
+          <p:cNvPr id="9013" name="Rectangle 9012"/>
+          <p:cNvSpPr/>
           <p:nvPr/>
         </p:nvSpPr>
         <p:spPr>
           <a:xfrm>
-            <a:off x="4392168" y="1911095"/>
-            <a:ext cx="3413760" cy="841248"/>
+            <a:off x="8125968" y="1783080"/>
+            <a:ext cx="3413760" cy="45720"/>
           </a:xfrm>
           <a:prstGeom prst="rect">
             <a:avLst/>
           </a:prstGeom>
-          <a:noFill/>
-        </p:spPr>
-        <p:txBody>
-          <a:bodyPr wrap="square" anchor="ctr" lIns="0" rIns="0" tIns="0" bIns="0">
-            <a:spAutoFit/>
-          </a:bodyPr>
-          <a:lstStyle/>
-          <a:p>
-            <a:pPr algn="ctr"/>
-            <a:r>
-              <a:rPr sz="4600" b="1">
-                <a:solidFill>
-                  <a:srgbClr val="113E6A"/>
-                </a:solidFill>
-                <a:latin typeface="Arial"/>
-                <a:ea typeface="微软雅黑"/>
-              </a:rPr>
-              <a:t>144</a:t>
-            </a:r>
-          </a:p>
-        </p:txBody>
-      </p:sp>
-      <p:sp>
-        <p:nvSpPr>
-          <p:cNvPr id="9012" name="TextBox 9011"/>
-          <p:cNvSpPr txBox="1"/>
-          <p:nvPr/>
-        </p:nvSpPr>
-        <p:spPr>
-          <a:xfrm>
-            <a:off x="4392168" y="2816352"/>
-            <a:ext cx="3413760" cy="274320"/>
-          </a:xfrm>
-          <a:prstGeom prst="rect">
-            <a:avLst/>
-          </a:prstGeom>
-          <a:noFill/>
-        </p:spPr>
-        <p:txBody>
-          <a:bodyPr wrap="square" anchor="t" lIns="0" rIns="0" tIns="0" bIns="0">
-            <a:spAutoFit/>
-          </a:bodyPr>
-          <a:lstStyle/>
-          <a:p>
-            <a:pPr algn="ctr"/>
-            <a:r>
-              <a:rPr sz="1200" b="0">
-                <a:solidFill>
-                  <a:srgbClr val="636363"/>
-                </a:solidFill>
-                <a:latin typeface="Arial"/>
-                <a:ea typeface="微软雅黑"/>
-              </a:rPr>
-              <a:t>次 run 全部通过</a:t>
-            </a:r>
-          </a:p>
-        </p:txBody>
-      </p:sp>
-      <p:sp>
-        <p:nvSpPr>
-          <p:cNvPr id="9013" name="Rounded Rectangle 9012"/>
-          <p:cNvSpPr/>
-          <p:nvPr/>
-        </p:nvSpPr>
-        <p:spPr>
-          <a:xfrm>
-            <a:off x="8125968" y="1783080"/>
-            <a:ext cx="3413760" cy="1417320"/>
-          </a:xfrm>
-          <a:prstGeom prst="roundRect">
-            <a:avLst/>
-          </a:prstGeom>
           <a:solidFill>
-            <a:srgbClr val="FFFFFF"/>
+            <a:srgbClr val="113E6A"/>
           </a:solidFill>
-          <a:ln w="9525">
-            <a:solidFill>
-              <a:srgbClr val="D6E3F0"/>
-            </a:solidFill>
+          <a:ln>
+            <a:noFill/>
           </a:ln>
           <a:effectLst/>
         </p:spPr>
@@ -12832,51 +12636,7 @@
       </p:sp>
       <p:sp>
         <p:nvSpPr>
-          <p:cNvPr id="9014" name="Rectangle 9013"/>
-          <p:cNvSpPr/>
-          <p:nvPr/>
-        </p:nvSpPr>
-        <p:spPr>
-          <a:xfrm>
-            <a:off x="8125968" y="1783080"/>
-            <a:ext cx="3413760" cy="45720"/>
-          </a:xfrm>
-          <a:prstGeom prst="rect">
-            <a:avLst/>
-          </a:prstGeom>
-          <a:solidFill>
-            <a:srgbClr val="113E6A"/>
-          </a:solidFill>
-          <a:ln>
-            <a:noFill/>
-          </a:ln>
-          <a:effectLst/>
-        </p:spPr>
-        <p:style>
-          <a:lnRef idx="1">
-            <a:schemeClr val="accent1"/>
-          </a:lnRef>
-          <a:fillRef idx="3">
-            <a:schemeClr val="accent1"/>
-          </a:fillRef>
-          <a:effectRef idx="2">
-            <a:schemeClr val="accent1"/>
-          </a:effectRef>
-          <a:fontRef idx="minor">
-            <a:schemeClr val="lt1"/>
-          </a:fontRef>
-        </p:style>
-        <p:txBody>
-          <a:bodyPr rtlCol="0" anchor="ctr"/>
-          <a:lstStyle/>
-          <a:p>
-            <a:pPr algn="ctr"/>
-          </a:p>
-        </p:txBody>
-      </p:sp>
-      <p:sp>
-        <p:nvSpPr>
-          <p:cNvPr id="9015" name="TextBox 9014"/>
+          <p:cNvPr id="9014" name="TextBox 9013"/>
           <p:cNvSpPr txBox="1"/>
           <p:nvPr/>
         </p:nvSpPr>
@@ -12912,7 +12672,7 @@
       </p:sp>
       <p:sp>
         <p:nvSpPr>
-          <p:cNvPr id="9016" name="TextBox 9015"/>
+          <p:cNvPr id="9015" name="TextBox 9014"/>
           <p:cNvSpPr txBox="1"/>
           <p:nvPr/>
         </p:nvSpPr>
@@ -12948,7 +12708,7 @@
       </p:sp>
       <p:sp>
         <p:nvSpPr>
-          <p:cNvPr id="9017" name="TextBox 9016"/>
+          <p:cNvPr id="9016" name="TextBox 9015"/>
           <p:cNvSpPr txBox="1"/>
           <p:nvPr/>
         </p:nvSpPr>
@@ -13028,7 +12788,7 @@
       </p:sp>
       <p:sp>
         <p:nvSpPr>
-          <p:cNvPr id="9018" name="TextBox 9017"/>
+          <p:cNvPr id="9017" name="TextBox 9016"/>
           <p:cNvSpPr txBox="1"/>
           <p:nvPr/>
         </p:nvSpPr>
@@ -13096,8 +12856,8 @@
         </p:nvSpPr>
         <p:spPr>
           <a:xfrm>
-            <a:off x="427038" y="220663"/>
-            <a:ext cx="474662" cy="560387"/>
+            <a:off x="182880" y="274320"/>
+            <a:ext cx="310896" cy="402336"/>
           </a:xfrm>
           <a:custGeom>
             <a:avLst/>
@@ -13317,8 +13077,8 @@
         </p:nvSpPr>
         <p:spPr>
           <a:xfrm>
-            <a:off x="1014984" y="155448"/>
-            <a:ext cx="8001000" cy="621792"/>
+            <a:off x="566928" y="155448"/>
+            <a:ext cx="8549640" cy="621792"/>
           </a:xfrm>
           <a:prstGeom prst="rect">
             <a:avLst/>
@@ -13351,58 +13111,14 @@
       </p:sp>
       <p:sp>
         <p:nvSpPr>
-          <p:cNvPr id="9003" name="Rectangle 9002"/>
-          <p:cNvSpPr/>
-          <p:nvPr/>
-        </p:nvSpPr>
-        <p:spPr>
-          <a:xfrm>
-            <a:off x="1014984" y="1298448"/>
-            <a:ext cx="27432" cy="310896"/>
-          </a:xfrm>
-          <a:prstGeom prst="rect">
-            <a:avLst/>
-          </a:prstGeom>
-          <a:solidFill>
-            <a:srgbClr val="0070C0"/>
-          </a:solidFill>
-          <a:ln>
-            <a:noFill/>
-          </a:ln>
-          <a:effectLst/>
-        </p:spPr>
-        <p:style>
-          <a:lnRef idx="1">
-            <a:schemeClr val="accent1"/>
-          </a:lnRef>
-          <a:fillRef idx="3">
-            <a:schemeClr val="accent1"/>
-          </a:fillRef>
-          <a:effectRef idx="2">
-            <a:schemeClr val="accent1"/>
-          </a:effectRef>
-          <a:fontRef idx="minor">
-            <a:schemeClr val="lt1"/>
-          </a:fontRef>
-        </p:style>
-        <p:txBody>
-          <a:bodyPr rtlCol="0" anchor="ctr"/>
-          <a:lstStyle/>
-          <a:p>
-            <a:pPr algn="ctr"/>
-          </a:p>
-        </p:txBody>
-      </p:sp>
-      <p:sp>
-        <p:nvSpPr>
-          <p:cNvPr id="9004" name="TextBox 9003"/>
+          <p:cNvPr id="9003" name="TextBox 9002"/>
           <p:cNvSpPr txBox="1"/>
           <p:nvPr/>
         </p:nvSpPr>
         <p:spPr>
           <a:xfrm>
-            <a:off x="1161288" y="1271016"/>
-            <a:ext cx="10241280" cy="384048"/>
+            <a:off x="566928" y="1261872"/>
+            <a:ext cx="10881360" cy="438912"/>
           </a:xfrm>
           <a:prstGeom prst="rect">
             <a:avLst/>
@@ -13415,9 +13131,13 @@
           </a:bodyPr>
           <a:lstStyle/>
           <a:p>
-            <a:pPr algn="l"/>
-            <a:r>
-              <a:rPr sz="1550" b="1">
+            <a:pPr algn="l">
+              <a:lnSpc>
+                <a:spcPct val="110000"/>
+              </a:lnSpc>
+            </a:pPr>
+            <a:r>
+              <a:rPr sz="1800" b="1">
                 <a:solidFill>
                   <a:srgbClr val="0070C0"/>
                 </a:solidFill>
@@ -13431,7 +13151,7 @@
       </p:sp>
       <p:pic>
         <p:nvPicPr>
-          <p:cNvPr id="9005" name="Picture 9004" descr="fig6-29a-layer0-timeseries.png"/>
+          <p:cNvPr id="9004" name="Picture 9003" descr="fig6-29a-layer0-timeseries.png"/>
           <p:cNvPicPr>
             <a:picLocks noChangeAspect="1"/>
           </p:cNvPicPr>
@@ -13455,7 +13175,7 @@
       </p:pic>
       <p:sp>
         <p:nvSpPr>
-          <p:cNvPr id="9006" name="TextBox 9005"/>
+          <p:cNvPr id="9005" name="TextBox 9004"/>
           <p:cNvSpPr txBox="1"/>
           <p:nvPr/>
         </p:nvSpPr>
@@ -13535,7 +13255,7 @@
       </p:sp>
       <p:sp>
         <p:nvSpPr>
-          <p:cNvPr id="9007" name="TextBox 9006"/>
+          <p:cNvPr id="9006" name="TextBox 9005"/>
           <p:cNvSpPr txBox="1"/>
           <p:nvPr/>
         </p:nvSpPr>
@@ -13571,7 +13291,7 @@
       </p:sp>
       <p:sp>
         <p:nvSpPr>
-          <p:cNvPr id="9008" name="TextBox 9007"/>
+          <p:cNvPr id="9007" name="TextBox 9006"/>
           <p:cNvSpPr txBox="1"/>
           <p:nvPr/>
         </p:nvSpPr>
@@ -13639,8 +13359,8 @@
         </p:nvSpPr>
         <p:spPr>
           <a:xfrm>
-            <a:off x="427038" y="220663"/>
-            <a:ext cx="474662" cy="560387"/>
+            <a:off x="182880" y="274320"/>
+            <a:ext cx="310896" cy="402336"/>
           </a:xfrm>
           <a:custGeom>
             <a:avLst/>
@@ -13860,8 +13580,8 @@
         </p:nvSpPr>
         <p:spPr>
           <a:xfrm>
-            <a:off x="1014984" y="155448"/>
-            <a:ext cx="8001000" cy="621792"/>
+            <a:off x="566928" y="155448"/>
+            <a:ext cx="8549640" cy="621792"/>
           </a:xfrm>
           <a:prstGeom prst="rect">
             <a:avLst/>
@@ -13894,58 +13614,14 @@
       </p:sp>
       <p:sp>
         <p:nvSpPr>
-          <p:cNvPr id="9003" name="Rectangle 9002"/>
-          <p:cNvSpPr/>
-          <p:nvPr/>
-        </p:nvSpPr>
-        <p:spPr>
-          <a:xfrm>
-            <a:off x="1014984" y="1298448"/>
-            <a:ext cx="27432" cy="310896"/>
-          </a:xfrm>
-          <a:prstGeom prst="rect">
-            <a:avLst/>
-          </a:prstGeom>
-          <a:solidFill>
-            <a:srgbClr val="0070C0"/>
-          </a:solidFill>
-          <a:ln>
-            <a:noFill/>
-          </a:ln>
-          <a:effectLst/>
-        </p:spPr>
-        <p:style>
-          <a:lnRef idx="1">
-            <a:schemeClr val="accent1"/>
-          </a:lnRef>
-          <a:fillRef idx="3">
-            <a:schemeClr val="accent1"/>
-          </a:fillRef>
-          <a:effectRef idx="2">
-            <a:schemeClr val="accent1"/>
-          </a:effectRef>
-          <a:fontRef idx="minor">
-            <a:schemeClr val="lt1"/>
-          </a:fontRef>
-        </p:style>
-        <p:txBody>
-          <a:bodyPr rtlCol="0" anchor="ctr"/>
-          <a:lstStyle/>
-          <a:p>
-            <a:pPr algn="ctr"/>
-          </a:p>
-        </p:txBody>
-      </p:sp>
-      <p:sp>
-        <p:nvSpPr>
-          <p:cNvPr id="9004" name="TextBox 9003"/>
+          <p:cNvPr id="9003" name="TextBox 9002"/>
           <p:cNvSpPr txBox="1"/>
           <p:nvPr/>
         </p:nvSpPr>
         <p:spPr>
           <a:xfrm>
-            <a:off x="1161288" y="1271016"/>
-            <a:ext cx="10241280" cy="384048"/>
+            <a:off x="566928" y="1261872"/>
+            <a:ext cx="10881360" cy="438912"/>
           </a:xfrm>
           <a:prstGeom prst="rect">
             <a:avLst/>
@@ -13958,9 +13634,13 @@
           </a:bodyPr>
           <a:lstStyle/>
           <a:p>
-            <a:pPr algn="l"/>
-            <a:r>
-              <a:rPr sz="1550" b="1">
+            <a:pPr algn="l">
+              <a:lnSpc>
+                <a:spcPct val="110000"/>
+              </a:lnSpc>
+            </a:pPr>
+            <a:r>
+              <a:rPr sz="1800" b="1">
                 <a:solidFill>
                   <a:srgbClr val="0070C0"/>
                 </a:solidFill>
@@ -13974,7 +13654,7 @@
       </p:sp>
       <p:pic>
         <p:nvPicPr>
-          <p:cNvPr id="9005" name="Picture 9004" descr="fig6-29b-layer3-timeseries.png"/>
+          <p:cNvPr id="9004" name="Picture 9003" descr="fig6-29b-layer3-timeseries.png"/>
           <p:cNvPicPr>
             <a:picLocks noChangeAspect="1"/>
           </p:cNvPicPr>
@@ -13998,7 +13678,7 @@
       </p:pic>
       <p:sp>
         <p:nvSpPr>
-          <p:cNvPr id="9006" name="TextBox 9005"/>
+          <p:cNvPr id="9005" name="TextBox 9004"/>
           <p:cNvSpPr txBox="1"/>
           <p:nvPr/>
         </p:nvSpPr>
@@ -14078,7 +13758,7 @@
       </p:sp>
       <p:sp>
         <p:nvSpPr>
-          <p:cNvPr id="9007" name="TextBox 9006"/>
+          <p:cNvPr id="9006" name="TextBox 9005"/>
           <p:cNvSpPr txBox="1"/>
           <p:nvPr/>
         </p:nvSpPr>
@@ -14114,7 +13794,7 @@
       </p:sp>
       <p:sp>
         <p:nvSpPr>
-          <p:cNvPr id="9008" name="TextBox 9007"/>
+          <p:cNvPr id="9007" name="TextBox 9006"/>
           <p:cNvSpPr txBox="1"/>
           <p:nvPr/>
         </p:nvSpPr>
@@ -14182,8 +13862,8 @@
         </p:nvSpPr>
         <p:spPr>
           <a:xfrm>
-            <a:off x="427038" y="220663"/>
-            <a:ext cx="474662" cy="560387"/>
+            <a:off x="182880" y="274320"/>
+            <a:ext cx="310896" cy="402336"/>
           </a:xfrm>
           <a:custGeom>
             <a:avLst/>
@@ -14403,8 +14083,8 @@
         </p:nvSpPr>
         <p:spPr>
           <a:xfrm>
-            <a:off x="1014984" y="155448"/>
-            <a:ext cx="8001000" cy="621792"/>
+            <a:off x="566928" y="155448"/>
+            <a:ext cx="8549640" cy="621792"/>
           </a:xfrm>
           <a:prstGeom prst="rect">
             <a:avLst/>
@@ -14437,58 +14117,14 @@
       </p:sp>
       <p:sp>
         <p:nvSpPr>
-          <p:cNvPr id="9003" name="Rectangle 9002"/>
-          <p:cNvSpPr/>
-          <p:nvPr/>
-        </p:nvSpPr>
-        <p:spPr>
-          <a:xfrm>
-            <a:off x="1014984" y="1298448"/>
-            <a:ext cx="27432" cy="310896"/>
-          </a:xfrm>
-          <a:prstGeom prst="rect">
-            <a:avLst/>
-          </a:prstGeom>
-          <a:solidFill>
-            <a:srgbClr val="0070C0"/>
-          </a:solidFill>
-          <a:ln>
-            <a:noFill/>
-          </a:ln>
-          <a:effectLst/>
-        </p:spPr>
-        <p:style>
-          <a:lnRef idx="1">
-            <a:schemeClr val="accent1"/>
-          </a:lnRef>
-          <a:fillRef idx="3">
-            <a:schemeClr val="accent1"/>
-          </a:fillRef>
-          <a:effectRef idx="2">
-            <a:schemeClr val="accent1"/>
-          </a:effectRef>
-          <a:fontRef idx="minor">
-            <a:schemeClr val="lt1"/>
-          </a:fontRef>
-        </p:style>
-        <p:txBody>
-          <a:bodyPr rtlCol="0" anchor="ctr"/>
-          <a:lstStyle/>
-          <a:p>
-            <a:pPr algn="ctr"/>
-          </a:p>
-        </p:txBody>
-      </p:sp>
-      <p:sp>
-        <p:nvSpPr>
-          <p:cNvPr id="9004" name="TextBox 9003"/>
+          <p:cNvPr id="9003" name="TextBox 9002"/>
           <p:cNvSpPr txBox="1"/>
           <p:nvPr/>
         </p:nvSpPr>
         <p:spPr>
           <a:xfrm>
-            <a:off x="1161288" y="1271016"/>
-            <a:ext cx="10241280" cy="384048"/>
+            <a:off x="566928" y="1261872"/>
+            <a:ext cx="10881360" cy="438912"/>
           </a:xfrm>
           <a:prstGeom prst="rect">
             <a:avLst/>
@@ -14501,9 +14137,13 @@
           </a:bodyPr>
           <a:lstStyle/>
           <a:p>
-            <a:pPr algn="l"/>
-            <a:r>
-              <a:rPr sz="1550" b="1">
+            <a:pPr algn="l">
+              <a:lnSpc>
+                <a:spcPct val="110000"/>
+              </a:lnSpc>
+            </a:pPr>
+            <a:r>
+              <a:rPr sz="1800" b="1">
                 <a:solidFill>
                   <a:srgbClr val="0070C0"/>
                 </a:solidFill>
@@ -14517,7 +14157,7 @@
       </p:sp>
       <p:pic>
         <p:nvPicPr>
-          <p:cNvPr id="9005" name="Picture 9004" descr="fig6-3-throughput-5group.png"/>
+          <p:cNvPr id="9004" name="Picture 9003" descr="fig6-3-throughput-5group.png"/>
           <p:cNvPicPr>
             <a:picLocks noChangeAspect="1"/>
           </p:cNvPicPr>
@@ -14541,7 +14181,7 @@
       </p:pic>
       <p:sp>
         <p:nvSpPr>
-          <p:cNvPr id="9006" name="TextBox 9005"/>
+          <p:cNvPr id="9005" name="TextBox 9004"/>
           <p:cNvSpPr txBox="1"/>
           <p:nvPr/>
         </p:nvSpPr>
@@ -14621,7 +14261,7 @@
       </p:sp>
       <p:graphicFrame>
         <p:nvGraphicFramePr>
-          <p:cNvPr id="9007" name="Table 9006"/>
+          <p:cNvPr id="9006" name="Table 9005"/>
           <p:cNvGraphicFramePr>
             <a:graphicFrameLocks noGrp="1"/>
           </p:cNvGraphicFramePr>
@@ -15089,7 +14729,7 @@
       </p:graphicFrame>
       <p:sp>
         <p:nvSpPr>
-          <p:cNvPr id="9008" name="TextBox 9007"/>
+          <p:cNvPr id="9007" name="TextBox 9006"/>
           <p:cNvSpPr txBox="1"/>
           <p:nvPr/>
         </p:nvSpPr>
@@ -15125,7 +14765,7 @@
       </p:sp>
       <p:sp>
         <p:nvSpPr>
-          <p:cNvPr id="9009" name="TextBox 9008"/>
+          <p:cNvPr id="9008" name="TextBox 9007"/>
           <p:cNvSpPr txBox="1"/>
           <p:nvPr/>
         </p:nvSpPr>
@@ -15193,8 +14833,8 @@
         </p:nvSpPr>
         <p:spPr>
           <a:xfrm>
-            <a:off x="427038" y="220663"/>
-            <a:ext cx="474662" cy="560387"/>
+            <a:off x="182880" y="274320"/>
+            <a:ext cx="310896" cy="402336"/>
           </a:xfrm>
           <a:custGeom>
             <a:avLst/>
@@ -15414,8 +15054,8 @@
         </p:nvSpPr>
         <p:spPr>
           <a:xfrm>
-            <a:off x="1014984" y="155448"/>
-            <a:ext cx="8001000" cy="621792"/>
+            <a:off x="566928" y="155448"/>
+            <a:ext cx="8549640" cy="621792"/>
           </a:xfrm>
           <a:prstGeom prst="rect">
             <a:avLst/>
@@ -15448,58 +15088,14 @@
       </p:sp>
       <p:sp>
         <p:nvSpPr>
-          <p:cNvPr id="9003" name="Rectangle 9002"/>
-          <p:cNvSpPr/>
-          <p:nvPr/>
-        </p:nvSpPr>
-        <p:spPr>
-          <a:xfrm>
-            <a:off x="1014984" y="1298448"/>
-            <a:ext cx="27432" cy="310896"/>
-          </a:xfrm>
-          <a:prstGeom prst="rect">
-            <a:avLst/>
-          </a:prstGeom>
-          <a:solidFill>
-            <a:srgbClr val="0070C0"/>
-          </a:solidFill>
-          <a:ln>
-            <a:noFill/>
-          </a:ln>
-          <a:effectLst/>
-        </p:spPr>
-        <p:style>
-          <a:lnRef idx="1">
-            <a:schemeClr val="accent1"/>
-          </a:lnRef>
-          <a:fillRef idx="3">
-            <a:schemeClr val="accent1"/>
-          </a:fillRef>
-          <a:effectRef idx="2">
-            <a:schemeClr val="accent1"/>
-          </a:effectRef>
-          <a:fontRef idx="minor">
-            <a:schemeClr val="lt1"/>
-          </a:fontRef>
-        </p:style>
-        <p:txBody>
-          <a:bodyPr rtlCol="0" anchor="ctr"/>
-          <a:lstStyle/>
-          <a:p>
-            <a:pPr algn="ctr"/>
-          </a:p>
-        </p:txBody>
-      </p:sp>
-      <p:sp>
-        <p:nvSpPr>
-          <p:cNvPr id="9004" name="TextBox 9003"/>
+          <p:cNvPr id="9003" name="TextBox 9002"/>
           <p:cNvSpPr txBox="1"/>
           <p:nvPr/>
         </p:nvSpPr>
         <p:spPr>
           <a:xfrm>
-            <a:off x="1161288" y="1271016"/>
-            <a:ext cx="10241280" cy="384048"/>
+            <a:off x="566928" y="1261872"/>
+            <a:ext cx="10881360" cy="438912"/>
           </a:xfrm>
           <a:prstGeom prst="rect">
             <a:avLst/>
@@ -15512,9 +15108,13 @@
           </a:bodyPr>
           <a:lstStyle/>
           <a:p>
-            <a:pPr algn="l"/>
-            <a:r>
-              <a:rPr sz="1550" b="1">
+            <a:pPr algn="l">
+              <a:lnSpc>
+                <a:spcPct val="110000"/>
+              </a:lnSpc>
+            </a:pPr>
+            <a:r>
+              <a:rPr sz="1800" b="1">
                 <a:solidFill>
                   <a:srgbClr val="0070C0"/>
                 </a:solidFill>
@@ -15528,7 +15128,7 @@
       </p:sp>
       <p:pic>
         <p:nvPicPr>
-          <p:cNvPr id="9005" name="Picture 9004" descr="fig6-2-effective-throughput.png"/>
+          <p:cNvPr id="9004" name="Picture 9003" descr="fig6-2-effective-throughput.png"/>
           <p:cNvPicPr>
             <a:picLocks noChangeAspect="1"/>
           </p:cNvPicPr>
@@ -15552,7 +15152,7 @@
       </p:pic>
       <p:sp>
         <p:nvSpPr>
-          <p:cNvPr id="9006" name="TextBox 9005"/>
+          <p:cNvPr id="9005" name="TextBox 9004"/>
           <p:cNvSpPr txBox="1"/>
           <p:nvPr/>
         </p:nvSpPr>
@@ -15632,7 +15232,7 @@
       </p:sp>
       <p:sp>
         <p:nvSpPr>
-          <p:cNvPr id="9007" name="TextBox 9006"/>
+          <p:cNvPr id="9006" name="TextBox 9005"/>
           <p:cNvSpPr txBox="1"/>
           <p:nvPr/>
         </p:nvSpPr>
@@ -15668,7 +15268,7 @@
       </p:sp>
       <p:sp>
         <p:nvSpPr>
-          <p:cNvPr id="9008" name="TextBox 9007"/>
+          <p:cNvPr id="9007" name="TextBox 9006"/>
           <p:cNvSpPr txBox="1"/>
           <p:nvPr/>
         </p:nvSpPr>
@@ -15736,8 +15336,8 @@
         </p:nvSpPr>
         <p:spPr>
           <a:xfrm>
-            <a:off x="427038" y="220663"/>
-            <a:ext cx="474662" cy="560387"/>
+            <a:off x="182880" y="274320"/>
+            <a:ext cx="310896" cy="402336"/>
           </a:xfrm>
           <a:custGeom>
             <a:avLst/>
@@ -15957,8 +15557,8 @@
         </p:nvSpPr>
         <p:spPr>
           <a:xfrm>
-            <a:off x="1014984" y="155448"/>
-            <a:ext cx="8001000" cy="621792"/>
+            <a:off x="566928" y="155448"/>
+            <a:ext cx="8549640" cy="621792"/>
           </a:xfrm>
           <a:prstGeom prst="rect">
             <a:avLst/>
@@ -15991,23 +15591,105 @@
       </p:sp>
       <p:sp>
         <p:nvSpPr>
-          <p:cNvPr id="9003" name="Rectangle 9002"/>
-          <p:cNvSpPr/>
+          <p:cNvPr id="9003" name="TextBox 9002"/>
+          <p:cNvSpPr txBox="1"/>
           <p:nvPr/>
         </p:nvSpPr>
         <p:spPr>
           <a:xfrm>
-            <a:off x="1014984" y="1298448"/>
-            <a:ext cx="27432" cy="310896"/>
+            <a:off x="566928" y="1261872"/>
+            <a:ext cx="10881360" cy="438912"/>
           </a:xfrm>
           <a:prstGeom prst="rect">
             <a:avLst/>
           </a:prstGeom>
+          <a:noFill/>
+        </p:spPr>
+        <p:txBody>
+          <a:bodyPr wrap="square" anchor="ctr" lIns="0" rIns="0" tIns="0" bIns="0">
+            <a:spAutoFit/>
+          </a:bodyPr>
+          <a:lstStyle/>
+          <a:p>
+            <a:pPr algn="l">
+              <a:lnSpc>
+                <a:spcPct val="110000"/>
+              </a:lnSpc>
+            </a:pPr>
+            <a:r>
+              <a:rPr sz="1800" b="1">
+                <a:solidFill>
+                  <a:srgbClr val="0070C0"/>
+                </a:solidFill>
+                <a:latin typeface="Arial"/>
+                <a:ea typeface="微软雅黑"/>
+              </a:rPr>
+              <a:t>生产集群进入万节点量级，单实例架构在吞吐与高可用上同时受制</a:t>
+            </a:r>
+          </a:p>
+        </p:txBody>
+      </p:sp>
+      <p:sp>
+        <p:nvSpPr>
+          <p:cNvPr id="9004" name="TextBox 9003"/>
+          <p:cNvSpPr txBox="1"/>
+          <p:nvPr/>
+        </p:nvSpPr>
+        <p:spPr>
+          <a:xfrm>
+            <a:off x="566928" y="1783080"/>
+            <a:ext cx="10881360" cy="1234440"/>
+          </a:xfrm>
+          <a:prstGeom prst="rect">
+            <a:avLst/>
+          </a:prstGeom>
+          <a:noFill/>
+        </p:spPr>
+        <p:txBody>
+          <a:bodyPr wrap="square" anchor="t" lIns="0" rIns="0" tIns="0" bIns="0">
+            <a:spAutoFit/>
+          </a:bodyPr>
+          <a:lstStyle/>
+          <a:p>
+            <a:pPr algn="l">
+              <a:lnSpc>
+                <a:spcPct val="135000"/>
+              </a:lnSpc>
+            </a:pPr>
+            <a:r>
+              <a:rPr sz="1500" b="0">
+                <a:solidFill>
+                  <a:srgbClr val="2E2C2C"/>
+                </a:solidFill>
+                <a:latin typeface="Arial"/>
+                <a:ea typeface="微软雅黑"/>
+              </a:rPr>
+              <a:t>Kubernetes 已成为云原生的事实标准，调度器处在 Pod 生命周期的关键路径上：它的吞吐与延迟直接决定集群资源利用率与业务响应速度。千节点规模下单实例尚可支撑，集群进入万节点量级后，三个瓶颈同时显现。</a:t>
+            </a:r>
+          </a:p>
+        </p:txBody>
+      </p:sp>
+      <p:sp>
+        <p:nvSpPr>
+          <p:cNvPr id="9005" name="Rounded Rectangle 9004"/>
+          <p:cNvSpPr/>
+          <p:nvPr/>
+        </p:nvSpPr>
+        <p:spPr>
+          <a:xfrm>
+            <a:off x="566928" y="2880360"/>
+            <a:ext cx="3517391" cy="2103120"/>
+          </a:xfrm>
+          <a:prstGeom prst="roundRect">
+            <a:avLst/>
+          </a:prstGeom>
           <a:solidFill>
-            <a:srgbClr val="0070C0"/>
+            <a:srgbClr val="FFFFFF"/>
           </a:solidFill>
-          <a:ln>
-            <a:noFill/>
+          <a:ln w="9525">
+            <a:solidFill>
+              <a:srgbClr val="D6E3F0"/>
+            </a:solidFill>
           </a:ln>
           <a:effectLst/>
         </p:spPr>
@@ -16035,101 +15717,23 @@
       </p:sp>
       <p:sp>
         <p:nvSpPr>
-          <p:cNvPr id="9004" name="TextBox 9003"/>
-          <p:cNvSpPr txBox="1"/>
-          <p:nvPr/>
-        </p:nvSpPr>
-        <p:spPr>
-          <a:xfrm>
-            <a:off x="1161288" y="1271016"/>
-            <a:ext cx="10241280" cy="384048"/>
-          </a:xfrm>
-          <a:prstGeom prst="rect">
-            <a:avLst/>
-          </a:prstGeom>
-          <a:noFill/>
-        </p:spPr>
-        <p:txBody>
-          <a:bodyPr wrap="square" anchor="ctr" lIns="0" rIns="0" tIns="0" bIns="0">
-            <a:spAutoFit/>
-          </a:bodyPr>
-          <a:lstStyle/>
-          <a:p>
-            <a:pPr algn="l"/>
-            <a:r>
-              <a:rPr sz="1550" b="1">
-                <a:solidFill>
-                  <a:srgbClr val="0070C0"/>
-                </a:solidFill>
-                <a:latin typeface="Arial"/>
-                <a:ea typeface="微软雅黑"/>
-              </a:rPr>
-              <a:t>生产集群进入万节点量级，单实例架构在吞吐与高可用上同时受制</a:t>
-            </a:r>
-          </a:p>
-        </p:txBody>
-      </p:sp>
-      <p:sp>
-        <p:nvSpPr>
-          <p:cNvPr id="9005" name="TextBox 9004"/>
-          <p:cNvSpPr txBox="1"/>
-          <p:nvPr/>
-        </p:nvSpPr>
-        <p:spPr>
-          <a:xfrm>
-            <a:off x="1014984" y="1719072"/>
-            <a:ext cx="10058400" cy="1143000"/>
-          </a:xfrm>
-          <a:prstGeom prst="rect">
-            <a:avLst/>
-          </a:prstGeom>
-          <a:noFill/>
-        </p:spPr>
-        <p:txBody>
-          <a:bodyPr wrap="square" anchor="t" lIns="0" rIns="0" tIns="0" bIns="0">
-            <a:spAutoFit/>
-          </a:bodyPr>
-          <a:lstStyle/>
-          <a:p>
-            <a:pPr algn="l">
-              <a:lnSpc>
-                <a:spcPct val="140000"/>
-              </a:lnSpc>
-            </a:pPr>
-            <a:r>
-              <a:rPr sz="1350" b="0">
-                <a:solidFill>
-                  <a:srgbClr val="2E2C2C"/>
-                </a:solidFill>
-                <a:latin typeface="Arial"/>
-                <a:ea typeface="微软雅黑"/>
-              </a:rPr>
-              <a:t>Kubernetes 已成为云原生的事实标准，调度器处在 Pod 生命周期的关键路径上：它的吞吐与延迟直接决定集群资源利用率与业务响应速度。千节点规模下单实例尚可支撑，集群进入万节点量级后，三个瓶颈同时显现。</a:t>
-            </a:r>
-          </a:p>
-        </p:txBody>
-      </p:sp>
-      <p:sp>
-        <p:nvSpPr>
-          <p:cNvPr id="9006" name="Rounded Rectangle 9005"/>
+          <p:cNvPr id="9006" name="Oval 9005"/>
           <p:cNvSpPr/>
           <p:nvPr/>
         </p:nvSpPr>
         <p:spPr>
           <a:xfrm>
-            <a:off x="566928" y="2880360"/>
-            <a:ext cx="3517391" cy="2103120"/>
-          </a:xfrm>
-          <a:prstGeom prst="roundRect">
+            <a:off x="713232" y="3017520"/>
+            <a:ext cx="274320" cy="274320"/>
+          </a:xfrm>
+          <a:prstGeom prst="ellipse">
             <a:avLst/>
           </a:prstGeom>
           <a:solidFill>
-            <a:srgbClr val="FFFFFF"/>
+            <a:srgbClr val="113E6A"/>
           </a:solidFill>
-          <a:ln w="9525">
-            <a:solidFill>
-              <a:srgbClr val="D6E3F0"/>
-            </a:solidFill>
+          <a:ln>
+            <a:noFill/>
           </a:ln>
           <a:effectLst/>
         </p:spPr>
@@ -16148,32 +15752,100 @@
           </a:fontRef>
         </p:style>
         <p:txBody>
-          <a:bodyPr rtlCol="0" anchor="ctr"/>
+          <a:bodyPr rtlCol="0" anchor="ctr" lIns="0" rIns="0" tIns="0" bIns="0"/>
           <a:lstStyle/>
           <a:p>
             <a:pPr algn="ctr"/>
-          </a:p>
-        </p:txBody>
-      </p:sp>
-      <p:sp>
-        <p:nvSpPr>
-          <p:cNvPr id="9007" name="Oval 9006"/>
+            <a:r>
+              <a:rPr sz="900" b="1">
+                <a:solidFill>
+                  <a:srgbClr val="FFFFFF"/>
+                </a:solidFill>
+                <a:latin typeface="Arial"/>
+                <a:ea typeface="微软雅黑"/>
+              </a:rPr>
+              <a:t>01</a:t>
+            </a:r>
+          </a:p>
+        </p:txBody>
+      </p:sp>
+      <p:sp>
+        <p:nvSpPr>
+          <p:cNvPr id="9007" name="TextBox 9006"/>
+          <p:cNvSpPr txBox="1"/>
+          <p:nvPr/>
+        </p:nvSpPr>
+        <p:spPr>
+          <a:xfrm>
+            <a:off x="1078992" y="3017520"/>
+            <a:ext cx="2877312" cy="1901951"/>
+          </a:xfrm>
+          <a:prstGeom prst="rect">
+            <a:avLst/>
+          </a:prstGeom>
+          <a:noFill/>
+        </p:spPr>
+        <p:txBody>
+          <a:bodyPr wrap="square" anchor="ctr" lIns="0" rIns="0" tIns="0" bIns="0">
+            <a:spAutoFit/>
+          </a:bodyPr>
+          <a:lstStyle/>
+          <a:p>
+            <a:pPr algn="l"/>
+            <a:r>
+              <a:rPr sz="1350" b="1">
+                <a:solidFill>
+                  <a:srgbClr val="113E6A"/>
+                </a:solidFill>
+                <a:latin typeface="Arial"/>
+                <a:ea typeface="微软雅黑"/>
+              </a:rPr>
+              <a:t>吞吐存在上限</a:t>
+            </a:r>
+          </a:p>
+          <a:p>
+            <a:pPr algn="l">
+              <a:lnSpc>
+                <a:spcPct val="110000"/>
+              </a:lnSpc>
+              <a:spcBef>
+                <a:spcPts val="400"/>
+              </a:spcBef>
+            </a:pPr>
+            <a:r>
+              <a:rPr sz="1100" b="0">
+                <a:solidFill>
+                  <a:srgbClr val="2E2C2C"/>
+                </a:solidFill>
+                <a:latin typeface="Arial"/>
+                <a:ea typeface="微软雅黑"/>
+              </a:rPr>
+              <a:t>activeQ 串行处理 Pod，大规模弹性伸缩与批任务启动被拖慢</a:t>
+            </a:r>
+          </a:p>
+        </p:txBody>
+      </p:sp>
+      <p:sp>
+        <p:nvSpPr>
+          <p:cNvPr id="9008" name="Rounded Rectangle 9007"/>
           <p:cNvSpPr/>
           <p:nvPr/>
         </p:nvSpPr>
         <p:spPr>
           <a:xfrm>
-            <a:off x="713232" y="3017520"/>
-            <a:ext cx="274320" cy="274320"/>
-          </a:xfrm>
-          <a:prstGeom prst="ellipse">
+            <a:off x="4340351" y="2880360"/>
+            <a:ext cx="3517391" cy="2103120"/>
+          </a:xfrm>
+          <a:prstGeom prst="roundRect">
             <a:avLst/>
           </a:prstGeom>
           <a:solidFill>
-            <a:srgbClr val="113E6A"/>
+            <a:srgbClr val="FFFFFF"/>
           </a:solidFill>
-          <a:ln>
-            <a:noFill/>
+          <a:ln w="9525">
+            <a:solidFill>
+              <a:srgbClr val="D6E3F0"/>
+            </a:solidFill>
           </a:ln>
           <a:effectLst/>
         </p:spPr>
@@ -16192,100 +15864,32 @@
           </a:fontRef>
         </p:style>
         <p:txBody>
-          <a:bodyPr rtlCol="0" anchor="ctr" lIns="0" rIns="0" tIns="0" bIns="0"/>
+          <a:bodyPr rtlCol="0" anchor="ctr"/>
           <a:lstStyle/>
           <a:p>
             <a:pPr algn="ctr"/>
-            <a:r>
-              <a:rPr sz="900" b="1">
-                <a:solidFill>
-                  <a:srgbClr val="FFFFFF"/>
-                </a:solidFill>
-                <a:latin typeface="Arial"/>
-                <a:ea typeface="微软雅黑"/>
-              </a:rPr>
-              <a:t>01</a:t>
-            </a:r>
-          </a:p>
-        </p:txBody>
-      </p:sp>
-      <p:sp>
-        <p:nvSpPr>
-          <p:cNvPr id="9008" name="TextBox 9007"/>
-          <p:cNvSpPr txBox="1"/>
-          <p:nvPr/>
-        </p:nvSpPr>
-        <p:spPr>
-          <a:xfrm>
-            <a:off x="1078992" y="3017520"/>
-            <a:ext cx="2877312" cy="1901951"/>
-          </a:xfrm>
-          <a:prstGeom prst="rect">
-            <a:avLst/>
-          </a:prstGeom>
-          <a:noFill/>
-        </p:spPr>
-        <p:txBody>
-          <a:bodyPr wrap="square" anchor="ctr" lIns="0" rIns="0" tIns="0" bIns="0">
-            <a:spAutoFit/>
-          </a:bodyPr>
-          <a:lstStyle/>
-          <a:p>
-            <a:pPr algn="l"/>
-            <a:r>
-              <a:rPr sz="1350" b="1">
-                <a:solidFill>
-                  <a:srgbClr val="113E6A"/>
-                </a:solidFill>
-                <a:latin typeface="Arial"/>
-                <a:ea typeface="微软雅黑"/>
-              </a:rPr>
-              <a:t>吞吐存在上限</a:t>
-            </a:r>
-          </a:p>
-          <a:p>
-            <a:pPr algn="l">
-              <a:lnSpc>
-                <a:spcPct val="110000"/>
-              </a:lnSpc>
-              <a:spcBef>
-                <a:spcPts val="400"/>
-              </a:spcBef>
-            </a:pPr>
-            <a:r>
-              <a:rPr sz="1100" b="0">
-                <a:solidFill>
-                  <a:srgbClr val="2E2C2C"/>
-                </a:solidFill>
-                <a:latin typeface="Arial"/>
-                <a:ea typeface="微软雅黑"/>
-              </a:rPr>
-              <a:t>activeQ 串行处理 Pod，大规模弹性伸缩与批任务启动被拖慢</a:t>
-            </a:r>
-          </a:p>
-        </p:txBody>
-      </p:sp>
-      <p:sp>
-        <p:nvSpPr>
-          <p:cNvPr id="9009" name="Rounded Rectangle 9008"/>
+          </a:p>
+        </p:txBody>
+      </p:sp>
+      <p:sp>
+        <p:nvSpPr>
+          <p:cNvPr id="9009" name="Oval 9008"/>
           <p:cNvSpPr/>
           <p:nvPr/>
         </p:nvSpPr>
         <p:spPr>
           <a:xfrm>
-            <a:off x="4340351" y="2880360"/>
-            <a:ext cx="3517391" cy="2103120"/>
-          </a:xfrm>
-          <a:prstGeom prst="roundRect">
+            <a:off x="4486656" y="3017520"/>
+            <a:ext cx="274320" cy="274320"/>
+          </a:xfrm>
+          <a:prstGeom prst="ellipse">
             <a:avLst/>
           </a:prstGeom>
           <a:solidFill>
-            <a:srgbClr val="FFFFFF"/>
+            <a:srgbClr val="113E6A"/>
           </a:solidFill>
-          <a:ln w="9525">
-            <a:solidFill>
-              <a:srgbClr val="D6E3F0"/>
-            </a:solidFill>
+          <a:ln>
+            <a:noFill/>
           </a:ln>
           <a:effectLst/>
         </p:spPr>
@@ -16304,32 +15908,100 @@
           </a:fontRef>
         </p:style>
         <p:txBody>
-          <a:bodyPr rtlCol="0" anchor="ctr"/>
+          <a:bodyPr rtlCol="0" anchor="ctr" lIns="0" rIns="0" tIns="0" bIns="0"/>
           <a:lstStyle/>
           <a:p>
             <a:pPr algn="ctr"/>
-          </a:p>
-        </p:txBody>
-      </p:sp>
-      <p:sp>
-        <p:nvSpPr>
-          <p:cNvPr id="9010" name="Oval 9009"/>
+            <a:r>
+              <a:rPr sz="900" b="1">
+                <a:solidFill>
+                  <a:srgbClr val="FFFFFF"/>
+                </a:solidFill>
+                <a:latin typeface="Arial"/>
+                <a:ea typeface="微软雅黑"/>
+              </a:rPr>
+              <a:t>02</a:t>
+            </a:r>
+          </a:p>
+        </p:txBody>
+      </p:sp>
+      <p:sp>
+        <p:nvSpPr>
+          <p:cNvPr id="9010" name="TextBox 9009"/>
+          <p:cNvSpPr txBox="1"/>
+          <p:nvPr/>
+        </p:nvSpPr>
+        <p:spPr>
+          <a:xfrm>
+            <a:off x="4852416" y="3017520"/>
+            <a:ext cx="2877312" cy="1901951"/>
+          </a:xfrm>
+          <a:prstGeom prst="rect">
+            <a:avLst/>
+          </a:prstGeom>
+          <a:noFill/>
+        </p:spPr>
+        <p:txBody>
+          <a:bodyPr wrap="square" anchor="ctr" lIns="0" rIns="0" tIns="0" bIns="0">
+            <a:spAutoFit/>
+          </a:bodyPr>
+          <a:lstStyle/>
+          <a:p>
+            <a:pPr algn="l"/>
+            <a:r>
+              <a:rPr sz="1350" b="1">
+                <a:solidFill>
+                  <a:srgbClr val="113E6A"/>
+                </a:solidFill>
+                <a:latin typeface="Arial"/>
+                <a:ea typeface="微软雅黑"/>
+              </a:rPr>
+              <a:t>尾延迟持续抬升</a:t>
+            </a:r>
+          </a:p>
+          <a:p>
+            <a:pPr algn="l">
+              <a:lnSpc>
+                <a:spcPct val="110000"/>
+              </a:lnSpc>
+              <a:spcBef>
+                <a:spcPts val="400"/>
+              </a:spcBef>
+            </a:pPr>
+            <a:r>
+              <a:rPr sz="1100" b="0">
+                <a:solidFill>
+                  <a:srgbClr val="2E2C2C"/>
+                </a:solidFill>
+                <a:latin typeface="Arial"/>
+                <a:ea typeface="微软雅黑"/>
+              </a:rPr>
+              <a:t>Filter/Score 遍历节点开销随规模线性上升，5000 节点下 P99 明显恶化</a:t>
+            </a:r>
+          </a:p>
+        </p:txBody>
+      </p:sp>
+      <p:sp>
+        <p:nvSpPr>
+          <p:cNvPr id="9011" name="Rounded Rectangle 9010"/>
           <p:cNvSpPr/>
           <p:nvPr/>
         </p:nvSpPr>
         <p:spPr>
           <a:xfrm>
-            <a:off x="4486656" y="3017520"/>
-            <a:ext cx="274320" cy="274320"/>
-          </a:xfrm>
-          <a:prstGeom prst="ellipse">
+            <a:off x="8113775" y="2880360"/>
+            <a:ext cx="3517391" cy="2103120"/>
+          </a:xfrm>
+          <a:prstGeom prst="roundRect">
             <a:avLst/>
           </a:prstGeom>
           <a:solidFill>
-            <a:srgbClr val="113E6A"/>
+            <a:srgbClr val="FFFFFF"/>
           </a:solidFill>
-          <a:ln>
-            <a:noFill/>
+          <a:ln w="9525">
+            <a:solidFill>
+              <a:srgbClr val="D6E3F0"/>
+            </a:solidFill>
           </a:ln>
           <a:effectLst/>
         </p:spPr>
@@ -16348,100 +16020,32 @@
           </a:fontRef>
         </p:style>
         <p:txBody>
-          <a:bodyPr rtlCol="0" anchor="ctr" lIns="0" rIns="0" tIns="0" bIns="0"/>
+          <a:bodyPr rtlCol="0" anchor="ctr"/>
           <a:lstStyle/>
           <a:p>
             <a:pPr algn="ctr"/>
-            <a:r>
-              <a:rPr sz="900" b="1">
-                <a:solidFill>
-                  <a:srgbClr val="FFFFFF"/>
-                </a:solidFill>
-                <a:latin typeface="Arial"/>
-                <a:ea typeface="微软雅黑"/>
-              </a:rPr>
-              <a:t>02</a:t>
-            </a:r>
-          </a:p>
-        </p:txBody>
-      </p:sp>
-      <p:sp>
-        <p:nvSpPr>
-          <p:cNvPr id="9011" name="TextBox 9010"/>
-          <p:cNvSpPr txBox="1"/>
-          <p:nvPr/>
-        </p:nvSpPr>
-        <p:spPr>
-          <a:xfrm>
-            <a:off x="4852416" y="3017520"/>
-            <a:ext cx="2877312" cy="1901951"/>
-          </a:xfrm>
-          <a:prstGeom prst="rect">
-            <a:avLst/>
-          </a:prstGeom>
-          <a:noFill/>
-        </p:spPr>
-        <p:txBody>
-          <a:bodyPr wrap="square" anchor="ctr" lIns="0" rIns="0" tIns="0" bIns="0">
-            <a:spAutoFit/>
-          </a:bodyPr>
-          <a:lstStyle/>
-          <a:p>
-            <a:pPr algn="l"/>
-            <a:r>
-              <a:rPr sz="1350" b="1">
-                <a:solidFill>
-                  <a:srgbClr val="113E6A"/>
-                </a:solidFill>
-                <a:latin typeface="Arial"/>
-                <a:ea typeface="微软雅黑"/>
-              </a:rPr>
-              <a:t>尾延迟持续抬升</a:t>
-            </a:r>
-          </a:p>
-          <a:p>
-            <a:pPr algn="l">
-              <a:lnSpc>
-                <a:spcPct val="110000"/>
-              </a:lnSpc>
-              <a:spcBef>
-                <a:spcPts val="400"/>
-              </a:spcBef>
-            </a:pPr>
-            <a:r>
-              <a:rPr sz="1100" b="0">
-                <a:solidFill>
-                  <a:srgbClr val="2E2C2C"/>
-                </a:solidFill>
-                <a:latin typeface="Arial"/>
-                <a:ea typeface="微软雅黑"/>
-              </a:rPr>
-              <a:t>Filter/Score 遍历节点开销随规模线性上升，5000 节点下 P99 明显恶化</a:t>
-            </a:r>
-          </a:p>
-        </p:txBody>
-      </p:sp>
-      <p:sp>
-        <p:nvSpPr>
-          <p:cNvPr id="9012" name="Rounded Rectangle 9011"/>
+          </a:p>
+        </p:txBody>
+      </p:sp>
+      <p:sp>
+        <p:nvSpPr>
+          <p:cNvPr id="9012" name="Oval 9011"/>
           <p:cNvSpPr/>
           <p:nvPr/>
         </p:nvSpPr>
         <p:spPr>
           <a:xfrm>
-            <a:off x="8113775" y="2880360"/>
-            <a:ext cx="3517391" cy="2103120"/>
-          </a:xfrm>
-          <a:prstGeom prst="roundRect">
+            <a:off x="8260079" y="3017520"/>
+            <a:ext cx="274320" cy="274320"/>
+          </a:xfrm>
+          <a:prstGeom prst="ellipse">
             <a:avLst/>
           </a:prstGeom>
           <a:solidFill>
-            <a:srgbClr val="FFFFFF"/>
+            <a:srgbClr val="113E6A"/>
           </a:solidFill>
-          <a:ln w="9525">
-            <a:solidFill>
-              <a:srgbClr val="D6E3F0"/>
-            </a:solidFill>
+          <a:ln>
+            <a:noFill/>
           </a:ln>
           <a:effectLst/>
         </p:spPr>
@@ -16460,50 +16064,6 @@
           </a:fontRef>
         </p:style>
         <p:txBody>
-          <a:bodyPr rtlCol="0" anchor="ctr"/>
-          <a:lstStyle/>
-          <a:p>
-            <a:pPr algn="ctr"/>
-          </a:p>
-        </p:txBody>
-      </p:sp>
-      <p:sp>
-        <p:nvSpPr>
-          <p:cNvPr id="9013" name="Oval 9012"/>
-          <p:cNvSpPr/>
-          <p:nvPr/>
-        </p:nvSpPr>
-        <p:spPr>
-          <a:xfrm>
-            <a:off x="8260079" y="3017520"/>
-            <a:ext cx="274320" cy="274320"/>
-          </a:xfrm>
-          <a:prstGeom prst="ellipse">
-            <a:avLst/>
-          </a:prstGeom>
-          <a:solidFill>
-            <a:srgbClr val="113E6A"/>
-          </a:solidFill>
-          <a:ln>
-            <a:noFill/>
-          </a:ln>
-          <a:effectLst/>
-        </p:spPr>
-        <p:style>
-          <a:lnRef idx="1">
-            <a:schemeClr val="accent1"/>
-          </a:lnRef>
-          <a:fillRef idx="3">
-            <a:schemeClr val="accent1"/>
-          </a:fillRef>
-          <a:effectRef idx="2">
-            <a:schemeClr val="accent1"/>
-          </a:effectRef>
-          <a:fontRef idx="minor">
-            <a:schemeClr val="lt1"/>
-          </a:fontRef>
-        </p:style>
-        <p:txBody>
           <a:bodyPr rtlCol="0" anchor="ctr" lIns="0" rIns="0" tIns="0" bIns="0"/>
           <a:lstStyle/>
           <a:p>
@@ -16523,7 +16083,7 @@
       </p:sp>
       <p:sp>
         <p:nvSpPr>
-          <p:cNvPr id="9014" name="TextBox 9013"/>
+          <p:cNvPr id="9013" name="TextBox 9012"/>
           <p:cNvSpPr txBox="1"/>
           <p:nvPr/>
         </p:nvSpPr>
@@ -16579,7 +16139,7 @@
       </p:sp>
       <p:sp>
         <p:nvSpPr>
-          <p:cNvPr id="9015" name="TextBox 9014"/>
+          <p:cNvPr id="9014" name="TextBox 9013"/>
           <p:cNvSpPr txBox="1"/>
           <p:nvPr/>
         </p:nvSpPr>
@@ -16647,8 +16207,8 @@
         </p:nvSpPr>
         <p:spPr>
           <a:xfrm>
-            <a:off x="427038" y="220663"/>
-            <a:ext cx="474662" cy="560387"/>
+            <a:off x="182880" y="274320"/>
+            <a:ext cx="310896" cy="402336"/>
           </a:xfrm>
           <a:custGeom>
             <a:avLst/>
@@ -16868,8 +16428,8 @@
         </p:nvSpPr>
         <p:spPr>
           <a:xfrm>
-            <a:off x="1014984" y="155448"/>
-            <a:ext cx="8001000" cy="621792"/>
+            <a:off x="566928" y="155448"/>
+            <a:ext cx="8549640" cy="621792"/>
           </a:xfrm>
           <a:prstGeom prst="rect">
             <a:avLst/>
@@ -16902,58 +16462,14 @@
       </p:sp>
       <p:sp>
         <p:nvSpPr>
-          <p:cNvPr id="9003" name="Rectangle 9002"/>
-          <p:cNvSpPr/>
-          <p:nvPr/>
-        </p:nvSpPr>
-        <p:spPr>
-          <a:xfrm>
-            <a:off x="1014984" y="1298448"/>
-            <a:ext cx="27432" cy="310896"/>
-          </a:xfrm>
-          <a:prstGeom prst="rect">
-            <a:avLst/>
-          </a:prstGeom>
-          <a:solidFill>
-            <a:srgbClr val="0070C0"/>
-          </a:solidFill>
-          <a:ln>
-            <a:noFill/>
-          </a:ln>
-          <a:effectLst/>
-        </p:spPr>
-        <p:style>
-          <a:lnRef idx="1">
-            <a:schemeClr val="accent1"/>
-          </a:lnRef>
-          <a:fillRef idx="3">
-            <a:schemeClr val="accent1"/>
-          </a:fillRef>
-          <a:effectRef idx="2">
-            <a:schemeClr val="accent1"/>
-          </a:effectRef>
-          <a:fontRef idx="minor">
-            <a:schemeClr val="lt1"/>
-          </a:fontRef>
-        </p:style>
-        <p:txBody>
-          <a:bodyPr rtlCol="0" anchor="ctr"/>
-          <a:lstStyle/>
-          <a:p>
-            <a:pPr algn="ctr"/>
-          </a:p>
-        </p:txBody>
-      </p:sp>
-      <p:sp>
-        <p:nvSpPr>
-          <p:cNvPr id="9004" name="TextBox 9003"/>
+          <p:cNvPr id="9003" name="TextBox 9002"/>
           <p:cNvSpPr txBox="1"/>
           <p:nvPr/>
         </p:nvSpPr>
         <p:spPr>
           <a:xfrm>
-            <a:off x="1161288" y="1271016"/>
-            <a:ext cx="10241280" cy="384048"/>
+            <a:off x="566928" y="1261872"/>
+            <a:ext cx="10881360" cy="438912"/>
           </a:xfrm>
           <a:prstGeom prst="rect">
             <a:avLst/>
@@ -16966,9 +16482,13 @@
           </a:bodyPr>
           <a:lstStyle/>
           <a:p>
-            <a:pPr algn="l"/>
-            <a:r>
-              <a:rPr sz="1550" b="1">
+            <a:pPr algn="l">
+              <a:lnSpc>
+                <a:spcPct val="110000"/>
+              </a:lnSpc>
+            </a:pPr>
+            <a:r>
+              <a:rPr sz="1800" b="1">
                 <a:solidFill>
                   <a:srgbClr val="0070C0"/>
                 </a:solidFill>
@@ -16982,7 +16502,7 @@
       </p:sp>
       <p:pic>
         <p:nvPicPr>
-          <p:cNvPr id="9005" name="Picture 9004" descr="fig6-4-latency-p99-all.png"/>
+          <p:cNvPr id="9004" name="Picture 9003" descr="fig6-4-latency-p99-all.png"/>
           <p:cNvPicPr>
             <a:picLocks noChangeAspect="1"/>
           </p:cNvPicPr>
@@ -17006,7 +16526,7 @@
       </p:pic>
       <p:sp>
         <p:nvSpPr>
-          <p:cNvPr id="9006" name="TextBox 9005"/>
+          <p:cNvPr id="9005" name="TextBox 9004"/>
           <p:cNvSpPr txBox="1"/>
           <p:nvPr/>
         </p:nvSpPr>
@@ -17086,7 +16606,7 @@
       </p:sp>
       <p:sp>
         <p:nvSpPr>
-          <p:cNvPr id="9007" name="TextBox 9006"/>
+          <p:cNvPr id="9006" name="TextBox 9005"/>
           <p:cNvSpPr txBox="1"/>
           <p:nvPr/>
         </p:nvSpPr>
@@ -17122,7 +16642,7 @@
       </p:sp>
       <p:sp>
         <p:nvSpPr>
-          <p:cNvPr id="9008" name="TextBox 9007"/>
+          <p:cNvPr id="9007" name="TextBox 9006"/>
           <p:cNvSpPr txBox="1"/>
           <p:nvPr/>
         </p:nvSpPr>
@@ -17190,8 +16710,8 @@
         </p:nvSpPr>
         <p:spPr>
           <a:xfrm>
-            <a:off x="427038" y="220663"/>
-            <a:ext cx="474662" cy="560387"/>
+            <a:off x="182880" y="274320"/>
+            <a:ext cx="310896" cy="402336"/>
           </a:xfrm>
           <a:custGeom>
             <a:avLst/>
@@ -17411,8 +16931,8 @@
         </p:nvSpPr>
         <p:spPr>
           <a:xfrm>
-            <a:off x="1014984" y="155448"/>
-            <a:ext cx="8001000" cy="621792"/>
+            <a:off x="566928" y="155448"/>
+            <a:ext cx="8549640" cy="621792"/>
           </a:xfrm>
           <a:prstGeom prst="rect">
             <a:avLst/>
@@ -17445,58 +16965,14 @@
       </p:sp>
       <p:sp>
         <p:nvSpPr>
-          <p:cNvPr id="9003" name="Rectangle 9002"/>
-          <p:cNvSpPr/>
-          <p:nvPr/>
-        </p:nvSpPr>
-        <p:spPr>
-          <a:xfrm>
-            <a:off x="1014984" y="1298448"/>
-            <a:ext cx="27432" cy="310896"/>
-          </a:xfrm>
-          <a:prstGeom prst="rect">
-            <a:avLst/>
-          </a:prstGeom>
-          <a:solidFill>
-            <a:srgbClr val="0070C0"/>
-          </a:solidFill>
-          <a:ln>
-            <a:noFill/>
-          </a:ln>
-          <a:effectLst/>
-        </p:spPr>
-        <p:style>
-          <a:lnRef idx="1">
-            <a:schemeClr val="accent1"/>
-          </a:lnRef>
-          <a:fillRef idx="3">
-            <a:schemeClr val="accent1"/>
-          </a:fillRef>
-          <a:effectRef idx="2">
-            <a:schemeClr val="accent1"/>
-          </a:effectRef>
-          <a:fontRef idx="minor">
-            <a:schemeClr val="lt1"/>
-          </a:fontRef>
-        </p:style>
-        <p:txBody>
-          <a:bodyPr rtlCol="0" anchor="ctr"/>
-          <a:lstStyle/>
-          <a:p>
-            <a:pPr algn="ctr"/>
-          </a:p>
-        </p:txBody>
-      </p:sp>
-      <p:sp>
-        <p:nvSpPr>
-          <p:cNvPr id="9004" name="TextBox 9003"/>
+          <p:cNvPr id="9003" name="TextBox 9002"/>
           <p:cNvSpPr txBox="1"/>
           <p:nvPr/>
         </p:nvSpPr>
         <p:spPr>
           <a:xfrm>
-            <a:off x="1161288" y="1271016"/>
-            <a:ext cx="10241280" cy="384048"/>
+            <a:off x="566928" y="1261872"/>
+            <a:ext cx="10881360" cy="438912"/>
           </a:xfrm>
           <a:prstGeom prst="rect">
             <a:avLst/>
@@ -17509,9 +16985,13 @@
           </a:bodyPr>
           <a:lstStyle/>
           <a:p>
-            <a:pPr algn="l"/>
-            <a:r>
-              <a:rPr sz="1550" b="1">
+            <a:pPr algn="l">
+              <a:lnSpc>
+                <a:spcPct val="110000"/>
+              </a:lnSpc>
+            </a:pPr>
+            <a:r>
+              <a:rPr sz="1800" b="1">
                 <a:solidFill>
                   <a:srgbClr val="0070C0"/>
                 </a:solidFill>
@@ -17525,7 +17005,7 @@
       </p:sp>
       <p:graphicFrame>
         <p:nvGraphicFramePr>
-          <p:cNvPr id="9005" name="Table 9004"/>
+          <p:cNvPr id="9004" name="Table 9003"/>
           <p:cNvGraphicFramePr>
             <a:graphicFrameLocks noGrp="1"/>
           </p:cNvGraphicFramePr>
@@ -17848,7 +17328,7 @@
       </p:graphicFrame>
       <p:pic>
         <p:nvPicPr>
-          <p:cNvPr id="9006" name="Picture 9005" descr="fig6-16-throughput-s3-w3-inst3.png"/>
+          <p:cNvPr id="9005" name="Picture 9004" descr="fig6-16-throughput-s3-w3-inst3.png"/>
           <p:cNvPicPr>
             <a:picLocks noChangeAspect="1"/>
           </p:cNvPicPr>
@@ -17872,7 +17352,7 @@
       </p:pic>
       <p:sp>
         <p:nvSpPr>
-          <p:cNvPr id="9007" name="TextBox 9006"/>
+          <p:cNvPr id="9006" name="TextBox 9005"/>
           <p:cNvSpPr txBox="1"/>
           <p:nvPr/>
         </p:nvSpPr>
@@ -17908,7 +17388,7 @@
       </p:sp>
       <p:sp>
         <p:nvSpPr>
-          <p:cNvPr id="9008" name="TextBox 9007"/>
+          <p:cNvPr id="9007" name="TextBox 9006"/>
           <p:cNvSpPr txBox="1"/>
           <p:nvPr/>
         </p:nvSpPr>
@@ -17988,7 +17468,7 @@
       </p:sp>
       <p:sp>
         <p:nvSpPr>
-          <p:cNvPr id="9009" name="TextBox 9008"/>
+          <p:cNvPr id="9008" name="TextBox 9007"/>
           <p:cNvSpPr txBox="1"/>
           <p:nvPr/>
         </p:nvSpPr>
@@ -18024,7 +17504,7 @@
       </p:sp>
       <p:sp>
         <p:nvSpPr>
-          <p:cNvPr id="9010" name="TextBox 9009"/>
+          <p:cNvPr id="9009" name="TextBox 9008"/>
           <p:cNvSpPr txBox="1"/>
           <p:nvPr/>
         </p:nvSpPr>
@@ -18092,8 +17572,8 @@
         </p:nvSpPr>
         <p:spPr>
           <a:xfrm>
-            <a:off x="427038" y="220663"/>
-            <a:ext cx="474662" cy="560387"/>
+            <a:off x="182880" y="274320"/>
+            <a:ext cx="310896" cy="402336"/>
           </a:xfrm>
           <a:custGeom>
             <a:avLst/>
@@ -18313,8 +17793,8 @@
         </p:nvSpPr>
         <p:spPr>
           <a:xfrm>
-            <a:off x="1014984" y="155448"/>
-            <a:ext cx="8001000" cy="621792"/>
+            <a:off x="566928" y="155448"/>
+            <a:ext cx="8549640" cy="621792"/>
           </a:xfrm>
           <a:prstGeom prst="rect">
             <a:avLst/>
@@ -18347,58 +17827,14 @@
       </p:sp>
       <p:sp>
         <p:nvSpPr>
-          <p:cNvPr id="9003" name="Rectangle 9002"/>
-          <p:cNvSpPr/>
-          <p:nvPr/>
-        </p:nvSpPr>
-        <p:spPr>
-          <a:xfrm>
-            <a:off x="1014984" y="1298448"/>
-            <a:ext cx="27432" cy="310896"/>
-          </a:xfrm>
-          <a:prstGeom prst="rect">
-            <a:avLst/>
-          </a:prstGeom>
-          <a:solidFill>
-            <a:srgbClr val="0070C0"/>
-          </a:solidFill>
-          <a:ln>
-            <a:noFill/>
-          </a:ln>
-          <a:effectLst/>
-        </p:spPr>
-        <p:style>
-          <a:lnRef idx="1">
-            <a:schemeClr val="accent1"/>
-          </a:lnRef>
-          <a:fillRef idx="3">
-            <a:schemeClr val="accent1"/>
-          </a:fillRef>
-          <a:effectRef idx="2">
-            <a:schemeClr val="accent1"/>
-          </a:effectRef>
-          <a:fontRef idx="minor">
-            <a:schemeClr val="lt1"/>
-          </a:fontRef>
-        </p:style>
-        <p:txBody>
-          <a:bodyPr rtlCol="0" anchor="ctr"/>
-          <a:lstStyle/>
-          <a:p>
-            <a:pPr algn="ctr"/>
-          </a:p>
-        </p:txBody>
-      </p:sp>
-      <p:sp>
-        <p:nvSpPr>
-          <p:cNvPr id="9004" name="TextBox 9003"/>
+          <p:cNvPr id="9003" name="TextBox 9002"/>
           <p:cNvSpPr txBox="1"/>
           <p:nvPr/>
         </p:nvSpPr>
         <p:spPr>
           <a:xfrm>
-            <a:off x="1161288" y="1271016"/>
-            <a:ext cx="10241280" cy="384048"/>
+            <a:off x="566928" y="1261872"/>
+            <a:ext cx="10881360" cy="438912"/>
           </a:xfrm>
           <a:prstGeom prst="rect">
             <a:avLst/>
@@ -18411,9 +17847,13 @@
           </a:bodyPr>
           <a:lstStyle/>
           <a:p>
-            <a:pPr algn="l"/>
-            <a:r>
-              <a:rPr sz="1550" b="1">
+            <a:pPr algn="l">
+              <a:lnSpc>
+                <a:spcPct val="110000"/>
+              </a:lnSpc>
+            </a:pPr>
+            <a:r>
+              <a:rPr sz="1800" b="1">
                 <a:solidFill>
                   <a:srgbClr val="0070C0"/>
                 </a:solidFill>
@@ -18427,7 +17867,7 @@
       </p:sp>
       <p:graphicFrame>
         <p:nvGraphicFramePr>
-          <p:cNvPr id="9005" name="Table 9004"/>
+          <p:cNvPr id="9004" name="Table 9003"/>
           <p:cNvGraphicFramePr>
             <a:graphicFrameLocks noGrp="1"/>
           </p:cNvGraphicFramePr>
@@ -18824,7 +18264,7 @@
       </p:graphicFrame>
       <p:sp>
         <p:nvSpPr>
-          <p:cNvPr id="9006" name="TextBox 9005"/>
+          <p:cNvPr id="9005" name="TextBox 9004"/>
           <p:cNvSpPr txBox="1"/>
           <p:nvPr/>
         </p:nvSpPr>
@@ -18904,7 +18344,7 @@
       </p:sp>
       <p:sp>
         <p:nvSpPr>
-          <p:cNvPr id="9007" name="TextBox 9006"/>
+          <p:cNvPr id="9006" name="TextBox 9005"/>
           <p:cNvSpPr txBox="1"/>
           <p:nvPr/>
         </p:nvSpPr>
@@ -18940,7 +18380,7 @@
       </p:sp>
       <p:sp>
         <p:nvSpPr>
-          <p:cNvPr id="9008" name="TextBox 9007"/>
+          <p:cNvPr id="9007" name="TextBox 9006"/>
           <p:cNvSpPr txBox="1"/>
           <p:nvPr/>
         </p:nvSpPr>
@@ -19008,8 +18448,8 @@
         </p:nvSpPr>
         <p:spPr>
           <a:xfrm>
-            <a:off x="427038" y="220663"/>
-            <a:ext cx="474662" cy="560387"/>
+            <a:off x="182880" y="274320"/>
+            <a:ext cx="310896" cy="402336"/>
           </a:xfrm>
           <a:custGeom>
             <a:avLst/>
@@ -19229,8 +18669,8 @@
         </p:nvSpPr>
         <p:spPr>
           <a:xfrm>
-            <a:off x="1014984" y="155448"/>
-            <a:ext cx="8001000" cy="621792"/>
+            <a:off x="566928" y="155448"/>
+            <a:ext cx="8549640" cy="621792"/>
           </a:xfrm>
           <a:prstGeom prst="rect">
             <a:avLst/>
@@ -19263,58 +18703,14 @@
       </p:sp>
       <p:sp>
         <p:nvSpPr>
-          <p:cNvPr id="9003" name="Rectangle 9002"/>
-          <p:cNvSpPr/>
-          <p:nvPr/>
-        </p:nvSpPr>
-        <p:spPr>
-          <a:xfrm>
-            <a:off x="1014984" y="1298448"/>
-            <a:ext cx="27432" cy="310896"/>
-          </a:xfrm>
-          <a:prstGeom prst="rect">
-            <a:avLst/>
-          </a:prstGeom>
-          <a:solidFill>
-            <a:srgbClr val="0070C0"/>
-          </a:solidFill>
-          <a:ln>
-            <a:noFill/>
-          </a:ln>
-          <a:effectLst/>
-        </p:spPr>
-        <p:style>
-          <a:lnRef idx="1">
-            <a:schemeClr val="accent1"/>
-          </a:lnRef>
-          <a:fillRef idx="3">
-            <a:schemeClr val="accent1"/>
-          </a:fillRef>
-          <a:effectRef idx="2">
-            <a:schemeClr val="accent1"/>
-          </a:effectRef>
-          <a:fontRef idx="minor">
-            <a:schemeClr val="lt1"/>
-          </a:fontRef>
-        </p:style>
-        <p:txBody>
-          <a:bodyPr rtlCol="0" anchor="ctr"/>
-          <a:lstStyle/>
-          <a:p>
-            <a:pPr algn="ctr"/>
-          </a:p>
-        </p:txBody>
-      </p:sp>
-      <p:sp>
-        <p:nvSpPr>
-          <p:cNvPr id="9004" name="TextBox 9003"/>
+          <p:cNvPr id="9003" name="TextBox 9002"/>
           <p:cNvSpPr txBox="1"/>
           <p:nvPr/>
         </p:nvSpPr>
         <p:spPr>
           <a:xfrm>
-            <a:off x="1161288" y="1271016"/>
-            <a:ext cx="10241280" cy="384048"/>
+            <a:off x="566928" y="1261872"/>
+            <a:ext cx="10881360" cy="438912"/>
           </a:xfrm>
           <a:prstGeom prst="rect">
             <a:avLst/>
@@ -19327,9 +18723,13 @@
           </a:bodyPr>
           <a:lstStyle/>
           <a:p>
-            <a:pPr algn="l"/>
-            <a:r>
-              <a:rPr sz="1550" b="1">
+            <a:pPr algn="l">
+              <a:lnSpc>
+                <a:spcPct val="110000"/>
+              </a:lnSpc>
+            </a:pPr>
+            <a:r>
+              <a:rPr sz="1800" b="1">
                 <a:solidFill>
                   <a:srgbClr val="0070C0"/>
                 </a:solidFill>
@@ -19343,7 +18743,7 @@
       </p:sp>
       <p:graphicFrame>
         <p:nvGraphicFramePr>
-          <p:cNvPr id="9005" name="Table 9004"/>
+          <p:cNvPr id="9004" name="Table 9003"/>
           <p:cNvGraphicFramePr>
             <a:graphicFrameLocks noGrp="1"/>
           </p:cNvGraphicFramePr>
@@ -19740,7 +19140,7 @@
       </p:graphicFrame>
       <p:sp>
         <p:nvSpPr>
-          <p:cNvPr id="9006" name="TextBox 9005"/>
+          <p:cNvPr id="9005" name="TextBox 9004"/>
           <p:cNvSpPr txBox="1"/>
           <p:nvPr/>
         </p:nvSpPr>
@@ -19820,7 +19220,7 @@
       </p:sp>
       <p:sp>
         <p:nvSpPr>
-          <p:cNvPr id="9007" name="TextBox 9006"/>
+          <p:cNvPr id="9006" name="TextBox 9005"/>
           <p:cNvSpPr txBox="1"/>
           <p:nvPr/>
         </p:nvSpPr>
@@ -19856,7 +19256,7 @@
       </p:sp>
       <p:sp>
         <p:nvSpPr>
-          <p:cNvPr id="9008" name="TextBox 9007"/>
+          <p:cNvPr id="9007" name="TextBox 9006"/>
           <p:cNvSpPr txBox="1"/>
           <p:nvPr/>
         </p:nvSpPr>
@@ -19924,8 +19324,8 @@
         </p:nvSpPr>
         <p:spPr>
           <a:xfrm>
-            <a:off x="427038" y="220663"/>
-            <a:ext cx="474662" cy="560387"/>
+            <a:off x="182880" y="274320"/>
+            <a:ext cx="310896" cy="402336"/>
           </a:xfrm>
           <a:custGeom>
             <a:avLst/>
@@ -20145,8 +19545,8 @@
         </p:nvSpPr>
         <p:spPr>
           <a:xfrm>
-            <a:off x="1014984" y="155448"/>
-            <a:ext cx="8001000" cy="621792"/>
+            <a:off x="566928" y="155448"/>
+            <a:ext cx="8549640" cy="621792"/>
           </a:xfrm>
           <a:prstGeom prst="rect">
             <a:avLst/>
@@ -20179,23 +19579,65 @@
       </p:sp>
       <p:sp>
         <p:nvSpPr>
-          <p:cNvPr id="9003" name="Rectangle 9002"/>
-          <p:cNvSpPr/>
+          <p:cNvPr id="9003" name="TextBox 9002"/>
+          <p:cNvSpPr txBox="1"/>
           <p:nvPr/>
         </p:nvSpPr>
         <p:spPr>
           <a:xfrm>
-            <a:off x="1014984" y="1298448"/>
-            <a:ext cx="27432" cy="310896"/>
+            <a:off x="566928" y="1261872"/>
+            <a:ext cx="10881360" cy="438912"/>
           </a:xfrm>
           <a:prstGeom prst="rect">
             <a:avLst/>
           </a:prstGeom>
+          <a:noFill/>
+        </p:spPr>
+        <p:txBody>
+          <a:bodyPr wrap="square" anchor="ctr" lIns="0" rIns="0" tIns="0" bIns="0">
+            <a:spAutoFit/>
+          </a:bodyPr>
+          <a:lstStyle/>
+          <a:p>
+            <a:pPr algn="l">
+              <a:lnSpc>
+                <a:spcPct val="110000"/>
+              </a:lnSpc>
+            </a:pPr>
+            <a:r>
+              <a:rPr sz="1800" b="1">
+                <a:solidFill>
+                  <a:srgbClr val="0070C0"/>
+                </a:solidFill>
+                <a:latin typeface="Arial"/>
+                <a:ea typeface="微软雅黑"/>
+              </a:rPr>
+              <a:t>结论在“跨调度器相对比较”上成立，绝对数值不外推到生产</a:t>
+            </a:r>
+          </a:p>
+        </p:txBody>
+      </p:sp>
+      <p:sp>
+        <p:nvSpPr>
+          <p:cNvPr id="9004" name="Rounded Rectangle 9003"/>
+          <p:cNvSpPr/>
+          <p:nvPr/>
+        </p:nvSpPr>
+        <p:spPr>
+          <a:xfrm>
+            <a:off x="566928" y="1874519"/>
+            <a:ext cx="3517391" cy="1051560"/>
+          </a:xfrm>
+          <a:prstGeom prst="roundRect">
+            <a:avLst/>
+          </a:prstGeom>
           <a:solidFill>
-            <a:srgbClr val="0070C0"/>
+            <a:srgbClr val="FFFFFF"/>
           </a:solidFill>
-          <a:ln>
-            <a:noFill/>
+          <a:ln w="9525">
+            <a:solidFill>
+              <a:srgbClr val="D6E3F0"/>
+            </a:solidFill>
           </a:ln>
           <a:effectLst/>
         </p:spPr>
@@ -20223,61 +19665,23 @@
       </p:sp>
       <p:sp>
         <p:nvSpPr>
-          <p:cNvPr id="9004" name="TextBox 9003"/>
-          <p:cNvSpPr txBox="1"/>
-          <p:nvPr/>
-        </p:nvSpPr>
-        <p:spPr>
-          <a:xfrm>
-            <a:off x="1161288" y="1271016"/>
-            <a:ext cx="10241280" cy="384048"/>
-          </a:xfrm>
-          <a:prstGeom prst="rect">
-            <a:avLst/>
-          </a:prstGeom>
-          <a:noFill/>
-        </p:spPr>
-        <p:txBody>
-          <a:bodyPr wrap="square" anchor="ctr" lIns="0" rIns="0" tIns="0" bIns="0">
-            <a:spAutoFit/>
-          </a:bodyPr>
-          <a:lstStyle/>
-          <a:p>
-            <a:pPr algn="l"/>
-            <a:r>
-              <a:rPr sz="1550" b="1">
-                <a:solidFill>
-                  <a:srgbClr val="0070C0"/>
-                </a:solidFill>
-                <a:latin typeface="Arial"/>
-                <a:ea typeface="微软雅黑"/>
-              </a:rPr>
-              <a:t>结论在“跨调度器相对比较”上成立，绝对数值不外推到生产</a:t>
-            </a:r>
-          </a:p>
-        </p:txBody>
-      </p:sp>
-      <p:sp>
-        <p:nvSpPr>
-          <p:cNvPr id="9005" name="Rounded Rectangle 9004"/>
+          <p:cNvPr id="9005" name="Oval 9004"/>
           <p:cNvSpPr/>
           <p:nvPr/>
         </p:nvSpPr>
         <p:spPr>
           <a:xfrm>
-            <a:off x="566928" y="1874519"/>
-            <a:ext cx="3517391" cy="1051560"/>
-          </a:xfrm>
-          <a:prstGeom prst="roundRect">
+            <a:off x="713232" y="2011679"/>
+            <a:ext cx="274320" cy="274320"/>
+          </a:xfrm>
+          <a:prstGeom prst="ellipse">
             <a:avLst/>
           </a:prstGeom>
           <a:solidFill>
-            <a:srgbClr val="FFFFFF"/>
+            <a:srgbClr val="113E6A"/>
           </a:solidFill>
-          <a:ln w="9525">
-            <a:solidFill>
-              <a:srgbClr val="D6E3F0"/>
-            </a:solidFill>
+          <a:ln>
+            <a:noFill/>
           </a:ln>
           <a:effectLst/>
         </p:spPr>
@@ -20296,32 +19700,100 @@
           </a:fontRef>
         </p:style>
         <p:txBody>
-          <a:bodyPr rtlCol="0" anchor="ctr"/>
+          <a:bodyPr rtlCol="0" anchor="ctr" lIns="0" rIns="0" tIns="0" bIns="0"/>
           <a:lstStyle/>
           <a:p>
             <a:pPr algn="ctr"/>
-          </a:p>
-        </p:txBody>
-      </p:sp>
-      <p:sp>
-        <p:nvSpPr>
-          <p:cNvPr id="9006" name="Oval 9005"/>
+            <a:r>
+              <a:rPr sz="900" b="1">
+                <a:solidFill>
+                  <a:srgbClr val="FFFFFF"/>
+                </a:solidFill>
+                <a:latin typeface="Arial"/>
+                <a:ea typeface="微软雅黑"/>
+              </a:rPr>
+              <a:t>01</a:t>
+            </a:r>
+          </a:p>
+        </p:txBody>
+      </p:sp>
+      <p:sp>
+        <p:nvSpPr>
+          <p:cNvPr id="9006" name="TextBox 9005"/>
+          <p:cNvSpPr txBox="1"/>
+          <p:nvPr/>
+        </p:nvSpPr>
+        <p:spPr>
+          <a:xfrm>
+            <a:off x="1078992" y="2011679"/>
+            <a:ext cx="2877312" cy="850392"/>
+          </a:xfrm>
+          <a:prstGeom prst="rect">
+            <a:avLst/>
+          </a:prstGeom>
+          <a:noFill/>
+        </p:spPr>
+        <p:txBody>
+          <a:bodyPr wrap="square" anchor="t" lIns="0" rIns="0" tIns="0" bIns="0">
+            <a:spAutoFit/>
+          </a:bodyPr>
+          <a:lstStyle/>
+          <a:p>
+            <a:pPr algn="l"/>
+            <a:r>
+              <a:rPr sz="1350" b="1">
+                <a:solidFill>
+                  <a:srgbClr val="113E6A"/>
+                </a:solidFill>
+                <a:latin typeface="Arial"/>
+                <a:ea typeface="微软雅黑"/>
+              </a:rPr>
+              <a:t>KWOK 仿真</a:t>
+            </a:r>
+          </a:p>
+          <a:p>
+            <a:pPr algn="l">
+              <a:lnSpc>
+                <a:spcPct val="110000"/>
+              </a:lnSpc>
+              <a:spcBef>
+                <a:spcPts val="400"/>
+              </a:spcBef>
+            </a:pPr>
+            <a:r>
+              <a:rPr sz="1100" b="0">
+                <a:solidFill>
+                  <a:srgbClr val="2E2C2C"/>
+                </a:solidFill>
+                <a:latin typeface="Arial"/>
+                <a:ea typeface="微软雅黑"/>
+              </a:rPr>
+              <a:t>无法反映真实资源竞争与 IO</a:t>
+            </a:r>
+          </a:p>
+        </p:txBody>
+      </p:sp>
+      <p:sp>
+        <p:nvSpPr>
+          <p:cNvPr id="9007" name="Rounded Rectangle 9006"/>
           <p:cNvSpPr/>
           <p:nvPr/>
         </p:nvSpPr>
         <p:spPr>
           <a:xfrm>
-            <a:off x="713232" y="2011679"/>
-            <a:ext cx="274320" cy="274320"/>
-          </a:xfrm>
-          <a:prstGeom prst="ellipse">
+            <a:off x="4340351" y="1874519"/>
+            <a:ext cx="3517391" cy="1051560"/>
+          </a:xfrm>
+          <a:prstGeom prst="roundRect">
             <a:avLst/>
           </a:prstGeom>
           <a:solidFill>
-            <a:srgbClr val="113E6A"/>
+            <a:srgbClr val="FFFFFF"/>
           </a:solidFill>
-          <a:ln>
-            <a:noFill/>
+          <a:ln w="9525">
+            <a:solidFill>
+              <a:srgbClr val="D6E3F0"/>
+            </a:solidFill>
           </a:ln>
           <a:effectLst/>
         </p:spPr>
@@ -20340,100 +19812,32 @@
           </a:fontRef>
         </p:style>
         <p:txBody>
-          <a:bodyPr rtlCol="0" anchor="ctr" lIns="0" rIns="0" tIns="0" bIns="0"/>
+          <a:bodyPr rtlCol="0" anchor="ctr"/>
           <a:lstStyle/>
           <a:p>
             <a:pPr algn="ctr"/>
-            <a:r>
-              <a:rPr sz="900" b="1">
-                <a:solidFill>
-                  <a:srgbClr val="FFFFFF"/>
-                </a:solidFill>
-                <a:latin typeface="Arial"/>
-                <a:ea typeface="微软雅黑"/>
-              </a:rPr>
-              <a:t>01</a:t>
-            </a:r>
-          </a:p>
-        </p:txBody>
-      </p:sp>
-      <p:sp>
-        <p:nvSpPr>
-          <p:cNvPr id="9007" name="TextBox 9006"/>
-          <p:cNvSpPr txBox="1"/>
-          <p:nvPr/>
-        </p:nvSpPr>
-        <p:spPr>
-          <a:xfrm>
-            <a:off x="1078992" y="2011679"/>
-            <a:ext cx="2877312" cy="850392"/>
-          </a:xfrm>
-          <a:prstGeom prst="rect">
-            <a:avLst/>
-          </a:prstGeom>
-          <a:noFill/>
-        </p:spPr>
-        <p:txBody>
-          <a:bodyPr wrap="square" anchor="t" lIns="0" rIns="0" tIns="0" bIns="0">
-            <a:spAutoFit/>
-          </a:bodyPr>
-          <a:lstStyle/>
-          <a:p>
-            <a:pPr algn="l"/>
-            <a:r>
-              <a:rPr sz="1350" b="1">
-                <a:solidFill>
-                  <a:srgbClr val="113E6A"/>
-                </a:solidFill>
-                <a:latin typeface="Arial"/>
-                <a:ea typeface="微软雅黑"/>
-              </a:rPr>
-              <a:t>KWOK 仿真</a:t>
-            </a:r>
-          </a:p>
-          <a:p>
-            <a:pPr algn="l">
-              <a:lnSpc>
-                <a:spcPct val="110000"/>
-              </a:lnSpc>
-              <a:spcBef>
-                <a:spcPts val="400"/>
-              </a:spcBef>
-            </a:pPr>
-            <a:r>
-              <a:rPr sz="1100" b="0">
-                <a:solidFill>
-                  <a:srgbClr val="2E2C2C"/>
-                </a:solidFill>
-                <a:latin typeface="Arial"/>
-                <a:ea typeface="微软雅黑"/>
-              </a:rPr>
-              <a:t>无法反映真实资源竞争与 IO</a:t>
-            </a:r>
-          </a:p>
-        </p:txBody>
-      </p:sp>
-      <p:sp>
-        <p:nvSpPr>
-          <p:cNvPr id="9008" name="Rounded Rectangle 9007"/>
+          </a:p>
+        </p:txBody>
+      </p:sp>
+      <p:sp>
+        <p:nvSpPr>
+          <p:cNvPr id="9008" name="Oval 9007"/>
           <p:cNvSpPr/>
           <p:nvPr/>
         </p:nvSpPr>
         <p:spPr>
           <a:xfrm>
-            <a:off x="4340351" y="1874519"/>
-            <a:ext cx="3517391" cy="1051560"/>
-          </a:xfrm>
-          <a:prstGeom prst="roundRect">
+            <a:off x="4486656" y="2011679"/>
+            <a:ext cx="274320" cy="274320"/>
+          </a:xfrm>
+          <a:prstGeom prst="ellipse">
             <a:avLst/>
           </a:prstGeom>
           <a:solidFill>
-            <a:srgbClr val="FFFFFF"/>
+            <a:srgbClr val="113E6A"/>
           </a:solidFill>
-          <a:ln w="9525">
-            <a:solidFill>
-              <a:srgbClr val="D6E3F0"/>
-            </a:solidFill>
+          <a:ln>
+            <a:noFill/>
           </a:ln>
           <a:effectLst/>
         </p:spPr>
@@ -20452,32 +19856,100 @@
           </a:fontRef>
         </p:style>
         <p:txBody>
-          <a:bodyPr rtlCol="0" anchor="ctr"/>
+          <a:bodyPr rtlCol="0" anchor="ctr" lIns="0" rIns="0" tIns="0" bIns="0"/>
           <a:lstStyle/>
           <a:p>
             <a:pPr algn="ctr"/>
-          </a:p>
-        </p:txBody>
-      </p:sp>
-      <p:sp>
-        <p:nvSpPr>
-          <p:cNvPr id="9009" name="Oval 9008"/>
+            <a:r>
+              <a:rPr sz="900" b="1">
+                <a:solidFill>
+                  <a:srgbClr val="FFFFFF"/>
+                </a:solidFill>
+                <a:latin typeface="Arial"/>
+                <a:ea typeface="微软雅黑"/>
+              </a:rPr>
+              <a:t>02</a:t>
+            </a:r>
+          </a:p>
+        </p:txBody>
+      </p:sp>
+      <p:sp>
+        <p:nvSpPr>
+          <p:cNvPr id="9009" name="TextBox 9008"/>
+          <p:cNvSpPr txBox="1"/>
+          <p:nvPr/>
+        </p:nvSpPr>
+        <p:spPr>
+          <a:xfrm>
+            <a:off x="4852416" y="2011679"/>
+            <a:ext cx="2877312" cy="850392"/>
+          </a:xfrm>
+          <a:prstGeom prst="rect">
+            <a:avLst/>
+          </a:prstGeom>
+          <a:noFill/>
+        </p:spPr>
+        <p:txBody>
+          <a:bodyPr wrap="square" anchor="t" lIns="0" rIns="0" tIns="0" bIns="0">
+            <a:spAutoFit/>
+          </a:bodyPr>
+          <a:lstStyle/>
+          <a:p>
+            <a:pPr algn="l"/>
+            <a:r>
+              <a:rPr sz="1350" b="1">
+                <a:solidFill>
+                  <a:srgbClr val="113E6A"/>
+                </a:solidFill>
+                <a:latin typeface="Arial"/>
+                <a:ea typeface="微软雅黑"/>
+              </a:rPr>
+              <a:t>Gang 延迟口径</a:t>
+            </a:r>
+          </a:p>
+          <a:p>
+            <a:pPr algn="l">
+              <a:lnSpc>
+                <a:spcPct val="110000"/>
+              </a:lnSpc>
+              <a:spcBef>
+                <a:spcPts val="400"/>
+              </a:spcBef>
+            </a:pPr>
+            <a:r>
+              <a:rPr sz="1100" b="0">
+                <a:solidFill>
+                  <a:srgbClr val="2E2C2C"/>
+                </a:solidFill>
+                <a:latin typeface="Arial"/>
+                <a:ea typeface="微软雅黑"/>
+              </a:rPr>
+              <a:t>w6 尾延迟反向，未分离计时</a:t>
+            </a:r>
+          </a:p>
+        </p:txBody>
+      </p:sp>
+      <p:sp>
+        <p:nvSpPr>
+          <p:cNvPr id="9010" name="Rounded Rectangle 9009"/>
           <p:cNvSpPr/>
           <p:nvPr/>
         </p:nvSpPr>
         <p:spPr>
           <a:xfrm>
-            <a:off x="4486656" y="2011679"/>
-            <a:ext cx="274320" cy="274320"/>
-          </a:xfrm>
-          <a:prstGeom prst="ellipse">
+            <a:off x="8113775" y="1874519"/>
+            <a:ext cx="3517391" cy="1051560"/>
+          </a:xfrm>
+          <a:prstGeom prst="roundRect">
             <a:avLst/>
           </a:prstGeom>
           <a:solidFill>
-            <a:srgbClr val="113E6A"/>
+            <a:srgbClr val="FFFFFF"/>
           </a:solidFill>
-          <a:ln>
-            <a:noFill/>
+          <a:ln w="9525">
+            <a:solidFill>
+              <a:srgbClr val="D6E3F0"/>
+            </a:solidFill>
           </a:ln>
           <a:effectLst/>
         </p:spPr>
@@ -20496,100 +19968,32 @@
           </a:fontRef>
         </p:style>
         <p:txBody>
-          <a:bodyPr rtlCol="0" anchor="ctr" lIns="0" rIns="0" tIns="0" bIns="0"/>
+          <a:bodyPr rtlCol="0" anchor="ctr"/>
           <a:lstStyle/>
           <a:p>
             <a:pPr algn="ctr"/>
-            <a:r>
-              <a:rPr sz="900" b="1">
-                <a:solidFill>
-                  <a:srgbClr val="FFFFFF"/>
-                </a:solidFill>
-                <a:latin typeface="Arial"/>
-                <a:ea typeface="微软雅黑"/>
-              </a:rPr>
-              <a:t>02</a:t>
-            </a:r>
-          </a:p>
-        </p:txBody>
-      </p:sp>
-      <p:sp>
-        <p:nvSpPr>
-          <p:cNvPr id="9010" name="TextBox 9009"/>
-          <p:cNvSpPr txBox="1"/>
-          <p:nvPr/>
-        </p:nvSpPr>
-        <p:spPr>
-          <a:xfrm>
-            <a:off x="4852416" y="2011679"/>
-            <a:ext cx="2877312" cy="850392"/>
-          </a:xfrm>
-          <a:prstGeom prst="rect">
-            <a:avLst/>
-          </a:prstGeom>
-          <a:noFill/>
-        </p:spPr>
-        <p:txBody>
-          <a:bodyPr wrap="square" anchor="t" lIns="0" rIns="0" tIns="0" bIns="0">
-            <a:spAutoFit/>
-          </a:bodyPr>
-          <a:lstStyle/>
-          <a:p>
-            <a:pPr algn="l"/>
-            <a:r>
-              <a:rPr sz="1350" b="1">
-                <a:solidFill>
-                  <a:srgbClr val="113E6A"/>
-                </a:solidFill>
-                <a:latin typeface="Arial"/>
-                <a:ea typeface="微软雅黑"/>
-              </a:rPr>
-              <a:t>Gang 延迟口径</a:t>
-            </a:r>
-          </a:p>
-          <a:p>
-            <a:pPr algn="l">
-              <a:lnSpc>
-                <a:spcPct val="110000"/>
-              </a:lnSpc>
-              <a:spcBef>
-                <a:spcPts val="400"/>
-              </a:spcBef>
-            </a:pPr>
-            <a:r>
-              <a:rPr sz="1100" b="0">
-                <a:solidFill>
-                  <a:srgbClr val="2E2C2C"/>
-                </a:solidFill>
-                <a:latin typeface="Arial"/>
-                <a:ea typeface="微软雅黑"/>
-              </a:rPr>
-              <a:t>w6 尾延迟反向，未分离计时</a:t>
-            </a:r>
-          </a:p>
-        </p:txBody>
-      </p:sp>
-      <p:sp>
-        <p:nvSpPr>
-          <p:cNvPr id="9011" name="Rounded Rectangle 9010"/>
+          </a:p>
+        </p:txBody>
+      </p:sp>
+      <p:sp>
+        <p:nvSpPr>
+          <p:cNvPr id="9011" name="Oval 9010"/>
           <p:cNvSpPr/>
           <p:nvPr/>
         </p:nvSpPr>
         <p:spPr>
           <a:xfrm>
-            <a:off x="8113775" y="1874519"/>
-            <a:ext cx="3517391" cy="1051560"/>
-          </a:xfrm>
-          <a:prstGeom prst="roundRect">
+            <a:off x="8260079" y="2011679"/>
+            <a:ext cx="274320" cy="274320"/>
+          </a:xfrm>
+          <a:prstGeom prst="ellipse">
             <a:avLst/>
           </a:prstGeom>
           <a:solidFill>
-            <a:srgbClr val="FFFFFF"/>
+            <a:srgbClr val="113E6A"/>
           </a:solidFill>
-          <a:ln w="9525">
-            <a:solidFill>
-              <a:srgbClr val="D6E3F0"/>
-            </a:solidFill>
+          <a:ln>
+            <a:noFill/>
           </a:ln>
           <a:effectLst/>
         </p:spPr>
@@ -20608,32 +20012,100 @@
           </a:fontRef>
         </p:style>
         <p:txBody>
-          <a:bodyPr rtlCol="0" anchor="ctr"/>
+          <a:bodyPr rtlCol="0" anchor="ctr" lIns="0" rIns="0" tIns="0" bIns="0"/>
           <a:lstStyle/>
           <a:p>
             <a:pPr algn="ctr"/>
-          </a:p>
-        </p:txBody>
-      </p:sp>
-      <p:sp>
-        <p:nvSpPr>
-          <p:cNvPr id="9012" name="Oval 9011"/>
+            <a:r>
+              <a:rPr sz="900" b="1">
+                <a:solidFill>
+                  <a:srgbClr val="FFFFFF"/>
+                </a:solidFill>
+                <a:latin typeface="Arial"/>
+                <a:ea typeface="微软雅黑"/>
+              </a:rPr>
+              <a:t>03</a:t>
+            </a:r>
+          </a:p>
+        </p:txBody>
+      </p:sp>
+      <p:sp>
+        <p:nvSpPr>
+          <p:cNvPr id="9012" name="TextBox 9011"/>
+          <p:cNvSpPr txBox="1"/>
+          <p:nvPr/>
+        </p:nvSpPr>
+        <p:spPr>
+          <a:xfrm>
+            <a:off x="8625839" y="2011679"/>
+            <a:ext cx="2877312" cy="850392"/>
+          </a:xfrm>
+          <a:prstGeom prst="rect">
+            <a:avLst/>
+          </a:prstGeom>
+          <a:noFill/>
+        </p:spPr>
+        <p:txBody>
+          <a:bodyPr wrap="square" anchor="t" lIns="0" rIns="0" tIns="0" bIns="0">
+            <a:spAutoFit/>
+          </a:bodyPr>
+          <a:lstStyle/>
+          <a:p>
+            <a:pPr algn="l"/>
+            <a:r>
+              <a:rPr sz="1350" b="1">
+                <a:solidFill>
+                  <a:srgbClr val="113E6A"/>
+                </a:solidFill>
+                <a:latin typeface="Arial"/>
+                <a:ea typeface="微软雅黑"/>
+              </a:rPr>
+              <a:t>固定实例数</a:t>
+            </a:r>
+          </a:p>
+          <a:p>
+            <a:pPr algn="l">
+              <a:lnSpc>
+                <a:spcPct val="110000"/>
+              </a:lnSpc>
+              <a:spcBef>
+                <a:spcPts val="400"/>
+              </a:spcBef>
+            </a:pPr>
+            <a:r>
+              <a:rPr sz="1100" b="0">
+                <a:solidFill>
+                  <a:srgbClr val="2E2C2C"/>
+                </a:solidFill>
+                <a:latin typeface="Arial"/>
+                <a:ea typeface="微软雅黑"/>
+              </a:rPr>
+              <a:t>s3→s4 未同步扩容</a:t>
+            </a:r>
+          </a:p>
+        </p:txBody>
+      </p:sp>
+      <p:sp>
+        <p:nvSpPr>
+          <p:cNvPr id="9013" name="Rounded Rectangle 9012"/>
           <p:cNvSpPr/>
           <p:nvPr/>
         </p:nvSpPr>
         <p:spPr>
           <a:xfrm>
-            <a:off x="8260079" y="2011679"/>
-            <a:ext cx="274320" cy="274320"/>
-          </a:xfrm>
-          <a:prstGeom prst="ellipse">
+            <a:off x="566928" y="3182111"/>
+            <a:ext cx="3517391" cy="1051560"/>
+          </a:xfrm>
+          <a:prstGeom prst="roundRect">
             <a:avLst/>
           </a:prstGeom>
           <a:solidFill>
-            <a:srgbClr val="113E6A"/>
+            <a:srgbClr val="FFFFFF"/>
           </a:solidFill>
-          <a:ln>
-            <a:noFill/>
+          <a:ln w="9525">
+            <a:solidFill>
+              <a:srgbClr val="D6E3F0"/>
+            </a:solidFill>
           </a:ln>
           <a:effectLst/>
         </p:spPr>
@@ -20652,100 +20124,32 @@
           </a:fontRef>
         </p:style>
         <p:txBody>
-          <a:bodyPr rtlCol="0" anchor="ctr" lIns="0" rIns="0" tIns="0" bIns="0"/>
+          <a:bodyPr rtlCol="0" anchor="ctr"/>
           <a:lstStyle/>
           <a:p>
             <a:pPr algn="ctr"/>
-            <a:r>
-              <a:rPr sz="900" b="1">
-                <a:solidFill>
-                  <a:srgbClr val="FFFFFF"/>
-                </a:solidFill>
-                <a:latin typeface="Arial"/>
-                <a:ea typeface="微软雅黑"/>
-              </a:rPr>
-              <a:t>03</a:t>
-            </a:r>
-          </a:p>
-        </p:txBody>
-      </p:sp>
-      <p:sp>
-        <p:nvSpPr>
-          <p:cNvPr id="9013" name="TextBox 9012"/>
-          <p:cNvSpPr txBox="1"/>
-          <p:nvPr/>
-        </p:nvSpPr>
-        <p:spPr>
-          <a:xfrm>
-            <a:off x="8625839" y="2011679"/>
-            <a:ext cx="2877312" cy="850392"/>
-          </a:xfrm>
-          <a:prstGeom prst="rect">
-            <a:avLst/>
-          </a:prstGeom>
-          <a:noFill/>
-        </p:spPr>
-        <p:txBody>
-          <a:bodyPr wrap="square" anchor="t" lIns="0" rIns="0" tIns="0" bIns="0">
-            <a:spAutoFit/>
-          </a:bodyPr>
-          <a:lstStyle/>
-          <a:p>
-            <a:pPr algn="l"/>
-            <a:r>
-              <a:rPr sz="1350" b="1">
-                <a:solidFill>
-                  <a:srgbClr val="113E6A"/>
-                </a:solidFill>
-                <a:latin typeface="Arial"/>
-                <a:ea typeface="微软雅黑"/>
-              </a:rPr>
-              <a:t>固定实例数</a:t>
-            </a:r>
-          </a:p>
-          <a:p>
-            <a:pPr algn="l">
-              <a:lnSpc>
-                <a:spcPct val="110000"/>
-              </a:lnSpc>
-              <a:spcBef>
-                <a:spcPts val="400"/>
-              </a:spcBef>
-            </a:pPr>
-            <a:r>
-              <a:rPr sz="1100" b="0">
-                <a:solidFill>
-                  <a:srgbClr val="2E2C2C"/>
-                </a:solidFill>
-                <a:latin typeface="Arial"/>
-                <a:ea typeface="微软雅黑"/>
-              </a:rPr>
-              <a:t>s3→s4 未同步扩容</a:t>
-            </a:r>
-          </a:p>
-        </p:txBody>
-      </p:sp>
-      <p:sp>
-        <p:nvSpPr>
-          <p:cNvPr id="9014" name="Rounded Rectangle 9013"/>
+          </a:p>
+        </p:txBody>
+      </p:sp>
+      <p:sp>
+        <p:nvSpPr>
+          <p:cNvPr id="9014" name="Oval 9013"/>
           <p:cNvSpPr/>
           <p:nvPr/>
         </p:nvSpPr>
         <p:spPr>
           <a:xfrm>
-            <a:off x="566928" y="3182111"/>
-            <a:ext cx="3517391" cy="1051560"/>
-          </a:xfrm>
-          <a:prstGeom prst="roundRect">
+            <a:off x="713232" y="3319271"/>
+            <a:ext cx="274320" cy="274320"/>
+          </a:xfrm>
+          <a:prstGeom prst="ellipse">
             <a:avLst/>
           </a:prstGeom>
           <a:solidFill>
-            <a:srgbClr val="FFFFFF"/>
+            <a:srgbClr val="113E6A"/>
           </a:solidFill>
-          <a:ln w="9525">
-            <a:solidFill>
-              <a:srgbClr val="D6E3F0"/>
-            </a:solidFill>
+          <a:ln>
+            <a:noFill/>
           </a:ln>
           <a:effectLst/>
         </p:spPr>
@@ -20764,32 +20168,100 @@
           </a:fontRef>
         </p:style>
         <p:txBody>
-          <a:bodyPr rtlCol="0" anchor="ctr"/>
+          <a:bodyPr rtlCol="0" anchor="ctr" lIns="0" rIns="0" tIns="0" bIns="0"/>
           <a:lstStyle/>
           <a:p>
             <a:pPr algn="ctr"/>
-          </a:p>
-        </p:txBody>
-      </p:sp>
-      <p:sp>
-        <p:nvSpPr>
-          <p:cNvPr id="9015" name="Oval 9014"/>
+            <a:r>
+              <a:rPr sz="900" b="1">
+                <a:solidFill>
+                  <a:srgbClr val="FFFFFF"/>
+                </a:solidFill>
+                <a:latin typeface="Arial"/>
+                <a:ea typeface="微软雅黑"/>
+              </a:rPr>
+              <a:t>04</a:t>
+            </a:r>
+          </a:p>
+        </p:txBody>
+      </p:sp>
+      <p:sp>
+        <p:nvSpPr>
+          <p:cNvPr id="9015" name="TextBox 9014"/>
+          <p:cNvSpPr txBox="1"/>
+          <p:nvPr/>
+        </p:nvSpPr>
+        <p:spPr>
+          <a:xfrm>
+            <a:off x="1078992" y="3319271"/>
+            <a:ext cx="2877312" cy="850392"/>
+          </a:xfrm>
+          <a:prstGeom prst="rect">
+            <a:avLst/>
+          </a:prstGeom>
+          <a:noFill/>
+        </p:spPr>
+        <p:txBody>
+          <a:bodyPr wrap="square" anchor="t" lIns="0" rIns="0" tIns="0" bIns="0">
+            <a:spAutoFit/>
+          </a:bodyPr>
+          <a:lstStyle/>
+          <a:p>
+            <a:pPr algn="l"/>
+            <a:r>
+              <a:rPr sz="1350" b="1">
+                <a:solidFill>
+                  <a:srgbClr val="113E6A"/>
+                </a:solidFill>
+                <a:latin typeface="Arial"/>
+                <a:ea typeface="微软雅黑"/>
+              </a:rPr>
+              <a:t>资源公平</a:t>
+            </a:r>
+          </a:p>
+          <a:p>
+            <a:pPr algn="l">
+              <a:lnSpc>
+                <a:spcPct val="110000"/>
+              </a:lnSpc>
+              <a:spcBef>
+                <a:spcPts val="400"/>
+              </a:spcBef>
+            </a:pPr>
+            <a:r>
+              <a:rPr sz="1100" b="0">
+                <a:solidFill>
+                  <a:srgbClr val="2E2C2C"/>
+                </a:solidFill>
+                <a:latin typeface="Arial"/>
+                <a:ea typeface="微软雅黑"/>
+              </a:rPr>
+              <a:t>每 Deployment 同规格，对 ENO 略不利</a:t>
+            </a:r>
+          </a:p>
+        </p:txBody>
+      </p:sp>
+      <p:sp>
+        <p:nvSpPr>
+          <p:cNvPr id="9016" name="Rounded Rectangle 9015"/>
           <p:cNvSpPr/>
           <p:nvPr/>
         </p:nvSpPr>
         <p:spPr>
           <a:xfrm>
-            <a:off x="713232" y="3319271"/>
-            <a:ext cx="274320" cy="274320"/>
-          </a:xfrm>
-          <a:prstGeom prst="ellipse">
+            <a:off x="4340351" y="3182111"/>
+            <a:ext cx="3517391" cy="1051560"/>
+          </a:xfrm>
+          <a:prstGeom prst="roundRect">
             <a:avLst/>
           </a:prstGeom>
           <a:solidFill>
-            <a:srgbClr val="113E6A"/>
+            <a:srgbClr val="FFFFFF"/>
           </a:solidFill>
-          <a:ln>
-            <a:noFill/>
+          <a:ln w="9525">
+            <a:solidFill>
+              <a:srgbClr val="D6E3F0"/>
+            </a:solidFill>
           </a:ln>
           <a:effectLst/>
         </p:spPr>
@@ -20808,100 +20280,32 @@
           </a:fontRef>
         </p:style>
         <p:txBody>
-          <a:bodyPr rtlCol="0" anchor="ctr" lIns="0" rIns="0" tIns="0" bIns="0"/>
+          <a:bodyPr rtlCol="0" anchor="ctr"/>
           <a:lstStyle/>
           <a:p>
             <a:pPr algn="ctr"/>
-            <a:r>
-              <a:rPr sz="900" b="1">
-                <a:solidFill>
-                  <a:srgbClr val="FFFFFF"/>
-                </a:solidFill>
-                <a:latin typeface="Arial"/>
-                <a:ea typeface="微软雅黑"/>
-              </a:rPr>
-              <a:t>04</a:t>
-            </a:r>
-          </a:p>
-        </p:txBody>
-      </p:sp>
-      <p:sp>
-        <p:nvSpPr>
-          <p:cNvPr id="9016" name="TextBox 9015"/>
-          <p:cNvSpPr txBox="1"/>
-          <p:nvPr/>
-        </p:nvSpPr>
-        <p:spPr>
-          <a:xfrm>
-            <a:off x="1078992" y="3319271"/>
-            <a:ext cx="2877312" cy="850392"/>
-          </a:xfrm>
-          <a:prstGeom prst="rect">
-            <a:avLst/>
-          </a:prstGeom>
-          <a:noFill/>
-        </p:spPr>
-        <p:txBody>
-          <a:bodyPr wrap="square" anchor="t" lIns="0" rIns="0" tIns="0" bIns="0">
-            <a:spAutoFit/>
-          </a:bodyPr>
-          <a:lstStyle/>
-          <a:p>
-            <a:pPr algn="l"/>
-            <a:r>
-              <a:rPr sz="1350" b="1">
-                <a:solidFill>
-                  <a:srgbClr val="113E6A"/>
-                </a:solidFill>
-                <a:latin typeface="Arial"/>
-                <a:ea typeface="微软雅黑"/>
-              </a:rPr>
-              <a:t>资源公平</a:t>
-            </a:r>
-          </a:p>
-          <a:p>
-            <a:pPr algn="l">
-              <a:lnSpc>
-                <a:spcPct val="110000"/>
-              </a:lnSpc>
-              <a:spcBef>
-                <a:spcPts val="400"/>
-              </a:spcBef>
-            </a:pPr>
-            <a:r>
-              <a:rPr sz="1100" b="0">
-                <a:solidFill>
-                  <a:srgbClr val="2E2C2C"/>
-                </a:solidFill>
-                <a:latin typeface="Arial"/>
-                <a:ea typeface="微软雅黑"/>
-              </a:rPr>
-              <a:t>每 Deployment 同规格，对 ENO 略不利</a:t>
-            </a:r>
-          </a:p>
-        </p:txBody>
-      </p:sp>
-      <p:sp>
-        <p:nvSpPr>
-          <p:cNvPr id="9017" name="Rounded Rectangle 9016"/>
+          </a:p>
+        </p:txBody>
+      </p:sp>
+      <p:sp>
+        <p:nvSpPr>
+          <p:cNvPr id="9017" name="Oval 9016"/>
           <p:cNvSpPr/>
           <p:nvPr/>
         </p:nvSpPr>
         <p:spPr>
           <a:xfrm>
-            <a:off x="4340351" y="3182111"/>
-            <a:ext cx="3517391" cy="1051560"/>
-          </a:xfrm>
-          <a:prstGeom prst="roundRect">
+            <a:off x="4486656" y="3319271"/>
+            <a:ext cx="274320" cy="274320"/>
+          </a:xfrm>
+          <a:prstGeom prst="ellipse">
             <a:avLst/>
           </a:prstGeom>
           <a:solidFill>
-            <a:srgbClr val="FFFFFF"/>
+            <a:srgbClr val="113E6A"/>
           </a:solidFill>
-          <a:ln w="9525">
-            <a:solidFill>
-              <a:srgbClr val="D6E3F0"/>
-            </a:solidFill>
+          <a:ln>
+            <a:noFill/>
           </a:ln>
           <a:effectLst/>
         </p:spPr>
@@ -20920,32 +20324,100 @@
           </a:fontRef>
         </p:style>
         <p:txBody>
-          <a:bodyPr rtlCol="0" anchor="ctr"/>
+          <a:bodyPr rtlCol="0" anchor="ctr" lIns="0" rIns="0" tIns="0" bIns="0"/>
           <a:lstStyle/>
           <a:p>
             <a:pPr algn="ctr"/>
-          </a:p>
-        </p:txBody>
-      </p:sp>
-      <p:sp>
-        <p:nvSpPr>
-          <p:cNvPr id="9018" name="Oval 9017"/>
+            <a:r>
+              <a:rPr sz="900" b="1">
+                <a:solidFill>
+                  <a:srgbClr val="FFFFFF"/>
+                </a:solidFill>
+                <a:latin typeface="Arial"/>
+                <a:ea typeface="微软雅黑"/>
+              </a:rPr>
+              <a:t>05</a:t>
+            </a:r>
+          </a:p>
+        </p:txBody>
+      </p:sp>
+      <p:sp>
+        <p:nvSpPr>
+          <p:cNvPr id="9018" name="TextBox 9017"/>
+          <p:cNvSpPr txBox="1"/>
+          <p:nvPr/>
+        </p:nvSpPr>
+        <p:spPr>
+          <a:xfrm>
+            <a:off x="4852416" y="3319271"/>
+            <a:ext cx="2877312" cy="850392"/>
+          </a:xfrm>
+          <a:prstGeom prst="rect">
+            <a:avLst/>
+          </a:prstGeom>
+          <a:noFill/>
+        </p:spPr>
+        <p:txBody>
+          <a:bodyPr wrap="square" anchor="t" lIns="0" rIns="0" tIns="0" bIns="0">
+            <a:spAutoFit/>
+          </a:bodyPr>
+          <a:lstStyle/>
+          <a:p>
+            <a:pPr algn="l"/>
+            <a:r>
+              <a:rPr sz="1350" b="1">
+                <a:solidFill>
+                  <a:srgbClr val="113E6A"/>
+                </a:solidFill>
+                <a:latin typeface="Arial"/>
+                <a:ea typeface="微软雅黑"/>
+              </a:rPr>
+              <a:t>Volcano 指标</a:t>
+            </a:r>
+          </a:p>
+          <a:p>
+            <a:pPr algn="l">
+              <a:lnSpc>
+                <a:spcPct val="110000"/>
+              </a:lnSpc>
+              <a:spcBef>
+                <a:spcPts val="400"/>
+              </a:spcBef>
+            </a:pPr>
+            <a:r>
+              <a:rPr sz="1100" b="0">
+                <a:solidFill>
+                  <a:srgbClr val="2E2C2C"/>
+                </a:solidFill>
+                <a:latin typeface="Arial"/>
+                <a:ea typeface="微软雅黑"/>
+              </a:rPr>
+              <a:t>测量对象与粒度不完全等价</a:t>
+            </a:r>
+          </a:p>
+        </p:txBody>
+      </p:sp>
+      <p:sp>
+        <p:nvSpPr>
+          <p:cNvPr id="9019" name="Rounded Rectangle 9018"/>
           <p:cNvSpPr/>
           <p:nvPr/>
         </p:nvSpPr>
         <p:spPr>
           <a:xfrm>
-            <a:off x="4486656" y="3319271"/>
-            <a:ext cx="274320" cy="274320"/>
-          </a:xfrm>
-          <a:prstGeom prst="ellipse">
+            <a:off x="8113775" y="3182111"/>
+            <a:ext cx="3517391" cy="1051560"/>
+          </a:xfrm>
+          <a:prstGeom prst="roundRect">
             <a:avLst/>
           </a:prstGeom>
           <a:solidFill>
-            <a:srgbClr val="113E6A"/>
+            <a:srgbClr val="FFFFFF"/>
           </a:solidFill>
-          <a:ln>
-            <a:noFill/>
+          <a:ln w="9525">
+            <a:solidFill>
+              <a:srgbClr val="D6E3F0"/>
+            </a:solidFill>
           </a:ln>
           <a:effectLst/>
         </p:spPr>
@@ -20964,100 +20436,32 @@
           </a:fontRef>
         </p:style>
         <p:txBody>
-          <a:bodyPr rtlCol="0" anchor="ctr" lIns="0" rIns="0" tIns="0" bIns="0"/>
+          <a:bodyPr rtlCol="0" anchor="ctr"/>
           <a:lstStyle/>
           <a:p>
             <a:pPr algn="ctr"/>
-            <a:r>
-              <a:rPr sz="900" b="1">
-                <a:solidFill>
-                  <a:srgbClr val="FFFFFF"/>
-                </a:solidFill>
-                <a:latin typeface="Arial"/>
-                <a:ea typeface="微软雅黑"/>
-              </a:rPr>
-              <a:t>05</a:t>
-            </a:r>
-          </a:p>
-        </p:txBody>
-      </p:sp>
-      <p:sp>
-        <p:nvSpPr>
-          <p:cNvPr id="9019" name="TextBox 9018"/>
-          <p:cNvSpPr txBox="1"/>
-          <p:nvPr/>
-        </p:nvSpPr>
-        <p:spPr>
-          <a:xfrm>
-            <a:off x="4852416" y="3319271"/>
-            <a:ext cx="2877312" cy="850392"/>
-          </a:xfrm>
-          <a:prstGeom prst="rect">
-            <a:avLst/>
-          </a:prstGeom>
-          <a:noFill/>
-        </p:spPr>
-        <p:txBody>
-          <a:bodyPr wrap="square" anchor="t" lIns="0" rIns="0" tIns="0" bIns="0">
-            <a:spAutoFit/>
-          </a:bodyPr>
-          <a:lstStyle/>
-          <a:p>
-            <a:pPr algn="l"/>
-            <a:r>
-              <a:rPr sz="1350" b="1">
-                <a:solidFill>
-                  <a:srgbClr val="113E6A"/>
-                </a:solidFill>
-                <a:latin typeface="Arial"/>
-                <a:ea typeface="微软雅黑"/>
-              </a:rPr>
-              <a:t>Volcano 指标</a:t>
-            </a:r>
-          </a:p>
-          <a:p>
-            <a:pPr algn="l">
-              <a:lnSpc>
-                <a:spcPct val="110000"/>
-              </a:lnSpc>
-              <a:spcBef>
-                <a:spcPts val="400"/>
-              </a:spcBef>
-            </a:pPr>
-            <a:r>
-              <a:rPr sz="1100" b="0">
-                <a:solidFill>
-                  <a:srgbClr val="2E2C2C"/>
-                </a:solidFill>
-                <a:latin typeface="Arial"/>
-                <a:ea typeface="微软雅黑"/>
-              </a:rPr>
-              <a:t>测量对象与粒度不完全等价</a:t>
-            </a:r>
-          </a:p>
-        </p:txBody>
-      </p:sp>
-      <p:sp>
-        <p:nvSpPr>
-          <p:cNvPr id="9020" name="Rounded Rectangle 9019"/>
+          </a:p>
+        </p:txBody>
+      </p:sp>
+      <p:sp>
+        <p:nvSpPr>
+          <p:cNvPr id="9020" name="Oval 9019"/>
           <p:cNvSpPr/>
           <p:nvPr/>
         </p:nvSpPr>
         <p:spPr>
           <a:xfrm>
-            <a:off x="8113775" y="3182111"/>
-            <a:ext cx="3517391" cy="1051560"/>
-          </a:xfrm>
-          <a:prstGeom prst="roundRect">
+            <a:off x="8260079" y="3319271"/>
+            <a:ext cx="274320" cy="274320"/>
+          </a:xfrm>
+          <a:prstGeom prst="ellipse">
             <a:avLst/>
           </a:prstGeom>
           <a:solidFill>
-            <a:srgbClr val="FFFFFF"/>
+            <a:srgbClr val="113E6A"/>
           </a:solidFill>
-          <a:ln w="9525">
-            <a:solidFill>
-              <a:srgbClr val="D6E3F0"/>
-            </a:solidFill>
+          <a:ln>
+            <a:noFill/>
           </a:ln>
           <a:effectLst/>
         </p:spPr>
@@ -21076,50 +20480,6 @@
           </a:fontRef>
         </p:style>
         <p:txBody>
-          <a:bodyPr rtlCol="0" anchor="ctr"/>
-          <a:lstStyle/>
-          <a:p>
-            <a:pPr algn="ctr"/>
-          </a:p>
-        </p:txBody>
-      </p:sp>
-      <p:sp>
-        <p:nvSpPr>
-          <p:cNvPr id="9021" name="Oval 9020"/>
-          <p:cNvSpPr/>
-          <p:nvPr/>
-        </p:nvSpPr>
-        <p:spPr>
-          <a:xfrm>
-            <a:off x="8260079" y="3319271"/>
-            <a:ext cx="274320" cy="274320"/>
-          </a:xfrm>
-          <a:prstGeom prst="ellipse">
-            <a:avLst/>
-          </a:prstGeom>
-          <a:solidFill>
-            <a:srgbClr val="113E6A"/>
-          </a:solidFill>
-          <a:ln>
-            <a:noFill/>
-          </a:ln>
-          <a:effectLst/>
-        </p:spPr>
-        <p:style>
-          <a:lnRef idx="1">
-            <a:schemeClr val="accent1"/>
-          </a:lnRef>
-          <a:fillRef idx="3">
-            <a:schemeClr val="accent1"/>
-          </a:fillRef>
-          <a:effectRef idx="2">
-            <a:schemeClr val="accent1"/>
-          </a:effectRef>
-          <a:fontRef idx="minor">
-            <a:schemeClr val="lt1"/>
-          </a:fontRef>
-        </p:style>
-        <p:txBody>
           <a:bodyPr rtlCol="0" anchor="ctr" lIns="0" rIns="0" tIns="0" bIns="0"/>
           <a:lstStyle/>
           <a:p>
@@ -21139,7 +20499,7 @@
       </p:sp>
       <p:sp>
         <p:nvSpPr>
-          <p:cNvPr id="9022" name="TextBox 9021"/>
+          <p:cNvPr id="9021" name="TextBox 9020"/>
           <p:cNvSpPr txBox="1"/>
           <p:nvPr/>
         </p:nvSpPr>
@@ -21195,7 +20555,7 @@
       </p:sp>
       <p:sp>
         <p:nvSpPr>
-          <p:cNvPr id="9023" name="TextBox 9022"/>
+          <p:cNvPr id="9022" name="TextBox 9021"/>
           <p:cNvSpPr txBox="1"/>
           <p:nvPr/>
         </p:nvSpPr>
@@ -21263,8 +20623,8 @@
         </p:nvSpPr>
         <p:spPr>
           <a:xfrm>
-            <a:off x="427038" y="220663"/>
-            <a:ext cx="474662" cy="560387"/>
+            <a:off x="182880" y="274320"/>
+            <a:ext cx="310896" cy="402336"/>
           </a:xfrm>
           <a:custGeom>
             <a:avLst/>
@@ -21484,8 +20844,8 @@
         </p:nvSpPr>
         <p:spPr>
           <a:xfrm>
-            <a:off x="1014984" y="155448"/>
-            <a:ext cx="8001000" cy="621792"/>
+            <a:off x="566928" y="155448"/>
+            <a:ext cx="8549640" cy="621792"/>
           </a:xfrm>
           <a:prstGeom prst="rect">
             <a:avLst/>
@@ -21518,23 +20878,65 @@
       </p:sp>
       <p:sp>
         <p:nvSpPr>
-          <p:cNvPr id="9003" name="Rectangle 9002"/>
-          <p:cNvSpPr/>
+          <p:cNvPr id="9003" name="TextBox 9002"/>
+          <p:cNvSpPr txBox="1"/>
           <p:nvPr/>
         </p:nvSpPr>
         <p:spPr>
           <a:xfrm>
-            <a:off x="1014984" y="1298448"/>
-            <a:ext cx="27432" cy="310896"/>
+            <a:off x="566928" y="1261872"/>
+            <a:ext cx="10881360" cy="438912"/>
           </a:xfrm>
           <a:prstGeom prst="rect">
             <a:avLst/>
           </a:prstGeom>
+          <a:noFill/>
+        </p:spPr>
+        <p:txBody>
+          <a:bodyPr wrap="square" anchor="ctr" lIns="0" rIns="0" tIns="0" bIns="0">
+            <a:spAutoFit/>
+          </a:bodyPr>
+          <a:lstStyle/>
+          <a:p>
+            <a:pPr algn="l">
+              <a:lnSpc>
+                <a:spcPct val="110000"/>
+              </a:lnSpc>
+            </a:pPr>
+            <a:r>
+              <a:rPr sz="1800" b="1">
+                <a:solidFill>
+                  <a:srgbClr val="0070C0"/>
+                </a:solidFill>
+                <a:latin typeface="Arial"/>
+                <a:ea typeface="微软雅黑"/>
+              </a:rPr>
+              <a:t>架构创新与一致性创新都有可复现实验支撑，且实现了向后兼容的工程落地</a:t>
+            </a:r>
+          </a:p>
+        </p:txBody>
+      </p:sp>
+      <p:sp>
+        <p:nvSpPr>
+          <p:cNvPr id="9004" name="Rounded Rectangle 9003"/>
+          <p:cNvSpPr/>
+          <p:nvPr/>
+        </p:nvSpPr>
+        <p:spPr>
+          <a:xfrm>
+            <a:off x="566928" y="1874519"/>
+            <a:ext cx="3517391" cy="1051560"/>
+          </a:xfrm>
+          <a:prstGeom prst="roundRect">
+            <a:avLst/>
+          </a:prstGeom>
           <a:solidFill>
-            <a:srgbClr val="0070C0"/>
+            <a:srgbClr val="FFFFFF"/>
           </a:solidFill>
-          <a:ln>
-            <a:noFill/>
+          <a:ln w="9525">
+            <a:solidFill>
+              <a:srgbClr val="D6E3F0"/>
+            </a:solidFill>
           </a:ln>
           <a:effectLst/>
         </p:spPr>
@@ -21562,61 +20964,23 @@
       </p:sp>
       <p:sp>
         <p:nvSpPr>
-          <p:cNvPr id="9004" name="TextBox 9003"/>
-          <p:cNvSpPr txBox="1"/>
-          <p:nvPr/>
-        </p:nvSpPr>
-        <p:spPr>
-          <a:xfrm>
-            <a:off x="1161288" y="1271016"/>
-            <a:ext cx="10241280" cy="384048"/>
-          </a:xfrm>
-          <a:prstGeom prst="rect">
-            <a:avLst/>
-          </a:prstGeom>
-          <a:noFill/>
-        </p:spPr>
-        <p:txBody>
-          <a:bodyPr wrap="square" anchor="ctr" lIns="0" rIns="0" tIns="0" bIns="0">
-            <a:spAutoFit/>
-          </a:bodyPr>
-          <a:lstStyle/>
-          <a:p>
-            <a:pPr algn="l"/>
-            <a:r>
-              <a:rPr sz="1550" b="1">
-                <a:solidFill>
-                  <a:srgbClr val="0070C0"/>
-                </a:solidFill>
-                <a:latin typeface="Arial"/>
-                <a:ea typeface="微软雅黑"/>
-              </a:rPr>
-              <a:t>架构创新与一致性创新都有可复现实验支撑，且实现了向后兼容的工程落地</a:t>
-            </a:r>
-          </a:p>
-        </p:txBody>
-      </p:sp>
-      <p:sp>
-        <p:nvSpPr>
-          <p:cNvPr id="9005" name="Rounded Rectangle 9004"/>
+          <p:cNvPr id="9005" name="Oval 9004"/>
           <p:cNvSpPr/>
           <p:nvPr/>
         </p:nvSpPr>
         <p:spPr>
           <a:xfrm>
-            <a:off x="566928" y="1874519"/>
-            <a:ext cx="3517391" cy="1051560"/>
-          </a:xfrm>
-          <a:prstGeom prst="roundRect">
+            <a:off x="713232" y="2011679"/>
+            <a:ext cx="274320" cy="274320"/>
+          </a:xfrm>
+          <a:prstGeom prst="ellipse">
             <a:avLst/>
           </a:prstGeom>
           <a:solidFill>
-            <a:srgbClr val="FFFFFF"/>
+            <a:srgbClr val="113E6A"/>
           </a:solidFill>
-          <a:ln w="9525">
-            <a:solidFill>
-              <a:srgbClr val="D6E3F0"/>
-            </a:solidFill>
+          <a:ln>
+            <a:noFill/>
           </a:ln>
           <a:effectLst/>
         </p:spPr>
@@ -21635,32 +20999,100 @@
           </a:fontRef>
         </p:style>
         <p:txBody>
-          <a:bodyPr rtlCol="0" anchor="ctr"/>
+          <a:bodyPr rtlCol="0" anchor="ctr" lIns="0" rIns="0" tIns="0" bIns="0"/>
           <a:lstStyle/>
           <a:p>
             <a:pPr algn="ctr"/>
-          </a:p>
-        </p:txBody>
-      </p:sp>
-      <p:sp>
-        <p:nvSpPr>
-          <p:cNvPr id="9006" name="Oval 9005"/>
+            <a:r>
+              <a:rPr sz="900" b="1">
+                <a:solidFill>
+                  <a:srgbClr val="FFFFFF"/>
+                </a:solidFill>
+                <a:latin typeface="Arial"/>
+                <a:ea typeface="微软雅黑"/>
+              </a:rPr>
+              <a:t>01</a:t>
+            </a:r>
+          </a:p>
+        </p:txBody>
+      </p:sp>
+      <p:sp>
+        <p:nvSpPr>
+          <p:cNvPr id="9006" name="TextBox 9005"/>
+          <p:cNvSpPr txBox="1"/>
+          <p:nvPr/>
+        </p:nvSpPr>
+        <p:spPr>
+          <a:xfrm>
+            <a:off x="1078992" y="2011679"/>
+            <a:ext cx="2877312" cy="850392"/>
+          </a:xfrm>
+          <a:prstGeom prst="rect">
+            <a:avLst/>
+          </a:prstGeom>
+          <a:noFill/>
+        </p:spPr>
+        <p:txBody>
+          <a:bodyPr wrap="square" anchor="t" lIns="0" rIns="0" tIns="0" bIns="0">
+            <a:spAutoFit/>
+          </a:bodyPr>
+          <a:lstStyle/>
+          <a:p>
+            <a:pPr algn="l"/>
+            <a:r>
+              <a:rPr sz="1350" b="1">
+                <a:solidFill>
+                  <a:srgbClr val="113E6A"/>
+                </a:solidFill>
+                <a:latin typeface="Arial"/>
+                <a:ea typeface="微软雅黑"/>
+              </a:rPr>
+              <a:t>创新 1 · ENO</a:t>
+            </a:r>
+          </a:p>
+          <a:p>
+            <a:pPr algn="l">
+              <a:lnSpc>
+                <a:spcPct val="110000"/>
+              </a:lnSpc>
+              <a:spcBef>
+                <a:spcPts val="400"/>
+              </a:spcBef>
+            </a:pPr>
+            <a:r>
+              <a:rPr sz="1100" b="0">
+                <a:solidFill>
+                  <a:srgbClr val="2E2C2C"/>
+                </a:solidFill>
+                <a:latin typeface="Arial"/>
+                <a:ea typeface="微软雅黑"/>
+              </a:rPr>
+              <a:t>Binder 进进程内 + CacheAdapter</a:t>
+            </a:r>
+          </a:p>
+        </p:txBody>
+      </p:sp>
+      <p:sp>
+        <p:nvSpPr>
+          <p:cNvPr id="9007" name="Rounded Rectangle 9006"/>
           <p:cNvSpPr/>
           <p:nvPr/>
         </p:nvSpPr>
         <p:spPr>
           <a:xfrm>
-            <a:off x="713232" y="2011679"/>
-            <a:ext cx="274320" cy="274320"/>
-          </a:xfrm>
-          <a:prstGeom prst="ellipse">
+            <a:off x="4340351" y="1874519"/>
+            <a:ext cx="3517391" cy="1051560"/>
+          </a:xfrm>
+          <a:prstGeom prst="roundRect">
             <a:avLst/>
           </a:prstGeom>
           <a:solidFill>
-            <a:srgbClr val="113E6A"/>
+            <a:srgbClr val="FFFFFF"/>
           </a:solidFill>
-          <a:ln>
-            <a:noFill/>
+          <a:ln w="9525">
+            <a:solidFill>
+              <a:srgbClr val="D6E3F0"/>
+            </a:solidFill>
           </a:ln>
           <a:effectLst/>
         </p:spPr>
@@ -21679,100 +21111,32 @@
           </a:fontRef>
         </p:style>
         <p:txBody>
-          <a:bodyPr rtlCol="0" anchor="ctr" lIns="0" rIns="0" tIns="0" bIns="0"/>
+          <a:bodyPr rtlCol="0" anchor="ctr"/>
           <a:lstStyle/>
           <a:p>
             <a:pPr algn="ctr"/>
-            <a:r>
-              <a:rPr sz="900" b="1">
-                <a:solidFill>
-                  <a:srgbClr val="FFFFFF"/>
-                </a:solidFill>
-                <a:latin typeface="Arial"/>
-                <a:ea typeface="微软雅黑"/>
-              </a:rPr>
-              <a:t>01</a:t>
-            </a:r>
-          </a:p>
-        </p:txBody>
-      </p:sp>
-      <p:sp>
-        <p:nvSpPr>
-          <p:cNvPr id="9007" name="TextBox 9006"/>
-          <p:cNvSpPr txBox="1"/>
-          <p:nvPr/>
-        </p:nvSpPr>
-        <p:spPr>
-          <a:xfrm>
-            <a:off x="1078992" y="2011679"/>
-            <a:ext cx="2877312" cy="850392"/>
-          </a:xfrm>
-          <a:prstGeom prst="rect">
-            <a:avLst/>
-          </a:prstGeom>
-          <a:noFill/>
-        </p:spPr>
-        <p:txBody>
-          <a:bodyPr wrap="square" anchor="t" lIns="0" rIns="0" tIns="0" bIns="0">
-            <a:spAutoFit/>
-          </a:bodyPr>
-          <a:lstStyle/>
-          <a:p>
-            <a:pPr algn="l"/>
-            <a:r>
-              <a:rPr sz="1350" b="1">
-                <a:solidFill>
-                  <a:srgbClr val="113E6A"/>
-                </a:solidFill>
-                <a:latin typeface="Arial"/>
-                <a:ea typeface="微软雅黑"/>
-              </a:rPr>
-              <a:t>创新 1 · ENO</a:t>
-            </a:r>
-          </a:p>
-          <a:p>
-            <a:pPr algn="l">
-              <a:lnSpc>
-                <a:spcPct val="110000"/>
-              </a:lnSpc>
-              <a:spcBef>
-                <a:spcPts val="400"/>
-              </a:spcBef>
-            </a:pPr>
-            <a:r>
-              <a:rPr sz="1100" b="0">
-                <a:solidFill>
-                  <a:srgbClr val="2E2C2C"/>
-                </a:solidFill>
-                <a:latin typeface="Arial"/>
-                <a:ea typeface="微软雅黑"/>
-              </a:rPr>
-              <a:t>Binder 进进程内 + CacheAdapter</a:t>
-            </a:r>
-          </a:p>
-        </p:txBody>
-      </p:sp>
-      <p:sp>
-        <p:nvSpPr>
-          <p:cNvPr id="9008" name="Rounded Rectangle 9007"/>
+          </a:p>
+        </p:txBody>
+      </p:sp>
+      <p:sp>
+        <p:nvSpPr>
+          <p:cNvPr id="9008" name="Oval 9007"/>
           <p:cNvSpPr/>
           <p:nvPr/>
         </p:nvSpPr>
         <p:spPr>
           <a:xfrm>
-            <a:off x="4340351" y="1874519"/>
-            <a:ext cx="3517391" cy="1051560"/>
-          </a:xfrm>
-          <a:prstGeom prst="roundRect">
+            <a:off x="4486656" y="2011679"/>
+            <a:ext cx="274320" cy="274320"/>
+          </a:xfrm>
+          <a:prstGeom prst="ellipse">
             <a:avLst/>
           </a:prstGeom>
           <a:solidFill>
-            <a:srgbClr val="FFFFFF"/>
+            <a:srgbClr val="113E6A"/>
           </a:solidFill>
-          <a:ln w="9525">
-            <a:solidFill>
-              <a:srgbClr val="D6E3F0"/>
-            </a:solidFill>
+          <a:ln>
+            <a:noFill/>
           </a:ln>
           <a:effectLst/>
         </p:spPr>
@@ -21791,32 +21155,100 @@
           </a:fontRef>
         </p:style>
         <p:txBody>
-          <a:bodyPr rtlCol="0" anchor="ctr"/>
+          <a:bodyPr rtlCol="0" anchor="ctr" lIns="0" rIns="0" tIns="0" bIns="0"/>
           <a:lstStyle/>
           <a:p>
             <a:pPr algn="ctr"/>
-          </a:p>
-        </p:txBody>
-      </p:sp>
-      <p:sp>
-        <p:nvSpPr>
-          <p:cNvPr id="9009" name="Oval 9008"/>
+            <a:r>
+              <a:rPr sz="900" b="1">
+                <a:solidFill>
+                  <a:srgbClr val="FFFFFF"/>
+                </a:solidFill>
+                <a:latin typeface="Arial"/>
+                <a:ea typeface="微软雅黑"/>
+              </a:rPr>
+              <a:t>02</a:t>
+            </a:r>
+          </a:p>
+        </p:txBody>
+      </p:sp>
+      <p:sp>
+        <p:nvSpPr>
+          <p:cNvPr id="9009" name="TextBox 9008"/>
+          <p:cNvSpPr txBox="1"/>
+          <p:nvPr/>
+        </p:nvSpPr>
+        <p:spPr>
+          <a:xfrm>
+            <a:off x="4852416" y="2011679"/>
+            <a:ext cx="2877312" cy="850392"/>
+          </a:xfrm>
+          <a:prstGeom prst="rect">
+            <a:avLst/>
+          </a:prstGeom>
+          <a:noFill/>
+        </p:spPr>
+        <p:txBody>
+          <a:bodyPr wrap="square" anchor="t" lIns="0" rIns="0" tIns="0" bIns="0">
+            <a:spAutoFit/>
+          </a:bodyPr>
+          <a:lstStyle/>
+          <a:p>
+            <a:pPr algn="l"/>
+            <a:r>
+              <a:rPr sz="1350" b="1">
+                <a:solidFill>
+                  <a:srgbClr val="113E6A"/>
+                </a:solidFill>
+                <a:latin typeface="Arial"/>
+                <a:ea typeface="微软雅黑"/>
+              </a:rPr>
+              <a:t>创新 2 · 四层容错</a:t>
+            </a:r>
+          </a:p>
+          <a:p>
+            <a:pPr algn="l">
+              <a:lnSpc>
+                <a:spcPct val="110000"/>
+              </a:lnSpc>
+              <a:spcBef>
+                <a:spcPts val="400"/>
+              </a:spcBef>
+            </a:pPr>
+            <a:r>
+              <a:rPr sz="1100" b="0">
+                <a:solidFill>
+                  <a:srgbClr val="2E2C2C"/>
+                </a:solidFill>
+                <a:latin typeface="Arial"/>
+                <a:ea typeface="微软雅黑"/>
+              </a:rPr>
+              <a:t>不变量 I 的完整证明要点</a:t>
+            </a:r>
+          </a:p>
+        </p:txBody>
+      </p:sp>
+      <p:sp>
+        <p:nvSpPr>
+          <p:cNvPr id="9010" name="Rounded Rectangle 9009"/>
           <p:cNvSpPr/>
           <p:nvPr/>
         </p:nvSpPr>
         <p:spPr>
           <a:xfrm>
-            <a:off x="4486656" y="2011679"/>
-            <a:ext cx="274320" cy="274320"/>
-          </a:xfrm>
-          <a:prstGeom prst="ellipse">
+            <a:off x="8113775" y="1874519"/>
+            <a:ext cx="3517391" cy="1051560"/>
+          </a:xfrm>
+          <a:prstGeom prst="roundRect">
             <a:avLst/>
           </a:prstGeom>
           <a:solidFill>
-            <a:srgbClr val="113E6A"/>
+            <a:srgbClr val="FFFFFF"/>
           </a:solidFill>
-          <a:ln>
-            <a:noFill/>
+          <a:ln w="9525">
+            <a:solidFill>
+              <a:srgbClr val="D6E3F0"/>
+            </a:solidFill>
           </a:ln>
           <a:effectLst/>
         </p:spPr>
@@ -21835,100 +21267,32 @@
           </a:fontRef>
         </p:style>
         <p:txBody>
-          <a:bodyPr rtlCol="0" anchor="ctr" lIns="0" rIns="0" tIns="0" bIns="0"/>
+          <a:bodyPr rtlCol="0" anchor="ctr"/>
           <a:lstStyle/>
           <a:p>
             <a:pPr algn="ctr"/>
-            <a:r>
-              <a:rPr sz="900" b="1">
-                <a:solidFill>
-                  <a:srgbClr val="FFFFFF"/>
-                </a:solidFill>
-                <a:latin typeface="Arial"/>
-                <a:ea typeface="微软雅黑"/>
-              </a:rPr>
-              <a:t>02</a:t>
-            </a:r>
-          </a:p>
-        </p:txBody>
-      </p:sp>
-      <p:sp>
-        <p:nvSpPr>
-          <p:cNvPr id="9010" name="TextBox 9009"/>
-          <p:cNvSpPr txBox="1"/>
-          <p:nvPr/>
-        </p:nvSpPr>
-        <p:spPr>
-          <a:xfrm>
-            <a:off x="4852416" y="2011679"/>
-            <a:ext cx="2877312" cy="850392"/>
-          </a:xfrm>
-          <a:prstGeom prst="rect">
-            <a:avLst/>
-          </a:prstGeom>
-          <a:noFill/>
-        </p:spPr>
-        <p:txBody>
-          <a:bodyPr wrap="square" anchor="t" lIns="0" rIns="0" tIns="0" bIns="0">
-            <a:spAutoFit/>
-          </a:bodyPr>
-          <a:lstStyle/>
-          <a:p>
-            <a:pPr algn="l"/>
-            <a:r>
-              <a:rPr sz="1350" b="1">
-                <a:solidFill>
-                  <a:srgbClr val="113E6A"/>
-                </a:solidFill>
-                <a:latin typeface="Arial"/>
-                <a:ea typeface="微软雅黑"/>
-              </a:rPr>
-              <a:t>创新 2 · 四层容错</a:t>
-            </a:r>
-          </a:p>
-          <a:p>
-            <a:pPr algn="l">
-              <a:lnSpc>
-                <a:spcPct val="110000"/>
-              </a:lnSpc>
-              <a:spcBef>
-                <a:spcPts val="400"/>
-              </a:spcBef>
-            </a:pPr>
-            <a:r>
-              <a:rPr sz="1100" b="0">
-                <a:solidFill>
-                  <a:srgbClr val="2E2C2C"/>
-                </a:solidFill>
-                <a:latin typeface="Arial"/>
-                <a:ea typeface="微软雅黑"/>
-              </a:rPr>
-              <a:t>不变量 I 的完整证明要点</a:t>
-            </a:r>
-          </a:p>
-        </p:txBody>
-      </p:sp>
-      <p:sp>
-        <p:nvSpPr>
-          <p:cNvPr id="9011" name="Rounded Rectangle 9010"/>
+          </a:p>
+        </p:txBody>
+      </p:sp>
+      <p:sp>
+        <p:nvSpPr>
+          <p:cNvPr id="9011" name="Oval 9010"/>
           <p:cNvSpPr/>
           <p:nvPr/>
         </p:nvSpPr>
         <p:spPr>
           <a:xfrm>
-            <a:off x="8113775" y="1874519"/>
-            <a:ext cx="3517391" cy="1051560"/>
-          </a:xfrm>
-          <a:prstGeom prst="roundRect">
+            <a:off x="8260079" y="2011679"/>
+            <a:ext cx="274320" cy="274320"/>
+          </a:xfrm>
+          <a:prstGeom prst="ellipse">
             <a:avLst/>
           </a:prstGeom>
           <a:solidFill>
-            <a:srgbClr val="FFFFFF"/>
+            <a:srgbClr val="113E6A"/>
           </a:solidFill>
-          <a:ln w="9525">
-            <a:solidFill>
-              <a:srgbClr val="D6E3F0"/>
-            </a:solidFill>
+          <a:ln>
+            <a:noFill/>
           </a:ln>
           <a:effectLst/>
         </p:spPr>
@@ -21947,32 +21311,100 @@
           </a:fontRef>
         </p:style>
         <p:txBody>
-          <a:bodyPr rtlCol="0" anchor="ctr"/>
+          <a:bodyPr rtlCol="0" anchor="ctr" lIns="0" rIns="0" tIns="0" bIns="0"/>
           <a:lstStyle/>
           <a:p>
             <a:pPr algn="ctr"/>
-          </a:p>
-        </p:txBody>
-      </p:sp>
-      <p:sp>
-        <p:nvSpPr>
-          <p:cNvPr id="9012" name="Oval 9011"/>
+            <a:r>
+              <a:rPr sz="900" b="1">
+                <a:solidFill>
+                  <a:srgbClr val="FFFFFF"/>
+                </a:solidFill>
+                <a:latin typeface="Arial"/>
+                <a:ea typeface="微软雅黑"/>
+              </a:rPr>
+              <a:t>03</a:t>
+            </a:r>
+          </a:p>
+        </p:txBody>
+      </p:sp>
+      <p:sp>
+        <p:nvSpPr>
+          <p:cNvPr id="9012" name="TextBox 9011"/>
+          <p:cNvSpPr txBox="1"/>
+          <p:nvPr/>
+        </p:nvSpPr>
+        <p:spPr>
+          <a:xfrm>
+            <a:off x="8625839" y="2011679"/>
+            <a:ext cx="2877312" cy="850392"/>
+          </a:xfrm>
+          <a:prstGeom prst="rect">
+            <a:avLst/>
+          </a:prstGeom>
+          <a:noFill/>
+        </p:spPr>
+        <p:txBody>
+          <a:bodyPr wrap="square" anchor="t" lIns="0" rIns="0" tIns="0" bIns="0">
+            <a:spAutoFit/>
+          </a:bodyPr>
+          <a:lstStyle/>
+          <a:p>
+            <a:pPr algn="l"/>
+            <a:r>
+              <a:rPr sz="1350" b="1">
+                <a:solidFill>
+                  <a:srgbClr val="113E6A"/>
+                </a:solidFill>
+                <a:latin typeface="Arial"/>
+                <a:ea typeface="微软雅黑"/>
+              </a:rPr>
+              <a:t>证据 1 · 规模</a:t>
+            </a:r>
+          </a:p>
+          <a:p>
+            <a:pPr algn="l">
+              <a:lnSpc>
+                <a:spcPct val="110000"/>
+              </a:lnSpc>
+              <a:spcBef>
+                <a:spcPts val="400"/>
+              </a:spcBef>
+            </a:pPr>
+            <a:r>
+              <a:rPr sz="1100" b="0">
+                <a:solidFill>
+                  <a:srgbClr val="2E2C2C"/>
+                </a:solidFill>
+                <a:latin typeface="Arial"/>
+                <a:ea typeface="微软雅黑"/>
+              </a:rPr>
+              <a:t>16 场景 / 144 run / 100% 成功率</a:t>
+            </a:r>
+          </a:p>
+        </p:txBody>
+      </p:sp>
+      <p:sp>
+        <p:nvSpPr>
+          <p:cNvPr id="9013" name="Rounded Rectangle 9012"/>
           <p:cNvSpPr/>
           <p:nvPr/>
         </p:nvSpPr>
         <p:spPr>
           <a:xfrm>
-            <a:off x="8260079" y="2011679"/>
-            <a:ext cx="274320" cy="274320"/>
-          </a:xfrm>
-          <a:prstGeom prst="ellipse">
+            <a:off x="566928" y="3182111"/>
+            <a:ext cx="3517391" cy="1051560"/>
+          </a:xfrm>
+          <a:prstGeom prst="roundRect">
             <a:avLst/>
           </a:prstGeom>
           <a:solidFill>
-            <a:srgbClr val="113E6A"/>
+            <a:srgbClr val="FFFFFF"/>
           </a:solidFill>
-          <a:ln>
-            <a:noFill/>
+          <a:ln w="9525">
+            <a:solidFill>
+              <a:srgbClr val="D6E3F0"/>
+            </a:solidFill>
           </a:ln>
           <a:effectLst/>
         </p:spPr>
@@ -21991,100 +21423,32 @@
           </a:fontRef>
         </p:style>
         <p:txBody>
-          <a:bodyPr rtlCol="0" anchor="ctr" lIns="0" rIns="0" tIns="0" bIns="0"/>
+          <a:bodyPr rtlCol="0" anchor="ctr"/>
           <a:lstStyle/>
           <a:p>
             <a:pPr algn="ctr"/>
-            <a:r>
-              <a:rPr sz="900" b="1">
-                <a:solidFill>
-                  <a:srgbClr val="FFFFFF"/>
-                </a:solidFill>
-                <a:latin typeface="Arial"/>
-                <a:ea typeface="微软雅黑"/>
-              </a:rPr>
-              <a:t>03</a:t>
-            </a:r>
-          </a:p>
-        </p:txBody>
-      </p:sp>
-      <p:sp>
-        <p:nvSpPr>
-          <p:cNvPr id="9013" name="TextBox 9012"/>
-          <p:cNvSpPr txBox="1"/>
-          <p:nvPr/>
-        </p:nvSpPr>
-        <p:spPr>
-          <a:xfrm>
-            <a:off x="8625839" y="2011679"/>
-            <a:ext cx="2877312" cy="850392"/>
-          </a:xfrm>
-          <a:prstGeom prst="rect">
-            <a:avLst/>
-          </a:prstGeom>
-          <a:noFill/>
-        </p:spPr>
-        <p:txBody>
-          <a:bodyPr wrap="square" anchor="t" lIns="0" rIns="0" tIns="0" bIns="0">
-            <a:spAutoFit/>
-          </a:bodyPr>
-          <a:lstStyle/>
-          <a:p>
-            <a:pPr algn="l"/>
-            <a:r>
-              <a:rPr sz="1350" b="1">
-                <a:solidFill>
-                  <a:srgbClr val="113E6A"/>
-                </a:solidFill>
-                <a:latin typeface="Arial"/>
-                <a:ea typeface="微软雅黑"/>
-              </a:rPr>
-              <a:t>证据 1 · 规模</a:t>
-            </a:r>
-          </a:p>
-          <a:p>
-            <a:pPr algn="l">
-              <a:lnSpc>
-                <a:spcPct val="110000"/>
-              </a:lnSpc>
-              <a:spcBef>
-                <a:spcPts val="400"/>
-              </a:spcBef>
-            </a:pPr>
-            <a:r>
-              <a:rPr sz="1100" b="0">
-                <a:solidFill>
-                  <a:srgbClr val="2E2C2C"/>
-                </a:solidFill>
-                <a:latin typeface="Arial"/>
-                <a:ea typeface="微软雅黑"/>
-              </a:rPr>
-              <a:t>16 场景 / 144 run / 100% 成功率</a:t>
-            </a:r>
-          </a:p>
-        </p:txBody>
-      </p:sp>
-      <p:sp>
-        <p:nvSpPr>
-          <p:cNvPr id="9014" name="Rounded Rectangle 9013"/>
+          </a:p>
+        </p:txBody>
+      </p:sp>
+      <p:sp>
+        <p:nvSpPr>
+          <p:cNvPr id="9014" name="Oval 9013"/>
           <p:cNvSpPr/>
           <p:nvPr/>
         </p:nvSpPr>
         <p:spPr>
           <a:xfrm>
-            <a:off x="566928" y="3182111"/>
-            <a:ext cx="3517391" cy="1051560"/>
-          </a:xfrm>
-          <a:prstGeom prst="roundRect">
+            <a:off x="713232" y="3319271"/>
+            <a:ext cx="274320" cy="274320"/>
+          </a:xfrm>
+          <a:prstGeom prst="ellipse">
             <a:avLst/>
           </a:prstGeom>
           <a:solidFill>
-            <a:srgbClr val="FFFFFF"/>
+            <a:srgbClr val="113E6A"/>
           </a:solidFill>
-          <a:ln w="9525">
-            <a:solidFill>
-              <a:srgbClr val="D6E3F0"/>
-            </a:solidFill>
+          <a:ln>
+            <a:noFill/>
           </a:ln>
           <a:effectLst/>
         </p:spPr>
@@ -22103,32 +21467,100 @@
           </a:fontRef>
         </p:style>
         <p:txBody>
-          <a:bodyPr rtlCol="0" anchor="ctr"/>
+          <a:bodyPr rtlCol="0" anchor="ctr" lIns="0" rIns="0" tIns="0" bIns="0"/>
           <a:lstStyle/>
           <a:p>
             <a:pPr algn="ctr"/>
-          </a:p>
-        </p:txBody>
-      </p:sp>
-      <p:sp>
-        <p:nvSpPr>
-          <p:cNvPr id="9015" name="Oval 9014"/>
+            <a:r>
+              <a:rPr sz="900" b="1">
+                <a:solidFill>
+                  <a:srgbClr val="FFFFFF"/>
+                </a:solidFill>
+                <a:latin typeface="Arial"/>
+                <a:ea typeface="微软雅黑"/>
+              </a:rPr>
+              <a:t>04</a:t>
+            </a:r>
+          </a:p>
+        </p:txBody>
+      </p:sp>
+      <p:sp>
+        <p:nvSpPr>
+          <p:cNvPr id="9015" name="TextBox 9014"/>
+          <p:cNvSpPr txBox="1"/>
+          <p:nvPr/>
+        </p:nvSpPr>
+        <p:spPr>
+          <a:xfrm>
+            <a:off x="1078992" y="3319271"/>
+            <a:ext cx="2877312" cy="850392"/>
+          </a:xfrm>
+          <a:prstGeom prst="rect">
+            <a:avLst/>
+          </a:prstGeom>
+          <a:noFill/>
+        </p:spPr>
+        <p:txBody>
+          <a:bodyPr wrap="square" anchor="t" lIns="0" rIns="0" tIns="0" bIns="0">
+            <a:spAutoFit/>
+          </a:bodyPr>
+          <a:lstStyle/>
+          <a:p>
+            <a:pPr algn="l"/>
+            <a:r>
+              <a:rPr sz="1350" b="1">
+                <a:solidFill>
+                  <a:srgbClr val="113E6A"/>
+                </a:solidFill>
+                <a:latin typeface="Arial"/>
+                <a:ea typeface="微软雅黑"/>
+              </a:rPr>
+              <a:t>证据 2 · 性能</a:t>
+            </a:r>
+          </a:p>
+          <a:p>
+            <a:pPr algn="l">
+              <a:lnSpc>
+                <a:spcPct val="110000"/>
+              </a:lnSpc>
+              <a:spcBef>
+                <a:spcPts val="400"/>
+              </a:spcBef>
+            </a:pPr>
+            <a:r>
+              <a:rPr sz="1100" b="0">
+                <a:solidFill>
+                  <a:srgbClr val="2E2C2C"/>
+                </a:solidFill>
+                <a:latin typeface="Arial"/>
+                <a:ea typeface="微软雅黑"/>
+              </a:rPr>
+              <a:t>平均 +11.9%；P99 最高 -82.9%</a:t>
+            </a:r>
+          </a:p>
+        </p:txBody>
+      </p:sp>
+      <p:sp>
+        <p:nvSpPr>
+          <p:cNvPr id="9016" name="Rounded Rectangle 9015"/>
           <p:cNvSpPr/>
           <p:nvPr/>
         </p:nvSpPr>
         <p:spPr>
           <a:xfrm>
-            <a:off x="713232" y="3319271"/>
-            <a:ext cx="274320" cy="274320"/>
-          </a:xfrm>
-          <a:prstGeom prst="ellipse">
+            <a:off x="4340351" y="3182111"/>
+            <a:ext cx="3517391" cy="1051560"/>
+          </a:xfrm>
+          <a:prstGeom prst="roundRect">
             <a:avLst/>
           </a:prstGeom>
           <a:solidFill>
-            <a:srgbClr val="113E6A"/>
+            <a:srgbClr val="FFFFFF"/>
           </a:solidFill>
-          <a:ln>
-            <a:noFill/>
+          <a:ln w="9525">
+            <a:solidFill>
+              <a:srgbClr val="D6E3F0"/>
+            </a:solidFill>
           </a:ln>
           <a:effectLst/>
         </p:spPr>
@@ -22147,100 +21579,32 @@
           </a:fontRef>
         </p:style>
         <p:txBody>
-          <a:bodyPr rtlCol="0" anchor="ctr" lIns="0" rIns="0" tIns="0" bIns="0"/>
+          <a:bodyPr rtlCol="0" anchor="ctr"/>
           <a:lstStyle/>
           <a:p>
             <a:pPr algn="ctr"/>
-            <a:r>
-              <a:rPr sz="900" b="1">
-                <a:solidFill>
-                  <a:srgbClr val="FFFFFF"/>
-                </a:solidFill>
-                <a:latin typeface="Arial"/>
-                <a:ea typeface="微软雅黑"/>
-              </a:rPr>
-              <a:t>04</a:t>
-            </a:r>
-          </a:p>
-        </p:txBody>
-      </p:sp>
-      <p:sp>
-        <p:nvSpPr>
-          <p:cNvPr id="9016" name="TextBox 9015"/>
-          <p:cNvSpPr txBox="1"/>
-          <p:nvPr/>
-        </p:nvSpPr>
-        <p:spPr>
-          <a:xfrm>
-            <a:off x="1078992" y="3319271"/>
-            <a:ext cx="2877312" cy="850392"/>
-          </a:xfrm>
-          <a:prstGeom prst="rect">
-            <a:avLst/>
-          </a:prstGeom>
-          <a:noFill/>
-        </p:spPr>
-        <p:txBody>
-          <a:bodyPr wrap="square" anchor="t" lIns="0" rIns="0" tIns="0" bIns="0">
-            <a:spAutoFit/>
-          </a:bodyPr>
-          <a:lstStyle/>
-          <a:p>
-            <a:pPr algn="l"/>
-            <a:r>
-              <a:rPr sz="1350" b="1">
-                <a:solidFill>
-                  <a:srgbClr val="113E6A"/>
-                </a:solidFill>
-                <a:latin typeface="Arial"/>
-                <a:ea typeface="微软雅黑"/>
-              </a:rPr>
-              <a:t>证据 2 · 性能</a:t>
-            </a:r>
-          </a:p>
-          <a:p>
-            <a:pPr algn="l">
-              <a:lnSpc>
-                <a:spcPct val="110000"/>
-              </a:lnSpc>
-              <a:spcBef>
-                <a:spcPts val="400"/>
-              </a:spcBef>
-            </a:pPr>
-            <a:r>
-              <a:rPr sz="1100" b="0">
-                <a:solidFill>
-                  <a:srgbClr val="2E2C2C"/>
-                </a:solidFill>
-                <a:latin typeface="Arial"/>
-                <a:ea typeface="微软雅黑"/>
-              </a:rPr>
-              <a:t>平均 +11.9%；P99 最高 -82.9%</a:t>
-            </a:r>
-          </a:p>
-        </p:txBody>
-      </p:sp>
-      <p:sp>
-        <p:nvSpPr>
-          <p:cNvPr id="9017" name="Rounded Rectangle 9016"/>
+          </a:p>
+        </p:txBody>
+      </p:sp>
+      <p:sp>
+        <p:nvSpPr>
+          <p:cNvPr id="9017" name="Oval 9016"/>
           <p:cNvSpPr/>
           <p:nvPr/>
         </p:nvSpPr>
         <p:spPr>
           <a:xfrm>
-            <a:off x="4340351" y="3182111"/>
-            <a:ext cx="3517391" cy="1051560"/>
-          </a:xfrm>
-          <a:prstGeom prst="roundRect">
+            <a:off x="4486656" y="3319271"/>
+            <a:ext cx="274320" cy="274320"/>
+          </a:xfrm>
+          <a:prstGeom prst="ellipse">
             <a:avLst/>
           </a:prstGeom>
           <a:solidFill>
-            <a:srgbClr val="FFFFFF"/>
+            <a:srgbClr val="113E6A"/>
           </a:solidFill>
-          <a:ln w="9525">
-            <a:solidFill>
-              <a:srgbClr val="D6E3F0"/>
-            </a:solidFill>
+          <a:ln>
+            <a:noFill/>
           </a:ln>
           <a:effectLst/>
         </p:spPr>
@@ -22259,32 +21623,100 @@
           </a:fontRef>
         </p:style>
         <p:txBody>
-          <a:bodyPr rtlCol="0" anchor="ctr"/>
+          <a:bodyPr rtlCol="0" anchor="ctr" lIns="0" rIns="0" tIns="0" bIns="0"/>
           <a:lstStyle/>
           <a:p>
             <a:pPr algn="ctr"/>
-          </a:p>
-        </p:txBody>
-      </p:sp>
-      <p:sp>
-        <p:nvSpPr>
-          <p:cNvPr id="9018" name="Oval 9017"/>
+            <a:r>
+              <a:rPr sz="900" b="1">
+                <a:solidFill>
+                  <a:srgbClr val="FFFFFF"/>
+                </a:solidFill>
+                <a:latin typeface="Arial"/>
+                <a:ea typeface="微软雅黑"/>
+              </a:rPr>
+              <a:t>05</a:t>
+            </a:r>
+          </a:p>
+        </p:txBody>
+      </p:sp>
+      <p:sp>
+        <p:nvSpPr>
+          <p:cNvPr id="9018" name="TextBox 9017"/>
+          <p:cNvSpPr txBox="1"/>
+          <p:nvPr/>
+        </p:nvSpPr>
+        <p:spPr>
+          <a:xfrm>
+            <a:off x="4852416" y="3319271"/>
+            <a:ext cx="2877312" cy="850392"/>
+          </a:xfrm>
+          <a:prstGeom prst="rect">
+            <a:avLst/>
+          </a:prstGeom>
+          <a:noFill/>
+        </p:spPr>
+        <p:txBody>
+          <a:bodyPr wrap="square" anchor="t" lIns="0" rIns="0" tIns="0" bIns="0">
+            <a:spAutoFit/>
+          </a:bodyPr>
+          <a:lstStyle/>
+          <a:p>
+            <a:pPr algn="l"/>
+            <a:r>
+              <a:rPr sz="1350" b="1">
+                <a:solidFill>
+                  <a:srgbClr val="113E6A"/>
+                </a:solidFill>
+                <a:latin typeface="Arial"/>
+                <a:ea typeface="微软雅黑"/>
+              </a:rPr>
+              <a:t>证据 3 · 扩展</a:t>
+            </a:r>
+          </a:p>
+          <a:p>
+            <a:pPr algn="l">
+              <a:lnSpc>
+                <a:spcPct val="110000"/>
+              </a:lnSpc>
+              <a:spcBef>
+                <a:spcPts val="400"/>
+              </a:spcBef>
+            </a:pPr>
+            <a:r>
+              <a:rPr sz="1100" b="0">
+                <a:solidFill>
+                  <a:srgbClr val="2E2C2C"/>
+                </a:solidFill>
+                <a:latin typeface="Arial"/>
+                <a:ea typeface="微软雅黑"/>
+              </a:rPr>
+              <a:t>实例 1→3：+17.5% 对 +1.4%</a:t>
+            </a:r>
+          </a:p>
+        </p:txBody>
+      </p:sp>
+      <p:sp>
+        <p:nvSpPr>
+          <p:cNvPr id="9019" name="Rounded Rectangle 9018"/>
           <p:cNvSpPr/>
           <p:nvPr/>
         </p:nvSpPr>
         <p:spPr>
           <a:xfrm>
-            <a:off x="4486656" y="3319271"/>
-            <a:ext cx="274320" cy="274320"/>
-          </a:xfrm>
-          <a:prstGeom prst="ellipse">
+            <a:off x="8113775" y="3182111"/>
+            <a:ext cx="3517391" cy="1051560"/>
+          </a:xfrm>
+          <a:prstGeom prst="roundRect">
             <a:avLst/>
           </a:prstGeom>
           <a:solidFill>
-            <a:srgbClr val="113E6A"/>
+            <a:srgbClr val="FFFFFF"/>
           </a:solidFill>
-          <a:ln>
-            <a:noFill/>
+          <a:ln w="9525">
+            <a:solidFill>
+              <a:srgbClr val="D6E3F0"/>
+            </a:solidFill>
           </a:ln>
           <a:effectLst/>
         </p:spPr>
@@ -22303,100 +21735,32 @@
           </a:fontRef>
         </p:style>
         <p:txBody>
-          <a:bodyPr rtlCol="0" anchor="ctr" lIns="0" rIns="0" tIns="0" bIns="0"/>
+          <a:bodyPr rtlCol="0" anchor="ctr"/>
           <a:lstStyle/>
           <a:p>
             <a:pPr algn="ctr"/>
-            <a:r>
-              <a:rPr sz="900" b="1">
-                <a:solidFill>
-                  <a:srgbClr val="FFFFFF"/>
-                </a:solidFill>
-                <a:latin typeface="Arial"/>
-                <a:ea typeface="微软雅黑"/>
-              </a:rPr>
-              <a:t>05</a:t>
-            </a:r>
-          </a:p>
-        </p:txBody>
-      </p:sp>
-      <p:sp>
-        <p:nvSpPr>
-          <p:cNvPr id="9019" name="TextBox 9018"/>
-          <p:cNvSpPr txBox="1"/>
-          <p:nvPr/>
-        </p:nvSpPr>
-        <p:spPr>
-          <a:xfrm>
-            <a:off x="4852416" y="3319271"/>
-            <a:ext cx="2877312" cy="850392"/>
-          </a:xfrm>
-          <a:prstGeom prst="rect">
-            <a:avLst/>
-          </a:prstGeom>
-          <a:noFill/>
-        </p:spPr>
-        <p:txBody>
-          <a:bodyPr wrap="square" anchor="t" lIns="0" rIns="0" tIns="0" bIns="0">
-            <a:spAutoFit/>
-          </a:bodyPr>
-          <a:lstStyle/>
-          <a:p>
-            <a:pPr algn="l"/>
-            <a:r>
-              <a:rPr sz="1350" b="1">
-                <a:solidFill>
-                  <a:srgbClr val="113E6A"/>
-                </a:solidFill>
-                <a:latin typeface="Arial"/>
-                <a:ea typeface="微软雅黑"/>
-              </a:rPr>
-              <a:t>证据 3 · 扩展</a:t>
-            </a:r>
-          </a:p>
-          <a:p>
-            <a:pPr algn="l">
-              <a:lnSpc>
-                <a:spcPct val="110000"/>
-              </a:lnSpc>
-              <a:spcBef>
-                <a:spcPts val="400"/>
-              </a:spcBef>
-            </a:pPr>
-            <a:r>
-              <a:rPr sz="1100" b="0">
-                <a:solidFill>
-                  <a:srgbClr val="2E2C2C"/>
-                </a:solidFill>
-                <a:latin typeface="Arial"/>
-                <a:ea typeface="微软雅黑"/>
-              </a:rPr>
-              <a:t>实例 1→3：+17.5% 对 +1.4%</a:t>
-            </a:r>
-          </a:p>
-        </p:txBody>
-      </p:sp>
-      <p:sp>
-        <p:nvSpPr>
-          <p:cNvPr id="9020" name="Rounded Rectangle 9019"/>
+          </a:p>
+        </p:txBody>
+      </p:sp>
+      <p:sp>
+        <p:nvSpPr>
+          <p:cNvPr id="9020" name="Oval 9019"/>
           <p:cNvSpPr/>
           <p:nvPr/>
         </p:nvSpPr>
         <p:spPr>
           <a:xfrm>
-            <a:off x="8113775" y="3182111"/>
-            <a:ext cx="3517391" cy="1051560"/>
-          </a:xfrm>
-          <a:prstGeom prst="roundRect">
+            <a:off x="8260079" y="3319271"/>
+            <a:ext cx="274320" cy="274320"/>
+          </a:xfrm>
+          <a:prstGeom prst="ellipse">
             <a:avLst/>
           </a:prstGeom>
           <a:solidFill>
-            <a:srgbClr val="FFFFFF"/>
+            <a:srgbClr val="113E6A"/>
           </a:solidFill>
-          <a:ln w="9525">
-            <a:solidFill>
-              <a:srgbClr val="D6E3F0"/>
-            </a:solidFill>
+          <a:ln>
+            <a:noFill/>
           </a:ln>
           <a:effectLst/>
         </p:spPr>
@@ -22415,50 +21779,6 @@
           </a:fontRef>
         </p:style>
         <p:txBody>
-          <a:bodyPr rtlCol="0" anchor="ctr"/>
-          <a:lstStyle/>
-          <a:p>
-            <a:pPr algn="ctr"/>
-          </a:p>
-        </p:txBody>
-      </p:sp>
-      <p:sp>
-        <p:nvSpPr>
-          <p:cNvPr id="9021" name="Oval 9020"/>
-          <p:cNvSpPr/>
-          <p:nvPr/>
-        </p:nvSpPr>
-        <p:spPr>
-          <a:xfrm>
-            <a:off x="8260079" y="3319271"/>
-            <a:ext cx="274320" cy="274320"/>
-          </a:xfrm>
-          <a:prstGeom prst="ellipse">
-            <a:avLst/>
-          </a:prstGeom>
-          <a:solidFill>
-            <a:srgbClr val="113E6A"/>
-          </a:solidFill>
-          <a:ln>
-            <a:noFill/>
-          </a:ln>
-          <a:effectLst/>
-        </p:spPr>
-        <p:style>
-          <a:lnRef idx="1">
-            <a:schemeClr val="accent1"/>
-          </a:lnRef>
-          <a:fillRef idx="3">
-            <a:schemeClr val="accent1"/>
-          </a:fillRef>
-          <a:effectRef idx="2">
-            <a:schemeClr val="accent1"/>
-          </a:effectRef>
-          <a:fontRef idx="minor">
-            <a:schemeClr val="lt1"/>
-          </a:fontRef>
-        </p:style>
-        <p:txBody>
           <a:bodyPr rtlCol="0" anchor="ctr" lIns="0" rIns="0" tIns="0" bIns="0"/>
           <a:lstStyle/>
           <a:p>
@@ -22478,7 +21798,7 @@
       </p:sp>
       <p:sp>
         <p:nvSpPr>
-          <p:cNvPr id="9022" name="TextBox 9021"/>
+          <p:cNvPr id="9021" name="TextBox 9020"/>
           <p:cNvSpPr txBox="1"/>
           <p:nvPr/>
         </p:nvSpPr>
@@ -22534,7 +21854,7 @@
       </p:sp>
       <p:sp>
         <p:nvSpPr>
-          <p:cNvPr id="9023" name="TextBox 9022"/>
+          <p:cNvPr id="9022" name="TextBox 9021"/>
           <p:cNvSpPr txBox="1"/>
           <p:nvPr/>
         </p:nvSpPr>
@@ -22945,8 +22265,8 @@
         </p:nvSpPr>
         <p:spPr>
           <a:xfrm>
-            <a:off x="427038" y="220663"/>
-            <a:ext cx="474662" cy="560387"/>
+            <a:off x="182880" y="274320"/>
+            <a:ext cx="310896" cy="402336"/>
           </a:xfrm>
           <a:custGeom>
             <a:avLst/>
@@ -23166,8 +22486,8 @@
         </p:nvSpPr>
         <p:spPr>
           <a:xfrm>
-            <a:off x="1014984" y="155448"/>
-            <a:ext cx="8001000" cy="621792"/>
+            <a:off x="566928" y="155448"/>
+            <a:ext cx="8549640" cy="621792"/>
           </a:xfrm>
           <a:prstGeom prst="rect">
             <a:avLst/>
@@ -23200,58 +22520,14 @@
       </p:sp>
       <p:sp>
         <p:nvSpPr>
-          <p:cNvPr id="9003" name="Rectangle 9002"/>
-          <p:cNvSpPr/>
-          <p:nvPr/>
-        </p:nvSpPr>
-        <p:spPr>
-          <a:xfrm>
-            <a:off x="1014984" y="1298448"/>
-            <a:ext cx="27432" cy="310896"/>
-          </a:xfrm>
-          <a:prstGeom prst="rect">
-            <a:avLst/>
-          </a:prstGeom>
-          <a:solidFill>
-            <a:srgbClr val="0070C0"/>
-          </a:solidFill>
-          <a:ln>
-            <a:noFill/>
-          </a:ln>
-          <a:effectLst/>
-        </p:spPr>
-        <p:style>
-          <a:lnRef idx="1">
-            <a:schemeClr val="accent1"/>
-          </a:lnRef>
-          <a:fillRef idx="3">
-            <a:schemeClr val="accent1"/>
-          </a:fillRef>
-          <a:effectRef idx="2">
-            <a:schemeClr val="accent1"/>
-          </a:effectRef>
-          <a:fontRef idx="minor">
-            <a:schemeClr val="lt1"/>
-          </a:fontRef>
-        </p:style>
-        <p:txBody>
-          <a:bodyPr rtlCol="0" anchor="ctr"/>
-          <a:lstStyle/>
-          <a:p>
-            <a:pPr algn="ctr"/>
-          </a:p>
-        </p:txBody>
-      </p:sp>
-      <p:sp>
-        <p:nvSpPr>
-          <p:cNvPr id="9004" name="TextBox 9003"/>
+          <p:cNvPr id="9003" name="TextBox 9002"/>
           <p:cNvSpPr txBox="1"/>
           <p:nvPr/>
         </p:nvSpPr>
         <p:spPr>
           <a:xfrm>
-            <a:off x="1161288" y="1271016"/>
-            <a:ext cx="10241280" cy="384048"/>
+            <a:off x="566928" y="1261872"/>
+            <a:ext cx="10881360" cy="438912"/>
           </a:xfrm>
           <a:prstGeom prst="rect">
             <a:avLst/>
@@ -23264,9 +22540,13 @@
           </a:bodyPr>
           <a:lstStyle/>
           <a:p>
-            <a:pPr algn="l"/>
-            <a:r>
-              <a:rPr sz="1550" b="1">
+            <a:pPr algn="l">
+              <a:lnSpc>
+                <a:spcPct val="110000"/>
+              </a:lnSpc>
+            </a:pPr>
+            <a:r>
+              <a:rPr sz="1800" b="1">
                 <a:solidFill>
                   <a:srgbClr val="0070C0"/>
                 </a:solidFill>
@@ -23280,7 +22560,7 @@
       </p:sp>
       <p:graphicFrame>
         <p:nvGraphicFramePr>
-          <p:cNvPr id="9005" name="Table 9004"/>
+          <p:cNvPr id="9004" name="Table 9003"/>
           <p:cNvGraphicFramePr>
             <a:graphicFrameLocks noGrp="1"/>
           </p:cNvGraphicFramePr>
@@ -24163,7 +23443,7 @@
       </p:graphicFrame>
       <p:sp>
         <p:nvSpPr>
-          <p:cNvPr id="9006" name="TextBox 9005"/>
+          <p:cNvPr id="9005" name="TextBox 9004"/>
           <p:cNvSpPr txBox="1"/>
           <p:nvPr/>
         </p:nvSpPr>
@@ -24243,7 +23523,7 @@
       </p:sp>
       <p:sp>
         <p:nvSpPr>
-          <p:cNvPr id="9007" name="TextBox 9006"/>
+          <p:cNvPr id="9006" name="TextBox 9005"/>
           <p:cNvSpPr txBox="1"/>
           <p:nvPr/>
         </p:nvSpPr>
@@ -24311,8 +23591,8 @@
         </p:nvSpPr>
         <p:spPr>
           <a:xfrm>
-            <a:off x="427038" y="220663"/>
-            <a:ext cx="474662" cy="560387"/>
+            <a:off x="182880" y="274320"/>
+            <a:ext cx="310896" cy="402336"/>
           </a:xfrm>
           <a:custGeom>
             <a:avLst/>
@@ -24532,8 +23812,8 @@
         </p:nvSpPr>
         <p:spPr>
           <a:xfrm>
-            <a:off x="1014984" y="155448"/>
-            <a:ext cx="8001000" cy="621792"/>
+            <a:off x="566928" y="155448"/>
+            <a:ext cx="8549640" cy="621792"/>
           </a:xfrm>
           <a:prstGeom prst="rect">
             <a:avLst/>
@@ -24566,58 +23846,14 @@
       </p:sp>
       <p:sp>
         <p:nvSpPr>
-          <p:cNvPr id="9003" name="Rectangle 9002"/>
-          <p:cNvSpPr/>
-          <p:nvPr/>
-        </p:nvSpPr>
-        <p:spPr>
-          <a:xfrm>
-            <a:off x="1014984" y="1298448"/>
-            <a:ext cx="27432" cy="310896"/>
-          </a:xfrm>
-          <a:prstGeom prst="rect">
-            <a:avLst/>
-          </a:prstGeom>
-          <a:solidFill>
-            <a:srgbClr val="0070C0"/>
-          </a:solidFill>
-          <a:ln>
-            <a:noFill/>
-          </a:ln>
-          <a:effectLst/>
-        </p:spPr>
-        <p:style>
-          <a:lnRef idx="1">
-            <a:schemeClr val="accent1"/>
-          </a:lnRef>
-          <a:fillRef idx="3">
-            <a:schemeClr val="accent1"/>
-          </a:fillRef>
-          <a:effectRef idx="2">
-            <a:schemeClr val="accent1"/>
-          </a:effectRef>
-          <a:fontRef idx="minor">
-            <a:schemeClr val="lt1"/>
-          </a:fontRef>
-        </p:style>
-        <p:txBody>
-          <a:bodyPr rtlCol="0" anchor="ctr"/>
-          <a:lstStyle/>
-          <a:p>
-            <a:pPr algn="ctr"/>
-          </a:p>
-        </p:txBody>
-      </p:sp>
-      <p:sp>
-        <p:nvSpPr>
-          <p:cNvPr id="9004" name="TextBox 9003"/>
+          <p:cNvPr id="9003" name="TextBox 9002"/>
           <p:cNvSpPr txBox="1"/>
           <p:nvPr/>
         </p:nvSpPr>
         <p:spPr>
           <a:xfrm>
-            <a:off x="1161288" y="1271016"/>
-            <a:ext cx="10241280" cy="384048"/>
+            <a:off x="566928" y="1261872"/>
+            <a:ext cx="10881360" cy="438912"/>
           </a:xfrm>
           <a:prstGeom prst="rect">
             <a:avLst/>
@@ -24630,9 +23866,13 @@
           </a:bodyPr>
           <a:lstStyle/>
           <a:p>
-            <a:pPr algn="l"/>
-            <a:r>
-              <a:rPr sz="1550" b="1">
+            <a:pPr algn="l">
+              <a:lnSpc>
+                <a:spcPct val="110000"/>
+              </a:lnSpc>
+            </a:pPr>
+            <a:r>
+              <a:rPr sz="1800" b="1">
                 <a:solidFill>
                   <a:srgbClr val="0070C0"/>
                 </a:solidFill>
@@ -24646,7 +23886,7 @@
       </p:sp>
       <p:graphicFrame>
         <p:nvGraphicFramePr>
-          <p:cNvPr id="9005" name="Table 9004"/>
+          <p:cNvPr id="9004" name="Table 9003"/>
           <p:cNvGraphicFramePr>
             <a:graphicFrameLocks noGrp="1"/>
           </p:cNvGraphicFramePr>
@@ -25191,7 +24431,7 @@
       </p:graphicFrame>
       <p:sp>
         <p:nvSpPr>
-          <p:cNvPr id="9006" name="TextBox 9005"/>
+          <p:cNvPr id="9005" name="TextBox 9004"/>
           <p:cNvSpPr txBox="1"/>
           <p:nvPr/>
         </p:nvSpPr>
@@ -25271,7 +24511,7 @@
       </p:sp>
       <p:sp>
         <p:nvSpPr>
-          <p:cNvPr id="9007" name="TextBox 9006"/>
+          <p:cNvPr id="9006" name="TextBox 9005"/>
           <p:cNvSpPr txBox="1"/>
           <p:nvPr/>
         </p:nvSpPr>
@@ -25339,8 +24579,8 @@
         </p:nvSpPr>
         <p:spPr>
           <a:xfrm>
-            <a:off x="427038" y="220663"/>
-            <a:ext cx="474662" cy="560387"/>
+            <a:off x="182880" y="274320"/>
+            <a:ext cx="310896" cy="402336"/>
           </a:xfrm>
           <a:custGeom>
             <a:avLst/>
@@ -25560,8 +24800,8 @@
         </p:nvSpPr>
         <p:spPr>
           <a:xfrm>
-            <a:off x="1014984" y="155448"/>
-            <a:ext cx="8001000" cy="621792"/>
+            <a:off x="566928" y="155448"/>
+            <a:ext cx="8549640" cy="621792"/>
           </a:xfrm>
           <a:prstGeom prst="rect">
             <a:avLst/>
@@ -25594,58 +24834,14 @@
       </p:sp>
       <p:sp>
         <p:nvSpPr>
-          <p:cNvPr id="9003" name="Rectangle 9002"/>
-          <p:cNvSpPr/>
-          <p:nvPr/>
-        </p:nvSpPr>
-        <p:spPr>
-          <a:xfrm>
-            <a:off x="1014984" y="1298448"/>
-            <a:ext cx="27432" cy="310896"/>
-          </a:xfrm>
-          <a:prstGeom prst="rect">
-            <a:avLst/>
-          </a:prstGeom>
-          <a:solidFill>
-            <a:srgbClr val="0070C0"/>
-          </a:solidFill>
-          <a:ln>
-            <a:noFill/>
-          </a:ln>
-          <a:effectLst/>
-        </p:spPr>
-        <p:style>
-          <a:lnRef idx="1">
-            <a:schemeClr val="accent1"/>
-          </a:lnRef>
-          <a:fillRef idx="3">
-            <a:schemeClr val="accent1"/>
-          </a:fillRef>
-          <a:effectRef idx="2">
-            <a:schemeClr val="accent1"/>
-          </a:effectRef>
-          <a:fontRef idx="minor">
-            <a:schemeClr val="lt1"/>
-          </a:fontRef>
-        </p:style>
-        <p:txBody>
-          <a:bodyPr rtlCol="0" anchor="ctr"/>
-          <a:lstStyle/>
-          <a:p>
-            <a:pPr algn="ctr"/>
-          </a:p>
-        </p:txBody>
-      </p:sp>
-      <p:sp>
-        <p:nvSpPr>
-          <p:cNvPr id="9004" name="TextBox 9003"/>
+          <p:cNvPr id="9003" name="TextBox 9002"/>
           <p:cNvSpPr txBox="1"/>
           <p:nvPr/>
         </p:nvSpPr>
         <p:spPr>
           <a:xfrm>
-            <a:off x="1161288" y="1271016"/>
-            <a:ext cx="10241280" cy="384048"/>
+            <a:off x="566928" y="1261872"/>
+            <a:ext cx="10881360" cy="438912"/>
           </a:xfrm>
           <a:prstGeom prst="rect">
             <a:avLst/>
@@ -25658,9 +24854,13 @@
           </a:bodyPr>
           <a:lstStyle/>
           <a:p>
-            <a:pPr algn="l"/>
-            <a:r>
-              <a:rPr sz="1550" b="1">
+            <a:pPr algn="l">
+              <a:lnSpc>
+                <a:spcPct val="110000"/>
+              </a:lnSpc>
+            </a:pPr>
+            <a:r>
+              <a:rPr sz="1800" b="1">
                 <a:solidFill>
                   <a:srgbClr val="0070C0"/>
                 </a:solidFill>
@@ -25674,7 +24874,7 @@
       </p:sp>
       <p:sp>
         <p:nvSpPr>
-          <p:cNvPr id="9005" name="TextBox 9004"/>
+          <p:cNvPr id="9004" name="TextBox 9003"/>
           <p:cNvSpPr txBox="1"/>
           <p:nvPr/>
         </p:nvSpPr>
@@ -25754,7 +24954,7 @@
       </p:sp>
       <p:sp>
         <p:nvSpPr>
-          <p:cNvPr id="9006" name="TextBox 9005"/>
+          <p:cNvPr id="9005" name="TextBox 9004"/>
           <p:cNvSpPr txBox="1"/>
           <p:nvPr/>
         </p:nvSpPr>
@@ -25822,8 +25022,8 @@
         </p:nvSpPr>
         <p:spPr>
           <a:xfrm>
-            <a:off x="427038" y="220663"/>
-            <a:ext cx="474662" cy="560387"/>
+            <a:off x="182880" y="274320"/>
+            <a:ext cx="310896" cy="402336"/>
           </a:xfrm>
           <a:custGeom>
             <a:avLst/>
@@ -26043,8 +25243,8 @@
         </p:nvSpPr>
         <p:spPr>
           <a:xfrm>
-            <a:off x="1014984" y="155448"/>
-            <a:ext cx="8001000" cy="621792"/>
+            <a:off x="566928" y="155448"/>
+            <a:ext cx="8549640" cy="621792"/>
           </a:xfrm>
           <a:prstGeom prst="rect">
             <a:avLst/>
@@ -26077,58 +25277,14 @@
       </p:sp>
       <p:sp>
         <p:nvSpPr>
-          <p:cNvPr id="9003" name="Rectangle 9002"/>
-          <p:cNvSpPr/>
-          <p:nvPr/>
-        </p:nvSpPr>
-        <p:spPr>
-          <a:xfrm>
-            <a:off x="1014984" y="1298448"/>
-            <a:ext cx="27432" cy="310896"/>
-          </a:xfrm>
-          <a:prstGeom prst="rect">
-            <a:avLst/>
-          </a:prstGeom>
-          <a:solidFill>
-            <a:srgbClr val="0070C0"/>
-          </a:solidFill>
-          <a:ln>
-            <a:noFill/>
-          </a:ln>
-          <a:effectLst/>
-        </p:spPr>
-        <p:style>
-          <a:lnRef idx="1">
-            <a:schemeClr val="accent1"/>
-          </a:lnRef>
-          <a:fillRef idx="3">
-            <a:schemeClr val="accent1"/>
-          </a:fillRef>
-          <a:effectRef idx="2">
-            <a:schemeClr val="accent1"/>
-          </a:effectRef>
-          <a:fontRef idx="minor">
-            <a:schemeClr val="lt1"/>
-          </a:fontRef>
-        </p:style>
-        <p:txBody>
-          <a:bodyPr rtlCol="0" anchor="ctr"/>
-          <a:lstStyle/>
-          <a:p>
-            <a:pPr algn="ctr"/>
-          </a:p>
-        </p:txBody>
-      </p:sp>
-      <p:sp>
-        <p:nvSpPr>
-          <p:cNvPr id="9004" name="TextBox 9003"/>
+          <p:cNvPr id="9003" name="TextBox 9002"/>
           <p:cNvSpPr txBox="1"/>
           <p:nvPr/>
         </p:nvSpPr>
         <p:spPr>
           <a:xfrm>
-            <a:off x="1161288" y="1271016"/>
-            <a:ext cx="10241280" cy="384048"/>
+            <a:off x="566928" y="1261872"/>
+            <a:ext cx="10881360" cy="438912"/>
           </a:xfrm>
           <a:prstGeom prst="rect">
             <a:avLst/>
@@ -26141,9 +25297,13 @@
           </a:bodyPr>
           <a:lstStyle/>
           <a:p>
-            <a:pPr algn="l"/>
-            <a:r>
-              <a:rPr sz="1550" b="1">
+            <a:pPr algn="l">
+              <a:lnSpc>
+                <a:spcPct val="110000"/>
+              </a:lnSpc>
+            </a:pPr>
+            <a:r>
+              <a:rPr sz="1800" b="1">
                 <a:solidFill>
                   <a:srgbClr val="0070C0"/>
                 </a:solidFill>
@@ -26157,7 +25317,7 @@
       </p:sp>
       <p:graphicFrame>
         <p:nvGraphicFramePr>
-          <p:cNvPr id="9005" name="Table 9004"/>
+          <p:cNvPr id="9004" name="Table 9003"/>
           <p:cNvGraphicFramePr>
             <a:graphicFrameLocks noGrp="1"/>
           </p:cNvGraphicFramePr>
@@ -26969,7 +26129,7 @@
       </p:graphicFrame>
       <p:sp>
         <p:nvSpPr>
-          <p:cNvPr id="9006" name="TextBox 9005"/>
+          <p:cNvPr id="9005" name="TextBox 9004"/>
           <p:cNvSpPr txBox="1"/>
           <p:nvPr/>
         </p:nvSpPr>
@@ -27049,7 +26209,7 @@
       </p:sp>
       <p:sp>
         <p:nvSpPr>
-          <p:cNvPr id="9007" name="TextBox 9006"/>
+          <p:cNvPr id="9006" name="TextBox 9005"/>
           <p:cNvSpPr txBox="1"/>
           <p:nvPr/>
         </p:nvSpPr>
@@ -27117,8 +26277,8 @@
         </p:nvSpPr>
         <p:spPr>
           <a:xfrm>
-            <a:off x="427038" y="220663"/>
-            <a:ext cx="474662" cy="560387"/>
+            <a:off x="182880" y="274320"/>
+            <a:ext cx="310896" cy="402336"/>
           </a:xfrm>
           <a:custGeom>
             <a:avLst/>
@@ -27338,8 +26498,8 @@
         </p:nvSpPr>
         <p:spPr>
           <a:xfrm>
-            <a:off x="1014984" y="155448"/>
-            <a:ext cx="8001000" cy="621792"/>
+            <a:off x="566928" y="155448"/>
+            <a:ext cx="8549640" cy="621792"/>
           </a:xfrm>
           <a:prstGeom prst="rect">
             <a:avLst/>
@@ -27372,58 +26532,14 @@
       </p:sp>
       <p:sp>
         <p:nvSpPr>
-          <p:cNvPr id="9003" name="Rectangle 9002"/>
-          <p:cNvSpPr/>
-          <p:nvPr/>
-        </p:nvSpPr>
-        <p:spPr>
-          <a:xfrm>
-            <a:off x="1014984" y="1298448"/>
-            <a:ext cx="27432" cy="310896"/>
-          </a:xfrm>
-          <a:prstGeom prst="rect">
-            <a:avLst/>
-          </a:prstGeom>
-          <a:solidFill>
-            <a:srgbClr val="0070C0"/>
-          </a:solidFill>
-          <a:ln>
-            <a:noFill/>
-          </a:ln>
-          <a:effectLst/>
-        </p:spPr>
-        <p:style>
-          <a:lnRef idx="1">
-            <a:schemeClr val="accent1"/>
-          </a:lnRef>
-          <a:fillRef idx="3">
-            <a:schemeClr val="accent1"/>
-          </a:fillRef>
-          <a:effectRef idx="2">
-            <a:schemeClr val="accent1"/>
-          </a:effectRef>
-          <a:fontRef idx="minor">
-            <a:schemeClr val="lt1"/>
-          </a:fontRef>
-        </p:style>
-        <p:txBody>
-          <a:bodyPr rtlCol="0" anchor="ctr"/>
-          <a:lstStyle/>
-          <a:p>
-            <a:pPr algn="ctr"/>
-          </a:p>
-        </p:txBody>
-      </p:sp>
-      <p:sp>
-        <p:nvSpPr>
-          <p:cNvPr id="9004" name="TextBox 9003"/>
+          <p:cNvPr id="9003" name="TextBox 9002"/>
           <p:cNvSpPr txBox="1"/>
           <p:nvPr/>
         </p:nvSpPr>
         <p:spPr>
           <a:xfrm>
-            <a:off x="1161288" y="1271016"/>
-            <a:ext cx="10241280" cy="384048"/>
+            <a:off x="566928" y="1261872"/>
+            <a:ext cx="10881360" cy="438912"/>
           </a:xfrm>
           <a:prstGeom prst="rect">
             <a:avLst/>
@@ -27436,9 +26552,13 @@
           </a:bodyPr>
           <a:lstStyle/>
           <a:p>
-            <a:pPr algn="l"/>
-            <a:r>
-              <a:rPr sz="1550" b="1">
+            <a:pPr algn="l">
+              <a:lnSpc>
+                <a:spcPct val="110000"/>
+              </a:lnSpc>
+            </a:pPr>
+            <a:r>
+              <a:rPr sz="1800" b="1">
                 <a:solidFill>
                   <a:srgbClr val="0070C0"/>
                 </a:solidFill>
@@ -27452,7 +26572,7 @@
       </p:sp>
       <p:graphicFrame>
         <p:nvGraphicFramePr>
-          <p:cNvPr id="9005" name="Table 9004"/>
+          <p:cNvPr id="9004" name="Table 9003"/>
           <p:cNvGraphicFramePr>
             <a:graphicFrameLocks noGrp="1"/>
           </p:cNvGraphicFramePr>
@@ -27969,7 +27089,7 @@
       </p:graphicFrame>
       <p:sp>
         <p:nvSpPr>
-          <p:cNvPr id="9006" name="TextBox 9005"/>
+          <p:cNvPr id="9005" name="TextBox 9004"/>
           <p:cNvSpPr txBox="1"/>
           <p:nvPr/>
         </p:nvSpPr>
@@ -28049,7 +27169,7 @@
       </p:sp>
       <p:sp>
         <p:nvSpPr>
-          <p:cNvPr id="9007" name="TextBox 9006"/>
+          <p:cNvPr id="9006" name="TextBox 9005"/>
           <p:cNvSpPr txBox="1"/>
           <p:nvPr/>
         </p:nvSpPr>
@@ -28117,8 +27237,8 @@
         </p:nvSpPr>
         <p:spPr>
           <a:xfrm>
-            <a:off x="427038" y="220663"/>
-            <a:ext cx="474662" cy="560387"/>
+            <a:off x="182880" y="274320"/>
+            <a:ext cx="310896" cy="402336"/>
           </a:xfrm>
           <a:custGeom>
             <a:avLst/>
@@ -28338,8 +27458,8 @@
         </p:nvSpPr>
         <p:spPr>
           <a:xfrm>
-            <a:off x="1014984" y="155448"/>
-            <a:ext cx="8001000" cy="621792"/>
+            <a:off x="566928" y="155448"/>
+            <a:ext cx="8549640" cy="621792"/>
           </a:xfrm>
           <a:prstGeom prst="rect">
             <a:avLst/>
@@ -28372,58 +27492,14 @@
       </p:sp>
       <p:sp>
         <p:nvSpPr>
-          <p:cNvPr id="9003" name="Rectangle 9002"/>
-          <p:cNvSpPr/>
-          <p:nvPr/>
-        </p:nvSpPr>
-        <p:spPr>
-          <a:xfrm>
-            <a:off x="1014984" y="1298448"/>
-            <a:ext cx="27432" cy="310896"/>
-          </a:xfrm>
-          <a:prstGeom prst="rect">
-            <a:avLst/>
-          </a:prstGeom>
-          <a:solidFill>
-            <a:srgbClr val="0070C0"/>
-          </a:solidFill>
-          <a:ln>
-            <a:noFill/>
-          </a:ln>
-          <a:effectLst/>
-        </p:spPr>
-        <p:style>
-          <a:lnRef idx="1">
-            <a:schemeClr val="accent1"/>
-          </a:lnRef>
-          <a:fillRef idx="3">
-            <a:schemeClr val="accent1"/>
-          </a:fillRef>
-          <a:effectRef idx="2">
-            <a:schemeClr val="accent1"/>
-          </a:effectRef>
-          <a:fontRef idx="minor">
-            <a:schemeClr val="lt1"/>
-          </a:fontRef>
-        </p:style>
-        <p:txBody>
-          <a:bodyPr rtlCol="0" anchor="ctr"/>
-          <a:lstStyle/>
-          <a:p>
-            <a:pPr algn="ctr"/>
-          </a:p>
-        </p:txBody>
-      </p:sp>
-      <p:sp>
-        <p:nvSpPr>
-          <p:cNvPr id="9004" name="TextBox 9003"/>
+          <p:cNvPr id="9003" name="TextBox 9002"/>
           <p:cNvSpPr txBox="1"/>
           <p:nvPr/>
         </p:nvSpPr>
         <p:spPr>
           <a:xfrm>
-            <a:off x="1161288" y="1271016"/>
-            <a:ext cx="10241280" cy="384048"/>
+            <a:off x="566928" y="1261872"/>
+            <a:ext cx="10881360" cy="438912"/>
           </a:xfrm>
           <a:prstGeom prst="rect">
             <a:avLst/>
@@ -28436,9 +27512,13 @@
           </a:bodyPr>
           <a:lstStyle/>
           <a:p>
-            <a:pPr algn="l"/>
-            <a:r>
-              <a:rPr sz="1550" b="1">
+            <a:pPr algn="l">
+              <a:lnSpc>
+                <a:spcPct val="110000"/>
+              </a:lnSpc>
+            </a:pPr>
+            <a:r>
+              <a:rPr sz="1800" b="1">
                 <a:solidFill>
                   <a:srgbClr val="0070C0"/>
                 </a:solidFill>
@@ -28452,7 +27532,7 @@
       </p:sp>
       <p:sp>
         <p:nvSpPr>
-          <p:cNvPr id="9005" name="TextBox 9004"/>
+          <p:cNvPr id="9004" name="TextBox 9003"/>
           <p:cNvSpPr txBox="1"/>
           <p:nvPr/>
         </p:nvSpPr>
@@ -28532,7 +27612,7 @@
       </p:sp>
       <p:sp>
         <p:nvSpPr>
-          <p:cNvPr id="9006" name="TextBox 9005"/>
+          <p:cNvPr id="9005" name="TextBox 9004"/>
           <p:cNvSpPr txBox="1"/>
           <p:nvPr/>
         </p:nvSpPr>
@@ -28600,8 +27680,8 @@
         </p:nvSpPr>
         <p:spPr>
           <a:xfrm>
-            <a:off x="427038" y="220663"/>
-            <a:ext cx="474662" cy="560387"/>
+            <a:off x="182880" y="274320"/>
+            <a:ext cx="310896" cy="402336"/>
           </a:xfrm>
           <a:custGeom>
             <a:avLst/>
@@ -28821,8 +27901,8 @@
         </p:nvSpPr>
         <p:spPr>
           <a:xfrm>
-            <a:off x="1014984" y="155448"/>
-            <a:ext cx="8001000" cy="621792"/>
+            <a:off x="566928" y="155448"/>
+            <a:ext cx="8549640" cy="621792"/>
           </a:xfrm>
           <a:prstGeom prst="rect">
             <a:avLst/>
@@ -28855,58 +27935,14 @@
       </p:sp>
       <p:sp>
         <p:nvSpPr>
-          <p:cNvPr id="9003" name="Rectangle 9002"/>
-          <p:cNvSpPr/>
-          <p:nvPr/>
-        </p:nvSpPr>
-        <p:spPr>
-          <a:xfrm>
-            <a:off x="1014984" y="1298448"/>
-            <a:ext cx="27432" cy="310896"/>
-          </a:xfrm>
-          <a:prstGeom prst="rect">
-            <a:avLst/>
-          </a:prstGeom>
-          <a:solidFill>
-            <a:srgbClr val="0070C0"/>
-          </a:solidFill>
-          <a:ln>
-            <a:noFill/>
-          </a:ln>
-          <a:effectLst/>
-        </p:spPr>
-        <p:style>
-          <a:lnRef idx="1">
-            <a:schemeClr val="accent1"/>
-          </a:lnRef>
-          <a:fillRef idx="3">
-            <a:schemeClr val="accent1"/>
-          </a:fillRef>
-          <a:effectRef idx="2">
-            <a:schemeClr val="accent1"/>
-          </a:effectRef>
-          <a:fontRef idx="minor">
-            <a:schemeClr val="lt1"/>
-          </a:fontRef>
-        </p:style>
-        <p:txBody>
-          <a:bodyPr rtlCol="0" anchor="ctr"/>
-          <a:lstStyle/>
-          <a:p>
-            <a:pPr algn="ctr"/>
-          </a:p>
-        </p:txBody>
-      </p:sp>
-      <p:sp>
-        <p:nvSpPr>
-          <p:cNvPr id="9004" name="TextBox 9003"/>
+          <p:cNvPr id="9003" name="TextBox 9002"/>
           <p:cNvSpPr txBox="1"/>
           <p:nvPr/>
         </p:nvSpPr>
         <p:spPr>
           <a:xfrm>
-            <a:off x="1161288" y="1271016"/>
-            <a:ext cx="10241280" cy="384048"/>
+            <a:off x="566928" y="1261872"/>
+            <a:ext cx="10881360" cy="438912"/>
           </a:xfrm>
           <a:prstGeom prst="rect">
             <a:avLst/>
@@ -28919,9 +27955,13 @@
           </a:bodyPr>
           <a:lstStyle/>
           <a:p>
-            <a:pPr algn="l"/>
-            <a:r>
-              <a:rPr sz="1550" b="1">
+            <a:pPr algn="l">
+              <a:lnSpc>
+                <a:spcPct val="110000"/>
+              </a:lnSpc>
+            </a:pPr>
+            <a:r>
+              <a:rPr sz="1800" b="1">
                 <a:solidFill>
                   <a:srgbClr val="0070C0"/>
                 </a:solidFill>
@@ -28935,7 +27975,7 @@
       </p:sp>
       <p:sp>
         <p:nvSpPr>
-          <p:cNvPr id="9005" name="TextBox 9004"/>
+          <p:cNvPr id="9004" name="TextBox 9003"/>
           <p:cNvSpPr txBox="1"/>
           <p:nvPr/>
         </p:nvSpPr>
@@ -29015,7 +28055,7 @@
       </p:sp>
       <p:sp>
         <p:nvSpPr>
-          <p:cNvPr id="9006" name="TextBox 9005"/>
+          <p:cNvPr id="9005" name="TextBox 9004"/>
           <p:cNvSpPr txBox="1"/>
           <p:nvPr/>
         </p:nvSpPr>
@@ -29083,8 +28123,8 @@
         </p:nvSpPr>
         <p:spPr>
           <a:xfrm>
-            <a:off x="427038" y="220663"/>
-            <a:ext cx="474662" cy="560387"/>
+            <a:off x="182880" y="274320"/>
+            <a:ext cx="310896" cy="402336"/>
           </a:xfrm>
           <a:custGeom>
             <a:avLst/>
@@ -29304,8 +28344,8 @@
         </p:nvSpPr>
         <p:spPr>
           <a:xfrm>
-            <a:off x="1014984" y="155448"/>
-            <a:ext cx="8001000" cy="621792"/>
+            <a:off x="566928" y="155448"/>
+            <a:ext cx="8549640" cy="621792"/>
           </a:xfrm>
           <a:prstGeom prst="rect">
             <a:avLst/>
@@ -29338,58 +28378,14 @@
       </p:sp>
       <p:sp>
         <p:nvSpPr>
-          <p:cNvPr id="9003" name="Rectangle 9002"/>
-          <p:cNvSpPr/>
-          <p:nvPr/>
-        </p:nvSpPr>
-        <p:spPr>
-          <a:xfrm>
-            <a:off x="1014984" y="1298448"/>
-            <a:ext cx="27432" cy="310896"/>
-          </a:xfrm>
-          <a:prstGeom prst="rect">
-            <a:avLst/>
-          </a:prstGeom>
-          <a:solidFill>
-            <a:srgbClr val="0070C0"/>
-          </a:solidFill>
-          <a:ln>
-            <a:noFill/>
-          </a:ln>
-          <a:effectLst/>
-        </p:spPr>
-        <p:style>
-          <a:lnRef idx="1">
-            <a:schemeClr val="accent1"/>
-          </a:lnRef>
-          <a:fillRef idx="3">
-            <a:schemeClr val="accent1"/>
-          </a:fillRef>
-          <a:effectRef idx="2">
-            <a:schemeClr val="accent1"/>
-          </a:effectRef>
-          <a:fontRef idx="minor">
-            <a:schemeClr val="lt1"/>
-          </a:fontRef>
-        </p:style>
-        <p:txBody>
-          <a:bodyPr rtlCol="0" anchor="ctr"/>
-          <a:lstStyle/>
-          <a:p>
-            <a:pPr algn="ctr"/>
-          </a:p>
-        </p:txBody>
-      </p:sp>
-      <p:sp>
-        <p:nvSpPr>
-          <p:cNvPr id="9004" name="TextBox 9003"/>
+          <p:cNvPr id="9003" name="TextBox 9002"/>
           <p:cNvSpPr txBox="1"/>
           <p:nvPr/>
         </p:nvSpPr>
         <p:spPr>
           <a:xfrm>
-            <a:off x="1161288" y="1271016"/>
-            <a:ext cx="10241280" cy="384048"/>
+            <a:off x="566928" y="1261872"/>
+            <a:ext cx="10881360" cy="438912"/>
           </a:xfrm>
           <a:prstGeom prst="rect">
             <a:avLst/>
@@ -29402,9 +28398,13 @@
           </a:bodyPr>
           <a:lstStyle/>
           <a:p>
-            <a:pPr algn="l"/>
-            <a:r>
-              <a:rPr sz="1550" b="1">
+            <a:pPr algn="l">
+              <a:lnSpc>
+                <a:spcPct val="110000"/>
+              </a:lnSpc>
+            </a:pPr>
+            <a:r>
+              <a:rPr sz="1800" b="1">
                 <a:solidFill>
                   <a:srgbClr val="0070C0"/>
                 </a:solidFill>
@@ -29418,7 +28418,7 @@
       </p:sp>
       <p:pic>
         <p:nvPicPr>
-          <p:cNvPr id="9005" name="Picture 9004" descr="fig6-throughput-s3-w3.png"/>
+          <p:cNvPr id="9004" name="Picture 9003" descr="fig6-throughput-s3-w3.png"/>
           <p:cNvPicPr>
             <a:picLocks noChangeAspect="1"/>
           </p:cNvPicPr>
@@ -29442,7 +28442,7 @@
       </p:pic>
       <p:pic>
         <p:nvPicPr>
-          <p:cNvPr id="9006" name="Picture 9005" descr="fig6-6-latency-p99-s3-w3.png"/>
+          <p:cNvPr id="9005" name="Picture 9004" descr="fig6-6-latency-p99-s3-w3.png"/>
           <p:cNvPicPr>
             <a:picLocks noChangeAspect="1"/>
           </p:cNvPicPr>
@@ -29466,7 +28466,7 @@
       </p:pic>
       <p:sp>
         <p:nvSpPr>
-          <p:cNvPr id="9007" name="TextBox 9006"/>
+          <p:cNvPr id="9006" name="TextBox 9005"/>
           <p:cNvSpPr txBox="1"/>
           <p:nvPr/>
         </p:nvSpPr>
@@ -29536,7 +28536,7 @@
       </p:sp>
       <p:sp>
         <p:nvSpPr>
-          <p:cNvPr id="9008" name="TextBox 9007"/>
+          <p:cNvPr id="9007" name="TextBox 9006"/>
           <p:cNvSpPr txBox="1"/>
           <p:nvPr/>
         </p:nvSpPr>
@@ -29604,8 +28604,8 @@
         </p:nvSpPr>
         <p:spPr>
           <a:xfrm>
-            <a:off x="427038" y="220663"/>
-            <a:ext cx="474662" cy="560387"/>
+            <a:off x="182880" y="274320"/>
+            <a:ext cx="310896" cy="402336"/>
           </a:xfrm>
           <a:custGeom>
             <a:avLst/>
@@ -29825,8 +28825,8 @@
         </p:nvSpPr>
         <p:spPr>
           <a:xfrm>
-            <a:off x="1014984" y="155448"/>
-            <a:ext cx="8001000" cy="621792"/>
+            <a:off x="566928" y="155448"/>
+            <a:ext cx="8549640" cy="621792"/>
           </a:xfrm>
           <a:prstGeom prst="rect">
             <a:avLst/>
@@ -29859,23 +28859,65 @@
       </p:sp>
       <p:sp>
         <p:nvSpPr>
-          <p:cNvPr id="9003" name="Rectangle 9002"/>
-          <p:cNvSpPr/>
+          <p:cNvPr id="9003" name="TextBox 9002"/>
+          <p:cNvSpPr txBox="1"/>
           <p:nvPr/>
         </p:nvSpPr>
         <p:spPr>
           <a:xfrm>
-            <a:off x="1014984" y="1298448"/>
-            <a:ext cx="27432" cy="310896"/>
+            <a:off x="566928" y="1261872"/>
+            <a:ext cx="10881360" cy="438912"/>
           </a:xfrm>
           <a:prstGeom prst="rect">
             <a:avLst/>
           </a:prstGeom>
+          <a:noFill/>
+        </p:spPr>
+        <p:txBody>
+          <a:bodyPr wrap="square" anchor="ctr" lIns="0" rIns="0" tIns="0" bIns="0">
+            <a:spAutoFit/>
+          </a:bodyPr>
+          <a:lstStyle/>
+          <a:p>
+            <a:pPr algn="l">
+              <a:lnSpc>
+                <a:spcPct val="110000"/>
+              </a:lnSpc>
+            </a:pPr>
+            <a:r>
+              <a:rPr sz="1800" b="1">
+                <a:solidFill>
+                  <a:srgbClr val="0070C0"/>
+                </a:solidFill>
+                <a:latin typeface="Arial"/>
+                <a:ea typeface="微软雅黑"/>
+              </a:rPr>
+              <a:t>两个创新：把 Binder 放进 Scheduler 进程；用四层容错守住“至多绑定一次”</a:t>
+            </a:r>
+          </a:p>
+        </p:txBody>
+      </p:sp>
+      <p:sp>
+        <p:nvSpPr>
+          <p:cNvPr id="9004" name="Rounded Rectangle 9003"/>
+          <p:cNvSpPr/>
+          <p:nvPr/>
+        </p:nvSpPr>
+        <p:spPr>
+          <a:xfrm>
+            <a:off x="566928" y="1874519"/>
+            <a:ext cx="5404104" cy="2103120"/>
+          </a:xfrm>
+          <a:prstGeom prst="roundRect">
+            <a:avLst/>
+          </a:prstGeom>
           <a:solidFill>
-            <a:srgbClr val="0070C0"/>
+            <a:srgbClr val="FFFFFF"/>
           </a:solidFill>
-          <a:ln>
-            <a:noFill/>
+          <a:ln w="9525">
+            <a:solidFill>
+              <a:srgbClr val="D6E3F0"/>
+            </a:solidFill>
           </a:ln>
           <a:effectLst/>
         </p:spPr>
@@ -29903,61 +28945,23 @@
       </p:sp>
       <p:sp>
         <p:nvSpPr>
-          <p:cNvPr id="9004" name="TextBox 9003"/>
-          <p:cNvSpPr txBox="1"/>
-          <p:nvPr/>
-        </p:nvSpPr>
-        <p:spPr>
-          <a:xfrm>
-            <a:off x="1161288" y="1271016"/>
-            <a:ext cx="10241280" cy="384048"/>
-          </a:xfrm>
-          <a:prstGeom prst="rect">
-            <a:avLst/>
-          </a:prstGeom>
-          <a:noFill/>
-        </p:spPr>
-        <p:txBody>
-          <a:bodyPr wrap="square" anchor="ctr" lIns="0" rIns="0" tIns="0" bIns="0">
-            <a:spAutoFit/>
-          </a:bodyPr>
-          <a:lstStyle/>
-          <a:p>
-            <a:pPr algn="l"/>
-            <a:r>
-              <a:rPr sz="1550" b="1">
-                <a:solidFill>
-                  <a:srgbClr val="0070C0"/>
-                </a:solidFill>
-                <a:latin typeface="Arial"/>
-                <a:ea typeface="微软雅黑"/>
-              </a:rPr>
-              <a:t>两个创新：把 Binder 放进 Scheduler 进程；用四层容错守住“至多绑定一次”</a:t>
-            </a:r>
-          </a:p>
-        </p:txBody>
-      </p:sp>
-      <p:sp>
-        <p:nvSpPr>
-          <p:cNvPr id="9005" name="Rounded Rectangle 9004"/>
+          <p:cNvPr id="9005" name="Oval 9004"/>
           <p:cNvSpPr/>
           <p:nvPr/>
         </p:nvSpPr>
         <p:spPr>
           <a:xfrm>
-            <a:off x="566928" y="1874519"/>
-            <a:ext cx="5404104" cy="2103120"/>
-          </a:xfrm>
-          <a:prstGeom prst="roundRect">
+            <a:off x="713232" y="2011679"/>
+            <a:ext cx="274320" cy="274320"/>
+          </a:xfrm>
+          <a:prstGeom prst="ellipse">
             <a:avLst/>
           </a:prstGeom>
           <a:solidFill>
-            <a:srgbClr val="FFFFFF"/>
+            <a:srgbClr val="113E6A"/>
           </a:solidFill>
-          <a:ln w="9525">
-            <a:solidFill>
-              <a:srgbClr val="D6E3F0"/>
-            </a:solidFill>
+          <a:ln>
+            <a:noFill/>
           </a:ln>
           <a:effectLst/>
         </p:spPr>
@@ -29976,32 +28980,100 @@
           </a:fontRef>
         </p:style>
         <p:txBody>
-          <a:bodyPr rtlCol="0" anchor="ctr"/>
+          <a:bodyPr rtlCol="0" anchor="ctr" lIns="0" rIns="0" tIns="0" bIns="0"/>
           <a:lstStyle/>
           <a:p>
             <a:pPr algn="ctr"/>
-          </a:p>
-        </p:txBody>
-      </p:sp>
-      <p:sp>
-        <p:nvSpPr>
-          <p:cNvPr id="9006" name="Oval 9005"/>
+            <a:r>
+              <a:rPr sz="900" b="1">
+                <a:solidFill>
+                  <a:srgbClr val="FFFFFF"/>
+                </a:solidFill>
+                <a:latin typeface="Arial"/>
+                <a:ea typeface="微软雅黑"/>
+              </a:rPr>
+              <a:t>01</a:t>
+            </a:r>
+          </a:p>
+        </p:txBody>
+      </p:sp>
+      <p:sp>
+        <p:nvSpPr>
+          <p:cNvPr id="9006" name="TextBox 9005"/>
+          <p:cNvSpPr txBox="1"/>
+          <p:nvPr/>
+        </p:nvSpPr>
+        <p:spPr>
+          <a:xfrm>
+            <a:off x="1078992" y="2011679"/>
+            <a:ext cx="4764024" cy="1901951"/>
+          </a:xfrm>
+          <a:prstGeom prst="rect">
+            <a:avLst/>
+          </a:prstGeom>
+          <a:noFill/>
+        </p:spPr>
+        <p:txBody>
+          <a:bodyPr wrap="square" anchor="ctr" lIns="0" rIns="0" tIns="0" bIns="0">
+            <a:spAutoFit/>
+          </a:bodyPr>
+          <a:lstStyle/>
+          <a:p>
+            <a:pPr algn="l"/>
+            <a:r>
+              <a:rPr sz="1350" b="1">
+                <a:solidFill>
+                  <a:srgbClr val="113E6A"/>
+                </a:solidFill>
+                <a:latin typeface="Arial"/>
+                <a:ea typeface="微软雅黑"/>
+              </a:rPr>
+              <a:t>创新 1 · ENO 架构</a:t>
+            </a:r>
+          </a:p>
+          <a:p>
+            <a:pPr algn="l">
+              <a:lnSpc>
+                <a:spcPct val="110000"/>
+              </a:lnSpc>
+              <a:spcBef>
+                <a:spcPts val="400"/>
+              </a:spcBef>
+            </a:pPr>
+            <a:r>
+              <a:rPr sz="1100" b="0">
+                <a:solidFill>
+                  <a:srgbClr val="2E2C2C"/>
+                </a:solidFill>
+                <a:latin typeface="Arial"/>
+                <a:ea typeface="微软雅黑"/>
+              </a:rPr>
+              <a:t>单 Dispatcher、多独立 Scheduler；Binder 与决策同域；CacheAdapter 零拷贝共享 SchedulerCache</a:t>
+            </a:r>
+          </a:p>
+        </p:txBody>
+      </p:sp>
+      <p:sp>
+        <p:nvSpPr>
+          <p:cNvPr id="9007" name="Rounded Rectangle 9006"/>
           <p:cNvSpPr/>
           <p:nvPr/>
         </p:nvSpPr>
         <p:spPr>
           <a:xfrm>
-            <a:off x="713232" y="2011679"/>
-            <a:ext cx="274320" cy="274320"/>
-          </a:xfrm>
-          <a:prstGeom prst="ellipse">
+            <a:off x="6227064" y="1874519"/>
+            <a:ext cx="5404104" cy="2103120"/>
+          </a:xfrm>
+          <a:prstGeom prst="roundRect">
             <a:avLst/>
           </a:prstGeom>
           <a:solidFill>
-            <a:srgbClr val="113E6A"/>
+            <a:srgbClr val="FFFFFF"/>
           </a:solidFill>
-          <a:ln>
-            <a:noFill/>
+          <a:ln w="9525">
+            <a:solidFill>
+              <a:srgbClr val="D6E3F0"/>
+            </a:solidFill>
           </a:ln>
           <a:effectLst/>
         </p:spPr>
@@ -30020,100 +29092,32 @@
           </a:fontRef>
         </p:style>
         <p:txBody>
-          <a:bodyPr rtlCol="0" anchor="ctr" lIns="0" rIns="0" tIns="0" bIns="0"/>
+          <a:bodyPr rtlCol="0" anchor="ctr"/>
           <a:lstStyle/>
           <a:p>
             <a:pPr algn="ctr"/>
-            <a:r>
-              <a:rPr sz="900" b="1">
-                <a:solidFill>
-                  <a:srgbClr val="FFFFFF"/>
-                </a:solidFill>
-                <a:latin typeface="Arial"/>
-                <a:ea typeface="微软雅黑"/>
-              </a:rPr>
-              <a:t>01</a:t>
-            </a:r>
-          </a:p>
-        </p:txBody>
-      </p:sp>
-      <p:sp>
-        <p:nvSpPr>
-          <p:cNvPr id="9007" name="TextBox 9006"/>
-          <p:cNvSpPr txBox="1"/>
-          <p:nvPr/>
-        </p:nvSpPr>
-        <p:spPr>
-          <a:xfrm>
-            <a:off x="1078992" y="2011679"/>
-            <a:ext cx="4764024" cy="1901951"/>
-          </a:xfrm>
-          <a:prstGeom prst="rect">
-            <a:avLst/>
-          </a:prstGeom>
-          <a:noFill/>
-        </p:spPr>
-        <p:txBody>
-          <a:bodyPr wrap="square" anchor="ctr" lIns="0" rIns="0" tIns="0" bIns="0">
-            <a:spAutoFit/>
-          </a:bodyPr>
-          <a:lstStyle/>
-          <a:p>
-            <a:pPr algn="l"/>
-            <a:r>
-              <a:rPr sz="1350" b="1">
-                <a:solidFill>
-                  <a:srgbClr val="113E6A"/>
-                </a:solidFill>
-                <a:latin typeface="Arial"/>
-                <a:ea typeface="微软雅黑"/>
-              </a:rPr>
-              <a:t>创新 1 · ENO 架构</a:t>
-            </a:r>
-          </a:p>
-          <a:p>
-            <a:pPr algn="l">
-              <a:lnSpc>
-                <a:spcPct val="110000"/>
-              </a:lnSpc>
-              <a:spcBef>
-                <a:spcPts val="400"/>
-              </a:spcBef>
-            </a:pPr>
-            <a:r>
-              <a:rPr sz="1100" b="0">
-                <a:solidFill>
-                  <a:srgbClr val="2E2C2C"/>
-                </a:solidFill>
-                <a:latin typeface="Arial"/>
-                <a:ea typeface="微软雅黑"/>
-              </a:rPr>
-              <a:t>单 Dispatcher、多独立 Scheduler；Binder 与决策同域；CacheAdapter 零拷贝共享 SchedulerCache</a:t>
-            </a:r>
-          </a:p>
-        </p:txBody>
-      </p:sp>
-      <p:sp>
-        <p:nvSpPr>
-          <p:cNvPr id="9008" name="Rounded Rectangle 9007"/>
+          </a:p>
+        </p:txBody>
+      </p:sp>
+      <p:sp>
+        <p:nvSpPr>
+          <p:cNvPr id="9008" name="Oval 9007"/>
           <p:cNvSpPr/>
           <p:nvPr/>
         </p:nvSpPr>
         <p:spPr>
           <a:xfrm>
-            <a:off x="6227064" y="1874519"/>
-            <a:ext cx="5404104" cy="2103120"/>
-          </a:xfrm>
-          <a:prstGeom prst="roundRect">
+            <a:off x="6373368" y="2011679"/>
+            <a:ext cx="274320" cy="274320"/>
+          </a:xfrm>
+          <a:prstGeom prst="ellipse">
             <a:avLst/>
           </a:prstGeom>
           <a:solidFill>
-            <a:srgbClr val="FFFFFF"/>
+            <a:srgbClr val="113E6A"/>
           </a:solidFill>
-          <a:ln w="9525">
-            <a:solidFill>
-              <a:srgbClr val="D6E3F0"/>
-            </a:solidFill>
+          <a:ln>
+            <a:noFill/>
           </a:ln>
           <a:effectLst/>
         </p:spPr>
@@ -30132,32 +29136,100 @@
           </a:fontRef>
         </p:style>
         <p:txBody>
-          <a:bodyPr rtlCol="0" anchor="ctr"/>
+          <a:bodyPr rtlCol="0" anchor="ctr" lIns="0" rIns="0" tIns="0" bIns="0"/>
           <a:lstStyle/>
           <a:p>
             <a:pPr algn="ctr"/>
-          </a:p>
-        </p:txBody>
-      </p:sp>
-      <p:sp>
-        <p:nvSpPr>
-          <p:cNvPr id="9009" name="Oval 9008"/>
+            <a:r>
+              <a:rPr sz="900" b="1">
+                <a:solidFill>
+                  <a:srgbClr val="FFFFFF"/>
+                </a:solidFill>
+                <a:latin typeface="Arial"/>
+                <a:ea typeface="微软雅黑"/>
+              </a:rPr>
+              <a:t>02</a:t>
+            </a:r>
+          </a:p>
+        </p:txBody>
+      </p:sp>
+      <p:sp>
+        <p:nvSpPr>
+          <p:cNvPr id="9009" name="TextBox 9008"/>
+          <p:cNvSpPr txBox="1"/>
+          <p:nvPr/>
+        </p:nvSpPr>
+        <p:spPr>
+          <a:xfrm>
+            <a:off x="6739128" y="2011679"/>
+            <a:ext cx="4764024" cy="1901951"/>
+          </a:xfrm>
+          <a:prstGeom prst="rect">
+            <a:avLst/>
+          </a:prstGeom>
+          <a:noFill/>
+        </p:spPr>
+        <p:txBody>
+          <a:bodyPr wrap="square" anchor="ctr" lIns="0" rIns="0" tIns="0" bIns="0">
+            <a:spAutoFit/>
+          </a:bodyPr>
+          <a:lstStyle/>
+          <a:p>
+            <a:pPr algn="l"/>
+            <a:r>
+              <a:rPr sz="1350" b="1">
+                <a:solidFill>
+                  <a:srgbClr val="113E6A"/>
+                </a:solidFill>
+                <a:latin typeface="Arial"/>
+                <a:ea typeface="微软雅黑"/>
+              </a:rPr>
+              <a:t>创新 2 · 四层容错</a:t>
+            </a:r>
+          </a:p>
+          <a:p>
+            <a:pPr algn="l">
+              <a:lnSpc>
+                <a:spcPct val="110000"/>
+              </a:lnSpc>
+              <a:spcBef>
+                <a:spcPts val="400"/>
+              </a:spcBef>
+            </a:pPr>
+            <a:r>
+              <a:rPr sz="1100" b="0">
+                <a:solidFill>
+                  <a:srgbClr val="2E2C2C"/>
+                </a:solidFill>
+                <a:latin typeface="Arial"/>
+                <a:ea typeface="微软雅黑"/>
+              </a:rPr>
+              <a:t>L0 归属校验 · L1 同步退避 · L2 异步回收 · L3 全局回退，全部建立在 etcd 原子语义上</a:t>
+            </a:r>
+          </a:p>
+        </p:txBody>
+      </p:sp>
+      <p:sp>
+        <p:nvSpPr>
+          <p:cNvPr id="9010" name="Rounded Rectangle 9009"/>
           <p:cNvSpPr/>
           <p:nvPr/>
         </p:nvSpPr>
         <p:spPr>
           <a:xfrm>
-            <a:off x="6373368" y="2011679"/>
-            <a:ext cx="274320" cy="274320"/>
-          </a:xfrm>
-          <a:prstGeom prst="ellipse">
+            <a:off x="566928" y="4343400"/>
+            <a:ext cx="11064240" cy="868680"/>
+          </a:xfrm>
+          <a:prstGeom prst="roundRect">
             <a:avLst/>
           </a:prstGeom>
           <a:solidFill>
-            <a:srgbClr val="113E6A"/>
+            <a:srgbClr val="F2F4F7"/>
           </a:solidFill>
-          <a:ln>
-            <a:noFill/>
+          <a:ln w="9525">
+            <a:solidFill>
+              <a:srgbClr val="D9DEE5"/>
+            </a:solidFill>
           </a:ln>
           <a:effectLst/>
         </p:spPr>
@@ -30176,100 +29248,32 @@
           </a:fontRef>
         </p:style>
         <p:txBody>
-          <a:bodyPr rtlCol="0" anchor="ctr" lIns="0" rIns="0" tIns="0" bIns="0"/>
+          <a:bodyPr rtlCol="0" anchor="ctr"/>
           <a:lstStyle/>
           <a:p>
             <a:pPr algn="ctr"/>
-            <a:r>
-              <a:rPr sz="900" b="1">
-                <a:solidFill>
-                  <a:srgbClr val="FFFFFF"/>
-                </a:solidFill>
-                <a:latin typeface="Arial"/>
-                <a:ea typeface="微软雅黑"/>
-              </a:rPr>
-              <a:t>02</a:t>
-            </a:r>
-          </a:p>
-        </p:txBody>
-      </p:sp>
-      <p:sp>
-        <p:nvSpPr>
-          <p:cNvPr id="9010" name="TextBox 9009"/>
-          <p:cNvSpPr txBox="1"/>
+          </a:p>
+        </p:txBody>
+      </p:sp>
+      <p:sp>
+        <p:nvSpPr>
+          <p:cNvPr id="9011" name="Rectangle 9010"/>
+          <p:cNvSpPr/>
           <p:nvPr/>
         </p:nvSpPr>
         <p:spPr>
           <a:xfrm>
-            <a:off x="6739128" y="2011679"/>
-            <a:ext cx="4764024" cy="1901951"/>
+            <a:off x="566928" y="4343400"/>
+            <a:ext cx="73152" cy="868680"/>
           </a:xfrm>
           <a:prstGeom prst="rect">
             <a:avLst/>
           </a:prstGeom>
-          <a:noFill/>
-        </p:spPr>
-        <p:txBody>
-          <a:bodyPr wrap="square" anchor="ctr" lIns="0" rIns="0" tIns="0" bIns="0">
-            <a:spAutoFit/>
-          </a:bodyPr>
-          <a:lstStyle/>
-          <a:p>
-            <a:pPr algn="l"/>
-            <a:r>
-              <a:rPr sz="1350" b="1">
-                <a:solidFill>
-                  <a:srgbClr val="113E6A"/>
-                </a:solidFill>
-                <a:latin typeface="Arial"/>
-                <a:ea typeface="微软雅黑"/>
-              </a:rPr>
-              <a:t>创新 2 · 四层容错</a:t>
-            </a:r>
-          </a:p>
-          <a:p>
-            <a:pPr algn="l">
-              <a:lnSpc>
-                <a:spcPct val="110000"/>
-              </a:lnSpc>
-              <a:spcBef>
-                <a:spcPts val="400"/>
-              </a:spcBef>
-            </a:pPr>
-            <a:r>
-              <a:rPr sz="1100" b="0">
-                <a:solidFill>
-                  <a:srgbClr val="2E2C2C"/>
-                </a:solidFill>
-                <a:latin typeface="Arial"/>
-                <a:ea typeface="微软雅黑"/>
-              </a:rPr>
-              <a:t>L0 归属校验 · L1 同步退避 · L2 异步回收 · L3 全局回退，全部建立在 etcd 原子语义上</a:t>
-            </a:r>
-          </a:p>
-        </p:txBody>
-      </p:sp>
-      <p:sp>
-        <p:nvSpPr>
-          <p:cNvPr id="9011" name="Rounded Rectangle 9010"/>
-          <p:cNvSpPr/>
-          <p:nvPr/>
-        </p:nvSpPr>
-        <p:spPr>
-          <a:xfrm>
-            <a:off x="566928" y="4343400"/>
-            <a:ext cx="11064240" cy="868680"/>
-          </a:xfrm>
-          <a:prstGeom prst="roundRect">
-            <a:avLst/>
-          </a:prstGeom>
           <a:solidFill>
-            <a:srgbClr val="F2F4F7"/>
+            <a:srgbClr val="0070C0"/>
           </a:solidFill>
-          <a:ln w="9525">
-            <a:solidFill>
-              <a:srgbClr val="D9DEE5"/>
-            </a:solidFill>
+          <a:ln>
+            <a:noFill/>
           </a:ln>
           <a:effectLst/>
         </p:spPr>
@@ -30297,51 +29301,7 @@
       </p:sp>
       <p:sp>
         <p:nvSpPr>
-          <p:cNvPr id="9012" name="Rectangle 9011"/>
-          <p:cNvSpPr/>
-          <p:nvPr/>
-        </p:nvSpPr>
-        <p:spPr>
-          <a:xfrm>
-            <a:off x="566928" y="4343400"/>
-            <a:ext cx="73152" cy="868680"/>
-          </a:xfrm>
-          <a:prstGeom prst="rect">
-            <a:avLst/>
-          </a:prstGeom>
-          <a:solidFill>
-            <a:srgbClr val="0070C0"/>
-          </a:solidFill>
-          <a:ln>
-            <a:noFill/>
-          </a:ln>
-          <a:effectLst/>
-        </p:spPr>
-        <p:style>
-          <a:lnRef idx="1">
-            <a:schemeClr val="accent1"/>
-          </a:lnRef>
-          <a:fillRef idx="3">
-            <a:schemeClr val="accent1"/>
-          </a:fillRef>
-          <a:effectRef idx="2">
-            <a:schemeClr val="accent1"/>
-          </a:effectRef>
-          <a:fontRef idx="minor">
-            <a:schemeClr val="lt1"/>
-          </a:fontRef>
-        </p:style>
-        <p:txBody>
-          <a:bodyPr rtlCol="0" anchor="ctr"/>
-          <a:lstStyle/>
-          <a:p>
-            <a:pPr algn="ctr"/>
-          </a:p>
-        </p:txBody>
-      </p:sp>
-      <p:sp>
-        <p:nvSpPr>
-          <p:cNvPr id="9013" name="TextBox 9012"/>
+          <p:cNvPr id="9012" name="TextBox 9011"/>
           <p:cNvSpPr txBox="1"/>
           <p:nvPr/>
         </p:nvSpPr>
@@ -30381,7 +29341,7 @@
       </p:sp>
       <p:sp>
         <p:nvSpPr>
-          <p:cNvPr id="9014" name="TextBox 9013"/>
+          <p:cNvPr id="9013" name="TextBox 9012"/>
           <p:cNvSpPr txBox="1"/>
           <p:nvPr/>
         </p:nvSpPr>
@@ -30449,8 +29409,8 @@
         </p:nvSpPr>
         <p:spPr>
           <a:xfrm>
-            <a:off x="427038" y="220663"/>
-            <a:ext cx="474662" cy="560387"/>
+            <a:off x="182880" y="274320"/>
+            <a:ext cx="310896" cy="402336"/>
           </a:xfrm>
           <a:custGeom>
             <a:avLst/>
@@ -30670,8 +29630,8 @@
         </p:nvSpPr>
         <p:spPr>
           <a:xfrm>
-            <a:off x="1014984" y="155448"/>
-            <a:ext cx="8001000" cy="621792"/>
+            <a:off x="566928" y="155448"/>
+            <a:ext cx="8549640" cy="621792"/>
           </a:xfrm>
           <a:prstGeom prst="rect">
             <a:avLst/>
@@ -30704,58 +29664,14 @@
       </p:sp>
       <p:sp>
         <p:nvSpPr>
-          <p:cNvPr id="9003" name="Rectangle 9002"/>
-          <p:cNvSpPr/>
-          <p:nvPr/>
-        </p:nvSpPr>
-        <p:spPr>
-          <a:xfrm>
-            <a:off x="1014984" y="1298448"/>
-            <a:ext cx="27432" cy="310896"/>
-          </a:xfrm>
-          <a:prstGeom prst="rect">
-            <a:avLst/>
-          </a:prstGeom>
-          <a:solidFill>
-            <a:srgbClr val="0070C0"/>
-          </a:solidFill>
-          <a:ln>
-            <a:noFill/>
-          </a:ln>
-          <a:effectLst/>
-        </p:spPr>
-        <p:style>
-          <a:lnRef idx="1">
-            <a:schemeClr val="accent1"/>
-          </a:lnRef>
-          <a:fillRef idx="3">
-            <a:schemeClr val="accent1"/>
-          </a:fillRef>
-          <a:effectRef idx="2">
-            <a:schemeClr val="accent1"/>
-          </a:effectRef>
-          <a:fontRef idx="minor">
-            <a:schemeClr val="lt1"/>
-          </a:fontRef>
-        </p:style>
-        <p:txBody>
-          <a:bodyPr rtlCol="0" anchor="ctr"/>
-          <a:lstStyle/>
-          <a:p>
-            <a:pPr algn="ctr"/>
-          </a:p>
-        </p:txBody>
-      </p:sp>
-      <p:sp>
-        <p:nvSpPr>
-          <p:cNvPr id="9004" name="TextBox 9003"/>
+          <p:cNvPr id="9003" name="TextBox 9002"/>
           <p:cNvSpPr txBox="1"/>
           <p:nvPr/>
         </p:nvSpPr>
         <p:spPr>
           <a:xfrm>
-            <a:off x="1161288" y="1271016"/>
-            <a:ext cx="10241280" cy="384048"/>
+            <a:off x="566928" y="1261872"/>
+            <a:ext cx="10881360" cy="438912"/>
           </a:xfrm>
           <a:prstGeom prst="rect">
             <a:avLst/>
@@ -30768,9 +29684,13 @@
           </a:bodyPr>
           <a:lstStyle/>
           <a:p>
-            <a:pPr algn="l"/>
-            <a:r>
-              <a:rPr sz="1550" b="1">
+            <a:pPr algn="l">
+              <a:lnSpc>
+                <a:spcPct val="110000"/>
+              </a:lnSpc>
+            </a:pPr>
+            <a:r>
+              <a:rPr sz="1800" b="1">
                 <a:solidFill>
                   <a:srgbClr val="0070C0"/>
                 </a:solidFill>
@@ -30784,7 +29704,7 @@
       </p:sp>
       <p:pic>
         <p:nvPicPr>
-          <p:cNvPr id="9005" name="Picture 9004" descr="fig5-1a-shared-binder.png"/>
+          <p:cNvPr id="9004" name="Picture 9003" descr="fig5-1a-shared-binder.png"/>
           <p:cNvPicPr>
             <a:picLocks noChangeAspect="1"/>
           </p:cNvPicPr>
@@ -30808,7 +29728,7 @@
       </p:pic>
       <p:sp>
         <p:nvSpPr>
-          <p:cNvPr id="9006" name="TextBox 9005"/>
+          <p:cNvPr id="9005" name="TextBox 9004"/>
           <p:cNvSpPr txBox="1"/>
           <p:nvPr/>
         </p:nvSpPr>
@@ -30888,7 +29808,7 @@
       </p:sp>
       <p:sp>
         <p:nvSpPr>
-          <p:cNvPr id="9007" name="TextBox 9006"/>
+          <p:cNvPr id="9006" name="TextBox 9005"/>
           <p:cNvSpPr txBox="1"/>
           <p:nvPr/>
         </p:nvSpPr>
@@ -30956,8 +29876,8 @@
         </p:nvSpPr>
         <p:spPr>
           <a:xfrm>
-            <a:off x="427038" y="220663"/>
-            <a:ext cx="474662" cy="560387"/>
+            <a:off x="182880" y="274320"/>
+            <a:ext cx="310896" cy="402336"/>
           </a:xfrm>
           <a:custGeom>
             <a:avLst/>
@@ -31177,8 +30097,8 @@
         </p:nvSpPr>
         <p:spPr>
           <a:xfrm>
-            <a:off x="1014984" y="155448"/>
-            <a:ext cx="8001000" cy="621792"/>
+            <a:off x="566928" y="155448"/>
+            <a:ext cx="8549640" cy="621792"/>
           </a:xfrm>
           <a:prstGeom prst="rect">
             <a:avLst/>
@@ -31211,58 +30131,14 @@
       </p:sp>
       <p:sp>
         <p:nvSpPr>
-          <p:cNvPr id="9003" name="Rectangle 9002"/>
-          <p:cNvSpPr/>
-          <p:nvPr/>
-        </p:nvSpPr>
-        <p:spPr>
-          <a:xfrm>
-            <a:off x="1014984" y="1298448"/>
-            <a:ext cx="27432" cy="310896"/>
-          </a:xfrm>
-          <a:prstGeom prst="rect">
-            <a:avLst/>
-          </a:prstGeom>
-          <a:solidFill>
-            <a:srgbClr val="0070C0"/>
-          </a:solidFill>
-          <a:ln>
-            <a:noFill/>
-          </a:ln>
-          <a:effectLst/>
-        </p:spPr>
-        <p:style>
-          <a:lnRef idx="1">
-            <a:schemeClr val="accent1"/>
-          </a:lnRef>
-          <a:fillRef idx="3">
-            <a:schemeClr val="accent1"/>
-          </a:fillRef>
-          <a:effectRef idx="2">
-            <a:schemeClr val="accent1"/>
-          </a:effectRef>
-          <a:fontRef idx="minor">
-            <a:schemeClr val="lt1"/>
-          </a:fontRef>
-        </p:style>
-        <p:txBody>
-          <a:bodyPr rtlCol="0" anchor="ctr"/>
-          <a:lstStyle/>
-          <a:p>
-            <a:pPr algn="ctr"/>
-          </a:p>
-        </p:txBody>
-      </p:sp>
-      <p:sp>
-        <p:nvSpPr>
-          <p:cNvPr id="9004" name="TextBox 9003"/>
+          <p:cNvPr id="9003" name="TextBox 9002"/>
           <p:cNvSpPr txBox="1"/>
           <p:nvPr/>
         </p:nvSpPr>
         <p:spPr>
           <a:xfrm>
-            <a:off x="1161288" y="1271016"/>
-            <a:ext cx="10241280" cy="384048"/>
+            <a:off x="566928" y="1261872"/>
+            <a:ext cx="10881360" cy="438912"/>
           </a:xfrm>
           <a:prstGeom prst="rect">
             <a:avLst/>
@@ -31275,9 +30151,13 @@
           </a:bodyPr>
           <a:lstStyle/>
           <a:p>
-            <a:pPr algn="l"/>
-            <a:r>
-              <a:rPr sz="1550" b="1">
+            <a:pPr algn="l">
+              <a:lnSpc>
+                <a:spcPct val="110000"/>
+              </a:lnSpc>
+            </a:pPr>
+            <a:r>
+              <a:rPr sz="1800" b="1">
                 <a:solidFill>
                   <a:srgbClr val="0070C0"/>
                 </a:solidFill>
@@ -31291,7 +30171,7 @@
       </p:sp>
       <p:pic>
         <p:nvPicPr>
-          <p:cNvPr id="9005" name="Picture 9004" descr="fig3-1-system-arch.png"/>
+          <p:cNvPr id="9004" name="Picture 9003" descr="fig3-1-system-arch.png"/>
           <p:cNvPicPr>
             <a:picLocks noChangeAspect="1"/>
           </p:cNvPicPr>
@@ -31315,7 +30195,7 @@
       </p:pic>
       <p:sp>
         <p:nvSpPr>
-          <p:cNvPr id="9006" name="TextBox 9005"/>
+          <p:cNvPr id="9005" name="TextBox 9004"/>
           <p:cNvSpPr txBox="1"/>
           <p:nvPr/>
         </p:nvSpPr>
@@ -31395,7 +30275,7 @@
       </p:sp>
       <p:sp>
         <p:nvSpPr>
-          <p:cNvPr id="9007" name="TextBox 9006"/>
+          <p:cNvPr id="9006" name="TextBox 9005"/>
           <p:cNvSpPr txBox="1"/>
           <p:nvPr/>
         </p:nvSpPr>
@@ -31463,8 +30343,8 @@
         </p:nvSpPr>
         <p:spPr>
           <a:xfrm>
-            <a:off x="427038" y="220663"/>
-            <a:ext cx="474662" cy="560387"/>
+            <a:off x="182880" y="274320"/>
+            <a:ext cx="310896" cy="402336"/>
           </a:xfrm>
           <a:custGeom>
             <a:avLst/>
@@ -31684,8 +30564,8 @@
         </p:nvSpPr>
         <p:spPr>
           <a:xfrm>
-            <a:off x="1014984" y="155448"/>
-            <a:ext cx="8001000" cy="621792"/>
+            <a:off x="566928" y="155448"/>
+            <a:ext cx="8549640" cy="621792"/>
           </a:xfrm>
           <a:prstGeom prst="rect">
             <a:avLst/>
@@ -31718,58 +30598,14 @@
       </p:sp>
       <p:sp>
         <p:nvSpPr>
-          <p:cNvPr id="9003" name="Rectangle 9002"/>
-          <p:cNvSpPr/>
-          <p:nvPr/>
-        </p:nvSpPr>
-        <p:spPr>
-          <a:xfrm>
-            <a:off x="1014984" y="1298448"/>
-            <a:ext cx="27432" cy="310896"/>
-          </a:xfrm>
-          <a:prstGeom prst="rect">
-            <a:avLst/>
-          </a:prstGeom>
-          <a:solidFill>
-            <a:srgbClr val="0070C0"/>
-          </a:solidFill>
-          <a:ln>
-            <a:noFill/>
-          </a:ln>
-          <a:effectLst/>
-        </p:spPr>
-        <p:style>
-          <a:lnRef idx="1">
-            <a:schemeClr val="accent1"/>
-          </a:lnRef>
-          <a:fillRef idx="3">
-            <a:schemeClr val="accent1"/>
-          </a:fillRef>
-          <a:effectRef idx="2">
-            <a:schemeClr val="accent1"/>
-          </a:effectRef>
-          <a:fontRef idx="minor">
-            <a:schemeClr val="lt1"/>
-          </a:fontRef>
-        </p:style>
-        <p:txBody>
-          <a:bodyPr rtlCol="0" anchor="ctr"/>
-          <a:lstStyle/>
-          <a:p>
-            <a:pPr algn="ctr"/>
-          </a:p>
-        </p:txBody>
-      </p:sp>
-      <p:sp>
-        <p:nvSpPr>
-          <p:cNvPr id="9004" name="TextBox 9003"/>
+          <p:cNvPr id="9003" name="TextBox 9002"/>
           <p:cNvSpPr txBox="1"/>
           <p:nvPr/>
         </p:nvSpPr>
         <p:spPr>
           <a:xfrm>
-            <a:off x="1161288" y="1271016"/>
-            <a:ext cx="10241280" cy="384048"/>
+            <a:off x="566928" y="1261872"/>
+            <a:ext cx="10881360" cy="438912"/>
           </a:xfrm>
           <a:prstGeom prst="rect">
             <a:avLst/>
@@ -31782,9 +30618,13 @@
           </a:bodyPr>
           <a:lstStyle/>
           <a:p>
-            <a:pPr algn="l"/>
-            <a:r>
-              <a:rPr sz="1550" b="1">
+            <a:pPr algn="l">
+              <a:lnSpc>
+                <a:spcPct val="110000"/>
+              </a:lnSpc>
+            </a:pPr>
+            <a:r>
+              <a:rPr sz="1800" b="1">
                 <a:solidFill>
                   <a:srgbClr val="0070C0"/>
                 </a:solidFill>
@@ -31798,7 +30638,7 @@
       </p:sp>
       <p:pic>
         <p:nvPicPr>
-          <p:cNvPr id="9005" name="Picture 9004" descr="fig3-3-dispatcher-flow.png"/>
+          <p:cNvPr id="9004" name="Picture 9003" descr="fig3-3-dispatcher-flow.png"/>
           <p:cNvPicPr>
             <a:picLocks noChangeAspect="1"/>
           </p:cNvPicPr>
@@ -31822,7 +30662,7 @@
       </p:pic>
       <p:sp>
         <p:nvSpPr>
-          <p:cNvPr id="9006" name="TextBox 9005"/>
+          <p:cNvPr id="9005" name="TextBox 9004"/>
           <p:cNvSpPr txBox="1"/>
           <p:nvPr/>
         </p:nvSpPr>
@@ -31902,7 +30742,7 @@
       </p:sp>
       <p:sp>
         <p:nvSpPr>
-          <p:cNvPr id="9007" name="TextBox 9006"/>
+          <p:cNvPr id="9006" name="TextBox 9005"/>
           <p:cNvSpPr txBox="1"/>
           <p:nvPr/>
         </p:nvSpPr>
@@ -31970,8 +30810,8 @@
         </p:nvSpPr>
         <p:spPr>
           <a:xfrm>
-            <a:off x="427038" y="220663"/>
-            <a:ext cx="474662" cy="560387"/>
+            <a:off x="182880" y="274320"/>
+            <a:ext cx="310896" cy="402336"/>
           </a:xfrm>
           <a:custGeom>
             <a:avLst/>
@@ -32191,8 +31031,8 @@
         </p:nvSpPr>
         <p:spPr>
           <a:xfrm>
-            <a:off x="1014984" y="155448"/>
-            <a:ext cx="8001000" cy="621792"/>
+            <a:off x="566928" y="155448"/>
+            <a:ext cx="8549640" cy="621792"/>
           </a:xfrm>
           <a:prstGeom prst="rect">
             <a:avLst/>
@@ -32225,58 +31065,14 @@
       </p:sp>
       <p:sp>
         <p:nvSpPr>
-          <p:cNvPr id="9003" name="Rectangle 9002"/>
-          <p:cNvSpPr/>
-          <p:nvPr/>
-        </p:nvSpPr>
-        <p:spPr>
-          <a:xfrm>
-            <a:off x="1014984" y="1298448"/>
-            <a:ext cx="27432" cy="310896"/>
-          </a:xfrm>
-          <a:prstGeom prst="rect">
-            <a:avLst/>
-          </a:prstGeom>
-          <a:solidFill>
-            <a:srgbClr val="0070C0"/>
-          </a:solidFill>
-          <a:ln>
-            <a:noFill/>
-          </a:ln>
-          <a:effectLst/>
-        </p:spPr>
-        <p:style>
-          <a:lnRef idx="1">
-            <a:schemeClr val="accent1"/>
-          </a:lnRef>
-          <a:fillRef idx="3">
-            <a:schemeClr val="accent1"/>
-          </a:fillRef>
-          <a:effectRef idx="2">
-            <a:schemeClr val="accent1"/>
-          </a:effectRef>
-          <a:fontRef idx="minor">
-            <a:schemeClr val="lt1"/>
-          </a:fontRef>
-        </p:style>
-        <p:txBody>
-          <a:bodyPr rtlCol="0" anchor="ctr"/>
-          <a:lstStyle/>
-          <a:p>
-            <a:pPr algn="ctr"/>
-          </a:p>
-        </p:txBody>
-      </p:sp>
-      <p:sp>
-        <p:nvSpPr>
-          <p:cNvPr id="9004" name="TextBox 9003"/>
+          <p:cNvPr id="9003" name="TextBox 9002"/>
           <p:cNvSpPr txBox="1"/>
           <p:nvPr/>
         </p:nvSpPr>
         <p:spPr>
           <a:xfrm>
-            <a:off x="1161288" y="1271016"/>
-            <a:ext cx="10241280" cy="384048"/>
+            <a:off x="566928" y="1261872"/>
+            <a:ext cx="10881360" cy="438912"/>
           </a:xfrm>
           <a:prstGeom prst="rect">
             <a:avLst/>
@@ -32289,9 +31085,13 @@
           </a:bodyPr>
           <a:lstStyle/>
           <a:p>
-            <a:pPr algn="l"/>
-            <a:r>
-              <a:rPr sz="1550" b="1">
+            <a:pPr algn="l">
+              <a:lnSpc>
+                <a:spcPct val="110000"/>
+              </a:lnSpc>
+            </a:pPr>
+            <a:r>
+              <a:rPr sz="1800" b="1">
                 <a:solidFill>
                   <a:srgbClr val="0070C0"/>
                 </a:solidFill>
@@ -32305,7 +31105,7 @@
       </p:sp>
       <p:pic>
         <p:nvPicPr>
-          <p:cNvPr id="9005" name="Picture 9004" descr="fig3-4-scheduler-flow.png"/>
+          <p:cNvPr id="9004" name="Picture 9003" descr="fig3-4-scheduler-flow.png"/>
           <p:cNvPicPr>
             <a:picLocks noChangeAspect="1"/>
           </p:cNvPicPr>
@@ -32329,7 +31129,7 @@
       </p:pic>
       <p:sp>
         <p:nvSpPr>
-          <p:cNvPr id="9006" name="TextBox 9005"/>
+          <p:cNvPr id="9005" name="TextBox 9004"/>
           <p:cNvSpPr txBox="1"/>
           <p:nvPr/>
         </p:nvSpPr>
@@ -32409,7 +31209,7 @@
       </p:sp>
       <p:sp>
         <p:nvSpPr>
-          <p:cNvPr id="9007" name="TextBox 9006"/>
+          <p:cNvPr id="9006" name="TextBox 9005"/>
           <p:cNvSpPr txBox="1"/>
           <p:nvPr/>
         </p:nvSpPr>
@@ -32477,8 +31277,8 @@
         </p:nvSpPr>
         <p:spPr>
           <a:xfrm>
-            <a:off x="427038" y="220663"/>
-            <a:ext cx="474662" cy="560387"/>
+            <a:off x="182880" y="274320"/>
+            <a:ext cx="310896" cy="402336"/>
           </a:xfrm>
           <a:custGeom>
             <a:avLst/>
@@ -32698,8 +31498,8 @@
         </p:nvSpPr>
         <p:spPr>
           <a:xfrm>
-            <a:off x="1014984" y="155448"/>
-            <a:ext cx="8001000" cy="621792"/>
+            <a:off x="566928" y="155448"/>
+            <a:ext cx="8549640" cy="621792"/>
           </a:xfrm>
           <a:prstGeom prst="rect">
             <a:avLst/>
@@ -32732,58 +31532,14 @@
       </p:sp>
       <p:sp>
         <p:nvSpPr>
-          <p:cNvPr id="9003" name="Rectangle 9002"/>
-          <p:cNvSpPr/>
-          <p:nvPr/>
-        </p:nvSpPr>
-        <p:spPr>
-          <a:xfrm>
-            <a:off x="1014984" y="1298448"/>
-            <a:ext cx="27432" cy="310896"/>
-          </a:xfrm>
-          <a:prstGeom prst="rect">
-            <a:avLst/>
-          </a:prstGeom>
-          <a:solidFill>
-            <a:srgbClr val="0070C0"/>
-          </a:solidFill>
-          <a:ln>
-            <a:noFill/>
-          </a:ln>
-          <a:effectLst/>
-        </p:spPr>
-        <p:style>
-          <a:lnRef idx="1">
-            <a:schemeClr val="accent1"/>
-          </a:lnRef>
-          <a:fillRef idx="3">
-            <a:schemeClr val="accent1"/>
-          </a:fillRef>
-          <a:effectRef idx="2">
-            <a:schemeClr val="accent1"/>
-          </a:effectRef>
-          <a:fontRef idx="minor">
-            <a:schemeClr val="lt1"/>
-          </a:fontRef>
-        </p:style>
-        <p:txBody>
-          <a:bodyPr rtlCol="0" anchor="ctr"/>
-          <a:lstStyle/>
-          <a:p>
-            <a:pPr algn="ctr"/>
-          </a:p>
-        </p:txBody>
-      </p:sp>
-      <p:sp>
-        <p:nvSpPr>
-          <p:cNvPr id="9004" name="TextBox 9003"/>
+          <p:cNvPr id="9003" name="TextBox 9002"/>
           <p:cNvSpPr txBox="1"/>
           <p:nvPr/>
         </p:nvSpPr>
         <p:spPr>
           <a:xfrm>
-            <a:off x="1161288" y="1271016"/>
-            <a:ext cx="10241280" cy="384048"/>
+            <a:off x="566928" y="1261872"/>
+            <a:ext cx="10881360" cy="438912"/>
           </a:xfrm>
           <a:prstGeom prst="rect">
             <a:avLst/>
@@ -32796,9 +31552,13 @@
           </a:bodyPr>
           <a:lstStyle/>
           <a:p>
-            <a:pPr algn="l"/>
-            <a:r>
-              <a:rPr sz="1550" b="1">
+            <a:pPr algn="l">
+              <a:lnSpc>
+                <a:spcPct val="110000"/>
+              </a:lnSpc>
+            </a:pPr>
+            <a:r>
+              <a:rPr sz="1800" b="1">
                 <a:solidFill>
                   <a:srgbClr val="0070C0"/>
                 </a:solidFill>
@@ -32812,7 +31572,7 @@
       </p:sp>
       <p:pic>
         <p:nvPicPr>
-          <p:cNvPr id="9005" name="Picture 9004" descr="fig5-1a-shared-binder.png"/>
+          <p:cNvPr id="9004" name="Picture 9003" descr="fig5-1a-shared-binder.png"/>
           <p:cNvPicPr>
             <a:picLocks noChangeAspect="1"/>
           </p:cNvPicPr>
@@ -32836,7 +31596,7 @@
       </p:pic>
       <p:pic>
         <p:nvPicPr>
-          <p:cNvPr id="9006" name="Picture 9005" descr="fig5-1b-eno-arch.png"/>
+          <p:cNvPr id="9005" name="Picture 9004" descr="fig5-1b-eno-arch.png"/>
           <p:cNvPicPr>
             <a:picLocks noChangeAspect="1"/>
           </p:cNvPicPr>
@@ -32860,7 +31620,7 @@
       </p:pic>
       <p:sp>
         <p:nvSpPr>
-          <p:cNvPr id="9007" name="TextBox 9006"/>
+          <p:cNvPr id="9006" name="TextBox 9005"/>
           <p:cNvSpPr txBox="1"/>
           <p:nvPr/>
         </p:nvSpPr>
@@ -32930,7 +31690,7 @@
       </p:sp>
       <p:sp>
         <p:nvSpPr>
-          <p:cNvPr id="9008" name="TextBox 9007"/>
+          <p:cNvPr id="9007" name="TextBox 9006"/>
           <p:cNvSpPr txBox="1"/>
           <p:nvPr/>
         </p:nvSpPr>

--- a/docs/thesis/defense/答辩PPT-北航模板版.pptx
+++ b/docs/thesis/defense/答辩PPT-北航模板版.pptx
@@ -15757,7 +15757,7 @@
           <a:p>
             <a:pPr algn="ctr"/>
             <a:r>
-              <a:rPr sz="900" b="1">
+              <a:rPr sz="1000" b="1">
                 <a:solidFill>
                   <a:srgbClr val="FFFFFF"/>
                 </a:solidFill>
@@ -15793,7 +15793,7 @@
           <a:p>
             <a:pPr algn="l"/>
             <a:r>
-              <a:rPr sz="1350" b="1">
+              <a:rPr sz="1500" b="1">
                 <a:solidFill>
                   <a:srgbClr val="113E6A"/>
                 </a:solidFill>
@@ -15806,14 +15806,14 @@
           <a:p>
             <a:pPr algn="l">
               <a:lnSpc>
-                <a:spcPct val="110000"/>
+                <a:spcPct val="115000"/>
               </a:lnSpc>
               <a:spcBef>
-                <a:spcPts val="400"/>
+                <a:spcPts val="500"/>
               </a:spcBef>
             </a:pPr>
             <a:r>
-              <a:rPr sz="1100" b="0">
+              <a:rPr sz="1300" b="0">
                 <a:solidFill>
                   <a:srgbClr val="2E2C2C"/>
                 </a:solidFill>
@@ -15913,7 +15913,7 @@
           <a:p>
             <a:pPr algn="ctr"/>
             <a:r>
-              <a:rPr sz="900" b="1">
+              <a:rPr sz="1000" b="1">
                 <a:solidFill>
                   <a:srgbClr val="FFFFFF"/>
                 </a:solidFill>
@@ -15949,7 +15949,7 @@
           <a:p>
             <a:pPr algn="l"/>
             <a:r>
-              <a:rPr sz="1350" b="1">
+              <a:rPr sz="1500" b="1">
                 <a:solidFill>
                   <a:srgbClr val="113E6A"/>
                 </a:solidFill>
@@ -15962,14 +15962,14 @@
           <a:p>
             <a:pPr algn="l">
               <a:lnSpc>
-                <a:spcPct val="110000"/>
+                <a:spcPct val="115000"/>
               </a:lnSpc>
               <a:spcBef>
-                <a:spcPts val="400"/>
+                <a:spcPts val="500"/>
               </a:spcBef>
             </a:pPr>
             <a:r>
-              <a:rPr sz="1100" b="0">
+              <a:rPr sz="1300" b="0">
                 <a:solidFill>
                   <a:srgbClr val="2E2C2C"/>
                 </a:solidFill>
@@ -16069,7 +16069,7 @@
           <a:p>
             <a:pPr algn="ctr"/>
             <a:r>
-              <a:rPr sz="900" b="1">
+              <a:rPr sz="1000" b="1">
                 <a:solidFill>
                   <a:srgbClr val="FFFFFF"/>
                 </a:solidFill>
@@ -16105,7 +16105,7 @@
           <a:p>
             <a:pPr algn="l"/>
             <a:r>
-              <a:rPr sz="1350" b="1">
+              <a:rPr sz="1500" b="1">
                 <a:solidFill>
                   <a:srgbClr val="113E6A"/>
                 </a:solidFill>
@@ -16118,14 +16118,14 @@
           <a:p>
             <a:pPr algn="l">
               <a:lnSpc>
-                <a:spcPct val="110000"/>
+                <a:spcPct val="115000"/>
               </a:lnSpc>
               <a:spcBef>
-                <a:spcPts val="400"/>
+                <a:spcPts val="500"/>
               </a:spcBef>
             </a:pPr>
             <a:r>
-              <a:rPr sz="1100" b="0">
+              <a:rPr sz="1300" b="0">
                 <a:solidFill>
                   <a:srgbClr val="2E2C2C"/>
                 </a:solidFill>
@@ -19705,7 +19705,7 @@
           <a:p>
             <a:pPr algn="ctr"/>
             <a:r>
-              <a:rPr sz="900" b="1">
+              <a:rPr sz="1000" b="1">
                 <a:solidFill>
                   <a:srgbClr val="FFFFFF"/>
                 </a:solidFill>
@@ -19741,7 +19741,7 @@
           <a:p>
             <a:pPr algn="l"/>
             <a:r>
-              <a:rPr sz="1350" b="1">
+              <a:rPr sz="1400" b="1">
                 <a:solidFill>
                   <a:srgbClr val="113E6A"/>
                 </a:solidFill>
@@ -19761,7 +19761,7 @@
               </a:spcBef>
             </a:pPr>
             <a:r>
-              <a:rPr sz="1100" b="0">
+              <a:rPr sz="1200" b="0">
                 <a:solidFill>
                   <a:srgbClr val="2E2C2C"/>
                 </a:solidFill>
@@ -19861,7 +19861,7 @@
           <a:p>
             <a:pPr algn="ctr"/>
             <a:r>
-              <a:rPr sz="900" b="1">
+              <a:rPr sz="1000" b="1">
                 <a:solidFill>
                   <a:srgbClr val="FFFFFF"/>
                 </a:solidFill>
@@ -19897,7 +19897,7 @@
           <a:p>
             <a:pPr algn="l"/>
             <a:r>
-              <a:rPr sz="1350" b="1">
+              <a:rPr sz="1400" b="1">
                 <a:solidFill>
                   <a:srgbClr val="113E6A"/>
                 </a:solidFill>
@@ -19917,7 +19917,7 @@
               </a:spcBef>
             </a:pPr>
             <a:r>
-              <a:rPr sz="1100" b="0">
+              <a:rPr sz="1200" b="0">
                 <a:solidFill>
                   <a:srgbClr val="2E2C2C"/>
                 </a:solidFill>
@@ -20017,7 +20017,7 @@
           <a:p>
             <a:pPr algn="ctr"/>
             <a:r>
-              <a:rPr sz="900" b="1">
+              <a:rPr sz="1000" b="1">
                 <a:solidFill>
                   <a:srgbClr val="FFFFFF"/>
                 </a:solidFill>
@@ -20053,7 +20053,7 @@
           <a:p>
             <a:pPr algn="l"/>
             <a:r>
-              <a:rPr sz="1350" b="1">
+              <a:rPr sz="1400" b="1">
                 <a:solidFill>
                   <a:srgbClr val="113E6A"/>
                 </a:solidFill>
@@ -20073,7 +20073,7 @@
               </a:spcBef>
             </a:pPr>
             <a:r>
-              <a:rPr sz="1100" b="0">
+              <a:rPr sz="1200" b="0">
                 <a:solidFill>
                   <a:srgbClr val="2E2C2C"/>
                 </a:solidFill>
@@ -20173,7 +20173,7 @@
           <a:p>
             <a:pPr algn="ctr"/>
             <a:r>
-              <a:rPr sz="900" b="1">
+              <a:rPr sz="1000" b="1">
                 <a:solidFill>
                   <a:srgbClr val="FFFFFF"/>
                 </a:solidFill>
@@ -20209,7 +20209,7 @@
           <a:p>
             <a:pPr algn="l"/>
             <a:r>
-              <a:rPr sz="1350" b="1">
+              <a:rPr sz="1400" b="1">
                 <a:solidFill>
                   <a:srgbClr val="113E6A"/>
                 </a:solidFill>
@@ -20229,7 +20229,7 @@
               </a:spcBef>
             </a:pPr>
             <a:r>
-              <a:rPr sz="1100" b="0">
+              <a:rPr sz="1200" b="0">
                 <a:solidFill>
                   <a:srgbClr val="2E2C2C"/>
                 </a:solidFill>
@@ -20329,7 +20329,7 @@
           <a:p>
             <a:pPr algn="ctr"/>
             <a:r>
-              <a:rPr sz="900" b="1">
+              <a:rPr sz="1000" b="1">
                 <a:solidFill>
                   <a:srgbClr val="FFFFFF"/>
                 </a:solidFill>
@@ -20365,7 +20365,7 @@
           <a:p>
             <a:pPr algn="l"/>
             <a:r>
-              <a:rPr sz="1350" b="1">
+              <a:rPr sz="1400" b="1">
                 <a:solidFill>
                   <a:srgbClr val="113E6A"/>
                 </a:solidFill>
@@ -20385,7 +20385,7 @@
               </a:spcBef>
             </a:pPr>
             <a:r>
-              <a:rPr sz="1100" b="0">
+              <a:rPr sz="1200" b="0">
                 <a:solidFill>
                   <a:srgbClr val="2E2C2C"/>
                 </a:solidFill>
@@ -20485,7 +20485,7 @@
           <a:p>
             <a:pPr algn="ctr"/>
             <a:r>
-              <a:rPr sz="900" b="1">
+              <a:rPr sz="1000" b="1">
                 <a:solidFill>
                   <a:srgbClr val="FFFFFF"/>
                 </a:solidFill>
@@ -20521,7 +20521,7 @@
           <a:p>
             <a:pPr algn="l"/>
             <a:r>
-              <a:rPr sz="1350" b="1">
+              <a:rPr sz="1400" b="1">
                 <a:solidFill>
                   <a:srgbClr val="113E6A"/>
                 </a:solidFill>
@@ -20541,7 +20541,7 @@
               </a:spcBef>
             </a:pPr>
             <a:r>
-              <a:rPr sz="1100" b="0">
+              <a:rPr sz="1200" b="0">
                 <a:solidFill>
                   <a:srgbClr val="2E2C2C"/>
                 </a:solidFill>
@@ -21004,7 +21004,7 @@
           <a:p>
             <a:pPr algn="ctr"/>
             <a:r>
-              <a:rPr sz="900" b="1">
+              <a:rPr sz="1000" b="1">
                 <a:solidFill>
                   <a:srgbClr val="FFFFFF"/>
                 </a:solidFill>
@@ -21040,7 +21040,7 @@
           <a:p>
             <a:pPr algn="l"/>
             <a:r>
-              <a:rPr sz="1350" b="1">
+              <a:rPr sz="1400" b="1">
                 <a:solidFill>
                   <a:srgbClr val="113E6A"/>
                 </a:solidFill>
@@ -21060,7 +21060,7 @@
               </a:spcBef>
             </a:pPr>
             <a:r>
-              <a:rPr sz="1100" b="0">
+              <a:rPr sz="1200" b="0">
                 <a:solidFill>
                   <a:srgbClr val="2E2C2C"/>
                 </a:solidFill>
@@ -21160,7 +21160,7 @@
           <a:p>
             <a:pPr algn="ctr"/>
             <a:r>
-              <a:rPr sz="900" b="1">
+              <a:rPr sz="1000" b="1">
                 <a:solidFill>
                   <a:srgbClr val="FFFFFF"/>
                 </a:solidFill>
@@ -21196,7 +21196,7 @@
           <a:p>
             <a:pPr algn="l"/>
             <a:r>
-              <a:rPr sz="1350" b="1">
+              <a:rPr sz="1400" b="1">
                 <a:solidFill>
                   <a:srgbClr val="113E6A"/>
                 </a:solidFill>
@@ -21216,7 +21216,7 @@
               </a:spcBef>
             </a:pPr>
             <a:r>
-              <a:rPr sz="1100" b="0">
+              <a:rPr sz="1200" b="0">
                 <a:solidFill>
                   <a:srgbClr val="2E2C2C"/>
                 </a:solidFill>
@@ -21316,7 +21316,7 @@
           <a:p>
             <a:pPr algn="ctr"/>
             <a:r>
-              <a:rPr sz="900" b="1">
+              <a:rPr sz="1000" b="1">
                 <a:solidFill>
                   <a:srgbClr val="FFFFFF"/>
                 </a:solidFill>
@@ -21352,7 +21352,7 @@
           <a:p>
             <a:pPr algn="l"/>
             <a:r>
-              <a:rPr sz="1350" b="1">
+              <a:rPr sz="1400" b="1">
                 <a:solidFill>
                   <a:srgbClr val="113E6A"/>
                 </a:solidFill>
@@ -21372,7 +21372,7 @@
               </a:spcBef>
             </a:pPr>
             <a:r>
-              <a:rPr sz="1100" b="0">
+              <a:rPr sz="1200" b="0">
                 <a:solidFill>
                   <a:srgbClr val="2E2C2C"/>
                 </a:solidFill>
@@ -21472,7 +21472,7 @@
           <a:p>
             <a:pPr algn="ctr"/>
             <a:r>
-              <a:rPr sz="900" b="1">
+              <a:rPr sz="1000" b="1">
                 <a:solidFill>
                   <a:srgbClr val="FFFFFF"/>
                 </a:solidFill>
@@ -21508,7 +21508,7 @@
           <a:p>
             <a:pPr algn="l"/>
             <a:r>
-              <a:rPr sz="1350" b="1">
+              <a:rPr sz="1400" b="1">
                 <a:solidFill>
                   <a:srgbClr val="113E6A"/>
                 </a:solidFill>
@@ -21528,7 +21528,7 @@
               </a:spcBef>
             </a:pPr>
             <a:r>
-              <a:rPr sz="1100" b="0">
+              <a:rPr sz="1200" b="0">
                 <a:solidFill>
                   <a:srgbClr val="2E2C2C"/>
                 </a:solidFill>
@@ -21628,7 +21628,7 @@
           <a:p>
             <a:pPr algn="ctr"/>
             <a:r>
-              <a:rPr sz="900" b="1">
+              <a:rPr sz="1000" b="1">
                 <a:solidFill>
                   <a:srgbClr val="FFFFFF"/>
                 </a:solidFill>
@@ -21664,7 +21664,7 @@
           <a:p>
             <a:pPr algn="l"/>
             <a:r>
-              <a:rPr sz="1350" b="1">
+              <a:rPr sz="1400" b="1">
                 <a:solidFill>
                   <a:srgbClr val="113E6A"/>
                 </a:solidFill>
@@ -21684,7 +21684,7 @@
               </a:spcBef>
             </a:pPr>
             <a:r>
-              <a:rPr sz="1100" b="0">
+              <a:rPr sz="1200" b="0">
                 <a:solidFill>
                   <a:srgbClr val="2E2C2C"/>
                 </a:solidFill>
@@ -21784,7 +21784,7 @@
           <a:p>
             <a:pPr algn="ctr"/>
             <a:r>
-              <a:rPr sz="900" b="1">
+              <a:rPr sz="1000" b="1">
                 <a:solidFill>
                   <a:srgbClr val="FFFFFF"/>
                 </a:solidFill>
@@ -21820,7 +21820,7 @@
           <a:p>
             <a:pPr algn="l"/>
             <a:r>
-              <a:rPr sz="1350" b="1">
+              <a:rPr sz="1400" b="1">
                 <a:solidFill>
                   <a:srgbClr val="113E6A"/>
                 </a:solidFill>
@@ -21840,7 +21840,7 @@
               </a:spcBef>
             </a:pPr>
             <a:r>
-              <a:rPr sz="1100" b="0">
+              <a:rPr sz="1200" b="0">
                 <a:solidFill>
                   <a:srgbClr val="2E2C2C"/>
                 </a:solidFill>
@@ -28985,7 +28985,7 @@
           <a:p>
             <a:pPr algn="ctr"/>
             <a:r>
-              <a:rPr sz="900" b="1">
+              <a:rPr sz="1000" b="1">
                 <a:solidFill>
                   <a:srgbClr val="FFFFFF"/>
                 </a:solidFill>
@@ -29021,7 +29021,7 @@
           <a:p>
             <a:pPr algn="l"/>
             <a:r>
-              <a:rPr sz="1350" b="1">
+              <a:rPr sz="1500" b="1">
                 <a:solidFill>
                   <a:srgbClr val="113E6A"/>
                 </a:solidFill>
@@ -29034,14 +29034,14 @@
           <a:p>
             <a:pPr algn="l">
               <a:lnSpc>
-                <a:spcPct val="110000"/>
+                <a:spcPct val="115000"/>
               </a:lnSpc>
               <a:spcBef>
-                <a:spcPts val="400"/>
+                <a:spcPts val="500"/>
               </a:spcBef>
             </a:pPr>
             <a:r>
-              <a:rPr sz="1100" b="0">
+              <a:rPr sz="1300" b="0">
                 <a:solidFill>
                   <a:srgbClr val="2E2C2C"/>
                 </a:solidFill>
@@ -29141,7 +29141,7 @@
           <a:p>
             <a:pPr algn="ctr"/>
             <a:r>
-              <a:rPr sz="900" b="1">
+              <a:rPr sz="1000" b="1">
                 <a:solidFill>
                   <a:srgbClr val="FFFFFF"/>
                 </a:solidFill>
@@ -29177,7 +29177,7 @@
           <a:p>
             <a:pPr algn="l"/>
             <a:r>
-              <a:rPr sz="1350" b="1">
+              <a:rPr sz="1500" b="1">
                 <a:solidFill>
                   <a:srgbClr val="113E6A"/>
                 </a:solidFill>
@@ -29190,14 +29190,14 @@
           <a:p>
             <a:pPr algn="l">
               <a:lnSpc>
-                <a:spcPct val="110000"/>
+                <a:spcPct val="115000"/>
               </a:lnSpc>
               <a:spcBef>
-                <a:spcPts val="400"/>
+                <a:spcPts val="500"/>
               </a:spcBef>
             </a:pPr>
             <a:r>
-              <a:rPr sz="1100" b="0">
+              <a:rPr sz="1300" b="0">
                 <a:solidFill>
                   <a:srgbClr val="2E2C2C"/>
                 </a:solidFill>

--- a/docs/thesis/defense/答辩PPT-北航模板版.pptx
+++ b/docs/thesis/defense/答辩PPT-北航模板版.pptx
@@ -15793,7 +15793,7 @@
           <a:p>
             <a:pPr algn="l"/>
             <a:r>
-              <a:rPr sz="1500" b="1">
+              <a:rPr sz="1600" b="1">
                 <a:solidFill>
                   <a:srgbClr val="113E6A"/>
                 </a:solidFill>
@@ -15813,7 +15813,7 @@
               </a:spcBef>
             </a:pPr>
             <a:r>
-              <a:rPr sz="1300" b="0">
+              <a:rPr sz="1500" b="0">
                 <a:solidFill>
                   <a:srgbClr val="2E2C2C"/>
                 </a:solidFill>
@@ -15949,7 +15949,7 @@
           <a:p>
             <a:pPr algn="l"/>
             <a:r>
-              <a:rPr sz="1500" b="1">
+              <a:rPr sz="1600" b="1">
                 <a:solidFill>
                   <a:srgbClr val="113E6A"/>
                 </a:solidFill>
@@ -15969,7 +15969,7 @@
               </a:spcBef>
             </a:pPr>
             <a:r>
-              <a:rPr sz="1300" b="0">
+              <a:rPr sz="1500" b="0">
                 <a:solidFill>
                   <a:srgbClr val="2E2C2C"/>
                 </a:solidFill>
@@ -16105,7 +16105,7 @@
           <a:p>
             <a:pPr algn="l"/>
             <a:r>
-              <a:rPr sz="1500" b="1">
+              <a:rPr sz="1600" b="1">
                 <a:solidFill>
                   <a:srgbClr val="113E6A"/>
                 </a:solidFill>
@@ -16125,7 +16125,7 @@
               </a:spcBef>
             </a:pPr>
             <a:r>
-              <a:rPr sz="1300" b="0">
+              <a:rPr sz="1500" b="0">
                 <a:solidFill>
                   <a:srgbClr val="2E2C2C"/>
                 </a:solidFill>
@@ -19761,7 +19761,7 @@
               </a:spcBef>
             </a:pPr>
             <a:r>
-              <a:rPr sz="1200" b="0">
+              <a:rPr sz="1250" b="0">
                 <a:solidFill>
                   <a:srgbClr val="2E2C2C"/>
                 </a:solidFill>
@@ -19917,7 +19917,7 @@
               </a:spcBef>
             </a:pPr>
             <a:r>
-              <a:rPr sz="1200" b="0">
+              <a:rPr sz="1250" b="0">
                 <a:solidFill>
                   <a:srgbClr val="2E2C2C"/>
                 </a:solidFill>
@@ -20073,7 +20073,7 @@
               </a:spcBef>
             </a:pPr>
             <a:r>
-              <a:rPr sz="1200" b="0">
+              <a:rPr sz="1250" b="0">
                 <a:solidFill>
                   <a:srgbClr val="2E2C2C"/>
                 </a:solidFill>
@@ -20229,7 +20229,7 @@
               </a:spcBef>
             </a:pPr>
             <a:r>
-              <a:rPr sz="1200" b="0">
+              <a:rPr sz="1250" b="0">
                 <a:solidFill>
                   <a:srgbClr val="2E2C2C"/>
                 </a:solidFill>
@@ -20385,7 +20385,7 @@
               </a:spcBef>
             </a:pPr>
             <a:r>
-              <a:rPr sz="1200" b="0">
+              <a:rPr sz="1250" b="0">
                 <a:solidFill>
                   <a:srgbClr val="2E2C2C"/>
                 </a:solidFill>
@@ -20541,7 +20541,7 @@
               </a:spcBef>
             </a:pPr>
             <a:r>
-              <a:rPr sz="1200" b="0">
+              <a:rPr sz="1250" b="0">
                 <a:solidFill>
                   <a:srgbClr val="2E2C2C"/>
                 </a:solidFill>
@@ -21060,7 +21060,7 @@
               </a:spcBef>
             </a:pPr>
             <a:r>
-              <a:rPr sz="1200" b="0">
+              <a:rPr sz="1250" b="0">
                 <a:solidFill>
                   <a:srgbClr val="2E2C2C"/>
                 </a:solidFill>
@@ -21216,7 +21216,7 @@
               </a:spcBef>
             </a:pPr>
             <a:r>
-              <a:rPr sz="1200" b="0">
+              <a:rPr sz="1250" b="0">
                 <a:solidFill>
                   <a:srgbClr val="2E2C2C"/>
                 </a:solidFill>
@@ -21372,7 +21372,7 @@
               </a:spcBef>
             </a:pPr>
             <a:r>
-              <a:rPr sz="1200" b="0">
+              <a:rPr sz="1250" b="0">
                 <a:solidFill>
                   <a:srgbClr val="2E2C2C"/>
                 </a:solidFill>
@@ -21528,7 +21528,7 @@
               </a:spcBef>
             </a:pPr>
             <a:r>
-              <a:rPr sz="1200" b="0">
+              <a:rPr sz="1250" b="0">
                 <a:solidFill>
                   <a:srgbClr val="2E2C2C"/>
                 </a:solidFill>
@@ -21684,7 +21684,7 @@
               </a:spcBef>
             </a:pPr>
             <a:r>
-              <a:rPr sz="1200" b="0">
+              <a:rPr sz="1250" b="0">
                 <a:solidFill>
                   <a:srgbClr val="2E2C2C"/>
                 </a:solidFill>
@@ -21840,7 +21840,7 @@
               </a:spcBef>
             </a:pPr>
             <a:r>
-              <a:rPr sz="1200" b="0">
+              <a:rPr sz="1250" b="0">
                 <a:solidFill>
                   <a:srgbClr val="2E2C2C"/>
                 </a:solidFill>
@@ -29021,7 +29021,7 @@
           <a:p>
             <a:pPr algn="l"/>
             <a:r>
-              <a:rPr sz="1500" b="1">
+              <a:rPr sz="1600" b="1">
                 <a:solidFill>
                   <a:srgbClr val="113E6A"/>
                 </a:solidFill>
@@ -29041,7 +29041,7 @@
               </a:spcBef>
             </a:pPr>
             <a:r>
-              <a:rPr sz="1300" b="0">
+              <a:rPr sz="1500" b="0">
                 <a:solidFill>
                   <a:srgbClr val="2E2C2C"/>
                 </a:solidFill>
@@ -29177,7 +29177,7 @@
           <a:p>
             <a:pPr algn="l"/>
             <a:r>
-              <a:rPr sz="1500" b="1">
+              <a:rPr sz="1600" b="1">
                 <a:solidFill>
                   <a:srgbClr val="113E6A"/>
                 </a:solidFill>
@@ -29197,7 +29197,7 @@
               </a:spcBef>
             </a:pPr>
             <a:r>
-              <a:rPr sz="1300" b="0">
+              <a:rPr sz="1500" b="0">
                 <a:solidFill>
                   <a:srgbClr val="2E2C2C"/>
                 </a:solidFill>

--- a/docs/thesis/defense/答辩PPT-北航模板版.pptx
+++ b/docs/thesis/defense/答辩PPT-北航模板版.pptx
@@ -28859,54 +28859,14 @@
       </p:sp>
       <p:sp>
         <p:nvSpPr>
-          <p:cNvPr id="9003" name="TextBox 9002"/>
-          <p:cNvSpPr txBox="1"/>
-          <p:nvPr/>
-        </p:nvSpPr>
-        <p:spPr>
-          <a:xfrm>
-            <a:off x="566928" y="1261872"/>
-            <a:ext cx="10881360" cy="438912"/>
-          </a:xfrm>
-          <a:prstGeom prst="rect">
-            <a:avLst/>
-          </a:prstGeom>
-          <a:noFill/>
-        </p:spPr>
-        <p:txBody>
-          <a:bodyPr wrap="square" anchor="ctr" lIns="0" rIns="0" tIns="0" bIns="0">
-            <a:spAutoFit/>
-          </a:bodyPr>
-          <a:lstStyle/>
-          <a:p>
-            <a:pPr algn="l">
-              <a:lnSpc>
-                <a:spcPct val="110000"/>
-              </a:lnSpc>
-            </a:pPr>
-            <a:r>
-              <a:rPr sz="1800" b="1">
-                <a:solidFill>
-                  <a:srgbClr val="0070C0"/>
-                </a:solidFill>
-                <a:latin typeface="Arial"/>
-                <a:ea typeface="微软雅黑"/>
-              </a:rPr>
-              <a:t>两个创新：把 Binder 放进 Scheduler 进程；用四层容错守住“至多绑定一次”</a:t>
-            </a:r>
-          </a:p>
-        </p:txBody>
-      </p:sp>
-      <p:sp>
-        <p:nvSpPr>
-          <p:cNvPr id="9004" name="Rounded Rectangle 9003"/>
+          <p:cNvPr id="9003" name="Rounded Rectangle 9002"/>
           <p:cNvSpPr/>
           <p:nvPr/>
         </p:nvSpPr>
         <p:spPr>
           <a:xfrm>
-            <a:off x="566928" y="1874519"/>
-            <a:ext cx="5404104" cy="2103120"/>
+            <a:off x="566928" y="1755648"/>
+            <a:ext cx="5404104" cy="2331720"/>
           </a:xfrm>
           <a:prstGeom prst="roundRect">
             <a:avLst/>
@@ -28945,13 +28905,13 @@
       </p:sp>
       <p:sp>
         <p:nvSpPr>
-          <p:cNvPr id="9005" name="Oval 9004"/>
+          <p:cNvPr id="9004" name="Oval 9003"/>
           <p:cNvSpPr/>
           <p:nvPr/>
         </p:nvSpPr>
         <p:spPr>
           <a:xfrm>
-            <a:off x="713232" y="2011679"/>
+            <a:off x="713232" y="1892807"/>
             <a:ext cx="274320" cy="274320"/>
           </a:xfrm>
           <a:prstGeom prst="ellipse">
@@ -28999,14 +28959,14 @@
       </p:sp>
       <p:sp>
         <p:nvSpPr>
-          <p:cNvPr id="9006" name="TextBox 9005"/>
+          <p:cNvPr id="9005" name="TextBox 9004"/>
           <p:cNvSpPr txBox="1"/>
           <p:nvPr/>
         </p:nvSpPr>
         <p:spPr>
           <a:xfrm>
-            <a:off x="1078992" y="2011679"/>
-            <a:ext cx="4764024" cy="1901951"/>
+            <a:off x="1078992" y="1892807"/>
+            <a:ext cx="4764024" cy="2130551"/>
           </a:xfrm>
           <a:prstGeom prst="rect">
             <a:avLst/>
@@ -29055,14 +29015,14 @@
       </p:sp>
       <p:sp>
         <p:nvSpPr>
-          <p:cNvPr id="9007" name="Rounded Rectangle 9006"/>
+          <p:cNvPr id="9006" name="Rounded Rectangle 9005"/>
           <p:cNvSpPr/>
           <p:nvPr/>
         </p:nvSpPr>
         <p:spPr>
           <a:xfrm>
-            <a:off x="6227064" y="1874519"/>
-            <a:ext cx="5404104" cy="2103120"/>
+            <a:off x="6227064" y="1755648"/>
+            <a:ext cx="5404104" cy="2331720"/>
           </a:xfrm>
           <a:prstGeom prst="roundRect">
             <a:avLst/>
@@ -29101,13 +29061,13 @@
       </p:sp>
       <p:sp>
         <p:nvSpPr>
-          <p:cNvPr id="9008" name="Oval 9007"/>
+          <p:cNvPr id="9007" name="Oval 9006"/>
           <p:cNvSpPr/>
           <p:nvPr/>
         </p:nvSpPr>
         <p:spPr>
           <a:xfrm>
-            <a:off x="6373368" y="2011679"/>
+            <a:off x="6373368" y="1892807"/>
             <a:ext cx="274320" cy="274320"/>
           </a:xfrm>
           <a:prstGeom prst="ellipse">
@@ -29155,14 +29115,14 @@
       </p:sp>
       <p:sp>
         <p:nvSpPr>
-          <p:cNvPr id="9009" name="TextBox 9008"/>
+          <p:cNvPr id="9008" name="TextBox 9007"/>
           <p:cNvSpPr txBox="1"/>
           <p:nvPr/>
         </p:nvSpPr>
         <p:spPr>
           <a:xfrm>
-            <a:off x="6739128" y="2011679"/>
-            <a:ext cx="4764024" cy="1901951"/>
+            <a:off x="6739128" y="1892807"/>
+            <a:ext cx="4764024" cy="2130551"/>
           </a:xfrm>
           <a:prstGeom prst="rect">
             <a:avLst/>
@@ -29211,13 +29171,13 @@
       </p:sp>
       <p:sp>
         <p:nvSpPr>
-          <p:cNvPr id="9010" name="Rounded Rectangle 9009"/>
+          <p:cNvPr id="9009" name="Rounded Rectangle 9008"/>
           <p:cNvSpPr/>
           <p:nvPr/>
         </p:nvSpPr>
         <p:spPr>
           <a:xfrm>
-            <a:off x="566928" y="4343400"/>
+            <a:off x="566928" y="4553712"/>
             <a:ext cx="11064240" cy="868680"/>
           </a:xfrm>
           <a:prstGeom prst="roundRect">
@@ -29257,13 +29217,13 @@
       </p:sp>
       <p:sp>
         <p:nvSpPr>
-          <p:cNvPr id="9011" name="Rectangle 9010"/>
+          <p:cNvPr id="9010" name="Rectangle 9009"/>
           <p:cNvSpPr/>
           <p:nvPr/>
         </p:nvSpPr>
         <p:spPr>
           <a:xfrm>
-            <a:off x="566928" y="4343400"/>
+            <a:off x="566928" y="4553712"/>
             <a:ext cx="73152" cy="868680"/>
           </a:xfrm>
           <a:prstGeom prst="rect">
@@ -29301,13 +29261,13 @@
       </p:sp>
       <p:sp>
         <p:nvSpPr>
-          <p:cNvPr id="9012" name="TextBox 9011"/>
+          <p:cNvPr id="9011" name="TextBox 9010"/>
           <p:cNvSpPr txBox="1"/>
           <p:nvPr/>
         </p:nvSpPr>
         <p:spPr>
           <a:xfrm>
-            <a:off x="786384" y="4434840"/>
+            <a:off x="786384" y="4645152"/>
             <a:ext cx="10607040" cy="685800"/>
           </a:xfrm>
           <a:prstGeom prst="rect">
@@ -29341,7 +29301,7 @@
       </p:sp>
       <p:sp>
         <p:nvSpPr>
-          <p:cNvPr id="9013" name="TextBox 9012"/>
+          <p:cNvPr id="9012" name="TextBox 9011"/>
           <p:cNvSpPr txBox="1"/>
           <p:nvPr/>
         </p:nvSpPr>

--- a/docs/thesis/defense/答辩PPT-北航模板版.pptx
+++ b/docs/thesis/defense/答辩PPT-北航模板版.pptx
@@ -29294,7 +29294,7 @@
                 <a:latin typeface="Arial"/>
                 <a:ea typeface="微软雅黑"/>
               </a:rPr>
-              <a:t>两条创新指向同一目标：不改 API 的前提下，让分布式调度既跑得快，又绑得对。</a:t>
+              <a:t>两条创新指向同一目标：不改 API 的前提下，让分布式调度既跑得快，稳定性更高。</a:t>
             </a:r>
           </a:p>
         </p:txBody>

--- a/docs/thesis/defense/答辩PPT-北航模板版.pptx
+++ b/docs/thesis/defense/答辩PPT-北航模板版.pptx
@@ -29079,7 +29079,7 @@
                 <a:latin typeface="Arial"/>
                 <a:ea typeface="微软雅黑"/>
               </a:rPr>
-              <a:t>三层职责</a:t>
+              <a:t>整体架构图</a:t>
             </a:r>
           </a:p>
         </p:txBody>

--- a/docs/thesis/defense/答辩PPT-北航模板版.pptx
+++ b/docs/thesis/defense/答辩PPT-北航模板版.pptx
@@ -29084,49 +29084,9 @@
           </a:p>
         </p:txBody>
       </p:sp>
-      <p:sp>
-        <p:nvSpPr>
-          <p:cNvPr id="9003" name="TextBox 9002"/>
-          <p:cNvSpPr txBox="1"/>
-          <p:nvPr/>
-        </p:nvSpPr>
-        <p:spPr>
-          <a:xfrm>
-            <a:off x="566928" y="1261872"/>
-            <a:ext cx="10881360" cy="438912"/>
-          </a:xfrm>
-          <a:prstGeom prst="rect">
-            <a:avLst/>
-          </a:prstGeom>
-          <a:noFill/>
-        </p:spPr>
-        <p:txBody>
-          <a:bodyPr wrap="square" anchor="ctr" lIns="0" rIns="0" tIns="0" bIns="0">
-            <a:spAutoFit/>
-          </a:bodyPr>
-          <a:lstStyle/>
-          <a:p>
-            <a:pPr algn="l">
-              <a:lnSpc>
-                <a:spcPct val="110000"/>
-              </a:lnSpc>
-            </a:pPr>
-            <a:r>
-              <a:rPr sz="1800" b="1">
-                <a:solidFill>
-                  <a:srgbClr val="0070C0"/>
-                </a:solidFill>
-                <a:latin typeface="Arial"/>
-                <a:ea typeface="微软雅黑"/>
-              </a:rPr>
-              <a:t>分区之间无锁并发，状态推进全部由 Watch 事件驱动</a:t>
-            </a:r>
-          </a:p>
-        </p:txBody>
-      </p:sp>
       <p:pic>
         <p:nvPicPr>
-          <p:cNvPr id="9004" name="Picture 9003" descr="fig3-1-system-arch.png"/>
+          <p:cNvPr id="9003" name="Picture 9002" descr="fig3-1-system-arch.png"/>
           <p:cNvPicPr>
             <a:picLocks noChangeAspect="1"/>
           </p:cNvPicPr>
@@ -29140,8 +29100,8 @@
         </p:blipFill>
         <p:spPr>
           <a:xfrm>
-            <a:off x="5806440" y="2587294"/>
-            <a:ext cx="5852160" cy="2597811"/>
+            <a:off x="2115464" y="868680"/>
+            <a:ext cx="7930591" cy="3520440"/>
           </a:xfrm>
           <a:prstGeom prst="rect">
             <a:avLst/>
@@ -29150,14 +29110,104 @@
       </p:pic>
       <p:sp>
         <p:nvSpPr>
-          <p:cNvPr id="9005" name="TextBox 9004"/>
+          <p:cNvPr id="9004" name="Rounded Rectangle 9003"/>
+          <p:cNvSpPr/>
+          <p:nvPr/>
+        </p:nvSpPr>
+        <p:spPr>
+          <a:xfrm>
+            <a:off x="566928" y="4590288"/>
+            <a:ext cx="3535680" cy="1481328"/>
+          </a:xfrm>
+          <a:prstGeom prst="roundRect">
+            <a:avLst/>
+          </a:prstGeom>
+          <a:solidFill>
+            <a:srgbClr val="FFFFFF"/>
+          </a:solidFill>
+          <a:ln w="9525">
+            <a:solidFill>
+              <a:srgbClr val="D6E3F0"/>
+            </a:solidFill>
+          </a:ln>
+          <a:effectLst/>
+        </p:spPr>
+        <p:style>
+          <a:lnRef idx="1">
+            <a:schemeClr val="accent1"/>
+          </a:lnRef>
+          <a:fillRef idx="3">
+            <a:schemeClr val="accent1"/>
+          </a:fillRef>
+          <a:effectRef idx="2">
+            <a:schemeClr val="accent1"/>
+          </a:effectRef>
+          <a:fontRef idx="minor">
+            <a:schemeClr val="lt1"/>
+          </a:fontRef>
+        </p:style>
+        <p:txBody>
+          <a:bodyPr rtlCol="0" anchor="ctr"/>
+          <a:lstStyle/>
+          <a:p>
+            <a:pPr algn="ctr"/>
+          </a:p>
+        </p:txBody>
+      </p:sp>
+      <p:sp>
+        <p:nvSpPr>
+          <p:cNvPr id="9005" name="Rectangle 9004"/>
+          <p:cNvSpPr/>
+          <p:nvPr/>
+        </p:nvSpPr>
+        <p:spPr>
+          <a:xfrm>
+            <a:off x="566928" y="4590288"/>
+            <a:ext cx="50292" cy="1481328"/>
+          </a:xfrm>
+          <a:prstGeom prst="rect">
+            <a:avLst/>
+          </a:prstGeom>
+          <a:solidFill>
+            <a:srgbClr val="113E6A"/>
+          </a:solidFill>
+          <a:ln>
+            <a:noFill/>
+          </a:ln>
+          <a:effectLst/>
+        </p:spPr>
+        <p:style>
+          <a:lnRef idx="1">
+            <a:schemeClr val="accent1"/>
+          </a:lnRef>
+          <a:fillRef idx="3">
+            <a:schemeClr val="accent1"/>
+          </a:fillRef>
+          <a:effectRef idx="2">
+            <a:schemeClr val="accent1"/>
+          </a:effectRef>
+          <a:fontRef idx="minor">
+            <a:schemeClr val="lt1"/>
+          </a:fontRef>
+        </p:style>
+        <p:txBody>
+          <a:bodyPr rtlCol="0" anchor="ctr"/>
+          <a:lstStyle/>
+          <a:p>
+            <a:pPr algn="ctr"/>
+          </a:p>
+        </p:txBody>
+      </p:sp>
+      <p:sp>
+        <p:nvSpPr>
+          <p:cNvPr id="9006" name="TextBox 9005"/>
           <p:cNvSpPr txBox="1"/>
           <p:nvPr/>
         </p:nvSpPr>
         <p:spPr>
           <a:xfrm>
-            <a:off x="566928" y="2011680"/>
-            <a:ext cx="5029200" cy="1417320"/>
+            <a:off x="749808" y="4700016"/>
+            <a:ext cx="3224784" cy="1298448"/>
           </a:xfrm>
           <a:prstGeom prst="rect">
             <a:avLst/>
@@ -29170,67 +29220,335 @@
           </a:bodyPr>
           <a:lstStyle/>
           <a:p>
+            <a:pPr algn="l"/>
+            <a:r>
+              <a:rPr sz="1500" b="1">
+                <a:solidFill>
+                  <a:srgbClr val="113E6A"/>
+                </a:solidFill>
+                <a:latin typeface="Arial"/>
+                <a:ea typeface="微软雅黑"/>
+              </a:rPr>
+              <a:t>Dispatcher</a:t>
+            </a:r>
+          </a:p>
+          <a:p>
             <a:pPr algn="l">
               <a:lnSpc>
-                <a:spcPct val="115000"/>
+                <a:spcPct val="118000"/>
               </a:lnSpc>
+              <a:spcBef>
+                <a:spcPts val="400"/>
+              </a:spcBef>
             </a:pPr>
             <a:r>
-              <a:rPr sz="1550" b="0">
+              <a:rPr sz="1250" b="0">
                 <a:solidFill>
                   <a:srgbClr val="2E2C2C"/>
                 </a:solidFill>
                 <a:latin typeface="Arial"/>
                 <a:ea typeface="微软雅黑"/>
               </a:rPr>
-              <a:t>▪  Dispatcher：分区分配与回退</a:t>
+              <a:t>单实例（Leader Election）。维护节点分区表，按分区把待调度 Pod 分发到对应 Scheduler；绑定失败时清理调度注解，触发全局重分发。</a:t>
+            </a:r>
+          </a:p>
+        </p:txBody>
+      </p:sp>
+      <p:sp>
+        <p:nvSpPr>
+          <p:cNvPr id="9007" name="Rounded Rectangle 9006"/>
+          <p:cNvSpPr/>
+          <p:nvPr/>
+        </p:nvSpPr>
+        <p:spPr>
+          <a:xfrm>
+            <a:off x="4331208" y="4590288"/>
+            <a:ext cx="3535680" cy="1481328"/>
+          </a:xfrm>
+          <a:prstGeom prst="roundRect">
+            <a:avLst/>
+          </a:prstGeom>
+          <a:solidFill>
+            <a:srgbClr val="FFFFFF"/>
+          </a:solidFill>
+          <a:ln w="9525">
+            <a:solidFill>
+              <a:srgbClr val="D6E3F0"/>
+            </a:solidFill>
+          </a:ln>
+          <a:effectLst/>
+        </p:spPr>
+        <p:style>
+          <a:lnRef idx="1">
+            <a:schemeClr val="accent1"/>
+          </a:lnRef>
+          <a:fillRef idx="3">
+            <a:schemeClr val="accent1"/>
+          </a:fillRef>
+          <a:effectRef idx="2">
+            <a:schemeClr val="accent1"/>
+          </a:effectRef>
+          <a:fontRef idx="minor">
+            <a:schemeClr val="lt1"/>
+          </a:fontRef>
+        </p:style>
+        <p:txBody>
+          <a:bodyPr rtlCol="0" anchor="ctr"/>
+          <a:lstStyle/>
+          <a:p>
+            <a:pPr algn="ctr"/>
+          </a:p>
+        </p:txBody>
+      </p:sp>
+      <p:sp>
+        <p:nvSpPr>
+          <p:cNvPr id="9008" name="Rectangle 9007"/>
+          <p:cNvSpPr/>
+          <p:nvPr/>
+        </p:nvSpPr>
+        <p:spPr>
+          <a:xfrm>
+            <a:off x="4331208" y="4590288"/>
+            <a:ext cx="50292" cy="1481328"/>
+          </a:xfrm>
+          <a:prstGeom prst="rect">
+            <a:avLst/>
+          </a:prstGeom>
+          <a:solidFill>
+            <a:srgbClr val="113E6A"/>
+          </a:solidFill>
+          <a:ln>
+            <a:noFill/>
+          </a:ln>
+          <a:effectLst/>
+        </p:spPr>
+        <p:style>
+          <a:lnRef idx="1">
+            <a:schemeClr val="accent1"/>
+          </a:lnRef>
+          <a:fillRef idx="3">
+            <a:schemeClr val="accent1"/>
+          </a:fillRef>
+          <a:effectRef idx="2">
+            <a:schemeClr val="accent1"/>
+          </a:effectRef>
+          <a:fontRef idx="minor">
+            <a:schemeClr val="lt1"/>
+          </a:fontRef>
+        </p:style>
+        <p:txBody>
+          <a:bodyPr rtlCol="0" anchor="ctr"/>
+          <a:lstStyle/>
+          <a:p>
+            <a:pPr algn="ctr"/>
+          </a:p>
+        </p:txBody>
+      </p:sp>
+      <p:sp>
+        <p:nvSpPr>
+          <p:cNvPr id="9009" name="TextBox 9008"/>
+          <p:cNvSpPr txBox="1"/>
+          <p:nvPr/>
+        </p:nvSpPr>
+        <p:spPr>
+          <a:xfrm>
+            <a:off x="4514088" y="4700016"/>
+            <a:ext cx="3224784" cy="1298448"/>
+          </a:xfrm>
+          <a:prstGeom prst="rect">
+            <a:avLst/>
+          </a:prstGeom>
+          <a:noFill/>
+        </p:spPr>
+        <p:txBody>
+          <a:bodyPr wrap="square" anchor="t" lIns="0" rIns="0" tIns="0" bIns="0">
+            <a:spAutoFit/>
+          </a:bodyPr>
+          <a:lstStyle/>
+          <a:p>
+            <a:pPr algn="l"/>
+            <a:r>
+              <a:rPr sz="1500" b="1">
+                <a:solidFill>
+                  <a:srgbClr val="113E6A"/>
+                </a:solidFill>
+                <a:latin typeface="Arial"/>
+                <a:ea typeface="微软雅黑"/>
+              </a:rPr>
+              <a:t>Scheduler</a:t>
             </a:r>
           </a:p>
           <a:p>
             <a:pPr algn="l">
               <a:lnSpc>
-                <a:spcPct val="115000"/>
+                <a:spcPct val="118000"/>
               </a:lnSpc>
               <a:spcBef>
-                <a:spcPts val="1400"/>
+                <a:spcPts val="400"/>
               </a:spcBef>
             </a:pPr>
             <a:r>
-              <a:rPr sz="1550" b="0">
+              <a:rPr sz="1250" b="0">
                 <a:solidFill>
                   <a:srgbClr val="2E2C2C"/>
                 </a:solidFill>
                 <a:latin typeface="Arial"/>
                 <a:ea typeface="微软雅黑"/>
               </a:rPr>
-              <a:t>▪  Scheduler：Filter/Score/Reserve</a:t>
+              <a:t>多实例水平扩展。只调度本分区内的节点，依次执行 Filter / Score / Reserve，产出目标节点后交给 Binder 落盘。</a:t>
+            </a:r>
+          </a:p>
+        </p:txBody>
+      </p:sp>
+      <p:sp>
+        <p:nvSpPr>
+          <p:cNvPr id="9010" name="Rounded Rectangle 9009"/>
+          <p:cNvSpPr/>
+          <p:nvPr/>
+        </p:nvSpPr>
+        <p:spPr>
+          <a:xfrm>
+            <a:off x="8095488" y="4590288"/>
+            <a:ext cx="3535680" cy="1481328"/>
+          </a:xfrm>
+          <a:prstGeom prst="roundRect">
+            <a:avLst/>
+          </a:prstGeom>
+          <a:solidFill>
+            <a:srgbClr val="FFFFFF"/>
+          </a:solidFill>
+          <a:ln w="9525">
+            <a:solidFill>
+              <a:srgbClr val="D6E3F0"/>
+            </a:solidFill>
+          </a:ln>
+          <a:effectLst/>
+        </p:spPr>
+        <p:style>
+          <a:lnRef idx="1">
+            <a:schemeClr val="accent1"/>
+          </a:lnRef>
+          <a:fillRef idx="3">
+            <a:schemeClr val="accent1"/>
+          </a:fillRef>
+          <a:effectRef idx="2">
+            <a:schemeClr val="accent1"/>
+          </a:effectRef>
+          <a:fontRef idx="minor">
+            <a:schemeClr val="lt1"/>
+          </a:fontRef>
+        </p:style>
+        <p:txBody>
+          <a:bodyPr rtlCol="0" anchor="ctr"/>
+          <a:lstStyle/>
+          <a:p>
+            <a:pPr algn="ctr"/>
+          </a:p>
+        </p:txBody>
+      </p:sp>
+      <p:sp>
+        <p:nvSpPr>
+          <p:cNvPr id="9011" name="Rectangle 9010"/>
+          <p:cNvSpPr/>
+          <p:nvPr/>
+        </p:nvSpPr>
+        <p:spPr>
+          <a:xfrm>
+            <a:off x="8095488" y="4590288"/>
+            <a:ext cx="50292" cy="1481328"/>
+          </a:xfrm>
+          <a:prstGeom prst="rect">
+            <a:avLst/>
+          </a:prstGeom>
+          <a:solidFill>
+            <a:srgbClr val="113E6A"/>
+          </a:solidFill>
+          <a:ln>
+            <a:noFill/>
+          </a:ln>
+          <a:effectLst/>
+        </p:spPr>
+        <p:style>
+          <a:lnRef idx="1">
+            <a:schemeClr val="accent1"/>
+          </a:lnRef>
+          <a:fillRef idx="3">
+            <a:schemeClr val="accent1"/>
+          </a:fillRef>
+          <a:effectRef idx="2">
+            <a:schemeClr val="accent1"/>
+          </a:effectRef>
+          <a:fontRef idx="minor">
+            <a:schemeClr val="lt1"/>
+          </a:fontRef>
+        </p:style>
+        <p:txBody>
+          <a:bodyPr rtlCol="0" anchor="ctr"/>
+          <a:lstStyle/>
+          <a:p>
+            <a:pPr algn="ctr"/>
+          </a:p>
+        </p:txBody>
+      </p:sp>
+      <p:sp>
+        <p:nvSpPr>
+          <p:cNvPr id="9012" name="TextBox 9011"/>
+          <p:cNvSpPr txBox="1"/>
+          <p:nvPr/>
+        </p:nvSpPr>
+        <p:spPr>
+          <a:xfrm>
+            <a:off x="8278367" y="4700016"/>
+            <a:ext cx="3224784" cy="1298448"/>
+          </a:xfrm>
+          <a:prstGeom prst="rect">
+            <a:avLst/>
+          </a:prstGeom>
+          <a:noFill/>
+        </p:spPr>
+        <p:txBody>
+          <a:bodyPr wrap="square" anchor="t" lIns="0" rIns="0" tIns="0" bIns="0">
+            <a:spAutoFit/>
+          </a:bodyPr>
+          <a:lstStyle/>
+          <a:p>
+            <a:pPr algn="l"/>
+            <a:r>
+              <a:rPr sz="1500" b="1">
+                <a:solidFill>
+                  <a:srgbClr val="113E6A"/>
+                </a:solidFill>
+                <a:latin typeface="Arial"/>
+                <a:ea typeface="微软雅黑"/>
+              </a:rPr>
+              <a:t>Binder</a:t>
             </a:r>
           </a:p>
           <a:p>
             <a:pPr algn="l">
               <a:lnSpc>
-                <a:spcPct val="115000"/>
+                <a:spcPct val="118000"/>
               </a:lnSpc>
               <a:spcBef>
-                <a:spcPts val="1400"/>
+                <a:spcPts val="400"/>
               </a:spcBef>
             </a:pPr>
             <a:r>
-              <a:rPr sz="1550" b="0">
+              <a:rPr sz="1250" b="0">
                 <a:solidFill>
                   <a:srgbClr val="2E2C2C"/>
                 </a:solidFill>
                 <a:latin typeface="Arial"/>
                 <a:ea typeface="微软雅黑"/>
               </a:rPr>
-              <a:t>▪  Binder：Bind 原子写与失败处理</a:t>
-            </a:r>
-          </a:p>
-        </p:txBody>
-      </p:sp>
-      <p:sp>
-        <p:nvSpPr>
-          <p:cNvPr id="9006" name="TextBox 9005"/>
+              <a:t>与 Scheduler 同进程。执行 Bind 子资源原子写；失败时按四层机制重试、回收孤儿状态，必要时上升到跨实例回退。</a:t>
+            </a:r>
+          </a:p>
+        </p:txBody>
+      </p:sp>
+      <p:sp>
+        <p:nvSpPr>
+          <p:cNvPr id="9013" name="TextBox 9012"/>
           <p:cNvSpPr txBox="1"/>
           <p:nvPr/>
         </p:nvSpPr>

--- a/docs/thesis/defense/答辩PPT-北航模板版.pptx
+++ b/docs/thesis/defense/答辩PPT-北航模板版.pptx
@@ -29869,49 +29869,9 @@
           </a:p>
         </p:txBody>
       </p:sp>
-      <p:sp>
-        <p:nvSpPr>
-          <p:cNvPr id="9003" name="TextBox 9002"/>
-          <p:cNvSpPr txBox="1"/>
-          <p:nvPr/>
-        </p:nvSpPr>
-        <p:spPr>
-          <a:xfrm>
-            <a:off x="566928" y="1261872"/>
-            <a:ext cx="10881360" cy="438912"/>
-          </a:xfrm>
-          <a:prstGeom prst="rect">
-            <a:avLst/>
-          </a:prstGeom>
-          <a:noFill/>
-        </p:spPr>
-        <p:txBody>
-          <a:bodyPr wrap="square" anchor="ctr" lIns="0" rIns="0" tIns="0" bIns="0">
-            <a:spAutoFit/>
-          </a:bodyPr>
-          <a:lstStyle/>
-          <a:p>
-            <a:pPr algn="l">
-              <a:lnSpc>
-                <a:spcPct val="110000"/>
-              </a:lnSpc>
-            </a:pPr>
-            <a:r>
-              <a:rPr sz="1800" b="1">
-                <a:solidFill>
-                  <a:srgbClr val="0070C0"/>
-                </a:solidFill>
-                <a:latin typeface="Arial"/>
-                <a:ea typeface="微软雅黑"/>
-              </a:rPr>
-              <a:t>先校验归属、再选分区、然后入队——它不选节点，只决定 Pod 去哪</a:t>
-            </a:r>
-          </a:p>
-        </p:txBody>
-      </p:sp>
       <p:pic>
         <p:nvPicPr>
-          <p:cNvPr id="9004" name="Picture 9003" descr="fig3-3-dispatcher-flow.png"/>
+          <p:cNvPr id="9003" name="Picture 9002" descr="fig3-3-dispatcher-flow.png"/>
           <p:cNvPicPr>
             <a:picLocks noChangeAspect="1"/>
           </p:cNvPicPr>
@@ -29925,8 +29885,8 @@
         </p:blipFill>
         <p:spPr>
           <a:xfrm>
-            <a:off x="4892040" y="1666984"/>
-            <a:ext cx="6720840" cy="4246406"/>
+            <a:off x="3150114" y="868680"/>
+            <a:ext cx="5861290" cy="3703320"/>
           </a:xfrm>
           <a:prstGeom prst="rect">
             <a:avLst/>
@@ -29935,14 +29895,104 @@
       </p:pic>
       <p:sp>
         <p:nvSpPr>
-          <p:cNvPr id="9005" name="TextBox 9004"/>
+          <p:cNvPr id="9004" name="Rounded Rectangle 9003"/>
+          <p:cNvSpPr/>
+          <p:nvPr/>
+        </p:nvSpPr>
+        <p:spPr>
+          <a:xfrm>
+            <a:off x="566928" y="4754880"/>
+            <a:ext cx="3535680" cy="1417320"/>
+          </a:xfrm>
+          <a:prstGeom prst="roundRect">
+            <a:avLst/>
+          </a:prstGeom>
+          <a:solidFill>
+            <a:srgbClr val="FFFFFF"/>
+          </a:solidFill>
+          <a:ln w="9525">
+            <a:solidFill>
+              <a:srgbClr val="D6E3F0"/>
+            </a:solidFill>
+          </a:ln>
+          <a:effectLst/>
+        </p:spPr>
+        <p:style>
+          <a:lnRef idx="1">
+            <a:schemeClr val="accent1"/>
+          </a:lnRef>
+          <a:fillRef idx="3">
+            <a:schemeClr val="accent1"/>
+          </a:fillRef>
+          <a:effectRef idx="2">
+            <a:schemeClr val="accent1"/>
+          </a:effectRef>
+          <a:fontRef idx="minor">
+            <a:schemeClr val="lt1"/>
+          </a:fontRef>
+        </p:style>
+        <p:txBody>
+          <a:bodyPr rtlCol="0" anchor="ctr"/>
+          <a:lstStyle/>
+          <a:p>
+            <a:pPr algn="ctr"/>
+          </a:p>
+        </p:txBody>
+      </p:sp>
+      <p:sp>
+        <p:nvSpPr>
+          <p:cNvPr id="9005" name="Rectangle 9004"/>
+          <p:cNvSpPr/>
+          <p:nvPr/>
+        </p:nvSpPr>
+        <p:spPr>
+          <a:xfrm>
+            <a:off x="566928" y="4754880"/>
+            <a:ext cx="50292" cy="1417320"/>
+          </a:xfrm>
+          <a:prstGeom prst="rect">
+            <a:avLst/>
+          </a:prstGeom>
+          <a:solidFill>
+            <a:srgbClr val="113E6A"/>
+          </a:solidFill>
+          <a:ln>
+            <a:noFill/>
+          </a:ln>
+          <a:effectLst/>
+        </p:spPr>
+        <p:style>
+          <a:lnRef idx="1">
+            <a:schemeClr val="accent1"/>
+          </a:lnRef>
+          <a:fillRef idx="3">
+            <a:schemeClr val="accent1"/>
+          </a:fillRef>
+          <a:effectRef idx="2">
+            <a:schemeClr val="accent1"/>
+          </a:effectRef>
+          <a:fontRef idx="minor">
+            <a:schemeClr val="lt1"/>
+          </a:fontRef>
+        </p:style>
+        <p:txBody>
+          <a:bodyPr rtlCol="0" anchor="ctr"/>
+          <a:lstStyle/>
+          <a:p>
+            <a:pPr algn="ctr"/>
+          </a:p>
+        </p:txBody>
+      </p:sp>
+      <p:sp>
+        <p:nvSpPr>
+          <p:cNvPr id="9006" name="TextBox 9005"/>
           <p:cNvSpPr txBox="1"/>
           <p:nvPr/>
         </p:nvSpPr>
         <p:spPr>
           <a:xfrm>
-            <a:off x="566928" y="2011680"/>
-            <a:ext cx="4160520" cy="1417320"/>
+            <a:off x="749808" y="4864608"/>
+            <a:ext cx="3224784" cy="1234440"/>
           </a:xfrm>
           <a:prstGeom prst="rect">
             <a:avLst/>
@@ -29955,67 +30005,335 @@
           </a:bodyPr>
           <a:lstStyle/>
           <a:p>
+            <a:pPr algn="l"/>
+            <a:r>
+              <a:rPr sz="1500" b="1">
+                <a:solidFill>
+                  <a:srgbClr val="113E6A"/>
+                </a:solidFill>
+                <a:latin typeface="Arial"/>
+                <a:ea typeface="微软雅黑"/>
+              </a:rPr>
+              <a:t>① 归属校验</a:t>
+            </a:r>
+          </a:p>
+          <a:p>
             <a:pPr algn="l">
               <a:lnSpc>
-                <a:spcPct val="115000"/>
+                <a:spcPct val="118000"/>
               </a:lnSpc>
+              <a:spcBef>
+                <a:spcPts val="400"/>
+              </a:spcBef>
             </a:pPr>
             <a:r>
-              <a:rPr sz="1550" b="0">
+              <a:rPr sz="1250" b="0">
                 <a:solidFill>
                   <a:srgbClr val="2E2C2C"/>
                 </a:solidFill>
                 <a:latin typeface="Arial"/>
                 <a:ea typeface="微软雅黑"/>
               </a:rPr>
-              <a:t>▪  归属校验：把漂移的 Pod 拦住</a:t>
+              <a:t>Bind 前校验目标节点的 eno.io/scheduler-name 注解，把分区归属漂移的 Pod 拦在门外</a:t>
+            </a:r>
+          </a:p>
+        </p:txBody>
+      </p:sp>
+      <p:sp>
+        <p:nvSpPr>
+          <p:cNvPr id="9007" name="Rounded Rectangle 9006"/>
+          <p:cNvSpPr/>
+          <p:nvPr/>
+        </p:nvSpPr>
+        <p:spPr>
+          <a:xfrm>
+            <a:off x="4331208" y="4754880"/>
+            <a:ext cx="3535680" cy="1417320"/>
+          </a:xfrm>
+          <a:prstGeom prst="roundRect">
+            <a:avLst/>
+          </a:prstGeom>
+          <a:solidFill>
+            <a:srgbClr val="FFFFFF"/>
+          </a:solidFill>
+          <a:ln w="9525">
+            <a:solidFill>
+              <a:srgbClr val="D6E3F0"/>
+            </a:solidFill>
+          </a:ln>
+          <a:effectLst/>
+        </p:spPr>
+        <p:style>
+          <a:lnRef idx="1">
+            <a:schemeClr val="accent1"/>
+          </a:lnRef>
+          <a:fillRef idx="3">
+            <a:schemeClr val="accent1"/>
+          </a:fillRef>
+          <a:effectRef idx="2">
+            <a:schemeClr val="accent1"/>
+          </a:effectRef>
+          <a:fontRef idx="minor">
+            <a:schemeClr val="lt1"/>
+          </a:fontRef>
+        </p:style>
+        <p:txBody>
+          <a:bodyPr rtlCol="0" anchor="ctr"/>
+          <a:lstStyle/>
+          <a:p>
+            <a:pPr algn="ctr"/>
+          </a:p>
+        </p:txBody>
+      </p:sp>
+      <p:sp>
+        <p:nvSpPr>
+          <p:cNvPr id="9008" name="Rectangle 9007"/>
+          <p:cNvSpPr/>
+          <p:nvPr/>
+        </p:nvSpPr>
+        <p:spPr>
+          <a:xfrm>
+            <a:off x="4331208" y="4754880"/>
+            <a:ext cx="50292" cy="1417320"/>
+          </a:xfrm>
+          <a:prstGeom prst="rect">
+            <a:avLst/>
+          </a:prstGeom>
+          <a:solidFill>
+            <a:srgbClr val="113E6A"/>
+          </a:solidFill>
+          <a:ln>
+            <a:noFill/>
+          </a:ln>
+          <a:effectLst/>
+        </p:spPr>
+        <p:style>
+          <a:lnRef idx="1">
+            <a:schemeClr val="accent1"/>
+          </a:lnRef>
+          <a:fillRef idx="3">
+            <a:schemeClr val="accent1"/>
+          </a:fillRef>
+          <a:effectRef idx="2">
+            <a:schemeClr val="accent1"/>
+          </a:effectRef>
+          <a:fontRef idx="minor">
+            <a:schemeClr val="lt1"/>
+          </a:fontRef>
+        </p:style>
+        <p:txBody>
+          <a:bodyPr rtlCol="0" anchor="ctr"/>
+          <a:lstStyle/>
+          <a:p>
+            <a:pPr algn="ctr"/>
+          </a:p>
+        </p:txBody>
+      </p:sp>
+      <p:sp>
+        <p:nvSpPr>
+          <p:cNvPr id="9009" name="TextBox 9008"/>
+          <p:cNvSpPr txBox="1"/>
+          <p:nvPr/>
+        </p:nvSpPr>
+        <p:spPr>
+          <a:xfrm>
+            <a:off x="4514088" y="4864608"/>
+            <a:ext cx="3224784" cy="1234440"/>
+          </a:xfrm>
+          <a:prstGeom prst="rect">
+            <a:avLst/>
+          </a:prstGeom>
+          <a:noFill/>
+        </p:spPr>
+        <p:txBody>
+          <a:bodyPr wrap="square" anchor="t" lIns="0" rIns="0" tIns="0" bIns="0">
+            <a:spAutoFit/>
+          </a:bodyPr>
+          <a:lstStyle/>
+          <a:p>
+            <a:pPr algn="l"/>
+            <a:r>
+              <a:rPr sz="1500" b="1">
+                <a:solidFill>
+                  <a:srgbClr val="113E6A"/>
+                </a:solidFill>
+                <a:latin typeface="Arial"/>
+                <a:ea typeface="微软雅黑"/>
+              </a:rPr>
+              <a:t>② 分区选择</a:t>
             </a:r>
           </a:p>
           <a:p>
             <a:pPr algn="l">
               <a:lnSpc>
-                <a:spcPct val="115000"/>
+                <a:spcPct val="118000"/>
               </a:lnSpc>
               <a:spcBef>
-                <a:spcPts val="1400"/>
+                <a:spcPts val="400"/>
               </a:spcBef>
             </a:pPr>
             <a:r>
-              <a:rPr sz="1550" b="0">
+              <a:rPr sz="1250" b="0">
                 <a:solidFill>
                   <a:srgbClr val="2E2C2C"/>
                 </a:solidFill>
                 <a:latin typeface="Arial"/>
                 <a:ea typeface="微软雅黑"/>
               </a:rPr>
-              <a:t>▪  分区选择：按实例负载均衡</a:t>
+              <a:t>依据节点分区表与实例负载，决定这个 Pod 交给哪个 Scheduler 实例处理</a:t>
+            </a:r>
+          </a:p>
+        </p:txBody>
+      </p:sp>
+      <p:sp>
+        <p:nvSpPr>
+          <p:cNvPr id="9010" name="Rounded Rectangle 9009"/>
+          <p:cNvSpPr/>
+          <p:nvPr/>
+        </p:nvSpPr>
+        <p:spPr>
+          <a:xfrm>
+            <a:off x="8095488" y="4754880"/>
+            <a:ext cx="3535680" cy="1417320"/>
+          </a:xfrm>
+          <a:prstGeom prst="roundRect">
+            <a:avLst/>
+          </a:prstGeom>
+          <a:solidFill>
+            <a:srgbClr val="FFFFFF"/>
+          </a:solidFill>
+          <a:ln w="9525">
+            <a:solidFill>
+              <a:srgbClr val="D6E3F0"/>
+            </a:solidFill>
+          </a:ln>
+          <a:effectLst/>
+        </p:spPr>
+        <p:style>
+          <a:lnRef idx="1">
+            <a:schemeClr val="accent1"/>
+          </a:lnRef>
+          <a:fillRef idx="3">
+            <a:schemeClr val="accent1"/>
+          </a:fillRef>
+          <a:effectRef idx="2">
+            <a:schemeClr val="accent1"/>
+          </a:effectRef>
+          <a:fontRef idx="minor">
+            <a:schemeClr val="lt1"/>
+          </a:fontRef>
+        </p:style>
+        <p:txBody>
+          <a:bodyPr rtlCol="0" anchor="ctr"/>
+          <a:lstStyle/>
+          <a:p>
+            <a:pPr algn="ctr"/>
+          </a:p>
+        </p:txBody>
+      </p:sp>
+      <p:sp>
+        <p:nvSpPr>
+          <p:cNvPr id="9011" name="Rectangle 9010"/>
+          <p:cNvSpPr/>
+          <p:nvPr/>
+        </p:nvSpPr>
+        <p:spPr>
+          <a:xfrm>
+            <a:off x="8095488" y="4754880"/>
+            <a:ext cx="50292" cy="1417320"/>
+          </a:xfrm>
+          <a:prstGeom prst="rect">
+            <a:avLst/>
+          </a:prstGeom>
+          <a:solidFill>
+            <a:srgbClr val="113E6A"/>
+          </a:solidFill>
+          <a:ln>
+            <a:noFill/>
+          </a:ln>
+          <a:effectLst/>
+        </p:spPr>
+        <p:style>
+          <a:lnRef idx="1">
+            <a:schemeClr val="accent1"/>
+          </a:lnRef>
+          <a:fillRef idx="3">
+            <a:schemeClr val="accent1"/>
+          </a:fillRef>
+          <a:effectRef idx="2">
+            <a:schemeClr val="accent1"/>
+          </a:effectRef>
+          <a:fontRef idx="minor">
+            <a:schemeClr val="lt1"/>
+          </a:fontRef>
+        </p:style>
+        <p:txBody>
+          <a:bodyPr rtlCol="0" anchor="ctr"/>
+          <a:lstStyle/>
+          <a:p>
+            <a:pPr algn="ctr"/>
+          </a:p>
+        </p:txBody>
+      </p:sp>
+      <p:sp>
+        <p:nvSpPr>
+          <p:cNvPr id="9012" name="TextBox 9011"/>
+          <p:cNvSpPr txBox="1"/>
+          <p:nvPr/>
+        </p:nvSpPr>
+        <p:spPr>
+          <a:xfrm>
+            <a:off x="8278367" y="4864608"/>
+            <a:ext cx="3224784" cy="1234440"/>
+          </a:xfrm>
+          <a:prstGeom prst="rect">
+            <a:avLst/>
+          </a:prstGeom>
+          <a:noFill/>
+        </p:spPr>
+        <p:txBody>
+          <a:bodyPr wrap="square" anchor="t" lIns="0" rIns="0" tIns="0" bIns="0">
+            <a:spAutoFit/>
+          </a:bodyPr>
+          <a:lstStyle/>
+          <a:p>
+            <a:pPr algn="l"/>
+            <a:r>
+              <a:rPr sz="1500" b="1">
+                <a:solidFill>
+                  <a:srgbClr val="113E6A"/>
+                </a:solidFill>
+                <a:latin typeface="Arial"/>
+                <a:ea typeface="微软雅黑"/>
+              </a:rPr>
+              <a:t>③ 入队</a:t>
             </a:r>
           </a:p>
           <a:p>
             <a:pPr algn="l">
               <a:lnSpc>
-                <a:spcPct val="115000"/>
+                <a:spcPct val="118000"/>
               </a:lnSpc>
               <a:spcBef>
-                <a:spcPts val="1400"/>
+                <a:spcPts val="400"/>
               </a:spcBef>
             </a:pPr>
             <a:r>
-              <a:rPr sz="1550" b="0">
+              <a:rPr sz="1250" b="0">
                 <a:solidFill>
                   <a:srgbClr val="2E2C2C"/>
                 </a:solidFill>
                 <a:latin typeface="Arial"/>
                 <a:ea typeface="微软雅黑"/>
               </a:rPr>
-              <a:t>▪  入队：交给对应 Scheduler 实例</a:t>
-            </a:r>
-          </a:p>
-        </p:txBody>
-      </p:sp>
-      <p:sp>
-        <p:nvSpPr>
-          <p:cNvPr id="9006" name="TextBox 9005"/>
+              <a:t>放入对应实例的调度队列；它不选节点，只决定 Pod 去哪，失败时触发回退</a:t>
+            </a:r>
+          </a:p>
+        </p:txBody>
+      </p:sp>
+      <p:sp>
+        <p:nvSpPr>
+          <p:cNvPr id="9013" name="TextBox 9012"/>
           <p:cNvSpPr txBox="1"/>
           <p:nvPr/>
         </p:nvSpPr>
@@ -30336,49 +30654,9 @@
           </a:p>
         </p:txBody>
       </p:sp>
-      <p:sp>
-        <p:nvSpPr>
-          <p:cNvPr id="9003" name="TextBox 9002"/>
-          <p:cNvSpPr txBox="1"/>
-          <p:nvPr/>
-        </p:nvSpPr>
-        <p:spPr>
-          <a:xfrm>
-            <a:off x="566928" y="1261872"/>
-            <a:ext cx="10881360" cy="438912"/>
-          </a:xfrm>
-          <a:prstGeom prst="rect">
-            <a:avLst/>
-          </a:prstGeom>
-          <a:noFill/>
-        </p:spPr>
-        <p:txBody>
-          <a:bodyPr wrap="square" anchor="ctr" lIns="0" rIns="0" tIns="0" bIns="0">
-            <a:spAutoFit/>
-          </a:bodyPr>
-          <a:lstStyle/>
-          <a:p>
-            <a:pPr algn="l">
-              <a:lnSpc>
-                <a:spcPct val="110000"/>
-              </a:lnSpc>
-            </a:pPr>
-            <a:r>
-              <a:rPr sz="1800" b="1">
-                <a:solidFill>
-                  <a:srgbClr val="0070C0"/>
-                </a:solidFill>
-                <a:latin typeface="Arial"/>
-                <a:ea typeface="微软雅黑"/>
-              </a:rPr>
-              <a:t>Filter → Score → Reserve → Permit，产出目标节点后交给 Binder 落盘</a:t>
-            </a:r>
-          </a:p>
-        </p:txBody>
-      </p:sp>
       <p:pic>
         <p:nvPicPr>
-          <p:cNvPr id="9004" name="Picture 9003" descr="fig3-4-scheduler-flow.png"/>
+          <p:cNvPr id="9003" name="Picture 9002" descr="fig3-4-scheduler-flow.png"/>
           <p:cNvPicPr>
             <a:picLocks noChangeAspect="1"/>
           </p:cNvPicPr>
@@ -30392,8 +30670,8 @@
         </p:blipFill>
         <p:spPr>
           <a:xfrm>
-            <a:off x="4999282" y="1664208"/>
-            <a:ext cx="6506354" cy="4251960"/>
+            <a:off x="3247347" y="868680"/>
+            <a:ext cx="5666825" cy="3703320"/>
           </a:xfrm>
           <a:prstGeom prst="rect">
             <a:avLst/>
@@ -30402,14 +30680,104 @@
       </p:pic>
       <p:sp>
         <p:nvSpPr>
-          <p:cNvPr id="9005" name="TextBox 9004"/>
+          <p:cNvPr id="9004" name="Rounded Rectangle 9003"/>
+          <p:cNvSpPr/>
+          <p:nvPr/>
+        </p:nvSpPr>
+        <p:spPr>
+          <a:xfrm>
+            <a:off x="566928" y="4754880"/>
+            <a:ext cx="3535680" cy="1417320"/>
+          </a:xfrm>
+          <a:prstGeom prst="roundRect">
+            <a:avLst/>
+          </a:prstGeom>
+          <a:solidFill>
+            <a:srgbClr val="FFFFFF"/>
+          </a:solidFill>
+          <a:ln w="9525">
+            <a:solidFill>
+              <a:srgbClr val="D6E3F0"/>
+            </a:solidFill>
+          </a:ln>
+          <a:effectLst/>
+        </p:spPr>
+        <p:style>
+          <a:lnRef idx="1">
+            <a:schemeClr val="accent1"/>
+          </a:lnRef>
+          <a:fillRef idx="3">
+            <a:schemeClr val="accent1"/>
+          </a:fillRef>
+          <a:effectRef idx="2">
+            <a:schemeClr val="accent1"/>
+          </a:effectRef>
+          <a:fontRef idx="minor">
+            <a:schemeClr val="lt1"/>
+          </a:fontRef>
+        </p:style>
+        <p:txBody>
+          <a:bodyPr rtlCol="0" anchor="ctr"/>
+          <a:lstStyle/>
+          <a:p>
+            <a:pPr algn="ctr"/>
+          </a:p>
+        </p:txBody>
+      </p:sp>
+      <p:sp>
+        <p:nvSpPr>
+          <p:cNvPr id="9005" name="Rectangle 9004"/>
+          <p:cNvSpPr/>
+          <p:nvPr/>
+        </p:nvSpPr>
+        <p:spPr>
+          <a:xfrm>
+            <a:off x="566928" y="4754880"/>
+            <a:ext cx="50292" cy="1417320"/>
+          </a:xfrm>
+          <a:prstGeom prst="rect">
+            <a:avLst/>
+          </a:prstGeom>
+          <a:solidFill>
+            <a:srgbClr val="113E6A"/>
+          </a:solidFill>
+          <a:ln>
+            <a:noFill/>
+          </a:ln>
+          <a:effectLst/>
+        </p:spPr>
+        <p:style>
+          <a:lnRef idx="1">
+            <a:schemeClr val="accent1"/>
+          </a:lnRef>
+          <a:fillRef idx="3">
+            <a:schemeClr val="accent1"/>
+          </a:fillRef>
+          <a:effectRef idx="2">
+            <a:schemeClr val="accent1"/>
+          </a:effectRef>
+          <a:fontRef idx="minor">
+            <a:schemeClr val="lt1"/>
+          </a:fontRef>
+        </p:style>
+        <p:txBody>
+          <a:bodyPr rtlCol="0" anchor="ctr"/>
+          <a:lstStyle/>
+          <a:p>
+            <a:pPr algn="ctr"/>
+          </a:p>
+        </p:txBody>
+      </p:sp>
+      <p:sp>
+        <p:nvSpPr>
+          <p:cNvPr id="9006" name="TextBox 9005"/>
           <p:cNvSpPr txBox="1"/>
           <p:nvPr/>
         </p:nvSpPr>
         <p:spPr>
           <a:xfrm>
-            <a:off x="566928" y="2011680"/>
-            <a:ext cx="4160520" cy="1417320"/>
+            <a:off x="749808" y="4864608"/>
+            <a:ext cx="3224784" cy="1234440"/>
           </a:xfrm>
           <a:prstGeom prst="rect">
             <a:avLst/>
@@ -30422,67 +30790,335 @@
           </a:bodyPr>
           <a:lstStyle/>
           <a:p>
+            <a:pPr algn="l"/>
+            <a:r>
+              <a:rPr sz="1500" b="1">
+                <a:solidFill>
+                  <a:srgbClr val="113E6A"/>
+                </a:solidFill>
+                <a:latin typeface="Arial"/>
+                <a:ea typeface="微软雅黑"/>
+              </a:rPr>
+              <a:t>① Filter</a:t>
+            </a:r>
+          </a:p>
+          <a:p>
             <a:pPr algn="l">
               <a:lnSpc>
-                <a:spcPct val="115000"/>
+                <a:spcPct val="118000"/>
               </a:lnSpc>
+              <a:spcBef>
+                <a:spcPts val="400"/>
+              </a:spcBef>
             </a:pPr>
             <a:r>
-              <a:rPr sz="1550" b="0">
+              <a:rPr sz="1250" b="0">
                 <a:solidFill>
                   <a:srgbClr val="2E2C2C"/>
                 </a:solidFill>
                 <a:latin typeface="Arial"/>
                 <a:ea typeface="微软雅黑"/>
               </a:rPr>
-              <a:t>▪  Filter：在分区内过滤候选节点</a:t>
+              <a:t>只在本分区内的节点上过滤，排除资源不足、约束不满足的候选</a:t>
+            </a:r>
+          </a:p>
+        </p:txBody>
+      </p:sp>
+      <p:sp>
+        <p:nvSpPr>
+          <p:cNvPr id="9007" name="Rounded Rectangle 9006"/>
+          <p:cNvSpPr/>
+          <p:nvPr/>
+        </p:nvSpPr>
+        <p:spPr>
+          <a:xfrm>
+            <a:off x="4331208" y="4754880"/>
+            <a:ext cx="3535680" cy="1417320"/>
+          </a:xfrm>
+          <a:prstGeom prst="roundRect">
+            <a:avLst/>
+          </a:prstGeom>
+          <a:solidFill>
+            <a:srgbClr val="FFFFFF"/>
+          </a:solidFill>
+          <a:ln w="9525">
+            <a:solidFill>
+              <a:srgbClr val="D6E3F0"/>
+            </a:solidFill>
+          </a:ln>
+          <a:effectLst/>
+        </p:spPr>
+        <p:style>
+          <a:lnRef idx="1">
+            <a:schemeClr val="accent1"/>
+          </a:lnRef>
+          <a:fillRef idx="3">
+            <a:schemeClr val="accent1"/>
+          </a:fillRef>
+          <a:effectRef idx="2">
+            <a:schemeClr val="accent1"/>
+          </a:effectRef>
+          <a:fontRef idx="minor">
+            <a:schemeClr val="lt1"/>
+          </a:fontRef>
+        </p:style>
+        <p:txBody>
+          <a:bodyPr rtlCol="0" anchor="ctr"/>
+          <a:lstStyle/>
+          <a:p>
+            <a:pPr algn="ctr"/>
+          </a:p>
+        </p:txBody>
+      </p:sp>
+      <p:sp>
+        <p:nvSpPr>
+          <p:cNvPr id="9008" name="Rectangle 9007"/>
+          <p:cNvSpPr/>
+          <p:nvPr/>
+        </p:nvSpPr>
+        <p:spPr>
+          <a:xfrm>
+            <a:off x="4331208" y="4754880"/>
+            <a:ext cx="50292" cy="1417320"/>
+          </a:xfrm>
+          <a:prstGeom prst="rect">
+            <a:avLst/>
+          </a:prstGeom>
+          <a:solidFill>
+            <a:srgbClr val="113E6A"/>
+          </a:solidFill>
+          <a:ln>
+            <a:noFill/>
+          </a:ln>
+          <a:effectLst/>
+        </p:spPr>
+        <p:style>
+          <a:lnRef idx="1">
+            <a:schemeClr val="accent1"/>
+          </a:lnRef>
+          <a:fillRef idx="3">
+            <a:schemeClr val="accent1"/>
+          </a:fillRef>
+          <a:effectRef idx="2">
+            <a:schemeClr val="accent1"/>
+          </a:effectRef>
+          <a:fontRef idx="minor">
+            <a:schemeClr val="lt1"/>
+          </a:fontRef>
+        </p:style>
+        <p:txBody>
+          <a:bodyPr rtlCol="0" anchor="ctr"/>
+          <a:lstStyle/>
+          <a:p>
+            <a:pPr algn="ctr"/>
+          </a:p>
+        </p:txBody>
+      </p:sp>
+      <p:sp>
+        <p:nvSpPr>
+          <p:cNvPr id="9009" name="TextBox 9008"/>
+          <p:cNvSpPr txBox="1"/>
+          <p:nvPr/>
+        </p:nvSpPr>
+        <p:spPr>
+          <a:xfrm>
+            <a:off x="4514088" y="4864608"/>
+            <a:ext cx="3224784" cy="1234440"/>
+          </a:xfrm>
+          <a:prstGeom prst="rect">
+            <a:avLst/>
+          </a:prstGeom>
+          <a:noFill/>
+        </p:spPr>
+        <p:txBody>
+          <a:bodyPr wrap="square" anchor="t" lIns="0" rIns="0" tIns="0" bIns="0">
+            <a:spAutoFit/>
+          </a:bodyPr>
+          <a:lstStyle/>
+          <a:p>
+            <a:pPr algn="l"/>
+            <a:r>
+              <a:rPr sz="1500" b="1">
+                <a:solidFill>
+                  <a:srgbClr val="113E6A"/>
+                </a:solidFill>
+                <a:latin typeface="Arial"/>
+                <a:ea typeface="微软雅黑"/>
+              </a:rPr>
+              <a:t>② Score</a:t>
             </a:r>
           </a:p>
           <a:p>
             <a:pPr algn="l">
               <a:lnSpc>
-                <a:spcPct val="115000"/>
+                <a:spcPct val="118000"/>
               </a:lnSpc>
               <a:spcBef>
-                <a:spcPts val="1400"/>
+                <a:spcPts val="400"/>
               </a:spcBef>
             </a:pPr>
             <a:r>
-              <a:rPr sz="1550" b="0">
+              <a:rPr sz="1250" b="0">
                 <a:solidFill>
                   <a:srgbClr val="2E2C2C"/>
                 </a:solidFill>
                 <a:latin typeface="Arial"/>
                 <a:ea typeface="微软雅黑"/>
               </a:rPr>
-              <a:t>▪  Score：打分选出最优节点</a:t>
+              <a:t>对候选节点打分排序，选出最优节点作为目标</a:t>
+            </a:r>
+          </a:p>
+        </p:txBody>
+      </p:sp>
+      <p:sp>
+        <p:nvSpPr>
+          <p:cNvPr id="9010" name="Rounded Rectangle 9009"/>
+          <p:cNvSpPr/>
+          <p:nvPr/>
+        </p:nvSpPr>
+        <p:spPr>
+          <a:xfrm>
+            <a:off x="8095488" y="4754880"/>
+            <a:ext cx="3535680" cy="1417320"/>
+          </a:xfrm>
+          <a:prstGeom prst="roundRect">
+            <a:avLst/>
+          </a:prstGeom>
+          <a:solidFill>
+            <a:srgbClr val="FFFFFF"/>
+          </a:solidFill>
+          <a:ln w="9525">
+            <a:solidFill>
+              <a:srgbClr val="D6E3F0"/>
+            </a:solidFill>
+          </a:ln>
+          <a:effectLst/>
+        </p:spPr>
+        <p:style>
+          <a:lnRef idx="1">
+            <a:schemeClr val="accent1"/>
+          </a:lnRef>
+          <a:fillRef idx="3">
+            <a:schemeClr val="accent1"/>
+          </a:fillRef>
+          <a:effectRef idx="2">
+            <a:schemeClr val="accent1"/>
+          </a:effectRef>
+          <a:fontRef idx="minor">
+            <a:schemeClr val="lt1"/>
+          </a:fontRef>
+        </p:style>
+        <p:txBody>
+          <a:bodyPr rtlCol="0" anchor="ctr"/>
+          <a:lstStyle/>
+          <a:p>
+            <a:pPr algn="ctr"/>
+          </a:p>
+        </p:txBody>
+      </p:sp>
+      <p:sp>
+        <p:nvSpPr>
+          <p:cNvPr id="9011" name="Rectangle 9010"/>
+          <p:cNvSpPr/>
+          <p:nvPr/>
+        </p:nvSpPr>
+        <p:spPr>
+          <a:xfrm>
+            <a:off x="8095488" y="4754880"/>
+            <a:ext cx="50292" cy="1417320"/>
+          </a:xfrm>
+          <a:prstGeom prst="rect">
+            <a:avLst/>
+          </a:prstGeom>
+          <a:solidFill>
+            <a:srgbClr val="113E6A"/>
+          </a:solidFill>
+          <a:ln>
+            <a:noFill/>
+          </a:ln>
+          <a:effectLst/>
+        </p:spPr>
+        <p:style>
+          <a:lnRef idx="1">
+            <a:schemeClr val="accent1"/>
+          </a:lnRef>
+          <a:fillRef idx="3">
+            <a:schemeClr val="accent1"/>
+          </a:fillRef>
+          <a:effectRef idx="2">
+            <a:schemeClr val="accent1"/>
+          </a:effectRef>
+          <a:fontRef idx="minor">
+            <a:schemeClr val="lt1"/>
+          </a:fontRef>
+        </p:style>
+        <p:txBody>
+          <a:bodyPr rtlCol="0" anchor="ctr"/>
+          <a:lstStyle/>
+          <a:p>
+            <a:pPr algn="ctr"/>
+          </a:p>
+        </p:txBody>
+      </p:sp>
+      <p:sp>
+        <p:nvSpPr>
+          <p:cNvPr id="9012" name="TextBox 9011"/>
+          <p:cNvSpPr txBox="1"/>
+          <p:nvPr/>
+        </p:nvSpPr>
+        <p:spPr>
+          <a:xfrm>
+            <a:off x="8278367" y="4864608"/>
+            <a:ext cx="3224784" cy="1234440"/>
+          </a:xfrm>
+          <a:prstGeom prst="rect">
+            <a:avLst/>
+          </a:prstGeom>
+          <a:noFill/>
+        </p:spPr>
+        <p:txBody>
+          <a:bodyPr wrap="square" anchor="t" lIns="0" rIns="0" tIns="0" bIns="0">
+            <a:spAutoFit/>
+          </a:bodyPr>
+          <a:lstStyle/>
+          <a:p>
+            <a:pPr algn="l"/>
+            <a:r>
+              <a:rPr sz="1500" b="1">
+                <a:solidFill>
+                  <a:srgbClr val="113E6A"/>
+                </a:solidFill>
+                <a:latin typeface="Arial"/>
+                <a:ea typeface="微软雅黑"/>
+              </a:rPr>
+              <a:t>③ Reserve / Permit</a:t>
             </a:r>
           </a:p>
           <a:p>
             <a:pPr algn="l">
               <a:lnSpc>
-                <a:spcPct val="115000"/>
+                <a:spcPct val="118000"/>
               </a:lnSpc>
               <a:spcBef>
-                <a:spcPts val="1400"/>
+                <a:spcPts val="400"/>
               </a:spcBef>
             </a:pPr>
             <a:r>
-              <a:rPr sz="1550" b="0">
+              <a:rPr sz="1250" b="0">
                 <a:solidFill>
                   <a:srgbClr val="2E2C2C"/>
                 </a:solidFill>
                 <a:latin typeface="Arial"/>
                 <a:ea typeface="微软雅黑"/>
               </a:rPr>
-              <a:t>▪  Reserve/Permit 后交 Binder</a:t>
-            </a:r>
-          </a:p>
-        </p:txBody>
-      </p:sp>
-      <p:sp>
-        <p:nvSpPr>
-          <p:cNvPr id="9006" name="TextBox 9005"/>
+              <a:t>预留资源并放行，产出目标节点后交给 Binder 落盘</a:t>
+            </a:r>
+          </a:p>
+        </p:txBody>
+      </p:sp>
+      <p:sp>
+        <p:nvSpPr>
+          <p:cNvPr id="9013" name="TextBox 9012"/>
           <p:cNvSpPr txBox="1"/>
           <p:nvPr/>
         </p:nvSpPr>

--- a/docs/thesis/defense/答辩PPT-北航模板版.pptx
+++ b/docs/thesis/defense/答辩PPT-北航模板版.pptx
@@ -30014,7 +30014,7 @@
                 <a:latin typeface="Arial"/>
                 <a:ea typeface="微软雅黑"/>
               </a:rPr>
-              <a:t>① 归属校验</a:t>
+              <a:t>① 排序入队</a:t>
             </a:r>
           </a:p>
           <a:p>
@@ -30034,7 +30034,7 @@
                 <a:latin typeface="Arial"/>
                 <a:ea typeface="微软雅黑"/>
               </a:rPr>
-              <a:t>Bind 前校验目标节点的 eno.io/scheduler-name 注解，把分区归属漂移的 Pod 拦在门外</a:t>
+              <a:t>Informer 观察到 nodeName 为空、且无 scheduler-name 注解的新 Pod，按 FIFO 排序后进入有序队列</a:t>
             </a:r>
           </a:p>
         </p:txBody>
@@ -30160,7 +30160,7 @@
                 <a:latin typeface="Arial"/>
                 <a:ea typeface="微软雅黑"/>
               </a:rPr>
-              <a:t>② 分区选择</a:t>
+              <a:t>② 分发决策</a:t>
             </a:r>
           </a:p>
           <a:p>
@@ -30180,7 +30180,7 @@
                 <a:latin typeface="Arial"/>
                 <a:ea typeface="微软雅黑"/>
               </a:rPr>
-              <a:t>依据节点分区表与实例负载，决定这个 Pod 交给哪个 Scheduler 实例处理</a:t>
+              <a:t>PodGroup 成员复用该组已分配的实例；否则按负载均衡（MaxIdle 加权轮询）挑选最空闲的 Scheduler</a:t>
             </a:r>
           </a:p>
         </p:txBody>
@@ -30306,7 +30306,7 @@
                 <a:latin typeface="Arial"/>
                 <a:ea typeface="微软雅黑"/>
               </a:rPr>
-              <a:t>③ 入队</a:t>
+              <a:t>③ 写入并跟踪</a:t>
             </a:r>
           </a:p>
           <a:p>
@@ -30326,7 +30326,7 @@
                 <a:latin typeface="Arial"/>
                 <a:ea typeface="微软雅黑"/>
               </a:rPr>
-              <a:t>放入对应实例的调度队列；它不选节点，只决定 Pod 去哪，失败时触发回退</a:t>
+              <a:t>PatchPod 写入 scheduler-name 完成分发；持续观察绑定结果，失败进入不可调度队列等待重分</a:t>
             </a:r>
           </a:p>
         </p:txBody>
@@ -30799,7 +30799,7 @@
                 <a:latin typeface="Arial"/>
                 <a:ea typeface="微软雅黑"/>
               </a:rPr>
-              <a:t>① Filter</a:t>
+              <a:t>① 入队与预处理</a:t>
             </a:r>
           </a:p>
           <a:p>
@@ -30819,7 +30819,7 @@
                 <a:latin typeface="Arial"/>
                 <a:ea typeface="微软雅黑"/>
               </a:rPr>
-              <a:t>只在本分区内的节点上过滤，排除资源不足、约束不满足的候选</a:t>
+              <a:t>只接 scheduler-name 匹配自身的 Pod；pre-queue 插件校验 PodGroup 成员与亲和依赖，不通过则退回 Dispatcher</a:t>
             </a:r>
           </a:p>
         </p:txBody>
@@ -30945,7 +30945,7 @@
                 <a:latin typeface="Arial"/>
                 <a:ea typeface="微软雅黑"/>
               </a:rPr>
-              <a:t>② Score</a:t>
+              <a:t>② 调度循环</a:t>
             </a:r>
           </a:p>
           <a:p>
@@ -30965,7 +30965,7 @@
                 <a:latin typeface="Arial"/>
                 <a:ea typeface="微软雅黑"/>
               </a:rPr>
-              <a:t>对候选节点打分排序，选出最优节点作为目标</a:t>
+              <a:t>从 activeQ 弹出后依次 Filter（剔除硬约束不满足）、Score（打分）、Reserve（标记候选并写 Assumed 状态）</a:t>
             </a:r>
           </a:p>
         </p:txBody>
@@ -31091,7 +31091,7 @@
                 <a:latin typeface="Arial"/>
                 <a:ea typeface="微软雅黑"/>
               </a:rPr>
-              <a:t>③ Reserve / Permit</a:t>
+              <a:t>③ 绑定与回流</a:t>
             </a:r>
           </a:p>
           <a:p>
@@ -31111,7 +31111,7 @@
                 <a:latin typeface="Arial"/>
                 <a:ea typeface="微软雅黑"/>
               </a:rPr>
-              <a:t>预留资源并放行，产出目标节点后交给 Binder 落盘</a:t>
+              <a:t>Reserve 后调用 Binder 执行 Bind；失败进入 backoffQ 指数退避，多次失败则退回 Dispatcher 触发跨实例回退</a:t>
             </a:r>
           </a:p>
         </p:txBody>

--- a/docs/thesis/defense/答辩PPT-北航模板版.pptx
+++ b/docs/thesis/defense/答辩PPT-北航模板版.pptx
@@ -8051,7 +8051,7 @@
                 <a:latin typeface="Arial"/>
                 <a:ea typeface="微软雅黑"/>
               </a:rPr>
-              <a:t>创新点 2</a:t>
+              <a:t>四层绑定容错</a:t>
             </a:r>
           </a:p>
         </p:txBody>
@@ -31434,7 +31434,7 @@
                 <a:latin typeface="Arial"/>
                 <a:ea typeface="微软雅黑"/>
               </a:rPr>
-              <a:t>创新点 1</a:t>
+              <a:t>进程内 Binder 架构</a:t>
             </a:r>
           </a:p>
         </p:txBody>

--- a/docs/thesis/defense/答辩PPT-北航模板版.pptx
+++ b/docs/thesis/defense/答辩PPT-北航模板版.pptx
@@ -1058,7 +1058,7 @@
           <a:lstStyle/>
           <a:p>
             <a:r>
-              <a:t>各位老师上午好。我汇报的题目是《基于 etcd 的分布式 Kubernetes 调度器研究与实现》。这项工作针对分布式调度器把绑定拆出去之后吞吐上不去、一致性也守不住的问题。一句话概括：把 Binder 合并回 Scheduler，用四层机制守住“至多绑定一次”。</a:t>
+              <a:t>各位老师上午好。我的论文题目是《基于 etcd 的分布式 Kubernetes 调度器研究与实现》。这项工作针对分布式调度器把绑定拆出去之后吞吐上不去、一致性也守不住的问题。一句话概括：把 Binder 合并回 Scheduler，用四层机制守住“至多绑定一次”。十八分钟，只讲问题、方法、证据。</a:t>
             </a:r>
           </a:p>
         </p:txBody>
@@ -1128,7 +1128,7 @@
           <a:lstStyle/>
           <a:p>
             <a:r>
-              <a:t>所有机制最后都回到不变量 I：任一 Pod 至多绑定到一个节点。证明拆四点：P1 来自 Bind 子资源原子写；P2 是 Assumed 状态清理；P3 是注解清理与重分发的时序；P4 是 Layer 0 前置拦截。四层都不破坏 I，且可在 apiserver 侧复核。这也是后面所有实验断言的设计依据。</a:t>
+              <a:t>四层是一条时间轴。Bind 前 Layer 0 校验归属注解，把漂移拦在门外；Bind 中 Layer 1 用同步退避处理暂态错误；失败后 Layer 2 异步回收孤儿状态；重试耗尽 Layer 3 由 Dispatcher 清注解、触发全局重分发。每层依赖一种 etcd 语义。四层之间是衔接关系，不是四个独立补丁。</a:t>
             </a:r>
           </a:p>
         </p:txBody>
@@ -1198,7 +1198,7 @@
           <a:lstStyle/>
           <a:p>
             <a:r>
-              <a:t>先讲编码：s 是规模档位，w 是负载强度，inst 是实例数，后面场景名都由这三段拼成。实验设计说明三点公平性。第一，KWOK 仿真，kind 集群内运行，Kubernetes 版本与对照组一致。第二，五个调度器 Pod 规格相同，客户端 QPS 与 Burst 都是 10000，避免把限流误读成能力差异。第三，每场景三次取中位数，共 144 次 run。所以主评估用 s2/w2、s2/w3、s3/w2、s3/w3 四个场景，扩展场景另算。</a:t>
+              <a:t>所有机制最后都回到不变量 I：任一 Pod 至多绑定到一个节点。证明拆四点：P1 来自 Bind 子资源原子写；P2 是 Assumed 状态清理；P3 是注解清理与重分发的时序；P4 是 Layer 0 前置拦截。四层都不破坏 I，且可在 apiserver 侧复核。这也是后面所有实验断言的设计依据。</a:t>
             </a:r>
           </a:p>
         </p:txBody>
@@ -1268,7 +1268,7 @@
           <a:lstStyle/>
           <a:p>
             <a:r>
-              <a:t>所有机制最后都要回到不变量 I：任一 Pod 至多绑定到一个节点。证明拆四点：P1 来自 Bind 子资源原子写；P2 是 Assumed 状态清理；P3 是注解清理与重分发的时序；P4 是 Layer 0 前置拦截。四层都不破坏 I，而且可以在 apiserver 侧用断言复核，不是自说自话。</a:t>
+              <a:t>先讲编码：s 是规模档位，w 是负载强度，inst 是实例数，后面场景名都由这三段拼成。再说公平性：KWOK 仿真、kind 集群内运行；五个调度器 Pod 规格相同，客户端 QPS 与 Burst 都是 10000；每场景三次取中位数，共 144 次 run。主评估取 s2/w2、s2/w3、s3/w2、s3/w3 四个场景，其余作为扩展与复杂负载场景。观测栈是 Prometheus 每 15 秒抓取，recording rules 统一各组指标名。</a:t>
             </a:r>
           </a:p>
         </p:txBody>
@@ -1338,7 +1338,7 @@
           <a:lstStyle/>
           <a:p>
             <a:r>
-              <a:t>在给性能数字之前，先说正确性。144 次 run，每次跑完都在 apiserver 侧断言：未绑定为零、重复绑定为零，全部通过；ENO 那 48 次 run 成功率都是 100%。两场故障注入各 6 项判据全过。所谓正确，不是日志没报错，而是外部事实对得上。两场注入分别是分区漂移与实例失活，正好覆盖两类威胁。判据包括成功率、断言、拦截数、回退数、耗时与队列行为，六项都要成立。</a:t>
+              <a:t>这一页是方法学核心。吞吐时序是爬升、平台、归零三段，直接取平均会被尾段零值稀释，稀释程度还取决于跑多久，跨调度器就不可比，所以主口径是总工作量除以总完成时间。时序类先对三条 run 逐点取中位数，再剔首尾各两点。c、d、e 是单实例，过载时 Pod 没进直方图，存在幸存者偏差，只做定性说明。所以跨调度器我只用吞吐、队列堆积与绑定成功率做整体比较，延迟只在 ENO 与 Gödel 之间比。这三条口径是后面所有数字可比的前提；口径不同，数字就不能直接并列。</a:t>
             </a:r>
           </a:p>
         </p:txBody>
@@ -1408,7 +1408,7 @@
           <a:lstStyle/>
           <a:p>
             <a:r>
-              <a:t>第一场注入：s2/w2、三实例，第 30 秒把 10% 的节点、约 100 个，归属注解从 scheduler-0 改为 scheduler-1。NodeValidator 拦截 300 次，Dispatcher 回退 300 次，两条曲线重叠。关键是拦截不等于丢弃：Pod 进回退队列被重分发，所以成功率仍是 1.00，断言 50000 全过，总耗时 683 秒，只比基线多 3 秒。这组数字说明 Layer 0 只是把错误前置，不是把工作丢掉，代价几乎为零。</a:t>
+              <a:t>在给性能数字之前，先说正确性。144 次 run，每次跑完都在 apiserver 侧断言：未绑定为零、重复绑定为零，全部通过；ENO 那 48 次 run 成功率都是 100%。两场故障注入各 6 项判据全过。所谓正确，不是日志里没报错，而是外部可观测的事实对得上。断言是在 apiserver 侧做的，不是调度器自报。</a:t>
             </a:r>
           </a:p>
         </p:txBody>
@@ -1478,7 +1478,7 @@
           <a:lstStyle/>
           <a:p>
             <a:r>
-              <a:t>第二场注入：第 10 秒杀掉 scheduler-0，停机 180 秒，实测中断 189 秒。被杀实例未完成的绑定只占 68/8407，即 0.81%；两个存活实例接管 8407 个 Pod，孤儿回收 77.15 每秒，队列峰值 353 后回落到 2。累计绑定 49607/50000，断言仍全过。代价是 784 秒、多 104 秒，这是工作量重排，不是数据损坏。对比基线是同一场景下的无故障运行，680 秒；这也说明接管是可控的，代价有界。</a:t>
+              <a:t>第一场注入：s2/w2、三实例，第 30 秒把 10% 的节点、约 100 个，归属注解从 scheduler-0 改为 scheduler-1。NodeValidator 拦截 300 次，Dispatcher 回退 300 次，两条曲线重叠。拦截不等于丢弃：Pod 进回退队列被重分发，成功率仍是 1.00，总耗时 683 秒、只比基线多 3 秒。这组数字说明 Layer 0 只是把错误前置，不是把工作丢掉，代价几乎为零。拦截 300 次、回退 300 次，两边对得上，说明没有 Pod 被丢掉。</a:t>
             </a:r>
           </a:p>
         </p:txBody>
@@ -1548,7 +1548,7 @@
           <a:lstStyle/>
           <a:p>
             <a:r>
-              <a:t>五组对比，结论是三档。第一档 ENO 与 Gödel，都是几百 pods/s；第二档 kube-scheduler；第三档 Volcano 与 Koordinator，只有约 48 和约 24 pods/s，几乎不随规模变化。主评估四场景里，ENO 比 kube-scheduler 高 1.8% 到 22.5%，比 Volcano 约 6 倍、比 Koordinator 12 倍以上。唯一例外是 s1/w1 低负载低 7.2%，那是没饱和。柱状图按场景排序，第三档几乎是一条水平线。</a:t>
+              <a:t>第二场注入：第 10 秒杀掉 scheduler-0，停机 180 秒，实测中断 189 秒。被杀实例未完成的绑定只占 68/8407，即 0.81%；两个存活实例接管 8407 个 Pod，队列峰值 353 后回落到 2。累计绑定 49607/50000，断言仍全过。代价是 784 秒、比基线多 104 秒，是工作量重排的代价，不是数据损坏。对比基线是同一场景下的无故障运行，680 秒。队列在 353 之后回落到 2，说明积压是瞬时的。</a:t>
             </a:r>
           </a:p>
         </p:txBody>
@@ -1618,7 +1618,7 @@
           <a:lstStyle/>
           <a:p>
             <a:r>
-              <a:t>和 Gödel 逐场景对比：16 个场景 14 个领先、2 个持平，没有落后的，提升 2.0% 到 22.9%，平均 11.9%。优势最大的是高负载与多实例：s2/w3 高 22.9%，s3/w3 三实例高 21.7%，s3/w5 与 s3/w7 三实例也都超过 21%。持平场景是没饱和，完成时间由注入速率决定。四个亮点场景分别是高负载、突发、异构与多实例。平均 11.9% 这个数，是把 14 个领先场景的幅度取均值得到的。</a:t>
+              <a:t>五组横向对比，结论是三档。第一档 ENO 与 Gödel，都是几百 pods/s；第二档 kube-scheduler；第三档 Volcano 与 Koordinator，只有约 48 和约 24 pods/s，几乎不随规模变化。主评估四场景里，ENO 比 kube-scheduler 高 1.8% 到 22.5%。唯一例外是 s1/w1 低负载低 7.2%，那个场景没饱和。柱状图按场景排序，第三档几乎是一条水平线，说明它们的瓶颈不在调度吞吐这一维。从 s1 到 s3，第一档的曲线始终压在最上面，第三档几乎不随规模变化。</a:t>
             </a:r>
           </a:p>
         </p:txBody>
@@ -1688,7 +1688,7 @@
           <a:lstStyle/>
           <a:p>
             <a:r>
-              <a:t>延迟这页。除 s2/w2 外，11 个非 Gang 场景 P99 都低于 Gödel，改善 0.3% 到 82.9%。最典型是 s2/w3，23.48 秒降到 4.00 秒；单实例 s3/w3 从 32.57 秒到 16.22 秒。Pod 端到端 P99 在 12 个非 Gang 场景也都不高于 Gödel，改善 0.6% 到 75.3%。Gang 是反的，放到局限里展开。延迟的单位都是秒，纵轴用对数，便于跨量级比较；改善的下界 0.3% 出现在接近饱和的场景。</a:t>
+              <a:t>和 Gödel 逐场景对比：16 个场景里 14 个领先，2 个持平，没有落后的，提升 2.0% 到 22.9%，平均 11.9%。优势最大的是高负载与多实例：s2/w3 高 22.9%，s3/w3 三实例高 21.7%。两个持平场景都没饱和，完成时间由注入速率决定。两个持平场景说明，未饱和时调度器再快也压不出更多吞吐。平均 11.9% 是 14 个领先场景提升幅度的均值。</a:t>
             </a:r>
           </a:p>
         </p:txBody>
@@ -1758,7 +1758,7 @@
           <a:lstStyle/>
           <a:p>
             <a:r>
-              <a:t>这是全文最强的归因证据。同样把实例从 1 加到 3，两边延迟都降约 99%，这部分一样。差别在吞吐：ENO 从 297.6 到 349.7，提升 17.5%；Gödel 从 283.3 到 287.4，只提升 1.4%。同样多的并发能力，Gödel 的增量被独立 Binder 的串行绑定吸收掉了。扩展性实验固定负载为 s3/w3，w3 即 1000 pods per second，两组都跑三次取中位数。延迟数量级下降，说明瓶颈不在决策侧。</a:t>
+              <a:t>延迟这页。除 s2/w2 外，11 个非 Gang 场景 P99 都低于 Gödel，改善 0.3% 到 82.9%。最典型是 s2/w3，23.48 秒降到 4.00 秒；单实例 s3/w3 从 32.57 秒到 16.22 秒。Pod 端到端 P99 在 12 个非 Gang 场景也都不高于 Gödel。Gang 是反的，放到局限里展开。延迟单位是秒，纵轴用对数，便于跨量级比较。改善的下界 0.3% 出现在已经接近饱和的场景。</a:t>
             </a:r>
           </a:p>
         </p:txBody>
@@ -1828,7 +1828,7 @@
           <a:lstStyle/>
           <a:p>
             <a:r>
-              <a:t>先说背景。云原生负载规模持续增长，生产集群已经进入万节点量级；业务对调度器提出双重要求，既要秒级承接海量 Pod，又要长期运行不因单点失效中断服务。原生 kube-scheduler 是单实例架构，这两条同时满足很吃力——这正是工业界做分布式改造的起点，也是本文要处理的问题。</a:t>
+              <a:t>先说背景。Kubernetes 已成为云原生的事实标准，调度器在 Pod 生命周期的关键路径上，吞吐和延迟直接决定资源利用率与业务响应速度。千节点规模单实例还能撑住，到万节点量级就暴露三个瓶颈：activeQ 串行、Filter/Score 随规模线性、Leader 单点。这三条叠在一起，单实例架构就很难再往上走。</a:t>
             </a:r>
           </a:p>
         </p:txBody>
@@ -1898,7 +1898,7 @@
           <a:lstStyle/>
           <a:p>
             <a:r>
-              <a:t>两件事。第一，规模从 5000 到 10000、实例数不变，两边都退化：ENO -15.2%，Gödel -2.3%；但 ENO 仍领先——吞吐 296.7 对 280.9 高 5.6%，P99 0.19 对 0.28 秒低 33.4%，队列峰值 9 对 61。第二，复杂负载：极限 +9.3% 与 +16.0%，突发 +21.3% 与 +2.8%，异构 s3 高 21.2%、s4 持平。注意固定三实例，回落不等于扩展上限。s4 的退化与固定三实例有关，这写在局限里。</a:t>
+              <a:t>这是全文最强的归因证据。同样把实例从 1 加到 3，两边延迟都降约 99%，这部分一样。差别在吞吐：ENO 从 297.6 到 349.7，提升 17.5%；Gödel 从 283.3 到 287.4，只提升 1.4%。同样多的并发能力，Gödel 的增量被独立 Binder 的串行绑定吸收掉了。延迟数量级下降说明瓶颈不在决策侧，而在绑定这一环的串行化。峰值吞吐两家都涨，但只有 ENO 把增量转化成了有效吞吐。</a:t>
             </a:r>
           </a:p>
         </p:txBody>
@@ -1968,7 +1968,7 @@
           <a:lstStyle/>
           <a:p>
             <a:r>
-              <a:t>把机制和指标对齐。进程内绑定去掉事件传递，对应 E2E 降低，三实例 0.45 对 0.93 秒；零拷贝让状态复用无同步延迟；关键是第三行，没有独立 Binder 的串行段，吞吐才能随实例扩展，+17.5% 对 +1.4%；第四行四层容错守住不变量。也要说明相关与归因的区别：峰值吞吐不是每个场景都领先，s3/w5 与 s4/w3 低于 Gödel。四行对应四个机制，每一项都有可复核的字段；如果评委追问某个数字，备用页里有完整口径以及原始目录。</a:t>
+              <a:t>两件事。第一，规模从 5000 到 10000、实例数不变，两边都退化：ENO -15.2%，Gödel -2.3%；但 ENO 仍领先，吞吐 296.7 对 280.9 高 5.6%，P99 0.19 对 0.28 秒低 33.4%，队列峰值 9 对 61。第二，复杂负载：极限 +9.3% 与 +16.0%，突发 +21.3% 与 +2.8%，异构 s3 高 21.2%、s4 持平。s4 的退化与固定三实例有关，这写在局限里。规模翻倍而实例不扩，本身就是一个更苛刻的设定，不能当作扩展上限。</a:t>
             </a:r>
           </a:p>
         </p:txBody>
@@ -2038,7 +2038,7 @@
           <a:lstStyle/>
           <a:p>
             <a:r>
-              <a:t>局限六条，只讲关键。KWOK 是仿真，绝对数值不外推，但跨调度器相对比较成立。Gang 即 w6，ENO 尾延迟确实更高：吞吐高 4.3% 到 19.1%，单 Pod P99 高 1.6 到 4.1 倍，原因是同组预留等待与决策共用进程和队列，我们没用独立计时实验把两段分离。其余是固定实例数、资源公平、Volcano 口径、幸存者偏差。这六条不是免责声明，而是给结论划边界；在这个边界内，跨调度器的相对结论是稳的。</a:t>
+              <a:t>把机制和指标对齐。进程内绑定去掉事件传递，对应 E2E 降低，三实例 0.45 对 0.93 秒；零拷贝让状态复用无同步延迟；关键是第三行，没有独立 Binder 的串行段，吞吐才能随实例扩展，+17.5% 对 +1.4%；第四行四层容错守住不变量。也要说明相关与归因的区别：峰值吞吐不是每个场景都领先。如果评委追问某个数字，备用页里有完整口径与原始目录。四行对应四个机制，每一项都有可复核的字段。</a:t>
             </a:r>
           </a:p>
         </p:txBody>
@@ -2108,7 +2108,7 @@
           <a:lstStyle/>
           <a:p>
             <a:r>
-              <a:t>最后收束。两个创新：ENO 把 Binder 放进进程内并用 CacheAdapter 共享缓存；四层容错给出不变量 I 的证明要点。三组证据：16 场景 144 次 run 全成功、平均 +11.9%、P99 最高 -82.9%、实例扩展 +17.5% 对 +1.4%。价值：不改 API、保留开关、基准开源。三组证据合起来，正好对应问题、方法与效果。</a:t>
+              <a:t>局限六条，只讲关键。KWOK 是仿真，绝对数值不外推，但跨调度器相对比较成立。Gang 即 w6，ENO 尾延迟确实更高：吞吐高 4.3% 到 19.1%，单 Pod P99 高 1.6 到 4.1 倍，原因是同组预留等待与决策共用进程和队列。s3 到 s4 固定三实例，退化幅度不能读成上限。其余是资源公平、Volcano 口径、幸存者偏差。这六条不是免责声明，而是给结论划边界。在这个边界内，跨调度器的相对结论是稳的。</a:t>
             </a:r>
           </a:p>
         </p:txBody>
@@ -2178,7 +2178,7 @@
           <a:lstStyle/>
           <a:p>
             <a:r>
-              <a:t>汇报到这里。一句话总结：把 Binder 合并进 Scheduler 进程，用 etcd 原子语义上的四层容错守住“至多绑定一次”，在 16 个场景、144 次 run 上做到更高吞吐、更低尾延迟、100% 成功率。请各位老师批评指正。如果只问一个问题，我的回答就是刚才那一句。</a:t>
+              <a:t>最后收束。两个创新：ENO 把 Binder 放进进程内并用 CacheAdapter 共享缓存；四层容错给出不变量 I 的证明要点。三组证据：16 场景 144 次 run 全成功、平均 +11.9%、P99 最高 -82.9%、实例扩展 +17.5% 对 +1.4%。价值：不改 API、保留开关、基准开源。三组证据合起来，正好对应问题、方法与效果。</a:t>
             </a:r>
           </a:p>
         </p:txBody>
@@ -2248,7 +2248,7 @@
           <a:lstStyle/>
           <a:p>
             <a:r>
-              <a:t>我的汇报到这里。如果只允许一句话总结：本文把 Binder 从独立进程合并进 Scheduler，用基于 etcd 原子语义的四层容错守住“至多绑定一次”，在 16 个场景、144 次 run 上做到更高吞吐、更低尾延迟和 100% 绑定成功率。请各位老师批评指正，谢谢。</a:t>
+              <a:t>汇报到这里。一句话总结：把 Binder 合并进 Scheduler 进程，用 etcd 原子语义上的四层容错守住“至多绑定一次”，在 16 个场景、144 次 run 上做到更高吞吐、更低尾延迟与 100% 绑定成功率。请各位老师批评指正。如果只问一个问题，我的回答就是刚才那一句。</a:t>
             </a:r>
           </a:p>
         </p:txBody>
@@ -2598,7 +2598,7 @@
           <a:lstStyle/>
           <a:p>
             <a:r>
-              <a:t>现状分国外与国内两条线。国外从集中式走到共享状态：Borg、Omega、Mesos，再到 kube-scheduler 的插件框架。国内代表是 Gödel，字节跳动开源，用节点分区做分片式多实例；Volcano 与 Koordinator 走插件增强。共同缺口在落盘侧，本文正落在这个缺口上。</a:t>
+              <a:t>第二章分国外与国内两条线。国外从集中式走到共享状态：Borg、Omega、Mesos，再到 kube-scheduler 的插件框架。国内代表是 Gödel，字节跳动开源，用节点分区做分片式多实例；Volcano 与 Koordinator 走插件增强。共同缺口在落盘侧。决策侧已相对充分，落盘侧的工程问题还没被系统回答。</a:t>
             </a:r>
           </a:p>
         </p:txBody>
@@ -2808,7 +2808,7 @@
           <a:lstStyle/>
           <a:p>
             <a:r>
-              <a:t>备用页：这一页给评委看形态。左边吞吐，右边 P99，共享时间轴。ENO 的平台更高、更早稳定；P99 峰值更低、回落更快。两张图放一起的意义是：我们的优势不是某个瞬时点，而是整段完成时间更短。这正好解释为什么有效吞吐对我们有利——它衡量的就是固定工作量多久做完，而不是某一秒的瞬时速率。</a:t>
+              <a:t>备用页：这一页是给评委看“形态”的。左边吞吐，右边 P99，共享同一条时间轴。ENO 的平台更高、更早稳定；右边的 P99 峰值更低、回落更快。这两张图放在一起的意义是：我们的优势不是某个瞬时点上的抖动，而是整段完成时间都更短——这也正好解释了为什么有效吞吐这个口径对我们有利，因为它衡量的是固定工作量做多久做完。</a:t>
             </a:r>
           </a:p>
         </p:txBody>
@@ -2878,7 +2878,7 @@
           <a:lstStyle/>
           <a:p>
             <a:r>
-              <a:t>这一页把全文压成两句。架构上，单 Dispatcher、多独立 Scheduler，Binder 合并进 Scheduler 进程，CacheAdapter 零拷贝共享缓存，去掉跨进程的事件传递与序列化。一致性上，四层容错，L0 到 L3 覆盖 Bind 前中后，每层对应一类 etcd 原子语义。两条创新指向同一个目标：不改 API，跑得快且绑得对。</a:t>
+              <a:t>这一页压成两句。架构上，单 Dispatcher、多独立 Scheduler，Binder 合并进 Scheduler 进程，CacheAdapter 零拷贝共享缓存。一致性上，四层容错覆盖 Bind 前中后，都建立在 etcd 原子语义上。两条创新指向同一个目标。不改 API 的前提下，让分布式调度既跑得快、稳定性更高。</a:t>
             </a:r>
           </a:p>
         </p:txBody>
@@ -2948,7 +2948,7 @@
           <a:lstStyle/>
           <a:p>
             <a:r>
-              <a:t>Gödel 是最有代表性的开源实现：Dispatcher 分发、Scheduler 决策、Binder 落盘，加节点分区。但它留了两个缺口：Binder 独立部署，绑定又变成跨进程串行环节；分区归属会漂移，严格一致性缺少完整论证。本文的两个问题就对着这两个缺口。</a:t>
+              <a:t>这张图是总体架构。上层 Dispatcher 单实例，维护节点分区表，把 Pod 按分区分发给对应 Scheduler，绑定出问题时清理注解、触发重分发。中间多个 Scheduler 只调度本分区节点。下层 Binder 与 Scheduler 同进程，负责真正写进 apiserver。三层职责清晰，故障面也就容易划清，后面的四层容错正是按这三层分工展开的。</a:t>
             </a:r>
           </a:p>
         </p:txBody>
@@ -3018,7 +3018,7 @@
           <a:lstStyle/>
           <a:p>
             <a:r>
-              <a:t>技术路线：并发做在分区上，一致性做在 etcd 上。Dispatcher 统一分发，Scheduler 在分区内并行决策，落盘走 dispatching、assuming、binding 三步事务。一致性不靠加锁，靠 etcd 三种原子语义：resourceVersion 乐观并发、Watch 一致性视图、Bind 子资源原子写。这三步事务，就是后面四层容错的落点。</a:t>
+              <a:t>Dispatcher 内部三步。第一步排序入队：nodeName 为空、还没有 scheduler-name 注解的新 Pod，按 FIFO 进有序队列。第二步分发决策：PodGroup 成员复用已分配实例，否则按负载均衡挑最空闲的。第三步写入并跟踪：PatchPod 写 scheduler-name，失败进不可调度队列。注意它不选节点，只决定 Pod 去哪。</a:t>
             </a:r>
           </a:p>
         </p:txBody>
@@ -3088,7 +3088,7 @@
           <a:lstStyle/>
           <a:p>
             <a:r>
-              <a:t>先看 Dispatcher 的内部流程。它进来先做归属校验，把分区漂移的 Pod 拦住；再按实例负载做分区选择，决定交给哪个 Scheduler；然后入队。注意它不选节点，只决定 Pod 去哪，选节点是下一环的事，这也是它能并行分发的原因。</a:t>
+              <a:t>Scheduler 内部也是三步。入队前 pre-queue 先校验 PodGroup 成员与亲和依赖，不通过退回 Dispatcher。进 activeQ 后跑 Filter、Score、Reserve，Reserve 阶段写 Assumed 状态。最后调 Binder 执行 Bind；失败进 backoffQ 退避，多次失败退回 Dispatcher。Scheduler 决定何时放弃本地重试，Dispatcher 决定何时重新分发，这是双向协作。</a:t>
             </a:r>
           </a:p>
         </p:txBody>
@@ -3158,7 +3158,7 @@
           <a:lstStyle/>
           <a:p>
             <a:r>
-              <a:t>难点在缓存。以前 Binder 在另一个进程，缓存要么复制要么重建。CacheAdapter 让进程内 Binder 直接拿到同一份 SchedulerCache 的对象引用，所以叫零拷贝。两边看到同一份状态，Layer 0 的校验才有同一个真相可依。零拷贝的收益，会在扩展性实验里直接体现。</a:t>
+              <a:t>左边是原形态，Binder 独立部署，决策完要把任务发过去；右边是本文形态，Binder 就在 Scheduler 进程里。这一刀去掉三段开销：事件传递、跨进程调用、序列化。我把它称为第一性来源。Binder 进进程之后，绑定与决策共享同一份缓存、同一个调度循环。</a:t>
             </a:r>
           </a:p>
         </p:txBody>
@@ -3228,7 +3228,7 @@
           <a:lstStyle/>
           <a:p>
             <a:r>
-              <a:t>四层是一条时间轴。Bind 前，Layer 0 校验归属注解，把漂移拦在门外；Bind 中，Layer 1 用同步退避处理暂态错误；失败后，Layer 2 用异步 Reconciler 回收孤儿状态；重试耗尽，Layer 3 由 Dispatcher 清注解、触发全局重分发。四层之间是衔接关系，不是四个独立补丁。</a:t>
+              <a:t>难点在缓存。以前 Binder 在另一个进程，缓存要么复制要么重建。CacheAdapter 让进程内 Binder 直接拿到同一份 SchedulerCache 的对象引用，所以叫零拷贝。两边看到同一份状态，Layer 0 的校验才有同一个真相可依。零拷贝的收益，会在后面的扩展性实验里直接看到。</a:t>
             </a:r>
           </a:p>
         </p:txBody>
@@ -31576,23 +31576,6 @@
                 <a:ea typeface="微软雅黑"/>
               </a:rPr>
               <a:t>▪  序列化与网络往返被消除</a:t>
-            </a:r>
-          </a:p>
-          <a:p>
-            <a:pPr algn="l">
-              <a:spcBef>
-                <a:spcPts val="600"/>
-              </a:spcBef>
-            </a:pPr>
-            <a:r>
-              <a:rPr sz="1400" b="0">
-                <a:solidFill>
-                  <a:srgbClr val="2E2C2C"/>
-                </a:solidFill>
-                <a:latin typeface="Arial"/>
-                <a:ea typeface="微软雅黑"/>
-              </a:rPr>
-              <a:t>▪  保留 CLI 开关，可回退</a:t>
             </a:r>
           </a:p>
         </p:txBody>

--- a/docs/thesis/defense/答辩PPT-北航模板版.pptx
+++ b/docs/thesis/defense/答辩PPT-北航模板版.pptx
@@ -31903,49 +31903,9 @@
           </a:p>
         </p:txBody>
       </p:sp>
-      <p:sp>
-        <p:nvSpPr>
-          <p:cNvPr id="9003" name="TextBox 9002"/>
-          <p:cNvSpPr txBox="1"/>
-          <p:nvPr/>
-        </p:nvSpPr>
-        <p:spPr>
-          <a:xfrm>
-            <a:off x="566928" y="1261872"/>
-            <a:ext cx="10881360" cy="438912"/>
-          </a:xfrm>
-          <a:prstGeom prst="rect">
-            <a:avLst/>
-          </a:prstGeom>
-          <a:noFill/>
-        </p:spPr>
-        <p:txBody>
-          <a:bodyPr wrap="square" anchor="ctr" lIns="0" rIns="0" tIns="0" bIns="0">
-            <a:spAutoFit/>
-          </a:bodyPr>
-          <a:lstStyle/>
-          <a:p>
-            <a:pPr algn="l">
-              <a:lnSpc>
-                <a:spcPct val="110000"/>
-              </a:lnSpc>
-            </a:pPr>
-            <a:r>
-              <a:rPr sz="1800" b="1">
-                <a:solidFill>
-                  <a:srgbClr val="0070C0"/>
-                </a:solidFill>
-                <a:latin typeface="Arial"/>
-                <a:ea typeface="微软雅黑"/>
-              </a:rPr>
-              <a:t>状态以对象引用共享，不再复制，也没有跨进程同步延迟</a:t>
-            </a:r>
-          </a:p>
-        </p:txBody>
-      </p:sp>
       <p:pic>
         <p:nvPicPr>
-          <p:cNvPr id="9004" name="Picture 9003" descr="fig5-2-cache-zero-copy.png"/>
+          <p:cNvPr id="9003" name="Picture 9002" descr="fig5-2-cache-zero-copy.png"/>
           <p:cNvPicPr>
             <a:picLocks noChangeAspect="1"/>
           </p:cNvPicPr>
@@ -31959,8 +31919,8 @@
         </p:blipFill>
         <p:spPr>
           <a:xfrm>
-            <a:off x="6174622" y="1783080"/>
-            <a:ext cx="5115794" cy="4206240"/>
+            <a:off x="3828698" y="868680"/>
+            <a:ext cx="4504123" cy="3703320"/>
           </a:xfrm>
           <a:prstGeom prst="rect">
             <a:avLst/>
@@ -31969,14 +31929,104 @@
       </p:pic>
       <p:sp>
         <p:nvSpPr>
-          <p:cNvPr id="9005" name="TextBox 9004"/>
+          <p:cNvPr id="9004" name="Rounded Rectangle 9003"/>
+          <p:cNvSpPr/>
+          <p:nvPr/>
+        </p:nvSpPr>
+        <p:spPr>
+          <a:xfrm>
+            <a:off x="566928" y="4754880"/>
+            <a:ext cx="3535680" cy="1417320"/>
+          </a:xfrm>
+          <a:prstGeom prst="roundRect">
+            <a:avLst/>
+          </a:prstGeom>
+          <a:solidFill>
+            <a:srgbClr val="FFFFFF"/>
+          </a:solidFill>
+          <a:ln w="9525">
+            <a:solidFill>
+              <a:srgbClr val="D6E3F0"/>
+            </a:solidFill>
+          </a:ln>
+          <a:effectLst/>
+        </p:spPr>
+        <p:style>
+          <a:lnRef idx="1">
+            <a:schemeClr val="accent1"/>
+          </a:lnRef>
+          <a:fillRef idx="3">
+            <a:schemeClr val="accent1"/>
+          </a:fillRef>
+          <a:effectRef idx="2">
+            <a:schemeClr val="accent1"/>
+          </a:effectRef>
+          <a:fontRef idx="minor">
+            <a:schemeClr val="lt1"/>
+          </a:fontRef>
+        </p:style>
+        <p:txBody>
+          <a:bodyPr rtlCol="0" anchor="ctr"/>
+          <a:lstStyle/>
+          <a:p>
+            <a:pPr algn="ctr"/>
+          </a:p>
+        </p:txBody>
+      </p:sp>
+      <p:sp>
+        <p:nvSpPr>
+          <p:cNvPr id="9005" name="Rectangle 9004"/>
+          <p:cNvSpPr/>
+          <p:nvPr/>
+        </p:nvSpPr>
+        <p:spPr>
+          <a:xfrm>
+            <a:off x="566928" y="4754880"/>
+            <a:ext cx="50292" cy="1417320"/>
+          </a:xfrm>
+          <a:prstGeom prst="rect">
+            <a:avLst/>
+          </a:prstGeom>
+          <a:solidFill>
+            <a:srgbClr val="113E6A"/>
+          </a:solidFill>
+          <a:ln>
+            <a:noFill/>
+          </a:ln>
+          <a:effectLst/>
+        </p:spPr>
+        <p:style>
+          <a:lnRef idx="1">
+            <a:schemeClr val="accent1"/>
+          </a:lnRef>
+          <a:fillRef idx="3">
+            <a:schemeClr val="accent1"/>
+          </a:fillRef>
+          <a:effectRef idx="2">
+            <a:schemeClr val="accent1"/>
+          </a:effectRef>
+          <a:fontRef idx="minor">
+            <a:schemeClr val="lt1"/>
+          </a:fontRef>
+        </p:style>
+        <p:txBody>
+          <a:bodyPr rtlCol="0" anchor="ctr"/>
+          <a:lstStyle/>
+          <a:p>
+            <a:pPr algn="ctr"/>
+          </a:p>
+        </p:txBody>
+      </p:sp>
+      <p:sp>
+        <p:nvSpPr>
+          <p:cNvPr id="9006" name="TextBox 9005"/>
           <p:cNvSpPr txBox="1"/>
           <p:nvPr/>
         </p:nvSpPr>
         <p:spPr>
           <a:xfrm>
-            <a:off x="566928" y="2011680"/>
-            <a:ext cx="5029200" cy="1417320"/>
+            <a:off x="749808" y="4864608"/>
+            <a:ext cx="3224784" cy="1234440"/>
           </a:xfrm>
           <a:prstGeom prst="rect">
             <a:avLst/>
@@ -31989,67 +32039,335 @@
           </a:bodyPr>
           <a:lstStyle/>
           <a:p>
+            <a:pPr algn="l"/>
+            <a:r>
+              <a:rPr sz="1500" b="1">
+                <a:solidFill>
+                  <a:srgbClr val="113E6A"/>
+                </a:solidFill>
+                <a:latin typeface="Arial"/>
+                <a:ea typeface="微软雅黑"/>
+              </a:rPr>
+              <a:t>① 共享同一实例</a:t>
+            </a:r>
+          </a:p>
+          <a:p>
             <a:pPr algn="l">
               <a:lnSpc>
-                <a:spcPct val="115000"/>
+                <a:spcPct val="118000"/>
               </a:lnSpc>
+              <a:spcBef>
+                <a:spcPts val="400"/>
+              </a:spcBef>
             </a:pPr>
             <a:r>
-              <a:rPr sz="1550" b="0">
+              <a:rPr sz="1250" b="0">
                 <a:solidFill>
                   <a:srgbClr val="2E2C2C"/>
                 </a:solidFill>
                 <a:latin typeface="Arial"/>
                 <a:ea typeface="微软雅黑"/>
               </a:rPr>
-              <a:t>▪  对象引用而非序列化拷贝</a:t>
+              <a:t>CacheAdapter 把 Scheduler 的 SchedulerCache 交给进程内 Binder，两边持有同一份缓存对象</a:t>
+            </a:r>
+          </a:p>
+        </p:txBody>
+      </p:sp>
+      <p:sp>
+        <p:nvSpPr>
+          <p:cNvPr id="9007" name="Rounded Rectangle 9006"/>
+          <p:cNvSpPr/>
+          <p:nvPr/>
+        </p:nvSpPr>
+        <p:spPr>
+          <a:xfrm>
+            <a:off x="4331208" y="4754880"/>
+            <a:ext cx="3535680" cy="1417320"/>
+          </a:xfrm>
+          <a:prstGeom prst="roundRect">
+            <a:avLst/>
+          </a:prstGeom>
+          <a:solidFill>
+            <a:srgbClr val="FFFFFF"/>
+          </a:solidFill>
+          <a:ln w="9525">
+            <a:solidFill>
+              <a:srgbClr val="D6E3F0"/>
+            </a:solidFill>
+          </a:ln>
+          <a:effectLst/>
+        </p:spPr>
+        <p:style>
+          <a:lnRef idx="1">
+            <a:schemeClr val="accent1"/>
+          </a:lnRef>
+          <a:fillRef idx="3">
+            <a:schemeClr val="accent1"/>
+          </a:fillRef>
+          <a:effectRef idx="2">
+            <a:schemeClr val="accent1"/>
+          </a:effectRef>
+          <a:fontRef idx="minor">
+            <a:schemeClr val="lt1"/>
+          </a:fontRef>
+        </p:style>
+        <p:txBody>
+          <a:bodyPr rtlCol="0" anchor="ctr"/>
+          <a:lstStyle/>
+          <a:p>
+            <a:pPr algn="ctr"/>
+          </a:p>
+        </p:txBody>
+      </p:sp>
+      <p:sp>
+        <p:nvSpPr>
+          <p:cNvPr id="9008" name="Rectangle 9007"/>
+          <p:cNvSpPr/>
+          <p:nvPr/>
+        </p:nvSpPr>
+        <p:spPr>
+          <a:xfrm>
+            <a:off x="4331208" y="4754880"/>
+            <a:ext cx="50292" cy="1417320"/>
+          </a:xfrm>
+          <a:prstGeom prst="rect">
+            <a:avLst/>
+          </a:prstGeom>
+          <a:solidFill>
+            <a:srgbClr val="113E6A"/>
+          </a:solidFill>
+          <a:ln>
+            <a:noFill/>
+          </a:ln>
+          <a:effectLst/>
+        </p:spPr>
+        <p:style>
+          <a:lnRef idx="1">
+            <a:schemeClr val="accent1"/>
+          </a:lnRef>
+          <a:fillRef idx="3">
+            <a:schemeClr val="accent1"/>
+          </a:fillRef>
+          <a:effectRef idx="2">
+            <a:schemeClr val="accent1"/>
+          </a:effectRef>
+          <a:fontRef idx="minor">
+            <a:schemeClr val="lt1"/>
+          </a:fontRef>
+        </p:style>
+        <p:txBody>
+          <a:bodyPr rtlCol="0" anchor="ctr"/>
+          <a:lstStyle/>
+          <a:p>
+            <a:pPr algn="ctr"/>
+          </a:p>
+        </p:txBody>
+      </p:sp>
+      <p:sp>
+        <p:nvSpPr>
+          <p:cNvPr id="9009" name="TextBox 9008"/>
+          <p:cNvSpPr txBox="1"/>
+          <p:nvPr/>
+        </p:nvSpPr>
+        <p:spPr>
+          <a:xfrm>
+            <a:off x="4514088" y="4864608"/>
+            <a:ext cx="3224784" cy="1234440"/>
+          </a:xfrm>
+          <a:prstGeom prst="rect">
+            <a:avLst/>
+          </a:prstGeom>
+          <a:noFill/>
+        </p:spPr>
+        <p:txBody>
+          <a:bodyPr wrap="square" anchor="t" lIns="0" rIns="0" tIns="0" bIns="0">
+            <a:spAutoFit/>
+          </a:bodyPr>
+          <a:lstStyle/>
+          <a:p>
+            <a:pPr algn="l"/>
+            <a:r>
+              <a:rPr sz="1500" b="1">
+                <a:solidFill>
+                  <a:srgbClr val="113E6A"/>
+                </a:solidFill>
+                <a:latin typeface="Arial"/>
+                <a:ea typeface="微软雅黑"/>
+              </a:rPr>
+              <a:t>② 零拷贝、零同步</a:t>
             </a:r>
           </a:p>
           <a:p>
             <a:pPr algn="l">
               <a:lnSpc>
-                <a:spcPct val="115000"/>
+                <a:spcPct val="118000"/>
               </a:lnSpc>
               <a:spcBef>
-                <a:spcPts val="1400"/>
+                <a:spcPts val="400"/>
               </a:spcBef>
             </a:pPr>
             <a:r>
-              <a:rPr sz="1550" b="0">
+              <a:rPr sz="1250" b="0">
                 <a:solidFill>
                   <a:srgbClr val="2E2C2C"/>
                 </a:solidFill>
                 <a:latin typeface="Arial"/>
                 <a:ea typeface="微软雅黑"/>
               </a:rPr>
-              <a:t>▪  进程内 Binder 与 Scheduler 同视图</a:t>
+              <a:t>状态以引用传递，不做序列化复制，也没有跨进程的同步延迟与网络往返</a:t>
+            </a:r>
+          </a:p>
+        </p:txBody>
+      </p:sp>
+      <p:sp>
+        <p:nvSpPr>
+          <p:cNvPr id="9010" name="Rounded Rectangle 9009"/>
+          <p:cNvSpPr/>
+          <p:nvPr/>
+        </p:nvSpPr>
+        <p:spPr>
+          <a:xfrm>
+            <a:off x="8095488" y="4754880"/>
+            <a:ext cx="3535680" cy="1417320"/>
+          </a:xfrm>
+          <a:prstGeom prst="roundRect">
+            <a:avLst/>
+          </a:prstGeom>
+          <a:solidFill>
+            <a:srgbClr val="FFFFFF"/>
+          </a:solidFill>
+          <a:ln w="9525">
+            <a:solidFill>
+              <a:srgbClr val="D6E3F0"/>
+            </a:solidFill>
+          </a:ln>
+          <a:effectLst/>
+        </p:spPr>
+        <p:style>
+          <a:lnRef idx="1">
+            <a:schemeClr val="accent1"/>
+          </a:lnRef>
+          <a:fillRef idx="3">
+            <a:schemeClr val="accent1"/>
+          </a:fillRef>
+          <a:effectRef idx="2">
+            <a:schemeClr val="accent1"/>
+          </a:effectRef>
+          <a:fontRef idx="minor">
+            <a:schemeClr val="lt1"/>
+          </a:fontRef>
+        </p:style>
+        <p:txBody>
+          <a:bodyPr rtlCol="0" anchor="ctr"/>
+          <a:lstStyle/>
+          <a:p>
+            <a:pPr algn="ctr"/>
+          </a:p>
+        </p:txBody>
+      </p:sp>
+      <p:sp>
+        <p:nvSpPr>
+          <p:cNvPr id="9011" name="Rectangle 9010"/>
+          <p:cNvSpPr/>
+          <p:nvPr/>
+        </p:nvSpPr>
+        <p:spPr>
+          <a:xfrm>
+            <a:off x="8095488" y="4754880"/>
+            <a:ext cx="50292" cy="1417320"/>
+          </a:xfrm>
+          <a:prstGeom prst="rect">
+            <a:avLst/>
+          </a:prstGeom>
+          <a:solidFill>
+            <a:srgbClr val="113E6A"/>
+          </a:solidFill>
+          <a:ln>
+            <a:noFill/>
+          </a:ln>
+          <a:effectLst/>
+        </p:spPr>
+        <p:style>
+          <a:lnRef idx="1">
+            <a:schemeClr val="accent1"/>
+          </a:lnRef>
+          <a:fillRef idx="3">
+            <a:schemeClr val="accent1"/>
+          </a:fillRef>
+          <a:effectRef idx="2">
+            <a:schemeClr val="accent1"/>
+          </a:effectRef>
+          <a:fontRef idx="minor">
+            <a:schemeClr val="lt1"/>
+          </a:fontRef>
+        </p:style>
+        <p:txBody>
+          <a:bodyPr rtlCol="0" anchor="ctr"/>
+          <a:lstStyle/>
+          <a:p>
+            <a:pPr algn="ctr"/>
+          </a:p>
+        </p:txBody>
+      </p:sp>
+      <p:sp>
+        <p:nvSpPr>
+          <p:cNvPr id="9012" name="TextBox 9011"/>
+          <p:cNvSpPr txBox="1"/>
+          <p:nvPr/>
+        </p:nvSpPr>
+        <p:spPr>
+          <a:xfrm>
+            <a:off x="8278367" y="4864608"/>
+            <a:ext cx="3224784" cy="1234440"/>
+          </a:xfrm>
+          <a:prstGeom prst="rect">
+            <a:avLst/>
+          </a:prstGeom>
+          <a:noFill/>
+        </p:spPr>
+        <p:txBody>
+          <a:bodyPr wrap="square" anchor="t" lIns="0" rIns="0" tIns="0" bIns="0">
+            <a:spAutoFit/>
+          </a:bodyPr>
+          <a:lstStyle/>
+          <a:p>
+            <a:pPr algn="l"/>
+            <a:r>
+              <a:rPr sz="1500" b="1">
+                <a:solidFill>
+                  <a:srgbClr val="113E6A"/>
+                </a:solidFill>
+                <a:latin typeface="Arial"/>
+                <a:ea typeface="微软雅黑"/>
+              </a:rPr>
+              <a:t>③ 同一份真相</a:t>
             </a:r>
           </a:p>
           <a:p>
             <a:pPr algn="l">
               <a:lnSpc>
-                <a:spcPct val="115000"/>
+                <a:spcPct val="118000"/>
               </a:lnSpc>
               <a:spcBef>
-                <a:spcPts val="1400"/>
+                <a:spcPts val="400"/>
               </a:spcBef>
             </a:pPr>
             <a:r>
-              <a:rPr sz="1550" b="0">
+              <a:rPr sz="1250" b="0">
                 <a:solidFill>
                   <a:srgbClr val="2E2C2C"/>
                 </a:solidFill>
                 <a:latin typeface="Arial"/>
                 <a:ea typeface="微软雅黑"/>
               </a:rPr>
-              <a:t>▪  为一致性校验提供同一份真相</a:t>
-            </a:r>
-          </a:p>
-        </p:txBody>
-      </p:sp>
-      <p:sp>
-        <p:nvSpPr>
-          <p:cNvPr id="9006" name="TextBox 9005"/>
+              <a:t>Layer 0 的节点归属校验读的就是这份缓存，Scheduler 与 Binder 看到的状态一致</a:t>
+            </a:r>
+          </a:p>
+        </p:txBody>
+      </p:sp>
+      <p:sp>
+        <p:nvSpPr>
+          <p:cNvPr id="9013" name="TextBox 9012"/>
           <p:cNvSpPr txBox="1"/>
           <p:nvPr/>
         </p:nvSpPr>

--- a/docs/thesis/defense/答辩PPT-北航模板版.pptx
+++ b/docs/thesis/defense/答辩PPT-北航模板版.pptx
@@ -8104,8 +8104,8 @@
         </p:nvSpPr>
         <p:spPr>
           <a:xfrm>
-            <a:off x="2212848" y="1920240"/>
-            <a:ext cx="25603" cy="3968496"/>
+            <a:off x="2212848" y="1847088"/>
+            <a:ext cx="25603" cy="4041648"/>
           </a:xfrm>
           <a:prstGeom prst="rect">
             <a:avLst/>
@@ -8148,7 +8148,7 @@
         </p:nvSpPr>
         <p:spPr>
           <a:xfrm>
-            <a:off x="2139696" y="2194560"/>
+            <a:off x="2139696" y="2157984"/>
             <a:ext cx="201168" cy="201168"/>
           </a:xfrm>
           <a:prstGeom prst="ellipse">
@@ -8194,8 +8194,8 @@
         </p:nvSpPr>
         <p:spPr>
           <a:xfrm>
-            <a:off x="566928" y="2029968"/>
-            <a:ext cx="1444752" cy="658368"/>
+            <a:off x="566928" y="1993392"/>
+            <a:ext cx="1444752" cy="713232"/>
           </a:xfrm>
           <a:prstGeom prst="rect">
             <a:avLst/>
@@ -8210,7 +8210,7 @@
           <a:p>
             <a:pPr algn="r"/>
             <a:r>
-              <a:rPr sz="1350" b="1">
+              <a:rPr sz="1300" b="1">
                 <a:solidFill>
                   <a:srgbClr val="113E6A"/>
                 </a:solidFill>
@@ -8227,7 +8227,7 @@
               </a:spcBef>
             </a:pPr>
             <a:r>
-              <a:rPr sz="1050" b="0">
+              <a:rPr sz="1000" b="0">
                 <a:solidFill>
                   <a:srgbClr val="636363"/>
                 </a:solidFill>
@@ -8247,8 +8247,8 @@
         </p:nvSpPr>
         <p:spPr>
           <a:xfrm>
-            <a:off x="2450592" y="1938528"/>
-            <a:ext cx="8961120" cy="841248"/>
+            <a:off x="2450592" y="1828800"/>
+            <a:ext cx="8961120" cy="969264"/>
           </a:xfrm>
           <a:prstGeom prst="roundRect">
             <a:avLst/>
@@ -8293,8 +8293,8 @@
         </p:nvSpPr>
         <p:spPr>
           <a:xfrm>
-            <a:off x="2615184" y="2039112"/>
-            <a:ext cx="8641080" cy="658368"/>
+            <a:off x="2615184" y="1892807"/>
+            <a:ext cx="8641080" cy="859536"/>
           </a:xfrm>
           <a:prstGeom prst="rect">
             <a:avLst/>
@@ -8307,23 +8307,10 @@
           </a:bodyPr>
           <a:lstStyle/>
           <a:p>
-            <a:pPr algn="l"/>
-            <a:r>
-              <a:rPr sz="1150" b="0">
-                <a:solidFill>
-                  <a:srgbClr val="2E2C2C"/>
-                </a:solidFill>
-                <a:latin typeface="Arial"/>
-                <a:ea typeface="微软雅黑"/>
-              </a:rPr>
-              <a:t>威胁：分区归属漂移</a:t>
-            </a:r>
-          </a:p>
-          <a:p>
             <a:pPr algn="l">
-              <a:spcBef>
-                <a:spcPts val="200"/>
-              </a:spcBef>
+              <a:lnSpc>
+                <a:spcPct val="100000"/>
+              </a:lnSpc>
             </a:pPr>
             <a:r>
               <a:rPr sz="1050" b="0">
@@ -8333,7 +8320,47 @@
                 <a:latin typeface="Arial"/>
                 <a:ea typeface="微软雅黑"/>
               </a:rPr>
-              <a:t>etcd：resourceVersion 乐观并发</a:t>
+              <a:t>威胁：T0 节点分区归属漂移</a:t>
+            </a:r>
+          </a:p>
+          <a:p>
+            <a:pPr algn="l">
+              <a:lnSpc>
+                <a:spcPct val="100000"/>
+              </a:lnSpc>
+              <a:spcBef>
+                <a:spcPts val="100"/>
+              </a:spcBef>
+            </a:pPr>
+            <a:r>
+              <a:rPr sz="1000" b="0">
+                <a:solidFill>
+                  <a:srgbClr val="2E2C2C"/>
+                </a:solidFill>
+                <a:latin typeface="Arial"/>
+                <a:ea typeface="微软雅黑"/>
+              </a:rPr>
+              <a:t>动作：Bind 前校验 Node 的 eno.io/scheduler-name 注解，非本分区直接拒绝并清理注解回退</a:t>
+            </a:r>
+          </a:p>
+          <a:p>
+            <a:pPr algn="l">
+              <a:lnSpc>
+                <a:spcPct val="100000"/>
+              </a:lnSpc>
+              <a:spcBef>
+                <a:spcPts val="100"/>
+              </a:spcBef>
+            </a:pPr>
+            <a:r>
+              <a:rPr sz="950" b="0">
+                <a:solidFill>
+                  <a:srgbClr val="636363"/>
+                </a:solidFill>
+                <a:latin typeface="Arial"/>
+                <a:ea typeface="微软雅黑"/>
+              </a:rPr>
+              <a:t>依赖：resourceVersion 乐观并发</a:t>
             </a:r>
           </a:p>
         </p:txBody>
@@ -8346,7 +8373,7 @@
         </p:nvSpPr>
         <p:spPr>
           <a:xfrm>
-            <a:off x="2139696" y="3172968"/>
+            <a:off x="2139696" y="3200399"/>
             <a:ext cx="201168" cy="201168"/>
           </a:xfrm>
           <a:prstGeom prst="ellipse">
@@ -8392,8 +8419,8 @@
         </p:nvSpPr>
         <p:spPr>
           <a:xfrm>
-            <a:off x="566928" y="3008376"/>
-            <a:ext cx="1444752" cy="658368"/>
+            <a:off x="566928" y="3035808"/>
+            <a:ext cx="1444752" cy="713232"/>
           </a:xfrm>
           <a:prstGeom prst="rect">
             <a:avLst/>
@@ -8408,7 +8435,7 @@
           <a:p>
             <a:pPr algn="r"/>
             <a:r>
-              <a:rPr sz="1350" b="1">
+              <a:rPr sz="1300" b="1">
                 <a:solidFill>
                   <a:srgbClr val="113E6A"/>
                 </a:solidFill>
@@ -8425,7 +8452,7 @@
               </a:spcBef>
             </a:pPr>
             <a:r>
-              <a:rPr sz="1050" b="0">
+              <a:rPr sz="1000" b="0">
                 <a:solidFill>
                   <a:srgbClr val="636363"/>
                 </a:solidFill>
@@ -8445,8 +8472,8 @@
         </p:nvSpPr>
         <p:spPr>
           <a:xfrm>
-            <a:off x="2450592" y="2916936"/>
-            <a:ext cx="8961120" cy="841248"/>
+            <a:off x="2450592" y="2871215"/>
+            <a:ext cx="8961120" cy="969264"/>
           </a:xfrm>
           <a:prstGeom prst="roundRect">
             <a:avLst/>
@@ -8491,8 +8518,8 @@
         </p:nvSpPr>
         <p:spPr>
           <a:xfrm>
-            <a:off x="2615184" y="3017520"/>
-            <a:ext cx="8641080" cy="658368"/>
+            <a:off x="2615184" y="2935223"/>
+            <a:ext cx="8641080" cy="859536"/>
           </a:xfrm>
           <a:prstGeom prst="rect">
             <a:avLst/>
@@ -8505,23 +8532,10 @@
           </a:bodyPr>
           <a:lstStyle/>
           <a:p>
-            <a:pPr algn="l"/>
-            <a:r>
-              <a:rPr sz="1150" b="0">
-                <a:solidFill>
-                  <a:srgbClr val="2E2C2C"/>
-                </a:solidFill>
-                <a:latin typeface="Arial"/>
-                <a:ea typeface="微软雅黑"/>
-              </a:rPr>
-              <a:t>威胁：apiserver 暂态错误</a:t>
-            </a:r>
-          </a:p>
-          <a:p>
             <a:pPr algn="l">
-              <a:spcBef>
-                <a:spcPts val="200"/>
-              </a:spcBef>
+              <a:lnSpc>
+                <a:spcPct val="100000"/>
+              </a:lnSpc>
             </a:pPr>
             <a:r>
               <a:rPr sz="1050" b="0">
@@ -8531,7 +8545,47 @@
                 <a:latin typeface="Arial"/>
                 <a:ea typeface="微软雅黑"/>
               </a:rPr>
-              <a:t>etcd：Bind 原子写 / 409 冲突</a:t>
+              <a:t>威胁：T1 Bind 返回 409 Conflict / 429 TooManyRequests / ServerTimeout</a:t>
+            </a:r>
+          </a:p>
+          <a:p>
+            <a:pPr algn="l">
+              <a:lnSpc>
+                <a:spcPct val="100000"/>
+              </a:lnSpc>
+              <a:spcBef>
+                <a:spcPts val="100"/>
+              </a:spcBef>
+            </a:pPr>
+            <a:r>
+              <a:rPr sz="1000" b="0">
+                <a:solidFill>
+                  <a:srgbClr val="2E2C2C"/>
+                </a:solidFill>
+                <a:latin typeface="Arial"/>
+                <a:ea typeface="微软雅黑"/>
+              </a:rPr>
+              <a:t>动作：线性退避 n×100ms（100/200/300ms），最多 3 次；仅这三类重试，其余错误立即上抛</a:t>
+            </a:r>
+          </a:p>
+          <a:p>
+            <a:pPr algn="l">
+              <a:lnSpc>
+                <a:spcPct val="100000"/>
+              </a:lnSpc>
+              <a:spcBef>
+                <a:spcPts val="100"/>
+              </a:spcBef>
+            </a:pPr>
+            <a:r>
+              <a:rPr sz="950" b="0">
+                <a:solidFill>
+                  <a:srgbClr val="636363"/>
+                </a:solidFill>
+                <a:latin typeface="Arial"/>
+                <a:ea typeface="微软雅黑"/>
+              </a:rPr>
+              <a:t>依赖：Bind 原子性：重复 Bind 返回 409，可视为成功</a:t>
             </a:r>
           </a:p>
         </p:txBody>
@@ -8544,7 +8598,7 @@
         </p:nvSpPr>
         <p:spPr>
           <a:xfrm>
-            <a:off x="2139696" y="4151376"/>
+            <a:off x="2139696" y="4242816"/>
             <a:ext cx="201168" cy="201168"/>
           </a:xfrm>
           <a:prstGeom prst="ellipse">
@@ -8590,8 +8644,8 @@
         </p:nvSpPr>
         <p:spPr>
           <a:xfrm>
-            <a:off x="566928" y="3986783"/>
-            <a:ext cx="1444752" cy="658368"/>
+            <a:off x="566928" y="4078223"/>
+            <a:ext cx="1444752" cy="713232"/>
           </a:xfrm>
           <a:prstGeom prst="rect">
             <a:avLst/>
@@ -8606,7 +8660,7 @@
           <a:p>
             <a:pPr algn="r"/>
             <a:r>
-              <a:rPr sz="1350" b="1">
+              <a:rPr sz="1300" b="1">
                 <a:solidFill>
                   <a:srgbClr val="113E6A"/>
                 </a:solidFill>
@@ -8623,7 +8677,7 @@
               </a:spcBef>
             </a:pPr>
             <a:r>
-              <a:rPr sz="1050" b="0">
+              <a:rPr sz="1000" b="0">
                 <a:solidFill>
                   <a:srgbClr val="636363"/>
                 </a:solidFill>
@@ -8643,8 +8697,8 @@
         </p:nvSpPr>
         <p:spPr>
           <a:xfrm>
-            <a:off x="2450592" y="3895344"/>
-            <a:ext cx="8961120" cy="841248"/>
+            <a:off x="2450592" y="3913631"/>
+            <a:ext cx="8961120" cy="969264"/>
           </a:xfrm>
           <a:prstGeom prst="roundRect">
             <a:avLst/>
@@ -8689,8 +8743,8 @@
         </p:nvSpPr>
         <p:spPr>
           <a:xfrm>
-            <a:off x="2615184" y="3995928"/>
-            <a:ext cx="8641080" cy="658368"/>
+            <a:off x="2615184" y="3977639"/>
+            <a:ext cx="8641080" cy="859536"/>
           </a:xfrm>
           <a:prstGeom prst="rect">
             <a:avLst/>
@@ -8703,23 +8757,10 @@
           </a:bodyPr>
           <a:lstStyle/>
           <a:p>
-            <a:pPr algn="l"/>
-            <a:r>
-              <a:rPr sz="1150" b="0">
-                <a:solidFill>
-                  <a:srgbClr val="2E2C2C"/>
-                </a:solidFill>
-                <a:latin typeface="Arial"/>
-                <a:ea typeface="微软雅黑"/>
-              </a:rPr>
-              <a:t>威胁：孤儿 Assumed 状态</a:t>
-            </a:r>
-          </a:p>
-          <a:p>
             <a:pPr algn="l">
-              <a:spcBef>
-                <a:spcPts val="200"/>
-              </a:spcBef>
+              <a:lnSpc>
+                <a:spcPct val="100000"/>
+              </a:lnSpc>
             </a:pPr>
             <a:r>
               <a:rPr sz="1050" b="0">
@@ -8729,7 +8770,47 @@
                 <a:latin typeface="Arial"/>
                 <a:ea typeface="微软雅黑"/>
               </a:rPr>
-              <a:t>etcd：Watch 一致性视图</a:t>
+              <a:t>威胁：T2 Bind 失败后 scheduler-name、assumed-node 注解残留</a:t>
+            </a:r>
+          </a:p>
+          <a:p>
+            <a:pPr algn="l">
+              <a:lnSpc>
+                <a:spcPct val="100000"/>
+              </a:lnSpc>
+              <a:spcBef>
+                <a:spcPts val="100"/>
+              </a:spcBef>
+            </a:pPr>
+            <a:r>
+              <a:rPr sz="1000" b="0">
+                <a:solidFill>
+                  <a:srgbClr val="2E2C2C"/>
+                </a:solidFill>
+                <a:latin typeface="Arial"/>
+                <a:ea typeface="微软雅黑"/>
+              </a:rPr>
+              <a:t>动作：异步 Reconciler 消费失败队列，PatchPod 清理调度注解，按失败计数决定本地重试或升 L3</a:t>
+            </a:r>
+          </a:p>
+          <a:p>
+            <a:pPr algn="l">
+              <a:lnSpc>
+                <a:spcPct val="100000"/>
+              </a:lnSpc>
+              <a:spcBef>
+                <a:spcPts val="100"/>
+              </a:spcBef>
+            </a:pPr>
+            <a:r>
+              <a:rPr sz="950" b="0">
+                <a:solidFill>
+                  <a:srgbClr val="636363"/>
+                </a:solidFill>
+                <a:latin typeface="Arial"/>
+                <a:ea typeface="微软雅黑"/>
+              </a:rPr>
+              <a:t>依赖：Watch 一致性视图；NotFound 直接丢弃</a:t>
             </a:r>
           </a:p>
         </p:txBody>
@@ -8742,7 +8823,7 @@
         </p:nvSpPr>
         <p:spPr>
           <a:xfrm>
-            <a:off x="2139696" y="5129784"/>
+            <a:off x="2139696" y="5285232"/>
             <a:ext cx="201168" cy="201168"/>
           </a:xfrm>
           <a:prstGeom prst="ellipse">
@@ -8788,8 +8869,8 @@
         </p:nvSpPr>
         <p:spPr>
           <a:xfrm>
-            <a:off x="566928" y="4965192"/>
-            <a:ext cx="1444752" cy="658368"/>
+            <a:off x="566928" y="5120640"/>
+            <a:ext cx="1444752" cy="713232"/>
           </a:xfrm>
           <a:prstGeom prst="rect">
             <a:avLst/>
@@ -8804,7 +8885,7 @@
           <a:p>
             <a:pPr algn="r"/>
             <a:r>
-              <a:rPr sz="1350" b="1">
+              <a:rPr sz="1300" b="1">
                 <a:solidFill>
                   <a:srgbClr val="113E6A"/>
                 </a:solidFill>
@@ -8821,7 +8902,7 @@
               </a:spcBef>
             </a:pPr>
             <a:r>
-              <a:rPr sz="1050" b="0">
+              <a:rPr sz="1000" b="0">
                 <a:solidFill>
                   <a:srgbClr val="636363"/>
                 </a:solidFill>
@@ -8841,8 +8922,8 @@
         </p:nvSpPr>
         <p:spPr>
           <a:xfrm>
-            <a:off x="2450592" y="4873752"/>
-            <a:ext cx="8961120" cy="841248"/>
+            <a:off x="2450592" y="4956048"/>
+            <a:ext cx="8961120" cy="969264"/>
           </a:xfrm>
           <a:prstGeom prst="roundRect">
             <a:avLst/>
@@ -8887,8 +8968,8 @@
         </p:nvSpPr>
         <p:spPr>
           <a:xfrm>
-            <a:off x="2615184" y="4974336"/>
-            <a:ext cx="8641080" cy="658368"/>
+            <a:off x="2615184" y="5020056"/>
+            <a:ext cx="8641080" cy="859536"/>
           </a:xfrm>
           <a:prstGeom prst="rect">
             <a:avLst/>
@@ -8901,23 +8982,10 @@
           </a:bodyPr>
           <a:lstStyle/>
           <a:p>
-            <a:pPr algn="l"/>
-            <a:r>
-              <a:rPr sz="1150" b="0">
-                <a:solidFill>
-                  <a:srgbClr val="2E2C2C"/>
-                </a:solidFill>
-                <a:latin typeface="Arial"/>
-                <a:ea typeface="微软雅黑"/>
-              </a:rPr>
-              <a:t>威胁：实例失活、重试耗尽</a:t>
-            </a:r>
-          </a:p>
-          <a:p>
             <a:pPr algn="l">
-              <a:spcBef>
-                <a:spcPts val="200"/>
-              </a:spcBef>
+              <a:lnSpc>
+                <a:spcPct val="100000"/>
+              </a:lnSpc>
             </a:pPr>
             <a:r>
               <a:rPr sz="1050" b="0">
@@ -8927,7 +8995,47 @@
                 <a:latin typeface="Arial"/>
                 <a:ea typeface="微软雅黑"/>
               </a:rPr>
-              <a:t>etcd：注解清理 + 全局重分发</a:t>
+              <a:t>威胁：T3 本地重试耗尽、Scheduler 实例失活</a:t>
+            </a:r>
+          </a:p>
+          <a:p>
+            <a:pPr algn="l">
+              <a:lnSpc>
+                <a:spcPct val="100000"/>
+              </a:lnSpc>
+              <a:spcBef>
+                <a:spcPts val="100"/>
+              </a:spcBef>
+            </a:pPr>
+            <a:r>
+              <a:rPr sz="1000" b="0">
+                <a:solidFill>
+                  <a:srgbClr val="2E2C2C"/>
+                </a:solidFill>
+                <a:latin typeface="Arial"/>
+                <a:ea typeface="微软雅黑"/>
+              </a:rPr>
+              <a:t>动作：一次 PatchPod 原子提交：置 pod-state=Pending、删 scheduler-name、追加 failed-schedulers</a:t>
+            </a:r>
+          </a:p>
+          <a:p>
+            <a:pPr algn="l">
+              <a:lnSpc>
+                <a:spcPct val="100000"/>
+              </a:lnSpc>
+              <a:spcBef>
+                <a:spcPts val="100"/>
+              </a:spcBef>
+            </a:pPr>
+            <a:r>
+              <a:rPr sz="950" b="0">
+                <a:solidFill>
+                  <a:srgbClr val="636363"/>
+                </a:solidFill>
+                <a:latin typeface="Arial"/>
+                <a:ea typeface="微软雅黑"/>
+              </a:rPr>
+              <a:t>依赖：etcd 事务原子提交（Txn）</a:t>
             </a:r>
           </a:p>
         </p:txBody>

--- a/docs/thesis/defense/答辩PPT-北航模板版.pptx
+++ b/docs/thesis/defense/答辩PPT-北航模板版.pptx
@@ -1128,7 +1128,7 @@
           <a:lstStyle/>
           <a:p>
             <a:r>
-              <a:t>四层是一条时间轴。Bind 前 Layer 0 校验归属注解，把漂移拦在门外；Bind 中 Layer 1 用同步退避处理暂态错误；失败后 Layer 2 异步回收孤儿状态；重试耗尽 Layer 3 由 Dispatcher 清注解、触发全局重分发。每层依赖一种 etcd 语义。四层之间是衔接关系，不是四个独立补丁。</a:t>
+              <a:t>四层是一条时间轴。Bind 前 Layer 0 校验归属注解，非本分区直接拒绝并回退。Bind 中 Layer 1 只处理 409、429、ServerTimeout 三类暂态错误：线性退避 100、200、300 毫秒，最多三次，其它错误立即上抛。失败后 Layer 2 异步清理残留注解，按失败计数决定本地重试还是上升。重试耗尽 Layer 3 用一次原子 patch 交回 Dispatcher 重分发。四层之间是衔接关系，不是四个独立补丁。</a:t>
             </a:r>
           </a:p>
         </p:txBody>
@@ -1618,7 +1618,7 @@
           <a:lstStyle/>
           <a:p>
             <a:r>
-              <a:t>五组横向对比，结论是三档。第一档 ENO 与 Gödel，都是几百 pods/s；第二档 kube-scheduler；第三档 Volcano 与 Koordinator，只有约 48 和约 24 pods/s，几乎不随规模变化。主评估四场景里，ENO 比 kube-scheduler 高 1.8% 到 22.5%。唯一例外是 s1/w1 低负载低 7.2%，那个场景没饱和。柱状图按场景排序，第三档几乎是一条水平线，说明它们的瓶颈不在调度吞吐这一维。从 s1 到 s3，第一档的曲线始终压在最上面，第三档几乎不随规模变化。</a:t>
+              <a:t>五组横向对比，结论是三档。第一档 ENO 与 Gödel，都是几百 pods/s；第二档 kube-scheduler；第三档 Volcano 与 Koordinator，只有约 48 和约 24 pods/s，几乎不随规模变化。主评估四场景里，ENO 比 kube-scheduler 高 1.8% 到 22.5%。唯一例外是 s1/w1 低负载低 7.2%，那个场景没饱和。柱状图按场景排序，第三档几乎是一条水平线，说明它们的瓶颈不在调度吞吐这一维。从 s1 到 s3，第一档的曲线始终压在最上面，第三档几乎不随规模变化。这个排序在 16 个场景上是一致的。</a:t>
             </a:r>
           </a:p>
         </p:txBody>
@@ -2948,7 +2948,7 @@
           <a:lstStyle/>
           <a:p>
             <a:r>
-              <a:t>这张图是总体架构。上层 Dispatcher 单实例，维护节点分区表，把 Pod 按分区分发给对应 Scheduler，绑定出问题时清理注解、触发重分发。中间多个 Scheduler 只调度本分区节点。下层 Binder 与 Scheduler 同进程，负责真正写进 apiserver。三层职责清晰，故障面也就容易划清，后面的四层容错正是按这三层分工展开的。</a:t>
+              <a:t>这张图是总体架构。上层 Dispatcher 单实例，维护节点分区表，把 Pod 按分区分发给对应 Scheduler，绑定出问题时清理注解、触发重分发。中间多个 Scheduler 只调度本分区节点。下层 Binder 与 Scheduler 同进程，负责真正写进 apiserver。</a:t>
             </a:r>
           </a:p>
         </p:txBody>
@@ -3088,7 +3088,7 @@
           <a:lstStyle/>
           <a:p>
             <a:r>
-              <a:t>Scheduler 内部也是三步。入队前 pre-queue 先校验 PodGroup 成员与亲和依赖，不通过退回 Dispatcher。进 activeQ 后跑 Filter、Score、Reserve，Reserve 阶段写 Assumed 状态。最后调 Binder 执行 Bind；失败进 backoffQ 退避，多次失败退回 Dispatcher。Scheduler 决定何时放弃本地重试，Dispatcher 决定何时重新分发，这是双向协作。</a:t>
+              <a:t>Scheduler 内部也是三步。入队前 pre-queue 先校验 PodGroup 成员与亲和依赖，不通过退回 Dispatcher。进 activeQ 后跑 Filter、Score、Reserve，Reserve 阶段写 Assumed 状态。最后调 Binder 执行 Bind；失败进 backoffQ 退避，多次失败退回 Dispatcher。</a:t>
             </a:r>
           </a:p>
         </p:txBody>

--- a/docs/thesis/defense/答辩PPT-北航模板版.pptx
+++ b/docs/thesis/defense/答辩PPT-北航模板版.pptx
@@ -1058,7 +1058,7 @@
           <a:lstStyle/>
           <a:p>
             <a:r>
-              <a:t>各位老师上午好。我的论文题目是《基于 etcd 的分布式 Kubernetes 调度器研究与实现》。这项工作针对分布式调度器把绑定拆出去之后吞吐上不去、一致性也守不住的问题。一句话概括：把 Binder 合并回 Scheduler，用四层机制守住“至多绑定一次”。十八分钟，只讲问题、方法、证据。</a:t>
+              <a:t>各位老师上午好。我的论文题目是《基于 etcd 的分布式 Kubernetes 调度器研究与实现》。这项工作针对分布式调度器把绑定拆出去之后吞吐上不去、一致性也守不住的问题。一句话概括：把 Binder 合并回 Scheduler，用四层机制守住“至多绑定一次”。</a:t>
             </a:r>
           </a:p>
         </p:txBody>
@@ -1198,7 +1198,7 @@
           <a:lstStyle/>
           <a:p>
             <a:r>
-              <a:t>所有机制最后都回到不变量 I：任一 Pod 至多绑定到一个节点。证明拆四点：P1 来自 Bind 子资源原子写；P2 是 Assumed 状态清理；P3 是注解清理与重分发的时序；P4 是 Layer 0 前置拦截。四层都不破坏 I，且可在 apiserver 侧复核。这也是后面所有实验断言的设计依据。</a:t>
+              <a:t>所有机制最后都归约到这一条不变量 I：任一 Pod 至多绑定到一个节点。证明拆四点。P1 是 Bind 唯一性，来自 Kubernetes 自身：nodeName 为空才允许原子写入，重复写返回 409。P2 是 Assumed 清理，Reject 阶段 ForgetPod 清内存态，Layer 2 清 etcd 注解。P3 是清理到重分发的时序，一次 PatchPod 原子提交。P4 是 Layer 0 前置拦截，缓存滞后由 P1 兜底。这也是后面所有实验断言的设计依据：断言查的就是未绑定与重复绑定两项。</a:t>
             </a:r>
           </a:p>
         </p:txBody>
@@ -1828,7 +1828,7 @@
           <a:lstStyle/>
           <a:p>
             <a:r>
-              <a:t>先说背景。Kubernetes 已成为云原生的事实标准，调度器在 Pod 生命周期的关键路径上，吞吐和延迟直接决定资源利用率与业务响应速度。千节点规模单实例还能撑住，到万节点量级就暴露三个瓶颈：activeQ 串行、Filter/Score 随规模线性、Leader 单点。这三条叠在一起，单实例架构就很难再往上走。</a:t>
+              <a:t>先说背景。Kubernetes 已成为云原生的事实标准，调度器在 Pod 生命周期的关键路径上，吞吐和延迟直接决定资源利用率与业务响应速度。千节点规模单实例还能撑住，到万节点量级就暴露三个瓶颈：activeQ 串行、Filter/Score 随规模线性、Leader 单点。</a:t>
             </a:r>
           </a:p>
         </p:txBody>
@@ -2598,7 +2598,7 @@
           <a:lstStyle/>
           <a:p>
             <a:r>
-              <a:t>第二章分国外与国内两条线。国外从集中式走到共享状态：Borg、Omega、Mesos，再到 kube-scheduler 的插件框架。国内代表是 Gödel，字节跳动开源，用节点分区做分片式多实例；Volcano 与 Koordinator 走插件增强。共同缺口在落盘侧。决策侧已相对充分，落盘侧的工程问题还没被系统回答。</a:t>
+              <a:t>第二章分国外与国内两条线。国外从集中式走到共享状态：Borg、Omega、Mesos，再到 kube-scheduler 的插件框架。国内代表是 Gödel，字节跳动开源，用节点分区做分片式多实例；Volcano 与 Koordinator 走插件增强。共同缺口在落盘侧。</a:t>
             </a:r>
           </a:p>
         </p:txBody>
@@ -2878,7 +2878,7 @@
           <a:lstStyle/>
           <a:p>
             <a:r>
-              <a:t>这一页压成两句。架构上，单 Dispatcher、多独立 Scheduler，Binder 合并进 Scheduler 进程，CacheAdapter 零拷贝共享缓存。一致性上，四层容错覆盖 Bind 前中后，都建立在 etcd 原子语义上。两条创新指向同一个目标。不改 API 的前提下，让分布式调度既跑得快、稳定性更高。</a:t>
+              <a:t>这一页压成两句。架构上，单 Dispatcher、多独立 Scheduler，Binder 合并进 Scheduler 进程，CacheAdapter 零拷贝共享缓存。一致性上，四层容错覆盖 Bind 前中后，都建立在 etcd 原子语义上。两条创新指向同一个目标。</a:t>
             </a:r>
           </a:p>
         </p:txBody>
@@ -9358,7 +9358,7 @@
                 <a:latin typeface="Arial"/>
                 <a:ea typeface="微软雅黑"/>
               </a:rPr>
-              <a:t>正确性根基</a:t>
+              <a:t>核心不变量 I</a:t>
             </a:r>
           </a:p>
         </p:txBody>
@@ -9438,7 +9438,7 @@
                 <a:latin typeface="Arial"/>
                 <a:ea typeface="微软雅黑"/>
               </a:rPr>
-              <a:t>▪  Bind 原子写是最后防线</a:t>
+              <a:t>▪  P1 Bind 唯一性：nodeName 为空才允许写，重复写返回 409</a:t>
             </a:r>
           </a:p>
           <a:p>
@@ -9458,7 +9458,7 @@
                 <a:latin typeface="Arial"/>
                 <a:ea typeface="微软雅黑"/>
               </a:rPr>
-              <a:t>▪  resourceVersion 防并发覆盖</a:t>
+              <a:t>▪  P2 Assumed 清理：Reject 阶段 ForgetPod，Layer 2 清 etcd 注解</a:t>
             </a:r>
           </a:p>
           <a:p>
@@ -9478,7 +9478,27 @@
                 <a:latin typeface="Arial"/>
                 <a:ea typeface="微软雅黑"/>
               </a:rPr>
-              <a:t>▪  四层机制均不破坏 I</a:t>
+              <a:t>▪  P3 清理与重分发时序：一次 PatchPod 原子提交，无中间态</a:t>
+            </a:r>
+          </a:p>
+          <a:p>
+            <a:pPr algn="l">
+              <a:lnSpc>
+                <a:spcPct val="115000"/>
+              </a:lnSpc>
+              <a:spcBef>
+                <a:spcPts val="600"/>
+              </a:spcBef>
+            </a:pPr>
+            <a:r>
+              <a:rPr sz="1350" b="0">
+                <a:solidFill>
+                  <a:srgbClr val="2E2C2C"/>
+                </a:solidFill>
+                <a:latin typeface="Arial"/>
+                <a:ea typeface="微软雅黑"/>
+              </a:rPr>
+              <a:t>▪  P4 前置拦截：归属注解 + Layer 0 校验，缓存滞后由 P1 兜底</a:t>
             </a:r>
           </a:p>
         </p:txBody>
@@ -21417,7 +21437,7 @@
                 <a:latin typeface="Arial"/>
                 <a:ea typeface="微软雅黑"/>
               </a:rPr>
-              <a:t>不改 API、保留开关、基准开源</a:t>
+              <a:t>不改 API、可平滑替换、基准开源</a:t>
             </a:r>
           </a:p>
         </p:txBody>

--- a/docs/thesis/defense/答辩PPT-北航模板版.pptx
+++ b/docs/thesis/defense/答辩PPT-北航模板版.pptx
@@ -9900,7 +9900,7 @@
         </p:nvGraphicFramePr>
         <p:xfrm>
           <a:off x="566928" y="1828800"/>
-          <a:ext cx="11064240" cy="2523744"/>
+          <a:ext cx="11064240" cy="3456432"/>
         </p:xfrm>
         <a:graphic>
           <a:graphicData uri="http://schemas.openxmlformats.org/drawingml/2006/table">
@@ -9912,7 +9912,7 @@
                 <a:gridCol w="5532120"/>
                 <a:gridCol w="5532120"/>
               </a:tblGrid>
-              <a:tr h="420624">
+              <a:tr h="384048">
                 <a:tc>
                   <a:txBody>
                     <a:bodyPr wrap="square"/>
@@ -9920,7 +9920,7 @@
                     <a:p>
                       <a:pPr algn="l"/>
                       <a:r>
-                        <a:rPr sz="1200" b="1">
+                        <a:rPr sz="1150" b="1">
                           <a:solidFill>
                             <a:srgbClr val="FFFFFF"/>
                           </a:solidFill>
@@ -9944,7 +9944,7 @@
                     <a:p>
                       <a:pPr algn="ctr"/>
                       <a:r>
-                        <a:rPr sz="1200" b="1">
+                        <a:rPr sz="1150" b="1">
                           <a:solidFill>
                             <a:srgbClr val="FFFFFF"/>
                           </a:solidFill>
@@ -9962,7 +9962,7 @@
                   </a:tcPr>
                 </a:tc>
               </a:tr>
-              <a:tr h="420624">
+              <a:tr h="384048">
                 <a:tc>
                   <a:txBody>
                     <a:bodyPr wrap="square"/>
@@ -9970,7 +9970,7 @@
                     <a:p>
                       <a:pPr algn="l"/>
                       <a:r>
-                        <a:rPr sz="1200" b="0">
+                        <a:rPr sz="1150" b="0">
                           <a:solidFill>
                             <a:srgbClr val="2E2C2C"/>
                           </a:solidFill>
@@ -9994,7 +9994,7 @@
                     <a:p>
                       <a:pPr algn="ctr"/>
                       <a:r>
-                        <a:rPr sz="1200" b="0">
+                        <a:rPr sz="1150" b="0">
                           <a:solidFill>
                             <a:srgbClr val="2E2C2C"/>
                           </a:solidFill>
@@ -10012,7 +10012,7 @@
                   </a:tcPr>
                 </a:tc>
               </a:tr>
-              <a:tr h="420624">
+              <a:tr h="384048">
                 <a:tc>
                   <a:txBody>
                     <a:bodyPr wrap="square"/>
@@ -10020,14 +10020,14 @@
                     <a:p>
                       <a:pPr algn="l"/>
                       <a:r>
-                        <a:rPr sz="1200" b="0">
+                        <a:rPr sz="1150" b="0">
                           <a:solidFill>
                             <a:srgbClr val="2E2C2C"/>
                           </a:solidFill>
                           <a:latin typeface="Arial"/>
                           <a:ea typeface="微软雅黑"/>
                         </a:rPr>
-                        <a:t>负载 w1–w7</a:t>
+                        <a:t>速率型 w1–w4</a:t>
                       </a:r>
                     </a:p>
                   </a:txBody>
@@ -10044,14 +10044,14 @@
                     <a:p>
                       <a:pPr algn="ctr"/>
                       <a:r>
-                        <a:rPr sz="1200" b="0">
+                        <a:rPr sz="1150" b="0">
                           <a:solidFill>
                             <a:srgbClr val="2E2C2C"/>
                           </a:solidFill>
                           <a:latin typeface="Arial"/>
                           <a:ea typeface="微软雅黑"/>
                         </a:rPr>
-                        <a:t>w1 100 → w4 2000 pods/s（极限）；w5 突发、w6 Gang、w7 异构</a:t>
+                        <a:t>100 / 500 / 1000 / 2000 pods/s（1 万 / 5 万 / 10 万 / 20 万 Pod，w4 为极限）</a:t>
                       </a:r>
                     </a:p>
                   </a:txBody>
@@ -10062,7 +10062,7 @@
                   </a:tcPr>
                 </a:tc>
               </a:tr>
-              <a:tr h="420624">
+              <a:tr h="384048">
                 <a:tc>
                   <a:txBody>
                     <a:bodyPr wrap="square"/>
@@ -10070,14 +10070,14 @@
                     <a:p>
                       <a:pPr algn="l"/>
                       <a:r>
-                        <a:rPr sz="1200" b="0">
+                        <a:rPr sz="1150" b="0">
                           <a:solidFill>
                             <a:srgbClr val="2E2C2C"/>
                           </a:solidFill>
                           <a:latin typeface="Arial"/>
                           <a:ea typeface="微软雅黑"/>
                         </a:rPr>
-                        <a:t>实例 inst</a:t>
+                        <a:t>突发 w5</a:t>
                       </a:r>
                     </a:p>
                   </a:txBody>
@@ -10094,14 +10094,14 @@
                     <a:p>
                       <a:pPr algn="ctr"/>
                       <a:r>
-                        <a:rPr sz="1200" b="0">
+                        <a:rPr sz="1150" b="0">
                           <a:solidFill>
                             <a:srgbClr val="2E2C2C"/>
                           </a:solidFill>
                           <a:latin typeface="Arial"/>
                           <a:ea typeface="微软雅黑"/>
                         </a:rPr>
-                        <a:t>inst1 = 1 个实例；inst3 = 3 个实例</a:t>
+                        <a:t>0 → 2000 → 0 pods/s，5 万 Pod，考察涌入与退潮</a:t>
                       </a:r>
                     </a:p>
                   </a:txBody>
@@ -10112,7 +10112,7 @@
                   </a:tcPr>
                 </a:tc>
               </a:tr>
-              <a:tr h="420624">
+              <a:tr h="384048">
                 <a:tc>
                   <a:txBody>
                     <a:bodyPr wrap="square"/>
@@ -10120,14 +10120,14 @@
                     <a:p>
                       <a:pPr algn="l"/>
                       <a:r>
-                        <a:rPr sz="1200" b="0">
+                        <a:rPr sz="1150" b="0">
                           <a:solidFill>
                             <a:srgbClr val="2E2C2C"/>
                           </a:solidFill>
                           <a:latin typeface="Arial"/>
                           <a:ea typeface="微软雅黑"/>
                         </a:rPr>
-                        <a:t>对比组</a:t>
+                        <a:t>Gang w6</a:t>
                       </a:r>
                     </a:p>
                   </a:txBody>
@@ -10144,14 +10144,14 @@
                     <a:p>
                       <a:pPr algn="ctr"/>
                       <a:r>
-                        <a:rPr sz="1200" b="0">
+                        <a:rPr sz="1150" b="0">
                           <a:solidFill>
                             <a:srgbClr val="2E2C2C"/>
                           </a:solidFill>
                           <a:latin typeface="Arial"/>
                           <a:ea typeface="微软雅黑"/>
                         </a:rPr>
-                        <a:t>a=ENO  b=Gödel  c=kube-scheduler  d=Volcano  e=Koordinator</a:t>
+                        <a:t>200 组/s × 5 Pod，共 5 万 Pod，组内必须同时调度</a:t>
                       </a:r>
                     </a:p>
                   </a:txBody>
@@ -10162,7 +10162,7 @@
                   </a:tcPr>
                 </a:tc>
               </a:tr>
-              <a:tr h="420624">
+              <a:tr h="384048">
                 <a:tc>
                   <a:txBody>
                     <a:bodyPr wrap="square"/>
@@ -10170,14 +10170,14 @@
                     <a:p>
                       <a:pPr algn="l"/>
                       <a:r>
-                        <a:rPr sz="1200" b="0">
+                        <a:rPr sz="1150" b="0">
                           <a:solidFill>
                             <a:srgbClr val="2E2C2C"/>
                           </a:solidFill>
                           <a:latin typeface="Arial"/>
                           <a:ea typeface="微软雅黑"/>
                         </a:rPr>
-                        <a:t>公平性</a:t>
+                        <a:t>异构 w7</a:t>
                       </a:r>
                     </a:p>
                   </a:txBody>
@@ -10194,7 +10194,157 @@
                     <a:p>
                       <a:pPr algn="ctr"/>
                       <a:r>
-                        <a:rPr sz="1200" b="0">
+                        <a:rPr sz="1150" b="0">
+                          <a:solidFill>
+                            <a:srgbClr val="2E2C2C"/>
+                          </a:solidFill>
+                          <a:latin typeface="Arial"/>
+                          <a:ea typeface="微软雅黑"/>
+                        </a:rPr>
+                        <a:t>500 pods/s，5 万 Pod，节点资源规格异构</a:t>
+                      </a:r>
+                    </a:p>
+                  </a:txBody>
+                  <a:tcPr marL="54864" marR="54864" marT="18288" marB="18288" anchor="ctr">
+                    <a:solidFill>
+                      <a:srgbClr val="FFFFFF"/>
+                    </a:solidFill>
+                  </a:tcPr>
+                </a:tc>
+              </a:tr>
+              <a:tr h="384048">
+                <a:tc>
+                  <a:txBody>
+                    <a:bodyPr wrap="square"/>
+                    <a:lstStyle/>
+                    <a:p>
+                      <a:pPr algn="l"/>
+                      <a:r>
+                        <a:rPr sz="1150" b="0">
+                          <a:solidFill>
+                            <a:srgbClr val="2E2C2C"/>
+                          </a:solidFill>
+                          <a:latin typeface="Arial"/>
+                          <a:ea typeface="微软雅黑"/>
+                        </a:rPr>
+                        <a:t>实例 inst</a:t>
+                      </a:r>
+                    </a:p>
+                  </a:txBody>
+                  <a:tcPr marL="54864" marR="54864" marT="18288" marB="18288" anchor="ctr">
+                    <a:solidFill>
+                      <a:srgbClr val="F2F4F7"/>
+                    </a:solidFill>
+                  </a:tcPr>
+                </a:tc>
+                <a:tc>
+                  <a:txBody>
+                    <a:bodyPr wrap="square"/>
+                    <a:lstStyle/>
+                    <a:p>
+                      <a:pPr algn="ctr"/>
+                      <a:r>
+                        <a:rPr sz="1150" b="0">
+                          <a:solidFill>
+                            <a:srgbClr val="2E2C2C"/>
+                          </a:solidFill>
+                          <a:latin typeface="Arial"/>
+                          <a:ea typeface="微软雅黑"/>
+                        </a:rPr>
+                        <a:t>inst1 = 1 个实例；inst3 = 3 个实例</a:t>
+                      </a:r>
+                    </a:p>
+                  </a:txBody>
+                  <a:tcPr marL="54864" marR="54864" marT="18288" marB="18288" anchor="ctr">
+                    <a:solidFill>
+                      <a:srgbClr val="F2F4F7"/>
+                    </a:solidFill>
+                  </a:tcPr>
+                </a:tc>
+              </a:tr>
+              <a:tr h="384048">
+                <a:tc>
+                  <a:txBody>
+                    <a:bodyPr wrap="square"/>
+                    <a:lstStyle/>
+                    <a:p>
+                      <a:pPr algn="l"/>
+                      <a:r>
+                        <a:rPr sz="1150" b="0">
+                          <a:solidFill>
+                            <a:srgbClr val="2E2C2C"/>
+                          </a:solidFill>
+                          <a:latin typeface="Arial"/>
+                          <a:ea typeface="微软雅黑"/>
+                        </a:rPr>
+                        <a:t>对比组</a:t>
+                      </a:r>
+                    </a:p>
+                  </a:txBody>
+                  <a:tcPr marL="54864" marR="54864" marT="18288" marB="18288" anchor="ctr">
+                    <a:solidFill>
+                      <a:srgbClr val="FFFFFF"/>
+                    </a:solidFill>
+                  </a:tcPr>
+                </a:tc>
+                <a:tc>
+                  <a:txBody>
+                    <a:bodyPr wrap="square"/>
+                    <a:lstStyle/>
+                    <a:p>
+                      <a:pPr algn="ctr"/>
+                      <a:r>
+                        <a:rPr sz="1150" b="0">
+                          <a:solidFill>
+                            <a:srgbClr val="2E2C2C"/>
+                          </a:solidFill>
+                          <a:latin typeface="Arial"/>
+                          <a:ea typeface="微软雅黑"/>
+                        </a:rPr>
+                        <a:t>a=ENO  b=Gödel  c=kube-scheduler  d=Volcano  e=Koordinator</a:t>
+                      </a:r>
+                    </a:p>
+                  </a:txBody>
+                  <a:tcPr marL="54864" marR="54864" marT="18288" marB="18288" anchor="ctr">
+                    <a:solidFill>
+                      <a:srgbClr val="FFFFFF"/>
+                    </a:solidFill>
+                  </a:tcPr>
+                </a:tc>
+              </a:tr>
+              <a:tr h="384048">
+                <a:tc>
+                  <a:txBody>
+                    <a:bodyPr wrap="square"/>
+                    <a:lstStyle/>
+                    <a:p>
+                      <a:pPr algn="l"/>
+                      <a:r>
+                        <a:rPr sz="1150" b="0">
+                          <a:solidFill>
+                            <a:srgbClr val="2E2C2C"/>
+                          </a:solidFill>
+                          <a:latin typeface="Arial"/>
+                          <a:ea typeface="微软雅黑"/>
+                        </a:rPr>
+                        <a:t>公平性</a:t>
+                      </a:r>
+                    </a:p>
+                  </a:txBody>
+                  <a:tcPr marL="54864" marR="54864" marT="18288" marB="18288" anchor="ctr">
+                    <a:solidFill>
+                      <a:srgbClr val="F2F4F7"/>
+                    </a:solidFill>
+                  </a:tcPr>
+                </a:tc>
+                <a:tc>
+                  <a:txBody>
+                    <a:bodyPr wrap="square"/>
+                    <a:lstStyle/>
+                    <a:p>
+                      <a:pPr algn="ctr"/>
+                      <a:r>
+                        <a:rPr sz="1150" b="0">
                           <a:solidFill>
                             <a:srgbClr val="2E2C2C"/>
                           </a:solidFill>
@@ -10207,7 +10357,7 @@
                   </a:txBody>
                   <a:tcPr marL="54864" marR="54864" marT="18288" marB="18288" anchor="ctr">
                     <a:solidFill>
-                      <a:srgbClr val="FFFFFF"/>
+                      <a:srgbClr val="F2F4F7"/>
                     </a:solidFill>
                   </a:tcPr>
                 </a:tc>
@@ -10224,8 +10374,8 @@
         </p:nvSpPr>
         <p:spPr>
           <a:xfrm>
-            <a:off x="566928" y="5074920"/>
-            <a:ext cx="10972800" cy="960120"/>
+            <a:off x="566928" y="5431536"/>
+            <a:ext cx="10972800" cy="914400"/>
           </a:xfrm>
           <a:prstGeom prst="rect">
             <a:avLst/>
@@ -17861,7 +18011,7 @@
         <p:spPr>
           <a:xfrm>
             <a:off x="566928" y="5074920"/>
-            <a:ext cx="10972800" cy="960120"/>
+            <a:ext cx="10972800" cy="914400"/>
           </a:xfrm>
           <a:prstGeom prst="rect">
             <a:avLst/>
@@ -18737,7 +18887,7 @@
         <p:spPr>
           <a:xfrm>
             <a:off x="566928" y="5074920"/>
-            <a:ext cx="10972800" cy="960120"/>
+            <a:ext cx="10972800" cy="914400"/>
           </a:xfrm>
           <a:prstGeom prst="rect">
             <a:avLst/>
@@ -23040,7 +23190,7 @@
         <p:spPr>
           <a:xfrm>
             <a:off x="566928" y="5074920"/>
-            <a:ext cx="10972800" cy="960120"/>
+            <a:ext cx="10972800" cy="914400"/>
           </a:xfrm>
           <a:prstGeom prst="rect">
             <a:avLst/>
@@ -24028,7 +24178,7 @@
         <p:spPr>
           <a:xfrm>
             <a:off x="566928" y="5074920"/>
-            <a:ext cx="10972800" cy="960120"/>
+            <a:ext cx="10972800" cy="914400"/>
           </a:xfrm>
           <a:prstGeom prst="rect">
             <a:avLst/>
@@ -25431,7 +25581,7 @@
         <p:spPr>
           <a:xfrm>
             <a:off x="566928" y="5074920"/>
-            <a:ext cx="10972800" cy="960120"/>
+            <a:ext cx="10972800" cy="914400"/>
           </a:xfrm>
           <a:prstGeom prst="rect">
             <a:avLst/>
@@ -26686,7 +26836,7 @@
         <p:spPr>
           <a:xfrm>
             <a:off x="566928" y="5074920"/>
-            <a:ext cx="10972800" cy="960120"/>
+            <a:ext cx="10972800" cy="914400"/>
           </a:xfrm>
           <a:prstGeom prst="rect">
             <a:avLst/>

--- a/docs/thesis/defense/答辩PPT-北航模板版.pptx
+++ b/docs/thesis/defense/答辩PPT-北航模板版.pptx
@@ -1268,7 +1268,7 @@
           <a:lstStyle/>
           <a:p>
             <a:r>
-              <a:t>先讲编码：s 是规模档位，w 是负载强度，inst 是实例数，后面场景名都由这三段拼成。再说公平性：KWOK 仿真、kind 集群内运行；五个调度器 Pod 规格相同，客户端 QPS 与 Burst 都是 10000；每场景三次取中位数，共 144 次 run。主评估取 s2/w2、s2/w3、s3/w2、s3/w3 四个场景，其余作为扩展与复杂负载场景。观测栈是 Prometheus 每 15 秒抓取，recording rules 统一各组指标名。</a:t>
+              <a:t>先讲编码：s 是规模档位，w 是负载强度，inst 是实例数，后面场景名都由这三段拼成。再说公平性：KWOK 仿真、kind 集群内运行；五个调度器 Pod 规格相同，各自的 client-go QPS 与 Burst 都放到 10000，避免把客户端限流误读成调度能力差异；每场景三次取中位数，共 144 次 run。主评估取 s2/w2、s2/w3、s3/w2、s3/w3 四个场景，其余作为扩展与复杂负载场景。观测栈是 Prometheus 每 15 秒抓取，recording rules 统一各组指标名。</a:t>
             </a:r>
           </a:p>
         </p:txBody>
@@ -10351,7 +10351,7 @@
                           <a:latin typeface="Arial"/>
                           <a:ea typeface="微软雅黑"/>
                         </a:rPr>
-                        <a:t>每 Pod 2C/4G；客户端 QPS=Burst=10000</a:t>
+                        <a:t>每 Pod 2C/4G；各调度器 client-go QPS=Burst=10000（不设限流瓶颈）</a:t>
                       </a:r>
                     </a:p>
                   </a:txBody>

--- a/docs/thesis/defense/答辩PPT-北航模板版.pptx
+++ b/docs/thesis/defense/答辩PPT-北航模板版.pptx
@@ -10809,166 +10809,26 @@
           </a:p>
         </p:txBody>
       </p:sp>
-      <p:pic>
-        <p:nvPicPr>
-          <p:cNvPr id="9004" name="Picture 9003" descr="fig6-throughput-s2-w3.png"/>
-          <p:cNvPicPr>
-            <a:picLocks noChangeAspect="1"/>
-          </p:cNvPicPr>
-          <p:nvPr/>
-        </p:nvPicPr>
-        <p:blipFill>
-          <a:blip r:embed="rId3"/>
-          <a:stretch>
-            <a:fillRect/>
-          </a:stretch>
-        </p:blipFill>
-        <p:spPr>
-          <a:xfrm>
-            <a:off x="568493" y="1755647"/>
-            <a:ext cx="7357788" cy="3017520"/>
-          </a:xfrm>
-          <a:prstGeom prst="rect">
-            <a:avLst/>
-          </a:prstGeom>
-        </p:spPr>
-      </p:pic>
-      <p:sp>
-        <p:nvSpPr>
-          <p:cNvPr id="9005" name="TextBox 9004"/>
-          <p:cNvSpPr txBox="1"/>
-          <p:nvPr/>
-        </p:nvSpPr>
-        <p:spPr>
-          <a:xfrm>
-            <a:off x="566928" y="4809744"/>
-            <a:ext cx="7360920" cy="237744"/>
-          </a:xfrm>
-          <a:prstGeom prst="rect">
-            <a:avLst/>
-          </a:prstGeom>
-          <a:noFill/>
-        </p:spPr>
-        <p:txBody>
-          <a:bodyPr wrap="square" anchor="t" lIns="0" rIns="0" tIns="0" bIns="0">
-            <a:spAutoFit/>
-          </a:bodyPr>
-          <a:lstStyle/>
-          <a:p>
-            <a:pPr algn="ctr"/>
-            <a:r>
-              <a:rPr sz="950" b="0">
-                <a:solidFill>
-                  <a:srgbClr val="636363"/>
-                </a:solidFill>
-                <a:latin typeface="Arial"/>
-                <a:ea typeface="微软雅黑"/>
-              </a:rPr>
-              <a:t>s2/w3 吞吐时序：爬升—平台—归零</a:t>
-            </a:r>
-          </a:p>
-        </p:txBody>
-      </p:sp>
-      <p:sp>
-        <p:nvSpPr>
-          <p:cNvPr id="9006" name="TextBox 9005"/>
-          <p:cNvSpPr txBox="1"/>
-          <p:nvPr/>
-        </p:nvSpPr>
-        <p:spPr>
-          <a:xfrm>
-            <a:off x="8138160" y="1828800"/>
-            <a:ext cx="3474720" cy="2834640"/>
-          </a:xfrm>
-          <a:prstGeom prst="rect">
-            <a:avLst/>
-          </a:prstGeom>
-          <a:noFill/>
-        </p:spPr>
-        <p:txBody>
-          <a:bodyPr wrap="square" anchor="t" lIns="0" rIns="0" tIns="0" bIns="0">
-            <a:spAutoFit/>
-          </a:bodyPr>
-          <a:lstStyle/>
-          <a:p>
-            <a:pPr algn="l">
-              <a:lnSpc>
-                <a:spcPct val="115000"/>
-              </a:lnSpc>
-            </a:pPr>
-            <a:r>
-              <a:rPr sz="1100" b="0">
-                <a:solidFill>
-                  <a:srgbClr val="2E2C2C"/>
-                </a:solidFill>
-                <a:latin typeface="Arial"/>
-                <a:ea typeface="微软雅黑"/>
-              </a:rPr>
-              <a:t>▪  三段结构：爬升—平台—归零，均值被尾段零值稀释</a:t>
-            </a:r>
-          </a:p>
-          <a:p>
-            <a:pPr algn="l">
-              <a:lnSpc>
-                <a:spcPct val="115000"/>
-              </a:lnSpc>
-              <a:spcBef>
-                <a:spcPts val="800"/>
-              </a:spcBef>
-            </a:pPr>
-            <a:r>
-              <a:rPr sz="1100" b="0">
-                <a:solidFill>
-                  <a:srgbClr val="2E2C2C"/>
-                </a:solidFill>
-                <a:latin typeface="Arial"/>
-                <a:ea typeface="微软雅黑"/>
-              </a:rPr>
-              <a:t>▪  时序类：3 run 逐点中位数，再去首尾各 2 点（约 30 s）</a:t>
-            </a:r>
-          </a:p>
-          <a:p>
-            <a:pPr algn="l">
-              <a:lnSpc>
-                <a:spcPct val="115000"/>
-              </a:lnSpc>
-              <a:spcBef>
-                <a:spcPts val="800"/>
-              </a:spcBef>
-            </a:pPr>
-            <a:r>
-              <a:rPr sz="1100" b="0">
-                <a:solidFill>
-                  <a:srgbClr val="2E2C2C"/>
-                </a:solidFill>
-                <a:latin typeface="Arial"/>
-                <a:ea typeface="微软雅黑"/>
-              </a:rPr>
-              <a:t>▪  c/d/e 单实例过载存在幸存者偏差，只与 a/b 比吞吐、队列、成功率</a:t>
-            </a:r>
-          </a:p>
-        </p:txBody>
-      </p:sp>
-      <p:sp>
-        <p:nvSpPr>
-          <p:cNvPr id="9007" name="Rounded Rectangle 9006"/>
+      <p:sp>
+        <p:nvSpPr>
+          <p:cNvPr id="9004" name="Rounded Rectangle 9003"/>
           <p:cNvSpPr/>
           <p:nvPr/>
         </p:nvSpPr>
         <p:spPr>
           <a:xfrm>
-            <a:off x="566928" y="4956048"/>
-            <a:ext cx="1744980" cy="841248"/>
+            <a:off x="566928" y="1783080"/>
+            <a:ext cx="3517391" cy="1325880"/>
           </a:xfrm>
           <a:prstGeom prst="roundRect">
             <a:avLst/>
           </a:prstGeom>
           <a:solidFill>
-            <a:srgbClr val="F2F4F7"/>
+            <a:srgbClr val="FFFFFF"/>
           </a:solidFill>
           <a:ln w="9525">
             <a:solidFill>
-              <a:srgbClr val="D9DEE5"/>
+              <a:srgbClr val="D6E3F0"/>
             </a:solidFill>
           </a:ln>
           <a:effectLst/>
@@ -10997,81 +10857,23 @@
       </p:sp>
       <p:sp>
         <p:nvSpPr>
-          <p:cNvPr id="9008" name="TextBox 9007"/>
-          <p:cNvSpPr txBox="1"/>
-          <p:nvPr/>
-        </p:nvSpPr>
-        <p:spPr>
-          <a:xfrm>
-            <a:off x="658368" y="5029200"/>
-            <a:ext cx="1598676" cy="713232"/>
-          </a:xfrm>
-          <a:prstGeom prst="rect">
-            <a:avLst/>
-          </a:prstGeom>
-          <a:noFill/>
-        </p:spPr>
-        <p:txBody>
-          <a:bodyPr wrap="square" anchor="t" lIns="0" rIns="0" tIns="0" bIns="0">
-            <a:spAutoFit/>
-          </a:bodyPr>
-          <a:lstStyle/>
-          <a:p>
-            <a:pPr algn="l"/>
-            <a:r>
-              <a:rPr sz="950" b="1">
-                <a:solidFill>
-                  <a:srgbClr val="113E6A"/>
-                </a:solidFill>
-                <a:latin typeface="Arial"/>
-                <a:ea typeface="微软雅黑"/>
-              </a:rPr>
-              <a:t>有效吞吐 pods/s</a:t>
-            </a:r>
-          </a:p>
-          <a:p>
-            <a:pPr algn="l">
-              <a:lnSpc>
-                <a:spcPct val="105000"/>
-              </a:lnSpc>
-              <a:spcBef>
-                <a:spcPts val="100"/>
-              </a:spcBef>
-            </a:pPr>
-            <a:r>
-              <a:rPr sz="800" b="0">
-                <a:solidFill>
-                  <a:srgbClr val="636363"/>
-                </a:solidFill>
-                <a:latin typeface="Arial"/>
-                <a:ea typeface="微软雅黑"/>
-              </a:rPr>
-              <a:t>名义工作量 ÷ 完成时间（主口径）</a:t>
-            </a:r>
-          </a:p>
-        </p:txBody>
-      </p:sp>
-      <p:sp>
-        <p:nvSpPr>
-          <p:cNvPr id="9009" name="Rounded Rectangle 9008"/>
+          <p:cNvPr id="9005" name="Oval 9004"/>
           <p:cNvSpPr/>
           <p:nvPr/>
         </p:nvSpPr>
         <p:spPr>
           <a:xfrm>
-            <a:off x="2430780" y="4956048"/>
-            <a:ext cx="1744980" cy="841248"/>
-          </a:xfrm>
-          <a:prstGeom prst="roundRect">
+            <a:off x="713232" y="1920240"/>
+            <a:ext cx="274320" cy="274320"/>
+          </a:xfrm>
+          <a:prstGeom prst="ellipse">
             <a:avLst/>
           </a:prstGeom>
           <a:solidFill>
-            <a:srgbClr val="F2F4F7"/>
+            <a:srgbClr val="113E6A"/>
           </a:solidFill>
-          <a:ln w="9525">
-            <a:solidFill>
-              <a:srgbClr val="D9DEE5"/>
-            </a:solidFill>
+          <a:ln>
+            <a:noFill/>
           </a:ln>
           <a:effectLst/>
         </p:spPr>
@@ -11090,23 +10892,33 @@
           </a:fontRef>
         </p:style>
         <p:txBody>
-          <a:bodyPr rtlCol="0" anchor="ctr"/>
+          <a:bodyPr rtlCol="0" anchor="ctr" lIns="0" rIns="0" tIns="0" bIns="0"/>
           <a:lstStyle/>
           <a:p>
             <a:pPr algn="ctr"/>
-          </a:p>
-        </p:txBody>
-      </p:sp>
-      <p:sp>
-        <p:nvSpPr>
-          <p:cNvPr id="9010" name="TextBox 9009"/>
+            <a:r>
+              <a:rPr sz="1000" b="1">
+                <a:solidFill>
+                  <a:srgbClr val="FFFFFF"/>
+                </a:solidFill>
+                <a:latin typeface="Arial"/>
+                <a:ea typeface="微软雅黑"/>
+              </a:rPr>
+              <a:t>01</a:t>
+            </a:r>
+          </a:p>
+        </p:txBody>
+      </p:sp>
+      <p:sp>
+        <p:nvSpPr>
+          <p:cNvPr id="9006" name="TextBox 9005"/>
           <p:cNvSpPr txBox="1"/>
           <p:nvPr/>
         </p:nvSpPr>
         <p:spPr>
           <a:xfrm>
-            <a:off x="2522220" y="5029200"/>
-            <a:ext cx="1598676" cy="713232"/>
+            <a:off x="1078992" y="1920240"/>
+            <a:ext cx="2877312" cy="1124712"/>
           </a:xfrm>
           <a:prstGeom prst="rect">
             <a:avLst/>
@@ -11121,58 +10933,58 @@
           <a:p>
             <a:pPr algn="l"/>
             <a:r>
-              <a:rPr sz="950" b="1">
+              <a:rPr sz="1400" b="1">
                 <a:solidFill>
                   <a:srgbClr val="113E6A"/>
                 </a:solidFill>
                 <a:latin typeface="Arial"/>
                 <a:ea typeface="微软雅黑"/>
               </a:rPr>
-              <a:t>峰值吞吐 pods/s</a:t>
+              <a:t>有效吞吐 pods/s</a:t>
             </a:r>
           </a:p>
           <a:p>
             <a:pPr algn="l">
               <a:lnSpc>
-                <a:spcPct val="105000"/>
+                <a:spcPct val="110000"/>
               </a:lnSpc>
               <a:spcBef>
-                <a:spcPts val="100"/>
+                <a:spcPts val="400"/>
               </a:spcBef>
             </a:pPr>
             <a:r>
-              <a:rPr sz="800" b="0">
+              <a:rPr sz="1250" b="0">
                 <a:solidFill>
-                  <a:srgbClr val="636363"/>
+                  <a:srgbClr val="2E2C2C"/>
                 </a:solidFill>
                 <a:latin typeface="Arial"/>
                 <a:ea typeface="微软雅黑"/>
               </a:rPr>
-              <a:t>过程中的最高瞬时调度速率</a:t>
-            </a:r>
-          </a:p>
-        </p:txBody>
-      </p:sp>
-      <p:sp>
-        <p:nvSpPr>
-          <p:cNvPr id="9011" name="Rounded Rectangle 9010"/>
+              <a:t>名义总工作量 ÷ 总完成时间；本文吞吐主口径，与采样窗口长度无关</a:t>
+            </a:r>
+          </a:p>
+        </p:txBody>
+      </p:sp>
+      <p:sp>
+        <p:nvSpPr>
+          <p:cNvPr id="9007" name="Rounded Rectangle 9006"/>
           <p:cNvSpPr/>
           <p:nvPr/>
         </p:nvSpPr>
         <p:spPr>
           <a:xfrm>
-            <a:off x="4294632" y="4956048"/>
-            <a:ext cx="1744980" cy="841248"/>
+            <a:off x="4340351" y="1783080"/>
+            <a:ext cx="3517391" cy="1325880"/>
           </a:xfrm>
           <a:prstGeom prst="roundRect">
             <a:avLst/>
           </a:prstGeom>
           <a:solidFill>
-            <a:srgbClr val="F2F4F7"/>
+            <a:srgbClr val="FFFFFF"/>
           </a:solidFill>
           <a:ln w="9525">
             <a:solidFill>
-              <a:srgbClr val="D9DEE5"/>
+              <a:srgbClr val="D6E3F0"/>
             </a:solidFill>
           </a:ln>
           <a:effectLst/>
@@ -11201,81 +11013,23 @@
       </p:sp>
       <p:sp>
         <p:nvSpPr>
-          <p:cNvPr id="9012" name="TextBox 9011"/>
-          <p:cNvSpPr txBox="1"/>
-          <p:nvPr/>
-        </p:nvSpPr>
-        <p:spPr>
-          <a:xfrm>
-            <a:off x="4386071" y="5029200"/>
-            <a:ext cx="1598676" cy="713232"/>
-          </a:xfrm>
-          <a:prstGeom prst="rect">
-            <a:avLst/>
-          </a:prstGeom>
-          <a:noFill/>
-        </p:spPr>
-        <p:txBody>
-          <a:bodyPr wrap="square" anchor="t" lIns="0" rIns="0" tIns="0" bIns="0">
-            <a:spAutoFit/>
-          </a:bodyPr>
-          <a:lstStyle/>
-          <a:p>
-            <a:pPr algn="l"/>
-            <a:r>
-              <a:rPr sz="950" b="1">
-                <a:solidFill>
-                  <a:srgbClr val="113E6A"/>
-                </a:solidFill>
-                <a:latin typeface="Arial"/>
-                <a:ea typeface="微软雅黑"/>
-              </a:rPr>
-              <a:t>P90 / P99 延迟 s</a:t>
-            </a:r>
-          </a:p>
-          <a:p>
-            <a:pPr algn="l">
-              <a:lnSpc>
-                <a:spcPct val="105000"/>
-              </a:lnSpc>
-              <a:spcBef>
-                <a:spcPts val="100"/>
-              </a:spcBef>
-            </a:pPr>
-            <a:r>
-              <a:rPr sz="800" b="0">
-                <a:solidFill>
-                  <a:srgbClr val="636363"/>
-                </a:solidFill>
-                <a:latin typeface="Arial"/>
-                <a:ea typeface="微软雅黑"/>
-              </a:rPr>
-              <a:t>入 activeQ 到 Bind 完成</a:t>
-            </a:r>
-          </a:p>
-        </p:txBody>
-      </p:sp>
-      <p:sp>
-        <p:nvSpPr>
-          <p:cNvPr id="9013" name="Rounded Rectangle 9012"/>
+          <p:cNvPr id="9008" name="Oval 9007"/>
           <p:cNvSpPr/>
           <p:nvPr/>
         </p:nvSpPr>
         <p:spPr>
           <a:xfrm>
-            <a:off x="6158483" y="4956048"/>
-            <a:ext cx="1744980" cy="841248"/>
-          </a:xfrm>
-          <a:prstGeom prst="roundRect">
+            <a:off x="4486656" y="1920240"/>
+            <a:ext cx="274320" cy="274320"/>
+          </a:xfrm>
+          <a:prstGeom prst="ellipse">
             <a:avLst/>
           </a:prstGeom>
           <a:solidFill>
-            <a:srgbClr val="F2F4F7"/>
+            <a:srgbClr val="113E6A"/>
           </a:solidFill>
-          <a:ln w="9525">
-            <a:solidFill>
-              <a:srgbClr val="D9DEE5"/>
-            </a:solidFill>
+          <a:ln>
+            <a:noFill/>
           </a:ln>
           <a:effectLst/>
         </p:spPr>
@@ -11294,23 +11048,33 @@
           </a:fontRef>
         </p:style>
         <p:txBody>
-          <a:bodyPr rtlCol="0" anchor="ctr"/>
+          <a:bodyPr rtlCol="0" anchor="ctr" lIns="0" rIns="0" tIns="0" bIns="0"/>
           <a:lstStyle/>
           <a:p>
             <a:pPr algn="ctr"/>
-          </a:p>
-        </p:txBody>
-      </p:sp>
-      <p:sp>
-        <p:nvSpPr>
-          <p:cNvPr id="9014" name="TextBox 9013"/>
+            <a:r>
+              <a:rPr sz="1000" b="1">
+                <a:solidFill>
+                  <a:srgbClr val="FFFFFF"/>
+                </a:solidFill>
+                <a:latin typeface="Arial"/>
+                <a:ea typeface="微软雅黑"/>
+              </a:rPr>
+              <a:t>02</a:t>
+            </a:r>
+          </a:p>
+        </p:txBody>
+      </p:sp>
+      <p:sp>
+        <p:nvSpPr>
+          <p:cNvPr id="9009" name="TextBox 9008"/>
           <p:cNvSpPr txBox="1"/>
           <p:nvPr/>
         </p:nvSpPr>
         <p:spPr>
           <a:xfrm>
-            <a:off x="6249923" y="5029200"/>
-            <a:ext cx="1598676" cy="713232"/>
+            <a:off x="4852416" y="1920240"/>
+            <a:ext cx="2877312" cy="1124712"/>
           </a:xfrm>
           <a:prstGeom prst="rect">
             <a:avLst/>
@@ -11325,58 +11089,58 @@
           <a:p>
             <a:pPr algn="l"/>
             <a:r>
-              <a:rPr sz="950" b="1">
+              <a:rPr sz="1400" b="1">
                 <a:solidFill>
                   <a:srgbClr val="113E6A"/>
                 </a:solidFill>
                 <a:latin typeface="Arial"/>
                 <a:ea typeface="微软雅黑"/>
               </a:rPr>
-              <a:t>Pod E2E P99 s</a:t>
+              <a:t>峰值吞吐 pods/s</a:t>
             </a:r>
           </a:p>
           <a:p>
             <a:pPr algn="l">
               <a:lnSpc>
-                <a:spcPct val="105000"/>
+                <a:spcPct val="110000"/>
               </a:lnSpc>
               <a:spcBef>
-                <a:spcPts val="100"/>
+                <a:spcPts val="400"/>
               </a:spcBef>
             </a:pPr>
             <a:r>
-              <a:rPr sz="800" b="0">
+              <a:rPr sz="1250" b="0">
                 <a:solidFill>
-                  <a:srgbClr val="636363"/>
+                  <a:srgbClr val="2E2C2C"/>
                 </a:solidFill>
                 <a:latin typeface="Arial"/>
                 <a:ea typeface="微软雅黑"/>
               </a:rPr>
-              <a:t>Dispatcher 观察到绑定完成</a:t>
-            </a:r>
-          </a:p>
-        </p:txBody>
-      </p:sp>
-      <p:sp>
-        <p:nvSpPr>
-          <p:cNvPr id="9015" name="Rounded Rectangle 9014"/>
+              <a:t>处理过程中的最高瞬时调度速率，反映瞬时处理能力上限</a:t>
+            </a:r>
+          </a:p>
+        </p:txBody>
+      </p:sp>
+      <p:sp>
+        <p:nvSpPr>
+          <p:cNvPr id="9010" name="Rounded Rectangle 9009"/>
           <p:cNvSpPr/>
           <p:nvPr/>
         </p:nvSpPr>
         <p:spPr>
           <a:xfrm>
-            <a:off x="8022335" y="4956048"/>
-            <a:ext cx="1744980" cy="841248"/>
+            <a:off x="8113775" y="1783080"/>
+            <a:ext cx="3517391" cy="1325880"/>
           </a:xfrm>
           <a:prstGeom prst="roundRect">
             <a:avLst/>
           </a:prstGeom>
           <a:solidFill>
-            <a:srgbClr val="F2F4F7"/>
+            <a:srgbClr val="FFFFFF"/>
           </a:solidFill>
           <a:ln w="9525">
             <a:solidFill>
-              <a:srgbClr val="D9DEE5"/>
+              <a:srgbClr val="D6E3F0"/>
             </a:solidFill>
           </a:ln>
           <a:effectLst/>
@@ -11405,81 +11169,23 @@
       </p:sp>
       <p:sp>
         <p:nvSpPr>
-          <p:cNvPr id="9016" name="TextBox 9015"/>
-          <p:cNvSpPr txBox="1"/>
-          <p:nvPr/>
-        </p:nvSpPr>
-        <p:spPr>
-          <a:xfrm>
-            <a:off x="8113775" y="5029200"/>
-            <a:ext cx="1598676" cy="713232"/>
-          </a:xfrm>
-          <a:prstGeom prst="rect">
-            <a:avLst/>
-          </a:prstGeom>
-          <a:noFill/>
-        </p:spPr>
-        <p:txBody>
-          <a:bodyPr wrap="square" anchor="t" lIns="0" rIns="0" tIns="0" bIns="0">
-            <a:spAutoFit/>
-          </a:bodyPr>
-          <a:lstStyle/>
-          <a:p>
-            <a:pPr algn="l"/>
-            <a:r>
-              <a:rPr sz="950" b="1">
-                <a:solidFill>
-                  <a:srgbClr val="113E6A"/>
-                </a:solidFill>
-                <a:latin typeface="Arial"/>
-                <a:ea typeface="微软雅黑"/>
-              </a:rPr>
-              <a:t>绑定成功率</a:t>
-            </a:r>
-          </a:p>
-          <a:p>
-            <a:pPr algn="l">
-              <a:lnSpc>
-                <a:spcPct val="105000"/>
-              </a:lnSpc>
-              <a:spcBef>
-                <a:spcPts val="100"/>
-              </a:spcBef>
-            </a:pPr>
-            <a:r>
-              <a:rPr sz="800" b="0">
-                <a:solidFill>
-                  <a:srgbClr val="636363"/>
-                </a:solidFill>
-                <a:latin typeface="Arial"/>
-                <a:ea typeface="微软雅黑"/>
-              </a:rPr>
-              <a:t>Bind 成功 / Bind 尝试</a:t>
-            </a:r>
-          </a:p>
-        </p:txBody>
-      </p:sp>
-      <p:sp>
-        <p:nvSpPr>
-          <p:cNvPr id="9017" name="Rounded Rectangle 9016"/>
+          <p:cNvPr id="9011" name="Oval 9010"/>
           <p:cNvSpPr/>
           <p:nvPr/>
         </p:nvSpPr>
         <p:spPr>
           <a:xfrm>
-            <a:off x="9886188" y="4956048"/>
-            <a:ext cx="1744980" cy="841248"/>
-          </a:xfrm>
-          <a:prstGeom prst="roundRect">
+            <a:off x="8260079" y="1920240"/>
+            <a:ext cx="274320" cy="274320"/>
+          </a:xfrm>
+          <a:prstGeom prst="ellipse">
             <a:avLst/>
           </a:prstGeom>
           <a:solidFill>
-            <a:srgbClr val="F2F4F7"/>
+            <a:srgbClr val="113E6A"/>
           </a:solidFill>
-          <a:ln w="9525">
-            <a:solidFill>
-              <a:srgbClr val="D9DEE5"/>
-            </a:solidFill>
+          <a:ln>
+            <a:noFill/>
           </a:ln>
           <a:effectLst/>
         </p:spPr>
@@ -11498,23 +11204,33 @@
           </a:fontRef>
         </p:style>
         <p:txBody>
-          <a:bodyPr rtlCol="0" anchor="ctr"/>
+          <a:bodyPr rtlCol="0" anchor="ctr" lIns="0" rIns="0" tIns="0" bIns="0"/>
           <a:lstStyle/>
           <a:p>
             <a:pPr algn="ctr"/>
-          </a:p>
-        </p:txBody>
-      </p:sp>
-      <p:sp>
-        <p:nvSpPr>
-          <p:cNvPr id="9018" name="TextBox 9017"/>
+            <a:r>
+              <a:rPr sz="1000" b="1">
+                <a:solidFill>
+                  <a:srgbClr val="FFFFFF"/>
+                </a:solidFill>
+                <a:latin typeface="Arial"/>
+                <a:ea typeface="微软雅黑"/>
+              </a:rPr>
+              <a:t>03</a:t>
+            </a:r>
+          </a:p>
+        </p:txBody>
+      </p:sp>
+      <p:sp>
+        <p:nvSpPr>
+          <p:cNvPr id="9012" name="TextBox 9011"/>
           <p:cNvSpPr txBox="1"/>
           <p:nvPr/>
         </p:nvSpPr>
         <p:spPr>
           <a:xfrm>
-            <a:off x="9977627" y="5029200"/>
-            <a:ext cx="1598676" cy="713232"/>
+            <a:off x="8625839" y="1920240"/>
+            <a:ext cx="2877312" cy="1124712"/>
           </a:xfrm>
           <a:prstGeom prst="rect">
             <a:avLst/>
@@ -11529,7 +11245,475 @@
           <a:p>
             <a:pPr algn="l"/>
             <a:r>
-              <a:rPr sz="950" b="1">
+              <a:rPr sz="1400" b="1">
+                <a:solidFill>
+                  <a:srgbClr val="113E6A"/>
+                </a:solidFill>
+                <a:latin typeface="Arial"/>
+                <a:ea typeface="微软雅黑"/>
+              </a:rPr>
+              <a:t>P90 / P99 调度延迟</a:t>
+            </a:r>
+          </a:p>
+          <a:p>
+            <a:pPr algn="l">
+              <a:lnSpc>
+                <a:spcPct val="110000"/>
+              </a:lnSpc>
+              <a:spcBef>
+                <a:spcPts val="400"/>
+              </a:spcBef>
+            </a:pPr>
+            <a:r>
+              <a:rPr sz="1250" b="0">
+                <a:solidFill>
+                  <a:srgbClr val="2E2C2C"/>
+                </a:solidFill>
+                <a:latin typeface="Arial"/>
+                <a:ea typeface="微软雅黑"/>
+              </a:rPr>
+              <a:t>从 Pod 进入 activeQ 到完成 Bind 的分位延迟</a:t>
+            </a:r>
+          </a:p>
+        </p:txBody>
+      </p:sp>
+      <p:sp>
+        <p:nvSpPr>
+          <p:cNvPr id="9013" name="Rounded Rectangle 9012"/>
+          <p:cNvSpPr/>
+          <p:nvPr/>
+        </p:nvSpPr>
+        <p:spPr>
+          <a:xfrm>
+            <a:off x="566928" y="3364991"/>
+            <a:ext cx="3517391" cy="1325880"/>
+          </a:xfrm>
+          <a:prstGeom prst="roundRect">
+            <a:avLst/>
+          </a:prstGeom>
+          <a:solidFill>
+            <a:srgbClr val="FFFFFF"/>
+          </a:solidFill>
+          <a:ln w="9525">
+            <a:solidFill>
+              <a:srgbClr val="D6E3F0"/>
+            </a:solidFill>
+          </a:ln>
+          <a:effectLst/>
+        </p:spPr>
+        <p:style>
+          <a:lnRef idx="1">
+            <a:schemeClr val="accent1"/>
+          </a:lnRef>
+          <a:fillRef idx="3">
+            <a:schemeClr val="accent1"/>
+          </a:fillRef>
+          <a:effectRef idx="2">
+            <a:schemeClr val="accent1"/>
+          </a:effectRef>
+          <a:fontRef idx="minor">
+            <a:schemeClr val="lt1"/>
+          </a:fontRef>
+        </p:style>
+        <p:txBody>
+          <a:bodyPr rtlCol="0" anchor="ctr"/>
+          <a:lstStyle/>
+          <a:p>
+            <a:pPr algn="ctr"/>
+          </a:p>
+        </p:txBody>
+      </p:sp>
+      <p:sp>
+        <p:nvSpPr>
+          <p:cNvPr id="9014" name="Oval 9013"/>
+          <p:cNvSpPr/>
+          <p:nvPr/>
+        </p:nvSpPr>
+        <p:spPr>
+          <a:xfrm>
+            <a:off x="713232" y="3502151"/>
+            <a:ext cx="274320" cy="274320"/>
+          </a:xfrm>
+          <a:prstGeom prst="ellipse">
+            <a:avLst/>
+          </a:prstGeom>
+          <a:solidFill>
+            <a:srgbClr val="113E6A"/>
+          </a:solidFill>
+          <a:ln>
+            <a:noFill/>
+          </a:ln>
+          <a:effectLst/>
+        </p:spPr>
+        <p:style>
+          <a:lnRef idx="1">
+            <a:schemeClr val="accent1"/>
+          </a:lnRef>
+          <a:fillRef idx="3">
+            <a:schemeClr val="accent1"/>
+          </a:fillRef>
+          <a:effectRef idx="2">
+            <a:schemeClr val="accent1"/>
+          </a:effectRef>
+          <a:fontRef idx="minor">
+            <a:schemeClr val="lt1"/>
+          </a:fontRef>
+        </p:style>
+        <p:txBody>
+          <a:bodyPr rtlCol="0" anchor="ctr" lIns="0" rIns="0" tIns="0" bIns="0"/>
+          <a:lstStyle/>
+          <a:p>
+            <a:pPr algn="ctr"/>
+            <a:r>
+              <a:rPr sz="1000" b="1">
+                <a:solidFill>
+                  <a:srgbClr val="FFFFFF"/>
+                </a:solidFill>
+                <a:latin typeface="Arial"/>
+                <a:ea typeface="微软雅黑"/>
+              </a:rPr>
+              <a:t>04</a:t>
+            </a:r>
+          </a:p>
+        </p:txBody>
+      </p:sp>
+      <p:sp>
+        <p:nvSpPr>
+          <p:cNvPr id="9015" name="TextBox 9014"/>
+          <p:cNvSpPr txBox="1"/>
+          <p:nvPr/>
+        </p:nvSpPr>
+        <p:spPr>
+          <a:xfrm>
+            <a:off x="1078992" y="3502151"/>
+            <a:ext cx="2877312" cy="1124712"/>
+          </a:xfrm>
+          <a:prstGeom prst="rect">
+            <a:avLst/>
+          </a:prstGeom>
+          <a:noFill/>
+        </p:spPr>
+        <p:txBody>
+          <a:bodyPr wrap="square" anchor="t" lIns="0" rIns="0" tIns="0" bIns="0">
+            <a:spAutoFit/>
+          </a:bodyPr>
+          <a:lstStyle/>
+          <a:p>
+            <a:pPr algn="l"/>
+            <a:r>
+              <a:rPr sz="1400" b="1">
+                <a:solidFill>
+                  <a:srgbClr val="113E6A"/>
+                </a:solidFill>
+                <a:latin typeface="Arial"/>
+                <a:ea typeface="微软雅黑"/>
+              </a:rPr>
+              <a:t>Pod E2E 延迟 P99</a:t>
+            </a:r>
+          </a:p>
+          <a:p>
+            <a:pPr algn="l">
+              <a:lnSpc>
+                <a:spcPct val="110000"/>
+              </a:lnSpc>
+              <a:spcBef>
+                <a:spcPts val="400"/>
+              </a:spcBef>
+            </a:pPr>
+            <a:r>
+              <a:rPr sz="1250" b="0">
+                <a:solidFill>
+                  <a:srgbClr val="2E2C2C"/>
+                </a:solidFill>
+                <a:latin typeface="Arial"/>
+                <a:ea typeface="微软雅黑"/>
+              </a:rPr>
+              <a:t>从 Dispatcher 观察到 Pod 起，直至绑定完成</a:t>
+            </a:r>
+          </a:p>
+        </p:txBody>
+      </p:sp>
+      <p:sp>
+        <p:nvSpPr>
+          <p:cNvPr id="9016" name="Rounded Rectangle 9015"/>
+          <p:cNvSpPr/>
+          <p:nvPr/>
+        </p:nvSpPr>
+        <p:spPr>
+          <a:xfrm>
+            <a:off x="4340351" y="3364991"/>
+            <a:ext cx="3517391" cy="1325880"/>
+          </a:xfrm>
+          <a:prstGeom prst="roundRect">
+            <a:avLst/>
+          </a:prstGeom>
+          <a:solidFill>
+            <a:srgbClr val="FFFFFF"/>
+          </a:solidFill>
+          <a:ln w="9525">
+            <a:solidFill>
+              <a:srgbClr val="D6E3F0"/>
+            </a:solidFill>
+          </a:ln>
+          <a:effectLst/>
+        </p:spPr>
+        <p:style>
+          <a:lnRef idx="1">
+            <a:schemeClr val="accent1"/>
+          </a:lnRef>
+          <a:fillRef idx="3">
+            <a:schemeClr val="accent1"/>
+          </a:fillRef>
+          <a:effectRef idx="2">
+            <a:schemeClr val="accent1"/>
+          </a:effectRef>
+          <a:fontRef idx="minor">
+            <a:schemeClr val="lt1"/>
+          </a:fontRef>
+        </p:style>
+        <p:txBody>
+          <a:bodyPr rtlCol="0" anchor="ctr"/>
+          <a:lstStyle/>
+          <a:p>
+            <a:pPr algn="ctr"/>
+          </a:p>
+        </p:txBody>
+      </p:sp>
+      <p:sp>
+        <p:nvSpPr>
+          <p:cNvPr id="9017" name="Oval 9016"/>
+          <p:cNvSpPr/>
+          <p:nvPr/>
+        </p:nvSpPr>
+        <p:spPr>
+          <a:xfrm>
+            <a:off x="4486656" y="3502151"/>
+            <a:ext cx="274320" cy="274320"/>
+          </a:xfrm>
+          <a:prstGeom prst="ellipse">
+            <a:avLst/>
+          </a:prstGeom>
+          <a:solidFill>
+            <a:srgbClr val="113E6A"/>
+          </a:solidFill>
+          <a:ln>
+            <a:noFill/>
+          </a:ln>
+          <a:effectLst/>
+        </p:spPr>
+        <p:style>
+          <a:lnRef idx="1">
+            <a:schemeClr val="accent1"/>
+          </a:lnRef>
+          <a:fillRef idx="3">
+            <a:schemeClr val="accent1"/>
+          </a:fillRef>
+          <a:effectRef idx="2">
+            <a:schemeClr val="accent1"/>
+          </a:effectRef>
+          <a:fontRef idx="minor">
+            <a:schemeClr val="lt1"/>
+          </a:fontRef>
+        </p:style>
+        <p:txBody>
+          <a:bodyPr rtlCol="0" anchor="ctr" lIns="0" rIns="0" tIns="0" bIns="0"/>
+          <a:lstStyle/>
+          <a:p>
+            <a:pPr algn="ctr"/>
+            <a:r>
+              <a:rPr sz="1000" b="1">
+                <a:solidFill>
+                  <a:srgbClr val="FFFFFF"/>
+                </a:solidFill>
+                <a:latin typeface="Arial"/>
+                <a:ea typeface="微软雅黑"/>
+              </a:rPr>
+              <a:t>05</a:t>
+            </a:r>
+          </a:p>
+        </p:txBody>
+      </p:sp>
+      <p:sp>
+        <p:nvSpPr>
+          <p:cNvPr id="9018" name="TextBox 9017"/>
+          <p:cNvSpPr txBox="1"/>
+          <p:nvPr/>
+        </p:nvSpPr>
+        <p:spPr>
+          <a:xfrm>
+            <a:off x="4852416" y="3502151"/>
+            <a:ext cx="2877312" cy="1124712"/>
+          </a:xfrm>
+          <a:prstGeom prst="rect">
+            <a:avLst/>
+          </a:prstGeom>
+          <a:noFill/>
+        </p:spPr>
+        <p:txBody>
+          <a:bodyPr wrap="square" anchor="t" lIns="0" rIns="0" tIns="0" bIns="0">
+            <a:spAutoFit/>
+          </a:bodyPr>
+          <a:lstStyle/>
+          <a:p>
+            <a:pPr algn="l"/>
+            <a:r>
+              <a:rPr sz="1400" b="1">
+                <a:solidFill>
+                  <a:srgbClr val="113E6A"/>
+                </a:solidFill>
+                <a:latin typeface="Arial"/>
+                <a:ea typeface="微软雅黑"/>
+              </a:rPr>
+              <a:t>绑定成功率</a:t>
+            </a:r>
+          </a:p>
+          <a:p>
+            <a:pPr algn="l">
+              <a:lnSpc>
+                <a:spcPct val="110000"/>
+              </a:lnSpc>
+              <a:spcBef>
+                <a:spcPts val="400"/>
+              </a:spcBef>
+            </a:pPr>
+            <a:r>
+              <a:rPr sz="1250" b="0">
+                <a:solidFill>
+                  <a:srgbClr val="2E2C2C"/>
+                </a:solidFill>
+                <a:latin typeface="Arial"/>
+                <a:ea typeface="微软雅黑"/>
+              </a:rPr>
+              <a:t>Bind 成功次数 ÷ Bind 尝试次数，直接对应正确性</a:t>
+            </a:r>
+          </a:p>
+        </p:txBody>
+      </p:sp>
+      <p:sp>
+        <p:nvSpPr>
+          <p:cNvPr id="9019" name="Rounded Rectangle 9018"/>
+          <p:cNvSpPr/>
+          <p:nvPr/>
+        </p:nvSpPr>
+        <p:spPr>
+          <a:xfrm>
+            <a:off x="8113775" y="3364991"/>
+            <a:ext cx="3517391" cy="1325880"/>
+          </a:xfrm>
+          <a:prstGeom prst="roundRect">
+            <a:avLst/>
+          </a:prstGeom>
+          <a:solidFill>
+            <a:srgbClr val="FFFFFF"/>
+          </a:solidFill>
+          <a:ln w="9525">
+            <a:solidFill>
+              <a:srgbClr val="D6E3F0"/>
+            </a:solidFill>
+          </a:ln>
+          <a:effectLst/>
+        </p:spPr>
+        <p:style>
+          <a:lnRef idx="1">
+            <a:schemeClr val="accent1"/>
+          </a:lnRef>
+          <a:fillRef idx="3">
+            <a:schemeClr val="accent1"/>
+          </a:fillRef>
+          <a:effectRef idx="2">
+            <a:schemeClr val="accent1"/>
+          </a:effectRef>
+          <a:fontRef idx="minor">
+            <a:schemeClr val="lt1"/>
+          </a:fontRef>
+        </p:style>
+        <p:txBody>
+          <a:bodyPr rtlCol="0" anchor="ctr"/>
+          <a:lstStyle/>
+          <a:p>
+            <a:pPr algn="ctr"/>
+          </a:p>
+        </p:txBody>
+      </p:sp>
+      <p:sp>
+        <p:nvSpPr>
+          <p:cNvPr id="9020" name="Oval 9019"/>
+          <p:cNvSpPr/>
+          <p:nvPr/>
+        </p:nvSpPr>
+        <p:spPr>
+          <a:xfrm>
+            <a:off x="8260079" y="3502151"/>
+            <a:ext cx="274320" cy="274320"/>
+          </a:xfrm>
+          <a:prstGeom prst="ellipse">
+            <a:avLst/>
+          </a:prstGeom>
+          <a:solidFill>
+            <a:srgbClr val="113E6A"/>
+          </a:solidFill>
+          <a:ln>
+            <a:noFill/>
+          </a:ln>
+          <a:effectLst/>
+        </p:spPr>
+        <p:style>
+          <a:lnRef idx="1">
+            <a:schemeClr val="accent1"/>
+          </a:lnRef>
+          <a:fillRef idx="3">
+            <a:schemeClr val="accent1"/>
+          </a:fillRef>
+          <a:effectRef idx="2">
+            <a:schemeClr val="accent1"/>
+          </a:effectRef>
+          <a:fontRef idx="minor">
+            <a:schemeClr val="lt1"/>
+          </a:fontRef>
+        </p:style>
+        <p:txBody>
+          <a:bodyPr rtlCol="0" anchor="ctr" lIns="0" rIns="0" tIns="0" bIns="0"/>
+          <a:lstStyle/>
+          <a:p>
+            <a:pPr algn="ctr"/>
+            <a:r>
+              <a:rPr sz="1000" b="1">
+                <a:solidFill>
+                  <a:srgbClr val="FFFFFF"/>
+                </a:solidFill>
+                <a:latin typeface="Arial"/>
+                <a:ea typeface="微软雅黑"/>
+              </a:rPr>
+              <a:t>06</a:t>
+            </a:r>
+          </a:p>
+        </p:txBody>
+      </p:sp>
+      <p:sp>
+        <p:nvSpPr>
+          <p:cNvPr id="9021" name="TextBox 9020"/>
+          <p:cNvSpPr txBox="1"/>
+          <p:nvPr/>
+        </p:nvSpPr>
+        <p:spPr>
+          <a:xfrm>
+            <a:off x="8625839" y="3502151"/>
+            <a:ext cx="2877312" cy="1124712"/>
+          </a:xfrm>
+          <a:prstGeom prst="rect">
+            <a:avLst/>
+          </a:prstGeom>
+          <a:noFill/>
+        </p:spPr>
+        <p:txBody>
+          <a:bodyPr wrap="square" anchor="t" lIns="0" rIns="0" tIns="0" bIns="0">
+            <a:spAutoFit/>
+          </a:bodyPr>
+          <a:lstStyle/>
+          <a:p>
+            <a:pPr algn="l"/>
+            <a:r>
+              <a:rPr sz="1400" b="1">
                 <a:solidFill>
                   <a:srgbClr val="113E6A"/>
                 </a:solidFill>
@@ -11542,28 +11726,98 @@
           <a:p>
             <a:pPr algn="l">
               <a:lnSpc>
-                <a:spcPct val="105000"/>
+                <a:spcPct val="110000"/>
               </a:lnSpc>
               <a:spcBef>
-                <a:spcPts val="100"/>
+                <a:spcPts val="400"/>
               </a:spcBef>
             </a:pPr>
             <a:r>
-              <a:rPr sz="800" b="0">
+              <a:rPr sz="1250" b="0">
+                <a:solidFill>
+                  <a:srgbClr val="2E2C2C"/>
+                </a:solidFill>
+                <a:latin typeface="Arial"/>
+                <a:ea typeface="微软雅黑"/>
+              </a:rPr>
+              <a:t>pending_pods 在处理过程中的最大值，反映消化能力</a:t>
+            </a:r>
+          </a:p>
+        </p:txBody>
+      </p:sp>
+      <p:sp>
+        <p:nvSpPr>
+          <p:cNvPr id="9022" name="TextBox 9021"/>
+          <p:cNvSpPr txBox="1"/>
+          <p:nvPr/>
+        </p:nvSpPr>
+        <p:spPr>
+          <a:xfrm>
+            <a:off x="566928" y="4846320"/>
+            <a:ext cx="11064240" cy="777240"/>
+          </a:xfrm>
+          <a:prstGeom prst="rect">
+            <a:avLst/>
+          </a:prstGeom>
+          <a:noFill/>
+        </p:spPr>
+        <p:txBody>
+          <a:bodyPr wrap="square" anchor="t" lIns="0" rIns="0" tIns="0" bIns="0">
+            <a:spAutoFit/>
+          </a:bodyPr>
+          <a:lstStyle/>
+          <a:p>
+            <a:pPr algn="l"/>
+            <a:r>
+              <a:rPr sz="1200" b="0">
                 <a:solidFill>
                   <a:srgbClr val="636363"/>
                 </a:solidFill>
                 <a:latin typeface="Arial"/>
                 <a:ea typeface="微软雅黑"/>
               </a:rPr>
-              <a:t>pending_pods 最大值</a:t>
-            </a:r>
-          </a:p>
-        </p:txBody>
-      </p:sp>
-      <p:sp>
-        <p:nvSpPr>
-          <p:cNvPr id="9019" name="TextBox 9018"/>
+              <a:t>▪  三段结构：爬升—平台—归零，均值被尾段零值稀释</a:t>
+            </a:r>
+          </a:p>
+          <a:p>
+            <a:pPr algn="l">
+              <a:spcBef>
+                <a:spcPts val="300"/>
+              </a:spcBef>
+            </a:pPr>
+            <a:r>
+              <a:rPr sz="1200" b="0">
+                <a:solidFill>
+                  <a:srgbClr val="636363"/>
+                </a:solidFill>
+                <a:latin typeface="Arial"/>
+                <a:ea typeface="微软雅黑"/>
+              </a:rPr>
+              <a:t>▪  时序类：3 run 逐点中位数，再去首尾各 2 点（约 30 s）</a:t>
+            </a:r>
+          </a:p>
+          <a:p>
+            <a:pPr algn="l">
+              <a:spcBef>
+                <a:spcPts val="300"/>
+              </a:spcBef>
+            </a:pPr>
+            <a:r>
+              <a:rPr sz="1200" b="0">
+                <a:solidFill>
+                  <a:srgbClr val="636363"/>
+                </a:solidFill>
+                <a:latin typeface="Arial"/>
+                <a:ea typeface="微软雅黑"/>
+              </a:rPr>
+              <a:t>▪  c/d/e 单实例过载存在幸存者偏差，只与 a/b 比吞吐、队列、成功率</a:t>
+            </a:r>
+          </a:p>
+        </p:txBody>
+      </p:sp>
+      <p:sp>
+        <p:nvSpPr>
+          <p:cNvPr id="9023" name="TextBox 9022"/>
           <p:cNvSpPr txBox="1"/>
           <p:nvPr/>
         </p:nvSpPr>
@@ -11599,7 +11853,7 @@
       </p:sp>
       <p:sp>
         <p:nvSpPr>
-          <p:cNvPr id="9020" name="TextBox 9019"/>
+          <p:cNvPr id="9024" name="TextBox 9023"/>
           <p:cNvSpPr txBox="1"/>
           <p:nvPr/>
         </p:nvSpPr>

--- a/docs/thesis/defense/答辩PPT-北航模板版.pptx
+++ b/docs/thesis/defense/答辩PPT-北航模板版.pptx
@@ -10771,54 +10771,14 @@
       </p:sp>
       <p:sp>
         <p:nvSpPr>
-          <p:cNvPr id="9003" name="TextBox 9002"/>
-          <p:cNvSpPr txBox="1"/>
-          <p:nvPr/>
-        </p:nvSpPr>
-        <p:spPr>
-          <a:xfrm>
-            <a:off x="566928" y="1261872"/>
-            <a:ext cx="10881360" cy="438912"/>
-          </a:xfrm>
-          <a:prstGeom prst="rect">
-            <a:avLst/>
-          </a:prstGeom>
-          <a:noFill/>
-        </p:spPr>
-        <p:txBody>
-          <a:bodyPr wrap="square" anchor="ctr" lIns="0" rIns="0" tIns="0" bIns="0">
-            <a:spAutoFit/>
-          </a:bodyPr>
-          <a:lstStyle/>
-          <a:p>
-            <a:pPr algn="l">
-              <a:lnSpc>
-                <a:spcPct val="110000"/>
-              </a:lnSpc>
-            </a:pPr>
-            <a:r>
-              <a:rPr sz="1800" b="1">
-                <a:solidFill>
-                  <a:srgbClr val="0070C0"/>
-                </a:solidFill>
-                <a:latin typeface="Arial"/>
-                <a:ea typeface="微软雅黑"/>
-              </a:rPr>
-              <a:t>吞吐时序会“归零”，只有“总工作量 ÷ 总完成时间”跨场景可比</a:t>
-            </a:r>
-          </a:p>
-        </p:txBody>
-      </p:sp>
-      <p:sp>
-        <p:nvSpPr>
-          <p:cNvPr id="9004" name="Rounded Rectangle 9003"/>
+          <p:cNvPr id="9003" name="Rounded Rectangle 9002"/>
           <p:cNvSpPr/>
           <p:nvPr/>
         </p:nvSpPr>
         <p:spPr>
           <a:xfrm>
-            <a:off x="566928" y="1783080"/>
-            <a:ext cx="3517391" cy="1325880"/>
+            <a:off x="566928" y="1417320"/>
+            <a:ext cx="3517391" cy="1481328"/>
           </a:xfrm>
           <a:prstGeom prst="roundRect">
             <a:avLst/>
@@ -10857,13 +10817,13 @@
       </p:sp>
       <p:sp>
         <p:nvSpPr>
-          <p:cNvPr id="9005" name="Oval 9004"/>
+          <p:cNvPr id="9004" name="Oval 9003"/>
           <p:cNvSpPr/>
           <p:nvPr/>
         </p:nvSpPr>
         <p:spPr>
           <a:xfrm>
-            <a:off x="713232" y="1920240"/>
+            <a:off x="713232" y="1554480"/>
             <a:ext cx="274320" cy="274320"/>
           </a:xfrm>
           <a:prstGeom prst="ellipse">
@@ -10911,14 +10871,14 @@
       </p:sp>
       <p:sp>
         <p:nvSpPr>
-          <p:cNvPr id="9006" name="TextBox 9005"/>
+          <p:cNvPr id="9005" name="TextBox 9004"/>
           <p:cNvSpPr txBox="1"/>
           <p:nvPr/>
         </p:nvSpPr>
         <p:spPr>
           <a:xfrm>
-            <a:off x="1078992" y="1920240"/>
-            <a:ext cx="2877312" cy="1124712"/>
+            <a:off x="1078992" y="1554480"/>
+            <a:ext cx="2877312" cy="1280160"/>
           </a:xfrm>
           <a:prstGeom prst="rect">
             <a:avLst/>
@@ -10967,14 +10927,14 @@
       </p:sp>
       <p:sp>
         <p:nvSpPr>
-          <p:cNvPr id="9007" name="Rounded Rectangle 9006"/>
+          <p:cNvPr id="9006" name="Rounded Rectangle 9005"/>
           <p:cNvSpPr/>
           <p:nvPr/>
         </p:nvSpPr>
         <p:spPr>
           <a:xfrm>
-            <a:off x="4340351" y="1783080"/>
-            <a:ext cx="3517391" cy="1325880"/>
+            <a:off x="4340351" y="1417320"/>
+            <a:ext cx="3517391" cy="1481328"/>
           </a:xfrm>
           <a:prstGeom prst="roundRect">
             <a:avLst/>
@@ -11013,13 +10973,13 @@
       </p:sp>
       <p:sp>
         <p:nvSpPr>
-          <p:cNvPr id="9008" name="Oval 9007"/>
+          <p:cNvPr id="9007" name="Oval 9006"/>
           <p:cNvSpPr/>
           <p:nvPr/>
         </p:nvSpPr>
         <p:spPr>
           <a:xfrm>
-            <a:off x="4486656" y="1920240"/>
+            <a:off x="4486656" y="1554480"/>
             <a:ext cx="274320" cy="274320"/>
           </a:xfrm>
           <a:prstGeom prst="ellipse">
@@ -11067,14 +11027,14 @@
       </p:sp>
       <p:sp>
         <p:nvSpPr>
-          <p:cNvPr id="9009" name="TextBox 9008"/>
+          <p:cNvPr id="9008" name="TextBox 9007"/>
           <p:cNvSpPr txBox="1"/>
           <p:nvPr/>
         </p:nvSpPr>
         <p:spPr>
           <a:xfrm>
-            <a:off x="4852416" y="1920240"/>
-            <a:ext cx="2877312" cy="1124712"/>
+            <a:off x="4852416" y="1554480"/>
+            <a:ext cx="2877312" cy="1280160"/>
           </a:xfrm>
           <a:prstGeom prst="rect">
             <a:avLst/>
@@ -11123,14 +11083,14 @@
       </p:sp>
       <p:sp>
         <p:nvSpPr>
-          <p:cNvPr id="9010" name="Rounded Rectangle 9009"/>
+          <p:cNvPr id="9009" name="Rounded Rectangle 9008"/>
           <p:cNvSpPr/>
           <p:nvPr/>
         </p:nvSpPr>
         <p:spPr>
           <a:xfrm>
-            <a:off x="8113775" y="1783080"/>
-            <a:ext cx="3517391" cy="1325880"/>
+            <a:off x="8113775" y="1417320"/>
+            <a:ext cx="3517391" cy="1481328"/>
           </a:xfrm>
           <a:prstGeom prst="roundRect">
             <a:avLst/>
@@ -11169,13 +11129,13 @@
       </p:sp>
       <p:sp>
         <p:nvSpPr>
-          <p:cNvPr id="9011" name="Oval 9010"/>
+          <p:cNvPr id="9010" name="Oval 9009"/>
           <p:cNvSpPr/>
           <p:nvPr/>
         </p:nvSpPr>
         <p:spPr>
           <a:xfrm>
-            <a:off x="8260079" y="1920240"/>
+            <a:off x="8260079" y="1554480"/>
             <a:ext cx="274320" cy="274320"/>
           </a:xfrm>
           <a:prstGeom prst="ellipse">
@@ -11223,14 +11183,14 @@
       </p:sp>
       <p:sp>
         <p:nvSpPr>
-          <p:cNvPr id="9012" name="TextBox 9011"/>
+          <p:cNvPr id="9011" name="TextBox 9010"/>
           <p:cNvSpPr txBox="1"/>
           <p:nvPr/>
         </p:nvSpPr>
         <p:spPr>
           <a:xfrm>
-            <a:off x="8625839" y="1920240"/>
-            <a:ext cx="2877312" cy="1124712"/>
+            <a:off x="8625839" y="1554480"/>
+            <a:ext cx="2877312" cy="1280160"/>
           </a:xfrm>
           <a:prstGeom prst="rect">
             <a:avLst/>
@@ -11279,14 +11239,14 @@
       </p:sp>
       <p:sp>
         <p:nvSpPr>
-          <p:cNvPr id="9013" name="Rounded Rectangle 9012"/>
+          <p:cNvPr id="9012" name="Rounded Rectangle 9011"/>
           <p:cNvSpPr/>
           <p:nvPr/>
         </p:nvSpPr>
         <p:spPr>
           <a:xfrm>
-            <a:off x="566928" y="3364991"/>
-            <a:ext cx="3517391" cy="1325880"/>
+            <a:off x="566928" y="3154680"/>
+            <a:ext cx="3517391" cy="1481328"/>
           </a:xfrm>
           <a:prstGeom prst="roundRect">
             <a:avLst/>
@@ -11325,13 +11285,13 @@
       </p:sp>
       <p:sp>
         <p:nvSpPr>
-          <p:cNvPr id="9014" name="Oval 9013"/>
+          <p:cNvPr id="9013" name="Oval 9012"/>
           <p:cNvSpPr/>
           <p:nvPr/>
         </p:nvSpPr>
         <p:spPr>
           <a:xfrm>
-            <a:off x="713232" y="3502151"/>
+            <a:off x="713232" y="3291840"/>
             <a:ext cx="274320" cy="274320"/>
           </a:xfrm>
           <a:prstGeom prst="ellipse">
@@ -11379,14 +11339,14 @@
       </p:sp>
       <p:sp>
         <p:nvSpPr>
-          <p:cNvPr id="9015" name="TextBox 9014"/>
+          <p:cNvPr id="9014" name="TextBox 9013"/>
           <p:cNvSpPr txBox="1"/>
           <p:nvPr/>
         </p:nvSpPr>
         <p:spPr>
           <a:xfrm>
-            <a:off x="1078992" y="3502151"/>
-            <a:ext cx="2877312" cy="1124712"/>
+            <a:off x="1078992" y="3291840"/>
+            <a:ext cx="2877312" cy="1280160"/>
           </a:xfrm>
           <a:prstGeom prst="rect">
             <a:avLst/>
@@ -11435,14 +11395,14 @@
       </p:sp>
       <p:sp>
         <p:nvSpPr>
-          <p:cNvPr id="9016" name="Rounded Rectangle 9015"/>
+          <p:cNvPr id="9015" name="Rounded Rectangle 9014"/>
           <p:cNvSpPr/>
           <p:nvPr/>
         </p:nvSpPr>
         <p:spPr>
           <a:xfrm>
-            <a:off x="4340351" y="3364991"/>
-            <a:ext cx="3517391" cy="1325880"/>
+            <a:off x="4340351" y="3154680"/>
+            <a:ext cx="3517391" cy="1481328"/>
           </a:xfrm>
           <a:prstGeom prst="roundRect">
             <a:avLst/>
@@ -11481,13 +11441,13 @@
       </p:sp>
       <p:sp>
         <p:nvSpPr>
-          <p:cNvPr id="9017" name="Oval 9016"/>
+          <p:cNvPr id="9016" name="Oval 9015"/>
           <p:cNvSpPr/>
           <p:nvPr/>
         </p:nvSpPr>
         <p:spPr>
           <a:xfrm>
-            <a:off x="4486656" y="3502151"/>
+            <a:off x="4486656" y="3291840"/>
             <a:ext cx="274320" cy="274320"/>
           </a:xfrm>
           <a:prstGeom prst="ellipse">
@@ -11535,14 +11495,14 @@
       </p:sp>
       <p:sp>
         <p:nvSpPr>
-          <p:cNvPr id="9018" name="TextBox 9017"/>
+          <p:cNvPr id="9017" name="TextBox 9016"/>
           <p:cNvSpPr txBox="1"/>
           <p:nvPr/>
         </p:nvSpPr>
         <p:spPr>
           <a:xfrm>
-            <a:off x="4852416" y="3502151"/>
-            <a:ext cx="2877312" cy="1124712"/>
+            <a:off x="4852416" y="3291840"/>
+            <a:ext cx="2877312" cy="1280160"/>
           </a:xfrm>
           <a:prstGeom prst="rect">
             <a:avLst/>
@@ -11591,14 +11551,14 @@
       </p:sp>
       <p:sp>
         <p:nvSpPr>
-          <p:cNvPr id="9019" name="Rounded Rectangle 9018"/>
+          <p:cNvPr id="9018" name="Rounded Rectangle 9017"/>
           <p:cNvSpPr/>
           <p:nvPr/>
         </p:nvSpPr>
         <p:spPr>
           <a:xfrm>
-            <a:off x="8113775" y="3364991"/>
-            <a:ext cx="3517391" cy="1325880"/>
+            <a:off x="8113775" y="3154680"/>
+            <a:ext cx="3517391" cy="1481328"/>
           </a:xfrm>
           <a:prstGeom prst="roundRect">
             <a:avLst/>
@@ -11637,13 +11597,13 @@
       </p:sp>
       <p:sp>
         <p:nvSpPr>
-          <p:cNvPr id="9020" name="Oval 9019"/>
+          <p:cNvPr id="9019" name="Oval 9018"/>
           <p:cNvSpPr/>
           <p:nvPr/>
         </p:nvSpPr>
         <p:spPr>
           <a:xfrm>
-            <a:off x="8260079" y="3502151"/>
+            <a:off x="8260079" y="3291840"/>
             <a:ext cx="274320" cy="274320"/>
           </a:xfrm>
           <a:prstGeom prst="ellipse">
@@ -11691,14 +11651,14 @@
       </p:sp>
       <p:sp>
         <p:nvSpPr>
-          <p:cNvPr id="9021" name="TextBox 9020"/>
+          <p:cNvPr id="9020" name="TextBox 9019"/>
           <p:cNvSpPr txBox="1"/>
           <p:nvPr/>
         </p:nvSpPr>
         <p:spPr>
           <a:xfrm>
-            <a:off x="8625839" y="3502151"/>
-            <a:ext cx="2877312" cy="1124712"/>
+            <a:off x="8625839" y="3291840"/>
+            <a:ext cx="2877312" cy="1280160"/>
           </a:xfrm>
           <a:prstGeom prst="rect">
             <a:avLst/>
@@ -11747,13 +11707,13 @@
       </p:sp>
       <p:sp>
         <p:nvSpPr>
-          <p:cNvPr id="9022" name="TextBox 9021"/>
+          <p:cNvPr id="9021" name="TextBox 9020"/>
           <p:cNvSpPr txBox="1"/>
           <p:nvPr/>
         </p:nvSpPr>
         <p:spPr>
           <a:xfrm>
-            <a:off x="566928" y="4846320"/>
+            <a:off x="566928" y="4956048"/>
             <a:ext cx="11064240" cy="777240"/>
           </a:xfrm>
           <a:prstGeom prst="rect">
@@ -11817,7 +11777,7 @@
       </p:sp>
       <p:sp>
         <p:nvSpPr>
-          <p:cNvPr id="9023" name="TextBox 9022"/>
+          <p:cNvPr id="9022" name="TextBox 9021"/>
           <p:cNvSpPr txBox="1"/>
           <p:nvPr/>
         </p:nvSpPr>
@@ -11853,7 +11813,7 @@
       </p:sp>
       <p:sp>
         <p:nvSpPr>
-          <p:cNvPr id="9024" name="TextBox 9023"/>
+          <p:cNvPr id="9023" name="TextBox 9022"/>
           <p:cNvSpPr txBox="1"/>
           <p:nvPr/>
         </p:nvSpPr>

--- a/docs/thesis/defense/答辩PPT-北航模板版.pptx
+++ b/docs/thesis/defense/答辩PPT-北航模板版.pptx
@@ -11778,42 +11778,6 @@
       <p:sp>
         <p:nvSpPr>
           <p:cNvPr id="9022" name="TextBox 9021"/>
-          <p:cNvSpPr txBox="1"/>
-          <p:nvPr/>
-        </p:nvSpPr>
-        <p:spPr>
-          <a:xfrm>
-            <a:off x="566928" y="6309360"/>
-            <a:ext cx="10104120" cy="201168"/>
-          </a:xfrm>
-          <a:prstGeom prst="rect">
-            <a:avLst/>
-          </a:prstGeom>
-          <a:noFill/>
-        </p:spPr>
-        <p:txBody>
-          <a:bodyPr wrap="square" anchor="t" lIns="0" rIns="0" tIns="0" bIns="0">
-            <a:spAutoFit/>
-          </a:bodyPr>
-          <a:lstStyle/>
-          <a:p>
-            <a:pPr algn="l"/>
-            <a:r>
-              <a:rPr sz="850" b="0">
-                <a:solidFill>
-                  <a:srgbClr val="636363"/>
-                </a:solidFill>
-                <a:latin typeface="Arial"/>
-                <a:ea typeface="微软雅黑"/>
-              </a:rPr>
-              <a:t>编码：s1–s4 = 100 / 1000 / 5000 / 10000 节点；w1–w7 = 负载强度（w2 500、w3 1000、w4 2000 pods/s 极限、w5 突发、w6 Gang、w7 异构）；inst3 = 3 实例</a:t>
-            </a:r>
-          </a:p>
-        </p:txBody>
-      </p:sp>
-      <p:sp>
-        <p:nvSpPr>
-          <p:cNvPr id="9023" name="TextBox 9022"/>
           <p:cNvSpPr txBox="1"/>
           <p:nvPr/>
         </p:nvSpPr>

--- a/docs/thesis/defense/答辩PPT-北航模板版.pptx
+++ b/docs/thesis/defense/答辩PPT-北航模板版.pptx
@@ -1338,7 +1338,7 @@
           <a:lstStyle/>
           <a:p>
             <a:r>
-              <a:t>这一页是方法学核心。吞吐时序是爬升、平台、归零三段，直接取平均会被尾段零值稀释，稀释程度还取决于跑多久，跨调度器就不可比，所以主口径是总工作量除以总完成时间。时序类先对三条 run 逐点取中位数，再剔首尾各两点。c、d、e 是单实例，过载时 Pod 没进直方图，存在幸存者偏差，只做定性说明。所以跨调度器我只用吞吐、队列堆积与绑定成功率做整体比较，延迟只在 ENO 与 Gödel 之间比。这三条口径是后面所有数字可比的前提；口径不同，数字就不能直接并列。</a:t>
+              <a:t>这一页是方法学核心。吞吐时序是爬升、平台、归零三段，直接取平均会被尾段零值稀释，稀释程度还取决于跑多久，跨调度器就不可比，所以主口径是总工作量除以总完成时间。时序处理三步：每个场景跑三次，按相对时间对齐后逐时间点取中位数；剔掉首尾各两个采样点，也就是约 30 秒的预热与冷却；剩下的序列上取分位数，P90、P99 用线性插值算。c、d、e 是单实例，过载时 Pod 没进直方图，存在幸存者偏差，只做定性说明。所以跨调度器我只用吞吐、队列堆积与绑定成功率做整体比较，延迟只在 ENO 与 Gödel 之间比。这三条口径是后面所有数字可比的前提；口径不同，数字就不能直接并列。</a:t>
             </a:r>
           </a:p>
         </p:txBody>
@@ -11736,7 +11736,7 @@
                 <a:latin typeface="Arial"/>
                 <a:ea typeface="微软雅黑"/>
               </a:rPr>
-              <a:t>▪  三段结构：爬升—平台—归零，均值被尾段零值稀释</a:t>
+              <a:t>▪  每场景 3 次 run：按相对时间对齐，逐时间点取中位数，得一条中位时序（离散度取半 IQR）</a:t>
             </a:r>
           </a:p>
           <a:p>
@@ -11753,7 +11753,7 @@
                 <a:latin typeface="Arial"/>
                 <a:ea typeface="微软雅黑"/>
               </a:rPr>
-              <a:t>▪  时序类：3 run 逐点中位数，再去首尾各 2 点（约 30 s）</a:t>
+              <a:t>▪  剔除首尾各 2 个采样点（约 30 s 的 warmup / cooldown），再在剩余序列上取标量</a:t>
             </a:r>
           </a:p>
           <a:p>
@@ -11770,7 +11770,7 @@
                 <a:latin typeface="Arial"/>
                 <a:ea typeface="微软雅黑"/>
               </a:rPr>
-              <a:t>▪  c/d/e 单实例过载存在幸存者偏差，只与 a/b 比吞吐、队列、成功率</a:t>
+              <a:t>▪  P90 / P99 用线性插值计算；c/d/e 单实例过载存在幸存者偏差，只与 a/b 比吞吐、队列、成功率</a:t>
             </a:r>
           </a:p>
         </p:txBody>

--- a/docs/thesis/defense/答辩PPT-北航模板版.pptx
+++ b/docs/thesis/defense/答辩PPT-北航模板版.pptx
@@ -3158,7 +3158,7 @@
           <a:lstStyle/>
           <a:p>
             <a:r>
-              <a:t>左边是原形态，Binder 独立部署，决策完要把任务发过去；右边是本文形态，Binder 就在 Scheduler 进程里。这一刀去掉三段开销：事件传递、跨进程调用、序列化。我把它称为第一性来源。Binder 进进程之后，绑定与决策共享同一份缓存、同一个调度循环。</a:t>
+              <a:t>左边是原形态，Binder 独立部署，决策完要把任务发过去；右边是本文形态，Binder 就在 Scheduler 进程里。这一刀去掉三段开销：事件传递、跨进程调用、序列化。我把它称为第一性来源。</a:t>
             </a:r>
           </a:p>
         </p:txBody>
@@ -3228,7 +3228,7 @@
           <a:lstStyle/>
           <a:p>
             <a:r>
-              <a:t>难点在缓存。以前 Binder 在另一个进程，缓存要么复制要么重建。CacheAdapter 让进程内 Binder 直接拿到同一份 SchedulerCache 的对象引用，所以叫零拷贝。两边看到同一份状态，Layer 0 的校验才有同一个真相可依。零拷贝的收益，会在后面的扩展性实验里直接看到。</a:t>
+              <a:t>难点在缓存。以前 Binder 在另一个进程，缓存要么复制要么重建。CacheAdapter 让进程内 Binder 直接拿到同一份 SchedulerCache 的对象引用，所以叫零拷贝。两边看到同一份状态，Layer 0 的校验才有同一个真相可依。</a:t>
             </a:r>
           </a:p>
         </p:txBody>

--- a/docs/thesis/defense/答辩PPT-北航模板版.pptx
+++ b/docs/thesis/defense/答辩PPT-北航模板版.pptx
@@ -1128,7 +1128,7 @@
           <a:lstStyle/>
           <a:p>
             <a:r>
-              <a:t>四层是一条时间轴。Bind 前 Layer 0 校验归属注解，非本分区直接拒绝并回退。Bind 中 Layer 1 只处理 409、429、ServerTimeout 三类暂态错误：线性退避 100、200、300 毫秒，最多三次，其它错误立即上抛。失败后 Layer 2 异步清理残留注解，按失败计数决定本地重试还是上升。重试耗尽 Layer 3 用一次原子 patch 交回 Dispatcher 重分发。四层之间是衔接关系，不是四个独立补丁。</a:t>
+              <a:t>四层是一条时间轴。Bind 前 Layer 0 校验归属注解，非本分区直接拒绝并回退。Bind 中 Layer 1 只处理 409、429、ServerTimeout 三类暂态错误：线性退避 100、200、300 毫秒，最多三次，其它错误立即上抛。失败后 Layer 2 异步清理残留注解，按失败计数决定本地重试还是上升。重试耗尽 Layer 3 用一次原子 patch 交回 Dispatcher 重分发。</a:t>
             </a:r>
           </a:p>
         </p:txBody>
@@ -1338,7 +1338,7 @@
           <a:lstStyle/>
           <a:p>
             <a:r>
-              <a:t>这一页是方法学核心。吞吐时序是爬升、平台、归零三段，直接取平均会被尾段零值稀释，稀释程度还取决于跑多久，跨调度器就不可比，所以主口径是总工作量除以总完成时间。时序处理三步：每个场景跑三次，按相对时间对齐后逐时间点取中位数；剔掉首尾各两个采样点，也就是约 30 秒的预热与冷却；剩下的序列上取分位数，P90、P99 用线性插值算。c、d、e 是单实例，过载时 Pod 没进直方图，存在幸存者偏差，只做定性说明。所以跨调度器我只用吞吐、队列堆积与绑定成功率做整体比较，延迟只在 ENO 与 Gödel 之间比。这三条口径是后面所有数字可比的前提；口径不同，数字就不能直接并列。</a:t>
+              <a:t>这一页是方法学核心。吞吐时序是爬升、平台、归零三段，直接取平均会被尾段零值稀释，稀释程度还取决于跑多久，跨调度器就不可比，所以主口径是总工作量除以总完成时间。时序处理三步：每个场景跑三次，按相对时间对齐后逐时间点取中位数；剔掉首尾各两个采样点，也就是约 30 秒的预热与冷却；剩下的序列上取分位数，P90、P99 用线性插值算。队列堆积是个例外，取过程最大值；绑定成功率按三次比值取中位数。c、d、e 是单实例，过载时 Pod 没进直方图，存在幸存者偏差，只做定性说明。所以跨调度器我只用吞吐、队列堆积与绑定成功率做整体比较，延迟只在 ENO 与 Gödel 之间比。这三条口径是后面所有数字可比的前提；口径不同，数字就不能直接并列。</a:t>
             </a:r>
           </a:p>
         </p:txBody>
@@ -11736,7 +11736,7 @@
                 <a:latin typeface="Arial"/>
                 <a:ea typeface="微软雅黑"/>
               </a:rPr>
-              <a:t>▪  每场景 3 次 run：按相对时间对齐，逐时间点取中位数，得一条中位时序（离散度取半 IQR）</a:t>
+              <a:t>▪  有效吞吐：每次 run 单独算「总工作量 ÷ 完成时间」，再取 3 次中位数（不走时序聚合）</a:t>
             </a:r>
           </a:p>
           <a:p>
@@ -11753,7 +11753,7 @@
                 <a:latin typeface="Arial"/>
                 <a:ea typeface="微软雅黑"/>
               </a:rPr>
-              <a:t>▪  剔除首尾各 2 个采样点（约 30 s 的 warmup / cooldown），再在剩余序列上取标量</a:t>
+              <a:t>▪  其余时序指标：3 条 run 逐时间点取中位数（离散度半 IQR）→ 剔首尾各 2 点（约 30 s）→ 取标量，分位数线性插值</a:t>
             </a:r>
           </a:p>
           <a:p>
@@ -11770,7 +11770,7 @@
                 <a:latin typeface="Arial"/>
                 <a:ea typeface="微软雅黑"/>
               </a:rPr>
-              <a:t>▪  P90 / P99 用线性插值计算；c/d/e 单实例过载存在幸存者偏差，只与 a/b 比吞吐、队列、成功率</a:t>
+              <a:t>▪  队列堆积取过程最大值；c/d/e 单实例过载存在幸存者偏差，只与 a/b 比吞吐、队列、成功率</a:t>
             </a:r>
           </a:p>
         </p:txBody>

--- a/docs/thesis/defense/答辩PPT-北航模板版.pptx
+++ b/docs/thesis/defense/答辩PPT-北航模板版.pptx
@@ -11770,7 +11770,7 @@
                 <a:latin typeface="Arial"/>
                 <a:ea typeface="微软雅黑"/>
               </a:rPr>
-              <a:t>▪  队列堆积取过程最大值；c/d/e 单实例过载存在幸存者偏差，只与 a/b 比吞吐、队列、成功率</a:t>
+              <a:t>▪  队列堆积是例外：逐点中位聚合后取峰值、不做剔尾；c/d/e 过载存在幸存者偏差，只与 a/b 比吞吐、队列、成功率</a:t>
             </a:r>
           </a:p>
         </p:txBody>

--- a/docs/thesis/defense/答辩PPT-北航模板版.pptx
+++ b/docs/thesis/defense/答辩PPT-北航模板版.pptx
@@ -11753,7 +11753,7 @@
                 <a:latin typeface="Arial"/>
                 <a:ea typeface="微软雅黑"/>
               </a:rPr>
-              <a:t>▪  其余时序指标：3 条 run 逐时间点取中位数（离散度半 IQR）→ 剔首尾各 2 点（约 30 s）→ 取标量，分位数线性插值</a:t>
+              <a:t>▪  其余时序指标：3 条 run 逐点取中位（离散度半 IQR）→ 剔首尾各 2 点（约 30 s）→ 取中位数；分位数线性插值</a:t>
             </a:r>
           </a:p>
           <a:p>

--- a/docs/thesis/defense/答辩PPT-北航模板版.pptx
+++ b/docs/thesis/defense/答辩PPT-北航模板版.pptx
@@ -1478,7 +1478,7 @@
           <a:lstStyle/>
           <a:p>
             <a:r>
-              <a:t>第一场注入：s2/w2、三实例，第 30 秒把 10% 的节点、约 100 个，归属注解从 scheduler-0 改为 scheduler-1。NodeValidator 拦截 300 次，Dispatcher 回退 300 次，两条曲线重叠。拦截不等于丢弃：Pod 进回退队列被重分发，成功率仍是 1.00，总耗时 683 秒、只比基线多 3 秒。这组数字说明 Layer 0 只是把错误前置，不是把工作丢掉，代价几乎为零。拦截 300 次、回退 300 次，两边对得上，说明没有 Pod 被丢掉。</a:t>
+              <a:t>五组横向对比，结论是三档。第一档 ENO 与 Gödel，都是几百 pods/s；第二档 kube-scheduler；第三档 Volcano 与 Koordinator，只有约 48 和约 24 pods/s，几乎不随规模变化。主评估四场景里，ENO 比 kube-scheduler 高 1.8% 到 22.5%。唯一例外是 s1/w1 低负载低 7.2%，那个场景没饱和。柱状图按场景排序，第三档几乎是一条水平线，说明它们的瓶颈不在调度吞吐这一维。从 s1 到 s3，第一档的曲线始终压在最上面，第三档几乎不随规模变化。这个排序在 16 个场景上是一致的。</a:t>
             </a:r>
           </a:p>
         </p:txBody>
@@ -1548,7 +1548,7 @@
           <a:lstStyle/>
           <a:p>
             <a:r>
-              <a:t>第二场注入：第 10 秒杀掉 scheduler-0，停机 180 秒，实测中断 189 秒。被杀实例未完成的绑定只占 68/8407，即 0.81%；两个存活实例接管 8407 个 Pod，队列峰值 353 后回落到 2。累计绑定 49607/50000，断言仍全过。代价是 784 秒、比基线多 104 秒，是工作量重排的代价，不是数据损坏。对比基线是同一场景下的无故障运行，680 秒。队列在 353 之后回落到 2，说明积压是瞬时的。</a:t>
+              <a:t>和 Gödel 逐场景对比：16 个场景里 14 个领先，2 个持平，没有落后的，提升 2.0% 到 22.9%，平均 11.9%。优势最大的是高负载与多实例：s2/w3 高 22.9%，s3/w3 三实例高 21.7%。两个持平场景都没饱和，完成时间由注入速率决定。两个持平场景说明，未饱和时调度器再快也压不出更多吞吐。平均 11.9% 是 14 个领先场景提升幅度的均值。</a:t>
             </a:r>
           </a:p>
         </p:txBody>
@@ -1618,7 +1618,7 @@
           <a:lstStyle/>
           <a:p>
             <a:r>
-              <a:t>五组横向对比，结论是三档。第一档 ENO 与 Gödel，都是几百 pods/s；第二档 kube-scheduler；第三档 Volcano 与 Koordinator，只有约 48 和约 24 pods/s，几乎不随规模变化。主评估四场景里，ENO 比 kube-scheduler 高 1.8% 到 22.5%。唯一例外是 s1/w1 低负载低 7.2%，那个场景没饱和。柱状图按场景排序，第三档几乎是一条水平线，说明它们的瓶颈不在调度吞吐这一维。从 s1 到 s3，第一档的曲线始终压在最上面，第三档几乎不随规模变化。这个排序在 16 个场景上是一致的。</a:t>
+              <a:t>延迟这页。除 s2/w2 外，11 个非 Gang 场景 P99 都低于 Gödel，改善 0.3% 到 82.9%。最典型是 s2/w3，23.48 秒降到 4.00 秒；单实例 s3/w3 从 32.57 秒到 16.22 秒。Pod 端到端 P99 在 12 个非 Gang 场景也都不高于 Gödel。Gang 是反的，放到局限里展开。延迟单位是秒，纵轴用对数，便于跨量级比较。改善的下界 0.3% 出现在已经接近饱和的场景。</a:t>
             </a:r>
           </a:p>
         </p:txBody>
@@ -1688,7 +1688,7 @@
           <a:lstStyle/>
           <a:p>
             <a:r>
-              <a:t>和 Gödel 逐场景对比：16 个场景里 14 个领先，2 个持平，没有落后的，提升 2.0% 到 22.9%，平均 11.9%。优势最大的是高负载与多实例：s2/w3 高 22.9%，s3/w3 三实例高 21.7%。两个持平场景都没饱和，完成时间由注入速率决定。两个持平场景说明，未饱和时调度器再快也压不出更多吞吐。平均 11.9% 是 14 个领先场景提升幅度的均值。</a:t>
+              <a:t>这是全文最强的归因证据。同样把实例从 1 加到 3，两边延迟都降约 99%，这部分一样。差别在吞吐：ENO 从 297.6 到 349.7，提升 17.5%；Gödel 从 283.3 到 287.4，只提升 1.4%。同样多的并发能力，Gödel 的增量被独立 Binder 的串行绑定吸收掉了。延迟数量级下降说明瓶颈不在决策侧，而在绑定这一环的串行化。峰值吞吐两家都涨，但只有 ENO 把增量转化成了有效吞吐。</a:t>
             </a:r>
           </a:p>
         </p:txBody>
@@ -1758,7 +1758,7 @@
           <a:lstStyle/>
           <a:p>
             <a:r>
-              <a:t>延迟这页。除 s2/w2 外，11 个非 Gang 场景 P99 都低于 Gödel，改善 0.3% 到 82.9%。最典型是 s2/w3，23.48 秒降到 4.00 秒；单实例 s3/w3 从 32.57 秒到 16.22 秒。Pod 端到端 P99 在 12 个非 Gang 场景也都不高于 Gödel。Gang 是反的，放到局限里展开。延迟单位是秒，纵轴用对数，便于跨量级比较。改善的下界 0.3% 出现在已经接近饱和的场景。</a:t>
+              <a:t>两件事。第一，规模从 5000 到 10000、实例数不变，两边都退化：ENO -15.2%，Gödel -2.3%；但 ENO 仍领先，吞吐 296.7 对 280.9 高 5.6%，P99 0.19 对 0.28 秒低 33.4%，队列峰值 9 对 61。第二，复杂负载：极限 +9.3% 与 +16.0%，突发 +21.3% 与 +2.8%，异构 s3 高 21.2%、s4 持平。s4 的退化与固定三实例有关，这写在局限里。规模翻倍而实例不扩，本身就是一个更苛刻的设定，不能当作扩展上限。</a:t>
             </a:r>
           </a:p>
         </p:txBody>
@@ -1898,7 +1898,7 @@
           <a:lstStyle/>
           <a:p>
             <a:r>
-              <a:t>这是全文最强的归因证据。同样把实例从 1 加到 3，两边延迟都降约 99%，这部分一样。差别在吞吐：ENO 从 297.6 到 349.7，提升 17.5%；Gödel 从 283.3 到 287.4，只提升 1.4%。同样多的并发能力，Gödel 的增量被独立 Binder 的串行绑定吸收掉了。延迟数量级下降说明瓶颈不在决策侧，而在绑定这一环的串行化。峰值吞吐两家都涨，但只有 ENO 把增量转化成了有效吞吐。</a:t>
+              <a:t>把机制和指标对齐。进程内绑定去掉事件传递，对应 E2E 降低，三实例 0.45 对 0.93 秒；零拷贝让状态复用无同步延迟；关键是第三行，没有独立 Binder 的串行段，吞吐才能随实例扩展，+17.5% 对 +1.4%；第四行四层容错守住不变量。也要说明相关与归因的区别：峰值吞吐不是每个场景都领先。如果评委追问某个数字，备用页里有完整口径与原始目录。四行对应四个机制，每一项都有可复核的字段。</a:t>
             </a:r>
           </a:p>
         </p:txBody>
@@ -1968,7 +1968,7 @@
           <a:lstStyle/>
           <a:p>
             <a:r>
-              <a:t>两件事。第一，规模从 5000 到 10000、实例数不变，两边都退化：ENO -15.2%，Gödel -2.3%；但 ENO 仍领先，吞吐 296.7 对 280.9 高 5.6%，P99 0.19 对 0.28 秒低 33.4%，队列峰值 9 对 61。第二，复杂负载：极限 +9.3% 与 +16.0%，突发 +21.3% 与 +2.8%，异构 s3 高 21.2%、s4 持平。s4 的退化与固定三实例有关，这写在局限里。规模翻倍而实例不扩，本身就是一个更苛刻的设定，不能当作扩展上限。</a:t>
+              <a:t>第一场注入：s2/w2、三实例，第 30 秒把 10% 的节点、约 100 个，归属注解从 scheduler-0 改为 scheduler-1。NodeValidator 拦截 300 次，Dispatcher 回退 300 次，两条曲线重叠。拦截不等于丢弃：Pod 进回退队列被重分发，成功率仍是 1.00，总耗时 683 秒、只比基线多 3 秒。这组数字说明 Layer 0 只是把错误前置，不是把工作丢掉，代价几乎为零。拦截 300 次、回退 300 次，两边对得上，说明没有 Pod 被丢掉。</a:t>
             </a:r>
           </a:p>
         </p:txBody>
@@ -2038,7 +2038,7 @@
           <a:lstStyle/>
           <a:p>
             <a:r>
-              <a:t>把机制和指标对齐。进程内绑定去掉事件传递，对应 E2E 降低，三实例 0.45 对 0.93 秒；零拷贝让状态复用无同步延迟；关键是第三行，没有独立 Binder 的串行段，吞吐才能随实例扩展，+17.5% 对 +1.4%；第四行四层容错守住不变量。也要说明相关与归因的区别：峰值吞吐不是每个场景都领先。如果评委追问某个数字，备用页里有完整口径与原始目录。四行对应四个机制，每一项都有可复核的字段。</a:t>
+              <a:t>第二场注入：第 10 秒杀掉 scheduler-0，停机 180 秒，实测中断 189 秒。被杀实例未完成的绑定只占 68/8407，即 0.81%；两个存活实例接管 8407 个 Pod，队列峰值 353 后回落到 2。累计绑定 49607/50000，断言仍全过。代价是 784 秒、比基线多 104 秒，是工作量重排的代价，不是数据损坏。对比基线是同一场景下的无故障运行，680 秒。队列在 353 之后回落到 2，说明积压是瞬时的。</a:t>
             </a:r>
           </a:p>
         </p:txBody>
@@ -13022,1012 +13022,6 @@
                 <a:latin typeface="Arial"/>
                 <a:ea typeface="微软雅黑"/>
               </a:rPr>
-              <a:t>故障注入 Layer 0</a:t>
-            </a:r>
-          </a:p>
-        </p:txBody>
-      </p:sp>
-      <p:sp>
-        <p:nvSpPr>
-          <p:cNvPr id="9003" name="TextBox 9002"/>
-          <p:cNvSpPr txBox="1"/>
-          <p:nvPr/>
-        </p:nvSpPr>
-        <p:spPr>
-          <a:xfrm>
-            <a:off x="566928" y="1261872"/>
-            <a:ext cx="10881360" cy="438912"/>
-          </a:xfrm>
-          <a:prstGeom prst="rect">
-            <a:avLst/>
-          </a:prstGeom>
-          <a:noFill/>
-        </p:spPr>
-        <p:txBody>
-          <a:bodyPr wrap="square" anchor="ctr" lIns="0" rIns="0" tIns="0" bIns="0">
-            <a:spAutoFit/>
-          </a:bodyPr>
-          <a:lstStyle/>
-          <a:p>
-            <a:pPr algn="l">
-              <a:lnSpc>
-                <a:spcPct val="110000"/>
-              </a:lnSpc>
-            </a:pPr>
-            <a:r>
-              <a:rPr sz="1800" b="1">
-                <a:solidFill>
-                  <a:srgbClr val="0070C0"/>
-                </a:solidFill>
-                <a:latin typeface="Arial"/>
-                <a:ea typeface="微软雅黑"/>
-              </a:rPr>
-              <a:t>10% 节点注解漂移，300 次拦截全部转为合规重排</a:t>
-            </a:r>
-          </a:p>
-        </p:txBody>
-      </p:sp>
-      <p:pic>
-        <p:nvPicPr>
-          <p:cNvPr id="9004" name="Picture 9003" descr="fig6-29a-layer0-timeseries.png"/>
-          <p:cNvPicPr>
-            <a:picLocks noChangeAspect="1"/>
-          </p:cNvPicPr>
-          <p:nvPr/>
-        </p:nvPicPr>
-        <p:blipFill>
-          <a:blip r:embed="rId3"/>
-          <a:stretch>
-            <a:fillRect/>
-          </a:stretch>
-        </p:blipFill>
-        <p:spPr>
-          <a:xfrm>
-            <a:off x="5806440" y="2657246"/>
-            <a:ext cx="5852160" cy="2457907"/>
-          </a:xfrm>
-          <a:prstGeom prst="rect">
-            <a:avLst/>
-          </a:prstGeom>
-        </p:spPr>
-      </p:pic>
-      <p:sp>
-        <p:nvSpPr>
-          <p:cNvPr id="9005" name="TextBox 9004"/>
-          <p:cNvSpPr txBox="1"/>
-          <p:nvPr/>
-        </p:nvSpPr>
-        <p:spPr>
-          <a:xfrm>
-            <a:off x="566928" y="2011680"/>
-            <a:ext cx="5029200" cy="1417320"/>
-          </a:xfrm>
-          <a:prstGeom prst="rect">
-            <a:avLst/>
-          </a:prstGeom>
-          <a:noFill/>
-        </p:spPr>
-        <p:txBody>
-          <a:bodyPr wrap="square" anchor="t" lIns="0" rIns="0" tIns="0" bIns="0">
-            <a:spAutoFit/>
-          </a:bodyPr>
-          <a:lstStyle/>
-          <a:p>
-            <a:pPr algn="l">
-              <a:lnSpc>
-                <a:spcPct val="115000"/>
-              </a:lnSpc>
-            </a:pPr>
-            <a:r>
-              <a:rPr sz="1550" b="0">
-                <a:solidFill>
-                  <a:srgbClr val="2E2C2C"/>
-                </a:solidFill>
-                <a:latin typeface="Arial"/>
-                <a:ea typeface="微软雅黑"/>
-              </a:rPr>
-              <a:t>▪  拦截 300 次 / 回退 300 次</a:t>
-            </a:r>
-          </a:p>
-          <a:p>
-            <a:pPr algn="l">
-              <a:lnSpc>
-                <a:spcPct val="115000"/>
-              </a:lnSpc>
-              <a:spcBef>
-                <a:spcPts val="1400"/>
-              </a:spcBef>
-            </a:pPr>
-            <a:r>
-              <a:rPr sz="1550" b="0">
-                <a:solidFill>
-                  <a:srgbClr val="2E2C2C"/>
-                </a:solidFill>
-                <a:latin typeface="Arial"/>
-                <a:ea typeface="微软雅黑"/>
-              </a:rPr>
-              <a:t>▪  绑定成功率 1.00；断言 50000/50000</a:t>
-            </a:r>
-          </a:p>
-          <a:p>
-            <a:pPr algn="l">
-              <a:lnSpc>
-                <a:spcPct val="115000"/>
-              </a:lnSpc>
-              <a:spcBef>
-                <a:spcPts val="1400"/>
-              </a:spcBef>
-            </a:pPr>
-            <a:r>
-              <a:rPr sz="1550" b="0">
-                <a:solidFill>
-                  <a:srgbClr val="2E2C2C"/>
-                </a:solidFill>
-                <a:latin typeface="Arial"/>
-                <a:ea typeface="微软雅黑"/>
-              </a:rPr>
-              <a:t>▪  总耗时 683 s 对基线 680 s（+0.4%）</a:t>
-            </a:r>
-          </a:p>
-        </p:txBody>
-      </p:sp>
-      <p:sp>
-        <p:nvSpPr>
-          <p:cNvPr id="9006" name="TextBox 9005"/>
-          <p:cNvSpPr txBox="1"/>
-          <p:nvPr/>
-        </p:nvSpPr>
-        <p:spPr>
-          <a:xfrm>
-            <a:off x="566928" y="6309360"/>
-            <a:ext cx="10104120" cy="201168"/>
-          </a:xfrm>
-          <a:prstGeom prst="rect">
-            <a:avLst/>
-          </a:prstGeom>
-          <a:noFill/>
-        </p:spPr>
-        <p:txBody>
-          <a:bodyPr wrap="square" anchor="t" lIns="0" rIns="0" tIns="0" bIns="0">
-            <a:spAutoFit/>
-          </a:bodyPr>
-          <a:lstStyle/>
-          <a:p>
-            <a:pPr algn="l"/>
-            <a:r>
-              <a:rPr sz="850" b="0">
-                <a:solidFill>
-                  <a:srgbClr val="636363"/>
-                </a:solidFill>
-                <a:latin typeface="Arial"/>
-                <a:ea typeface="微软雅黑"/>
-              </a:rPr>
-              <a:t>编码：s1–s4 = 100 / 1000 / 5000 / 10000 节点；w1–w7 = 负载强度（w2 500、w3 1000、w4 2000 pods/s 极限、w5 突发、w6 Gang、w7 异构）；inst3 = 3 实例</a:t>
-            </a:r>
-          </a:p>
-        </p:txBody>
-      </p:sp>
-      <p:sp>
-        <p:nvSpPr>
-          <p:cNvPr id="9007" name="TextBox 9006"/>
-          <p:cNvSpPr txBox="1"/>
-          <p:nvPr/>
-        </p:nvSpPr>
-        <p:spPr>
-          <a:xfrm>
-            <a:off x="10780776" y="6345936"/>
-            <a:ext cx="850392" cy="219456"/>
-          </a:xfrm>
-          <a:prstGeom prst="rect">
-            <a:avLst/>
-          </a:prstGeom>
-          <a:noFill/>
-        </p:spPr>
-        <p:txBody>
-          <a:bodyPr wrap="square" anchor="t" lIns="0" rIns="0" tIns="0" bIns="0">
-            <a:spAutoFit/>
-          </a:bodyPr>
-          <a:lstStyle/>
-          <a:p>
-            <a:pPr algn="r"/>
-            <a:r>
-              <a:rPr sz="950" b="0">
-                <a:solidFill>
-                  <a:srgbClr val="636363"/>
-                </a:solidFill>
-                <a:latin typeface="Arial"/>
-                <a:ea typeface="微软雅黑"/>
-              </a:rPr>
-              <a:t>15 / 25</a:t>
-            </a:r>
-          </a:p>
-        </p:txBody>
-      </p:sp>
-    </p:spTree>
-  </p:cSld>
-  <p:clrMapOvr>
-    <a:masterClrMapping/>
-  </p:clrMapOvr>
-</p:sld>
-</file>
-
-<file path=ppt/slides/slide16.xml><?xml version="1.0" encoding="utf-8"?>
-<p:sld xmlns:a="http://schemas.openxmlformats.org/drawingml/2006/main" xmlns:p="http://schemas.openxmlformats.org/presentationml/2006/main" xmlns:r="http://schemas.openxmlformats.org/officeDocument/2006/relationships">
-  <p:cSld>
-    <p:bg>
-      <p:bgPr>
-        <a:solidFill>
-          <a:srgbClr val="FFFFFF"/>
-        </a:solidFill>
-        <a:effectLst/>
-      </p:bgPr>
-    </p:bg>
-    <p:spTree>
-      <p:nvGrpSpPr>
-        <p:cNvPr id="1" name=""/>
-        <p:cNvGrpSpPr/>
-        <p:nvPr/>
-      </p:nvGrpSpPr>
-      <p:grpSpPr/>
-      <p:sp>
-        <p:nvSpPr>
-          <p:cNvPr id="9000" name="Freeform 5"/>
-          <p:cNvSpPr/>
-          <p:nvPr/>
-        </p:nvSpPr>
-        <p:spPr>
-          <a:xfrm>
-            <a:off x="182880" y="274320"/>
-            <a:ext cx="310896" cy="402336"/>
-          </a:xfrm>
-          <a:custGeom>
-            <a:avLst/>
-            <a:gdLst/>
-            <a:ahLst/>
-            <a:cxnLst>
-              <a:cxn ang="0">
-                <a:pos x="2147483647" y="2147483647"/>
-              </a:cxn>
-              <a:cxn ang="0">
-                <a:pos x="2147483647" y="2147483647"/>
-              </a:cxn>
-              <a:cxn ang="0">
-                <a:pos x="2147483647" y="2147483647"/>
-              </a:cxn>
-              <a:cxn ang="0">
-                <a:pos x="2147483647" y="2147483647"/>
-              </a:cxn>
-              <a:cxn ang="0">
-                <a:pos x="2147483647" y="2147483647"/>
-              </a:cxn>
-              <a:cxn ang="0">
-                <a:pos x="2147483647" y="2147483647"/>
-              </a:cxn>
-              <a:cxn ang="0">
-                <a:pos x="2147483647" y="2147483647"/>
-              </a:cxn>
-              <a:cxn ang="0">
-                <a:pos x="2147483647" y="2147483647"/>
-              </a:cxn>
-              <a:cxn ang="0">
-                <a:pos x="2147483647" y="0"/>
-              </a:cxn>
-              <a:cxn ang="0">
-                <a:pos x="2147483647" y="2147483647"/>
-              </a:cxn>
-              <a:cxn ang="0">
-                <a:pos x="2147483647" y="2147483647"/>
-              </a:cxn>
-              <a:cxn ang="0">
-                <a:pos x="2147483647" y="2147483647"/>
-              </a:cxn>
-              <a:cxn ang="0">
-                <a:pos x="2147483647" y="2147483647"/>
-              </a:cxn>
-              <a:cxn ang="0">
-                <a:pos x="2147483647" y="2147483647"/>
-              </a:cxn>
-              <a:cxn ang="0">
-                <a:pos x="2147483647" y="2147483647"/>
-              </a:cxn>
-              <a:cxn ang="0">
-                <a:pos x="2147483647" y="2147483647"/>
-              </a:cxn>
-              <a:cxn ang="0">
-                <a:pos x="2147483647" y="2147483647"/>
-              </a:cxn>
-              <a:cxn ang="0">
-                <a:pos x="2147483647" y="2147483647"/>
-              </a:cxn>
-              <a:cxn ang="0">
-                <a:pos x="2147483647" y="2147483647"/>
-              </a:cxn>
-              <a:cxn ang="0">
-                <a:pos x="0" y="2147483647"/>
-              </a:cxn>
-              <a:cxn ang="0">
-                <a:pos x="2147483647" y="2147483647"/>
-              </a:cxn>
-            </a:cxnLst>
-            <a:rect l="0" t="0" r="0" b="0"/>
-            <a:pathLst>
-              <a:path w="574" h="681">
-                <a:moveTo>
-                  <a:pt x="120" y="441"/>
-                </a:moveTo>
-                <a:cubicBezTo>
-                  <a:pt x="153" y="441"/>
-                  <a:pt x="183" y="454"/>
-                  <a:pt x="205" y="476"/>
-                </a:cubicBezTo>
-                <a:lnTo>
-                  <a:pt x="389" y="329"/>
-                </a:lnTo>
-                <a:cubicBezTo>
-                  <a:pt x="383" y="317"/>
-                  <a:pt x="380" y="303"/>
-                  <a:pt x="380" y="289"/>
-                </a:cubicBezTo>
-                <a:cubicBezTo>
-                  <a:pt x="380" y="271"/>
-                  <a:pt x="384" y="255"/>
-                  <a:pt x="392" y="241"/>
-                </a:cubicBezTo>
-                <a:lnTo>
-                  <a:pt x="270" y="138"/>
-                </a:lnTo>
-                <a:cubicBezTo>
-                  <a:pt x="256" y="151"/>
-                  <a:pt x="237" y="159"/>
-                  <a:pt x="217" y="159"/>
-                </a:cubicBezTo>
-                <a:cubicBezTo>
-                  <a:pt x="173" y="159"/>
-                  <a:pt x="137" y="123"/>
-                  <a:pt x="137" y="79"/>
-                </a:cubicBezTo>
-                <a:cubicBezTo>
-                  <a:pt x="137" y="36"/>
-                  <a:pt x="173" y="0"/>
-                  <a:pt x="217" y="0"/>
-                </a:cubicBezTo>
-                <a:cubicBezTo>
-                  <a:pt x="260" y="0"/>
-                  <a:pt x="296" y="36"/>
-                  <a:pt x="296" y="79"/>
-                </a:cubicBezTo>
-                <a:cubicBezTo>
-                  <a:pt x="296" y="91"/>
-                  <a:pt x="293" y="103"/>
-                  <a:pt x="289" y="113"/>
-                </a:cubicBezTo>
-                <a:lnTo>
-                  <a:pt x="412" y="217"/>
-                </a:lnTo>
-                <a:cubicBezTo>
-                  <a:pt x="429" y="201"/>
-                  <a:pt x="452" y="192"/>
-                  <a:pt x="477" y="192"/>
-                </a:cubicBezTo>
-                <a:cubicBezTo>
-                  <a:pt x="530" y="192"/>
-                  <a:pt x="574" y="235"/>
-                  <a:pt x="574" y="289"/>
-                </a:cubicBezTo>
-                <a:cubicBezTo>
-                  <a:pt x="574" y="342"/>
-                  <a:pt x="530" y="386"/>
-                  <a:pt x="477" y="386"/>
-                </a:cubicBezTo>
-                <a:cubicBezTo>
-                  <a:pt x="449" y="386"/>
-                  <a:pt x="424" y="374"/>
-                  <a:pt x="406" y="355"/>
-                </a:cubicBezTo>
-                <a:lnTo>
-                  <a:pt x="224" y="501"/>
-                </a:lnTo>
-                <a:cubicBezTo>
-                  <a:pt x="234" y="518"/>
-                  <a:pt x="240" y="539"/>
-                  <a:pt x="240" y="561"/>
-                </a:cubicBezTo>
-                <a:cubicBezTo>
-                  <a:pt x="240" y="627"/>
-                  <a:pt x="186" y="681"/>
-                  <a:pt x="120" y="681"/>
-                </a:cubicBezTo>
-                <a:cubicBezTo>
-                  <a:pt x="54" y="681"/>
-                  <a:pt x="0" y="627"/>
-                  <a:pt x="0" y="561"/>
-                </a:cubicBezTo>
-                <a:cubicBezTo>
-                  <a:pt x="0" y="495"/>
-                  <a:pt x="54" y="441"/>
-                  <a:pt x="120" y="441"/>
-                </a:cubicBezTo>
-                <a:close/>
-              </a:path>
-            </a:pathLst>
-          </a:custGeom>
-          <a:solidFill>
-            <a:srgbClr val="113E6A"/>
-          </a:solidFill>
-          <a:ln w="9525">
-            <a:noFill/>
-          </a:ln>
-        </p:spPr>
-        <p:txBody>
-          <a:bodyPr/>
-          <a:lstStyle/>
-          <a:p>
-            <a:endParaRPr lang="zh-CN" altLang="en-US"/>
-          </a:p>
-        </p:txBody>
-      </p:sp>
-      <p:pic>
-        <p:nvPicPr>
-          <p:cNvPr id="9001" name="Picture 9000" descr="beihang-logo-navy.png"/>
-          <p:cNvPicPr>
-            <a:picLocks noChangeAspect="1"/>
-          </p:cNvPicPr>
-          <p:nvPr/>
-        </p:nvPicPr>
-        <p:blipFill>
-          <a:blip r:embed="rId2"/>
-          <a:stretch>
-            <a:fillRect/>
-          </a:stretch>
-        </p:blipFill>
-        <p:spPr>
-          <a:xfrm>
-            <a:off x="9336024" y="91665"/>
-            <a:ext cx="2642616" cy="502469"/>
-          </a:xfrm>
-          <a:prstGeom prst="rect">
-            <a:avLst/>
-          </a:prstGeom>
-        </p:spPr>
-      </p:pic>
-      <p:sp>
-        <p:nvSpPr>
-          <p:cNvPr id="9002" name="TextBox 9001"/>
-          <p:cNvSpPr txBox="1"/>
-          <p:nvPr/>
-        </p:nvSpPr>
-        <p:spPr>
-          <a:xfrm>
-            <a:off x="566928" y="155448"/>
-            <a:ext cx="8549640" cy="621792"/>
-          </a:xfrm>
-          <a:prstGeom prst="rect">
-            <a:avLst/>
-          </a:prstGeom>
-          <a:noFill/>
-        </p:spPr>
-        <p:txBody>
-          <a:bodyPr wrap="square" anchor="ctr" lIns="0" rIns="0" tIns="0" bIns="0">
-            <a:spAutoFit/>
-          </a:bodyPr>
-          <a:lstStyle/>
-          <a:p>
-            <a:pPr algn="l">
-              <a:lnSpc>
-                <a:spcPct val="100000"/>
-              </a:lnSpc>
-            </a:pPr>
-            <a:r>
-              <a:rPr sz="3000" b="1">
-                <a:solidFill>
-                  <a:srgbClr val="113E6A"/>
-                </a:solidFill>
-                <a:latin typeface="Arial"/>
-                <a:ea typeface="微软雅黑"/>
-              </a:rPr>
-              <a:t>故障注入 Layer 3</a:t>
-            </a:r>
-          </a:p>
-        </p:txBody>
-      </p:sp>
-      <p:sp>
-        <p:nvSpPr>
-          <p:cNvPr id="9003" name="TextBox 9002"/>
-          <p:cNvSpPr txBox="1"/>
-          <p:nvPr/>
-        </p:nvSpPr>
-        <p:spPr>
-          <a:xfrm>
-            <a:off x="566928" y="1261872"/>
-            <a:ext cx="10881360" cy="438912"/>
-          </a:xfrm>
-          <a:prstGeom prst="rect">
-            <a:avLst/>
-          </a:prstGeom>
-          <a:noFill/>
-        </p:spPr>
-        <p:txBody>
-          <a:bodyPr wrap="square" anchor="ctr" lIns="0" rIns="0" tIns="0" bIns="0">
-            <a:spAutoFit/>
-          </a:bodyPr>
-          <a:lstStyle/>
-          <a:p>
-            <a:pPr algn="l">
-              <a:lnSpc>
-                <a:spcPct val="110000"/>
-              </a:lnSpc>
-            </a:pPr>
-            <a:r>
-              <a:rPr sz="1800" b="1">
-                <a:solidFill>
-                  <a:srgbClr val="0070C0"/>
-                </a:solidFill>
-                <a:latin typeface="Arial"/>
-                <a:ea typeface="微软雅黑"/>
-              </a:rPr>
-              <a:t>杀掉 1/3 实例并停机 180 s，系统仍在 784 s 内完成全部绑定</a:t>
-            </a:r>
-          </a:p>
-        </p:txBody>
-      </p:sp>
-      <p:pic>
-        <p:nvPicPr>
-          <p:cNvPr id="9004" name="Picture 9003" descr="fig6-29b-layer3-timeseries.png"/>
-          <p:cNvPicPr>
-            <a:picLocks noChangeAspect="1"/>
-          </p:cNvPicPr>
-          <p:nvPr/>
-        </p:nvPicPr>
-        <p:blipFill>
-          <a:blip r:embed="rId3"/>
-          <a:stretch>
-            <a:fillRect/>
-          </a:stretch>
-        </p:blipFill>
-        <p:spPr>
-          <a:xfrm>
-            <a:off x="5806440" y="2657246"/>
-            <a:ext cx="5852160" cy="2457907"/>
-          </a:xfrm>
-          <a:prstGeom prst="rect">
-            <a:avLst/>
-          </a:prstGeom>
-        </p:spPr>
-      </p:pic>
-      <p:sp>
-        <p:nvSpPr>
-          <p:cNvPr id="9005" name="TextBox 9004"/>
-          <p:cNvSpPr txBox="1"/>
-          <p:nvPr/>
-        </p:nvSpPr>
-        <p:spPr>
-          <a:xfrm>
-            <a:off x="566928" y="2011680"/>
-            <a:ext cx="5029200" cy="1417320"/>
-          </a:xfrm>
-          <a:prstGeom prst="rect">
-            <a:avLst/>
-          </a:prstGeom>
-          <a:noFill/>
-        </p:spPr>
-        <p:txBody>
-          <a:bodyPr wrap="square" anchor="t" lIns="0" rIns="0" tIns="0" bIns="0">
-            <a:spAutoFit/>
-          </a:bodyPr>
-          <a:lstStyle/>
-          <a:p>
-            <a:pPr algn="l">
-              <a:lnSpc>
-                <a:spcPct val="115000"/>
-              </a:lnSpc>
-            </a:pPr>
-            <a:r>
-              <a:rPr sz="1550" b="0">
-                <a:solidFill>
-                  <a:srgbClr val="2E2C2C"/>
-                </a:solidFill>
-                <a:latin typeface="Arial"/>
-                <a:ea typeface="微软雅黑"/>
-              </a:rPr>
-              <a:t>▪  被杀实例绑定占比 68/8407 = 0.81%</a:t>
-            </a:r>
-          </a:p>
-          <a:p>
-            <a:pPr algn="l">
-              <a:lnSpc>
-                <a:spcPct val="115000"/>
-              </a:lnSpc>
-              <a:spcBef>
-                <a:spcPts val="1400"/>
-              </a:spcBef>
-            </a:pPr>
-            <a:r>
-              <a:rPr sz="1550" b="0">
-                <a:solidFill>
-                  <a:srgbClr val="2E2C2C"/>
-                </a:solidFill>
-                <a:latin typeface="Arial"/>
-                <a:ea typeface="微软雅黑"/>
-              </a:rPr>
-              <a:t>▪  存活实例接管 8407 pods；pending 353→2</a:t>
-            </a:r>
-          </a:p>
-          <a:p>
-            <a:pPr algn="l">
-              <a:lnSpc>
-                <a:spcPct val="115000"/>
-              </a:lnSpc>
-              <a:spcBef>
-                <a:spcPts val="1400"/>
-              </a:spcBef>
-            </a:pPr>
-            <a:r>
-              <a:rPr sz="1550" b="0">
-                <a:solidFill>
-                  <a:srgbClr val="2E2C2C"/>
-                </a:solidFill>
-                <a:latin typeface="Arial"/>
-                <a:ea typeface="微软雅黑"/>
-              </a:rPr>
-              <a:t>▪  总耗时 784 s，较基线 +15.3%</a:t>
-            </a:r>
-          </a:p>
-        </p:txBody>
-      </p:sp>
-      <p:sp>
-        <p:nvSpPr>
-          <p:cNvPr id="9006" name="TextBox 9005"/>
-          <p:cNvSpPr txBox="1"/>
-          <p:nvPr/>
-        </p:nvSpPr>
-        <p:spPr>
-          <a:xfrm>
-            <a:off x="566928" y="6309360"/>
-            <a:ext cx="10104120" cy="201168"/>
-          </a:xfrm>
-          <a:prstGeom prst="rect">
-            <a:avLst/>
-          </a:prstGeom>
-          <a:noFill/>
-        </p:spPr>
-        <p:txBody>
-          <a:bodyPr wrap="square" anchor="t" lIns="0" rIns="0" tIns="0" bIns="0">
-            <a:spAutoFit/>
-          </a:bodyPr>
-          <a:lstStyle/>
-          <a:p>
-            <a:pPr algn="l"/>
-            <a:r>
-              <a:rPr sz="850" b="0">
-                <a:solidFill>
-                  <a:srgbClr val="636363"/>
-                </a:solidFill>
-                <a:latin typeface="Arial"/>
-                <a:ea typeface="微软雅黑"/>
-              </a:rPr>
-              <a:t>编码：s1–s4 = 100 / 1000 / 5000 / 10000 节点；w1–w7 = 负载强度（w2 500、w3 1000、w4 2000 pods/s 极限、w5 突发、w6 Gang、w7 异构）；inst3 = 3 实例</a:t>
-            </a:r>
-          </a:p>
-        </p:txBody>
-      </p:sp>
-      <p:sp>
-        <p:nvSpPr>
-          <p:cNvPr id="9007" name="TextBox 9006"/>
-          <p:cNvSpPr txBox="1"/>
-          <p:nvPr/>
-        </p:nvSpPr>
-        <p:spPr>
-          <a:xfrm>
-            <a:off x="10780776" y="6345936"/>
-            <a:ext cx="850392" cy="219456"/>
-          </a:xfrm>
-          <a:prstGeom prst="rect">
-            <a:avLst/>
-          </a:prstGeom>
-          <a:noFill/>
-        </p:spPr>
-        <p:txBody>
-          <a:bodyPr wrap="square" anchor="t" lIns="0" rIns="0" tIns="0" bIns="0">
-            <a:spAutoFit/>
-          </a:bodyPr>
-          <a:lstStyle/>
-          <a:p>
-            <a:pPr algn="r"/>
-            <a:r>
-              <a:rPr sz="950" b="0">
-                <a:solidFill>
-                  <a:srgbClr val="636363"/>
-                </a:solidFill>
-                <a:latin typeface="Arial"/>
-                <a:ea typeface="微软雅黑"/>
-              </a:rPr>
-              <a:t>16 / 25</a:t>
-            </a:r>
-          </a:p>
-        </p:txBody>
-      </p:sp>
-    </p:spTree>
-  </p:cSld>
-  <p:clrMapOvr>
-    <a:masterClrMapping/>
-  </p:clrMapOvr>
-</p:sld>
-</file>
-
-<file path=ppt/slides/slide17.xml><?xml version="1.0" encoding="utf-8"?>
-<p:sld xmlns:a="http://schemas.openxmlformats.org/drawingml/2006/main" xmlns:p="http://schemas.openxmlformats.org/presentationml/2006/main" xmlns:r="http://schemas.openxmlformats.org/officeDocument/2006/relationships">
-  <p:cSld>
-    <p:bg>
-      <p:bgPr>
-        <a:solidFill>
-          <a:srgbClr val="FFFFFF"/>
-        </a:solidFill>
-        <a:effectLst/>
-      </p:bgPr>
-    </p:bg>
-    <p:spTree>
-      <p:nvGrpSpPr>
-        <p:cNvPr id="1" name=""/>
-        <p:cNvGrpSpPr/>
-        <p:nvPr/>
-      </p:nvGrpSpPr>
-      <p:grpSpPr/>
-      <p:sp>
-        <p:nvSpPr>
-          <p:cNvPr id="9000" name="Freeform 5"/>
-          <p:cNvSpPr/>
-          <p:nvPr/>
-        </p:nvSpPr>
-        <p:spPr>
-          <a:xfrm>
-            <a:off x="182880" y="274320"/>
-            <a:ext cx="310896" cy="402336"/>
-          </a:xfrm>
-          <a:custGeom>
-            <a:avLst/>
-            <a:gdLst/>
-            <a:ahLst/>
-            <a:cxnLst>
-              <a:cxn ang="0">
-                <a:pos x="2147483647" y="2147483647"/>
-              </a:cxn>
-              <a:cxn ang="0">
-                <a:pos x="2147483647" y="2147483647"/>
-              </a:cxn>
-              <a:cxn ang="0">
-                <a:pos x="2147483647" y="2147483647"/>
-              </a:cxn>
-              <a:cxn ang="0">
-                <a:pos x="2147483647" y="2147483647"/>
-              </a:cxn>
-              <a:cxn ang="0">
-                <a:pos x="2147483647" y="2147483647"/>
-              </a:cxn>
-              <a:cxn ang="0">
-                <a:pos x="2147483647" y="2147483647"/>
-              </a:cxn>
-              <a:cxn ang="0">
-                <a:pos x="2147483647" y="2147483647"/>
-              </a:cxn>
-              <a:cxn ang="0">
-                <a:pos x="2147483647" y="2147483647"/>
-              </a:cxn>
-              <a:cxn ang="0">
-                <a:pos x="2147483647" y="0"/>
-              </a:cxn>
-              <a:cxn ang="0">
-                <a:pos x="2147483647" y="2147483647"/>
-              </a:cxn>
-              <a:cxn ang="0">
-                <a:pos x="2147483647" y="2147483647"/>
-              </a:cxn>
-              <a:cxn ang="0">
-                <a:pos x="2147483647" y="2147483647"/>
-              </a:cxn>
-              <a:cxn ang="0">
-                <a:pos x="2147483647" y="2147483647"/>
-              </a:cxn>
-              <a:cxn ang="0">
-                <a:pos x="2147483647" y="2147483647"/>
-              </a:cxn>
-              <a:cxn ang="0">
-                <a:pos x="2147483647" y="2147483647"/>
-              </a:cxn>
-              <a:cxn ang="0">
-                <a:pos x="2147483647" y="2147483647"/>
-              </a:cxn>
-              <a:cxn ang="0">
-                <a:pos x="2147483647" y="2147483647"/>
-              </a:cxn>
-              <a:cxn ang="0">
-                <a:pos x="2147483647" y="2147483647"/>
-              </a:cxn>
-              <a:cxn ang="0">
-                <a:pos x="2147483647" y="2147483647"/>
-              </a:cxn>
-              <a:cxn ang="0">
-                <a:pos x="0" y="2147483647"/>
-              </a:cxn>
-              <a:cxn ang="0">
-                <a:pos x="2147483647" y="2147483647"/>
-              </a:cxn>
-            </a:cxnLst>
-            <a:rect l="0" t="0" r="0" b="0"/>
-            <a:pathLst>
-              <a:path w="574" h="681">
-                <a:moveTo>
-                  <a:pt x="120" y="441"/>
-                </a:moveTo>
-                <a:cubicBezTo>
-                  <a:pt x="153" y="441"/>
-                  <a:pt x="183" y="454"/>
-                  <a:pt x="205" y="476"/>
-                </a:cubicBezTo>
-                <a:lnTo>
-                  <a:pt x="389" y="329"/>
-                </a:lnTo>
-                <a:cubicBezTo>
-                  <a:pt x="383" y="317"/>
-                  <a:pt x="380" y="303"/>
-                  <a:pt x="380" y="289"/>
-                </a:cubicBezTo>
-                <a:cubicBezTo>
-                  <a:pt x="380" y="271"/>
-                  <a:pt x="384" y="255"/>
-                  <a:pt x="392" y="241"/>
-                </a:cubicBezTo>
-                <a:lnTo>
-                  <a:pt x="270" y="138"/>
-                </a:lnTo>
-                <a:cubicBezTo>
-                  <a:pt x="256" y="151"/>
-                  <a:pt x="237" y="159"/>
-                  <a:pt x="217" y="159"/>
-                </a:cubicBezTo>
-                <a:cubicBezTo>
-                  <a:pt x="173" y="159"/>
-                  <a:pt x="137" y="123"/>
-                  <a:pt x="137" y="79"/>
-                </a:cubicBezTo>
-                <a:cubicBezTo>
-                  <a:pt x="137" y="36"/>
-                  <a:pt x="173" y="0"/>
-                  <a:pt x="217" y="0"/>
-                </a:cubicBezTo>
-                <a:cubicBezTo>
-                  <a:pt x="260" y="0"/>
-                  <a:pt x="296" y="36"/>
-                  <a:pt x="296" y="79"/>
-                </a:cubicBezTo>
-                <a:cubicBezTo>
-                  <a:pt x="296" y="91"/>
-                  <a:pt x="293" y="103"/>
-                  <a:pt x="289" y="113"/>
-                </a:cubicBezTo>
-                <a:lnTo>
-                  <a:pt x="412" y="217"/>
-                </a:lnTo>
-                <a:cubicBezTo>
-                  <a:pt x="429" y="201"/>
-                  <a:pt x="452" y="192"/>
-                  <a:pt x="477" y="192"/>
-                </a:cubicBezTo>
-                <a:cubicBezTo>
-                  <a:pt x="530" y="192"/>
-                  <a:pt x="574" y="235"/>
-                  <a:pt x="574" y="289"/>
-                </a:cubicBezTo>
-                <a:cubicBezTo>
-                  <a:pt x="574" y="342"/>
-                  <a:pt x="530" y="386"/>
-                  <a:pt x="477" y="386"/>
-                </a:cubicBezTo>
-                <a:cubicBezTo>
-                  <a:pt x="449" y="386"/>
-                  <a:pt x="424" y="374"/>
-                  <a:pt x="406" y="355"/>
-                </a:cubicBezTo>
-                <a:lnTo>
-                  <a:pt x="224" y="501"/>
-                </a:lnTo>
-                <a:cubicBezTo>
-                  <a:pt x="234" y="518"/>
-                  <a:pt x="240" y="539"/>
-                  <a:pt x="240" y="561"/>
-                </a:cubicBezTo>
-                <a:cubicBezTo>
-                  <a:pt x="240" y="627"/>
-                  <a:pt x="186" y="681"/>
-                  <a:pt x="120" y="681"/>
-                </a:cubicBezTo>
-                <a:cubicBezTo>
-                  <a:pt x="54" y="681"/>
-                  <a:pt x="0" y="627"/>
-                  <a:pt x="0" y="561"/>
-                </a:cubicBezTo>
-                <a:cubicBezTo>
-                  <a:pt x="0" y="495"/>
-                  <a:pt x="54" y="441"/>
-                  <a:pt x="120" y="441"/>
-                </a:cubicBezTo>
-                <a:close/>
-              </a:path>
-            </a:pathLst>
-          </a:custGeom>
-          <a:solidFill>
-            <a:srgbClr val="113E6A"/>
-          </a:solidFill>
-          <a:ln w="9525">
-            <a:noFill/>
-          </a:ln>
-        </p:spPr>
-        <p:txBody>
-          <a:bodyPr/>
-          <a:lstStyle/>
-          <a:p>
-            <a:endParaRPr lang="zh-CN" altLang="en-US"/>
-          </a:p>
-        </p:txBody>
-      </p:sp>
-      <p:pic>
-        <p:nvPicPr>
-          <p:cNvPr id="9001" name="Picture 9000" descr="beihang-logo-navy.png"/>
-          <p:cNvPicPr>
-            <a:picLocks noChangeAspect="1"/>
-          </p:cNvPicPr>
-          <p:nvPr/>
-        </p:nvPicPr>
-        <p:blipFill>
-          <a:blip r:embed="rId2"/>
-          <a:stretch>
-            <a:fillRect/>
-          </a:stretch>
-        </p:blipFill>
-        <p:spPr>
-          <a:xfrm>
-            <a:off x="9336024" y="91665"/>
-            <a:ext cx="2642616" cy="502469"/>
-          </a:xfrm>
-          <a:prstGeom prst="rect">
-            <a:avLst/>
-          </a:prstGeom>
-        </p:spPr>
-      </p:pic>
-      <p:sp>
-        <p:nvSpPr>
-          <p:cNvPr id="9002" name="TextBox 9001"/>
-          <p:cNvSpPr txBox="1"/>
-          <p:nvPr/>
-        </p:nvSpPr>
-        <p:spPr>
-          <a:xfrm>
-            <a:off x="566928" y="155448"/>
-            <a:ext cx="8549640" cy="621792"/>
-          </a:xfrm>
-          <a:prstGeom prst="rect">
-            <a:avLst/>
-          </a:prstGeom>
-          <a:noFill/>
-        </p:spPr>
-        <p:txBody>
-          <a:bodyPr wrap="square" anchor="ctr" lIns="0" rIns="0" tIns="0" bIns="0">
-            <a:spAutoFit/>
-          </a:bodyPr>
-          <a:lstStyle/>
-          <a:p>
-            <a:pPr algn="l">
-              <a:lnSpc>
-                <a:spcPct val="100000"/>
-              </a:lnSpc>
-            </a:pPr>
-            <a:r>
-              <a:rPr sz="3000" b="1">
-                <a:solidFill>
-                  <a:srgbClr val="113E6A"/>
-                </a:solidFill>
-                <a:latin typeface="Arial"/>
-                <a:ea typeface="微软雅黑"/>
-              </a:rPr>
               <a:t>五组基线</a:t>
             </a:r>
           </a:p>
@@ -14712,7 +13706,7 @@
                 <a:latin typeface="Arial"/>
                 <a:ea typeface="微软雅黑"/>
               </a:rPr>
-              <a:t>17 / 25</a:t>
+              <a:t>15 / 25</a:t>
             </a:r>
           </a:p>
         </p:txBody>
@@ -14725,7 +13719,7 @@
 </p:sld>
 </file>
 
-<file path=ppt/slides/slide18.xml><?xml version="1.0" encoding="utf-8"?>
+<file path=ppt/slides/slide16.xml><?xml version="1.0" encoding="utf-8"?>
 <p:sld xmlns:a="http://schemas.openxmlformats.org/drawingml/2006/main" xmlns:p="http://schemas.openxmlformats.org/presentationml/2006/main" xmlns:r="http://schemas.openxmlformats.org/officeDocument/2006/relationships">
   <p:cSld>
     <p:bg>
@@ -15215,7 +14209,7 @@
                 <a:latin typeface="Arial"/>
                 <a:ea typeface="微软雅黑"/>
               </a:rPr>
-              <a:t>18 / 25</a:t>
+              <a:t>16 / 25</a:t>
             </a:r>
           </a:p>
         </p:txBody>
@@ -15228,7 +14222,7 @@
 </p:sld>
 </file>
 
-<file path=ppt/slides/slide19.xml><?xml version="1.0" encoding="utf-8"?>
+<file path=ppt/slides/slide17.xml><?xml version="1.0" encoding="utf-8"?>
 <p:sld xmlns:a="http://schemas.openxmlformats.org/drawingml/2006/main" xmlns:p="http://schemas.openxmlformats.org/presentationml/2006/main" xmlns:r="http://schemas.openxmlformats.org/officeDocument/2006/relationships">
   <p:cSld>
     <p:bg>
@@ -15718,7 +14712,7 @@
                 <a:latin typeface="Arial"/>
                 <a:ea typeface="微软雅黑"/>
               </a:rPr>
-              <a:t>19 / 25</a:t>
+              <a:t>17 / 25</a:t>
             </a:r>
           </a:p>
         </p:txBody>
@@ -15731,878 +14725,7 @@
 </p:sld>
 </file>
 
-<file path=ppt/slides/slide2.xml><?xml version="1.0" encoding="utf-8"?>
-<p:sld xmlns:a="http://schemas.openxmlformats.org/drawingml/2006/main" xmlns:p="http://schemas.openxmlformats.org/presentationml/2006/main" xmlns:r="http://schemas.openxmlformats.org/officeDocument/2006/relationships">
-  <p:cSld>
-    <p:bg>
-      <p:bgPr>
-        <a:solidFill>
-          <a:srgbClr val="FFFFFF"/>
-        </a:solidFill>
-        <a:effectLst/>
-      </p:bgPr>
-    </p:bg>
-    <p:spTree>
-      <p:nvGrpSpPr>
-        <p:cNvPr id="1" name=""/>
-        <p:cNvGrpSpPr/>
-        <p:nvPr/>
-      </p:nvGrpSpPr>
-      <p:grpSpPr/>
-      <p:sp>
-        <p:nvSpPr>
-          <p:cNvPr id="9000" name="Freeform 5"/>
-          <p:cNvSpPr/>
-          <p:nvPr/>
-        </p:nvSpPr>
-        <p:spPr>
-          <a:xfrm>
-            <a:off x="182880" y="274320"/>
-            <a:ext cx="310896" cy="402336"/>
-          </a:xfrm>
-          <a:custGeom>
-            <a:avLst/>
-            <a:gdLst/>
-            <a:ahLst/>
-            <a:cxnLst>
-              <a:cxn ang="0">
-                <a:pos x="2147483647" y="2147483647"/>
-              </a:cxn>
-              <a:cxn ang="0">
-                <a:pos x="2147483647" y="2147483647"/>
-              </a:cxn>
-              <a:cxn ang="0">
-                <a:pos x="2147483647" y="2147483647"/>
-              </a:cxn>
-              <a:cxn ang="0">
-                <a:pos x="2147483647" y="2147483647"/>
-              </a:cxn>
-              <a:cxn ang="0">
-                <a:pos x="2147483647" y="2147483647"/>
-              </a:cxn>
-              <a:cxn ang="0">
-                <a:pos x="2147483647" y="2147483647"/>
-              </a:cxn>
-              <a:cxn ang="0">
-                <a:pos x="2147483647" y="2147483647"/>
-              </a:cxn>
-              <a:cxn ang="0">
-                <a:pos x="2147483647" y="2147483647"/>
-              </a:cxn>
-              <a:cxn ang="0">
-                <a:pos x="2147483647" y="0"/>
-              </a:cxn>
-              <a:cxn ang="0">
-                <a:pos x="2147483647" y="2147483647"/>
-              </a:cxn>
-              <a:cxn ang="0">
-                <a:pos x="2147483647" y="2147483647"/>
-              </a:cxn>
-              <a:cxn ang="0">
-                <a:pos x="2147483647" y="2147483647"/>
-              </a:cxn>
-              <a:cxn ang="0">
-                <a:pos x="2147483647" y="2147483647"/>
-              </a:cxn>
-              <a:cxn ang="0">
-                <a:pos x="2147483647" y="2147483647"/>
-              </a:cxn>
-              <a:cxn ang="0">
-                <a:pos x="2147483647" y="2147483647"/>
-              </a:cxn>
-              <a:cxn ang="0">
-                <a:pos x="2147483647" y="2147483647"/>
-              </a:cxn>
-              <a:cxn ang="0">
-                <a:pos x="2147483647" y="2147483647"/>
-              </a:cxn>
-              <a:cxn ang="0">
-                <a:pos x="2147483647" y="2147483647"/>
-              </a:cxn>
-              <a:cxn ang="0">
-                <a:pos x="2147483647" y="2147483647"/>
-              </a:cxn>
-              <a:cxn ang="0">
-                <a:pos x="0" y="2147483647"/>
-              </a:cxn>
-              <a:cxn ang="0">
-                <a:pos x="2147483647" y="2147483647"/>
-              </a:cxn>
-            </a:cxnLst>
-            <a:rect l="0" t="0" r="0" b="0"/>
-            <a:pathLst>
-              <a:path w="574" h="681">
-                <a:moveTo>
-                  <a:pt x="120" y="441"/>
-                </a:moveTo>
-                <a:cubicBezTo>
-                  <a:pt x="153" y="441"/>
-                  <a:pt x="183" y="454"/>
-                  <a:pt x="205" y="476"/>
-                </a:cubicBezTo>
-                <a:lnTo>
-                  <a:pt x="389" y="329"/>
-                </a:lnTo>
-                <a:cubicBezTo>
-                  <a:pt x="383" y="317"/>
-                  <a:pt x="380" y="303"/>
-                  <a:pt x="380" y="289"/>
-                </a:cubicBezTo>
-                <a:cubicBezTo>
-                  <a:pt x="380" y="271"/>
-                  <a:pt x="384" y="255"/>
-                  <a:pt x="392" y="241"/>
-                </a:cubicBezTo>
-                <a:lnTo>
-                  <a:pt x="270" y="138"/>
-                </a:lnTo>
-                <a:cubicBezTo>
-                  <a:pt x="256" y="151"/>
-                  <a:pt x="237" y="159"/>
-                  <a:pt x="217" y="159"/>
-                </a:cubicBezTo>
-                <a:cubicBezTo>
-                  <a:pt x="173" y="159"/>
-                  <a:pt x="137" y="123"/>
-                  <a:pt x="137" y="79"/>
-                </a:cubicBezTo>
-                <a:cubicBezTo>
-                  <a:pt x="137" y="36"/>
-                  <a:pt x="173" y="0"/>
-                  <a:pt x="217" y="0"/>
-                </a:cubicBezTo>
-                <a:cubicBezTo>
-                  <a:pt x="260" y="0"/>
-                  <a:pt x="296" y="36"/>
-                  <a:pt x="296" y="79"/>
-                </a:cubicBezTo>
-                <a:cubicBezTo>
-                  <a:pt x="296" y="91"/>
-                  <a:pt x="293" y="103"/>
-                  <a:pt x="289" y="113"/>
-                </a:cubicBezTo>
-                <a:lnTo>
-                  <a:pt x="412" y="217"/>
-                </a:lnTo>
-                <a:cubicBezTo>
-                  <a:pt x="429" y="201"/>
-                  <a:pt x="452" y="192"/>
-                  <a:pt x="477" y="192"/>
-                </a:cubicBezTo>
-                <a:cubicBezTo>
-                  <a:pt x="530" y="192"/>
-                  <a:pt x="574" y="235"/>
-                  <a:pt x="574" y="289"/>
-                </a:cubicBezTo>
-                <a:cubicBezTo>
-                  <a:pt x="574" y="342"/>
-                  <a:pt x="530" y="386"/>
-                  <a:pt x="477" y="386"/>
-                </a:cubicBezTo>
-                <a:cubicBezTo>
-                  <a:pt x="449" y="386"/>
-                  <a:pt x="424" y="374"/>
-                  <a:pt x="406" y="355"/>
-                </a:cubicBezTo>
-                <a:lnTo>
-                  <a:pt x="224" y="501"/>
-                </a:lnTo>
-                <a:cubicBezTo>
-                  <a:pt x="234" y="518"/>
-                  <a:pt x="240" y="539"/>
-                  <a:pt x="240" y="561"/>
-                </a:cubicBezTo>
-                <a:cubicBezTo>
-                  <a:pt x="240" y="627"/>
-                  <a:pt x="186" y="681"/>
-                  <a:pt x="120" y="681"/>
-                </a:cubicBezTo>
-                <a:cubicBezTo>
-                  <a:pt x="54" y="681"/>
-                  <a:pt x="0" y="627"/>
-                  <a:pt x="0" y="561"/>
-                </a:cubicBezTo>
-                <a:cubicBezTo>
-                  <a:pt x="0" y="495"/>
-                  <a:pt x="54" y="441"/>
-                  <a:pt x="120" y="441"/>
-                </a:cubicBezTo>
-                <a:close/>
-              </a:path>
-            </a:pathLst>
-          </a:custGeom>
-          <a:solidFill>
-            <a:srgbClr val="113E6A"/>
-          </a:solidFill>
-          <a:ln w="9525">
-            <a:noFill/>
-          </a:ln>
-        </p:spPr>
-        <p:txBody>
-          <a:bodyPr/>
-          <a:lstStyle/>
-          <a:p>
-            <a:endParaRPr lang="zh-CN" altLang="en-US"/>
-          </a:p>
-        </p:txBody>
-      </p:sp>
-      <p:pic>
-        <p:nvPicPr>
-          <p:cNvPr id="9001" name="Picture 9000" descr="beihang-logo-navy.png"/>
-          <p:cNvPicPr>
-            <a:picLocks noChangeAspect="1"/>
-          </p:cNvPicPr>
-          <p:nvPr/>
-        </p:nvPicPr>
-        <p:blipFill>
-          <a:blip r:embed="rId2"/>
-          <a:stretch>
-            <a:fillRect/>
-          </a:stretch>
-        </p:blipFill>
-        <p:spPr>
-          <a:xfrm>
-            <a:off x="9336024" y="91665"/>
-            <a:ext cx="2642616" cy="502469"/>
-          </a:xfrm>
-          <a:prstGeom prst="rect">
-            <a:avLst/>
-          </a:prstGeom>
-        </p:spPr>
-      </p:pic>
-      <p:sp>
-        <p:nvSpPr>
-          <p:cNvPr id="9002" name="TextBox 9001"/>
-          <p:cNvSpPr txBox="1"/>
-          <p:nvPr/>
-        </p:nvSpPr>
-        <p:spPr>
-          <a:xfrm>
-            <a:off x="566928" y="155448"/>
-            <a:ext cx="8549640" cy="621792"/>
-          </a:xfrm>
-          <a:prstGeom prst="rect">
-            <a:avLst/>
-          </a:prstGeom>
-          <a:noFill/>
-        </p:spPr>
-        <p:txBody>
-          <a:bodyPr wrap="square" anchor="ctr" lIns="0" rIns="0" tIns="0" bIns="0">
-            <a:spAutoFit/>
-          </a:bodyPr>
-          <a:lstStyle/>
-          <a:p>
-            <a:pPr algn="l">
-              <a:lnSpc>
-                <a:spcPct val="100000"/>
-              </a:lnSpc>
-            </a:pPr>
-            <a:r>
-              <a:rPr sz="3000" b="1">
-                <a:solidFill>
-                  <a:srgbClr val="113E6A"/>
-                </a:solidFill>
-                <a:latin typeface="Arial"/>
-                <a:ea typeface="微软雅黑"/>
-              </a:rPr>
-              <a:t>研究背景</a:t>
-            </a:r>
-          </a:p>
-        </p:txBody>
-      </p:sp>
-      <p:sp>
-        <p:nvSpPr>
-          <p:cNvPr id="9003" name="TextBox 9002"/>
-          <p:cNvSpPr txBox="1"/>
-          <p:nvPr/>
-        </p:nvSpPr>
-        <p:spPr>
-          <a:xfrm>
-            <a:off x="566928" y="1261872"/>
-            <a:ext cx="10881360" cy="438912"/>
-          </a:xfrm>
-          <a:prstGeom prst="rect">
-            <a:avLst/>
-          </a:prstGeom>
-          <a:noFill/>
-        </p:spPr>
-        <p:txBody>
-          <a:bodyPr wrap="square" anchor="ctr" lIns="0" rIns="0" tIns="0" bIns="0">
-            <a:spAutoFit/>
-          </a:bodyPr>
-          <a:lstStyle/>
-          <a:p>
-            <a:pPr algn="l">
-              <a:lnSpc>
-                <a:spcPct val="110000"/>
-              </a:lnSpc>
-            </a:pPr>
-            <a:r>
-              <a:rPr sz="1800" b="1">
-                <a:solidFill>
-                  <a:srgbClr val="0070C0"/>
-                </a:solidFill>
-                <a:latin typeface="Arial"/>
-                <a:ea typeface="微软雅黑"/>
-              </a:rPr>
-              <a:t>生产集群进入万节点量级，单实例架构在吞吐与高可用上同时受制</a:t>
-            </a:r>
-          </a:p>
-        </p:txBody>
-      </p:sp>
-      <p:sp>
-        <p:nvSpPr>
-          <p:cNvPr id="9004" name="TextBox 9003"/>
-          <p:cNvSpPr txBox="1"/>
-          <p:nvPr/>
-        </p:nvSpPr>
-        <p:spPr>
-          <a:xfrm>
-            <a:off x="566928" y="1783080"/>
-            <a:ext cx="10881360" cy="1234440"/>
-          </a:xfrm>
-          <a:prstGeom prst="rect">
-            <a:avLst/>
-          </a:prstGeom>
-          <a:noFill/>
-        </p:spPr>
-        <p:txBody>
-          <a:bodyPr wrap="square" anchor="t" lIns="0" rIns="0" tIns="0" bIns="0">
-            <a:spAutoFit/>
-          </a:bodyPr>
-          <a:lstStyle/>
-          <a:p>
-            <a:pPr algn="l">
-              <a:lnSpc>
-                <a:spcPct val="135000"/>
-              </a:lnSpc>
-            </a:pPr>
-            <a:r>
-              <a:rPr sz="1500" b="0">
-                <a:solidFill>
-                  <a:srgbClr val="2E2C2C"/>
-                </a:solidFill>
-                <a:latin typeface="Arial"/>
-                <a:ea typeface="微软雅黑"/>
-              </a:rPr>
-              <a:t>Kubernetes 已成为云原生的事实标准，调度器处在 Pod 生命周期的关键路径上：它的吞吐与延迟直接决定集群资源利用率与业务响应速度。千节点规模下单实例尚可支撑，集群进入万节点量级后，三个瓶颈同时显现。</a:t>
-            </a:r>
-          </a:p>
-        </p:txBody>
-      </p:sp>
-      <p:sp>
-        <p:nvSpPr>
-          <p:cNvPr id="9005" name="Rounded Rectangle 9004"/>
-          <p:cNvSpPr/>
-          <p:nvPr/>
-        </p:nvSpPr>
-        <p:spPr>
-          <a:xfrm>
-            <a:off x="566928" y="2880360"/>
-            <a:ext cx="3517391" cy="2103120"/>
-          </a:xfrm>
-          <a:prstGeom prst="roundRect">
-            <a:avLst/>
-          </a:prstGeom>
-          <a:solidFill>
-            <a:srgbClr val="FFFFFF"/>
-          </a:solidFill>
-          <a:ln w="9525">
-            <a:solidFill>
-              <a:srgbClr val="D6E3F0"/>
-            </a:solidFill>
-          </a:ln>
-          <a:effectLst/>
-        </p:spPr>
-        <p:style>
-          <a:lnRef idx="1">
-            <a:schemeClr val="accent1"/>
-          </a:lnRef>
-          <a:fillRef idx="3">
-            <a:schemeClr val="accent1"/>
-          </a:fillRef>
-          <a:effectRef idx="2">
-            <a:schemeClr val="accent1"/>
-          </a:effectRef>
-          <a:fontRef idx="minor">
-            <a:schemeClr val="lt1"/>
-          </a:fontRef>
-        </p:style>
-        <p:txBody>
-          <a:bodyPr rtlCol="0" anchor="ctr"/>
-          <a:lstStyle/>
-          <a:p>
-            <a:pPr algn="ctr"/>
-          </a:p>
-        </p:txBody>
-      </p:sp>
-      <p:sp>
-        <p:nvSpPr>
-          <p:cNvPr id="9006" name="Oval 9005"/>
-          <p:cNvSpPr/>
-          <p:nvPr/>
-        </p:nvSpPr>
-        <p:spPr>
-          <a:xfrm>
-            <a:off x="713232" y="3017520"/>
-            <a:ext cx="274320" cy="274320"/>
-          </a:xfrm>
-          <a:prstGeom prst="ellipse">
-            <a:avLst/>
-          </a:prstGeom>
-          <a:solidFill>
-            <a:srgbClr val="113E6A"/>
-          </a:solidFill>
-          <a:ln>
-            <a:noFill/>
-          </a:ln>
-          <a:effectLst/>
-        </p:spPr>
-        <p:style>
-          <a:lnRef idx="1">
-            <a:schemeClr val="accent1"/>
-          </a:lnRef>
-          <a:fillRef idx="3">
-            <a:schemeClr val="accent1"/>
-          </a:fillRef>
-          <a:effectRef idx="2">
-            <a:schemeClr val="accent1"/>
-          </a:effectRef>
-          <a:fontRef idx="minor">
-            <a:schemeClr val="lt1"/>
-          </a:fontRef>
-        </p:style>
-        <p:txBody>
-          <a:bodyPr rtlCol="0" anchor="ctr" lIns="0" rIns="0" tIns="0" bIns="0"/>
-          <a:lstStyle/>
-          <a:p>
-            <a:pPr algn="ctr"/>
-            <a:r>
-              <a:rPr sz="1000" b="1">
-                <a:solidFill>
-                  <a:srgbClr val="FFFFFF"/>
-                </a:solidFill>
-                <a:latin typeface="Arial"/>
-                <a:ea typeface="微软雅黑"/>
-              </a:rPr>
-              <a:t>01</a:t>
-            </a:r>
-          </a:p>
-        </p:txBody>
-      </p:sp>
-      <p:sp>
-        <p:nvSpPr>
-          <p:cNvPr id="9007" name="TextBox 9006"/>
-          <p:cNvSpPr txBox="1"/>
-          <p:nvPr/>
-        </p:nvSpPr>
-        <p:spPr>
-          <a:xfrm>
-            <a:off x="1078992" y="3017520"/>
-            <a:ext cx="2877312" cy="1901951"/>
-          </a:xfrm>
-          <a:prstGeom prst="rect">
-            <a:avLst/>
-          </a:prstGeom>
-          <a:noFill/>
-        </p:spPr>
-        <p:txBody>
-          <a:bodyPr wrap="square" anchor="ctr" lIns="0" rIns="0" tIns="0" bIns="0">
-            <a:spAutoFit/>
-          </a:bodyPr>
-          <a:lstStyle/>
-          <a:p>
-            <a:pPr algn="l"/>
-            <a:r>
-              <a:rPr sz="1600" b="1">
-                <a:solidFill>
-                  <a:srgbClr val="113E6A"/>
-                </a:solidFill>
-                <a:latin typeface="Arial"/>
-                <a:ea typeface="微软雅黑"/>
-              </a:rPr>
-              <a:t>吞吐存在上限</a:t>
-            </a:r>
-          </a:p>
-          <a:p>
-            <a:pPr algn="l">
-              <a:lnSpc>
-                <a:spcPct val="115000"/>
-              </a:lnSpc>
-              <a:spcBef>
-                <a:spcPts val="500"/>
-              </a:spcBef>
-            </a:pPr>
-            <a:r>
-              <a:rPr sz="1500" b="0">
-                <a:solidFill>
-                  <a:srgbClr val="2E2C2C"/>
-                </a:solidFill>
-                <a:latin typeface="Arial"/>
-                <a:ea typeface="微软雅黑"/>
-              </a:rPr>
-              <a:t>activeQ 串行处理 Pod，大规模弹性伸缩与批任务启动被拖慢</a:t>
-            </a:r>
-          </a:p>
-        </p:txBody>
-      </p:sp>
-      <p:sp>
-        <p:nvSpPr>
-          <p:cNvPr id="9008" name="Rounded Rectangle 9007"/>
-          <p:cNvSpPr/>
-          <p:nvPr/>
-        </p:nvSpPr>
-        <p:spPr>
-          <a:xfrm>
-            <a:off x="4340351" y="2880360"/>
-            <a:ext cx="3517391" cy="2103120"/>
-          </a:xfrm>
-          <a:prstGeom prst="roundRect">
-            <a:avLst/>
-          </a:prstGeom>
-          <a:solidFill>
-            <a:srgbClr val="FFFFFF"/>
-          </a:solidFill>
-          <a:ln w="9525">
-            <a:solidFill>
-              <a:srgbClr val="D6E3F0"/>
-            </a:solidFill>
-          </a:ln>
-          <a:effectLst/>
-        </p:spPr>
-        <p:style>
-          <a:lnRef idx="1">
-            <a:schemeClr val="accent1"/>
-          </a:lnRef>
-          <a:fillRef idx="3">
-            <a:schemeClr val="accent1"/>
-          </a:fillRef>
-          <a:effectRef idx="2">
-            <a:schemeClr val="accent1"/>
-          </a:effectRef>
-          <a:fontRef idx="minor">
-            <a:schemeClr val="lt1"/>
-          </a:fontRef>
-        </p:style>
-        <p:txBody>
-          <a:bodyPr rtlCol="0" anchor="ctr"/>
-          <a:lstStyle/>
-          <a:p>
-            <a:pPr algn="ctr"/>
-          </a:p>
-        </p:txBody>
-      </p:sp>
-      <p:sp>
-        <p:nvSpPr>
-          <p:cNvPr id="9009" name="Oval 9008"/>
-          <p:cNvSpPr/>
-          <p:nvPr/>
-        </p:nvSpPr>
-        <p:spPr>
-          <a:xfrm>
-            <a:off x="4486656" y="3017520"/>
-            <a:ext cx="274320" cy="274320"/>
-          </a:xfrm>
-          <a:prstGeom prst="ellipse">
-            <a:avLst/>
-          </a:prstGeom>
-          <a:solidFill>
-            <a:srgbClr val="113E6A"/>
-          </a:solidFill>
-          <a:ln>
-            <a:noFill/>
-          </a:ln>
-          <a:effectLst/>
-        </p:spPr>
-        <p:style>
-          <a:lnRef idx="1">
-            <a:schemeClr val="accent1"/>
-          </a:lnRef>
-          <a:fillRef idx="3">
-            <a:schemeClr val="accent1"/>
-          </a:fillRef>
-          <a:effectRef idx="2">
-            <a:schemeClr val="accent1"/>
-          </a:effectRef>
-          <a:fontRef idx="minor">
-            <a:schemeClr val="lt1"/>
-          </a:fontRef>
-        </p:style>
-        <p:txBody>
-          <a:bodyPr rtlCol="0" anchor="ctr" lIns="0" rIns="0" tIns="0" bIns="0"/>
-          <a:lstStyle/>
-          <a:p>
-            <a:pPr algn="ctr"/>
-            <a:r>
-              <a:rPr sz="1000" b="1">
-                <a:solidFill>
-                  <a:srgbClr val="FFFFFF"/>
-                </a:solidFill>
-                <a:latin typeface="Arial"/>
-                <a:ea typeface="微软雅黑"/>
-              </a:rPr>
-              <a:t>02</a:t>
-            </a:r>
-          </a:p>
-        </p:txBody>
-      </p:sp>
-      <p:sp>
-        <p:nvSpPr>
-          <p:cNvPr id="9010" name="TextBox 9009"/>
-          <p:cNvSpPr txBox="1"/>
-          <p:nvPr/>
-        </p:nvSpPr>
-        <p:spPr>
-          <a:xfrm>
-            <a:off x="4852416" y="3017520"/>
-            <a:ext cx="2877312" cy="1901951"/>
-          </a:xfrm>
-          <a:prstGeom prst="rect">
-            <a:avLst/>
-          </a:prstGeom>
-          <a:noFill/>
-        </p:spPr>
-        <p:txBody>
-          <a:bodyPr wrap="square" anchor="ctr" lIns="0" rIns="0" tIns="0" bIns="0">
-            <a:spAutoFit/>
-          </a:bodyPr>
-          <a:lstStyle/>
-          <a:p>
-            <a:pPr algn="l"/>
-            <a:r>
-              <a:rPr sz="1600" b="1">
-                <a:solidFill>
-                  <a:srgbClr val="113E6A"/>
-                </a:solidFill>
-                <a:latin typeface="Arial"/>
-                <a:ea typeface="微软雅黑"/>
-              </a:rPr>
-              <a:t>尾延迟持续抬升</a:t>
-            </a:r>
-          </a:p>
-          <a:p>
-            <a:pPr algn="l">
-              <a:lnSpc>
-                <a:spcPct val="115000"/>
-              </a:lnSpc>
-              <a:spcBef>
-                <a:spcPts val="500"/>
-              </a:spcBef>
-            </a:pPr>
-            <a:r>
-              <a:rPr sz="1500" b="0">
-                <a:solidFill>
-                  <a:srgbClr val="2E2C2C"/>
-                </a:solidFill>
-                <a:latin typeface="Arial"/>
-                <a:ea typeface="微软雅黑"/>
-              </a:rPr>
-              <a:t>Filter/Score 遍历节点开销随规模线性上升，5000 节点下 P99 明显恶化</a:t>
-            </a:r>
-          </a:p>
-        </p:txBody>
-      </p:sp>
-      <p:sp>
-        <p:nvSpPr>
-          <p:cNvPr id="9011" name="Rounded Rectangle 9010"/>
-          <p:cNvSpPr/>
-          <p:nvPr/>
-        </p:nvSpPr>
-        <p:spPr>
-          <a:xfrm>
-            <a:off x="8113775" y="2880360"/>
-            <a:ext cx="3517391" cy="2103120"/>
-          </a:xfrm>
-          <a:prstGeom prst="roundRect">
-            <a:avLst/>
-          </a:prstGeom>
-          <a:solidFill>
-            <a:srgbClr val="FFFFFF"/>
-          </a:solidFill>
-          <a:ln w="9525">
-            <a:solidFill>
-              <a:srgbClr val="D6E3F0"/>
-            </a:solidFill>
-          </a:ln>
-          <a:effectLst/>
-        </p:spPr>
-        <p:style>
-          <a:lnRef idx="1">
-            <a:schemeClr val="accent1"/>
-          </a:lnRef>
-          <a:fillRef idx="3">
-            <a:schemeClr val="accent1"/>
-          </a:fillRef>
-          <a:effectRef idx="2">
-            <a:schemeClr val="accent1"/>
-          </a:effectRef>
-          <a:fontRef idx="minor">
-            <a:schemeClr val="lt1"/>
-          </a:fontRef>
-        </p:style>
-        <p:txBody>
-          <a:bodyPr rtlCol="0" anchor="ctr"/>
-          <a:lstStyle/>
-          <a:p>
-            <a:pPr algn="ctr"/>
-          </a:p>
-        </p:txBody>
-      </p:sp>
-      <p:sp>
-        <p:nvSpPr>
-          <p:cNvPr id="9012" name="Oval 9011"/>
-          <p:cNvSpPr/>
-          <p:nvPr/>
-        </p:nvSpPr>
-        <p:spPr>
-          <a:xfrm>
-            <a:off x="8260079" y="3017520"/>
-            <a:ext cx="274320" cy="274320"/>
-          </a:xfrm>
-          <a:prstGeom prst="ellipse">
-            <a:avLst/>
-          </a:prstGeom>
-          <a:solidFill>
-            <a:srgbClr val="113E6A"/>
-          </a:solidFill>
-          <a:ln>
-            <a:noFill/>
-          </a:ln>
-          <a:effectLst/>
-        </p:spPr>
-        <p:style>
-          <a:lnRef idx="1">
-            <a:schemeClr val="accent1"/>
-          </a:lnRef>
-          <a:fillRef idx="3">
-            <a:schemeClr val="accent1"/>
-          </a:fillRef>
-          <a:effectRef idx="2">
-            <a:schemeClr val="accent1"/>
-          </a:effectRef>
-          <a:fontRef idx="minor">
-            <a:schemeClr val="lt1"/>
-          </a:fontRef>
-        </p:style>
-        <p:txBody>
-          <a:bodyPr rtlCol="0" anchor="ctr" lIns="0" rIns="0" tIns="0" bIns="0"/>
-          <a:lstStyle/>
-          <a:p>
-            <a:pPr algn="ctr"/>
-            <a:r>
-              <a:rPr sz="1000" b="1">
-                <a:solidFill>
-                  <a:srgbClr val="FFFFFF"/>
-                </a:solidFill>
-                <a:latin typeface="Arial"/>
-                <a:ea typeface="微软雅黑"/>
-              </a:rPr>
-              <a:t>03</a:t>
-            </a:r>
-          </a:p>
-        </p:txBody>
-      </p:sp>
-      <p:sp>
-        <p:nvSpPr>
-          <p:cNvPr id="9013" name="TextBox 9012"/>
-          <p:cNvSpPr txBox="1"/>
-          <p:nvPr/>
-        </p:nvSpPr>
-        <p:spPr>
-          <a:xfrm>
-            <a:off x="8625839" y="3017520"/>
-            <a:ext cx="2877312" cy="1901951"/>
-          </a:xfrm>
-          <a:prstGeom prst="rect">
-            <a:avLst/>
-          </a:prstGeom>
-          <a:noFill/>
-        </p:spPr>
-        <p:txBody>
-          <a:bodyPr wrap="square" anchor="ctr" lIns="0" rIns="0" tIns="0" bIns="0">
-            <a:spAutoFit/>
-          </a:bodyPr>
-          <a:lstStyle/>
-          <a:p>
-            <a:pPr algn="l"/>
-            <a:r>
-              <a:rPr sz="1600" b="1">
-                <a:solidFill>
-                  <a:srgbClr val="113E6A"/>
-                </a:solidFill>
-                <a:latin typeface="Arial"/>
-                <a:ea typeface="微软雅黑"/>
-              </a:rPr>
-              <a:t>单点故障风险</a:t>
-            </a:r>
-          </a:p>
-          <a:p>
-            <a:pPr algn="l">
-              <a:lnSpc>
-                <a:spcPct val="115000"/>
-              </a:lnSpc>
-              <a:spcBef>
-                <a:spcPts val="500"/>
-              </a:spcBef>
-            </a:pPr>
-            <a:r>
-              <a:rPr sz="1500" b="0">
-                <a:solidFill>
-                  <a:srgbClr val="2E2C2C"/>
-                </a:solidFill>
-                <a:latin typeface="Arial"/>
-                <a:ea typeface="微软雅黑"/>
-              </a:rPr>
-              <a:t>Leader 崩溃后需等待 Standby 接管，这段窗口内集群完全无法调度</a:t>
-            </a:r>
-          </a:p>
-        </p:txBody>
-      </p:sp>
-      <p:sp>
-        <p:nvSpPr>
-          <p:cNvPr id="9014" name="TextBox 9013"/>
-          <p:cNvSpPr txBox="1"/>
-          <p:nvPr/>
-        </p:nvSpPr>
-        <p:spPr>
-          <a:xfrm>
-            <a:off x="10780776" y="6345936"/>
-            <a:ext cx="850392" cy="219456"/>
-          </a:xfrm>
-          <a:prstGeom prst="rect">
-            <a:avLst/>
-          </a:prstGeom>
-          <a:noFill/>
-        </p:spPr>
-        <p:txBody>
-          <a:bodyPr wrap="square" anchor="t" lIns="0" rIns="0" tIns="0" bIns="0">
-            <a:spAutoFit/>
-          </a:bodyPr>
-          <a:lstStyle/>
-          <a:p>
-            <a:pPr algn="r"/>
-            <a:r>
-              <a:rPr sz="950" b="0">
-                <a:solidFill>
-                  <a:srgbClr val="636363"/>
-                </a:solidFill>
-                <a:latin typeface="Arial"/>
-                <a:ea typeface="微软雅黑"/>
-              </a:rPr>
-              <a:t>2 / 25</a:t>
-            </a:r>
-          </a:p>
-        </p:txBody>
-      </p:sp>
-    </p:spTree>
-  </p:cSld>
-  <p:clrMapOvr>
-    <a:masterClrMapping/>
-  </p:clrMapOvr>
-</p:sld>
-</file>
-
-<file path=ppt/slides/slide20.xml><?xml version="1.0" encoding="utf-8"?>
+<file path=ppt/slides/slide18.xml><?xml version="1.0" encoding="utf-8"?>
 <p:sld xmlns:a="http://schemas.openxmlformats.org/drawingml/2006/main" xmlns:p="http://schemas.openxmlformats.org/presentationml/2006/main" xmlns:r="http://schemas.openxmlformats.org/officeDocument/2006/relationships">
   <p:cSld>
     <p:bg>
@@ -17451,7 +15574,7 @@
                 <a:latin typeface="Arial"/>
                 <a:ea typeface="微软雅黑"/>
               </a:rPr>
-              <a:t>20 / 25</a:t>
+              <a:t>18 / 25</a:t>
             </a:r>
           </a:p>
         </p:txBody>
@@ -17464,7 +15587,7 @@
 </p:sld>
 </file>
 
-<file path=ppt/slides/slide21.xml><?xml version="1.0" encoding="utf-8"?>
+<file path=ppt/slides/slide19.xml><?xml version="1.0" encoding="utf-8"?>
 <p:sld xmlns:a="http://schemas.openxmlformats.org/drawingml/2006/main" xmlns:p="http://schemas.openxmlformats.org/presentationml/2006/main" xmlns:r="http://schemas.openxmlformats.org/officeDocument/2006/relationships">
   <p:cSld>
     <p:bg>
@@ -18327,7 +16450,7 @@
                 <a:latin typeface="Arial"/>
                 <a:ea typeface="微软雅黑"/>
               </a:rPr>
-              <a:t>21 / 25</a:t>
+              <a:t>19 / 25</a:t>
             </a:r>
           </a:p>
         </p:txBody>
@@ -18340,7 +16463,878 @@
 </p:sld>
 </file>
 
-<file path=ppt/slides/slide22.xml><?xml version="1.0" encoding="utf-8"?>
+<file path=ppt/slides/slide2.xml><?xml version="1.0" encoding="utf-8"?>
+<p:sld xmlns:a="http://schemas.openxmlformats.org/drawingml/2006/main" xmlns:p="http://schemas.openxmlformats.org/presentationml/2006/main" xmlns:r="http://schemas.openxmlformats.org/officeDocument/2006/relationships">
+  <p:cSld>
+    <p:bg>
+      <p:bgPr>
+        <a:solidFill>
+          <a:srgbClr val="FFFFFF"/>
+        </a:solidFill>
+        <a:effectLst/>
+      </p:bgPr>
+    </p:bg>
+    <p:spTree>
+      <p:nvGrpSpPr>
+        <p:cNvPr id="1" name=""/>
+        <p:cNvGrpSpPr/>
+        <p:nvPr/>
+      </p:nvGrpSpPr>
+      <p:grpSpPr/>
+      <p:sp>
+        <p:nvSpPr>
+          <p:cNvPr id="9000" name="Freeform 5"/>
+          <p:cNvSpPr/>
+          <p:nvPr/>
+        </p:nvSpPr>
+        <p:spPr>
+          <a:xfrm>
+            <a:off x="182880" y="274320"/>
+            <a:ext cx="310896" cy="402336"/>
+          </a:xfrm>
+          <a:custGeom>
+            <a:avLst/>
+            <a:gdLst/>
+            <a:ahLst/>
+            <a:cxnLst>
+              <a:cxn ang="0">
+                <a:pos x="2147483647" y="2147483647"/>
+              </a:cxn>
+              <a:cxn ang="0">
+                <a:pos x="2147483647" y="2147483647"/>
+              </a:cxn>
+              <a:cxn ang="0">
+                <a:pos x="2147483647" y="2147483647"/>
+              </a:cxn>
+              <a:cxn ang="0">
+                <a:pos x="2147483647" y="2147483647"/>
+              </a:cxn>
+              <a:cxn ang="0">
+                <a:pos x="2147483647" y="2147483647"/>
+              </a:cxn>
+              <a:cxn ang="0">
+                <a:pos x="2147483647" y="2147483647"/>
+              </a:cxn>
+              <a:cxn ang="0">
+                <a:pos x="2147483647" y="2147483647"/>
+              </a:cxn>
+              <a:cxn ang="0">
+                <a:pos x="2147483647" y="2147483647"/>
+              </a:cxn>
+              <a:cxn ang="0">
+                <a:pos x="2147483647" y="0"/>
+              </a:cxn>
+              <a:cxn ang="0">
+                <a:pos x="2147483647" y="2147483647"/>
+              </a:cxn>
+              <a:cxn ang="0">
+                <a:pos x="2147483647" y="2147483647"/>
+              </a:cxn>
+              <a:cxn ang="0">
+                <a:pos x="2147483647" y="2147483647"/>
+              </a:cxn>
+              <a:cxn ang="0">
+                <a:pos x="2147483647" y="2147483647"/>
+              </a:cxn>
+              <a:cxn ang="0">
+                <a:pos x="2147483647" y="2147483647"/>
+              </a:cxn>
+              <a:cxn ang="0">
+                <a:pos x="2147483647" y="2147483647"/>
+              </a:cxn>
+              <a:cxn ang="0">
+                <a:pos x="2147483647" y="2147483647"/>
+              </a:cxn>
+              <a:cxn ang="0">
+                <a:pos x="2147483647" y="2147483647"/>
+              </a:cxn>
+              <a:cxn ang="0">
+                <a:pos x="2147483647" y="2147483647"/>
+              </a:cxn>
+              <a:cxn ang="0">
+                <a:pos x="2147483647" y="2147483647"/>
+              </a:cxn>
+              <a:cxn ang="0">
+                <a:pos x="0" y="2147483647"/>
+              </a:cxn>
+              <a:cxn ang="0">
+                <a:pos x="2147483647" y="2147483647"/>
+              </a:cxn>
+            </a:cxnLst>
+            <a:rect l="0" t="0" r="0" b="0"/>
+            <a:pathLst>
+              <a:path w="574" h="681">
+                <a:moveTo>
+                  <a:pt x="120" y="441"/>
+                </a:moveTo>
+                <a:cubicBezTo>
+                  <a:pt x="153" y="441"/>
+                  <a:pt x="183" y="454"/>
+                  <a:pt x="205" y="476"/>
+                </a:cubicBezTo>
+                <a:lnTo>
+                  <a:pt x="389" y="329"/>
+                </a:lnTo>
+                <a:cubicBezTo>
+                  <a:pt x="383" y="317"/>
+                  <a:pt x="380" y="303"/>
+                  <a:pt x="380" y="289"/>
+                </a:cubicBezTo>
+                <a:cubicBezTo>
+                  <a:pt x="380" y="271"/>
+                  <a:pt x="384" y="255"/>
+                  <a:pt x="392" y="241"/>
+                </a:cubicBezTo>
+                <a:lnTo>
+                  <a:pt x="270" y="138"/>
+                </a:lnTo>
+                <a:cubicBezTo>
+                  <a:pt x="256" y="151"/>
+                  <a:pt x="237" y="159"/>
+                  <a:pt x="217" y="159"/>
+                </a:cubicBezTo>
+                <a:cubicBezTo>
+                  <a:pt x="173" y="159"/>
+                  <a:pt x="137" y="123"/>
+                  <a:pt x="137" y="79"/>
+                </a:cubicBezTo>
+                <a:cubicBezTo>
+                  <a:pt x="137" y="36"/>
+                  <a:pt x="173" y="0"/>
+                  <a:pt x="217" y="0"/>
+                </a:cubicBezTo>
+                <a:cubicBezTo>
+                  <a:pt x="260" y="0"/>
+                  <a:pt x="296" y="36"/>
+                  <a:pt x="296" y="79"/>
+                </a:cubicBezTo>
+                <a:cubicBezTo>
+                  <a:pt x="296" y="91"/>
+                  <a:pt x="293" y="103"/>
+                  <a:pt x="289" y="113"/>
+                </a:cubicBezTo>
+                <a:lnTo>
+                  <a:pt x="412" y="217"/>
+                </a:lnTo>
+                <a:cubicBezTo>
+                  <a:pt x="429" y="201"/>
+                  <a:pt x="452" y="192"/>
+                  <a:pt x="477" y="192"/>
+                </a:cubicBezTo>
+                <a:cubicBezTo>
+                  <a:pt x="530" y="192"/>
+                  <a:pt x="574" y="235"/>
+                  <a:pt x="574" y="289"/>
+                </a:cubicBezTo>
+                <a:cubicBezTo>
+                  <a:pt x="574" y="342"/>
+                  <a:pt x="530" y="386"/>
+                  <a:pt x="477" y="386"/>
+                </a:cubicBezTo>
+                <a:cubicBezTo>
+                  <a:pt x="449" y="386"/>
+                  <a:pt x="424" y="374"/>
+                  <a:pt x="406" y="355"/>
+                </a:cubicBezTo>
+                <a:lnTo>
+                  <a:pt x="224" y="501"/>
+                </a:lnTo>
+                <a:cubicBezTo>
+                  <a:pt x="234" y="518"/>
+                  <a:pt x="240" y="539"/>
+                  <a:pt x="240" y="561"/>
+                </a:cubicBezTo>
+                <a:cubicBezTo>
+                  <a:pt x="240" y="627"/>
+                  <a:pt x="186" y="681"/>
+                  <a:pt x="120" y="681"/>
+                </a:cubicBezTo>
+                <a:cubicBezTo>
+                  <a:pt x="54" y="681"/>
+                  <a:pt x="0" y="627"/>
+                  <a:pt x="0" y="561"/>
+                </a:cubicBezTo>
+                <a:cubicBezTo>
+                  <a:pt x="0" y="495"/>
+                  <a:pt x="54" y="441"/>
+                  <a:pt x="120" y="441"/>
+                </a:cubicBezTo>
+                <a:close/>
+              </a:path>
+            </a:pathLst>
+          </a:custGeom>
+          <a:solidFill>
+            <a:srgbClr val="113E6A"/>
+          </a:solidFill>
+          <a:ln w="9525">
+            <a:noFill/>
+          </a:ln>
+        </p:spPr>
+        <p:txBody>
+          <a:bodyPr/>
+          <a:lstStyle/>
+          <a:p>
+            <a:endParaRPr lang="zh-CN" altLang="en-US"/>
+          </a:p>
+        </p:txBody>
+      </p:sp>
+      <p:pic>
+        <p:nvPicPr>
+          <p:cNvPr id="9001" name="Picture 9000" descr="beihang-logo-navy.png"/>
+          <p:cNvPicPr>
+            <a:picLocks noChangeAspect="1"/>
+          </p:cNvPicPr>
+          <p:nvPr/>
+        </p:nvPicPr>
+        <p:blipFill>
+          <a:blip r:embed="rId2"/>
+          <a:stretch>
+            <a:fillRect/>
+          </a:stretch>
+        </p:blipFill>
+        <p:spPr>
+          <a:xfrm>
+            <a:off x="9336024" y="91665"/>
+            <a:ext cx="2642616" cy="502469"/>
+          </a:xfrm>
+          <a:prstGeom prst="rect">
+            <a:avLst/>
+          </a:prstGeom>
+        </p:spPr>
+      </p:pic>
+      <p:sp>
+        <p:nvSpPr>
+          <p:cNvPr id="9002" name="TextBox 9001"/>
+          <p:cNvSpPr txBox="1"/>
+          <p:nvPr/>
+        </p:nvSpPr>
+        <p:spPr>
+          <a:xfrm>
+            <a:off x="566928" y="155448"/>
+            <a:ext cx="8549640" cy="621792"/>
+          </a:xfrm>
+          <a:prstGeom prst="rect">
+            <a:avLst/>
+          </a:prstGeom>
+          <a:noFill/>
+        </p:spPr>
+        <p:txBody>
+          <a:bodyPr wrap="square" anchor="ctr" lIns="0" rIns="0" tIns="0" bIns="0">
+            <a:spAutoFit/>
+          </a:bodyPr>
+          <a:lstStyle/>
+          <a:p>
+            <a:pPr algn="l">
+              <a:lnSpc>
+                <a:spcPct val="100000"/>
+              </a:lnSpc>
+            </a:pPr>
+            <a:r>
+              <a:rPr sz="3000" b="1">
+                <a:solidFill>
+                  <a:srgbClr val="113E6A"/>
+                </a:solidFill>
+                <a:latin typeface="Arial"/>
+                <a:ea typeface="微软雅黑"/>
+              </a:rPr>
+              <a:t>研究背景</a:t>
+            </a:r>
+          </a:p>
+        </p:txBody>
+      </p:sp>
+      <p:sp>
+        <p:nvSpPr>
+          <p:cNvPr id="9003" name="TextBox 9002"/>
+          <p:cNvSpPr txBox="1"/>
+          <p:nvPr/>
+        </p:nvSpPr>
+        <p:spPr>
+          <a:xfrm>
+            <a:off x="566928" y="1261872"/>
+            <a:ext cx="10881360" cy="438912"/>
+          </a:xfrm>
+          <a:prstGeom prst="rect">
+            <a:avLst/>
+          </a:prstGeom>
+          <a:noFill/>
+        </p:spPr>
+        <p:txBody>
+          <a:bodyPr wrap="square" anchor="ctr" lIns="0" rIns="0" tIns="0" bIns="0">
+            <a:spAutoFit/>
+          </a:bodyPr>
+          <a:lstStyle/>
+          <a:p>
+            <a:pPr algn="l">
+              <a:lnSpc>
+                <a:spcPct val="110000"/>
+              </a:lnSpc>
+            </a:pPr>
+            <a:r>
+              <a:rPr sz="1800" b="1">
+                <a:solidFill>
+                  <a:srgbClr val="0070C0"/>
+                </a:solidFill>
+                <a:latin typeface="Arial"/>
+                <a:ea typeface="微软雅黑"/>
+              </a:rPr>
+              <a:t>生产集群进入万节点量级，单实例架构在吞吐与高可用上同时受制</a:t>
+            </a:r>
+          </a:p>
+        </p:txBody>
+      </p:sp>
+      <p:sp>
+        <p:nvSpPr>
+          <p:cNvPr id="9004" name="TextBox 9003"/>
+          <p:cNvSpPr txBox="1"/>
+          <p:nvPr/>
+        </p:nvSpPr>
+        <p:spPr>
+          <a:xfrm>
+            <a:off x="566928" y="1783080"/>
+            <a:ext cx="10881360" cy="1234440"/>
+          </a:xfrm>
+          <a:prstGeom prst="rect">
+            <a:avLst/>
+          </a:prstGeom>
+          <a:noFill/>
+        </p:spPr>
+        <p:txBody>
+          <a:bodyPr wrap="square" anchor="t" lIns="0" rIns="0" tIns="0" bIns="0">
+            <a:spAutoFit/>
+          </a:bodyPr>
+          <a:lstStyle/>
+          <a:p>
+            <a:pPr algn="l">
+              <a:lnSpc>
+                <a:spcPct val="135000"/>
+              </a:lnSpc>
+            </a:pPr>
+            <a:r>
+              <a:rPr sz="1500" b="0">
+                <a:solidFill>
+                  <a:srgbClr val="2E2C2C"/>
+                </a:solidFill>
+                <a:latin typeface="Arial"/>
+                <a:ea typeface="微软雅黑"/>
+              </a:rPr>
+              <a:t>Kubernetes 已成为云原生的事实标准，调度器处在 Pod 生命周期的关键路径上：它的吞吐与延迟直接决定集群资源利用率与业务响应速度。千节点规模下单实例尚可支撑，集群进入万节点量级后，三个瓶颈同时显现。</a:t>
+            </a:r>
+          </a:p>
+        </p:txBody>
+      </p:sp>
+      <p:sp>
+        <p:nvSpPr>
+          <p:cNvPr id="9005" name="Rounded Rectangle 9004"/>
+          <p:cNvSpPr/>
+          <p:nvPr/>
+        </p:nvSpPr>
+        <p:spPr>
+          <a:xfrm>
+            <a:off x="566928" y="2880360"/>
+            <a:ext cx="3517391" cy="2103120"/>
+          </a:xfrm>
+          <a:prstGeom prst="roundRect">
+            <a:avLst/>
+          </a:prstGeom>
+          <a:solidFill>
+            <a:srgbClr val="FFFFFF"/>
+          </a:solidFill>
+          <a:ln w="9525">
+            <a:solidFill>
+              <a:srgbClr val="D6E3F0"/>
+            </a:solidFill>
+          </a:ln>
+          <a:effectLst/>
+        </p:spPr>
+        <p:style>
+          <a:lnRef idx="1">
+            <a:schemeClr val="accent1"/>
+          </a:lnRef>
+          <a:fillRef idx="3">
+            <a:schemeClr val="accent1"/>
+          </a:fillRef>
+          <a:effectRef idx="2">
+            <a:schemeClr val="accent1"/>
+          </a:effectRef>
+          <a:fontRef idx="minor">
+            <a:schemeClr val="lt1"/>
+          </a:fontRef>
+        </p:style>
+        <p:txBody>
+          <a:bodyPr rtlCol="0" anchor="ctr"/>
+          <a:lstStyle/>
+          <a:p>
+            <a:pPr algn="ctr"/>
+          </a:p>
+        </p:txBody>
+      </p:sp>
+      <p:sp>
+        <p:nvSpPr>
+          <p:cNvPr id="9006" name="Oval 9005"/>
+          <p:cNvSpPr/>
+          <p:nvPr/>
+        </p:nvSpPr>
+        <p:spPr>
+          <a:xfrm>
+            <a:off x="713232" y="3017520"/>
+            <a:ext cx="274320" cy="274320"/>
+          </a:xfrm>
+          <a:prstGeom prst="ellipse">
+            <a:avLst/>
+          </a:prstGeom>
+          <a:solidFill>
+            <a:srgbClr val="113E6A"/>
+          </a:solidFill>
+          <a:ln>
+            <a:noFill/>
+          </a:ln>
+          <a:effectLst/>
+        </p:spPr>
+        <p:style>
+          <a:lnRef idx="1">
+            <a:schemeClr val="accent1"/>
+          </a:lnRef>
+          <a:fillRef idx="3">
+            <a:schemeClr val="accent1"/>
+          </a:fillRef>
+          <a:effectRef idx="2">
+            <a:schemeClr val="accent1"/>
+          </a:effectRef>
+          <a:fontRef idx="minor">
+            <a:schemeClr val="lt1"/>
+          </a:fontRef>
+        </p:style>
+        <p:txBody>
+          <a:bodyPr rtlCol="0" anchor="ctr" lIns="0" rIns="0" tIns="0" bIns="0"/>
+          <a:lstStyle/>
+          <a:p>
+            <a:pPr algn="ctr"/>
+            <a:r>
+              <a:rPr sz="1000" b="1">
+                <a:solidFill>
+                  <a:srgbClr val="FFFFFF"/>
+                </a:solidFill>
+                <a:latin typeface="Arial"/>
+                <a:ea typeface="微软雅黑"/>
+              </a:rPr>
+              <a:t>01</a:t>
+            </a:r>
+          </a:p>
+        </p:txBody>
+      </p:sp>
+      <p:sp>
+        <p:nvSpPr>
+          <p:cNvPr id="9007" name="TextBox 9006"/>
+          <p:cNvSpPr txBox="1"/>
+          <p:nvPr/>
+        </p:nvSpPr>
+        <p:spPr>
+          <a:xfrm>
+            <a:off x="1078992" y="3017520"/>
+            <a:ext cx="2877312" cy="1901951"/>
+          </a:xfrm>
+          <a:prstGeom prst="rect">
+            <a:avLst/>
+          </a:prstGeom>
+          <a:noFill/>
+        </p:spPr>
+        <p:txBody>
+          <a:bodyPr wrap="square" anchor="ctr" lIns="0" rIns="0" tIns="0" bIns="0">
+            <a:spAutoFit/>
+          </a:bodyPr>
+          <a:lstStyle/>
+          <a:p>
+            <a:pPr algn="l"/>
+            <a:r>
+              <a:rPr sz="1600" b="1">
+                <a:solidFill>
+                  <a:srgbClr val="113E6A"/>
+                </a:solidFill>
+                <a:latin typeface="Arial"/>
+                <a:ea typeface="微软雅黑"/>
+              </a:rPr>
+              <a:t>吞吐存在上限</a:t>
+            </a:r>
+          </a:p>
+          <a:p>
+            <a:pPr algn="l">
+              <a:lnSpc>
+                <a:spcPct val="115000"/>
+              </a:lnSpc>
+              <a:spcBef>
+                <a:spcPts val="500"/>
+              </a:spcBef>
+            </a:pPr>
+            <a:r>
+              <a:rPr sz="1500" b="0">
+                <a:solidFill>
+                  <a:srgbClr val="2E2C2C"/>
+                </a:solidFill>
+                <a:latin typeface="Arial"/>
+                <a:ea typeface="微软雅黑"/>
+              </a:rPr>
+              <a:t>activeQ 串行处理 Pod，大规模弹性伸缩与批任务启动被拖慢</a:t>
+            </a:r>
+          </a:p>
+        </p:txBody>
+      </p:sp>
+      <p:sp>
+        <p:nvSpPr>
+          <p:cNvPr id="9008" name="Rounded Rectangle 9007"/>
+          <p:cNvSpPr/>
+          <p:nvPr/>
+        </p:nvSpPr>
+        <p:spPr>
+          <a:xfrm>
+            <a:off x="4340351" y="2880360"/>
+            <a:ext cx="3517391" cy="2103120"/>
+          </a:xfrm>
+          <a:prstGeom prst="roundRect">
+            <a:avLst/>
+          </a:prstGeom>
+          <a:solidFill>
+            <a:srgbClr val="FFFFFF"/>
+          </a:solidFill>
+          <a:ln w="9525">
+            <a:solidFill>
+              <a:srgbClr val="D6E3F0"/>
+            </a:solidFill>
+          </a:ln>
+          <a:effectLst/>
+        </p:spPr>
+        <p:style>
+          <a:lnRef idx="1">
+            <a:schemeClr val="accent1"/>
+          </a:lnRef>
+          <a:fillRef idx="3">
+            <a:schemeClr val="accent1"/>
+          </a:fillRef>
+          <a:effectRef idx="2">
+            <a:schemeClr val="accent1"/>
+          </a:effectRef>
+          <a:fontRef idx="minor">
+            <a:schemeClr val="lt1"/>
+          </a:fontRef>
+        </p:style>
+        <p:txBody>
+          <a:bodyPr rtlCol="0" anchor="ctr"/>
+          <a:lstStyle/>
+          <a:p>
+            <a:pPr algn="ctr"/>
+          </a:p>
+        </p:txBody>
+      </p:sp>
+      <p:sp>
+        <p:nvSpPr>
+          <p:cNvPr id="9009" name="Oval 9008"/>
+          <p:cNvSpPr/>
+          <p:nvPr/>
+        </p:nvSpPr>
+        <p:spPr>
+          <a:xfrm>
+            <a:off x="4486656" y="3017520"/>
+            <a:ext cx="274320" cy="274320"/>
+          </a:xfrm>
+          <a:prstGeom prst="ellipse">
+            <a:avLst/>
+          </a:prstGeom>
+          <a:solidFill>
+            <a:srgbClr val="113E6A"/>
+          </a:solidFill>
+          <a:ln>
+            <a:noFill/>
+          </a:ln>
+          <a:effectLst/>
+        </p:spPr>
+        <p:style>
+          <a:lnRef idx="1">
+            <a:schemeClr val="accent1"/>
+          </a:lnRef>
+          <a:fillRef idx="3">
+            <a:schemeClr val="accent1"/>
+          </a:fillRef>
+          <a:effectRef idx="2">
+            <a:schemeClr val="accent1"/>
+          </a:effectRef>
+          <a:fontRef idx="minor">
+            <a:schemeClr val="lt1"/>
+          </a:fontRef>
+        </p:style>
+        <p:txBody>
+          <a:bodyPr rtlCol="0" anchor="ctr" lIns="0" rIns="0" tIns="0" bIns="0"/>
+          <a:lstStyle/>
+          <a:p>
+            <a:pPr algn="ctr"/>
+            <a:r>
+              <a:rPr sz="1000" b="1">
+                <a:solidFill>
+                  <a:srgbClr val="FFFFFF"/>
+                </a:solidFill>
+                <a:latin typeface="Arial"/>
+                <a:ea typeface="微软雅黑"/>
+              </a:rPr>
+              <a:t>02</a:t>
+            </a:r>
+          </a:p>
+        </p:txBody>
+      </p:sp>
+      <p:sp>
+        <p:nvSpPr>
+          <p:cNvPr id="9010" name="TextBox 9009"/>
+          <p:cNvSpPr txBox="1"/>
+          <p:nvPr/>
+        </p:nvSpPr>
+        <p:spPr>
+          <a:xfrm>
+            <a:off x="4852416" y="3017520"/>
+            <a:ext cx="2877312" cy="1901951"/>
+          </a:xfrm>
+          <a:prstGeom prst="rect">
+            <a:avLst/>
+          </a:prstGeom>
+          <a:noFill/>
+        </p:spPr>
+        <p:txBody>
+          <a:bodyPr wrap="square" anchor="ctr" lIns="0" rIns="0" tIns="0" bIns="0">
+            <a:spAutoFit/>
+          </a:bodyPr>
+          <a:lstStyle/>
+          <a:p>
+            <a:pPr algn="l"/>
+            <a:r>
+              <a:rPr sz="1600" b="1">
+                <a:solidFill>
+                  <a:srgbClr val="113E6A"/>
+                </a:solidFill>
+                <a:latin typeface="Arial"/>
+                <a:ea typeface="微软雅黑"/>
+              </a:rPr>
+              <a:t>尾延迟持续抬升</a:t>
+            </a:r>
+          </a:p>
+          <a:p>
+            <a:pPr algn="l">
+              <a:lnSpc>
+                <a:spcPct val="115000"/>
+              </a:lnSpc>
+              <a:spcBef>
+                <a:spcPts val="500"/>
+              </a:spcBef>
+            </a:pPr>
+            <a:r>
+              <a:rPr sz="1500" b="0">
+                <a:solidFill>
+                  <a:srgbClr val="2E2C2C"/>
+                </a:solidFill>
+                <a:latin typeface="Arial"/>
+                <a:ea typeface="微软雅黑"/>
+              </a:rPr>
+              <a:t>Filter/Score 遍历节点开销随规模线性上升，5000 节点下 P99 明显恶化</a:t>
+            </a:r>
+          </a:p>
+        </p:txBody>
+      </p:sp>
+      <p:sp>
+        <p:nvSpPr>
+          <p:cNvPr id="9011" name="Rounded Rectangle 9010"/>
+          <p:cNvSpPr/>
+          <p:nvPr/>
+        </p:nvSpPr>
+        <p:spPr>
+          <a:xfrm>
+            <a:off x="8113775" y="2880360"/>
+            <a:ext cx="3517391" cy="2103120"/>
+          </a:xfrm>
+          <a:prstGeom prst="roundRect">
+            <a:avLst/>
+          </a:prstGeom>
+          <a:solidFill>
+            <a:srgbClr val="FFFFFF"/>
+          </a:solidFill>
+          <a:ln w="9525">
+            <a:solidFill>
+              <a:srgbClr val="D6E3F0"/>
+            </a:solidFill>
+          </a:ln>
+          <a:effectLst/>
+        </p:spPr>
+        <p:style>
+          <a:lnRef idx="1">
+            <a:schemeClr val="accent1"/>
+          </a:lnRef>
+          <a:fillRef idx="3">
+            <a:schemeClr val="accent1"/>
+          </a:fillRef>
+          <a:effectRef idx="2">
+            <a:schemeClr val="accent1"/>
+          </a:effectRef>
+          <a:fontRef idx="minor">
+            <a:schemeClr val="lt1"/>
+          </a:fontRef>
+        </p:style>
+        <p:txBody>
+          <a:bodyPr rtlCol="0" anchor="ctr"/>
+          <a:lstStyle/>
+          <a:p>
+            <a:pPr algn="ctr"/>
+          </a:p>
+        </p:txBody>
+      </p:sp>
+      <p:sp>
+        <p:nvSpPr>
+          <p:cNvPr id="9012" name="Oval 9011"/>
+          <p:cNvSpPr/>
+          <p:nvPr/>
+        </p:nvSpPr>
+        <p:spPr>
+          <a:xfrm>
+            <a:off x="8260079" y="3017520"/>
+            <a:ext cx="274320" cy="274320"/>
+          </a:xfrm>
+          <a:prstGeom prst="ellipse">
+            <a:avLst/>
+          </a:prstGeom>
+          <a:solidFill>
+            <a:srgbClr val="113E6A"/>
+          </a:solidFill>
+          <a:ln>
+            <a:noFill/>
+          </a:ln>
+          <a:effectLst/>
+        </p:spPr>
+        <p:style>
+          <a:lnRef idx="1">
+            <a:schemeClr val="accent1"/>
+          </a:lnRef>
+          <a:fillRef idx="3">
+            <a:schemeClr val="accent1"/>
+          </a:fillRef>
+          <a:effectRef idx="2">
+            <a:schemeClr val="accent1"/>
+          </a:effectRef>
+          <a:fontRef idx="minor">
+            <a:schemeClr val="lt1"/>
+          </a:fontRef>
+        </p:style>
+        <p:txBody>
+          <a:bodyPr rtlCol="0" anchor="ctr" lIns="0" rIns="0" tIns="0" bIns="0"/>
+          <a:lstStyle/>
+          <a:p>
+            <a:pPr algn="ctr"/>
+            <a:r>
+              <a:rPr sz="1000" b="1">
+                <a:solidFill>
+                  <a:srgbClr val="FFFFFF"/>
+                </a:solidFill>
+                <a:latin typeface="Arial"/>
+                <a:ea typeface="微软雅黑"/>
+              </a:rPr>
+              <a:t>03</a:t>
+            </a:r>
+          </a:p>
+        </p:txBody>
+      </p:sp>
+      <p:sp>
+        <p:nvSpPr>
+          <p:cNvPr id="9013" name="TextBox 9012"/>
+          <p:cNvSpPr txBox="1"/>
+          <p:nvPr/>
+        </p:nvSpPr>
+        <p:spPr>
+          <a:xfrm>
+            <a:off x="8625839" y="3017520"/>
+            <a:ext cx="2877312" cy="1901951"/>
+          </a:xfrm>
+          <a:prstGeom prst="rect">
+            <a:avLst/>
+          </a:prstGeom>
+          <a:noFill/>
+        </p:spPr>
+        <p:txBody>
+          <a:bodyPr wrap="square" anchor="ctr" lIns="0" rIns="0" tIns="0" bIns="0">
+            <a:spAutoFit/>
+          </a:bodyPr>
+          <a:lstStyle/>
+          <a:p>
+            <a:pPr algn="l"/>
+            <a:r>
+              <a:rPr sz="1600" b="1">
+                <a:solidFill>
+                  <a:srgbClr val="113E6A"/>
+                </a:solidFill>
+                <a:latin typeface="Arial"/>
+                <a:ea typeface="微软雅黑"/>
+              </a:rPr>
+              <a:t>单点故障风险</a:t>
+            </a:r>
+          </a:p>
+          <a:p>
+            <a:pPr algn="l">
+              <a:lnSpc>
+                <a:spcPct val="115000"/>
+              </a:lnSpc>
+              <a:spcBef>
+                <a:spcPts val="500"/>
+              </a:spcBef>
+            </a:pPr>
+            <a:r>
+              <a:rPr sz="1500" b="0">
+                <a:solidFill>
+                  <a:srgbClr val="2E2C2C"/>
+                </a:solidFill>
+                <a:latin typeface="Arial"/>
+                <a:ea typeface="微软雅黑"/>
+              </a:rPr>
+              <a:t>Leader 崩溃后需等待 Standby 接管，这段窗口内集群完全无法调度</a:t>
+            </a:r>
+          </a:p>
+        </p:txBody>
+      </p:sp>
+      <p:sp>
+        <p:nvSpPr>
+          <p:cNvPr id="9014" name="TextBox 9013"/>
+          <p:cNvSpPr txBox="1"/>
+          <p:nvPr/>
+        </p:nvSpPr>
+        <p:spPr>
+          <a:xfrm>
+            <a:off x="10780776" y="6345936"/>
+            <a:ext cx="850392" cy="219456"/>
+          </a:xfrm>
+          <a:prstGeom prst="rect">
+            <a:avLst/>
+          </a:prstGeom>
+          <a:noFill/>
+        </p:spPr>
+        <p:txBody>
+          <a:bodyPr wrap="square" anchor="t" lIns="0" rIns="0" tIns="0" bIns="0">
+            <a:spAutoFit/>
+          </a:bodyPr>
+          <a:lstStyle/>
+          <a:p>
+            <a:pPr algn="r"/>
+            <a:r>
+              <a:rPr sz="950" b="0">
+                <a:solidFill>
+                  <a:srgbClr val="636363"/>
+                </a:solidFill>
+                <a:latin typeface="Arial"/>
+                <a:ea typeface="微软雅黑"/>
+              </a:rPr>
+              <a:t>2 / 25</a:t>
+            </a:r>
+          </a:p>
+        </p:txBody>
+      </p:sp>
+    </p:spTree>
+  </p:cSld>
+  <p:clrMapOvr>
+    <a:masterClrMapping/>
+  </p:clrMapOvr>
+</p:sld>
+</file>
+
+<file path=ppt/slides/slide20.xml><?xml version="1.0" encoding="utf-8"?>
 <p:sld xmlns:a="http://schemas.openxmlformats.org/drawingml/2006/main" xmlns:p="http://schemas.openxmlformats.org/presentationml/2006/main" xmlns:r="http://schemas.openxmlformats.org/officeDocument/2006/relationships">
   <p:cSld>
     <p:bg>
@@ -19132,6 +18126,1012 @@
                 <a:ea typeface="微软雅黑"/>
               </a:rPr>
               <a:t>▪  收益部分来自启动更快（口径权衡）</a:t>
+            </a:r>
+          </a:p>
+        </p:txBody>
+      </p:sp>
+      <p:sp>
+        <p:nvSpPr>
+          <p:cNvPr id="9006" name="TextBox 9005"/>
+          <p:cNvSpPr txBox="1"/>
+          <p:nvPr/>
+        </p:nvSpPr>
+        <p:spPr>
+          <a:xfrm>
+            <a:off x="566928" y="6309360"/>
+            <a:ext cx="10104120" cy="201168"/>
+          </a:xfrm>
+          <a:prstGeom prst="rect">
+            <a:avLst/>
+          </a:prstGeom>
+          <a:noFill/>
+        </p:spPr>
+        <p:txBody>
+          <a:bodyPr wrap="square" anchor="t" lIns="0" rIns="0" tIns="0" bIns="0">
+            <a:spAutoFit/>
+          </a:bodyPr>
+          <a:lstStyle/>
+          <a:p>
+            <a:pPr algn="l"/>
+            <a:r>
+              <a:rPr sz="850" b="0">
+                <a:solidFill>
+                  <a:srgbClr val="636363"/>
+                </a:solidFill>
+                <a:latin typeface="Arial"/>
+                <a:ea typeface="微软雅黑"/>
+              </a:rPr>
+              <a:t>编码：s1–s4 = 100 / 1000 / 5000 / 10000 节点；w1–w7 = 负载强度（w2 500、w3 1000、w4 2000 pods/s 极限、w5 突发、w6 Gang、w7 异构）；inst3 = 3 实例</a:t>
+            </a:r>
+          </a:p>
+        </p:txBody>
+      </p:sp>
+      <p:sp>
+        <p:nvSpPr>
+          <p:cNvPr id="9007" name="TextBox 9006"/>
+          <p:cNvSpPr txBox="1"/>
+          <p:nvPr/>
+        </p:nvSpPr>
+        <p:spPr>
+          <a:xfrm>
+            <a:off x="10780776" y="6345936"/>
+            <a:ext cx="850392" cy="219456"/>
+          </a:xfrm>
+          <a:prstGeom prst="rect">
+            <a:avLst/>
+          </a:prstGeom>
+          <a:noFill/>
+        </p:spPr>
+        <p:txBody>
+          <a:bodyPr wrap="square" anchor="t" lIns="0" rIns="0" tIns="0" bIns="0">
+            <a:spAutoFit/>
+          </a:bodyPr>
+          <a:lstStyle/>
+          <a:p>
+            <a:pPr algn="r"/>
+            <a:r>
+              <a:rPr sz="950" b="0">
+                <a:solidFill>
+                  <a:srgbClr val="636363"/>
+                </a:solidFill>
+                <a:latin typeface="Arial"/>
+                <a:ea typeface="微软雅黑"/>
+              </a:rPr>
+              <a:t>20 / 25</a:t>
+            </a:r>
+          </a:p>
+        </p:txBody>
+      </p:sp>
+    </p:spTree>
+  </p:cSld>
+  <p:clrMapOvr>
+    <a:masterClrMapping/>
+  </p:clrMapOvr>
+</p:sld>
+</file>
+
+<file path=ppt/slides/slide21.xml><?xml version="1.0" encoding="utf-8"?>
+<p:sld xmlns:a="http://schemas.openxmlformats.org/drawingml/2006/main" xmlns:p="http://schemas.openxmlformats.org/presentationml/2006/main" xmlns:r="http://schemas.openxmlformats.org/officeDocument/2006/relationships">
+  <p:cSld>
+    <p:bg>
+      <p:bgPr>
+        <a:solidFill>
+          <a:srgbClr val="FFFFFF"/>
+        </a:solidFill>
+        <a:effectLst/>
+      </p:bgPr>
+    </p:bg>
+    <p:spTree>
+      <p:nvGrpSpPr>
+        <p:cNvPr id="1" name=""/>
+        <p:cNvGrpSpPr/>
+        <p:nvPr/>
+      </p:nvGrpSpPr>
+      <p:grpSpPr/>
+      <p:sp>
+        <p:nvSpPr>
+          <p:cNvPr id="9000" name="Freeform 5"/>
+          <p:cNvSpPr/>
+          <p:nvPr/>
+        </p:nvSpPr>
+        <p:spPr>
+          <a:xfrm>
+            <a:off x="182880" y="274320"/>
+            <a:ext cx="310896" cy="402336"/>
+          </a:xfrm>
+          <a:custGeom>
+            <a:avLst/>
+            <a:gdLst/>
+            <a:ahLst/>
+            <a:cxnLst>
+              <a:cxn ang="0">
+                <a:pos x="2147483647" y="2147483647"/>
+              </a:cxn>
+              <a:cxn ang="0">
+                <a:pos x="2147483647" y="2147483647"/>
+              </a:cxn>
+              <a:cxn ang="0">
+                <a:pos x="2147483647" y="2147483647"/>
+              </a:cxn>
+              <a:cxn ang="0">
+                <a:pos x="2147483647" y="2147483647"/>
+              </a:cxn>
+              <a:cxn ang="0">
+                <a:pos x="2147483647" y="2147483647"/>
+              </a:cxn>
+              <a:cxn ang="0">
+                <a:pos x="2147483647" y="2147483647"/>
+              </a:cxn>
+              <a:cxn ang="0">
+                <a:pos x="2147483647" y="2147483647"/>
+              </a:cxn>
+              <a:cxn ang="0">
+                <a:pos x="2147483647" y="2147483647"/>
+              </a:cxn>
+              <a:cxn ang="0">
+                <a:pos x="2147483647" y="0"/>
+              </a:cxn>
+              <a:cxn ang="0">
+                <a:pos x="2147483647" y="2147483647"/>
+              </a:cxn>
+              <a:cxn ang="0">
+                <a:pos x="2147483647" y="2147483647"/>
+              </a:cxn>
+              <a:cxn ang="0">
+                <a:pos x="2147483647" y="2147483647"/>
+              </a:cxn>
+              <a:cxn ang="0">
+                <a:pos x="2147483647" y="2147483647"/>
+              </a:cxn>
+              <a:cxn ang="0">
+                <a:pos x="2147483647" y="2147483647"/>
+              </a:cxn>
+              <a:cxn ang="0">
+                <a:pos x="2147483647" y="2147483647"/>
+              </a:cxn>
+              <a:cxn ang="0">
+                <a:pos x="2147483647" y="2147483647"/>
+              </a:cxn>
+              <a:cxn ang="0">
+                <a:pos x="2147483647" y="2147483647"/>
+              </a:cxn>
+              <a:cxn ang="0">
+                <a:pos x="2147483647" y="2147483647"/>
+              </a:cxn>
+              <a:cxn ang="0">
+                <a:pos x="2147483647" y="2147483647"/>
+              </a:cxn>
+              <a:cxn ang="0">
+                <a:pos x="0" y="2147483647"/>
+              </a:cxn>
+              <a:cxn ang="0">
+                <a:pos x="2147483647" y="2147483647"/>
+              </a:cxn>
+            </a:cxnLst>
+            <a:rect l="0" t="0" r="0" b="0"/>
+            <a:pathLst>
+              <a:path w="574" h="681">
+                <a:moveTo>
+                  <a:pt x="120" y="441"/>
+                </a:moveTo>
+                <a:cubicBezTo>
+                  <a:pt x="153" y="441"/>
+                  <a:pt x="183" y="454"/>
+                  <a:pt x="205" y="476"/>
+                </a:cubicBezTo>
+                <a:lnTo>
+                  <a:pt x="389" y="329"/>
+                </a:lnTo>
+                <a:cubicBezTo>
+                  <a:pt x="383" y="317"/>
+                  <a:pt x="380" y="303"/>
+                  <a:pt x="380" y="289"/>
+                </a:cubicBezTo>
+                <a:cubicBezTo>
+                  <a:pt x="380" y="271"/>
+                  <a:pt x="384" y="255"/>
+                  <a:pt x="392" y="241"/>
+                </a:cubicBezTo>
+                <a:lnTo>
+                  <a:pt x="270" y="138"/>
+                </a:lnTo>
+                <a:cubicBezTo>
+                  <a:pt x="256" y="151"/>
+                  <a:pt x="237" y="159"/>
+                  <a:pt x="217" y="159"/>
+                </a:cubicBezTo>
+                <a:cubicBezTo>
+                  <a:pt x="173" y="159"/>
+                  <a:pt x="137" y="123"/>
+                  <a:pt x="137" y="79"/>
+                </a:cubicBezTo>
+                <a:cubicBezTo>
+                  <a:pt x="137" y="36"/>
+                  <a:pt x="173" y="0"/>
+                  <a:pt x="217" y="0"/>
+                </a:cubicBezTo>
+                <a:cubicBezTo>
+                  <a:pt x="260" y="0"/>
+                  <a:pt x="296" y="36"/>
+                  <a:pt x="296" y="79"/>
+                </a:cubicBezTo>
+                <a:cubicBezTo>
+                  <a:pt x="296" y="91"/>
+                  <a:pt x="293" y="103"/>
+                  <a:pt x="289" y="113"/>
+                </a:cubicBezTo>
+                <a:lnTo>
+                  <a:pt x="412" y="217"/>
+                </a:lnTo>
+                <a:cubicBezTo>
+                  <a:pt x="429" y="201"/>
+                  <a:pt x="452" y="192"/>
+                  <a:pt x="477" y="192"/>
+                </a:cubicBezTo>
+                <a:cubicBezTo>
+                  <a:pt x="530" y="192"/>
+                  <a:pt x="574" y="235"/>
+                  <a:pt x="574" y="289"/>
+                </a:cubicBezTo>
+                <a:cubicBezTo>
+                  <a:pt x="574" y="342"/>
+                  <a:pt x="530" y="386"/>
+                  <a:pt x="477" y="386"/>
+                </a:cubicBezTo>
+                <a:cubicBezTo>
+                  <a:pt x="449" y="386"/>
+                  <a:pt x="424" y="374"/>
+                  <a:pt x="406" y="355"/>
+                </a:cubicBezTo>
+                <a:lnTo>
+                  <a:pt x="224" y="501"/>
+                </a:lnTo>
+                <a:cubicBezTo>
+                  <a:pt x="234" y="518"/>
+                  <a:pt x="240" y="539"/>
+                  <a:pt x="240" y="561"/>
+                </a:cubicBezTo>
+                <a:cubicBezTo>
+                  <a:pt x="240" y="627"/>
+                  <a:pt x="186" y="681"/>
+                  <a:pt x="120" y="681"/>
+                </a:cubicBezTo>
+                <a:cubicBezTo>
+                  <a:pt x="54" y="681"/>
+                  <a:pt x="0" y="627"/>
+                  <a:pt x="0" y="561"/>
+                </a:cubicBezTo>
+                <a:cubicBezTo>
+                  <a:pt x="0" y="495"/>
+                  <a:pt x="54" y="441"/>
+                  <a:pt x="120" y="441"/>
+                </a:cubicBezTo>
+                <a:close/>
+              </a:path>
+            </a:pathLst>
+          </a:custGeom>
+          <a:solidFill>
+            <a:srgbClr val="113E6A"/>
+          </a:solidFill>
+          <a:ln w="9525">
+            <a:noFill/>
+          </a:ln>
+        </p:spPr>
+        <p:txBody>
+          <a:bodyPr/>
+          <a:lstStyle/>
+          <a:p>
+            <a:endParaRPr lang="zh-CN" altLang="en-US"/>
+          </a:p>
+        </p:txBody>
+      </p:sp>
+      <p:pic>
+        <p:nvPicPr>
+          <p:cNvPr id="9001" name="Picture 9000" descr="beihang-logo-navy.png"/>
+          <p:cNvPicPr>
+            <a:picLocks noChangeAspect="1"/>
+          </p:cNvPicPr>
+          <p:nvPr/>
+        </p:nvPicPr>
+        <p:blipFill>
+          <a:blip r:embed="rId2"/>
+          <a:stretch>
+            <a:fillRect/>
+          </a:stretch>
+        </p:blipFill>
+        <p:spPr>
+          <a:xfrm>
+            <a:off x="9336024" y="91665"/>
+            <a:ext cx="2642616" cy="502469"/>
+          </a:xfrm>
+          <a:prstGeom prst="rect">
+            <a:avLst/>
+          </a:prstGeom>
+        </p:spPr>
+      </p:pic>
+      <p:sp>
+        <p:nvSpPr>
+          <p:cNvPr id="9002" name="TextBox 9001"/>
+          <p:cNvSpPr txBox="1"/>
+          <p:nvPr/>
+        </p:nvSpPr>
+        <p:spPr>
+          <a:xfrm>
+            <a:off x="566928" y="155448"/>
+            <a:ext cx="8549640" cy="621792"/>
+          </a:xfrm>
+          <a:prstGeom prst="rect">
+            <a:avLst/>
+          </a:prstGeom>
+          <a:noFill/>
+        </p:spPr>
+        <p:txBody>
+          <a:bodyPr wrap="square" anchor="ctr" lIns="0" rIns="0" tIns="0" bIns="0">
+            <a:spAutoFit/>
+          </a:bodyPr>
+          <a:lstStyle/>
+          <a:p>
+            <a:pPr algn="l">
+              <a:lnSpc>
+                <a:spcPct val="100000"/>
+              </a:lnSpc>
+            </a:pPr>
+            <a:r>
+              <a:rPr sz="3000" b="1">
+                <a:solidFill>
+                  <a:srgbClr val="113E6A"/>
+                </a:solidFill>
+                <a:latin typeface="Arial"/>
+                <a:ea typeface="微软雅黑"/>
+              </a:rPr>
+              <a:t>故障注入 Layer 0</a:t>
+            </a:r>
+          </a:p>
+        </p:txBody>
+      </p:sp>
+      <p:sp>
+        <p:nvSpPr>
+          <p:cNvPr id="9003" name="TextBox 9002"/>
+          <p:cNvSpPr txBox="1"/>
+          <p:nvPr/>
+        </p:nvSpPr>
+        <p:spPr>
+          <a:xfrm>
+            <a:off x="566928" y="1261872"/>
+            <a:ext cx="10881360" cy="438912"/>
+          </a:xfrm>
+          <a:prstGeom prst="rect">
+            <a:avLst/>
+          </a:prstGeom>
+          <a:noFill/>
+        </p:spPr>
+        <p:txBody>
+          <a:bodyPr wrap="square" anchor="ctr" lIns="0" rIns="0" tIns="0" bIns="0">
+            <a:spAutoFit/>
+          </a:bodyPr>
+          <a:lstStyle/>
+          <a:p>
+            <a:pPr algn="l">
+              <a:lnSpc>
+                <a:spcPct val="110000"/>
+              </a:lnSpc>
+            </a:pPr>
+            <a:r>
+              <a:rPr sz="1800" b="1">
+                <a:solidFill>
+                  <a:srgbClr val="0070C0"/>
+                </a:solidFill>
+                <a:latin typeface="Arial"/>
+                <a:ea typeface="微软雅黑"/>
+              </a:rPr>
+              <a:t>10% 节点注解漂移，300 次拦截全部转为合规重排</a:t>
+            </a:r>
+          </a:p>
+        </p:txBody>
+      </p:sp>
+      <p:pic>
+        <p:nvPicPr>
+          <p:cNvPr id="9004" name="Picture 9003" descr="fig6-29a-layer0-timeseries.png"/>
+          <p:cNvPicPr>
+            <a:picLocks noChangeAspect="1"/>
+          </p:cNvPicPr>
+          <p:nvPr/>
+        </p:nvPicPr>
+        <p:blipFill>
+          <a:blip r:embed="rId3"/>
+          <a:stretch>
+            <a:fillRect/>
+          </a:stretch>
+        </p:blipFill>
+        <p:spPr>
+          <a:xfrm>
+            <a:off x="5806440" y="2657246"/>
+            <a:ext cx="5852160" cy="2457907"/>
+          </a:xfrm>
+          <a:prstGeom prst="rect">
+            <a:avLst/>
+          </a:prstGeom>
+        </p:spPr>
+      </p:pic>
+      <p:sp>
+        <p:nvSpPr>
+          <p:cNvPr id="9005" name="TextBox 9004"/>
+          <p:cNvSpPr txBox="1"/>
+          <p:nvPr/>
+        </p:nvSpPr>
+        <p:spPr>
+          <a:xfrm>
+            <a:off x="566928" y="2011680"/>
+            <a:ext cx="5029200" cy="1417320"/>
+          </a:xfrm>
+          <a:prstGeom prst="rect">
+            <a:avLst/>
+          </a:prstGeom>
+          <a:noFill/>
+        </p:spPr>
+        <p:txBody>
+          <a:bodyPr wrap="square" anchor="t" lIns="0" rIns="0" tIns="0" bIns="0">
+            <a:spAutoFit/>
+          </a:bodyPr>
+          <a:lstStyle/>
+          <a:p>
+            <a:pPr algn="l">
+              <a:lnSpc>
+                <a:spcPct val="115000"/>
+              </a:lnSpc>
+            </a:pPr>
+            <a:r>
+              <a:rPr sz="1550" b="0">
+                <a:solidFill>
+                  <a:srgbClr val="2E2C2C"/>
+                </a:solidFill>
+                <a:latin typeface="Arial"/>
+                <a:ea typeface="微软雅黑"/>
+              </a:rPr>
+              <a:t>▪  拦截 300 次 / 回退 300 次</a:t>
+            </a:r>
+          </a:p>
+          <a:p>
+            <a:pPr algn="l">
+              <a:lnSpc>
+                <a:spcPct val="115000"/>
+              </a:lnSpc>
+              <a:spcBef>
+                <a:spcPts val="1400"/>
+              </a:spcBef>
+            </a:pPr>
+            <a:r>
+              <a:rPr sz="1550" b="0">
+                <a:solidFill>
+                  <a:srgbClr val="2E2C2C"/>
+                </a:solidFill>
+                <a:latin typeface="Arial"/>
+                <a:ea typeface="微软雅黑"/>
+              </a:rPr>
+              <a:t>▪  绑定成功率 1.00；断言 50000/50000</a:t>
+            </a:r>
+          </a:p>
+          <a:p>
+            <a:pPr algn="l">
+              <a:lnSpc>
+                <a:spcPct val="115000"/>
+              </a:lnSpc>
+              <a:spcBef>
+                <a:spcPts val="1400"/>
+              </a:spcBef>
+            </a:pPr>
+            <a:r>
+              <a:rPr sz="1550" b="0">
+                <a:solidFill>
+                  <a:srgbClr val="2E2C2C"/>
+                </a:solidFill>
+                <a:latin typeface="Arial"/>
+                <a:ea typeface="微软雅黑"/>
+              </a:rPr>
+              <a:t>▪  总耗时 683 s 对基线 680 s（+0.4%）</a:t>
+            </a:r>
+          </a:p>
+        </p:txBody>
+      </p:sp>
+      <p:sp>
+        <p:nvSpPr>
+          <p:cNvPr id="9006" name="TextBox 9005"/>
+          <p:cNvSpPr txBox="1"/>
+          <p:nvPr/>
+        </p:nvSpPr>
+        <p:spPr>
+          <a:xfrm>
+            <a:off x="566928" y="6309360"/>
+            <a:ext cx="10104120" cy="201168"/>
+          </a:xfrm>
+          <a:prstGeom prst="rect">
+            <a:avLst/>
+          </a:prstGeom>
+          <a:noFill/>
+        </p:spPr>
+        <p:txBody>
+          <a:bodyPr wrap="square" anchor="t" lIns="0" rIns="0" tIns="0" bIns="0">
+            <a:spAutoFit/>
+          </a:bodyPr>
+          <a:lstStyle/>
+          <a:p>
+            <a:pPr algn="l"/>
+            <a:r>
+              <a:rPr sz="850" b="0">
+                <a:solidFill>
+                  <a:srgbClr val="636363"/>
+                </a:solidFill>
+                <a:latin typeface="Arial"/>
+                <a:ea typeface="微软雅黑"/>
+              </a:rPr>
+              <a:t>编码：s1–s4 = 100 / 1000 / 5000 / 10000 节点；w1–w7 = 负载强度（w2 500、w3 1000、w4 2000 pods/s 极限、w5 突发、w6 Gang、w7 异构）；inst3 = 3 实例</a:t>
+            </a:r>
+          </a:p>
+        </p:txBody>
+      </p:sp>
+      <p:sp>
+        <p:nvSpPr>
+          <p:cNvPr id="9007" name="TextBox 9006"/>
+          <p:cNvSpPr txBox="1"/>
+          <p:nvPr/>
+        </p:nvSpPr>
+        <p:spPr>
+          <a:xfrm>
+            <a:off x="10780776" y="6345936"/>
+            <a:ext cx="850392" cy="219456"/>
+          </a:xfrm>
+          <a:prstGeom prst="rect">
+            <a:avLst/>
+          </a:prstGeom>
+          <a:noFill/>
+        </p:spPr>
+        <p:txBody>
+          <a:bodyPr wrap="square" anchor="t" lIns="0" rIns="0" tIns="0" bIns="0">
+            <a:spAutoFit/>
+          </a:bodyPr>
+          <a:lstStyle/>
+          <a:p>
+            <a:pPr algn="r"/>
+            <a:r>
+              <a:rPr sz="950" b="0">
+                <a:solidFill>
+                  <a:srgbClr val="636363"/>
+                </a:solidFill>
+                <a:latin typeface="Arial"/>
+                <a:ea typeface="微软雅黑"/>
+              </a:rPr>
+              <a:t>21 / 25</a:t>
+            </a:r>
+          </a:p>
+        </p:txBody>
+      </p:sp>
+    </p:spTree>
+  </p:cSld>
+  <p:clrMapOvr>
+    <a:masterClrMapping/>
+  </p:clrMapOvr>
+</p:sld>
+</file>
+
+<file path=ppt/slides/slide22.xml><?xml version="1.0" encoding="utf-8"?>
+<p:sld xmlns:a="http://schemas.openxmlformats.org/drawingml/2006/main" xmlns:p="http://schemas.openxmlformats.org/presentationml/2006/main" xmlns:r="http://schemas.openxmlformats.org/officeDocument/2006/relationships">
+  <p:cSld>
+    <p:bg>
+      <p:bgPr>
+        <a:solidFill>
+          <a:srgbClr val="FFFFFF"/>
+        </a:solidFill>
+        <a:effectLst/>
+      </p:bgPr>
+    </p:bg>
+    <p:spTree>
+      <p:nvGrpSpPr>
+        <p:cNvPr id="1" name=""/>
+        <p:cNvGrpSpPr/>
+        <p:nvPr/>
+      </p:nvGrpSpPr>
+      <p:grpSpPr/>
+      <p:sp>
+        <p:nvSpPr>
+          <p:cNvPr id="9000" name="Freeform 5"/>
+          <p:cNvSpPr/>
+          <p:nvPr/>
+        </p:nvSpPr>
+        <p:spPr>
+          <a:xfrm>
+            <a:off x="182880" y="274320"/>
+            <a:ext cx="310896" cy="402336"/>
+          </a:xfrm>
+          <a:custGeom>
+            <a:avLst/>
+            <a:gdLst/>
+            <a:ahLst/>
+            <a:cxnLst>
+              <a:cxn ang="0">
+                <a:pos x="2147483647" y="2147483647"/>
+              </a:cxn>
+              <a:cxn ang="0">
+                <a:pos x="2147483647" y="2147483647"/>
+              </a:cxn>
+              <a:cxn ang="0">
+                <a:pos x="2147483647" y="2147483647"/>
+              </a:cxn>
+              <a:cxn ang="0">
+                <a:pos x="2147483647" y="2147483647"/>
+              </a:cxn>
+              <a:cxn ang="0">
+                <a:pos x="2147483647" y="2147483647"/>
+              </a:cxn>
+              <a:cxn ang="0">
+                <a:pos x="2147483647" y="2147483647"/>
+              </a:cxn>
+              <a:cxn ang="0">
+                <a:pos x="2147483647" y="2147483647"/>
+              </a:cxn>
+              <a:cxn ang="0">
+                <a:pos x="2147483647" y="2147483647"/>
+              </a:cxn>
+              <a:cxn ang="0">
+                <a:pos x="2147483647" y="0"/>
+              </a:cxn>
+              <a:cxn ang="0">
+                <a:pos x="2147483647" y="2147483647"/>
+              </a:cxn>
+              <a:cxn ang="0">
+                <a:pos x="2147483647" y="2147483647"/>
+              </a:cxn>
+              <a:cxn ang="0">
+                <a:pos x="2147483647" y="2147483647"/>
+              </a:cxn>
+              <a:cxn ang="0">
+                <a:pos x="2147483647" y="2147483647"/>
+              </a:cxn>
+              <a:cxn ang="0">
+                <a:pos x="2147483647" y="2147483647"/>
+              </a:cxn>
+              <a:cxn ang="0">
+                <a:pos x="2147483647" y="2147483647"/>
+              </a:cxn>
+              <a:cxn ang="0">
+                <a:pos x="2147483647" y="2147483647"/>
+              </a:cxn>
+              <a:cxn ang="0">
+                <a:pos x="2147483647" y="2147483647"/>
+              </a:cxn>
+              <a:cxn ang="0">
+                <a:pos x="2147483647" y="2147483647"/>
+              </a:cxn>
+              <a:cxn ang="0">
+                <a:pos x="2147483647" y="2147483647"/>
+              </a:cxn>
+              <a:cxn ang="0">
+                <a:pos x="0" y="2147483647"/>
+              </a:cxn>
+              <a:cxn ang="0">
+                <a:pos x="2147483647" y="2147483647"/>
+              </a:cxn>
+            </a:cxnLst>
+            <a:rect l="0" t="0" r="0" b="0"/>
+            <a:pathLst>
+              <a:path w="574" h="681">
+                <a:moveTo>
+                  <a:pt x="120" y="441"/>
+                </a:moveTo>
+                <a:cubicBezTo>
+                  <a:pt x="153" y="441"/>
+                  <a:pt x="183" y="454"/>
+                  <a:pt x="205" y="476"/>
+                </a:cubicBezTo>
+                <a:lnTo>
+                  <a:pt x="389" y="329"/>
+                </a:lnTo>
+                <a:cubicBezTo>
+                  <a:pt x="383" y="317"/>
+                  <a:pt x="380" y="303"/>
+                  <a:pt x="380" y="289"/>
+                </a:cubicBezTo>
+                <a:cubicBezTo>
+                  <a:pt x="380" y="271"/>
+                  <a:pt x="384" y="255"/>
+                  <a:pt x="392" y="241"/>
+                </a:cubicBezTo>
+                <a:lnTo>
+                  <a:pt x="270" y="138"/>
+                </a:lnTo>
+                <a:cubicBezTo>
+                  <a:pt x="256" y="151"/>
+                  <a:pt x="237" y="159"/>
+                  <a:pt x="217" y="159"/>
+                </a:cubicBezTo>
+                <a:cubicBezTo>
+                  <a:pt x="173" y="159"/>
+                  <a:pt x="137" y="123"/>
+                  <a:pt x="137" y="79"/>
+                </a:cubicBezTo>
+                <a:cubicBezTo>
+                  <a:pt x="137" y="36"/>
+                  <a:pt x="173" y="0"/>
+                  <a:pt x="217" y="0"/>
+                </a:cubicBezTo>
+                <a:cubicBezTo>
+                  <a:pt x="260" y="0"/>
+                  <a:pt x="296" y="36"/>
+                  <a:pt x="296" y="79"/>
+                </a:cubicBezTo>
+                <a:cubicBezTo>
+                  <a:pt x="296" y="91"/>
+                  <a:pt x="293" y="103"/>
+                  <a:pt x="289" y="113"/>
+                </a:cubicBezTo>
+                <a:lnTo>
+                  <a:pt x="412" y="217"/>
+                </a:lnTo>
+                <a:cubicBezTo>
+                  <a:pt x="429" y="201"/>
+                  <a:pt x="452" y="192"/>
+                  <a:pt x="477" y="192"/>
+                </a:cubicBezTo>
+                <a:cubicBezTo>
+                  <a:pt x="530" y="192"/>
+                  <a:pt x="574" y="235"/>
+                  <a:pt x="574" y="289"/>
+                </a:cubicBezTo>
+                <a:cubicBezTo>
+                  <a:pt x="574" y="342"/>
+                  <a:pt x="530" y="386"/>
+                  <a:pt x="477" y="386"/>
+                </a:cubicBezTo>
+                <a:cubicBezTo>
+                  <a:pt x="449" y="386"/>
+                  <a:pt x="424" y="374"/>
+                  <a:pt x="406" y="355"/>
+                </a:cubicBezTo>
+                <a:lnTo>
+                  <a:pt x="224" y="501"/>
+                </a:lnTo>
+                <a:cubicBezTo>
+                  <a:pt x="234" y="518"/>
+                  <a:pt x="240" y="539"/>
+                  <a:pt x="240" y="561"/>
+                </a:cubicBezTo>
+                <a:cubicBezTo>
+                  <a:pt x="240" y="627"/>
+                  <a:pt x="186" y="681"/>
+                  <a:pt x="120" y="681"/>
+                </a:cubicBezTo>
+                <a:cubicBezTo>
+                  <a:pt x="54" y="681"/>
+                  <a:pt x="0" y="627"/>
+                  <a:pt x="0" y="561"/>
+                </a:cubicBezTo>
+                <a:cubicBezTo>
+                  <a:pt x="0" y="495"/>
+                  <a:pt x="54" y="441"/>
+                  <a:pt x="120" y="441"/>
+                </a:cubicBezTo>
+                <a:close/>
+              </a:path>
+            </a:pathLst>
+          </a:custGeom>
+          <a:solidFill>
+            <a:srgbClr val="113E6A"/>
+          </a:solidFill>
+          <a:ln w="9525">
+            <a:noFill/>
+          </a:ln>
+        </p:spPr>
+        <p:txBody>
+          <a:bodyPr/>
+          <a:lstStyle/>
+          <a:p>
+            <a:endParaRPr lang="zh-CN" altLang="en-US"/>
+          </a:p>
+        </p:txBody>
+      </p:sp>
+      <p:pic>
+        <p:nvPicPr>
+          <p:cNvPr id="9001" name="Picture 9000" descr="beihang-logo-navy.png"/>
+          <p:cNvPicPr>
+            <a:picLocks noChangeAspect="1"/>
+          </p:cNvPicPr>
+          <p:nvPr/>
+        </p:nvPicPr>
+        <p:blipFill>
+          <a:blip r:embed="rId2"/>
+          <a:stretch>
+            <a:fillRect/>
+          </a:stretch>
+        </p:blipFill>
+        <p:spPr>
+          <a:xfrm>
+            <a:off x="9336024" y="91665"/>
+            <a:ext cx="2642616" cy="502469"/>
+          </a:xfrm>
+          <a:prstGeom prst="rect">
+            <a:avLst/>
+          </a:prstGeom>
+        </p:spPr>
+      </p:pic>
+      <p:sp>
+        <p:nvSpPr>
+          <p:cNvPr id="9002" name="TextBox 9001"/>
+          <p:cNvSpPr txBox="1"/>
+          <p:nvPr/>
+        </p:nvSpPr>
+        <p:spPr>
+          <a:xfrm>
+            <a:off x="566928" y="155448"/>
+            <a:ext cx="8549640" cy="621792"/>
+          </a:xfrm>
+          <a:prstGeom prst="rect">
+            <a:avLst/>
+          </a:prstGeom>
+          <a:noFill/>
+        </p:spPr>
+        <p:txBody>
+          <a:bodyPr wrap="square" anchor="ctr" lIns="0" rIns="0" tIns="0" bIns="0">
+            <a:spAutoFit/>
+          </a:bodyPr>
+          <a:lstStyle/>
+          <a:p>
+            <a:pPr algn="l">
+              <a:lnSpc>
+                <a:spcPct val="100000"/>
+              </a:lnSpc>
+            </a:pPr>
+            <a:r>
+              <a:rPr sz="3000" b="1">
+                <a:solidFill>
+                  <a:srgbClr val="113E6A"/>
+                </a:solidFill>
+                <a:latin typeface="Arial"/>
+                <a:ea typeface="微软雅黑"/>
+              </a:rPr>
+              <a:t>故障注入 Layer 3</a:t>
+            </a:r>
+          </a:p>
+        </p:txBody>
+      </p:sp>
+      <p:sp>
+        <p:nvSpPr>
+          <p:cNvPr id="9003" name="TextBox 9002"/>
+          <p:cNvSpPr txBox="1"/>
+          <p:nvPr/>
+        </p:nvSpPr>
+        <p:spPr>
+          <a:xfrm>
+            <a:off x="566928" y="1261872"/>
+            <a:ext cx="10881360" cy="438912"/>
+          </a:xfrm>
+          <a:prstGeom prst="rect">
+            <a:avLst/>
+          </a:prstGeom>
+          <a:noFill/>
+        </p:spPr>
+        <p:txBody>
+          <a:bodyPr wrap="square" anchor="ctr" lIns="0" rIns="0" tIns="0" bIns="0">
+            <a:spAutoFit/>
+          </a:bodyPr>
+          <a:lstStyle/>
+          <a:p>
+            <a:pPr algn="l">
+              <a:lnSpc>
+                <a:spcPct val="110000"/>
+              </a:lnSpc>
+            </a:pPr>
+            <a:r>
+              <a:rPr sz="1800" b="1">
+                <a:solidFill>
+                  <a:srgbClr val="0070C0"/>
+                </a:solidFill>
+                <a:latin typeface="Arial"/>
+                <a:ea typeface="微软雅黑"/>
+              </a:rPr>
+              <a:t>杀掉 1/3 实例并停机 180 s，系统仍在 784 s 内完成全部绑定</a:t>
+            </a:r>
+          </a:p>
+        </p:txBody>
+      </p:sp>
+      <p:pic>
+        <p:nvPicPr>
+          <p:cNvPr id="9004" name="Picture 9003" descr="fig6-29b-layer3-timeseries.png"/>
+          <p:cNvPicPr>
+            <a:picLocks noChangeAspect="1"/>
+          </p:cNvPicPr>
+          <p:nvPr/>
+        </p:nvPicPr>
+        <p:blipFill>
+          <a:blip r:embed="rId3"/>
+          <a:stretch>
+            <a:fillRect/>
+          </a:stretch>
+        </p:blipFill>
+        <p:spPr>
+          <a:xfrm>
+            <a:off x="5806440" y="2657246"/>
+            <a:ext cx="5852160" cy="2457907"/>
+          </a:xfrm>
+          <a:prstGeom prst="rect">
+            <a:avLst/>
+          </a:prstGeom>
+        </p:spPr>
+      </p:pic>
+      <p:sp>
+        <p:nvSpPr>
+          <p:cNvPr id="9005" name="TextBox 9004"/>
+          <p:cNvSpPr txBox="1"/>
+          <p:nvPr/>
+        </p:nvSpPr>
+        <p:spPr>
+          <a:xfrm>
+            <a:off x="566928" y="2011680"/>
+            <a:ext cx="5029200" cy="1417320"/>
+          </a:xfrm>
+          <a:prstGeom prst="rect">
+            <a:avLst/>
+          </a:prstGeom>
+          <a:noFill/>
+        </p:spPr>
+        <p:txBody>
+          <a:bodyPr wrap="square" anchor="t" lIns="0" rIns="0" tIns="0" bIns="0">
+            <a:spAutoFit/>
+          </a:bodyPr>
+          <a:lstStyle/>
+          <a:p>
+            <a:pPr algn="l">
+              <a:lnSpc>
+                <a:spcPct val="115000"/>
+              </a:lnSpc>
+            </a:pPr>
+            <a:r>
+              <a:rPr sz="1550" b="0">
+                <a:solidFill>
+                  <a:srgbClr val="2E2C2C"/>
+                </a:solidFill>
+                <a:latin typeface="Arial"/>
+                <a:ea typeface="微软雅黑"/>
+              </a:rPr>
+              <a:t>▪  被杀实例绑定占比 68/8407 = 0.81%</a:t>
+            </a:r>
+          </a:p>
+          <a:p>
+            <a:pPr algn="l">
+              <a:lnSpc>
+                <a:spcPct val="115000"/>
+              </a:lnSpc>
+              <a:spcBef>
+                <a:spcPts val="1400"/>
+              </a:spcBef>
+            </a:pPr>
+            <a:r>
+              <a:rPr sz="1550" b="0">
+                <a:solidFill>
+                  <a:srgbClr val="2E2C2C"/>
+                </a:solidFill>
+                <a:latin typeface="Arial"/>
+                <a:ea typeface="微软雅黑"/>
+              </a:rPr>
+              <a:t>▪  存活实例接管 8407 pods；pending 353→2</a:t>
+            </a:r>
+          </a:p>
+          <a:p>
+            <a:pPr algn="l">
+              <a:lnSpc>
+                <a:spcPct val="115000"/>
+              </a:lnSpc>
+              <a:spcBef>
+                <a:spcPts val="1400"/>
+              </a:spcBef>
+            </a:pPr>
+            <a:r>
+              <a:rPr sz="1550" b="0">
+                <a:solidFill>
+                  <a:srgbClr val="2E2C2C"/>
+                </a:solidFill>
+                <a:latin typeface="Arial"/>
+                <a:ea typeface="微软雅黑"/>
+              </a:rPr>
+              <a:t>▪  总耗时 784 s，较基线 +15.3%</a:t>
             </a:r>
           </a:p>
         </p:txBody>

--- a/docs/thesis/defense/答辩PPT-北航模板版.pptx
+++ b/docs/thesis/defense/答辩PPT-北航模板版.pptx
@@ -1408,7 +1408,7 @@
           <a:lstStyle/>
           <a:p>
             <a:r>
-              <a:t>在给性能数字之前，先说正确性。144 次 run，每次跑完都在 apiserver 侧断言：未绑定为零、重复绑定为零，全部通过；ENO 那 48 次 run 成功率都是 100%。两场故障注入各 6 项判据全过。所谓正确，不是日志里没报错，而是外部可观测的事实对得上。断言是在 apiserver 侧做的，不是调度器自报。</a:t>
+              <a:t>在给性能数字之前，先说正确性。144 次 run，每次跑完都在 apiserver 侧断言：未绑定为零、重复绑定为零，全部通过；ENO 那 48 次 run 成功率都是 100%。两场故障注入各 6 项判据全过：Layer 0 拦截 300 次、全部由 Dispatcher 回退重排；Layer 3 存活实例接管 8407 个 Pod、pending 从 353 回落到 2。所谓正确，不是日志里没报错，而是外部可观测的事实对得上。断言是在 apiserver 侧做的，不是调度器自报。</a:t>
             </a:r>
           </a:p>
         </p:txBody>
@@ -12679,7 +12679,7 @@
                 <a:latin typeface="Arial"/>
                 <a:ea typeface="微软雅黑"/>
               </a:rPr>
-              <a:t>▪  Layer 0 / Layer 3 故障注入各 6 项判据全过</a:t>
+              <a:t>▪  故障注入各 6 项判据全过：L0 拦截 300 次、全部经回退重排；L3 存活实例接管 8407 pods、pending 353 → 2</a:t>
             </a:r>
           </a:p>
           <a:p>

--- a/docs/thesis/defense/答辩PPT-北航模板版.pptx
+++ b/docs/thesis/defense/答辩PPT-北航模板版.pptx
@@ -1198,7 +1198,7 @@
           <a:lstStyle/>
           <a:p>
             <a:r>
-              <a:t>所有机制最后都归约到这一条不变量 I：任一 Pod 至多绑定到一个节点。证明拆四点。P1 是 Bind 唯一性，来自 Kubernetes 自身：nodeName 为空才允许原子写入，重复写返回 409。P2 是 Assumed 清理，Reject 阶段 ForgetPod 清内存态，Layer 2 清 etcd 注解。P3 是清理到重分发的时序，一次 PatchPod 原子提交。P4 是 Layer 0 前置拦截，缓存滞后由 P1 兜底。这也是后面所有实验断言的设计依据：断言查的就是未绑定与重复绑定两项。</a:t>
+              <a:t>所有机制最后都归约到这一条不变量 I：任一 Pod 至多绑定到一个节点。证明拆四点。P1 是 Bind 唯一性，来自 Kubernetes 自身：nodeName 为空才允许原子写入，重复写返回 409。P2 是 Assumed 清理，Reject 阶段 ForgetPod 清内存态，Layer 2 清 etcd 注解。P3 是清理到重分发的时序，一次 PatchPod 原子提交。P4 是 Layer 0 前置拦截，缓存滞后由 P1 兜底。</a:t>
             </a:r>
           </a:p>
         </p:txBody>
@@ -2178,7 +2178,7 @@
           <a:lstStyle/>
           <a:p>
             <a:r>
-              <a:t>最后收束。两个创新：ENO 把 Binder 放进进程内并用 CacheAdapter 共享缓存；四层容错给出不变量 I 的证明要点。三组证据：16 场景 144 次 run 全成功、平均 +11.9%、P99 最高 -82.9%、实例扩展 +17.5% 对 +1.4%。价值：不改 API、保留开关、基准开源。三组证据合起来，正好对应问题、方法与效果。</a:t>
+              <a:t>最后收束。两个创新：ENO 把 Binder 放进进程内并用 CacheAdapter 共享缓存；四层容错给出不变量 I 的证明要点。三组证据：16 场景 144 次 run 全成功、平均 +11.9%、P99 最高 -82.9%、实例扩展 +17.5% 对 +1.4%。价值：不改 API、保留开关、基准开源。</a:t>
             </a:r>
           </a:p>
         </p:txBody>
@@ -2248,7 +2248,7 @@
           <a:lstStyle/>
           <a:p>
             <a:r>
-              <a:t>汇报到这里。一句话总结：把 Binder 合并进 Scheduler 进程，用 etcd 原子语义上的四层容错守住“至多绑定一次”，在 16 个场景、144 次 run 上做到更高吞吐、更低尾延迟与 100% 绑定成功率。请各位老师批评指正。如果只问一个问题，我的回答就是刚才那一句。</a:t>
+              <a:t>汇报到这里。一句话总结：把 Binder 合并进 Scheduler 进程，用 etcd 原子语义上的四层容错守住“至多绑定一次”，在 16 个场景、144 次 run 上做到更高吞吐、更低尾延迟与 100% 绑定成功率。请各位老师批评指正。</a:t>
             </a:r>
           </a:p>
         </p:txBody>
@@ -3018,7 +3018,7 @@
           <a:lstStyle/>
           <a:p>
             <a:r>
-              <a:t>Dispatcher 内部三步。第一步排序入队：nodeName 为空、还没有 scheduler-name 注解的新 Pod，按 FIFO 进有序队列。第二步分发决策：PodGroup 成员复用已分配实例，否则按负载均衡挑最空闲的。第三步写入并跟踪：PatchPod 写 scheduler-name，失败进不可调度队列。注意它不选节点，只决定 Pod 去哪。</a:t>
+              <a:t>Dispatcher 内部三步。第一步排序入队：nodeName 为空、还没有 scheduler-name 注解的新 Pod，按 FIFO 进有序队列。第二步分发决策：PodGroup 成员复用已分配实例，否则按负载均衡挑最空闲的。第三步写入并跟踪：PatchPod 写 scheduler-name，失败进不可调度队列。</a:t>
             </a:r>
           </a:p>
         </p:txBody>

--- a/docs/thesis/defense/答辩PPT-北航模板版.pptx
+++ b/docs/thesis/defense/答辩PPT-北航模板版.pptx
@@ -1408,7 +1408,7 @@
           <a:lstStyle/>
           <a:p>
             <a:r>
-              <a:t>在给性能数字之前，先说正确性。144 次 run，每次跑完都在 apiserver 侧断言：未绑定为零、重复绑定为零，全部通过；ENO 那 48 次 run 成功率都是 100%。两场故障注入各 6 项判据全过：Layer 0 拦截 300 次、全部由 Dispatcher 回退重排；Layer 3 存活实例接管 8407 个 Pod、pending 从 353 回落到 2。所谓正确，不是日志里没报错，而是外部可观测的事实对得上。断言是在 apiserver 侧做的，不是调度器自报。</a:t>
+              <a:t>在给性能数字之前，先说正确性。144 次 run，每次跑完都在 apiserver 侧断言：未绑定为零、重复绑定为零，全部通过；ENO 那 48 次 run 成功率都是 100%。两场故障注入各 6 项判据全过。所谓正确，不是日志里没报错，而是外部可观测的事实对得上。断言是在 apiserver 侧做的，不是调度器自报。</a:t>
             </a:r>
           </a:p>
         </p:txBody>
@@ -12679,7 +12679,7 @@
                 <a:latin typeface="Arial"/>
                 <a:ea typeface="微软雅黑"/>
               </a:rPr>
-              <a:t>▪  故障注入各 6 项判据全过：L0 拦截 300 次、全部经回退重排；L3 存活实例接管 8407 pods、pending 353 → 2</a:t>
+              <a:t>▪  Layer 0 / Layer 3 故障注入均通过 6 项判据</a:t>
             </a:r>
           </a:p>
           <a:p>

--- a/docs/thesis/defense/答辩PPT-北航模板版.pptx
+++ b/docs/thesis/defense/答辩PPT-北航模板版.pptx
@@ -12679,7 +12679,7 @@
                 <a:latin typeface="Arial"/>
                 <a:ea typeface="微软雅黑"/>
               </a:rPr>
-              <a:t>▪  Layer 0 / Layer 3 故障注入均通过 6 项判据</a:t>
+              <a:t>▪  Layer 0 / Layer 3 故障注入均通过</a:t>
             </a:r>
           </a:p>
           <a:p>

--- a/docs/thesis/defense/答辩PPT-北航模板版.pptx
+++ b/docs/thesis/defense/答辩PPT-北航模板版.pptx
@@ -12680,26 +12680,6 @@
                 <a:ea typeface="微软雅黑"/>
               </a:rPr>
               <a:t>▪  Layer 0 / Layer 3 故障注入均通过</a:t>
-            </a:r>
-          </a:p>
-          <a:p>
-            <a:pPr algn="l">
-              <a:lnSpc>
-                <a:spcPct val="115000"/>
-              </a:lnSpc>
-              <a:spcBef>
-                <a:spcPts val="1200"/>
-              </a:spcBef>
-            </a:pPr>
-            <a:r>
-              <a:rPr sz="1550" b="0">
-                <a:solidFill>
-                  <a:srgbClr val="2E2C2C"/>
-                </a:solidFill>
-                <a:latin typeface="Arial"/>
-                <a:ea typeface="微软雅黑"/>
-              </a:rPr>
-              <a:t>▪  断言在 apiserver 侧可复核</a:t>
             </a:r>
           </a:p>
         </p:txBody>

--- a/docs/thesis/defense/答辩PPT-北航模板版.pptx
+++ b/docs/thesis/defense/答辩PPT-北航模板版.pptx
@@ -13966,14 +13966,14 @@
               </a:lnSpc>
             </a:pPr>
             <a:r>
-              <a:rPr sz="3000" b="1">
+              <a:rPr sz="2400" b="1">
                 <a:solidFill>
                   <a:srgbClr val="113E6A"/>
                 </a:solidFill>
                 <a:latin typeface="Arial"/>
                 <a:ea typeface="微软雅黑"/>
               </a:rPr>
-              <a:t>ENO vs Gödel</a:t>
+              <a:t>ENO vs Gödel 各场景吞吐对比</a:t>
             </a:r>
           </a:p>
         </p:txBody>

--- a/docs/thesis/defense/答辩PPT-北航模板版.pptx
+++ b/docs/thesis/defense/答辩PPT-北航模板版.pptx
@@ -1618,7 +1618,7 @@
           <a:lstStyle/>
           <a:p>
             <a:r>
-              <a:t>延迟这页。除 s2/w2 外，11 个非 Gang 场景 P99 都低于 Gödel，改善 0.3% 到 82.9%。最典型是 s2/w3，23.48 秒降到 4.00 秒；单实例 s3/w3 从 32.57 秒到 16.22 秒。Pod 端到端 P99 在 12 个非 Gang 场景也都不高于 Gödel。Gang 是反的，放到局限里展开。延迟单位是秒，纵轴用对数，便于跨量级比较。改善的下界 0.3% 出现在已经接近饱和的场景。</a:t>
+              <a:t>和 Gödel 逐场景对比：16 个场景里 14 个领先，2 个持平，没有落后的，提升 2.0% 到 22.9%，平均 11.9%。优势最大的是高负载与多实例：s2/w3 高 22.9%，s3/w3 三实例高 21.7%。两个持平场景都没饱和，完成时间由注入速率决定。两个持平场景说明，未饱和时调度器再快也压不出更多吞吐。平均 11.9% 是 14 个领先场景提升幅度的均值。</a:t>
             </a:r>
           </a:p>
         </p:txBody>
@@ -13966,7 +13966,7 @@
               </a:lnSpc>
             </a:pPr>
             <a:r>
-              <a:rPr sz="2400" b="1">
+              <a:rPr sz="3000" b="1">
                 <a:solidFill>
                   <a:srgbClr val="113E6A"/>
                 </a:solidFill>
@@ -14476,7 +14476,7 @@
                 <a:latin typeface="Arial"/>
                 <a:ea typeface="微软雅黑"/>
               </a:rPr>
-              <a:t>尾延迟</a:t>
+              <a:t>ENO vs Gödel 各场景尾延迟对比</a:t>
             </a:r>
           </a:p>
         </p:txBody>
@@ -25161,7 +25161,7 @@
               </a:lnSpc>
             </a:pPr>
             <a:r>
-              <a:rPr sz="2400" b="1">
+              <a:rPr sz="3000" b="1">
                 <a:solidFill>
                   <a:srgbClr val="113E6A"/>
                 </a:solidFill>
@@ -28262,7 +28262,7 @@
               </a:lnSpc>
             </a:pPr>
             <a:r>
-              <a:rPr sz="2400" b="1">
+              <a:rPr sz="3000" b="1">
                 <a:solidFill>
                   <a:srgbClr val="113E6A"/>
                 </a:solidFill>

--- a/docs/thesis/defense/答辩PPT-北航模板版.pptx
+++ b/docs/thesis/defense/答辩PPT-北航模板版.pptx
@@ -14573,14 +14573,14 @@
               </a:lnSpc>
             </a:pPr>
             <a:r>
-              <a:rPr sz="1550" b="0">
+              <a:rPr sz="1350" b="0">
                 <a:solidFill>
                   <a:srgbClr val="2E2C2C"/>
                 </a:solidFill>
                 <a:latin typeface="Arial"/>
                 <a:ea typeface="微软雅黑"/>
               </a:rPr>
-              <a:t>▪  P99 改善 0.3%~82.9%（除 s2/w2）</a:t>
+              <a:t>▪  16 个场景：11 好、1 持平（s2/w2）、3 个 Gang 反向、1 个无数据</a:t>
             </a:r>
           </a:p>
           <a:p>
@@ -14589,18 +14589,18 @@
                 <a:spcPct val="115000"/>
               </a:lnSpc>
               <a:spcBef>
-                <a:spcPts val="1400"/>
+                <a:spcPts val="1000"/>
               </a:spcBef>
             </a:pPr>
             <a:r>
-              <a:rPr sz="1550" b="0">
+              <a:rPr sz="1350" b="0">
                 <a:solidFill>
                   <a:srgbClr val="2E2C2C"/>
                 </a:solidFill>
                 <a:latin typeface="Arial"/>
                 <a:ea typeface="微软雅黑"/>
               </a:rPr>
-              <a:t>▪  s3/w3 inst1 32.57→16.22 s（-50.2%）</a:t>
+              <a:t>▪  Gang（w6）3 个场景全部偏差：P99 高 1.6~4.1 倍，但吞吐仍 +4.3%~+19.1%</a:t>
             </a:r>
           </a:p>
           <a:p>
@@ -14609,18 +14609,18 @@
                 <a:spcPct val="115000"/>
               </a:lnSpc>
               <a:spcBef>
-                <a:spcPts val="1400"/>
+                <a:spcPts val="1000"/>
               </a:spcBef>
             </a:pPr>
             <a:r>
-              <a:rPr sz="1550" b="0">
+              <a:rPr sz="1350" b="0">
                 <a:solidFill>
                   <a:srgbClr val="2E2C2C"/>
                 </a:solidFill>
                 <a:latin typeface="Arial"/>
                 <a:ea typeface="微软雅黑"/>
               </a:rPr>
-              <a:t>▪  Pod E2E P99 改善 0.6%~75.3%</a:t>
+              <a:t>▪  Pod E2E P99：12 个非 Gang 改善 0.6%~75.3%，3 个 Gang 高 11.9%~122.2%</a:t>
             </a:r>
           </a:p>
         </p:txBody>

--- a/docs/thesis/defense/答辩PPT-北航模板版.pptx
+++ b/docs/thesis/defense/答辩PPT-北航模板版.pptx
@@ -14580,7 +14580,7 @@
                 <a:latin typeface="Arial"/>
                 <a:ea typeface="微软雅黑"/>
               </a:rPr>
-              <a:t>▪  16 个场景：11 好、1 持平（s2/w2）、3 个 Gang 反向、1 个无数据</a:t>
+              <a:t>▪  15 个场景：11 好、1 持平（s2/w2）、3 个 Gang 反向</a:t>
             </a:r>
           </a:p>
           <a:p>

--- a/docs/thesis/defense/答辩PPT-北航模板版.pptx
+++ b/docs/thesis/defense/答辩PPT-北航模板版.pptx
@@ -1688,7 +1688,7 @@
           <a:lstStyle/>
           <a:p>
             <a:r>
-              <a:t>这是全文最强的归因证据。同样把实例从 1 加到 3，两边延迟都降约 99%，这部分一样。差别在吞吐：ENO 从 297.6 到 349.7，提升 17.5%；Gödel 从 283.3 到 287.4，只提升 1.4%。同样多的并发能力，Gödel 的增量被独立 Binder 的串行绑定吸收掉了。延迟数量级下降说明瓶颈不在决策侧，而在绑定这一环的串行化。峰值吞吐两家都涨，但只有 ENO 把增量转化成了有效吞吐。</a:t>
+              <a:t>和 Gödel 逐场景对比：16 个场景里 14 个领先，2 个持平，没有落后的，提升 2.0% 到 22.9%，平均 11.9%。优势最大的是高负载与多实例：s2/w3 高 22.9%，s3/w3 三实例高 21.7%。两个持平场景都没饱和，完成时间由注入速率决定。两个持平场景说明，未饱和时调度器再快也压不出更多吞吐。平均 11.9% 是 14 个领先场景提升幅度的均值。</a:t>
             </a:r>
           </a:p>
         </p:txBody>
@@ -14979,7 +14979,7 @@
                 <a:latin typeface="Arial"/>
                 <a:ea typeface="微软雅黑"/>
               </a:rPr>
-              <a:t>实例 1→3</a:t>
+              <a:t>ENO vs Gödel 实例扩展对比</a:t>
             </a:r>
           </a:p>
         </p:txBody>

--- a/docs/thesis/defense/答辩PPT-北航模板版.pptx
+++ b/docs/thesis/defense/答辩PPT-北航模板版.pptx
@@ -15443,46 +15443,6 @@
                 <a:ea typeface="微软雅黑"/>
               </a:rPr>
               <a:t>▪  延迟都降约 99%，但吞吐转化率差 12 倍</a:t>
-            </a:r>
-          </a:p>
-          <a:p>
-            <a:pPr algn="l">
-              <a:lnSpc>
-                <a:spcPct val="115000"/>
-              </a:lnSpc>
-              <a:spcBef>
-                <a:spcPts val="400"/>
-              </a:spcBef>
-            </a:pPr>
-            <a:r>
-              <a:rPr sz="1200" b="0">
-                <a:solidFill>
-                  <a:srgbClr val="2E2C2C"/>
-                </a:solidFill>
-                <a:latin typeface="Arial"/>
-                <a:ea typeface="微软雅黑"/>
-              </a:rPr>
-              <a:t>▪  Gödel 增量被独立 Binder 串行吸收</a:t>
-            </a:r>
-          </a:p>
-          <a:p>
-            <a:pPr algn="l">
-              <a:lnSpc>
-                <a:spcPct val="115000"/>
-              </a:lnSpc>
-              <a:spcBef>
-                <a:spcPts val="400"/>
-              </a:spcBef>
-            </a:pPr>
-            <a:r>
-              <a:rPr sz="1200" b="0">
-                <a:solidFill>
-                  <a:srgbClr val="2E2C2C"/>
-                </a:solidFill>
-                <a:latin typeface="Arial"/>
-                <a:ea typeface="微软雅黑"/>
-              </a:rPr>
-              <a:t>▪  这是架构归因最强的一组证据</a:t>
             </a:r>
           </a:p>
         </p:txBody>

--- a/docs/thesis/defense/答辩PPT-北航模板版.pptx
+++ b/docs/thesis/defense/答辩PPT-北航模板版.pptx
@@ -15856,7 +15856,7 @@
         </p:nvGraphicFramePr>
         <p:xfrm>
           <a:off x="566928" y="1828800"/>
-          <a:ext cx="11064240" cy="2103120"/>
+          <a:ext cx="11064240" cy="2560320"/>
         </p:xfrm>
         <a:graphic>
           <a:graphicData uri="http://schemas.openxmlformats.org/drawingml/2006/table">
@@ -15865,11 +15865,11 @@
                 <a:tableStyleId>{5C22544A-7EE6-4342-B048-85BDC9FD1C3A}</a:tableStyleId>
               </a:tblPr>
               <a:tblGrid>
-                <a:gridCol w="3688080"/>
-                <a:gridCol w="3688080"/>
-                <a:gridCol w="3688080"/>
+                <a:gridCol w="2423160"/>
+                <a:gridCol w="4160520"/>
+                <a:gridCol w="4480560"/>
               </a:tblGrid>
-              <a:tr h="420624">
+              <a:tr h="512064">
                 <a:tc>
                   <a:txBody>
                     <a:bodyPr wrap="square"/>
@@ -15877,7 +15877,7 @@
                     <a:p>
                       <a:pPr algn="l"/>
                       <a:r>
-                        <a:rPr sz="1200" b="1">
+                        <a:rPr sz="1150" b="1">
                           <a:solidFill>
                             <a:srgbClr val="FFFFFF"/>
                           </a:solidFill>
@@ -15901,14 +15901,14 @@
                     <a:p>
                       <a:pPr algn="ctr"/>
                       <a:r>
-                        <a:rPr sz="1200" b="1">
+                        <a:rPr sz="1150" b="1">
                           <a:solidFill>
                             <a:srgbClr val="FFFFFF"/>
                           </a:solidFill>
                           <a:latin typeface="Arial"/>
                           <a:ea typeface="微软雅黑"/>
                         </a:rPr>
-                        <a:t>ENO vs Gödel 有效吞吐</a:t>
+                        <a:t>有效吞吐（ENO vs Gödel）</a:t>
                       </a:r>
                     </a:p>
                   </a:txBody>
@@ -15925,14 +15925,14 @@
                     <a:p>
                       <a:pPr algn="ctr"/>
                       <a:r>
-                        <a:rPr sz="1200" b="1">
+                        <a:rPr sz="1150" b="1">
                           <a:solidFill>
                             <a:srgbClr val="FFFFFF"/>
                           </a:solidFill>
                           <a:latin typeface="Arial"/>
                           <a:ea typeface="微软雅黑"/>
                         </a:rPr>
-                        <a:t>P99 / E2E 变化</a:t>
+                        <a:t>尾延迟变化</a:t>
                       </a:r>
                     </a:p>
                   </a:txBody>
@@ -15943,7 +15943,7 @@
                   </a:tcPr>
                 </a:tc>
               </a:tr>
-              <a:tr h="420624">
+              <a:tr h="512064">
                 <a:tc>
                   <a:txBody>
                     <a:bodyPr wrap="square"/>
@@ -15951,14 +15951,14 @@
                     <a:p>
                       <a:pPr algn="l"/>
                       <a:r>
-                        <a:rPr sz="1200" b="0">
+                        <a:rPr sz="1150" b="0">
                           <a:solidFill>
                             <a:srgbClr val="2E2C2C"/>
                           </a:solidFill>
                           <a:latin typeface="Arial"/>
                           <a:ea typeface="微软雅黑"/>
                         </a:rPr>
-                        <a:t>s3→s4（w3，实例不变）</a:t>
+                        <a:t>s3 → s4（w3）</a:t>
                       </a:r>
                     </a:p>
                   </a:txBody>
@@ -15975,14 +15975,14 @@
                     <a:p>
                       <a:pPr algn="ctr"/>
                       <a:r>
-                        <a:rPr sz="1200" b="0">
+                        <a:rPr sz="1150" b="0">
                           <a:solidFill>
                             <a:srgbClr val="2E2C2C"/>
                           </a:solidFill>
                           <a:latin typeface="Arial"/>
                           <a:ea typeface="微软雅黑"/>
                         </a:rPr>
-                        <a:t>349.7→296.7 vs 287.4→280.9（+5.6%）</a:t>
+                        <a:t>+5.6%（296.7 vs 280.9）</a:t>
                       </a:r>
                     </a:p>
                   </a:txBody>
@@ -15999,7 +15999,7 @@
                     <a:p>
                       <a:pPr algn="ctr"/>
                       <a:r>
-                        <a:rPr sz="1200" b="0">
+                        <a:rPr sz="1150" b="0">
                           <a:solidFill>
                             <a:srgbClr val="2E2C2C"/>
                           </a:solidFill>
@@ -16017,7 +16017,7 @@
                   </a:tcPr>
                 </a:tc>
               </a:tr>
-              <a:tr h="420624">
+              <a:tr h="512064">
                 <a:tc>
                   <a:txBody>
                     <a:bodyPr wrap="square"/>
@@ -16025,7 +16025,7 @@
                     <a:p>
                       <a:pPr algn="l"/>
                       <a:r>
-                        <a:rPr sz="1200" b="0">
+                        <a:rPr sz="1150" b="0">
                           <a:solidFill>
                             <a:srgbClr val="2E2C2C"/>
                           </a:solidFill>
@@ -16049,7 +16049,7 @@
                     <a:p>
                       <a:pPr algn="ctr"/>
                       <a:r>
-                        <a:rPr sz="1200" b="0">
+                        <a:rPr sz="1150" b="0">
                           <a:solidFill>
                             <a:srgbClr val="2E2C2C"/>
                           </a:solidFill>
@@ -16073,14 +16073,14 @@
                     <a:p>
                       <a:pPr algn="ctr"/>
                       <a:r>
-                        <a:rPr sz="1200" b="0">
+                        <a:rPr sz="1150" b="0">
                           <a:solidFill>
                             <a:srgbClr val="2E2C2C"/>
                           </a:solidFill>
                           <a:latin typeface="Arial"/>
                           <a:ea typeface="微软雅黑"/>
                         </a:rPr>
-                        <a:t>P99 -49.7% / -14.8%；E2E -32.6%~-35.3%</a:t>
+                        <a:t>P99 −49.7% / −14.8%</a:t>
                       </a:r>
                     </a:p>
                   </a:txBody>
@@ -16091,7 +16091,7 @@
                   </a:tcPr>
                 </a:tc>
               </a:tr>
-              <a:tr h="420624">
+              <a:tr h="512064">
                 <a:tc>
                   <a:txBody>
                     <a:bodyPr wrap="square"/>
@@ -16099,7 +16099,7 @@
                     <a:p>
                       <a:pPr algn="l"/>
                       <a:r>
-                        <a:rPr sz="1200" b="0">
+                        <a:rPr sz="1150" b="0">
                           <a:solidFill>
                             <a:srgbClr val="2E2C2C"/>
                           </a:solidFill>
@@ -16123,7 +16123,7 @@
                     <a:p>
                       <a:pPr algn="ctr"/>
                       <a:r>
-                        <a:rPr sz="1200" b="0">
+                        <a:rPr sz="1150" b="0">
                           <a:solidFill>
                             <a:srgbClr val="2E2C2C"/>
                           </a:solidFill>
@@ -16147,14 +16147,14 @@
                     <a:p>
                       <a:pPr algn="ctr"/>
                       <a:r>
-                        <a:rPr sz="1200" b="0">
+                        <a:rPr sz="1150" b="0">
                           <a:solidFill>
                             <a:srgbClr val="2E2C2C"/>
                           </a:solidFill>
                           <a:latin typeface="Arial"/>
                           <a:ea typeface="微软雅黑"/>
                         </a:rPr>
-                        <a:t>s3 E2E -53.8%；s4 基本持平</a:t>
+                        <a:t>E2E −53.8% / 持平</a:t>
                       </a:r>
                     </a:p>
                   </a:txBody>
@@ -16165,7 +16165,7 @@
                   </a:tcPr>
                 </a:tc>
               </a:tr>
-              <a:tr h="420624">
+              <a:tr h="512064">
                 <a:tc>
                   <a:txBody>
                     <a:bodyPr wrap="square"/>
@@ -16173,7 +16173,7 @@
                     <a:p>
                       <a:pPr algn="l"/>
                       <a:r>
-                        <a:rPr sz="1200" b="0">
+                        <a:rPr sz="1150" b="0">
                           <a:solidFill>
                             <a:srgbClr val="2E2C2C"/>
                           </a:solidFill>
@@ -16197,14 +16197,14 @@
                     <a:p>
                       <a:pPr algn="ctr"/>
                       <a:r>
-                        <a:rPr sz="1200" b="0">
+                        <a:rPr sz="1150" b="0">
                           <a:solidFill>
                             <a:srgbClr val="2E2C2C"/>
                           </a:solidFill>
                           <a:latin typeface="Arial"/>
                           <a:ea typeface="微软雅黑"/>
                         </a:rPr>
-                        <a:t>+21.2% / 基本持平</a:t>
+                        <a:t>+21.2% / 持平</a:t>
                       </a:r>
                     </a:p>
                   </a:txBody>
@@ -16221,14 +16221,14 @@
                     <a:p>
                       <a:pPr algn="ctr"/>
                       <a:r>
-                        <a:rPr sz="1200" b="0">
+                        <a:rPr sz="1150" b="0">
                           <a:solidFill>
                             <a:srgbClr val="2E2C2C"/>
                           </a:solidFill>
                           <a:latin typeface="Arial"/>
                           <a:ea typeface="微软雅黑"/>
                         </a:rPr>
-                        <a:t>s3 E2E -67.6%</a:t>
+                        <a:t>E2E −67.6% / 持平</a:t>
                       </a:r>
                     </a:p>
                   </a:txBody>
@@ -16251,7 +16251,7 @@
         </p:nvSpPr>
         <p:spPr>
           <a:xfrm>
-            <a:off x="566928" y="5074920"/>
+            <a:off x="566928" y="4718304"/>
             <a:ext cx="10972800" cy="914400"/>
           </a:xfrm>
           <a:prstGeom prst="rect">

--- a/docs/thesis/defense/答辩PPT-北航模板版.pptx
+++ b/docs/thesis/defense/答辩PPT-北航模板版.pptx
@@ -15958,7 +15958,7 @@
                           <a:latin typeface="Arial"/>
                           <a:ea typeface="微软雅黑"/>
                         </a:rPr>
-                        <a:t>s3 → s4（w3）</a:t>
+                        <a:t>w3 稳态（s3 → s4）</a:t>
                       </a:r>
                     </a:p>
                   </a:txBody>

--- a/docs/thesis/defense/答辩PPT-北航模板版.pptx
+++ b/docs/thesis/defense/答辩PPT-北航模板版.pptx
@@ -15958,7 +15958,7 @@
                           <a:latin typeface="Arial"/>
                           <a:ea typeface="微软雅黑"/>
                         </a:rPr>
-                        <a:t>w3 稳态（s3 → s4）</a:t>
+                        <a:t>w3 稳态（s3 / s4）</a:t>
                       </a:r>
                     </a:p>
                   </a:txBody>
@@ -15982,7 +15982,7 @@
                           <a:latin typeface="Arial"/>
                           <a:ea typeface="微软雅黑"/>
                         </a:rPr>
-                        <a:t>+5.6%（296.7 vs 280.9）</a:t>
+                        <a:t>+21.7% / +5.6%</a:t>
                       </a:r>
                     </a:p>
                   </a:txBody>
@@ -16006,7 +16006,7 @@
                           <a:latin typeface="Arial"/>
                           <a:ea typeface="微软雅黑"/>
                         </a:rPr>
-                        <a:t>P99 0.19 vs 0.28 s（低 33.4%）</a:t>
+                        <a:t>P99 −15.2% / −33.4%</a:t>
                       </a:r>
                     </a:p>
                   </a:txBody>

--- a/docs/thesis/defense/答辩PPT-北航模板版.pptx
+++ b/docs/thesis/defense/答辩PPT-北航模板版.pptx
@@ -15932,7 +15932,7 @@
                           <a:latin typeface="Arial"/>
                           <a:ea typeface="微软雅黑"/>
                         </a:rPr>
-                        <a:t>尾延迟变化</a:t>
+                        <a:t>P99 调度延迟（相对 Gödel）</a:t>
                       </a:r>
                     </a:p>
                   </a:txBody>
@@ -16006,7 +16006,7 @@
                           <a:latin typeface="Arial"/>
                           <a:ea typeface="微软雅黑"/>
                         </a:rPr>
-                        <a:t>P99 −15.2% / −33.4%</a:t>
+                        <a:t>−15.2% / −33.4%</a:t>
                       </a:r>
                     </a:p>
                   </a:txBody>
@@ -16080,7 +16080,7 @@
                           <a:latin typeface="Arial"/>
                           <a:ea typeface="微软雅黑"/>
                         </a:rPr>
-                        <a:t>P99 −49.7% / −14.8%</a:t>
+                        <a:t>−49.7% / −14.8%</a:t>
                       </a:r>
                     </a:p>
                   </a:txBody>
@@ -16154,7 +16154,7 @@
                           <a:latin typeface="Arial"/>
                           <a:ea typeface="微软雅黑"/>
                         </a:rPr>
-                        <a:t>E2E −53.8% / 持平</a:t>
+                        <a:t>−18.0% / −0.3%</a:t>
                       </a:r>
                     </a:p>
                   </a:txBody>
@@ -16228,7 +16228,7 @@
                           <a:latin typeface="Arial"/>
                           <a:ea typeface="微软雅黑"/>
                         </a:rPr>
-                        <a:t>E2E −67.6% / 持平</a:t>
+                        <a:t>−22.1% / −3.9%</a:t>
                       </a:r>
                     </a:p>
                   </a:txBody>

--- a/docs/thesis/defense/答辩PPT-北航模板版.pptx
+++ b/docs/thesis/defense/答辩PPT-北航模板版.pptx
@@ -15908,7 +15908,7 @@
                           <a:latin typeface="Arial"/>
                           <a:ea typeface="微软雅黑"/>
                         </a:rPr>
-                        <a:t>有效吞吐（ENO vs Gödel）</a:t>
+                        <a:t>有效吞吐提升（vs Gödel）</a:t>
                       </a:r>
                     </a:p>
                   </a:txBody>
@@ -15932,7 +15932,7 @@
                           <a:latin typeface="Arial"/>
                           <a:ea typeface="微软雅黑"/>
                         </a:rPr>
-                        <a:t>P99 调度延迟（相对 Gödel）</a:t>
+                        <a:t>P99 降幅（vs Gödel）</a:t>
                       </a:r>
                     </a:p>
                   </a:txBody>

--- a/docs/thesis/defense/答辩PPT-北航模板版.pptx
+++ b/docs/thesis/defense/答辩PPT-北航模板版.pptx
@@ -15908,7 +15908,7 @@
                           <a:latin typeface="Arial"/>
                           <a:ea typeface="微软雅黑"/>
                         </a:rPr>
-                        <a:t>有效吞吐提升（vs Gödel）</a:t>
+                        <a:t>吞吐提升（vs Gödel）</a:t>
                       </a:r>
                     </a:p>
                   </a:txBody>

--- a/docs/thesis/defense/答辩PPT-北航模板版.pptx
+++ b/docs/thesis/defense/答辩PPT-北航模板版.pptx
@@ -16278,7 +16278,7 @@
                 <a:latin typeface="Arial"/>
                 <a:ea typeface="微软雅黑"/>
               </a:rPr>
-              <a:t>▪  s4 队列堆积峰值 9 vs 61</a:t>
+              <a:t>▪  s4 队列堆积峰值 9 vs 61（低 85%），过载积压明显更少</a:t>
             </a:r>
           </a:p>
           <a:p>
@@ -16298,7 +16298,7 @@
                 <a:latin typeface="Arial"/>
                 <a:ea typeface="微软雅黑"/>
               </a:rPr>
-              <a:t>▪  规模翻倍时两者都退化（ENO -15.2%）</a:t>
+              <a:t>▪  规模翻倍后两者都退化：ENO −15.2%、Gödel −2.3%，但 ENO 仍领先 5.6%</a:t>
             </a:r>
           </a:p>
           <a:p>
@@ -16318,7 +16318,7 @@
                 <a:latin typeface="Arial"/>
                 <a:ea typeface="微软雅黑"/>
               </a:rPr>
-              <a:t>▪  s3/s4 固定 3 实例，口径需说明</a:t>
+              <a:t>▪  s3/s4 均固定 3 实例，本页衡量规模增长，不构成扩展上限</a:t>
             </a:r>
           </a:p>
         </p:txBody>

--- a/docs/thesis/defense/答辩PPT-北航模板版.pptx
+++ b/docs/thesis/defense/答辩PPT-北航模板版.pptx
@@ -15019,7 +15019,7 @@
                 <a:latin typeface="Arial"/>
                 <a:ea typeface="微软雅黑"/>
               </a:rPr>
-              <a:t>ENO 有效吞吐 +17.5%，Gödel 仅 +1.4%</a:t>
+              <a:t>实例 ×3：ENO 吞吐 ×1.18，Gödel 仅 ×1.01；P99 都降约 99%</a:t>
             </a:r>
           </a:p>
         </p:txBody>
@@ -15086,7 +15086,7 @@
                           <a:latin typeface="Arial"/>
                           <a:ea typeface="微软雅黑"/>
                         </a:rPr>
-                        <a:t>ENO inst1→inst3</a:t>
+                        <a:t>ENO：inst1 → inst3</a:t>
                       </a:r>
                     </a:p>
                   </a:txBody>
@@ -15110,7 +15110,7 @@
                           <a:latin typeface="Arial"/>
                           <a:ea typeface="微软雅黑"/>
                         </a:rPr>
-                        <a:t>Gödel inst1→inst3</a:t>
+                        <a:t>Gödel：inst1 → inst3</a:t>
                       </a:r>
                     </a:p>
                   </a:txBody>
@@ -15136,7 +15136,7 @@
                           <a:latin typeface="Arial"/>
                           <a:ea typeface="微软雅黑"/>
                         </a:rPr>
-                        <a:t>有效吞吐</a:t>
+                        <a:t>有效吞吐 pods/s</a:t>
                       </a:r>
                     </a:p>
                   </a:txBody>
@@ -15160,7 +15160,7 @@
                           <a:latin typeface="Arial"/>
                           <a:ea typeface="微软雅黑"/>
                         </a:rPr>
-                        <a:t>297.6 → 349.7（+17.5%）</a:t>
+                        <a:t>297.6 → 349.7（×1.18）</a:t>
                       </a:r>
                     </a:p>
                   </a:txBody>
@@ -15184,7 +15184,7 @@
                           <a:latin typeface="Arial"/>
                           <a:ea typeface="微软雅黑"/>
                         </a:rPr>
-                        <a:t>283.3 → 287.4（+1.4%）</a:t>
+                        <a:t>283.3 → 287.4（×1.01）</a:t>
                       </a:r>
                     </a:p>
                   </a:txBody>
@@ -15210,7 +15210,7 @@
                           <a:latin typeface="Arial"/>
                           <a:ea typeface="微软雅黑"/>
                         </a:rPr>
-                        <a:t>P99 延迟</a:t>
+                        <a:t>P99 延迟 s</a:t>
                       </a:r>
                     </a:p>
                   </a:txBody>
@@ -15234,7 +15234,7 @@
                           <a:latin typeface="Arial"/>
                           <a:ea typeface="微软雅黑"/>
                         </a:rPr>
-                        <a:t>16.22 → 0.13 s（-99.2%）</a:t>
+                        <a:t>16.22 → 0.13（−99.2%）</a:t>
                       </a:r>
                     </a:p>
                   </a:txBody>
@@ -15258,7 +15258,7 @@
                           <a:latin typeface="Arial"/>
                           <a:ea typeface="微软雅黑"/>
                         </a:rPr>
-                        <a:t>32.57 → 0.15 s（-99.5%）</a:t>
+                        <a:t>32.57 → 0.15（−99.5%）</a:t>
                       </a:r>
                     </a:p>
                   </a:txBody>
@@ -15442,7 +15442,7 @@
                 <a:latin typeface="Arial"/>
                 <a:ea typeface="微软雅黑"/>
               </a:rPr>
-              <a:t>▪  延迟都降约 99%，但吞吐转化率差 12 倍</a:t>
+              <a:t>▪  同样的实例增量：ENO 多 52.1 pods/s，Gödel 只多 4.1 pods/s</a:t>
             </a:r>
           </a:p>
         </p:txBody>

--- a/docs/thesis/defense/答辩PPT-北航模板版.pptx
+++ b/docs/thesis/defense/答辩PPT-北航模板版.pptx
@@ -15856,7 +15856,7 @@
         </p:nvGraphicFramePr>
         <p:xfrm>
           <a:off x="566928" y="1828800"/>
-          <a:ext cx="11064240" cy="2560320"/>
+          <a:ext cx="11064240" cy="3291840"/>
         </p:xfrm>
         <a:graphic>
           <a:graphicData uri="http://schemas.openxmlformats.org/drawingml/2006/table">
@@ -15869,7 +15869,7 @@
                 <a:gridCol w="4160520"/>
                 <a:gridCol w="4480560"/>
               </a:tblGrid>
-              <a:tr h="512064">
+              <a:tr h="658368">
                 <a:tc>
                   <a:txBody>
                     <a:bodyPr wrap="square"/>
@@ -15877,7 +15877,7 @@
                     <a:p>
                       <a:pPr algn="l"/>
                       <a:r>
-                        <a:rPr sz="1150" b="1">
+                        <a:rPr sz="1250" b="1">
                           <a:solidFill>
                             <a:srgbClr val="FFFFFF"/>
                           </a:solidFill>
@@ -15901,7 +15901,7 @@
                     <a:p>
                       <a:pPr algn="ctr"/>
                       <a:r>
-                        <a:rPr sz="1150" b="1">
+                        <a:rPr sz="1250" b="1">
                           <a:solidFill>
                             <a:srgbClr val="FFFFFF"/>
                           </a:solidFill>
@@ -15925,7 +15925,7 @@
                     <a:p>
                       <a:pPr algn="ctr"/>
                       <a:r>
-                        <a:rPr sz="1150" b="1">
+                        <a:rPr sz="1250" b="1">
                           <a:solidFill>
                             <a:srgbClr val="FFFFFF"/>
                           </a:solidFill>
@@ -15943,7 +15943,7 @@
                   </a:tcPr>
                 </a:tc>
               </a:tr>
-              <a:tr h="512064">
+              <a:tr h="658368">
                 <a:tc>
                   <a:txBody>
                     <a:bodyPr wrap="square"/>
@@ -15951,7 +15951,7 @@
                     <a:p>
                       <a:pPr algn="l"/>
                       <a:r>
-                        <a:rPr sz="1150" b="0">
+                        <a:rPr sz="1250" b="0">
                           <a:solidFill>
                             <a:srgbClr val="2E2C2C"/>
                           </a:solidFill>
@@ -15975,7 +15975,7 @@
                     <a:p>
                       <a:pPr algn="ctr"/>
                       <a:r>
-                        <a:rPr sz="1150" b="0">
+                        <a:rPr sz="1250" b="0">
                           <a:solidFill>
                             <a:srgbClr val="2E2C2C"/>
                           </a:solidFill>
@@ -15999,7 +15999,7 @@
                     <a:p>
                       <a:pPr algn="ctr"/>
                       <a:r>
-                        <a:rPr sz="1150" b="0">
+                        <a:rPr sz="1250" b="0">
                           <a:solidFill>
                             <a:srgbClr val="2E2C2C"/>
                           </a:solidFill>
@@ -16017,7 +16017,7 @@
                   </a:tcPr>
                 </a:tc>
               </a:tr>
-              <a:tr h="512064">
+              <a:tr h="658368">
                 <a:tc>
                   <a:txBody>
                     <a:bodyPr wrap="square"/>
@@ -16025,7 +16025,7 @@
                     <a:p>
                       <a:pPr algn="l"/>
                       <a:r>
-                        <a:rPr sz="1150" b="0">
+                        <a:rPr sz="1250" b="0">
                           <a:solidFill>
                             <a:srgbClr val="2E2C2C"/>
                           </a:solidFill>
@@ -16049,7 +16049,7 @@
                     <a:p>
                       <a:pPr algn="ctr"/>
                       <a:r>
-                        <a:rPr sz="1150" b="0">
+                        <a:rPr sz="1250" b="0">
                           <a:solidFill>
                             <a:srgbClr val="2E2C2C"/>
                           </a:solidFill>
@@ -16073,7 +16073,7 @@
                     <a:p>
                       <a:pPr algn="ctr"/>
                       <a:r>
-                        <a:rPr sz="1150" b="0">
+                        <a:rPr sz="1250" b="0">
                           <a:solidFill>
                             <a:srgbClr val="2E2C2C"/>
                           </a:solidFill>
@@ -16091,7 +16091,7 @@
                   </a:tcPr>
                 </a:tc>
               </a:tr>
-              <a:tr h="512064">
+              <a:tr h="658368">
                 <a:tc>
                   <a:txBody>
                     <a:bodyPr wrap="square"/>
@@ -16099,7 +16099,7 @@
                     <a:p>
                       <a:pPr algn="l"/>
                       <a:r>
-                        <a:rPr sz="1150" b="0">
+                        <a:rPr sz="1250" b="0">
                           <a:solidFill>
                             <a:srgbClr val="2E2C2C"/>
                           </a:solidFill>
@@ -16123,7 +16123,7 @@
                     <a:p>
                       <a:pPr algn="ctr"/>
                       <a:r>
-                        <a:rPr sz="1150" b="0">
+                        <a:rPr sz="1250" b="0">
                           <a:solidFill>
                             <a:srgbClr val="2E2C2C"/>
                           </a:solidFill>
@@ -16147,7 +16147,7 @@
                     <a:p>
                       <a:pPr algn="ctr"/>
                       <a:r>
-                        <a:rPr sz="1150" b="0">
+                        <a:rPr sz="1250" b="0">
                           <a:solidFill>
                             <a:srgbClr val="2E2C2C"/>
                           </a:solidFill>
@@ -16165,7 +16165,7 @@
                   </a:tcPr>
                 </a:tc>
               </a:tr>
-              <a:tr h="512064">
+              <a:tr h="658368">
                 <a:tc>
                   <a:txBody>
                     <a:bodyPr wrap="square"/>
@@ -16173,7 +16173,7 @@
                     <a:p>
                       <a:pPr algn="l"/>
                       <a:r>
-                        <a:rPr sz="1150" b="0">
+                        <a:rPr sz="1250" b="0">
                           <a:solidFill>
                             <a:srgbClr val="2E2C2C"/>
                           </a:solidFill>
@@ -16197,7 +16197,7 @@
                     <a:p>
                       <a:pPr algn="ctr"/>
                       <a:r>
-                        <a:rPr sz="1150" b="0">
+                        <a:rPr sz="1250" b="0">
                           <a:solidFill>
                             <a:srgbClr val="2E2C2C"/>
                           </a:solidFill>
@@ -16221,7 +16221,7 @@
                     <a:p>
                       <a:pPr algn="ctr"/>
                       <a:r>
-                        <a:rPr sz="1150" b="0">
+                        <a:rPr sz="1250" b="0">
                           <a:solidFill>
                             <a:srgbClr val="2E2C2C"/>
                           </a:solidFill>
@@ -16251,86 +16251,6 @@
         </p:nvSpPr>
         <p:spPr>
           <a:xfrm>
-            <a:off x="566928" y="4718304"/>
-            <a:ext cx="10972800" cy="914400"/>
-          </a:xfrm>
-          <a:prstGeom prst="rect">
-            <a:avLst/>
-          </a:prstGeom>
-          <a:noFill/>
-        </p:spPr>
-        <p:txBody>
-          <a:bodyPr wrap="square" anchor="t" lIns="0" rIns="0" tIns="0" bIns="0">
-            <a:spAutoFit/>
-          </a:bodyPr>
-          <a:lstStyle/>
-          <a:p>
-            <a:pPr algn="l">
-              <a:lnSpc>
-                <a:spcPct val="115000"/>
-              </a:lnSpc>
-            </a:pPr>
-            <a:r>
-              <a:rPr sz="1300" b="0">
-                <a:solidFill>
-                  <a:srgbClr val="2E2C2C"/>
-                </a:solidFill>
-                <a:latin typeface="Arial"/>
-                <a:ea typeface="微软雅黑"/>
-              </a:rPr>
-              <a:t>▪  s4 队列堆积峰值 9 vs 61（低 85%），过载积压明显更少</a:t>
-            </a:r>
-          </a:p>
-          <a:p>
-            <a:pPr algn="l">
-              <a:lnSpc>
-                <a:spcPct val="115000"/>
-              </a:lnSpc>
-              <a:spcBef>
-                <a:spcPts val="600"/>
-              </a:spcBef>
-            </a:pPr>
-            <a:r>
-              <a:rPr sz="1300" b="0">
-                <a:solidFill>
-                  <a:srgbClr val="2E2C2C"/>
-                </a:solidFill>
-                <a:latin typeface="Arial"/>
-                <a:ea typeface="微软雅黑"/>
-              </a:rPr>
-              <a:t>▪  规模翻倍后两者都退化：ENO −15.2%、Gödel −2.3%，但 ENO 仍领先 5.6%</a:t>
-            </a:r>
-          </a:p>
-          <a:p>
-            <a:pPr algn="l">
-              <a:lnSpc>
-                <a:spcPct val="115000"/>
-              </a:lnSpc>
-              <a:spcBef>
-                <a:spcPts val="600"/>
-              </a:spcBef>
-            </a:pPr>
-            <a:r>
-              <a:rPr sz="1300" b="0">
-                <a:solidFill>
-                  <a:srgbClr val="2E2C2C"/>
-                </a:solidFill>
-                <a:latin typeface="Arial"/>
-                <a:ea typeface="微软雅黑"/>
-              </a:rPr>
-              <a:t>▪  s3/s4 均固定 3 实例，本页衡量规模增长，不构成扩展上限</a:t>
-            </a:r>
-          </a:p>
-        </p:txBody>
-      </p:sp>
-      <p:sp>
-        <p:nvSpPr>
-          <p:cNvPr id="9006" name="TextBox 9005"/>
-          <p:cNvSpPr txBox="1"/>
-          <p:nvPr/>
-        </p:nvSpPr>
-        <p:spPr>
-          <a:xfrm>
             <a:off x="566928" y="6309360"/>
             <a:ext cx="10104120" cy="201168"/>
           </a:xfrm>
@@ -16361,7 +16281,7 @@
       </p:sp>
       <p:sp>
         <p:nvSpPr>
-          <p:cNvPr id="9007" name="TextBox 9006"/>
+          <p:cNvPr id="9006" name="TextBox 9005"/>
           <p:cNvSpPr txBox="1"/>
           <p:nvPr/>
         </p:nvSpPr>

--- a/docs/thesis/defense/答辩PPT-北航模板版.pptx
+++ b/docs/thesis/defense/答辩PPT-北航模板版.pptx
@@ -15806,57 +15806,17 @@
           </a:p>
         </p:txBody>
       </p:sp>
-      <p:sp>
-        <p:nvSpPr>
-          <p:cNvPr id="9003" name="TextBox 9002"/>
-          <p:cNvSpPr txBox="1"/>
-          <p:nvPr/>
-        </p:nvSpPr>
-        <p:spPr>
-          <a:xfrm>
-            <a:off x="566928" y="1261872"/>
-            <a:ext cx="10881360" cy="438912"/>
-          </a:xfrm>
-          <a:prstGeom prst="rect">
-            <a:avLst/>
-          </a:prstGeom>
-          <a:noFill/>
-        </p:spPr>
-        <p:txBody>
-          <a:bodyPr wrap="square" anchor="ctr" lIns="0" rIns="0" tIns="0" bIns="0">
-            <a:spAutoFit/>
-          </a:bodyPr>
-          <a:lstStyle/>
-          <a:p>
-            <a:pPr algn="l">
-              <a:lnSpc>
-                <a:spcPct val="110000"/>
-              </a:lnSpc>
-            </a:pPr>
-            <a:r>
-              <a:rPr sz="1800" b="1">
-                <a:solidFill>
-                  <a:srgbClr val="0070C0"/>
-                </a:solidFill>
-                <a:latin typeface="Arial"/>
-                <a:ea typeface="微软雅黑"/>
-              </a:rPr>
-              <a:t>s4 规模下吞吐仍 +5.6%、P99 低 33.4%；突发、极限、异构均不落后</a:t>
-            </a:r>
-          </a:p>
-        </p:txBody>
-      </p:sp>
       <p:graphicFrame>
         <p:nvGraphicFramePr>
-          <p:cNvPr id="9004" name="Table 9003"/>
+          <p:cNvPr id="9003" name="Table 9002"/>
           <p:cNvGraphicFramePr>
             <a:graphicFrameLocks noGrp="1"/>
           </p:cNvGraphicFramePr>
           <p:nvPr/>
         </p:nvGraphicFramePr>
         <p:xfrm>
-          <a:off x="566928" y="1828800"/>
-          <a:ext cx="11064240" cy="3291840"/>
+          <a:off x="566928" y="1207008"/>
+          <a:ext cx="11064240" cy="3657600"/>
         </p:xfrm>
         <a:graphic>
           <a:graphicData uri="http://schemas.openxmlformats.org/drawingml/2006/table">
@@ -15869,7 +15829,7 @@
                 <a:gridCol w="4160520"/>
                 <a:gridCol w="4480560"/>
               </a:tblGrid>
-              <a:tr h="658368">
+              <a:tr h="731520">
                 <a:tc>
                   <a:txBody>
                     <a:bodyPr wrap="square"/>
@@ -15943,7 +15903,7 @@
                   </a:tcPr>
                 </a:tc>
               </a:tr>
-              <a:tr h="658368">
+              <a:tr h="731520">
                 <a:tc>
                   <a:txBody>
                     <a:bodyPr wrap="square"/>
@@ -16017,7 +15977,7 @@
                   </a:tcPr>
                 </a:tc>
               </a:tr>
-              <a:tr h="658368">
+              <a:tr h="731520">
                 <a:tc>
                   <a:txBody>
                     <a:bodyPr wrap="square"/>
@@ -16091,7 +16051,7 @@
                   </a:tcPr>
                 </a:tc>
               </a:tr>
-              <a:tr h="658368">
+              <a:tr h="731520">
                 <a:tc>
                   <a:txBody>
                     <a:bodyPr wrap="square"/>
@@ -16165,7 +16125,7 @@
                   </a:tcPr>
                 </a:tc>
               </a:tr>
-              <a:tr h="658368">
+              <a:tr h="731520">
                 <a:tc>
                   <a:txBody>
                     <a:bodyPr wrap="square"/>
@@ -16245,7 +16205,7 @@
       </p:graphicFrame>
       <p:sp>
         <p:nvSpPr>
-          <p:cNvPr id="9005" name="TextBox 9004"/>
+          <p:cNvPr id="9004" name="TextBox 9003"/>
           <p:cNvSpPr txBox="1"/>
           <p:nvPr/>
         </p:nvSpPr>
@@ -16281,7 +16241,7 @@
       </p:sp>
       <p:sp>
         <p:nvSpPr>
-          <p:cNvPr id="9006" name="TextBox 9005"/>
+          <p:cNvPr id="9005" name="TextBox 9004"/>
           <p:cNvSpPr txBox="1"/>
           <p:nvPr/>
         </p:nvSpPr>

--- a/docs/thesis/defense/答辩PPT-北航模板版.pptx
+++ b/docs/thesis/defense/答辩PPT-北航模板版.pptx
@@ -9983,6 +9983,56 @@
                   </a:txBody>
                   <a:tcPr marL="54864" marR="54864" marT="18288" marB="18288" anchor="ctr">
                     <a:solidFill>
+                      <a:srgbClr val="F2F4F7"/>
+                    </a:solidFill>
+                  </a:tcPr>
+                </a:tc>
+                <a:tc>
+                  <a:txBody>
+                    <a:bodyPr wrap="square"/>
+                    <a:lstStyle/>
+                    <a:p>
+                      <a:pPr algn="ctr"/>
+                      <a:r>
+                        <a:rPr sz="1150" b="0">
+                          <a:solidFill>
+                            <a:srgbClr val="2E2C2C"/>
+                          </a:solidFill>
+                          <a:latin typeface="Arial"/>
+                          <a:ea typeface="微软雅黑"/>
+                        </a:rPr>
+                        <a:t>100 / 1000 / 5000 / 10000 节点</a:t>
+                      </a:r>
+                    </a:p>
+                  </a:txBody>
+                  <a:tcPr marL="54864" marR="54864" marT="18288" marB="18288" anchor="ctr">
+                    <a:solidFill>
+                      <a:srgbClr val="F2F4F7"/>
+                    </a:solidFill>
+                  </a:tcPr>
+                </a:tc>
+              </a:tr>
+              <a:tr h="384048">
+                <a:tc>
+                  <a:txBody>
+                    <a:bodyPr wrap="square"/>
+                    <a:lstStyle/>
+                    <a:p>
+                      <a:pPr algn="l"/>
+                      <a:r>
+                        <a:rPr sz="1150" b="0">
+                          <a:solidFill>
+                            <a:srgbClr val="2E2C2C"/>
+                          </a:solidFill>
+                          <a:latin typeface="Arial"/>
+                          <a:ea typeface="微软雅黑"/>
+                        </a:rPr>
+                        <a:t>速率型 w1–w4</a:t>
+                      </a:r>
+                    </a:p>
+                  </a:txBody>
+                  <a:tcPr marL="54864" marR="54864" marT="18288" marB="18288" anchor="ctr">
+                    <a:solidFill>
                       <a:srgbClr val="FFFFFF"/>
                     </a:solidFill>
                   </a:tcPr>
@@ -10001,7 +10051,7 @@
                           <a:latin typeface="Arial"/>
                           <a:ea typeface="微软雅黑"/>
                         </a:rPr>
-                        <a:t>100 / 1000 / 5000 / 10000 节点</a:t>
+                        <a:t>100 / 500 / 1000 / 2000 pods/s（1 万 / 5 万 / 10 万 / 20 万 Pod，w4 为极限）</a:t>
                       </a:r>
                     </a:p>
                   </a:txBody>
@@ -10027,7 +10077,7 @@
                           <a:latin typeface="Arial"/>
                           <a:ea typeface="微软雅黑"/>
                         </a:rPr>
-                        <a:t>速率型 w1–w4</a:t>
+                        <a:t>突发 w5</a:t>
                       </a:r>
                     </a:p>
                   </a:txBody>
@@ -10051,7 +10101,7 @@
                           <a:latin typeface="Arial"/>
                           <a:ea typeface="微软雅黑"/>
                         </a:rPr>
-                        <a:t>100 / 500 / 1000 / 2000 pods/s（1 万 / 5 万 / 10 万 / 20 万 Pod，w4 为极限）</a:t>
+                        <a:t>0 → 2000 → 0 pods/s，5 万 Pod，考察涌入与退潮</a:t>
                       </a:r>
                     </a:p>
                   </a:txBody>
@@ -10077,7 +10127,7 @@
                           <a:latin typeface="Arial"/>
                           <a:ea typeface="微软雅黑"/>
                         </a:rPr>
-                        <a:t>突发 w5</a:t>
+                        <a:t>Gang w6</a:t>
                       </a:r>
                     </a:p>
                   </a:txBody>
@@ -10101,7 +10151,7 @@
                           <a:latin typeface="Arial"/>
                           <a:ea typeface="微软雅黑"/>
                         </a:rPr>
-                        <a:t>0 → 2000 → 0 pods/s，5 万 Pod，考察涌入与退潮</a:t>
+                        <a:t>200 组/s × 5 Pod，共 5 万 Pod，组内必须同时调度</a:t>
                       </a:r>
                     </a:p>
                   </a:txBody>
@@ -10127,7 +10177,7 @@
                           <a:latin typeface="Arial"/>
                           <a:ea typeface="微软雅黑"/>
                         </a:rPr>
-                        <a:t>Gang w6</a:t>
+                        <a:t>异构 w7</a:t>
                       </a:r>
                     </a:p>
                   </a:txBody>
@@ -10151,7 +10201,7 @@
                           <a:latin typeface="Arial"/>
                           <a:ea typeface="微软雅黑"/>
                         </a:rPr>
-                        <a:t>200 组/s × 5 Pod，共 5 万 Pod，组内必须同时调度</a:t>
+                        <a:t>500 pods/s，5 万 Pod，节点资源规格异构</a:t>
                       </a:r>
                     </a:p>
                   </a:txBody>
@@ -10177,7 +10227,7 @@
                           <a:latin typeface="Arial"/>
                           <a:ea typeface="微软雅黑"/>
                         </a:rPr>
-                        <a:t>异构 w7</a:t>
+                        <a:t>实例 inst</a:t>
                       </a:r>
                     </a:p>
                   </a:txBody>
@@ -10201,7 +10251,7 @@
                           <a:latin typeface="Arial"/>
                           <a:ea typeface="微软雅黑"/>
                         </a:rPr>
-                        <a:t>500 pods/s，5 万 Pod，节点资源规格异构</a:t>
+                        <a:t>inst1 = 1 个实例；inst3 = 3 个实例</a:t>
                       </a:r>
                     </a:p>
                   </a:txBody>
@@ -10227,7 +10277,7 @@
                           <a:latin typeface="Arial"/>
                           <a:ea typeface="微软雅黑"/>
                         </a:rPr>
-                        <a:t>实例 inst</a:t>
+                        <a:t>对比组</a:t>
                       </a:r>
                     </a:p>
                   </a:txBody>
@@ -10251,7 +10301,7 @@
                           <a:latin typeface="Arial"/>
                           <a:ea typeface="微软雅黑"/>
                         </a:rPr>
-                        <a:t>inst1 = 1 个实例；inst3 = 3 个实例</a:t>
+                        <a:t>a=ENO  b=Gödel  c=kube-scheduler  d=Volcano  e=Koordinator</a:t>
                       </a:r>
                     </a:p>
                   </a:txBody>
@@ -10277,7 +10327,7 @@
                           <a:latin typeface="Arial"/>
                           <a:ea typeface="微软雅黑"/>
                         </a:rPr>
-                        <a:t>对比组</a:t>
+                        <a:t>公平性</a:t>
                       </a:r>
                     </a:p>
                   </a:txBody>
@@ -10301,63 +10351,13 @@
                           <a:latin typeface="Arial"/>
                           <a:ea typeface="微软雅黑"/>
                         </a:rPr>
-                        <a:t>a=ENO  b=Gödel  c=kube-scheduler  d=Volcano  e=Koordinator</a:t>
+                        <a:t>每 Pod 2C/4G；各调度器 client-go QPS=Burst=10000（不设限流瓶颈）</a:t>
                       </a:r>
                     </a:p>
                   </a:txBody>
                   <a:tcPr marL="54864" marR="54864" marT="18288" marB="18288" anchor="ctr">
                     <a:solidFill>
                       <a:srgbClr val="FFFFFF"/>
-                    </a:solidFill>
-                  </a:tcPr>
-                </a:tc>
-              </a:tr>
-              <a:tr h="384048">
-                <a:tc>
-                  <a:txBody>
-                    <a:bodyPr wrap="square"/>
-                    <a:lstStyle/>
-                    <a:p>
-                      <a:pPr algn="l"/>
-                      <a:r>
-                        <a:rPr sz="1150" b="0">
-                          <a:solidFill>
-                            <a:srgbClr val="2E2C2C"/>
-                          </a:solidFill>
-                          <a:latin typeface="Arial"/>
-                          <a:ea typeface="微软雅黑"/>
-                        </a:rPr>
-                        <a:t>公平性</a:t>
-                      </a:r>
-                    </a:p>
-                  </a:txBody>
-                  <a:tcPr marL="54864" marR="54864" marT="18288" marB="18288" anchor="ctr">
-                    <a:solidFill>
-                      <a:srgbClr val="F2F4F7"/>
-                    </a:solidFill>
-                  </a:tcPr>
-                </a:tc>
-                <a:tc>
-                  <a:txBody>
-                    <a:bodyPr wrap="square"/>
-                    <a:lstStyle/>
-                    <a:p>
-                      <a:pPr algn="ctr"/>
-                      <a:r>
-                        <a:rPr sz="1150" b="0">
-                          <a:solidFill>
-                            <a:srgbClr val="2E2C2C"/>
-                          </a:solidFill>
-                          <a:latin typeface="Arial"/>
-                          <a:ea typeface="微软雅黑"/>
-                        </a:rPr>
-                        <a:t>每 Pod 2C/4G；各调度器 client-go QPS=Burst=10000（不设限流瓶颈）</a:t>
-                      </a:r>
-                    </a:p>
-                  </a:txBody>
-                  <a:tcPr marL="54864" marR="54864" marT="18288" marB="18288" anchor="ctr">
-                    <a:solidFill>
-                      <a:srgbClr val="F2F4F7"/>
                     </a:solidFill>
                   </a:tcPr>
                 </a:tc>
@@ -13344,7 +13344,7 @@
                   </a:txBody>
                   <a:tcPr marL="54864" marR="54864" marT="18288" marB="18288" anchor="ctr">
                     <a:solidFill>
-                      <a:srgbClr val="FFFFFF"/>
+                      <a:srgbClr val="F2F4F7"/>
                     </a:solidFill>
                   </a:tcPr>
                 </a:tc>
@@ -13368,7 +13368,7 @@
                   </a:txBody>
                   <a:tcPr marL="54864" marR="54864" marT="18288" marB="18288" anchor="ctr">
                     <a:solidFill>
-                      <a:srgbClr val="FFFFFF"/>
+                      <a:srgbClr val="F2F4F7"/>
                     </a:solidFill>
                   </a:tcPr>
                 </a:tc>
@@ -13392,6 +13392,104 @@
                   </a:txBody>
                   <a:tcPr marL="54864" marR="54864" marT="18288" marB="18288" anchor="ctr">
                     <a:solidFill>
+                      <a:srgbClr val="F2F4F7"/>
+                    </a:solidFill>
+                  </a:tcPr>
+                </a:tc>
+                <a:tc>
+                  <a:txBody>
+                    <a:bodyPr wrap="square"/>
+                    <a:lstStyle/>
+                    <a:p>
+                      <a:pPr algn="ctr"/>
+                      <a:r>
+                        <a:rPr sz="1050" b="0">
+                          <a:solidFill>
+                            <a:srgbClr val="2E2C2C"/>
+                          </a:solidFill>
+                          <a:latin typeface="Arial"/>
+                          <a:ea typeface="微软雅黑"/>
+                        </a:rPr>
+                        <a:t>≈297</a:t>
+                      </a:r>
+                    </a:p>
+                  </a:txBody>
+                  <a:tcPr marL="54864" marR="54864" marT="18288" marB="18288" anchor="ctr">
+                    <a:solidFill>
+                      <a:srgbClr val="F2F4F7"/>
+                    </a:solidFill>
+                  </a:tcPr>
+                </a:tc>
+                <a:tc>
+                  <a:txBody>
+                    <a:bodyPr wrap="square"/>
+                    <a:lstStyle/>
+                    <a:p>
+                      <a:pPr algn="ctr"/>
+                      <a:r>
+                        <a:rPr sz="1050" b="0">
+                          <a:solidFill>
+                            <a:srgbClr val="2E2C2C"/>
+                          </a:solidFill>
+                          <a:latin typeface="Arial"/>
+                          <a:ea typeface="微软雅黑"/>
+                        </a:rPr>
+                        <a:t>≈48</a:t>
+                      </a:r>
+                    </a:p>
+                  </a:txBody>
+                  <a:tcPr marL="54864" marR="54864" marT="18288" marB="18288" anchor="ctr">
+                    <a:solidFill>
+                      <a:srgbClr val="F2F4F7"/>
+                    </a:solidFill>
+                  </a:tcPr>
+                </a:tc>
+                <a:tc>
+                  <a:txBody>
+                    <a:bodyPr wrap="square"/>
+                    <a:lstStyle/>
+                    <a:p>
+                      <a:pPr algn="ctr"/>
+                      <a:r>
+                        <a:rPr sz="1050" b="0">
+                          <a:solidFill>
+                            <a:srgbClr val="2E2C2C"/>
+                          </a:solidFill>
+                          <a:latin typeface="Arial"/>
+                          <a:ea typeface="微软雅黑"/>
+                        </a:rPr>
+                        <a:t>≈16</a:t>
+                      </a:r>
+                    </a:p>
+                  </a:txBody>
+                  <a:tcPr marL="54864" marR="54864" marT="18288" marB="18288" anchor="ctr">
+                    <a:solidFill>
+                      <a:srgbClr val="F2F4F7"/>
+                    </a:solidFill>
+                  </a:tcPr>
+                </a:tc>
+              </a:tr>
+              <a:tr h="310896">
+                <a:tc>
+                  <a:txBody>
+                    <a:bodyPr wrap="square"/>
+                    <a:lstStyle/>
+                    <a:p>
+                      <a:pPr algn="l"/>
+                      <a:r>
+                        <a:rPr sz="1050" b="0">
+                          <a:solidFill>
+                            <a:srgbClr val="2E2C2C"/>
+                          </a:solidFill>
+                          <a:latin typeface="Arial"/>
+                          <a:ea typeface="微软雅黑"/>
+                        </a:rPr>
+                        <a:t>s3/w3</a:t>
+                      </a:r>
+                    </a:p>
+                  </a:txBody>
+                  <a:tcPr marL="54864" marR="54864" marT="18288" marB="18288" anchor="ctr">
+                    <a:solidFill>
                       <a:srgbClr val="FFFFFF"/>
                     </a:solidFill>
                   </a:tcPr>
@@ -13410,7 +13508,55 @@
                           <a:latin typeface="Arial"/>
                           <a:ea typeface="微软雅黑"/>
                         </a:rPr>
-                        <a:t>≈297</a:t>
+                        <a:t>297.6</a:t>
+                      </a:r>
+                    </a:p>
+                  </a:txBody>
+                  <a:tcPr marL="54864" marR="54864" marT="18288" marB="18288" anchor="ctr">
+                    <a:solidFill>
+                      <a:srgbClr val="FFFFFF"/>
+                    </a:solidFill>
+                  </a:tcPr>
+                </a:tc>
+                <a:tc>
+                  <a:txBody>
+                    <a:bodyPr wrap="square"/>
+                    <a:lstStyle/>
+                    <a:p>
+                      <a:pPr algn="ctr"/>
+                      <a:r>
+                        <a:rPr sz="1050" b="0">
+                          <a:solidFill>
+                            <a:srgbClr val="2E2C2C"/>
+                          </a:solidFill>
+                          <a:latin typeface="Arial"/>
+                          <a:ea typeface="微软雅黑"/>
+                        </a:rPr>
+                        <a:t>283.3</a:t>
+                      </a:r>
+                    </a:p>
+                  </a:txBody>
+                  <a:tcPr marL="54864" marR="54864" marT="18288" marB="18288" anchor="ctr">
+                    <a:solidFill>
+                      <a:srgbClr val="FFFFFF"/>
+                    </a:solidFill>
+                  </a:tcPr>
+                </a:tc>
+                <a:tc>
+                  <a:txBody>
+                    <a:bodyPr wrap="square"/>
+                    <a:lstStyle/>
+                    <a:p>
+                      <a:pPr algn="ctr"/>
+                      <a:r>
+                        <a:rPr sz="1050" b="0">
+                          <a:solidFill>
+                            <a:srgbClr val="2E2C2C"/>
+                          </a:solidFill>
+                          <a:latin typeface="Arial"/>
+                          <a:ea typeface="微软雅黑"/>
+                        </a:rPr>
+                        <a:t>≈292</a:t>
                       </a:r>
                     </a:p>
                   </a:txBody>
@@ -13458,159 +13604,13 @@
                           <a:latin typeface="Arial"/>
                           <a:ea typeface="微软雅黑"/>
                         </a:rPr>
-                        <a:t>≈16</a:t>
+                        <a:t>≈24</a:t>
                       </a:r>
                     </a:p>
                   </a:txBody>
                   <a:tcPr marL="54864" marR="54864" marT="18288" marB="18288" anchor="ctr">
                     <a:solidFill>
                       <a:srgbClr val="FFFFFF"/>
-                    </a:solidFill>
-                  </a:tcPr>
-                </a:tc>
-              </a:tr>
-              <a:tr h="310896">
-                <a:tc>
-                  <a:txBody>
-                    <a:bodyPr wrap="square"/>
-                    <a:lstStyle/>
-                    <a:p>
-                      <a:pPr algn="l"/>
-                      <a:r>
-                        <a:rPr sz="1050" b="0">
-                          <a:solidFill>
-                            <a:srgbClr val="2E2C2C"/>
-                          </a:solidFill>
-                          <a:latin typeface="Arial"/>
-                          <a:ea typeface="微软雅黑"/>
-                        </a:rPr>
-                        <a:t>s3/w3</a:t>
-                      </a:r>
-                    </a:p>
-                  </a:txBody>
-                  <a:tcPr marL="54864" marR="54864" marT="18288" marB="18288" anchor="ctr">
-                    <a:solidFill>
-                      <a:srgbClr val="F2F4F7"/>
-                    </a:solidFill>
-                  </a:tcPr>
-                </a:tc>
-                <a:tc>
-                  <a:txBody>
-                    <a:bodyPr wrap="square"/>
-                    <a:lstStyle/>
-                    <a:p>
-                      <a:pPr algn="ctr"/>
-                      <a:r>
-                        <a:rPr sz="1050" b="0">
-                          <a:solidFill>
-                            <a:srgbClr val="2E2C2C"/>
-                          </a:solidFill>
-                          <a:latin typeface="Arial"/>
-                          <a:ea typeface="微软雅黑"/>
-                        </a:rPr>
-                        <a:t>297.6</a:t>
-                      </a:r>
-                    </a:p>
-                  </a:txBody>
-                  <a:tcPr marL="54864" marR="54864" marT="18288" marB="18288" anchor="ctr">
-                    <a:solidFill>
-                      <a:srgbClr val="F2F4F7"/>
-                    </a:solidFill>
-                  </a:tcPr>
-                </a:tc>
-                <a:tc>
-                  <a:txBody>
-                    <a:bodyPr wrap="square"/>
-                    <a:lstStyle/>
-                    <a:p>
-                      <a:pPr algn="ctr"/>
-                      <a:r>
-                        <a:rPr sz="1050" b="0">
-                          <a:solidFill>
-                            <a:srgbClr val="2E2C2C"/>
-                          </a:solidFill>
-                          <a:latin typeface="Arial"/>
-                          <a:ea typeface="微软雅黑"/>
-                        </a:rPr>
-                        <a:t>283.3</a:t>
-                      </a:r>
-                    </a:p>
-                  </a:txBody>
-                  <a:tcPr marL="54864" marR="54864" marT="18288" marB="18288" anchor="ctr">
-                    <a:solidFill>
-                      <a:srgbClr val="F2F4F7"/>
-                    </a:solidFill>
-                  </a:tcPr>
-                </a:tc>
-                <a:tc>
-                  <a:txBody>
-                    <a:bodyPr wrap="square"/>
-                    <a:lstStyle/>
-                    <a:p>
-                      <a:pPr algn="ctr"/>
-                      <a:r>
-                        <a:rPr sz="1050" b="0">
-                          <a:solidFill>
-                            <a:srgbClr val="2E2C2C"/>
-                          </a:solidFill>
-                          <a:latin typeface="Arial"/>
-                          <a:ea typeface="微软雅黑"/>
-                        </a:rPr>
-                        <a:t>≈292</a:t>
-                      </a:r>
-                    </a:p>
-                  </a:txBody>
-                  <a:tcPr marL="54864" marR="54864" marT="18288" marB="18288" anchor="ctr">
-                    <a:solidFill>
-                      <a:srgbClr val="F2F4F7"/>
-                    </a:solidFill>
-                  </a:tcPr>
-                </a:tc>
-                <a:tc>
-                  <a:txBody>
-                    <a:bodyPr wrap="square"/>
-                    <a:lstStyle/>
-                    <a:p>
-                      <a:pPr algn="ctr"/>
-                      <a:r>
-                        <a:rPr sz="1050" b="0">
-                          <a:solidFill>
-                            <a:srgbClr val="2E2C2C"/>
-                          </a:solidFill>
-                          <a:latin typeface="Arial"/>
-                          <a:ea typeface="微软雅黑"/>
-                        </a:rPr>
-                        <a:t>≈48</a:t>
-                      </a:r>
-                    </a:p>
-                  </a:txBody>
-                  <a:tcPr marL="54864" marR="54864" marT="18288" marB="18288" anchor="ctr">
-                    <a:solidFill>
-                      <a:srgbClr val="F2F4F7"/>
-                    </a:solidFill>
-                  </a:tcPr>
-                </a:tc>
-                <a:tc>
-                  <a:txBody>
-                    <a:bodyPr wrap="square"/>
-                    <a:lstStyle/>
-                    <a:p>
-                      <a:pPr algn="ctr"/>
-                      <a:r>
-                        <a:rPr sz="1050" b="0">
-                          <a:solidFill>
-                            <a:srgbClr val="2E2C2C"/>
-                          </a:solidFill>
-                          <a:latin typeface="Arial"/>
-                          <a:ea typeface="微软雅黑"/>
-                        </a:rPr>
-                        <a:t>≈24</a:t>
-                      </a:r>
-                    </a:p>
-                  </a:txBody>
-                  <a:tcPr marL="54864" marR="54864" marT="18288" marB="18288" anchor="ctr">
-                    <a:solidFill>
-                      <a:srgbClr val="F2F4F7"/>
                     </a:solidFill>
                   </a:tcPr>
                 </a:tc>
@@ -15142,7 +15142,7 @@
                   </a:txBody>
                   <a:tcPr marL="54864" marR="54864" marT="18288" marB="18288" anchor="ctr">
                     <a:solidFill>
-                      <a:srgbClr val="FFFFFF"/>
+                      <a:srgbClr val="F2F4F7"/>
                     </a:solidFill>
                   </a:tcPr>
                 </a:tc>
@@ -15166,6 +15166,56 @@
                   </a:txBody>
                   <a:tcPr marL="54864" marR="54864" marT="18288" marB="18288" anchor="ctr">
                     <a:solidFill>
+                      <a:srgbClr val="F2F4F7"/>
+                    </a:solidFill>
+                  </a:tcPr>
+                </a:tc>
+                <a:tc>
+                  <a:txBody>
+                    <a:bodyPr wrap="square"/>
+                    <a:lstStyle/>
+                    <a:p>
+                      <a:pPr algn="ctr"/>
+                      <a:r>
+                        <a:rPr sz="1050" b="0">
+                          <a:solidFill>
+                            <a:srgbClr val="2E2C2C"/>
+                          </a:solidFill>
+                          <a:latin typeface="Arial"/>
+                          <a:ea typeface="微软雅黑"/>
+                        </a:rPr>
+                        <a:t>283.3 → 287.4（×1.01）</a:t>
+                      </a:r>
+                    </a:p>
+                  </a:txBody>
+                  <a:tcPr marL="54864" marR="54864" marT="18288" marB="18288" anchor="ctr">
+                    <a:solidFill>
+                      <a:srgbClr val="F2F4F7"/>
+                    </a:solidFill>
+                  </a:tcPr>
+                </a:tc>
+              </a:tr>
+              <a:tr h="548640">
+                <a:tc>
+                  <a:txBody>
+                    <a:bodyPr wrap="square"/>
+                    <a:lstStyle/>
+                    <a:p>
+                      <a:pPr algn="l"/>
+                      <a:r>
+                        <a:rPr sz="1050" b="0">
+                          <a:solidFill>
+                            <a:srgbClr val="2E2C2C"/>
+                          </a:solidFill>
+                          <a:latin typeface="Arial"/>
+                          <a:ea typeface="微软雅黑"/>
+                        </a:rPr>
+                        <a:t>P99 延迟 s</a:t>
+                      </a:r>
+                    </a:p>
+                  </a:txBody>
+                  <a:tcPr marL="54864" marR="54864" marT="18288" marB="18288" anchor="ctr">
+                    <a:solidFill>
                       <a:srgbClr val="FFFFFF"/>
                     </a:solidFill>
                   </a:tcPr>
@@ -15184,7 +15234,31 @@
                           <a:latin typeface="Arial"/>
                           <a:ea typeface="微软雅黑"/>
                         </a:rPr>
-                        <a:t>283.3 → 287.4（×1.01）</a:t>
+                        <a:t>16.22 → 0.13（−99.2%）</a:t>
+                      </a:r>
+                    </a:p>
+                  </a:txBody>
+                  <a:tcPr marL="54864" marR="54864" marT="18288" marB="18288" anchor="ctr">
+                    <a:solidFill>
+                      <a:srgbClr val="FFFFFF"/>
+                    </a:solidFill>
+                  </a:tcPr>
+                </a:tc>
+                <a:tc>
+                  <a:txBody>
+                    <a:bodyPr wrap="square"/>
+                    <a:lstStyle/>
+                    <a:p>
+                      <a:pPr algn="ctr"/>
+                      <a:r>
+                        <a:rPr sz="1050" b="0">
+                          <a:solidFill>
+                            <a:srgbClr val="2E2C2C"/>
+                          </a:solidFill>
+                          <a:latin typeface="Arial"/>
+                          <a:ea typeface="微软雅黑"/>
+                        </a:rPr>
+                        <a:t>32.57 → 0.15（−99.5%）</a:t>
                       </a:r>
                     </a:p>
                   </a:txBody>
@@ -15210,7 +15284,7 @@
                           <a:latin typeface="Arial"/>
                           <a:ea typeface="微软雅黑"/>
                         </a:rPr>
-                        <a:t>P99 延迟 s</a:t>
+                        <a:t>队列堆积峰值</a:t>
                       </a:r>
                     </a:p>
                   </a:txBody>
@@ -15234,7 +15308,7 @@
                           <a:latin typeface="Arial"/>
                           <a:ea typeface="微软雅黑"/>
                         </a:rPr>
-                        <a:t>16.22 → 0.13（−99.2%）</a:t>
+                        <a:t>14698 → 20</a:t>
                       </a:r>
                     </a:p>
                   </a:txBody>
@@ -15258,87 +15332,13 @@
                           <a:latin typeface="Arial"/>
                           <a:ea typeface="微软雅黑"/>
                         </a:rPr>
-                        <a:t>32.57 → 0.15（−99.5%）</a:t>
+                        <a:t>22652 → 16</a:t>
                       </a:r>
                     </a:p>
                   </a:txBody>
                   <a:tcPr marL="54864" marR="54864" marT="18288" marB="18288" anchor="ctr">
                     <a:solidFill>
                       <a:srgbClr val="F2F4F7"/>
-                    </a:solidFill>
-                  </a:tcPr>
-                </a:tc>
-              </a:tr>
-              <a:tr h="548640">
-                <a:tc>
-                  <a:txBody>
-                    <a:bodyPr wrap="square"/>
-                    <a:lstStyle/>
-                    <a:p>
-                      <a:pPr algn="l"/>
-                      <a:r>
-                        <a:rPr sz="1050" b="0">
-                          <a:solidFill>
-                            <a:srgbClr val="2E2C2C"/>
-                          </a:solidFill>
-                          <a:latin typeface="Arial"/>
-                          <a:ea typeface="微软雅黑"/>
-                        </a:rPr>
-                        <a:t>队列堆积峰值</a:t>
-                      </a:r>
-                    </a:p>
-                  </a:txBody>
-                  <a:tcPr marL="54864" marR="54864" marT="18288" marB="18288" anchor="ctr">
-                    <a:solidFill>
-                      <a:srgbClr val="FFFFFF"/>
-                    </a:solidFill>
-                  </a:tcPr>
-                </a:tc>
-                <a:tc>
-                  <a:txBody>
-                    <a:bodyPr wrap="square"/>
-                    <a:lstStyle/>
-                    <a:p>
-                      <a:pPr algn="ctr"/>
-                      <a:r>
-                        <a:rPr sz="1050" b="0">
-                          <a:solidFill>
-                            <a:srgbClr val="2E2C2C"/>
-                          </a:solidFill>
-                          <a:latin typeface="Arial"/>
-                          <a:ea typeface="微软雅黑"/>
-                        </a:rPr>
-                        <a:t>14698 → 20</a:t>
-                      </a:r>
-                    </a:p>
-                  </a:txBody>
-                  <a:tcPr marL="54864" marR="54864" marT="18288" marB="18288" anchor="ctr">
-                    <a:solidFill>
-                      <a:srgbClr val="FFFFFF"/>
-                    </a:solidFill>
-                  </a:tcPr>
-                </a:tc>
-                <a:tc>
-                  <a:txBody>
-                    <a:bodyPr wrap="square"/>
-                    <a:lstStyle/>
-                    <a:p>
-                      <a:pPr algn="ctr"/>
-                      <a:r>
-                        <a:rPr sz="1050" b="0">
-                          <a:solidFill>
-                            <a:srgbClr val="2E2C2C"/>
-                          </a:solidFill>
-                          <a:latin typeface="Arial"/>
-                          <a:ea typeface="微软雅黑"/>
-                        </a:rPr>
-                        <a:t>22652 → 16</a:t>
-                      </a:r>
-                    </a:p>
-                  </a:txBody>
-                  <a:tcPr marL="54864" marR="54864" marT="18288" marB="18288" anchor="ctr">
-                    <a:solidFill>
-                      <a:srgbClr val="FFFFFF"/>
                     </a:solidFill>
                   </a:tcPr>
                 </a:tc>
@@ -15816,7 +15816,7 @@
         </p:nvGraphicFramePr>
         <p:xfrm>
           <a:off x="566928" y="1207008"/>
-          <a:ext cx="11064240" cy="3657600"/>
+          <a:ext cx="11064240" cy="3621024"/>
         </p:xfrm>
         <a:graphic>
           <a:graphicData uri="http://schemas.openxmlformats.org/drawingml/2006/table">
@@ -15825,12 +15825,14 @@
                 <a:tableStyleId>{5C22544A-7EE6-4342-B048-85BDC9FD1C3A}</a:tableStyleId>
               </a:tblPr>
               <a:tblGrid>
-                <a:gridCol w="2423160"/>
-                <a:gridCol w="4160520"/>
-                <a:gridCol w="4480560"/>
+                <a:gridCol w="2286000"/>
+                <a:gridCol w="2011680"/>
+                <a:gridCol w="2011680"/>
+                <a:gridCol w="2377440"/>
+                <a:gridCol w="2377440"/>
               </a:tblGrid>
-              <a:tr h="731520">
-                <a:tc>
+              <a:tr h="603504">
+                <a:tc rowSpan="2">
                   <a:txBody>
                     <a:bodyPr wrap="square"/>
                     <a:lstStyle/>
@@ -15854,7 +15856,7 @@
                     </a:solidFill>
                   </a:tcPr>
                 </a:tc>
-                <a:tc>
+                <a:tc gridSpan="2">
                   <a:txBody>
                     <a:bodyPr wrap="square"/>
                     <a:lstStyle/>
@@ -15878,7 +15880,31 @@
                     </a:solidFill>
                   </a:tcPr>
                 </a:tc>
-                <a:tc>
+                <a:tc hMerge="1">
+                  <a:txBody>
+                    <a:bodyPr wrap="square"/>
+                    <a:lstStyle/>
+                    <a:p>
+                      <a:pPr algn="ctr"/>
+                      <a:r>
+                        <a:rPr sz="1250" b="1">
+                          <a:solidFill>
+                            <a:srgbClr val="FFFFFF"/>
+                          </a:solidFill>
+                          <a:latin typeface="Arial"/>
+                          <a:ea typeface="微软雅黑"/>
+                        </a:rPr>
+                        <a:t/>
+                      </a:r>
+                    </a:p>
+                  </a:txBody>
+                  <a:tcPr marL="54864" marR="54864" marT="18288" marB="18288" anchor="ctr">
+                    <a:solidFill>
+                      <a:srgbClr val="113E6A"/>
+                    </a:solidFill>
+                  </a:tcPr>
+                </a:tc>
+                <a:tc gridSpan="2">
                   <a:txBody>
                     <a:bodyPr wrap="square"/>
                     <a:lstStyle/>
@@ -15902,8 +15928,154 @@
                     </a:solidFill>
                   </a:tcPr>
                 </a:tc>
+                <a:tc hMerge="1">
+                  <a:txBody>
+                    <a:bodyPr wrap="square"/>
+                    <a:lstStyle/>
+                    <a:p>
+                      <a:pPr algn="ctr"/>
+                      <a:r>
+                        <a:rPr sz="1250" b="1">
+                          <a:solidFill>
+                            <a:srgbClr val="FFFFFF"/>
+                          </a:solidFill>
+                          <a:latin typeface="Arial"/>
+                          <a:ea typeface="微软雅黑"/>
+                        </a:rPr>
+                        <a:t/>
+                      </a:r>
+                    </a:p>
+                  </a:txBody>
+                  <a:tcPr marL="54864" marR="54864" marT="18288" marB="18288" anchor="ctr">
+                    <a:solidFill>
+                      <a:srgbClr val="113E6A"/>
+                    </a:solidFill>
+                  </a:tcPr>
+                </a:tc>
               </a:tr>
-              <a:tr h="731520">
+              <a:tr h="603504">
+                <a:tc vMerge="1">
+                  <a:txBody>
+                    <a:bodyPr wrap="square"/>
+                    <a:lstStyle/>
+                    <a:p>
+                      <a:pPr algn="l"/>
+                      <a:r>
+                        <a:rPr sz="1250" b="1">
+                          <a:solidFill>
+                            <a:srgbClr val="FFFFFF"/>
+                          </a:solidFill>
+                          <a:latin typeface="Arial"/>
+                          <a:ea typeface="微软雅黑"/>
+                        </a:rPr>
+                        <a:t/>
+                      </a:r>
+                    </a:p>
+                  </a:txBody>
+                  <a:tcPr marL="54864" marR="54864" marT="18288" marB="18288" anchor="ctr">
+                    <a:solidFill>
+                      <a:srgbClr val="113E6A"/>
+                    </a:solidFill>
+                  </a:tcPr>
+                </a:tc>
+                <a:tc>
+                  <a:txBody>
+                    <a:bodyPr wrap="square"/>
+                    <a:lstStyle/>
+                    <a:p>
+                      <a:pPr algn="ctr"/>
+                      <a:r>
+                        <a:rPr sz="1250" b="1">
+                          <a:solidFill>
+                            <a:srgbClr val="FFFFFF"/>
+                          </a:solidFill>
+                          <a:latin typeface="Arial"/>
+                          <a:ea typeface="微软雅黑"/>
+                        </a:rPr>
+                        <a:t>s3（5k）</a:t>
+                      </a:r>
+                    </a:p>
+                  </a:txBody>
+                  <a:tcPr marL="54864" marR="54864" marT="18288" marB="18288" anchor="ctr">
+                    <a:solidFill>
+                      <a:srgbClr val="113E6A"/>
+                    </a:solidFill>
+                  </a:tcPr>
+                </a:tc>
+                <a:tc>
+                  <a:txBody>
+                    <a:bodyPr wrap="square"/>
+                    <a:lstStyle/>
+                    <a:p>
+                      <a:pPr algn="ctr"/>
+                      <a:r>
+                        <a:rPr sz="1250" b="1">
+                          <a:solidFill>
+                            <a:srgbClr val="FFFFFF"/>
+                          </a:solidFill>
+                          <a:latin typeface="Arial"/>
+                          <a:ea typeface="微软雅黑"/>
+                        </a:rPr>
+                        <a:t>s4（10k）</a:t>
+                      </a:r>
+                    </a:p>
+                  </a:txBody>
+                  <a:tcPr marL="54864" marR="54864" marT="18288" marB="18288" anchor="ctr">
+                    <a:solidFill>
+                      <a:srgbClr val="113E6A"/>
+                    </a:solidFill>
+                  </a:tcPr>
+                </a:tc>
+                <a:tc>
+                  <a:txBody>
+                    <a:bodyPr wrap="square"/>
+                    <a:lstStyle/>
+                    <a:p>
+                      <a:pPr algn="ctr"/>
+                      <a:r>
+                        <a:rPr sz="1250" b="1">
+                          <a:solidFill>
+                            <a:srgbClr val="FFFFFF"/>
+                          </a:solidFill>
+                          <a:latin typeface="Arial"/>
+                          <a:ea typeface="微软雅黑"/>
+                        </a:rPr>
+                        <a:t>s3（5k）</a:t>
+                      </a:r>
+                    </a:p>
+                  </a:txBody>
+                  <a:tcPr marL="54864" marR="54864" marT="18288" marB="18288" anchor="ctr">
+                    <a:solidFill>
+                      <a:srgbClr val="113E6A"/>
+                    </a:solidFill>
+                  </a:tcPr>
+                </a:tc>
+                <a:tc>
+                  <a:txBody>
+                    <a:bodyPr wrap="square"/>
+                    <a:lstStyle/>
+                    <a:p>
+                      <a:pPr algn="ctr"/>
+                      <a:r>
+                        <a:rPr sz="1250" b="1">
+                          <a:solidFill>
+                            <a:srgbClr val="FFFFFF"/>
+                          </a:solidFill>
+                          <a:latin typeface="Arial"/>
+                          <a:ea typeface="微软雅黑"/>
+                        </a:rPr>
+                        <a:t>s4（10k）</a:t>
+                      </a:r>
+                    </a:p>
+                  </a:txBody>
+                  <a:tcPr marL="54864" marR="54864" marT="18288" marB="18288" anchor="ctr">
+                    <a:solidFill>
+                      <a:srgbClr val="113E6A"/>
+                    </a:solidFill>
+                  </a:tcPr>
+                </a:tc>
+              </a:tr>
+              <a:tr h="603504">
                 <a:tc>
                   <a:txBody>
                     <a:bodyPr wrap="square"/>
@@ -15918,7 +16090,129 @@
                           <a:latin typeface="Arial"/>
                           <a:ea typeface="微软雅黑"/>
                         </a:rPr>
-                        <a:t>w3 稳态（s3 / s4）</a:t>
+                        <a:t>w3 稳态</a:t>
+                      </a:r>
+                    </a:p>
+                  </a:txBody>
+                  <a:tcPr marL="54864" marR="54864" marT="18288" marB="18288" anchor="ctr">
+                    <a:solidFill>
+                      <a:srgbClr val="F2F4F7"/>
+                    </a:solidFill>
+                  </a:tcPr>
+                </a:tc>
+                <a:tc>
+                  <a:txBody>
+                    <a:bodyPr wrap="square"/>
+                    <a:lstStyle/>
+                    <a:p>
+                      <a:pPr algn="ctr"/>
+                      <a:r>
+                        <a:rPr sz="1250" b="0">
+                          <a:solidFill>
+                            <a:srgbClr val="2E2C2C"/>
+                          </a:solidFill>
+                          <a:latin typeface="Arial"/>
+                          <a:ea typeface="微软雅黑"/>
+                        </a:rPr>
+                        <a:t>+21.7%</a:t>
+                      </a:r>
+                    </a:p>
+                  </a:txBody>
+                  <a:tcPr marL="54864" marR="54864" marT="18288" marB="18288" anchor="ctr">
+                    <a:solidFill>
+                      <a:srgbClr val="F2F4F7"/>
+                    </a:solidFill>
+                  </a:tcPr>
+                </a:tc>
+                <a:tc>
+                  <a:txBody>
+                    <a:bodyPr wrap="square"/>
+                    <a:lstStyle/>
+                    <a:p>
+                      <a:pPr algn="ctr"/>
+                      <a:r>
+                        <a:rPr sz="1250" b="0">
+                          <a:solidFill>
+                            <a:srgbClr val="2E2C2C"/>
+                          </a:solidFill>
+                          <a:latin typeface="Arial"/>
+                          <a:ea typeface="微软雅黑"/>
+                        </a:rPr>
+                        <a:t>+5.6%</a:t>
+                      </a:r>
+                    </a:p>
+                  </a:txBody>
+                  <a:tcPr marL="54864" marR="54864" marT="18288" marB="18288" anchor="ctr">
+                    <a:solidFill>
+                      <a:srgbClr val="F2F4F7"/>
+                    </a:solidFill>
+                  </a:tcPr>
+                </a:tc>
+                <a:tc>
+                  <a:txBody>
+                    <a:bodyPr wrap="square"/>
+                    <a:lstStyle/>
+                    <a:p>
+                      <a:pPr algn="ctr"/>
+                      <a:r>
+                        <a:rPr sz="1250" b="0">
+                          <a:solidFill>
+                            <a:srgbClr val="2E2C2C"/>
+                          </a:solidFill>
+                          <a:latin typeface="Arial"/>
+                          <a:ea typeface="微软雅黑"/>
+                        </a:rPr>
+                        <a:t>−15.2%</a:t>
+                      </a:r>
+                    </a:p>
+                  </a:txBody>
+                  <a:tcPr marL="54864" marR="54864" marT="18288" marB="18288" anchor="ctr">
+                    <a:solidFill>
+                      <a:srgbClr val="F2F4F7"/>
+                    </a:solidFill>
+                  </a:tcPr>
+                </a:tc>
+                <a:tc>
+                  <a:txBody>
+                    <a:bodyPr wrap="square"/>
+                    <a:lstStyle/>
+                    <a:p>
+                      <a:pPr algn="ctr"/>
+                      <a:r>
+                        <a:rPr sz="1250" b="0">
+                          <a:solidFill>
+                            <a:srgbClr val="2E2C2C"/>
+                          </a:solidFill>
+                          <a:latin typeface="Arial"/>
+                          <a:ea typeface="微软雅黑"/>
+                        </a:rPr>
+                        <a:t>−33.4%</a:t>
+                      </a:r>
+                    </a:p>
+                  </a:txBody>
+                  <a:tcPr marL="54864" marR="54864" marT="18288" marB="18288" anchor="ctr">
+                    <a:solidFill>
+                      <a:srgbClr val="F2F4F7"/>
+                    </a:solidFill>
+                  </a:tcPr>
+                </a:tc>
+              </a:tr>
+              <a:tr h="603504">
+                <a:tc>
+                  <a:txBody>
+                    <a:bodyPr wrap="square"/>
+                    <a:lstStyle/>
+                    <a:p>
+                      <a:pPr algn="l"/>
+                      <a:r>
+                        <a:rPr sz="1250" b="0">
+                          <a:solidFill>
+                            <a:srgbClr val="2E2C2C"/>
+                          </a:solidFill>
+                          <a:latin typeface="Arial"/>
+                          <a:ea typeface="微软雅黑"/>
+                        </a:rPr>
+                        <a:t>w4 极限</a:t>
                       </a:r>
                     </a:p>
                   </a:txBody>
@@ -15942,7 +16236,7 @@
                           <a:latin typeface="Arial"/>
                           <a:ea typeface="微软雅黑"/>
                         </a:rPr>
-                        <a:t>+21.7% / +5.6%</a:t>
+                        <a:t>+9.3%</a:t>
                       </a:r>
                     </a:p>
                   </a:txBody>
@@ -15966,7 +16260,55 @@
                           <a:latin typeface="Arial"/>
                           <a:ea typeface="微软雅黑"/>
                         </a:rPr>
-                        <a:t>−15.2% / −33.4%</a:t>
+                        <a:t>+16.0%</a:t>
+                      </a:r>
+                    </a:p>
+                  </a:txBody>
+                  <a:tcPr marL="54864" marR="54864" marT="18288" marB="18288" anchor="ctr">
+                    <a:solidFill>
+                      <a:srgbClr val="FFFFFF"/>
+                    </a:solidFill>
+                  </a:tcPr>
+                </a:tc>
+                <a:tc>
+                  <a:txBody>
+                    <a:bodyPr wrap="square"/>
+                    <a:lstStyle/>
+                    <a:p>
+                      <a:pPr algn="ctr"/>
+                      <a:r>
+                        <a:rPr sz="1250" b="0">
+                          <a:solidFill>
+                            <a:srgbClr val="2E2C2C"/>
+                          </a:solidFill>
+                          <a:latin typeface="Arial"/>
+                          <a:ea typeface="微软雅黑"/>
+                        </a:rPr>
+                        <a:t>−49.7%</a:t>
+                      </a:r>
+                    </a:p>
+                  </a:txBody>
+                  <a:tcPr marL="54864" marR="54864" marT="18288" marB="18288" anchor="ctr">
+                    <a:solidFill>
+                      <a:srgbClr val="FFFFFF"/>
+                    </a:solidFill>
+                  </a:tcPr>
+                </a:tc>
+                <a:tc>
+                  <a:txBody>
+                    <a:bodyPr wrap="square"/>
+                    <a:lstStyle/>
+                    <a:p>
+                      <a:pPr algn="ctr"/>
+                      <a:r>
+                        <a:rPr sz="1250" b="0">
+                          <a:solidFill>
+                            <a:srgbClr val="2E2C2C"/>
+                          </a:solidFill>
+                          <a:latin typeface="Arial"/>
+                          <a:ea typeface="微软雅黑"/>
+                        </a:rPr>
+                        <a:t>−14.8%</a:t>
                       </a:r>
                     </a:p>
                   </a:txBody>
@@ -15977,7 +16319,7 @@
                   </a:tcPr>
                 </a:tc>
               </a:tr>
-              <a:tr h="731520">
+              <a:tr h="603504">
                 <a:tc>
                   <a:txBody>
                     <a:bodyPr wrap="square"/>
@@ -15992,7 +16334,7 @@
                           <a:latin typeface="Arial"/>
                           <a:ea typeface="微软雅黑"/>
                         </a:rPr>
-                        <a:t>w4 极限（s3 / s4）</a:t>
+                        <a:t>w5 突发</a:t>
                       </a:r>
                     </a:p>
                   </a:txBody>
@@ -16016,7 +16358,7 @@
                           <a:latin typeface="Arial"/>
                           <a:ea typeface="微软雅黑"/>
                         </a:rPr>
-                        <a:t>+9.3% / +16.0%</a:t>
+                        <a:t>+21.3%</a:t>
                       </a:r>
                     </a:p>
                   </a:txBody>
@@ -16040,7 +16382,55 @@
                           <a:latin typeface="Arial"/>
                           <a:ea typeface="微软雅黑"/>
                         </a:rPr>
-                        <a:t>−49.7% / −14.8%</a:t>
+                        <a:t>+2.8%</a:t>
+                      </a:r>
+                    </a:p>
+                  </a:txBody>
+                  <a:tcPr marL="54864" marR="54864" marT="18288" marB="18288" anchor="ctr">
+                    <a:solidFill>
+                      <a:srgbClr val="F2F4F7"/>
+                    </a:solidFill>
+                  </a:tcPr>
+                </a:tc>
+                <a:tc>
+                  <a:txBody>
+                    <a:bodyPr wrap="square"/>
+                    <a:lstStyle/>
+                    <a:p>
+                      <a:pPr algn="ctr"/>
+                      <a:r>
+                        <a:rPr sz="1250" b="0">
+                          <a:solidFill>
+                            <a:srgbClr val="2E2C2C"/>
+                          </a:solidFill>
+                          <a:latin typeface="Arial"/>
+                          <a:ea typeface="微软雅黑"/>
+                        </a:rPr>
+                        <a:t>−18.0%</a:t>
+                      </a:r>
+                    </a:p>
+                  </a:txBody>
+                  <a:tcPr marL="54864" marR="54864" marT="18288" marB="18288" anchor="ctr">
+                    <a:solidFill>
+                      <a:srgbClr val="F2F4F7"/>
+                    </a:solidFill>
+                  </a:tcPr>
+                </a:tc>
+                <a:tc>
+                  <a:txBody>
+                    <a:bodyPr wrap="square"/>
+                    <a:lstStyle/>
+                    <a:p>
+                      <a:pPr algn="ctr"/>
+                      <a:r>
+                        <a:rPr sz="1250" b="0">
+                          <a:solidFill>
+                            <a:srgbClr val="2E2C2C"/>
+                          </a:solidFill>
+                          <a:latin typeface="Arial"/>
+                          <a:ea typeface="微软雅黑"/>
+                        </a:rPr>
+                        <a:t>−0.3%</a:t>
                       </a:r>
                     </a:p>
                   </a:txBody>
@@ -16051,7 +16441,7 @@
                   </a:tcPr>
                 </a:tc>
               </a:tr>
-              <a:tr h="731520">
+              <a:tr h="603504">
                 <a:tc>
                   <a:txBody>
                     <a:bodyPr wrap="square"/>
@@ -16066,7 +16456,7 @@
                           <a:latin typeface="Arial"/>
                           <a:ea typeface="微软雅黑"/>
                         </a:rPr>
-                        <a:t>w5 突发（s3 / s4）</a:t>
+                        <a:t>w7 异构</a:t>
                       </a:r>
                     </a:p>
                   </a:txBody>
@@ -16090,7 +16480,7 @@
                           <a:latin typeface="Arial"/>
                           <a:ea typeface="微软雅黑"/>
                         </a:rPr>
-                        <a:t>+21.3% / +2.8%</a:t>
+                        <a:t>+21.2%</a:t>
                       </a:r>
                     </a:p>
                   </a:txBody>
@@ -16114,39 +16504,13 @@
                           <a:latin typeface="Arial"/>
                           <a:ea typeface="微软雅黑"/>
                         </a:rPr>
-                        <a:t>−18.0% / −0.3%</a:t>
+                        <a:t>持平</a:t>
                       </a:r>
                     </a:p>
                   </a:txBody>
                   <a:tcPr marL="54864" marR="54864" marT="18288" marB="18288" anchor="ctr">
                     <a:solidFill>
                       <a:srgbClr val="FFFFFF"/>
-                    </a:solidFill>
-                  </a:tcPr>
-                </a:tc>
-              </a:tr>
-              <a:tr h="731520">
-                <a:tc>
-                  <a:txBody>
-                    <a:bodyPr wrap="square"/>
-                    <a:lstStyle/>
-                    <a:p>
-                      <a:pPr algn="l"/>
-                      <a:r>
-                        <a:rPr sz="1250" b="0">
-                          <a:solidFill>
-                            <a:srgbClr val="2E2C2C"/>
-                          </a:solidFill>
-                          <a:latin typeface="Arial"/>
-                          <a:ea typeface="微软雅黑"/>
-                        </a:rPr>
-                        <a:t>w7 异构（s3 / s4）</a:t>
-                      </a:r>
-                    </a:p>
-                  </a:txBody>
-                  <a:tcPr marL="54864" marR="54864" marT="18288" marB="18288" anchor="ctr">
-                    <a:solidFill>
-                      <a:srgbClr val="F2F4F7"/>
                     </a:solidFill>
                   </a:tcPr>
                 </a:tc>
@@ -16164,13 +16528,13 @@
                           <a:latin typeface="Arial"/>
                           <a:ea typeface="微软雅黑"/>
                         </a:rPr>
-                        <a:t>+21.2% / 持平</a:t>
+                        <a:t>−22.1%</a:t>
                       </a:r>
                     </a:p>
                   </a:txBody>
                   <a:tcPr marL="54864" marR="54864" marT="18288" marB="18288" anchor="ctr">
                     <a:solidFill>
-                      <a:srgbClr val="F2F4F7"/>
+                      <a:srgbClr val="FFFFFF"/>
                     </a:solidFill>
                   </a:tcPr>
                 </a:tc>
@@ -16188,13 +16552,13 @@
                           <a:latin typeface="Arial"/>
                           <a:ea typeface="微软雅黑"/>
                         </a:rPr>
-                        <a:t>−22.1% / −3.9%</a:t>
+                        <a:t>−3.9%</a:t>
                       </a:r>
                     </a:p>
                   </a:txBody>
                   <a:tcPr marL="54864" marR="54864" marT="18288" marB="18288" anchor="ctr">
                     <a:solidFill>
-                      <a:srgbClr val="F2F4F7"/>
+                      <a:srgbClr val="FFFFFF"/>
                     </a:solidFill>
                   </a:tcPr>
                 </a:tc>
@@ -17591,7 +17955,7 @@
                   </a:txBody>
                   <a:tcPr marL="54864" marR="54864" marT="18288" marB="18288" anchor="ctr">
                     <a:solidFill>
-                      <a:srgbClr val="FFFFFF"/>
+                      <a:srgbClr val="F2F4F7"/>
                     </a:solidFill>
                   </a:tcPr>
                 </a:tc>
@@ -17615,6 +17979,56 @@
                   </a:txBody>
                   <a:tcPr marL="54864" marR="54864" marT="18288" marB="18288" anchor="ctr">
                     <a:solidFill>
+                      <a:srgbClr val="F2F4F7"/>
+                    </a:solidFill>
+                  </a:tcPr>
+                </a:tc>
+                <a:tc>
+                  <a:txBody>
+                    <a:bodyPr wrap="square"/>
+                    <a:lstStyle/>
+                    <a:p>
+                      <a:pPr algn="ctr"/>
+                      <a:r>
+                        <a:rPr sz="1200" b="0">
+                          <a:solidFill>
+                            <a:srgbClr val="2E2C2C"/>
+                          </a:solidFill>
+                          <a:latin typeface="Arial"/>
+                          <a:ea typeface="微软雅黑"/>
+                        </a:rPr>
+                        <a:t>s3/w3 inst3 0.45 vs 0.93 s（低 51.9%）</a:t>
+                      </a:r>
+                    </a:p>
+                  </a:txBody>
+                  <a:tcPr marL="54864" marR="54864" marT="18288" marB="18288" anchor="ctr">
+                    <a:solidFill>
+                      <a:srgbClr val="F2F4F7"/>
+                    </a:solidFill>
+                  </a:tcPr>
+                </a:tc>
+              </a:tr>
+              <a:tr h="420624">
+                <a:tc>
+                  <a:txBody>
+                    <a:bodyPr wrap="square"/>
+                    <a:lstStyle/>
+                    <a:p>
+                      <a:pPr algn="l"/>
+                      <a:r>
+                        <a:rPr sz="1200" b="0">
+                          <a:solidFill>
+                            <a:srgbClr val="2E2C2C"/>
+                          </a:solidFill>
+                          <a:latin typeface="Arial"/>
+                          <a:ea typeface="微软雅黑"/>
+                        </a:rPr>
+                        <a:t>CacheAdapter 零拷贝共享</a:t>
+                      </a:r>
+                    </a:p>
+                  </a:txBody>
+                  <a:tcPr marL="54864" marR="54864" marT="18288" marB="18288" anchor="ctr">
+                    <a:solidFill>
                       <a:srgbClr val="FFFFFF"/>
                     </a:solidFill>
                   </a:tcPr>
@@ -17633,7 +18047,31 @@
                           <a:latin typeface="Arial"/>
                           <a:ea typeface="微软雅黑"/>
                         </a:rPr>
-                        <a:t>s3/w3 inst3 0.45 vs 0.93 s（低 51.9%）</a:t>
+                        <a:t>状态复用 / 无同步延迟</a:t>
+                      </a:r>
+                    </a:p>
+                  </a:txBody>
+                  <a:tcPr marL="54864" marR="54864" marT="18288" marB="18288" anchor="ctr">
+                    <a:solidFill>
+                      <a:srgbClr val="FFFFFF"/>
+                    </a:solidFill>
+                  </a:tcPr>
+                </a:tc>
+                <a:tc>
+                  <a:txBody>
+                    <a:bodyPr wrap="square"/>
+                    <a:lstStyle/>
+                    <a:p>
+                      <a:pPr algn="ctr"/>
+                      <a:r>
+                        <a:rPr sz="1200" b="0">
+                          <a:solidFill>
+                            <a:srgbClr val="2E2C2C"/>
+                          </a:solidFill>
+                          <a:latin typeface="Arial"/>
+                          <a:ea typeface="微软雅黑"/>
+                        </a:rPr>
+                        <a:t>inst3 队列峰值 20 vs 16</a:t>
                       </a:r>
                     </a:p>
                   </a:txBody>
@@ -17659,7 +18097,7 @@
                           <a:latin typeface="Arial"/>
                           <a:ea typeface="微软雅黑"/>
                         </a:rPr>
-                        <a:t>CacheAdapter 零拷贝共享</a:t>
+                        <a:t>无独立 Binder 串行段</a:t>
                       </a:r>
                     </a:p>
                   </a:txBody>
@@ -17683,7 +18121,7 @@
                           <a:latin typeface="Arial"/>
                           <a:ea typeface="微软雅黑"/>
                         </a:rPr>
-                        <a:t>状态复用 / 无同步延迟</a:t>
+                        <a:t>有效吞吐随实例扩展</a:t>
                       </a:r>
                     </a:p>
                   </a:txBody>
@@ -17707,7 +18145,7 @@
                           <a:latin typeface="Arial"/>
                           <a:ea typeface="微软雅黑"/>
                         </a:rPr>
-                        <a:t>inst3 队列峰值 20 vs 16</a:t>
+                        <a:t>+17.5% vs +1.4%</a:t>
                       </a:r>
                     </a:p>
                   </a:txBody>
@@ -17733,7 +18171,7 @@
                           <a:latin typeface="Arial"/>
                           <a:ea typeface="微软雅黑"/>
                         </a:rPr>
-                        <a:t>无独立 Binder 串行段</a:t>
+                        <a:t>四层容错守住不变量 I</a:t>
                       </a:r>
                     </a:p>
                   </a:txBody>
@@ -17757,7 +18195,7 @@
                           <a:latin typeface="Arial"/>
                           <a:ea typeface="微软雅黑"/>
                         </a:rPr>
-                        <a:t>有效吞吐随实例扩展</a:t>
+                        <a:t>绑定成功率 / 断言</a:t>
                       </a:r>
                     </a:p>
                   </a:txBody>
@@ -17781,87 +18219,13 @@
                           <a:latin typeface="Arial"/>
                           <a:ea typeface="微软雅黑"/>
                         </a:rPr>
-                        <a:t>+17.5% vs +1.4%</a:t>
+                        <a:t>100%；144 次 run 全过</a:t>
                       </a:r>
                     </a:p>
                   </a:txBody>
                   <a:tcPr marL="54864" marR="54864" marT="18288" marB="18288" anchor="ctr">
                     <a:solidFill>
                       <a:srgbClr val="FFFFFF"/>
-                    </a:solidFill>
-                  </a:tcPr>
-                </a:tc>
-              </a:tr>
-              <a:tr h="420624">
-                <a:tc>
-                  <a:txBody>
-                    <a:bodyPr wrap="square"/>
-                    <a:lstStyle/>
-                    <a:p>
-                      <a:pPr algn="l"/>
-                      <a:r>
-                        <a:rPr sz="1200" b="0">
-                          <a:solidFill>
-                            <a:srgbClr val="2E2C2C"/>
-                          </a:solidFill>
-                          <a:latin typeface="Arial"/>
-                          <a:ea typeface="微软雅黑"/>
-                        </a:rPr>
-                        <a:t>四层容错守住不变量 I</a:t>
-                      </a:r>
-                    </a:p>
-                  </a:txBody>
-                  <a:tcPr marL="54864" marR="54864" marT="18288" marB="18288" anchor="ctr">
-                    <a:solidFill>
-                      <a:srgbClr val="F2F4F7"/>
-                    </a:solidFill>
-                  </a:tcPr>
-                </a:tc>
-                <a:tc>
-                  <a:txBody>
-                    <a:bodyPr wrap="square"/>
-                    <a:lstStyle/>
-                    <a:p>
-                      <a:pPr algn="ctr"/>
-                      <a:r>
-                        <a:rPr sz="1200" b="0">
-                          <a:solidFill>
-                            <a:srgbClr val="2E2C2C"/>
-                          </a:solidFill>
-                          <a:latin typeface="Arial"/>
-                          <a:ea typeface="微软雅黑"/>
-                        </a:rPr>
-                        <a:t>绑定成功率 / 断言</a:t>
-                      </a:r>
-                    </a:p>
-                  </a:txBody>
-                  <a:tcPr marL="54864" marR="54864" marT="18288" marB="18288" anchor="ctr">
-                    <a:solidFill>
-                      <a:srgbClr val="F2F4F7"/>
-                    </a:solidFill>
-                  </a:tcPr>
-                </a:tc>
-                <a:tc>
-                  <a:txBody>
-                    <a:bodyPr wrap="square"/>
-                    <a:lstStyle/>
-                    <a:p>
-                      <a:pPr algn="ctr"/>
-                      <a:r>
-                        <a:rPr sz="1200" b="0">
-                          <a:solidFill>
-                            <a:srgbClr val="2E2C2C"/>
-                          </a:solidFill>
-                          <a:latin typeface="Arial"/>
-                          <a:ea typeface="微软雅黑"/>
-                        </a:rPr>
-                        <a:t>100%；144 次 run 全过</a:t>
-                      </a:r>
-                    </a:p>
-                  </a:txBody>
-                  <a:tcPr marL="54864" marR="54864" marT="18288" marB="18288" anchor="ctr">
-                    <a:solidFill>
-                      <a:srgbClr val="F2F4F7"/>
                     </a:solidFill>
                   </a:tcPr>
                 </a:tc>
@@ -22464,7 +22828,7 @@
                   </a:txBody>
                   <a:tcPr marL="54864" marR="54864" marT="18288" marB="18288" anchor="ctr">
                     <a:solidFill>
-                      <a:srgbClr val="FFFFFF"/>
+                      <a:srgbClr val="F2F4F7"/>
                     </a:solidFill>
                   </a:tcPr>
                 </a:tc>
@@ -22488,7 +22852,7 @@
                   </a:txBody>
                   <a:tcPr marL="54864" marR="54864" marT="18288" marB="18288" anchor="ctr">
                     <a:solidFill>
-                      <a:srgbClr val="FFFFFF"/>
+                      <a:srgbClr val="F2F4F7"/>
                     </a:solidFill>
                   </a:tcPr>
                 </a:tc>
@@ -22512,7 +22876,7 @@
                   </a:txBody>
                   <a:tcPr marL="54864" marR="54864" marT="18288" marB="18288" anchor="ctr">
                     <a:solidFill>
-                      <a:srgbClr val="FFFFFF"/>
+                      <a:srgbClr val="F2F4F7"/>
                     </a:solidFill>
                   </a:tcPr>
                 </a:tc>
@@ -22536,6 +22900,56 @@
                   </a:txBody>
                   <a:tcPr marL="54864" marR="54864" marT="18288" marB="18288" anchor="ctr">
                     <a:solidFill>
+                      <a:srgbClr val="F2F4F7"/>
+                    </a:solidFill>
+                  </a:tcPr>
+                </a:tc>
+                <a:tc>
+                  <a:txBody>
+                    <a:bodyPr wrap="square"/>
+                    <a:lstStyle/>
+                    <a:p>
+                      <a:pPr algn="ctr"/>
+                      <a:r>
+                        <a:rPr sz="1200" b="0">
+                          <a:solidFill>
+                            <a:srgbClr val="2E2C2C"/>
+                          </a:solidFill>
+                          <a:latin typeface="Arial"/>
+                          <a:ea typeface="微软雅黑"/>
+                        </a:rPr>
+                        <a:t>0.11</a:t>
+                      </a:r>
+                    </a:p>
+                  </a:txBody>
+                  <a:tcPr marL="54864" marR="54864" marT="18288" marB="18288" anchor="ctr">
+                    <a:solidFill>
+                      <a:srgbClr val="F2F4F7"/>
+                    </a:solidFill>
+                  </a:tcPr>
+                </a:tc>
+              </a:tr>
+              <a:tr h="420624">
+                <a:tc>
+                  <a:txBody>
+                    <a:bodyPr wrap="square"/>
+                    <a:lstStyle/>
+                    <a:p>
+                      <a:pPr algn="l"/>
+                      <a:r>
+                        <a:rPr sz="1200" b="0">
+                          <a:solidFill>
+                            <a:srgbClr val="2E2C2C"/>
+                          </a:solidFill>
+                          <a:latin typeface="Arial"/>
+                          <a:ea typeface="微软雅黑"/>
+                        </a:rPr>
+                        <a:t>s2/w3</a:t>
+                      </a:r>
+                    </a:p>
+                  </a:txBody>
+                  <a:tcPr marL="54864" marR="54864" marT="18288" marB="18288" anchor="ctr">
+                    <a:solidFill>
                       <a:srgbClr val="FFFFFF"/>
                     </a:solidFill>
                   </a:tcPr>
@@ -22554,7 +22968,79 @@
                           <a:latin typeface="Arial"/>
                           <a:ea typeface="微软雅黑"/>
                         </a:rPr>
-                        <a:t>0.11</a:t>
+                        <a:t>352.1</a:t>
+                      </a:r>
+                    </a:p>
+                  </a:txBody>
+                  <a:tcPr marL="54864" marR="54864" marT="18288" marB="18288" anchor="ctr">
+                    <a:solidFill>
+                      <a:srgbClr val="FFFFFF"/>
+                    </a:solidFill>
+                  </a:tcPr>
+                </a:tc>
+                <a:tc>
+                  <a:txBody>
+                    <a:bodyPr wrap="square"/>
+                    <a:lstStyle/>
+                    <a:p>
+                      <a:pPr algn="ctr"/>
+                      <a:r>
+                        <a:rPr sz="1200" b="0">
+                          <a:solidFill>
+                            <a:srgbClr val="2E2C2C"/>
+                          </a:solidFill>
+                          <a:latin typeface="Arial"/>
+                          <a:ea typeface="微软雅黑"/>
+                        </a:rPr>
+                        <a:t>286.5</a:t>
+                      </a:r>
+                    </a:p>
+                  </a:txBody>
+                  <a:tcPr marL="54864" marR="54864" marT="18288" marB="18288" anchor="ctr">
+                    <a:solidFill>
+                      <a:srgbClr val="FFFFFF"/>
+                    </a:solidFill>
+                  </a:tcPr>
+                </a:tc>
+                <a:tc>
+                  <a:txBody>
+                    <a:bodyPr wrap="square"/>
+                    <a:lstStyle/>
+                    <a:p>
+                      <a:pPr algn="ctr"/>
+                      <a:r>
+                        <a:rPr sz="1200" b="0">
+                          <a:solidFill>
+                            <a:srgbClr val="2E2C2C"/>
+                          </a:solidFill>
+                          <a:latin typeface="Arial"/>
+                          <a:ea typeface="微软雅黑"/>
+                        </a:rPr>
+                        <a:t>4.00</a:t>
+                      </a:r>
+                    </a:p>
+                  </a:txBody>
+                  <a:tcPr marL="54864" marR="54864" marT="18288" marB="18288" anchor="ctr">
+                    <a:solidFill>
+                      <a:srgbClr val="FFFFFF"/>
+                    </a:solidFill>
+                  </a:tcPr>
+                </a:tc>
+                <a:tc>
+                  <a:txBody>
+                    <a:bodyPr wrap="square"/>
+                    <a:lstStyle/>
+                    <a:p>
+                      <a:pPr algn="ctr"/>
+                      <a:r>
+                        <a:rPr sz="1200" b="0">
+                          <a:solidFill>
+                            <a:srgbClr val="2E2C2C"/>
+                          </a:solidFill>
+                          <a:latin typeface="Arial"/>
+                          <a:ea typeface="微软雅黑"/>
+                        </a:rPr>
+                        <a:t>23.48</a:t>
                       </a:r>
                     </a:p>
                   </a:txBody>
@@ -22580,7 +23066,7 @@
                           <a:latin typeface="Arial"/>
                           <a:ea typeface="微软雅黑"/>
                         </a:rPr>
-                        <a:t>s2/w3</a:t>
+                        <a:t>s3/w3 inst1</a:t>
                       </a:r>
                     </a:p>
                   </a:txBody>
@@ -22604,7 +23090,7 @@
                           <a:latin typeface="Arial"/>
                           <a:ea typeface="微软雅黑"/>
                         </a:rPr>
-                        <a:t>352.1</a:t>
+                        <a:t>297.6</a:t>
                       </a:r>
                     </a:p>
                   </a:txBody>
@@ -22628,7 +23114,7 @@
                           <a:latin typeface="Arial"/>
                           <a:ea typeface="微软雅黑"/>
                         </a:rPr>
-                        <a:t>286.5</a:t>
+                        <a:t>283.3</a:t>
                       </a:r>
                     </a:p>
                   </a:txBody>
@@ -22652,7 +23138,7 @@
                           <a:latin typeface="Arial"/>
                           <a:ea typeface="微软雅黑"/>
                         </a:rPr>
-                        <a:t>4.00</a:t>
+                        <a:t>16.22</a:t>
                       </a:r>
                     </a:p>
                   </a:txBody>
@@ -22676,7 +23162,7 @@
                           <a:latin typeface="Arial"/>
                           <a:ea typeface="微软雅黑"/>
                         </a:rPr>
-                        <a:t>23.48</a:t>
+                        <a:t>32.57</a:t>
                       </a:r>
                     </a:p>
                   </a:txBody>
@@ -22702,7 +23188,7 @@
                           <a:latin typeface="Arial"/>
                           <a:ea typeface="微软雅黑"/>
                         </a:rPr>
-                        <a:t>s3/w3 inst1</a:t>
+                        <a:t>s3/w3 inst3</a:t>
                       </a:r>
                     </a:p>
                   </a:txBody>
@@ -22726,7 +23212,7 @@
                           <a:latin typeface="Arial"/>
                           <a:ea typeface="微软雅黑"/>
                         </a:rPr>
-                        <a:t>297.6</a:t>
+                        <a:t>349.7</a:t>
                       </a:r>
                     </a:p>
                   </a:txBody>
@@ -22750,7 +23236,7 @@
                           <a:latin typeface="Arial"/>
                           <a:ea typeface="微软雅黑"/>
                         </a:rPr>
-                        <a:t>283.3</a:t>
+                        <a:t>287.4</a:t>
                       </a:r>
                     </a:p>
                   </a:txBody>
@@ -22774,7 +23260,7 @@
                           <a:latin typeface="Arial"/>
                           <a:ea typeface="微软雅黑"/>
                         </a:rPr>
-                        <a:t>16.22</a:t>
+                        <a:t>0.13</a:t>
                       </a:r>
                     </a:p>
                   </a:txBody>
@@ -22798,7 +23284,7 @@
                           <a:latin typeface="Arial"/>
                           <a:ea typeface="微软雅黑"/>
                         </a:rPr>
-                        <a:t>32.57</a:t>
+                        <a:t>0.15</a:t>
                       </a:r>
                     </a:p>
                   </a:txBody>
@@ -22824,7 +23310,7 @@
                           <a:latin typeface="Arial"/>
                           <a:ea typeface="微软雅黑"/>
                         </a:rPr>
-                        <a:t>s3/w3 inst3</a:t>
+                        <a:t>s4/w3 inst3</a:t>
                       </a:r>
                     </a:p>
                   </a:txBody>
@@ -22848,7 +23334,7 @@
                           <a:latin typeface="Arial"/>
                           <a:ea typeface="微软雅黑"/>
                         </a:rPr>
-                        <a:t>349.7</a:t>
+                        <a:t>296.7</a:t>
                       </a:r>
                     </a:p>
                   </a:txBody>
@@ -22872,7 +23358,7 @@
                           <a:latin typeface="Arial"/>
                           <a:ea typeface="微软雅黑"/>
                         </a:rPr>
-                        <a:t>287.4</a:t>
+                        <a:t>280.9</a:t>
                       </a:r>
                     </a:p>
                   </a:txBody>
@@ -22896,7 +23382,7 @@
                           <a:latin typeface="Arial"/>
                           <a:ea typeface="微软雅黑"/>
                         </a:rPr>
-                        <a:t>0.13</a:t>
+                        <a:t>0.19</a:t>
                       </a:r>
                     </a:p>
                   </a:txBody>
@@ -22920,7 +23406,7 @@
                           <a:latin typeface="Arial"/>
                           <a:ea typeface="微软雅黑"/>
                         </a:rPr>
-                        <a:t>0.15</a:t>
+                        <a:t>0.28</a:t>
                       </a:r>
                     </a:p>
                   </a:txBody>
@@ -22946,7 +23432,7 @@
                           <a:latin typeface="Arial"/>
                           <a:ea typeface="微软雅黑"/>
                         </a:rPr>
-                        <a:t>s4/w3 inst3</a:t>
+                        <a:t>s4/w7 inst3</a:t>
                       </a:r>
                     </a:p>
                   </a:txBody>
@@ -22970,7 +23456,7 @@
                           <a:latin typeface="Arial"/>
                           <a:ea typeface="微软雅黑"/>
                         </a:rPr>
-                        <a:t>296.7</a:t>
+                        <a:t>271.7</a:t>
                       </a:r>
                     </a:p>
                   </a:txBody>
@@ -22994,7 +23480,7 @@
                           <a:latin typeface="Arial"/>
                           <a:ea typeface="微软雅黑"/>
                         </a:rPr>
-                        <a:t>280.9</a:t>
+                        <a:t>271.7</a:t>
                       </a:r>
                     </a:p>
                   </a:txBody>
@@ -23018,7 +23504,7 @@
                           <a:latin typeface="Arial"/>
                           <a:ea typeface="微软雅黑"/>
                         </a:rPr>
-                        <a:t>0.19</a:t>
+                        <a:t>0.06</a:t>
                       </a:r>
                     </a:p>
                   </a:txBody>
@@ -23042,135 +23528,13 @@
                           <a:latin typeface="Arial"/>
                           <a:ea typeface="微软雅黑"/>
                         </a:rPr>
-                        <a:t>0.28</a:t>
+                        <a:t>0.06</a:t>
                       </a:r>
                     </a:p>
                   </a:txBody>
                   <a:tcPr marL="54864" marR="54864" marT="18288" marB="18288" anchor="ctr">
                     <a:solidFill>
                       <a:srgbClr val="FFFFFF"/>
-                    </a:solidFill>
-                  </a:tcPr>
-                </a:tc>
-              </a:tr>
-              <a:tr h="420624">
-                <a:tc>
-                  <a:txBody>
-                    <a:bodyPr wrap="square"/>
-                    <a:lstStyle/>
-                    <a:p>
-                      <a:pPr algn="l"/>
-                      <a:r>
-                        <a:rPr sz="1200" b="0">
-                          <a:solidFill>
-                            <a:srgbClr val="2E2C2C"/>
-                          </a:solidFill>
-                          <a:latin typeface="Arial"/>
-                          <a:ea typeface="微软雅黑"/>
-                        </a:rPr>
-                        <a:t>s4/w7 inst3</a:t>
-                      </a:r>
-                    </a:p>
-                  </a:txBody>
-                  <a:tcPr marL="54864" marR="54864" marT="18288" marB="18288" anchor="ctr">
-                    <a:solidFill>
-                      <a:srgbClr val="F2F4F7"/>
-                    </a:solidFill>
-                  </a:tcPr>
-                </a:tc>
-                <a:tc>
-                  <a:txBody>
-                    <a:bodyPr wrap="square"/>
-                    <a:lstStyle/>
-                    <a:p>
-                      <a:pPr algn="ctr"/>
-                      <a:r>
-                        <a:rPr sz="1200" b="0">
-                          <a:solidFill>
-                            <a:srgbClr val="2E2C2C"/>
-                          </a:solidFill>
-                          <a:latin typeface="Arial"/>
-                          <a:ea typeface="微软雅黑"/>
-                        </a:rPr>
-                        <a:t>271.7</a:t>
-                      </a:r>
-                    </a:p>
-                  </a:txBody>
-                  <a:tcPr marL="54864" marR="54864" marT="18288" marB="18288" anchor="ctr">
-                    <a:solidFill>
-                      <a:srgbClr val="F2F4F7"/>
-                    </a:solidFill>
-                  </a:tcPr>
-                </a:tc>
-                <a:tc>
-                  <a:txBody>
-                    <a:bodyPr wrap="square"/>
-                    <a:lstStyle/>
-                    <a:p>
-                      <a:pPr algn="ctr"/>
-                      <a:r>
-                        <a:rPr sz="1200" b="0">
-                          <a:solidFill>
-                            <a:srgbClr val="2E2C2C"/>
-                          </a:solidFill>
-                          <a:latin typeface="Arial"/>
-                          <a:ea typeface="微软雅黑"/>
-                        </a:rPr>
-                        <a:t>271.7</a:t>
-                      </a:r>
-                    </a:p>
-                  </a:txBody>
-                  <a:tcPr marL="54864" marR="54864" marT="18288" marB="18288" anchor="ctr">
-                    <a:solidFill>
-                      <a:srgbClr val="F2F4F7"/>
-                    </a:solidFill>
-                  </a:tcPr>
-                </a:tc>
-                <a:tc>
-                  <a:txBody>
-                    <a:bodyPr wrap="square"/>
-                    <a:lstStyle/>
-                    <a:p>
-                      <a:pPr algn="ctr"/>
-                      <a:r>
-                        <a:rPr sz="1200" b="0">
-                          <a:solidFill>
-                            <a:srgbClr val="2E2C2C"/>
-                          </a:solidFill>
-                          <a:latin typeface="Arial"/>
-                          <a:ea typeface="微软雅黑"/>
-                        </a:rPr>
-                        <a:t>0.06</a:t>
-                      </a:r>
-                    </a:p>
-                  </a:txBody>
-                  <a:tcPr marL="54864" marR="54864" marT="18288" marB="18288" anchor="ctr">
-                    <a:solidFill>
-                      <a:srgbClr val="F2F4F7"/>
-                    </a:solidFill>
-                  </a:tcPr>
-                </a:tc>
-                <a:tc>
-                  <a:txBody>
-                    <a:bodyPr wrap="square"/>
-                    <a:lstStyle/>
-                    <a:p>
-                      <a:pPr algn="ctr"/>
-                      <a:r>
-                        <a:rPr sz="1200" b="0">
-                          <a:solidFill>
-                            <a:srgbClr val="2E2C2C"/>
-                          </a:solidFill>
-                          <a:latin typeface="Arial"/>
-                          <a:ea typeface="微软雅黑"/>
-                        </a:rPr>
-                        <a:t>0.06</a:t>
-                      </a:r>
-                    </a:p>
-                  </a:txBody>
-                  <a:tcPr marL="54864" marR="54864" marT="18288" marB="18288" anchor="ctr">
-                    <a:solidFill>
-                      <a:srgbClr val="F2F4F7"/>
                     </a:solidFill>
                   </a:tcPr>
                 </a:tc>
@@ -23740,7 +24104,7 @@
                   </a:txBody>
                   <a:tcPr marL="54864" marR="54864" marT="18288" marB="18288" anchor="ctr">
                     <a:solidFill>
-                      <a:srgbClr val="FFFFFF"/>
+                      <a:srgbClr val="F2F4F7"/>
                     </a:solidFill>
                   </a:tcPr>
                 </a:tc>
@@ -23764,6 +24128,56 @@
                   </a:txBody>
                   <a:tcPr marL="54864" marR="54864" marT="18288" marB="18288" anchor="ctr">
                     <a:solidFill>
+                      <a:srgbClr val="F2F4F7"/>
+                    </a:solidFill>
+                  </a:tcPr>
+                </a:tc>
+                <a:tc>
+                  <a:txBody>
+                    <a:bodyPr wrap="square"/>
+                    <a:lstStyle/>
+                    <a:p>
+                      <a:pPr algn="ctr"/>
+                      <a:r>
+                        <a:rPr sz="1200" b="0">
+                          <a:solidFill>
+                            <a:srgbClr val="2E2C2C"/>
+                          </a:solidFill>
+                          <a:latin typeface="Arial"/>
+                          <a:ea typeface="微软雅黑"/>
+                        </a:rPr>
+                        <a:t>每 run 算再取中位数</a:t>
+                      </a:r>
+                    </a:p>
+                  </a:txBody>
+                  <a:tcPr marL="54864" marR="54864" marT="18288" marB="18288" anchor="ctr">
+                    <a:solidFill>
+                      <a:srgbClr val="F2F4F7"/>
+                    </a:solidFill>
+                  </a:tcPr>
+                </a:tc>
+              </a:tr>
+              <a:tr h="420624">
+                <a:tc>
+                  <a:txBody>
+                    <a:bodyPr wrap="square"/>
+                    <a:lstStyle/>
+                    <a:p>
+                      <a:pPr algn="l"/>
+                      <a:r>
+                        <a:rPr sz="1200" b="0">
+                          <a:solidFill>
+                            <a:srgbClr val="2E2C2C"/>
+                          </a:solidFill>
+                          <a:latin typeface="Arial"/>
+                          <a:ea typeface="微软雅黑"/>
+                        </a:rPr>
+                        <a:t>峰值吞吐</a:t>
+                      </a:r>
+                    </a:p>
+                  </a:txBody>
+                  <a:tcPr marL="54864" marR="54864" marT="18288" marB="18288" anchor="ctr">
+                    <a:solidFill>
                       <a:srgbClr val="FFFFFF"/>
                     </a:solidFill>
                   </a:tcPr>
@@ -23782,7 +24196,31 @@
                           <a:latin typeface="Arial"/>
                           <a:ea typeface="微软雅黑"/>
                         </a:rPr>
-                        <a:t>每 run 算再取中位数</a:t>
+                        <a:t>scheduling_peak_throughput</a:t>
+                      </a:r>
+                    </a:p>
+                  </a:txBody>
+                  <a:tcPr marL="54864" marR="54864" marT="18288" marB="18288" anchor="ctr">
+                    <a:solidFill>
+                      <a:srgbClr val="FFFFFF"/>
+                    </a:solidFill>
+                  </a:tcPr>
+                </a:tc>
+                <a:tc>
+                  <a:txBody>
+                    <a:bodyPr wrap="square"/>
+                    <a:lstStyle/>
+                    <a:p>
+                      <a:pPr algn="ctr"/>
+                      <a:r>
+                        <a:rPr sz="1200" b="0">
+                          <a:solidFill>
+                            <a:srgbClr val="2E2C2C"/>
+                          </a:solidFill>
+                          <a:latin typeface="Arial"/>
+                          <a:ea typeface="微软雅黑"/>
+                        </a:rPr>
+                        <a:t>3 run 逐点中位数后取标量</a:t>
                       </a:r>
                     </a:p>
                   </a:txBody>
@@ -23808,7 +24246,7 @@
                           <a:latin typeface="Arial"/>
                           <a:ea typeface="微软雅黑"/>
                         </a:rPr>
-                        <a:t>峰值吞吐</a:t>
+                        <a:t>P90/P99</a:t>
                       </a:r>
                     </a:p>
                   </a:txBody>
@@ -23832,7 +24270,7 @@
                           <a:latin typeface="Arial"/>
                           <a:ea typeface="微软雅黑"/>
                         </a:rPr>
-                        <a:t>scheduling_peak_throughput</a:t>
+                        <a:t>activeQ 到 Bind 完成的分位</a:t>
                       </a:r>
                     </a:p>
                   </a:txBody>
@@ -23856,7 +24294,7 @@
                           <a:latin typeface="Arial"/>
                           <a:ea typeface="微软雅黑"/>
                         </a:rPr>
-                        <a:t>3 run 逐点中位数后取标量</a:t>
+                        <a:t>剔首尾各 2 点后取中位数</a:t>
                       </a:r>
                     </a:p>
                   </a:txBody>
@@ -23882,7 +24320,7 @@
                           <a:latin typeface="Arial"/>
                           <a:ea typeface="微软雅黑"/>
                         </a:rPr>
-                        <a:t>P90/P99</a:t>
+                        <a:t>Pod E2E P99</a:t>
                       </a:r>
                     </a:p>
                   </a:txBody>
@@ -23906,7 +24344,7 @@
                           <a:latin typeface="Arial"/>
                           <a:ea typeface="微软雅黑"/>
                         </a:rPr>
-                        <a:t>activeQ 到 Bind 完成的分位</a:t>
+                        <a:t>pod_e2e_latency_p99</a:t>
                       </a:r>
                     </a:p>
                   </a:txBody>
@@ -23930,7 +24368,7 @@
                           <a:latin typeface="Arial"/>
                           <a:ea typeface="微软雅黑"/>
                         </a:rPr>
-                        <a:t>剔首尾各 2 点后取中位数</a:t>
+                        <a:t>同上</a:t>
                       </a:r>
                     </a:p>
                   </a:txBody>
@@ -23956,7 +24394,7 @@
                           <a:latin typeface="Arial"/>
                           <a:ea typeface="微软雅黑"/>
                         </a:rPr>
-                        <a:t>Pod E2E P99</a:t>
+                        <a:t>绑定成功率</a:t>
                       </a:r>
                     </a:p>
                   </a:txBody>
@@ -23980,7 +24418,7 @@
                           <a:latin typeface="Arial"/>
                           <a:ea typeface="微软雅黑"/>
                         </a:rPr>
-                        <a:t>pod_e2e_latency_p99</a:t>
+                        <a:t>Bind 成功 / 尝试</a:t>
                       </a:r>
                     </a:p>
                   </a:txBody>
@@ -24004,7 +24442,7 @@
                           <a:latin typeface="Arial"/>
                           <a:ea typeface="微软雅黑"/>
                         </a:rPr>
-                        <a:t>同上</a:t>
+                        <a:t>比值</a:t>
                       </a:r>
                     </a:p>
                   </a:txBody>
@@ -24030,7 +24468,7 @@
                           <a:latin typeface="Arial"/>
                           <a:ea typeface="微软雅黑"/>
                         </a:rPr>
-                        <a:t>绑定成功率</a:t>
+                        <a:t>队列堆积峰值</a:t>
                       </a:r>
                     </a:p>
                   </a:txBody>
@@ -24054,7 +24492,7 @@
                           <a:latin typeface="Arial"/>
                           <a:ea typeface="微软雅黑"/>
                         </a:rPr>
-                        <a:t>Bind 成功 / 尝试</a:t>
+                        <a:t>pending_pods 最大值</a:t>
                       </a:r>
                     </a:p>
                   </a:txBody>
@@ -24078,87 +24516,13 @@
                           <a:latin typeface="Arial"/>
                           <a:ea typeface="微软雅黑"/>
                         </a:rPr>
-                        <a:t>比值</a:t>
+                        <a:t>取最大</a:t>
                       </a:r>
                     </a:p>
                   </a:txBody>
                   <a:tcPr marL="54864" marR="54864" marT="18288" marB="18288" anchor="ctr">
                     <a:solidFill>
                       <a:srgbClr val="FFFFFF"/>
-                    </a:solidFill>
-                  </a:tcPr>
-                </a:tc>
-              </a:tr>
-              <a:tr h="420624">
-                <a:tc>
-                  <a:txBody>
-                    <a:bodyPr wrap="square"/>
-                    <a:lstStyle/>
-                    <a:p>
-                      <a:pPr algn="l"/>
-                      <a:r>
-                        <a:rPr sz="1200" b="0">
-                          <a:solidFill>
-                            <a:srgbClr val="2E2C2C"/>
-                          </a:solidFill>
-                          <a:latin typeface="Arial"/>
-                          <a:ea typeface="微软雅黑"/>
-                        </a:rPr>
-                        <a:t>队列堆积峰值</a:t>
-                      </a:r>
-                    </a:p>
-                  </a:txBody>
-                  <a:tcPr marL="54864" marR="54864" marT="18288" marB="18288" anchor="ctr">
-                    <a:solidFill>
-                      <a:srgbClr val="F2F4F7"/>
-                    </a:solidFill>
-                  </a:tcPr>
-                </a:tc>
-                <a:tc>
-                  <a:txBody>
-                    <a:bodyPr wrap="square"/>
-                    <a:lstStyle/>
-                    <a:p>
-                      <a:pPr algn="ctr"/>
-                      <a:r>
-                        <a:rPr sz="1200" b="0">
-                          <a:solidFill>
-                            <a:srgbClr val="2E2C2C"/>
-                          </a:solidFill>
-                          <a:latin typeface="Arial"/>
-                          <a:ea typeface="微软雅黑"/>
-                        </a:rPr>
-                        <a:t>pending_pods 最大值</a:t>
-                      </a:r>
-                    </a:p>
-                  </a:txBody>
-                  <a:tcPr marL="54864" marR="54864" marT="18288" marB="18288" anchor="ctr">
-                    <a:solidFill>
-                      <a:srgbClr val="F2F4F7"/>
-                    </a:solidFill>
-                  </a:tcPr>
-                </a:tc>
-                <a:tc>
-                  <a:txBody>
-                    <a:bodyPr wrap="square"/>
-                    <a:lstStyle/>
-                    <a:p>
-                      <a:pPr algn="ctr"/>
-                      <a:r>
-                        <a:rPr sz="1200" b="0">
-                          <a:solidFill>
-                            <a:srgbClr val="2E2C2C"/>
-                          </a:solidFill>
-                          <a:latin typeface="Arial"/>
-                          <a:ea typeface="微软雅黑"/>
-                        </a:rPr>
-                        <a:t>取最大</a:t>
-                      </a:r>
-                    </a:p>
-                  </a:txBody>
-                  <a:tcPr marL="54864" marR="54864" marT="18288" marB="18288" anchor="ctr">
-                    <a:solidFill>
-                      <a:srgbClr val="F2F4F7"/>
                     </a:solidFill>
                   </a:tcPr>
                 </a:tc>
@@ -25221,7 +25585,7 @@
                   </a:txBody>
                   <a:tcPr marL="54864" marR="54864" marT="18288" marB="18288" anchor="ctr">
                     <a:solidFill>
-                      <a:srgbClr val="FFFFFF"/>
+                      <a:srgbClr val="F2F4F7"/>
                     </a:solidFill>
                   </a:tcPr>
                 </a:tc>
@@ -25245,7 +25609,7 @@
                   </a:txBody>
                   <a:tcPr marL="54864" marR="54864" marT="18288" marB="18288" anchor="ctr">
                     <a:solidFill>
-                      <a:srgbClr val="FFFFFF"/>
+                      <a:srgbClr val="F2F4F7"/>
                     </a:solidFill>
                   </a:tcPr>
                 </a:tc>
@@ -25269,7 +25633,7 @@
                   </a:txBody>
                   <a:tcPr marL="54864" marR="54864" marT="18288" marB="18288" anchor="ctr">
                     <a:solidFill>
-                      <a:srgbClr val="FFFFFF"/>
+                      <a:srgbClr val="F2F4F7"/>
                     </a:solidFill>
                   </a:tcPr>
                 </a:tc>
@@ -25293,6 +25657,56 @@
                   </a:txBody>
                   <a:tcPr marL="54864" marR="54864" marT="18288" marB="18288" anchor="ctr">
                     <a:solidFill>
+                      <a:srgbClr val="F2F4F7"/>
+                    </a:solidFill>
+                  </a:tcPr>
+                </a:tc>
+                <a:tc>
+                  <a:txBody>
+                    <a:bodyPr wrap="square"/>
+                    <a:lstStyle/>
+                    <a:p>
+                      <a:pPr algn="ctr"/>
+                      <a:r>
+                        <a:rPr sz="1200" b="0">
+                          <a:solidFill>
+                            <a:srgbClr val="2E2C2C"/>
+                          </a:solidFill>
+                          <a:latin typeface="Arial"/>
+                          <a:ea typeface="微软雅黑"/>
+                        </a:rPr>
+                        <a:t>0.175</a:t>
+                      </a:r>
+                    </a:p>
+                  </a:txBody>
+                  <a:tcPr marL="54864" marR="54864" marT="18288" marB="18288" anchor="ctr">
+                    <a:solidFill>
+                      <a:srgbClr val="F2F4F7"/>
+                    </a:solidFill>
+                  </a:tcPr>
+                </a:tc>
+              </a:tr>
+              <a:tr h="420624">
+                <a:tc>
+                  <a:txBody>
+                    <a:bodyPr wrap="square"/>
+                    <a:lstStyle/>
+                    <a:p>
+                      <a:pPr algn="l"/>
+                      <a:r>
+                        <a:rPr sz="1200" b="0">
+                          <a:solidFill>
+                            <a:srgbClr val="2E2C2C"/>
+                          </a:solidFill>
+                          <a:latin typeface="Arial"/>
+                          <a:ea typeface="微软雅黑"/>
+                        </a:rPr>
+                        <a:t>s3/w6 inst3</a:t>
+                      </a:r>
+                    </a:p>
+                  </a:txBody>
+                  <a:tcPr marL="54864" marR="54864" marT="18288" marB="18288" anchor="ctr">
+                    <a:solidFill>
                       <a:srgbClr val="FFFFFF"/>
                     </a:solidFill>
                   </a:tcPr>
@@ -25311,7 +25725,79 @@
                           <a:latin typeface="Arial"/>
                           <a:ea typeface="微软雅黑"/>
                         </a:rPr>
-                        <a:t>0.175</a:t>
+                        <a:t>215.5</a:t>
+                      </a:r>
+                    </a:p>
+                  </a:txBody>
+                  <a:tcPr marL="54864" marR="54864" marT="18288" marB="18288" anchor="ctr">
+                    <a:solidFill>
+                      <a:srgbClr val="FFFFFF"/>
+                    </a:solidFill>
+                  </a:tcPr>
+                </a:tc>
+                <a:tc>
+                  <a:txBody>
+                    <a:bodyPr wrap="square"/>
+                    <a:lstStyle/>
+                    <a:p>
+                      <a:pPr algn="ctr"/>
+                      <a:r>
+                        <a:rPr sz="1200" b="0">
+                          <a:solidFill>
+                            <a:srgbClr val="2E2C2C"/>
+                          </a:solidFill>
+                          <a:latin typeface="Arial"/>
+                          <a:ea typeface="微软雅黑"/>
+                        </a:rPr>
+                        <a:t>206.6</a:t>
+                      </a:r>
+                    </a:p>
+                  </a:txBody>
+                  <a:tcPr marL="54864" marR="54864" marT="18288" marB="18288" anchor="ctr">
+                    <a:solidFill>
+                      <a:srgbClr val="FFFFFF"/>
+                    </a:solidFill>
+                  </a:tcPr>
+                </a:tc>
+                <a:tc>
+                  <a:txBody>
+                    <a:bodyPr wrap="square"/>
+                    <a:lstStyle/>
+                    <a:p>
+                      <a:pPr algn="ctr"/>
+                      <a:r>
+                        <a:rPr sz="1200" b="0">
+                          <a:solidFill>
+                            <a:srgbClr val="2E2C2C"/>
+                          </a:solidFill>
+                          <a:latin typeface="Arial"/>
+                          <a:ea typeface="微软雅黑"/>
+                        </a:rPr>
+                        <a:t>0.892</a:t>
+                      </a:r>
+                    </a:p>
+                  </a:txBody>
+                  <a:tcPr marL="54864" marR="54864" marT="18288" marB="18288" anchor="ctr">
+                    <a:solidFill>
+                      <a:srgbClr val="FFFFFF"/>
+                    </a:solidFill>
+                  </a:tcPr>
+                </a:tc>
+                <a:tc>
+                  <a:txBody>
+                    <a:bodyPr wrap="square"/>
+                    <a:lstStyle/>
+                    <a:p>
+                      <a:pPr algn="ctr"/>
+                      <a:r>
+                        <a:rPr sz="1200" b="0">
+                          <a:solidFill>
+                            <a:srgbClr val="2E2C2C"/>
+                          </a:solidFill>
+                          <a:latin typeface="Arial"/>
+                          <a:ea typeface="微软雅黑"/>
+                        </a:rPr>
+                        <a:t>0.218</a:t>
                       </a:r>
                     </a:p>
                   </a:txBody>
@@ -25337,7 +25823,7 @@
                           <a:latin typeface="Arial"/>
                           <a:ea typeface="微软雅黑"/>
                         </a:rPr>
-                        <a:t>s3/w6 inst3</a:t>
+                        <a:t>s4/w6 inst3</a:t>
                       </a:r>
                     </a:p>
                   </a:txBody>
@@ -25361,7 +25847,7 @@
                           <a:latin typeface="Arial"/>
                           <a:ea typeface="微软雅黑"/>
                         </a:rPr>
-                        <a:t>215.5</a:t>
+                        <a:t>245.1</a:t>
                       </a:r>
                     </a:p>
                   </a:txBody>
@@ -25409,7 +25895,7 @@
                           <a:latin typeface="Arial"/>
                           <a:ea typeface="微软雅黑"/>
                         </a:rPr>
-                        <a:t>0.892</a:t>
+                        <a:t>0.576</a:t>
                       </a:r>
                     </a:p>
                   </a:txBody>
@@ -25433,135 +25919,13 @@
                           <a:latin typeface="Arial"/>
                           <a:ea typeface="微软雅黑"/>
                         </a:rPr>
-                        <a:t>0.218</a:t>
+                        <a:t>0.353</a:t>
                       </a:r>
                     </a:p>
                   </a:txBody>
                   <a:tcPr marL="54864" marR="54864" marT="18288" marB="18288" anchor="ctr">
                     <a:solidFill>
                       <a:srgbClr val="F2F4F7"/>
-                    </a:solidFill>
-                  </a:tcPr>
-                </a:tc>
-              </a:tr>
-              <a:tr h="420624">
-                <a:tc>
-                  <a:txBody>
-                    <a:bodyPr wrap="square"/>
-                    <a:lstStyle/>
-                    <a:p>
-                      <a:pPr algn="l"/>
-                      <a:r>
-                        <a:rPr sz="1200" b="0">
-                          <a:solidFill>
-                            <a:srgbClr val="2E2C2C"/>
-                          </a:solidFill>
-                          <a:latin typeface="Arial"/>
-                          <a:ea typeface="微软雅黑"/>
-                        </a:rPr>
-                        <a:t>s4/w6 inst3</a:t>
-                      </a:r>
-                    </a:p>
-                  </a:txBody>
-                  <a:tcPr marL="54864" marR="54864" marT="18288" marB="18288" anchor="ctr">
-                    <a:solidFill>
-                      <a:srgbClr val="FFFFFF"/>
-                    </a:solidFill>
-                  </a:tcPr>
-                </a:tc>
-                <a:tc>
-                  <a:txBody>
-                    <a:bodyPr wrap="square"/>
-                    <a:lstStyle/>
-                    <a:p>
-                      <a:pPr algn="ctr"/>
-                      <a:r>
-                        <a:rPr sz="1200" b="0">
-                          <a:solidFill>
-                            <a:srgbClr val="2E2C2C"/>
-                          </a:solidFill>
-                          <a:latin typeface="Arial"/>
-                          <a:ea typeface="微软雅黑"/>
-                        </a:rPr>
-                        <a:t>245.1</a:t>
-                      </a:r>
-                    </a:p>
-                  </a:txBody>
-                  <a:tcPr marL="54864" marR="54864" marT="18288" marB="18288" anchor="ctr">
-                    <a:solidFill>
-                      <a:srgbClr val="FFFFFF"/>
-                    </a:solidFill>
-                  </a:tcPr>
-                </a:tc>
-                <a:tc>
-                  <a:txBody>
-                    <a:bodyPr wrap="square"/>
-                    <a:lstStyle/>
-                    <a:p>
-                      <a:pPr algn="ctr"/>
-                      <a:r>
-                        <a:rPr sz="1200" b="0">
-                          <a:solidFill>
-                            <a:srgbClr val="2E2C2C"/>
-                          </a:solidFill>
-                          <a:latin typeface="Arial"/>
-                          <a:ea typeface="微软雅黑"/>
-                        </a:rPr>
-                        <a:t>206.6</a:t>
-                      </a:r>
-                    </a:p>
-                  </a:txBody>
-                  <a:tcPr marL="54864" marR="54864" marT="18288" marB="18288" anchor="ctr">
-                    <a:solidFill>
-                      <a:srgbClr val="FFFFFF"/>
-                    </a:solidFill>
-                  </a:tcPr>
-                </a:tc>
-                <a:tc>
-                  <a:txBody>
-                    <a:bodyPr wrap="square"/>
-                    <a:lstStyle/>
-                    <a:p>
-                      <a:pPr algn="ctr"/>
-                      <a:r>
-                        <a:rPr sz="1200" b="0">
-                          <a:solidFill>
-                            <a:srgbClr val="2E2C2C"/>
-                          </a:solidFill>
-                          <a:latin typeface="Arial"/>
-                          <a:ea typeface="微软雅黑"/>
-                        </a:rPr>
-                        <a:t>0.576</a:t>
-                      </a:r>
-                    </a:p>
-                  </a:txBody>
-                  <a:tcPr marL="54864" marR="54864" marT="18288" marB="18288" anchor="ctr">
-                    <a:solidFill>
-                      <a:srgbClr val="FFFFFF"/>
-                    </a:solidFill>
-                  </a:tcPr>
-                </a:tc>
-                <a:tc>
-                  <a:txBody>
-                    <a:bodyPr wrap="square"/>
-                    <a:lstStyle/>
-                    <a:p>
-                      <a:pPr algn="ctr"/>
-                      <a:r>
-                        <a:rPr sz="1200" b="0">
-                          <a:solidFill>
-                            <a:srgbClr val="2E2C2C"/>
-                          </a:solidFill>
-                          <a:latin typeface="Arial"/>
-                          <a:ea typeface="微软雅黑"/>
-                        </a:rPr>
-                        <a:t>0.353</a:t>
-                      </a:r>
-                    </a:p>
-                  </a:txBody>
-                  <a:tcPr marL="54864" marR="54864" marT="18288" marB="18288" anchor="ctr">
-                    <a:solidFill>
-                      <a:srgbClr val="FFFFFF"/>
                     </a:solidFill>
                   </a:tcPr>
                 </a:tc>
@@ -26156,6 +26520,104 @@
                   </a:txBody>
                   <a:tcPr marL="54864" marR="54864" marT="18288" marB="18288" anchor="ctr">
                     <a:solidFill>
+                      <a:srgbClr val="F2F4F7"/>
+                    </a:solidFill>
+                  </a:tcPr>
+                </a:tc>
+                <a:tc>
+                  <a:txBody>
+                    <a:bodyPr wrap="square"/>
+                    <a:lstStyle/>
+                    <a:p>
+                      <a:pPr algn="ctr"/>
+                      <a:r>
+                        <a:rPr sz="1100" b="0">
+                          <a:solidFill>
+                            <a:srgbClr val="2E2C2C"/>
+                          </a:solidFill>
+                          <a:latin typeface="Arial"/>
+                          <a:ea typeface="微软雅黑"/>
+                        </a:rPr>
+                        <a:t>国外</a:t>
+                      </a:r>
+                    </a:p>
+                  </a:txBody>
+                  <a:tcPr marL="54864" marR="54864" marT="18288" marB="18288" anchor="ctr">
+                    <a:solidFill>
+                      <a:srgbClr val="F2F4F7"/>
+                    </a:solidFill>
+                  </a:tcPr>
+                </a:tc>
+                <a:tc>
+                  <a:txBody>
+                    <a:bodyPr wrap="square"/>
+                    <a:lstStyle/>
+                    <a:p>
+                      <a:pPr algn="ctr"/>
+                      <a:r>
+                        <a:rPr sz="1100" b="0">
+                          <a:solidFill>
+                            <a:srgbClr val="2E2C2C"/>
+                          </a:solidFill>
+                          <a:latin typeface="Arial"/>
+                          <a:ea typeface="微软雅黑"/>
+                        </a:rPr>
+                        <a:t>集中式</a:t>
+                      </a:r>
+                    </a:p>
+                  </a:txBody>
+                  <a:tcPr marL="54864" marR="54864" marT="18288" marB="18288" anchor="ctr">
+                    <a:solidFill>
+                      <a:srgbClr val="F2F4F7"/>
+                    </a:solidFill>
+                  </a:tcPr>
+                </a:tc>
+                <a:tc>
+                  <a:txBody>
+                    <a:bodyPr wrap="square"/>
+                    <a:lstStyle/>
+                    <a:p>
+                      <a:pPr algn="ctr"/>
+                      <a:r>
+                        <a:rPr sz="1100" b="0">
+                          <a:solidFill>
+                            <a:srgbClr val="2E2C2C"/>
+                          </a:solidFill>
+                          <a:latin typeface="Arial"/>
+                          <a:ea typeface="微软雅黑"/>
+                        </a:rPr>
+                        <a:t>单点决策路径上限</a:t>
+                      </a:r>
+                    </a:p>
+                  </a:txBody>
+                  <a:tcPr marL="54864" marR="54864" marT="18288" marB="18288" anchor="ctr">
+                    <a:solidFill>
+                      <a:srgbClr val="F2F4F7"/>
+                    </a:solidFill>
+                  </a:tcPr>
+                </a:tc>
+              </a:tr>
+              <a:tr h="310896">
+                <a:tc>
+                  <a:txBody>
+                    <a:bodyPr wrap="square"/>
+                    <a:lstStyle/>
+                    <a:p>
+                      <a:pPr algn="l"/>
+                      <a:r>
+                        <a:rPr sz="1100" b="0">
+                          <a:solidFill>
+                            <a:srgbClr val="2E2C2C"/>
+                          </a:solidFill>
+                          <a:latin typeface="Arial"/>
+                          <a:ea typeface="微软雅黑"/>
+                        </a:rPr>
+                        <a:t>Omega</a:t>
+                      </a:r>
+                    </a:p>
+                  </a:txBody>
+                  <a:tcPr marL="54864" marR="54864" marT="18288" marB="18288" anchor="ctr">
+                    <a:solidFill>
                       <a:srgbClr val="FFFFFF"/>
                     </a:solidFill>
                   </a:tcPr>
@@ -26198,7 +26660,7 @@
                           <a:latin typeface="Arial"/>
                           <a:ea typeface="微软雅黑"/>
                         </a:rPr>
-                        <a:t>集中式</a:t>
+                        <a:t>共享状态 + 乐观并发</a:t>
                       </a:r>
                     </a:p>
                   </a:txBody>
@@ -26222,7 +26684,7 @@
                           <a:latin typeface="Arial"/>
                           <a:ea typeface="微软雅黑"/>
                         </a:rPr>
-                        <a:t>单点决策路径上限</a:t>
+                        <a:t>冲突处理复杂</a:t>
                       </a:r>
                     </a:p>
                   </a:txBody>
@@ -26248,7 +26710,7 @@
                           <a:latin typeface="Arial"/>
                           <a:ea typeface="微软雅黑"/>
                         </a:rPr>
-                        <a:t>Omega</a:t>
+                        <a:t>Mesos</a:t>
                       </a:r>
                     </a:p>
                   </a:txBody>
@@ -26296,7 +26758,7 @@
                           <a:latin typeface="Arial"/>
                           <a:ea typeface="微软雅黑"/>
                         </a:rPr>
-                        <a:t>共享状态 + 乐观并发</a:t>
+                        <a:t>两级资源调度</a:t>
                       </a:r>
                     </a:p>
                   </a:txBody>
@@ -26320,7 +26782,7 @@
                           <a:latin typeface="Arial"/>
                           <a:ea typeface="微软雅黑"/>
                         </a:rPr>
-                        <a:t>冲突处理复杂</a:t>
+                        <a:t>多框架共享开销</a:t>
                       </a:r>
                     </a:p>
                   </a:txBody>
@@ -26346,7 +26808,7 @@
                           <a:latin typeface="Arial"/>
                           <a:ea typeface="微软雅黑"/>
                         </a:rPr>
-                        <a:t>Mesos</a:t>
+                        <a:t>kube-scheduler</a:t>
                       </a:r>
                     </a:p>
                   </a:txBody>
@@ -26394,7 +26856,7 @@
                           <a:latin typeface="Arial"/>
                           <a:ea typeface="微软雅黑"/>
                         </a:rPr>
-                        <a:t>两级资源调度</a:t>
+                        <a:t>中心式插件框架</a:t>
                       </a:r>
                     </a:p>
                   </a:txBody>
@@ -26418,7 +26880,7 @@
                           <a:latin typeface="Arial"/>
                           <a:ea typeface="微软雅黑"/>
                         </a:rPr>
-                        <a:t>多框架共享开销</a:t>
+                        <a:t>超大规模扩展受限</a:t>
                       </a:r>
                     </a:p>
                   </a:txBody>
@@ -26444,7 +26906,7 @@
                           <a:latin typeface="Arial"/>
                           <a:ea typeface="微软雅黑"/>
                         </a:rPr>
-                        <a:t>kube-scheduler</a:t>
+                        <a:t>Gödel</a:t>
                       </a:r>
                     </a:p>
                   </a:txBody>
@@ -26468,7 +26930,7 @@
                           <a:latin typeface="Arial"/>
                           <a:ea typeface="微软雅黑"/>
                         </a:rPr>
-                        <a:t>国外</a:t>
+                        <a:t>国内</a:t>
                       </a:r>
                     </a:p>
                   </a:txBody>
@@ -26492,7 +26954,7 @@
                           <a:latin typeface="Arial"/>
                           <a:ea typeface="微软雅黑"/>
                         </a:rPr>
-                        <a:t>中心式插件框架</a:t>
+                        <a:t>分片式分布式（字节跳动）</a:t>
                       </a:r>
                     </a:p>
                   </a:txBody>
@@ -26516,7 +26978,7 @@
                           <a:latin typeface="Arial"/>
                           <a:ea typeface="微软雅黑"/>
                         </a:rPr>
-                        <a:t>超大规模扩展受限</a:t>
+                        <a:t>独立 Binder 存在瓶颈</a:t>
                       </a:r>
                     </a:p>
                   </a:txBody>
@@ -26542,7 +27004,7 @@
                           <a:latin typeface="Arial"/>
                           <a:ea typeface="微软雅黑"/>
                         </a:rPr>
-                        <a:t>Gödel</a:t>
+                        <a:t>Volcano</a:t>
                       </a:r>
                     </a:p>
                   </a:txBody>
@@ -26590,7 +27052,7 @@
                           <a:latin typeface="Arial"/>
                           <a:ea typeface="微软雅黑"/>
                         </a:rPr>
-                        <a:t>分片式分布式（字节跳动）</a:t>
+                        <a:t>插件增强（Gang/队列）</a:t>
                       </a:r>
                     </a:p>
                   </a:txBody>
@@ -26614,7 +27076,7 @@
                           <a:latin typeface="Arial"/>
                           <a:ea typeface="微软雅黑"/>
                         </a:rPr>
-                        <a:t>独立 Binder 存在瓶颈</a:t>
+                        <a:t>中心路径仍有瓶颈</a:t>
                       </a:r>
                     </a:p>
                   </a:txBody>
@@ -26640,7 +27102,7 @@
                           <a:latin typeface="Arial"/>
                           <a:ea typeface="微软雅黑"/>
                         </a:rPr>
-                        <a:t>Volcano</a:t>
+                        <a:t>Koordinator</a:t>
                       </a:r>
                     </a:p>
                   </a:txBody>
@@ -26688,7 +27150,7 @@
                           <a:latin typeface="Arial"/>
                           <a:ea typeface="微软雅黑"/>
                         </a:rPr>
-                        <a:t>插件增强（Gang/队列）</a:t>
+                        <a:t>插件增强（QoS/超卖）</a:t>
                       </a:r>
                     </a:p>
                   </a:txBody>
@@ -26712,111 +27174,13 @@
                           <a:latin typeface="Arial"/>
                           <a:ea typeface="微软雅黑"/>
                         </a:rPr>
-                        <a:t>中心路径仍有瓶颈</a:t>
+                        <a:t>单实例扩展受限</a:t>
                       </a:r>
                     </a:p>
                   </a:txBody>
                   <a:tcPr marL="54864" marR="54864" marT="18288" marB="18288" anchor="ctr">
                     <a:solidFill>
                       <a:srgbClr val="F2F4F7"/>
-                    </a:solidFill>
-                  </a:tcPr>
-                </a:tc>
-              </a:tr>
-              <a:tr h="310896">
-                <a:tc>
-                  <a:txBody>
-                    <a:bodyPr wrap="square"/>
-                    <a:lstStyle/>
-                    <a:p>
-                      <a:pPr algn="l"/>
-                      <a:r>
-                        <a:rPr sz="1100" b="0">
-                          <a:solidFill>
-                            <a:srgbClr val="2E2C2C"/>
-                          </a:solidFill>
-                          <a:latin typeface="Arial"/>
-                          <a:ea typeface="微软雅黑"/>
-                        </a:rPr>
-                        <a:t>Koordinator</a:t>
-                      </a:r>
-                    </a:p>
-                  </a:txBody>
-                  <a:tcPr marL="54864" marR="54864" marT="18288" marB="18288" anchor="ctr">
-                    <a:solidFill>
-                      <a:srgbClr val="FFFFFF"/>
-                    </a:solidFill>
-                  </a:tcPr>
-                </a:tc>
-                <a:tc>
-                  <a:txBody>
-                    <a:bodyPr wrap="square"/>
-                    <a:lstStyle/>
-                    <a:p>
-                      <a:pPr algn="ctr"/>
-                      <a:r>
-                        <a:rPr sz="1100" b="0">
-                          <a:solidFill>
-                            <a:srgbClr val="2E2C2C"/>
-                          </a:solidFill>
-                          <a:latin typeface="Arial"/>
-                          <a:ea typeface="微软雅黑"/>
-                        </a:rPr>
-                        <a:t>国内</a:t>
-                      </a:r>
-                    </a:p>
-                  </a:txBody>
-                  <a:tcPr marL="54864" marR="54864" marT="18288" marB="18288" anchor="ctr">
-                    <a:solidFill>
-                      <a:srgbClr val="FFFFFF"/>
-                    </a:solidFill>
-                  </a:tcPr>
-                </a:tc>
-                <a:tc>
-                  <a:txBody>
-                    <a:bodyPr wrap="square"/>
-                    <a:lstStyle/>
-                    <a:p>
-                      <a:pPr algn="ctr"/>
-                      <a:r>
-                        <a:rPr sz="1100" b="0">
-                          <a:solidFill>
-                            <a:srgbClr val="2E2C2C"/>
-                          </a:solidFill>
-                          <a:latin typeface="Arial"/>
-                          <a:ea typeface="微软雅黑"/>
-                        </a:rPr>
-                        <a:t>插件增强（QoS/超卖）</a:t>
-                      </a:r>
-                    </a:p>
-                  </a:txBody>
-                  <a:tcPr marL="54864" marR="54864" marT="18288" marB="18288" anchor="ctr">
-                    <a:solidFill>
-                      <a:srgbClr val="FFFFFF"/>
-                    </a:solidFill>
-                  </a:tcPr>
-                </a:tc>
-                <a:tc>
-                  <a:txBody>
-                    <a:bodyPr wrap="square"/>
-                    <a:lstStyle/>
-                    <a:p>
-                      <a:pPr algn="ctr"/>
-                      <a:r>
-                        <a:rPr sz="1100" b="0">
-                          <a:solidFill>
-                            <a:srgbClr val="2E2C2C"/>
-                          </a:solidFill>
-                          <a:latin typeface="Arial"/>
-                          <a:ea typeface="微软雅黑"/>
-                        </a:rPr>
-                        <a:t>单实例扩展受限</a:t>
-                      </a:r>
-                    </a:p>
-                  </a:txBody>
-                  <a:tcPr marL="54864" marR="54864" marT="18288" marB="18288" anchor="ctr">
-                    <a:solidFill>
-                      <a:srgbClr val="FFFFFF"/>
                     </a:solidFill>
                   </a:tcPr>
                 </a:tc>

--- a/docs/thesis/defense/答辩PPT-北航模板版.pptx
+++ b/docs/thesis/defense/答辩PPT-北航模板版.pptx
@@ -40,7 +40,6 @@
     <p:sldId id="284" r:id="rId3"/>
     <p:sldId id="285" r:id="rId37"/>
     <p:sldId id="286" r:id="rId38"/>
-    <p:sldId id="287" r:id="rId39"/>
   </p:sldIdLst>
   <p:sldSz cx="12196763" cy="6858000"/>
   <p:notesSz cx="6858000" cy="9144000"/>
@@ -1898,7 +1897,7 @@
           <a:lstStyle/>
           <a:p>
             <a:r>
-              <a:t>把机制和指标对齐。进程内绑定去掉事件传递，对应 E2E 降低，三实例 0.45 对 0.93 秒；零拷贝让状态复用无同步延迟；关键是第三行，没有独立 Binder 的串行段，吞吐才能随实例扩展，+17.5% 对 +1.4%；第四行四层容错守住不变量。也要说明相关与归因的区别：峰值吞吐不是每个场景都领先。如果评委追问某个数字，备用页里有完整口径与原始目录。四行对应四个机制，每一项都有可复核的字段。</a:t>
+              <a:t>第一场注入：s2/w2、三实例，第 30 秒把 10% 的节点、约 100 个，归属注解从 scheduler-0 改为 scheduler-1。NodeValidator 拦截 300 次，Dispatcher 回退 300 次，两条曲线重叠。拦截不等于丢弃：Pod 进回退队列被重分发，成功率仍是 1.00，总耗时 683 秒、只比基线多 3 秒。这组数字说明 Layer 0 只是把错误前置，不是把工作丢掉，代价几乎为零。拦截 300 次、回退 300 次，两边对得上，说明没有 Pod 被丢掉。</a:t>
             </a:r>
           </a:p>
         </p:txBody>
@@ -1968,7 +1967,7 @@
           <a:lstStyle/>
           <a:p>
             <a:r>
-              <a:t>第一场注入：s2/w2、三实例，第 30 秒把 10% 的节点、约 100 个，归属注解从 scheduler-0 改为 scheduler-1。NodeValidator 拦截 300 次，Dispatcher 回退 300 次，两条曲线重叠。拦截不等于丢弃：Pod 进回退队列被重分发，成功率仍是 1.00，总耗时 683 秒、只比基线多 3 秒。这组数字说明 Layer 0 只是把错误前置，不是把工作丢掉，代价几乎为零。拦截 300 次、回退 300 次，两边对得上，说明没有 Pod 被丢掉。</a:t>
+              <a:t>第二场注入：第 10 秒杀掉 scheduler-0，停机 180 秒，实测中断 189 秒。被杀实例未完成的绑定只占 68/8407，即 0.81%；两个存活实例接管 8407 个 Pod，队列峰值 353 后回落到 2。累计绑定 49607/50000，断言仍全过。代价是 784 秒、比基线多 104 秒，是工作量重排的代价，不是数据损坏。对比基线是同一场景下的无故障运行，680 秒。队列在 353 之后回落到 2，说明积压是瞬时的。</a:t>
             </a:r>
           </a:p>
         </p:txBody>
@@ -2038,7 +2037,7 @@
           <a:lstStyle/>
           <a:p>
             <a:r>
-              <a:t>第二场注入：第 10 秒杀掉 scheduler-0，停机 180 秒，实测中断 189 秒。被杀实例未完成的绑定只占 68/8407，即 0.81%；两个存活实例接管 8407 个 Pod，队列峰值 353 后回落到 2。累计绑定 49607/50000，断言仍全过。代价是 784 秒、比基线多 104 秒，是工作量重排的代价，不是数据损坏。对比基线是同一场景下的无故障运行，680 秒。队列在 353 之后回落到 2，说明积压是瞬时的。</a:t>
+              <a:t>局限六条，只讲关键。KWOK 是仿真，绝对数值不外推，但跨调度器相对比较成立。Gang 即 w6，ENO 尾延迟确实更高：吞吐高 4.3% 到 19.1%，单 Pod P99 高 1.6 到 4.1 倍，原因是同组预留等待与决策共用进程和队列。s3 到 s4 固定三实例，退化幅度不能读成上限。其余是资源公平、Volcano 口径、幸存者偏差。这六条不是免责声明，而是给结论划边界。在这个边界内，跨调度器的相对结论是稳的。</a:t>
             </a:r>
           </a:p>
         </p:txBody>
@@ -2108,7 +2107,7 @@
           <a:lstStyle/>
           <a:p>
             <a:r>
-              <a:t>局限六条，只讲关键。KWOK 是仿真，绝对数值不外推，但跨调度器相对比较成立。Gang 即 w6，ENO 尾延迟确实更高：吞吐高 4.3% 到 19.1%，单 Pod P99 高 1.6 到 4.1 倍，原因是同组预留等待与决策共用进程和队列。s3 到 s4 固定三实例，退化幅度不能读成上限。其余是资源公平、Volcano 口径、幸存者偏差。这六条不是免责声明，而是给结论划边界。在这个边界内，跨调度器的相对结论是稳的。</a:t>
+              <a:t>最后收束。两个创新：ENO 把 Binder 放进进程内并用 CacheAdapter 共享缓存；四层容错给出不变量 I 的证明要点。三组证据：16 场景 144 次 run 全成功、平均 +11.9%、P99 最高 -82.9%、实例扩展 +17.5% 对 +1.4%。价值：不改 API、保留开关、基准开源。</a:t>
             </a:r>
           </a:p>
         </p:txBody>
@@ -2178,7 +2177,7 @@
           <a:lstStyle/>
           <a:p>
             <a:r>
-              <a:t>最后收束。两个创新：ENO 把 Binder 放进进程内并用 CacheAdapter 共享缓存；四层容错给出不变量 I 的证明要点。三组证据：16 场景 144 次 run 全成功、平均 +11.9%、P99 最高 -82.9%、实例扩展 +17.5% 对 +1.4%。价值：不改 API、保留开关、基准开源。</a:t>
+              <a:t>汇报到这里。一句话总结：把 Binder 合并进 Scheduler 进程，用 etcd 原子语义上的四层容错守住“至多绑定一次”，在 16 个场景、144 次 run 上做到更高吞吐、更低尾延迟与 100% 绑定成功率。请各位老师批评指正。</a:t>
             </a:r>
           </a:p>
         </p:txBody>
@@ -2248,7 +2247,7 @@
           <a:lstStyle/>
           <a:p>
             <a:r>
-              <a:t>汇报到这里。一句话总结：把 Binder 合并进 Scheduler 进程，用 etcd 原子语义上的四层容错守住“至多绑定一次”，在 16 个场景、144 次 run 上做到更高吞吐、更低尾延迟与 100% 绑定成功率。请各位老师批评指正。</a:t>
+              <a:t>备用页：抽查任意场景的原始数值。</a:t>
             </a:r>
           </a:p>
         </p:txBody>
@@ -2318,7 +2317,7 @@
           <a:lstStyle/>
           <a:p>
             <a:r>
-              <a:t>备用页：抽查任意场景的原始数值。</a:t>
+              <a:t>备用页：如果评委追问某个数字怎么算出来的，用这页回答。</a:t>
             </a:r>
           </a:p>
         </p:txBody>
@@ -2388,7 +2387,7 @@
           <a:lstStyle/>
           <a:p>
             <a:r>
-              <a:t>备用页：如果评委追问某个数字怎么算出来的，用这页回答。</a:t>
+              <a:t>备用页：幸存者偏差的解释。过载时 Pod 根本没被处理，所以延迟看起来“很好”。</a:t>
             </a:r>
           </a:p>
         </p:txBody>
@@ -2458,7 +2457,7 @@
           <a:lstStyle/>
           <a:p>
             <a:r>
-              <a:t>备用页：幸存者偏差的解释。过载时 Pod 根本没被处理，所以延迟看起来“很好”。</a:t>
+              <a:t>备用页：w6 反向结果的完整数据与解释。</a:t>
             </a:r>
           </a:p>
         </p:txBody>
@@ -2528,7 +2527,7 @@
           <a:lstStyle/>
           <a:p>
             <a:r>
-              <a:t>备用页：w6 反向结果的完整数据与解释。</a:t>
+              <a:t>备用页：公平性与资源开销的口径说明。</a:t>
             </a:r>
           </a:p>
         </p:txBody>
@@ -2668,7 +2667,7 @@
           <a:lstStyle/>
           <a:p>
             <a:r>
-              <a:t>备用页：公平性与资源开销的口径说明。</a:t>
+              <a:t>备用页：评委问可复现性时展示。</a:t>
             </a:r>
           </a:p>
         </p:txBody>
@@ -2694,76 +2693,6 @@
 </file>
 
 <file path=ppt/notesSlides/notesSlide31.xml><?xml version="1.0" encoding="utf-8"?>
-<p:notes xmlns:a="http://schemas.openxmlformats.org/drawingml/2006/main" xmlns:p="http://schemas.openxmlformats.org/presentationml/2006/main" xmlns:r="http://schemas.openxmlformats.org/officeDocument/2006/relationships">
-  <p:cSld>
-    <p:spTree>
-      <p:nvGrpSpPr>
-        <p:cNvPr id="1" name=""/>
-        <p:cNvGrpSpPr/>
-        <p:nvPr/>
-      </p:nvGrpSpPr>
-      <p:grpSpPr>
-        <a:xfrm>
-          <a:off x="0" y="0"/>
-          <a:ext cx="0" cy="0"/>
-          <a:chOff x="0" y="0"/>
-          <a:chExt cx="0" cy="0"/>
-        </a:xfrm>
-      </p:grpSpPr>
-      <p:sp>
-        <p:nvSpPr>
-          <p:cNvPr id="2" name="Slide Image Placeholder 1"/>
-          <p:cNvSpPr>
-            <a:spLocks noGrp="1"/>
-          </p:cNvSpPr>
-          <p:nvPr>
-            <p:ph type="sldImg"/>
-          </p:nvPr>
-        </p:nvSpPr>
-        <p:spPr/>
-      </p:sp>
-      <p:sp>
-        <p:nvSpPr>
-          <p:cNvPr id="3" name="Notes Placeholder 2"/>
-          <p:cNvSpPr>
-            <a:spLocks noGrp="1"/>
-          </p:cNvSpPr>
-          <p:nvPr>
-            <p:ph type="body" idx="3" sz="quarter"/>
-          </p:nvPr>
-        </p:nvSpPr>
-        <p:spPr/>
-        <p:txBody>
-          <a:bodyPr/>
-          <a:lstStyle/>
-          <a:p>
-            <a:r>
-              <a:t>备用页：评委问可复现性时展示。</a:t>
-            </a:r>
-          </a:p>
-        </p:txBody>
-      </p:sp>
-      <p:sp>
-        <p:nvSpPr>
-          <p:cNvPr id="4" name="Slide Number Placeholder 3"/>
-          <p:cNvSpPr>
-            <a:spLocks noGrp="1"/>
-          </p:cNvSpPr>
-          <p:nvPr>
-            <p:ph type="sldNum" idx="5" sz="quarter"/>
-          </p:nvPr>
-        </p:nvSpPr>
-        <p:spPr/>
-      </p:sp>
-    </p:spTree>
-  </p:cSld>
-  <p:clrMapOvr>
-    <a:masterClrMapping/>
-  </p:clrMapOvr>
-</p:notes>
-</file>
-
-<file path=ppt/notesSlides/notesSlide32.xml><?xml version="1.0" encoding="utf-8"?>
 <p:notes xmlns:a="http://schemas.openxmlformats.org/drawingml/2006/main" xmlns:p="http://schemas.openxmlformats.org/presentationml/2006/main" xmlns:r="http://schemas.openxmlformats.org/officeDocument/2006/relationships">
   <p:cSld>
     <p:spTree>
@@ -7764,7 +7693,7 @@
                 <a:latin typeface="Arial"/>
                 <a:ea typeface="微软雅黑"/>
               </a:rPr>
-              <a:t>1 / 25</a:t>
+              <a:t>1 / 24</a:t>
             </a:r>
           </a:p>
         </p:txBody>
@@ -9071,7 +9000,7 @@
                 <a:latin typeface="Arial"/>
                 <a:ea typeface="微软雅黑"/>
               </a:rPr>
-              <a:t>10 / 25</a:t>
+              <a:t>10 / 24</a:t>
             </a:r>
           </a:p>
         </p:txBody>
@@ -9558,7 +9487,7 @@
                 <a:latin typeface="Arial"/>
                 <a:ea typeface="微软雅黑"/>
               </a:rPr>
-              <a:t>11 / 25</a:t>
+              <a:t>11 / 24</a:t>
             </a:r>
           </a:p>
         </p:txBody>
@@ -10477,7 +10406,7 @@
                 <a:latin typeface="Arial"/>
                 <a:ea typeface="微软雅黑"/>
               </a:rPr>
-              <a:t>12 / 25</a:t>
+              <a:t>12 / 24</a:t>
             </a:r>
           </a:p>
         </p:txBody>
@@ -11806,7 +11735,7 @@
                 <a:latin typeface="Arial"/>
                 <a:ea typeface="微软雅黑"/>
               </a:rPr>
-              <a:t>13 / 25</a:t>
+              <a:t>13 / 24</a:t>
             </a:r>
           </a:p>
         </p:txBody>
@@ -12715,7 +12644,7 @@
                 <a:latin typeface="Arial"/>
                 <a:ea typeface="微软雅黑"/>
               </a:rPr>
-              <a:t>14 / 25</a:t>
+              <a:t>14 / 24</a:t>
             </a:r>
           </a:p>
         </p:txBody>
@@ -13686,7 +13615,7 @@
                 <a:latin typeface="Arial"/>
                 <a:ea typeface="微软雅黑"/>
               </a:rPr>
-              <a:t>15 / 25</a:t>
+              <a:t>15 / 24</a:t>
             </a:r>
           </a:p>
         </p:txBody>
@@ -14189,7 +14118,7 @@
                 <a:latin typeface="Arial"/>
                 <a:ea typeface="微软雅黑"/>
               </a:rPr>
-              <a:t>16 / 25</a:t>
+              <a:t>16 / 24</a:t>
             </a:r>
           </a:p>
         </p:txBody>
@@ -14692,7 +14621,7 @@
                 <a:latin typeface="Arial"/>
                 <a:ea typeface="微软雅黑"/>
               </a:rPr>
-              <a:t>17 / 25</a:t>
+              <a:t>17 / 24</a:t>
             </a:r>
           </a:p>
         </p:txBody>
@@ -15514,7 +15443,7 @@
                 <a:latin typeface="Arial"/>
                 <a:ea typeface="微软雅黑"/>
               </a:rPr>
-              <a:t>18 / 25</a:t>
+              <a:t>18 / 24</a:t>
             </a:r>
           </a:p>
         </p:txBody>
@@ -16634,7 +16563,7 @@
                 <a:latin typeface="Arial"/>
                 <a:ea typeface="微软雅黑"/>
               </a:rPr>
-              <a:t>19 / 25</a:t>
+              <a:t>19 / 24</a:t>
             </a:r>
           </a:p>
         </p:txBody>
@@ -17505,7 +17434,7 @@
                 <a:latin typeface="Arial"/>
                 <a:ea typeface="微软雅黑"/>
               </a:rPr>
-              <a:t>2 / 25</a:t>
+              <a:t>2 / 24</a:t>
             </a:r>
           </a:p>
         </p:txBody>
@@ -17792,7 +17721,7 @@
                 <a:latin typeface="Arial"/>
                 <a:ea typeface="微软雅黑"/>
               </a:rPr>
-              <a:t>归因闭环</a:t>
+              <a:t>故障注入 Layer 0</a:t>
             </a:r>
           </a:p>
         </p:txBody>
@@ -17832,408 +17761,35 @@
                 <a:latin typeface="Arial"/>
                 <a:ea typeface="微软雅黑"/>
               </a:rPr>
-              <a:t>去掉一次跨进程绑定链路，换来吞吐、尾延迟、队列深度的同步改善</a:t>
-            </a:r>
-          </a:p>
-        </p:txBody>
-      </p:sp>
-      <p:graphicFrame>
-        <p:nvGraphicFramePr>
-          <p:cNvPr id="9004" name="Table 9003"/>
-          <p:cNvGraphicFramePr>
-            <a:graphicFrameLocks noGrp="1"/>
-          </p:cNvGraphicFramePr>
-          <p:nvPr/>
-        </p:nvGraphicFramePr>
-        <p:xfrm>
-          <a:off x="566928" y="1828800"/>
-          <a:ext cx="11064240" cy="2103120"/>
-        </p:xfrm>
-        <a:graphic>
-          <a:graphicData uri="http://schemas.openxmlformats.org/drawingml/2006/table">
-            <a:tbl>
-              <a:tblPr firstRow="1" bandRow="1">
-                <a:tableStyleId>{5C22544A-7EE6-4342-B048-85BDC9FD1C3A}</a:tableStyleId>
-              </a:tblPr>
-              <a:tblGrid>
-                <a:gridCol w="3688080"/>
-                <a:gridCol w="3688080"/>
-                <a:gridCol w="3688080"/>
-              </a:tblGrid>
-              <a:tr h="420624">
-                <a:tc>
-                  <a:txBody>
-                    <a:bodyPr wrap="square"/>
-                    <a:lstStyle/>
-                    <a:p>
-                      <a:pPr algn="l"/>
-                      <a:r>
-                        <a:rPr sz="1200" b="1">
-                          <a:solidFill>
-                            <a:srgbClr val="FFFFFF"/>
-                          </a:solidFill>
-                          <a:latin typeface="Arial"/>
-                          <a:ea typeface="微软雅黑"/>
-                        </a:rPr>
-                        <a:t>机制差异</a:t>
-                      </a:r>
-                    </a:p>
-                  </a:txBody>
-                  <a:tcPr marL="54864" marR="54864" marT="18288" marB="18288" anchor="ctr">
-                    <a:solidFill>
-                      <a:srgbClr val="113E6A"/>
-                    </a:solidFill>
-                  </a:tcPr>
-                </a:tc>
-                <a:tc>
-                  <a:txBody>
-                    <a:bodyPr wrap="square"/>
-                    <a:lstStyle/>
-                    <a:p>
-                      <a:pPr algn="ctr"/>
-                      <a:r>
-                        <a:rPr sz="1200" b="1">
-                          <a:solidFill>
-                            <a:srgbClr val="FFFFFF"/>
-                          </a:solidFill>
-                          <a:latin typeface="Arial"/>
-                          <a:ea typeface="微软雅黑"/>
-                        </a:rPr>
-                        <a:t>对应指标</a:t>
-                      </a:r>
-                    </a:p>
-                  </a:txBody>
-                  <a:tcPr marL="54864" marR="54864" marT="18288" marB="18288" anchor="ctr">
-                    <a:solidFill>
-                      <a:srgbClr val="113E6A"/>
-                    </a:solidFill>
-                  </a:tcPr>
-                </a:tc>
-                <a:tc>
-                  <a:txBody>
-                    <a:bodyPr wrap="square"/>
-                    <a:lstStyle/>
-                    <a:p>
-                      <a:pPr algn="ctr"/>
-                      <a:r>
-                        <a:rPr sz="1200" b="1">
-                          <a:solidFill>
-                            <a:srgbClr val="FFFFFF"/>
-                          </a:solidFill>
-                          <a:latin typeface="Arial"/>
-                          <a:ea typeface="微软雅黑"/>
-                        </a:rPr>
-                        <a:t>实测证据</a:t>
-                      </a:r>
-                    </a:p>
-                  </a:txBody>
-                  <a:tcPr marL="54864" marR="54864" marT="18288" marB="18288" anchor="ctr">
-                    <a:solidFill>
-                      <a:srgbClr val="113E6A"/>
-                    </a:solidFill>
-                  </a:tcPr>
-                </a:tc>
-              </a:tr>
-              <a:tr h="420624">
-                <a:tc>
-                  <a:txBody>
-                    <a:bodyPr wrap="square"/>
-                    <a:lstStyle/>
-                    <a:p>
-                      <a:pPr algn="l"/>
-                      <a:r>
-                        <a:rPr sz="1200" b="0">
-                          <a:solidFill>
-                            <a:srgbClr val="2E2C2C"/>
-                          </a:solidFill>
-                          <a:latin typeface="Arial"/>
-                          <a:ea typeface="微软雅黑"/>
-                        </a:rPr>
-                        <a:t>进程内绑定，无事件传递</a:t>
-                      </a:r>
-                    </a:p>
-                  </a:txBody>
-                  <a:tcPr marL="54864" marR="54864" marT="18288" marB="18288" anchor="ctr">
-                    <a:solidFill>
-                      <a:srgbClr val="F2F4F7"/>
-                    </a:solidFill>
-                  </a:tcPr>
-                </a:tc>
-                <a:tc>
-                  <a:txBody>
-                    <a:bodyPr wrap="square"/>
-                    <a:lstStyle/>
-                    <a:p>
-                      <a:pPr algn="ctr"/>
-                      <a:r>
-                        <a:rPr sz="1200" b="0">
-                          <a:solidFill>
-                            <a:srgbClr val="2E2C2C"/>
-                          </a:solidFill>
-                          <a:latin typeface="Arial"/>
-                          <a:ea typeface="微软雅黑"/>
-                        </a:rPr>
-                        <a:t>Pod E2E P99</a:t>
-                      </a:r>
-                    </a:p>
-                  </a:txBody>
-                  <a:tcPr marL="54864" marR="54864" marT="18288" marB="18288" anchor="ctr">
-                    <a:solidFill>
-                      <a:srgbClr val="F2F4F7"/>
-                    </a:solidFill>
-                  </a:tcPr>
-                </a:tc>
-                <a:tc>
-                  <a:txBody>
-                    <a:bodyPr wrap="square"/>
-                    <a:lstStyle/>
-                    <a:p>
-                      <a:pPr algn="ctr"/>
-                      <a:r>
-                        <a:rPr sz="1200" b="0">
-                          <a:solidFill>
-                            <a:srgbClr val="2E2C2C"/>
-                          </a:solidFill>
-                          <a:latin typeface="Arial"/>
-                          <a:ea typeface="微软雅黑"/>
-                        </a:rPr>
-                        <a:t>s3/w3 inst3 0.45 vs 0.93 s（低 51.9%）</a:t>
-                      </a:r>
-                    </a:p>
-                  </a:txBody>
-                  <a:tcPr marL="54864" marR="54864" marT="18288" marB="18288" anchor="ctr">
-                    <a:solidFill>
-                      <a:srgbClr val="F2F4F7"/>
-                    </a:solidFill>
-                  </a:tcPr>
-                </a:tc>
-              </a:tr>
-              <a:tr h="420624">
-                <a:tc>
-                  <a:txBody>
-                    <a:bodyPr wrap="square"/>
-                    <a:lstStyle/>
-                    <a:p>
-                      <a:pPr algn="l"/>
-                      <a:r>
-                        <a:rPr sz="1200" b="0">
-                          <a:solidFill>
-                            <a:srgbClr val="2E2C2C"/>
-                          </a:solidFill>
-                          <a:latin typeface="Arial"/>
-                          <a:ea typeface="微软雅黑"/>
-                        </a:rPr>
-                        <a:t>CacheAdapter 零拷贝共享</a:t>
-                      </a:r>
-                    </a:p>
-                  </a:txBody>
-                  <a:tcPr marL="54864" marR="54864" marT="18288" marB="18288" anchor="ctr">
-                    <a:solidFill>
-                      <a:srgbClr val="FFFFFF"/>
-                    </a:solidFill>
-                  </a:tcPr>
-                </a:tc>
-                <a:tc>
-                  <a:txBody>
-                    <a:bodyPr wrap="square"/>
-                    <a:lstStyle/>
-                    <a:p>
-                      <a:pPr algn="ctr"/>
-                      <a:r>
-                        <a:rPr sz="1200" b="0">
-                          <a:solidFill>
-                            <a:srgbClr val="2E2C2C"/>
-                          </a:solidFill>
-                          <a:latin typeface="Arial"/>
-                          <a:ea typeface="微软雅黑"/>
-                        </a:rPr>
-                        <a:t>状态复用 / 无同步延迟</a:t>
-                      </a:r>
-                    </a:p>
-                  </a:txBody>
-                  <a:tcPr marL="54864" marR="54864" marT="18288" marB="18288" anchor="ctr">
-                    <a:solidFill>
-                      <a:srgbClr val="FFFFFF"/>
-                    </a:solidFill>
-                  </a:tcPr>
-                </a:tc>
-                <a:tc>
-                  <a:txBody>
-                    <a:bodyPr wrap="square"/>
-                    <a:lstStyle/>
-                    <a:p>
-                      <a:pPr algn="ctr"/>
-                      <a:r>
-                        <a:rPr sz="1200" b="0">
-                          <a:solidFill>
-                            <a:srgbClr val="2E2C2C"/>
-                          </a:solidFill>
-                          <a:latin typeface="Arial"/>
-                          <a:ea typeface="微软雅黑"/>
-                        </a:rPr>
-                        <a:t>inst3 队列峰值 20 vs 16</a:t>
-                      </a:r>
-                    </a:p>
-                  </a:txBody>
-                  <a:tcPr marL="54864" marR="54864" marT="18288" marB="18288" anchor="ctr">
-                    <a:solidFill>
-                      <a:srgbClr val="FFFFFF"/>
-                    </a:solidFill>
-                  </a:tcPr>
-                </a:tc>
-              </a:tr>
-              <a:tr h="420624">
-                <a:tc>
-                  <a:txBody>
-                    <a:bodyPr wrap="square"/>
-                    <a:lstStyle/>
-                    <a:p>
-                      <a:pPr algn="l"/>
-                      <a:r>
-                        <a:rPr sz="1200" b="0">
-                          <a:solidFill>
-                            <a:srgbClr val="2E2C2C"/>
-                          </a:solidFill>
-                          <a:latin typeface="Arial"/>
-                          <a:ea typeface="微软雅黑"/>
-                        </a:rPr>
-                        <a:t>无独立 Binder 串行段</a:t>
-                      </a:r>
-                    </a:p>
-                  </a:txBody>
-                  <a:tcPr marL="54864" marR="54864" marT="18288" marB="18288" anchor="ctr">
-                    <a:solidFill>
-                      <a:srgbClr val="F2F4F7"/>
-                    </a:solidFill>
-                  </a:tcPr>
-                </a:tc>
-                <a:tc>
-                  <a:txBody>
-                    <a:bodyPr wrap="square"/>
-                    <a:lstStyle/>
-                    <a:p>
-                      <a:pPr algn="ctr"/>
-                      <a:r>
-                        <a:rPr sz="1200" b="0">
-                          <a:solidFill>
-                            <a:srgbClr val="2E2C2C"/>
-                          </a:solidFill>
-                          <a:latin typeface="Arial"/>
-                          <a:ea typeface="微软雅黑"/>
-                        </a:rPr>
-                        <a:t>有效吞吐随实例扩展</a:t>
-                      </a:r>
-                    </a:p>
-                  </a:txBody>
-                  <a:tcPr marL="54864" marR="54864" marT="18288" marB="18288" anchor="ctr">
-                    <a:solidFill>
-                      <a:srgbClr val="F2F4F7"/>
-                    </a:solidFill>
-                  </a:tcPr>
-                </a:tc>
-                <a:tc>
-                  <a:txBody>
-                    <a:bodyPr wrap="square"/>
-                    <a:lstStyle/>
-                    <a:p>
-                      <a:pPr algn="ctr"/>
-                      <a:r>
-                        <a:rPr sz="1200" b="0">
-                          <a:solidFill>
-                            <a:srgbClr val="2E2C2C"/>
-                          </a:solidFill>
-                          <a:latin typeface="Arial"/>
-                          <a:ea typeface="微软雅黑"/>
-                        </a:rPr>
-                        <a:t>+17.5% vs +1.4%</a:t>
-                      </a:r>
-                    </a:p>
-                  </a:txBody>
-                  <a:tcPr marL="54864" marR="54864" marT="18288" marB="18288" anchor="ctr">
-                    <a:solidFill>
-                      <a:srgbClr val="F2F4F7"/>
-                    </a:solidFill>
-                  </a:tcPr>
-                </a:tc>
-              </a:tr>
-              <a:tr h="420624">
-                <a:tc>
-                  <a:txBody>
-                    <a:bodyPr wrap="square"/>
-                    <a:lstStyle/>
-                    <a:p>
-                      <a:pPr algn="l"/>
-                      <a:r>
-                        <a:rPr sz="1200" b="0">
-                          <a:solidFill>
-                            <a:srgbClr val="2E2C2C"/>
-                          </a:solidFill>
-                          <a:latin typeface="Arial"/>
-                          <a:ea typeface="微软雅黑"/>
-                        </a:rPr>
-                        <a:t>四层容错守住不变量 I</a:t>
-                      </a:r>
-                    </a:p>
-                  </a:txBody>
-                  <a:tcPr marL="54864" marR="54864" marT="18288" marB="18288" anchor="ctr">
-                    <a:solidFill>
-                      <a:srgbClr val="FFFFFF"/>
-                    </a:solidFill>
-                  </a:tcPr>
-                </a:tc>
-                <a:tc>
-                  <a:txBody>
-                    <a:bodyPr wrap="square"/>
-                    <a:lstStyle/>
-                    <a:p>
-                      <a:pPr algn="ctr"/>
-                      <a:r>
-                        <a:rPr sz="1200" b="0">
-                          <a:solidFill>
-                            <a:srgbClr val="2E2C2C"/>
-                          </a:solidFill>
-                          <a:latin typeface="Arial"/>
-                          <a:ea typeface="微软雅黑"/>
-                        </a:rPr>
-                        <a:t>绑定成功率 / 断言</a:t>
-                      </a:r>
-                    </a:p>
-                  </a:txBody>
-                  <a:tcPr marL="54864" marR="54864" marT="18288" marB="18288" anchor="ctr">
-                    <a:solidFill>
-                      <a:srgbClr val="FFFFFF"/>
-                    </a:solidFill>
-                  </a:tcPr>
-                </a:tc>
-                <a:tc>
-                  <a:txBody>
-                    <a:bodyPr wrap="square"/>
-                    <a:lstStyle/>
-                    <a:p>
-                      <a:pPr algn="ctr"/>
-                      <a:r>
-                        <a:rPr sz="1200" b="0">
-                          <a:solidFill>
-                            <a:srgbClr val="2E2C2C"/>
-                          </a:solidFill>
-                          <a:latin typeface="Arial"/>
-                          <a:ea typeface="微软雅黑"/>
-                        </a:rPr>
-                        <a:t>100%；144 次 run 全过</a:t>
-                      </a:r>
-                    </a:p>
-                  </a:txBody>
-                  <a:tcPr marL="54864" marR="54864" marT="18288" marB="18288" anchor="ctr">
-                    <a:solidFill>
-                      <a:srgbClr val="FFFFFF"/>
-                    </a:solidFill>
-                  </a:tcPr>
-                </a:tc>
-              </a:tr>
-            </a:tbl>
-          </a:graphicData>
-        </a:graphic>
-      </p:graphicFrame>
+              <a:t>10% 节点注解漂移，300 次拦截全部转为合规重排</a:t>
+            </a:r>
+          </a:p>
+        </p:txBody>
+      </p:sp>
+      <p:pic>
+        <p:nvPicPr>
+          <p:cNvPr id="9004" name="Picture 9003" descr="fig6-29a-layer0-timeseries.png"/>
+          <p:cNvPicPr>
+            <a:picLocks noChangeAspect="1"/>
+          </p:cNvPicPr>
+          <p:nvPr/>
+        </p:nvPicPr>
+        <p:blipFill>
+          <a:blip r:embed="rId3"/>
+          <a:stretch>
+            <a:fillRect/>
+          </a:stretch>
+        </p:blipFill>
+        <p:spPr>
+          <a:xfrm>
+            <a:off x="5806440" y="2657246"/>
+            <a:ext cx="5852160" cy="2457907"/>
+          </a:xfrm>
+          <a:prstGeom prst="rect">
+            <a:avLst/>
+          </a:prstGeom>
+        </p:spPr>
+      </p:pic>
       <p:sp>
         <p:nvSpPr>
           <p:cNvPr id="9005" name="TextBox 9004"/>
@@ -18242,8 +17798,8 @@
         </p:nvSpPr>
         <p:spPr>
           <a:xfrm>
-            <a:off x="566928" y="5074920"/>
-            <a:ext cx="10972800" cy="914400"/>
+            <a:off x="566928" y="2011680"/>
+            <a:ext cx="5029200" cy="1417320"/>
           </a:xfrm>
           <a:prstGeom prst="rect">
             <a:avLst/>
@@ -18262,14 +17818,14 @@
               </a:lnSpc>
             </a:pPr>
             <a:r>
-              <a:rPr sz="1300" b="0">
+              <a:rPr sz="1550" b="0">
                 <a:solidFill>
                   <a:srgbClr val="2E2C2C"/>
                 </a:solidFill>
                 <a:latin typeface="Arial"/>
                 <a:ea typeface="微软雅黑"/>
               </a:rPr>
-              <a:t>▪  相关不等于归因：峰值吞吐并非全面领先</a:t>
+              <a:t>▪  拦截 300 次 / 回退 300 次</a:t>
             </a:r>
           </a:p>
           <a:p>
@@ -18278,18 +17834,18 @@
                 <a:spcPct val="115000"/>
               </a:lnSpc>
               <a:spcBef>
-                <a:spcPts val="600"/>
+                <a:spcPts val="1400"/>
               </a:spcBef>
             </a:pPr>
             <a:r>
-              <a:rPr sz="1300" b="0">
+              <a:rPr sz="1550" b="0">
                 <a:solidFill>
                   <a:srgbClr val="2E2C2C"/>
                 </a:solidFill>
                 <a:latin typeface="Arial"/>
                 <a:ea typeface="微软雅黑"/>
               </a:rPr>
-              <a:t>▪  s3/w5、s4/w3 峰值吞吐低于 Gödel</a:t>
+              <a:t>▪  绑定成功率 1.00；断言 50000/50000</a:t>
             </a:r>
           </a:p>
           <a:p>
@@ -18298,18 +17854,18 @@
                 <a:spcPct val="115000"/>
               </a:lnSpc>
               <a:spcBef>
-                <a:spcPts val="600"/>
+                <a:spcPts val="1400"/>
               </a:spcBef>
             </a:pPr>
             <a:r>
-              <a:rPr sz="1300" b="0">
+              <a:rPr sz="1550" b="0">
                 <a:solidFill>
                   <a:srgbClr val="2E2C2C"/>
                 </a:solidFill>
                 <a:latin typeface="Arial"/>
                 <a:ea typeface="微软雅黑"/>
               </a:rPr>
-              <a:t>▪  收益部分来自启动更快（口径权衡）</a:t>
+              <a:t>▪  总耗时 683 s 对基线 680 s（+0.4%）</a:t>
             </a:r>
           </a:p>
         </p:txBody>
@@ -18381,7 +17937,7 @@
                 <a:latin typeface="Arial"/>
                 <a:ea typeface="微软雅黑"/>
               </a:rPr>
-              <a:t>20 / 25</a:t>
+              <a:t>20 / 24</a:t>
             </a:r>
           </a:p>
         </p:txBody>
@@ -18668,7 +18224,7 @@
                 <a:latin typeface="Arial"/>
                 <a:ea typeface="微软雅黑"/>
               </a:rPr>
-              <a:t>故障注入 Layer 0</a:t>
+              <a:t>故障注入 Layer 3</a:t>
             </a:r>
           </a:p>
         </p:txBody>
@@ -18708,14 +18264,14 @@
                 <a:latin typeface="Arial"/>
                 <a:ea typeface="微软雅黑"/>
               </a:rPr>
-              <a:t>10% 节点注解漂移，300 次拦截全部转为合规重排</a:t>
+              <a:t>杀掉 1/3 实例并停机 180 s，系统仍在 784 s 内完成全部绑定</a:t>
             </a:r>
           </a:p>
         </p:txBody>
       </p:sp>
       <p:pic>
         <p:nvPicPr>
-          <p:cNvPr id="9004" name="Picture 9003" descr="fig6-29a-layer0-timeseries.png"/>
+          <p:cNvPr id="9004" name="Picture 9003" descr="fig6-29b-layer3-timeseries.png"/>
           <p:cNvPicPr>
             <a:picLocks noChangeAspect="1"/>
           </p:cNvPicPr>
@@ -18772,7 +18328,7 @@
                 <a:latin typeface="Arial"/>
                 <a:ea typeface="微软雅黑"/>
               </a:rPr>
-              <a:t>▪  拦截 300 次 / 回退 300 次</a:t>
+              <a:t>▪  被杀实例绑定占比 68/8407 = 0.81%</a:t>
             </a:r>
           </a:p>
           <a:p>
@@ -18792,7 +18348,7 @@
                 <a:latin typeface="Arial"/>
                 <a:ea typeface="微软雅黑"/>
               </a:rPr>
-              <a:t>▪  绑定成功率 1.00；断言 50000/50000</a:t>
+              <a:t>▪  存活实例接管 8407 pods；pending 353→2</a:t>
             </a:r>
           </a:p>
           <a:p>
@@ -18812,7 +18368,7 @@
                 <a:latin typeface="Arial"/>
                 <a:ea typeface="微软雅黑"/>
               </a:rPr>
-              <a:t>▪  总耗时 683 s 对基线 680 s（+0.4%）</a:t>
+              <a:t>▪  总耗时 784 s，较基线 +15.3%</a:t>
             </a:r>
           </a:p>
         </p:txBody>
@@ -18884,7 +18440,7 @@
                 <a:latin typeface="Arial"/>
                 <a:ea typeface="微软雅黑"/>
               </a:rPr>
-              <a:t>21 / 25</a:t>
+              <a:t>21 / 24</a:t>
             </a:r>
           </a:p>
         </p:txBody>
@@ -19171,7 +18727,7 @@
                 <a:latin typeface="Arial"/>
                 <a:ea typeface="微软雅黑"/>
               </a:rPr>
-              <a:t>故障注入 Layer 3</a:t>
+              <a:t>局限性与威胁效力</a:t>
             </a:r>
           </a:p>
         </p:txBody>
@@ -19211,45 +18767,121 @@
                 <a:latin typeface="Arial"/>
                 <a:ea typeface="微软雅黑"/>
               </a:rPr>
-              <a:t>杀掉 1/3 实例并停机 180 s，系统仍在 784 s 内完成全部绑定</a:t>
-            </a:r>
-          </a:p>
-        </p:txBody>
-      </p:sp>
-      <p:pic>
-        <p:nvPicPr>
-          <p:cNvPr id="9004" name="Picture 9003" descr="fig6-29b-layer3-timeseries.png"/>
-          <p:cNvPicPr>
-            <a:picLocks noChangeAspect="1"/>
-          </p:cNvPicPr>
-          <p:nvPr/>
-        </p:nvPicPr>
-        <p:blipFill>
-          <a:blip r:embed="rId3"/>
-          <a:stretch>
-            <a:fillRect/>
-          </a:stretch>
-        </p:blipFill>
-        <p:spPr>
-          <a:xfrm>
-            <a:off x="5806440" y="2657246"/>
-            <a:ext cx="5852160" cy="2457907"/>
-          </a:xfrm>
-          <a:prstGeom prst="rect">
+              <a:t>结论在“跨调度器相对比较”上成立，绝对数值不外推到生产</a:t>
+            </a:r>
+          </a:p>
+        </p:txBody>
+      </p:sp>
+      <p:sp>
+        <p:nvSpPr>
+          <p:cNvPr id="9004" name="Rounded Rectangle 9003"/>
+          <p:cNvSpPr/>
+          <p:nvPr/>
+        </p:nvSpPr>
+        <p:spPr>
+          <a:xfrm>
+            <a:off x="566928" y="1874519"/>
+            <a:ext cx="3517391" cy="1051560"/>
+          </a:xfrm>
+          <a:prstGeom prst="roundRect">
             <a:avLst/>
           </a:prstGeom>
-        </p:spPr>
-      </p:pic>
-      <p:sp>
-        <p:nvSpPr>
-          <p:cNvPr id="9005" name="TextBox 9004"/>
+          <a:solidFill>
+            <a:srgbClr val="FFFFFF"/>
+          </a:solidFill>
+          <a:ln w="9525">
+            <a:solidFill>
+              <a:srgbClr val="D6E3F0"/>
+            </a:solidFill>
+          </a:ln>
+          <a:effectLst/>
+        </p:spPr>
+        <p:style>
+          <a:lnRef idx="1">
+            <a:schemeClr val="accent1"/>
+          </a:lnRef>
+          <a:fillRef idx="3">
+            <a:schemeClr val="accent1"/>
+          </a:fillRef>
+          <a:effectRef idx="2">
+            <a:schemeClr val="accent1"/>
+          </a:effectRef>
+          <a:fontRef idx="minor">
+            <a:schemeClr val="lt1"/>
+          </a:fontRef>
+        </p:style>
+        <p:txBody>
+          <a:bodyPr rtlCol="0" anchor="ctr"/>
+          <a:lstStyle/>
+          <a:p>
+            <a:pPr algn="ctr"/>
+          </a:p>
+        </p:txBody>
+      </p:sp>
+      <p:sp>
+        <p:nvSpPr>
+          <p:cNvPr id="9005" name="Oval 9004"/>
+          <p:cNvSpPr/>
+          <p:nvPr/>
+        </p:nvSpPr>
+        <p:spPr>
+          <a:xfrm>
+            <a:off x="713232" y="2011679"/>
+            <a:ext cx="274320" cy="274320"/>
+          </a:xfrm>
+          <a:prstGeom prst="ellipse">
+            <a:avLst/>
+          </a:prstGeom>
+          <a:solidFill>
+            <a:srgbClr val="113E6A"/>
+          </a:solidFill>
+          <a:ln>
+            <a:noFill/>
+          </a:ln>
+          <a:effectLst/>
+        </p:spPr>
+        <p:style>
+          <a:lnRef idx="1">
+            <a:schemeClr val="accent1"/>
+          </a:lnRef>
+          <a:fillRef idx="3">
+            <a:schemeClr val="accent1"/>
+          </a:fillRef>
+          <a:effectRef idx="2">
+            <a:schemeClr val="accent1"/>
+          </a:effectRef>
+          <a:fontRef idx="minor">
+            <a:schemeClr val="lt1"/>
+          </a:fontRef>
+        </p:style>
+        <p:txBody>
+          <a:bodyPr rtlCol="0" anchor="ctr" lIns="0" rIns="0" tIns="0" bIns="0"/>
+          <a:lstStyle/>
+          <a:p>
+            <a:pPr algn="ctr"/>
+            <a:r>
+              <a:rPr sz="1000" b="1">
+                <a:solidFill>
+                  <a:srgbClr val="FFFFFF"/>
+                </a:solidFill>
+                <a:latin typeface="Arial"/>
+                <a:ea typeface="微软雅黑"/>
+              </a:rPr>
+              <a:t>01</a:t>
+            </a:r>
+          </a:p>
+        </p:txBody>
+      </p:sp>
+      <p:sp>
+        <p:nvSpPr>
+          <p:cNvPr id="9006" name="TextBox 9005"/>
           <p:cNvSpPr txBox="1"/>
           <p:nvPr/>
         </p:nvSpPr>
         <p:spPr>
           <a:xfrm>
-            <a:off x="566928" y="2011680"/>
-            <a:ext cx="5029200" cy="1417320"/>
+            <a:off x="1078992" y="2011679"/>
+            <a:ext cx="2877312" cy="850392"/>
           </a:xfrm>
           <a:prstGeom prst="rect">
             <a:avLst/>
@@ -19262,103 +18894,823 @@
           </a:bodyPr>
           <a:lstStyle/>
           <a:p>
+            <a:pPr algn="l"/>
+            <a:r>
+              <a:rPr sz="1400" b="1">
+                <a:solidFill>
+                  <a:srgbClr val="113E6A"/>
+                </a:solidFill>
+                <a:latin typeface="Arial"/>
+                <a:ea typeface="微软雅黑"/>
+              </a:rPr>
+              <a:t>KWOK 仿真</a:t>
+            </a:r>
+          </a:p>
+          <a:p>
             <a:pPr algn="l">
               <a:lnSpc>
-                <a:spcPct val="115000"/>
+                <a:spcPct val="110000"/>
               </a:lnSpc>
+              <a:spcBef>
+                <a:spcPts val="400"/>
+              </a:spcBef>
             </a:pPr>
             <a:r>
-              <a:rPr sz="1550" b="0">
+              <a:rPr sz="1250" b="0">
                 <a:solidFill>
                   <a:srgbClr val="2E2C2C"/>
                 </a:solidFill>
                 <a:latin typeface="Arial"/>
                 <a:ea typeface="微软雅黑"/>
               </a:rPr>
-              <a:t>▪  被杀实例绑定占比 68/8407 = 0.81%</a:t>
+              <a:t>无法反映真实资源竞争与 IO</a:t>
+            </a:r>
+          </a:p>
+        </p:txBody>
+      </p:sp>
+      <p:sp>
+        <p:nvSpPr>
+          <p:cNvPr id="9007" name="Rounded Rectangle 9006"/>
+          <p:cNvSpPr/>
+          <p:nvPr/>
+        </p:nvSpPr>
+        <p:spPr>
+          <a:xfrm>
+            <a:off x="4340351" y="1874519"/>
+            <a:ext cx="3517391" cy="1051560"/>
+          </a:xfrm>
+          <a:prstGeom prst="roundRect">
+            <a:avLst/>
+          </a:prstGeom>
+          <a:solidFill>
+            <a:srgbClr val="FFFFFF"/>
+          </a:solidFill>
+          <a:ln w="9525">
+            <a:solidFill>
+              <a:srgbClr val="D6E3F0"/>
+            </a:solidFill>
+          </a:ln>
+          <a:effectLst/>
+        </p:spPr>
+        <p:style>
+          <a:lnRef idx="1">
+            <a:schemeClr val="accent1"/>
+          </a:lnRef>
+          <a:fillRef idx="3">
+            <a:schemeClr val="accent1"/>
+          </a:fillRef>
+          <a:effectRef idx="2">
+            <a:schemeClr val="accent1"/>
+          </a:effectRef>
+          <a:fontRef idx="minor">
+            <a:schemeClr val="lt1"/>
+          </a:fontRef>
+        </p:style>
+        <p:txBody>
+          <a:bodyPr rtlCol="0" anchor="ctr"/>
+          <a:lstStyle/>
+          <a:p>
+            <a:pPr algn="ctr"/>
+          </a:p>
+        </p:txBody>
+      </p:sp>
+      <p:sp>
+        <p:nvSpPr>
+          <p:cNvPr id="9008" name="Oval 9007"/>
+          <p:cNvSpPr/>
+          <p:nvPr/>
+        </p:nvSpPr>
+        <p:spPr>
+          <a:xfrm>
+            <a:off x="4486656" y="2011679"/>
+            <a:ext cx="274320" cy="274320"/>
+          </a:xfrm>
+          <a:prstGeom prst="ellipse">
+            <a:avLst/>
+          </a:prstGeom>
+          <a:solidFill>
+            <a:srgbClr val="113E6A"/>
+          </a:solidFill>
+          <a:ln>
+            <a:noFill/>
+          </a:ln>
+          <a:effectLst/>
+        </p:spPr>
+        <p:style>
+          <a:lnRef idx="1">
+            <a:schemeClr val="accent1"/>
+          </a:lnRef>
+          <a:fillRef idx="3">
+            <a:schemeClr val="accent1"/>
+          </a:fillRef>
+          <a:effectRef idx="2">
+            <a:schemeClr val="accent1"/>
+          </a:effectRef>
+          <a:fontRef idx="minor">
+            <a:schemeClr val="lt1"/>
+          </a:fontRef>
+        </p:style>
+        <p:txBody>
+          <a:bodyPr rtlCol="0" anchor="ctr" lIns="0" rIns="0" tIns="0" bIns="0"/>
+          <a:lstStyle/>
+          <a:p>
+            <a:pPr algn="ctr"/>
+            <a:r>
+              <a:rPr sz="1000" b="1">
+                <a:solidFill>
+                  <a:srgbClr val="FFFFFF"/>
+                </a:solidFill>
+                <a:latin typeface="Arial"/>
+                <a:ea typeface="微软雅黑"/>
+              </a:rPr>
+              <a:t>02</a:t>
+            </a:r>
+          </a:p>
+        </p:txBody>
+      </p:sp>
+      <p:sp>
+        <p:nvSpPr>
+          <p:cNvPr id="9009" name="TextBox 9008"/>
+          <p:cNvSpPr txBox="1"/>
+          <p:nvPr/>
+        </p:nvSpPr>
+        <p:spPr>
+          <a:xfrm>
+            <a:off x="4852416" y="2011679"/>
+            <a:ext cx="2877312" cy="850392"/>
+          </a:xfrm>
+          <a:prstGeom prst="rect">
+            <a:avLst/>
+          </a:prstGeom>
+          <a:noFill/>
+        </p:spPr>
+        <p:txBody>
+          <a:bodyPr wrap="square" anchor="t" lIns="0" rIns="0" tIns="0" bIns="0">
+            <a:spAutoFit/>
+          </a:bodyPr>
+          <a:lstStyle/>
+          <a:p>
+            <a:pPr algn="l"/>
+            <a:r>
+              <a:rPr sz="1400" b="1">
+                <a:solidFill>
+                  <a:srgbClr val="113E6A"/>
+                </a:solidFill>
+                <a:latin typeface="Arial"/>
+                <a:ea typeface="微软雅黑"/>
+              </a:rPr>
+              <a:t>Gang 延迟口径</a:t>
             </a:r>
           </a:p>
           <a:p>
             <a:pPr algn="l">
               <a:lnSpc>
-                <a:spcPct val="115000"/>
+                <a:spcPct val="110000"/>
               </a:lnSpc>
               <a:spcBef>
-                <a:spcPts val="1400"/>
+                <a:spcPts val="400"/>
               </a:spcBef>
             </a:pPr>
             <a:r>
-              <a:rPr sz="1550" b="0">
+              <a:rPr sz="1250" b="0">
                 <a:solidFill>
                   <a:srgbClr val="2E2C2C"/>
                 </a:solidFill>
                 <a:latin typeface="Arial"/>
                 <a:ea typeface="微软雅黑"/>
               </a:rPr>
-              <a:t>▪  存活实例接管 8407 pods；pending 353→2</a:t>
+              <a:t>w6 尾延迟反向，未分离计时</a:t>
+            </a:r>
+          </a:p>
+        </p:txBody>
+      </p:sp>
+      <p:sp>
+        <p:nvSpPr>
+          <p:cNvPr id="9010" name="Rounded Rectangle 9009"/>
+          <p:cNvSpPr/>
+          <p:nvPr/>
+        </p:nvSpPr>
+        <p:spPr>
+          <a:xfrm>
+            <a:off x="8113775" y="1874519"/>
+            <a:ext cx="3517391" cy="1051560"/>
+          </a:xfrm>
+          <a:prstGeom prst="roundRect">
+            <a:avLst/>
+          </a:prstGeom>
+          <a:solidFill>
+            <a:srgbClr val="FFFFFF"/>
+          </a:solidFill>
+          <a:ln w="9525">
+            <a:solidFill>
+              <a:srgbClr val="D6E3F0"/>
+            </a:solidFill>
+          </a:ln>
+          <a:effectLst/>
+        </p:spPr>
+        <p:style>
+          <a:lnRef idx="1">
+            <a:schemeClr val="accent1"/>
+          </a:lnRef>
+          <a:fillRef idx="3">
+            <a:schemeClr val="accent1"/>
+          </a:fillRef>
+          <a:effectRef idx="2">
+            <a:schemeClr val="accent1"/>
+          </a:effectRef>
+          <a:fontRef idx="minor">
+            <a:schemeClr val="lt1"/>
+          </a:fontRef>
+        </p:style>
+        <p:txBody>
+          <a:bodyPr rtlCol="0" anchor="ctr"/>
+          <a:lstStyle/>
+          <a:p>
+            <a:pPr algn="ctr"/>
+          </a:p>
+        </p:txBody>
+      </p:sp>
+      <p:sp>
+        <p:nvSpPr>
+          <p:cNvPr id="9011" name="Oval 9010"/>
+          <p:cNvSpPr/>
+          <p:nvPr/>
+        </p:nvSpPr>
+        <p:spPr>
+          <a:xfrm>
+            <a:off x="8260079" y="2011679"/>
+            <a:ext cx="274320" cy="274320"/>
+          </a:xfrm>
+          <a:prstGeom prst="ellipse">
+            <a:avLst/>
+          </a:prstGeom>
+          <a:solidFill>
+            <a:srgbClr val="113E6A"/>
+          </a:solidFill>
+          <a:ln>
+            <a:noFill/>
+          </a:ln>
+          <a:effectLst/>
+        </p:spPr>
+        <p:style>
+          <a:lnRef idx="1">
+            <a:schemeClr val="accent1"/>
+          </a:lnRef>
+          <a:fillRef idx="3">
+            <a:schemeClr val="accent1"/>
+          </a:fillRef>
+          <a:effectRef idx="2">
+            <a:schemeClr val="accent1"/>
+          </a:effectRef>
+          <a:fontRef idx="minor">
+            <a:schemeClr val="lt1"/>
+          </a:fontRef>
+        </p:style>
+        <p:txBody>
+          <a:bodyPr rtlCol="0" anchor="ctr" lIns="0" rIns="0" tIns="0" bIns="0"/>
+          <a:lstStyle/>
+          <a:p>
+            <a:pPr algn="ctr"/>
+            <a:r>
+              <a:rPr sz="1000" b="1">
+                <a:solidFill>
+                  <a:srgbClr val="FFFFFF"/>
+                </a:solidFill>
+                <a:latin typeface="Arial"/>
+                <a:ea typeface="微软雅黑"/>
+              </a:rPr>
+              <a:t>03</a:t>
+            </a:r>
+          </a:p>
+        </p:txBody>
+      </p:sp>
+      <p:sp>
+        <p:nvSpPr>
+          <p:cNvPr id="9012" name="TextBox 9011"/>
+          <p:cNvSpPr txBox="1"/>
+          <p:nvPr/>
+        </p:nvSpPr>
+        <p:spPr>
+          <a:xfrm>
+            <a:off x="8625839" y="2011679"/>
+            <a:ext cx="2877312" cy="850392"/>
+          </a:xfrm>
+          <a:prstGeom prst="rect">
+            <a:avLst/>
+          </a:prstGeom>
+          <a:noFill/>
+        </p:spPr>
+        <p:txBody>
+          <a:bodyPr wrap="square" anchor="t" lIns="0" rIns="0" tIns="0" bIns="0">
+            <a:spAutoFit/>
+          </a:bodyPr>
+          <a:lstStyle/>
+          <a:p>
+            <a:pPr algn="l"/>
+            <a:r>
+              <a:rPr sz="1400" b="1">
+                <a:solidFill>
+                  <a:srgbClr val="113E6A"/>
+                </a:solidFill>
+                <a:latin typeface="Arial"/>
+                <a:ea typeface="微软雅黑"/>
+              </a:rPr>
+              <a:t>固定实例数</a:t>
             </a:r>
           </a:p>
           <a:p>
             <a:pPr algn="l">
               <a:lnSpc>
-                <a:spcPct val="115000"/>
+                <a:spcPct val="110000"/>
               </a:lnSpc>
               <a:spcBef>
-                <a:spcPts val="1400"/>
+                <a:spcPts val="400"/>
               </a:spcBef>
             </a:pPr>
             <a:r>
-              <a:rPr sz="1550" b="0">
+              <a:rPr sz="1250" b="0">
                 <a:solidFill>
                   <a:srgbClr val="2E2C2C"/>
                 </a:solidFill>
                 <a:latin typeface="Arial"/>
                 <a:ea typeface="微软雅黑"/>
               </a:rPr>
-              <a:t>▪  总耗时 784 s，较基线 +15.3%</a:t>
-            </a:r>
-          </a:p>
-        </p:txBody>
-      </p:sp>
-      <p:sp>
-        <p:nvSpPr>
-          <p:cNvPr id="9006" name="TextBox 9005"/>
-          <p:cNvSpPr txBox="1"/>
-          <p:nvPr/>
-        </p:nvSpPr>
-        <p:spPr>
-          <a:xfrm>
-            <a:off x="566928" y="6309360"/>
-            <a:ext cx="10104120" cy="201168"/>
-          </a:xfrm>
-          <a:prstGeom prst="rect">
+              <a:t>s3→s4 未同步扩容</a:t>
+            </a:r>
+          </a:p>
+        </p:txBody>
+      </p:sp>
+      <p:sp>
+        <p:nvSpPr>
+          <p:cNvPr id="9013" name="Rounded Rectangle 9012"/>
+          <p:cNvSpPr/>
+          <p:nvPr/>
+        </p:nvSpPr>
+        <p:spPr>
+          <a:xfrm>
+            <a:off x="566928" y="3182111"/>
+            <a:ext cx="3517391" cy="1051560"/>
+          </a:xfrm>
+          <a:prstGeom prst="roundRect">
             <a:avLst/>
           </a:prstGeom>
-          <a:noFill/>
-        </p:spPr>
-        <p:txBody>
-          <a:bodyPr wrap="square" anchor="t" lIns="0" rIns="0" tIns="0" bIns="0">
-            <a:spAutoFit/>
-          </a:bodyPr>
-          <a:lstStyle/>
-          <a:p>
-            <a:pPr algn="l"/>
-            <a:r>
-              <a:rPr sz="850" b="0">
+          <a:solidFill>
+            <a:srgbClr val="FFFFFF"/>
+          </a:solidFill>
+          <a:ln w="9525">
+            <a:solidFill>
+              <a:srgbClr val="D6E3F0"/>
+            </a:solidFill>
+          </a:ln>
+          <a:effectLst/>
+        </p:spPr>
+        <p:style>
+          <a:lnRef idx="1">
+            <a:schemeClr val="accent1"/>
+          </a:lnRef>
+          <a:fillRef idx="3">
+            <a:schemeClr val="accent1"/>
+          </a:fillRef>
+          <a:effectRef idx="2">
+            <a:schemeClr val="accent1"/>
+          </a:effectRef>
+          <a:fontRef idx="minor">
+            <a:schemeClr val="lt1"/>
+          </a:fontRef>
+        </p:style>
+        <p:txBody>
+          <a:bodyPr rtlCol="0" anchor="ctr"/>
+          <a:lstStyle/>
+          <a:p>
+            <a:pPr algn="ctr"/>
+          </a:p>
+        </p:txBody>
+      </p:sp>
+      <p:sp>
+        <p:nvSpPr>
+          <p:cNvPr id="9014" name="Oval 9013"/>
+          <p:cNvSpPr/>
+          <p:nvPr/>
+        </p:nvSpPr>
+        <p:spPr>
+          <a:xfrm>
+            <a:off x="713232" y="3319271"/>
+            <a:ext cx="274320" cy="274320"/>
+          </a:xfrm>
+          <a:prstGeom prst="ellipse">
+            <a:avLst/>
+          </a:prstGeom>
+          <a:solidFill>
+            <a:srgbClr val="113E6A"/>
+          </a:solidFill>
+          <a:ln>
+            <a:noFill/>
+          </a:ln>
+          <a:effectLst/>
+        </p:spPr>
+        <p:style>
+          <a:lnRef idx="1">
+            <a:schemeClr val="accent1"/>
+          </a:lnRef>
+          <a:fillRef idx="3">
+            <a:schemeClr val="accent1"/>
+          </a:fillRef>
+          <a:effectRef idx="2">
+            <a:schemeClr val="accent1"/>
+          </a:effectRef>
+          <a:fontRef idx="minor">
+            <a:schemeClr val="lt1"/>
+          </a:fontRef>
+        </p:style>
+        <p:txBody>
+          <a:bodyPr rtlCol="0" anchor="ctr" lIns="0" rIns="0" tIns="0" bIns="0"/>
+          <a:lstStyle/>
+          <a:p>
+            <a:pPr algn="ctr"/>
+            <a:r>
+              <a:rPr sz="1000" b="1">
                 <a:solidFill>
-                  <a:srgbClr val="636363"/>
+                  <a:srgbClr val="FFFFFF"/>
                 </a:solidFill>
                 <a:latin typeface="Arial"/>
                 <a:ea typeface="微软雅黑"/>
               </a:rPr>
-              <a:t>编码：s1–s4 = 100 / 1000 / 5000 / 10000 节点；w1–w7 = 负载强度（w2 500、w3 1000、w4 2000 pods/s 极限、w5 突发、w6 Gang、w7 异构）；inst3 = 3 实例</a:t>
-            </a:r>
-          </a:p>
-        </p:txBody>
-      </p:sp>
-      <p:sp>
-        <p:nvSpPr>
-          <p:cNvPr id="9007" name="TextBox 9006"/>
+              <a:t>04</a:t>
+            </a:r>
+          </a:p>
+        </p:txBody>
+      </p:sp>
+      <p:sp>
+        <p:nvSpPr>
+          <p:cNvPr id="9015" name="TextBox 9014"/>
+          <p:cNvSpPr txBox="1"/>
+          <p:nvPr/>
+        </p:nvSpPr>
+        <p:spPr>
+          <a:xfrm>
+            <a:off x="1078992" y="3319271"/>
+            <a:ext cx="2877312" cy="850392"/>
+          </a:xfrm>
+          <a:prstGeom prst="rect">
+            <a:avLst/>
+          </a:prstGeom>
+          <a:noFill/>
+        </p:spPr>
+        <p:txBody>
+          <a:bodyPr wrap="square" anchor="t" lIns="0" rIns="0" tIns="0" bIns="0">
+            <a:spAutoFit/>
+          </a:bodyPr>
+          <a:lstStyle/>
+          <a:p>
+            <a:pPr algn="l"/>
+            <a:r>
+              <a:rPr sz="1400" b="1">
+                <a:solidFill>
+                  <a:srgbClr val="113E6A"/>
+                </a:solidFill>
+                <a:latin typeface="Arial"/>
+                <a:ea typeface="微软雅黑"/>
+              </a:rPr>
+              <a:t>资源公平</a:t>
+            </a:r>
+          </a:p>
+          <a:p>
+            <a:pPr algn="l">
+              <a:lnSpc>
+                <a:spcPct val="110000"/>
+              </a:lnSpc>
+              <a:spcBef>
+                <a:spcPts val="400"/>
+              </a:spcBef>
+            </a:pPr>
+            <a:r>
+              <a:rPr sz="1250" b="0">
+                <a:solidFill>
+                  <a:srgbClr val="2E2C2C"/>
+                </a:solidFill>
+                <a:latin typeface="Arial"/>
+                <a:ea typeface="微软雅黑"/>
+              </a:rPr>
+              <a:t>每 Deployment 同规格，对 ENO 略不利</a:t>
+            </a:r>
+          </a:p>
+        </p:txBody>
+      </p:sp>
+      <p:sp>
+        <p:nvSpPr>
+          <p:cNvPr id="9016" name="Rounded Rectangle 9015"/>
+          <p:cNvSpPr/>
+          <p:nvPr/>
+        </p:nvSpPr>
+        <p:spPr>
+          <a:xfrm>
+            <a:off x="4340351" y="3182111"/>
+            <a:ext cx="3517391" cy="1051560"/>
+          </a:xfrm>
+          <a:prstGeom prst="roundRect">
+            <a:avLst/>
+          </a:prstGeom>
+          <a:solidFill>
+            <a:srgbClr val="FFFFFF"/>
+          </a:solidFill>
+          <a:ln w="9525">
+            <a:solidFill>
+              <a:srgbClr val="D6E3F0"/>
+            </a:solidFill>
+          </a:ln>
+          <a:effectLst/>
+        </p:spPr>
+        <p:style>
+          <a:lnRef idx="1">
+            <a:schemeClr val="accent1"/>
+          </a:lnRef>
+          <a:fillRef idx="3">
+            <a:schemeClr val="accent1"/>
+          </a:fillRef>
+          <a:effectRef idx="2">
+            <a:schemeClr val="accent1"/>
+          </a:effectRef>
+          <a:fontRef idx="minor">
+            <a:schemeClr val="lt1"/>
+          </a:fontRef>
+        </p:style>
+        <p:txBody>
+          <a:bodyPr rtlCol="0" anchor="ctr"/>
+          <a:lstStyle/>
+          <a:p>
+            <a:pPr algn="ctr"/>
+          </a:p>
+        </p:txBody>
+      </p:sp>
+      <p:sp>
+        <p:nvSpPr>
+          <p:cNvPr id="9017" name="Oval 9016"/>
+          <p:cNvSpPr/>
+          <p:nvPr/>
+        </p:nvSpPr>
+        <p:spPr>
+          <a:xfrm>
+            <a:off x="4486656" y="3319271"/>
+            <a:ext cx="274320" cy="274320"/>
+          </a:xfrm>
+          <a:prstGeom prst="ellipse">
+            <a:avLst/>
+          </a:prstGeom>
+          <a:solidFill>
+            <a:srgbClr val="113E6A"/>
+          </a:solidFill>
+          <a:ln>
+            <a:noFill/>
+          </a:ln>
+          <a:effectLst/>
+        </p:spPr>
+        <p:style>
+          <a:lnRef idx="1">
+            <a:schemeClr val="accent1"/>
+          </a:lnRef>
+          <a:fillRef idx="3">
+            <a:schemeClr val="accent1"/>
+          </a:fillRef>
+          <a:effectRef idx="2">
+            <a:schemeClr val="accent1"/>
+          </a:effectRef>
+          <a:fontRef idx="minor">
+            <a:schemeClr val="lt1"/>
+          </a:fontRef>
+        </p:style>
+        <p:txBody>
+          <a:bodyPr rtlCol="0" anchor="ctr" lIns="0" rIns="0" tIns="0" bIns="0"/>
+          <a:lstStyle/>
+          <a:p>
+            <a:pPr algn="ctr"/>
+            <a:r>
+              <a:rPr sz="1000" b="1">
+                <a:solidFill>
+                  <a:srgbClr val="FFFFFF"/>
+                </a:solidFill>
+                <a:latin typeface="Arial"/>
+                <a:ea typeface="微软雅黑"/>
+              </a:rPr>
+              <a:t>05</a:t>
+            </a:r>
+          </a:p>
+        </p:txBody>
+      </p:sp>
+      <p:sp>
+        <p:nvSpPr>
+          <p:cNvPr id="9018" name="TextBox 9017"/>
+          <p:cNvSpPr txBox="1"/>
+          <p:nvPr/>
+        </p:nvSpPr>
+        <p:spPr>
+          <a:xfrm>
+            <a:off x="4852416" y="3319271"/>
+            <a:ext cx="2877312" cy="850392"/>
+          </a:xfrm>
+          <a:prstGeom prst="rect">
+            <a:avLst/>
+          </a:prstGeom>
+          <a:noFill/>
+        </p:spPr>
+        <p:txBody>
+          <a:bodyPr wrap="square" anchor="t" lIns="0" rIns="0" tIns="0" bIns="0">
+            <a:spAutoFit/>
+          </a:bodyPr>
+          <a:lstStyle/>
+          <a:p>
+            <a:pPr algn="l"/>
+            <a:r>
+              <a:rPr sz="1400" b="1">
+                <a:solidFill>
+                  <a:srgbClr val="113E6A"/>
+                </a:solidFill>
+                <a:latin typeface="Arial"/>
+                <a:ea typeface="微软雅黑"/>
+              </a:rPr>
+              <a:t>Volcano 指标</a:t>
+            </a:r>
+          </a:p>
+          <a:p>
+            <a:pPr algn="l">
+              <a:lnSpc>
+                <a:spcPct val="110000"/>
+              </a:lnSpc>
+              <a:spcBef>
+                <a:spcPts val="400"/>
+              </a:spcBef>
+            </a:pPr>
+            <a:r>
+              <a:rPr sz="1250" b="0">
+                <a:solidFill>
+                  <a:srgbClr val="2E2C2C"/>
+                </a:solidFill>
+                <a:latin typeface="Arial"/>
+                <a:ea typeface="微软雅黑"/>
+              </a:rPr>
+              <a:t>测量对象与粒度不完全等价</a:t>
+            </a:r>
+          </a:p>
+        </p:txBody>
+      </p:sp>
+      <p:sp>
+        <p:nvSpPr>
+          <p:cNvPr id="9019" name="Rounded Rectangle 9018"/>
+          <p:cNvSpPr/>
+          <p:nvPr/>
+        </p:nvSpPr>
+        <p:spPr>
+          <a:xfrm>
+            <a:off x="8113775" y="3182111"/>
+            <a:ext cx="3517391" cy="1051560"/>
+          </a:xfrm>
+          <a:prstGeom prst="roundRect">
+            <a:avLst/>
+          </a:prstGeom>
+          <a:solidFill>
+            <a:srgbClr val="FFFFFF"/>
+          </a:solidFill>
+          <a:ln w="9525">
+            <a:solidFill>
+              <a:srgbClr val="D6E3F0"/>
+            </a:solidFill>
+          </a:ln>
+          <a:effectLst/>
+        </p:spPr>
+        <p:style>
+          <a:lnRef idx="1">
+            <a:schemeClr val="accent1"/>
+          </a:lnRef>
+          <a:fillRef idx="3">
+            <a:schemeClr val="accent1"/>
+          </a:fillRef>
+          <a:effectRef idx="2">
+            <a:schemeClr val="accent1"/>
+          </a:effectRef>
+          <a:fontRef idx="minor">
+            <a:schemeClr val="lt1"/>
+          </a:fontRef>
+        </p:style>
+        <p:txBody>
+          <a:bodyPr rtlCol="0" anchor="ctr"/>
+          <a:lstStyle/>
+          <a:p>
+            <a:pPr algn="ctr"/>
+          </a:p>
+        </p:txBody>
+      </p:sp>
+      <p:sp>
+        <p:nvSpPr>
+          <p:cNvPr id="9020" name="Oval 9019"/>
+          <p:cNvSpPr/>
+          <p:nvPr/>
+        </p:nvSpPr>
+        <p:spPr>
+          <a:xfrm>
+            <a:off x="8260079" y="3319271"/>
+            <a:ext cx="274320" cy="274320"/>
+          </a:xfrm>
+          <a:prstGeom prst="ellipse">
+            <a:avLst/>
+          </a:prstGeom>
+          <a:solidFill>
+            <a:srgbClr val="113E6A"/>
+          </a:solidFill>
+          <a:ln>
+            <a:noFill/>
+          </a:ln>
+          <a:effectLst/>
+        </p:spPr>
+        <p:style>
+          <a:lnRef idx="1">
+            <a:schemeClr val="accent1"/>
+          </a:lnRef>
+          <a:fillRef idx="3">
+            <a:schemeClr val="accent1"/>
+          </a:fillRef>
+          <a:effectRef idx="2">
+            <a:schemeClr val="accent1"/>
+          </a:effectRef>
+          <a:fontRef idx="minor">
+            <a:schemeClr val="lt1"/>
+          </a:fontRef>
+        </p:style>
+        <p:txBody>
+          <a:bodyPr rtlCol="0" anchor="ctr" lIns="0" rIns="0" tIns="0" bIns="0"/>
+          <a:lstStyle/>
+          <a:p>
+            <a:pPr algn="ctr"/>
+            <a:r>
+              <a:rPr sz="1000" b="1">
+                <a:solidFill>
+                  <a:srgbClr val="FFFFFF"/>
+                </a:solidFill>
+                <a:latin typeface="Arial"/>
+                <a:ea typeface="微软雅黑"/>
+              </a:rPr>
+              <a:t>06</a:t>
+            </a:r>
+          </a:p>
+        </p:txBody>
+      </p:sp>
+      <p:sp>
+        <p:nvSpPr>
+          <p:cNvPr id="9021" name="TextBox 9020"/>
+          <p:cNvSpPr txBox="1"/>
+          <p:nvPr/>
+        </p:nvSpPr>
+        <p:spPr>
+          <a:xfrm>
+            <a:off x="8625839" y="3319271"/>
+            <a:ext cx="2877312" cy="850392"/>
+          </a:xfrm>
+          <a:prstGeom prst="rect">
+            <a:avLst/>
+          </a:prstGeom>
+          <a:noFill/>
+        </p:spPr>
+        <p:txBody>
+          <a:bodyPr wrap="square" anchor="t" lIns="0" rIns="0" tIns="0" bIns="0">
+            <a:spAutoFit/>
+          </a:bodyPr>
+          <a:lstStyle/>
+          <a:p>
+            <a:pPr algn="l"/>
+            <a:r>
+              <a:rPr sz="1400" b="1">
+                <a:solidFill>
+                  <a:srgbClr val="113E6A"/>
+                </a:solidFill>
+                <a:latin typeface="Arial"/>
+                <a:ea typeface="微软雅黑"/>
+              </a:rPr>
+              <a:t>幸存者偏差</a:t>
+            </a:r>
+          </a:p>
+          <a:p>
+            <a:pPr algn="l">
+              <a:lnSpc>
+                <a:spcPct val="110000"/>
+              </a:lnSpc>
+              <a:spcBef>
+                <a:spcPts val="400"/>
+              </a:spcBef>
+            </a:pPr>
+            <a:r>
+              <a:rPr sz="1250" b="0">
+                <a:solidFill>
+                  <a:srgbClr val="2E2C2C"/>
+                </a:solidFill>
+                <a:latin typeface="Arial"/>
+                <a:ea typeface="微软雅黑"/>
+              </a:rPr>
+              <a:t>c/d/e 的 P99 不做数值对齐</a:t>
+            </a:r>
+          </a:p>
+        </p:txBody>
+      </p:sp>
+      <p:sp>
+        <p:nvSpPr>
+          <p:cNvPr id="9022" name="TextBox 9021"/>
           <p:cNvSpPr txBox="1"/>
           <p:nvPr/>
         </p:nvSpPr>
@@ -19387,7 +19739,7 @@
                 <a:latin typeface="Arial"/>
                 <a:ea typeface="微软雅黑"/>
               </a:rPr>
-              <a:t>22 / 25</a:t>
+              <a:t>22 / 24</a:t>
             </a:r>
           </a:p>
         </p:txBody>
@@ -19674,7 +20026,7 @@
                 <a:latin typeface="Arial"/>
                 <a:ea typeface="微软雅黑"/>
               </a:rPr>
-              <a:t>局限性与威胁效力</a:t>
+              <a:t>结论</a:t>
             </a:r>
           </a:p>
         </p:txBody>
@@ -19714,7 +20066,7 @@
                 <a:latin typeface="Arial"/>
                 <a:ea typeface="微软雅黑"/>
               </a:rPr>
-              <a:t>结论在“跨调度器相对比较”上成立，绝对数值不外推到生产</a:t>
+              <a:t>架构创新与一致性创新都有可复现实验支撑，且实现了向后兼容的工程落地</a:t>
             </a:r>
           </a:p>
         </p:txBody>
@@ -19850,7 +20202,7 @@
                 <a:latin typeface="Arial"/>
                 <a:ea typeface="微软雅黑"/>
               </a:rPr>
-              <a:t>KWOK 仿真</a:t>
+              <a:t>创新 1 · ENO</a:t>
             </a:r>
           </a:p>
           <a:p>
@@ -19870,7 +20222,7 @@
                 <a:latin typeface="Arial"/>
                 <a:ea typeface="微软雅黑"/>
               </a:rPr>
-              <a:t>无法反映真实资源竞争与 IO</a:t>
+              <a:t>Binder 进进程内 + CacheAdapter</a:t>
             </a:r>
           </a:p>
         </p:txBody>
@@ -20006,7 +20358,7 @@
                 <a:latin typeface="Arial"/>
                 <a:ea typeface="微软雅黑"/>
               </a:rPr>
-              <a:t>Gang 延迟口径</a:t>
+              <a:t>创新 2 · 四层容错</a:t>
             </a:r>
           </a:p>
           <a:p>
@@ -20026,7 +20378,7 @@
                 <a:latin typeface="Arial"/>
                 <a:ea typeface="微软雅黑"/>
               </a:rPr>
-              <a:t>w6 尾延迟反向，未分离计时</a:t>
+              <a:t>不变量 I 的完整证明要点</a:t>
             </a:r>
           </a:p>
         </p:txBody>
@@ -20162,7 +20514,7 @@
                 <a:latin typeface="Arial"/>
                 <a:ea typeface="微软雅黑"/>
               </a:rPr>
-              <a:t>固定实例数</a:t>
+              <a:t>证据 1 · 规模</a:t>
             </a:r>
           </a:p>
           <a:p>
@@ -20182,7 +20534,7 @@
                 <a:latin typeface="Arial"/>
                 <a:ea typeface="微软雅黑"/>
               </a:rPr>
-              <a:t>s3→s4 未同步扩容</a:t>
+              <a:t>16 场景 / 144 run / 100% 成功率</a:t>
             </a:r>
           </a:p>
         </p:txBody>
@@ -20318,7 +20670,7 @@
                 <a:latin typeface="Arial"/>
                 <a:ea typeface="微软雅黑"/>
               </a:rPr>
-              <a:t>资源公平</a:t>
+              <a:t>证据 2 · 性能</a:t>
             </a:r>
           </a:p>
           <a:p>
@@ -20338,7 +20690,7 @@
                 <a:latin typeface="Arial"/>
                 <a:ea typeface="微软雅黑"/>
               </a:rPr>
-              <a:t>每 Deployment 同规格，对 ENO 略不利</a:t>
+              <a:t>平均 +11.9%；P99 最高 -82.9%</a:t>
             </a:r>
           </a:p>
         </p:txBody>
@@ -20474,7 +20826,7 @@
                 <a:latin typeface="Arial"/>
                 <a:ea typeface="微软雅黑"/>
               </a:rPr>
-              <a:t>Volcano 指标</a:t>
+              <a:t>证据 3 · 扩展</a:t>
             </a:r>
           </a:p>
           <a:p>
@@ -20494,7 +20846,7 @@
                 <a:latin typeface="Arial"/>
                 <a:ea typeface="微软雅黑"/>
               </a:rPr>
-              <a:t>测量对象与粒度不完全等价</a:t>
+              <a:t>实例 1→3：+17.5% 对 +1.4%</a:t>
             </a:r>
           </a:p>
         </p:txBody>
@@ -20630,7 +20982,7 @@
                 <a:latin typeface="Arial"/>
                 <a:ea typeface="微软雅黑"/>
               </a:rPr>
-              <a:t>幸存者偏差</a:t>
+              <a:t>价值 · 落地</a:t>
             </a:r>
           </a:p>
           <a:p>
@@ -20650,7 +21002,7 @@
                 <a:latin typeface="Arial"/>
                 <a:ea typeface="微软雅黑"/>
               </a:rPr>
-              <a:t>c/d/e 的 P99 不做数值对齐</a:t>
+              <a:t>不改 API、可平滑替换、基准开源</a:t>
             </a:r>
           </a:p>
         </p:txBody>
@@ -20686,7 +21038,7 @@
                 <a:latin typeface="Arial"/>
                 <a:ea typeface="微软雅黑"/>
               </a:rPr>
-              <a:t>23 / 25</a:t>
+              <a:t>23 / 24</a:t>
             </a:r>
           </a:p>
         </p:txBody>
@@ -20717,206 +21069,9 @@
         <p:nvPr/>
       </p:nvGrpSpPr>
       <p:grpSpPr/>
-      <p:sp>
-        <p:nvSpPr>
-          <p:cNvPr id="9000" name="Freeform 5"/>
-          <p:cNvSpPr/>
-          <p:nvPr/>
-        </p:nvSpPr>
-        <p:spPr>
-          <a:xfrm>
-            <a:off x="182880" y="274320"/>
-            <a:ext cx="310896" cy="402336"/>
-          </a:xfrm>
-          <a:custGeom>
-            <a:avLst/>
-            <a:gdLst/>
-            <a:ahLst/>
-            <a:cxnLst>
-              <a:cxn ang="0">
-                <a:pos x="2147483647" y="2147483647"/>
-              </a:cxn>
-              <a:cxn ang="0">
-                <a:pos x="2147483647" y="2147483647"/>
-              </a:cxn>
-              <a:cxn ang="0">
-                <a:pos x="2147483647" y="2147483647"/>
-              </a:cxn>
-              <a:cxn ang="0">
-                <a:pos x="2147483647" y="2147483647"/>
-              </a:cxn>
-              <a:cxn ang="0">
-                <a:pos x="2147483647" y="2147483647"/>
-              </a:cxn>
-              <a:cxn ang="0">
-                <a:pos x="2147483647" y="2147483647"/>
-              </a:cxn>
-              <a:cxn ang="0">
-                <a:pos x="2147483647" y="2147483647"/>
-              </a:cxn>
-              <a:cxn ang="0">
-                <a:pos x="2147483647" y="2147483647"/>
-              </a:cxn>
-              <a:cxn ang="0">
-                <a:pos x="2147483647" y="0"/>
-              </a:cxn>
-              <a:cxn ang="0">
-                <a:pos x="2147483647" y="2147483647"/>
-              </a:cxn>
-              <a:cxn ang="0">
-                <a:pos x="2147483647" y="2147483647"/>
-              </a:cxn>
-              <a:cxn ang="0">
-                <a:pos x="2147483647" y="2147483647"/>
-              </a:cxn>
-              <a:cxn ang="0">
-                <a:pos x="2147483647" y="2147483647"/>
-              </a:cxn>
-              <a:cxn ang="0">
-                <a:pos x="2147483647" y="2147483647"/>
-              </a:cxn>
-              <a:cxn ang="0">
-                <a:pos x="2147483647" y="2147483647"/>
-              </a:cxn>
-              <a:cxn ang="0">
-                <a:pos x="2147483647" y="2147483647"/>
-              </a:cxn>
-              <a:cxn ang="0">
-                <a:pos x="2147483647" y="2147483647"/>
-              </a:cxn>
-              <a:cxn ang="0">
-                <a:pos x="2147483647" y="2147483647"/>
-              </a:cxn>
-              <a:cxn ang="0">
-                <a:pos x="2147483647" y="2147483647"/>
-              </a:cxn>
-              <a:cxn ang="0">
-                <a:pos x="0" y="2147483647"/>
-              </a:cxn>
-              <a:cxn ang="0">
-                <a:pos x="2147483647" y="2147483647"/>
-              </a:cxn>
-            </a:cxnLst>
-            <a:rect l="0" t="0" r="0" b="0"/>
-            <a:pathLst>
-              <a:path w="574" h="681">
-                <a:moveTo>
-                  <a:pt x="120" y="441"/>
-                </a:moveTo>
-                <a:cubicBezTo>
-                  <a:pt x="153" y="441"/>
-                  <a:pt x="183" y="454"/>
-                  <a:pt x="205" y="476"/>
-                </a:cubicBezTo>
-                <a:lnTo>
-                  <a:pt x="389" y="329"/>
-                </a:lnTo>
-                <a:cubicBezTo>
-                  <a:pt x="383" y="317"/>
-                  <a:pt x="380" y="303"/>
-                  <a:pt x="380" y="289"/>
-                </a:cubicBezTo>
-                <a:cubicBezTo>
-                  <a:pt x="380" y="271"/>
-                  <a:pt x="384" y="255"/>
-                  <a:pt x="392" y="241"/>
-                </a:cubicBezTo>
-                <a:lnTo>
-                  <a:pt x="270" y="138"/>
-                </a:lnTo>
-                <a:cubicBezTo>
-                  <a:pt x="256" y="151"/>
-                  <a:pt x="237" y="159"/>
-                  <a:pt x="217" y="159"/>
-                </a:cubicBezTo>
-                <a:cubicBezTo>
-                  <a:pt x="173" y="159"/>
-                  <a:pt x="137" y="123"/>
-                  <a:pt x="137" y="79"/>
-                </a:cubicBezTo>
-                <a:cubicBezTo>
-                  <a:pt x="137" y="36"/>
-                  <a:pt x="173" y="0"/>
-                  <a:pt x="217" y="0"/>
-                </a:cubicBezTo>
-                <a:cubicBezTo>
-                  <a:pt x="260" y="0"/>
-                  <a:pt x="296" y="36"/>
-                  <a:pt x="296" y="79"/>
-                </a:cubicBezTo>
-                <a:cubicBezTo>
-                  <a:pt x="296" y="91"/>
-                  <a:pt x="293" y="103"/>
-                  <a:pt x="289" y="113"/>
-                </a:cubicBezTo>
-                <a:lnTo>
-                  <a:pt x="412" y="217"/>
-                </a:lnTo>
-                <a:cubicBezTo>
-                  <a:pt x="429" y="201"/>
-                  <a:pt x="452" y="192"/>
-                  <a:pt x="477" y="192"/>
-                </a:cubicBezTo>
-                <a:cubicBezTo>
-                  <a:pt x="530" y="192"/>
-                  <a:pt x="574" y="235"/>
-                  <a:pt x="574" y="289"/>
-                </a:cubicBezTo>
-                <a:cubicBezTo>
-                  <a:pt x="574" y="342"/>
-                  <a:pt x="530" y="386"/>
-                  <a:pt x="477" y="386"/>
-                </a:cubicBezTo>
-                <a:cubicBezTo>
-                  <a:pt x="449" y="386"/>
-                  <a:pt x="424" y="374"/>
-                  <a:pt x="406" y="355"/>
-                </a:cubicBezTo>
-                <a:lnTo>
-                  <a:pt x="224" y="501"/>
-                </a:lnTo>
-                <a:cubicBezTo>
-                  <a:pt x="234" y="518"/>
-                  <a:pt x="240" y="539"/>
-                  <a:pt x="240" y="561"/>
-                </a:cubicBezTo>
-                <a:cubicBezTo>
-                  <a:pt x="240" y="627"/>
-                  <a:pt x="186" y="681"/>
-                  <a:pt x="120" y="681"/>
-                </a:cubicBezTo>
-                <a:cubicBezTo>
-                  <a:pt x="54" y="681"/>
-                  <a:pt x="0" y="627"/>
-                  <a:pt x="0" y="561"/>
-                </a:cubicBezTo>
-                <a:cubicBezTo>
-                  <a:pt x="0" y="495"/>
-                  <a:pt x="54" y="441"/>
-                  <a:pt x="120" y="441"/>
-                </a:cubicBezTo>
-                <a:close/>
-              </a:path>
-            </a:pathLst>
-          </a:custGeom>
-          <a:solidFill>
-            <a:srgbClr val="113E6A"/>
-          </a:solidFill>
-          <a:ln w="9525">
-            <a:noFill/>
-          </a:ln>
-        </p:spPr>
-        <p:txBody>
-          <a:bodyPr/>
-          <a:lstStyle/>
-          <a:p>
-            <a:endParaRPr lang="zh-CN" altLang="en-US"/>
-          </a:p>
-        </p:txBody>
-      </p:sp>
       <p:pic>
         <p:nvPicPr>
-          <p:cNvPr id="9001" name="Picture 9000" descr="beihang-logo-navy.png"/>
+          <p:cNvPr id="2" name="Picture 1" descr="beihang-logo-navy.png"/>
           <p:cNvPicPr>
             <a:picLocks noChangeAspect="1"/>
           </p:cNvPicPr>
@@ -20940,105 +21095,23 @@
       </p:pic>
       <p:sp>
         <p:nvSpPr>
-          <p:cNvPr id="9002" name="TextBox 9001"/>
-          <p:cNvSpPr txBox="1"/>
-          <p:nvPr/>
-        </p:nvSpPr>
-        <p:spPr>
-          <a:xfrm>
-            <a:off x="566928" y="155448"/>
-            <a:ext cx="8549640" cy="621792"/>
+          <p:cNvPr id="3" name="Rectangle 2"/>
+          <p:cNvSpPr/>
+          <p:nvPr/>
+        </p:nvSpPr>
+        <p:spPr>
+          <a:xfrm>
+            <a:off x="1197864" y="2212848"/>
+            <a:ext cx="9866376" cy="20116"/>
           </a:xfrm>
           <a:prstGeom prst="rect">
-            <a:avLst/>
-          </a:prstGeom>
-          <a:noFill/>
-        </p:spPr>
-        <p:txBody>
-          <a:bodyPr wrap="square" anchor="ctr" lIns="0" rIns="0" tIns="0" bIns="0">
-            <a:spAutoFit/>
-          </a:bodyPr>
-          <a:lstStyle/>
-          <a:p>
-            <a:pPr algn="l">
-              <a:lnSpc>
-                <a:spcPct val="100000"/>
-              </a:lnSpc>
-            </a:pPr>
-            <a:r>
-              <a:rPr sz="3000" b="1">
-                <a:solidFill>
-                  <a:srgbClr val="113E6A"/>
-                </a:solidFill>
-                <a:latin typeface="Arial"/>
-                <a:ea typeface="微软雅黑"/>
-              </a:rPr>
-              <a:t>结论</a:t>
-            </a:r>
-          </a:p>
-        </p:txBody>
-      </p:sp>
-      <p:sp>
-        <p:nvSpPr>
-          <p:cNvPr id="9003" name="TextBox 9002"/>
-          <p:cNvSpPr txBox="1"/>
-          <p:nvPr/>
-        </p:nvSpPr>
-        <p:spPr>
-          <a:xfrm>
-            <a:off x="566928" y="1261872"/>
-            <a:ext cx="10881360" cy="438912"/>
-          </a:xfrm>
-          <a:prstGeom prst="rect">
-            <a:avLst/>
-          </a:prstGeom>
-          <a:noFill/>
-        </p:spPr>
-        <p:txBody>
-          <a:bodyPr wrap="square" anchor="ctr" lIns="0" rIns="0" tIns="0" bIns="0">
-            <a:spAutoFit/>
-          </a:bodyPr>
-          <a:lstStyle/>
-          <a:p>
-            <a:pPr algn="l">
-              <a:lnSpc>
-                <a:spcPct val="110000"/>
-              </a:lnSpc>
-            </a:pPr>
-            <a:r>
-              <a:rPr sz="1800" b="1">
-                <a:solidFill>
-                  <a:srgbClr val="0070C0"/>
-                </a:solidFill>
-                <a:latin typeface="Arial"/>
-                <a:ea typeface="微软雅黑"/>
-              </a:rPr>
-              <a:t>架构创新与一致性创新都有可复现实验支撑，且实现了向后兼容的工程落地</a:t>
-            </a:r>
-          </a:p>
-        </p:txBody>
-      </p:sp>
-      <p:sp>
-        <p:nvSpPr>
-          <p:cNvPr id="9004" name="Rounded Rectangle 9003"/>
-          <p:cNvSpPr/>
-          <p:nvPr/>
-        </p:nvSpPr>
-        <p:spPr>
-          <a:xfrm>
-            <a:off x="566928" y="1874519"/>
-            <a:ext cx="3517391" cy="1051560"/>
-          </a:xfrm>
-          <a:prstGeom prst="roundRect">
             <a:avLst/>
           </a:prstGeom>
           <a:solidFill>
-            <a:srgbClr val="FFFFFF"/>
+            <a:srgbClr val="113E6A"/>
           </a:solidFill>
-          <a:ln w="9525">
-            <a:solidFill>
-              <a:srgbClr val="D6E3F0"/>
-            </a:solidFill>
+          <a:ln>
+            <a:noFill/>
           </a:ln>
           <a:effectLst/>
         </p:spPr>
@@ -21066,16 +21139,141 @@
       </p:sp>
       <p:sp>
         <p:nvSpPr>
-          <p:cNvPr id="9005" name="Oval 9004"/>
+          <p:cNvPr id="4" name="TextBox 3"/>
+          <p:cNvSpPr txBox="1"/>
+          <p:nvPr/>
+        </p:nvSpPr>
+        <p:spPr>
+          <a:xfrm>
+            <a:off x="914400" y="2395728"/>
+            <a:ext cx="10332720" cy="914400"/>
+          </a:xfrm>
+          <a:prstGeom prst="rect">
+            <a:avLst/>
+          </a:prstGeom>
+          <a:noFill/>
+        </p:spPr>
+        <p:txBody>
+          <a:bodyPr wrap="square" anchor="ctr" lIns="0" rIns="0" tIns="0" bIns="0">
+            <a:spAutoFit/>
+          </a:bodyPr>
+          <a:lstStyle/>
+          <a:p>
+            <a:pPr algn="ctr"/>
+            <a:r>
+              <a:rPr sz="3400" b="1">
+                <a:solidFill>
+                  <a:srgbClr val="113E6A"/>
+                </a:solidFill>
+                <a:latin typeface="Arial"/>
+                <a:ea typeface="微软雅黑"/>
+              </a:rPr>
+              <a:t>谢谢各位老师，请批评指正</a:t>
+            </a:r>
+          </a:p>
+        </p:txBody>
+      </p:sp>
+      <p:sp>
+        <p:nvSpPr>
+          <p:cNvPr id="5" name="TextBox 4"/>
+          <p:cNvSpPr txBox="1"/>
+          <p:nvPr/>
+        </p:nvSpPr>
+        <p:spPr>
+          <a:xfrm>
+            <a:off x="914400" y="3429000"/>
+            <a:ext cx="10332720" cy="457200"/>
+          </a:xfrm>
+          <a:prstGeom prst="rect">
+            <a:avLst/>
+          </a:prstGeom>
+          <a:noFill/>
+        </p:spPr>
+        <p:txBody>
+          <a:bodyPr wrap="square" anchor="t" lIns="0" rIns="0" tIns="0" bIns="0">
+            <a:spAutoFit/>
+          </a:bodyPr>
+          <a:lstStyle/>
+          <a:p>
+            <a:pPr algn="ctr"/>
+            <a:r>
+              <a:rPr sz="1600" b="0">
+                <a:solidFill>
+                  <a:srgbClr val="636363"/>
+                </a:solidFill>
+                <a:latin typeface="Arial"/>
+                <a:ea typeface="微软雅黑"/>
+              </a:rPr>
+              <a:t>基于 etcd 的分布式 Kubernetes 调度器研究与实现</a:t>
+            </a:r>
+          </a:p>
+        </p:txBody>
+      </p:sp>
+      <p:sp>
+        <p:nvSpPr>
+          <p:cNvPr id="6" name="TextBox 5"/>
+          <p:cNvSpPr txBox="1"/>
+          <p:nvPr/>
+        </p:nvSpPr>
+        <p:spPr>
+          <a:xfrm>
+            <a:off x="914400" y="4343400"/>
+            <a:ext cx="10332720" cy="731520"/>
+          </a:xfrm>
+          <a:prstGeom prst="rect">
+            <a:avLst/>
+          </a:prstGeom>
+          <a:noFill/>
+        </p:spPr>
+        <p:txBody>
+          <a:bodyPr wrap="square" anchor="t" lIns="0" rIns="0" tIns="0" bIns="0">
+            <a:spAutoFit/>
+          </a:bodyPr>
+          <a:lstStyle/>
+          <a:p>
+            <a:pPr algn="ctr"/>
+            <a:r>
+              <a:rPr sz="1300" b="0">
+                <a:solidFill>
+                  <a:srgbClr val="636363"/>
+                </a:solidFill>
+                <a:latin typeface="Arial"/>
+                <a:ea typeface="微软雅黑"/>
+              </a:rPr>
+              <a:t>答辩人：[姓名]</a:t>
+            </a:r>
+          </a:p>
+          <a:p>
+            <a:pPr algn="ctr">
+              <a:spcBef>
+                <a:spcPts val="400"/>
+              </a:spcBef>
+            </a:pPr>
+            <a:r>
+              <a:rPr sz="1300" b="0">
+                <a:solidFill>
+                  <a:srgbClr val="636363"/>
+                </a:solidFill>
+                <a:latin typeface="Arial"/>
+                <a:ea typeface="微软雅黑"/>
+              </a:rPr>
+              <a:t>联系方式：[邮箱]</a:t>
+            </a:r>
+          </a:p>
+        </p:txBody>
+      </p:sp>
+      <p:sp>
+        <p:nvSpPr>
+          <p:cNvPr id="7" name="Rectangle 6"/>
           <p:cNvSpPr/>
           <p:nvPr/>
         </p:nvSpPr>
         <p:spPr>
           <a:xfrm>
-            <a:off x="713232" y="2011679"/>
-            <a:ext cx="274320" cy="274320"/>
-          </a:xfrm>
-          <a:prstGeom prst="ellipse">
+            <a:off x="1197864" y="5074920"/>
+            <a:ext cx="9866376" cy="20116"/>
+          </a:xfrm>
+          <a:prstGeom prst="rect">
             <a:avLst/>
           </a:prstGeom>
           <a:solidFill>
@@ -21101,100 +21299,32 @@
           </a:fontRef>
         </p:style>
         <p:txBody>
-          <a:bodyPr rtlCol="0" anchor="ctr" lIns="0" rIns="0" tIns="0" bIns="0"/>
+          <a:bodyPr rtlCol="0" anchor="ctr"/>
           <a:lstStyle/>
           <a:p>
             <a:pPr algn="ctr"/>
-            <a:r>
-              <a:rPr sz="1000" b="1">
-                <a:solidFill>
-                  <a:srgbClr val="FFFFFF"/>
-                </a:solidFill>
-                <a:latin typeface="Arial"/>
-                <a:ea typeface="微软雅黑"/>
-              </a:rPr>
-              <a:t>01</a:t>
-            </a:r>
-          </a:p>
-        </p:txBody>
-      </p:sp>
-      <p:sp>
-        <p:nvSpPr>
-          <p:cNvPr id="9006" name="TextBox 9005"/>
-          <p:cNvSpPr txBox="1"/>
-          <p:nvPr/>
-        </p:nvSpPr>
-        <p:spPr>
-          <a:xfrm>
-            <a:off x="1078992" y="2011679"/>
-            <a:ext cx="2877312" cy="850392"/>
+          </a:p>
+        </p:txBody>
+      </p:sp>
+      <p:sp>
+        <p:nvSpPr>
+          <p:cNvPr id="8" name="Rectangle 7"/>
+          <p:cNvSpPr/>
+          <p:nvPr/>
+        </p:nvSpPr>
+        <p:spPr>
+          <a:xfrm>
+            <a:off x="36576" y="6748272"/>
+            <a:ext cx="12088368" cy="45720"/>
           </a:xfrm>
           <a:prstGeom prst="rect">
-            <a:avLst/>
-          </a:prstGeom>
-          <a:noFill/>
-        </p:spPr>
-        <p:txBody>
-          <a:bodyPr wrap="square" anchor="t" lIns="0" rIns="0" tIns="0" bIns="0">
-            <a:spAutoFit/>
-          </a:bodyPr>
-          <a:lstStyle/>
-          <a:p>
-            <a:pPr algn="l"/>
-            <a:r>
-              <a:rPr sz="1400" b="1">
-                <a:solidFill>
-                  <a:srgbClr val="113E6A"/>
-                </a:solidFill>
-                <a:latin typeface="Arial"/>
-                <a:ea typeface="微软雅黑"/>
-              </a:rPr>
-              <a:t>创新 1 · ENO</a:t>
-            </a:r>
-          </a:p>
-          <a:p>
-            <a:pPr algn="l">
-              <a:lnSpc>
-                <a:spcPct val="110000"/>
-              </a:lnSpc>
-              <a:spcBef>
-                <a:spcPts val="400"/>
-              </a:spcBef>
-            </a:pPr>
-            <a:r>
-              <a:rPr sz="1250" b="0">
-                <a:solidFill>
-                  <a:srgbClr val="2E2C2C"/>
-                </a:solidFill>
-                <a:latin typeface="Arial"/>
-                <a:ea typeface="微软雅黑"/>
-              </a:rPr>
-              <a:t>Binder 进进程内 + CacheAdapter</a:t>
-            </a:r>
-          </a:p>
-        </p:txBody>
-      </p:sp>
-      <p:sp>
-        <p:nvSpPr>
-          <p:cNvPr id="9007" name="Rounded Rectangle 9006"/>
-          <p:cNvSpPr/>
-          <p:nvPr/>
-        </p:nvSpPr>
-        <p:spPr>
-          <a:xfrm>
-            <a:off x="4340351" y="1874519"/>
-            <a:ext cx="3517391" cy="1051560"/>
-          </a:xfrm>
-          <a:prstGeom prst="roundRect">
             <a:avLst/>
           </a:prstGeom>
           <a:solidFill>
-            <a:srgbClr val="FFFFFF"/>
+            <a:srgbClr val="113E6A"/>
           </a:solidFill>
-          <a:ln w="9525">
-            <a:solidFill>
-              <a:srgbClr val="D6E3F0"/>
-            </a:solidFill>
+          <a:ln>
+            <a:noFill/>
           </a:ln>
           <a:effectLst/>
         </p:spPr>
@@ -21222,741 +21352,7 @@
       </p:sp>
       <p:sp>
         <p:nvSpPr>
-          <p:cNvPr id="9008" name="Oval 9007"/>
-          <p:cNvSpPr/>
-          <p:nvPr/>
-        </p:nvSpPr>
-        <p:spPr>
-          <a:xfrm>
-            <a:off x="4486656" y="2011679"/>
-            <a:ext cx="274320" cy="274320"/>
-          </a:xfrm>
-          <a:prstGeom prst="ellipse">
-            <a:avLst/>
-          </a:prstGeom>
-          <a:solidFill>
-            <a:srgbClr val="113E6A"/>
-          </a:solidFill>
-          <a:ln>
-            <a:noFill/>
-          </a:ln>
-          <a:effectLst/>
-        </p:spPr>
-        <p:style>
-          <a:lnRef idx="1">
-            <a:schemeClr val="accent1"/>
-          </a:lnRef>
-          <a:fillRef idx="3">
-            <a:schemeClr val="accent1"/>
-          </a:fillRef>
-          <a:effectRef idx="2">
-            <a:schemeClr val="accent1"/>
-          </a:effectRef>
-          <a:fontRef idx="minor">
-            <a:schemeClr val="lt1"/>
-          </a:fontRef>
-        </p:style>
-        <p:txBody>
-          <a:bodyPr rtlCol="0" anchor="ctr" lIns="0" rIns="0" tIns="0" bIns="0"/>
-          <a:lstStyle/>
-          <a:p>
-            <a:pPr algn="ctr"/>
-            <a:r>
-              <a:rPr sz="1000" b="1">
-                <a:solidFill>
-                  <a:srgbClr val="FFFFFF"/>
-                </a:solidFill>
-                <a:latin typeface="Arial"/>
-                <a:ea typeface="微软雅黑"/>
-              </a:rPr>
-              <a:t>02</a:t>
-            </a:r>
-          </a:p>
-        </p:txBody>
-      </p:sp>
-      <p:sp>
-        <p:nvSpPr>
-          <p:cNvPr id="9009" name="TextBox 9008"/>
-          <p:cNvSpPr txBox="1"/>
-          <p:nvPr/>
-        </p:nvSpPr>
-        <p:spPr>
-          <a:xfrm>
-            <a:off x="4852416" y="2011679"/>
-            <a:ext cx="2877312" cy="850392"/>
-          </a:xfrm>
-          <a:prstGeom prst="rect">
-            <a:avLst/>
-          </a:prstGeom>
-          <a:noFill/>
-        </p:spPr>
-        <p:txBody>
-          <a:bodyPr wrap="square" anchor="t" lIns="0" rIns="0" tIns="0" bIns="0">
-            <a:spAutoFit/>
-          </a:bodyPr>
-          <a:lstStyle/>
-          <a:p>
-            <a:pPr algn="l"/>
-            <a:r>
-              <a:rPr sz="1400" b="1">
-                <a:solidFill>
-                  <a:srgbClr val="113E6A"/>
-                </a:solidFill>
-                <a:latin typeface="Arial"/>
-                <a:ea typeface="微软雅黑"/>
-              </a:rPr>
-              <a:t>创新 2 · 四层容错</a:t>
-            </a:r>
-          </a:p>
-          <a:p>
-            <a:pPr algn="l">
-              <a:lnSpc>
-                <a:spcPct val="110000"/>
-              </a:lnSpc>
-              <a:spcBef>
-                <a:spcPts val="400"/>
-              </a:spcBef>
-            </a:pPr>
-            <a:r>
-              <a:rPr sz="1250" b="0">
-                <a:solidFill>
-                  <a:srgbClr val="2E2C2C"/>
-                </a:solidFill>
-                <a:latin typeface="Arial"/>
-                <a:ea typeface="微软雅黑"/>
-              </a:rPr>
-              <a:t>不变量 I 的完整证明要点</a:t>
-            </a:r>
-          </a:p>
-        </p:txBody>
-      </p:sp>
-      <p:sp>
-        <p:nvSpPr>
-          <p:cNvPr id="9010" name="Rounded Rectangle 9009"/>
-          <p:cNvSpPr/>
-          <p:nvPr/>
-        </p:nvSpPr>
-        <p:spPr>
-          <a:xfrm>
-            <a:off x="8113775" y="1874519"/>
-            <a:ext cx="3517391" cy="1051560"/>
-          </a:xfrm>
-          <a:prstGeom prst="roundRect">
-            <a:avLst/>
-          </a:prstGeom>
-          <a:solidFill>
-            <a:srgbClr val="FFFFFF"/>
-          </a:solidFill>
-          <a:ln w="9525">
-            <a:solidFill>
-              <a:srgbClr val="D6E3F0"/>
-            </a:solidFill>
-          </a:ln>
-          <a:effectLst/>
-        </p:spPr>
-        <p:style>
-          <a:lnRef idx="1">
-            <a:schemeClr val="accent1"/>
-          </a:lnRef>
-          <a:fillRef idx="3">
-            <a:schemeClr val="accent1"/>
-          </a:fillRef>
-          <a:effectRef idx="2">
-            <a:schemeClr val="accent1"/>
-          </a:effectRef>
-          <a:fontRef idx="minor">
-            <a:schemeClr val="lt1"/>
-          </a:fontRef>
-        </p:style>
-        <p:txBody>
-          <a:bodyPr rtlCol="0" anchor="ctr"/>
-          <a:lstStyle/>
-          <a:p>
-            <a:pPr algn="ctr"/>
-          </a:p>
-        </p:txBody>
-      </p:sp>
-      <p:sp>
-        <p:nvSpPr>
-          <p:cNvPr id="9011" name="Oval 9010"/>
-          <p:cNvSpPr/>
-          <p:nvPr/>
-        </p:nvSpPr>
-        <p:spPr>
-          <a:xfrm>
-            <a:off x="8260079" y="2011679"/>
-            <a:ext cx="274320" cy="274320"/>
-          </a:xfrm>
-          <a:prstGeom prst="ellipse">
-            <a:avLst/>
-          </a:prstGeom>
-          <a:solidFill>
-            <a:srgbClr val="113E6A"/>
-          </a:solidFill>
-          <a:ln>
-            <a:noFill/>
-          </a:ln>
-          <a:effectLst/>
-        </p:spPr>
-        <p:style>
-          <a:lnRef idx="1">
-            <a:schemeClr val="accent1"/>
-          </a:lnRef>
-          <a:fillRef idx="3">
-            <a:schemeClr val="accent1"/>
-          </a:fillRef>
-          <a:effectRef idx="2">
-            <a:schemeClr val="accent1"/>
-          </a:effectRef>
-          <a:fontRef idx="minor">
-            <a:schemeClr val="lt1"/>
-          </a:fontRef>
-        </p:style>
-        <p:txBody>
-          <a:bodyPr rtlCol="0" anchor="ctr" lIns="0" rIns="0" tIns="0" bIns="0"/>
-          <a:lstStyle/>
-          <a:p>
-            <a:pPr algn="ctr"/>
-            <a:r>
-              <a:rPr sz="1000" b="1">
-                <a:solidFill>
-                  <a:srgbClr val="FFFFFF"/>
-                </a:solidFill>
-                <a:latin typeface="Arial"/>
-                <a:ea typeface="微软雅黑"/>
-              </a:rPr>
-              <a:t>03</a:t>
-            </a:r>
-          </a:p>
-        </p:txBody>
-      </p:sp>
-      <p:sp>
-        <p:nvSpPr>
-          <p:cNvPr id="9012" name="TextBox 9011"/>
-          <p:cNvSpPr txBox="1"/>
-          <p:nvPr/>
-        </p:nvSpPr>
-        <p:spPr>
-          <a:xfrm>
-            <a:off x="8625839" y="2011679"/>
-            <a:ext cx="2877312" cy="850392"/>
-          </a:xfrm>
-          <a:prstGeom prst="rect">
-            <a:avLst/>
-          </a:prstGeom>
-          <a:noFill/>
-        </p:spPr>
-        <p:txBody>
-          <a:bodyPr wrap="square" anchor="t" lIns="0" rIns="0" tIns="0" bIns="0">
-            <a:spAutoFit/>
-          </a:bodyPr>
-          <a:lstStyle/>
-          <a:p>
-            <a:pPr algn="l"/>
-            <a:r>
-              <a:rPr sz="1400" b="1">
-                <a:solidFill>
-                  <a:srgbClr val="113E6A"/>
-                </a:solidFill>
-                <a:latin typeface="Arial"/>
-                <a:ea typeface="微软雅黑"/>
-              </a:rPr>
-              <a:t>证据 1 · 规模</a:t>
-            </a:r>
-          </a:p>
-          <a:p>
-            <a:pPr algn="l">
-              <a:lnSpc>
-                <a:spcPct val="110000"/>
-              </a:lnSpc>
-              <a:spcBef>
-                <a:spcPts val="400"/>
-              </a:spcBef>
-            </a:pPr>
-            <a:r>
-              <a:rPr sz="1250" b="0">
-                <a:solidFill>
-                  <a:srgbClr val="2E2C2C"/>
-                </a:solidFill>
-                <a:latin typeface="Arial"/>
-                <a:ea typeface="微软雅黑"/>
-              </a:rPr>
-              <a:t>16 场景 / 144 run / 100% 成功率</a:t>
-            </a:r>
-          </a:p>
-        </p:txBody>
-      </p:sp>
-      <p:sp>
-        <p:nvSpPr>
-          <p:cNvPr id="9013" name="Rounded Rectangle 9012"/>
-          <p:cNvSpPr/>
-          <p:nvPr/>
-        </p:nvSpPr>
-        <p:spPr>
-          <a:xfrm>
-            <a:off x="566928" y="3182111"/>
-            <a:ext cx="3517391" cy="1051560"/>
-          </a:xfrm>
-          <a:prstGeom prst="roundRect">
-            <a:avLst/>
-          </a:prstGeom>
-          <a:solidFill>
-            <a:srgbClr val="FFFFFF"/>
-          </a:solidFill>
-          <a:ln w="9525">
-            <a:solidFill>
-              <a:srgbClr val="D6E3F0"/>
-            </a:solidFill>
-          </a:ln>
-          <a:effectLst/>
-        </p:spPr>
-        <p:style>
-          <a:lnRef idx="1">
-            <a:schemeClr val="accent1"/>
-          </a:lnRef>
-          <a:fillRef idx="3">
-            <a:schemeClr val="accent1"/>
-          </a:fillRef>
-          <a:effectRef idx="2">
-            <a:schemeClr val="accent1"/>
-          </a:effectRef>
-          <a:fontRef idx="minor">
-            <a:schemeClr val="lt1"/>
-          </a:fontRef>
-        </p:style>
-        <p:txBody>
-          <a:bodyPr rtlCol="0" anchor="ctr"/>
-          <a:lstStyle/>
-          <a:p>
-            <a:pPr algn="ctr"/>
-          </a:p>
-        </p:txBody>
-      </p:sp>
-      <p:sp>
-        <p:nvSpPr>
-          <p:cNvPr id="9014" name="Oval 9013"/>
-          <p:cNvSpPr/>
-          <p:nvPr/>
-        </p:nvSpPr>
-        <p:spPr>
-          <a:xfrm>
-            <a:off x="713232" y="3319271"/>
-            <a:ext cx="274320" cy="274320"/>
-          </a:xfrm>
-          <a:prstGeom prst="ellipse">
-            <a:avLst/>
-          </a:prstGeom>
-          <a:solidFill>
-            <a:srgbClr val="113E6A"/>
-          </a:solidFill>
-          <a:ln>
-            <a:noFill/>
-          </a:ln>
-          <a:effectLst/>
-        </p:spPr>
-        <p:style>
-          <a:lnRef idx="1">
-            <a:schemeClr val="accent1"/>
-          </a:lnRef>
-          <a:fillRef idx="3">
-            <a:schemeClr val="accent1"/>
-          </a:fillRef>
-          <a:effectRef idx="2">
-            <a:schemeClr val="accent1"/>
-          </a:effectRef>
-          <a:fontRef idx="minor">
-            <a:schemeClr val="lt1"/>
-          </a:fontRef>
-        </p:style>
-        <p:txBody>
-          <a:bodyPr rtlCol="0" anchor="ctr" lIns="0" rIns="0" tIns="0" bIns="0"/>
-          <a:lstStyle/>
-          <a:p>
-            <a:pPr algn="ctr"/>
-            <a:r>
-              <a:rPr sz="1000" b="1">
-                <a:solidFill>
-                  <a:srgbClr val="FFFFFF"/>
-                </a:solidFill>
-                <a:latin typeface="Arial"/>
-                <a:ea typeface="微软雅黑"/>
-              </a:rPr>
-              <a:t>04</a:t>
-            </a:r>
-          </a:p>
-        </p:txBody>
-      </p:sp>
-      <p:sp>
-        <p:nvSpPr>
-          <p:cNvPr id="9015" name="TextBox 9014"/>
-          <p:cNvSpPr txBox="1"/>
-          <p:nvPr/>
-        </p:nvSpPr>
-        <p:spPr>
-          <a:xfrm>
-            <a:off x="1078992" y="3319271"/>
-            <a:ext cx="2877312" cy="850392"/>
-          </a:xfrm>
-          <a:prstGeom prst="rect">
-            <a:avLst/>
-          </a:prstGeom>
-          <a:noFill/>
-        </p:spPr>
-        <p:txBody>
-          <a:bodyPr wrap="square" anchor="t" lIns="0" rIns="0" tIns="0" bIns="0">
-            <a:spAutoFit/>
-          </a:bodyPr>
-          <a:lstStyle/>
-          <a:p>
-            <a:pPr algn="l"/>
-            <a:r>
-              <a:rPr sz="1400" b="1">
-                <a:solidFill>
-                  <a:srgbClr val="113E6A"/>
-                </a:solidFill>
-                <a:latin typeface="Arial"/>
-                <a:ea typeface="微软雅黑"/>
-              </a:rPr>
-              <a:t>证据 2 · 性能</a:t>
-            </a:r>
-          </a:p>
-          <a:p>
-            <a:pPr algn="l">
-              <a:lnSpc>
-                <a:spcPct val="110000"/>
-              </a:lnSpc>
-              <a:spcBef>
-                <a:spcPts val="400"/>
-              </a:spcBef>
-            </a:pPr>
-            <a:r>
-              <a:rPr sz="1250" b="0">
-                <a:solidFill>
-                  <a:srgbClr val="2E2C2C"/>
-                </a:solidFill>
-                <a:latin typeface="Arial"/>
-                <a:ea typeface="微软雅黑"/>
-              </a:rPr>
-              <a:t>平均 +11.9%；P99 最高 -82.9%</a:t>
-            </a:r>
-          </a:p>
-        </p:txBody>
-      </p:sp>
-      <p:sp>
-        <p:nvSpPr>
-          <p:cNvPr id="9016" name="Rounded Rectangle 9015"/>
-          <p:cNvSpPr/>
-          <p:nvPr/>
-        </p:nvSpPr>
-        <p:spPr>
-          <a:xfrm>
-            <a:off x="4340351" y="3182111"/>
-            <a:ext cx="3517391" cy="1051560"/>
-          </a:xfrm>
-          <a:prstGeom prst="roundRect">
-            <a:avLst/>
-          </a:prstGeom>
-          <a:solidFill>
-            <a:srgbClr val="FFFFFF"/>
-          </a:solidFill>
-          <a:ln w="9525">
-            <a:solidFill>
-              <a:srgbClr val="D6E3F0"/>
-            </a:solidFill>
-          </a:ln>
-          <a:effectLst/>
-        </p:spPr>
-        <p:style>
-          <a:lnRef idx="1">
-            <a:schemeClr val="accent1"/>
-          </a:lnRef>
-          <a:fillRef idx="3">
-            <a:schemeClr val="accent1"/>
-          </a:fillRef>
-          <a:effectRef idx="2">
-            <a:schemeClr val="accent1"/>
-          </a:effectRef>
-          <a:fontRef idx="minor">
-            <a:schemeClr val="lt1"/>
-          </a:fontRef>
-        </p:style>
-        <p:txBody>
-          <a:bodyPr rtlCol="0" anchor="ctr"/>
-          <a:lstStyle/>
-          <a:p>
-            <a:pPr algn="ctr"/>
-          </a:p>
-        </p:txBody>
-      </p:sp>
-      <p:sp>
-        <p:nvSpPr>
-          <p:cNvPr id="9017" name="Oval 9016"/>
-          <p:cNvSpPr/>
-          <p:nvPr/>
-        </p:nvSpPr>
-        <p:spPr>
-          <a:xfrm>
-            <a:off x="4486656" y="3319271"/>
-            <a:ext cx="274320" cy="274320"/>
-          </a:xfrm>
-          <a:prstGeom prst="ellipse">
-            <a:avLst/>
-          </a:prstGeom>
-          <a:solidFill>
-            <a:srgbClr val="113E6A"/>
-          </a:solidFill>
-          <a:ln>
-            <a:noFill/>
-          </a:ln>
-          <a:effectLst/>
-        </p:spPr>
-        <p:style>
-          <a:lnRef idx="1">
-            <a:schemeClr val="accent1"/>
-          </a:lnRef>
-          <a:fillRef idx="3">
-            <a:schemeClr val="accent1"/>
-          </a:fillRef>
-          <a:effectRef idx="2">
-            <a:schemeClr val="accent1"/>
-          </a:effectRef>
-          <a:fontRef idx="minor">
-            <a:schemeClr val="lt1"/>
-          </a:fontRef>
-        </p:style>
-        <p:txBody>
-          <a:bodyPr rtlCol="0" anchor="ctr" lIns="0" rIns="0" tIns="0" bIns="0"/>
-          <a:lstStyle/>
-          <a:p>
-            <a:pPr algn="ctr"/>
-            <a:r>
-              <a:rPr sz="1000" b="1">
-                <a:solidFill>
-                  <a:srgbClr val="FFFFFF"/>
-                </a:solidFill>
-                <a:latin typeface="Arial"/>
-                <a:ea typeface="微软雅黑"/>
-              </a:rPr>
-              <a:t>05</a:t>
-            </a:r>
-          </a:p>
-        </p:txBody>
-      </p:sp>
-      <p:sp>
-        <p:nvSpPr>
-          <p:cNvPr id="9018" name="TextBox 9017"/>
-          <p:cNvSpPr txBox="1"/>
-          <p:nvPr/>
-        </p:nvSpPr>
-        <p:spPr>
-          <a:xfrm>
-            <a:off x="4852416" y="3319271"/>
-            <a:ext cx="2877312" cy="850392"/>
-          </a:xfrm>
-          <a:prstGeom prst="rect">
-            <a:avLst/>
-          </a:prstGeom>
-          <a:noFill/>
-        </p:spPr>
-        <p:txBody>
-          <a:bodyPr wrap="square" anchor="t" lIns="0" rIns="0" tIns="0" bIns="0">
-            <a:spAutoFit/>
-          </a:bodyPr>
-          <a:lstStyle/>
-          <a:p>
-            <a:pPr algn="l"/>
-            <a:r>
-              <a:rPr sz="1400" b="1">
-                <a:solidFill>
-                  <a:srgbClr val="113E6A"/>
-                </a:solidFill>
-                <a:latin typeface="Arial"/>
-                <a:ea typeface="微软雅黑"/>
-              </a:rPr>
-              <a:t>证据 3 · 扩展</a:t>
-            </a:r>
-          </a:p>
-          <a:p>
-            <a:pPr algn="l">
-              <a:lnSpc>
-                <a:spcPct val="110000"/>
-              </a:lnSpc>
-              <a:spcBef>
-                <a:spcPts val="400"/>
-              </a:spcBef>
-            </a:pPr>
-            <a:r>
-              <a:rPr sz="1250" b="0">
-                <a:solidFill>
-                  <a:srgbClr val="2E2C2C"/>
-                </a:solidFill>
-                <a:latin typeface="Arial"/>
-                <a:ea typeface="微软雅黑"/>
-              </a:rPr>
-              <a:t>实例 1→3：+17.5% 对 +1.4%</a:t>
-            </a:r>
-          </a:p>
-        </p:txBody>
-      </p:sp>
-      <p:sp>
-        <p:nvSpPr>
-          <p:cNvPr id="9019" name="Rounded Rectangle 9018"/>
-          <p:cNvSpPr/>
-          <p:nvPr/>
-        </p:nvSpPr>
-        <p:spPr>
-          <a:xfrm>
-            <a:off x="8113775" y="3182111"/>
-            <a:ext cx="3517391" cy="1051560"/>
-          </a:xfrm>
-          <a:prstGeom prst="roundRect">
-            <a:avLst/>
-          </a:prstGeom>
-          <a:solidFill>
-            <a:srgbClr val="FFFFFF"/>
-          </a:solidFill>
-          <a:ln w="9525">
-            <a:solidFill>
-              <a:srgbClr val="D6E3F0"/>
-            </a:solidFill>
-          </a:ln>
-          <a:effectLst/>
-        </p:spPr>
-        <p:style>
-          <a:lnRef idx="1">
-            <a:schemeClr val="accent1"/>
-          </a:lnRef>
-          <a:fillRef idx="3">
-            <a:schemeClr val="accent1"/>
-          </a:fillRef>
-          <a:effectRef idx="2">
-            <a:schemeClr val="accent1"/>
-          </a:effectRef>
-          <a:fontRef idx="minor">
-            <a:schemeClr val="lt1"/>
-          </a:fontRef>
-        </p:style>
-        <p:txBody>
-          <a:bodyPr rtlCol="0" anchor="ctr"/>
-          <a:lstStyle/>
-          <a:p>
-            <a:pPr algn="ctr"/>
-          </a:p>
-        </p:txBody>
-      </p:sp>
-      <p:sp>
-        <p:nvSpPr>
-          <p:cNvPr id="9020" name="Oval 9019"/>
-          <p:cNvSpPr/>
-          <p:nvPr/>
-        </p:nvSpPr>
-        <p:spPr>
-          <a:xfrm>
-            <a:off x="8260079" y="3319271"/>
-            <a:ext cx="274320" cy="274320"/>
-          </a:xfrm>
-          <a:prstGeom prst="ellipse">
-            <a:avLst/>
-          </a:prstGeom>
-          <a:solidFill>
-            <a:srgbClr val="113E6A"/>
-          </a:solidFill>
-          <a:ln>
-            <a:noFill/>
-          </a:ln>
-          <a:effectLst/>
-        </p:spPr>
-        <p:style>
-          <a:lnRef idx="1">
-            <a:schemeClr val="accent1"/>
-          </a:lnRef>
-          <a:fillRef idx="3">
-            <a:schemeClr val="accent1"/>
-          </a:fillRef>
-          <a:effectRef idx="2">
-            <a:schemeClr val="accent1"/>
-          </a:effectRef>
-          <a:fontRef idx="minor">
-            <a:schemeClr val="lt1"/>
-          </a:fontRef>
-        </p:style>
-        <p:txBody>
-          <a:bodyPr rtlCol="0" anchor="ctr" lIns="0" rIns="0" tIns="0" bIns="0"/>
-          <a:lstStyle/>
-          <a:p>
-            <a:pPr algn="ctr"/>
-            <a:r>
-              <a:rPr sz="1000" b="1">
-                <a:solidFill>
-                  <a:srgbClr val="FFFFFF"/>
-                </a:solidFill>
-                <a:latin typeface="Arial"/>
-                <a:ea typeface="微软雅黑"/>
-              </a:rPr>
-              <a:t>06</a:t>
-            </a:r>
-          </a:p>
-        </p:txBody>
-      </p:sp>
-      <p:sp>
-        <p:nvSpPr>
-          <p:cNvPr id="9021" name="TextBox 9020"/>
-          <p:cNvSpPr txBox="1"/>
-          <p:nvPr/>
-        </p:nvSpPr>
-        <p:spPr>
-          <a:xfrm>
-            <a:off x="8625839" y="3319271"/>
-            <a:ext cx="2877312" cy="850392"/>
-          </a:xfrm>
-          <a:prstGeom prst="rect">
-            <a:avLst/>
-          </a:prstGeom>
-          <a:noFill/>
-        </p:spPr>
-        <p:txBody>
-          <a:bodyPr wrap="square" anchor="t" lIns="0" rIns="0" tIns="0" bIns="0">
-            <a:spAutoFit/>
-          </a:bodyPr>
-          <a:lstStyle/>
-          <a:p>
-            <a:pPr algn="l"/>
-            <a:r>
-              <a:rPr sz="1400" b="1">
-                <a:solidFill>
-                  <a:srgbClr val="113E6A"/>
-                </a:solidFill>
-                <a:latin typeface="Arial"/>
-                <a:ea typeface="微软雅黑"/>
-              </a:rPr>
-              <a:t>价值 · 落地</a:t>
-            </a:r>
-          </a:p>
-          <a:p>
-            <a:pPr algn="l">
-              <a:lnSpc>
-                <a:spcPct val="110000"/>
-              </a:lnSpc>
-              <a:spcBef>
-                <a:spcPts val="400"/>
-              </a:spcBef>
-            </a:pPr>
-            <a:r>
-              <a:rPr sz="1250" b="0">
-                <a:solidFill>
-                  <a:srgbClr val="2E2C2C"/>
-                </a:solidFill>
-                <a:latin typeface="Arial"/>
-                <a:ea typeface="微软雅黑"/>
-              </a:rPr>
-              <a:t>不改 API、可平滑替换、基准开源</a:t>
-            </a:r>
-          </a:p>
-        </p:txBody>
-      </p:sp>
-      <p:sp>
-        <p:nvSpPr>
-          <p:cNvPr id="9022" name="TextBox 9021"/>
+          <p:cNvPr id="9" name="TextBox 8"/>
           <p:cNvSpPr txBox="1"/>
           <p:nvPr/>
         </p:nvSpPr>
@@ -21985,7 +21381,7 @@
                 <a:latin typeface="Arial"/>
                 <a:ea typeface="微软雅黑"/>
               </a:rPr>
-              <a:t>24 / 25</a:t>
+              <a:t>24 / 24</a:t>
             </a:r>
           </a:p>
         </p:txBody>
@@ -21999,349 +21395,6 @@
 </file>
 
 <file path=ppt/slides/slide25.xml><?xml version="1.0" encoding="utf-8"?>
-<p:sld xmlns:a="http://schemas.openxmlformats.org/drawingml/2006/main" xmlns:p="http://schemas.openxmlformats.org/presentationml/2006/main" xmlns:r="http://schemas.openxmlformats.org/officeDocument/2006/relationships">
-  <p:cSld>
-    <p:bg>
-      <p:bgPr>
-        <a:solidFill>
-          <a:srgbClr val="FFFFFF"/>
-        </a:solidFill>
-        <a:effectLst/>
-      </p:bgPr>
-    </p:bg>
-    <p:spTree>
-      <p:nvGrpSpPr>
-        <p:cNvPr id="1" name=""/>
-        <p:cNvGrpSpPr/>
-        <p:nvPr/>
-      </p:nvGrpSpPr>
-      <p:grpSpPr/>
-      <p:pic>
-        <p:nvPicPr>
-          <p:cNvPr id="2" name="Picture 1" descr="beihang-logo-navy.png"/>
-          <p:cNvPicPr>
-            <a:picLocks noChangeAspect="1"/>
-          </p:cNvPicPr>
-          <p:nvPr/>
-        </p:nvPicPr>
-        <p:blipFill>
-          <a:blip r:embed="rId2"/>
-          <a:stretch>
-            <a:fillRect/>
-          </a:stretch>
-        </p:blipFill>
-        <p:spPr>
-          <a:xfrm>
-            <a:off x="9336024" y="91665"/>
-            <a:ext cx="2642616" cy="502469"/>
-          </a:xfrm>
-          <a:prstGeom prst="rect">
-            <a:avLst/>
-          </a:prstGeom>
-        </p:spPr>
-      </p:pic>
-      <p:sp>
-        <p:nvSpPr>
-          <p:cNvPr id="3" name="Rectangle 2"/>
-          <p:cNvSpPr/>
-          <p:nvPr/>
-        </p:nvSpPr>
-        <p:spPr>
-          <a:xfrm>
-            <a:off x="1197864" y="2212848"/>
-            <a:ext cx="9866376" cy="20116"/>
-          </a:xfrm>
-          <a:prstGeom prst="rect">
-            <a:avLst/>
-          </a:prstGeom>
-          <a:solidFill>
-            <a:srgbClr val="113E6A"/>
-          </a:solidFill>
-          <a:ln>
-            <a:noFill/>
-          </a:ln>
-          <a:effectLst/>
-        </p:spPr>
-        <p:style>
-          <a:lnRef idx="1">
-            <a:schemeClr val="accent1"/>
-          </a:lnRef>
-          <a:fillRef idx="3">
-            <a:schemeClr val="accent1"/>
-          </a:fillRef>
-          <a:effectRef idx="2">
-            <a:schemeClr val="accent1"/>
-          </a:effectRef>
-          <a:fontRef idx="minor">
-            <a:schemeClr val="lt1"/>
-          </a:fontRef>
-        </p:style>
-        <p:txBody>
-          <a:bodyPr rtlCol="0" anchor="ctr"/>
-          <a:lstStyle/>
-          <a:p>
-            <a:pPr algn="ctr"/>
-          </a:p>
-        </p:txBody>
-      </p:sp>
-      <p:sp>
-        <p:nvSpPr>
-          <p:cNvPr id="4" name="TextBox 3"/>
-          <p:cNvSpPr txBox="1"/>
-          <p:nvPr/>
-        </p:nvSpPr>
-        <p:spPr>
-          <a:xfrm>
-            <a:off x="914400" y="2395728"/>
-            <a:ext cx="10332720" cy="914400"/>
-          </a:xfrm>
-          <a:prstGeom prst="rect">
-            <a:avLst/>
-          </a:prstGeom>
-          <a:noFill/>
-        </p:spPr>
-        <p:txBody>
-          <a:bodyPr wrap="square" anchor="ctr" lIns="0" rIns="0" tIns="0" bIns="0">
-            <a:spAutoFit/>
-          </a:bodyPr>
-          <a:lstStyle/>
-          <a:p>
-            <a:pPr algn="ctr"/>
-            <a:r>
-              <a:rPr sz="3400" b="1">
-                <a:solidFill>
-                  <a:srgbClr val="113E6A"/>
-                </a:solidFill>
-                <a:latin typeface="Arial"/>
-                <a:ea typeface="微软雅黑"/>
-              </a:rPr>
-              <a:t>谢谢各位老师，请批评指正</a:t>
-            </a:r>
-          </a:p>
-        </p:txBody>
-      </p:sp>
-      <p:sp>
-        <p:nvSpPr>
-          <p:cNvPr id="5" name="TextBox 4"/>
-          <p:cNvSpPr txBox="1"/>
-          <p:nvPr/>
-        </p:nvSpPr>
-        <p:spPr>
-          <a:xfrm>
-            <a:off x="914400" y="3429000"/>
-            <a:ext cx="10332720" cy="457200"/>
-          </a:xfrm>
-          <a:prstGeom prst="rect">
-            <a:avLst/>
-          </a:prstGeom>
-          <a:noFill/>
-        </p:spPr>
-        <p:txBody>
-          <a:bodyPr wrap="square" anchor="t" lIns="0" rIns="0" tIns="0" bIns="0">
-            <a:spAutoFit/>
-          </a:bodyPr>
-          <a:lstStyle/>
-          <a:p>
-            <a:pPr algn="ctr"/>
-            <a:r>
-              <a:rPr sz="1600" b="0">
-                <a:solidFill>
-                  <a:srgbClr val="636363"/>
-                </a:solidFill>
-                <a:latin typeface="Arial"/>
-                <a:ea typeface="微软雅黑"/>
-              </a:rPr>
-              <a:t>基于 etcd 的分布式 Kubernetes 调度器研究与实现</a:t>
-            </a:r>
-          </a:p>
-        </p:txBody>
-      </p:sp>
-      <p:sp>
-        <p:nvSpPr>
-          <p:cNvPr id="6" name="TextBox 5"/>
-          <p:cNvSpPr txBox="1"/>
-          <p:nvPr/>
-        </p:nvSpPr>
-        <p:spPr>
-          <a:xfrm>
-            <a:off x="914400" y="4343400"/>
-            <a:ext cx="10332720" cy="731520"/>
-          </a:xfrm>
-          <a:prstGeom prst="rect">
-            <a:avLst/>
-          </a:prstGeom>
-          <a:noFill/>
-        </p:spPr>
-        <p:txBody>
-          <a:bodyPr wrap="square" anchor="t" lIns="0" rIns="0" tIns="0" bIns="0">
-            <a:spAutoFit/>
-          </a:bodyPr>
-          <a:lstStyle/>
-          <a:p>
-            <a:pPr algn="ctr"/>
-            <a:r>
-              <a:rPr sz="1300" b="0">
-                <a:solidFill>
-                  <a:srgbClr val="636363"/>
-                </a:solidFill>
-                <a:latin typeface="Arial"/>
-                <a:ea typeface="微软雅黑"/>
-              </a:rPr>
-              <a:t>答辩人：[姓名]</a:t>
-            </a:r>
-          </a:p>
-          <a:p>
-            <a:pPr algn="ctr">
-              <a:spcBef>
-                <a:spcPts val="400"/>
-              </a:spcBef>
-            </a:pPr>
-            <a:r>
-              <a:rPr sz="1300" b="0">
-                <a:solidFill>
-                  <a:srgbClr val="636363"/>
-                </a:solidFill>
-                <a:latin typeface="Arial"/>
-                <a:ea typeface="微软雅黑"/>
-              </a:rPr>
-              <a:t>联系方式：[邮箱]</a:t>
-            </a:r>
-          </a:p>
-        </p:txBody>
-      </p:sp>
-      <p:sp>
-        <p:nvSpPr>
-          <p:cNvPr id="7" name="Rectangle 6"/>
-          <p:cNvSpPr/>
-          <p:nvPr/>
-        </p:nvSpPr>
-        <p:spPr>
-          <a:xfrm>
-            <a:off x="1197864" y="5074920"/>
-            <a:ext cx="9866376" cy="20116"/>
-          </a:xfrm>
-          <a:prstGeom prst="rect">
-            <a:avLst/>
-          </a:prstGeom>
-          <a:solidFill>
-            <a:srgbClr val="113E6A"/>
-          </a:solidFill>
-          <a:ln>
-            <a:noFill/>
-          </a:ln>
-          <a:effectLst/>
-        </p:spPr>
-        <p:style>
-          <a:lnRef idx="1">
-            <a:schemeClr val="accent1"/>
-          </a:lnRef>
-          <a:fillRef idx="3">
-            <a:schemeClr val="accent1"/>
-          </a:fillRef>
-          <a:effectRef idx="2">
-            <a:schemeClr val="accent1"/>
-          </a:effectRef>
-          <a:fontRef idx="minor">
-            <a:schemeClr val="lt1"/>
-          </a:fontRef>
-        </p:style>
-        <p:txBody>
-          <a:bodyPr rtlCol="0" anchor="ctr"/>
-          <a:lstStyle/>
-          <a:p>
-            <a:pPr algn="ctr"/>
-          </a:p>
-        </p:txBody>
-      </p:sp>
-      <p:sp>
-        <p:nvSpPr>
-          <p:cNvPr id="8" name="Rectangle 7"/>
-          <p:cNvSpPr/>
-          <p:nvPr/>
-        </p:nvSpPr>
-        <p:spPr>
-          <a:xfrm>
-            <a:off x="36576" y="6748272"/>
-            <a:ext cx="12088368" cy="45720"/>
-          </a:xfrm>
-          <a:prstGeom prst="rect">
-            <a:avLst/>
-          </a:prstGeom>
-          <a:solidFill>
-            <a:srgbClr val="113E6A"/>
-          </a:solidFill>
-          <a:ln>
-            <a:noFill/>
-          </a:ln>
-          <a:effectLst/>
-        </p:spPr>
-        <p:style>
-          <a:lnRef idx="1">
-            <a:schemeClr val="accent1"/>
-          </a:lnRef>
-          <a:fillRef idx="3">
-            <a:schemeClr val="accent1"/>
-          </a:fillRef>
-          <a:effectRef idx="2">
-            <a:schemeClr val="accent1"/>
-          </a:effectRef>
-          <a:fontRef idx="minor">
-            <a:schemeClr val="lt1"/>
-          </a:fontRef>
-        </p:style>
-        <p:txBody>
-          <a:bodyPr rtlCol="0" anchor="ctr"/>
-          <a:lstStyle/>
-          <a:p>
-            <a:pPr algn="ctr"/>
-          </a:p>
-        </p:txBody>
-      </p:sp>
-      <p:sp>
-        <p:nvSpPr>
-          <p:cNvPr id="9" name="TextBox 8"/>
-          <p:cNvSpPr txBox="1"/>
-          <p:nvPr/>
-        </p:nvSpPr>
-        <p:spPr>
-          <a:xfrm>
-            <a:off x="10780776" y="6345936"/>
-            <a:ext cx="850392" cy="219456"/>
-          </a:xfrm>
-          <a:prstGeom prst="rect">
-            <a:avLst/>
-          </a:prstGeom>
-          <a:noFill/>
-        </p:spPr>
-        <p:txBody>
-          <a:bodyPr wrap="square" anchor="t" lIns="0" rIns="0" tIns="0" bIns="0">
-            <a:spAutoFit/>
-          </a:bodyPr>
-          <a:lstStyle/>
-          <a:p>
-            <a:pPr algn="r"/>
-            <a:r>
-              <a:rPr sz="950" b="0">
-                <a:solidFill>
-                  <a:srgbClr val="636363"/>
-                </a:solidFill>
-                <a:latin typeface="Arial"/>
-                <a:ea typeface="微软雅黑"/>
-              </a:rPr>
-              <a:t>25 / 25</a:t>
-            </a:r>
-          </a:p>
-        </p:txBody>
-      </p:sp>
-    </p:spTree>
-  </p:cSld>
-  <p:clrMapOvr>
-    <a:masterClrMapping/>
-  </p:clrMapOvr>
-</p:sld>
-</file>
-
-<file path=ppt/slides/slide26.xml><?xml version="1.0" encoding="utf-8"?>
 <p:sld xmlns:a="http://schemas.openxmlformats.org/drawingml/2006/main" xmlns:p="http://schemas.openxmlformats.org/presentationml/2006/main" xmlns:r="http://schemas.openxmlformats.org/officeDocument/2006/relationships">
   <p:cSld>
     <p:bg>
@@ -23667,7 +22720,7 @@
 </p:sld>
 </file>
 
-<file path=ppt/slides/slide27.xml><?xml version="1.0" encoding="utf-8"?>
+<file path=ppt/slides/slide26.xml><?xml version="1.0" encoding="utf-8"?>
 <p:sld xmlns:a="http://schemas.openxmlformats.org/drawingml/2006/main" xmlns:p="http://schemas.openxmlformats.org/presentationml/2006/main" xmlns:r="http://schemas.openxmlformats.org/officeDocument/2006/relationships">
   <p:cSld>
     <p:bg>
@@ -24655,7 +23708,7 @@
 </p:sld>
 </file>
 
-<file path=ppt/slides/slide28.xml><?xml version="1.0" encoding="utf-8"?>
+<file path=ppt/slides/slide27.xml><?xml version="1.0" encoding="utf-8"?>
 <p:sld xmlns:a="http://schemas.openxmlformats.org/drawingml/2006/main" xmlns:p="http://schemas.openxmlformats.org/presentationml/2006/main" xmlns:r="http://schemas.openxmlformats.org/officeDocument/2006/relationships">
   <p:cSld>
     <p:bg>
@@ -25098,7 +24151,7 @@
 </p:sld>
 </file>
 
-<file path=ppt/slides/slide29.xml><?xml version="1.0" encoding="utf-8"?>
+<file path=ppt/slides/slide28.xml><?xml version="1.0" encoding="utf-8"?>
 <p:sld xmlns:a="http://schemas.openxmlformats.org/drawingml/2006/main" xmlns:p="http://schemas.openxmlformats.org/presentationml/2006/main" xmlns:r="http://schemas.openxmlformats.org/officeDocument/2006/relationships">
   <p:cSld>
     <p:bg>
@@ -26046,6 +25099,449 @@
                 <a:ea typeface="微软雅黑"/>
               </a:rPr>
               <a:t>B4</a:t>
+            </a:r>
+          </a:p>
+        </p:txBody>
+      </p:sp>
+    </p:spTree>
+  </p:cSld>
+  <p:clrMapOvr>
+    <a:masterClrMapping/>
+  </p:clrMapOvr>
+</p:sld>
+</file>
+
+<file path=ppt/slides/slide29.xml><?xml version="1.0" encoding="utf-8"?>
+<p:sld xmlns:a="http://schemas.openxmlformats.org/drawingml/2006/main" xmlns:p="http://schemas.openxmlformats.org/presentationml/2006/main" xmlns:r="http://schemas.openxmlformats.org/officeDocument/2006/relationships">
+  <p:cSld>
+    <p:bg>
+      <p:bgPr>
+        <a:solidFill>
+          <a:srgbClr val="FFFFFF"/>
+        </a:solidFill>
+        <a:effectLst/>
+      </p:bgPr>
+    </p:bg>
+    <p:spTree>
+      <p:nvGrpSpPr>
+        <p:cNvPr id="1" name=""/>
+        <p:cNvGrpSpPr/>
+        <p:nvPr/>
+      </p:nvGrpSpPr>
+      <p:grpSpPr/>
+      <p:sp>
+        <p:nvSpPr>
+          <p:cNvPr id="9000" name="Freeform 5"/>
+          <p:cNvSpPr/>
+          <p:nvPr/>
+        </p:nvSpPr>
+        <p:spPr>
+          <a:xfrm>
+            <a:off x="182880" y="274320"/>
+            <a:ext cx="310896" cy="402336"/>
+          </a:xfrm>
+          <a:custGeom>
+            <a:avLst/>
+            <a:gdLst/>
+            <a:ahLst/>
+            <a:cxnLst>
+              <a:cxn ang="0">
+                <a:pos x="2147483647" y="2147483647"/>
+              </a:cxn>
+              <a:cxn ang="0">
+                <a:pos x="2147483647" y="2147483647"/>
+              </a:cxn>
+              <a:cxn ang="0">
+                <a:pos x="2147483647" y="2147483647"/>
+              </a:cxn>
+              <a:cxn ang="0">
+                <a:pos x="2147483647" y="2147483647"/>
+              </a:cxn>
+              <a:cxn ang="0">
+                <a:pos x="2147483647" y="2147483647"/>
+              </a:cxn>
+              <a:cxn ang="0">
+                <a:pos x="2147483647" y="2147483647"/>
+              </a:cxn>
+              <a:cxn ang="0">
+                <a:pos x="2147483647" y="2147483647"/>
+              </a:cxn>
+              <a:cxn ang="0">
+                <a:pos x="2147483647" y="2147483647"/>
+              </a:cxn>
+              <a:cxn ang="0">
+                <a:pos x="2147483647" y="0"/>
+              </a:cxn>
+              <a:cxn ang="0">
+                <a:pos x="2147483647" y="2147483647"/>
+              </a:cxn>
+              <a:cxn ang="0">
+                <a:pos x="2147483647" y="2147483647"/>
+              </a:cxn>
+              <a:cxn ang="0">
+                <a:pos x="2147483647" y="2147483647"/>
+              </a:cxn>
+              <a:cxn ang="0">
+                <a:pos x="2147483647" y="2147483647"/>
+              </a:cxn>
+              <a:cxn ang="0">
+                <a:pos x="2147483647" y="2147483647"/>
+              </a:cxn>
+              <a:cxn ang="0">
+                <a:pos x="2147483647" y="2147483647"/>
+              </a:cxn>
+              <a:cxn ang="0">
+                <a:pos x="2147483647" y="2147483647"/>
+              </a:cxn>
+              <a:cxn ang="0">
+                <a:pos x="2147483647" y="2147483647"/>
+              </a:cxn>
+              <a:cxn ang="0">
+                <a:pos x="2147483647" y="2147483647"/>
+              </a:cxn>
+              <a:cxn ang="0">
+                <a:pos x="2147483647" y="2147483647"/>
+              </a:cxn>
+              <a:cxn ang="0">
+                <a:pos x="0" y="2147483647"/>
+              </a:cxn>
+              <a:cxn ang="0">
+                <a:pos x="2147483647" y="2147483647"/>
+              </a:cxn>
+            </a:cxnLst>
+            <a:rect l="0" t="0" r="0" b="0"/>
+            <a:pathLst>
+              <a:path w="574" h="681">
+                <a:moveTo>
+                  <a:pt x="120" y="441"/>
+                </a:moveTo>
+                <a:cubicBezTo>
+                  <a:pt x="153" y="441"/>
+                  <a:pt x="183" y="454"/>
+                  <a:pt x="205" y="476"/>
+                </a:cubicBezTo>
+                <a:lnTo>
+                  <a:pt x="389" y="329"/>
+                </a:lnTo>
+                <a:cubicBezTo>
+                  <a:pt x="383" y="317"/>
+                  <a:pt x="380" y="303"/>
+                  <a:pt x="380" y="289"/>
+                </a:cubicBezTo>
+                <a:cubicBezTo>
+                  <a:pt x="380" y="271"/>
+                  <a:pt x="384" y="255"/>
+                  <a:pt x="392" y="241"/>
+                </a:cubicBezTo>
+                <a:lnTo>
+                  <a:pt x="270" y="138"/>
+                </a:lnTo>
+                <a:cubicBezTo>
+                  <a:pt x="256" y="151"/>
+                  <a:pt x="237" y="159"/>
+                  <a:pt x="217" y="159"/>
+                </a:cubicBezTo>
+                <a:cubicBezTo>
+                  <a:pt x="173" y="159"/>
+                  <a:pt x="137" y="123"/>
+                  <a:pt x="137" y="79"/>
+                </a:cubicBezTo>
+                <a:cubicBezTo>
+                  <a:pt x="137" y="36"/>
+                  <a:pt x="173" y="0"/>
+                  <a:pt x="217" y="0"/>
+                </a:cubicBezTo>
+                <a:cubicBezTo>
+                  <a:pt x="260" y="0"/>
+                  <a:pt x="296" y="36"/>
+                  <a:pt x="296" y="79"/>
+                </a:cubicBezTo>
+                <a:cubicBezTo>
+                  <a:pt x="296" y="91"/>
+                  <a:pt x="293" y="103"/>
+                  <a:pt x="289" y="113"/>
+                </a:cubicBezTo>
+                <a:lnTo>
+                  <a:pt x="412" y="217"/>
+                </a:lnTo>
+                <a:cubicBezTo>
+                  <a:pt x="429" y="201"/>
+                  <a:pt x="452" y="192"/>
+                  <a:pt x="477" y="192"/>
+                </a:cubicBezTo>
+                <a:cubicBezTo>
+                  <a:pt x="530" y="192"/>
+                  <a:pt x="574" y="235"/>
+                  <a:pt x="574" y="289"/>
+                </a:cubicBezTo>
+                <a:cubicBezTo>
+                  <a:pt x="574" y="342"/>
+                  <a:pt x="530" y="386"/>
+                  <a:pt x="477" y="386"/>
+                </a:cubicBezTo>
+                <a:cubicBezTo>
+                  <a:pt x="449" y="386"/>
+                  <a:pt x="424" y="374"/>
+                  <a:pt x="406" y="355"/>
+                </a:cubicBezTo>
+                <a:lnTo>
+                  <a:pt x="224" y="501"/>
+                </a:lnTo>
+                <a:cubicBezTo>
+                  <a:pt x="234" y="518"/>
+                  <a:pt x="240" y="539"/>
+                  <a:pt x="240" y="561"/>
+                </a:cubicBezTo>
+                <a:cubicBezTo>
+                  <a:pt x="240" y="627"/>
+                  <a:pt x="186" y="681"/>
+                  <a:pt x="120" y="681"/>
+                </a:cubicBezTo>
+                <a:cubicBezTo>
+                  <a:pt x="54" y="681"/>
+                  <a:pt x="0" y="627"/>
+                  <a:pt x="0" y="561"/>
+                </a:cubicBezTo>
+                <a:cubicBezTo>
+                  <a:pt x="0" y="495"/>
+                  <a:pt x="54" y="441"/>
+                  <a:pt x="120" y="441"/>
+                </a:cubicBezTo>
+                <a:close/>
+              </a:path>
+            </a:pathLst>
+          </a:custGeom>
+          <a:solidFill>
+            <a:srgbClr val="113E6A"/>
+          </a:solidFill>
+          <a:ln w="9525">
+            <a:noFill/>
+          </a:ln>
+        </p:spPr>
+        <p:txBody>
+          <a:bodyPr/>
+          <a:lstStyle/>
+          <a:p>
+            <a:endParaRPr lang="zh-CN" altLang="en-US"/>
+          </a:p>
+        </p:txBody>
+      </p:sp>
+      <p:pic>
+        <p:nvPicPr>
+          <p:cNvPr id="9001" name="Picture 9000" descr="beihang-logo-navy.png"/>
+          <p:cNvPicPr>
+            <a:picLocks noChangeAspect="1"/>
+          </p:cNvPicPr>
+          <p:nvPr/>
+        </p:nvPicPr>
+        <p:blipFill>
+          <a:blip r:embed="rId2"/>
+          <a:stretch>
+            <a:fillRect/>
+          </a:stretch>
+        </p:blipFill>
+        <p:spPr>
+          <a:xfrm>
+            <a:off x="9336024" y="91665"/>
+            <a:ext cx="2642616" cy="502469"/>
+          </a:xfrm>
+          <a:prstGeom prst="rect">
+            <a:avLst/>
+          </a:prstGeom>
+        </p:spPr>
+      </p:pic>
+      <p:sp>
+        <p:nvSpPr>
+          <p:cNvPr id="9002" name="TextBox 9001"/>
+          <p:cNvSpPr txBox="1"/>
+          <p:nvPr/>
+        </p:nvSpPr>
+        <p:spPr>
+          <a:xfrm>
+            <a:off x="566928" y="155448"/>
+            <a:ext cx="8549640" cy="621792"/>
+          </a:xfrm>
+          <a:prstGeom prst="rect">
+            <a:avLst/>
+          </a:prstGeom>
+          <a:noFill/>
+        </p:spPr>
+        <p:txBody>
+          <a:bodyPr wrap="square" anchor="ctr" lIns="0" rIns="0" tIns="0" bIns="0">
+            <a:spAutoFit/>
+          </a:bodyPr>
+          <a:lstStyle/>
+          <a:p>
+            <a:pPr algn="l">
+              <a:lnSpc>
+                <a:spcPct val="100000"/>
+              </a:lnSpc>
+            </a:pPr>
+            <a:r>
+              <a:rPr sz="3000" b="1">
+                <a:solidFill>
+                  <a:srgbClr val="113E6A"/>
+                </a:solidFill>
+                <a:latin typeface="Arial"/>
+                <a:ea typeface="微软雅黑"/>
+              </a:rPr>
+              <a:t>资源公平性与未量化的资源收益</a:t>
+            </a:r>
+          </a:p>
+        </p:txBody>
+      </p:sp>
+      <p:sp>
+        <p:nvSpPr>
+          <p:cNvPr id="9003" name="TextBox 9002"/>
+          <p:cNvSpPr txBox="1"/>
+          <p:nvPr/>
+        </p:nvSpPr>
+        <p:spPr>
+          <a:xfrm>
+            <a:off x="566928" y="1261872"/>
+            <a:ext cx="10881360" cy="438912"/>
+          </a:xfrm>
+          <a:prstGeom prst="rect">
+            <a:avLst/>
+          </a:prstGeom>
+          <a:noFill/>
+        </p:spPr>
+        <p:txBody>
+          <a:bodyPr wrap="square" anchor="ctr" lIns="0" rIns="0" tIns="0" bIns="0">
+            <a:spAutoFit/>
+          </a:bodyPr>
+          <a:lstStyle/>
+          <a:p>
+            <a:pPr algn="l">
+              <a:lnSpc>
+                <a:spcPct val="110000"/>
+              </a:lnSpc>
+            </a:pPr>
+            <a:r>
+              <a:rPr sz="1800" b="1">
+                <a:solidFill>
+                  <a:srgbClr val="0070C0"/>
+                </a:solidFill>
+                <a:latin typeface="Arial"/>
+                <a:ea typeface="微软雅黑"/>
+              </a:rPr>
+              <a:t>每 Deployment 同规格，对 ENO 略不利</a:t>
+            </a:r>
+          </a:p>
+        </p:txBody>
+      </p:sp>
+      <p:sp>
+        <p:nvSpPr>
+          <p:cNvPr id="9004" name="TextBox 9003"/>
+          <p:cNvSpPr txBox="1"/>
+          <p:nvPr/>
+        </p:nvSpPr>
+        <p:spPr>
+          <a:xfrm>
+            <a:off x="566928" y="1965960"/>
+            <a:ext cx="10607040" cy="1417320"/>
+          </a:xfrm>
+          <a:prstGeom prst="rect">
+            <a:avLst/>
+          </a:prstGeom>
+          <a:noFill/>
+        </p:spPr>
+        <p:txBody>
+          <a:bodyPr wrap="square" anchor="t" lIns="0" rIns="0" tIns="0" bIns="0">
+            <a:spAutoFit/>
+          </a:bodyPr>
+          <a:lstStyle/>
+          <a:p>
+            <a:pPr algn="l">
+              <a:lnSpc>
+                <a:spcPct val="115000"/>
+              </a:lnSpc>
+            </a:pPr>
+            <a:r>
+              <a:rPr sz="1700" b="0">
+                <a:solidFill>
+                  <a:srgbClr val="2E2C2C"/>
+                </a:solidFill>
+                <a:latin typeface="Arial"/>
+                <a:ea typeface="微软雅黑"/>
+              </a:rPr>
+              <a:t>▪  Scheduler Pod 统一 2C/4G</a:t>
+            </a:r>
+          </a:p>
+          <a:p>
+            <a:pPr algn="l">
+              <a:lnSpc>
+                <a:spcPct val="115000"/>
+              </a:lnSpc>
+              <a:spcBef>
+                <a:spcPts val="1800"/>
+              </a:spcBef>
+            </a:pPr>
+            <a:r>
+              <a:rPr sz="1700" b="0">
+                <a:solidFill>
+                  <a:srgbClr val="2E2C2C"/>
+                </a:solidFill>
+                <a:latin typeface="Arial"/>
+                <a:ea typeface="微软雅黑"/>
+              </a:rPr>
+              <a:t>▪  ENO 少一个 Binder Deployment</a:t>
+            </a:r>
+          </a:p>
+          <a:p>
+            <a:pPr algn="l">
+              <a:lnSpc>
+                <a:spcPct val="115000"/>
+              </a:lnSpc>
+              <a:spcBef>
+                <a:spcPts val="1800"/>
+              </a:spcBef>
+            </a:pPr>
+            <a:r>
+              <a:rPr sz="1700" b="0">
+                <a:solidFill>
+                  <a:srgbClr val="2E2C2C"/>
+                </a:solidFill>
+                <a:latin typeface="Arial"/>
+                <a:ea typeface="微软雅黑"/>
+              </a:rPr>
+              <a:t>▪  集群总资源收益未量化</a:t>
+            </a:r>
+          </a:p>
+        </p:txBody>
+      </p:sp>
+      <p:sp>
+        <p:nvSpPr>
+          <p:cNvPr id="9005" name="TextBox 9004"/>
+          <p:cNvSpPr txBox="1"/>
+          <p:nvPr/>
+        </p:nvSpPr>
+        <p:spPr>
+          <a:xfrm>
+            <a:off x="10780776" y="6345936"/>
+            <a:ext cx="850392" cy="219456"/>
+          </a:xfrm>
+          <a:prstGeom prst="rect">
+            <a:avLst/>
+          </a:prstGeom>
+          <a:noFill/>
+        </p:spPr>
+        <p:txBody>
+          <a:bodyPr wrap="square" anchor="t" lIns="0" rIns="0" tIns="0" bIns="0">
+            <a:spAutoFit/>
+          </a:bodyPr>
+          <a:lstStyle/>
+          <a:p>
+            <a:pPr algn="r"/>
+            <a:r>
+              <a:rPr sz="950" b="0">
+                <a:solidFill>
+                  <a:srgbClr val="636363"/>
+                </a:solidFill>
+                <a:latin typeface="Arial"/>
+                <a:ea typeface="微软雅黑"/>
+              </a:rPr>
+              <a:t>B5</a:t>
             </a:r>
           </a:p>
         </p:txBody>
@@ -27300,7 +26796,7 @@
                 <a:latin typeface="Arial"/>
                 <a:ea typeface="微软雅黑"/>
               </a:rPr>
-              <a:t>3 / 25</a:t>
+              <a:t>3 / 24</a:t>
             </a:r>
           </a:p>
         </p:txBody>
@@ -27587,7 +27083,7 @@
                 <a:latin typeface="Arial"/>
                 <a:ea typeface="微软雅黑"/>
               </a:rPr>
-              <a:t>资源公平性与未量化的资源收益</a:t>
+              <a:t>一键复现</a:t>
             </a:r>
           </a:p>
         </p:txBody>
@@ -27627,7 +27123,7 @@
                 <a:latin typeface="Arial"/>
                 <a:ea typeface="微软雅黑"/>
               </a:rPr>
-              <a:t>每 Deployment 同规格，对 ENO 略不利</a:t>
+              <a:t>从零到结果的全部入口</a:t>
             </a:r>
           </a:p>
         </p:txBody>
@@ -27667,7 +27163,7 @@
                 <a:latin typeface="Arial"/>
                 <a:ea typeface="微软雅黑"/>
               </a:rPr>
-              <a:t>▪  Scheduler Pod 统一 2C/4G</a:t>
+              <a:t>▪  run-experiment.sh：12 步实验流程</a:t>
             </a:r>
           </a:p>
           <a:p>
@@ -27687,7 +27183,7 @@
                 <a:latin typeface="Arial"/>
                 <a:ea typeface="微软雅黑"/>
               </a:rPr>
-              <a:t>▪  ENO 少一个 Binder Deployment</a:t>
+              <a:t>▪  plot-results.py / collect/：聚合与出图</a:t>
             </a:r>
           </a:p>
           <a:p>
@@ -27707,7 +27203,7 @@
                 <a:latin typeface="Arial"/>
                 <a:ea typeface="微软雅黑"/>
               </a:rPr>
-              <a:t>▪  集群总资源收益未量化</a:t>
+              <a:t>▪  results/compare/：16 场景产物</a:t>
             </a:r>
           </a:p>
         </p:txBody>
@@ -27743,7 +27239,7 @@
                 <a:latin typeface="Arial"/>
                 <a:ea typeface="微软雅黑"/>
               </a:rPr>
-              <a:t>B5</a:t>
+              <a:t>B6</a:t>
             </a:r>
           </a:p>
         </p:txBody>
@@ -28030,449 +27526,6 @@
                 <a:latin typeface="Arial"/>
                 <a:ea typeface="微软雅黑"/>
               </a:rPr>
-              <a:t>一键复现</a:t>
-            </a:r>
-          </a:p>
-        </p:txBody>
-      </p:sp>
-      <p:sp>
-        <p:nvSpPr>
-          <p:cNvPr id="9003" name="TextBox 9002"/>
-          <p:cNvSpPr txBox="1"/>
-          <p:nvPr/>
-        </p:nvSpPr>
-        <p:spPr>
-          <a:xfrm>
-            <a:off x="566928" y="1261872"/>
-            <a:ext cx="10881360" cy="438912"/>
-          </a:xfrm>
-          <a:prstGeom prst="rect">
-            <a:avLst/>
-          </a:prstGeom>
-          <a:noFill/>
-        </p:spPr>
-        <p:txBody>
-          <a:bodyPr wrap="square" anchor="ctr" lIns="0" rIns="0" tIns="0" bIns="0">
-            <a:spAutoFit/>
-          </a:bodyPr>
-          <a:lstStyle/>
-          <a:p>
-            <a:pPr algn="l">
-              <a:lnSpc>
-                <a:spcPct val="110000"/>
-              </a:lnSpc>
-            </a:pPr>
-            <a:r>
-              <a:rPr sz="1800" b="1">
-                <a:solidFill>
-                  <a:srgbClr val="0070C0"/>
-                </a:solidFill>
-                <a:latin typeface="Arial"/>
-                <a:ea typeface="微软雅黑"/>
-              </a:rPr>
-              <a:t>从零到结果的全部入口</a:t>
-            </a:r>
-          </a:p>
-        </p:txBody>
-      </p:sp>
-      <p:sp>
-        <p:nvSpPr>
-          <p:cNvPr id="9004" name="TextBox 9003"/>
-          <p:cNvSpPr txBox="1"/>
-          <p:nvPr/>
-        </p:nvSpPr>
-        <p:spPr>
-          <a:xfrm>
-            <a:off x="566928" y="1965960"/>
-            <a:ext cx="10607040" cy="1417320"/>
-          </a:xfrm>
-          <a:prstGeom prst="rect">
-            <a:avLst/>
-          </a:prstGeom>
-          <a:noFill/>
-        </p:spPr>
-        <p:txBody>
-          <a:bodyPr wrap="square" anchor="t" lIns="0" rIns="0" tIns="0" bIns="0">
-            <a:spAutoFit/>
-          </a:bodyPr>
-          <a:lstStyle/>
-          <a:p>
-            <a:pPr algn="l">
-              <a:lnSpc>
-                <a:spcPct val="115000"/>
-              </a:lnSpc>
-            </a:pPr>
-            <a:r>
-              <a:rPr sz="1700" b="0">
-                <a:solidFill>
-                  <a:srgbClr val="2E2C2C"/>
-                </a:solidFill>
-                <a:latin typeface="Arial"/>
-                <a:ea typeface="微软雅黑"/>
-              </a:rPr>
-              <a:t>▪  run-experiment.sh：12 步实验流程</a:t>
-            </a:r>
-          </a:p>
-          <a:p>
-            <a:pPr algn="l">
-              <a:lnSpc>
-                <a:spcPct val="115000"/>
-              </a:lnSpc>
-              <a:spcBef>
-                <a:spcPts val="1800"/>
-              </a:spcBef>
-            </a:pPr>
-            <a:r>
-              <a:rPr sz="1700" b="0">
-                <a:solidFill>
-                  <a:srgbClr val="2E2C2C"/>
-                </a:solidFill>
-                <a:latin typeface="Arial"/>
-                <a:ea typeface="微软雅黑"/>
-              </a:rPr>
-              <a:t>▪  plot-results.py / collect/：聚合与出图</a:t>
-            </a:r>
-          </a:p>
-          <a:p>
-            <a:pPr algn="l">
-              <a:lnSpc>
-                <a:spcPct val="115000"/>
-              </a:lnSpc>
-              <a:spcBef>
-                <a:spcPts val="1800"/>
-              </a:spcBef>
-            </a:pPr>
-            <a:r>
-              <a:rPr sz="1700" b="0">
-                <a:solidFill>
-                  <a:srgbClr val="2E2C2C"/>
-                </a:solidFill>
-                <a:latin typeface="Arial"/>
-                <a:ea typeface="微软雅黑"/>
-              </a:rPr>
-              <a:t>▪  results/compare/：16 场景产物</a:t>
-            </a:r>
-          </a:p>
-        </p:txBody>
-      </p:sp>
-      <p:sp>
-        <p:nvSpPr>
-          <p:cNvPr id="9005" name="TextBox 9004"/>
-          <p:cNvSpPr txBox="1"/>
-          <p:nvPr/>
-        </p:nvSpPr>
-        <p:spPr>
-          <a:xfrm>
-            <a:off x="10780776" y="6345936"/>
-            <a:ext cx="850392" cy="219456"/>
-          </a:xfrm>
-          <a:prstGeom prst="rect">
-            <a:avLst/>
-          </a:prstGeom>
-          <a:noFill/>
-        </p:spPr>
-        <p:txBody>
-          <a:bodyPr wrap="square" anchor="t" lIns="0" rIns="0" tIns="0" bIns="0">
-            <a:spAutoFit/>
-          </a:bodyPr>
-          <a:lstStyle/>
-          <a:p>
-            <a:pPr algn="r"/>
-            <a:r>
-              <a:rPr sz="950" b="0">
-                <a:solidFill>
-                  <a:srgbClr val="636363"/>
-                </a:solidFill>
-                <a:latin typeface="Arial"/>
-                <a:ea typeface="微软雅黑"/>
-              </a:rPr>
-              <a:t>B6</a:t>
-            </a:r>
-          </a:p>
-        </p:txBody>
-      </p:sp>
-    </p:spTree>
-  </p:cSld>
-  <p:clrMapOvr>
-    <a:masterClrMapping/>
-  </p:clrMapOvr>
-</p:sld>
-</file>
-
-<file path=ppt/slides/slide32.xml><?xml version="1.0" encoding="utf-8"?>
-<p:sld xmlns:a="http://schemas.openxmlformats.org/drawingml/2006/main" xmlns:p="http://schemas.openxmlformats.org/presentationml/2006/main" xmlns:r="http://schemas.openxmlformats.org/officeDocument/2006/relationships">
-  <p:cSld>
-    <p:bg>
-      <p:bgPr>
-        <a:solidFill>
-          <a:srgbClr val="FFFFFF"/>
-        </a:solidFill>
-        <a:effectLst/>
-      </p:bgPr>
-    </p:bg>
-    <p:spTree>
-      <p:nvGrpSpPr>
-        <p:cNvPr id="1" name=""/>
-        <p:cNvGrpSpPr/>
-        <p:nvPr/>
-      </p:nvGrpSpPr>
-      <p:grpSpPr/>
-      <p:sp>
-        <p:nvSpPr>
-          <p:cNvPr id="9000" name="Freeform 5"/>
-          <p:cNvSpPr/>
-          <p:nvPr/>
-        </p:nvSpPr>
-        <p:spPr>
-          <a:xfrm>
-            <a:off x="182880" y="274320"/>
-            <a:ext cx="310896" cy="402336"/>
-          </a:xfrm>
-          <a:custGeom>
-            <a:avLst/>
-            <a:gdLst/>
-            <a:ahLst/>
-            <a:cxnLst>
-              <a:cxn ang="0">
-                <a:pos x="2147483647" y="2147483647"/>
-              </a:cxn>
-              <a:cxn ang="0">
-                <a:pos x="2147483647" y="2147483647"/>
-              </a:cxn>
-              <a:cxn ang="0">
-                <a:pos x="2147483647" y="2147483647"/>
-              </a:cxn>
-              <a:cxn ang="0">
-                <a:pos x="2147483647" y="2147483647"/>
-              </a:cxn>
-              <a:cxn ang="0">
-                <a:pos x="2147483647" y="2147483647"/>
-              </a:cxn>
-              <a:cxn ang="0">
-                <a:pos x="2147483647" y="2147483647"/>
-              </a:cxn>
-              <a:cxn ang="0">
-                <a:pos x="2147483647" y="2147483647"/>
-              </a:cxn>
-              <a:cxn ang="0">
-                <a:pos x="2147483647" y="2147483647"/>
-              </a:cxn>
-              <a:cxn ang="0">
-                <a:pos x="2147483647" y="0"/>
-              </a:cxn>
-              <a:cxn ang="0">
-                <a:pos x="2147483647" y="2147483647"/>
-              </a:cxn>
-              <a:cxn ang="0">
-                <a:pos x="2147483647" y="2147483647"/>
-              </a:cxn>
-              <a:cxn ang="0">
-                <a:pos x="2147483647" y="2147483647"/>
-              </a:cxn>
-              <a:cxn ang="0">
-                <a:pos x="2147483647" y="2147483647"/>
-              </a:cxn>
-              <a:cxn ang="0">
-                <a:pos x="2147483647" y="2147483647"/>
-              </a:cxn>
-              <a:cxn ang="0">
-                <a:pos x="2147483647" y="2147483647"/>
-              </a:cxn>
-              <a:cxn ang="0">
-                <a:pos x="2147483647" y="2147483647"/>
-              </a:cxn>
-              <a:cxn ang="0">
-                <a:pos x="2147483647" y="2147483647"/>
-              </a:cxn>
-              <a:cxn ang="0">
-                <a:pos x="2147483647" y="2147483647"/>
-              </a:cxn>
-              <a:cxn ang="0">
-                <a:pos x="2147483647" y="2147483647"/>
-              </a:cxn>
-              <a:cxn ang="0">
-                <a:pos x="0" y="2147483647"/>
-              </a:cxn>
-              <a:cxn ang="0">
-                <a:pos x="2147483647" y="2147483647"/>
-              </a:cxn>
-            </a:cxnLst>
-            <a:rect l="0" t="0" r="0" b="0"/>
-            <a:pathLst>
-              <a:path w="574" h="681">
-                <a:moveTo>
-                  <a:pt x="120" y="441"/>
-                </a:moveTo>
-                <a:cubicBezTo>
-                  <a:pt x="153" y="441"/>
-                  <a:pt x="183" y="454"/>
-                  <a:pt x="205" y="476"/>
-                </a:cubicBezTo>
-                <a:lnTo>
-                  <a:pt x="389" y="329"/>
-                </a:lnTo>
-                <a:cubicBezTo>
-                  <a:pt x="383" y="317"/>
-                  <a:pt x="380" y="303"/>
-                  <a:pt x="380" y="289"/>
-                </a:cubicBezTo>
-                <a:cubicBezTo>
-                  <a:pt x="380" y="271"/>
-                  <a:pt x="384" y="255"/>
-                  <a:pt x="392" y="241"/>
-                </a:cubicBezTo>
-                <a:lnTo>
-                  <a:pt x="270" y="138"/>
-                </a:lnTo>
-                <a:cubicBezTo>
-                  <a:pt x="256" y="151"/>
-                  <a:pt x="237" y="159"/>
-                  <a:pt x="217" y="159"/>
-                </a:cubicBezTo>
-                <a:cubicBezTo>
-                  <a:pt x="173" y="159"/>
-                  <a:pt x="137" y="123"/>
-                  <a:pt x="137" y="79"/>
-                </a:cubicBezTo>
-                <a:cubicBezTo>
-                  <a:pt x="137" y="36"/>
-                  <a:pt x="173" y="0"/>
-                  <a:pt x="217" y="0"/>
-                </a:cubicBezTo>
-                <a:cubicBezTo>
-                  <a:pt x="260" y="0"/>
-                  <a:pt x="296" y="36"/>
-                  <a:pt x="296" y="79"/>
-                </a:cubicBezTo>
-                <a:cubicBezTo>
-                  <a:pt x="296" y="91"/>
-                  <a:pt x="293" y="103"/>
-                  <a:pt x="289" y="113"/>
-                </a:cubicBezTo>
-                <a:lnTo>
-                  <a:pt x="412" y="217"/>
-                </a:lnTo>
-                <a:cubicBezTo>
-                  <a:pt x="429" y="201"/>
-                  <a:pt x="452" y="192"/>
-                  <a:pt x="477" y="192"/>
-                </a:cubicBezTo>
-                <a:cubicBezTo>
-                  <a:pt x="530" y="192"/>
-                  <a:pt x="574" y="235"/>
-                  <a:pt x="574" y="289"/>
-                </a:cubicBezTo>
-                <a:cubicBezTo>
-                  <a:pt x="574" y="342"/>
-                  <a:pt x="530" y="386"/>
-                  <a:pt x="477" y="386"/>
-                </a:cubicBezTo>
-                <a:cubicBezTo>
-                  <a:pt x="449" y="386"/>
-                  <a:pt x="424" y="374"/>
-                  <a:pt x="406" y="355"/>
-                </a:cubicBezTo>
-                <a:lnTo>
-                  <a:pt x="224" y="501"/>
-                </a:lnTo>
-                <a:cubicBezTo>
-                  <a:pt x="234" y="518"/>
-                  <a:pt x="240" y="539"/>
-                  <a:pt x="240" y="561"/>
-                </a:cubicBezTo>
-                <a:cubicBezTo>
-                  <a:pt x="240" y="627"/>
-                  <a:pt x="186" y="681"/>
-                  <a:pt x="120" y="681"/>
-                </a:cubicBezTo>
-                <a:cubicBezTo>
-                  <a:pt x="54" y="681"/>
-                  <a:pt x="0" y="627"/>
-                  <a:pt x="0" y="561"/>
-                </a:cubicBezTo>
-                <a:cubicBezTo>
-                  <a:pt x="0" y="495"/>
-                  <a:pt x="54" y="441"/>
-                  <a:pt x="120" y="441"/>
-                </a:cubicBezTo>
-                <a:close/>
-              </a:path>
-            </a:pathLst>
-          </a:custGeom>
-          <a:solidFill>
-            <a:srgbClr val="113E6A"/>
-          </a:solidFill>
-          <a:ln w="9525">
-            <a:noFill/>
-          </a:ln>
-        </p:spPr>
-        <p:txBody>
-          <a:bodyPr/>
-          <a:lstStyle/>
-          <a:p>
-            <a:endParaRPr lang="zh-CN" altLang="en-US"/>
-          </a:p>
-        </p:txBody>
-      </p:sp>
-      <p:pic>
-        <p:nvPicPr>
-          <p:cNvPr id="9001" name="Picture 9000" descr="beihang-logo-navy.png"/>
-          <p:cNvPicPr>
-            <a:picLocks noChangeAspect="1"/>
-          </p:cNvPicPr>
-          <p:nvPr/>
-        </p:nvPicPr>
-        <p:blipFill>
-          <a:blip r:embed="rId2"/>
-          <a:stretch>
-            <a:fillRect/>
-          </a:stretch>
-        </p:blipFill>
-        <p:spPr>
-          <a:xfrm>
-            <a:off x="9336024" y="91665"/>
-            <a:ext cx="2642616" cy="502469"/>
-          </a:xfrm>
-          <a:prstGeom prst="rect">
-            <a:avLst/>
-          </a:prstGeom>
-        </p:spPr>
-      </p:pic>
-      <p:sp>
-        <p:nvSpPr>
-          <p:cNvPr id="9002" name="TextBox 9001"/>
-          <p:cNvSpPr txBox="1"/>
-          <p:nvPr/>
-        </p:nvSpPr>
-        <p:spPr>
-          <a:xfrm>
-            <a:off x="566928" y="155448"/>
-            <a:ext cx="8549640" cy="621792"/>
-          </a:xfrm>
-          <a:prstGeom prst="rect">
-            <a:avLst/>
-          </a:prstGeom>
-          <a:noFill/>
-        </p:spPr>
-        <p:txBody>
-          <a:bodyPr wrap="square" anchor="ctr" lIns="0" rIns="0" tIns="0" bIns="0">
-            <a:spAutoFit/>
-          </a:bodyPr>
-          <a:lstStyle/>
-          <a:p>
-            <a:pPr algn="l">
-              <a:lnSpc>
-                <a:spcPct val="100000"/>
-              </a:lnSpc>
-            </a:pPr>
-            <a:r>
-              <a:rPr sz="3000" b="1">
-                <a:solidFill>
-                  <a:srgbClr val="113E6A"/>
-                </a:solidFill>
-                <a:latin typeface="Arial"/>
-                <a:ea typeface="微软雅黑"/>
-              </a:rPr>
               <a:t>主场景 s3/w3 的时序形态（备用）</a:t>
             </a:r>
           </a:p>
@@ -29432,7 +28485,7 @@
                 <a:latin typeface="Arial"/>
                 <a:ea typeface="微软雅黑"/>
               </a:rPr>
-              <a:t>4 / 25</a:t>
+              <a:t>4 / 24</a:t>
             </a:r>
           </a:p>
         </p:txBody>
@@ -30217,7 +29270,7 @@
                 <a:latin typeface="Arial"/>
                 <a:ea typeface="微软雅黑"/>
               </a:rPr>
-              <a:t>5 / 25</a:t>
+              <a:t>5 / 24</a:t>
             </a:r>
           </a:p>
         </p:txBody>
@@ -31002,7 +30055,7 @@
                 <a:latin typeface="Arial"/>
                 <a:ea typeface="微软雅黑"/>
               </a:rPr>
-              <a:t>6 / 25</a:t>
+              <a:t>6 / 24</a:t>
             </a:r>
           </a:p>
         </p:txBody>
@@ -31787,7 +30840,7 @@
                 <a:latin typeface="Arial"/>
                 <a:ea typeface="微软雅黑"/>
               </a:rPr>
-              <a:t>7 / 25</a:t>
+              <a:t>7 / 24</a:t>
             </a:r>
           </a:p>
         </p:txBody>
@@ -32251,7 +31304,7 @@
                 <a:latin typeface="Arial"/>
                 <a:ea typeface="微软雅黑"/>
               </a:rPr>
-              <a:t>8 / 25</a:t>
+              <a:t>8 / 24</a:t>
             </a:r>
           </a:p>
         </p:txBody>
@@ -33036,7 +32089,7 @@
                 <a:latin typeface="Arial"/>
                 <a:ea typeface="微软雅黑"/>
               </a:rPr>
-              <a:t>9 / 25</a:t>
+              <a:t>9 / 24</a:t>
             </a:r>
           </a:p>
         </p:txBody>

--- a/docs/thesis/defense/答辩PPT-北航模板版.pptx
+++ b/docs/thesis/defense/答辩PPT-北航模板版.pptx
@@ -1477,7 +1477,7 @@
           <a:lstStyle/>
           <a:p>
             <a:r>
-              <a:t>五组横向对比，结论是三档。第一档 ENO 与 Gödel，都是几百 pods/s；第二档 kube-scheduler；第三档 Volcano 与 Koordinator，只有约 48 和约 24 pods/s，几乎不随规模变化。主评估四场景里，ENO 比 kube-scheduler 高 1.8% 到 22.5%。唯一例外是 s1/w1 低负载低 7.2%，那个场景没饱和。柱状图按场景排序，第三档几乎是一条水平线，说明它们的瓶颈不在调度吞吐这一维。从 s1 到 s3，第一档的曲线始终压在最上面，第三档几乎不随规模变化。这个排序在 16 个场景上是一致的。</a:t>
+              <a:t>五组横向对比，结论是三档。第一档是 ENO 与 Gödel，单位都是几百 pods/s。第二档是 kube-scheduler。第三档是 Volcano 与 Koordinator，只有约 48 和约 24 pods/s，而且几乎不随规模变化——这是它们批处理与 QoS 感知调度的固有开销。主评估四场景里，ENO 比 kube-scheduler 高 1.8% 到 22.5%，比 Volcano 约 6 倍、比 Koordinator 12 倍以上。唯一的例外是 s1/w1 的低负载，比 kube-scheduler 低 7.2%，因为那个场景没饱和，完成时间由注入速率决定。柱状图按场景排序，第三档几乎是一条水平线，说明它们的瓶颈不在调度吞吐这一维。从 s1 到 s3，第一档的曲线始终压在最上面，第三档几乎不随规模变化。这个排序在 16 个场景上是一致的。</a:t>
             </a:r>
           </a:p>
         </p:txBody>
@@ -1967,7 +1967,7 @@
           <a:lstStyle/>
           <a:p>
             <a:r>
-              <a:t>第二场注入：第 10 秒杀掉 scheduler-0，停机 180 秒，实测中断 189 秒。被杀实例未完成的绑定只占 68/8407，即 0.81%；两个存活实例接管 8407 个 Pod，队列峰值 353 后回落到 2。累计绑定 49607/50000，断言仍全过。代价是 784 秒、比基线多 104 秒，是工作量重排的代价，不是数据损坏。对比基线是同一场景下的无故障运行，680 秒。队列在 353 之后回落到 2，说明积压是瞬时的。</a:t>
+              <a:t>第二场注入：第 10 秒杀掉 scheduler-0，停机 180 秒，实测中断 189 秒。看 kill 之后 90 秒的窗口：被杀实例只剩 68 次绑定，占该窗口 8407 次的 0.81%——它的份额被瞬间清零，而不是有 0.81% 的 Pod 丢了。同一窗口两个存活实例照常完成绑定，pending 峰值 353，之后 60 秒回落到 2；累计绑定 49607/50000，断言仍全过。代价是 784 秒、比基线多 104 秒。注意它比 180 秒停机短：另外三分之二的实例一直在工作，重排被并行吸收了。这是工作量重排的代价，不是数据损坏。对比基线是同一场景下的无故障运行，680 秒。队列在 353 之后回落到 2，说明积压是瞬时的。</a:t>
             </a:r>
           </a:p>
         </p:txBody>
@@ -18328,7 +18328,7 @@
                 <a:latin typeface="Arial"/>
                 <a:ea typeface="微软雅黑"/>
               </a:rPr>
-              <a:t>▪  被杀实例绑定占比 68/8407 = 0.81%</a:t>
+              <a:t>▪  kill 后 90 s 窗口内，被杀实例只剩 68 次绑定，占该窗口 8407 次的 0.81%</a:t>
             </a:r>
           </a:p>
           <a:p>
@@ -18348,7 +18348,7 @@
                 <a:latin typeface="Arial"/>
                 <a:ea typeface="微软雅黑"/>
               </a:rPr>
-              <a:t>▪  存活实例接管 8407 pods；pending 353→2</a:t>
+              <a:t>▪  同一窗口共完成 8407 次绑定；pending 峰值 353，60 s 内回落到 2</a:t>
             </a:r>
           </a:p>
           <a:p>
@@ -18368,7 +18368,7 @@
                 <a:latin typeface="Arial"/>
                 <a:ea typeface="微软雅黑"/>
               </a:rPr>
-              <a:t>▪  总耗时 784 s，较基线 +15.3%</a:t>
+              <a:t>▪  整场耗时 784 s，比无故障基线 680 s 多 104 s（+15.3%）</a:t>
             </a:r>
           </a:p>
         </p:txBody>

--- a/docs/thesis/defense/答辩PPT-北航模板版.pptx
+++ b/docs/thesis/defense/答辩PPT-北航模板版.pptx
@@ -17818,14 +17818,14 @@
               </a:lnSpc>
             </a:pPr>
             <a:r>
-              <a:rPr sz="1550" b="0">
+              <a:rPr sz="1400" b="0">
                 <a:solidFill>
                   <a:srgbClr val="2E2C2C"/>
                 </a:solidFill>
                 <a:latin typeface="Arial"/>
                 <a:ea typeface="微软雅黑"/>
               </a:rPr>
-              <a:t>▪  拦截 300 次 / 回退 300 次</a:t>
+              <a:t>▪  300 次拦截全部转为回退：不发 Bind，Pod 进 Dispatcher 回退队列</a:t>
             </a:r>
           </a:p>
           <a:p>
@@ -17838,14 +17838,14 @@
               </a:spcBef>
             </a:pPr>
             <a:r>
-              <a:rPr sz="1550" b="0">
+              <a:rPr sz="1400" b="0">
                 <a:solidFill>
                   <a:srgbClr val="2E2C2C"/>
                 </a:solidFill>
                 <a:latin typeface="Arial"/>
                 <a:ea typeface="微软雅黑"/>
               </a:rPr>
-              <a:t>▪  绑定成功率 1.00；断言 50000/50000</a:t>
+              <a:t>▪  回退后由新归属实例重新调度，15 s 内落到合法节点；累计 50000/50000 绑定成功</a:t>
             </a:r>
           </a:p>
           <a:p>
@@ -17858,14 +17858,14 @@
               </a:spcBef>
             </a:pPr>
             <a:r>
-              <a:rPr sz="1550" b="0">
+              <a:rPr sz="1400" b="0">
                 <a:solidFill>
                   <a:srgbClr val="2E2C2C"/>
                 </a:solidFill>
                 <a:latin typeface="Arial"/>
                 <a:ea typeface="微软雅黑"/>
               </a:rPr>
-              <a:t>▪  总耗时 683 s 对基线 680 s（+0.4%）</a:t>
+              <a:t>▪  代价：总耗时 683 s，对基线 680 s 多 3 s（+0.4%）</a:t>
             </a:r>
           </a:p>
         </p:txBody>

--- a/docs/thesis/defense/答辩PPT-北航模板版.pptx
+++ b/docs/thesis/defense/答辩PPT-北航模板版.pptx
@@ -2037,7 +2037,7 @@
           <a:lstStyle/>
           <a:p>
             <a:r>
-              <a:t>局限六条，只讲关键。KWOK 是仿真，绝对数值不外推，但跨调度器相对比较成立。Gang 即 w6，ENO 尾延迟确实更高：吞吐高 4.3% 到 19.1%，单 Pod P99 高 1.6 到 4.1 倍，原因是同组预留等待与决策共用进程和队列。s3 到 s4 固定三实例，退化幅度不能读成上限。其余是资源公平、Volcano 口径、幸存者偏差。这六条不是免责声明，而是给结论划边界。在这个边界内，跨调度器的相对结论是稳的。</a:t>
+              <a:t>这一页的局限按论文第 7 章讲三条。第一，Gang 场景的尾延迟反向：w6 下 ENO 单 Pod P99 高于 Gödel，我们的解释是同组预留等待、绑定调用与后续决策共用同一个进程和队列，但还没有用独立计时实验把这两段耗时分离开，所以如实列为未证实的归因。第二，KWOK 仿真：去掉了 kubelet、运行时、真实网络与磁盘 IO，绝对数值不能外推到生产，只能用于跨调度器的相对比较。第三，资源开销：公平策略是每个 Deployment 同规格，所以没有量化 ENO 移除整个 Binder Deployment 在集群总资源上的收益。对应的三个延伸方向是生产灰度、多 Dispatcher 分区协同、以及在 ENO 上叠加具体调度策略。</a:t>
             </a:r>
           </a:p>
         </p:txBody>
@@ -18727,7 +18727,7 @@
                 <a:latin typeface="Arial"/>
                 <a:ea typeface="微软雅黑"/>
               </a:rPr>
-              <a:t>局限性与威胁效力</a:t>
+              <a:t>局限与展望</a:t>
             </a:r>
           </a:p>
         </p:txBody>
@@ -18767,7 +18767,7 @@
                 <a:latin typeface="Arial"/>
                 <a:ea typeface="微软雅黑"/>
               </a:rPr>
-              <a:t>结论在“跨调度器相对比较”上成立，绝对数值不外推到生产</a:t>
+              <a:t>三条局限有明确边界，三方向是本工作的自然延伸</a:t>
             </a:r>
           </a:p>
         </p:txBody>
@@ -18780,8 +18780,8 @@
         </p:nvSpPr>
         <p:spPr>
           <a:xfrm>
-            <a:off x="566928" y="1874519"/>
-            <a:ext cx="3517391" cy="1051560"/>
+            <a:off x="566928" y="1847088"/>
+            <a:ext cx="3517391" cy="2084831"/>
           </a:xfrm>
           <a:prstGeom prst="roundRect">
             <a:avLst/>
@@ -18826,7 +18826,7 @@
         </p:nvSpPr>
         <p:spPr>
           <a:xfrm>
-            <a:off x="713232" y="2011679"/>
+            <a:off x="713232" y="1984248"/>
             <a:ext cx="274320" cy="274320"/>
           </a:xfrm>
           <a:prstGeom prst="ellipse">
@@ -18880,8 +18880,8 @@
         </p:nvSpPr>
         <p:spPr>
           <a:xfrm>
-            <a:off x="1078992" y="2011679"/>
-            <a:ext cx="2877312" cy="850392"/>
+            <a:off x="1078992" y="1984248"/>
+            <a:ext cx="2877312" cy="1883663"/>
           </a:xfrm>
           <a:prstGeom prst="rect">
             <a:avLst/>
@@ -18889,41 +18889,41 @@
           <a:noFill/>
         </p:spPr>
         <p:txBody>
-          <a:bodyPr wrap="square" anchor="t" lIns="0" rIns="0" tIns="0" bIns="0">
+          <a:bodyPr wrap="square" anchor="ctr" lIns="0" rIns="0" tIns="0" bIns="0">
             <a:spAutoFit/>
           </a:bodyPr>
           <a:lstStyle/>
           <a:p>
             <a:pPr algn="l"/>
             <a:r>
-              <a:rPr sz="1400" b="1">
+              <a:rPr sz="1600" b="1">
                 <a:solidFill>
                   <a:srgbClr val="113E6A"/>
                 </a:solidFill>
                 <a:latin typeface="Arial"/>
                 <a:ea typeface="微软雅黑"/>
               </a:rPr>
-              <a:t>KWOK 仿真</a:t>
+              <a:t>Gang 尾延迟未分离归因</a:t>
             </a:r>
           </a:p>
           <a:p>
             <a:pPr algn="l">
               <a:lnSpc>
-                <a:spcPct val="110000"/>
+                <a:spcPct val="115000"/>
               </a:lnSpc>
               <a:spcBef>
-                <a:spcPts val="400"/>
+                <a:spcPts val="500"/>
               </a:spcBef>
             </a:pPr>
             <a:r>
-              <a:rPr sz="1250" b="0">
+              <a:rPr sz="1500" b="0">
                 <a:solidFill>
                   <a:srgbClr val="2E2C2C"/>
                 </a:solidFill>
                 <a:latin typeface="Arial"/>
                 <a:ea typeface="微软雅黑"/>
               </a:rPr>
-              <a:t>无法反映真实资源竞争与 IO</a:t>
+              <a:t>w6 场景 ENO 单 Pod P99 高于 Gödel，归因是同组预留等待与后续决策共用进程与队列，尚未用独立计时实验把两段耗时分离开量化</a:t>
             </a:r>
           </a:p>
         </p:txBody>
@@ -18936,8 +18936,8 @@
         </p:nvSpPr>
         <p:spPr>
           <a:xfrm>
-            <a:off x="4340351" y="1874519"/>
-            <a:ext cx="3517391" cy="1051560"/>
+            <a:off x="4340351" y="1847088"/>
+            <a:ext cx="3517391" cy="2084831"/>
           </a:xfrm>
           <a:prstGeom prst="roundRect">
             <a:avLst/>
@@ -18982,7 +18982,7 @@
         </p:nvSpPr>
         <p:spPr>
           <a:xfrm>
-            <a:off x="4486656" y="2011679"/>
+            <a:off x="4486656" y="1984248"/>
             <a:ext cx="274320" cy="274320"/>
           </a:xfrm>
           <a:prstGeom prst="ellipse">
@@ -19036,8 +19036,8 @@
         </p:nvSpPr>
         <p:spPr>
           <a:xfrm>
-            <a:off x="4852416" y="2011679"/>
-            <a:ext cx="2877312" cy="850392"/>
+            <a:off x="4852416" y="1984248"/>
+            <a:ext cx="2877312" cy="1883663"/>
           </a:xfrm>
           <a:prstGeom prst="rect">
             <a:avLst/>
@@ -19045,41 +19045,41 @@
           <a:noFill/>
         </p:spPr>
         <p:txBody>
-          <a:bodyPr wrap="square" anchor="t" lIns="0" rIns="0" tIns="0" bIns="0">
+          <a:bodyPr wrap="square" anchor="ctr" lIns="0" rIns="0" tIns="0" bIns="0">
             <a:spAutoFit/>
           </a:bodyPr>
           <a:lstStyle/>
           <a:p>
             <a:pPr algn="l"/>
             <a:r>
-              <a:rPr sz="1400" b="1">
+              <a:rPr sz="1600" b="1">
                 <a:solidFill>
                   <a:srgbClr val="113E6A"/>
                 </a:solidFill>
                 <a:latin typeface="Arial"/>
                 <a:ea typeface="微软雅黑"/>
               </a:rPr>
-              <a:t>Gang 延迟口径</a:t>
+              <a:t>KWOK 仿真的外推边界</a:t>
             </a:r>
           </a:p>
           <a:p>
             <a:pPr algn="l">
               <a:lnSpc>
-                <a:spcPct val="110000"/>
+                <a:spcPct val="115000"/>
               </a:lnSpc>
               <a:spcBef>
-                <a:spcPts val="400"/>
+                <a:spcPts val="500"/>
               </a:spcBef>
             </a:pPr>
             <a:r>
-              <a:rPr sz="1250" b="0">
+              <a:rPr sz="1500" b="0">
                 <a:solidFill>
                   <a:srgbClr val="2E2C2C"/>
                 </a:solidFill>
                 <a:latin typeface="Arial"/>
                 <a:ea typeface="微软雅黑"/>
               </a:rPr>
-              <a:t>w6 尾延迟反向，未分离计时</a:t>
+              <a:t>实验全部在 KWOK 下完成，去掉 kubelet、容器运行时、真实网络与磁盘 IO；绝对数值不能外推到生产，只能做跨调度器相对对比</a:t>
             </a:r>
           </a:p>
         </p:txBody>
@@ -19092,8 +19092,8 @@
         </p:nvSpPr>
         <p:spPr>
           <a:xfrm>
-            <a:off x="8113775" y="1874519"/>
-            <a:ext cx="3517391" cy="1051560"/>
+            <a:off x="8113775" y="1847088"/>
+            <a:ext cx="3517391" cy="2084831"/>
           </a:xfrm>
           <a:prstGeom prst="roundRect">
             <a:avLst/>
@@ -19138,7 +19138,7 @@
         </p:nvSpPr>
         <p:spPr>
           <a:xfrm>
-            <a:off x="8260079" y="2011679"/>
+            <a:off x="8260079" y="1984248"/>
             <a:ext cx="274320" cy="274320"/>
           </a:xfrm>
           <a:prstGeom prst="ellipse">
@@ -19192,8 +19192,8 @@
         </p:nvSpPr>
         <p:spPr>
           <a:xfrm>
-            <a:off x="8625839" y="2011679"/>
-            <a:ext cx="2877312" cy="850392"/>
+            <a:off x="8625839" y="1984248"/>
+            <a:ext cx="2877312" cy="1883663"/>
           </a:xfrm>
           <a:prstGeom prst="rect">
             <a:avLst/>
@@ -19201,516 +19201,84 @@
           <a:noFill/>
         </p:spPr>
         <p:txBody>
-          <a:bodyPr wrap="square" anchor="t" lIns="0" rIns="0" tIns="0" bIns="0">
+          <a:bodyPr wrap="square" anchor="ctr" lIns="0" rIns="0" tIns="0" bIns="0">
             <a:spAutoFit/>
           </a:bodyPr>
           <a:lstStyle/>
           <a:p>
             <a:pPr algn="l"/>
             <a:r>
-              <a:rPr sz="1400" b="1">
+              <a:rPr sz="1600" b="1">
                 <a:solidFill>
                   <a:srgbClr val="113E6A"/>
                 </a:solidFill>
                 <a:latin typeface="Arial"/>
                 <a:ea typeface="微软雅黑"/>
               </a:rPr>
-              <a:t>固定实例数</a:t>
+              <a:t>资源开销未量化</a:t>
             </a:r>
           </a:p>
           <a:p>
             <a:pPr algn="l">
               <a:lnSpc>
-                <a:spcPct val="110000"/>
+                <a:spcPct val="115000"/>
               </a:lnSpc>
               <a:spcBef>
-                <a:spcPts val="400"/>
+                <a:spcPts val="500"/>
               </a:spcBef>
             </a:pPr>
             <a:r>
-              <a:rPr sz="1250" b="0">
+              <a:rPr sz="1500" b="0">
                 <a:solidFill>
                   <a:srgbClr val="2E2C2C"/>
                 </a:solidFill>
                 <a:latin typeface="Arial"/>
                 <a:ea typeface="微软雅黑"/>
               </a:rPr>
-              <a:t>s3→s4 未同步扩容</a:t>
-            </a:r>
-          </a:p>
-        </p:txBody>
-      </p:sp>
-      <p:sp>
-        <p:nvSpPr>
-          <p:cNvPr id="9013" name="Rounded Rectangle 9012"/>
-          <p:cNvSpPr/>
+              <a:t>公平策略是各组 Deployment 同规格（2C/4G），因此没有量化 ENO 移除 Binder Deployment 后集群总资源开销的收益</a:t>
+            </a:r>
+          </a:p>
+        </p:txBody>
+      </p:sp>
+      <p:sp>
+        <p:nvSpPr>
+          <p:cNvPr id="9013" name="TextBox 9012"/>
+          <p:cNvSpPr txBox="1"/>
           <p:nvPr/>
         </p:nvSpPr>
         <p:spPr>
           <a:xfrm>
-            <a:off x="566928" y="3182111"/>
-            <a:ext cx="3517391" cy="1051560"/>
-          </a:xfrm>
-          <a:prstGeom prst="roundRect">
+            <a:off x="566928" y="4224528"/>
+            <a:ext cx="11064240" cy="777240"/>
+          </a:xfrm>
+          <a:prstGeom prst="rect">
             <a:avLst/>
           </a:prstGeom>
-          <a:solidFill>
-            <a:srgbClr val="FFFFFF"/>
-          </a:solidFill>
-          <a:ln w="9525">
-            <a:solidFill>
-              <a:srgbClr val="D6E3F0"/>
-            </a:solidFill>
-          </a:ln>
-          <a:effectLst/>
-        </p:spPr>
-        <p:style>
-          <a:lnRef idx="1">
-            <a:schemeClr val="accent1"/>
-          </a:lnRef>
-          <a:fillRef idx="3">
-            <a:schemeClr val="accent1"/>
-          </a:fillRef>
-          <a:effectRef idx="2">
-            <a:schemeClr val="accent1"/>
-          </a:effectRef>
-          <a:fontRef idx="minor">
-            <a:schemeClr val="lt1"/>
-          </a:fontRef>
-        </p:style>
-        <p:txBody>
-          <a:bodyPr rtlCol="0" anchor="ctr"/>
-          <a:lstStyle/>
-          <a:p>
-            <a:pPr algn="ctr"/>
-          </a:p>
-        </p:txBody>
-      </p:sp>
-      <p:sp>
-        <p:nvSpPr>
-          <p:cNvPr id="9014" name="Oval 9013"/>
-          <p:cNvSpPr/>
-          <p:nvPr/>
-        </p:nvSpPr>
-        <p:spPr>
-          <a:xfrm>
-            <a:off x="713232" y="3319271"/>
-            <a:ext cx="274320" cy="274320"/>
-          </a:xfrm>
-          <a:prstGeom prst="ellipse">
-            <a:avLst/>
-          </a:prstGeom>
-          <a:solidFill>
-            <a:srgbClr val="113E6A"/>
-          </a:solidFill>
-          <a:ln>
-            <a:noFill/>
-          </a:ln>
-          <a:effectLst/>
-        </p:spPr>
-        <p:style>
-          <a:lnRef idx="1">
-            <a:schemeClr val="accent1"/>
-          </a:lnRef>
-          <a:fillRef idx="3">
-            <a:schemeClr val="accent1"/>
-          </a:fillRef>
-          <a:effectRef idx="2">
-            <a:schemeClr val="accent1"/>
-          </a:effectRef>
-          <a:fontRef idx="minor">
-            <a:schemeClr val="lt1"/>
-          </a:fontRef>
-        </p:style>
-        <p:txBody>
-          <a:bodyPr rtlCol="0" anchor="ctr" lIns="0" rIns="0" tIns="0" bIns="0"/>
-          <a:lstStyle/>
-          <a:p>
-            <a:pPr algn="ctr"/>
-            <a:r>
-              <a:rPr sz="1000" b="1">
+          <a:noFill/>
+        </p:spPr>
+        <p:txBody>
+          <a:bodyPr wrap="square" anchor="t" lIns="0" rIns="0" tIns="0" bIns="0">
+            <a:spAutoFit/>
+          </a:bodyPr>
+          <a:lstStyle/>
+          <a:p>
+            <a:pPr algn="l"/>
+            <a:r>
+              <a:rPr sz="1200" b="0">
                 <a:solidFill>
-                  <a:srgbClr val="FFFFFF"/>
+                  <a:srgbClr val="636363"/>
                 </a:solidFill>
                 <a:latin typeface="Arial"/>
                 <a:ea typeface="微软雅黑"/>
               </a:rPr>
-              <a:t>04</a:t>
-            </a:r>
-          </a:p>
-        </p:txBody>
-      </p:sp>
-      <p:sp>
-        <p:nvSpPr>
-          <p:cNvPr id="9015" name="TextBox 9014"/>
-          <p:cNvSpPr txBox="1"/>
-          <p:nvPr/>
-        </p:nvSpPr>
-        <p:spPr>
-          <a:xfrm>
-            <a:off x="1078992" y="3319271"/>
-            <a:ext cx="2877312" cy="850392"/>
-          </a:xfrm>
-          <a:prstGeom prst="rect">
-            <a:avLst/>
-          </a:prstGeom>
-          <a:noFill/>
-        </p:spPr>
-        <p:txBody>
-          <a:bodyPr wrap="square" anchor="t" lIns="0" rIns="0" tIns="0" bIns="0">
-            <a:spAutoFit/>
-          </a:bodyPr>
-          <a:lstStyle/>
-          <a:p>
-            <a:pPr algn="l"/>
-            <a:r>
-              <a:rPr sz="1400" b="1">
-                <a:solidFill>
-                  <a:srgbClr val="113E6A"/>
-                </a:solidFill>
-                <a:latin typeface="Arial"/>
-                <a:ea typeface="微软雅黑"/>
-              </a:rPr>
-              <a:t>资源公平</a:t>
-            </a:r>
-          </a:p>
-          <a:p>
-            <a:pPr algn="l">
-              <a:lnSpc>
-                <a:spcPct val="110000"/>
-              </a:lnSpc>
-              <a:spcBef>
-                <a:spcPts val="400"/>
-              </a:spcBef>
-            </a:pPr>
-            <a:r>
-              <a:rPr sz="1250" b="0">
-                <a:solidFill>
-                  <a:srgbClr val="2E2C2C"/>
-                </a:solidFill>
-                <a:latin typeface="Arial"/>
-                <a:ea typeface="微软雅黑"/>
-              </a:rPr>
-              <a:t>每 Deployment 同规格，对 ENO 略不利</a:t>
-            </a:r>
-          </a:p>
-        </p:txBody>
-      </p:sp>
-      <p:sp>
-        <p:nvSpPr>
-          <p:cNvPr id="9016" name="Rounded Rectangle 9015"/>
-          <p:cNvSpPr/>
-          <p:nvPr/>
-        </p:nvSpPr>
-        <p:spPr>
-          <a:xfrm>
-            <a:off x="4340351" y="3182111"/>
-            <a:ext cx="3517391" cy="1051560"/>
-          </a:xfrm>
-          <a:prstGeom prst="roundRect">
-            <a:avLst/>
-          </a:prstGeom>
-          <a:solidFill>
-            <a:srgbClr val="FFFFFF"/>
-          </a:solidFill>
-          <a:ln w="9525">
-            <a:solidFill>
-              <a:srgbClr val="D6E3F0"/>
-            </a:solidFill>
-          </a:ln>
-          <a:effectLst/>
-        </p:spPr>
-        <p:style>
-          <a:lnRef idx="1">
-            <a:schemeClr val="accent1"/>
-          </a:lnRef>
-          <a:fillRef idx="3">
-            <a:schemeClr val="accent1"/>
-          </a:fillRef>
-          <a:effectRef idx="2">
-            <a:schemeClr val="accent1"/>
-          </a:effectRef>
-          <a:fontRef idx="minor">
-            <a:schemeClr val="lt1"/>
-          </a:fontRef>
-        </p:style>
-        <p:txBody>
-          <a:bodyPr rtlCol="0" anchor="ctr"/>
-          <a:lstStyle/>
-          <a:p>
-            <a:pPr algn="ctr"/>
-          </a:p>
-        </p:txBody>
-      </p:sp>
-      <p:sp>
-        <p:nvSpPr>
-          <p:cNvPr id="9017" name="Oval 9016"/>
-          <p:cNvSpPr/>
-          <p:nvPr/>
-        </p:nvSpPr>
-        <p:spPr>
-          <a:xfrm>
-            <a:off x="4486656" y="3319271"/>
-            <a:ext cx="274320" cy="274320"/>
-          </a:xfrm>
-          <a:prstGeom prst="ellipse">
-            <a:avLst/>
-          </a:prstGeom>
-          <a:solidFill>
-            <a:srgbClr val="113E6A"/>
-          </a:solidFill>
-          <a:ln>
-            <a:noFill/>
-          </a:ln>
-          <a:effectLst/>
-        </p:spPr>
-        <p:style>
-          <a:lnRef idx="1">
-            <a:schemeClr val="accent1"/>
-          </a:lnRef>
-          <a:fillRef idx="3">
-            <a:schemeClr val="accent1"/>
-          </a:fillRef>
-          <a:effectRef idx="2">
-            <a:schemeClr val="accent1"/>
-          </a:effectRef>
-          <a:fontRef idx="minor">
-            <a:schemeClr val="lt1"/>
-          </a:fontRef>
-        </p:style>
-        <p:txBody>
-          <a:bodyPr rtlCol="0" anchor="ctr" lIns="0" rIns="0" tIns="0" bIns="0"/>
-          <a:lstStyle/>
-          <a:p>
-            <a:pPr algn="ctr"/>
-            <a:r>
-              <a:rPr sz="1000" b="1">
-                <a:solidFill>
-                  <a:srgbClr val="FFFFFF"/>
-                </a:solidFill>
-                <a:latin typeface="Arial"/>
-                <a:ea typeface="微软雅黑"/>
-              </a:rPr>
-              <a:t>05</a:t>
-            </a:r>
-          </a:p>
-        </p:txBody>
-      </p:sp>
-      <p:sp>
-        <p:nvSpPr>
-          <p:cNvPr id="9018" name="TextBox 9017"/>
-          <p:cNvSpPr txBox="1"/>
-          <p:nvPr/>
-        </p:nvSpPr>
-        <p:spPr>
-          <a:xfrm>
-            <a:off x="4852416" y="3319271"/>
-            <a:ext cx="2877312" cy="850392"/>
-          </a:xfrm>
-          <a:prstGeom prst="rect">
-            <a:avLst/>
-          </a:prstGeom>
-          <a:noFill/>
-        </p:spPr>
-        <p:txBody>
-          <a:bodyPr wrap="square" anchor="t" lIns="0" rIns="0" tIns="0" bIns="0">
-            <a:spAutoFit/>
-          </a:bodyPr>
-          <a:lstStyle/>
-          <a:p>
-            <a:pPr algn="l"/>
-            <a:r>
-              <a:rPr sz="1400" b="1">
-                <a:solidFill>
-                  <a:srgbClr val="113E6A"/>
-                </a:solidFill>
-                <a:latin typeface="Arial"/>
-                <a:ea typeface="微软雅黑"/>
-              </a:rPr>
-              <a:t>Volcano 指标</a:t>
-            </a:r>
-          </a:p>
-          <a:p>
-            <a:pPr algn="l">
-              <a:lnSpc>
-                <a:spcPct val="110000"/>
-              </a:lnSpc>
-              <a:spcBef>
-                <a:spcPts val="400"/>
-              </a:spcBef>
-            </a:pPr>
-            <a:r>
-              <a:rPr sz="1250" b="0">
-                <a:solidFill>
-                  <a:srgbClr val="2E2C2C"/>
-                </a:solidFill>
-                <a:latin typeface="Arial"/>
-                <a:ea typeface="微软雅黑"/>
-              </a:rPr>
-              <a:t>测量对象与粒度不完全等价</a:t>
-            </a:r>
-          </a:p>
-        </p:txBody>
-      </p:sp>
-      <p:sp>
-        <p:nvSpPr>
-          <p:cNvPr id="9019" name="Rounded Rectangle 9018"/>
-          <p:cNvSpPr/>
-          <p:nvPr/>
-        </p:nvSpPr>
-        <p:spPr>
-          <a:xfrm>
-            <a:off x="8113775" y="3182111"/>
-            <a:ext cx="3517391" cy="1051560"/>
-          </a:xfrm>
-          <a:prstGeom prst="roundRect">
-            <a:avLst/>
-          </a:prstGeom>
-          <a:solidFill>
-            <a:srgbClr val="FFFFFF"/>
-          </a:solidFill>
-          <a:ln w="9525">
-            <a:solidFill>
-              <a:srgbClr val="D6E3F0"/>
-            </a:solidFill>
-          </a:ln>
-          <a:effectLst/>
-        </p:spPr>
-        <p:style>
-          <a:lnRef idx="1">
-            <a:schemeClr val="accent1"/>
-          </a:lnRef>
-          <a:fillRef idx="3">
-            <a:schemeClr val="accent1"/>
-          </a:fillRef>
-          <a:effectRef idx="2">
-            <a:schemeClr val="accent1"/>
-          </a:effectRef>
-          <a:fontRef idx="minor">
-            <a:schemeClr val="lt1"/>
-          </a:fontRef>
-        </p:style>
-        <p:txBody>
-          <a:bodyPr rtlCol="0" anchor="ctr"/>
-          <a:lstStyle/>
-          <a:p>
-            <a:pPr algn="ctr"/>
-          </a:p>
-        </p:txBody>
-      </p:sp>
-      <p:sp>
-        <p:nvSpPr>
-          <p:cNvPr id="9020" name="Oval 9019"/>
-          <p:cNvSpPr/>
-          <p:nvPr/>
-        </p:nvSpPr>
-        <p:spPr>
-          <a:xfrm>
-            <a:off x="8260079" y="3319271"/>
-            <a:ext cx="274320" cy="274320"/>
-          </a:xfrm>
-          <a:prstGeom prst="ellipse">
-            <a:avLst/>
-          </a:prstGeom>
-          <a:solidFill>
-            <a:srgbClr val="113E6A"/>
-          </a:solidFill>
-          <a:ln>
-            <a:noFill/>
-          </a:ln>
-          <a:effectLst/>
-        </p:spPr>
-        <p:style>
-          <a:lnRef idx="1">
-            <a:schemeClr val="accent1"/>
-          </a:lnRef>
-          <a:fillRef idx="3">
-            <a:schemeClr val="accent1"/>
-          </a:fillRef>
-          <a:effectRef idx="2">
-            <a:schemeClr val="accent1"/>
-          </a:effectRef>
-          <a:fontRef idx="minor">
-            <a:schemeClr val="lt1"/>
-          </a:fontRef>
-        </p:style>
-        <p:txBody>
-          <a:bodyPr rtlCol="0" anchor="ctr" lIns="0" rIns="0" tIns="0" bIns="0"/>
-          <a:lstStyle/>
-          <a:p>
-            <a:pPr algn="ctr"/>
-            <a:r>
-              <a:rPr sz="1000" b="1">
-                <a:solidFill>
-                  <a:srgbClr val="FFFFFF"/>
-                </a:solidFill>
-                <a:latin typeface="Arial"/>
-                <a:ea typeface="微软雅黑"/>
-              </a:rPr>
-              <a:t>06</a:t>
-            </a:r>
-          </a:p>
-        </p:txBody>
-      </p:sp>
-      <p:sp>
-        <p:nvSpPr>
-          <p:cNvPr id="9021" name="TextBox 9020"/>
-          <p:cNvSpPr txBox="1"/>
-          <p:nvPr/>
-        </p:nvSpPr>
-        <p:spPr>
-          <a:xfrm>
-            <a:off x="8625839" y="3319271"/>
-            <a:ext cx="2877312" cy="850392"/>
-          </a:xfrm>
-          <a:prstGeom prst="rect">
-            <a:avLst/>
-          </a:prstGeom>
-          <a:noFill/>
-        </p:spPr>
-        <p:txBody>
-          <a:bodyPr wrap="square" anchor="t" lIns="0" rIns="0" tIns="0" bIns="0">
-            <a:spAutoFit/>
-          </a:bodyPr>
-          <a:lstStyle/>
-          <a:p>
-            <a:pPr algn="l"/>
-            <a:r>
-              <a:rPr sz="1400" b="1">
-                <a:solidFill>
-                  <a:srgbClr val="113E6A"/>
-                </a:solidFill>
-                <a:latin typeface="Arial"/>
-                <a:ea typeface="微软雅黑"/>
-              </a:rPr>
-              <a:t>幸存者偏差</a:t>
-            </a:r>
-          </a:p>
-          <a:p>
-            <a:pPr algn="l">
-              <a:lnSpc>
-                <a:spcPct val="110000"/>
-              </a:lnSpc>
-              <a:spcBef>
-                <a:spcPts val="400"/>
-              </a:spcBef>
-            </a:pPr>
-            <a:r>
-              <a:rPr sz="1250" b="0">
-                <a:solidFill>
-                  <a:srgbClr val="2E2C2C"/>
-                </a:solidFill>
-                <a:latin typeface="Arial"/>
-                <a:ea typeface="微软雅黑"/>
-              </a:rPr>
-              <a:t>c/d/e 的 P99 不做数值对齐</a:t>
-            </a:r>
-          </a:p>
-        </p:txBody>
-      </p:sp>
-      <p:sp>
-        <p:nvSpPr>
-          <p:cNvPr id="9022" name="TextBox 9021"/>
+              <a:t>▪  展望：生产环境灰度验证 · 多 Dispatcher 分区协同 · 在 ENO 上叠加资源感知与拓扑亲和策略</a:t>
+            </a:r>
+          </a:p>
+        </p:txBody>
+      </p:sp>
+      <p:sp>
+        <p:nvSpPr>
+          <p:cNvPr id="9014" name="TextBox 9013"/>
           <p:cNvSpPr txBox="1"/>
           <p:nvPr/>
         </p:nvSpPr>

--- a/docs/thesis/defense/答辩PPT-北航模板版.pptx
+++ b/docs/thesis/defense/答辩PPT-北航模板版.pptx
@@ -19059,7 +19059,7 @@
                 <a:latin typeface="Arial"/>
                 <a:ea typeface="微软雅黑"/>
               </a:rPr>
-              <a:t>KWOK 仿真的外推边界</a:t>
+              <a:t>仿真环境的测量边界</a:t>
             </a:r>
           </a:p>
           <a:p>
@@ -19079,7 +19079,7 @@
                 <a:latin typeface="Arial"/>
                 <a:ea typeface="微软雅黑"/>
               </a:rPr>
-              <a:t>实验全部在 KWOK 下完成，去掉 kubelet、容器运行时、真实网络与磁盘 IO；绝对数值不能外推到生产，只能做跨调度器相对对比</a:t>
+              <a:t>KWOK 用模拟 kubelet 让 Pod 直接进入 Running，省掉镜像拉取、容器启动与真实 IO：好处是测的是调度器本身、可复现；代价是绝对数值不能外推到生产，只能做相对对比</a:t>
             </a:r>
           </a:p>
         </p:txBody>

--- a/docs/thesis/defense/答辩PPT-北航模板版.pptx
+++ b/docs/thesis/defense/答辩PPT-北航模板版.pptx
@@ -19634,7 +19634,7 @@
                 <a:latin typeface="Arial"/>
                 <a:ea typeface="微软雅黑"/>
               </a:rPr>
-              <a:t>架构创新与一致性创新都有可复现实验支撑，且实现了向后兼容的工程落地</a:t>
+              <a:t>三项工作、两个创新，都有可复现实验支撑，且保持了向后兼容</a:t>
             </a:r>
           </a:p>
         </p:txBody>
@@ -19647,8 +19647,8 @@
         </p:nvSpPr>
         <p:spPr>
           <a:xfrm>
-            <a:off x="566928" y="1874519"/>
-            <a:ext cx="3517391" cy="1051560"/>
+            <a:off x="566928" y="1810512"/>
+            <a:ext cx="3517391" cy="1444752"/>
           </a:xfrm>
           <a:prstGeom prst="roundRect">
             <a:avLst/>
@@ -19693,7 +19693,7 @@
         </p:nvSpPr>
         <p:spPr>
           <a:xfrm>
-            <a:off x="713232" y="2011679"/>
+            <a:off x="713232" y="1947672"/>
             <a:ext cx="274320" cy="274320"/>
           </a:xfrm>
           <a:prstGeom prst="ellipse">
@@ -19747,8 +19747,8 @@
         </p:nvSpPr>
         <p:spPr>
           <a:xfrm>
-            <a:off x="1078992" y="2011679"/>
-            <a:ext cx="2877312" cy="850392"/>
+            <a:off x="1078992" y="1947672"/>
+            <a:ext cx="2877312" cy="1243584"/>
           </a:xfrm>
           <a:prstGeom prst="rect">
             <a:avLst/>
@@ -19770,7 +19770,7 @@
                 <a:latin typeface="Arial"/>
                 <a:ea typeface="微软雅黑"/>
               </a:rPr>
-              <a:t>创新 1 · ENO</a:t>
+              <a:t>工作 1 · 架构梳理</a:t>
             </a:r>
           </a:p>
           <a:p>
@@ -19790,7 +19790,7 @@
                 <a:latin typeface="Arial"/>
                 <a:ea typeface="微软雅黑"/>
               </a:rPr>
-              <a:t>Binder 进进程内 + CacheAdapter</a:t>
+              <a:t>Dispatcher / Scheduler / Binder 三层与 Pod 完整流转；不依赖自研协调机制，全部建立在三种 etcd 原子语义上</a:t>
             </a:r>
           </a:p>
         </p:txBody>
@@ -19803,8 +19803,8 @@
         </p:nvSpPr>
         <p:spPr>
           <a:xfrm>
-            <a:off x="4340351" y="1874519"/>
-            <a:ext cx="3517391" cy="1051560"/>
+            <a:off x="4340351" y="1810512"/>
+            <a:ext cx="3517391" cy="1444752"/>
           </a:xfrm>
           <a:prstGeom prst="roundRect">
             <a:avLst/>
@@ -19849,7 +19849,7 @@
         </p:nvSpPr>
         <p:spPr>
           <a:xfrm>
-            <a:off x="4486656" y="2011679"/>
+            <a:off x="4486656" y="1947672"/>
             <a:ext cx="274320" cy="274320"/>
           </a:xfrm>
           <a:prstGeom prst="ellipse">
@@ -19903,8 +19903,8 @@
         </p:nvSpPr>
         <p:spPr>
           <a:xfrm>
-            <a:off x="4852416" y="2011679"/>
-            <a:ext cx="2877312" cy="850392"/>
+            <a:off x="4852416" y="1947672"/>
+            <a:ext cx="2877312" cy="1243584"/>
           </a:xfrm>
           <a:prstGeom prst="rect">
             <a:avLst/>
@@ -19926,7 +19926,7 @@
                 <a:latin typeface="Arial"/>
                 <a:ea typeface="微软雅黑"/>
               </a:rPr>
-              <a:t>创新 2 · 四层容错</a:t>
+              <a:t>工作 2 · 四层容错</a:t>
             </a:r>
           </a:p>
           <a:p>
@@ -19946,7 +19946,7 @@
                 <a:latin typeface="Arial"/>
                 <a:ea typeface="微软雅黑"/>
               </a:rPr>
-              <a:t>不变量 I 的完整证明要点</a:t>
+              <a:t>L0 前置校验、L1 同步重试、L2 异步回收、L3 跨实例回退，并给出不变量 I 的证明要点</a:t>
             </a:r>
           </a:p>
         </p:txBody>
@@ -19959,8 +19959,8 @@
         </p:nvSpPr>
         <p:spPr>
           <a:xfrm>
-            <a:off x="8113775" y="1874519"/>
-            <a:ext cx="3517391" cy="1051560"/>
+            <a:off x="8113775" y="1810512"/>
+            <a:ext cx="3517391" cy="1444752"/>
           </a:xfrm>
           <a:prstGeom prst="roundRect">
             <a:avLst/>
@@ -20005,7 +20005,7 @@
         </p:nvSpPr>
         <p:spPr>
           <a:xfrm>
-            <a:off x="8260079" y="2011679"/>
+            <a:off x="8260079" y="1947672"/>
             <a:ext cx="274320" cy="274320"/>
           </a:xfrm>
           <a:prstGeom prst="ellipse">
@@ -20059,8 +20059,8 @@
         </p:nvSpPr>
         <p:spPr>
           <a:xfrm>
-            <a:off x="8625839" y="2011679"/>
-            <a:ext cx="2877312" cy="850392"/>
+            <a:off x="8625839" y="1947672"/>
+            <a:ext cx="2877312" cy="1243584"/>
           </a:xfrm>
           <a:prstGeom prst="rect">
             <a:avLst/>
@@ -20082,7 +20082,7 @@
                 <a:latin typeface="Arial"/>
                 <a:ea typeface="微软雅黑"/>
               </a:rPr>
-              <a:t>证据 1 · 规模</a:t>
+              <a:t>工作 3 · ENO 优化</a:t>
             </a:r>
           </a:p>
           <a:p>
@@ -20102,7 +20102,7 @@
                 <a:latin typeface="Arial"/>
                 <a:ea typeface="微软雅黑"/>
               </a:rPr>
-              <a:t>16 场景 / 144 run / 100% 成功率</a:t>
+              <a:t>Binder 合并进 Scheduler 进程，CacheAdapter 零拷贝共享缓存，消除跨进程调用与序列化</a:t>
             </a:r>
           </a:p>
         </p:txBody>
@@ -20115,8 +20115,8 @@
         </p:nvSpPr>
         <p:spPr>
           <a:xfrm>
-            <a:off x="566928" y="3182111"/>
-            <a:ext cx="3517391" cy="1051560"/>
+            <a:off x="566928" y="3511296"/>
+            <a:ext cx="3517391" cy="1444752"/>
           </a:xfrm>
           <a:prstGeom prst="roundRect">
             <a:avLst/>
@@ -20161,7 +20161,7 @@
         </p:nvSpPr>
         <p:spPr>
           <a:xfrm>
-            <a:off x="713232" y="3319271"/>
+            <a:off x="713232" y="3648456"/>
             <a:ext cx="274320" cy="274320"/>
           </a:xfrm>
           <a:prstGeom prst="ellipse">
@@ -20215,8 +20215,8 @@
         </p:nvSpPr>
         <p:spPr>
           <a:xfrm>
-            <a:off x="1078992" y="3319271"/>
-            <a:ext cx="2877312" cy="850392"/>
+            <a:off x="1078992" y="3648456"/>
+            <a:ext cx="2877312" cy="1243584"/>
           </a:xfrm>
           <a:prstGeom prst="rect">
             <a:avLst/>
@@ -20238,7 +20238,7 @@
                 <a:latin typeface="Arial"/>
                 <a:ea typeface="微软雅黑"/>
               </a:rPr>
-              <a:t>证据 2 · 性能</a:t>
+              <a:t>创新 1 · ENO 架构</a:t>
             </a:r>
           </a:p>
           <a:p>
@@ -20258,7 +20258,7 @@
                 <a:latin typeface="Arial"/>
                 <a:ea typeface="微软雅黑"/>
               </a:rPr>
-              <a:t>平均 +11.9%；P99 最高 -82.9%</a:t>
+              <a:t>单 Dispatcher、多独立 Scheduler；吞吐提升来自去掉跨进程绑定链路，不是换调度算法</a:t>
             </a:r>
           </a:p>
         </p:txBody>
@@ -20271,8 +20271,8 @@
         </p:nvSpPr>
         <p:spPr>
           <a:xfrm>
-            <a:off x="4340351" y="3182111"/>
-            <a:ext cx="3517391" cy="1051560"/>
+            <a:off x="4340351" y="3511296"/>
+            <a:ext cx="3517391" cy="1444752"/>
           </a:xfrm>
           <a:prstGeom prst="roundRect">
             <a:avLst/>
@@ -20317,7 +20317,7 @@
         </p:nvSpPr>
         <p:spPr>
           <a:xfrm>
-            <a:off x="4486656" y="3319271"/>
+            <a:off x="4486656" y="3648456"/>
             <a:ext cx="274320" cy="274320"/>
           </a:xfrm>
           <a:prstGeom prst="ellipse">
@@ -20371,8 +20371,8 @@
         </p:nvSpPr>
         <p:spPr>
           <a:xfrm>
-            <a:off x="4852416" y="3319271"/>
-            <a:ext cx="2877312" cy="850392"/>
+            <a:off x="4852416" y="3648456"/>
+            <a:ext cx="2877312" cy="1243584"/>
           </a:xfrm>
           <a:prstGeom prst="rect">
             <a:avLst/>
@@ -20394,7 +20394,7 @@
                 <a:latin typeface="Arial"/>
                 <a:ea typeface="微软雅黑"/>
               </a:rPr>
-              <a:t>证据 3 · 扩展</a:t>
+              <a:t>创新 2 · 四层容错</a:t>
             </a:r>
           </a:p>
           <a:p>
@@ -20414,7 +20414,7 @@
                 <a:latin typeface="Arial"/>
                 <a:ea typeface="微软雅黑"/>
               </a:rPr>
-              <a:t>实例 1→3：+17.5% 对 +1.4%</a:t>
+              <a:t>面向分区归属漂移与实例失活；每层对应一类 etcd 语义，守住至多绑定一次</a:t>
             </a:r>
           </a:p>
         </p:txBody>
@@ -20427,8 +20427,8 @@
         </p:nvSpPr>
         <p:spPr>
           <a:xfrm>
-            <a:off x="8113775" y="3182111"/>
-            <a:ext cx="3517391" cy="1051560"/>
+            <a:off x="8113775" y="3511296"/>
+            <a:ext cx="3517391" cy="1444752"/>
           </a:xfrm>
           <a:prstGeom prst="roundRect">
             <a:avLst/>
@@ -20473,7 +20473,7 @@
         </p:nvSpPr>
         <p:spPr>
           <a:xfrm>
-            <a:off x="8260079" y="3319271"/>
+            <a:off x="8260079" y="3648456"/>
             <a:ext cx="274320" cy="274320"/>
           </a:xfrm>
           <a:prstGeom prst="ellipse">
@@ -20527,8 +20527,8 @@
         </p:nvSpPr>
         <p:spPr>
           <a:xfrm>
-            <a:off x="8625839" y="3319271"/>
-            <a:ext cx="2877312" cy="850392"/>
+            <a:off x="8625839" y="3648456"/>
+            <a:ext cx="2877312" cy="1243584"/>
           </a:xfrm>
           <a:prstGeom prst="rect">
             <a:avLst/>
@@ -20550,7 +20550,7 @@
                 <a:latin typeface="Arial"/>
                 <a:ea typeface="微软雅黑"/>
               </a:rPr>
-              <a:t>价值 · 落地</a:t>
+              <a:t>主场景读数（s3/w3）</a:t>
             </a:r>
           </a:p>
           <a:p>
@@ -20570,7 +20570,7 @@
                 <a:latin typeface="Arial"/>
                 <a:ea typeface="微软雅黑"/>
               </a:rPr>
-              <a:t>不改 API、可平滑替换、基准开源</a:t>
+              <a:t>P99 32.57 → 16.22 s（inst1）、0.13 vs 0.15 s（inst3）；有效吞吐 +5.1%~+21.7%</a:t>
             </a:r>
           </a:p>
         </p:txBody>
@@ -20578,6 +20578,42 @@
       <p:sp>
         <p:nvSpPr>
           <p:cNvPr id="9022" name="TextBox 9021"/>
+          <p:cNvSpPr txBox="1"/>
+          <p:nvPr/>
+        </p:nvSpPr>
+        <p:spPr>
+          <a:xfrm>
+            <a:off x="566928" y="5175504"/>
+            <a:ext cx="11064240" cy="777240"/>
+          </a:xfrm>
+          <a:prstGeom prst="rect">
+            <a:avLst/>
+          </a:prstGeom>
+          <a:noFill/>
+        </p:spPr>
+        <p:txBody>
+          <a:bodyPr wrap="square" anchor="t" lIns="0" rIns="0" tIns="0" bIns="0">
+            <a:spAutoFit/>
+          </a:bodyPr>
+          <a:lstStyle/>
+          <a:p>
+            <a:pPr algn="l"/>
+            <a:r>
+              <a:rPr sz="1200" b="0">
+                <a:solidFill>
+                  <a:srgbClr val="636363"/>
+                </a:solidFill>
+                <a:latin typeface="Arial"/>
+                <a:ea typeface="微软雅黑"/>
+              </a:rPr>
+              <a:t>▪  副产出：16 个场景、144 次 run 的原始数据与脚本随本文开源</a:t>
+            </a:r>
+          </a:p>
+        </p:txBody>
+      </p:sp>
+      <p:sp>
+        <p:nvSpPr>
+          <p:cNvPr id="9023" name="TextBox 9022"/>
           <p:cNvSpPr txBox="1"/>
           <p:nvPr/>
         </p:nvSpPr>

--- a/docs/thesis/defense/答辩PPT-北航模板版.pptx
+++ b/docs/thesis/defense/答辩PPT-北航模板版.pptx
@@ -39,7 +39,6 @@
     <p:sldId id="283" r:id="rId4"/>
     <p:sldId id="284" r:id="rId3"/>
     <p:sldId id="285" r:id="rId37"/>
-    <p:sldId id="286" r:id="rId38"/>
   </p:sldIdLst>
   <p:sldSz cx="12196763" cy="6858000"/>
   <p:notesSz cx="6858000" cy="9144000"/>
@@ -2107,7 +2106,7 @@
           <a:lstStyle/>
           <a:p>
             <a:r>
-              <a:t>最后收束。两个创新：ENO 把 Binder 放进进程内并用 CacheAdapter 共享缓存；四层容错给出不变量 I 的证明要点。三组证据：16 场景 144 次 run 全成功、平均 +11.9%、P99 最高 -82.9%、实例扩展 +17.5% 对 +1.4%。价值：不改 API、保留开关、基准开源。</a:t>
+              <a:t>汇报到这里。一句话总结：把 Binder 合并进 Scheduler 进程，用 etcd 原子语义上的四层容错守住“至多绑定一次”，在 16 个场景、144 次 run 上做到更高吞吐、更低尾延迟与 100% 绑定成功率。请各位老师批评指正。</a:t>
             </a:r>
           </a:p>
         </p:txBody>
@@ -2177,7 +2176,7 @@
           <a:lstStyle/>
           <a:p>
             <a:r>
-              <a:t>汇报到这里。一句话总结：把 Binder 合并进 Scheduler 进程，用 etcd 原子语义上的四层容错守住“至多绑定一次”，在 16 个场景、144 次 run 上做到更高吞吐、更低尾延迟与 100% 绑定成功率。请各位老师批评指正。</a:t>
+              <a:t>备用页：抽查任意场景的原始数值。</a:t>
             </a:r>
           </a:p>
         </p:txBody>
@@ -2247,7 +2246,7 @@
           <a:lstStyle/>
           <a:p>
             <a:r>
-              <a:t>备用页：抽查任意场景的原始数值。</a:t>
+              <a:t>备用页：如果评委追问某个数字怎么算出来的，用这页回答。</a:t>
             </a:r>
           </a:p>
         </p:txBody>
@@ -2317,7 +2316,7 @@
           <a:lstStyle/>
           <a:p>
             <a:r>
-              <a:t>备用页：如果评委追问某个数字怎么算出来的，用这页回答。</a:t>
+              <a:t>备用页：幸存者偏差的解释。过载时 Pod 根本没被处理，所以延迟看起来“很好”。</a:t>
             </a:r>
           </a:p>
         </p:txBody>
@@ -2387,7 +2386,7 @@
           <a:lstStyle/>
           <a:p>
             <a:r>
-              <a:t>备用页：幸存者偏差的解释。过载时 Pod 根本没被处理，所以延迟看起来“很好”。</a:t>
+              <a:t>备用页：w6 反向结果的完整数据与解释。</a:t>
             </a:r>
           </a:p>
         </p:txBody>
@@ -2457,7 +2456,7 @@
           <a:lstStyle/>
           <a:p>
             <a:r>
-              <a:t>备用页：w6 反向结果的完整数据与解释。</a:t>
+              <a:t>备用页：公平性与资源开销的口径说明。</a:t>
             </a:r>
           </a:p>
         </p:txBody>
@@ -2527,7 +2526,7 @@
           <a:lstStyle/>
           <a:p>
             <a:r>
-              <a:t>备用页：公平性与资源开销的口径说明。</a:t>
+              <a:t>备用页：评委问可复现性时展示。</a:t>
             </a:r>
           </a:p>
         </p:txBody>
@@ -2623,76 +2622,6 @@
 </file>
 
 <file path=ppt/notesSlides/notesSlide30.xml><?xml version="1.0" encoding="utf-8"?>
-<p:notes xmlns:a="http://schemas.openxmlformats.org/drawingml/2006/main" xmlns:p="http://schemas.openxmlformats.org/presentationml/2006/main" xmlns:r="http://schemas.openxmlformats.org/officeDocument/2006/relationships">
-  <p:cSld>
-    <p:spTree>
-      <p:nvGrpSpPr>
-        <p:cNvPr id="1" name=""/>
-        <p:cNvGrpSpPr/>
-        <p:nvPr/>
-      </p:nvGrpSpPr>
-      <p:grpSpPr>
-        <a:xfrm>
-          <a:off x="0" y="0"/>
-          <a:ext cx="0" cy="0"/>
-          <a:chOff x="0" y="0"/>
-          <a:chExt cx="0" cy="0"/>
-        </a:xfrm>
-      </p:grpSpPr>
-      <p:sp>
-        <p:nvSpPr>
-          <p:cNvPr id="2" name="Slide Image Placeholder 1"/>
-          <p:cNvSpPr>
-            <a:spLocks noGrp="1"/>
-          </p:cNvSpPr>
-          <p:nvPr>
-            <p:ph type="sldImg"/>
-          </p:nvPr>
-        </p:nvSpPr>
-        <p:spPr/>
-      </p:sp>
-      <p:sp>
-        <p:nvSpPr>
-          <p:cNvPr id="3" name="Notes Placeholder 2"/>
-          <p:cNvSpPr>
-            <a:spLocks noGrp="1"/>
-          </p:cNvSpPr>
-          <p:nvPr>
-            <p:ph type="body" idx="3" sz="quarter"/>
-          </p:nvPr>
-        </p:nvSpPr>
-        <p:spPr/>
-        <p:txBody>
-          <a:bodyPr/>
-          <a:lstStyle/>
-          <a:p>
-            <a:r>
-              <a:t>备用页：评委问可复现性时展示。</a:t>
-            </a:r>
-          </a:p>
-        </p:txBody>
-      </p:sp>
-      <p:sp>
-        <p:nvSpPr>
-          <p:cNvPr id="4" name="Slide Number Placeholder 3"/>
-          <p:cNvSpPr>
-            <a:spLocks noGrp="1"/>
-          </p:cNvSpPr>
-          <p:nvPr>
-            <p:ph type="sldNum" idx="5" sz="quarter"/>
-          </p:nvPr>
-        </p:nvSpPr>
-        <p:spPr/>
-      </p:sp>
-    </p:spTree>
-  </p:cSld>
-  <p:clrMapOvr>
-    <a:masterClrMapping/>
-  </p:clrMapOvr>
-</p:notes>
-</file>
-
-<file path=ppt/notesSlides/notesSlide31.xml><?xml version="1.0" encoding="utf-8"?>
 <p:notes xmlns:a="http://schemas.openxmlformats.org/drawingml/2006/main" xmlns:p="http://schemas.openxmlformats.org/presentationml/2006/main" xmlns:r="http://schemas.openxmlformats.org/officeDocument/2006/relationships">
   <p:cSld>
     <p:spTree>
@@ -7693,7 +7622,7 @@
                 <a:latin typeface="Arial"/>
                 <a:ea typeface="微软雅黑"/>
               </a:rPr>
-              <a:t>1 / 24</a:t>
+              <a:t>1 / 23</a:t>
             </a:r>
           </a:p>
         </p:txBody>
@@ -9000,7 +8929,7 @@
                 <a:latin typeface="Arial"/>
                 <a:ea typeface="微软雅黑"/>
               </a:rPr>
-              <a:t>10 / 24</a:t>
+              <a:t>10 / 23</a:t>
             </a:r>
           </a:p>
         </p:txBody>
@@ -9487,7 +9416,7 @@
                 <a:latin typeface="Arial"/>
                 <a:ea typeface="微软雅黑"/>
               </a:rPr>
-              <a:t>11 / 24</a:t>
+              <a:t>11 / 23</a:t>
             </a:r>
           </a:p>
         </p:txBody>
@@ -10406,7 +10335,7 @@
                 <a:latin typeface="Arial"/>
                 <a:ea typeface="微软雅黑"/>
               </a:rPr>
-              <a:t>12 / 24</a:t>
+              <a:t>12 / 23</a:t>
             </a:r>
           </a:p>
         </p:txBody>
@@ -11735,7 +11664,7 @@
                 <a:latin typeface="Arial"/>
                 <a:ea typeface="微软雅黑"/>
               </a:rPr>
-              <a:t>13 / 24</a:t>
+              <a:t>13 / 23</a:t>
             </a:r>
           </a:p>
         </p:txBody>
@@ -12644,7 +12573,7 @@
                 <a:latin typeface="Arial"/>
                 <a:ea typeface="微软雅黑"/>
               </a:rPr>
-              <a:t>14 / 24</a:t>
+              <a:t>14 / 23</a:t>
             </a:r>
           </a:p>
         </p:txBody>
@@ -13615,7 +13544,7 @@
                 <a:latin typeface="Arial"/>
                 <a:ea typeface="微软雅黑"/>
               </a:rPr>
-              <a:t>15 / 24</a:t>
+              <a:t>15 / 23</a:t>
             </a:r>
           </a:p>
         </p:txBody>
@@ -14118,7 +14047,7 @@
                 <a:latin typeface="Arial"/>
                 <a:ea typeface="微软雅黑"/>
               </a:rPr>
-              <a:t>16 / 24</a:t>
+              <a:t>16 / 23</a:t>
             </a:r>
           </a:p>
         </p:txBody>
@@ -14621,7 +14550,7 @@
                 <a:latin typeface="Arial"/>
                 <a:ea typeface="微软雅黑"/>
               </a:rPr>
-              <a:t>17 / 24</a:t>
+              <a:t>17 / 23</a:t>
             </a:r>
           </a:p>
         </p:txBody>
@@ -15443,7 +15372,7 @@
                 <a:latin typeface="Arial"/>
                 <a:ea typeface="微软雅黑"/>
               </a:rPr>
-              <a:t>18 / 24</a:t>
+              <a:t>18 / 23</a:t>
             </a:r>
           </a:p>
         </p:txBody>
@@ -16563,7 +16492,7 @@
                 <a:latin typeface="Arial"/>
                 <a:ea typeface="微软雅黑"/>
               </a:rPr>
-              <a:t>19 / 24</a:t>
+              <a:t>19 / 23</a:t>
             </a:r>
           </a:p>
         </p:txBody>
@@ -17434,7 +17363,7 @@
                 <a:latin typeface="Arial"/>
                 <a:ea typeface="微软雅黑"/>
               </a:rPr>
-              <a:t>2 / 24</a:t>
+              <a:t>2 / 23</a:t>
             </a:r>
           </a:p>
         </p:txBody>
@@ -17937,7 +17866,7 @@
                 <a:latin typeface="Arial"/>
                 <a:ea typeface="微软雅黑"/>
               </a:rPr>
-              <a:t>20 / 24</a:t>
+              <a:t>20 / 23</a:t>
             </a:r>
           </a:p>
         </p:txBody>
@@ -18440,7 +18369,7 @@
                 <a:latin typeface="Arial"/>
                 <a:ea typeface="微软雅黑"/>
               </a:rPr>
-              <a:t>21 / 24</a:t>
+              <a:t>21 / 23</a:t>
             </a:r>
           </a:p>
         </p:txBody>
@@ -19307,7 +19236,7 @@
                 <a:latin typeface="Arial"/>
                 <a:ea typeface="微软雅黑"/>
               </a:rPr>
-              <a:t>22 / 24</a:t>
+              <a:t>22 / 23</a:t>
             </a:r>
           </a:p>
         </p:txBody>
@@ -19321,1341 +19250,6 @@
 </file>
 
 <file path=ppt/slides/slide23.xml><?xml version="1.0" encoding="utf-8"?>
-<p:sld xmlns:a="http://schemas.openxmlformats.org/drawingml/2006/main" xmlns:p="http://schemas.openxmlformats.org/presentationml/2006/main" xmlns:r="http://schemas.openxmlformats.org/officeDocument/2006/relationships">
-  <p:cSld>
-    <p:bg>
-      <p:bgPr>
-        <a:solidFill>
-          <a:srgbClr val="FFFFFF"/>
-        </a:solidFill>
-        <a:effectLst/>
-      </p:bgPr>
-    </p:bg>
-    <p:spTree>
-      <p:nvGrpSpPr>
-        <p:cNvPr id="1" name=""/>
-        <p:cNvGrpSpPr/>
-        <p:nvPr/>
-      </p:nvGrpSpPr>
-      <p:grpSpPr/>
-      <p:sp>
-        <p:nvSpPr>
-          <p:cNvPr id="9000" name="Freeform 5"/>
-          <p:cNvSpPr/>
-          <p:nvPr/>
-        </p:nvSpPr>
-        <p:spPr>
-          <a:xfrm>
-            <a:off x="182880" y="274320"/>
-            <a:ext cx="310896" cy="402336"/>
-          </a:xfrm>
-          <a:custGeom>
-            <a:avLst/>
-            <a:gdLst/>
-            <a:ahLst/>
-            <a:cxnLst>
-              <a:cxn ang="0">
-                <a:pos x="2147483647" y="2147483647"/>
-              </a:cxn>
-              <a:cxn ang="0">
-                <a:pos x="2147483647" y="2147483647"/>
-              </a:cxn>
-              <a:cxn ang="0">
-                <a:pos x="2147483647" y="2147483647"/>
-              </a:cxn>
-              <a:cxn ang="0">
-                <a:pos x="2147483647" y="2147483647"/>
-              </a:cxn>
-              <a:cxn ang="0">
-                <a:pos x="2147483647" y="2147483647"/>
-              </a:cxn>
-              <a:cxn ang="0">
-                <a:pos x="2147483647" y="2147483647"/>
-              </a:cxn>
-              <a:cxn ang="0">
-                <a:pos x="2147483647" y="2147483647"/>
-              </a:cxn>
-              <a:cxn ang="0">
-                <a:pos x="2147483647" y="2147483647"/>
-              </a:cxn>
-              <a:cxn ang="0">
-                <a:pos x="2147483647" y="0"/>
-              </a:cxn>
-              <a:cxn ang="0">
-                <a:pos x="2147483647" y="2147483647"/>
-              </a:cxn>
-              <a:cxn ang="0">
-                <a:pos x="2147483647" y="2147483647"/>
-              </a:cxn>
-              <a:cxn ang="0">
-                <a:pos x="2147483647" y="2147483647"/>
-              </a:cxn>
-              <a:cxn ang="0">
-                <a:pos x="2147483647" y="2147483647"/>
-              </a:cxn>
-              <a:cxn ang="0">
-                <a:pos x="2147483647" y="2147483647"/>
-              </a:cxn>
-              <a:cxn ang="0">
-                <a:pos x="2147483647" y="2147483647"/>
-              </a:cxn>
-              <a:cxn ang="0">
-                <a:pos x="2147483647" y="2147483647"/>
-              </a:cxn>
-              <a:cxn ang="0">
-                <a:pos x="2147483647" y="2147483647"/>
-              </a:cxn>
-              <a:cxn ang="0">
-                <a:pos x="2147483647" y="2147483647"/>
-              </a:cxn>
-              <a:cxn ang="0">
-                <a:pos x="2147483647" y="2147483647"/>
-              </a:cxn>
-              <a:cxn ang="0">
-                <a:pos x="0" y="2147483647"/>
-              </a:cxn>
-              <a:cxn ang="0">
-                <a:pos x="2147483647" y="2147483647"/>
-              </a:cxn>
-            </a:cxnLst>
-            <a:rect l="0" t="0" r="0" b="0"/>
-            <a:pathLst>
-              <a:path w="574" h="681">
-                <a:moveTo>
-                  <a:pt x="120" y="441"/>
-                </a:moveTo>
-                <a:cubicBezTo>
-                  <a:pt x="153" y="441"/>
-                  <a:pt x="183" y="454"/>
-                  <a:pt x="205" y="476"/>
-                </a:cubicBezTo>
-                <a:lnTo>
-                  <a:pt x="389" y="329"/>
-                </a:lnTo>
-                <a:cubicBezTo>
-                  <a:pt x="383" y="317"/>
-                  <a:pt x="380" y="303"/>
-                  <a:pt x="380" y="289"/>
-                </a:cubicBezTo>
-                <a:cubicBezTo>
-                  <a:pt x="380" y="271"/>
-                  <a:pt x="384" y="255"/>
-                  <a:pt x="392" y="241"/>
-                </a:cubicBezTo>
-                <a:lnTo>
-                  <a:pt x="270" y="138"/>
-                </a:lnTo>
-                <a:cubicBezTo>
-                  <a:pt x="256" y="151"/>
-                  <a:pt x="237" y="159"/>
-                  <a:pt x="217" y="159"/>
-                </a:cubicBezTo>
-                <a:cubicBezTo>
-                  <a:pt x="173" y="159"/>
-                  <a:pt x="137" y="123"/>
-                  <a:pt x="137" y="79"/>
-                </a:cubicBezTo>
-                <a:cubicBezTo>
-                  <a:pt x="137" y="36"/>
-                  <a:pt x="173" y="0"/>
-                  <a:pt x="217" y="0"/>
-                </a:cubicBezTo>
-                <a:cubicBezTo>
-                  <a:pt x="260" y="0"/>
-                  <a:pt x="296" y="36"/>
-                  <a:pt x="296" y="79"/>
-                </a:cubicBezTo>
-                <a:cubicBezTo>
-                  <a:pt x="296" y="91"/>
-                  <a:pt x="293" y="103"/>
-                  <a:pt x="289" y="113"/>
-                </a:cubicBezTo>
-                <a:lnTo>
-                  <a:pt x="412" y="217"/>
-                </a:lnTo>
-                <a:cubicBezTo>
-                  <a:pt x="429" y="201"/>
-                  <a:pt x="452" y="192"/>
-                  <a:pt x="477" y="192"/>
-                </a:cubicBezTo>
-                <a:cubicBezTo>
-                  <a:pt x="530" y="192"/>
-                  <a:pt x="574" y="235"/>
-                  <a:pt x="574" y="289"/>
-                </a:cubicBezTo>
-                <a:cubicBezTo>
-                  <a:pt x="574" y="342"/>
-                  <a:pt x="530" y="386"/>
-                  <a:pt x="477" y="386"/>
-                </a:cubicBezTo>
-                <a:cubicBezTo>
-                  <a:pt x="449" y="386"/>
-                  <a:pt x="424" y="374"/>
-                  <a:pt x="406" y="355"/>
-                </a:cubicBezTo>
-                <a:lnTo>
-                  <a:pt x="224" y="501"/>
-                </a:lnTo>
-                <a:cubicBezTo>
-                  <a:pt x="234" y="518"/>
-                  <a:pt x="240" y="539"/>
-                  <a:pt x="240" y="561"/>
-                </a:cubicBezTo>
-                <a:cubicBezTo>
-                  <a:pt x="240" y="627"/>
-                  <a:pt x="186" y="681"/>
-                  <a:pt x="120" y="681"/>
-                </a:cubicBezTo>
-                <a:cubicBezTo>
-                  <a:pt x="54" y="681"/>
-                  <a:pt x="0" y="627"/>
-                  <a:pt x="0" y="561"/>
-                </a:cubicBezTo>
-                <a:cubicBezTo>
-                  <a:pt x="0" y="495"/>
-                  <a:pt x="54" y="441"/>
-                  <a:pt x="120" y="441"/>
-                </a:cubicBezTo>
-                <a:close/>
-              </a:path>
-            </a:pathLst>
-          </a:custGeom>
-          <a:solidFill>
-            <a:srgbClr val="113E6A"/>
-          </a:solidFill>
-          <a:ln w="9525">
-            <a:noFill/>
-          </a:ln>
-        </p:spPr>
-        <p:txBody>
-          <a:bodyPr/>
-          <a:lstStyle/>
-          <a:p>
-            <a:endParaRPr lang="zh-CN" altLang="en-US"/>
-          </a:p>
-        </p:txBody>
-      </p:sp>
-      <p:pic>
-        <p:nvPicPr>
-          <p:cNvPr id="9001" name="Picture 9000" descr="beihang-logo-navy.png"/>
-          <p:cNvPicPr>
-            <a:picLocks noChangeAspect="1"/>
-          </p:cNvPicPr>
-          <p:nvPr/>
-        </p:nvPicPr>
-        <p:blipFill>
-          <a:blip r:embed="rId2"/>
-          <a:stretch>
-            <a:fillRect/>
-          </a:stretch>
-        </p:blipFill>
-        <p:spPr>
-          <a:xfrm>
-            <a:off x="9336024" y="91665"/>
-            <a:ext cx="2642616" cy="502469"/>
-          </a:xfrm>
-          <a:prstGeom prst="rect">
-            <a:avLst/>
-          </a:prstGeom>
-        </p:spPr>
-      </p:pic>
-      <p:sp>
-        <p:nvSpPr>
-          <p:cNvPr id="9002" name="TextBox 9001"/>
-          <p:cNvSpPr txBox="1"/>
-          <p:nvPr/>
-        </p:nvSpPr>
-        <p:spPr>
-          <a:xfrm>
-            <a:off x="566928" y="155448"/>
-            <a:ext cx="8549640" cy="621792"/>
-          </a:xfrm>
-          <a:prstGeom prst="rect">
-            <a:avLst/>
-          </a:prstGeom>
-          <a:noFill/>
-        </p:spPr>
-        <p:txBody>
-          <a:bodyPr wrap="square" anchor="ctr" lIns="0" rIns="0" tIns="0" bIns="0">
-            <a:spAutoFit/>
-          </a:bodyPr>
-          <a:lstStyle/>
-          <a:p>
-            <a:pPr algn="l">
-              <a:lnSpc>
-                <a:spcPct val="100000"/>
-              </a:lnSpc>
-            </a:pPr>
-            <a:r>
-              <a:rPr sz="3000" b="1">
-                <a:solidFill>
-                  <a:srgbClr val="113E6A"/>
-                </a:solidFill>
-                <a:latin typeface="Arial"/>
-                <a:ea typeface="微软雅黑"/>
-              </a:rPr>
-              <a:t>结论</a:t>
-            </a:r>
-          </a:p>
-        </p:txBody>
-      </p:sp>
-      <p:sp>
-        <p:nvSpPr>
-          <p:cNvPr id="9003" name="TextBox 9002"/>
-          <p:cNvSpPr txBox="1"/>
-          <p:nvPr/>
-        </p:nvSpPr>
-        <p:spPr>
-          <a:xfrm>
-            <a:off x="566928" y="1261872"/>
-            <a:ext cx="10881360" cy="438912"/>
-          </a:xfrm>
-          <a:prstGeom prst="rect">
-            <a:avLst/>
-          </a:prstGeom>
-          <a:noFill/>
-        </p:spPr>
-        <p:txBody>
-          <a:bodyPr wrap="square" anchor="ctr" lIns="0" rIns="0" tIns="0" bIns="0">
-            <a:spAutoFit/>
-          </a:bodyPr>
-          <a:lstStyle/>
-          <a:p>
-            <a:pPr algn="l">
-              <a:lnSpc>
-                <a:spcPct val="110000"/>
-              </a:lnSpc>
-            </a:pPr>
-            <a:r>
-              <a:rPr sz="1800" b="1">
-                <a:solidFill>
-                  <a:srgbClr val="0070C0"/>
-                </a:solidFill>
-                <a:latin typeface="Arial"/>
-                <a:ea typeface="微软雅黑"/>
-              </a:rPr>
-              <a:t>三项工作、两个创新，都有可复现实验支撑，且保持了向后兼容</a:t>
-            </a:r>
-          </a:p>
-        </p:txBody>
-      </p:sp>
-      <p:sp>
-        <p:nvSpPr>
-          <p:cNvPr id="9004" name="Rounded Rectangle 9003"/>
-          <p:cNvSpPr/>
-          <p:nvPr/>
-        </p:nvSpPr>
-        <p:spPr>
-          <a:xfrm>
-            <a:off x="566928" y="1810512"/>
-            <a:ext cx="3517391" cy="1444752"/>
-          </a:xfrm>
-          <a:prstGeom prst="roundRect">
-            <a:avLst/>
-          </a:prstGeom>
-          <a:solidFill>
-            <a:srgbClr val="FFFFFF"/>
-          </a:solidFill>
-          <a:ln w="9525">
-            <a:solidFill>
-              <a:srgbClr val="D6E3F0"/>
-            </a:solidFill>
-          </a:ln>
-          <a:effectLst/>
-        </p:spPr>
-        <p:style>
-          <a:lnRef idx="1">
-            <a:schemeClr val="accent1"/>
-          </a:lnRef>
-          <a:fillRef idx="3">
-            <a:schemeClr val="accent1"/>
-          </a:fillRef>
-          <a:effectRef idx="2">
-            <a:schemeClr val="accent1"/>
-          </a:effectRef>
-          <a:fontRef idx="minor">
-            <a:schemeClr val="lt1"/>
-          </a:fontRef>
-        </p:style>
-        <p:txBody>
-          <a:bodyPr rtlCol="0" anchor="ctr"/>
-          <a:lstStyle/>
-          <a:p>
-            <a:pPr algn="ctr"/>
-          </a:p>
-        </p:txBody>
-      </p:sp>
-      <p:sp>
-        <p:nvSpPr>
-          <p:cNvPr id="9005" name="Oval 9004"/>
-          <p:cNvSpPr/>
-          <p:nvPr/>
-        </p:nvSpPr>
-        <p:spPr>
-          <a:xfrm>
-            <a:off x="713232" y="1947672"/>
-            <a:ext cx="274320" cy="274320"/>
-          </a:xfrm>
-          <a:prstGeom prst="ellipse">
-            <a:avLst/>
-          </a:prstGeom>
-          <a:solidFill>
-            <a:srgbClr val="113E6A"/>
-          </a:solidFill>
-          <a:ln>
-            <a:noFill/>
-          </a:ln>
-          <a:effectLst/>
-        </p:spPr>
-        <p:style>
-          <a:lnRef idx="1">
-            <a:schemeClr val="accent1"/>
-          </a:lnRef>
-          <a:fillRef idx="3">
-            <a:schemeClr val="accent1"/>
-          </a:fillRef>
-          <a:effectRef idx="2">
-            <a:schemeClr val="accent1"/>
-          </a:effectRef>
-          <a:fontRef idx="minor">
-            <a:schemeClr val="lt1"/>
-          </a:fontRef>
-        </p:style>
-        <p:txBody>
-          <a:bodyPr rtlCol="0" anchor="ctr" lIns="0" rIns="0" tIns="0" bIns="0"/>
-          <a:lstStyle/>
-          <a:p>
-            <a:pPr algn="ctr"/>
-            <a:r>
-              <a:rPr sz="1000" b="1">
-                <a:solidFill>
-                  <a:srgbClr val="FFFFFF"/>
-                </a:solidFill>
-                <a:latin typeface="Arial"/>
-                <a:ea typeface="微软雅黑"/>
-              </a:rPr>
-              <a:t>01</a:t>
-            </a:r>
-          </a:p>
-        </p:txBody>
-      </p:sp>
-      <p:sp>
-        <p:nvSpPr>
-          <p:cNvPr id="9006" name="TextBox 9005"/>
-          <p:cNvSpPr txBox="1"/>
-          <p:nvPr/>
-        </p:nvSpPr>
-        <p:spPr>
-          <a:xfrm>
-            <a:off x="1078992" y="1947672"/>
-            <a:ext cx="2877312" cy="1243584"/>
-          </a:xfrm>
-          <a:prstGeom prst="rect">
-            <a:avLst/>
-          </a:prstGeom>
-          <a:noFill/>
-        </p:spPr>
-        <p:txBody>
-          <a:bodyPr wrap="square" anchor="t" lIns="0" rIns="0" tIns="0" bIns="0">
-            <a:spAutoFit/>
-          </a:bodyPr>
-          <a:lstStyle/>
-          <a:p>
-            <a:pPr algn="l"/>
-            <a:r>
-              <a:rPr sz="1400" b="1">
-                <a:solidFill>
-                  <a:srgbClr val="113E6A"/>
-                </a:solidFill>
-                <a:latin typeface="Arial"/>
-                <a:ea typeface="微软雅黑"/>
-              </a:rPr>
-              <a:t>工作 1 · 架构梳理</a:t>
-            </a:r>
-          </a:p>
-          <a:p>
-            <a:pPr algn="l">
-              <a:lnSpc>
-                <a:spcPct val="110000"/>
-              </a:lnSpc>
-              <a:spcBef>
-                <a:spcPts val="400"/>
-              </a:spcBef>
-            </a:pPr>
-            <a:r>
-              <a:rPr sz="1250" b="0">
-                <a:solidFill>
-                  <a:srgbClr val="2E2C2C"/>
-                </a:solidFill>
-                <a:latin typeface="Arial"/>
-                <a:ea typeface="微软雅黑"/>
-              </a:rPr>
-              <a:t>Dispatcher / Scheduler / Binder 三层与 Pod 完整流转；不依赖自研协调机制，全部建立在三种 etcd 原子语义上</a:t>
-            </a:r>
-          </a:p>
-        </p:txBody>
-      </p:sp>
-      <p:sp>
-        <p:nvSpPr>
-          <p:cNvPr id="9007" name="Rounded Rectangle 9006"/>
-          <p:cNvSpPr/>
-          <p:nvPr/>
-        </p:nvSpPr>
-        <p:spPr>
-          <a:xfrm>
-            <a:off x="4340351" y="1810512"/>
-            <a:ext cx="3517391" cy="1444752"/>
-          </a:xfrm>
-          <a:prstGeom prst="roundRect">
-            <a:avLst/>
-          </a:prstGeom>
-          <a:solidFill>
-            <a:srgbClr val="FFFFFF"/>
-          </a:solidFill>
-          <a:ln w="9525">
-            <a:solidFill>
-              <a:srgbClr val="D6E3F0"/>
-            </a:solidFill>
-          </a:ln>
-          <a:effectLst/>
-        </p:spPr>
-        <p:style>
-          <a:lnRef idx="1">
-            <a:schemeClr val="accent1"/>
-          </a:lnRef>
-          <a:fillRef idx="3">
-            <a:schemeClr val="accent1"/>
-          </a:fillRef>
-          <a:effectRef idx="2">
-            <a:schemeClr val="accent1"/>
-          </a:effectRef>
-          <a:fontRef idx="minor">
-            <a:schemeClr val="lt1"/>
-          </a:fontRef>
-        </p:style>
-        <p:txBody>
-          <a:bodyPr rtlCol="0" anchor="ctr"/>
-          <a:lstStyle/>
-          <a:p>
-            <a:pPr algn="ctr"/>
-          </a:p>
-        </p:txBody>
-      </p:sp>
-      <p:sp>
-        <p:nvSpPr>
-          <p:cNvPr id="9008" name="Oval 9007"/>
-          <p:cNvSpPr/>
-          <p:nvPr/>
-        </p:nvSpPr>
-        <p:spPr>
-          <a:xfrm>
-            <a:off x="4486656" y="1947672"/>
-            <a:ext cx="274320" cy="274320"/>
-          </a:xfrm>
-          <a:prstGeom prst="ellipse">
-            <a:avLst/>
-          </a:prstGeom>
-          <a:solidFill>
-            <a:srgbClr val="113E6A"/>
-          </a:solidFill>
-          <a:ln>
-            <a:noFill/>
-          </a:ln>
-          <a:effectLst/>
-        </p:spPr>
-        <p:style>
-          <a:lnRef idx="1">
-            <a:schemeClr val="accent1"/>
-          </a:lnRef>
-          <a:fillRef idx="3">
-            <a:schemeClr val="accent1"/>
-          </a:fillRef>
-          <a:effectRef idx="2">
-            <a:schemeClr val="accent1"/>
-          </a:effectRef>
-          <a:fontRef idx="minor">
-            <a:schemeClr val="lt1"/>
-          </a:fontRef>
-        </p:style>
-        <p:txBody>
-          <a:bodyPr rtlCol="0" anchor="ctr" lIns="0" rIns="0" tIns="0" bIns="0"/>
-          <a:lstStyle/>
-          <a:p>
-            <a:pPr algn="ctr"/>
-            <a:r>
-              <a:rPr sz="1000" b="1">
-                <a:solidFill>
-                  <a:srgbClr val="FFFFFF"/>
-                </a:solidFill>
-                <a:latin typeface="Arial"/>
-                <a:ea typeface="微软雅黑"/>
-              </a:rPr>
-              <a:t>02</a:t>
-            </a:r>
-          </a:p>
-        </p:txBody>
-      </p:sp>
-      <p:sp>
-        <p:nvSpPr>
-          <p:cNvPr id="9009" name="TextBox 9008"/>
-          <p:cNvSpPr txBox="1"/>
-          <p:nvPr/>
-        </p:nvSpPr>
-        <p:spPr>
-          <a:xfrm>
-            <a:off x="4852416" y="1947672"/>
-            <a:ext cx="2877312" cy="1243584"/>
-          </a:xfrm>
-          <a:prstGeom prst="rect">
-            <a:avLst/>
-          </a:prstGeom>
-          <a:noFill/>
-        </p:spPr>
-        <p:txBody>
-          <a:bodyPr wrap="square" anchor="t" lIns="0" rIns="0" tIns="0" bIns="0">
-            <a:spAutoFit/>
-          </a:bodyPr>
-          <a:lstStyle/>
-          <a:p>
-            <a:pPr algn="l"/>
-            <a:r>
-              <a:rPr sz="1400" b="1">
-                <a:solidFill>
-                  <a:srgbClr val="113E6A"/>
-                </a:solidFill>
-                <a:latin typeface="Arial"/>
-                <a:ea typeface="微软雅黑"/>
-              </a:rPr>
-              <a:t>工作 2 · 四层容错</a:t>
-            </a:r>
-          </a:p>
-          <a:p>
-            <a:pPr algn="l">
-              <a:lnSpc>
-                <a:spcPct val="110000"/>
-              </a:lnSpc>
-              <a:spcBef>
-                <a:spcPts val="400"/>
-              </a:spcBef>
-            </a:pPr>
-            <a:r>
-              <a:rPr sz="1250" b="0">
-                <a:solidFill>
-                  <a:srgbClr val="2E2C2C"/>
-                </a:solidFill>
-                <a:latin typeface="Arial"/>
-                <a:ea typeface="微软雅黑"/>
-              </a:rPr>
-              <a:t>L0 前置校验、L1 同步重试、L2 异步回收、L3 跨实例回退，并给出不变量 I 的证明要点</a:t>
-            </a:r>
-          </a:p>
-        </p:txBody>
-      </p:sp>
-      <p:sp>
-        <p:nvSpPr>
-          <p:cNvPr id="9010" name="Rounded Rectangle 9009"/>
-          <p:cNvSpPr/>
-          <p:nvPr/>
-        </p:nvSpPr>
-        <p:spPr>
-          <a:xfrm>
-            <a:off x="8113775" y="1810512"/>
-            <a:ext cx="3517391" cy="1444752"/>
-          </a:xfrm>
-          <a:prstGeom prst="roundRect">
-            <a:avLst/>
-          </a:prstGeom>
-          <a:solidFill>
-            <a:srgbClr val="FFFFFF"/>
-          </a:solidFill>
-          <a:ln w="9525">
-            <a:solidFill>
-              <a:srgbClr val="D6E3F0"/>
-            </a:solidFill>
-          </a:ln>
-          <a:effectLst/>
-        </p:spPr>
-        <p:style>
-          <a:lnRef idx="1">
-            <a:schemeClr val="accent1"/>
-          </a:lnRef>
-          <a:fillRef idx="3">
-            <a:schemeClr val="accent1"/>
-          </a:fillRef>
-          <a:effectRef idx="2">
-            <a:schemeClr val="accent1"/>
-          </a:effectRef>
-          <a:fontRef idx="minor">
-            <a:schemeClr val="lt1"/>
-          </a:fontRef>
-        </p:style>
-        <p:txBody>
-          <a:bodyPr rtlCol="0" anchor="ctr"/>
-          <a:lstStyle/>
-          <a:p>
-            <a:pPr algn="ctr"/>
-          </a:p>
-        </p:txBody>
-      </p:sp>
-      <p:sp>
-        <p:nvSpPr>
-          <p:cNvPr id="9011" name="Oval 9010"/>
-          <p:cNvSpPr/>
-          <p:nvPr/>
-        </p:nvSpPr>
-        <p:spPr>
-          <a:xfrm>
-            <a:off x="8260079" y="1947672"/>
-            <a:ext cx="274320" cy="274320"/>
-          </a:xfrm>
-          <a:prstGeom prst="ellipse">
-            <a:avLst/>
-          </a:prstGeom>
-          <a:solidFill>
-            <a:srgbClr val="113E6A"/>
-          </a:solidFill>
-          <a:ln>
-            <a:noFill/>
-          </a:ln>
-          <a:effectLst/>
-        </p:spPr>
-        <p:style>
-          <a:lnRef idx="1">
-            <a:schemeClr val="accent1"/>
-          </a:lnRef>
-          <a:fillRef idx="3">
-            <a:schemeClr val="accent1"/>
-          </a:fillRef>
-          <a:effectRef idx="2">
-            <a:schemeClr val="accent1"/>
-          </a:effectRef>
-          <a:fontRef idx="minor">
-            <a:schemeClr val="lt1"/>
-          </a:fontRef>
-        </p:style>
-        <p:txBody>
-          <a:bodyPr rtlCol="0" anchor="ctr" lIns="0" rIns="0" tIns="0" bIns="0"/>
-          <a:lstStyle/>
-          <a:p>
-            <a:pPr algn="ctr"/>
-            <a:r>
-              <a:rPr sz="1000" b="1">
-                <a:solidFill>
-                  <a:srgbClr val="FFFFFF"/>
-                </a:solidFill>
-                <a:latin typeface="Arial"/>
-                <a:ea typeface="微软雅黑"/>
-              </a:rPr>
-              <a:t>03</a:t>
-            </a:r>
-          </a:p>
-        </p:txBody>
-      </p:sp>
-      <p:sp>
-        <p:nvSpPr>
-          <p:cNvPr id="9012" name="TextBox 9011"/>
-          <p:cNvSpPr txBox="1"/>
-          <p:nvPr/>
-        </p:nvSpPr>
-        <p:spPr>
-          <a:xfrm>
-            <a:off x="8625839" y="1947672"/>
-            <a:ext cx="2877312" cy="1243584"/>
-          </a:xfrm>
-          <a:prstGeom prst="rect">
-            <a:avLst/>
-          </a:prstGeom>
-          <a:noFill/>
-        </p:spPr>
-        <p:txBody>
-          <a:bodyPr wrap="square" anchor="t" lIns="0" rIns="0" tIns="0" bIns="0">
-            <a:spAutoFit/>
-          </a:bodyPr>
-          <a:lstStyle/>
-          <a:p>
-            <a:pPr algn="l"/>
-            <a:r>
-              <a:rPr sz="1400" b="1">
-                <a:solidFill>
-                  <a:srgbClr val="113E6A"/>
-                </a:solidFill>
-                <a:latin typeface="Arial"/>
-                <a:ea typeface="微软雅黑"/>
-              </a:rPr>
-              <a:t>工作 3 · ENO 优化</a:t>
-            </a:r>
-          </a:p>
-          <a:p>
-            <a:pPr algn="l">
-              <a:lnSpc>
-                <a:spcPct val="110000"/>
-              </a:lnSpc>
-              <a:spcBef>
-                <a:spcPts val="400"/>
-              </a:spcBef>
-            </a:pPr>
-            <a:r>
-              <a:rPr sz="1250" b="0">
-                <a:solidFill>
-                  <a:srgbClr val="2E2C2C"/>
-                </a:solidFill>
-                <a:latin typeface="Arial"/>
-                <a:ea typeface="微软雅黑"/>
-              </a:rPr>
-              <a:t>Binder 合并进 Scheduler 进程，CacheAdapter 零拷贝共享缓存，消除跨进程调用与序列化</a:t>
-            </a:r>
-          </a:p>
-        </p:txBody>
-      </p:sp>
-      <p:sp>
-        <p:nvSpPr>
-          <p:cNvPr id="9013" name="Rounded Rectangle 9012"/>
-          <p:cNvSpPr/>
-          <p:nvPr/>
-        </p:nvSpPr>
-        <p:spPr>
-          <a:xfrm>
-            <a:off x="566928" y="3511296"/>
-            <a:ext cx="3517391" cy="1444752"/>
-          </a:xfrm>
-          <a:prstGeom prst="roundRect">
-            <a:avLst/>
-          </a:prstGeom>
-          <a:solidFill>
-            <a:srgbClr val="FFFFFF"/>
-          </a:solidFill>
-          <a:ln w="9525">
-            <a:solidFill>
-              <a:srgbClr val="D6E3F0"/>
-            </a:solidFill>
-          </a:ln>
-          <a:effectLst/>
-        </p:spPr>
-        <p:style>
-          <a:lnRef idx="1">
-            <a:schemeClr val="accent1"/>
-          </a:lnRef>
-          <a:fillRef idx="3">
-            <a:schemeClr val="accent1"/>
-          </a:fillRef>
-          <a:effectRef idx="2">
-            <a:schemeClr val="accent1"/>
-          </a:effectRef>
-          <a:fontRef idx="minor">
-            <a:schemeClr val="lt1"/>
-          </a:fontRef>
-        </p:style>
-        <p:txBody>
-          <a:bodyPr rtlCol="0" anchor="ctr"/>
-          <a:lstStyle/>
-          <a:p>
-            <a:pPr algn="ctr"/>
-          </a:p>
-        </p:txBody>
-      </p:sp>
-      <p:sp>
-        <p:nvSpPr>
-          <p:cNvPr id="9014" name="Oval 9013"/>
-          <p:cNvSpPr/>
-          <p:nvPr/>
-        </p:nvSpPr>
-        <p:spPr>
-          <a:xfrm>
-            <a:off x="713232" y="3648456"/>
-            <a:ext cx="274320" cy="274320"/>
-          </a:xfrm>
-          <a:prstGeom prst="ellipse">
-            <a:avLst/>
-          </a:prstGeom>
-          <a:solidFill>
-            <a:srgbClr val="113E6A"/>
-          </a:solidFill>
-          <a:ln>
-            <a:noFill/>
-          </a:ln>
-          <a:effectLst/>
-        </p:spPr>
-        <p:style>
-          <a:lnRef idx="1">
-            <a:schemeClr val="accent1"/>
-          </a:lnRef>
-          <a:fillRef idx="3">
-            <a:schemeClr val="accent1"/>
-          </a:fillRef>
-          <a:effectRef idx="2">
-            <a:schemeClr val="accent1"/>
-          </a:effectRef>
-          <a:fontRef idx="minor">
-            <a:schemeClr val="lt1"/>
-          </a:fontRef>
-        </p:style>
-        <p:txBody>
-          <a:bodyPr rtlCol="0" anchor="ctr" lIns="0" rIns="0" tIns="0" bIns="0"/>
-          <a:lstStyle/>
-          <a:p>
-            <a:pPr algn="ctr"/>
-            <a:r>
-              <a:rPr sz="1000" b="1">
-                <a:solidFill>
-                  <a:srgbClr val="FFFFFF"/>
-                </a:solidFill>
-                <a:latin typeface="Arial"/>
-                <a:ea typeface="微软雅黑"/>
-              </a:rPr>
-              <a:t>04</a:t>
-            </a:r>
-          </a:p>
-        </p:txBody>
-      </p:sp>
-      <p:sp>
-        <p:nvSpPr>
-          <p:cNvPr id="9015" name="TextBox 9014"/>
-          <p:cNvSpPr txBox="1"/>
-          <p:nvPr/>
-        </p:nvSpPr>
-        <p:spPr>
-          <a:xfrm>
-            <a:off x="1078992" y="3648456"/>
-            <a:ext cx="2877312" cy="1243584"/>
-          </a:xfrm>
-          <a:prstGeom prst="rect">
-            <a:avLst/>
-          </a:prstGeom>
-          <a:noFill/>
-        </p:spPr>
-        <p:txBody>
-          <a:bodyPr wrap="square" anchor="t" lIns="0" rIns="0" tIns="0" bIns="0">
-            <a:spAutoFit/>
-          </a:bodyPr>
-          <a:lstStyle/>
-          <a:p>
-            <a:pPr algn="l"/>
-            <a:r>
-              <a:rPr sz="1400" b="1">
-                <a:solidFill>
-                  <a:srgbClr val="113E6A"/>
-                </a:solidFill>
-                <a:latin typeface="Arial"/>
-                <a:ea typeface="微软雅黑"/>
-              </a:rPr>
-              <a:t>创新 1 · ENO 架构</a:t>
-            </a:r>
-          </a:p>
-          <a:p>
-            <a:pPr algn="l">
-              <a:lnSpc>
-                <a:spcPct val="110000"/>
-              </a:lnSpc>
-              <a:spcBef>
-                <a:spcPts val="400"/>
-              </a:spcBef>
-            </a:pPr>
-            <a:r>
-              <a:rPr sz="1250" b="0">
-                <a:solidFill>
-                  <a:srgbClr val="2E2C2C"/>
-                </a:solidFill>
-                <a:latin typeface="Arial"/>
-                <a:ea typeface="微软雅黑"/>
-              </a:rPr>
-              <a:t>单 Dispatcher、多独立 Scheduler；吞吐提升来自去掉跨进程绑定链路，不是换调度算法</a:t>
-            </a:r>
-          </a:p>
-        </p:txBody>
-      </p:sp>
-      <p:sp>
-        <p:nvSpPr>
-          <p:cNvPr id="9016" name="Rounded Rectangle 9015"/>
-          <p:cNvSpPr/>
-          <p:nvPr/>
-        </p:nvSpPr>
-        <p:spPr>
-          <a:xfrm>
-            <a:off x="4340351" y="3511296"/>
-            <a:ext cx="3517391" cy="1444752"/>
-          </a:xfrm>
-          <a:prstGeom prst="roundRect">
-            <a:avLst/>
-          </a:prstGeom>
-          <a:solidFill>
-            <a:srgbClr val="FFFFFF"/>
-          </a:solidFill>
-          <a:ln w="9525">
-            <a:solidFill>
-              <a:srgbClr val="D6E3F0"/>
-            </a:solidFill>
-          </a:ln>
-          <a:effectLst/>
-        </p:spPr>
-        <p:style>
-          <a:lnRef idx="1">
-            <a:schemeClr val="accent1"/>
-          </a:lnRef>
-          <a:fillRef idx="3">
-            <a:schemeClr val="accent1"/>
-          </a:fillRef>
-          <a:effectRef idx="2">
-            <a:schemeClr val="accent1"/>
-          </a:effectRef>
-          <a:fontRef idx="minor">
-            <a:schemeClr val="lt1"/>
-          </a:fontRef>
-        </p:style>
-        <p:txBody>
-          <a:bodyPr rtlCol="0" anchor="ctr"/>
-          <a:lstStyle/>
-          <a:p>
-            <a:pPr algn="ctr"/>
-          </a:p>
-        </p:txBody>
-      </p:sp>
-      <p:sp>
-        <p:nvSpPr>
-          <p:cNvPr id="9017" name="Oval 9016"/>
-          <p:cNvSpPr/>
-          <p:nvPr/>
-        </p:nvSpPr>
-        <p:spPr>
-          <a:xfrm>
-            <a:off x="4486656" y="3648456"/>
-            <a:ext cx="274320" cy="274320"/>
-          </a:xfrm>
-          <a:prstGeom prst="ellipse">
-            <a:avLst/>
-          </a:prstGeom>
-          <a:solidFill>
-            <a:srgbClr val="113E6A"/>
-          </a:solidFill>
-          <a:ln>
-            <a:noFill/>
-          </a:ln>
-          <a:effectLst/>
-        </p:spPr>
-        <p:style>
-          <a:lnRef idx="1">
-            <a:schemeClr val="accent1"/>
-          </a:lnRef>
-          <a:fillRef idx="3">
-            <a:schemeClr val="accent1"/>
-          </a:fillRef>
-          <a:effectRef idx="2">
-            <a:schemeClr val="accent1"/>
-          </a:effectRef>
-          <a:fontRef idx="minor">
-            <a:schemeClr val="lt1"/>
-          </a:fontRef>
-        </p:style>
-        <p:txBody>
-          <a:bodyPr rtlCol="0" anchor="ctr" lIns="0" rIns="0" tIns="0" bIns="0"/>
-          <a:lstStyle/>
-          <a:p>
-            <a:pPr algn="ctr"/>
-            <a:r>
-              <a:rPr sz="1000" b="1">
-                <a:solidFill>
-                  <a:srgbClr val="FFFFFF"/>
-                </a:solidFill>
-                <a:latin typeface="Arial"/>
-                <a:ea typeface="微软雅黑"/>
-              </a:rPr>
-              <a:t>05</a:t>
-            </a:r>
-          </a:p>
-        </p:txBody>
-      </p:sp>
-      <p:sp>
-        <p:nvSpPr>
-          <p:cNvPr id="9018" name="TextBox 9017"/>
-          <p:cNvSpPr txBox="1"/>
-          <p:nvPr/>
-        </p:nvSpPr>
-        <p:spPr>
-          <a:xfrm>
-            <a:off x="4852416" y="3648456"/>
-            <a:ext cx="2877312" cy="1243584"/>
-          </a:xfrm>
-          <a:prstGeom prst="rect">
-            <a:avLst/>
-          </a:prstGeom>
-          <a:noFill/>
-        </p:spPr>
-        <p:txBody>
-          <a:bodyPr wrap="square" anchor="t" lIns="0" rIns="0" tIns="0" bIns="0">
-            <a:spAutoFit/>
-          </a:bodyPr>
-          <a:lstStyle/>
-          <a:p>
-            <a:pPr algn="l"/>
-            <a:r>
-              <a:rPr sz="1400" b="1">
-                <a:solidFill>
-                  <a:srgbClr val="113E6A"/>
-                </a:solidFill>
-                <a:latin typeface="Arial"/>
-                <a:ea typeface="微软雅黑"/>
-              </a:rPr>
-              <a:t>创新 2 · 四层容错</a:t>
-            </a:r>
-          </a:p>
-          <a:p>
-            <a:pPr algn="l">
-              <a:lnSpc>
-                <a:spcPct val="110000"/>
-              </a:lnSpc>
-              <a:spcBef>
-                <a:spcPts val="400"/>
-              </a:spcBef>
-            </a:pPr>
-            <a:r>
-              <a:rPr sz="1250" b="0">
-                <a:solidFill>
-                  <a:srgbClr val="2E2C2C"/>
-                </a:solidFill>
-                <a:latin typeface="Arial"/>
-                <a:ea typeface="微软雅黑"/>
-              </a:rPr>
-              <a:t>面向分区归属漂移与实例失活；每层对应一类 etcd 语义，守住至多绑定一次</a:t>
-            </a:r>
-          </a:p>
-        </p:txBody>
-      </p:sp>
-      <p:sp>
-        <p:nvSpPr>
-          <p:cNvPr id="9019" name="Rounded Rectangle 9018"/>
-          <p:cNvSpPr/>
-          <p:nvPr/>
-        </p:nvSpPr>
-        <p:spPr>
-          <a:xfrm>
-            <a:off x="8113775" y="3511296"/>
-            <a:ext cx="3517391" cy="1444752"/>
-          </a:xfrm>
-          <a:prstGeom prst="roundRect">
-            <a:avLst/>
-          </a:prstGeom>
-          <a:solidFill>
-            <a:srgbClr val="FFFFFF"/>
-          </a:solidFill>
-          <a:ln w="9525">
-            <a:solidFill>
-              <a:srgbClr val="D6E3F0"/>
-            </a:solidFill>
-          </a:ln>
-          <a:effectLst/>
-        </p:spPr>
-        <p:style>
-          <a:lnRef idx="1">
-            <a:schemeClr val="accent1"/>
-          </a:lnRef>
-          <a:fillRef idx="3">
-            <a:schemeClr val="accent1"/>
-          </a:fillRef>
-          <a:effectRef idx="2">
-            <a:schemeClr val="accent1"/>
-          </a:effectRef>
-          <a:fontRef idx="minor">
-            <a:schemeClr val="lt1"/>
-          </a:fontRef>
-        </p:style>
-        <p:txBody>
-          <a:bodyPr rtlCol="0" anchor="ctr"/>
-          <a:lstStyle/>
-          <a:p>
-            <a:pPr algn="ctr"/>
-          </a:p>
-        </p:txBody>
-      </p:sp>
-      <p:sp>
-        <p:nvSpPr>
-          <p:cNvPr id="9020" name="Oval 9019"/>
-          <p:cNvSpPr/>
-          <p:nvPr/>
-        </p:nvSpPr>
-        <p:spPr>
-          <a:xfrm>
-            <a:off x="8260079" y="3648456"/>
-            <a:ext cx="274320" cy="274320"/>
-          </a:xfrm>
-          <a:prstGeom prst="ellipse">
-            <a:avLst/>
-          </a:prstGeom>
-          <a:solidFill>
-            <a:srgbClr val="113E6A"/>
-          </a:solidFill>
-          <a:ln>
-            <a:noFill/>
-          </a:ln>
-          <a:effectLst/>
-        </p:spPr>
-        <p:style>
-          <a:lnRef idx="1">
-            <a:schemeClr val="accent1"/>
-          </a:lnRef>
-          <a:fillRef idx="3">
-            <a:schemeClr val="accent1"/>
-          </a:fillRef>
-          <a:effectRef idx="2">
-            <a:schemeClr val="accent1"/>
-          </a:effectRef>
-          <a:fontRef idx="minor">
-            <a:schemeClr val="lt1"/>
-          </a:fontRef>
-        </p:style>
-        <p:txBody>
-          <a:bodyPr rtlCol="0" anchor="ctr" lIns="0" rIns="0" tIns="0" bIns="0"/>
-          <a:lstStyle/>
-          <a:p>
-            <a:pPr algn="ctr"/>
-            <a:r>
-              <a:rPr sz="1000" b="1">
-                <a:solidFill>
-                  <a:srgbClr val="FFFFFF"/>
-                </a:solidFill>
-                <a:latin typeface="Arial"/>
-                <a:ea typeface="微软雅黑"/>
-              </a:rPr>
-              <a:t>06</a:t>
-            </a:r>
-          </a:p>
-        </p:txBody>
-      </p:sp>
-      <p:sp>
-        <p:nvSpPr>
-          <p:cNvPr id="9021" name="TextBox 9020"/>
-          <p:cNvSpPr txBox="1"/>
-          <p:nvPr/>
-        </p:nvSpPr>
-        <p:spPr>
-          <a:xfrm>
-            <a:off x="8625839" y="3648456"/>
-            <a:ext cx="2877312" cy="1243584"/>
-          </a:xfrm>
-          <a:prstGeom prst="rect">
-            <a:avLst/>
-          </a:prstGeom>
-          <a:noFill/>
-        </p:spPr>
-        <p:txBody>
-          <a:bodyPr wrap="square" anchor="t" lIns="0" rIns="0" tIns="0" bIns="0">
-            <a:spAutoFit/>
-          </a:bodyPr>
-          <a:lstStyle/>
-          <a:p>
-            <a:pPr algn="l"/>
-            <a:r>
-              <a:rPr sz="1400" b="1">
-                <a:solidFill>
-                  <a:srgbClr val="113E6A"/>
-                </a:solidFill>
-                <a:latin typeface="Arial"/>
-                <a:ea typeface="微软雅黑"/>
-              </a:rPr>
-              <a:t>主场景读数（s3/w3）</a:t>
-            </a:r>
-          </a:p>
-          <a:p>
-            <a:pPr algn="l">
-              <a:lnSpc>
-                <a:spcPct val="110000"/>
-              </a:lnSpc>
-              <a:spcBef>
-                <a:spcPts val="400"/>
-              </a:spcBef>
-            </a:pPr>
-            <a:r>
-              <a:rPr sz="1250" b="0">
-                <a:solidFill>
-                  <a:srgbClr val="2E2C2C"/>
-                </a:solidFill>
-                <a:latin typeface="Arial"/>
-                <a:ea typeface="微软雅黑"/>
-              </a:rPr>
-              <a:t>P99 32.57 → 16.22 s（inst1）、0.13 vs 0.15 s（inst3）；有效吞吐 +5.1%~+21.7%</a:t>
-            </a:r>
-          </a:p>
-        </p:txBody>
-      </p:sp>
-      <p:sp>
-        <p:nvSpPr>
-          <p:cNvPr id="9022" name="TextBox 9021"/>
-          <p:cNvSpPr txBox="1"/>
-          <p:nvPr/>
-        </p:nvSpPr>
-        <p:spPr>
-          <a:xfrm>
-            <a:off x="566928" y="5175504"/>
-            <a:ext cx="11064240" cy="777240"/>
-          </a:xfrm>
-          <a:prstGeom prst="rect">
-            <a:avLst/>
-          </a:prstGeom>
-          <a:noFill/>
-        </p:spPr>
-        <p:txBody>
-          <a:bodyPr wrap="square" anchor="t" lIns="0" rIns="0" tIns="0" bIns="0">
-            <a:spAutoFit/>
-          </a:bodyPr>
-          <a:lstStyle/>
-          <a:p>
-            <a:pPr algn="l"/>
-            <a:r>
-              <a:rPr sz="1200" b="0">
-                <a:solidFill>
-                  <a:srgbClr val="636363"/>
-                </a:solidFill>
-                <a:latin typeface="Arial"/>
-                <a:ea typeface="微软雅黑"/>
-              </a:rPr>
-              <a:t>▪  副产出：16 个场景、144 次 run 的原始数据与脚本随本文开源</a:t>
-            </a:r>
-          </a:p>
-        </p:txBody>
-      </p:sp>
-      <p:sp>
-        <p:nvSpPr>
-          <p:cNvPr id="9023" name="TextBox 9022"/>
-          <p:cNvSpPr txBox="1"/>
-          <p:nvPr/>
-        </p:nvSpPr>
-        <p:spPr>
-          <a:xfrm>
-            <a:off x="10780776" y="6345936"/>
-            <a:ext cx="850392" cy="219456"/>
-          </a:xfrm>
-          <a:prstGeom prst="rect">
-            <a:avLst/>
-          </a:prstGeom>
-          <a:noFill/>
-        </p:spPr>
-        <p:txBody>
-          <a:bodyPr wrap="square" anchor="t" lIns="0" rIns="0" tIns="0" bIns="0">
-            <a:spAutoFit/>
-          </a:bodyPr>
-          <a:lstStyle/>
-          <a:p>
-            <a:pPr algn="r"/>
-            <a:r>
-              <a:rPr sz="950" b="0">
-                <a:solidFill>
-                  <a:srgbClr val="636363"/>
-                </a:solidFill>
-                <a:latin typeface="Arial"/>
-                <a:ea typeface="微软雅黑"/>
-              </a:rPr>
-              <a:t>23 / 24</a:t>
-            </a:r>
-          </a:p>
-        </p:txBody>
-      </p:sp>
-    </p:spTree>
-  </p:cSld>
-  <p:clrMapOvr>
-    <a:masterClrMapping/>
-  </p:clrMapOvr>
-</p:sld>
-</file>
-
-<file path=ppt/slides/slide24.xml><?xml version="1.0" encoding="utf-8"?>
 <p:sld xmlns:a="http://schemas.openxmlformats.org/drawingml/2006/main" xmlns:p="http://schemas.openxmlformats.org/presentationml/2006/main" xmlns:r="http://schemas.openxmlformats.org/officeDocument/2006/relationships">
   <p:cSld>
     <p:bg>
@@ -20985,7 +19579,7 @@
                 <a:latin typeface="Arial"/>
                 <a:ea typeface="微软雅黑"/>
               </a:rPr>
-              <a:t>24 / 24</a:t>
+              <a:t>23 / 23</a:t>
             </a:r>
           </a:p>
         </p:txBody>
@@ -20998,7 +19592,7 @@
 </p:sld>
 </file>
 
-<file path=ppt/slides/slide25.xml><?xml version="1.0" encoding="utf-8"?>
+<file path=ppt/slides/slide24.xml><?xml version="1.0" encoding="utf-8"?>
 <p:sld xmlns:a="http://schemas.openxmlformats.org/drawingml/2006/main" xmlns:p="http://schemas.openxmlformats.org/presentationml/2006/main" xmlns:r="http://schemas.openxmlformats.org/officeDocument/2006/relationships">
   <p:cSld>
     <p:bg>
@@ -22324,7 +20918,7 @@
 </p:sld>
 </file>
 
-<file path=ppt/slides/slide26.xml><?xml version="1.0" encoding="utf-8"?>
+<file path=ppt/slides/slide25.xml><?xml version="1.0" encoding="utf-8"?>
 <p:sld xmlns:a="http://schemas.openxmlformats.org/drawingml/2006/main" xmlns:p="http://schemas.openxmlformats.org/presentationml/2006/main" xmlns:r="http://schemas.openxmlformats.org/officeDocument/2006/relationships">
   <p:cSld>
     <p:bg>
@@ -23312,7 +21906,7 @@
 </p:sld>
 </file>
 
-<file path=ppt/slides/slide27.xml><?xml version="1.0" encoding="utf-8"?>
+<file path=ppt/slides/slide26.xml><?xml version="1.0" encoding="utf-8"?>
 <p:sld xmlns:a="http://schemas.openxmlformats.org/drawingml/2006/main" xmlns:p="http://schemas.openxmlformats.org/presentationml/2006/main" xmlns:r="http://schemas.openxmlformats.org/officeDocument/2006/relationships">
   <p:cSld>
     <p:bg>
@@ -23755,7 +22349,7 @@
 </p:sld>
 </file>
 
-<file path=ppt/slides/slide28.xml><?xml version="1.0" encoding="utf-8"?>
+<file path=ppt/slides/slide27.xml><?xml version="1.0" encoding="utf-8"?>
 <p:sld xmlns:a="http://schemas.openxmlformats.org/drawingml/2006/main" xmlns:p="http://schemas.openxmlformats.org/presentationml/2006/main" xmlns:r="http://schemas.openxmlformats.org/officeDocument/2006/relationships">
   <p:cSld>
     <p:bg>
@@ -24715,6 +23309,449 @@
 </p:sld>
 </file>
 
+<file path=ppt/slides/slide28.xml><?xml version="1.0" encoding="utf-8"?>
+<p:sld xmlns:a="http://schemas.openxmlformats.org/drawingml/2006/main" xmlns:p="http://schemas.openxmlformats.org/presentationml/2006/main" xmlns:r="http://schemas.openxmlformats.org/officeDocument/2006/relationships">
+  <p:cSld>
+    <p:bg>
+      <p:bgPr>
+        <a:solidFill>
+          <a:srgbClr val="FFFFFF"/>
+        </a:solidFill>
+        <a:effectLst/>
+      </p:bgPr>
+    </p:bg>
+    <p:spTree>
+      <p:nvGrpSpPr>
+        <p:cNvPr id="1" name=""/>
+        <p:cNvGrpSpPr/>
+        <p:nvPr/>
+      </p:nvGrpSpPr>
+      <p:grpSpPr/>
+      <p:sp>
+        <p:nvSpPr>
+          <p:cNvPr id="9000" name="Freeform 5"/>
+          <p:cNvSpPr/>
+          <p:nvPr/>
+        </p:nvSpPr>
+        <p:spPr>
+          <a:xfrm>
+            <a:off x="182880" y="274320"/>
+            <a:ext cx="310896" cy="402336"/>
+          </a:xfrm>
+          <a:custGeom>
+            <a:avLst/>
+            <a:gdLst/>
+            <a:ahLst/>
+            <a:cxnLst>
+              <a:cxn ang="0">
+                <a:pos x="2147483647" y="2147483647"/>
+              </a:cxn>
+              <a:cxn ang="0">
+                <a:pos x="2147483647" y="2147483647"/>
+              </a:cxn>
+              <a:cxn ang="0">
+                <a:pos x="2147483647" y="2147483647"/>
+              </a:cxn>
+              <a:cxn ang="0">
+                <a:pos x="2147483647" y="2147483647"/>
+              </a:cxn>
+              <a:cxn ang="0">
+                <a:pos x="2147483647" y="2147483647"/>
+              </a:cxn>
+              <a:cxn ang="0">
+                <a:pos x="2147483647" y="2147483647"/>
+              </a:cxn>
+              <a:cxn ang="0">
+                <a:pos x="2147483647" y="2147483647"/>
+              </a:cxn>
+              <a:cxn ang="0">
+                <a:pos x="2147483647" y="2147483647"/>
+              </a:cxn>
+              <a:cxn ang="0">
+                <a:pos x="2147483647" y="0"/>
+              </a:cxn>
+              <a:cxn ang="0">
+                <a:pos x="2147483647" y="2147483647"/>
+              </a:cxn>
+              <a:cxn ang="0">
+                <a:pos x="2147483647" y="2147483647"/>
+              </a:cxn>
+              <a:cxn ang="0">
+                <a:pos x="2147483647" y="2147483647"/>
+              </a:cxn>
+              <a:cxn ang="0">
+                <a:pos x="2147483647" y="2147483647"/>
+              </a:cxn>
+              <a:cxn ang="0">
+                <a:pos x="2147483647" y="2147483647"/>
+              </a:cxn>
+              <a:cxn ang="0">
+                <a:pos x="2147483647" y="2147483647"/>
+              </a:cxn>
+              <a:cxn ang="0">
+                <a:pos x="2147483647" y="2147483647"/>
+              </a:cxn>
+              <a:cxn ang="0">
+                <a:pos x="2147483647" y="2147483647"/>
+              </a:cxn>
+              <a:cxn ang="0">
+                <a:pos x="2147483647" y="2147483647"/>
+              </a:cxn>
+              <a:cxn ang="0">
+                <a:pos x="2147483647" y="2147483647"/>
+              </a:cxn>
+              <a:cxn ang="0">
+                <a:pos x="0" y="2147483647"/>
+              </a:cxn>
+              <a:cxn ang="0">
+                <a:pos x="2147483647" y="2147483647"/>
+              </a:cxn>
+            </a:cxnLst>
+            <a:rect l="0" t="0" r="0" b="0"/>
+            <a:pathLst>
+              <a:path w="574" h="681">
+                <a:moveTo>
+                  <a:pt x="120" y="441"/>
+                </a:moveTo>
+                <a:cubicBezTo>
+                  <a:pt x="153" y="441"/>
+                  <a:pt x="183" y="454"/>
+                  <a:pt x="205" y="476"/>
+                </a:cubicBezTo>
+                <a:lnTo>
+                  <a:pt x="389" y="329"/>
+                </a:lnTo>
+                <a:cubicBezTo>
+                  <a:pt x="383" y="317"/>
+                  <a:pt x="380" y="303"/>
+                  <a:pt x="380" y="289"/>
+                </a:cubicBezTo>
+                <a:cubicBezTo>
+                  <a:pt x="380" y="271"/>
+                  <a:pt x="384" y="255"/>
+                  <a:pt x="392" y="241"/>
+                </a:cubicBezTo>
+                <a:lnTo>
+                  <a:pt x="270" y="138"/>
+                </a:lnTo>
+                <a:cubicBezTo>
+                  <a:pt x="256" y="151"/>
+                  <a:pt x="237" y="159"/>
+                  <a:pt x="217" y="159"/>
+                </a:cubicBezTo>
+                <a:cubicBezTo>
+                  <a:pt x="173" y="159"/>
+                  <a:pt x="137" y="123"/>
+                  <a:pt x="137" y="79"/>
+                </a:cubicBezTo>
+                <a:cubicBezTo>
+                  <a:pt x="137" y="36"/>
+                  <a:pt x="173" y="0"/>
+                  <a:pt x="217" y="0"/>
+                </a:cubicBezTo>
+                <a:cubicBezTo>
+                  <a:pt x="260" y="0"/>
+                  <a:pt x="296" y="36"/>
+                  <a:pt x="296" y="79"/>
+                </a:cubicBezTo>
+                <a:cubicBezTo>
+                  <a:pt x="296" y="91"/>
+                  <a:pt x="293" y="103"/>
+                  <a:pt x="289" y="113"/>
+                </a:cubicBezTo>
+                <a:lnTo>
+                  <a:pt x="412" y="217"/>
+                </a:lnTo>
+                <a:cubicBezTo>
+                  <a:pt x="429" y="201"/>
+                  <a:pt x="452" y="192"/>
+                  <a:pt x="477" y="192"/>
+                </a:cubicBezTo>
+                <a:cubicBezTo>
+                  <a:pt x="530" y="192"/>
+                  <a:pt x="574" y="235"/>
+                  <a:pt x="574" y="289"/>
+                </a:cubicBezTo>
+                <a:cubicBezTo>
+                  <a:pt x="574" y="342"/>
+                  <a:pt x="530" y="386"/>
+                  <a:pt x="477" y="386"/>
+                </a:cubicBezTo>
+                <a:cubicBezTo>
+                  <a:pt x="449" y="386"/>
+                  <a:pt x="424" y="374"/>
+                  <a:pt x="406" y="355"/>
+                </a:cubicBezTo>
+                <a:lnTo>
+                  <a:pt x="224" y="501"/>
+                </a:lnTo>
+                <a:cubicBezTo>
+                  <a:pt x="234" y="518"/>
+                  <a:pt x="240" y="539"/>
+                  <a:pt x="240" y="561"/>
+                </a:cubicBezTo>
+                <a:cubicBezTo>
+                  <a:pt x="240" y="627"/>
+                  <a:pt x="186" y="681"/>
+                  <a:pt x="120" y="681"/>
+                </a:cubicBezTo>
+                <a:cubicBezTo>
+                  <a:pt x="54" y="681"/>
+                  <a:pt x="0" y="627"/>
+                  <a:pt x="0" y="561"/>
+                </a:cubicBezTo>
+                <a:cubicBezTo>
+                  <a:pt x="0" y="495"/>
+                  <a:pt x="54" y="441"/>
+                  <a:pt x="120" y="441"/>
+                </a:cubicBezTo>
+                <a:close/>
+              </a:path>
+            </a:pathLst>
+          </a:custGeom>
+          <a:solidFill>
+            <a:srgbClr val="113E6A"/>
+          </a:solidFill>
+          <a:ln w="9525">
+            <a:noFill/>
+          </a:ln>
+        </p:spPr>
+        <p:txBody>
+          <a:bodyPr/>
+          <a:lstStyle/>
+          <a:p>
+            <a:endParaRPr lang="zh-CN" altLang="en-US"/>
+          </a:p>
+        </p:txBody>
+      </p:sp>
+      <p:pic>
+        <p:nvPicPr>
+          <p:cNvPr id="9001" name="Picture 9000" descr="beihang-logo-navy.png"/>
+          <p:cNvPicPr>
+            <a:picLocks noChangeAspect="1"/>
+          </p:cNvPicPr>
+          <p:nvPr/>
+        </p:nvPicPr>
+        <p:blipFill>
+          <a:blip r:embed="rId2"/>
+          <a:stretch>
+            <a:fillRect/>
+          </a:stretch>
+        </p:blipFill>
+        <p:spPr>
+          <a:xfrm>
+            <a:off x="9336024" y="91665"/>
+            <a:ext cx="2642616" cy="502469"/>
+          </a:xfrm>
+          <a:prstGeom prst="rect">
+            <a:avLst/>
+          </a:prstGeom>
+        </p:spPr>
+      </p:pic>
+      <p:sp>
+        <p:nvSpPr>
+          <p:cNvPr id="9002" name="TextBox 9001"/>
+          <p:cNvSpPr txBox="1"/>
+          <p:nvPr/>
+        </p:nvSpPr>
+        <p:spPr>
+          <a:xfrm>
+            <a:off x="566928" y="155448"/>
+            <a:ext cx="8549640" cy="621792"/>
+          </a:xfrm>
+          <a:prstGeom prst="rect">
+            <a:avLst/>
+          </a:prstGeom>
+          <a:noFill/>
+        </p:spPr>
+        <p:txBody>
+          <a:bodyPr wrap="square" anchor="ctr" lIns="0" rIns="0" tIns="0" bIns="0">
+            <a:spAutoFit/>
+          </a:bodyPr>
+          <a:lstStyle/>
+          <a:p>
+            <a:pPr algn="l">
+              <a:lnSpc>
+                <a:spcPct val="100000"/>
+              </a:lnSpc>
+            </a:pPr>
+            <a:r>
+              <a:rPr sz="3000" b="1">
+                <a:solidFill>
+                  <a:srgbClr val="113E6A"/>
+                </a:solidFill>
+                <a:latin typeface="Arial"/>
+                <a:ea typeface="微软雅黑"/>
+              </a:rPr>
+              <a:t>资源公平性与未量化的资源收益</a:t>
+            </a:r>
+          </a:p>
+        </p:txBody>
+      </p:sp>
+      <p:sp>
+        <p:nvSpPr>
+          <p:cNvPr id="9003" name="TextBox 9002"/>
+          <p:cNvSpPr txBox="1"/>
+          <p:nvPr/>
+        </p:nvSpPr>
+        <p:spPr>
+          <a:xfrm>
+            <a:off x="566928" y="1261872"/>
+            <a:ext cx="10881360" cy="438912"/>
+          </a:xfrm>
+          <a:prstGeom prst="rect">
+            <a:avLst/>
+          </a:prstGeom>
+          <a:noFill/>
+        </p:spPr>
+        <p:txBody>
+          <a:bodyPr wrap="square" anchor="ctr" lIns="0" rIns="0" tIns="0" bIns="0">
+            <a:spAutoFit/>
+          </a:bodyPr>
+          <a:lstStyle/>
+          <a:p>
+            <a:pPr algn="l">
+              <a:lnSpc>
+                <a:spcPct val="110000"/>
+              </a:lnSpc>
+            </a:pPr>
+            <a:r>
+              <a:rPr sz="1800" b="1">
+                <a:solidFill>
+                  <a:srgbClr val="0070C0"/>
+                </a:solidFill>
+                <a:latin typeface="Arial"/>
+                <a:ea typeface="微软雅黑"/>
+              </a:rPr>
+              <a:t>每 Deployment 同规格，对 ENO 略不利</a:t>
+            </a:r>
+          </a:p>
+        </p:txBody>
+      </p:sp>
+      <p:sp>
+        <p:nvSpPr>
+          <p:cNvPr id="9004" name="TextBox 9003"/>
+          <p:cNvSpPr txBox="1"/>
+          <p:nvPr/>
+        </p:nvSpPr>
+        <p:spPr>
+          <a:xfrm>
+            <a:off x="566928" y="1965960"/>
+            <a:ext cx="10607040" cy="1417320"/>
+          </a:xfrm>
+          <a:prstGeom prst="rect">
+            <a:avLst/>
+          </a:prstGeom>
+          <a:noFill/>
+        </p:spPr>
+        <p:txBody>
+          <a:bodyPr wrap="square" anchor="t" lIns="0" rIns="0" tIns="0" bIns="0">
+            <a:spAutoFit/>
+          </a:bodyPr>
+          <a:lstStyle/>
+          <a:p>
+            <a:pPr algn="l">
+              <a:lnSpc>
+                <a:spcPct val="115000"/>
+              </a:lnSpc>
+            </a:pPr>
+            <a:r>
+              <a:rPr sz="1700" b="0">
+                <a:solidFill>
+                  <a:srgbClr val="2E2C2C"/>
+                </a:solidFill>
+                <a:latin typeface="Arial"/>
+                <a:ea typeface="微软雅黑"/>
+              </a:rPr>
+              <a:t>▪  Scheduler Pod 统一 2C/4G</a:t>
+            </a:r>
+          </a:p>
+          <a:p>
+            <a:pPr algn="l">
+              <a:lnSpc>
+                <a:spcPct val="115000"/>
+              </a:lnSpc>
+              <a:spcBef>
+                <a:spcPts val="1800"/>
+              </a:spcBef>
+            </a:pPr>
+            <a:r>
+              <a:rPr sz="1700" b="0">
+                <a:solidFill>
+                  <a:srgbClr val="2E2C2C"/>
+                </a:solidFill>
+                <a:latin typeface="Arial"/>
+                <a:ea typeface="微软雅黑"/>
+              </a:rPr>
+              <a:t>▪  ENO 少一个 Binder Deployment</a:t>
+            </a:r>
+          </a:p>
+          <a:p>
+            <a:pPr algn="l">
+              <a:lnSpc>
+                <a:spcPct val="115000"/>
+              </a:lnSpc>
+              <a:spcBef>
+                <a:spcPts val="1800"/>
+              </a:spcBef>
+            </a:pPr>
+            <a:r>
+              <a:rPr sz="1700" b="0">
+                <a:solidFill>
+                  <a:srgbClr val="2E2C2C"/>
+                </a:solidFill>
+                <a:latin typeface="Arial"/>
+                <a:ea typeface="微软雅黑"/>
+              </a:rPr>
+              <a:t>▪  集群总资源收益未量化</a:t>
+            </a:r>
+          </a:p>
+        </p:txBody>
+      </p:sp>
+      <p:sp>
+        <p:nvSpPr>
+          <p:cNvPr id="9005" name="TextBox 9004"/>
+          <p:cNvSpPr txBox="1"/>
+          <p:nvPr/>
+        </p:nvSpPr>
+        <p:spPr>
+          <a:xfrm>
+            <a:off x="10780776" y="6345936"/>
+            <a:ext cx="850392" cy="219456"/>
+          </a:xfrm>
+          <a:prstGeom prst="rect">
+            <a:avLst/>
+          </a:prstGeom>
+          <a:noFill/>
+        </p:spPr>
+        <p:txBody>
+          <a:bodyPr wrap="square" anchor="t" lIns="0" rIns="0" tIns="0" bIns="0">
+            <a:spAutoFit/>
+          </a:bodyPr>
+          <a:lstStyle/>
+          <a:p>
+            <a:pPr algn="r"/>
+            <a:r>
+              <a:rPr sz="950" b="0">
+                <a:solidFill>
+                  <a:srgbClr val="636363"/>
+                </a:solidFill>
+                <a:latin typeface="Arial"/>
+                <a:ea typeface="微软雅黑"/>
+              </a:rPr>
+              <a:t>B5</a:t>
+            </a:r>
+          </a:p>
+        </p:txBody>
+      </p:sp>
+    </p:spTree>
+  </p:cSld>
+  <p:clrMapOvr>
+    <a:masterClrMapping/>
+  </p:clrMapOvr>
+</p:sld>
+</file>
+
 <file path=ppt/slides/slide29.xml><?xml version="1.0" encoding="utf-8"?>
 <p:sld xmlns:a="http://schemas.openxmlformats.org/drawingml/2006/main" xmlns:p="http://schemas.openxmlformats.org/presentationml/2006/main" xmlns:r="http://schemas.openxmlformats.org/officeDocument/2006/relationships">
   <p:cSld>
@@ -24989,7 +24026,7 @@
                 <a:latin typeface="Arial"/>
                 <a:ea typeface="微软雅黑"/>
               </a:rPr>
-              <a:t>资源公平性与未量化的资源收益</a:t>
+              <a:t>一键复现</a:t>
             </a:r>
           </a:p>
         </p:txBody>
@@ -25029,7 +24066,7 @@
                 <a:latin typeface="Arial"/>
                 <a:ea typeface="微软雅黑"/>
               </a:rPr>
-              <a:t>每 Deployment 同规格，对 ENO 略不利</a:t>
+              <a:t>从零到结果的全部入口</a:t>
             </a:r>
           </a:p>
         </p:txBody>
@@ -25069,7 +24106,7 @@
                 <a:latin typeface="Arial"/>
                 <a:ea typeface="微软雅黑"/>
               </a:rPr>
-              <a:t>▪  Scheduler Pod 统一 2C/4G</a:t>
+              <a:t>▪  run-experiment.sh：12 步实验流程</a:t>
             </a:r>
           </a:p>
           <a:p>
@@ -25089,7 +24126,7 @@
                 <a:latin typeface="Arial"/>
                 <a:ea typeface="微软雅黑"/>
               </a:rPr>
-              <a:t>▪  ENO 少一个 Binder Deployment</a:t>
+              <a:t>▪  plot-results.py / collect/：聚合与出图</a:t>
             </a:r>
           </a:p>
           <a:p>
@@ -25109,7 +24146,7 @@
                 <a:latin typeface="Arial"/>
                 <a:ea typeface="微软雅黑"/>
               </a:rPr>
-              <a:t>▪  集群总资源收益未量化</a:t>
+              <a:t>▪  results/compare/：16 场景产物</a:t>
             </a:r>
           </a:p>
         </p:txBody>
@@ -25145,7 +24182,7 @@
                 <a:latin typeface="Arial"/>
                 <a:ea typeface="微软雅黑"/>
               </a:rPr>
-              <a:t>B5</a:t>
+              <a:t>B6</a:t>
             </a:r>
           </a:p>
         </p:txBody>
@@ -26400,7 +25437,7 @@
                 <a:latin typeface="Arial"/>
                 <a:ea typeface="微软雅黑"/>
               </a:rPr>
-              <a:t>3 / 24</a:t>
+              <a:t>3 / 23</a:t>
             </a:r>
           </a:p>
         </p:txBody>
@@ -26687,449 +25724,6 @@
                 <a:latin typeface="Arial"/>
                 <a:ea typeface="微软雅黑"/>
               </a:rPr>
-              <a:t>一键复现</a:t>
-            </a:r>
-          </a:p>
-        </p:txBody>
-      </p:sp>
-      <p:sp>
-        <p:nvSpPr>
-          <p:cNvPr id="9003" name="TextBox 9002"/>
-          <p:cNvSpPr txBox="1"/>
-          <p:nvPr/>
-        </p:nvSpPr>
-        <p:spPr>
-          <a:xfrm>
-            <a:off x="566928" y="1261872"/>
-            <a:ext cx="10881360" cy="438912"/>
-          </a:xfrm>
-          <a:prstGeom prst="rect">
-            <a:avLst/>
-          </a:prstGeom>
-          <a:noFill/>
-        </p:spPr>
-        <p:txBody>
-          <a:bodyPr wrap="square" anchor="ctr" lIns="0" rIns="0" tIns="0" bIns="0">
-            <a:spAutoFit/>
-          </a:bodyPr>
-          <a:lstStyle/>
-          <a:p>
-            <a:pPr algn="l">
-              <a:lnSpc>
-                <a:spcPct val="110000"/>
-              </a:lnSpc>
-            </a:pPr>
-            <a:r>
-              <a:rPr sz="1800" b="1">
-                <a:solidFill>
-                  <a:srgbClr val="0070C0"/>
-                </a:solidFill>
-                <a:latin typeface="Arial"/>
-                <a:ea typeface="微软雅黑"/>
-              </a:rPr>
-              <a:t>从零到结果的全部入口</a:t>
-            </a:r>
-          </a:p>
-        </p:txBody>
-      </p:sp>
-      <p:sp>
-        <p:nvSpPr>
-          <p:cNvPr id="9004" name="TextBox 9003"/>
-          <p:cNvSpPr txBox="1"/>
-          <p:nvPr/>
-        </p:nvSpPr>
-        <p:spPr>
-          <a:xfrm>
-            <a:off x="566928" y="1965960"/>
-            <a:ext cx="10607040" cy="1417320"/>
-          </a:xfrm>
-          <a:prstGeom prst="rect">
-            <a:avLst/>
-          </a:prstGeom>
-          <a:noFill/>
-        </p:spPr>
-        <p:txBody>
-          <a:bodyPr wrap="square" anchor="t" lIns="0" rIns="0" tIns="0" bIns="0">
-            <a:spAutoFit/>
-          </a:bodyPr>
-          <a:lstStyle/>
-          <a:p>
-            <a:pPr algn="l">
-              <a:lnSpc>
-                <a:spcPct val="115000"/>
-              </a:lnSpc>
-            </a:pPr>
-            <a:r>
-              <a:rPr sz="1700" b="0">
-                <a:solidFill>
-                  <a:srgbClr val="2E2C2C"/>
-                </a:solidFill>
-                <a:latin typeface="Arial"/>
-                <a:ea typeface="微软雅黑"/>
-              </a:rPr>
-              <a:t>▪  run-experiment.sh：12 步实验流程</a:t>
-            </a:r>
-          </a:p>
-          <a:p>
-            <a:pPr algn="l">
-              <a:lnSpc>
-                <a:spcPct val="115000"/>
-              </a:lnSpc>
-              <a:spcBef>
-                <a:spcPts val="1800"/>
-              </a:spcBef>
-            </a:pPr>
-            <a:r>
-              <a:rPr sz="1700" b="0">
-                <a:solidFill>
-                  <a:srgbClr val="2E2C2C"/>
-                </a:solidFill>
-                <a:latin typeface="Arial"/>
-                <a:ea typeface="微软雅黑"/>
-              </a:rPr>
-              <a:t>▪  plot-results.py / collect/：聚合与出图</a:t>
-            </a:r>
-          </a:p>
-          <a:p>
-            <a:pPr algn="l">
-              <a:lnSpc>
-                <a:spcPct val="115000"/>
-              </a:lnSpc>
-              <a:spcBef>
-                <a:spcPts val="1800"/>
-              </a:spcBef>
-            </a:pPr>
-            <a:r>
-              <a:rPr sz="1700" b="0">
-                <a:solidFill>
-                  <a:srgbClr val="2E2C2C"/>
-                </a:solidFill>
-                <a:latin typeface="Arial"/>
-                <a:ea typeface="微软雅黑"/>
-              </a:rPr>
-              <a:t>▪  results/compare/：16 场景产物</a:t>
-            </a:r>
-          </a:p>
-        </p:txBody>
-      </p:sp>
-      <p:sp>
-        <p:nvSpPr>
-          <p:cNvPr id="9005" name="TextBox 9004"/>
-          <p:cNvSpPr txBox="1"/>
-          <p:nvPr/>
-        </p:nvSpPr>
-        <p:spPr>
-          <a:xfrm>
-            <a:off x="10780776" y="6345936"/>
-            <a:ext cx="850392" cy="219456"/>
-          </a:xfrm>
-          <a:prstGeom prst="rect">
-            <a:avLst/>
-          </a:prstGeom>
-          <a:noFill/>
-        </p:spPr>
-        <p:txBody>
-          <a:bodyPr wrap="square" anchor="t" lIns="0" rIns="0" tIns="0" bIns="0">
-            <a:spAutoFit/>
-          </a:bodyPr>
-          <a:lstStyle/>
-          <a:p>
-            <a:pPr algn="r"/>
-            <a:r>
-              <a:rPr sz="950" b="0">
-                <a:solidFill>
-                  <a:srgbClr val="636363"/>
-                </a:solidFill>
-                <a:latin typeface="Arial"/>
-                <a:ea typeface="微软雅黑"/>
-              </a:rPr>
-              <a:t>B6</a:t>
-            </a:r>
-          </a:p>
-        </p:txBody>
-      </p:sp>
-    </p:spTree>
-  </p:cSld>
-  <p:clrMapOvr>
-    <a:masterClrMapping/>
-  </p:clrMapOvr>
-</p:sld>
-</file>
-
-<file path=ppt/slides/slide31.xml><?xml version="1.0" encoding="utf-8"?>
-<p:sld xmlns:a="http://schemas.openxmlformats.org/drawingml/2006/main" xmlns:p="http://schemas.openxmlformats.org/presentationml/2006/main" xmlns:r="http://schemas.openxmlformats.org/officeDocument/2006/relationships">
-  <p:cSld>
-    <p:bg>
-      <p:bgPr>
-        <a:solidFill>
-          <a:srgbClr val="FFFFFF"/>
-        </a:solidFill>
-        <a:effectLst/>
-      </p:bgPr>
-    </p:bg>
-    <p:spTree>
-      <p:nvGrpSpPr>
-        <p:cNvPr id="1" name=""/>
-        <p:cNvGrpSpPr/>
-        <p:nvPr/>
-      </p:nvGrpSpPr>
-      <p:grpSpPr/>
-      <p:sp>
-        <p:nvSpPr>
-          <p:cNvPr id="9000" name="Freeform 5"/>
-          <p:cNvSpPr/>
-          <p:nvPr/>
-        </p:nvSpPr>
-        <p:spPr>
-          <a:xfrm>
-            <a:off x="182880" y="274320"/>
-            <a:ext cx="310896" cy="402336"/>
-          </a:xfrm>
-          <a:custGeom>
-            <a:avLst/>
-            <a:gdLst/>
-            <a:ahLst/>
-            <a:cxnLst>
-              <a:cxn ang="0">
-                <a:pos x="2147483647" y="2147483647"/>
-              </a:cxn>
-              <a:cxn ang="0">
-                <a:pos x="2147483647" y="2147483647"/>
-              </a:cxn>
-              <a:cxn ang="0">
-                <a:pos x="2147483647" y="2147483647"/>
-              </a:cxn>
-              <a:cxn ang="0">
-                <a:pos x="2147483647" y="2147483647"/>
-              </a:cxn>
-              <a:cxn ang="0">
-                <a:pos x="2147483647" y="2147483647"/>
-              </a:cxn>
-              <a:cxn ang="0">
-                <a:pos x="2147483647" y="2147483647"/>
-              </a:cxn>
-              <a:cxn ang="0">
-                <a:pos x="2147483647" y="2147483647"/>
-              </a:cxn>
-              <a:cxn ang="0">
-                <a:pos x="2147483647" y="2147483647"/>
-              </a:cxn>
-              <a:cxn ang="0">
-                <a:pos x="2147483647" y="0"/>
-              </a:cxn>
-              <a:cxn ang="0">
-                <a:pos x="2147483647" y="2147483647"/>
-              </a:cxn>
-              <a:cxn ang="0">
-                <a:pos x="2147483647" y="2147483647"/>
-              </a:cxn>
-              <a:cxn ang="0">
-                <a:pos x="2147483647" y="2147483647"/>
-              </a:cxn>
-              <a:cxn ang="0">
-                <a:pos x="2147483647" y="2147483647"/>
-              </a:cxn>
-              <a:cxn ang="0">
-                <a:pos x="2147483647" y="2147483647"/>
-              </a:cxn>
-              <a:cxn ang="0">
-                <a:pos x="2147483647" y="2147483647"/>
-              </a:cxn>
-              <a:cxn ang="0">
-                <a:pos x="2147483647" y="2147483647"/>
-              </a:cxn>
-              <a:cxn ang="0">
-                <a:pos x="2147483647" y="2147483647"/>
-              </a:cxn>
-              <a:cxn ang="0">
-                <a:pos x="2147483647" y="2147483647"/>
-              </a:cxn>
-              <a:cxn ang="0">
-                <a:pos x="2147483647" y="2147483647"/>
-              </a:cxn>
-              <a:cxn ang="0">
-                <a:pos x="0" y="2147483647"/>
-              </a:cxn>
-              <a:cxn ang="0">
-                <a:pos x="2147483647" y="2147483647"/>
-              </a:cxn>
-            </a:cxnLst>
-            <a:rect l="0" t="0" r="0" b="0"/>
-            <a:pathLst>
-              <a:path w="574" h="681">
-                <a:moveTo>
-                  <a:pt x="120" y="441"/>
-                </a:moveTo>
-                <a:cubicBezTo>
-                  <a:pt x="153" y="441"/>
-                  <a:pt x="183" y="454"/>
-                  <a:pt x="205" y="476"/>
-                </a:cubicBezTo>
-                <a:lnTo>
-                  <a:pt x="389" y="329"/>
-                </a:lnTo>
-                <a:cubicBezTo>
-                  <a:pt x="383" y="317"/>
-                  <a:pt x="380" y="303"/>
-                  <a:pt x="380" y="289"/>
-                </a:cubicBezTo>
-                <a:cubicBezTo>
-                  <a:pt x="380" y="271"/>
-                  <a:pt x="384" y="255"/>
-                  <a:pt x="392" y="241"/>
-                </a:cubicBezTo>
-                <a:lnTo>
-                  <a:pt x="270" y="138"/>
-                </a:lnTo>
-                <a:cubicBezTo>
-                  <a:pt x="256" y="151"/>
-                  <a:pt x="237" y="159"/>
-                  <a:pt x="217" y="159"/>
-                </a:cubicBezTo>
-                <a:cubicBezTo>
-                  <a:pt x="173" y="159"/>
-                  <a:pt x="137" y="123"/>
-                  <a:pt x="137" y="79"/>
-                </a:cubicBezTo>
-                <a:cubicBezTo>
-                  <a:pt x="137" y="36"/>
-                  <a:pt x="173" y="0"/>
-                  <a:pt x="217" y="0"/>
-                </a:cubicBezTo>
-                <a:cubicBezTo>
-                  <a:pt x="260" y="0"/>
-                  <a:pt x="296" y="36"/>
-                  <a:pt x="296" y="79"/>
-                </a:cubicBezTo>
-                <a:cubicBezTo>
-                  <a:pt x="296" y="91"/>
-                  <a:pt x="293" y="103"/>
-                  <a:pt x="289" y="113"/>
-                </a:cubicBezTo>
-                <a:lnTo>
-                  <a:pt x="412" y="217"/>
-                </a:lnTo>
-                <a:cubicBezTo>
-                  <a:pt x="429" y="201"/>
-                  <a:pt x="452" y="192"/>
-                  <a:pt x="477" y="192"/>
-                </a:cubicBezTo>
-                <a:cubicBezTo>
-                  <a:pt x="530" y="192"/>
-                  <a:pt x="574" y="235"/>
-                  <a:pt x="574" y="289"/>
-                </a:cubicBezTo>
-                <a:cubicBezTo>
-                  <a:pt x="574" y="342"/>
-                  <a:pt x="530" y="386"/>
-                  <a:pt x="477" y="386"/>
-                </a:cubicBezTo>
-                <a:cubicBezTo>
-                  <a:pt x="449" y="386"/>
-                  <a:pt x="424" y="374"/>
-                  <a:pt x="406" y="355"/>
-                </a:cubicBezTo>
-                <a:lnTo>
-                  <a:pt x="224" y="501"/>
-                </a:lnTo>
-                <a:cubicBezTo>
-                  <a:pt x="234" y="518"/>
-                  <a:pt x="240" y="539"/>
-                  <a:pt x="240" y="561"/>
-                </a:cubicBezTo>
-                <a:cubicBezTo>
-                  <a:pt x="240" y="627"/>
-                  <a:pt x="186" y="681"/>
-                  <a:pt x="120" y="681"/>
-                </a:cubicBezTo>
-                <a:cubicBezTo>
-                  <a:pt x="54" y="681"/>
-                  <a:pt x="0" y="627"/>
-                  <a:pt x="0" y="561"/>
-                </a:cubicBezTo>
-                <a:cubicBezTo>
-                  <a:pt x="0" y="495"/>
-                  <a:pt x="54" y="441"/>
-                  <a:pt x="120" y="441"/>
-                </a:cubicBezTo>
-                <a:close/>
-              </a:path>
-            </a:pathLst>
-          </a:custGeom>
-          <a:solidFill>
-            <a:srgbClr val="113E6A"/>
-          </a:solidFill>
-          <a:ln w="9525">
-            <a:noFill/>
-          </a:ln>
-        </p:spPr>
-        <p:txBody>
-          <a:bodyPr/>
-          <a:lstStyle/>
-          <a:p>
-            <a:endParaRPr lang="zh-CN" altLang="en-US"/>
-          </a:p>
-        </p:txBody>
-      </p:sp>
-      <p:pic>
-        <p:nvPicPr>
-          <p:cNvPr id="9001" name="Picture 9000" descr="beihang-logo-navy.png"/>
-          <p:cNvPicPr>
-            <a:picLocks noChangeAspect="1"/>
-          </p:cNvPicPr>
-          <p:nvPr/>
-        </p:nvPicPr>
-        <p:blipFill>
-          <a:blip r:embed="rId2"/>
-          <a:stretch>
-            <a:fillRect/>
-          </a:stretch>
-        </p:blipFill>
-        <p:spPr>
-          <a:xfrm>
-            <a:off x="9336024" y="91665"/>
-            <a:ext cx="2642616" cy="502469"/>
-          </a:xfrm>
-          <a:prstGeom prst="rect">
-            <a:avLst/>
-          </a:prstGeom>
-        </p:spPr>
-      </p:pic>
-      <p:sp>
-        <p:nvSpPr>
-          <p:cNvPr id="9002" name="TextBox 9001"/>
-          <p:cNvSpPr txBox="1"/>
-          <p:nvPr/>
-        </p:nvSpPr>
-        <p:spPr>
-          <a:xfrm>
-            <a:off x="566928" y="155448"/>
-            <a:ext cx="8549640" cy="621792"/>
-          </a:xfrm>
-          <a:prstGeom prst="rect">
-            <a:avLst/>
-          </a:prstGeom>
-          <a:noFill/>
-        </p:spPr>
-        <p:txBody>
-          <a:bodyPr wrap="square" anchor="ctr" lIns="0" rIns="0" tIns="0" bIns="0">
-            <a:spAutoFit/>
-          </a:bodyPr>
-          <a:lstStyle/>
-          <a:p>
-            <a:pPr algn="l">
-              <a:lnSpc>
-                <a:spcPct val="100000"/>
-              </a:lnSpc>
-            </a:pPr>
-            <a:r>
-              <a:rPr sz="3000" b="1">
-                <a:solidFill>
-                  <a:srgbClr val="113E6A"/>
-                </a:solidFill>
-                <a:latin typeface="Arial"/>
-                <a:ea typeface="微软雅黑"/>
-              </a:rPr>
               <a:t>主场景 s3/w3 的时序形态（备用）</a:t>
             </a:r>
           </a:p>
@@ -28089,7 +26683,7 @@
                 <a:latin typeface="Arial"/>
                 <a:ea typeface="微软雅黑"/>
               </a:rPr>
-              <a:t>4 / 24</a:t>
+              <a:t>4 / 23</a:t>
             </a:r>
           </a:p>
         </p:txBody>
@@ -28874,7 +27468,7 @@
                 <a:latin typeface="Arial"/>
                 <a:ea typeface="微软雅黑"/>
               </a:rPr>
-              <a:t>5 / 24</a:t>
+              <a:t>5 / 23</a:t>
             </a:r>
           </a:p>
         </p:txBody>
@@ -29659,7 +28253,7 @@
                 <a:latin typeface="Arial"/>
                 <a:ea typeface="微软雅黑"/>
               </a:rPr>
-              <a:t>6 / 24</a:t>
+              <a:t>6 / 23</a:t>
             </a:r>
           </a:p>
         </p:txBody>
@@ -30444,7 +29038,7 @@
                 <a:latin typeface="Arial"/>
                 <a:ea typeface="微软雅黑"/>
               </a:rPr>
-              <a:t>7 / 24</a:t>
+              <a:t>7 / 23</a:t>
             </a:r>
           </a:p>
         </p:txBody>
@@ -30908,7 +29502,7 @@
                 <a:latin typeface="Arial"/>
                 <a:ea typeface="微软雅黑"/>
               </a:rPr>
-              <a:t>8 / 24</a:t>
+              <a:t>8 / 23</a:t>
             </a:r>
           </a:p>
         </p:txBody>
@@ -31693,7 +30287,7 @@
                 <a:latin typeface="Arial"/>
                 <a:ea typeface="微软雅黑"/>
               </a:rPr>
-              <a:t>9 / 24</a:t>
+              <a:t>9 / 23</a:t>
             </a:r>
           </a:p>
         </p:txBody>

--- a/docs/thesis/defense/答辩PPT-北航模板版.pptx
+++ b/docs/thesis/defense/答辩PPT-北航模板版.pptx
@@ -1546,7 +1546,7 @@
           <a:lstStyle/>
           <a:p>
             <a:r>
-              <a:t>和 Gödel 逐场景对比：16 个场景里 14 个领先，2 个持平，没有落后的，提升 2.0% 到 22.9%，平均 11.9%。优势最大的是高负载与多实例：s2/w3 高 22.9%，s3/w3 三实例高 21.7%。两个持平场景都没饱和，完成时间由注入速率决定。两个持平场景说明，未饱和时调度器再快也压不出更多吞吐。平均 11.9% 是 14 个领先场景提升幅度的均值。</a:t>
+              <a:t>这一页是给评委看“形态”的。左边吞吐，右边 P99，共享同一条时间轴。ENO 的平台更高、更早稳定；右边的 P99 峰值更低、回落更快。这两张图放在一起的意义是：我们的优势不是某个瞬时点上的抖动，而是整段完成时间都更短——这也正好解释了为什么有效吞吐这个口径对我们有利，因为它衡量的是固定工作量做多久做完。</a:t>
             </a:r>
           </a:p>
         </p:txBody>
@@ -1756,7 +1756,7 @@
           <a:lstStyle/>
           <a:p>
             <a:r>
-              <a:t>两件事。第一，规模从 5000 到 10000、实例数不变，两边都退化：ENO -15.2%，Gödel -2.3%；但 ENO 仍领先，吞吐 296.7 对 280.9 高 5.6%，P99 0.19 对 0.28 秒低 33.4%，队列峰值 9 对 61。第二，复杂负载：极限 +9.3% 与 +16.0%，突发 +21.3% 与 +2.8%，异构 s3 高 21.2%、s4 持平。s4 的退化与固定三实例有关，这写在局限里。规模翻倍而实例不扩，本身就是一个更苛刻的设定，不能当作扩展上限。</a:t>
+              <a:t>和 Gödel 逐场景对比：16 个场景里 14 个领先，2 个持平，没有落后的，提升 2.0% 到 22.9%，平均 11.9%。优势最大的是高负载与多实例：s2/w3 高 22.9%，s3/w3 三实例高 21.7%。两个持平场景都没饱和，完成时间由注入速率决定。两个持平场景说明，未饱和时调度器再快也压不出更多吞吐。平均 11.9% 是 14 个领先场景提升幅度的均值。</a:t>
             </a:r>
           </a:p>
         </p:txBody>
@@ -1896,7 +1896,7 @@
           <a:lstStyle/>
           <a:p>
             <a:r>
-              <a:t>第一场注入：s2/w2、三实例，第 30 秒把 10% 的节点、约 100 个，归属注解从 scheduler-0 改为 scheduler-1。NodeValidator 拦截 300 次，Dispatcher 回退 300 次，两条曲线重叠。拦截不等于丢弃：Pod 进回退队列被重分发，成功率仍是 1.00，总耗时 683 秒、只比基线多 3 秒。这组数字说明 Layer 0 只是把错误前置，不是把工作丢掉，代价几乎为零。拦截 300 次、回退 300 次，两边对得上，说明没有 Pod 被丢掉。</a:t>
+              <a:t>两件事。第一，规模从 5000 到 10000、实例数不变，两边都退化：ENO -15.2%，Gödel -2.3%；但 ENO 仍领先，吞吐 296.7 对 280.9 高 5.6%，P99 0.19 对 0.28 秒低 33.4%，队列峰值 9 对 61。第二，复杂负载：极限 +9.3% 与 +16.0%，突发 +21.3% 与 +2.8%，异构 s3 高 21.2%、s4 持平。s4 的退化与固定三实例有关，这写在局限里。规模翻倍而实例不扩，本身就是一个更苛刻的设定，不能当作扩展上限。</a:t>
             </a:r>
           </a:p>
         </p:txBody>
@@ -1966,7 +1966,7 @@
           <a:lstStyle/>
           <a:p>
             <a:r>
-              <a:t>第二场注入：第 10 秒杀掉 scheduler-0，停机 180 秒，实测中断 189 秒。看 kill 之后 90 秒的窗口：被杀实例只剩 68 次绑定，占该窗口 8407 次的 0.81%——它的份额被瞬间清零，而不是有 0.81% 的 Pod 丢了。同一窗口两个存活实例照常完成绑定，pending 峰值 353，之后 60 秒回落到 2；累计绑定 49607/50000，断言仍全过。代价是 784 秒、比基线多 104 秒。注意它比 180 秒停机短：另外三分之二的实例一直在工作，重排被并行吸收了。这是工作量重排的代价，不是数据损坏。对比基线是同一场景下的无故障运行，680 秒。队列在 353 之后回落到 2，说明积压是瞬时的。</a:t>
+              <a:t>第一场注入：s2/w2、三实例，第 30 秒把 10% 的节点、约 100 个，归属注解从 scheduler-0 改为 scheduler-1。NodeValidator 拦截 300 次，Dispatcher 回退 300 次，两条曲线重叠。拦截不等于丢弃：Pod 进回退队列被重分发，成功率仍是 1.00，总耗时 683 秒、只比基线多 3 秒。这组数字说明 Layer 0 只是把错误前置，不是把工作丢掉，代价几乎为零。拦截 300 次、回退 300 次，两边对得上，说明没有 Pod 被丢掉。</a:t>
             </a:r>
           </a:p>
         </p:txBody>
@@ -2036,7 +2036,7 @@
           <a:lstStyle/>
           <a:p>
             <a:r>
-              <a:t>这一页的局限按论文第 7 章讲三条。第一，Gang 场景的尾延迟反向：w6 下 ENO 单 Pod P99 高于 Gödel，我们的解释是同组预留等待、绑定调用与后续决策共用同一个进程和队列，但还没有用独立计时实验把这两段耗时分离开，所以如实列为未证实的归因。第二，KWOK 仿真：去掉了 kubelet、运行时、真实网络与磁盘 IO，绝对数值不能外推到生产，只能用于跨调度器的相对比较。第三，资源开销：公平策略是每个 Deployment 同规格，所以没有量化 ENO 移除整个 Binder Deployment 在集群总资源上的收益。对应的三个延伸方向是生产灰度、多 Dispatcher 分区协同、以及在 ENO 上叠加具体调度策略。</a:t>
+              <a:t>第二场注入：第 10 秒杀掉 scheduler-0，停机 180 秒，实测中断 189 秒。看 kill 之后 90 秒的窗口：被杀实例只剩 68 次绑定，占该窗口 8407 次的 0.81%——它的份额被瞬间清零，而不是有 0.81% 的 Pod 丢了。同一窗口两个存活实例照常完成绑定，pending 峰值 353，之后 60 秒回落到 2；累计绑定 49607/50000，断言仍全过。代价是 784 秒、比基线多 104 秒。注意它比 180 秒停机短：另外三分之二的实例一直在工作，重排被并行吸收了。这是工作量重排的代价，不是数据损坏。对比基线是同一场景下的无故障运行，680 秒。队列在 353 之后回落到 2，说明积压是瞬时的。</a:t>
             </a:r>
           </a:p>
         </p:txBody>
@@ -2106,7 +2106,7 @@
           <a:lstStyle/>
           <a:p>
             <a:r>
-              <a:t>汇报到这里。一句话总结：把 Binder 合并进 Scheduler 进程，用 etcd 原子语义上的四层容错守住“至多绑定一次”，在 16 个场景、144 次 run 上做到更高吞吐、更低尾延迟与 100% 绑定成功率。请各位老师批评指正。</a:t>
+              <a:t>这一页的局限按论文第 7 章讲三条。第一，Gang 场景的尾延迟反向：w6 下 ENO 单 Pod P99 高于 Gödel，我们的解释是同组预留等待、绑定调用与后续决策共用同一个进程和队列，但还没有用独立计时实验把这两段耗时分离开，所以如实列为未证实的归因。第二，KWOK 仿真：去掉了 kubelet、运行时、真实网络与磁盘 IO，绝对数值不能外推到生产，只能用于跨调度器的相对比较。第三，资源开销：公平策略是每个 Deployment 同规格，所以没有量化 ENO 移除整个 Binder Deployment 在集群总资源上的收益。对应的三个延伸方向是生产灰度、多 Dispatcher 分区协同、以及在 ENO 上叠加具体调度策略。</a:t>
             </a:r>
           </a:p>
         </p:txBody>
@@ -2176,7 +2176,7 @@
           <a:lstStyle/>
           <a:p>
             <a:r>
-              <a:t>备用页：抽查任意场景的原始数值。</a:t>
+              <a:t>汇报到这里。一句话总结：把 Binder 合并进 Scheduler 进程，用 etcd 原子语义上的四层容错守住“至多绑定一次”，在 16 个场景、144 次 run 上做到更高吞吐、更低尾延迟与 100% 绑定成功率。请各位老师批评指正。</a:t>
             </a:r>
           </a:p>
         </p:txBody>
@@ -2246,7 +2246,7 @@
           <a:lstStyle/>
           <a:p>
             <a:r>
-              <a:t>备用页：如果评委追问某个数字怎么算出来的，用这页回答。</a:t>
+              <a:t>备用页：抽查任意场景的原始数值。</a:t>
             </a:r>
           </a:p>
         </p:txBody>
@@ -2316,7 +2316,7 @@
           <a:lstStyle/>
           <a:p>
             <a:r>
-              <a:t>备用页：幸存者偏差的解释。过载时 Pod 根本没被处理，所以延迟看起来“很好”。</a:t>
+              <a:t>备用页：如果评委追问某个数字怎么算出来的，用这页回答。</a:t>
             </a:r>
           </a:p>
         </p:txBody>
@@ -2386,7 +2386,7 @@
           <a:lstStyle/>
           <a:p>
             <a:r>
-              <a:t>备用页：w6 反向结果的完整数据与解释。</a:t>
+              <a:t>备用页：幸存者偏差的解释。过载时 Pod 根本没被处理，所以延迟看起来“很好”。</a:t>
             </a:r>
           </a:p>
         </p:txBody>
@@ -2456,7 +2456,7 @@
           <a:lstStyle/>
           <a:p>
             <a:r>
-              <a:t>备用页：公平性与资源开销的口径说明。</a:t>
+              <a:t>备用页：w6 反向结果的完整数据与解释。</a:t>
             </a:r>
           </a:p>
         </p:txBody>
@@ -2526,7 +2526,7 @@
           <a:lstStyle/>
           <a:p>
             <a:r>
-              <a:t>备用页：评委问可复现性时展示。</a:t>
+              <a:t>备用页：公平性与资源开销的口径说明。</a:t>
             </a:r>
           </a:p>
         </p:txBody>
@@ -2666,7 +2666,7 @@
           <a:lstStyle/>
           <a:p>
             <a:r>
-              <a:t>备用页：这一页是给评委看“形态”的。左边吞吐，右边 P99，共享同一条时间轴。ENO 的平台更高、更早稳定；右边的 P99 峰值更低、回落更快。这两张图放在一起的意义是：我们的优势不是某个瞬时点上的抖动，而是整段完成时间都更短——这也正好解释了为什么有效吞吐这个口径对我们有利，因为它衡量的是固定工作量做多久做完。</a:t>
+              <a:t>备用页：评委问可复现性时展示。</a:t>
             </a:r>
           </a:p>
         </p:txBody>
@@ -7622,7 +7622,7 @@
                 <a:latin typeface="Arial"/>
                 <a:ea typeface="微软雅黑"/>
               </a:rPr>
-              <a:t>1 / 23</a:t>
+              <a:t>1 / 24</a:t>
             </a:r>
           </a:p>
         </p:txBody>
@@ -8929,7 +8929,7 @@
                 <a:latin typeface="Arial"/>
                 <a:ea typeface="微软雅黑"/>
               </a:rPr>
-              <a:t>10 / 23</a:t>
+              <a:t>10 / 24</a:t>
             </a:r>
           </a:p>
         </p:txBody>
@@ -9416,7 +9416,7 @@
                 <a:latin typeface="Arial"/>
                 <a:ea typeface="微软雅黑"/>
               </a:rPr>
-              <a:t>11 / 23</a:t>
+              <a:t>11 / 24</a:t>
             </a:r>
           </a:p>
         </p:txBody>
@@ -10335,7 +10335,7 @@
                 <a:latin typeface="Arial"/>
                 <a:ea typeface="微软雅黑"/>
               </a:rPr>
-              <a:t>12 / 23</a:t>
+              <a:t>12 / 24</a:t>
             </a:r>
           </a:p>
         </p:txBody>
@@ -11664,7 +11664,7 @@
                 <a:latin typeface="Arial"/>
                 <a:ea typeface="微软雅黑"/>
               </a:rPr>
-              <a:t>13 / 23</a:t>
+              <a:t>13 / 24</a:t>
             </a:r>
           </a:p>
         </p:txBody>
@@ -12573,7 +12573,7 @@
                 <a:latin typeface="Arial"/>
                 <a:ea typeface="微软雅黑"/>
               </a:rPr>
-              <a:t>14 / 23</a:t>
+              <a:t>14 / 24</a:t>
             </a:r>
           </a:p>
         </p:txBody>
@@ -13544,7 +13544,7 @@
                 <a:latin typeface="Arial"/>
                 <a:ea typeface="微软雅黑"/>
               </a:rPr>
-              <a:t>15 / 23</a:t>
+              <a:t>15 / 24</a:t>
             </a:r>
           </a:p>
         </p:txBody>
@@ -13831,7 +13831,7 @@
                 <a:latin typeface="Arial"/>
                 <a:ea typeface="微软雅黑"/>
               </a:rPr>
-              <a:t>ENO vs Gödel 各场景吞吐对比</a:t>
+              <a:t>主场景 s3/w3 的时序形态</a:t>
             </a:r>
           </a:p>
         </p:txBody>
@@ -13871,14 +13871,14 @@
                 <a:latin typeface="Arial"/>
                 <a:ea typeface="微软雅黑"/>
               </a:rPr>
-              <a:t>平均 +11.9%，高负载与多实例场景优势最大</a:t>
+              <a:t>ENO 更早进入平台、平台更高、结束更早</a:t>
             </a:r>
           </a:p>
         </p:txBody>
       </p:sp>
       <p:pic>
         <p:nvPicPr>
-          <p:cNvPr id="9004" name="Picture 9003" descr="fig6-2-effective-throughput.png"/>
+          <p:cNvPr id="9004" name="Picture 9003" descr="fig6-throughput-s3-w3.png"/>
           <p:cNvPicPr>
             <a:picLocks noChangeAspect="1"/>
           </p:cNvPicPr>
@@ -13892,24 +13892,48 @@
         </p:blipFill>
         <p:spPr>
           <a:xfrm>
-            <a:off x="5806440" y="2535701"/>
-            <a:ext cx="5852160" cy="2700996"/>
+            <a:off x="566928" y="2322730"/>
+            <a:ext cx="5394960" cy="2212539"/>
           </a:xfrm>
           <a:prstGeom prst="rect">
             <a:avLst/>
           </a:prstGeom>
         </p:spPr>
       </p:pic>
-      <p:sp>
-        <p:nvSpPr>
-          <p:cNvPr id="9005" name="TextBox 9004"/>
+      <p:pic>
+        <p:nvPicPr>
+          <p:cNvPr id="9005" name="Picture 9004" descr="fig6-6-latency-p99-s3-w3.png"/>
+          <p:cNvPicPr>
+            <a:picLocks noChangeAspect="1"/>
+          </p:cNvPicPr>
+          <p:nvPr/>
+        </p:nvPicPr>
+        <p:blipFill>
+          <a:blip r:embed="rId4"/>
+          <a:stretch>
+            <a:fillRect/>
+          </a:stretch>
+        </p:blipFill>
+        <p:spPr>
+          <a:xfrm>
+            <a:off x="6172200" y="2323351"/>
+            <a:ext cx="5394960" cy="2211297"/>
+          </a:xfrm>
+          <a:prstGeom prst="rect">
+            <a:avLst/>
+          </a:prstGeom>
+        </p:spPr>
+      </p:pic>
+      <p:sp>
+        <p:nvSpPr>
+          <p:cNvPr id="9006" name="TextBox 9005"/>
           <p:cNvSpPr txBox="1"/>
           <p:nvPr/>
         </p:nvSpPr>
         <p:spPr>
           <a:xfrm>
-            <a:off x="566928" y="2011680"/>
-            <a:ext cx="5029200" cy="1417320"/>
+            <a:off x="566928" y="5138928"/>
+            <a:ext cx="11064240" cy="1097280"/>
           </a:xfrm>
           <a:prstGeom prst="rect">
             <a:avLst/>
@@ -13922,96 +13946,50 @@
           </a:bodyPr>
           <a:lstStyle/>
           <a:p>
-            <a:pPr algn="l">
-              <a:lnSpc>
-                <a:spcPct val="115000"/>
-              </a:lnSpc>
-            </a:pPr>
-            <a:r>
-              <a:rPr sz="1550" b="0">
+            <a:pPr algn="l"/>
+            <a:r>
+              <a:rPr sz="1400" b="0">
                 <a:solidFill>
                   <a:srgbClr val="2E2C2C"/>
                 </a:solidFill>
                 <a:latin typeface="Arial"/>
                 <a:ea typeface="微软雅黑"/>
               </a:rPr>
-              <a:t>▪  14 领先、2 持平（s1/w1、s4/w7）</a:t>
+              <a:t>▪  吞吐平台更高且更早稳定</a:t>
             </a:r>
           </a:p>
           <a:p>
             <a:pPr algn="l">
-              <a:lnSpc>
-                <a:spcPct val="115000"/>
-              </a:lnSpc>
               <a:spcBef>
-                <a:spcPts val="1400"/>
+                <a:spcPts val="600"/>
               </a:spcBef>
             </a:pPr>
             <a:r>
-              <a:rPr sz="1550" b="0">
+              <a:rPr sz="1400" b="0">
                 <a:solidFill>
                   <a:srgbClr val="2E2C2C"/>
                 </a:solidFill>
                 <a:latin typeface="Arial"/>
                 <a:ea typeface="微软雅黑"/>
               </a:rPr>
-              <a:t>▪  提升 +2.0%~+22.9%，平均 +11.9%</a:t>
+              <a:t>▪  P99 峰值更低、回落更快</a:t>
             </a:r>
           </a:p>
           <a:p>
             <a:pPr algn="l">
-              <a:lnSpc>
-                <a:spcPct val="115000"/>
-              </a:lnSpc>
               <a:spcBef>
-                <a:spcPts val="1400"/>
+                <a:spcPts val="600"/>
               </a:spcBef>
             </a:pPr>
             <a:r>
-              <a:rPr sz="1550" b="0">
+              <a:rPr sz="1400" b="0">
                 <a:solidFill>
                   <a:srgbClr val="2E2C2C"/>
                 </a:solidFill>
                 <a:latin typeface="Arial"/>
                 <a:ea typeface="微软雅黑"/>
               </a:rPr>
-              <a:t>▪  亮点：s2/w3 +22.9%、s3/w3 inst3 +21.7%</a:t>
-            </a:r>
-          </a:p>
-        </p:txBody>
-      </p:sp>
-      <p:sp>
-        <p:nvSpPr>
-          <p:cNvPr id="9006" name="TextBox 9005"/>
-          <p:cNvSpPr txBox="1"/>
-          <p:nvPr/>
-        </p:nvSpPr>
-        <p:spPr>
-          <a:xfrm>
-            <a:off x="566928" y="6309360"/>
-            <a:ext cx="10104120" cy="201168"/>
-          </a:xfrm>
-          <a:prstGeom prst="rect">
-            <a:avLst/>
-          </a:prstGeom>
-          <a:noFill/>
-        </p:spPr>
-        <p:txBody>
-          <a:bodyPr wrap="square" anchor="t" lIns="0" rIns="0" tIns="0" bIns="0">
-            <a:spAutoFit/>
-          </a:bodyPr>
-          <a:lstStyle/>
-          <a:p>
-            <a:pPr algn="l"/>
-            <a:r>
-              <a:rPr sz="850" b="0">
-                <a:solidFill>
-                  <a:srgbClr val="636363"/>
-                </a:solidFill>
-                <a:latin typeface="Arial"/>
-                <a:ea typeface="微软雅黑"/>
-              </a:rPr>
-              <a:t>编码：s1–s4 = 100 / 1000 / 5000 / 10000 节点；w1–w7 = 负载强度（w2 500、w3 1000、w4 2000 pods/s 极限、w5 突发、w6 Gang、w7 异构）；inst3 = 3 实例</a:t>
+              <a:t>▪  整体完成时间更短</a:t>
             </a:r>
           </a:p>
         </p:txBody>
@@ -14047,7 +14025,7 @@
                 <a:latin typeface="Arial"/>
                 <a:ea typeface="微软雅黑"/>
               </a:rPr>
-              <a:t>16 / 23</a:t>
+              <a:t>16 / 24</a:t>
             </a:r>
           </a:p>
         </p:txBody>
@@ -14334,6 +14312,509 @@
                 <a:latin typeface="Arial"/>
                 <a:ea typeface="微软雅黑"/>
               </a:rPr>
+              <a:t>ENO vs Gödel 各场景吞吐对比</a:t>
+            </a:r>
+          </a:p>
+        </p:txBody>
+      </p:sp>
+      <p:sp>
+        <p:nvSpPr>
+          <p:cNvPr id="9003" name="TextBox 9002"/>
+          <p:cNvSpPr txBox="1"/>
+          <p:nvPr/>
+        </p:nvSpPr>
+        <p:spPr>
+          <a:xfrm>
+            <a:off x="566928" y="1261872"/>
+            <a:ext cx="10881360" cy="438912"/>
+          </a:xfrm>
+          <a:prstGeom prst="rect">
+            <a:avLst/>
+          </a:prstGeom>
+          <a:noFill/>
+        </p:spPr>
+        <p:txBody>
+          <a:bodyPr wrap="square" anchor="ctr" lIns="0" rIns="0" tIns="0" bIns="0">
+            <a:spAutoFit/>
+          </a:bodyPr>
+          <a:lstStyle/>
+          <a:p>
+            <a:pPr algn="l">
+              <a:lnSpc>
+                <a:spcPct val="110000"/>
+              </a:lnSpc>
+            </a:pPr>
+            <a:r>
+              <a:rPr sz="1800" b="1">
+                <a:solidFill>
+                  <a:srgbClr val="0070C0"/>
+                </a:solidFill>
+                <a:latin typeface="Arial"/>
+                <a:ea typeface="微软雅黑"/>
+              </a:rPr>
+              <a:t>平均 +11.9%，高负载与多实例场景优势最大</a:t>
+            </a:r>
+          </a:p>
+        </p:txBody>
+      </p:sp>
+      <p:pic>
+        <p:nvPicPr>
+          <p:cNvPr id="9004" name="Picture 9003" descr="fig6-2-effective-throughput.png"/>
+          <p:cNvPicPr>
+            <a:picLocks noChangeAspect="1"/>
+          </p:cNvPicPr>
+          <p:nvPr/>
+        </p:nvPicPr>
+        <p:blipFill>
+          <a:blip r:embed="rId3"/>
+          <a:stretch>
+            <a:fillRect/>
+          </a:stretch>
+        </p:blipFill>
+        <p:spPr>
+          <a:xfrm>
+            <a:off x="5806440" y="2535701"/>
+            <a:ext cx="5852160" cy="2700996"/>
+          </a:xfrm>
+          <a:prstGeom prst="rect">
+            <a:avLst/>
+          </a:prstGeom>
+        </p:spPr>
+      </p:pic>
+      <p:sp>
+        <p:nvSpPr>
+          <p:cNvPr id="9005" name="TextBox 9004"/>
+          <p:cNvSpPr txBox="1"/>
+          <p:nvPr/>
+        </p:nvSpPr>
+        <p:spPr>
+          <a:xfrm>
+            <a:off x="566928" y="2011680"/>
+            <a:ext cx="5029200" cy="1417320"/>
+          </a:xfrm>
+          <a:prstGeom prst="rect">
+            <a:avLst/>
+          </a:prstGeom>
+          <a:noFill/>
+        </p:spPr>
+        <p:txBody>
+          <a:bodyPr wrap="square" anchor="t" lIns="0" rIns="0" tIns="0" bIns="0">
+            <a:spAutoFit/>
+          </a:bodyPr>
+          <a:lstStyle/>
+          <a:p>
+            <a:pPr algn="l">
+              <a:lnSpc>
+                <a:spcPct val="115000"/>
+              </a:lnSpc>
+            </a:pPr>
+            <a:r>
+              <a:rPr sz="1550" b="0">
+                <a:solidFill>
+                  <a:srgbClr val="2E2C2C"/>
+                </a:solidFill>
+                <a:latin typeface="Arial"/>
+                <a:ea typeface="微软雅黑"/>
+              </a:rPr>
+              <a:t>▪  14 领先、2 持平（s1/w1、s4/w7）</a:t>
+            </a:r>
+          </a:p>
+          <a:p>
+            <a:pPr algn="l">
+              <a:lnSpc>
+                <a:spcPct val="115000"/>
+              </a:lnSpc>
+              <a:spcBef>
+                <a:spcPts val="1400"/>
+              </a:spcBef>
+            </a:pPr>
+            <a:r>
+              <a:rPr sz="1550" b="0">
+                <a:solidFill>
+                  <a:srgbClr val="2E2C2C"/>
+                </a:solidFill>
+                <a:latin typeface="Arial"/>
+                <a:ea typeface="微软雅黑"/>
+              </a:rPr>
+              <a:t>▪  提升 +2.0%~+22.9%，平均 +11.9%</a:t>
+            </a:r>
+          </a:p>
+          <a:p>
+            <a:pPr algn="l">
+              <a:lnSpc>
+                <a:spcPct val="115000"/>
+              </a:lnSpc>
+              <a:spcBef>
+                <a:spcPts val="1400"/>
+              </a:spcBef>
+            </a:pPr>
+            <a:r>
+              <a:rPr sz="1550" b="0">
+                <a:solidFill>
+                  <a:srgbClr val="2E2C2C"/>
+                </a:solidFill>
+                <a:latin typeface="Arial"/>
+                <a:ea typeface="微软雅黑"/>
+              </a:rPr>
+              <a:t>▪  亮点：s2/w3 +22.9%、s3/w3 inst3 +21.7%</a:t>
+            </a:r>
+          </a:p>
+        </p:txBody>
+      </p:sp>
+      <p:sp>
+        <p:nvSpPr>
+          <p:cNvPr id="9006" name="TextBox 9005"/>
+          <p:cNvSpPr txBox="1"/>
+          <p:nvPr/>
+        </p:nvSpPr>
+        <p:spPr>
+          <a:xfrm>
+            <a:off x="566928" y="6309360"/>
+            <a:ext cx="10104120" cy="201168"/>
+          </a:xfrm>
+          <a:prstGeom prst="rect">
+            <a:avLst/>
+          </a:prstGeom>
+          <a:noFill/>
+        </p:spPr>
+        <p:txBody>
+          <a:bodyPr wrap="square" anchor="t" lIns="0" rIns="0" tIns="0" bIns="0">
+            <a:spAutoFit/>
+          </a:bodyPr>
+          <a:lstStyle/>
+          <a:p>
+            <a:pPr algn="l"/>
+            <a:r>
+              <a:rPr sz="850" b="0">
+                <a:solidFill>
+                  <a:srgbClr val="636363"/>
+                </a:solidFill>
+                <a:latin typeface="Arial"/>
+                <a:ea typeface="微软雅黑"/>
+              </a:rPr>
+              <a:t>编码：s1–s4 = 100 / 1000 / 5000 / 10000 节点；w1–w7 = 负载强度（w2 500、w3 1000、w4 2000 pods/s 极限、w5 突发、w6 Gang、w7 异构）；inst3 = 3 实例</a:t>
+            </a:r>
+          </a:p>
+        </p:txBody>
+      </p:sp>
+      <p:sp>
+        <p:nvSpPr>
+          <p:cNvPr id="9007" name="TextBox 9006"/>
+          <p:cNvSpPr txBox="1"/>
+          <p:nvPr/>
+        </p:nvSpPr>
+        <p:spPr>
+          <a:xfrm>
+            <a:off x="10780776" y="6345936"/>
+            <a:ext cx="850392" cy="219456"/>
+          </a:xfrm>
+          <a:prstGeom prst="rect">
+            <a:avLst/>
+          </a:prstGeom>
+          <a:noFill/>
+        </p:spPr>
+        <p:txBody>
+          <a:bodyPr wrap="square" anchor="t" lIns="0" rIns="0" tIns="0" bIns="0">
+            <a:spAutoFit/>
+          </a:bodyPr>
+          <a:lstStyle/>
+          <a:p>
+            <a:pPr algn="r"/>
+            <a:r>
+              <a:rPr sz="950" b="0">
+                <a:solidFill>
+                  <a:srgbClr val="636363"/>
+                </a:solidFill>
+                <a:latin typeface="Arial"/>
+                <a:ea typeface="微软雅黑"/>
+              </a:rPr>
+              <a:t>17 / 24</a:t>
+            </a:r>
+          </a:p>
+        </p:txBody>
+      </p:sp>
+    </p:spTree>
+  </p:cSld>
+  <p:clrMapOvr>
+    <a:masterClrMapping/>
+  </p:clrMapOvr>
+</p:sld>
+</file>
+
+<file path=ppt/slides/slide18.xml><?xml version="1.0" encoding="utf-8"?>
+<p:sld xmlns:a="http://schemas.openxmlformats.org/drawingml/2006/main" xmlns:p="http://schemas.openxmlformats.org/presentationml/2006/main" xmlns:r="http://schemas.openxmlformats.org/officeDocument/2006/relationships">
+  <p:cSld>
+    <p:bg>
+      <p:bgPr>
+        <a:solidFill>
+          <a:srgbClr val="FFFFFF"/>
+        </a:solidFill>
+        <a:effectLst/>
+      </p:bgPr>
+    </p:bg>
+    <p:spTree>
+      <p:nvGrpSpPr>
+        <p:cNvPr id="1" name=""/>
+        <p:cNvGrpSpPr/>
+        <p:nvPr/>
+      </p:nvGrpSpPr>
+      <p:grpSpPr/>
+      <p:sp>
+        <p:nvSpPr>
+          <p:cNvPr id="9000" name="Freeform 5"/>
+          <p:cNvSpPr/>
+          <p:nvPr/>
+        </p:nvSpPr>
+        <p:spPr>
+          <a:xfrm>
+            <a:off x="182880" y="274320"/>
+            <a:ext cx="310896" cy="402336"/>
+          </a:xfrm>
+          <a:custGeom>
+            <a:avLst/>
+            <a:gdLst/>
+            <a:ahLst/>
+            <a:cxnLst>
+              <a:cxn ang="0">
+                <a:pos x="2147483647" y="2147483647"/>
+              </a:cxn>
+              <a:cxn ang="0">
+                <a:pos x="2147483647" y="2147483647"/>
+              </a:cxn>
+              <a:cxn ang="0">
+                <a:pos x="2147483647" y="2147483647"/>
+              </a:cxn>
+              <a:cxn ang="0">
+                <a:pos x="2147483647" y="2147483647"/>
+              </a:cxn>
+              <a:cxn ang="0">
+                <a:pos x="2147483647" y="2147483647"/>
+              </a:cxn>
+              <a:cxn ang="0">
+                <a:pos x="2147483647" y="2147483647"/>
+              </a:cxn>
+              <a:cxn ang="0">
+                <a:pos x="2147483647" y="2147483647"/>
+              </a:cxn>
+              <a:cxn ang="0">
+                <a:pos x="2147483647" y="2147483647"/>
+              </a:cxn>
+              <a:cxn ang="0">
+                <a:pos x="2147483647" y="0"/>
+              </a:cxn>
+              <a:cxn ang="0">
+                <a:pos x="2147483647" y="2147483647"/>
+              </a:cxn>
+              <a:cxn ang="0">
+                <a:pos x="2147483647" y="2147483647"/>
+              </a:cxn>
+              <a:cxn ang="0">
+                <a:pos x="2147483647" y="2147483647"/>
+              </a:cxn>
+              <a:cxn ang="0">
+                <a:pos x="2147483647" y="2147483647"/>
+              </a:cxn>
+              <a:cxn ang="0">
+                <a:pos x="2147483647" y="2147483647"/>
+              </a:cxn>
+              <a:cxn ang="0">
+                <a:pos x="2147483647" y="2147483647"/>
+              </a:cxn>
+              <a:cxn ang="0">
+                <a:pos x="2147483647" y="2147483647"/>
+              </a:cxn>
+              <a:cxn ang="0">
+                <a:pos x="2147483647" y="2147483647"/>
+              </a:cxn>
+              <a:cxn ang="0">
+                <a:pos x="2147483647" y="2147483647"/>
+              </a:cxn>
+              <a:cxn ang="0">
+                <a:pos x="2147483647" y="2147483647"/>
+              </a:cxn>
+              <a:cxn ang="0">
+                <a:pos x="0" y="2147483647"/>
+              </a:cxn>
+              <a:cxn ang="0">
+                <a:pos x="2147483647" y="2147483647"/>
+              </a:cxn>
+            </a:cxnLst>
+            <a:rect l="0" t="0" r="0" b="0"/>
+            <a:pathLst>
+              <a:path w="574" h="681">
+                <a:moveTo>
+                  <a:pt x="120" y="441"/>
+                </a:moveTo>
+                <a:cubicBezTo>
+                  <a:pt x="153" y="441"/>
+                  <a:pt x="183" y="454"/>
+                  <a:pt x="205" y="476"/>
+                </a:cubicBezTo>
+                <a:lnTo>
+                  <a:pt x="389" y="329"/>
+                </a:lnTo>
+                <a:cubicBezTo>
+                  <a:pt x="383" y="317"/>
+                  <a:pt x="380" y="303"/>
+                  <a:pt x="380" y="289"/>
+                </a:cubicBezTo>
+                <a:cubicBezTo>
+                  <a:pt x="380" y="271"/>
+                  <a:pt x="384" y="255"/>
+                  <a:pt x="392" y="241"/>
+                </a:cubicBezTo>
+                <a:lnTo>
+                  <a:pt x="270" y="138"/>
+                </a:lnTo>
+                <a:cubicBezTo>
+                  <a:pt x="256" y="151"/>
+                  <a:pt x="237" y="159"/>
+                  <a:pt x="217" y="159"/>
+                </a:cubicBezTo>
+                <a:cubicBezTo>
+                  <a:pt x="173" y="159"/>
+                  <a:pt x="137" y="123"/>
+                  <a:pt x="137" y="79"/>
+                </a:cubicBezTo>
+                <a:cubicBezTo>
+                  <a:pt x="137" y="36"/>
+                  <a:pt x="173" y="0"/>
+                  <a:pt x="217" y="0"/>
+                </a:cubicBezTo>
+                <a:cubicBezTo>
+                  <a:pt x="260" y="0"/>
+                  <a:pt x="296" y="36"/>
+                  <a:pt x="296" y="79"/>
+                </a:cubicBezTo>
+                <a:cubicBezTo>
+                  <a:pt x="296" y="91"/>
+                  <a:pt x="293" y="103"/>
+                  <a:pt x="289" y="113"/>
+                </a:cubicBezTo>
+                <a:lnTo>
+                  <a:pt x="412" y="217"/>
+                </a:lnTo>
+                <a:cubicBezTo>
+                  <a:pt x="429" y="201"/>
+                  <a:pt x="452" y="192"/>
+                  <a:pt x="477" y="192"/>
+                </a:cubicBezTo>
+                <a:cubicBezTo>
+                  <a:pt x="530" y="192"/>
+                  <a:pt x="574" y="235"/>
+                  <a:pt x="574" y="289"/>
+                </a:cubicBezTo>
+                <a:cubicBezTo>
+                  <a:pt x="574" y="342"/>
+                  <a:pt x="530" y="386"/>
+                  <a:pt x="477" y="386"/>
+                </a:cubicBezTo>
+                <a:cubicBezTo>
+                  <a:pt x="449" y="386"/>
+                  <a:pt x="424" y="374"/>
+                  <a:pt x="406" y="355"/>
+                </a:cubicBezTo>
+                <a:lnTo>
+                  <a:pt x="224" y="501"/>
+                </a:lnTo>
+                <a:cubicBezTo>
+                  <a:pt x="234" y="518"/>
+                  <a:pt x="240" y="539"/>
+                  <a:pt x="240" y="561"/>
+                </a:cubicBezTo>
+                <a:cubicBezTo>
+                  <a:pt x="240" y="627"/>
+                  <a:pt x="186" y="681"/>
+                  <a:pt x="120" y="681"/>
+                </a:cubicBezTo>
+                <a:cubicBezTo>
+                  <a:pt x="54" y="681"/>
+                  <a:pt x="0" y="627"/>
+                  <a:pt x="0" y="561"/>
+                </a:cubicBezTo>
+                <a:cubicBezTo>
+                  <a:pt x="0" y="495"/>
+                  <a:pt x="54" y="441"/>
+                  <a:pt x="120" y="441"/>
+                </a:cubicBezTo>
+                <a:close/>
+              </a:path>
+            </a:pathLst>
+          </a:custGeom>
+          <a:solidFill>
+            <a:srgbClr val="113E6A"/>
+          </a:solidFill>
+          <a:ln w="9525">
+            <a:noFill/>
+          </a:ln>
+        </p:spPr>
+        <p:txBody>
+          <a:bodyPr/>
+          <a:lstStyle/>
+          <a:p>
+            <a:endParaRPr lang="zh-CN" altLang="en-US"/>
+          </a:p>
+        </p:txBody>
+      </p:sp>
+      <p:pic>
+        <p:nvPicPr>
+          <p:cNvPr id="9001" name="Picture 9000" descr="beihang-logo-navy.png"/>
+          <p:cNvPicPr>
+            <a:picLocks noChangeAspect="1"/>
+          </p:cNvPicPr>
+          <p:nvPr/>
+        </p:nvPicPr>
+        <p:blipFill>
+          <a:blip r:embed="rId2"/>
+          <a:stretch>
+            <a:fillRect/>
+          </a:stretch>
+        </p:blipFill>
+        <p:spPr>
+          <a:xfrm>
+            <a:off x="9336024" y="91665"/>
+            <a:ext cx="2642616" cy="502469"/>
+          </a:xfrm>
+          <a:prstGeom prst="rect">
+            <a:avLst/>
+          </a:prstGeom>
+        </p:spPr>
+      </p:pic>
+      <p:sp>
+        <p:nvSpPr>
+          <p:cNvPr id="9002" name="TextBox 9001"/>
+          <p:cNvSpPr txBox="1"/>
+          <p:nvPr/>
+        </p:nvSpPr>
+        <p:spPr>
+          <a:xfrm>
+            <a:off x="566928" y="155448"/>
+            <a:ext cx="8549640" cy="621792"/>
+          </a:xfrm>
+          <a:prstGeom prst="rect">
+            <a:avLst/>
+          </a:prstGeom>
+          <a:noFill/>
+        </p:spPr>
+        <p:txBody>
+          <a:bodyPr wrap="square" anchor="ctr" lIns="0" rIns="0" tIns="0" bIns="0">
+            <a:spAutoFit/>
+          </a:bodyPr>
+          <a:lstStyle/>
+          <a:p>
+            <a:pPr algn="l">
+              <a:lnSpc>
+                <a:spcPct val="100000"/>
+              </a:lnSpc>
+            </a:pPr>
+            <a:r>
+              <a:rPr sz="3000" b="1">
+                <a:solidFill>
+                  <a:srgbClr val="113E6A"/>
+                </a:solidFill>
+                <a:latin typeface="Arial"/>
+                <a:ea typeface="微软雅黑"/>
+              </a:rPr>
               <a:t>ENO vs Gödel 各场景尾延迟对比</a:t>
             </a:r>
           </a:p>
@@ -14550,7 +15031,7 @@
                 <a:latin typeface="Arial"/>
                 <a:ea typeface="微软雅黑"/>
               </a:rPr>
-              <a:t>17 / 23</a:t>
+              <a:t>18 / 24</a:t>
             </a:r>
           </a:p>
         </p:txBody>
@@ -14563,7 +15044,7 @@
 </p:sld>
 </file>
 
-<file path=ppt/slides/slide18.xml><?xml version="1.0" encoding="utf-8"?>
+<file path=ppt/slides/slide19.xml><?xml version="1.0" encoding="utf-8"?>
 <p:sld xmlns:a="http://schemas.openxmlformats.org/drawingml/2006/main" xmlns:p="http://schemas.openxmlformats.org/presentationml/2006/main" xmlns:r="http://schemas.openxmlformats.org/officeDocument/2006/relationships">
   <p:cSld>
     <p:bg>
@@ -15372,7 +15853,7 @@
                 <a:latin typeface="Arial"/>
                 <a:ea typeface="微软雅黑"/>
               </a:rPr>
-              <a:t>18 / 23</a:t>
+              <a:t>19 / 24</a:t>
             </a:r>
           </a:p>
         </p:txBody>
@@ -15385,7 +15866,878 @@
 </p:sld>
 </file>
 
-<file path=ppt/slides/slide19.xml><?xml version="1.0" encoding="utf-8"?>
+<file path=ppt/slides/slide2.xml><?xml version="1.0" encoding="utf-8"?>
+<p:sld xmlns:a="http://schemas.openxmlformats.org/drawingml/2006/main" xmlns:p="http://schemas.openxmlformats.org/presentationml/2006/main" xmlns:r="http://schemas.openxmlformats.org/officeDocument/2006/relationships">
+  <p:cSld>
+    <p:bg>
+      <p:bgPr>
+        <a:solidFill>
+          <a:srgbClr val="FFFFFF"/>
+        </a:solidFill>
+        <a:effectLst/>
+      </p:bgPr>
+    </p:bg>
+    <p:spTree>
+      <p:nvGrpSpPr>
+        <p:cNvPr id="1" name=""/>
+        <p:cNvGrpSpPr/>
+        <p:nvPr/>
+      </p:nvGrpSpPr>
+      <p:grpSpPr/>
+      <p:sp>
+        <p:nvSpPr>
+          <p:cNvPr id="9000" name="Freeform 5"/>
+          <p:cNvSpPr/>
+          <p:nvPr/>
+        </p:nvSpPr>
+        <p:spPr>
+          <a:xfrm>
+            <a:off x="182880" y="274320"/>
+            <a:ext cx="310896" cy="402336"/>
+          </a:xfrm>
+          <a:custGeom>
+            <a:avLst/>
+            <a:gdLst/>
+            <a:ahLst/>
+            <a:cxnLst>
+              <a:cxn ang="0">
+                <a:pos x="2147483647" y="2147483647"/>
+              </a:cxn>
+              <a:cxn ang="0">
+                <a:pos x="2147483647" y="2147483647"/>
+              </a:cxn>
+              <a:cxn ang="0">
+                <a:pos x="2147483647" y="2147483647"/>
+              </a:cxn>
+              <a:cxn ang="0">
+                <a:pos x="2147483647" y="2147483647"/>
+              </a:cxn>
+              <a:cxn ang="0">
+                <a:pos x="2147483647" y="2147483647"/>
+              </a:cxn>
+              <a:cxn ang="0">
+                <a:pos x="2147483647" y="2147483647"/>
+              </a:cxn>
+              <a:cxn ang="0">
+                <a:pos x="2147483647" y="2147483647"/>
+              </a:cxn>
+              <a:cxn ang="0">
+                <a:pos x="2147483647" y="2147483647"/>
+              </a:cxn>
+              <a:cxn ang="0">
+                <a:pos x="2147483647" y="0"/>
+              </a:cxn>
+              <a:cxn ang="0">
+                <a:pos x="2147483647" y="2147483647"/>
+              </a:cxn>
+              <a:cxn ang="0">
+                <a:pos x="2147483647" y="2147483647"/>
+              </a:cxn>
+              <a:cxn ang="0">
+                <a:pos x="2147483647" y="2147483647"/>
+              </a:cxn>
+              <a:cxn ang="0">
+                <a:pos x="2147483647" y="2147483647"/>
+              </a:cxn>
+              <a:cxn ang="0">
+                <a:pos x="2147483647" y="2147483647"/>
+              </a:cxn>
+              <a:cxn ang="0">
+                <a:pos x="2147483647" y="2147483647"/>
+              </a:cxn>
+              <a:cxn ang="0">
+                <a:pos x="2147483647" y="2147483647"/>
+              </a:cxn>
+              <a:cxn ang="0">
+                <a:pos x="2147483647" y="2147483647"/>
+              </a:cxn>
+              <a:cxn ang="0">
+                <a:pos x="2147483647" y="2147483647"/>
+              </a:cxn>
+              <a:cxn ang="0">
+                <a:pos x="2147483647" y="2147483647"/>
+              </a:cxn>
+              <a:cxn ang="0">
+                <a:pos x="0" y="2147483647"/>
+              </a:cxn>
+              <a:cxn ang="0">
+                <a:pos x="2147483647" y="2147483647"/>
+              </a:cxn>
+            </a:cxnLst>
+            <a:rect l="0" t="0" r="0" b="0"/>
+            <a:pathLst>
+              <a:path w="574" h="681">
+                <a:moveTo>
+                  <a:pt x="120" y="441"/>
+                </a:moveTo>
+                <a:cubicBezTo>
+                  <a:pt x="153" y="441"/>
+                  <a:pt x="183" y="454"/>
+                  <a:pt x="205" y="476"/>
+                </a:cubicBezTo>
+                <a:lnTo>
+                  <a:pt x="389" y="329"/>
+                </a:lnTo>
+                <a:cubicBezTo>
+                  <a:pt x="383" y="317"/>
+                  <a:pt x="380" y="303"/>
+                  <a:pt x="380" y="289"/>
+                </a:cubicBezTo>
+                <a:cubicBezTo>
+                  <a:pt x="380" y="271"/>
+                  <a:pt x="384" y="255"/>
+                  <a:pt x="392" y="241"/>
+                </a:cubicBezTo>
+                <a:lnTo>
+                  <a:pt x="270" y="138"/>
+                </a:lnTo>
+                <a:cubicBezTo>
+                  <a:pt x="256" y="151"/>
+                  <a:pt x="237" y="159"/>
+                  <a:pt x="217" y="159"/>
+                </a:cubicBezTo>
+                <a:cubicBezTo>
+                  <a:pt x="173" y="159"/>
+                  <a:pt x="137" y="123"/>
+                  <a:pt x="137" y="79"/>
+                </a:cubicBezTo>
+                <a:cubicBezTo>
+                  <a:pt x="137" y="36"/>
+                  <a:pt x="173" y="0"/>
+                  <a:pt x="217" y="0"/>
+                </a:cubicBezTo>
+                <a:cubicBezTo>
+                  <a:pt x="260" y="0"/>
+                  <a:pt x="296" y="36"/>
+                  <a:pt x="296" y="79"/>
+                </a:cubicBezTo>
+                <a:cubicBezTo>
+                  <a:pt x="296" y="91"/>
+                  <a:pt x="293" y="103"/>
+                  <a:pt x="289" y="113"/>
+                </a:cubicBezTo>
+                <a:lnTo>
+                  <a:pt x="412" y="217"/>
+                </a:lnTo>
+                <a:cubicBezTo>
+                  <a:pt x="429" y="201"/>
+                  <a:pt x="452" y="192"/>
+                  <a:pt x="477" y="192"/>
+                </a:cubicBezTo>
+                <a:cubicBezTo>
+                  <a:pt x="530" y="192"/>
+                  <a:pt x="574" y="235"/>
+                  <a:pt x="574" y="289"/>
+                </a:cubicBezTo>
+                <a:cubicBezTo>
+                  <a:pt x="574" y="342"/>
+                  <a:pt x="530" y="386"/>
+                  <a:pt x="477" y="386"/>
+                </a:cubicBezTo>
+                <a:cubicBezTo>
+                  <a:pt x="449" y="386"/>
+                  <a:pt x="424" y="374"/>
+                  <a:pt x="406" y="355"/>
+                </a:cubicBezTo>
+                <a:lnTo>
+                  <a:pt x="224" y="501"/>
+                </a:lnTo>
+                <a:cubicBezTo>
+                  <a:pt x="234" y="518"/>
+                  <a:pt x="240" y="539"/>
+                  <a:pt x="240" y="561"/>
+                </a:cubicBezTo>
+                <a:cubicBezTo>
+                  <a:pt x="240" y="627"/>
+                  <a:pt x="186" y="681"/>
+                  <a:pt x="120" y="681"/>
+                </a:cubicBezTo>
+                <a:cubicBezTo>
+                  <a:pt x="54" y="681"/>
+                  <a:pt x="0" y="627"/>
+                  <a:pt x="0" y="561"/>
+                </a:cubicBezTo>
+                <a:cubicBezTo>
+                  <a:pt x="0" y="495"/>
+                  <a:pt x="54" y="441"/>
+                  <a:pt x="120" y="441"/>
+                </a:cubicBezTo>
+                <a:close/>
+              </a:path>
+            </a:pathLst>
+          </a:custGeom>
+          <a:solidFill>
+            <a:srgbClr val="113E6A"/>
+          </a:solidFill>
+          <a:ln w="9525">
+            <a:noFill/>
+          </a:ln>
+        </p:spPr>
+        <p:txBody>
+          <a:bodyPr/>
+          <a:lstStyle/>
+          <a:p>
+            <a:endParaRPr lang="zh-CN" altLang="en-US"/>
+          </a:p>
+        </p:txBody>
+      </p:sp>
+      <p:pic>
+        <p:nvPicPr>
+          <p:cNvPr id="9001" name="Picture 9000" descr="beihang-logo-navy.png"/>
+          <p:cNvPicPr>
+            <a:picLocks noChangeAspect="1"/>
+          </p:cNvPicPr>
+          <p:nvPr/>
+        </p:nvPicPr>
+        <p:blipFill>
+          <a:blip r:embed="rId2"/>
+          <a:stretch>
+            <a:fillRect/>
+          </a:stretch>
+        </p:blipFill>
+        <p:spPr>
+          <a:xfrm>
+            <a:off x="9336024" y="91665"/>
+            <a:ext cx="2642616" cy="502469"/>
+          </a:xfrm>
+          <a:prstGeom prst="rect">
+            <a:avLst/>
+          </a:prstGeom>
+        </p:spPr>
+      </p:pic>
+      <p:sp>
+        <p:nvSpPr>
+          <p:cNvPr id="9002" name="TextBox 9001"/>
+          <p:cNvSpPr txBox="1"/>
+          <p:nvPr/>
+        </p:nvSpPr>
+        <p:spPr>
+          <a:xfrm>
+            <a:off x="566928" y="155448"/>
+            <a:ext cx="8549640" cy="621792"/>
+          </a:xfrm>
+          <a:prstGeom prst="rect">
+            <a:avLst/>
+          </a:prstGeom>
+          <a:noFill/>
+        </p:spPr>
+        <p:txBody>
+          <a:bodyPr wrap="square" anchor="ctr" lIns="0" rIns="0" tIns="0" bIns="0">
+            <a:spAutoFit/>
+          </a:bodyPr>
+          <a:lstStyle/>
+          <a:p>
+            <a:pPr algn="l">
+              <a:lnSpc>
+                <a:spcPct val="100000"/>
+              </a:lnSpc>
+            </a:pPr>
+            <a:r>
+              <a:rPr sz="3000" b="1">
+                <a:solidFill>
+                  <a:srgbClr val="113E6A"/>
+                </a:solidFill>
+                <a:latin typeface="Arial"/>
+                <a:ea typeface="微软雅黑"/>
+              </a:rPr>
+              <a:t>研究背景</a:t>
+            </a:r>
+          </a:p>
+        </p:txBody>
+      </p:sp>
+      <p:sp>
+        <p:nvSpPr>
+          <p:cNvPr id="9003" name="TextBox 9002"/>
+          <p:cNvSpPr txBox="1"/>
+          <p:nvPr/>
+        </p:nvSpPr>
+        <p:spPr>
+          <a:xfrm>
+            <a:off x="566928" y="1261872"/>
+            <a:ext cx="10881360" cy="438912"/>
+          </a:xfrm>
+          <a:prstGeom prst="rect">
+            <a:avLst/>
+          </a:prstGeom>
+          <a:noFill/>
+        </p:spPr>
+        <p:txBody>
+          <a:bodyPr wrap="square" anchor="ctr" lIns="0" rIns="0" tIns="0" bIns="0">
+            <a:spAutoFit/>
+          </a:bodyPr>
+          <a:lstStyle/>
+          <a:p>
+            <a:pPr algn="l">
+              <a:lnSpc>
+                <a:spcPct val="110000"/>
+              </a:lnSpc>
+            </a:pPr>
+            <a:r>
+              <a:rPr sz="1800" b="1">
+                <a:solidFill>
+                  <a:srgbClr val="0070C0"/>
+                </a:solidFill>
+                <a:latin typeface="Arial"/>
+                <a:ea typeface="微软雅黑"/>
+              </a:rPr>
+              <a:t>生产集群进入万节点量级，单实例架构在吞吐与高可用上同时受制</a:t>
+            </a:r>
+          </a:p>
+        </p:txBody>
+      </p:sp>
+      <p:sp>
+        <p:nvSpPr>
+          <p:cNvPr id="9004" name="TextBox 9003"/>
+          <p:cNvSpPr txBox="1"/>
+          <p:nvPr/>
+        </p:nvSpPr>
+        <p:spPr>
+          <a:xfrm>
+            <a:off x="566928" y="1783080"/>
+            <a:ext cx="10881360" cy="1234440"/>
+          </a:xfrm>
+          <a:prstGeom prst="rect">
+            <a:avLst/>
+          </a:prstGeom>
+          <a:noFill/>
+        </p:spPr>
+        <p:txBody>
+          <a:bodyPr wrap="square" anchor="t" lIns="0" rIns="0" tIns="0" bIns="0">
+            <a:spAutoFit/>
+          </a:bodyPr>
+          <a:lstStyle/>
+          <a:p>
+            <a:pPr algn="l">
+              <a:lnSpc>
+                <a:spcPct val="135000"/>
+              </a:lnSpc>
+            </a:pPr>
+            <a:r>
+              <a:rPr sz="1500" b="0">
+                <a:solidFill>
+                  <a:srgbClr val="2E2C2C"/>
+                </a:solidFill>
+                <a:latin typeface="Arial"/>
+                <a:ea typeface="微软雅黑"/>
+              </a:rPr>
+              <a:t>Kubernetes 已成为云原生的事实标准，调度器处在 Pod 生命周期的关键路径上：它的吞吐与延迟直接决定集群资源利用率与业务响应速度。千节点规模下单实例尚可支撑，集群进入万节点量级后，三个瓶颈同时显现。</a:t>
+            </a:r>
+          </a:p>
+        </p:txBody>
+      </p:sp>
+      <p:sp>
+        <p:nvSpPr>
+          <p:cNvPr id="9005" name="Rounded Rectangle 9004"/>
+          <p:cNvSpPr/>
+          <p:nvPr/>
+        </p:nvSpPr>
+        <p:spPr>
+          <a:xfrm>
+            <a:off x="566928" y="2880360"/>
+            <a:ext cx="3517391" cy="2103120"/>
+          </a:xfrm>
+          <a:prstGeom prst="roundRect">
+            <a:avLst/>
+          </a:prstGeom>
+          <a:solidFill>
+            <a:srgbClr val="FFFFFF"/>
+          </a:solidFill>
+          <a:ln w="9525">
+            <a:solidFill>
+              <a:srgbClr val="D6E3F0"/>
+            </a:solidFill>
+          </a:ln>
+          <a:effectLst/>
+        </p:spPr>
+        <p:style>
+          <a:lnRef idx="1">
+            <a:schemeClr val="accent1"/>
+          </a:lnRef>
+          <a:fillRef idx="3">
+            <a:schemeClr val="accent1"/>
+          </a:fillRef>
+          <a:effectRef idx="2">
+            <a:schemeClr val="accent1"/>
+          </a:effectRef>
+          <a:fontRef idx="minor">
+            <a:schemeClr val="lt1"/>
+          </a:fontRef>
+        </p:style>
+        <p:txBody>
+          <a:bodyPr rtlCol="0" anchor="ctr"/>
+          <a:lstStyle/>
+          <a:p>
+            <a:pPr algn="ctr"/>
+          </a:p>
+        </p:txBody>
+      </p:sp>
+      <p:sp>
+        <p:nvSpPr>
+          <p:cNvPr id="9006" name="Oval 9005"/>
+          <p:cNvSpPr/>
+          <p:nvPr/>
+        </p:nvSpPr>
+        <p:spPr>
+          <a:xfrm>
+            <a:off x="713232" y="3017520"/>
+            <a:ext cx="274320" cy="274320"/>
+          </a:xfrm>
+          <a:prstGeom prst="ellipse">
+            <a:avLst/>
+          </a:prstGeom>
+          <a:solidFill>
+            <a:srgbClr val="113E6A"/>
+          </a:solidFill>
+          <a:ln>
+            <a:noFill/>
+          </a:ln>
+          <a:effectLst/>
+        </p:spPr>
+        <p:style>
+          <a:lnRef idx="1">
+            <a:schemeClr val="accent1"/>
+          </a:lnRef>
+          <a:fillRef idx="3">
+            <a:schemeClr val="accent1"/>
+          </a:fillRef>
+          <a:effectRef idx="2">
+            <a:schemeClr val="accent1"/>
+          </a:effectRef>
+          <a:fontRef idx="minor">
+            <a:schemeClr val="lt1"/>
+          </a:fontRef>
+        </p:style>
+        <p:txBody>
+          <a:bodyPr rtlCol="0" anchor="ctr" lIns="0" rIns="0" tIns="0" bIns="0"/>
+          <a:lstStyle/>
+          <a:p>
+            <a:pPr algn="ctr"/>
+            <a:r>
+              <a:rPr sz="1000" b="1">
+                <a:solidFill>
+                  <a:srgbClr val="FFFFFF"/>
+                </a:solidFill>
+                <a:latin typeface="Arial"/>
+                <a:ea typeface="微软雅黑"/>
+              </a:rPr>
+              <a:t>01</a:t>
+            </a:r>
+          </a:p>
+        </p:txBody>
+      </p:sp>
+      <p:sp>
+        <p:nvSpPr>
+          <p:cNvPr id="9007" name="TextBox 9006"/>
+          <p:cNvSpPr txBox="1"/>
+          <p:nvPr/>
+        </p:nvSpPr>
+        <p:spPr>
+          <a:xfrm>
+            <a:off x="1078992" y="3017520"/>
+            <a:ext cx="2877312" cy="1901951"/>
+          </a:xfrm>
+          <a:prstGeom prst="rect">
+            <a:avLst/>
+          </a:prstGeom>
+          <a:noFill/>
+        </p:spPr>
+        <p:txBody>
+          <a:bodyPr wrap="square" anchor="ctr" lIns="0" rIns="0" tIns="0" bIns="0">
+            <a:spAutoFit/>
+          </a:bodyPr>
+          <a:lstStyle/>
+          <a:p>
+            <a:pPr algn="l"/>
+            <a:r>
+              <a:rPr sz="1600" b="1">
+                <a:solidFill>
+                  <a:srgbClr val="113E6A"/>
+                </a:solidFill>
+                <a:latin typeface="Arial"/>
+                <a:ea typeface="微软雅黑"/>
+              </a:rPr>
+              <a:t>吞吐存在上限</a:t>
+            </a:r>
+          </a:p>
+          <a:p>
+            <a:pPr algn="l">
+              <a:lnSpc>
+                <a:spcPct val="115000"/>
+              </a:lnSpc>
+              <a:spcBef>
+                <a:spcPts val="500"/>
+              </a:spcBef>
+            </a:pPr>
+            <a:r>
+              <a:rPr sz="1500" b="0">
+                <a:solidFill>
+                  <a:srgbClr val="2E2C2C"/>
+                </a:solidFill>
+                <a:latin typeface="Arial"/>
+                <a:ea typeface="微软雅黑"/>
+              </a:rPr>
+              <a:t>activeQ 串行处理 Pod，大规模弹性伸缩与批任务启动被拖慢</a:t>
+            </a:r>
+          </a:p>
+        </p:txBody>
+      </p:sp>
+      <p:sp>
+        <p:nvSpPr>
+          <p:cNvPr id="9008" name="Rounded Rectangle 9007"/>
+          <p:cNvSpPr/>
+          <p:nvPr/>
+        </p:nvSpPr>
+        <p:spPr>
+          <a:xfrm>
+            <a:off x="4340351" y="2880360"/>
+            <a:ext cx="3517391" cy="2103120"/>
+          </a:xfrm>
+          <a:prstGeom prst="roundRect">
+            <a:avLst/>
+          </a:prstGeom>
+          <a:solidFill>
+            <a:srgbClr val="FFFFFF"/>
+          </a:solidFill>
+          <a:ln w="9525">
+            <a:solidFill>
+              <a:srgbClr val="D6E3F0"/>
+            </a:solidFill>
+          </a:ln>
+          <a:effectLst/>
+        </p:spPr>
+        <p:style>
+          <a:lnRef idx="1">
+            <a:schemeClr val="accent1"/>
+          </a:lnRef>
+          <a:fillRef idx="3">
+            <a:schemeClr val="accent1"/>
+          </a:fillRef>
+          <a:effectRef idx="2">
+            <a:schemeClr val="accent1"/>
+          </a:effectRef>
+          <a:fontRef idx="minor">
+            <a:schemeClr val="lt1"/>
+          </a:fontRef>
+        </p:style>
+        <p:txBody>
+          <a:bodyPr rtlCol="0" anchor="ctr"/>
+          <a:lstStyle/>
+          <a:p>
+            <a:pPr algn="ctr"/>
+          </a:p>
+        </p:txBody>
+      </p:sp>
+      <p:sp>
+        <p:nvSpPr>
+          <p:cNvPr id="9009" name="Oval 9008"/>
+          <p:cNvSpPr/>
+          <p:nvPr/>
+        </p:nvSpPr>
+        <p:spPr>
+          <a:xfrm>
+            <a:off x="4486656" y="3017520"/>
+            <a:ext cx="274320" cy="274320"/>
+          </a:xfrm>
+          <a:prstGeom prst="ellipse">
+            <a:avLst/>
+          </a:prstGeom>
+          <a:solidFill>
+            <a:srgbClr val="113E6A"/>
+          </a:solidFill>
+          <a:ln>
+            <a:noFill/>
+          </a:ln>
+          <a:effectLst/>
+        </p:spPr>
+        <p:style>
+          <a:lnRef idx="1">
+            <a:schemeClr val="accent1"/>
+          </a:lnRef>
+          <a:fillRef idx="3">
+            <a:schemeClr val="accent1"/>
+          </a:fillRef>
+          <a:effectRef idx="2">
+            <a:schemeClr val="accent1"/>
+          </a:effectRef>
+          <a:fontRef idx="minor">
+            <a:schemeClr val="lt1"/>
+          </a:fontRef>
+        </p:style>
+        <p:txBody>
+          <a:bodyPr rtlCol="0" anchor="ctr" lIns="0" rIns="0" tIns="0" bIns="0"/>
+          <a:lstStyle/>
+          <a:p>
+            <a:pPr algn="ctr"/>
+            <a:r>
+              <a:rPr sz="1000" b="1">
+                <a:solidFill>
+                  <a:srgbClr val="FFFFFF"/>
+                </a:solidFill>
+                <a:latin typeface="Arial"/>
+                <a:ea typeface="微软雅黑"/>
+              </a:rPr>
+              <a:t>02</a:t>
+            </a:r>
+          </a:p>
+        </p:txBody>
+      </p:sp>
+      <p:sp>
+        <p:nvSpPr>
+          <p:cNvPr id="9010" name="TextBox 9009"/>
+          <p:cNvSpPr txBox="1"/>
+          <p:nvPr/>
+        </p:nvSpPr>
+        <p:spPr>
+          <a:xfrm>
+            <a:off x="4852416" y="3017520"/>
+            <a:ext cx="2877312" cy="1901951"/>
+          </a:xfrm>
+          <a:prstGeom prst="rect">
+            <a:avLst/>
+          </a:prstGeom>
+          <a:noFill/>
+        </p:spPr>
+        <p:txBody>
+          <a:bodyPr wrap="square" anchor="ctr" lIns="0" rIns="0" tIns="0" bIns="0">
+            <a:spAutoFit/>
+          </a:bodyPr>
+          <a:lstStyle/>
+          <a:p>
+            <a:pPr algn="l"/>
+            <a:r>
+              <a:rPr sz="1600" b="1">
+                <a:solidFill>
+                  <a:srgbClr val="113E6A"/>
+                </a:solidFill>
+                <a:latin typeface="Arial"/>
+                <a:ea typeface="微软雅黑"/>
+              </a:rPr>
+              <a:t>尾延迟持续抬升</a:t>
+            </a:r>
+          </a:p>
+          <a:p>
+            <a:pPr algn="l">
+              <a:lnSpc>
+                <a:spcPct val="115000"/>
+              </a:lnSpc>
+              <a:spcBef>
+                <a:spcPts val="500"/>
+              </a:spcBef>
+            </a:pPr>
+            <a:r>
+              <a:rPr sz="1500" b="0">
+                <a:solidFill>
+                  <a:srgbClr val="2E2C2C"/>
+                </a:solidFill>
+                <a:latin typeface="Arial"/>
+                <a:ea typeface="微软雅黑"/>
+              </a:rPr>
+              <a:t>Filter/Score 遍历节点开销随规模线性上升，5000 节点下 P99 明显恶化</a:t>
+            </a:r>
+          </a:p>
+        </p:txBody>
+      </p:sp>
+      <p:sp>
+        <p:nvSpPr>
+          <p:cNvPr id="9011" name="Rounded Rectangle 9010"/>
+          <p:cNvSpPr/>
+          <p:nvPr/>
+        </p:nvSpPr>
+        <p:spPr>
+          <a:xfrm>
+            <a:off x="8113775" y="2880360"/>
+            <a:ext cx="3517391" cy="2103120"/>
+          </a:xfrm>
+          <a:prstGeom prst="roundRect">
+            <a:avLst/>
+          </a:prstGeom>
+          <a:solidFill>
+            <a:srgbClr val="FFFFFF"/>
+          </a:solidFill>
+          <a:ln w="9525">
+            <a:solidFill>
+              <a:srgbClr val="D6E3F0"/>
+            </a:solidFill>
+          </a:ln>
+          <a:effectLst/>
+        </p:spPr>
+        <p:style>
+          <a:lnRef idx="1">
+            <a:schemeClr val="accent1"/>
+          </a:lnRef>
+          <a:fillRef idx="3">
+            <a:schemeClr val="accent1"/>
+          </a:fillRef>
+          <a:effectRef idx="2">
+            <a:schemeClr val="accent1"/>
+          </a:effectRef>
+          <a:fontRef idx="minor">
+            <a:schemeClr val="lt1"/>
+          </a:fontRef>
+        </p:style>
+        <p:txBody>
+          <a:bodyPr rtlCol="0" anchor="ctr"/>
+          <a:lstStyle/>
+          <a:p>
+            <a:pPr algn="ctr"/>
+          </a:p>
+        </p:txBody>
+      </p:sp>
+      <p:sp>
+        <p:nvSpPr>
+          <p:cNvPr id="9012" name="Oval 9011"/>
+          <p:cNvSpPr/>
+          <p:nvPr/>
+        </p:nvSpPr>
+        <p:spPr>
+          <a:xfrm>
+            <a:off x="8260079" y="3017520"/>
+            <a:ext cx="274320" cy="274320"/>
+          </a:xfrm>
+          <a:prstGeom prst="ellipse">
+            <a:avLst/>
+          </a:prstGeom>
+          <a:solidFill>
+            <a:srgbClr val="113E6A"/>
+          </a:solidFill>
+          <a:ln>
+            <a:noFill/>
+          </a:ln>
+          <a:effectLst/>
+        </p:spPr>
+        <p:style>
+          <a:lnRef idx="1">
+            <a:schemeClr val="accent1"/>
+          </a:lnRef>
+          <a:fillRef idx="3">
+            <a:schemeClr val="accent1"/>
+          </a:fillRef>
+          <a:effectRef idx="2">
+            <a:schemeClr val="accent1"/>
+          </a:effectRef>
+          <a:fontRef idx="minor">
+            <a:schemeClr val="lt1"/>
+          </a:fontRef>
+        </p:style>
+        <p:txBody>
+          <a:bodyPr rtlCol="0" anchor="ctr" lIns="0" rIns="0" tIns="0" bIns="0"/>
+          <a:lstStyle/>
+          <a:p>
+            <a:pPr algn="ctr"/>
+            <a:r>
+              <a:rPr sz="1000" b="1">
+                <a:solidFill>
+                  <a:srgbClr val="FFFFFF"/>
+                </a:solidFill>
+                <a:latin typeface="Arial"/>
+                <a:ea typeface="微软雅黑"/>
+              </a:rPr>
+              <a:t>03</a:t>
+            </a:r>
+          </a:p>
+        </p:txBody>
+      </p:sp>
+      <p:sp>
+        <p:nvSpPr>
+          <p:cNvPr id="9013" name="TextBox 9012"/>
+          <p:cNvSpPr txBox="1"/>
+          <p:nvPr/>
+        </p:nvSpPr>
+        <p:spPr>
+          <a:xfrm>
+            <a:off x="8625839" y="3017520"/>
+            <a:ext cx="2877312" cy="1901951"/>
+          </a:xfrm>
+          <a:prstGeom prst="rect">
+            <a:avLst/>
+          </a:prstGeom>
+          <a:noFill/>
+        </p:spPr>
+        <p:txBody>
+          <a:bodyPr wrap="square" anchor="ctr" lIns="0" rIns="0" tIns="0" bIns="0">
+            <a:spAutoFit/>
+          </a:bodyPr>
+          <a:lstStyle/>
+          <a:p>
+            <a:pPr algn="l"/>
+            <a:r>
+              <a:rPr sz="1600" b="1">
+                <a:solidFill>
+                  <a:srgbClr val="113E6A"/>
+                </a:solidFill>
+                <a:latin typeface="Arial"/>
+                <a:ea typeface="微软雅黑"/>
+              </a:rPr>
+              <a:t>单点故障风险</a:t>
+            </a:r>
+          </a:p>
+          <a:p>
+            <a:pPr algn="l">
+              <a:lnSpc>
+                <a:spcPct val="115000"/>
+              </a:lnSpc>
+              <a:spcBef>
+                <a:spcPts val="500"/>
+              </a:spcBef>
+            </a:pPr>
+            <a:r>
+              <a:rPr sz="1500" b="0">
+                <a:solidFill>
+                  <a:srgbClr val="2E2C2C"/>
+                </a:solidFill>
+                <a:latin typeface="Arial"/>
+                <a:ea typeface="微软雅黑"/>
+              </a:rPr>
+              <a:t>Leader 崩溃后需等待 Standby 接管，这段窗口内集群完全无法调度</a:t>
+            </a:r>
+          </a:p>
+        </p:txBody>
+      </p:sp>
+      <p:sp>
+        <p:nvSpPr>
+          <p:cNvPr id="9014" name="TextBox 9013"/>
+          <p:cNvSpPr txBox="1"/>
+          <p:nvPr/>
+        </p:nvSpPr>
+        <p:spPr>
+          <a:xfrm>
+            <a:off x="10780776" y="6345936"/>
+            <a:ext cx="850392" cy="219456"/>
+          </a:xfrm>
+          <a:prstGeom prst="rect">
+            <a:avLst/>
+          </a:prstGeom>
+          <a:noFill/>
+        </p:spPr>
+        <p:txBody>
+          <a:bodyPr wrap="square" anchor="t" lIns="0" rIns="0" tIns="0" bIns="0">
+            <a:spAutoFit/>
+          </a:bodyPr>
+          <a:lstStyle/>
+          <a:p>
+            <a:pPr algn="r"/>
+            <a:r>
+              <a:rPr sz="950" b="0">
+                <a:solidFill>
+                  <a:srgbClr val="636363"/>
+                </a:solidFill>
+                <a:latin typeface="Arial"/>
+                <a:ea typeface="微软雅黑"/>
+              </a:rPr>
+              <a:t>2 / 24</a:t>
+            </a:r>
+          </a:p>
+        </p:txBody>
+      </p:sp>
+    </p:spTree>
+  </p:cSld>
+  <p:clrMapOvr>
+    <a:masterClrMapping/>
+  </p:clrMapOvr>
+</p:sld>
+</file>
+
+<file path=ppt/slides/slide20.xml><?xml version="1.0" encoding="utf-8"?>
 <p:sld xmlns:a="http://schemas.openxmlformats.org/drawingml/2006/main" xmlns:p="http://schemas.openxmlformats.org/presentationml/2006/main" xmlns:r="http://schemas.openxmlformats.org/officeDocument/2006/relationships">
   <p:cSld>
     <p:bg>
@@ -16492,1381 +17844,7 @@
                 <a:latin typeface="Arial"/>
                 <a:ea typeface="微软雅黑"/>
               </a:rPr>
-              <a:t>19 / 23</a:t>
-            </a:r>
-          </a:p>
-        </p:txBody>
-      </p:sp>
-    </p:spTree>
-  </p:cSld>
-  <p:clrMapOvr>
-    <a:masterClrMapping/>
-  </p:clrMapOvr>
-</p:sld>
-</file>
-
-<file path=ppt/slides/slide2.xml><?xml version="1.0" encoding="utf-8"?>
-<p:sld xmlns:a="http://schemas.openxmlformats.org/drawingml/2006/main" xmlns:p="http://schemas.openxmlformats.org/presentationml/2006/main" xmlns:r="http://schemas.openxmlformats.org/officeDocument/2006/relationships">
-  <p:cSld>
-    <p:bg>
-      <p:bgPr>
-        <a:solidFill>
-          <a:srgbClr val="FFFFFF"/>
-        </a:solidFill>
-        <a:effectLst/>
-      </p:bgPr>
-    </p:bg>
-    <p:spTree>
-      <p:nvGrpSpPr>
-        <p:cNvPr id="1" name=""/>
-        <p:cNvGrpSpPr/>
-        <p:nvPr/>
-      </p:nvGrpSpPr>
-      <p:grpSpPr/>
-      <p:sp>
-        <p:nvSpPr>
-          <p:cNvPr id="9000" name="Freeform 5"/>
-          <p:cNvSpPr/>
-          <p:nvPr/>
-        </p:nvSpPr>
-        <p:spPr>
-          <a:xfrm>
-            <a:off x="182880" y="274320"/>
-            <a:ext cx="310896" cy="402336"/>
-          </a:xfrm>
-          <a:custGeom>
-            <a:avLst/>
-            <a:gdLst/>
-            <a:ahLst/>
-            <a:cxnLst>
-              <a:cxn ang="0">
-                <a:pos x="2147483647" y="2147483647"/>
-              </a:cxn>
-              <a:cxn ang="0">
-                <a:pos x="2147483647" y="2147483647"/>
-              </a:cxn>
-              <a:cxn ang="0">
-                <a:pos x="2147483647" y="2147483647"/>
-              </a:cxn>
-              <a:cxn ang="0">
-                <a:pos x="2147483647" y="2147483647"/>
-              </a:cxn>
-              <a:cxn ang="0">
-                <a:pos x="2147483647" y="2147483647"/>
-              </a:cxn>
-              <a:cxn ang="0">
-                <a:pos x="2147483647" y="2147483647"/>
-              </a:cxn>
-              <a:cxn ang="0">
-                <a:pos x="2147483647" y="2147483647"/>
-              </a:cxn>
-              <a:cxn ang="0">
-                <a:pos x="2147483647" y="2147483647"/>
-              </a:cxn>
-              <a:cxn ang="0">
-                <a:pos x="2147483647" y="0"/>
-              </a:cxn>
-              <a:cxn ang="0">
-                <a:pos x="2147483647" y="2147483647"/>
-              </a:cxn>
-              <a:cxn ang="0">
-                <a:pos x="2147483647" y="2147483647"/>
-              </a:cxn>
-              <a:cxn ang="0">
-                <a:pos x="2147483647" y="2147483647"/>
-              </a:cxn>
-              <a:cxn ang="0">
-                <a:pos x="2147483647" y="2147483647"/>
-              </a:cxn>
-              <a:cxn ang="0">
-                <a:pos x="2147483647" y="2147483647"/>
-              </a:cxn>
-              <a:cxn ang="0">
-                <a:pos x="2147483647" y="2147483647"/>
-              </a:cxn>
-              <a:cxn ang="0">
-                <a:pos x="2147483647" y="2147483647"/>
-              </a:cxn>
-              <a:cxn ang="0">
-                <a:pos x="2147483647" y="2147483647"/>
-              </a:cxn>
-              <a:cxn ang="0">
-                <a:pos x="2147483647" y="2147483647"/>
-              </a:cxn>
-              <a:cxn ang="0">
-                <a:pos x="2147483647" y="2147483647"/>
-              </a:cxn>
-              <a:cxn ang="0">
-                <a:pos x="0" y="2147483647"/>
-              </a:cxn>
-              <a:cxn ang="0">
-                <a:pos x="2147483647" y="2147483647"/>
-              </a:cxn>
-            </a:cxnLst>
-            <a:rect l="0" t="0" r="0" b="0"/>
-            <a:pathLst>
-              <a:path w="574" h="681">
-                <a:moveTo>
-                  <a:pt x="120" y="441"/>
-                </a:moveTo>
-                <a:cubicBezTo>
-                  <a:pt x="153" y="441"/>
-                  <a:pt x="183" y="454"/>
-                  <a:pt x="205" y="476"/>
-                </a:cubicBezTo>
-                <a:lnTo>
-                  <a:pt x="389" y="329"/>
-                </a:lnTo>
-                <a:cubicBezTo>
-                  <a:pt x="383" y="317"/>
-                  <a:pt x="380" y="303"/>
-                  <a:pt x="380" y="289"/>
-                </a:cubicBezTo>
-                <a:cubicBezTo>
-                  <a:pt x="380" y="271"/>
-                  <a:pt x="384" y="255"/>
-                  <a:pt x="392" y="241"/>
-                </a:cubicBezTo>
-                <a:lnTo>
-                  <a:pt x="270" y="138"/>
-                </a:lnTo>
-                <a:cubicBezTo>
-                  <a:pt x="256" y="151"/>
-                  <a:pt x="237" y="159"/>
-                  <a:pt x="217" y="159"/>
-                </a:cubicBezTo>
-                <a:cubicBezTo>
-                  <a:pt x="173" y="159"/>
-                  <a:pt x="137" y="123"/>
-                  <a:pt x="137" y="79"/>
-                </a:cubicBezTo>
-                <a:cubicBezTo>
-                  <a:pt x="137" y="36"/>
-                  <a:pt x="173" y="0"/>
-                  <a:pt x="217" y="0"/>
-                </a:cubicBezTo>
-                <a:cubicBezTo>
-                  <a:pt x="260" y="0"/>
-                  <a:pt x="296" y="36"/>
-                  <a:pt x="296" y="79"/>
-                </a:cubicBezTo>
-                <a:cubicBezTo>
-                  <a:pt x="296" y="91"/>
-                  <a:pt x="293" y="103"/>
-                  <a:pt x="289" y="113"/>
-                </a:cubicBezTo>
-                <a:lnTo>
-                  <a:pt x="412" y="217"/>
-                </a:lnTo>
-                <a:cubicBezTo>
-                  <a:pt x="429" y="201"/>
-                  <a:pt x="452" y="192"/>
-                  <a:pt x="477" y="192"/>
-                </a:cubicBezTo>
-                <a:cubicBezTo>
-                  <a:pt x="530" y="192"/>
-                  <a:pt x="574" y="235"/>
-                  <a:pt x="574" y="289"/>
-                </a:cubicBezTo>
-                <a:cubicBezTo>
-                  <a:pt x="574" y="342"/>
-                  <a:pt x="530" y="386"/>
-                  <a:pt x="477" y="386"/>
-                </a:cubicBezTo>
-                <a:cubicBezTo>
-                  <a:pt x="449" y="386"/>
-                  <a:pt x="424" y="374"/>
-                  <a:pt x="406" y="355"/>
-                </a:cubicBezTo>
-                <a:lnTo>
-                  <a:pt x="224" y="501"/>
-                </a:lnTo>
-                <a:cubicBezTo>
-                  <a:pt x="234" y="518"/>
-                  <a:pt x="240" y="539"/>
-                  <a:pt x="240" y="561"/>
-                </a:cubicBezTo>
-                <a:cubicBezTo>
-                  <a:pt x="240" y="627"/>
-                  <a:pt x="186" y="681"/>
-                  <a:pt x="120" y="681"/>
-                </a:cubicBezTo>
-                <a:cubicBezTo>
-                  <a:pt x="54" y="681"/>
-                  <a:pt x="0" y="627"/>
-                  <a:pt x="0" y="561"/>
-                </a:cubicBezTo>
-                <a:cubicBezTo>
-                  <a:pt x="0" y="495"/>
-                  <a:pt x="54" y="441"/>
-                  <a:pt x="120" y="441"/>
-                </a:cubicBezTo>
-                <a:close/>
-              </a:path>
-            </a:pathLst>
-          </a:custGeom>
-          <a:solidFill>
-            <a:srgbClr val="113E6A"/>
-          </a:solidFill>
-          <a:ln w="9525">
-            <a:noFill/>
-          </a:ln>
-        </p:spPr>
-        <p:txBody>
-          <a:bodyPr/>
-          <a:lstStyle/>
-          <a:p>
-            <a:endParaRPr lang="zh-CN" altLang="en-US"/>
-          </a:p>
-        </p:txBody>
-      </p:sp>
-      <p:pic>
-        <p:nvPicPr>
-          <p:cNvPr id="9001" name="Picture 9000" descr="beihang-logo-navy.png"/>
-          <p:cNvPicPr>
-            <a:picLocks noChangeAspect="1"/>
-          </p:cNvPicPr>
-          <p:nvPr/>
-        </p:nvPicPr>
-        <p:blipFill>
-          <a:blip r:embed="rId2"/>
-          <a:stretch>
-            <a:fillRect/>
-          </a:stretch>
-        </p:blipFill>
-        <p:spPr>
-          <a:xfrm>
-            <a:off x="9336024" y="91665"/>
-            <a:ext cx="2642616" cy="502469"/>
-          </a:xfrm>
-          <a:prstGeom prst="rect">
-            <a:avLst/>
-          </a:prstGeom>
-        </p:spPr>
-      </p:pic>
-      <p:sp>
-        <p:nvSpPr>
-          <p:cNvPr id="9002" name="TextBox 9001"/>
-          <p:cNvSpPr txBox="1"/>
-          <p:nvPr/>
-        </p:nvSpPr>
-        <p:spPr>
-          <a:xfrm>
-            <a:off x="566928" y="155448"/>
-            <a:ext cx="8549640" cy="621792"/>
-          </a:xfrm>
-          <a:prstGeom prst="rect">
-            <a:avLst/>
-          </a:prstGeom>
-          <a:noFill/>
-        </p:spPr>
-        <p:txBody>
-          <a:bodyPr wrap="square" anchor="ctr" lIns="0" rIns="0" tIns="0" bIns="0">
-            <a:spAutoFit/>
-          </a:bodyPr>
-          <a:lstStyle/>
-          <a:p>
-            <a:pPr algn="l">
-              <a:lnSpc>
-                <a:spcPct val="100000"/>
-              </a:lnSpc>
-            </a:pPr>
-            <a:r>
-              <a:rPr sz="3000" b="1">
-                <a:solidFill>
-                  <a:srgbClr val="113E6A"/>
-                </a:solidFill>
-                <a:latin typeface="Arial"/>
-                <a:ea typeface="微软雅黑"/>
-              </a:rPr>
-              <a:t>研究背景</a:t>
-            </a:r>
-          </a:p>
-        </p:txBody>
-      </p:sp>
-      <p:sp>
-        <p:nvSpPr>
-          <p:cNvPr id="9003" name="TextBox 9002"/>
-          <p:cNvSpPr txBox="1"/>
-          <p:nvPr/>
-        </p:nvSpPr>
-        <p:spPr>
-          <a:xfrm>
-            <a:off x="566928" y="1261872"/>
-            <a:ext cx="10881360" cy="438912"/>
-          </a:xfrm>
-          <a:prstGeom prst="rect">
-            <a:avLst/>
-          </a:prstGeom>
-          <a:noFill/>
-        </p:spPr>
-        <p:txBody>
-          <a:bodyPr wrap="square" anchor="ctr" lIns="0" rIns="0" tIns="0" bIns="0">
-            <a:spAutoFit/>
-          </a:bodyPr>
-          <a:lstStyle/>
-          <a:p>
-            <a:pPr algn="l">
-              <a:lnSpc>
-                <a:spcPct val="110000"/>
-              </a:lnSpc>
-            </a:pPr>
-            <a:r>
-              <a:rPr sz="1800" b="1">
-                <a:solidFill>
-                  <a:srgbClr val="0070C0"/>
-                </a:solidFill>
-                <a:latin typeface="Arial"/>
-                <a:ea typeface="微软雅黑"/>
-              </a:rPr>
-              <a:t>生产集群进入万节点量级，单实例架构在吞吐与高可用上同时受制</a:t>
-            </a:r>
-          </a:p>
-        </p:txBody>
-      </p:sp>
-      <p:sp>
-        <p:nvSpPr>
-          <p:cNvPr id="9004" name="TextBox 9003"/>
-          <p:cNvSpPr txBox="1"/>
-          <p:nvPr/>
-        </p:nvSpPr>
-        <p:spPr>
-          <a:xfrm>
-            <a:off x="566928" y="1783080"/>
-            <a:ext cx="10881360" cy="1234440"/>
-          </a:xfrm>
-          <a:prstGeom prst="rect">
-            <a:avLst/>
-          </a:prstGeom>
-          <a:noFill/>
-        </p:spPr>
-        <p:txBody>
-          <a:bodyPr wrap="square" anchor="t" lIns="0" rIns="0" tIns="0" bIns="0">
-            <a:spAutoFit/>
-          </a:bodyPr>
-          <a:lstStyle/>
-          <a:p>
-            <a:pPr algn="l">
-              <a:lnSpc>
-                <a:spcPct val="135000"/>
-              </a:lnSpc>
-            </a:pPr>
-            <a:r>
-              <a:rPr sz="1500" b="0">
-                <a:solidFill>
-                  <a:srgbClr val="2E2C2C"/>
-                </a:solidFill>
-                <a:latin typeface="Arial"/>
-                <a:ea typeface="微软雅黑"/>
-              </a:rPr>
-              <a:t>Kubernetes 已成为云原生的事实标准，调度器处在 Pod 生命周期的关键路径上：它的吞吐与延迟直接决定集群资源利用率与业务响应速度。千节点规模下单实例尚可支撑，集群进入万节点量级后，三个瓶颈同时显现。</a:t>
-            </a:r>
-          </a:p>
-        </p:txBody>
-      </p:sp>
-      <p:sp>
-        <p:nvSpPr>
-          <p:cNvPr id="9005" name="Rounded Rectangle 9004"/>
-          <p:cNvSpPr/>
-          <p:nvPr/>
-        </p:nvSpPr>
-        <p:spPr>
-          <a:xfrm>
-            <a:off x="566928" y="2880360"/>
-            <a:ext cx="3517391" cy="2103120"/>
-          </a:xfrm>
-          <a:prstGeom prst="roundRect">
-            <a:avLst/>
-          </a:prstGeom>
-          <a:solidFill>
-            <a:srgbClr val="FFFFFF"/>
-          </a:solidFill>
-          <a:ln w="9525">
-            <a:solidFill>
-              <a:srgbClr val="D6E3F0"/>
-            </a:solidFill>
-          </a:ln>
-          <a:effectLst/>
-        </p:spPr>
-        <p:style>
-          <a:lnRef idx="1">
-            <a:schemeClr val="accent1"/>
-          </a:lnRef>
-          <a:fillRef idx="3">
-            <a:schemeClr val="accent1"/>
-          </a:fillRef>
-          <a:effectRef idx="2">
-            <a:schemeClr val="accent1"/>
-          </a:effectRef>
-          <a:fontRef idx="minor">
-            <a:schemeClr val="lt1"/>
-          </a:fontRef>
-        </p:style>
-        <p:txBody>
-          <a:bodyPr rtlCol="0" anchor="ctr"/>
-          <a:lstStyle/>
-          <a:p>
-            <a:pPr algn="ctr"/>
-          </a:p>
-        </p:txBody>
-      </p:sp>
-      <p:sp>
-        <p:nvSpPr>
-          <p:cNvPr id="9006" name="Oval 9005"/>
-          <p:cNvSpPr/>
-          <p:nvPr/>
-        </p:nvSpPr>
-        <p:spPr>
-          <a:xfrm>
-            <a:off x="713232" y="3017520"/>
-            <a:ext cx="274320" cy="274320"/>
-          </a:xfrm>
-          <a:prstGeom prst="ellipse">
-            <a:avLst/>
-          </a:prstGeom>
-          <a:solidFill>
-            <a:srgbClr val="113E6A"/>
-          </a:solidFill>
-          <a:ln>
-            <a:noFill/>
-          </a:ln>
-          <a:effectLst/>
-        </p:spPr>
-        <p:style>
-          <a:lnRef idx="1">
-            <a:schemeClr val="accent1"/>
-          </a:lnRef>
-          <a:fillRef idx="3">
-            <a:schemeClr val="accent1"/>
-          </a:fillRef>
-          <a:effectRef idx="2">
-            <a:schemeClr val="accent1"/>
-          </a:effectRef>
-          <a:fontRef idx="minor">
-            <a:schemeClr val="lt1"/>
-          </a:fontRef>
-        </p:style>
-        <p:txBody>
-          <a:bodyPr rtlCol="0" anchor="ctr" lIns="0" rIns="0" tIns="0" bIns="0"/>
-          <a:lstStyle/>
-          <a:p>
-            <a:pPr algn="ctr"/>
-            <a:r>
-              <a:rPr sz="1000" b="1">
-                <a:solidFill>
-                  <a:srgbClr val="FFFFFF"/>
-                </a:solidFill>
-                <a:latin typeface="Arial"/>
-                <a:ea typeface="微软雅黑"/>
-              </a:rPr>
-              <a:t>01</a:t>
-            </a:r>
-          </a:p>
-        </p:txBody>
-      </p:sp>
-      <p:sp>
-        <p:nvSpPr>
-          <p:cNvPr id="9007" name="TextBox 9006"/>
-          <p:cNvSpPr txBox="1"/>
-          <p:nvPr/>
-        </p:nvSpPr>
-        <p:spPr>
-          <a:xfrm>
-            <a:off x="1078992" y="3017520"/>
-            <a:ext cx="2877312" cy="1901951"/>
-          </a:xfrm>
-          <a:prstGeom prst="rect">
-            <a:avLst/>
-          </a:prstGeom>
-          <a:noFill/>
-        </p:spPr>
-        <p:txBody>
-          <a:bodyPr wrap="square" anchor="ctr" lIns="0" rIns="0" tIns="0" bIns="0">
-            <a:spAutoFit/>
-          </a:bodyPr>
-          <a:lstStyle/>
-          <a:p>
-            <a:pPr algn="l"/>
-            <a:r>
-              <a:rPr sz="1600" b="1">
-                <a:solidFill>
-                  <a:srgbClr val="113E6A"/>
-                </a:solidFill>
-                <a:latin typeface="Arial"/>
-                <a:ea typeface="微软雅黑"/>
-              </a:rPr>
-              <a:t>吞吐存在上限</a:t>
-            </a:r>
-          </a:p>
-          <a:p>
-            <a:pPr algn="l">
-              <a:lnSpc>
-                <a:spcPct val="115000"/>
-              </a:lnSpc>
-              <a:spcBef>
-                <a:spcPts val="500"/>
-              </a:spcBef>
-            </a:pPr>
-            <a:r>
-              <a:rPr sz="1500" b="0">
-                <a:solidFill>
-                  <a:srgbClr val="2E2C2C"/>
-                </a:solidFill>
-                <a:latin typeface="Arial"/>
-                <a:ea typeface="微软雅黑"/>
-              </a:rPr>
-              <a:t>activeQ 串行处理 Pod，大规模弹性伸缩与批任务启动被拖慢</a:t>
-            </a:r>
-          </a:p>
-        </p:txBody>
-      </p:sp>
-      <p:sp>
-        <p:nvSpPr>
-          <p:cNvPr id="9008" name="Rounded Rectangle 9007"/>
-          <p:cNvSpPr/>
-          <p:nvPr/>
-        </p:nvSpPr>
-        <p:spPr>
-          <a:xfrm>
-            <a:off x="4340351" y="2880360"/>
-            <a:ext cx="3517391" cy="2103120"/>
-          </a:xfrm>
-          <a:prstGeom prst="roundRect">
-            <a:avLst/>
-          </a:prstGeom>
-          <a:solidFill>
-            <a:srgbClr val="FFFFFF"/>
-          </a:solidFill>
-          <a:ln w="9525">
-            <a:solidFill>
-              <a:srgbClr val="D6E3F0"/>
-            </a:solidFill>
-          </a:ln>
-          <a:effectLst/>
-        </p:spPr>
-        <p:style>
-          <a:lnRef idx="1">
-            <a:schemeClr val="accent1"/>
-          </a:lnRef>
-          <a:fillRef idx="3">
-            <a:schemeClr val="accent1"/>
-          </a:fillRef>
-          <a:effectRef idx="2">
-            <a:schemeClr val="accent1"/>
-          </a:effectRef>
-          <a:fontRef idx="minor">
-            <a:schemeClr val="lt1"/>
-          </a:fontRef>
-        </p:style>
-        <p:txBody>
-          <a:bodyPr rtlCol="0" anchor="ctr"/>
-          <a:lstStyle/>
-          <a:p>
-            <a:pPr algn="ctr"/>
-          </a:p>
-        </p:txBody>
-      </p:sp>
-      <p:sp>
-        <p:nvSpPr>
-          <p:cNvPr id="9009" name="Oval 9008"/>
-          <p:cNvSpPr/>
-          <p:nvPr/>
-        </p:nvSpPr>
-        <p:spPr>
-          <a:xfrm>
-            <a:off x="4486656" y="3017520"/>
-            <a:ext cx="274320" cy="274320"/>
-          </a:xfrm>
-          <a:prstGeom prst="ellipse">
-            <a:avLst/>
-          </a:prstGeom>
-          <a:solidFill>
-            <a:srgbClr val="113E6A"/>
-          </a:solidFill>
-          <a:ln>
-            <a:noFill/>
-          </a:ln>
-          <a:effectLst/>
-        </p:spPr>
-        <p:style>
-          <a:lnRef idx="1">
-            <a:schemeClr val="accent1"/>
-          </a:lnRef>
-          <a:fillRef idx="3">
-            <a:schemeClr val="accent1"/>
-          </a:fillRef>
-          <a:effectRef idx="2">
-            <a:schemeClr val="accent1"/>
-          </a:effectRef>
-          <a:fontRef idx="minor">
-            <a:schemeClr val="lt1"/>
-          </a:fontRef>
-        </p:style>
-        <p:txBody>
-          <a:bodyPr rtlCol="0" anchor="ctr" lIns="0" rIns="0" tIns="0" bIns="0"/>
-          <a:lstStyle/>
-          <a:p>
-            <a:pPr algn="ctr"/>
-            <a:r>
-              <a:rPr sz="1000" b="1">
-                <a:solidFill>
-                  <a:srgbClr val="FFFFFF"/>
-                </a:solidFill>
-                <a:latin typeface="Arial"/>
-                <a:ea typeface="微软雅黑"/>
-              </a:rPr>
-              <a:t>02</a:t>
-            </a:r>
-          </a:p>
-        </p:txBody>
-      </p:sp>
-      <p:sp>
-        <p:nvSpPr>
-          <p:cNvPr id="9010" name="TextBox 9009"/>
-          <p:cNvSpPr txBox="1"/>
-          <p:nvPr/>
-        </p:nvSpPr>
-        <p:spPr>
-          <a:xfrm>
-            <a:off x="4852416" y="3017520"/>
-            <a:ext cx="2877312" cy="1901951"/>
-          </a:xfrm>
-          <a:prstGeom prst="rect">
-            <a:avLst/>
-          </a:prstGeom>
-          <a:noFill/>
-        </p:spPr>
-        <p:txBody>
-          <a:bodyPr wrap="square" anchor="ctr" lIns="0" rIns="0" tIns="0" bIns="0">
-            <a:spAutoFit/>
-          </a:bodyPr>
-          <a:lstStyle/>
-          <a:p>
-            <a:pPr algn="l"/>
-            <a:r>
-              <a:rPr sz="1600" b="1">
-                <a:solidFill>
-                  <a:srgbClr val="113E6A"/>
-                </a:solidFill>
-                <a:latin typeface="Arial"/>
-                <a:ea typeface="微软雅黑"/>
-              </a:rPr>
-              <a:t>尾延迟持续抬升</a:t>
-            </a:r>
-          </a:p>
-          <a:p>
-            <a:pPr algn="l">
-              <a:lnSpc>
-                <a:spcPct val="115000"/>
-              </a:lnSpc>
-              <a:spcBef>
-                <a:spcPts val="500"/>
-              </a:spcBef>
-            </a:pPr>
-            <a:r>
-              <a:rPr sz="1500" b="0">
-                <a:solidFill>
-                  <a:srgbClr val="2E2C2C"/>
-                </a:solidFill>
-                <a:latin typeface="Arial"/>
-                <a:ea typeface="微软雅黑"/>
-              </a:rPr>
-              <a:t>Filter/Score 遍历节点开销随规模线性上升，5000 节点下 P99 明显恶化</a:t>
-            </a:r>
-          </a:p>
-        </p:txBody>
-      </p:sp>
-      <p:sp>
-        <p:nvSpPr>
-          <p:cNvPr id="9011" name="Rounded Rectangle 9010"/>
-          <p:cNvSpPr/>
-          <p:nvPr/>
-        </p:nvSpPr>
-        <p:spPr>
-          <a:xfrm>
-            <a:off x="8113775" y="2880360"/>
-            <a:ext cx="3517391" cy="2103120"/>
-          </a:xfrm>
-          <a:prstGeom prst="roundRect">
-            <a:avLst/>
-          </a:prstGeom>
-          <a:solidFill>
-            <a:srgbClr val="FFFFFF"/>
-          </a:solidFill>
-          <a:ln w="9525">
-            <a:solidFill>
-              <a:srgbClr val="D6E3F0"/>
-            </a:solidFill>
-          </a:ln>
-          <a:effectLst/>
-        </p:spPr>
-        <p:style>
-          <a:lnRef idx="1">
-            <a:schemeClr val="accent1"/>
-          </a:lnRef>
-          <a:fillRef idx="3">
-            <a:schemeClr val="accent1"/>
-          </a:fillRef>
-          <a:effectRef idx="2">
-            <a:schemeClr val="accent1"/>
-          </a:effectRef>
-          <a:fontRef idx="minor">
-            <a:schemeClr val="lt1"/>
-          </a:fontRef>
-        </p:style>
-        <p:txBody>
-          <a:bodyPr rtlCol="0" anchor="ctr"/>
-          <a:lstStyle/>
-          <a:p>
-            <a:pPr algn="ctr"/>
-          </a:p>
-        </p:txBody>
-      </p:sp>
-      <p:sp>
-        <p:nvSpPr>
-          <p:cNvPr id="9012" name="Oval 9011"/>
-          <p:cNvSpPr/>
-          <p:nvPr/>
-        </p:nvSpPr>
-        <p:spPr>
-          <a:xfrm>
-            <a:off x="8260079" y="3017520"/>
-            <a:ext cx="274320" cy="274320"/>
-          </a:xfrm>
-          <a:prstGeom prst="ellipse">
-            <a:avLst/>
-          </a:prstGeom>
-          <a:solidFill>
-            <a:srgbClr val="113E6A"/>
-          </a:solidFill>
-          <a:ln>
-            <a:noFill/>
-          </a:ln>
-          <a:effectLst/>
-        </p:spPr>
-        <p:style>
-          <a:lnRef idx="1">
-            <a:schemeClr val="accent1"/>
-          </a:lnRef>
-          <a:fillRef idx="3">
-            <a:schemeClr val="accent1"/>
-          </a:fillRef>
-          <a:effectRef idx="2">
-            <a:schemeClr val="accent1"/>
-          </a:effectRef>
-          <a:fontRef idx="minor">
-            <a:schemeClr val="lt1"/>
-          </a:fontRef>
-        </p:style>
-        <p:txBody>
-          <a:bodyPr rtlCol="0" anchor="ctr" lIns="0" rIns="0" tIns="0" bIns="0"/>
-          <a:lstStyle/>
-          <a:p>
-            <a:pPr algn="ctr"/>
-            <a:r>
-              <a:rPr sz="1000" b="1">
-                <a:solidFill>
-                  <a:srgbClr val="FFFFFF"/>
-                </a:solidFill>
-                <a:latin typeface="Arial"/>
-                <a:ea typeface="微软雅黑"/>
-              </a:rPr>
-              <a:t>03</a:t>
-            </a:r>
-          </a:p>
-        </p:txBody>
-      </p:sp>
-      <p:sp>
-        <p:nvSpPr>
-          <p:cNvPr id="9013" name="TextBox 9012"/>
-          <p:cNvSpPr txBox="1"/>
-          <p:nvPr/>
-        </p:nvSpPr>
-        <p:spPr>
-          <a:xfrm>
-            <a:off x="8625839" y="3017520"/>
-            <a:ext cx="2877312" cy="1901951"/>
-          </a:xfrm>
-          <a:prstGeom prst="rect">
-            <a:avLst/>
-          </a:prstGeom>
-          <a:noFill/>
-        </p:spPr>
-        <p:txBody>
-          <a:bodyPr wrap="square" anchor="ctr" lIns="0" rIns="0" tIns="0" bIns="0">
-            <a:spAutoFit/>
-          </a:bodyPr>
-          <a:lstStyle/>
-          <a:p>
-            <a:pPr algn="l"/>
-            <a:r>
-              <a:rPr sz="1600" b="1">
-                <a:solidFill>
-                  <a:srgbClr val="113E6A"/>
-                </a:solidFill>
-                <a:latin typeface="Arial"/>
-                <a:ea typeface="微软雅黑"/>
-              </a:rPr>
-              <a:t>单点故障风险</a:t>
-            </a:r>
-          </a:p>
-          <a:p>
-            <a:pPr algn="l">
-              <a:lnSpc>
-                <a:spcPct val="115000"/>
-              </a:lnSpc>
-              <a:spcBef>
-                <a:spcPts val="500"/>
-              </a:spcBef>
-            </a:pPr>
-            <a:r>
-              <a:rPr sz="1500" b="0">
-                <a:solidFill>
-                  <a:srgbClr val="2E2C2C"/>
-                </a:solidFill>
-                <a:latin typeface="Arial"/>
-                <a:ea typeface="微软雅黑"/>
-              </a:rPr>
-              <a:t>Leader 崩溃后需等待 Standby 接管，这段窗口内集群完全无法调度</a:t>
-            </a:r>
-          </a:p>
-        </p:txBody>
-      </p:sp>
-      <p:sp>
-        <p:nvSpPr>
-          <p:cNvPr id="9014" name="TextBox 9013"/>
-          <p:cNvSpPr txBox="1"/>
-          <p:nvPr/>
-        </p:nvSpPr>
-        <p:spPr>
-          <a:xfrm>
-            <a:off x="10780776" y="6345936"/>
-            <a:ext cx="850392" cy="219456"/>
-          </a:xfrm>
-          <a:prstGeom prst="rect">
-            <a:avLst/>
-          </a:prstGeom>
-          <a:noFill/>
-        </p:spPr>
-        <p:txBody>
-          <a:bodyPr wrap="square" anchor="t" lIns="0" rIns="0" tIns="0" bIns="0">
-            <a:spAutoFit/>
-          </a:bodyPr>
-          <a:lstStyle/>
-          <a:p>
-            <a:pPr algn="r"/>
-            <a:r>
-              <a:rPr sz="950" b="0">
-                <a:solidFill>
-                  <a:srgbClr val="636363"/>
-                </a:solidFill>
-                <a:latin typeface="Arial"/>
-                <a:ea typeface="微软雅黑"/>
-              </a:rPr>
-              <a:t>2 / 23</a:t>
-            </a:r>
-          </a:p>
-        </p:txBody>
-      </p:sp>
-    </p:spTree>
-  </p:cSld>
-  <p:clrMapOvr>
-    <a:masterClrMapping/>
-  </p:clrMapOvr>
-</p:sld>
-</file>
-
-<file path=ppt/slides/slide20.xml><?xml version="1.0" encoding="utf-8"?>
-<p:sld xmlns:a="http://schemas.openxmlformats.org/drawingml/2006/main" xmlns:p="http://schemas.openxmlformats.org/presentationml/2006/main" xmlns:r="http://schemas.openxmlformats.org/officeDocument/2006/relationships">
-  <p:cSld>
-    <p:bg>
-      <p:bgPr>
-        <a:solidFill>
-          <a:srgbClr val="FFFFFF"/>
-        </a:solidFill>
-        <a:effectLst/>
-      </p:bgPr>
-    </p:bg>
-    <p:spTree>
-      <p:nvGrpSpPr>
-        <p:cNvPr id="1" name=""/>
-        <p:cNvGrpSpPr/>
-        <p:nvPr/>
-      </p:nvGrpSpPr>
-      <p:grpSpPr/>
-      <p:sp>
-        <p:nvSpPr>
-          <p:cNvPr id="9000" name="Freeform 5"/>
-          <p:cNvSpPr/>
-          <p:nvPr/>
-        </p:nvSpPr>
-        <p:spPr>
-          <a:xfrm>
-            <a:off x="182880" y="274320"/>
-            <a:ext cx="310896" cy="402336"/>
-          </a:xfrm>
-          <a:custGeom>
-            <a:avLst/>
-            <a:gdLst/>
-            <a:ahLst/>
-            <a:cxnLst>
-              <a:cxn ang="0">
-                <a:pos x="2147483647" y="2147483647"/>
-              </a:cxn>
-              <a:cxn ang="0">
-                <a:pos x="2147483647" y="2147483647"/>
-              </a:cxn>
-              <a:cxn ang="0">
-                <a:pos x="2147483647" y="2147483647"/>
-              </a:cxn>
-              <a:cxn ang="0">
-                <a:pos x="2147483647" y="2147483647"/>
-              </a:cxn>
-              <a:cxn ang="0">
-                <a:pos x="2147483647" y="2147483647"/>
-              </a:cxn>
-              <a:cxn ang="0">
-                <a:pos x="2147483647" y="2147483647"/>
-              </a:cxn>
-              <a:cxn ang="0">
-                <a:pos x="2147483647" y="2147483647"/>
-              </a:cxn>
-              <a:cxn ang="0">
-                <a:pos x="2147483647" y="2147483647"/>
-              </a:cxn>
-              <a:cxn ang="0">
-                <a:pos x="2147483647" y="0"/>
-              </a:cxn>
-              <a:cxn ang="0">
-                <a:pos x="2147483647" y="2147483647"/>
-              </a:cxn>
-              <a:cxn ang="0">
-                <a:pos x="2147483647" y="2147483647"/>
-              </a:cxn>
-              <a:cxn ang="0">
-                <a:pos x="2147483647" y="2147483647"/>
-              </a:cxn>
-              <a:cxn ang="0">
-                <a:pos x="2147483647" y="2147483647"/>
-              </a:cxn>
-              <a:cxn ang="0">
-                <a:pos x="2147483647" y="2147483647"/>
-              </a:cxn>
-              <a:cxn ang="0">
-                <a:pos x="2147483647" y="2147483647"/>
-              </a:cxn>
-              <a:cxn ang="0">
-                <a:pos x="2147483647" y="2147483647"/>
-              </a:cxn>
-              <a:cxn ang="0">
-                <a:pos x="2147483647" y="2147483647"/>
-              </a:cxn>
-              <a:cxn ang="0">
-                <a:pos x="2147483647" y="2147483647"/>
-              </a:cxn>
-              <a:cxn ang="0">
-                <a:pos x="2147483647" y="2147483647"/>
-              </a:cxn>
-              <a:cxn ang="0">
-                <a:pos x="0" y="2147483647"/>
-              </a:cxn>
-              <a:cxn ang="0">
-                <a:pos x="2147483647" y="2147483647"/>
-              </a:cxn>
-            </a:cxnLst>
-            <a:rect l="0" t="0" r="0" b="0"/>
-            <a:pathLst>
-              <a:path w="574" h="681">
-                <a:moveTo>
-                  <a:pt x="120" y="441"/>
-                </a:moveTo>
-                <a:cubicBezTo>
-                  <a:pt x="153" y="441"/>
-                  <a:pt x="183" y="454"/>
-                  <a:pt x="205" y="476"/>
-                </a:cubicBezTo>
-                <a:lnTo>
-                  <a:pt x="389" y="329"/>
-                </a:lnTo>
-                <a:cubicBezTo>
-                  <a:pt x="383" y="317"/>
-                  <a:pt x="380" y="303"/>
-                  <a:pt x="380" y="289"/>
-                </a:cubicBezTo>
-                <a:cubicBezTo>
-                  <a:pt x="380" y="271"/>
-                  <a:pt x="384" y="255"/>
-                  <a:pt x="392" y="241"/>
-                </a:cubicBezTo>
-                <a:lnTo>
-                  <a:pt x="270" y="138"/>
-                </a:lnTo>
-                <a:cubicBezTo>
-                  <a:pt x="256" y="151"/>
-                  <a:pt x="237" y="159"/>
-                  <a:pt x="217" y="159"/>
-                </a:cubicBezTo>
-                <a:cubicBezTo>
-                  <a:pt x="173" y="159"/>
-                  <a:pt x="137" y="123"/>
-                  <a:pt x="137" y="79"/>
-                </a:cubicBezTo>
-                <a:cubicBezTo>
-                  <a:pt x="137" y="36"/>
-                  <a:pt x="173" y="0"/>
-                  <a:pt x="217" y="0"/>
-                </a:cubicBezTo>
-                <a:cubicBezTo>
-                  <a:pt x="260" y="0"/>
-                  <a:pt x="296" y="36"/>
-                  <a:pt x="296" y="79"/>
-                </a:cubicBezTo>
-                <a:cubicBezTo>
-                  <a:pt x="296" y="91"/>
-                  <a:pt x="293" y="103"/>
-                  <a:pt x="289" y="113"/>
-                </a:cubicBezTo>
-                <a:lnTo>
-                  <a:pt x="412" y="217"/>
-                </a:lnTo>
-                <a:cubicBezTo>
-                  <a:pt x="429" y="201"/>
-                  <a:pt x="452" y="192"/>
-                  <a:pt x="477" y="192"/>
-                </a:cubicBezTo>
-                <a:cubicBezTo>
-                  <a:pt x="530" y="192"/>
-                  <a:pt x="574" y="235"/>
-                  <a:pt x="574" y="289"/>
-                </a:cubicBezTo>
-                <a:cubicBezTo>
-                  <a:pt x="574" y="342"/>
-                  <a:pt x="530" y="386"/>
-                  <a:pt x="477" y="386"/>
-                </a:cubicBezTo>
-                <a:cubicBezTo>
-                  <a:pt x="449" y="386"/>
-                  <a:pt x="424" y="374"/>
-                  <a:pt x="406" y="355"/>
-                </a:cubicBezTo>
-                <a:lnTo>
-                  <a:pt x="224" y="501"/>
-                </a:lnTo>
-                <a:cubicBezTo>
-                  <a:pt x="234" y="518"/>
-                  <a:pt x="240" y="539"/>
-                  <a:pt x="240" y="561"/>
-                </a:cubicBezTo>
-                <a:cubicBezTo>
-                  <a:pt x="240" y="627"/>
-                  <a:pt x="186" y="681"/>
-                  <a:pt x="120" y="681"/>
-                </a:cubicBezTo>
-                <a:cubicBezTo>
-                  <a:pt x="54" y="681"/>
-                  <a:pt x="0" y="627"/>
-                  <a:pt x="0" y="561"/>
-                </a:cubicBezTo>
-                <a:cubicBezTo>
-                  <a:pt x="0" y="495"/>
-                  <a:pt x="54" y="441"/>
-                  <a:pt x="120" y="441"/>
-                </a:cubicBezTo>
-                <a:close/>
-              </a:path>
-            </a:pathLst>
-          </a:custGeom>
-          <a:solidFill>
-            <a:srgbClr val="113E6A"/>
-          </a:solidFill>
-          <a:ln w="9525">
-            <a:noFill/>
-          </a:ln>
-        </p:spPr>
-        <p:txBody>
-          <a:bodyPr/>
-          <a:lstStyle/>
-          <a:p>
-            <a:endParaRPr lang="zh-CN" altLang="en-US"/>
-          </a:p>
-        </p:txBody>
-      </p:sp>
-      <p:pic>
-        <p:nvPicPr>
-          <p:cNvPr id="9001" name="Picture 9000" descr="beihang-logo-navy.png"/>
-          <p:cNvPicPr>
-            <a:picLocks noChangeAspect="1"/>
-          </p:cNvPicPr>
-          <p:nvPr/>
-        </p:nvPicPr>
-        <p:blipFill>
-          <a:blip r:embed="rId2"/>
-          <a:stretch>
-            <a:fillRect/>
-          </a:stretch>
-        </p:blipFill>
-        <p:spPr>
-          <a:xfrm>
-            <a:off x="9336024" y="91665"/>
-            <a:ext cx="2642616" cy="502469"/>
-          </a:xfrm>
-          <a:prstGeom prst="rect">
-            <a:avLst/>
-          </a:prstGeom>
-        </p:spPr>
-      </p:pic>
-      <p:sp>
-        <p:nvSpPr>
-          <p:cNvPr id="9002" name="TextBox 9001"/>
-          <p:cNvSpPr txBox="1"/>
-          <p:nvPr/>
-        </p:nvSpPr>
-        <p:spPr>
-          <a:xfrm>
-            <a:off x="566928" y="155448"/>
-            <a:ext cx="8549640" cy="621792"/>
-          </a:xfrm>
-          <a:prstGeom prst="rect">
-            <a:avLst/>
-          </a:prstGeom>
-          <a:noFill/>
-        </p:spPr>
-        <p:txBody>
-          <a:bodyPr wrap="square" anchor="ctr" lIns="0" rIns="0" tIns="0" bIns="0">
-            <a:spAutoFit/>
-          </a:bodyPr>
-          <a:lstStyle/>
-          <a:p>
-            <a:pPr algn="l">
-              <a:lnSpc>
-                <a:spcPct val="100000"/>
-              </a:lnSpc>
-            </a:pPr>
-            <a:r>
-              <a:rPr sz="3000" b="1">
-                <a:solidFill>
-                  <a:srgbClr val="113E6A"/>
-                </a:solidFill>
-                <a:latin typeface="Arial"/>
-                <a:ea typeface="微软雅黑"/>
-              </a:rPr>
-              <a:t>故障注入 Layer 0</a:t>
-            </a:r>
-          </a:p>
-        </p:txBody>
-      </p:sp>
-      <p:sp>
-        <p:nvSpPr>
-          <p:cNvPr id="9003" name="TextBox 9002"/>
-          <p:cNvSpPr txBox="1"/>
-          <p:nvPr/>
-        </p:nvSpPr>
-        <p:spPr>
-          <a:xfrm>
-            <a:off x="566928" y="1261872"/>
-            <a:ext cx="10881360" cy="438912"/>
-          </a:xfrm>
-          <a:prstGeom prst="rect">
-            <a:avLst/>
-          </a:prstGeom>
-          <a:noFill/>
-        </p:spPr>
-        <p:txBody>
-          <a:bodyPr wrap="square" anchor="ctr" lIns="0" rIns="0" tIns="0" bIns="0">
-            <a:spAutoFit/>
-          </a:bodyPr>
-          <a:lstStyle/>
-          <a:p>
-            <a:pPr algn="l">
-              <a:lnSpc>
-                <a:spcPct val="110000"/>
-              </a:lnSpc>
-            </a:pPr>
-            <a:r>
-              <a:rPr sz="1800" b="1">
-                <a:solidFill>
-                  <a:srgbClr val="0070C0"/>
-                </a:solidFill>
-                <a:latin typeface="Arial"/>
-                <a:ea typeface="微软雅黑"/>
-              </a:rPr>
-              <a:t>10% 节点注解漂移，300 次拦截全部转为合规重排</a:t>
-            </a:r>
-          </a:p>
-        </p:txBody>
-      </p:sp>
-      <p:pic>
-        <p:nvPicPr>
-          <p:cNvPr id="9004" name="Picture 9003" descr="fig6-29a-layer0-timeseries.png"/>
-          <p:cNvPicPr>
-            <a:picLocks noChangeAspect="1"/>
-          </p:cNvPicPr>
-          <p:nvPr/>
-        </p:nvPicPr>
-        <p:blipFill>
-          <a:blip r:embed="rId3"/>
-          <a:stretch>
-            <a:fillRect/>
-          </a:stretch>
-        </p:blipFill>
-        <p:spPr>
-          <a:xfrm>
-            <a:off x="5806440" y="2657246"/>
-            <a:ext cx="5852160" cy="2457907"/>
-          </a:xfrm>
-          <a:prstGeom prst="rect">
-            <a:avLst/>
-          </a:prstGeom>
-        </p:spPr>
-      </p:pic>
-      <p:sp>
-        <p:nvSpPr>
-          <p:cNvPr id="9005" name="TextBox 9004"/>
-          <p:cNvSpPr txBox="1"/>
-          <p:nvPr/>
-        </p:nvSpPr>
-        <p:spPr>
-          <a:xfrm>
-            <a:off x="566928" y="2011680"/>
-            <a:ext cx="5029200" cy="1417320"/>
-          </a:xfrm>
-          <a:prstGeom prst="rect">
-            <a:avLst/>
-          </a:prstGeom>
-          <a:noFill/>
-        </p:spPr>
-        <p:txBody>
-          <a:bodyPr wrap="square" anchor="t" lIns="0" rIns="0" tIns="0" bIns="0">
-            <a:spAutoFit/>
-          </a:bodyPr>
-          <a:lstStyle/>
-          <a:p>
-            <a:pPr algn="l">
-              <a:lnSpc>
-                <a:spcPct val="115000"/>
-              </a:lnSpc>
-            </a:pPr>
-            <a:r>
-              <a:rPr sz="1400" b="0">
-                <a:solidFill>
-                  <a:srgbClr val="2E2C2C"/>
-                </a:solidFill>
-                <a:latin typeface="Arial"/>
-                <a:ea typeface="微软雅黑"/>
-              </a:rPr>
-              <a:t>▪  300 次拦截全部转为回退：不发 Bind，Pod 进 Dispatcher 回退队列</a:t>
-            </a:r>
-          </a:p>
-          <a:p>
-            <a:pPr algn="l">
-              <a:lnSpc>
-                <a:spcPct val="115000"/>
-              </a:lnSpc>
-              <a:spcBef>
-                <a:spcPts val="1400"/>
-              </a:spcBef>
-            </a:pPr>
-            <a:r>
-              <a:rPr sz="1400" b="0">
-                <a:solidFill>
-                  <a:srgbClr val="2E2C2C"/>
-                </a:solidFill>
-                <a:latin typeface="Arial"/>
-                <a:ea typeface="微软雅黑"/>
-              </a:rPr>
-              <a:t>▪  回退后由新归属实例重新调度，15 s 内落到合法节点；累计 50000/50000 绑定成功</a:t>
-            </a:r>
-          </a:p>
-          <a:p>
-            <a:pPr algn="l">
-              <a:lnSpc>
-                <a:spcPct val="115000"/>
-              </a:lnSpc>
-              <a:spcBef>
-                <a:spcPts val="1400"/>
-              </a:spcBef>
-            </a:pPr>
-            <a:r>
-              <a:rPr sz="1400" b="0">
-                <a:solidFill>
-                  <a:srgbClr val="2E2C2C"/>
-                </a:solidFill>
-                <a:latin typeface="Arial"/>
-                <a:ea typeface="微软雅黑"/>
-              </a:rPr>
-              <a:t>▪  代价：总耗时 683 s，对基线 680 s 多 3 s（+0.4%）</a:t>
-            </a:r>
-          </a:p>
-        </p:txBody>
-      </p:sp>
-      <p:sp>
-        <p:nvSpPr>
-          <p:cNvPr id="9006" name="TextBox 9005"/>
-          <p:cNvSpPr txBox="1"/>
-          <p:nvPr/>
-        </p:nvSpPr>
-        <p:spPr>
-          <a:xfrm>
-            <a:off x="566928" y="6309360"/>
-            <a:ext cx="10104120" cy="201168"/>
-          </a:xfrm>
-          <a:prstGeom prst="rect">
-            <a:avLst/>
-          </a:prstGeom>
-          <a:noFill/>
-        </p:spPr>
-        <p:txBody>
-          <a:bodyPr wrap="square" anchor="t" lIns="0" rIns="0" tIns="0" bIns="0">
-            <a:spAutoFit/>
-          </a:bodyPr>
-          <a:lstStyle/>
-          <a:p>
-            <a:pPr algn="l"/>
-            <a:r>
-              <a:rPr sz="850" b="0">
-                <a:solidFill>
-                  <a:srgbClr val="636363"/>
-                </a:solidFill>
-                <a:latin typeface="Arial"/>
-                <a:ea typeface="微软雅黑"/>
-              </a:rPr>
-              <a:t>编码：s1–s4 = 100 / 1000 / 5000 / 10000 节点；w1–w7 = 负载强度（w2 500、w3 1000、w4 2000 pods/s 极限、w5 突发、w6 Gang、w7 异构）；inst3 = 3 实例</a:t>
-            </a:r>
-          </a:p>
-        </p:txBody>
-      </p:sp>
-      <p:sp>
-        <p:nvSpPr>
-          <p:cNvPr id="9007" name="TextBox 9006"/>
-          <p:cNvSpPr txBox="1"/>
-          <p:nvPr/>
-        </p:nvSpPr>
-        <p:spPr>
-          <a:xfrm>
-            <a:off x="10780776" y="6345936"/>
-            <a:ext cx="850392" cy="219456"/>
-          </a:xfrm>
-          <a:prstGeom prst="rect">
-            <a:avLst/>
-          </a:prstGeom>
-          <a:noFill/>
-        </p:spPr>
-        <p:txBody>
-          <a:bodyPr wrap="square" anchor="t" lIns="0" rIns="0" tIns="0" bIns="0">
-            <a:spAutoFit/>
-          </a:bodyPr>
-          <a:lstStyle/>
-          <a:p>
-            <a:pPr algn="r"/>
-            <a:r>
-              <a:rPr sz="950" b="0">
-                <a:solidFill>
-                  <a:srgbClr val="636363"/>
-                </a:solidFill>
-                <a:latin typeface="Arial"/>
-                <a:ea typeface="微软雅黑"/>
-              </a:rPr>
-              <a:t>20 / 23</a:t>
+              <a:t>20 / 24</a:t>
             </a:r>
           </a:p>
         </p:txBody>
@@ -18153,7 +18131,7 @@
                 <a:latin typeface="Arial"/>
                 <a:ea typeface="微软雅黑"/>
               </a:rPr>
-              <a:t>故障注入 Layer 3</a:t>
+              <a:t>故障注入 Layer 0</a:t>
             </a:r>
           </a:p>
         </p:txBody>
@@ -18193,14 +18171,14 @@
                 <a:latin typeface="Arial"/>
                 <a:ea typeface="微软雅黑"/>
               </a:rPr>
-              <a:t>杀掉 1/3 实例并停机 180 s，系统仍在 784 s 内完成全部绑定</a:t>
+              <a:t>10% 节点注解漂移，300 次拦截全部转为合规重排</a:t>
             </a:r>
           </a:p>
         </p:txBody>
       </p:sp>
       <p:pic>
         <p:nvPicPr>
-          <p:cNvPr id="9004" name="Picture 9003" descr="fig6-29b-layer3-timeseries.png"/>
+          <p:cNvPr id="9004" name="Picture 9003" descr="fig6-29a-layer0-timeseries.png"/>
           <p:cNvPicPr>
             <a:picLocks noChangeAspect="1"/>
           </p:cNvPicPr>
@@ -18250,14 +18228,14 @@
               </a:lnSpc>
             </a:pPr>
             <a:r>
-              <a:rPr sz="1550" b="0">
+              <a:rPr sz="1400" b="0">
                 <a:solidFill>
                   <a:srgbClr val="2E2C2C"/>
                 </a:solidFill>
                 <a:latin typeface="Arial"/>
                 <a:ea typeface="微软雅黑"/>
               </a:rPr>
-              <a:t>▪  kill 后 90 s 窗口内，被杀实例只剩 68 次绑定，占该窗口 8407 次的 0.81%</a:t>
+              <a:t>▪  300 次拦截全部转为回退：不发 Bind，Pod 进 Dispatcher 回退队列</a:t>
             </a:r>
           </a:p>
           <a:p>
@@ -18270,14 +18248,14 @@
               </a:spcBef>
             </a:pPr>
             <a:r>
-              <a:rPr sz="1550" b="0">
+              <a:rPr sz="1400" b="0">
                 <a:solidFill>
                   <a:srgbClr val="2E2C2C"/>
                 </a:solidFill>
                 <a:latin typeface="Arial"/>
                 <a:ea typeface="微软雅黑"/>
               </a:rPr>
-              <a:t>▪  同一窗口共完成 8407 次绑定；pending 峰值 353，60 s 内回落到 2</a:t>
+              <a:t>▪  回退后由新归属实例重新调度，15 s 内落到合法节点；累计 50000/50000 绑定成功</a:t>
             </a:r>
           </a:p>
           <a:p>
@@ -18290,14 +18268,14 @@
               </a:spcBef>
             </a:pPr>
             <a:r>
-              <a:rPr sz="1550" b="0">
+              <a:rPr sz="1400" b="0">
                 <a:solidFill>
                   <a:srgbClr val="2E2C2C"/>
                 </a:solidFill>
                 <a:latin typeface="Arial"/>
                 <a:ea typeface="微软雅黑"/>
               </a:rPr>
-              <a:t>▪  整场耗时 784 s，比无故障基线 680 s 多 104 s（+15.3%）</a:t>
+              <a:t>▪  代价：总耗时 683 s，对基线 680 s 多 3 s（+0.4%）</a:t>
             </a:r>
           </a:p>
         </p:txBody>
@@ -18369,7 +18347,7 @@
                 <a:latin typeface="Arial"/>
                 <a:ea typeface="微软雅黑"/>
               </a:rPr>
-              <a:t>21 / 23</a:t>
+              <a:t>21 / 24</a:t>
             </a:r>
           </a:p>
         </p:txBody>
@@ -18656,6 +18634,509 @@
                 <a:latin typeface="Arial"/>
                 <a:ea typeface="微软雅黑"/>
               </a:rPr>
+              <a:t>故障注入 Layer 3</a:t>
+            </a:r>
+          </a:p>
+        </p:txBody>
+      </p:sp>
+      <p:sp>
+        <p:nvSpPr>
+          <p:cNvPr id="9003" name="TextBox 9002"/>
+          <p:cNvSpPr txBox="1"/>
+          <p:nvPr/>
+        </p:nvSpPr>
+        <p:spPr>
+          <a:xfrm>
+            <a:off x="566928" y="1261872"/>
+            <a:ext cx="10881360" cy="438912"/>
+          </a:xfrm>
+          <a:prstGeom prst="rect">
+            <a:avLst/>
+          </a:prstGeom>
+          <a:noFill/>
+        </p:spPr>
+        <p:txBody>
+          <a:bodyPr wrap="square" anchor="ctr" lIns="0" rIns="0" tIns="0" bIns="0">
+            <a:spAutoFit/>
+          </a:bodyPr>
+          <a:lstStyle/>
+          <a:p>
+            <a:pPr algn="l">
+              <a:lnSpc>
+                <a:spcPct val="110000"/>
+              </a:lnSpc>
+            </a:pPr>
+            <a:r>
+              <a:rPr sz="1800" b="1">
+                <a:solidFill>
+                  <a:srgbClr val="0070C0"/>
+                </a:solidFill>
+                <a:latin typeface="Arial"/>
+                <a:ea typeface="微软雅黑"/>
+              </a:rPr>
+              <a:t>杀掉 1/3 实例并停机 180 s，系统仍在 784 s 内完成全部绑定</a:t>
+            </a:r>
+          </a:p>
+        </p:txBody>
+      </p:sp>
+      <p:pic>
+        <p:nvPicPr>
+          <p:cNvPr id="9004" name="Picture 9003" descr="fig6-29b-layer3-timeseries.png"/>
+          <p:cNvPicPr>
+            <a:picLocks noChangeAspect="1"/>
+          </p:cNvPicPr>
+          <p:nvPr/>
+        </p:nvPicPr>
+        <p:blipFill>
+          <a:blip r:embed="rId3"/>
+          <a:stretch>
+            <a:fillRect/>
+          </a:stretch>
+        </p:blipFill>
+        <p:spPr>
+          <a:xfrm>
+            <a:off x="5806440" y="2657246"/>
+            <a:ext cx="5852160" cy="2457907"/>
+          </a:xfrm>
+          <a:prstGeom prst="rect">
+            <a:avLst/>
+          </a:prstGeom>
+        </p:spPr>
+      </p:pic>
+      <p:sp>
+        <p:nvSpPr>
+          <p:cNvPr id="9005" name="TextBox 9004"/>
+          <p:cNvSpPr txBox="1"/>
+          <p:nvPr/>
+        </p:nvSpPr>
+        <p:spPr>
+          <a:xfrm>
+            <a:off x="566928" y="2011680"/>
+            <a:ext cx="5029200" cy="1417320"/>
+          </a:xfrm>
+          <a:prstGeom prst="rect">
+            <a:avLst/>
+          </a:prstGeom>
+          <a:noFill/>
+        </p:spPr>
+        <p:txBody>
+          <a:bodyPr wrap="square" anchor="t" lIns="0" rIns="0" tIns="0" bIns="0">
+            <a:spAutoFit/>
+          </a:bodyPr>
+          <a:lstStyle/>
+          <a:p>
+            <a:pPr algn="l">
+              <a:lnSpc>
+                <a:spcPct val="115000"/>
+              </a:lnSpc>
+            </a:pPr>
+            <a:r>
+              <a:rPr sz="1550" b="0">
+                <a:solidFill>
+                  <a:srgbClr val="2E2C2C"/>
+                </a:solidFill>
+                <a:latin typeface="Arial"/>
+                <a:ea typeface="微软雅黑"/>
+              </a:rPr>
+              <a:t>▪  kill 后 90 s 窗口内，被杀实例只剩 68 次绑定，占该窗口 8407 次的 0.81%</a:t>
+            </a:r>
+          </a:p>
+          <a:p>
+            <a:pPr algn="l">
+              <a:lnSpc>
+                <a:spcPct val="115000"/>
+              </a:lnSpc>
+              <a:spcBef>
+                <a:spcPts val="1400"/>
+              </a:spcBef>
+            </a:pPr>
+            <a:r>
+              <a:rPr sz="1550" b="0">
+                <a:solidFill>
+                  <a:srgbClr val="2E2C2C"/>
+                </a:solidFill>
+                <a:latin typeface="Arial"/>
+                <a:ea typeface="微软雅黑"/>
+              </a:rPr>
+              <a:t>▪  同一窗口共完成 8407 次绑定；pending 峰值 353，60 s 内回落到 2</a:t>
+            </a:r>
+          </a:p>
+          <a:p>
+            <a:pPr algn="l">
+              <a:lnSpc>
+                <a:spcPct val="115000"/>
+              </a:lnSpc>
+              <a:spcBef>
+                <a:spcPts val="1400"/>
+              </a:spcBef>
+            </a:pPr>
+            <a:r>
+              <a:rPr sz="1550" b="0">
+                <a:solidFill>
+                  <a:srgbClr val="2E2C2C"/>
+                </a:solidFill>
+                <a:latin typeface="Arial"/>
+                <a:ea typeface="微软雅黑"/>
+              </a:rPr>
+              <a:t>▪  整场耗时 784 s，比无故障基线 680 s 多 104 s（+15.3%）</a:t>
+            </a:r>
+          </a:p>
+        </p:txBody>
+      </p:sp>
+      <p:sp>
+        <p:nvSpPr>
+          <p:cNvPr id="9006" name="TextBox 9005"/>
+          <p:cNvSpPr txBox="1"/>
+          <p:nvPr/>
+        </p:nvSpPr>
+        <p:spPr>
+          <a:xfrm>
+            <a:off x="566928" y="6309360"/>
+            <a:ext cx="10104120" cy="201168"/>
+          </a:xfrm>
+          <a:prstGeom prst="rect">
+            <a:avLst/>
+          </a:prstGeom>
+          <a:noFill/>
+        </p:spPr>
+        <p:txBody>
+          <a:bodyPr wrap="square" anchor="t" lIns="0" rIns="0" tIns="0" bIns="0">
+            <a:spAutoFit/>
+          </a:bodyPr>
+          <a:lstStyle/>
+          <a:p>
+            <a:pPr algn="l"/>
+            <a:r>
+              <a:rPr sz="850" b="0">
+                <a:solidFill>
+                  <a:srgbClr val="636363"/>
+                </a:solidFill>
+                <a:latin typeface="Arial"/>
+                <a:ea typeface="微软雅黑"/>
+              </a:rPr>
+              <a:t>编码：s1–s4 = 100 / 1000 / 5000 / 10000 节点；w1–w7 = 负载强度（w2 500、w3 1000、w4 2000 pods/s 极限、w5 突发、w6 Gang、w7 异构）；inst3 = 3 实例</a:t>
+            </a:r>
+          </a:p>
+        </p:txBody>
+      </p:sp>
+      <p:sp>
+        <p:nvSpPr>
+          <p:cNvPr id="9007" name="TextBox 9006"/>
+          <p:cNvSpPr txBox="1"/>
+          <p:nvPr/>
+        </p:nvSpPr>
+        <p:spPr>
+          <a:xfrm>
+            <a:off x="10780776" y="6345936"/>
+            <a:ext cx="850392" cy="219456"/>
+          </a:xfrm>
+          <a:prstGeom prst="rect">
+            <a:avLst/>
+          </a:prstGeom>
+          <a:noFill/>
+        </p:spPr>
+        <p:txBody>
+          <a:bodyPr wrap="square" anchor="t" lIns="0" rIns="0" tIns="0" bIns="0">
+            <a:spAutoFit/>
+          </a:bodyPr>
+          <a:lstStyle/>
+          <a:p>
+            <a:pPr algn="r"/>
+            <a:r>
+              <a:rPr sz="950" b="0">
+                <a:solidFill>
+                  <a:srgbClr val="636363"/>
+                </a:solidFill>
+                <a:latin typeface="Arial"/>
+                <a:ea typeface="微软雅黑"/>
+              </a:rPr>
+              <a:t>22 / 24</a:t>
+            </a:r>
+          </a:p>
+        </p:txBody>
+      </p:sp>
+    </p:spTree>
+  </p:cSld>
+  <p:clrMapOvr>
+    <a:masterClrMapping/>
+  </p:clrMapOvr>
+</p:sld>
+</file>
+
+<file path=ppt/slides/slide23.xml><?xml version="1.0" encoding="utf-8"?>
+<p:sld xmlns:a="http://schemas.openxmlformats.org/drawingml/2006/main" xmlns:p="http://schemas.openxmlformats.org/presentationml/2006/main" xmlns:r="http://schemas.openxmlformats.org/officeDocument/2006/relationships">
+  <p:cSld>
+    <p:bg>
+      <p:bgPr>
+        <a:solidFill>
+          <a:srgbClr val="FFFFFF"/>
+        </a:solidFill>
+        <a:effectLst/>
+      </p:bgPr>
+    </p:bg>
+    <p:spTree>
+      <p:nvGrpSpPr>
+        <p:cNvPr id="1" name=""/>
+        <p:cNvGrpSpPr/>
+        <p:nvPr/>
+      </p:nvGrpSpPr>
+      <p:grpSpPr/>
+      <p:sp>
+        <p:nvSpPr>
+          <p:cNvPr id="9000" name="Freeform 5"/>
+          <p:cNvSpPr/>
+          <p:nvPr/>
+        </p:nvSpPr>
+        <p:spPr>
+          <a:xfrm>
+            <a:off x="182880" y="274320"/>
+            <a:ext cx="310896" cy="402336"/>
+          </a:xfrm>
+          <a:custGeom>
+            <a:avLst/>
+            <a:gdLst/>
+            <a:ahLst/>
+            <a:cxnLst>
+              <a:cxn ang="0">
+                <a:pos x="2147483647" y="2147483647"/>
+              </a:cxn>
+              <a:cxn ang="0">
+                <a:pos x="2147483647" y="2147483647"/>
+              </a:cxn>
+              <a:cxn ang="0">
+                <a:pos x="2147483647" y="2147483647"/>
+              </a:cxn>
+              <a:cxn ang="0">
+                <a:pos x="2147483647" y="2147483647"/>
+              </a:cxn>
+              <a:cxn ang="0">
+                <a:pos x="2147483647" y="2147483647"/>
+              </a:cxn>
+              <a:cxn ang="0">
+                <a:pos x="2147483647" y="2147483647"/>
+              </a:cxn>
+              <a:cxn ang="0">
+                <a:pos x="2147483647" y="2147483647"/>
+              </a:cxn>
+              <a:cxn ang="0">
+                <a:pos x="2147483647" y="2147483647"/>
+              </a:cxn>
+              <a:cxn ang="0">
+                <a:pos x="2147483647" y="0"/>
+              </a:cxn>
+              <a:cxn ang="0">
+                <a:pos x="2147483647" y="2147483647"/>
+              </a:cxn>
+              <a:cxn ang="0">
+                <a:pos x="2147483647" y="2147483647"/>
+              </a:cxn>
+              <a:cxn ang="0">
+                <a:pos x="2147483647" y="2147483647"/>
+              </a:cxn>
+              <a:cxn ang="0">
+                <a:pos x="2147483647" y="2147483647"/>
+              </a:cxn>
+              <a:cxn ang="0">
+                <a:pos x="2147483647" y="2147483647"/>
+              </a:cxn>
+              <a:cxn ang="0">
+                <a:pos x="2147483647" y="2147483647"/>
+              </a:cxn>
+              <a:cxn ang="0">
+                <a:pos x="2147483647" y="2147483647"/>
+              </a:cxn>
+              <a:cxn ang="0">
+                <a:pos x="2147483647" y="2147483647"/>
+              </a:cxn>
+              <a:cxn ang="0">
+                <a:pos x="2147483647" y="2147483647"/>
+              </a:cxn>
+              <a:cxn ang="0">
+                <a:pos x="2147483647" y="2147483647"/>
+              </a:cxn>
+              <a:cxn ang="0">
+                <a:pos x="0" y="2147483647"/>
+              </a:cxn>
+              <a:cxn ang="0">
+                <a:pos x="2147483647" y="2147483647"/>
+              </a:cxn>
+            </a:cxnLst>
+            <a:rect l="0" t="0" r="0" b="0"/>
+            <a:pathLst>
+              <a:path w="574" h="681">
+                <a:moveTo>
+                  <a:pt x="120" y="441"/>
+                </a:moveTo>
+                <a:cubicBezTo>
+                  <a:pt x="153" y="441"/>
+                  <a:pt x="183" y="454"/>
+                  <a:pt x="205" y="476"/>
+                </a:cubicBezTo>
+                <a:lnTo>
+                  <a:pt x="389" y="329"/>
+                </a:lnTo>
+                <a:cubicBezTo>
+                  <a:pt x="383" y="317"/>
+                  <a:pt x="380" y="303"/>
+                  <a:pt x="380" y="289"/>
+                </a:cubicBezTo>
+                <a:cubicBezTo>
+                  <a:pt x="380" y="271"/>
+                  <a:pt x="384" y="255"/>
+                  <a:pt x="392" y="241"/>
+                </a:cubicBezTo>
+                <a:lnTo>
+                  <a:pt x="270" y="138"/>
+                </a:lnTo>
+                <a:cubicBezTo>
+                  <a:pt x="256" y="151"/>
+                  <a:pt x="237" y="159"/>
+                  <a:pt x="217" y="159"/>
+                </a:cubicBezTo>
+                <a:cubicBezTo>
+                  <a:pt x="173" y="159"/>
+                  <a:pt x="137" y="123"/>
+                  <a:pt x="137" y="79"/>
+                </a:cubicBezTo>
+                <a:cubicBezTo>
+                  <a:pt x="137" y="36"/>
+                  <a:pt x="173" y="0"/>
+                  <a:pt x="217" y="0"/>
+                </a:cubicBezTo>
+                <a:cubicBezTo>
+                  <a:pt x="260" y="0"/>
+                  <a:pt x="296" y="36"/>
+                  <a:pt x="296" y="79"/>
+                </a:cubicBezTo>
+                <a:cubicBezTo>
+                  <a:pt x="296" y="91"/>
+                  <a:pt x="293" y="103"/>
+                  <a:pt x="289" y="113"/>
+                </a:cubicBezTo>
+                <a:lnTo>
+                  <a:pt x="412" y="217"/>
+                </a:lnTo>
+                <a:cubicBezTo>
+                  <a:pt x="429" y="201"/>
+                  <a:pt x="452" y="192"/>
+                  <a:pt x="477" y="192"/>
+                </a:cubicBezTo>
+                <a:cubicBezTo>
+                  <a:pt x="530" y="192"/>
+                  <a:pt x="574" y="235"/>
+                  <a:pt x="574" y="289"/>
+                </a:cubicBezTo>
+                <a:cubicBezTo>
+                  <a:pt x="574" y="342"/>
+                  <a:pt x="530" y="386"/>
+                  <a:pt x="477" y="386"/>
+                </a:cubicBezTo>
+                <a:cubicBezTo>
+                  <a:pt x="449" y="386"/>
+                  <a:pt x="424" y="374"/>
+                  <a:pt x="406" y="355"/>
+                </a:cubicBezTo>
+                <a:lnTo>
+                  <a:pt x="224" y="501"/>
+                </a:lnTo>
+                <a:cubicBezTo>
+                  <a:pt x="234" y="518"/>
+                  <a:pt x="240" y="539"/>
+                  <a:pt x="240" y="561"/>
+                </a:cubicBezTo>
+                <a:cubicBezTo>
+                  <a:pt x="240" y="627"/>
+                  <a:pt x="186" y="681"/>
+                  <a:pt x="120" y="681"/>
+                </a:cubicBezTo>
+                <a:cubicBezTo>
+                  <a:pt x="54" y="681"/>
+                  <a:pt x="0" y="627"/>
+                  <a:pt x="0" y="561"/>
+                </a:cubicBezTo>
+                <a:cubicBezTo>
+                  <a:pt x="0" y="495"/>
+                  <a:pt x="54" y="441"/>
+                  <a:pt x="120" y="441"/>
+                </a:cubicBezTo>
+                <a:close/>
+              </a:path>
+            </a:pathLst>
+          </a:custGeom>
+          <a:solidFill>
+            <a:srgbClr val="113E6A"/>
+          </a:solidFill>
+          <a:ln w="9525">
+            <a:noFill/>
+          </a:ln>
+        </p:spPr>
+        <p:txBody>
+          <a:bodyPr/>
+          <a:lstStyle/>
+          <a:p>
+            <a:endParaRPr lang="zh-CN" altLang="en-US"/>
+          </a:p>
+        </p:txBody>
+      </p:sp>
+      <p:pic>
+        <p:nvPicPr>
+          <p:cNvPr id="9001" name="Picture 9000" descr="beihang-logo-navy.png"/>
+          <p:cNvPicPr>
+            <a:picLocks noChangeAspect="1"/>
+          </p:cNvPicPr>
+          <p:nvPr/>
+        </p:nvPicPr>
+        <p:blipFill>
+          <a:blip r:embed="rId2"/>
+          <a:stretch>
+            <a:fillRect/>
+          </a:stretch>
+        </p:blipFill>
+        <p:spPr>
+          <a:xfrm>
+            <a:off x="9336024" y="91665"/>
+            <a:ext cx="2642616" cy="502469"/>
+          </a:xfrm>
+          <a:prstGeom prst="rect">
+            <a:avLst/>
+          </a:prstGeom>
+        </p:spPr>
+      </p:pic>
+      <p:sp>
+        <p:nvSpPr>
+          <p:cNvPr id="9002" name="TextBox 9001"/>
+          <p:cNvSpPr txBox="1"/>
+          <p:nvPr/>
+        </p:nvSpPr>
+        <p:spPr>
+          <a:xfrm>
+            <a:off x="566928" y="155448"/>
+            <a:ext cx="8549640" cy="621792"/>
+          </a:xfrm>
+          <a:prstGeom prst="rect">
+            <a:avLst/>
+          </a:prstGeom>
+          <a:noFill/>
+        </p:spPr>
+        <p:txBody>
+          <a:bodyPr wrap="square" anchor="ctr" lIns="0" rIns="0" tIns="0" bIns="0">
+            <a:spAutoFit/>
+          </a:bodyPr>
+          <a:lstStyle/>
+          <a:p>
+            <a:pPr algn="l">
+              <a:lnSpc>
+                <a:spcPct val="100000"/>
+              </a:lnSpc>
+            </a:pPr>
+            <a:r>
+              <a:rPr sz="3000" b="1">
+                <a:solidFill>
+                  <a:srgbClr val="113E6A"/>
+                </a:solidFill>
+                <a:latin typeface="Arial"/>
+                <a:ea typeface="微软雅黑"/>
+              </a:rPr>
               <a:t>局限与展望</a:t>
             </a:r>
           </a:p>
@@ -19236,7 +19717,7 @@
                 <a:latin typeface="Arial"/>
                 <a:ea typeface="微软雅黑"/>
               </a:rPr>
-              <a:t>22 / 23</a:t>
+              <a:t>23 / 24</a:t>
             </a:r>
           </a:p>
         </p:txBody>
@@ -19249,7 +19730,7 @@
 </p:sld>
 </file>
 
-<file path=ppt/slides/slide23.xml><?xml version="1.0" encoding="utf-8"?>
+<file path=ppt/slides/slide24.xml><?xml version="1.0" encoding="utf-8"?>
 <p:sld xmlns:a="http://schemas.openxmlformats.org/drawingml/2006/main" xmlns:p="http://schemas.openxmlformats.org/presentationml/2006/main" xmlns:r="http://schemas.openxmlformats.org/officeDocument/2006/relationships">
   <p:cSld>
     <p:bg>
@@ -19579,7 +20060,7 @@
                 <a:latin typeface="Arial"/>
                 <a:ea typeface="微软雅黑"/>
               </a:rPr>
-              <a:t>23 / 23</a:t>
+              <a:t>24 / 24</a:t>
             </a:r>
           </a:p>
         </p:txBody>
@@ -19592,7 +20073,7 @@
 </p:sld>
 </file>
 
-<file path=ppt/slides/slide24.xml><?xml version="1.0" encoding="utf-8"?>
+<file path=ppt/slides/slide25.xml><?xml version="1.0" encoding="utf-8"?>
 <p:sld xmlns:a="http://schemas.openxmlformats.org/drawingml/2006/main" xmlns:p="http://schemas.openxmlformats.org/presentationml/2006/main" xmlns:r="http://schemas.openxmlformats.org/officeDocument/2006/relationships">
   <p:cSld>
     <p:bg>
@@ -20918,7 +21399,7 @@
 </p:sld>
 </file>
 
-<file path=ppt/slides/slide25.xml><?xml version="1.0" encoding="utf-8"?>
+<file path=ppt/slides/slide26.xml><?xml version="1.0" encoding="utf-8"?>
 <p:sld xmlns:a="http://schemas.openxmlformats.org/drawingml/2006/main" xmlns:p="http://schemas.openxmlformats.org/presentationml/2006/main" xmlns:r="http://schemas.openxmlformats.org/officeDocument/2006/relationships">
   <p:cSld>
     <p:bg>
@@ -21906,7 +22387,7 @@
 </p:sld>
 </file>
 
-<file path=ppt/slides/slide26.xml><?xml version="1.0" encoding="utf-8"?>
+<file path=ppt/slides/slide27.xml><?xml version="1.0" encoding="utf-8"?>
 <p:sld xmlns:a="http://schemas.openxmlformats.org/drawingml/2006/main" xmlns:p="http://schemas.openxmlformats.org/presentationml/2006/main" xmlns:r="http://schemas.openxmlformats.org/officeDocument/2006/relationships">
   <p:cSld>
     <p:bg>
@@ -22349,7 +22830,7 @@
 </p:sld>
 </file>
 
-<file path=ppt/slides/slide27.xml><?xml version="1.0" encoding="utf-8"?>
+<file path=ppt/slides/slide28.xml><?xml version="1.0" encoding="utf-8"?>
 <p:sld xmlns:a="http://schemas.openxmlformats.org/drawingml/2006/main" xmlns:p="http://schemas.openxmlformats.org/presentationml/2006/main" xmlns:r="http://schemas.openxmlformats.org/officeDocument/2006/relationships">
   <p:cSld>
     <p:bg>
@@ -23309,449 +23790,6 @@
 </p:sld>
 </file>
 
-<file path=ppt/slides/slide28.xml><?xml version="1.0" encoding="utf-8"?>
-<p:sld xmlns:a="http://schemas.openxmlformats.org/drawingml/2006/main" xmlns:p="http://schemas.openxmlformats.org/presentationml/2006/main" xmlns:r="http://schemas.openxmlformats.org/officeDocument/2006/relationships">
-  <p:cSld>
-    <p:bg>
-      <p:bgPr>
-        <a:solidFill>
-          <a:srgbClr val="FFFFFF"/>
-        </a:solidFill>
-        <a:effectLst/>
-      </p:bgPr>
-    </p:bg>
-    <p:spTree>
-      <p:nvGrpSpPr>
-        <p:cNvPr id="1" name=""/>
-        <p:cNvGrpSpPr/>
-        <p:nvPr/>
-      </p:nvGrpSpPr>
-      <p:grpSpPr/>
-      <p:sp>
-        <p:nvSpPr>
-          <p:cNvPr id="9000" name="Freeform 5"/>
-          <p:cNvSpPr/>
-          <p:nvPr/>
-        </p:nvSpPr>
-        <p:spPr>
-          <a:xfrm>
-            <a:off x="182880" y="274320"/>
-            <a:ext cx="310896" cy="402336"/>
-          </a:xfrm>
-          <a:custGeom>
-            <a:avLst/>
-            <a:gdLst/>
-            <a:ahLst/>
-            <a:cxnLst>
-              <a:cxn ang="0">
-                <a:pos x="2147483647" y="2147483647"/>
-              </a:cxn>
-              <a:cxn ang="0">
-                <a:pos x="2147483647" y="2147483647"/>
-              </a:cxn>
-              <a:cxn ang="0">
-                <a:pos x="2147483647" y="2147483647"/>
-              </a:cxn>
-              <a:cxn ang="0">
-                <a:pos x="2147483647" y="2147483647"/>
-              </a:cxn>
-              <a:cxn ang="0">
-                <a:pos x="2147483647" y="2147483647"/>
-              </a:cxn>
-              <a:cxn ang="0">
-                <a:pos x="2147483647" y="2147483647"/>
-              </a:cxn>
-              <a:cxn ang="0">
-                <a:pos x="2147483647" y="2147483647"/>
-              </a:cxn>
-              <a:cxn ang="0">
-                <a:pos x="2147483647" y="2147483647"/>
-              </a:cxn>
-              <a:cxn ang="0">
-                <a:pos x="2147483647" y="0"/>
-              </a:cxn>
-              <a:cxn ang="0">
-                <a:pos x="2147483647" y="2147483647"/>
-              </a:cxn>
-              <a:cxn ang="0">
-                <a:pos x="2147483647" y="2147483647"/>
-              </a:cxn>
-              <a:cxn ang="0">
-                <a:pos x="2147483647" y="2147483647"/>
-              </a:cxn>
-              <a:cxn ang="0">
-                <a:pos x="2147483647" y="2147483647"/>
-              </a:cxn>
-              <a:cxn ang="0">
-                <a:pos x="2147483647" y="2147483647"/>
-              </a:cxn>
-              <a:cxn ang="0">
-                <a:pos x="2147483647" y="2147483647"/>
-              </a:cxn>
-              <a:cxn ang="0">
-                <a:pos x="2147483647" y="2147483647"/>
-              </a:cxn>
-              <a:cxn ang="0">
-                <a:pos x="2147483647" y="2147483647"/>
-              </a:cxn>
-              <a:cxn ang="0">
-                <a:pos x="2147483647" y="2147483647"/>
-              </a:cxn>
-              <a:cxn ang="0">
-                <a:pos x="2147483647" y="2147483647"/>
-              </a:cxn>
-              <a:cxn ang="0">
-                <a:pos x="0" y="2147483647"/>
-              </a:cxn>
-              <a:cxn ang="0">
-                <a:pos x="2147483647" y="2147483647"/>
-              </a:cxn>
-            </a:cxnLst>
-            <a:rect l="0" t="0" r="0" b="0"/>
-            <a:pathLst>
-              <a:path w="574" h="681">
-                <a:moveTo>
-                  <a:pt x="120" y="441"/>
-                </a:moveTo>
-                <a:cubicBezTo>
-                  <a:pt x="153" y="441"/>
-                  <a:pt x="183" y="454"/>
-                  <a:pt x="205" y="476"/>
-                </a:cubicBezTo>
-                <a:lnTo>
-                  <a:pt x="389" y="329"/>
-                </a:lnTo>
-                <a:cubicBezTo>
-                  <a:pt x="383" y="317"/>
-                  <a:pt x="380" y="303"/>
-                  <a:pt x="380" y="289"/>
-                </a:cubicBezTo>
-                <a:cubicBezTo>
-                  <a:pt x="380" y="271"/>
-                  <a:pt x="384" y="255"/>
-                  <a:pt x="392" y="241"/>
-                </a:cubicBezTo>
-                <a:lnTo>
-                  <a:pt x="270" y="138"/>
-                </a:lnTo>
-                <a:cubicBezTo>
-                  <a:pt x="256" y="151"/>
-                  <a:pt x="237" y="159"/>
-                  <a:pt x="217" y="159"/>
-                </a:cubicBezTo>
-                <a:cubicBezTo>
-                  <a:pt x="173" y="159"/>
-                  <a:pt x="137" y="123"/>
-                  <a:pt x="137" y="79"/>
-                </a:cubicBezTo>
-                <a:cubicBezTo>
-                  <a:pt x="137" y="36"/>
-                  <a:pt x="173" y="0"/>
-                  <a:pt x="217" y="0"/>
-                </a:cubicBezTo>
-                <a:cubicBezTo>
-                  <a:pt x="260" y="0"/>
-                  <a:pt x="296" y="36"/>
-                  <a:pt x="296" y="79"/>
-                </a:cubicBezTo>
-                <a:cubicBezTo>
-                  <a:pt x="296" y="91"/>
-                  <a:pt x="293" y="103"/>
-                  <a:pt x="289" y="113"/>
-                </a:cubicBezTo>
-                <a:lnTo>
-                  <a:pt x="412" y="217"/>
-                </a:lnTo>
-                <a:cubicBezTo>
-                  <a:pt x="429" y="201"/>
-                  <a:pt x="452" y="192"/>
-                  <a:pt x="477" y="192"/>
-                </a:cubicBezTo>
-                <a:cubicBezTo>
-                  <a:pt x="530" y="192"/>
-                  <a:pt x="574" y="235"/>
-                  <a:pt x="574" y="289"/>
-                </a:cubicBezTo>
-                <a:cubicBezTo>
-                  <a:pt x="574" y="342"/>
-                  <a:pt x="530" y="386"/>
-                  <a:pt x="477" y="386"/>
-                </a:cubicBezTo>
-                <a:cubicBezTo>
-                  <a:pt x="449" y="386"/>
-                  <a:pt x="424" y="374"/>
-                  <a:pt x="406" y="355"/>
-                </a:cubicBezTo>
-                <a:lnTo>
-                  <a:pt x="224" y="501"/>
-                </a:lnTo>
-                <a:cubicBezTo>
-                  <a:pt x="234" y="518"/>
-                  <a:pt x="240" y="539"/>
-                  <a:pt x="240" y="561"/>
-                </a:cubicBezTo>
-                <a:cubicBezTo>
-                  <a:pt x="240" y="627"/>
-                  <a:pt x="186" y="681"/>
-                  <a:pt x="120" y="681"/>
-                </a:cubicBezTo>
-                <a:cubicBezTo>
-                  <a:pt x="54" y="681"/>
-                  <a:pt x="0" y="627"/>
-                  <a:pt x="0" y="561"/>
-                </a:cubicBezTo>
-                <a:cubicBezTo>
-                  <a:pt x="0" y="495"/>
-                  <a:pt x="54" y="441"/>
-                  <a:pt x="120" y="441"/>
-                </a:cubicBezTo>
-                <a:close/>
-              </a:path>
-            </a:pathLst>
-          </a:custGeom>
-          <a:solidFill>
-            <a:srgbClr val="113E6A"/>
-          </a:solidFill>
-          <a:ln w="9525">
-            <a:noFill/>
-          </a:ln>
-        </p:spPr>
-        <p:txBody>
-          <a:bodyPr/>
-          <a:lstStyle/>
-          <a:p>
-            <a:endParaRPr lang="zh-CN" altLang="en-US"/>
-          </a:p>
-        </p:txBody>
-      </p:sp>
-      <p:pic>
-        <p:nvPicPr>
-          <p:cNvPr id="9001" name="Picture 9000" descr="beihang-logo-navy.png"/>
-          <p:cNvPicPr>
-            <a:picLocks noChangeAspect="1"/>
-          </p:cNvPicPr>
-          <p:nvPr/>
-        </p:nvPicPr>
-        <p:blipFill>
-          <a:blip r:embed="rId2"/>
-          <a:stretch>
-            <a:fillRect/>
-          </a:stretch>
-        </p:blipFill>
-        <p:spPr>
-          <a:xfrm>
-            <a:off x="9336024" y="91665"/>
-            <a:ext cx="2642616" cy="502469"/>
-          </a:xfrm>
-          <a:prstGeom prst="rect">
-            <a:avLst/>
-          </a:prstGeom>
-        </p:spPr>
-      </p:pic>
-      <p:sp>
-        <p:nvSpPr>
-          <p:cNvPr id="9002" name="TextBox 9001"/>
-          <p:cNvSpPr txBox="1"/>
-          <p:nvPr/>
-        </p:nvSpPr>
-        <p:spPr>
-          <a:xfrm>
-            <a:off x="566928" y="155448"/>
-            <a:ext cx="8549640" cy="621792"/>
-          </a:xfrm>
-          <a:prstGeom prst="rect">
-            <a:avLst/>
-          </a:prstGeom>
-          <a:noFill/>
-        </p:spPr>
-        <p:txBody>
-          <a:bodyPr wrap="square" anchor="ctr" lIns="0" rIns="0" tIns="0" bIns="0">
-            <a:spAutoFit/>
-          </a:bodyPr>
-          <a:lstStyle/>
-          <a:p>
-            <a:pPr algn="l">
-              <a:lnSpc>
-                <a:spcPct val="100000"/>
-              </a:lnSpc>
-            </a:pPr>
-            <a:r>
-              <a:rPr sz="3000" b="1">
-                <a:solidFill>
-                  <a:srgbClr val="113E6A"/>
-                </a:solidFill>
-                <a:latin typeface="Arial"/>
-                <a:ea typeface="微软雅黑"/>
-              </a:rPr>
-              <a:t>资源公平性与未量化的资源收益</a:t>
-            </a:r>
-          </a:p>
-        </p:txBody>
-      </p:sp>
-      <p:sp>
-        <p:nvSpPr>
-          <p:cNvPr id="9003" name="TextBox 9002"/>
-          <p:cNvSpPr txBox="1"/>
-          <p:nvPr/>
-        </p:nvSpPr>
-        <p:spPr>
-          <a:xfrm>
-            <a:off x="566928" y="1261872"/>
-            <a:ext cx="10881360" cy="438912"/>
-          </a:xfrm>
-          <a:prstGeom prst="rect">
-            <a:avLst/>
-          </a:prstGeom>
-          <a:noFill/>
-        </p:spPr>
-        <p:txBody>
-          <a:bodyPr wrap="square" anchor="ctr" lIns="0" rIns="0" tIns="0" bIns="0">
-            <a:spAutoFit/>
-          </a:bodyPr>
-          <a:lstStyle/>
-          <a:p>
-            <a:pPr algn="l">
-              <a:lnSpc>
-                <a:spcPct val="110000"/>
-              </a:lnSpc>
-            </a:pPr>
-            <a:r>
-              <a:rPr sz="1800" b="1">
-                <a:solidFill>
-                  <a:srgbClr val="0070C0"/>
-                </a:solidFill>
-                <a:latin typeface="Arial"/>
-                <a:ea typeface="微软雅黑"/>
-              </a:rPr>
-              <a:t>每 Deployment 同规格，对 ENO 略不利</a:t>
-            </a:r>
-          </a:p>
-        </p:txBody>
-      </p:sp>
-      <p:sp>
-        <p:nvSpPr>
-          <p:cNvPr id="9004" name="TextBox 9003"/>
-          <p:cNvSpPr txBox="1"/>
-          <p:nvPr/>
-        </p:nvSpPr>
-        <p:spPr>
-          <a:xfrm>
-            <a:off x="566928" y="1965960"/>
-            <a:ext cx="10607040" cy="1417320"/>
-          </a:xfrm>
-          <a:prstGeom prst="rect">
-            <a:avLst/>
-          </a:prstGeom>
-          <a:noFill/>
-        </p:spPr>
-        <p:txBody>
-          <a:bodyPr wrap="square" anchor="t" lIns="0" rIns="0" tIns="0" bIns="0">
-            <a:spAutoFit/>
-          </a:bodyPr>
-          <a:lstStyle/>
-          <a:p>
-            <a:pPr algn="l">
-              <a:lnSpc>
-                <a:spcPct val="115000"/>
-              </a:lnSpc>
-            </a:pPr>
-            <a:r>
-              <a:rPr sz="1700" b="0">
-                <a:solidFill>
-                  <a:srgbClr val="2E2C2C"/>
-                </a:solidFill>
-                <a:latin typeface="Arial"/>
-                <a:ea typeface="微软雅黑"/>
-              </a:rPr>
-              <a:t>▪  Scheduler Pod 统一 2C/4G</a:t>
-            </a:r>
-          </a:p>
-          <a:p>
-            <a:pPr algn="l">
-              <a:lnSpc>
-                <a:spcPct val="115000"/>
-              </a:lnSpc>
-              <a:spcBef>
-                <a:spcPts val="1800"/>
-              </a:spcBef>
-            </a:pPr>
-            <a:r>
-              <a:rPr sz="1700" b="0">
-                <a:solidFill>
-                  <a:srgbClr val="2E2C2C"/>
-                </a:solidFill>
-                <a:latin typeface="Arial"/>
-                <a:ea typeface="微软雅黑"/>
-              </a:rPr>
-              <a:t>▪  ENO 少一个 Binder Deployment</a:t>
-            </a:r>
-          </a:p>
-          <a:p>
-            <a:pPr algn="l">
-              <a:lnSpc>
-                <a:spcPct val="115000"/>
-              </a:lnSpc>
-              <a:spcBef>
-                <a:spcPts val="1800"/>
-              </a:spcBef>
-            </a:pPr>
-            <a:r>
-              <a:rPr sz="1700" b="0">
-                <a:solidFill>
-                  <a:srgbClr val="2E2C2C"/>
-                </a:solidFill>
-                <a:latin typeface="Arial"/>
-                <a:ea typeface="微软雅黑"/>
-              </a:rPr>
-              <a:t>▪  集群总资源收益未量化</a:t>
-            </a:r>
-          </a:p>
-        </p:txBody>
-      </p:sp>
-      <p:sp>
-        <p:nvSpPr>
-          <p:cNvPr id="9005" name="TextBox 9004"/>
-          <p:cNvSpPr txBox="1"/>
-          <p:nvPr/>
-        </p:nvSpPr>
-        <p:spPr>
-          <a:xfrm>
-            <a:off x="10780776" y="6345936"/>
-            <a:ext cx="850392" cy="219456"/>
-          </a:xfrm>
-          <a:prstGeom prst="rect">
-            <a:avLst/>
-          </a:prstGeom>
-          <a:noFill/>
-        </p:spPr>
-        <p:txBody>
-          <a:bodyPr wrap="square" anchor="t" lIns="0" rIns="0" tIns="0" bIns="0">
-            <a:spAutoFit/>
-          </a:bodyPr>
-          <a:lstStyle/>
-          <a:p>
-            <a:pPr algn="r"/>
-            <a:r>
-              <a:rPr sz="950" b="0">
-                <a:solidFill>
-                  <a:srgbClr val="636363"/>
-                </a:solidFill>
-                <a:latin typeface="Arial"/>
-                <a:ea typeface="微软雅黑"/>
-              </a:rPr>
-              <a:t>B5</a:t>
-            </a:r>
-          </a:p>
-        </p:txBody>
-      </p:sp>
-    </p:spTree>
-  </p:cSld>
-  <p:clrMapOvr>
-    <a:masterClrMapping/>
-  </p:clrMapOvr>
-</p:sld>
-</file>
-
 <file path=ppt/slides/slide29.xml><?xml version="1.0" encoding="utf-8"?>
 <p:sld xmlns:a="http://schemas.openxmlformats.org/drawingml/2006/main" xmlns:p="http://schemas.openxmlformats.org/presentationml/2006/main" xmlns:r="http://schemas.openxmlformats.org/officeDocument/2006/relationships">
   <p:cSld>
@@ -24026,7 +24064,7 @@
                 <a:latin typeface="Arial"/>
                 <a:ea typeface="微软雅黑"/>
               </a:rPr>
-              <a:t>一键复现</a:t>
+              <a:t>资源公平性与未量化的资源收益</a:t>
             </a:r>
           </a:p>
         </p:txBody>
@@ -24066,7 +24104,7 @@
                 <a:latin typeface="Arial"/>
                 <a:ea typeface="微软雅黑"/>
               </a:rPr>
-              <a:t>从零到结果的全部入口</a:t>
+              <a:t>每 Deployment 同规格，对 ENO 略不利</a:t>
             </a:r>
           </a:p>
         </p:txBody>
@@ -24106,7 +24144,7 @@
                 <a:latin typeface="Arial"/>
                 <a:ea typeface="微软雅黑"/>
               </a:rPr>
-              <a:t>▪  run-experiment.sh：12 步实验流程</a:t>
+              <a:t>▪  Scheduler Pod 统一 2C/4G</a:t>
             </a:r>
           </a:p>
           <a:p>
@@ -24126,7 +24164,7 @@
                 <a:latin typeface="Arial"/>
                 <a:ea typeface="微软雅黑"/>
               </a:rPr>
-              <a:t>▪  plot-results.py / collect/：聚合与出图</a:t>
+              <a:t>▪  ENO 少一个 Binder Deployment</a:t>
             </a:r>
           </a:p>
           <a:p>
@@ -24146,7 +24184,7 @@
                 <a:latin typeface="Arial"/>
                 <a:ea typeface="微软雅黑"/>
               </a:rPr>
-              <a:t>▪  results/compare/：16 场景产物</a:t>
+              <a:t>▪  集群总资源收益未量化</a:t>
             </a:r>
           </a:p>
         </p:txBody>
@@ -24182,7 +24220,7 @@
                 <a:latin typeface="Arial"/>
                 <a:ea typeface="微软雅黑"/>
               </a:rPr>
-              <a:t>B6</a:t>
+              <a:t>B5</a:t>
             </a:r>
           </a:p>
         </p:txBody>
@@ -25437,7 +25475,7 @@
                 <a:latin typeface="Arial"/>
                 <a:ea typeface="微软雅黑"/>
               </a:rPr>
-              <a:t>3 / 23</a:t>
+              <a:t>3 / 24</a:t>
             </a:r>
           </a:p>
         </p:txBody>
@@ -25724,7 +25762,7 @@
                 <a:latin typeface="Arial"/>
                 <a:ea typeface="微软雅黑"/>
               </a:rPr>
-              <a:t>主场景 s3/w3 的时序形态（备用）</a:t>
+              <a:t>一键复现</a:t>
             </a:r>
           </a:p>
         </p:txBody>
@@ -25764,69 +25802,21 @@
                 <a:latin typeface="Arial"/>
                 <a:ea typeface="微软雅黑"/>
               </a:rPr>
-              <a:t>ENO 更早进入平台、平台更高、结束更早</a:t>
-            </a:r>
-          </a:p>
-        </p:txBody>
-      </p:sp>
-      <p:pic>
-        <p:nvPicPr>
-          <p:cNvPr id="9004" name="Picture 9003" descr="fig6-throughput-s3-w3.png"/>
-          <p:cNvPicPr>
-            <a:picLocks noChangeAspect="1"/>
-          </p:cNvPicPr>
-          <p:nvPr/>
-        </p:nvPicPr>
-        <p:blipFill>
-          <a:blip r:embed="rId3"/>
-          <a:stretch>
-            <a:fillRect/>
-          </a:stretch>
-        </p:blipFill>
-        <p:spPr>
-          <a:xfrm>
-            <a:off x="566928" y="2322730"/>
-            <a:ext cx="5394960" cy="2212539"/>
-          </a:xfrm>
-          <a:prstGeom prst="rect">
-            <a:avLst/>
-          </a:prstGeom>
-        </p:spPr>
-      </p:pic>
-      <p:pic>
-        <p:nvPicPr>
-          <p:cNvPr id="9005" name="Picture 9004" descr="fig6-6-latency-p99-s3-w3.png"/>
-          <p:cNvPicPr>
-            <a:picLocks noChangeAspect="1"/>
-          </p:cNvPicPr>
-          <p:nvPr/>
-        </p:nvPicPr>
-        <p:blipFill>
-          <a:blip r:embed="rId4"/>
-          <a:stretch>
-            <a:fillRect/>
-          </a:stretch>
-        </p:blipFill>
-        <p:spPr>
-          <a:xfrm>
-            <a:off x="6172200" y="2323351"/>
-            <a:ext cx="5394960" cy="2211297"/>
-          </a:xfrm>
-          <a:prstGeom prst="rect">
-            <a:avLst/>
-          </a:prstGeom>
-        </p:spPr>
-      </p:pic>
-      <p:sp>
-        <p:nvSpPr>
-          <p:cNvPr id="9006" name="TextBox 9005"/>
+              <a:t>从零到结果的全部入口</a:t>
+            </a:r>
+          </a:p>
+        </p:txBody>
+      </p:sp>
+      <p:sp>
+        <p:nvSpPr>
+          <p:cNvPr id="9004" name="TextBox 9003"/>
           <p:cNvSpPr txBox="1"/>
           <p:nvPr/>
         </p:nvSpPr>
         <p:spPr>
           <a:xfrm>
-            <a:off x="566928" y="5138928"/>
-            <a:ext cx="11064240" cy="1097280"/>
+            <a:off x="566928" y="1965960"/>
+            <a:ext cx="10607040" cy="1417320"/>
           </a:xfrm>
           <a:prstGeom prst="rect">
             <a:avLst/>
@@ -25839,57 +25829,67 @@
           </a:bodyPr>
           <a:lstStyle/>
           <a:p>
-            <a:pPr algn="l"/>
-            <a:r>
-              <a:rPr sz="1400" b="0">
+            <a:pPr algn="l">
+              <a:lnSpc>
+                <a:spcPct val="115000"/>
+              </a:lnSpc>
+            </a:pPr>
+            <a:r>
+              <a:rPr sz="1700" b="0">
                 <a:solidFill>
                   <a:srgbClr val="2E2C2C"/>
                 </a:solidFill>
                 <a:latin typeface="Arial"/>
                 <a:ea typeface="微软雅黑"/>
               </a:rPr>
-              <a:t>▪  吞吐平台更高且更早稳定</a:t>
+              <a:t>▪  run-experiment.sh：12 步实验流程</a:t>
             </a:r>
           </a:p>
           <a:p>
             <a:pPr algn="l">
+              <a:lnSpc>
+                <a:spcPct val="115000"/>
+              </a:lnSpc>
               <a:spcBef>
-                <a:spcPts val="600"/>
+                <a:spcPts val="1800"/>
               </a:spcBef>
             </a:pPr>
             <a:r>
-              <a:rPr sz="1400" b="0">
+              <a:rPr sz="1700" b="0">
                 <a:solidFill>
                   <a:srgbClr val="2E2C2C"/>
                 </a:solidFill>
                 <a:latin typeface="Arial"/>
                 <a:ea typeface="微软雅黑"/>
               </a:rPr>
-              <a:t>▪  P99 峰值更低、回落更快</a:t>
+              <a:t>▪  plot-results.py / collect/：聚合与出图</a:t>
             </a:r>
           </a:p>
           <a:p>
             <a:pPr algn="l">
+              <a:lnSpc>
+                <a:spcPct val="115000"/>
+              </a:lnSpc>
               <a:spcBef>
-                <a:spcPts val="600"/>
+                <a:spcPts val="1800"/>
               </a:spcBef>
             </a:pPr>
             <a:r>
-              <a:rPr sz="1400" b="0">
+              <a:rPr sz="1700" b="0">
                 <a:solidFill>
                   <a:srgbClr val="2E2C2C"/>
                 </a:solidFill>
                 <a:latin typeface="Arial"/>
                 <a:ea typeface="微软雅黑"/>
               </a:rPr>
-              <a:t>▪  整体完成时间更短</a:t>
-            </a:r>
-          </a:p>
-        </p:txBody>
-      </p:sp>
-      <p:sp>
-        <p:nvSpPr>
-          <p:cNvPr id="9007" name="TextBox 9006"/>
+              <a:t>▪  results/compare/：16 场景产物</a:t>
+            </a:r>
+          </a:p>
+        </p:txBody>
+      </p:sp>
+      <p:sp>
+        <p:nvSpPr>
+          <p:cNvPr id="9005" name="TextBox 9004"/>
           <p:cNvSpPr txBox="1"/>
           <p:nvPr/>
         </p:nvSpPr>
@@ -25918,7 +25918,7 @@
                 <a:latin typeface="Arial"/>
                 <a:ea typeface="微软雅黑"/>
               </a:rPr>
-              <a:t>B7</a:t>
+              <a:t>B6</a:t>
             </a:r>
           </a:p>
         </p:txBody>
@@ -26683,7 +26683,7 @@
                 <a:latin typeface="Arial"/>
                 <a:ea typeface="微软雅黑"/>
               </a:rPr>
-              <a:t>4 / 23</a:t>
+              <a:t>4 / 24</a:t>
             </a:r>
           </a:p>
         </p:txBody>
@@ -27468,7 +27468,7 @@
                 <a:latin typeface="Arial"/>
                 <a:ea typeface="微软雅黑"/>
               </a:rPr>
-              <a:t>5 / 23</a:t>
+              <a:t>5 / 24</a:t>
             </a:r>
           </a:p>
         </p:txBody>
@@ -28253,7 +28253,7 @@
                 <a:latin typeface="Arial"/>
                 <a:ea typeface="微软雅黑"/>
               </a:rPr>
-              <a:t>6 / 23</a:t>
+              <a:t>6 / 24</a:t>
             </a:r>
           </a:p>
         </p:txBody>
@@ -29038,7 +29038,7 @@
                 <a:latin typeface="Arial"/>
                 <a:ea typeface="微软雅黑"/>
               </a:rPr>
-              <a:t>7 / 23</a:t>
+              <a:t>7 / 24</a:t>
             </a:r>
           </a:p>
         </p:txBody>
@@ -29502,7 +29502,7 @@
                 <a:latin typeface="Arial"/>
                 <a:ea typeface="微软雅黑"/>
               </a:rPr>
-              <a:t>8 / 23</a:t>
+              <a:t>8 / 24</a:t>
             </a:r>
           </a:p>
         </p:txBody>
@@ -30287,7 +30287,7 @@
                 <a:latin typeface="Arial"/>
                 <a:ea typeface="微软雅黑"/>
               </a:rPr>
-              <a:t>9 / 23</a:t>
+              <a:t>9 / 24</a:t>
             </a:r>
           </a:p>
         </p:txBody>

--- a/docs/thesis/defense/答辩PPT-北航模板版.pptx
+++ b/docs/thesis/defense/答辩PPT-北航模板版.pptx
@@ -33,12 +33,6 @@
     <p:sldId id="277" r:id="rId29"/>
     <p:sldId id="278" r:id="rId30"/>
     <p:sldId id="279" r:id="rId31"/>
-    <p:sldId id="280" r:id="rId7"/>
-    <p:sldId id="281" r:id="rId6"/>
-    <p:sldId id="282" r:id="rId5"/>
-    <p:sldId id="283" r:id="rId4"/>
-    <p:sldId id="284" r:id="rId3"/>
-    <p:sldId id="285" r:id="rId37"/>
   </p:sldIdLst>
   <p:sldSz cx="12196763" cy="6858000"/>
   <p:notesSz cx="6858000" cy="9144000"/>
@@ -2201,356 +2195,6 @@
 </p:notes>
 </file>
 
-<file path=ppt/notesSlides/notesSlide25.xml><?xml version="1.0" encoding="utf-8"?>
-<p:notes xmlns:a="http://schemas.openxmlformats.org/drawingml/2006/main" xmlns:p="http://schemas.openxmlformats.org/presentationml/2006/main" xmlns:r="http://schemas.openxmlformats.org/officeDocument/2006/relationships">
-  <p:cSld>
-    <p:spTree>
-      <p:nvGrpSpPr>
-        <p:cNvPr id="1" name=""/>
-        <p:cNvGrpSpPr/>
-        <p:nvPr/>
-      </p:nvGrpSpPr>
-      <p:grpSpPr>
-        <a:xfrm>
-          <a:off x="0" y="0"/>
-          <a:ext cx="0" cy="0"/>
-          <a:chOff x="0" y="0"/>
-          <a:chExt cx="0" cy="0"/>
-        </a:xfrm>
-      </p:grpSpPr>
-      <p:sp>
-        <p:nvSpPr>
-          <p:cNvPr id="2" name="Slide Image Placeholder 1"/>
-          <p:cNvSpPr>
-            <a:spLocks noGrp="1"/>
-          </p:cNvSpPr>
-          <p:nvPr>
-            <p:ph type="sldImg"/>
-          </p:nvPr>
-        </p:nvSpPr>
-        <p:spPr/>
-      </p:sp>
-      <p:sp>
-        <p:nvSpPr>
-          <p:cNvPr id="3" name="Notes Placeholder 2"/>
-          <p:cNvSpPr>
-            <a:spLocks noGrp="1"/>
-          </p:cNvSpPr>
-          <p:nvPr>
-            <p:ph type="body" idx="3" sz="quarter"/>
-          </p:nvPr>
-        </p:nvSpPr>
-        <p:spPr/>
-        <p:txBody>
-          <a:bodyPr/>
-          <a:lstStyle/>
-          <a:p>
-            <a:r>
-              <a:t>备用页：抽查任意场景的原始数值。</a:t>
-            </a:r>
-          </a:p>
-        </p:txBody>
-      </p:sp>
-      <p:sp>
-        <p:nvSpPr>
-          <p:cNvPr id="4" name="Slide Number Placeholder 3"/>
-          <p:cNvSpPr>
-            <a:spLocks noGrp="1"/>
-          </p:cNvSpPr>
-          <p:nvPr>
-            <p:ph type="sldNum" idx="5" sz="quarter"/>
-          </p:nvPr>
-        </p:nvSpPr>
-        <p:spPr/>
-      </p:sp>
-    </p:spTree>
-  </p:cSld>
-  <p:clrMapOvr>
-    <a:masterClrMapping/>
-  </p:clrMapOvr>
-</p:notes>
-</file>
-
-<file path=ppt/notesSlides/notesSlide26.xml><?xml version="1.0" encoding="utf-8"?>
-<p:notes xmlns:a="http://schemas.openxmlformats.org/drawingml/2006/main" xmlns:p="http://schemas.openxmlformats.org/presentationml/2006/main" xmlns:r="http://schemas.openxmlformats.org/officeDocument/2006/relationships">
-  <p:cSld>
-    <p:spTree>
-      <p:nvGrpSpPr>
-        <p:cNvPr id="1" name=""/>
-        <p:cNvGrpSpPr/>
-        <p:nvPr/>
-      </p:nvGrpSpPr>
-      <p:grpSpPr>
-        <a:xfrm>
-          <a:off x="0" y="0"/>
-          <a:ext cx="0" cy="0"/>
-          <a:chOff x="0" y="0"/>
-          <a:chExt cx="0" cy="0"/>
-        </a:xfrm>
-      </p:grpSpPr>
-      <p:sp>
-        <p:nvSpPr>
-          <p:cNvPr id="2" name="Slide Image Placeholder 1"/>
-          <p:cNvSpPr>
-            <a:spLocks noGrp="1"/>
-          </p:cNvSpPr>
-          <p:nvPr>
-            <p:ph type="sldImg"/>
-          </p:nvPr>
-        </p:nvSpPr>
-        <p:spPr/>
-      </p:sp>
-      <p:sp>
-        <p:nvSpPr>
-          <p:cNvPr id="3" name="Notes Placeholder 2"/>
-          <p:cNvSpPr>
-            <a:spLocks noGrp="1"/>
-          </p:cNvSpPr>
-          <p:nvPr>
-            <p:ph type="body" idx="3" sz="quarter"/>
-          </p:nvPr>
-        </p:nvSpPr>
-        <p:spPr/>
-        <p:txBody>
-          <a:bodyPr/>
-          <a:lstStyle/>
-          <a:p>
-            <a:r>
-              <a:t>备用页：如果评委追问某个数字怎么算出来的，用这页回答。</a:t>
-            </a:r>
-          </a:p>
-        </p:txBody>
-      </p:sp>
-      <p:sp>
-        <p:nvSpPr>
-          <p:cNvPr id="4" name="Slide Number Placeholder 3"/>
-          <p:cNvSpPr>
-            <a:spLocks noGrp="1"/>
-          </p:cNvSpPr>
-          <p:nvPr>
-            <p:ph type="sldNum" idx="5" sz="quarter"/>
-          </p:nvPr>
-        </p:nvSpPr>
-        <p:spPr/>
-      </p:sp>
-    </p:spTree>
-  </p:cSld>
-  <p:clrMapOvr>
-    <a:masterClrMapping/>
-  </p:clrMapOvr>
-</p:notes>
-</file>
-
-<file path=ppt/notesSlides/notesSlide27.xml><?xml version="1.0" encoding="utf-8"?>
-<p:notes xmlns:a="http://schemas.openxmlformats.org/drawingml/2006/main" xmlns:p="http://schemas.openxmlformats.org/presentationml/2006/main" xmlns:r="http://schemas.openxmlformats.org/officeDocument/2006/relationships">
-  <p:cSld>
-    <p:spTree>
-      <p:nvGrpSpPr>
-        <p:cNvPr id="1" name=""/>
-        <p:cNvGrpSpPr/>
-        <p:nvPr/>
-      </p:nvGrpSpPr>
-      <p:grpSpPr>
-        <a:xfrm>
-          <a:off x="0" y="0"/>
-          <a:ext cx="0" cy="0"/>
-          <a:chOff x="0" y="0"/>
-          <a:chExt cx="0" cy="0"/>
-        </a:xfrm>
-      </p:grpSpPr>
-      <p:sp>
-        <p:nvSpPr>
-          <p:cNvPr id="2" name="Slide Image Placeholder 1"/>
-          <p:cNvSpPr>
-            <a:spLocks noGrp="1"/>
-          </p:cNvSpPr>
-          <p:nvPr>
-            <p:ph type="sldImg"/>
-          </p:nvPr>
-        </p:nvSpPr>
-        <p:spPr/>
-      </p:sp>
-      <p:sp>
-        <p:nvSpPr>
-          <p:cNvPr id="3" name="Notes Placeholder 2"/>
-          <p:cNvSpPr>
-            <a:spLocks noGrp="1"/>
-          </p:cNvSpPr>
-          <p:nvPr>
-            <p:ph type="body" idx="3" sz="quarter"/>
-          </p:nvPr>
-        </p:nvSpPr>
-        <p:spPr/>
-        <p:txBody>
-          <a:bodyPr/>
-          <a:lstStyle/>
-          <a:p>
-            <a:r>
-              <a:t>备用页：幸存者偏差的解释。过载时 Pod 根本没被处理，所以延迟看起来“很好”。</a:t>
-            </a:r>
-          </a:p>
-        </p:txBody>
-      </p:sp>
-      <p:sp>
-        <p:nvSpPr>
-          <p:cNvPr id="4" name="Slide Number Placeholder 3"/>
-          <p:cNvSpPr>
-            <a:spLocks noGrp="1"/>
-          </p:cNvSpPr>
-          <p:nvPr>
-            <p:ph type="sldNum" idx="5" sz="quarter"/>
-          </p:nvPr>
-        </p:nvSpPr>
-        <p:spPr/>
-      </p:sp>
-    </p:spTree>
-  </p:cSld>
-  <p:clrMapOvr>
-    <a:masterClrMapping/>
-  </p:clrMapOvr>
-</p:notes>
-</file>
-
-<file path=ppt/notesSlides/notesSlide28.xml><?xml version="1.0" encoding="utf-8"?>
-<p:notes xmlns:a="http://schemas.openxmlformats.org/drawingml/2006/main" xmlns:p="http://schemas.openxmlformats.org/presentationml/2006/main" xmlns:r="http://schemas.openxmlformats.org/officeDocument/2006/relationships">
-  <p:cSld>
-    <p:spTree>
-      <p:nvGrpSpPr>
-        <p:cNvPr id="1" name=""/>
-        <p:cNvGrpSpPr/>
-        <p:nvPr/>
-      </p:nvGrpSpPr>
-      <p:grpSpPr>
-        <a:xfrm>
-          <a:off x="0" y="0"/>
-          <a:ext cx="0" cy="0"/>
-          <a:chOff x="0" y="0"/>
-          <a:chExt cx="0" cy="0"/>
-        </a:xfrm>
-      </p:grpSpPr>
-      <p:sp>
-        <p:nvSpPr>
-          <p:cNvPr id="2" name="Slide Image Placeholder 1"/>
-          <p:cNvSpPr>
-            <a:spLocks noGrp="1"/>
-          </p:cNvSpPr>
-          <p:nvPr>
-            <p:ph type="sldImg"/>
-          </p:nvPr>
-        </p:nvSpPr>
-        <p:spPr/>
-      </p:sp>
-      <p:sp>
-        <p:nvSpPr>
-          <p:cNvPr id="3" name="Notes Placeholder 2"/>
-          <p:cNvSpPr>
-            <a:spLocks noGrp="1"/>
-          </p:cNvSpPr>
-          <p:nvPr>
-            <p:ph type="body" idx="3" sz="quarter"/>
-          </p:nvPr>
-        </p:nvSpPr>
-        <p:spPr/>
-        <p:txBody>
-          <a:bodyPr/>
-          <a:lstStyle/>
-          <a:p>
-            <a:r>
-              <a:t>备用页：w6 反向结果的完整数据与解释。</a:t>
-            </a:r>
-          </a:p>
-        </p:txBody>
-      </p:sp>
-      <p:sp>
-        <p:nvSpPr>
-          <p:cNvPr id="4" name="Slide Number Placeholder 3"/>
-          <p:cNvSpPr>
-            <a:spLocks noGrp="1"/>
-          </p:cNvSpPr>
-          <p:nvPr>
-            <p:ph type="sldNum" idx="5" sz="quarter"/>
-          </p:nvPr>
-        </p:nvSpPr>
-        <p:spPr/>
-      </p:sp>
-    </p:spTree>
-  </p:cSld>
-  <p:clrMapOvr>
-    <a:masterClrMapping/>
-  </p:clrMapOvr>
-</p:notes>
-</file>
-
-<file path=ppt/notesSlides/notesSlide29.xml><?xml version="1.0" encoding="utf-8"?>
-<p:notes xmlns:a="http://schemas.openxmlformats.org/drawingml/2006/main" xmlns:p="http://schemas.openxmlformats.org/presentationml/2006/main" xmlns:r="http://schemas.openxmlformats.org/officeDocument/2006/relationships">
-  <p:cSld>
-    <p:spTree>
-      <p:nvGrpSpPr>
-        <p:cNvPr id="1" name=""/>
-        <p:cNvGrpSpPr/>
-        <p:nvPr/>
-      </p:nvGrpSpPr>
-      <p:grpSpPr>
-        <a:xfrm>
-          <a:off x="0" y="0"/>
-          <a:ext cx="0" cy="0"/>
-          <a:chOff x="0" y="0"/>
-          <a:chExt cx="0" cy="0"/>
-        </a:xfrm>
-      </p:grpSpPr>
-      <p:sp>
-        <p:nvSpPr>
-          <p:cNvPr id="2" name="Slide Image Placeholder 1"/>
-          <p:cNvSpPr>
-            <a:spLocks noGrp="1"/>
-          </p:cNvSpPr>
-          <p:nvPr>
-            <p:ph type="sldImg"/>
-          </p:nvPr>
-        </p:nvSpPr>
-        <p:spPr/>
-      </p:sp>
-      <p:sp>
-        <p:nvSpPr>
-          <p:cNvPr id="3" name="Notes Placeholder 2"/>
-          <p:cNvSpPr>
-            <a:spLocks noGrp="1"/>
-          </p:cNvSpPr>
-          <p:nvPr>
-            <p:ph type="body" idx="3" sz="quarter"/>
-          </p:nvPr>
-        </p:nvSpPr>
-        <p:spPr/>
-        <p:txBody>
-          <a:bodyPr/>
-          <a:lstStyle/>
-          <a:p>
-            <a:r>
-              <a:t>备用页：公平性与资源开销的口径说明。</a:t>
-            </a:r>
-          </a:p>
-        </p:txBody>
-      </p:sp>
-      <p:sp>
-        <p:nvSpPr>
-          <p:cNvPr id="4" name="Slide Number Placeholder 3"/>
-          <p:cNvSpPr>
-            <a:spLocks noGrp="1"/>
-          </p:cNvSpPr>
-          <p:nvPr>
-            <p:ph type="sldNum" idx="5" sz="quarter"/>
-          </p:nvPr>
-        </p:nvSpPr>
-        <p:spPr/>
-      </p:sp>
-    </p:spTree>
-  </p:cSld>
-  <p:clrMapOvr>
-    <a:masterClrMapping/>
-  </p:clrMapOvr>
-</p:notes>
-</file>
-
 <file path=ppt/notesSlides/notesSlide3.xml><?xml version="1.0" encoding="utf-8"?>
 <p:notes xmlns:a="http://schemas.openxmlformats.org/drawingml/2006/main" xmlns:p="http://schemas.openxmlformats.org/presentationml/2006/main" xmlns:r="http://schemas.openxmlformats.org/officeDocument/2006/relationships">
   <p:cSld>
@@ -2597,76 +2241,6 @@
           <a:p>
             <a:r>
               <a:t>第二章分国外与国内两条线。国外从集中式走到共享状态：Borg、Omega、Mesos，再到 kube-scheduler 的插件框架。国内代表是 Gödel，字节跳动开源，用节点分区做分片式多实例；Volcano 与 Koordinator 走插件增强。共同缺口在落盘侧。</a:t>
-            </a:r>
-          </a:p>
-        </p:txBody>
-      </p:sp>
-      <p:sp>
-        <p:nvSpPr>
-          <p:cNvPr id="4" name="Slide Number Placeholder 3"/>
-          <p:cNvSpPr>
-            <a:spLocks noGrp="1"/>
-          </p:cNvSpPr>
-          <p:nvPr>
-            <p:ph type="sldNum" idx="5" sz="quarter"/>
-          </p:nvPr>
-        </p:nvSpPr>
-        <p:spPr/>
-      </p:sp>
-    </p:spTree>
-  </p:cSld>
-  <p:clrMapOvr>
-    <a:masterClrMapping/>
-  </p:clrMapOvr>
-</p:notes>
-</file>
-
-<file path=ppt/notesSlides/notesSlide30.xml><?xml version="1.0" encoding="utf-8"?>
-<p:notes xmlns:a="http://schemas.openxmlformats.org/drawingml/2006/main" xmlns:p="http://schemas.openxmlformats.org/presentationml/2006/main" xmlns:r="http://schemas.openxmlformats.org/officeDocument/2006/relationships">
-  <p:cSld>
-    <p:spTree>
-      <p:nvGrpSpPr>
-        <p:cNvPr id="1" name=""/>
-        <p:cNvGrpSpPr/>
-        <p:nvPr/>
-      </p:nvGrpSpPr>
-      <p:grpSpPr>
-        <a:xfrm>
-          <a:off x="0" y="0"/>
-          <a:ext cx="0" cy="0"/>
-          <a:chOff x="0" y="0"/>
-          <a:chExt cx="0" cy="0"/>
-        </a:xfrm>
-      </p:grpSpPr>
-      <p:sp>
-        <p:nvSpPr>
-          <p:cNvPr id="2" name="Slide Image Placeholder 1"/>
-          <p:cNvSpPr>
-            <a:spLocks noGrp="1"/>
-          </p:cNvSpPr>
-          <p:nvPr>
-            <p:ph type="sldImg"/>
-          </p:nvPr>
-        </p:nvSpPr>
-        <p:spPr/>
-      </p:sp>
-      <p:sp>
-        <p:nvSpPr>
-          <p:cNvPr id="3" name="Notes Placeholder 2"/>
-          <p:cNvSpPr>
-            <a:spLocks noGrp="1"/>
-          </p:cNvSpPr>
-          <p:nvPr>
-            <p:ph type="body" idx="3" sz="quarter"/>
-          </p:nvPr>
-        </p:nvSpPr>
-        <p:spPr/>
-        <p:txBody>
-          <a:bodyPr/>
-          <a:lstStyle/>
-          <a:p>
-            <a:r>
-              <a:t>备用页：评委问可复现性时展示。</a:t>
             </a:r>
           </a:p>
         </p:txBody>
@@ -20061,4166 +19635,6 @@
                 <a:ea typeface="微软雅黑"/>
               </a:rPr>
               <a:t>24 / 24</a:t>
-            </a:r>
-          </a:p>
-        </p:txBody>
-      </p:sp>
-    </p:spTree>
-  </p:cSld>
-  <p:clrMapOvr>
-    <a:masterClrMapping/>
-  </p:clrMapOvr>
-</p:sld>
-</file>
-
-<file path=ppt/slides/slide25.xml><?xml version="1.0" encoding="utf-8"?>
-<p:sld xmlns:a="http://schemas.openxmlformats.org/drawingml/2006/main" xmlns:p="http://schemas.openxmlformats.org/presentationml/2006/main" xmlns:r="http://schemas.openxmlformats.org/officeDocument/2006/relationships">
-  <p:cSld>
-    <p:bg>
-      <p:bgPr>
-        <a:solidFill>
-          <a:srgbClr val="FFFFFF"/>
-        </a:solidFill>
-        <a:effectLst/>
-      </p:bgPr>
-    </p:bg>
-    <p:spTree>
-      <p:nvGrpSpPr>
-        <p:cNvPr id="1" name=""/>
-        <p:cNvGrpSpPr/>
-        <p:nvPr/>
-      </p:nvGrpSpPr>
-      <p:grpSpPr/>
-      <p:sp>
-        <p:nvSpPr>
-          <p:cNvPr id="9000" name="Freeform 5"/>
-          <p:cNvSpPr/>
-          <p:nvPr/>
-        </p:nvSpPr>
-        <p:spPr>
-          <a:xfrm>
-            <a:off x="182880" y="274320"/>
-            <a:ext cx="310896" cy="402336"/>
-          </a:xfrm>
-          <a:custGeom>
-            <a:avLst/>
-            <a:gdLst/>
-            <a:ahLst/>
-            <a:cxnLst>
-              <a:cxn ang="0">
-                <a:pos x="2147483647" y="2147483647"/>
-              </a:cxn>
-              <a:cxn ang="0">
-                <a:pos x="2147483647" y="2147483647"/>
-              </a:cxn>
-              <a:cxn ang="0">
-                <a:pos x="2147483647" y="2147483647"/>
-              </a:cxn>
-              <a:cxn ang="0">
-                <a:pos x="2147483647" y="2147483647"/>
-              </a:cxn>
-              <a:cxn ang="0">
-                <a:pos x="2147483647" y="2147483647"/>
-              </a:cxn>
-              <a:cxn ang="0">
-                <a:pos x="2147483647" y="2147483647"/>
-              </a:cxn>
-              <a:cxn ang="0">
-                <a:pos x="2147483647" y="2147483647"/>
-              </a:cxn>
-              <a:cxn ang="0">
-                <a:pos x="2147483647" y="2147483647"/>
-              </a:cxn>
-              <a:cxn ang="0">
-                <a:pos x="2147483647" y="0"/>
-              </a:cxn>
-              <a:cxn ang="0">
-                <a:pos x="2147483647" y="2147483647"/>
-              </a:cxn>
-              <a:cxn ang="0">
-                <a:pos x="2147483647" y="2147483647"/>
-              </a:cxn>
-              <a:cxn ang="0">
-                <a:pos x="2147483647" y="2147483647"/>
-              </a:cxn>
-              <a:cxn ang="0">
-                <a:pos x="2147483647" y="2147483647"/>
-              </a:cxn>
-              <a:cxn ang="0">
-                <a:pos x="2147483647" y="2147483647"/>
-              </a:cxn>
-              <a:cxn ang="0">
-                <a:pos x="2147483647" y="2147483647"/>
-              </a:cxn>
-              <a:cxn ang="0">
-                <a:pos x="2147483647" y="2147483647"/>
-              </a:cxn>
-              <a:cxn ang="0">
-                <a:pos x="2147483647" y="2147483647"/>
-              </a:cxn>
-              <a:cxn ang="0">
-                <a:pos x="2147483647" y="2147483647"/>
-              </a:cxn>
-              <a:cxn ang="0">
-                <a:pos x="2147483647" y="2147483647"/>
-              </a:cxn>
-              <a:cxn ang="0">
-                <a:pos x="0" y="2147483647"/>
-              </a:cxn>
-              <a:cxn ang="0">
-                <a:pos x="2147483647" y="2147483647"/>
-              </a:cxn>
-            </a:cxnLst>
-            <a:rect l="0" t="0" r="0" b="0"/>
-            <a:pathLst>
-              <a:path w="574" h="681">
-                <a:moveTo>
-                  <a:pt x="120" y="441"/>
-                </a:moveTo>
-                <a:cubicBezTo>
-                  <a:pt x="153" y="441"/>
-                  <a:pt x="183" y="454"/>
-                  <a:pt x="205" y="476"/>
-                </a:cubicBezTo>
-                <a:lnTo>
-                  <a:pt x="389" y="329"/>
-                </a:lnTo>
-                <a:cubicBezTo>
-                  <a:pt x="383" y="317"/>
-                  <a:pt x="380" y="303"/>
-                  <a:pt x="380" y="289"/>
-                </a:cubicBezTo>
-                <a:cubicBezTo>
-                  <a:pt x="380" y="271"/>
-                  <a:pt x="384" y="255"/>
-                  <a:pt x="392" y="241"/>
-                </a:cubicBezTo>
-                <a:lnTo>
-                  <a:pt x="270" y="138"/>
-                </a:lnTo>
-                <a:cubicBezTo>
-                  <a:pt x="256" y="151"/>
-                  <a:pt x="237" y="159"/>
-                  <a:pt x="217" y="159"/>
-                </a:cubicBezTo>
-                <a:cubicBezTo>
-                  <a:pt x="173" y="159"/>
-                  <a:pt x="137" y="123"/>
-                  <a:pt x="137" y="79"/>
-                </a:cubicBezTo>
-                <a:cubicBezTo>
-                  <a:pt x="137" y="36"/>
-                  <a:pt x="173" y="0"/>
-                  <a:pt x="217" y="0"/>
-                </a:cubicBezTo>
-                <a:cubicBezTo>
-                  <a:pt x="260" y="0"/>
-                  <a:pt x="296" y="36"/>
-                  <a:pt x="296" y="79"/>
-                </a:cubicBezTo>
-                <a:cubicBezTo>
-                  <a:pt x="296" y="91"/>
-                  <a:pt x="293" y="103"/>
-                  <a:pt x="289" y="113"/>
-                </a:cubicBezTo>
-                <a:lnTo>
-                  <a:pt x="412" y="217"/>
-                </a:lnTo>
-                <a:cubicBezTo>
-                  <a:pt x="429" y="201"/>
-                  <a:pt x="452" y="192"/>
-                  <a:pt x="477" y="192"/>
-                </a:cubicBezTo>
-                <a:cubicBezTo>
-                  <a:pt x="530" y="192"/>
-                  <a:pt x="574" y="235"/>
-                  <a:pt x="574" y="289"/>
-                </a:cubicBezTo>
-                <a:cubicBezTo>
-                  <a:pt x="574" y="342"/>
-                  <a:pt x="530" y="386"/>
-                  <a:pt x="477" y="386"/>
-                </a:cubicBezTo>
-                <a:cubicBezTo>
-                  <a:pt x="449" y="386"/>
-                  <a:pt x="424" y="374"/>
-                  <a:pt x="406" y="355"/>
-                </a:cubicBezTo>
-                <a:lnTo>
-                  <a:pt x="224" y="501"/>
-                </a:lnTo>
-                <a:cubicBezTo>
-                  <a:pt x="234" y="518"/>
-                  <a:pt x="240" y="539"/>
-                  <a:pt x="240" y="561"/>
-                </a:cubicBezTo>
-                <a:cubicBezTo>
-                  <a:pt x="240" y="627"/>
-                  <a:pt x="186" y="681"/>
-                  <a:pt x="120" y="681"/>
-                </a:cubicBezTo>
-                <a:cubicBezTo>
-                  <a:pt x="54" y="681"/>
-                  <a:pt x="0" y="627"/>
-                  <a:pt x="0" y="561"/>
-                </a:cubicBezTo>
-                <a:cubicBezTo>
-                  <a:pt x="0" y="495"/>
-                  <a:pt x="54" y="441"/>
-                  <a:pt x="120" y="441"/>
-                </a:cubicBezTo>
-                <a:close/>
-              </a:path>
-            </a:pathLst>
-          </a:custGeom>
-          <a:solidFill>
-            <a:srgbClr val="113E6A"/>
-          </a:solidFill>
-          <a:ln w="9525">
-            <a:noFill/>
-          </a:ln>
-        </p:spPr>
-        <p:txBody>
-          <a:bodyPr/>
-          <a:lstStyle/>
-          <a:p>
-            <a:endParaRPr lang="zh-CN" altLang="en-US"/>
-          </a:p>
-        </p:txBody>
-      </p:sp>
-      <p:pic>
-        <p:nvPicPr>
-          <p:cNvPr id="9001" name="Picture 9000" descr="beihang-logo-navy.png"/>
-          <p:cNvPicPr>
-            <a:picLocks noChangeAspect="1"/>
-          </p:cNvPicPr>
-          <p:nvPr/>
-        </p:nvPicPr>
-        <p:blipFill>
-          <a:blip r:embed="rId2"/>
-          <a:stretch>
-            <a:fillRect/>
-          </a:stretch>
-        </p:blipFill>
-        <p:spPr>
-          <a:xfrm>
-            <a:off x="9336024" y="91665"/>
-            <a:ext cx="2642616" cy="502469"/>
-          </a:xfrm>
-          <a:prstGeom prst="rect">
-            <a:avLst/>
-          </a:prstGeom>
-        </p:spPr>
-      </p:pic>
-      <p:sp>
-        <p:nvSpPr>
-          <p:cNvPr id="9002" name="TextBox 9001"/>
-          <p:cNvSpPr txBox="1"/>
-          <p:nvPr/>
-        </p:nvSpPr>
-        <p:spPr>
-          <a:xfrm>
-            <a:off x="566928" y="155448"/>
-            <a:ext cx="8549640" cy="621792"/>
-          </a:xfrm>
-          <a:prstGeom prst="rect">
-            <a:avLst/>
-          </a:prstGeom>
-          <a:noFill/>
-        </p:spPr>
-        <p:txBody>
-          <a:bodyPr wrap="square" anchor="ctr" lIns="0" rIns="0" tIns="0" bIns="0">
-            <a:spAutoFit/>
-          </a:bodyPr>
-          <a:lstStyle/>
-          <a:p>
-            <a:pPr algn="l">
-              <a:lnSpc>
-                <a:spcPct val="100000"/>
-              </a:lnSpc>
-            </a:pPr>
-            <a:r>
-              <a:rPr sz="3000" b="1">
-                <a:solidFill>
-                  <a:srgbClr val="113E6A"/>
-                </a:solidFill>
-                <a:latin typeface="Arial"/>
-                <a:ea typeface="微软雅黑"/>
-              </a:rPr>
-              <a:t>16 场景完整数据（摘要）</a:t>
-            </a:r>
-          </a:p>
-        </p:txBody>
-      </p:sp>
-      <p:sp>
-        <p:nvSpPr>
-          <p:cNvPr id="9003" name="TextBox 9002"/>
-          <p:cNvSpPr txBox="1"/>
-          <p:nvPr/>
-        </p:nvSpPr>
-        <p:spPr>
-          <a:xfrm>
-            <a:off x="566928" y="1261872"/>
-            <a:ext cx="10881360" cy="438912"/>
-          </a:xfrm>
-          <a:prstGeom prst="rect">
-            <a:avLst/>
-          </a:prstGeom>
-          <a:noFill/>
-        </p:spPr>
-        <p:txBody>
-          <a:bodyPr wrap="square" anchor="ctr" lIns="0" rIns="0" tIns="0" bIns="0">
-            <a:spAutoFit/>
-          </a:bodyPr>
-          <a:lstStyle/>
-          <a:p>
-            <a:pPr algn="l">
-              <a:lnSpc>
-                <a:spcPct val="110000"/>
-              </a:lnSpc>
-            </a:pPr>
-            <a:r>
-              <a:rPr sz="1800" b="1">
-                <a:solidFill>
-                  <a:srgbClr val="0070C0"/>
-                </a:solidFill>
-                <a:latin typeface="Arial"/>
-                <a:ea typeface="微软雅黑"/>
-              </a:rPr>
-              <a:t>有效吞吐 / P99 / Pod E2E P99 / 队列堆积峰值（n=3 中位数）</a:t>
-            </a:r>
-          </a:p>
-        </p:txBody>
-      </p:sp>
-      <p:graphicFrame>
-        <p:nvGraphicFramePr>
-          <p:cNvPr id="9004" name="Table 9003"/>
-          <p:cNvGraphicFramePr>
-            <a:graphicFrameLocks noGrp="1"/>
-          </p:cNvGraphicFramePr>
-          <p:nvPr/>
-        </p:nvGraphicFramePr>
-        <p:xfrm>
-          <a:off x="566928" y="1828800"/>
-          <a:ext cx="11064240" cy="2944368"/>
-        </p:xfrm>
-        <a:graphic>
-          <a:graphicData uri="http://schemas.openxmlformats.org/drawingml/2006/table">
-            <a:tbl>
-              <a:tblPr firstRow="1" bandRow="1">
-                <a:tableStyleId>{5C22544A-7EE6-4342-B048-85BDC9FD1C3A}</a:tableStyleId>
-              </a:tblPr>
-              <a:tblGrid>
-                <a:gridCol w="2212848"/>
-                <a:gridCol w="2212848"/>
-                <a:gridCol w="2212848"/>
-                <a:gridCol w="2212848"/>
-                <a:gridCol w="2212848"/>
-              </a:tblGrid>
-              <a:tr h="420624">
-                <a:tc>
-                  <a:txBody>
-                    <a:bodyPr wrap="square"/>
-                    <a:lstStyle/>
-                    <a:p>
-                      <a:pPr algn="l"/>
-                      <a:r>
-                        <a:rPr sz="1200" b="1">
-                          <a:solidFill>
-                            <a:srgbClr val="FFFFFF"/>
-                          </a:solidFill>
-                          <a:latin typeface="Arial"/>
-                          <a:ea typeface="微软雅黑"/>
-                        </a:rPr>
-                        <a:t>场景</a:t>
-                      </a:r>
-                    </a:p>
-                  </a:txBody>
-                  <a:tcPr marL="54864" marR="54864" marT="18288" marB="18288" anchor="ctr">
-                    <a:solidFill>
-                      <a:srgbClr val="113E6A"/>
-                    </a:solidFill>
-                  </a:tcPr>
-                </a:tc>
-                <a:tc>
-                  <a:txBody>
-                    <a:bodyPr wrap="square"/>
-                    <a:lstStyle/>
-                    <a:p>
-                      <a:pPr algn="ctr"/>
-                      <a:r>
-                        <a:rPr sz="1200" b="1">
-                          <a:solidFill>
-                            <a:srgbClr val="FFFFFF"/>
-                          </a:solidFill>
-                          <a:latin typeface="Arial"/>
-                          <a:ea typeface="微软雅黑"/>
-                        </a:rPr>
-                        <a:t>ENO 吞吐</a:t>
-                      </a:r>
-                    </a:p>
-                  </a:txBody>
-                  <a:tcPr marL="54864" marR="54864" marT="18288" marB="18288" anchor="ctr">
-                    <a:solidFill>
-                      <a:srgbClr val="113E6A"/>
-                    </a:solidFill>
-                  </a:tcPr>
-                </a:tc>
-                <a:tc>
-                  <a:txBody>
-                    <a:bodyPr wrap="square"/>
-                    <a:lstStyle/>
-                    <a:p>
-                      <a:pPr algn="ctr"/>
-                      <a:r>
-                        <a:rPr sz="1200" b="1">
-                          <a:solidFill>
-                            <a:srgbClr val="FFFFFF"/>
-                          </a:solidFill>
-                          <a:latin typeface="Arial"/>
-                          <a:ea typeface="微软雅黑"/>
-                        </a:rPr>
-                        <a:t>Gödel 吞吐</a:t>
-                      </a:r>
-                    </a:p>
-                  </a:txBody>
-                  <a:tcPr marL="54864" marR="54864" marT="18288" marB="18288" anchor="ctr">
-                    <a:solidFill>
-                      <a:srgbClr val="113E6A"/>
-                    </a:solidFill>
-                  </a:tcPr>
-                </a:tc>
-                <a:tc>
-                  <a:txBody>
-                    <a:bodyPr wrap="square"/>
-                    <a:lstStyle/>
-                    <a:p>
-                      <a:pPr algn="ctr"/>
-                      <a:r>
-                        <a:rPr sz="1200" b="1">
-                          <a:solidFill>
-                            <a:srgbClr val="FFFFFF"/>
-                          </a:solidFill>
-                          <a:latin typeface="Arial"/>
-                          <a:ea typeface="微软雅黑"/>
-                        </a:rPr>
-                        <a:t>ENO P99</a:t>
-                      </a:r>
-                    </a:p>
-                  </a:txBody>
-                  <a:tcPr marL="54864" marR="54864" marT="18288" marB="18288" anchor="ctr">
-                    <a:solidFill>
-                      <a:srgbClr val="113E6A"/>
-                    </a:solidFill>
-                  </a:tcPr>
-                </a:tc>
-                <a:tc>
-                  <a:txBody>
-                    <a:bodyPr wrap="square"/>
-                    <a:lstStyle/>
-                    <a:p>
-                      <a:pPr algn="ctr"/>
-                      <a:r>
-                        <a:rPr sz="1200" b="1">
-                          <a:solidFill>
-                            <a:srgbClr val="FFFFFF"/>
-                          </a:solidFill>
-                          <a:latin typeface="Arial"/>
-                          <a:ea typeface="微软雅黑"/>
-                        </a:rPr>
-                        <a:t>Gödel P99</a:t>
-                      </a:r>
-                    </a:p>
-                  </a:txBody>
-                  <a:tcPr marL="54864" marR="54864" marT="18288" marB="18288" anchor="ctr">
-                    <a:solidFill>
-                      <a:srgbClr val="113E6A"/>
-                    </a:solidFill>
-                  </a:tcPr>
-                </a:tc>
-              </a:tr>
-              <a:tr h="420624">
-                <a:tc>
-                  <a:txBody>
-                    <a:bodyPr wrap="square"/>
-                    <a:lstStyle/>
-                    <a:p>
-                      <a:pPr algn="l"/>
-                      <a:r>
-                        <a:rPr sz="1200" b="0">
-                          <a:solidFill>
-                            <a:srgbClr val="2E2C2C"/>
-                          </a:solidFill>
-                          <a:latin typeface="Arial"/>
-                          <a:ea typeface="微软雅黑"/>
-                        </a:rPr>
-                        <a:t>s2/w2</a:t>
-                      </a:r>
-                    </a:p>
-                  </a:txBody>
-                  <a:tcPr marL="54864" marR="54864" marT="18288" marB="18288" anchor="ctr">
-                    <a:solidFill>
-                      <a:srgbClr val="F2F4F7"/>
-                    </a:solidFill>
-                  </a:tcPr>
-                </a:tc>
-                <a:tc>
-                  <a:txBody>
-                    <a:bodyPr wrap="square"/>
-                    <a:lstStyle/>
-                    <a:p>
-                      <a:pPr algn="ctr"/>
-                      <a:r>
-                        <a:rPr sz="1200" b="0">
-                          <a:solidFill>
-                            <a:srgbClr val="2E2C2C"/>
-                          </a:solidFill>
-                          <a:latin typeface="Arial"/>
-                          <a:ea typeface="微软雅黑"/>
-                        </a:rPr>
-                        <a:t>331.1</a:t>
-                      </a:r>
-                    </a:p>
-                  </a:txBody>
-                  <a:tcPr marL="54864" marR="54864" marT="18288" marB="18288" anchor="ctr">
-                    <a:solidFill>
-                      <a:srgbClr val="F2F4F7"/>
-                    </a:solidFill>
-                  </a:tcPr>
-                </a:tc>
-                <a:tc>
-                  <a:txBody>
-                    <a:bodyPr wrap="square"/>
-                    <a:lstStyle/>
-                    <a:p>
-                      <a:pPr algn="ctr"/>
-                      <a:r>
-                        <a:rPr sz="1200" b="0">
-                          <a:solidFill>
-                            <a:srgbClr val="2E2C2C"/>
-                          </a:solidFill>
-                          <a:latin typeface="Arial"/>
-                          <a:ea typeface="微软雅黑"/>
-                        </a:rPr>
-                        <a:t>324.7</a:t>
-                      </a:r>
-                    </a:p>
-                  </a:txBody>
-                  <a:tcPr marL="54864" marR="54864" marT="18288" marB="18288" anchor="ctr">
-                    <a:solidFill>
-                      <a:srgbClr val="F2F4F7"/>
-                    </a:solidFill>
-                  </a:tcPr>
-                </a:tc>
-                <a:tc>
-                  <a:txBody>
-                    <a:bodyPr wrap="square"/>
-                    <a:lstStyle/>
-                    <a:p>
-                      <a:pPr algn="ctr"/>
-                      <a:r>
-                        <a:rPr sz="1200" b="0">
-                          <a:solidFill>
-                            <a:srgbClr val="2E2C2C"/>
-                          </a:solidFill>
-                          <a:latin typeface="Arial"/>
-                          <a:ea typeface="微软雅黑"/>
-                        </a:rPr>
-                        <a:t>0.16</a:t>
-                      </a:r>
-                    </a:p>
-                  </a:txBody>
-                  <a:tcPr marL="54864" marR="54864" marT="18288" marB="18288" anchor="ctr">
-                    <a:solidFill>
-                      <a:srgbClr val="F2F4F7"/>
-                    </a:solidFill>
-                  </a:tcPr>
-                </a:tc>
-                <a:tc>
-                  <a:txBody>
-                    <a:bodyPr wrap="square"/>
-                    <a:lstStyle/>
-                    <a:p>
-                      <a:pPr algn="ctr"/>
-                      <a:r>
-                        <a:rPr sz="1200" b="0">
-                          <a:solidFill>
-                            <a:srgbClr val="2E2C2C"/>
-                          </a:solidFill>
-                          <a:latin typeface="Arial"/>
-                          <a:ea typeface="微软雅黑"/>
-                        </a:rPr>
-                        <a:t>0.11</a:t>
-                      </a:r>
-                    </a:p>
-                  </a:txBody>
-                  <a:tcPr marL="54864" marR="54864" marT="18288" marB="18288" anchor="ctr">
-                    <a:solidFill>
-                      <a:srgbClr val="F2F4F7"/>
-                    </a:solidFill>
-                  </a:tcPr>
-                </a:tc>
-              </a:tr>
-              <a:tr h="420624">
-                <a:tc>
-                  <a:txBody>
-                    <a:bodyPr wrap="square"/>
-                    <a:lstStyle/>
-                    <a:p>
-                      <a:pPr algn="l"/>
-                      <a:r>
-                        <a:rPr sz="1200" b="0">
-                          <a:solidFill>
-                            <a:srgbClr val="2E2C2C"/>
-                          </a:solidFill>
-                          <a:latin typeface="Arial"/>
-                          <a:ea typeface="微软雅黑"/>
-                        </a:rPr>
-                        <a:t>s2/w3</a:t>
-                      </a:r>
-                    </a:p>
-                  </a:txBody>
-                  <a:tcPr marL="54864" marR="54864" marT="18288" marB="18288" anchor="ctr">
-                    <a:solidFill>
-                      <a:srgbClr val="FFFFFF"/>
-                    </a:solidFill>
-                  </a:tcPr>
-                </a:tc>
-                <a:tc>
-                  <a:txBody>
-                    <a:bodyPr wrap="square"/>
-                    <a:lstStyle/>
-                    <a:p>
-                      <a:pPr algn="ctr"/>
-                      <a:r>
-                        <a:rPr sz="1200" b="0">
-                          <a:solidFill>
-                            <a:srgbClr val="2E2C2C"/>
-                          </a:solidFill>
-                          <a:latin typeface="Arial"/>
-                          <a:ea typeface="微软雅黑"/>
-                        </a:rPr>
-                        <a:t>352.1</a:t>
-                      </a:r>
-                    </a:p>
-                  </a:txBody>
-                  <a:tcPr marL="54864" marR="54864" marT="18288" marB="18288" anchor="ctr">
-                    <a:solidFill>
-                      <a:srgbClr val="FFFFFF"/>
-                    </a:solidFill>
-                  </a:tcPr>
-                </a:tc>
-                <a:tc>
-                  <a:txBody>
-                    <a:bodyPr wrap="square"/>
-                    <a:lstStyle/>
-                    <a:p>
-                      <a:pPr algn="ctr"/>
-                      <a:r>
-                        <a:rPr sz="1200" b="0">
-                          <a:solidFill>
-                            <a:srgbClr val="2E2C2C"/>
-                          </a:solidFill>
-                          <a:latin typeface="Arial"/>
-                          <a:ea typeface="微软雅黑"/>
-                        </a:rPr>
-                        <a:t>286.5</a:t>
-                      </a:r>
-                    </a:p>
-                  </a:txBody>
-                  <a:tcPr marL="54864" marR="54864" marT="18288" marB="18288" anchor="ctr">
-                    <a:solidFill>
-                      <a:srgbClr val="FFFFFF"/>
-                    </a:solidFill>
-                  </a:tcPr>
-                </a:tc>
-                <a:tc>
-                  <a:txBody>
-                    <a:bodyPr wrap="square"/>
-                    <a:lstStyle/>
-                    <a:p>
-                      <a:pPr algn="ctr"/>
-                      <a:r>
-                        <a:rPr sz="1200" b="0">
-                          <a:solidFill>
-                            <a:srgbClr val="2E2C2C"/>
-                          </a:solidFill>
-                          <a:latin typeface="Arial"/>
-                          <a:ea typeface="微软雅黑"/>
-                        </a:rPr>
-                        <a:t>4.00</a:t>
-                      </a:r>
-                    </a:p>
-                  </a:txBody>
-                  <a:tcPr marL="54864" marR="54864" marT="18288" marB="18288" anchor="ctr">
-                    <a:solidFill>
-                      <a:srgbClr val="FFFFFF"/>
-                    </a:solidFill>
-                  </a:tcPr>
-                </a:tc>
-                <a:tc>
-                  <a:txBody>
-                    <a:bodyPr wrap="square"/>
-                    <a:lstStyle/>
-                    <a:p>
-                      <a:pPr algn="ctr"/>
-                      <a:r>
-                        <a:rPr sz="1200" b="0">
-                          <a:solidFill>
-                            <a:srgbClr val="2E2C2C"/>
-                          </a:solidFill>
-                          <a:latin typeface="Arial"/>
-                          <a:ea typeface="微软雅黑"/>
-                        </a:rPr>
-                        <a:t>23.48</a:t>
-                      </a:r>
-                    </a:p>
-                  </a:txBody>
-                  <a:tcPr marL="54864" marR="54864" marT="18288" marB="18288" anchor="ctr">
-                    <a:solidFill>
-                      <a:srgbClr val="FFFFFF"/>
-                    </a:solidFill>
-                  </a:tcPr>
-                </a:tc>
-              </a:tr>
-              <a:tr h="420624">
-                <a:tc>
-                  <a:txBody>
-                    <a:bodyPr wrap="square"/>
-                    <a:lstStyle/>
-                    <a:p>
-                      <a:pPr algn="l"/>
-                      <a:r>
-                        <a:rPr sz="1200" b="0">
-                          <a:solidFill>
-                            <a:srgbClr val="2E2C2C"/>
-                          </a:solidFill>
-                          <a:latin typeface="Arial"/>
-                          <a:ea typeface="微软雅黑"/>
-                        </a:rPr>
-                        <a:t>s3/w3 inst1</a:t>
-                      </a:r>
-                    </a:p>
-                  </a:txBody>
-                  <a:tcPr marL="54864" marR="54864" marT="18288" marB="18288" anchor="ctr">
-                    <a:solidFill>
-                      <a:srgbClr val="F2F4F7"/>
-                    </a:solidFill>
-                  </a:tcPr>
-                </a:tc>
-                <a:tc>
-                  <a:txBody>
-                    <a:bodyPr wrap="square"/>
-                    <a:lstStyle/>
-                    <a:p>
-                      <a:pPr algn="ctr"/>
-                      <a:r>
-                        <a:rPr sz="1200" b="0">
-                          <a:solidFill>
-                            <a:srgbClr val="2E2C2C"/>
-                          </a:solidFill>
-                          <a:latin typeface="Arial"/>
-                          <a:ea typeface="微软雅黑"/>
-                        </a:rPr>
-                        <a:t>297.6</a:t>
-                      </a:r>
-                    </a:p>
-                  </a:txBody>
-                  <a:tcPr marL="54864" marR="54864" marT="18288" marB="18288" anchor="ctr">
-                    <a:solidFill>
-                      <a:srgbClr val="F2F4F7"/>
-                    </a:solidFill>
-                  </a:tcPr>
-                </a:tc>
-                <a:tc>
-                  <a:txBody>
-                    <a:bodyPr wrap="square"/>
-                    <a:lstStyle/>
-                    <a:p>
-                      <a:pPr algn="ctr"/>
-                      <a:r>
-                        <a:rPr sz="1200" b="0">
-                          <a:solidFill>
-                            <a:srgbClr val="2E2C2C"/>
-                          </a:solidFill>
-                          <a:latin typeface="Arial"/>
-                          <a:ea typeface="微软雅黑"/>
-                        </a:rPr>
-                        <a:t>283.3</a:t>
-                      </a:r>
-                    </a:p>
-                  </a:txBody>
-                  <a:tcPr marL="54864" marR="54864" marT="18288" marB="18288" anchor="ctr">
-                    <a:solidFill>
-                      <a:srgbClr val="F2F4F7"/>
-                    </a:solidFill>
-                  </a:tcPr>
-                </a:tc>
-                <a:tc>
-                  <a:txBody>
-                    <a:bodyPr wrap="square"/>
-                    <a:lstStyle/>
-                    <a:p>
-                      <a:pPr algn="ctr"/>
-                      <a:r>
-                        <a:rPr sz="1200" b="0">
-                          <a:solidFill>
-                            <a:srgbClr val="2E2C2C"/>
-                          </a:solidFill>
-                          <a:latin typeface="Arial"/>
-                          <a:ea typeface="微软雅黑"/>
-                        </a:rPr>
-                        <a:t>16.22</a:t>
-                      </a:r>
-                    </a:p>
-                  </a:txBody>
-                  <a:tcPr marL="54864" marR="54864" marT="18288" marB="18288" anchor="ctr">
-                    <a:solidFill>
-                      <a:srgbClr val="F2F4F7"/>
-                    </a:solidFill>
-                  </a:tcPr>
-                </a:tc>
-                <a:tc>
-                  <a:txBody>
-                    <a:bodyPr wrap="square"/>
-                    <a:lstStyle/>
-                    <a:p>
-                      <a:pPr algn="ctr"/>
-                      <a:r>
-                        <a:rPr sz="1200" b="0">
-                          <a:solidFill>
-                            <a:srgbClr val="2E2C2C"/>
-                          </a:solidFill>
-                          <a:latin typeface="Arial"/>
-                          <a:ea typeface="微软雅黑"/>
-                        </a:rPr>
-                        <a:t>32.57</a:t>
-                      </a:r>
-                    </a:p>
-                  </a:txBody>
-                  <a:tcPr marL="54864" marR="54864" marT="18288" marB="18288" anchor="ctr">
-                    <a:solidFill>
-                      <a:srgbClr val="F2F4F7"/>
-                    </a:solidFill>
-                  </a:tcPr>
-                </a:tc>
-              </a:tr>
-              <a:tr h="420624">
-                <a:tc>
-                  <a:txBody>
-                    <a:bodyPr wrap="square"/>
-                    <a:lstStyle/>
-                    <a:p>
-                      <a:pPr algn="l"/>
-                      <a:r>
-                        <a:rPr sz="1200" b="0">
-                          <a:solidFill>
-                            <a:srgbClr val="2E2C2C"/>
-                          </a:solidFill>
-                          <a:latin typeface="Arial"/>
-                          <a:ea typeface="微软雅黑"/>
-                        </a:rPr>
-                        <a:t>s3/w3 inst3</a:t>
-                      </a:r>
-                    </a:p>
-                  </a:txBody>
-                  <a:tcPr marL="54864" marR="54864" marT="18288" marB="18288" anchor="ctr">
-                    <a:solidFill>
-                      <a:srgbClr val="FFFFFF"/>
-                    </a:solidFill>
-                  </a:tcPr>
-                </a:tc>
-                <a:tc>
-                  <a:txBody>
-                    <a:bodyPr wrap="square"/>
-                    <a:lstStyle/>
-                    <a:p>
-                      <a:pPr algn="ctr"/>
-                      <a:r>
-                        <a:rPr sz="1200" b="0">
-                          <a:solidFill>
-                            <a:srgbClr val="2E2C2C"/>
-                          </a:solidFill>
-                          <a:latin typeface="Arial"/>
-                          <a:ea typeface="微软雅黑"/>
-                        </a:rPr>
-                        <a:t>349.7</a:t>
-                      </a:r>
-                    </a:p>
-                  </a:txBody>
-                  <a:tcPr marL="54864" marR="54864" marT="18288" marB="18288" anchor="ctr">
-                    <a:solidFill>
-                      <a:srgbClr val="FFFFFF"/>
-                    </a:solidFill>
-                  </a:tcPr>
-                </a:tc>
-                <a:tc>
-                  <a:txBody>
-                    <a:bodyPr wrap="square"/>
-                    <a:lstStyle/>
-                    <a:p>
-                      <a:pPr algn="ctr"/>
-                      <a:r>
-                        <a:rPr sz="1200" b="0">
-                          <a:solidFill>
-                            <a:srgbClr val="2E2C2C"/>
-                          </a:solidFill>
-                          <a:latin typeface="Arial"/>
-                          <a:ea typeface="微软雅黑"/>
-                        </a:rPr>
-                        <a:t>287.4</a:t>
-                      </a:r>
-                    </a:p>
-                  </a:txBody>
-                  <a:tcPr marL="54864" marR="54864" marT="18288" marB="18288" anchor="ctr">
-                    <a:solidFill>
-                      <a:srgbClr val="FFFFFF"/>
-                    </a:solidFill>
-                  </a:tcPr>
-                </a:tc>
-                <a:tc>
-                  <a:txBody>
-                    <a:bodyPr wrap="square"/>
-                    <a:lstStyle/>
-                    <a:p>
-                      <a:pPr algn="ctr"/>
-                      <a:r>
-                        <a:rPr sz="1200" b="0">
-                          <a:solidFill>
-                            <a:srgbClr val="2E2C2C"/>
-                          </a:solidFill>
-                          <a:latin typeface="Arial"/>
-                          <a:ea typeface="微软雅黑"/>
-                        </a:rPr>
-                        <a:t>0.13</a:t>
-                      </a:r>
-                    </a:p>
-                  </a:txBody>
-                  <a:tcPr marL="54864" marR="54864" marT="18288" marB="18288" anchor="ctr">
-                    <a:solidFill>
-                      <a:srgbClr val="FFFFFF"/>
-                    </a:solidFill>
-                  </a:tcPr>
-                </a:tc>
-                <a:tc>
-                  <a:txBody>
-                    <a:bodyPr wrap="square"/>
-                    <a:lstStyle/>
-                    <a:p>
-                      <a:pPr algn="ctr"/>
-                      <a:r>
-                        <a:rPr sz="1200" b="0">
-                          <a:solidFill>
-                            <a:srgbClr val="2E2C2C"/>
-                          </a:solidFill>
-                          <a:latin typeface="Arial"/>
-                          <a:ea typeface="微软雅黑"/>
-                        </a:rPr>
-                        <a:t>0.15</a:t>
-                      </a:r>
-                    </a:p>
-                  </a:txBody>
-                  <a:tcPr marL="54864" marR="54864" marT="18288" marB="18288" anchor="ctr">
-                    <a:solidFill>
-                      <a:srgbClr val="FFFFFF"/>
-                    </a:solidFill>
-                  </a:tcPr>
-                </a:tc>
-              </a:tr>
-              <a:tr h="420624">
-                <a:tc>
-                  <a:txBody>
-                    <a:bodyPr wrap="square"/>
-                    <a:lstStyle/>
-                    <a:p>
-                      <a:pPr algn="l"/>
-                      <a:r>
-                        <a:rPr sz="1200" b="0">
-                          <a:solidFill>
-                            <a:srgbClr val="2E2C2C"/>
-                          </a:solidFill>
-                          <a:latin typeface="Arial"/>
-                          <a:ea typeface="微软雅黑"/>
-                        </a:rPr>
-                        <a:t>s4/w3 inst3</a:t>
-                      </a:r>
-                    </a:p>
-                  </a:txBody>
-                  <a:tcPr marL="54864" marR="54864" marT="18288" marB="18288" anchor="ctr">
-                    <a:solidFill>
-                      <a:srgbClr val="F2F4F7"/>
-                    </a:solidFill>
-                  </a:tcPr>
-                </a:tc>
-                <a:tc>
-                  <a:txBody>
-                    <a:bodyPr wrap="square"/>
-                    <a:lstStyle/>
-                    <a:p>
-                      <a:pPr algn="ctr"/>
-                      <a:r>
-                        <a:rPr sz="1200" b="0">
-                          <a:solidFill>
-                            <a:srgbClr val="2E2C2C"/>
-                          </a:solidFill>
-                          <a:latin typeface="Arial"/>
-                          <a:ea typeface="微软雅黑"/>
-                        </a:rPr>
-                        <a:t>296.7</a:t>
-                      </a:r>
-                    </a:p>
-                  </a:txBody>
-                  <a:tcPr marL="54864" marR="54864" marT="18288" marB="18288" anchor="ctr">
-                    <a:solidFill>
-                      <a:srgbClr val="F2F4F7"/>
-                    </a:solidFill>
-                  </a:tcPr>
-                </a:tc>
-                <a:tc>
-                  <a:txBody>
-                    <a:bodyPr wrap="square"/>
-                    <a:lstStyle/>
-                    <a:p>
-                      <a:pPr algn="ctr"/>
-                      <a:r>
-                        <a:rPr sz="1200" b="0">
-                          <a:solidFill>
-                            <a:srgbClr val="2E2C2C"/>
-                          </a:solidFill>
-                          <a:latin typeface="Arial"/>
-                          <a:ea typeface="微软雅黑"/>
-                        </a:rPr>
-                        <a:t>280.9</a:t>
-                      </a:r>
-                    </a:p>
-                  </a:txBody>
-                  <a:tcPr marL="54864" marR="54864" marT="18288" marB="18288" anchor="ctr">
-                    <a:solidFill>
-                      <a:srgbClr val="F2F4F7"/>
-                    </a:solidFill>
-                  </a:tcPr>
-                </a:tc>
-                <a:tc>
-                  <a:txBody>
-                    <a:bodyPr wrap="square"/>
-                    <a:lstStyle/>
-                    <a:p>
-                      <a:pPr algn="ctr"/>
-                      <a:r>
-                        <a:rPr sz="1200" b="0">
-                          <a:solidFill>
-                            <a:srgbClr val="2E2C2C"/>
-                          </a:solidFill>
-                          <a:latin typeface="Arial"/>
-                          <a:ea typeface="微软雅黑"/>
-                        </a:rPr>
-                        <a:t>0.19</a:t>
-                      </a:r>
-                    </a:p>
-                  </a:txBody>
-                  <a:tcPr marL="54864" marR="54864" marT="18288" marB="18288" anchor="ctr">
-                    <a:solidFill>
-                      <a:srgbClr val="F2F4F7"/>
-                    </a:solidFill>
-                  </a:tcPr>
-                </a:tc>
-                <a:tc>
-                  <a:txBody>
-                    <a:bodyPr wrap="square"/>
-                    <a:lstStyle/>
-                    <a:p>
-                      <a:pPr algn="ctr"/>
-                      <a:r>
-                        <a:rPr sz="1200" b="0">
-                          <a:solidFill>
-                            <a:srgbClr val="2E2C2C"/>
-                          </a:solidFill>
-                          <a:latin typeface="Arial"/>
-                          <a:ea typeface="微软雅黑"/>
-                        </a:rPr>
-                        <a:t>0.28</a:t>
-                      </a:r>
-                    </a:p>
-                  </a:txBody>
-                  <a:tcPr marL="54864" marR="54864" marT="18288" marB="18288" anchor="ctr">
-                    <a:solidFill>
-                      <a:srgbClr val="F2F4F7"/>
-                    </a:solidFill>
-                  </a:tcPr>
-                </a:tc>
-              </a:tr>
-              <a:tr h="420624">
-                <a:tc>
-                  <a:txBody>
-                    <a:bodyPr wrap="square"/>
-                    <a:lstStyle/>
-                    <a:p>
-                      <a:pPr algn="l"/>
-                      <a:r>
-                        <a:rPr sz="1200" b="0">
-                          <a:solidFill>
-                            <a:srgbClr val="2E2C2C"/>
-                          </a:solidFill>
-                          <a:latin typeface="Arial"/>
-                          <a:ea typeface="微软雅黑"/>
-                        </a:rPr>
-                        <a:t>s4/w7 inst3</a:t>
-                      </a:r>
-                    </a:p>
-                  </a:txBody>
-                  <a:tcPr marL="54864" marR="54864" marT="18288" marB="18288" anchor="ctr">
-                    <a:solidFill>
-                      <a:srgbClr val="FFFFFF"/>
-                    </a:solidFill>
-                  </a:tcPr>
-                </a:tc>
-                <a:tc>
-                  <a:txBody>
-                    <a:bodyPr wrap="square"/>
-                    <a:lstStyle/>
-                    <a:p>
-                      <a:pPr algn="ctr"/>
-                      <a:r>
-                        <a:rPr sz="1200" b="0">
-                          <a:solidFill>
-                            <a:srgbClr val="2E2C2C"/>
-                          </a:solidFill>
-                          <a:latin typeface="Arial"/>
-                          <a:ea typeface="微软雅黑"/>
-                        </a:rPr>
-                        <a:t>271.7</a:t>
-                      </a:r>
-                    </a:p>
-                  </a:txBody>
-                  <a:tcPr marL="54864" marR="54864" marT="18288" marB="18288" anchor="ctr">
-                    <a:solidFill>
-                      <a:srgbClr val="FFFFFF"/>
-                    </a:solidFill>
-                  </a:tcPr>
-                </a:tc>
-                <a:tc>
-                  <a:txBody>
-                    <a:bodyPr wrap="square"/>
-                    <a:lstStyle/>
-                    <a:p>
-                      <a:pPr algn="ctr"/>
-                      <a:r>
-                        <a:rPr sz="1200" b="0">
-                          <a:solidFill>
-                            <a:srgbClr val="2E2C2C"/>
-                          </a:solidFill>
-                          <a:latin typeface="Arial"/>
-                          <a:ea typeface="微软雅黑"/>
-                        </a:rPr>
-                        <a:t>271.7</a:t>
-                      </a:r>
-                    </a:p>
-                  </a:txBody>
-                  <a:tcPr marL="54864" marR="54864" marT="18288" marB="18288" anchor="ctr">
-                    <a:solidFill>
-                      <a:srgbClr val="FFFFFF"/>
-                    </a:solidFill>
-                  </a:tcPr>
-                </a:tc>
-                <a:tc>
-                  <a:txBody>
-                    <a:bodyPr wrap="square"/>
-                    <a:lstStyle/>
-                    <a:p>
-                      <a:pPr algn="ctr"/>
-                      <a:r>
-                        <a:rPr sz="1200" b="0">
-                          <a:solidFill>
-                            <a:srgbClr val="2E2C2C"/>
-                          </a:solidFill>
-                          <a:latin typeface="Arial"/>
-                          <a:ea typeface="微软雅黑"/>
-                        </a:rPr>
-                        <a:t>0.06</a:t>
-                      </a:r>
-                    </a:p>
-                  </a:txBody>
-                  <a:tcPr marL="54864" marR="54864" marT="18288" marB="18288" anchor="ctr">
-                    <a:solidFill>
-                      <a:srgbClr val="FFFFFF"/>
-                    </a:solidFill>
-                  </a:tcPr>
-                </a:tc>
-                <a:tc>
-                  <a:txBody>
-                    <a:bodyPr wrap="square"/>
-                    <a:lstStyle/>
-                    <a:p>
-                      <a:pPr algn="ctr"/>
-                      <a:r>
-                        <a:rPr sz="1200" b="0">
-                          <a:solidFill>
-                            <a:srgbClr val="2E2C2C"/>
-                          </a:solidFill>
-                          <a:latin typeface="Arial"/>
-                          <a:ea typeface="微软雅黑"/>
-                        </a:rPr>
-                        <a:t>0.06</a:t>
-                      </a:r>
-                    </a:p>
-                  </a:txBody>
-                  <a:tcPr marL="54864" marR="54864" marT="18288" marB="18288" anchor="ctr">
-                    <a:solidFill>
-                      <a:srgbClr val="FFFFFF"/>
-                    </a:solidFill>
-                  </a:tcPr>
-                </a:tc>
-              </a:tr>
-            </a:tbl>
-          </a:graphicData>
-        </a:graphic>
-      </p:graphicFrame>
-      <p:sp>
-        <p:nvSpPr>
-          <p:cNvPr id="9005" name="TextBox 9004"/>
-          <p:cNvSpPr txBox="1"/>
-          <p:nvPr/>
-        </p:nvSpPr>
-        <p:spPr>
-          <a:xfrm>
-            <a:off x="566928" y="5074920"/>
-            <a:ext cx="10972800" cy="914400"/>
-          </a:xfrm>
-          <a:prstGeom prst="rect">
-            <a:avLst/>
-          </a:prstGeom>
-          <a:noFill/>
-        </p:spPr>
-        <p:txBody>
-          <a:bodyPr wrap="square" anchor="t" lIns="0" rIns="0" tIns="0" bIns="0">
-            <a:spAutoFit/>
-          </a:bodyPr>
-          <a:lstStyle/>
-          <a:p>
-            <a:pPr algn="l">
-              <a:lnSpc>
-                <a:spcPct val="115000"/>
-              </a:lnSpc>
-            </a:pPr>
-            <a:r>
-              <a:rPr sz="1300" b="0">
-                <a:solidFill>
-                  <a:srgbClr val="2E2C2C"/>
-                </a:solidFill>
-                <a:latin typeface="Arial"/>
-                <a:ea typeface="微软雅黑"/>
-              </a:rPr>
-              <a:t>▪  完整 16 行见论文表 6-6/6-7/6-8</a:t>
-            </a:r>
-          </a:p>
-          <a:p>
-            <a:pPr algn="l">
-              <a:lnSpc>
-                <a:spcPct val="115000"/>
-              </a:lnSpc>
-              <a:spcBef>
-                <a:spcPts val="600"/>
-              </a:spcBef>
-            </a:pPr>
-            <a:r>
-              <a:rPr sz="1300" b="0">
-                <a:solidFill>
-                  <a:srgbClr val="2E2C2C"/>
-                </a:solidFill>
-                <a:latin typeface="Arial"/>
-                <a:ea typeface="微软雅黑"/>
-              </a:rPr>
-              <a:t>▪  数据目录：results/compare/</a:t>
-            </a:r>
-          </a:p>
-          <a:p>
-            <a:pPr algn="l">
-              <a:lnSpc>
-                <a:spcPct val="115000"/>
-              </a:lnSpc>
-              <a:spcBef>
-                <a:spcPts val="600"/>
-              </a:spcBef>
-            </a:pPr>
-            <a:r>
-              <a:rPr sz="1300" b="0">
-                <a:solidFill>
-                  <a:srgbClr val="2E2C2C"/>
-                </a:solidFill>
-                <a:latin typeface="Arial"/>
-                <a:ea typeface="微软雅黑"/>
-              </a:rPr>
-              <a:t>▪  统计口径：n=3 中位数</a:t>
-            </a:r>
-          </a:p>
-        </p:txBody>
-      </p:sp>
-      <p:sp>
-        <p:nvSpPr>
-          <p:cNvPr id="9006" name="TextBox 9005"/>
-          <p:cNvSpPr txBox="1"/>
-          <p:nvPr/>
-        </p:nvSpPr>
-        <p:spPr>
-          <a:xfrm>
-            <a:off x="10780776" y="6345936"/>
-            <a:ext cx="850392" cy="219456"/>
-          </a:xfrm>
-          <a:prstGeom prst="rect">
-            <a:avLst/>
-          </a:prstGeom>
-          <a:noFill/>
-        </p:spPr>
-        <p:txBody>
-          <a:bodyPr wrap="square" anchor="t" lIns="0" rIns="0" tIns="0" bIns="0">
-            <a:spAutoFit/>
-          </a:bodyPr>
-          <a:lstStyle/>
-          <a:p>
-            <a:pPr algn="r"/>
-            <a:r>
-              <a:rPr sz="950" b="0">
-                <a:solidFill>
-                  <a:srgbClr val="636363"/>
-                </a:solidFill>
-                <a:latin typeface="Arial"/>
-                <a:ea typeface="微软雅黑"/>
-              </a:rPr>
-              <a:t>B1</a:t>
-            </a:r>
-          </a:p>
-        </p:txBody>
-      </p:sp>
-    </p:spTree>
-  </p:cSld>
-  <p:clrMapOvr>
-    <a:masterClrMapping/>
-  </p:clrMapOvr>
-</p:sld>
-</file>
-
-<file path=ppt/slides/slide26.xml><?xml version="1.0" encoding="utf-8"?>
-<p:sld xmlns:a="http://schemas.openxmlformats.org/drawingml/2006/main" xmlns:p="http://schemas.openxmlformats.org/presentationml/2006/main" xmlns:r="http://schemas.openxmlformats.org/officeDocument/2006/relationships">
-  <p:cSld>
-    <p:bg>
-      <p:bgPr>
-        <a:solidFill>
-          <a:srgbClr val="FFFFFF"/>
-        </a:solidFill>
-        <a:effectLst/>
-      </p:bgPr>
-    </p:bg>
-    <p:spTree>
-      <p:nvGrpSpPr>
-        <p:cNvPr id="1" name=""/>
-        <p:cNvGrpSpPr/>
-        <p:nvPr/>
-      </p:nvGrpSpPr>
-      <p:grpSpPr/>
-      <p:sp>
-        <p:nvSpPr>
-          <p:cNvPr id="9000" name="Freeform 5"/>
-          <p:cNvSpPr/>
-          <p:nvPr/>
-        </p:nvSpPr>
-        <p:spPr>
-          <a:xfrm>
-            <a:off x="182880" y="274320"/>
-            <a:ext cx="310896" cy="402336"/>
-          </a:xfrm>
-          <a:custGeom>
-            <a:avLst/>
-            <a:gdLst/>
-            <a:ahLst/>
-            <a:cxnLst>
-              <a:cxn ang="0">
-                <a:pos x="2147483647" y="2147483647"/>
-              </a:cxn>
-              <a:cxn ang="0">
-                <a:pos x="2147483647" y="2147483647"/>
-              </a:cxn>
-              <a:cxn ang="0">
-                <a:pos x="2147483647" y="2147483647"/>
-              </a:cxn>
-              <a:cxn ang="0">
-                <a:pos x="2147483647" y="2147483647"/>
-              </a:cxn>
-              <a:cxn ang="0">
-                <a:pos x="2147483647" y="2147483647"/>
-              </a:cxn>
-              <a:cxn ang="0">
-                <a:pos x="2147483647" y="2147483647"/>
-              </a:cxn>
-              <a:cxn ang="0">
-                <a:pos x="2147483647" y="2147483647"/>
-              </a:cxn>
-              <a:cxn ang="0">
-                <a:pos x="2147483647" y="2147483647"/>
-              </a:cxn>
-              <a:cxn ang="0">
-                <a:pos x="2147483647" y="0"/>
-              </a:cxn>
-              <a:cxn ang="0">
-                <a:pos x="2147483647" y="2147483647"/>
-              </a:cxn>
-              <a:cxn ang="0">
-                <a:pos x="2147483647" y="2147483647"/>
-              </a:cxn>
-              <a:cxn ang="0">
-                <a:pos x="2147483647" y="2147483647"/>
-              </a:cxn>
-              <a:cxn ang="0">
-                <a:pos x="2147483647" y="2147483647"/>
-              </a:cxn>
-              <a:cxn ang="0">
-                <a:pos x="2147483647" y="2147483647"/>
-              </a:cxn>
-              <a:cxn ang="0">
-                <a:pos x="2147483647" y="2147483647"/>
-              </a:cxn>
-              <a:cxn ang="0">
-                <a:pos x="2147483647" y="2147483647"/>
-              </a:cxn>
-              <a:cxn ang="0">
-                <a:pos x="2147483647" y="2147483647"/>
-              </a:cxn>
-              <a:cxn ang="0">
-                <a:pos x="2147483647" y="2147483647"/>
-              </a:cxn>
-              <a:cxn ang="0">
-                <a:pos x="2147483647" y="2147483647"/>
-              </a:cxn>
-              <a:cxn ang="0">
-                <a:pos x="0" y="2147483647"/>
-              </a:cxn>
-              <a:cxn ang="0">
-                <a:pos x="2147483647" y="2147483647"/>
-              </a:cxn>
-            </a:cxnLst>
-            <a:rect l="0" t="0" r="0" b="0"/>
-            <a:pathLst>
-              <a:path w="574" h="681">
-                <a:moveTo>
-                  <a:pt x="120" y="441"/>
-                </a:moveTo>
-                <a:cubicBezTo>
-                  <a:pt x="153" y="441"/>
-                  <a:pt x="183" y="454"/>
-                  <a:pt x="205" y="476"/>
-                </a:cubicBezTo>
-                <a:lnTo>
-                  <a:pt x="389" y="329"/>
-                </a:lnTo>
-                <a:cubicBezTo>
-                  <a:pt x="383" y="317"/>
-                  <a:pt x="380" y="303"/>
-                  <a:pt x="380" y="289"/>
-                </a:cubicBezTo>
-                <a:cubicBezTo>
-                  <a:pt x="380" y="271"/>
-                  <a:pt x="384" y="255"/>
-                  <a:pt x="392" y="241"/>
-                </a:cubicBezTo>
-                <a:lnTo>
-                  <a:pt x="270" y="138"/>
-                </a:lnTo>
-                <a:cubicBezTo>
-                  <a:pt x="256" y="151"/>
-                  <a:pt x="237" y="159"/>
-                  <a:pt x="217" y="159"/>
-                </a:cubicBezTo>
-                <a:cubicBezTo>
-                  <a:pt x="173" y="159"/>
-                  <a:pt x="137" y="123"/>
-                  <a:pt x="137" y="79"/>
-                </a:cubicBezTo>
-                <a:cubicBezTo>
-                  <a:pt x="137" y="36"/>
-                  <a:pt x="173" y="0"/>
-                  <a:pt x="217" y="0"/>
-                </a:cubicBezTo>
-                <a:cubicBezTo>
-                  <a:pt x="260" y="0"/>
-                  <a:pt x="296" y="36"/>
-                  <a:pt x="296" y="79"/>
-                </a:cubicBezTo>
-                <a:cubicBezTo>
-                  <a:pt x="296" y="91"/>
-                  <a:pt x="293" y="103"/>
-                  <a:pt x="289" y="113"/>
-                </a:cubicBezTo>
-                <a:lnTo>
-                  <a:pt x="412" y="217"/>
-                </a:lnTo>
-                <a:cubicBezTo>
-                  <a:pt x="429" y="201"/>
-                  <a:pt x="452" y="192"/>
-                  <a:pt x="477" y="192"/>
-                </a:cubicBezTo>
-                <a:cubicBezTo>
-                  <a:pt x="530" y="192"/>
-                  <a:pt x="574" y="235"/>
-                  <a:pt x="574" y="289"/>
-                </a:cubicBezTo>
-                <a:cubicBezTo>
-                  <a:pt x="574" y="342"/>
-                  <a:pt x="530" y="386"/>
-                  <a:pt x="477" y="386"/>
-                </a:cubicBezTo>
-                <a:cubicBezTo>
-                  <a:pt x="449" y="386"/>
-                  <a:pt x="424" y="374"/>
-                  <a:pt x="406" y="355"/>
-                </a:cubicBezTo>
-                <a:lnTo>
-                  <a:pt x="224" y="501"/>
-                </a:lnTo>
-                <a:cubicBezTo>
-                  <a:pt x="234" y="518"/>
-                  <a:pt x="240" y="539"/>
-                  <a:pt x="240" y="561"/>
-                </a:cubicBezTo>
-                <a:cubicBezTo>
-                  <a:pt x="240" y="627"/>
-                  <a:pt x="186" y="681"/>
-                  <a:pt x="120" y="681"/>
-                </a:cubicBezTo>
-                <a:cubicBezTo>
-                  <a:pt x="54" y="681"/>
-                  <a:pt x="0" y="627"/>
-                  <a:pt x="0" y="561"/>
-                </a:cubicBezTo>
-                <a:cubicBezTo>
-                  <a:pt x="0" y="495"/>
-                  <a:pt x="54" y="441"/>
-                  <a:pt x="120" y="441"/>
-                </a:cubicBezTo>
-                <a:close/>
-              </a:path>
-            </a:pathLst>
-          </a:custGeom>
-          <a:solidFill>
-            <a:srgbClr val="113E6A"/>
-          </a:solidFill>
-          <a:ln w="9525">
-            <a:noFill/>
-          </a:ln>
-        </p:spPr>
-        <p:txBody>
-          <a:bodyPr/>
-          <a:lstStyle/>
-          <a:p>
-            <a:endParaRPr lang="zh-CN" altLang="en-US"/>
-          </a:p>
-        </p:txBody>
-      </p:sp>
-      <p:pic>
-        <p:nvPicPr>
-          <p:cNvPr id="9001" name="Picture 9000" descr="beihang-logo-navy.png"/>
-          <p:cNvPicPr>
-            <a:picLocks noChangeAspect="1"/>
-          </p:cNvPicPr>
-          <p:nvPr/>
-        </p:nvPicPr>
-        <p:blipFill>
-          <a:blip r:embed="rId2"/>
-          <a:stretch>
-            <a:fillRect/>
-          </a:stretch>
-        </p:blipFill>
-        <p:spPr>
-          <a:xfrm>
-            <a:off x="9336024" y="91665"/>
-            <a:ext cx="2642616" cy="502469"/>
-          </a:xfrm>
-          <a:prstGeom prst="rect">
-            <a:avLst/>
-          </a:prstGeom>
-        </p:spPr>
-      </p:pic>
-      <p:sp>
-        <p:nvSpPr>
-          <p:cNvPr id="9002" name="TextBox 9001"/>
-          <p:cNvSpPr txBox="1"/>
-          <p:nvPr/>
-        </p:nvSpPr>
-        <p:spPr>
-          <a:xfrm>
-            <a:off x="566928" y="155448"/>
-            <a:ext cx="8549640" cy="621792"/>
-          </a:xfrm>
-          <a:prstGeom prst="rect">
-            <a:avLst/>
-          </a:prstGeom>
-          <a:noFill/>
-        </p:spPr>
-        <p:txBody>
-          <a:bodyPr wrap="square" anchor="ctr" lIns="0" rIns="0" tIns="0" bIns="0">
-            <a:spAutoFit/>
-          </a:bodyPr>
-          <a:lstStyle/>
-          <a:p>
-            <a:pPr algn="l">
-              <a:lnSpc>
-                <a:spcPct val="100000"/>
-              </a:lnSpc>
-            </a:pPr>
-            <a:r>
-              <a:rPr sz="3000" b="1">
-                <a:solidFill>
-                  <a:srgbClr val="113E6A"/>
-                </a:solidFill>
-                <a:latin typeface="Arial"/>
-                <a:ea typeface="微软雅黑"/>
-              </a:rPr>
-              <a:t>6 个指标的精确口径与来源</a:t>
-            </a:r>
-          </a:p>
-        </p:txBody>
-      </p:sp>
-      <p:sp>
-        <p:nvSpPr>
-          <p:cNvPr id="9003" name="TextBox 9002"/>
-          <p:cNvSpPr txBox="1"/>
-          <p:nvPr/>
-        </p:nvSpPr>
-        <p:spPr>
-          <a:xfrm>
-            <a:off x="566928" y="1261872"/>
-            <a:ext cx="10881360" cy="438912"/>
-          </a:xfrm>
-          <a:prstGeom prst="rect">
-            <a:avLst/>
-          </a:prstGeom>
-          <a:noFill/>
-        </p:spPr>
-        <p:txBody>
-          <a:bodyPr wrap="square" anchor="ctr" lIns="0" rIns="0" tIns="0" bIns="0">
-            <a:spAutoFit/>
-          </a:bodyPr>
-          <a:lstStyle/>
-          <a:p>
-            <a:pPr algn="l">
-              <a:lnSpc>
-                <a:spcPct val="110000"/>
-              </a:lnSpc>
-            </a:pPr>
-            <a:r>
-              <a:rPr sz="1800" b="1">
-                <a:solidFill>
-                  <a:srgbClr val="0070C0"/>
-                </a:solidFill>
-                <a:latin typeface="Arial"/>
-                <a:ea typeface="微软雅黑"/>
-              </a:rPr>
-              <a:t>定义、聚合方式与对应的可复核字段</a:t>
-            </a:r>
-          </a:p>
-        </p:txBody>
-      </p:sp>
-      <p:graphicFrame>
-        <p:nvGraphicFramePr>
-          <p:cNvPr id="9004" name="Table 9003"/>
-          <p:cNvGraphicFramePr>
-            <a:graphicFrameLocks noGrp="1"/>
-          </p:cNvGraphicFramePr>
-          <p:nvPr/>
-        </p:nvGraphicFramePr>
-        <p:xfrm>
-          <a:off x="566928" y="1828800"/>
-          <a:ext cx="11064240" cy="2944368"/>
-        </p:xfrm>
-        <a:graphic>
-          <a:graphicData uri="http://schemas.openxmlformats.org/drawingml/2006/table">
-            <a:tbl>
-              <a:tblPr firstRow="1" bandRow="1">
-                <a:tableStyleId>{5C22544A-7EE6-4342-B048-85BDC9FD1C3A}</a:tableStyleId>
-              </a:tblPr>
-              <a:tblGrid>
-                <a:gridCol w="3688080"/>
-                <a:gridCol w="3688080"/>
-                <a:gridCol w="3688080"/>
-              </a:tblGrid>
-              <a:tr h="420624">
-                <a:tc>
-                  <a:txBody>
-                    <a:bodyPr wrap="square"/>
-                    <a:lstStyle/>
-                    <a:p>
-                      <a:pPr algn="l"/>
-                      <a:r>
-                        <a:rPr sz="1200" b="1">
-                          <a:solidFill>
-                            <a:srgbClr val="FFFFFF"/>
-                          </a:solidFill>
-                          <a:latin typeface="Arial"/>
-                          <a:ea typeface="微软雅黑"/>
-                        </a:rPr>
-                        <a:t>指标</a:t>
-                      </a:r>
-                    </a:p>
-                  </a:txBody>
-                  <a:tcPr marL="54864" marR="54864" marT="18288" marB="18288" anchor="ctr">
-                    <a:solidFill>
-                      <a:srgbClr val="113E6A"/>
-                    </a:solidFill>
-                  </a:tcPr>
-                </a:tc>
-                <a:tc>
-                  <a:txBody>
-                    <a:bodyPr wrap="square"/>
-                    <a:lstStyle/>
-                    <a:p>
-                      <a:pPr algn="ctr"/>
-                      <a:r>
-                        <a:rPr sz="1200" b="1">
-                          <a:solidFill>
-                            <a:srgbClr val="FFFFFF"/>
-                          </a:solidFill>
-                          <a:latin typeface="Arial"/>
-                          <a:ea typeface="微软雅黑"/>
-                        </a:rPr>
-                        <a:t>字段 / 定义</a:t>
-                      </a:r>
-                    </a:p>
-                  </a:txBody>
-                  <a:tcPr marL="54864" marR="54864" marT="18288" marB="18288" anchor="ctr">
-                    <a:solidFill>
-                      <a:srgbClr val="113E6A"/>
-                    </a:solidFill>
-                  </a:tcPr>
-                </a:tc>
-                <a:tc>
-                  <a:txBody>
-                    <a:bodyPr wrap="square"/>
-                    <a:lstStyle/>
-                    <a:p>
-                      <a:pPr algn="ctr"/>
-                      <a:r>
-                        <a:rPr sz="1200" b="1">
-                          <a:solidFill>
-                            <a:srgbClr val="FFFFFF"/>
-                          </a:solidFill>
-                          <a:latin typeface="Arial"/>
-                          <a:ea typeface="微软雅黑"/>
-                        </a:rPr>
-                        <a:t>聚合</a:t>
-                      </a:r>
-                    </a:p>
-                  </a:txBody>
-                  <a:tcPr marL="54864" marR="54864" marT="18288" marB="18288" anchor="ctr">
-                    <a:solidFill>
-                      <a:srgbClr val="113E6A"/>
-                    </a:solidFill>
-                  </a:tcPr>
-                </a:tc>
-              </a:tr>
-              <a:tr h="420624">
-                <a:tc>
-                  <a:txBody>
-                    <a:bodyPr wrap="square"/>
-                    <a:lstStyle/>
-                    <a:p>
-                      <a:pPr algn="l"/>
-                      <a:r>
-                        <a:rPr sz="1200" b="0">
-                          <a:solidFill>
-                            <a:srgbClr val="2E2C2C"/>
-                          </a:solidFill>
-                          <a:latin typeface="Arial"/>
-                          <a:ea typeface="微软雅黑"/>
-                        </a:rPr>
-                        <a:t>有效吞吐</a:t>
-                      </a:r>
-                    </a:p>
-                  </a:txBody>
-                  <a:tcPr marL="54864" marR="54864" marT="18288" marB="18288" anchor="ctr">
-                    <a:solidFill>
-                      <a:srgbClr val="F2F4F7"/>
-                    </a:solidFill>
-                  </a:tcPr>
-                </a:tc>
-                <a:tc>
-                  <a:txBody>
-                    <a:bodyPr wrap="square"/>
-                    <a:lstStyle/>
-                    <a:p>
-                      <a:pPr algn="ctr"/>
-                      <a:r>
-                        <a:rPr sz="1200" b="0">
-                          <a:solidFill>
-                            <a:srgbClr val="2E2C2C"/>
-                          </a:solidFill>
-                          <a:latin typeface="Arial"/>
-                          <a:ea typeface="微软雅黑"/>
-                        </a:rPr>
-                        <a:t>名义工作量 ÷ metadata.duration</a:t>
-                      </a:r>
-                    </a:p>
-                  </a:txBody>
-                  <a:tcPr marL="54864" marR="54864" marT="18288" marB="18288" anchor="ctr">
-                    <a:solidFill>
-                      <a:srgbClr val="F2F4F7"/>
-                    </a:solidFill>
-                  </a:tcPr>
-                </a:tc>
-                <a:tc>
-                  <a:txBody>
-                    <a:bodyPr wrap="square"/>
-                    <a:lstStyle/>
-                    <a:p>
-                      <a:pPr algn="ctr"/>
-                      <a:r>
-                        <a:rPr sz="1200" b="0">
-                          <a:solidFill>
-                            <a:srgbClr val="2E2C2C"/>
-                          </a:solidFill>
-                          <a:latin typeface="Arial"/>
-                          <a:ea typeface="微软雅黑"/>
-                        </a:rPr>
-                        <a:t>每 run 算再取中位数</a:t>
-                      </a:r>
-                    </a:p>
-                  </a:txBody>
-                  <a:tcPr marL="54864" marR="54864" marT="18288" marB="18288" anchor="ctr">
-                    <a:solidFill>
-                      <a:srgbClr val="F2F4F7"/>
-                    </a:solidFill>
-                  </a:tcPr>
-                </a:tc>
-              </a:tr>
-              <a:tr h="420624">
-                <a:tc>
-                  <a:txBody>
-                    <a:bodyPr wrap="square"/>
-                    <a:lstStyle/>
-                    <a:p>
-                      <a:pPr algn="l"/>
-                      <a:r>
-                        <a:rPr sz="1200" b="0">
-                          <a:solidFill>
-                            <a:srgbClr val="2E2C2C"/>
-                          </a:solidFill>
-                          <a:latin typeface="Arial"/>
-                          <a:ea typeface="微软雅黑"/>
-                        </a:rPr>
-                        <a:t>峰值吞吐</a:t>
-                      </a:r>
-                    </a:p>
-                  </a:txBody>
-                  <a:tcPr marL="54864" marR="54864" marT="18288" marB="18288" anchor="ctr">
-                    <a:solidFill>
-                      <a:srgbClr val="FFFFFF"/>
-                    </a:solidFill>
-                  </a:tcPr>
-                </a:tc>
-                <a:tc>
-                  <a:txBody>
-                    <a:bodyPr wrap="square"/>
-                    <a:lstStyle/>
-                    <a:p>
-                      <a:pPr algn="ctr"/>
-                      <a:r>
-                        <a:rPr sz="1200" b="0">
-                          <a:solidFill>
-                            <a:srgbClr val="2E2C2C"/>
-                          </a:solidFill>
-                          <a:latin typeface="Arial"/>
-                          <a:ea typeface="微软雅黑"/>
-                        </a:rPr>
-                        <a:t>scheduling_peak_throughput</a:t>
-                      </a:r>
-                    </a:p>
-                  </a:txBody>
-                  <a:tcPr marL="54864" marR="54864" marT="18288" marB="18288" anchor="ctr">
-                    <a:solidFill>
-                      <a:srgbClr val="FFFFFF"/>
-                    </a:solidFill>
-                  </a:tcPr>
-                </a:tc>
-                <a:tc>
-                  <a:txBody>
-                    <a:bodyPr wrap="square"/>
-                    <a:lstStyle/>
-                    <a:p>
-                      <a:pPr algn="ctr"/>
-                      <a:r>
-                        <a:rPr sz="1200" b="0">
-                          <a:solidFill>
-                            <a:srgbClr val="2E2C2C"/>
-                          </a:solidFill>
-                          <a:latin typeface="Arial"/>
-                          <a:ea typeface="微软雅黑"/>
-                        </a:rPr>
-                        <a:t>3 run 逐点中位数后取标量</a:t>
-                      </a:r>
-                    </a:p>
-                  </a:txBody>
-                  <a:tcPr marL="54864" marR="54864" marT="18288" marB="18288" anchor="ctr">
-                    <a:solidFill>
-                      <a:srgbClr val="FFFFFF"/>
-                    </a:solidFill>
-                  </a:tcPr>
-                </a:tc>
-              </a:tr>
-              <a:tr h="420624">
-                <a:tc>
-                  <a:txBody>
-                    <a:bodyPr wrap="square"/>
-                    <a:lstStyle/>
-                    <a:p>
-                      <a:pPr algn="l"/>
-                      <a:r>
-                        <a:rPr sz="1200" b="0">
-                          <a:solidFill>
-                            <a:srgbClr val="2E2C2C"/>
-                          </a:solidFill>
-                          <a:latin typeface="Arial"/>
-                          <a:ea typeface="微软雅黑"/>
-                        </a:rPr>
-                        <a:t>P90/P99</a:t>
-                      </a:r>
-                    </a:p>
-                  </a:txBody>
-                  <a:tcPr marL="54864" marR="54864" marT="18288" marB="18288" anchor="ctr">
-                    <a:solidFill>
-                      <a:srgbClr val="F2F4F7"/>
-                    </a:solidFill>
-                  </a:tcPr>
-                </a:tc>
-                <a:tc>
-                  <a:txBody>
-                    <a:bodyPr wrap="square"/>
-                    <a:lstStyle/>
-                    <a:p>
-                      <a:pPr algn="ctr"/>
-                      <a:r>
-                        <a:rPr sz="1200" b="0">
-                          <a:solidFill>
-                            <a:srgbClr val="2E2C2C"/>
-                          </a:solidFill>
-                          <a:latin typeface="Arial"/>
-                          <a:ea typeface="微软雅黑"/>
-                        </a:rPr>
-                        <a:t>activeQ 到 Bind 完成的分位</a:t>
-                      </a:r>
-                    </a:p>
-                  </a:txBody>
-                  <a:tcPr marL="54864" marR="54864" marT="18288" marB="18288" anchor="ctr">
-                    <a:solidFill>
-                      <a:srgbClr val="F2F4F7"/>
-                    </a:solidFill>
-                  </a:tcPr>
-                </a:tc>
-                <a:tc>
-                  <a:txBody>
-                    <a:bodyPr wrap="square"/>
-                    <a:lstStyle/>
-                    <a:p>
-                      <a:pPr algn="ctr"/>
-                      <a:r>
-                        <a:rPr sz="1200" b="0">
-                          <a:solidFill>
-                            <a:srgbClr val="2E2C2C"/>
-                          </a:solidFill>
-                          <a:latin typeface="Arial"/>
-                          <a:ea typeface="微软雅黑"/>
-                        </a:rPr>
-                        <a:t>剔首尾各 2 点后取中位数</a:t>
-                      </a:r>
-                    </a:p>
-                  </a:txBody>
-                  <a:tcPr marL="54864" marR="54864" marT="18288" marB="18288" anchor="ctr">
-                    <a:solidFill>
-                      <a:srgbClr val="F2F4F7"/>
-                    </a:solidFill>
-                  </a:tcPr>
-                </a:tc>
-              </a:tr>
-              <a:tr h="420624">
-                <a:tc>
-                  <a:txBody>
-                    <a:bodyPr wrap="square"/>
-                    <a:lstStyle/>
-                    <a:p>
-                      <a:pPr algn="l"/>
-                      <a:r>
-                        <a:rPr sz="1200" b="0">
-                          <a:solidFill>
-                            <a:srgbClr val="2E2C2C"/>
-                          </a:solidFill>
-                          <a:latin typeface="Arial"/>
-                          <a:ea typeface="微软雅黑"/>
-                        </a:rPr>
-                        <a:t>Pod E2E P99</a:t>
-                      </a:r>
-                    </a:p>
-                  </a:txBody>
-                  <a:tcPr marL="54864" marR="54864" marT="18288" marB="18288" anchor="ctr">
-                    <a:solidFill>
-                      <a:srgbClr val="FFFFFF"/>
-                    </a:solidFill>
-                  </a:tcPr>
-                </a:tc>
-                <a:tc>
-                  <a:txBody>
-                    <a:bodyPr wrap="square"/>
-                    <a:lstStyle/>
-                    <a:p>
-                      <a:pPr algn="ctr"/>
-                      <a:r>
-                        <a:rPr sz="1200" b="0">
-                          <a:solidFill>
-                            <a:srgbClr val="2E2C2C"/>
-                          </a:solidFill>
-                          <a:latin typeface="Arial"/>
-                          <a:ea typeface="微软雅黑"/>
-                        </a:rPr>
-                        <a:t>pod_e2e_latency_p99</a:t>
-                      </a:r>
-                    </a:p>
-                  </a:txBody>
-                  <a:tcPr marL="54864" marR="54864" marT="18288" marB="18288" anchor="ctr">
-                    <a:solidFill>
-                      <a:srgbClr val="FFFFFF"/>
-                    </a:solidFill>
-                  </a:tcPr>
-                </a:tc>
-                <a:tc>
-                  <a:txBody>
-                    <a:bodyPr wrap="square"/>
-                    <a:lstStyle/>
-                    <a:p>
-                      <a:pPr algn="ctr"/>
-                      <a:r>
-                        <a:rPr sz="1200" b="0">
-                          <a:solidFill>
-                            <a:srgbClr val="2E2C2C"/>
-                          </a:solidFill>
-                          <a:latin typeface="Arial"/>
-                          <a:ea typeface="微软雅黑"/>
-                        </a:rPr>
-                        <a:t>同上</a:t>
-                      </a:r>
-                    </a:p>
-                  </a:txBody>
-                  <a:tcPr marL="54864" marR="54864" marT="18288" marB="18288" anchor="ctr">
-                    <a:solidFill>
-                      <a:srgbClr val="FFFFFF"/>
-                    </a:solidFill>
-                  </a:tcPr>
-                </a:tc>
-              </a:tr>
-              <a:tr h="420624">
-                <a:tc>
-                  <a:txBody>
-                    <a:bodyPr wrap="square"/>
-                    <a:lstStyle/>
-                    <a:p>
-                      <a:pPr algn="l"/>
-                      <a:r>
-                        <a:rPr sz="1200" b="0">
-                          <a:solidFill>
-                            <a:srgbClr val="2E2C2C"/>
-                          </a:solidFill>
-                          <a:latin typeface="Arial"/>
-                          <a:ea typeface="微软雅黑"/>
-                        </a:rPr>
-                        <a:t>绑定成功率</a:t>
-                      </a:r>
-                    </a:p>
-                  </a:txBody>
-                  <a:tcPr marL="54864" marR="54864" marT="18288" marB="18288" anchor="ctr">
-                    <a:solidFill>
-                      <a:srgbClr val="F2F4F7"/>
-                    </a:solidFill>
-                  </a:tcPr>
-                </a:tc>
-                <a:tc>
-                  <a:txBody>
-                    <a:bodyPr wrap="square"/>
-                    <a:lstStyle/>
-                    <a:p>
-                      <a:pPr algn="ctr"/>
-                      <a:r>
-                        <a:rPr sz="1200" b="0">
-                          <a:solidFill>
-                            <a:srgbClr val="2E2C2C"/>
-                          </a:solidFill>
-                          <a:latin typeface="Arial"/>
-                          <a:ea typeface="微软雅黑"/>
-                        </a:rPr>
-                        <a:t>Bind 成功 / 尝试</a:t>
-                      </a:r>
-                    </a:p>
-                  </a:txBody>
-                  <a:tcPr marL="54864" marR="54864" marT="18288" marB="18288" anchor="ctr">
-                    <a:solidFill>
-                      <a:srgbClr val="F2F4F7"/>
-                    </a:solidFill>
-                  </a:tcPr>
-                </a:tc>
-                <a:tc>
-                  <a:txBody>
-                    <a:bodyPr wrap="square"/>
-                    <a:lstStyle/>
-                    <a:p>
-                      <a:pPr algn="ctr"/>
-                      <a:r>
-                        <a:rPr sz="1200" b="0">
-                          <a:solidFill>
-                            <a:srgbClr val="2E2C2C"/>
-                          </a:solidFill>
-                          <a:latin typeface="Arial"/>
-                          <a:ea typeface="微软雅黑"/>
-                        </a:rPr>
-                        <a:t>比值</a:t>
-                      </a:r>
-                    </a:p>
-                  </a:txBody>
-                  <a:tcPr marL="54864" marR="54864" marT="18288" marB="18288" anchor="ctr">
-                    <a:solidFill>
-                      <a:srgbClr val="F2F4F7"/>
-                    </a:solidFill>
-                  </a:tcPr>
-                </a:tc>
-              </a:tr>
-              <a:tr h="420624">
-                <a:tc>
-                  <a:txBody>
-                    <a:bodyPr wrap="square"/>
-                    <a:lstStyle/>
-                    <a:p>
-                      <a:pPr algn="l"/>
-                      <a:r>
-                        <a:rPr sz="1200" b="0">
-                          <a:solidFill>
-                            <a:srgbClr val="2E2C2C"/>
-                          </a:solidFill>
-                          <a:latin typeface="Arial"/>
-                          <a:ea typeface="微软雅黑"/>
-                        </a:rPr>
-                        <a:t>队列堆积峰值</a:t>
-                      </a:r>
-                    </a:p>
-                  </a:txBody>
-                  <a:tcPr marL="54864" marR="54864" marT="18288" marB="18288" anchor="ctr">
-                    <a:solidFill>
-                      <a:srgbClr val="FFFFFF"/>
-                    </a:solidFill>
-                  </a:tcPr>
-                </a:tc>
-                <a:tc>
-                  <a:txBody>
-                    <a:bodyPr wrap="square"/>
-                    <a:lstStyle/>
-                    <a:p>
-                      <a:pPr algn="ctr"/>
-                      <a:r>
-                        <a:rPr sz="1200" b="0">
-                          <a:solidFill>
-                            <a:srgbClr val="2E2C2C"/>
-                          </a:solidFill>
-                          <a:latin typeface="Arial"/>
-                          <a:ea typeface="微软雅黑"/>
-                        </a:rPr>
-                        <a:t>pending_pods 最大值</a:t>
-                      </a:r>
-                    </a:p>
-                  </a:txBody>
-                  <a:tcPr marL="54864" marR="54864" marT="18288" marB="18288" anchor="ctr">
-                    <a:solidFill>
-                      <a:srgbClr val="FFFFFF"/>
-                    </a:solidFill>
-                  </a:tcPr>
-                </a:tc>
-                <a:tc>
-                  <a:txBody>
-                    <a:bodyPr wrap="square"/>
-                    <a:lstStyle/>
-                    <a:p>
-                      <a:pPr algn="ctr"/>
-                      <a:r>
-                        <a:rPr sz="1200" b="0">
-                          <a:solidFill>
-                            <a:srgbClr val="2E2C2C"/>
-                          </a:solidFill>
-                          <a:latin typeface="Arial"/>
-                          <a:ea typeface="微软雅黑"/>
-                        </a:rPr>
-                        <a:t>取最大</a:t>
-                      </a:r>
-                    </a:p>
-                  </a:txBody>
-                  <a:tcPr marL="54864" marR="54864" marT="18288" marB="18288" anchor="ctr">
-                    <a:solidFill>
-                      <a:srgbClr val="FFFFFF"/>
-                    </a:solidFill>
-                  </a:tcPr>
-                </a:tc>
-              </a:tr>
-            </a:tbl>
-          </a:graphicData>
-        </a:graphic>
-      </p:graphicFrame>
-      <p:sp>
-        <p:nvSpPr>
-          <p:cNvPr id="9005" name="TextBox 9004"/>
-          <p:cNvSpPr txBox="1"/>
-          <p:nvPr/>
-        </p:nvSpPr>
-        <p:spPr>
-          <a:xfrm>
-            <a:off x="566928" y="5074920"/>
-            <a:ext cx="10972800" cy="914400"/>
-          </a:xfrm>
-          <a:prstGeom prst="rect">
-            <a:avLst/>
-          </a:prstGeom>
-          <a:noFill/>
-        </p:spPr>
-        <p:txBody>
-          <a:bodyPr wrap="square" anchor="t" lIns="0" rIns="0" tIns="0" bIns="0">
-            <a:spAutoFit/>
-          </a:bodyPr>
-          <a:lstStyle/>
-          <a:p>
-            <a:pPr algn="l">
-              <a:lnSpc>
-                <a:spcPct val="115000"/>
-              </a:lnSpc>
-            </a:pPr>
-            <a:r>
-              <a:rPr sz="1300" b="0">
-                <a:solidFill>
-                  <a:srgbClr val="2E2C2C"/>
-                </a:solidFill>
-                <a:latin typeface="Arial"/>
-                <a:ea typeface="微软雅黑"/>
-              </a:rPr>
-              <a:t>▪  recording rules 归一化跨组指标名</a:t>
-            </a:r>
-          </a:p>
-          <a:p>
-            <a:pPr algn="l">
-              <a:lnSpc>
-                <a:spcPct val="115000"/>
-              </a:lnSpc>
-              <a:spcBef>
-                <a:spcPts val="600"/>
-              </a:spcBef>
-            </a:pPr>
-            <a:r>
-              <a:rPr sz="1300" b="0">
-                <a:solidFill>
-                  <a:srgbClr val="2E2C2C"/>
-                </a:solidFill>
-                <a:latin typeface="Arial"/>
-                <a:ea typeface="微软雅黑"/>
-              </a:rPr>
-              <a:t>▪  提取脚本：collect/latency-compare.py</a:t>
-            </a:r>
-          </a:p>
-          <a:p>
-            <a:pPr algn="l">
-              <a:lnSpc>
-                <a:spcPct val="115000"/>
-              </a:lnSpc>
-              <a:spcBef>
-                <a:spcPts val="600"/>
-              </a:spcBef>
-            </a:pPr>
-            <a:r>
-              <a:rPr sz="1300" b="0">
-                <a:solidFill>
-                  <a:srgbClr val="2E2C2C"/>
-                </a:solidFill>
-                <a:latin typeface="Arial"/>
-                <a:ea typeface="微软雅黑"/>
-              </a:rPr>
-              <a:t>▪  场景清单：results/compare/</a:t>
-            </a:r>
-          </a:p>
-        </p:txBody>
-      </p:sp>
-      <p:sp>
-        <p:nvSpPr>
-          <p:cNvPr id="9006" name="TextBox 9005"/>
-          <p:cNvSpPr txBox="1"/>
-          <p:nvPr/>
-        </p:nvSpPr>
-        <p:spPr>
-          <a:xfrm>
-            <a:off x="10780776" y="6345936"/>
-            <a:ext cx="850392" cy="219456"/>
-          </a:xfrm>
-          <a:prstGeom prst="rect">
-            <a:avLst/>
-          </a:prstGeom>
-          <a:noFill/>
-        </p:spPr>
-        <p:txBody>
-          <a:bodyPr wrap="square" anchor="t" lIns="0" rIns="0" tIns="0" bIns="0">
-            <a:spAutoFit/>
-          </a:bodyPr>
-          <a:lstStyle/>
-          <a:p>
-            <a:pPr algn="r"/>
-            <a:r>
-              <a:rPr sz="950" b="0">
-                <a:solidFill>
-                  <a:srgbClr val="636363"/>
-                </a:solidFill>
-                <a:latin typeface="Arial"/>
-                <a:ea typeface="微软雅黑"/>
-              </a:rPr>
-              <a:t>B2</a:t>
-            </a:r>
-          </a:p>
-        </p:txBody>
-      </p:sp>
-    </p:spTree>
-  </p:cSld>
-  <p:clrMapOvr>
-    <a:masterClrMapping/>
-  </p:clrMapOvr>
-</p:sld>
-</file>
-
-<file path=ppt/slides/slide27.xml><?xml version="1.0" encoding="utf-8"?>
-<p:sld xmlns:a="http://schemas.openxmlformats.org/drawingml/2006/main" xmlns:p="http://schemas.openxmlformats.org/presentationml/2006/main" xmlns:r="http://schemas.openxmlformats.org/officeDocument/2006/relationships">
-  <p:cSld>
-    <p:bg>
-      <p:bgPr>
-        <a:solidFill>
-          <a:srgbClr val="FFFFFF"/>
-        </a:solidFill>
-        <a:effectLst/>
-      </p:bgPr>
-    </p:bg>
-    <p:spTree>
-      <p:nvGrpSpPr>
-        <p:cNvPr id="1" name=""/>
-        <p:cNvGrpSpPr/>
-        <p:nvPr/>
-      </p:nvGrpSpPr>
-      <p:grpSpPr/>
-      <p:sp>
-        <p:nvSpPr>
-          <p:cNvPr id="9000" name="Freeform 5"/>
-          <p:cNvSpPr/>
-          <p:nvPr/>
-        </p:nvSpPr>
-        <p:spPr>
-          <a:xfrm>
-            <a:off x="182880" y="274320"/>
-            <a:ext cx="310896" cy="402336"/>
-          </a:xfrm>
-          <a:custGeom>
-            <a:avLst/>
-            <a:gdLst/>
-            <a:ahLst/>
-            <a:cxnLst>
-              <a:cxn ang="0">
-                <a:pos x="2147483647" y="2147483647"/>
-              </a:cxn>
-              <a:cxn ang="0">
-                <a:pos x="2147483647" y="2147483647"/>
-              </a:cxn>
-              <a:cxn ang="0">
-                <a:pos x="2147483647" y="2147483647"/>
-              </a:cxn>
-              <a:cxn ang="0">
-                <a:pos x="2147483647" y="2147483647"/>
-              </a:cxn>
-              <a:cxn ang="0">
-                <a:pos x="2147483647" y="2147483647"/>
-              </a:cxn>
-              <a:cxn ang="0">
-                <a:pos x="2147483647" y="2147483647"/>
-              </a:cxn>
-              <a:cxn ang="0">
-                <a:pos x="2147483647" y="2147483647"/>
-              </a:cxn>
-              <a:cxn ang="0">
-                <a:pos x="2147483647" y="2147483647"/>
-              </a:cxn>
-              <a:cxn ang="0">
-                <a:pos x="2147483647" y="0"/>
-              </a:cxn>
-              <a:cxn ang="0">
-                <a:pos x="2147483647" y="2147483647"/>
-              </a:cxn>
-              <a:cxn ang="0">
-                <a:pos x="2147483647" y="2147483647"/>
-              </a:cxn>
-              <a:cxn ang="0">
-                <a:pos x="2147483647" y="2147483647"/>
-              </a:cxn>
-              <a:cxn ang="0">
-                <a:pos x="2147483647" y="2147483647"/>
-              </a:cxn>
-              <a:cxn ang="0">
-                <a:pos x="2147483647" y="2147483647"/>
-              </a:cxn>
-              <a:cxn ang="0">
-                <a:pos x="2147483647" y="2147483647"/>
-              </a:cxn>
-              <a:cxn ang="0">
-                <a:pos x="2147483647" y="2147483647"/>
-              </a:cxn>
-              <a:cxn ang="0">
-                <a:pos x="2147483647" y="2147483647"/>
-              </a:cxn>
-              <a:cxn ang="0">
-                <a:pos x="2147483647" y="2147483647"/>
-              </a:cxn>
-              <a:cxn ang="0">
-                <a:pos x="2147483647" y="2147483647"/>
-              </a:cxn>
-              <a:cxn ang="0">
-                <a:pos x="0" y="2147483647"/>
-              </a:cxn>
-              <a:cxn ang="0">
-                <a:pos x="2147483647" y="2147483647"/>
-              </a:cxn>
-            </a:cxnLst>
-            <a:rect l="0" t="0" r="0" b="0"/>
-            <a:pathLst>
-              <a:path w="574" h="681">
-                <a:moveTo>
-                  <a:pt x="120" y="441"/>
-                </a:moveTo>
-                <a:cubicBezTo>
-                  <a:pt x="153" y="441"/>
-                  <a:pt x="183" y="454"/>
-                  <a:pt x="205" y="476"/>
-                </a:cubicBezTo>
-                <a:lnTo>
-                  <a:pt x="389" y="329"/>
-                </a:lnTo>
-                <a:cubicBezTo>
-                  <a:pt x="383" y="317"/>
-                  <a:pt x="380" y="303"/>
-                  <a:pt x="380" y="289"/>
-                </a:cubicBezTo>
-                <a:cubicBezTo>
-                  <a:pt x="380" y="271"/>
-                  <a:pt x="384" y="255"/>
-                  <a:pt x="392" y="241"/>
-                </a:cubicBezTo>
-                <a:lnTo>
-                  <a:pt x="270" y="138"/>
-                </a:lnTo>
-                <a:cubicBezTo>
-                  <a:pt x="256" y="151"/>
-                  <a:pt x="237" y="159"/>
-                  <a:pt x="217" y="159"/>
-                </a:cubicBezTo>
-                <a:cubicBezTo>
-                  <a:pt x="173" y="159"/>
-                  <a:pt x="137" y="123"/>
-                  <a:pt x="137" y="79"/>
-                </a:cubicBezTo>
-                <a:cubicBezTo>
-                  <a:pt x="137" y="36"/>
-                  <a:pt x="173" y="0"/>
-                  <a:pt x="217" y="0"/>
-                </a:cubicBezTo>
-                <a:cubicBezTo>
-                  <a:pt x="260" y="0"/>
-                  <a:pt x="296" y="36"/>
-                  <a:pt x="296" y="79"/>
-                </a:cubicBezTo>
-                <a:cubicBezTo>
-                  <a:pt x="296" y="91"/>
-                  <a:pt x="293" y="103"/>
-                  <a:pt x="289" y="113"/>
-                </a:cubicBezTo>
-                <a:lnTo>
-                  <a:pt x="412" y="217"/>
-                </a:lnTo>
-                <a:cubicBezTo>
-                  <a:pt x="429" y="201"/>
-                  <a:pt x="452" y="192"/>
-                  <a:pt x="477" y="192"/>
-                </a:cubicBezTo>
-                <a:cubicBezTo>
-                  <a:pt x="530" y="192"/>
-                  <a:pt x="574" y="235"/>
-                  <a:pt x="574" y="289"/>
-                </a:cubicBezTo>
-                <a:cubicBezTo>
-                  <a:pt x="574" y="342"/>
-                  <a:pt x="530" y="386"/>
-                  <a:pt x="477" y="386"/>
-                </a:cubicBezTo>
-                <a:cubicBezTo>
-                  <a:pt x="449" y="386"/>
-                  <a:pt x="424" y="374"/>
-                  <a:pt x="406" y="355"/>
-                </a:cubicBezTo>
-                <a:lnTo>
-                  <a:pt x="224" y="501"/>
-                </a:lnTo>
-                <a:cubicBezTo>
-                  <a:pt x="234" y="518"/>
-                  <a:pt x="240" y="539"/>
-                  <a:pt x="240" y="561"/>
-                </a:cubicBezTo>
-                <a:cubicBezTo>
-                  <a:pt x="240" y="627"/>
-                  <a:pt x="186" y="681"/>
-                  <a:pt x="120" y="681"/>
-                </a:cubicBezTo>
-                <a:cubicBezTo>
-                  <a:pt x="54" y="681"/>
-                  <a:pt x="0" y="627"/>
-                  <a:pt x="0" y="561"/>
-                </a:cubicBezTo>
-                <a:cubicBezTo>
-                  <a:pt x="0" y="495"/>
-                  <a:pt x="54" y="441"/>
-                  <a:pt x="120" y="441"/>
-                </a:cubicBezTo>
-                <a:close/>
-              </a:path>
-            </a:pathLst>
-          </a:custGeom>
-          <a:solidFill>
-            <a:srgbClr val="113E6A"/>
-          </a:solidFill>
-          <a:ln w="9525">
-            <a:noFill/>
-          </a:ln>
-        </p:spPr>
-        <p:txBody>
-          <a:bodyPr/>
-          <a:lstStyle/>
-          <a:p>
-            <a:endParaRPr lang="zh-CN" altLang="en-US"/>
-          </a:p>
-        </p:txBody>
-      </p:sp>
-      <p:pic>
-        <p:nvPicPr>
-          <p:cNvPr id="9001" name="Picture 9000" descr="beihang-logo-navy.png"/>
-          <p:cNvPicPr>
-            <a:picLocks noChangeAspect="1"/>
-          </p:cNvPicPr>
-          <p:nvPr/>
-        </p:nvPicPr>
-        <p:blipFill>
-          <a:blip r:embed="rId2"/>
-          <a:stretch>
-            <a:fillRect/>
-          </a:stretch>
-        </p:blipFill>
-        <p:spPr>
-          <a:xfrm>
-            <a:off x="9336024" y="91665"/>
-            <a:ext cx="2642616" cy="502469"/>
-          </a:xfrm>
-          <a:prstGeom prst="rect">
-            <a:avLst/>
-          </a:prstGeom>
-        </p:spPr>
-      </p:pic>
-      <p:sp>
-        <p:nvSpPr>
-          <p:cNvPr id="9002" name="TextBox 9001"/>
-          <p:cNvSpPr txBox="1"/>
-          <p:nvPr/>
-        </p:nvSpPr>
-        <p:spPr>
-          <a:xfrm>
-            <a:off x="566928" y="155448"/>
-            <a:ext cx="8549640" cy="621792"/>
-          </a:xfrm>
-          <a:prstGeom prst="rect">
-            <a:avLst/>
-          </a:prstGeom>
-          <a:noFill/>
-        </p:spPr>
-        <p:txBody>
-          <a:bodyPr wrap="square" anchor="ctr" lIns="0" rIns="0" tIns="0" bIns="0">
-            <a:spAutoFit/>
-          </a:bodyPr>
-          <a:lstStyle/>
-          <a:p>
-            <a:pPr algn="l">
-              <a:lnSpc>
-                <a:spcPct val="100000"/>
-              </a:lnSpc>
-            </a:pPr>
-            <a:r>
-              <a:rPr sz="2400" b="1">
-                <a:solidFill>
-                  <a:srgbClr val="113E6A"/>
-                </a:solidFill>
-                <a:latin typeface="Arial"/>
-                <a:ea typeface="微软雅黑"/>
-              </a:rPr>
-              <a:t>为什么 c/d/e 的 P99 不能与 a/b 直接比</a:t>
-            </a:r>
-          </a:p>
-        </p:txBody>
-      </p:sp>
-      <p:sp>
-        <p:nvSpPr>
-          <p:cNvPr id="9003" name="TextBox 9002"/>
-          <p:cNvSpPr txBox="1"/>
-          <p:nvPr/>
-        </p:nvSpPr>
-        <p:spPr>
-          <a:xfrm>
-            <a:off x="566928" y="1261872"/>
-            <a:ext cx="10881360" cy="438912"/>
-          </a:xfrm>
-          <a:prstGeom prst="rect">
-            <a:avLst/>
-          </a:prstGeom>
-          <a:noFill/>
-        </p:spPr>
-        <p:txBody>
-          <a:bodyPr wrap="square" anchor="ctr" lIns="0" rIns="0" tIns="0" bIns="0">
-            <a:spAutoFit/>
-          </a:bodyPr>
-          <a:lstStyle/>
-          <a:p>
-            <a:pPr algn="l">
-              <a:lnSpc>
-                <a:spcPct val="110000"/>
-              </a:lnSpc>
-            </a:pPr>
-            <a:r>
-              <a:rPr sz="1800" b="1">
-                <a:solidFill>
-                  <a:srgbClr val="0070C0"/>
-                </a:solidFill>
-                <a:latin typeface="Arial"/>
-                <a:ea typeface="微软雅黑"/>
-              </a:rPr>
-              <a:t>单实例过载 → Pod 长期堵在 activeQ → 未进入延迟直方图</a:t>
-            </a:r>
-          </a:p>
-        </p:txBody>
-      </p:sp>
-      <p:sp>
-        <p:nvSpPr>
-          <p:cNvPr id="9004" name="TextBox 9003"/>
-          <p:cNvSpPr txBox="1"/>
-          <p:nvPr/>
-        </p:nvSpPr>
-        <p:spPr>
-          <a:xfrm>
-            <a:off x="566928" y="1965960"/>
-            <a:ext cx="10607040" cy="1417320"/>
-          </a:xfrm>
-          <a:prstGeom prst="rect">
-            <a:avLst/>
-          </a:prstGeom>
-          <a:noFill/>
-        </p:spPr>
-        <p:txBody>
-          <a:bodyPr wrap="square" anchor="t" lIns="0" rIns="0" tIns="0" bIns="0">
-            <a:spAutoFit/>
-          </a:bodyPr>
-          <a:lstStyle/>
-          <a:p>
-            <a:pPr algn="l">
-              <a:lnSpc>
-                <a:spcPct val="115000"/>
-              </a:lnSpc>
-            </a:pPr>
-            <a:r>
-              <a:rPr sz="1700" b="0">
-                <a:solidFill>
-                  <a:srgbClr val="2E2C2C"/>
-                </a:solidFill>
-                <a:latin typeface="Arial"/>
-                <a:ea typeface="微软雅黑"/>
-              </a:rPr>
-              <a:t>▪  直方图只覆盖“已被 pop 处理”的子集</a:t>
-            </a:r>
-          </a:p>
-          <a:p>
-            <a:pPr algn="l">
-              <a:lnSpc>
-                <a:spcPct val="115000"/>
-              </a:lnSpc>
-              <a:spcBef>
-                <a:spcPts val="1800"/>
-              </a:spcBef>
-            </a:pPr>
-            <a:r>
-              <a:rPr sz="1700" b="0">
-                <a:solidFill>
-                  <a:srgbClr val="2E2C2C"/>
-                </a:solidFill>
-                <a:latin typeface="Arial"/>
-                <a:ea typeface="微软雅黑"/>
-              </a:rPr>
-              <a:t>▪  数值对该子集准确，但样本群体不同</a:t>
-            </a:r>
-          </a:p>
-          <a:p>
-            <a:pPr algn="l">
-              <a:lnSpc>
-                <a:spcPct val="115000"/>
-              </a:lnSpc>
-              <a:spcBef>
-                <a:spcPts val="1800"/>
-              </a:spcBef>
-            </a:pPr>
-            <a:r>
-              <a:rPr sz="1700" b="0">
-                <a:solidFill>
-                  <a:srgbClr val="2E2C2C"/>
-                </a:solidFill>
-                <a:latin typeface="Arial"/>
-                <a:ea typeface="微软雅黑"/>
-              </a:rPr>
-              <a:t>▪  故只比吞吐 / 队列 / 成功率</a:t>
-            </a:r>
-          </a:p>
-        </p:txBody>
-      </p:sp>
-      <p:sp>
-        <p:nvSpPr>
-          <p:cNvPr id="9005" name="TextBox 9004"/>
-          <p:cNvSpPr txBox="1"/>
-          <p:nvPr/>
-        </p:nvSpPr>
-        <p:spPr>
-          <a:xfrm>
-            <a:off x="10780776" y="6345936"/>
-            <a:ext cx="850392" cy="219456"/>
-          </a:xfrm>
-          <a:prstGeom prst="rect">
-            <a:avLst/>
-          </a:prstGeom>
-          <a:noFill/>
-        </p:spPr>
-        <p:txBody>
-          <a:bodyPr wrap="square" anchor="t" lIns="0" rIns="0" tIns="0" bIns="0">
-            <a:spAutoFit/>
-          </a:bodyPr>
-          <a:lstStyle/>
-          <a:p>
-            <a:pPr algn="r"/>
-            <a:r>
-              <a:rPr sz="950" b="0">
-                <a:solidFill>
-                  <a:srgbClr val="636363"/>
-                </a:solidFill>
-                <a:latin typeface="Arial"/>
-                <a:ea typeface="微软雅黑"/>
-              </a:rPr>
-              <a:t>B3</a:t>
-            </a:r>
-          </a:p>
-        </p:txBody>
-      </p:sp>
-    </p:spTree>
-  </p:cSld>
-  <p:clrMapOvr>
-    <a:masterClrMapping/>
-  </p:clrMapOvr>
-</p:sld>
-</file>
-
-<file path=ppt/slides/slide28.xml><?xml version="1.0" encoding="utf-8"?>
-<p:sld xmlns:a="http://schemas.openxmlformats.org/drawingml/2006/main" xmlns:p="http://schemas.openxmlformats.org/presentationml/2006/main" xmlns:r="http://schemas.openxmlformats.org/officeDocument/2006/relationships">
-  <p:cSld>
-    <p:bg>
-      <p:bgPr>
-        <a:solidFill>
-          <a:srgbClr val="FFFFFF"/>
-        </a:solidFill>
-        <a:effectLst/>
-      </p:bgPr>
-    </p:bg>
-    <p:spTree>
-      <p:nvGrpSpPr>
-        <p:cNvPr id="1" name=""/>
-        <p:cNvGrpSpPr/>
-        <p:nvPr/>
-      </p:nvGrpSpPr>
-      <p:grpSpPr/>
-      <p:sp>
-        <p:nvSpPr>
-          <p:cNvPr id="9000" name="Freeform 5"/>
-          <p:cNvSpPr/>
-          <p:nvPr/>
-        </p:nvSpPr>
-        <p:spPr>
-          <a:xfrm>
-            <a:off x="182880" y="274320"/>
-            <a:ext cx="310896" cy="402336"/>
-          </a:xfrm>
-          <a:custGeom>
-            <a:avLst/>
-            <a:gdLst/>
-            <a:ahLst/>
-            <a:cxnLst>
-              <a:cxn ang="0">
-                <a:pos x="2147483647" y="2147483647"/>
-              </a:cxn>
-              <a:cxn ang="0">
-                <a:pos x="2147483647" y="2147483647"/>
-              </a:cxn>
-              <a:cxn ang="0">
-                <a:pos x="2147483647" y="2147483647"/>
-              </a:cxn>
-              <a:cxn ang="0">
-                <a:pos x="2147483647" y="2147483647"/>
-              </a:cxn>
-              <a:cxn ang="0">
-                <a:pos x="2147483647" y="2147483647"/>
-              </a:cxn>
-              <a:cxn ang="0">
-                <a:pos x="2147483647" y="2147483647"/>
-              </a:cxn>
-              <a:cxn ang="0">
-                <a:pos x="2147483647" y="2147483647"/>
-              </a:cxn>
-              <a:cxn ang="0">
-                <a:pos x="2147483647" y="2147483647"/>
-              </a:cxn>
-              <a:cxn ang="0">
-                <a:pos x="2147483647" y="0"/>
-              </a:cxn>
-              <a:cxn ang="0">
-                <a:pos x="2147483647" y="2147483647"/>
-              </a:cxn>
-              <a:cxn ang="0">
-                <a:pos x="2147483647" y="2147483647"/>
-              </a:cxn>
-              <a:cxn ang="0">
-                <a:pos x="2147483647" y="2147483647"/>
-              </a:cxn>
-              <a:cxn ang="0">
-                <a:pos x="2147483647" y="2147483647"/>
-              </a:cxn>
-              <a:cxn ang="0">
-                <a:pos x="2147483647" y="2147483647"/>
-              </a:cxn>
-              <a:cxn ang="0">
-                <a:pos x="2147483647" y="2147483647"/>
-              </a:cxn>
-              <a:cxn ang="0">
-                <a:pos x="2147483647" y="2147483647"/>
-              </a:cxn>
-              <a:cxn ang="0">
-                <a:pos x="2147483647" y="2147483647"/>
-              </a:cxn>
-              <a:cxn ang="0">
-                <a:pos x="2147483647" y="2147483647"/>
-              </a:cxn>
-              <a:cxn ang="0">
-                <a:pos x="2147483647" y="2147483647"/>
-              </a:cxn>
-              <a:cxn ang="0">
-                <a:pos x="0" y="2147483647"/>
-              </a:cxn>
-              <a:cxn ang="0">
-                <a:pos x="2147483647" y="2147483647"/>
-              </a:cxn>
-            </a:cxnLst>
-            <a:rect l="0" t="0" r="0" b="0"/>
-            <a:pathLst>
-              <a:path w="574" h="681">
-                <a:moveTo>
-                  <a:pt x="120" y="441"/>
-                </a:moveTo>
-                <a:cubicBezTo>
-                  <a:pt x="153" y="441"/>
-                  <a:pt x="183" y="454"/>
-                  <a:pt x="205" y="476"/>
-                </a:cubicBezTo>
-                <a:lnTo>
-                  <a:pt x="389" y="329"/>
-                </a:lnTo>
-                <a:cubicBezTo>
-                  <a:pt x="383" y="317"/>
-                  <a:pt x="380" y="303"/>
-                  <a:pt x="380" y="289"/>
-                </a:cubicBezTo>
-                <a:cubicBezTo>
-                  <a:pt x="380" y="271"/>
-                  <a:pt x="384" y="255"/>
-                  <a:pt x="392" y="241"/>
-                </a:cubicBezTo>
-                <a:lnTo>
-                  <a:pt x="270" y="138"/>
-                </a:lnTo>
-                <a:cubicBezTo>
-                  <a:pt x="256" y="151"/>
-                  <a:pt x="237" y="159"/>
-                  <a:pt x="217" y="159"/>
-                </a:cubicBezTo>
-                <a:cubicBezTo>
-                  <a:pt x="173" y="159"/>
-                  <a:pt x="137" y="123"/>
-                  <a:pt x="137" y="79"/>
-                </a:cubicBezTo>
-                <a:cubicBezTo>
-                  <a:pt x="137" y="36"/>
-                  <a:pt x="173" y="0"/>
-                  <a:pt x="217" y="0"/>
-                </a:cubicBezTo>
-                <a:cubicBezTo>
-                  <a:pt x="260" y="0"/>
-                  <a:pt x="296" y="36"/>
-                  <a:pt x="296" y="79"/>
-                </a:cubicBezTo>
-                <a:cubicBezTo>
-                  <a:pt x="296" y="91"/>
-                  <a:pt x="293" y="103"/>
-                  <a:pt x="289" y="113"/>
-                </a:cubicBezTo>
-                <a:lnTo>
-                  <a:pt x="412" y="217"/>
-                </a:lnTo>
-                <a:cubicBezTo>
-                  <a:pt x="429" y="201"/>
-                  <a:pt x="452" y="192"/>
-                  <a:pt x="477" y="192"/>
-                </a:cubicBezTo>
-                <a:cubicBezTo>
-                  <a:pt x="530" y="192"/>
-                  <a:pt x="574" y="235"/>
-                  <a:pt x="574" y="289"/>
-                </a:cubicBezTo>
-                <a:cubicBezTo>
-                  <a:pt x="574" y="342"/>
-                  <a:pt x="530" y="386"/>
-                  <a:pt x="477" y="386"/>
-                </a:cubicBezTo>
-                <a:cubicBezTo>
-                  <a:pt x="449" y="386"/>
-                  <a:pt x="424" y="374"/>
-                  <a:pt x="406" y="355"/>
-                </a:cubicBezTo>
-                <a:lnTo>
-                  <a:pt x="224" y="501"/>
-                </a:lnTo>
-                <a:cubicBezTo>
-                  <a:pt x="234" y="518"/>
-                  <a:pt x="240" y="539"/>
-                  <a:pt x="240" y="561"/>
-                </a:cubicBezTo>
-                <a:cubicBezTo>
-                  <a:pt x="240" y="627"/>
-                  <a:pt x="186" y="681"/>
-                  <a:pt x="120" y="681"/>
-                </a:cubicBezTo>
-                <a:cubicBezTo>
-                  <a:pt x="54" y="681"/>
-                  <a:pt x="0" y="627"/>
-                  <a:pt x="0" y="561"/>
-                </a:cubicBezTo>
-                <a:cubicBezTo>
-                  <a:pt x="0" y="495"/>
-                  <a:pt x="54" y="441"/>
-                  <a:pt x="120" y="441"/>
-                </a:cubicBezTo>
-                <a:close/>
-              </a:path>
-            </a:pathLst>
-          </a:custGeom>
-          <a:solidFill>
-            <a:srgbClr val="113E6A"/>
-          </a:solidFill>
-          <a:ln w="9525">
-            <a:noFill/>
-          </a:ln>
-        </p:spPr>
-        <p:txBody>
-          <a:bodyPr/>
-          <a:lstStyle/>
-          <a:p>
-            <a:endParaRPr lang="zh-CN" altLang="en-US"/>
-          </a:p>
-        </p:txBody>
-      </p:sp>
-      <p:pic>
-        <p:nvPicPr>
-          <p:cNvPr id="9001" name="Picture 9000" descr="beihang-logo-navy.png"/>
-          <p:cNvPicPr>
-            <a:picLocks noChangeAspect="1"/>
-          </p:cNvPicPr>
-          <p:nvPr/>
-        </p:nvPicPr>
-        <p:blipFill>
-          <a:blip r:embed="rId2"/>
-          <a:stretch>
-            <a:fillRect/>
-          </a:stretch>
-        </p:blipFill>
-        <p:spPr>
-          <a:xfrm>
-            <a:off x="9336024" y="91665"/>
-            <a:ext cx="2642616" cy="502469"/>
-          </a:xfrm>
-          <a:prstGeom prst="rect">
-            <a:avLst/>
-          </a:prstGeom>
-        </p:spPr>
-      </p:pic>
-      <p:sp>
-        <p:nvSpPr>
-          <p:cNvPr id="9002" name="TextBox 9001"/>
-          <p:cNvSpPr txBox="1"/>
-          <p:nvPr/>
-        </p:nvSpPr>
-        <p:spPr>
-          <a:xfrm>
-            <a:off x="566928" y="155448"/>
-            <a:ext cx="8549640" cy="621792"/>
-          </a:xfrm>
-          <a:prstGeom prst="rect">
-            <a:avLst/>
-          </a:prstGeom>
-          <a:noFill/>
-        </p:spPr>
-        <p:txBody>
-          <a:bodyPr wrap="square" anchor="ctr" lIns="0" rIns="0" tIns="0" bIns="0">
-            <a:spAutoFit/>
-          </a:bodyPr>
-          <a:lstStyle/>
-          <a:p>
-            <a:pPr algn="l">
-              <a:lnSpc>
-                <a:spcPct val="100000"/>
-              </a:lnSpc>
-            </a:pPr>
-            <a:r>
-              <a:rPr sz="3000" b="1">
-                <a:solidFill>
-                  <a:srgbClr val="113E6A"/>
-                </a:solidFill>
-                <a:latin typeface="Arial"/>
-                <a:ea typeface="微软雅黑"/>
-              </a:rPr>
-              <a:t>Gang（w6）尾延迟反向的机理与边界</a:t>
-            </a:r>
-          </a:p>
-        </p:txBody>
-      </p:sp>
-      <p:sp>
-        <p:nvSpPr>
-          <p:cNvPr id="9003" name="TextBox 9002"/>
-          <p:cNvSpPr txBox="1"/>
-          <p:nvPr/>
-        </p:nvSpPr>
-        <p:spPr>
-          <a:xfrm>
-            <a:off x="566928" y="1261872"/>
-            <a:ext cx="10881360" cy="438912"/>
-          </a:xfrm>
-          <a:prstGeom prst="rect">
-            <a:avLst/>
-          </a:prstGeom>
-          <a:noFill/>
-        </p:spPr>
-        <p:txBody>
-          <a:bodyPr wrap="square" anchor="ctr" lIns="0" rIns="0" tIns="0" bIns="0">
-            <a:spAutoFit/>
-          </a:bodyPr>
-          <a:lstStyle/>
-          <a:p>
-            <a:pPr algn="l">
-              <a:lnSpc>
-                <a:spcPct val="110000"/>
-              </a:lnSpc>
-            </a:pPr>
-            <a:r>
-              <a:rPr sz="1800" b="1">
-                <a:solidFill>
-                  <a:srgbClr val="0070C0"/>
-                </a:solidFill>
-                <a:latin typeface="Arial"/>
-                <a:ea typeface="微软雅黑"/>
-              </a:rPr>
-              <a:t>吞吐仍领先，但单 Pod 尾延迟高出 1.6~4.1 倍</a:t>
-            </a:r>
-          </a:p>
-        </p:txBody>
-      </p:sp>
-      <p:graphicFrame>
-        <p:nvGraphicFramePr>
-          <p:cNvPr id="9004" name="Table 9003"/>
-          <p:cNvGraphicFramePr>
-            <a:graphicFrameLocks noGrp="1"/>
-          </p:cNvGraphicFramePr>
-          <p:nvPr/>
-        </p:nvGraphicFramePr>
-        <p:xfrm>
-          <a:off x="566928" y="1828800"/>
-          <a:ext cx="11064240" cy="1682496"/>
-        </p:xfrm>
-        <a:graphic>
-          <a:graphicData uri="http://schemas.openxmlformats.org/drawingml/2006/table">
-            <a:tbl>
-              <a:tblPr firstRow="1" bandRow="1">
-                <a:tableStyleId>{5C22544A-7EE6-4342-B048-85BDC9FD1C3A}</a:tableStyleId>
-              </a:tblPr>
-              <a:tblGrid>
-                <a:gridCol w="2212848"/>
-                <a:gridCol w="2212848"/>
-                <a:gridCol w="2212848"/>
-                <a:gridCol w="2212848"/>
-                <a:gridCol w="2212848"/>
-              </a:tblGrid>
-              <a:tr h="420624">
-                <a:tc>
-                  <a:txBody>
-                    <a:bodyPr wrap="square"/>
-                    <a:lstStyle/>
-                    <a:p>
-                      <a:pPr algn="l"/>
-                      <a:r>
-                        <a:rPr sz="1200" b="1">
-                          <a:solidFill>
-                            <a:srgbClr val="FFFFFF"/>
-                          </a:solidFill>
-                          <a:latin typeface="Arial"/>
-                          <a:ea typeface="微软雅黑"/>
-                        </a:rPr>
-                        <a:t>场景</a:t>
-                      </a:r>
-                    </a:p>
-                  </a:txBody>
-                  <a:tcPr marL="54864" marR="54864" marT="18288" marB="18288" anchor="ctr">
-                    <a:solidFill>
-                      <a:srgbClr val="113E6A"/>
-                    </a:solidFill>
-                  </a:tcPr>
-                </a:tc>
-                <a:tc>
-                  <a:txBody>
-                    <a:bodyPr wrap="square"/>
-                    <a:lstStyle/>
-                    <a:p>
-                      <a:pPr algn="ctr"/>
-                      <a:r>
-                        <a:rPr sz="1200" b="1">
-                          <a:solidFill>
-                            <a:srgbClr val="FFFFFF"/>
-                          </a:solidFill>
-                          <a:latin typeface="Arial"/>
-                          <a:ea typeface="微软雅黑"/>
-                        </a:rPr>
-                        <a:t>ENO 吞吐</a:t>
-                      </a:r>
-                    </a:p>
-                  </a:txBody>
-                  <a:tcPr marL="54864" marR="54864" marT="18288" marB="18288" anchor="ctr">
-                    <a:solidFill>
-                      <a:srgbClr val="113E6A"/>
-                    </a:solidFill>
-                  </a:tcPr>
-                </a:tc>
-                <a:tc>
-                  <a:txBody>
-                    <a:bodyPr wrap="square"/>
-                    <a:lstStyle/>
-                    <a:p>
-                      <a:pPr algn="ctr"/>
-                      <a:r>
-                        <a:rPr sz="1200" b="1">
-                          <a:solidFill>
-                            <a:srgbClr val="FFFFFF"/>
-                          </a:solidFill>
-                          <a:latin typeface="Arial"/>
-                          <a:ea typeface="微软雅黑"/>
-                        </a:rPr>
-                        <a:t>Gödel 吞吐</a:t>
-                      </a:r>
-                    </a:p>
-                  </a:txBody>
-                  <a:tcPr marL="54864" marR="54864" marT="18288" marB="18288" anchor="ctr">
-                    <a:solidFill>
-                      <a:srgbClr val="113E6A"/>
-                    </a:solidFill>
-                  </a:tcPr>
-                </a:tc>
-                <a:tc>
-                  <a:txBody>
-                    <a:bodyPr wrap="square"/>
-                    <a:lstStyle/>
-                    <a:p>
-                      <a:pPr algn="ctr"/>
-                      <a:r>
-                        <a:rPr sz="1200" b="1">
-                          <a:solidFill>
-                            <a:srgbClr val="FFFFFF"/>
-                          </a:solidFill>
-                          <a:latin typeface="Arial"/>
-                          <a:ea typeface="微软雅黑"/>
-                        </a:rPr>
-                        <a:t>ENO P99</a:t>
-                      </a:r>
-                    </a:p>
-                  </a:txBody>
-                  <a:tcPr marL="54864" marR="54864" marT="18288" marB="18288" anchor="ctr">
-                    <a:solidFill>
-                      <a:srgbClr val="113E6A"/>
-                    </a:solidFill>
-                  </a:tcPr>
-                </a:tc>
-                <a:tc>
-                  <a:txBody>
-                    <a:bodyPr wrap="square"/>
-                    <a:lstStyle/>
-                    <a:p>
-                      <a:pPr algn="ctr"/>
-                      <a:r>
-                        <a:rPr sz="1200" b="1">
-                          <a:solidFill>
-                            <a:srgbClr val="FFFFFF"/>
-                          </a:solidFill>
-                          <a:latin typeface="Arial"/>
-                          <a:ea typeface="微软雅黑"/>
-                        </a:rPr>
-                        <a:t>Gödel P99</a:t>
-                      </a:r>
-                    </a:p>
-                  </a:txBody>
-                  <a:tcPr marL="54864" marR="54864" marT="18288" marB="18288" anchor="ctr">
-                    <a:solidFill>
-                      <a:srgbClr val="113E6A"/>
-                    </a:solidFill>
-                  </a:tcPr>
-                </a:tc>
-              </a:tr>
-              <a:tr h="420624">
-                <a:tc>
-                  <a:txBody>
-                    <a:bodyPr wrap="square"/>
-                    <a:lstStyle/>
-                    <a:p>
-                      <a:pPr algn="l"/>
-                      <a:r>
-                        <a:rPr sz="1200" b="0">
-                          <a:solidFill>
-                            <a:srgbClr val="2E2C2C"/>
-                          </a:solidFill>
-                          <a:latin typeface="Arial"/>
-                          <a:ea typeface="微软雅黑"/>
-                        </a:rPr>
-                        <a:t>s3/w6 inst1</a:t>
-                      </a:r>
-                    </a:p>
-                  </a:txBody>
-                  <a:tcPr marL="54864" marR="54864" marT="18288" marB="18288" anchor="ctr">
-                    <a:solidFill>
-                      <a:srgbClr val="F2F4F7"/>
-                    </a:solidFill>
-                  </a:tcPr>
-                </a:tc>
-                <a:tc>
-                  <a:txBody>
-                    <a:bodyPr wrap="square"/>
-                    <a:lstStyle/>
-                    <a:p>
-                      <a:pPr algn="ctr"/>
-                      <a:r>
-                        <a:rPr sz="1200" b="0">
-                          <a:solidFill>
-                            <a:srgbClr val="2E2C2C"/>
-                          </a:solidFill>
-                          <a:latin typeface="Arial"/>
-                          <a:ea typeface="微软雅黑"/>
-                        </a:rPr>
-                        <a:t>251.3</a:t>
-                      </a:r>
-                    </a:p>
-                  </a:txBody>
-                  <a:tcPr marL="54864" marR="54864" marT="18288" marB="18288" anchor="ctr">
-                    <a:solidFill>
-                      <a:srgbClr val="F2F4F7"/>
-                    </a:solidFill>
-                  </a:tcPr>
-                </a:tc>
-                <a:tc>
-                  <a:txBody>
-                    <a:bodyPr wrap="square"/>
-                    <a:lstStyle/>
-                    <a:p>
-                      <a:pPr algn="ctr"/>
-                      <a:r>
-                        <a:rPr sz="1200" b="0">
-                          <a:solidFill>
-                            <a:srgbClr val="2E2C2C"/>
-                          </a:solidFill>
-                          <a:latin typeface="Arial"/>
-                          <a:ea typeface="微软雅黑"/>
-                        </a:rPr>
-                        <a:t>211.0</a:t>
-                      </a:r>
-                    </a:p>
-                  </a:txBody>
-                  <a:tcPr marL="54864" marR="54864" marT="18288" marB="18288" anchor="ctr">
-                    <a:solidFill>
-                      <a:srgbClr val="F2F4F7"/>
-                    </a:solidFill>
-                  </a:tcPr>
-                </a:tc>
-                <a:tc>
-                  <a:txBody>
-                    <a:bodyPr wrap="square"/>
-                    <a:lstStyle/>
-                    <a:p>
-                      <a:pPr algn="ctr"/>
-                      <a:r>
-                        <a:rPr sz="1200" b="0">
-                          <a:solidFill>
-                            <a:srgbClr val="2E2C2C"/>
-                          </a:solidFill>
-                          <a:latin typeface="Arial"/>
-                          <a:ea typeface="微软雅黑"/>
-                        </a:rPr>
-                        <a:t>0.428</a:t>
-                      </a:r>
-                    </a:p>
-                  </a:txBody>
-                  <a:tcPr marL="54864" marR="54864" marT="18288" marB="18288" anchor="ctr">
-                    <a:solidFill>
-                      <a:srgbClr val="F2F4F7"/>
-                    </a:solidFill>
-                  </a:tcPr>
-                </a:tc>
-                <a:tc>
-                  <a:txBody>
-                    <a:bodyPr wrap="square"/>
-                    <a:lstStyle/>
-                    <a:p>
-                      <a:pPr algn="ctr"/>
-                      <a:r>
-                        <a:rPr sz="1200" b="0">
-                          <a:solidFill>
-                            <a:srgbClr val="2E2C2C"/>
-                          </a:solidFill>
-                          <a:latin typeface="Arial"/>
-                          <a:ea typeface="微软雅黑"/>
-                        </a:rPr>
-                        <a:t>0.175</a:t>
-                      </a:r>
-                    </a:p>
-                  </a:txBody>
-                  <a:tcPr marL="54864" marR="54864" marT="18288" marB="18288" anchor="ctr">
-                    <a:solidFill>
-                      <a:srgbClr val="F2F4F7"/>
-                    </a:solidFill>
-                  </a:tcPr>
-                </a:tc>
-              </a:tr>
-              <a:tr h="420624">
-                <a:tc>
-                  <a:txBody>
-                    <a:bodyPr wrap="square"/>
-                    <a:lstStyle/>
-                    <a:p>
-                      <a:pPr algn="l"/>
-                      <a:r>
-                        <a:rPr sz="1200" b="0">
-                          <a:solidFill>
-                            <a:srgbClr val="2E2C2C"/>
-                          </a:solidFill>
-                          <a:latin typeface="Arial"/>
-                          <a:ea typeface="微软雅黑"/>
-                        </a:rPr>
-                        <a:t>s3/w6 inst3</a:t>
-                      </a:r>
-                    </a:p>
-                  </a:txBody>
-                  <a:tcPr marL="54864" marR="54864" marT="18288" marB="18288" anchor="ctr">
-                    <a:solidFill>
-                      <a:srgbClr val="FFFFFF"/>
-                    </a:solidFill>
-                  </a:tcPr>
-                </a:tc>
-                <a:tc>
-                  <a:txBody>
-                    <a:bodyPr wrap="square"/>
-                    <a:lstStyle/>
-                    <a:p>
-                      <a:pPr algn="ctr"/>
-                      <a:r>
-                        <a:rPr sz="1200" b="0">
-                          <a:solidFill>
-                            <a:srgbClr val="2E2C2C"/>
-                          </a:solidFill>
-                          <a:latin typeface="Arial"/>
-                          <a:ea typeface="微软雅黑"/>
-                        </a:rPr>
-                        <a:t>215.5</a:t>
-                      </a:r>
-                    </a:p>
-                  </a:txBody>
-                  <a:tcPr marL="54864" marR="54864" marT="18288" marB="18288" anchor="ctr">
-                    <a:solidFill>
-                      <a:srgbClr val="FFFFFF"/>
-                    </a:solidFill>
-                  </a:tcPr>
-                </a:tc>
-                <a:tc>
-                  <a:txBody>
-                    <a:bodyPr wrap="square"/>
-                    <a:lstStyle/>
-                    <a:p>
-                      <a:pPr algn="ctr"/>
-                      <a:r>
-                        <a:rPr sz="1200" b="0">
-                          <a:solidFill>
-                            <a:srgbClr val="2E2C2C"/>
-                          </a:solidFill>
-                          <a:latin typeface="Arial"/>
-                          <a:ea typeface="微软雅黑"/>
-                        </a:rPr>
-                        <a:t>206.6</a:t>
-                      </a:r>
-                    </a:p>
-                  </a:txBody>
-                  <a:tcPr marL="54864" marR="54864" marT="18288" marB="18288" anchor="ctr">
-                    <a:solidFill>
-                      <a:srgbClr val="FFFFFF"/>
-                    </a:solidFill>
-                  </a:tcPr>
-                </a:tc>
-                <a:tc>
-                  <a:txBody>
-                    <a:bodyPr wrap="square"/>
-                    <a:lstStyle/>
-                    <a:p>
-                      <a:pPr algn="ctr"/>
-                      <a:r>
-                        <a:rPr sz="1200" b="0">
-                          <a:solidFill>
-                            <a:srgbClr val="2E2C2C"/>
-                          </a:solidFill>
-                          <a:latin typeface="Arial"/>
-                          <a:ea typeface="微软雅黑"/>
-                        </a:rPr>
-                        <a:t>0.892</a:t>
-                      </a:r>
-                    </a:p>
-                  </a:txBody>
-                  <a:tcPr marL="54864" marR="54864" marT="18288" marB="18288" anchor="ctr">
-                    <a:solidFill>
-                      <a:srgbClr val="FFFFFF"/>
-                    </a:solidFill>
-                  </a:tcPr>
-                </a:tc>
-                <a:tc>
-                  <a:txBody>
-                    <a:bodyPr wrap="square"/>
-                    <a:lstStyle/>
-                    <a:p>
-                      <a:pPr algn="ctr"/>
-                      <a:r>
-                        <a:rPr sz="1200" b="0">
-                          <a:solidFill>
-                            <a:srgbClr val="2E2C2C"/>
-                          </a:solidFill>
-                          <a:latin typeface="Arial"/>
-                          <a:ea typeface="微软雅黑"/>
-                        </a:rPr>
-                        <a:t>0.218</a:t>
-                      </a:r>
-                    </a:p>
-                  </a:txBody>
-                  <a:tcPr marL="54864" marR="54864" marT="18288" marB="18288" anchor="ctr">
-                    <a:solidFill>
-                      <a:srgbClr val="FFFFFF"/>
-                    </a:solidFill>
-                  </a:tcPr>
-                </a:tc>
-              </a:tr>
-              <a:tr h="420624">
-                <a:tc>
-                  <a:txBody>
-                    <a:bodyPr wrap="square"/>
-                    <a:lstStyle/>
-                    <a:p>
-                      <a:pPr algn="l"/>
-                      <a:r>
-                        <a:rPr sz="1200" b="0">
-                          <a:solidFill>
-                            <a:srgbClr val="2E2C2C"/>
-                          </a:solidFill>
-                          <a:latin typeface="Arial"/>
-                          <a:ea typeface="微软雅黑"/>
-                        </a:rPr>
-                        <a:t>s4/w6 inst3</a:t>
-                      </a:r>
-                    </a:p>
-                  </a:txBody>
-                  <a:tcPr marL="54864" marR="54864" marT="18288" marB="18288" anchor="ctr">
-                    <a:solidFill>
-                      <a:srgbClr val="F2F4F7"/>
-                    </a:solidFill>
-                  </a:tcPr>
-                </a:tc>
-                <a:tc>
-                  <a:txBody>
-                    <a:bodyPr wrap="square"/>
-                    <a:lstStyle/>
-                    <a:p>
-                      <a:pPr algn="ctr"/>
-                      <a:r>
-                        <a:rPr sz="1200" b="0">
-                          <a:solidFill>
-                            <a:srgbClr val="2E2C2C"/>
-                          </a:solidFill>
-                          <a:latin typeface="Arial"/>
-                          <a:ea typeface="微软雅黑"/>
-                        </a:rPr>
-                        <a:t>245.1</a:t>
-                      </a:r>
-                    </a:p>
-                  </a:txBody>
-                  <a:tcPr marL="54864" marR="54864" marT="18288" marB="18288" anchor="ctr">
-                    <a:solidFill>
-                      <a:srgbClr val="F2F4F7"/>
-                    </a:solidFill>
-                  </a:tcPr>
-                </a:tc>
-                <a:tc>
-                  <a:txBody>
-                    <a:bodyPr wrap="square"/>
-                    <a:lstStyle/>
-                    <a:p>
-                      <a:pPr algn="ctr"/>
-                      <a:r>
-                        <a:rPr sz="1200" b="0">
-                          <a:solidFill>
-                            <a:srgbClr val="2E2C2C"/>
-                          </a:solidFill>
-                          <a:latin typeface="Arial"/>
-                          <a:ea typeface="微软雅黑"/>
-                        </a:rPr>
-                        <a:t>206.6</a:t>
-                      </a:r>
-                    </a:p>
-                  </a:txBody>
-                  <a:tcPr marL="54864" marR="54864" marT="18288" marB="18288" anchor="ctr">
-                    <a:solidFill>
-                      <a:srgbClr val="F2F4F7"/>
-                    </a:solidFill>
-                  </a:tcPr>
-                </a:tc>
-                <a:tc>
-                  <a:txBody>
-                    <a:bodyPr wrap="square"/>
-                    <a:lstStyle/>
-                    <a:p>
-                      <a:pPr algn="ctr"/>
-                      <a:r>
-                        <a:rPr sz="1200" b="0">
-                          <a:solidFill>
-                            <a:srgbClr val="2E2C2C"/>
-                          </a:solidFill>
-                          <a:latin typeface="Arial"/>
-                          <a:ea typeface="微软雅黑"/>
-                        </a:rPr>
-                        <a:t>0.576</a:t>
-                      </a:r>
-                    </a:p>
-                  </a:txBody>
-                  <a:tcPr marL="54864" marR="54864" marT="18288" marB="18288" anchor="ctr">
-                    <a:solidFill>
-                      <a:srgbClr val="F2F4F7"/>
-                    </a:solidFill>
-                  </a:tcPr>
-                </a:tc>
-                <a:tc>
-                  <a:txBody>
-                    <a:bodyPr wrap="square"/>
-                    <a:lstStyle/>
-                    <a:p>
-                      <a:pPr algn="ctr"/>
-                      <a:r>
-                        <a:rPr sz="1200" b="0">
-                          <a:solidFill>
-                            <a:srgbClr val="2E2C2C"/>
-                          </a:solidFill>
-                          <a:latin typeface="Arial"/>
-                          <a:ea typeface="微软雅黑"/>
-                        </a:rPr>
-                        <a:t>0.353</a:t>
-                      </a:r>
-                    </a:p>
-                  </a:txBody>
-                  <a:tcPr marL="54864" marR="54864" marT="18288" marB="18288" anchor="ctr">
-                    <a:solidFill>
-                      <a:srgbClr val="F2F4F7"/>
-                    </a:solidFill>
-                  </a:tcPr>
-                </a:tc>
-              </a:tr>
-            </a:tbl>
-          </a:graphicData>
-        </a:graphic>
-      </p:graphicFrame>
-      <p:sp>
-        <p:nvSpPr>
-          <p:cNvPr id="9005" name="TextBox 9004"/>
-          <p:cNvSpPr txBox="1"/>
-          <p:nvPr/>
-        </p:nvSpPr>
-        <p:spPr>
-          <a:xfrm>
-            <a:off x="566928" y="5074920"/>
-            <a:ext cx="10972800" cy="914400"/>
-          </a:xfrm>
-          <a:prstGeom prst="rect">
-            <a:avLst/>
-          </a:prstGeom>
-          <a:noFill/>
-        </p:spPr>
-        <p:txBody>
-          <a:bodyPr wrap="square" anchor="t" lIns="0" rIns="0" tIns="0" bIns="0">
-            <a:spAutoFit/>
-          </a:bodyPr>
-          <a:lstStyle/>
-          <a:p>
-            <a:pPr algn="l">
-              <a:lnSpc>
-                <a:spcPct val="115000"/>
-              </a:lnSpc>
-            </a:pPr>
-            <a:r>
-              <a:rPr sz="1300" b="0">
-                <a:solidFill>
-                  <a:srgbClr val="2E2C2C"/>
-                </a:solidFill>
-                <a:latin typeface="Arial"/>
-                <a:ea typeface="微软雅黑"/>
-              </a:rPr>
-              <a:t>▪  同组预留等待与决策共用进程与队列</a:t>
-            </a:r>
-          </a:p>
-          <a:p>
-            <a:pPr algn="l">
-              <a:lnSpc>
-                <a:spcPct val="115000"/>
-              </a:lnSpc>
-              <a:spcBef>
-                <a:spcPts val="600"/>
-              </a:spcBef>
-            </a:pPr>
-            <a:r>
-              <a:rPr sz="1300" b="0">
-                <a:solidFill>
-                  <a:srgbClr val="2E2C2C"/>
-                </a:solidFill>
-                <a:latin typeface="Arial"/>
-                <a:ea typeface="微软雅黑"/>
-              </a:rPr>
-              <a:t>▪  未用独立计时实验分离两段耗时</a:t>
-            </a:r>
-          </a:p>
-          <a:p>
-            <a:pPr algn="l">
-              <a:lnSpc>
-                <a:spcPct val="115000"/>
-              </a:lnSpc>
-              <a:spcBef>
-                <a:spcPts val="600"/>
-              </a:spcBef>
-            </a:pPr>
-            <a:r>
-              <a:rPr sz="1300" b="0">
-                <a:solidFill>
-                  <a:srgbClr val="2E2C2C"/>
-                </a:solidFill>
-                <a:latin typeface="Arial"/>
-                <a:ea typeface="微软雅黑"/>
-              </a:rPr>
-              <a:t>▪  已在论文 §6.8 列为局限</a:t>
-            </a:r>
-          </a:p>
-        </p:txBody>
-      </p:sp>
-      <p:sp>
-        <p:nvSpPr>
-          <p:cNvPr id="9006" name="TextBox 9005"/>
-          <p:cNvSpPr txBox="1"/>
-          <p:nvPr/>
-        </p:nvSpPr>
-        <p:spPr>
-          <a:xfrm>
-            <a:off x="10780776" y="6345936"/>
-            <a:ext cx="850392" cy="219456"/>
-          </a:xfrm>
-          <a:prstGeom prst="rect">
-            <a:avLst/>
-          </a:prstGeom>
-          <a:noFill/>
-        </p:spPr>
-        <p:txBody>
-          <a:bodyPr wrap="square" anchor="t" lIns="0" rIns="0" tIns="0" bIns="0">
-            <a:spAutoFit/>
-          </a:bodyPr>
-          <a:lstStyle/>
-          <a:p>
-            <a:pPr algn="r"/>
-            <a:r>
-              <a:rPr sz="950" b="0">
-                <a:solidFill>
-                  <a:srgbClr val="636363"/>
-                </a:solidFill>
-                <a:latin typeface="Arial"/>
-                <a:ea typeface="微软雅黑"/>
-              </a:rPr>
-              <a:t>B4</a:t>
-            </a:r>
-          </a:p>
-        </p:txBody>
-      </p:sp>
-    </p:spTree>
-  </p:cSld>
-  <p:clrMapOvr>
-    <a:masterClrMapping/>
-  </p:clrMapOvr>
-</p:sld>
-</file>
-
-<file path=ppt/slides/slide29.xml><?xml version="1.0" encoding="utf-8"?>
-<p:sld xmlns:a="http://schemas.openxmlformats.org/drawingml/2006/main" xmlns:p="http://schemas.openxmlformats.org/presentationml/2006/main" xmlns:r="http://schemas.openxmlformats.org/officeDocument/2006/relationships">
-  <p:cSld>
-    <p:bg>
-      <p:bgPr>
-        <a:solidFill>
-          <a:srgbClr val="FFFFFF"/>
-        </a:solidFill>
-        <a:effectLst/>
-      </p:bgPr>
-    </p:bg>
-    <p:spTree>
-      <p:nvGrpSpPr>
-        <p:cNvPr id="1" name=""/>
-        <p:cNvGrpSpPr/>
-        <p:nvPr/>
-      </p:nvGrpSpPr>
-      <p:grpSpPr/>
-      <p:sp>
-        <p:nvSpPr>
-          <p:cNvPr id="9000" name="Freeform 5"/>
-          <p:cNvSpPr/>
-          <p:nvPr/>
-        </p:nvSpPr>
-        <p:spPr>
-          <a:xfrm>
-            <a:off x="182880" y="274320"/>
-            <a:ext cx="310896" cy="402336"/>
-          </a:xfrm>
-          <a:custGeom>
-            <a:avLst/>
-            <a:gdLst/>
-            <a:ahLst/>
-            <a:cxnLst>
-              <a:cxn ang="0">
-                <a:pos x="2147483647" y="2147483647"/>
-              </a:cxn>
-              <a:cxn ang="0">
-                <a:pos x="2147483647" y="2147483647"/>
-              </a:cxn>
-              <a:cxn ang="0">
-                <a:pos x="2147483647" y="2147483647"/>
-              </a:cxn>
-              <a:cxn ang="0">
-                <a:pos x="2147483647" y="2147483647"/>
-              </a:cxn>
-              <a:cxn ang="0">
-                <a:pos x="2147483647" y="2147483647"/>
-              </a:cxn>
-              <a:cxn ang="0">
-                <a:pos x="2147483647" y="2147483647"/>
-              </a:cxn>
-              <a:cxn ang="0">
-                <a:pos x="2147483647" y="2147483647"/>
-              </a:cxn>
-              <a:cxn ang="0">
-                <a:pos x="2147483647" y="2147483647"/>
-              </a:cxn>
-              <a:cxn ang="0">
-                <a:pos x="2147483647" y="0"/>
-              </a:cxn>
-              <a:cxn ang="0">
-                <a:pos x="2147483647" y="2147483647"/>
-              </a:cxn>
-              <a:cxn ang="0">
-                <a:pos x="2147483647" y="2147483647"/>
-              </a:cxn>
-              <a:cxn ang="0">
-                <a:pos x="2147483647" y="2147483647"/>
-              </a:cxn>
-              <a:cxn ang="0">
-                <a:pos x="2147483647" y="2147483647"/>
-              </a:cxn>
-              <a:cxn ang="0">
-                <a:pos x="2147483647" y="2147483647"/>
-              </a:cxn>
-              <a:cxn ang="0">
-                <a:pos x="2147483647" y="2147483647"/>
-              </a:cxn>
-              <a:cxn ang="0">
-                <a:pos x="2147483647" y="2147483647"/>
-              </a:cxn>
-              <a:cxn ang="0">
-                <a:pos x="2147483647" y="2147483647"/>
-              </a:cxn>
-              <a:cxn ang="0">
-                <a:pos x="2147483647" y="2147483647"/>
-              </a:cxn>
-              <a:cxn ang="0">
-                <a:pos x="2147483647" y="2147483647"/>
-              </a:cxn>
-              <a:cxn ang="0">
-                <a:pos x="0" y="2147483647"/>
-              </a:cxn>
-              <a:cxn ang="0">
-                <a:pos x="2147483647" y="2147483647"/>
-              </a:cxn>
-            </a:cxnLst>
-            <a:rect l="0" t="0" r="0" b="0"/>
-            <a:pathLst>
-              <a:path w="574" h="681">
-                <a:moveTo>
-                  <a:pt x="120" y="441"/>
-                </a:moveTo>
-                <a:cubicBezTo>
-                  <a:pt x="153" y="441"/>
-                  <a:pt x="183" y="454"/>
-                  <a:pt x="205" y="476"/>
-                </a:cubicBezTo>
-                <a:lnTo>
-                  <a:pt x="389" y="329"/>
-                </a:lnTo>
-                <a:cubicBezTo>
-                  <a:pt x="383" y="317"/>
-                  <a:pt x="380" y="303"/>
-                  <a:pt x="380" y="289"/>
-                </a:cubicBezTo>
-                <a:cubicBezTo>
-                  <a:pt x="380" y="271"/>
-                  <a:pt x="384" y="255"/>
-                  <a:pt x="392" y="241"/>
-                </a:cubicBezTo>
-                <a:lnTo>
-                  <a:pt x="270" y="138"/>
-                </a:lnTo>
-                <a:cubicBezTo>
-                  <a:pt x="256" y="151"/>
-                  <a:pt x="237" y="159"/>
-                  <a:pt x="217" y="159"/>
-                </a:cubicBezTo>
-                <a:cubicBezTo>
-                  <a:pt x="173" y="159"/>
-                  <a:pt x="137" y="123"/>
-                  <a:pt x="137" y="79"/>
-                </a:cubicBezTo>
-                <a:cubicBezTo>
-                  <a:pt x="137" y="36"/>
-                  <a:pt x="173" y="0"/>
-                  <a:pt x="217" y="0"/>
-                </a:cubicBezTo>
-                <a:cubicBezTo>
-                  <a:pt x="260" y="0"/>
-                  <a:pt x="296" y="36"/>
-                  <a:pt x="296" y="79"/>
-                </a:cubicBezTo>
-                <a:cubicBezTo>
-                  <a:pt x="296" y="91"/>
-                  <a:pt x="293" y="103"/>
-                  <a:pt x="289" y="113"/>
-                </a:cubicBezTo>
-                <a:lnTo>
-                  <a:pt x="412" y="217"/>
-                </a:lnTo>
-                <a:cubicBezTo>
-                  <a:pt x="429" y="201"/>
-                  <a:pt x="452" y="192"/>
-                  <a:pt x="477" y="192"/>
-                </a:cubicBezTo>
-                <a:cubicBezTo>
-                  <a:pt x="530" y="192"/>
-                  <a:pt x="574" y="235"/>
-                  <a:pt x="574" y="289"/>
-                </a:cubicBezTo>
-                <a:cubicBezTo>
-                  <a:pt x="574" y="342"/>
-                  <a:pt x="530" y="386"/>
-                  <a:pt x="477" y="386"/>
-                </a:cubicBezTo>
-                <a:cubicBezTo>
-                  <a:pt x="449" y="386"/>
-                  <a:pt x="424" y="374"/>
-                  <a:pt x="406" y="355"/>
-                </a:cubicBezTo>
-                <a:lnTo>
-                  <a:pt x="224" y="501"/>
-                </a:lnTo>
-                <a:cubicBezTo>
-                  <a:pt x="234" y="518"/>
-                  <a:pt x="240" y="539"/>
-                  <a:pt x="240" y="561"/>
-                </a:cubicBezTo>
-                <a:cubicBezTo>
-                  <a:pt x="240" y="627"/>
-                  <a:pt x="186" y="681"/>
-                  <a:pt x="120" y="681"/>
-                </a:cubicBezTo>
-                <a:cubicBezTo>
-                  <a:pt x="54" y="681"/>
-                  <a:pt x="0" y="627"/>
-                  <a:pt x="0" y="561"/>
-                </a:cubicBezTo>
-                <a:cubicBezTo>
-                  <a:pt x="0" y="495"/>
-                  <a:pt x="54" y="441"/>
-                  <a:pt x="120" y="441"/>
-                </a:cubicBezTo>
-                <a:close/>
-              </a:path>
-            </a:pathLst>
-          </a:custGeom>
-          <a:solidFill>
-            <a:srgbClr val="113E6A"/>
-          </a:solidFill>
-          <a:ln w="9525">
-            <a:noFill/>
-          </a:ln>
-        </p:spPr>
-        <p:txBody>
-          <a:bodyPr/>
-          <a:lstStyle/>
-          <a:p>
-            <a:endParaRPr lang="zh-CN" altLang="en-US"/>
-          </a:p>
-        </p:txBody>
-      </p:sp>
-      <p:pic>
-        <p:nvPicPr>
-          <p:cNvPr id="9001" name="Picture 9000" descr="beihang-logo-navy.png"/>
-          <p:cNvPicPr>
-            <a:picLocks noChangeAspect="1"/>
-          </p:cNvPicPr>
-          <p:nvPr/>
-        </p:nvPicPr>
-        <p:blipFill>
-          <a:blip r:embed="rId2"/>
-          <a:stretch>
-            <a:fillRect/>
-          </a:stretch>
-        </p:blipFill>
-        <p:spPr>
-          <a:xfrm>
-            <a:off x="9336024" y="91665"/>
-            <a:ext cx="2642616" cy="502469"/>
-          </a:xfrm>
-          <a:prstGeom prst="rect">
-            <a:avLst/>
-          </a:prstGeom>
-        </p:spPr>
-      </p:pic>
-      <p:sp>
-        <p:nvSpPr>
-          <p:cNvPr id="9002" name="TextBox 9001"/>
-          <p:cNvSpPr txBox="1"/>
-          <p:nvPr/>
-        </p:nvSpPr>
-        <p:spPr>
-          <a:xfrm>
-            <a:off x="566928" y="155448"/>
-            <a:ext cx="8549640" cy="621792"/>
-          </a:xfrm>
-          <a:prstGeom prst="rect">
-            <a:avLst/>
-          </a:prstGeom>
-          <a:noFill/>
-        </p:spPr>
-        <p:txBody>
-          <a:bodyPr wrap="square" anchor="ctr" lIns="0" rIns="0" tIns="0" bIns="0">
-            <a:spAutoFit/>
-          </a:bodyPr>
-          <a:lstStyle/>
-          <a:p>
-            <a:pPr algn="l">
-              <a:lnSpc>
-                <a:spcPct val="100000"/>
-              </a:lnSpc>
-            </a:pPr>
-            <a:r>
-              <a:rPr sz="3000" b="1">
-                <a:solidFill>
-                  <a:srgbClr val="113E6A"/>
-                </a:solidFill>
-                <a:latin typeface="Arial"/>
-                <a:ea typeface="微软雅黑"/>
-              </a:rPr>
-              <a:t>资源公平性与未量化的资源收益</a:t>
-            </a:r>
-          </a:p>
-        </p:txBody>
-      </p:sp>
-      <p:sp>
-        <p:nvSpPr>
-          <p:cNvPr id="9003" name="TextBox 9002"/>
-          <p:cNvSpPr txBox="1"/>
-          <p:nvPr/>
-        </p:nvSpPr>
-        <p:spPr>
-          <a:xfrm>
-            <a:off x="566928" y="1261872"/>
-            <a:ext cx="10881360" cy="438912"/>
-          </a:xfrm>
-          <a:prstGeom prst="rect">
-            <a:avLst/>
-          </a:prstGeom>
-          <a:noFill/>
-        </p:spPr>
-        <p:txBody>
-          <a:bodyPr wrap="square" anchor="ctr" lIns="0" rIns="0" tIns="0" bIns="0">
-            <a:spAutoFit/>
-          </a:bodyPr>
-          <a:lstStyle/>
-          <a:p>
-            <a:pPr algn="l">
-              <a:lnSpc>
-                <a:spcPct val="110000"/>
-              </a:lnSpc>
-            </a:pPr>
-            <a:r>
-              <a:rPr sz="1800" b="1">
-                <a:solidFill>
-                  <a:srgbClr val="0070C0"/>
-                </a:solidFill>
-                <a:latin typeface="Arial"/>
-                <a:ea typeface="微软雅黑"/>
-              </a:rPr>
-              <a:t>每 Deployment 同规格，对 ENO 略不利</a:t>
-            </a:r>
-          </a:p>
-        </p:txBody>
-      </p:sp>
-      <p:sp>
-        <p:nvSpPr>
-          <p:cNvPr id="9004" name="TextBox 9003"/>
-          <p:cNvSpPr txBox="1"/>
-          <p:nvPr/>
-        </p:nvSpPr>
-        <p:spPr>
-          <a:xfrm>
-            <a:off x="566928" y="1965960"/>
-            <a:ext cx="10607040" cy="1417320"/>
-          </a:xfrm>
-          <a:prstGeom prst="rect">
-            <a:avLst/>
-          </a:prstGeom>
-          <a:noFill/>
-        </p:spPr>
-        <p:txBody>
-          <a:bodyPr wrap="square" anchor="t" lIns="0" rIns="0" tIns="0" bIns="0">
-            <a:spAutoFit/>
-          </a:bodyPr>
-          <a:lstStyle/>
-          <a:p>
-            <a:pPr algn="l">
-              <a:lnSpc>
-                <a:spcPct val="115000"/>
-              </a:lnSpc>
-            </a:pPr>
-            <a:r>
-              <a:rPr sz="1700" b="0">
-                <a:solidFill>
-                  <a:srgbClr val="2E2C2C"/>
-                </a:solidFill>
-                <a:latin typeface="Arial"/>
-                <a:ea typeface="微软雅黑"/>
-              </a:rPr>
-              <a:t>▪  Scheduler Pod 统一 2C/4G</a:t>
-            </a:r>
-          </a:p>
-          <a:p>
-            <a:pPr algn="l">
-              <a:lnSpc>
-                <a:spcPct val="115000"/>
-              </a:lnSpc>
-              <a:spcBef>
-                <a:spcPts val="1800"/>
-              </a:spcBef>
-            </a:pPr>
-            <a:r>
-              <a:rPr sz="1700" b="0">
-                <a:solidFill>
-                  <a:srgbClr val="2E2C2C"/>
-                </a:solidFill>
-                <a:latin typeface="Arial"/>
-                <a:ea typeface="微软雅黑"/>
-              </a:rPr>
-              <a:t>▪  ENO 少一个 Binder Deployment</a:t>
-            </a:r>
-          </a:p>
-          <a:p>
-            <a:pPr algn="l">
-              <a:lnSpc>
-                <a:spcPct val="115000"/>
-              </a:lnSpc>
-              <a:spcBef>
-                <a:spcPts val="1800"/>
-              </a:spcBef>
-            </a:pPr>
-            <a:r>
-              <a:rPr sz="1700" b="0">
-                <a:solidFill>
-                  <a:srgbClr val="2E2C2C"/>
-                </a:solidFill>
-                <a:latin typeface="Arial"/>
-                <a:ea typeface="微软雅黑"/>
-              </a:rPr>
-              <a:t>▪  集群总资源收益未量化</a:t>
-            </a:r>
-          </a:p>
-        </p:txBody>
-      </p:sp>
-      <p:sp>
-        <p:nvSpPr>
-          <p:cNvPr id="9005" name="TextBox 9004"/>
-          <p:cNvSpPr txBox="1"/>
-          <p:nvPr/>
-        </p:nvSpPr>
-        <p:spPr>
-          <a:xfrm>
-            <a:off x="10780776" y="6345936"/>
-            <a:ext cx="850392" cy="219456"/>
-          </a:xfrm>
-          <a:prstGeom prst="rect">
-            <a:avLst/>
-          </a:prstGeom>
-          <a:noFill/>
-        </p:spPr>
-        <p:txBody>
-          <a:bodyPr wrap="square" anchor="t" lIns="0" rIns="0" tIns="0" bIns="0">
-            <a:spAutoFit/>
-          </a:bodyPr>
-          <a:lstStyle/>
-          <a:p>
-            <a:pPr algn="r"/>
-            <a:r>
-              <a:rPr sz="950" b="0">
-                <a:solidFill>
-                  <a:srgbClr val="636363"/>
-                </a:solidFill>
-                <a:latin typeface="Arial"/>
-                <a:ea typeface="微软雅黑"/>
-              </a:rPr>
-              <a:t>B5</a:t>
             </a:r>
           </a:p>
         </p:txBody>
@@ -25476,449 +20890,6 @@
                 <a:ea typeface="微软雅黑"/>
               </a:rPr>
               <a:t>3 / 24</a:t>
-            </a:r>
-          </a:p>
-        </p:txBody>
-      </p:sp>
-    </p:spTree>
-  </p:cSld>
-  <p:clrMapOvr>
-    <a:masterClrMapping/>
-  </p:clrMapOvr>
-</p:sld>
-</file>
-
-<file path=ppt/slides/slide30.xml><?xml version="1.0" encoding="utf-8"?>
-<p:sld xmlns:a="http://schemas.openxmlformats.org/drawingml/2006/main" xmlns:p="http://schemas.openxmlformats.org/presentationml/2006/main" xmlns:r="http://schemas.openxmlformats.org/officeDocument/2006/relationships">
-  <p:cSld>
-    <p:bg>
-      <p:bgPr>
-        <a:solidFill>
-          <a:srgbClr val="FFFFFF"/>
-        </a:solidFill>
-        <a:effectLst/>
-      </p:bgPr>
-    </p:bg>
-    <p:spTree>
-      <p:nvGrpSpPr>
-        <p:cNvPr id="1" name=""/>
-        <p:cNvGrpSpPr/>
-        <p:nvPr/>
-      </p:nvGrpSpPr>
-      <p:grpSpPr/>
-      <p:sp>
-        <p:nvSpPr>
-          <p:cNvPr id="9000" name="Freeform 5"/>
-          <p:cNvSpPr/>
-          <p:nvPr/>
-        </p:nvSpPr>
-        <p:spPr>
-          <a:xfrm>
-            <a:off x="182880" y="274320"/>
-            <a:ext cx="310896" cy="402336"/>
-          </a:xfrm>
-          <a:custGeom>
-            <a:avLst/>
-            <a:gdLst/>
-            <a:ahLst/>
-            <a:cxnLst>
-              <a:cxn ang="0">
-                <a:pos x="2147483647" y="2147483647"/>
-              </a:cxn>
-              <a:cxn ang="0">
-                <a:pos x="2147483647" y="2147483647"/>
-              </a:cxn>
-              <a:cxn ang="0">
-                <a:pos x="2147483647" y="2147483647"/>
-              </a:cxn>
-              <a:cxn ang="0">
-                <a:pos x="2147483647" y="2147483647"/>
-              </a:cxn>
-              <a:cxn ang="0">
-                <a:pos x="2147483647" y="2147483647"/>
-              </a:cxn>
-              <a:cxn ang="0">
-                <a:pos x="2147483647" y="2147483647"/>
-              </a:cxn>
-              <a:cxn ang="0">
-                <a:pos x="2147483647" y="2147483647"/>
-              </a:cxn>
-              <a:cxn ang="0">
-                <a:pos x="2147483647" y="2147483647"/>
-              </a:cxn>
-              <a:cxn ang="0">
-                <a:pos x="2147483647" y="0"/>
-              </a:cxn>
-              <a:cxn ang="0">
-                <a:pos x="2147483647" y="2147483647"/>
-              </a:cxn>
-              <a:cxn ang="0">
-                <a:pos x="2147483647" y="2147483647"/>
-              </a:cxn>
-              <a:cxn ang="0">
-                <a:pos x="2147483647" y="2147483647"/>
-              </a:cxn>
-              <a:cxn ang="0">
-                <a:pos x="2147483647" y="2147483647"/>
-              </a:cxn>
-              <a:cxn ang="0">
-                <a:pos x="2147483647" y="2147483647"/>
-              </a:cxn>
-              <a:cxn ang="0">
-                <a:pos x="2147483647" y="2147483647"/>
-              </a:cxn>
-              <a:cxn ang="0">
-                <a:pos x="2147483647" y="2147483647"/>
-              </a:cxn>
-              <a:cxn ang="0">
-                <a:pos x="2147483647" y="2147483647"/>
-              </a:cxn>
-              <a:cxn ang="0">
-                <a:pos x="2147483647" y="2147483647"/>
-              </a:cxn>
-              <a:cxn ang="0">
-                <a:pos x="2147483647" y="2147483647"/>
-              </a:cxn>
-              <a:cxn ang="0">
-                <a:pos x="0" y="2147483647"/>
-              </a:cxn>
-              <a:cxn ang="0">
-                <a:pos x="2147483647" y="2147483647"/>
-              </a:cxn>
-            </a:cxnLst>
-            <a:rect l="0" t="0" r="0" b="0"/>
-            <a:pathLst>
-              <a:path w="574" h="681">
-                <a:moveTo>
-                  <a:pt x="120" y="441"/>
-                </a:moveTo>
-                <a:cubicBezTo>
-                  <a:pt x="153" y="441"/>
-                  <a:pt x="183" y="454"/>
-                  <a:pt x="205" y="476"/>
-                </a:cubicBezTo>
-                <a:lnTo>
-                  <a:pt x="389" y="329"/>
-                </a:lnTo>
-                <a:cubicBezTo>
-                  <a:pt x="383" y="317"/>
-                  <a:pt x="380" y="303"/>
-                  <a:pt x="380" y="289"/>
-                </a:cubicBezTo>
-                <a:cubicBezTo>
-                  <a:pt x="380" y="271"/>
-                  <a:pt x="384" y="255"/>
-                  <a:pt x="392" y="241"/>
-                </a:cubicBezTo>
-                <a:lnTo>
-                  <a:pt x="270" y="138"/>
-                </a:lnTo>
-                <a:cubicBezTo>
-                  <a:pt x="256" y="151"/>
-                  <a:pt x="237" y="159"/>
-                  <a:pt x="217" y="159"/>
-                </a:cubicBezTo>
-                <a:cubicBezTo>
-                  <a:pt x="173" y="159"/>
-                  <a:pt x="137" y="123"/>
-                  <a:pt x="137" y="79"/>
-                </a:cubicBezTo>
-                <a:cubicBezTo>
-                  <a:pt x="137" y="36"/>
-                  <a:pt x="173" y="0"/>
-                  <a:pt x="217" y="0"/>
-                </a:cubicBezTo>
-                <a:cubicBezTo>
-                  <a:pt x="260" y="0"/>
-                  <a:pt x="296" y="36"/>
-                  <a:pt x="296" y="79"/>
-                </a:cubicBezTo>
-                <a:cubicBezTo>
-                  <a:pt x="296" y="91"/>
-                  <a:pt x="293" y="103"/>
-                  <a:pt x="289" y="113"/>
-                </a:cubicBezTo>
-                <a:lnTo>
-                  <a:pt x="412" y="217"/>
-                </a:lnTo>
-                <a:cubicBezTo>
-                  <a:pt x="429" y="201"/>
-                  <a:pt x="452" y="192"/>
-                  <a:pt x="477" y="192"/>
-                </a:cubicBezTo>
-                <a:cubicBezTo>
-                  <a:pt x="530" y="192"/>
-                  <a:pt x="574" y="235"/>
-                  <a:pt x="574" y="289"/>
-                </a:cubicBezTo>
-                <a:cubicBezTo>
-                  <a:pt x="574" y="342"/>
-                  <a:pt x="530" y="386"/>
-                  <a:pt x="477" y="386"/>
-                </a:cubicBezTo>
-                <a:cubicBezTo>
-                  <a:pt x="449" y="386"/>
-                  <a:pt x="424" y="374"/>
-                  <a:pt x="406" y="355"/>
-                </a:cubicBezTo>
-                <a:lnTo>
-                  <a:pt x="224" y="501"/>
-                </a:lnTo>
-                <a:cubicBezTo>
-                  <a:pt x="234" y="518"/>
-                  <a:pt x="240" y="539"/>
-                  <a:pt x="240" y="561"/>
-                </a:cubicBezTo>
-                <a:cubicBezTo>
-                  <a:pt x="240" y="627"/>
-                  <a:pt x="186" y="681"/>
-                  <a:pt x="120" y="681"/>
-                </a:cubicBezTo>
-                <a:cubicBezTo>
-                  <a:pt x="54" y="681"/>
-                  <a:pt x="0" y="627"/>
-                  <a:pt x="0" y="561"/>
-                </a:cubicBezTo>
-                <a:cubicBezTo>
-                  <a:pt x="0" y="495"/>
-                  <a:pt x="54" y="441"/>
-                  <a:pt x="120" y="441"/>
-                </a:cubicBezTo>
-                <a:close/>
-              </a:path>
-            </a:pathLst>
-          </a:custGeom>
-          <a:solidFill>
-            <a:srgbClr val="113E6A"/>
-          </a:solidFill>
-          <a:ln w="9525">
-            <a:noFill/>
-          </a:ln>
-        </p:spPr>
-        <p:txBody>
-          <a:bodyPr/>
-          <a:lstStyle/>
-          <a:p>
-            <a:endParaRPr lang="zh-CN" altLang="en-US"/>
-          </a:p>
-        </p:txBody>
-      </p:sp>
-      <p:pic>
-        <p:nvPicPr>
-          <p:cNvPr id="9001" name="Picture 9000" descr="beihang-logo-navy.png"/>
-          <p:cNvPicPr>
-            <a:picLocks noChangeAspect="1"/>
-          </p:cNvPicPr>
-          <p:nvPr/>
-        </p:nvPicPr>
-        <p:blipFill>
-          <a:blip r:embed="rId2"/>
-          <a:stretch>
-            <a:fillRect/>
-          </a:stretch>
-        </p:blipFill>
-        <p:spPr>
-          <a:xfrm>
-            <a:off x="9336024" y="91665"/>
-            <a:ext cx="2642616" cy="502469"/>
-          </a:xfrm>
-          <a:prstGeom prst="rect">
-            <a:avLst/>
-          </a:prstGeom>
-        </p:spPr>
-      </p:pic>
-      <p:sp>
-        <p:nvSpPr>
-          <p:cNvPr id="9002" name="TextBox 9001"/>
-          <p:cNvSpPr txBox="1"/>
-          <p:nvPr/>
-        </p:nvSpPr>
-        <p:spPr>
-          <a:xfrm>
-            <a:off x="566928" y="155448"/>
-            <a:ext cx="8549640" cy="621792"/>
-          </a:xfrm>
-          <a:prstGeom prst="rect">
-            <a:avLst/>
-          </a:prstGeom>
-          <a:noFill/>
-        </p:spPr>
-        <p:txBody>
-          <a:bodyPr wrap="square" anchor="ctr" lIns="0" rIns="0" tIns="0" bIns="0">
-            <a:spAutoFit/>
-          </a:bodyPr>
-          <a:lstStyle/>
-          <a:p>
-            <a:pPr algn="l">
-              <a:lnSpc>
-                <a:spcPct val="100000"/>
-              </a:lnSpc>
-            </a:pPr>
-            <a:r>
-              <a:rPr sz="3000" b="1">
-                <a:solidFill>
-                  <a:srgbClr val="113E6A"/>
-                </a:solidFill>
-                <a:latin typeface="Arial"/>
-                <a:ea typeface="微软雅黑"/>
-              </a:rPr>
-              <a:t>一键复现</a:t>
-            </a:r>
-          </a:p>
-        </p:txBody>
-      </p:sp>
-      <p:sp>
-        <p:nvSpPr>
-          <p:cNvPr id="9003" name="TextBox 9002"/>
-          <p:cNvSpPr txBox="1"/>
-          <p:nvPr/>
-        </p:nvSpPr>
-        <p:spPr>
-          <a:xfrm>
-            <a:off x="566928" y="1261872"/>
-            <a:ext cx="10881360" cy="438912"/>
-          </a:xfrm>
-          <a:prstGeom prst="rect">
-            <a:avLst/>
-          </a:prstGeom>
-          <a:noFill/>
-        </p:spPr>
-        <p:txBody>
-          <a:bodyPr wrap="square" anchor="ctr" lIns="0" rIns="0" tIns="0" bIns="0">
-            <a:spAutoFit/>
-          </a:bodyPr>
-          <a:lstStyle/>
-          <a:p>
-            <a:pPr algn="l">
-              <a:lnSpc>
-                <a:spcPct val="110000"/>
-              </a:lnSpc>
-            </a:pPr>
-            <a:r>
-              <a:rPr sz="1800" b="1">
-                <a:solidFill>
-                  <a:srgbClr val="0070C0"/>
-                </a:solidFill>
-                <a:latin typeface="Arial"/>
-                <a:ea typeface="微软雅黑"/>
-              </a:rPr>
-              <a:t>从零到结果的全部入口</a:t>
-            </a:r>
-          </a:p>
-        </p:txBody>
-      </p:sp>
-      <p:sp>
-        <p:nvSpPr>
-          <p:cNvPr id="9004" name="TextBox 9003"/>
-          <p:cNvSpPr txBox="1"/>
-          <p:nvPr/>
-        </p:nvSpPr>
-        <p:spPr>
-          <a:xfrm>
-            <a:off x="566928" y="1965960"/>
-            <a:ext cx="10607040" cy="1417320"/>
-          </a:xfrm>
-          <a:prstGeom prst="rect">
-            <a:avLst/>
-          </a:prstGeom>
-          <a:noFill/>
-        </p:spPr>
-        <p:txBody>
-          <a:bodyPr wrap="square" anchor="t" lIns="0" rIns="0" tIns="0" bIns="0">
-            <a:spAutoFit/>
-          </a:bodyPr>
-          <a:lstStyle/>
-          <a:p>
-            <a:pPr algn="l">
-              <a:lnSpc>
-                <a:spcPct val="115000"/>
-              </a:lnSpc>
-            </a:pPr>
-            <a:r>
-              <a:rPr sz="1700" b="0">
-                <a:solidFill>
-                  <a:srgbClr val="2E2C2C"/>
-                </a:solidFill>
-                <a:latin typeface="Arial"/>
-                <a:ea typeface="微软雅黑"/>
-              </a:rPr>
-              <a:t>▪  run-experiment.sh：12 步实验流程</a:t>
-            </a:r>
-          </a:p>
-          <a:p>
-            <a:pPr algn="l">
-              <a:lnSpc>
-                <a:spcPct val="115000"/>
-              </a:lnSpc>
-              <a:spcBef>
-                <a:spcPts val="1800"/>
-              </a:spcBef>
-            </a:pPr>
-            <a:r>
-              <a:rPr sz="1700" b="0">
-                <a:solidFill>
-                  <a:srgbClr val="2E2C2C"/>
-                </a:solidFill>
-                <a:latin typeface="Arial"/>
-                <a:ea typeface="微软雅黑"/>
-              </a:rPr>
-              <a:t>▪  plot-results.py / collect/：聚合与出图</a:t>
-            </a:r>
-          </a:p>
-          <a:p>
-            <a:pPr algn="l">
-              <a:lnSpc>
-                <a:spcPct val="115000"/>
-              </a:lnSpc>
-              <a:spcBef>
-                <a:spcPts val="1800"/>
-              </a:spcBef>
-            </a:pPr>
-            <a:r>
-              <a:rPr sz="1700" b="0">
-                <a:solidFill>
-                  <a:srgbClr val="2E2C2C"/>
-                </a:solidFill>
-                <a:latin typeface="Arial"/>
-                <a:ea typeface="微软雅黑"/>
-              </a:rPr>
-              <a:t>▪  results/compare/：16 场景产物</a:t>
-            </a:r>
-          </a:p>
-        </p:txBody>
-      </p:sp>
-      <p:sp>
-        <p:nvSpPr>
-          <p:cNvPr id="9005" name="TextBox 9004"/>
-          <p:cNvSpPr txBox="1"/>
-          <p:nvPr/>
-        </p:nvSpPr>
-        <p:spPr>
-          <a:xfrm>
-            <a:off x="10780776" y="6345936"/>
-            <a:ext cx="850392" cy="219456"/>
-          </a:xfrm>
-          <a:prstGeom prst="rect">
-            <a:avLst/>
-          </a:prstGeom>
-          <a:noFill/>
-        </p:spPr>
-        <p:txBody>
-          <a:bodyPr wrap="square" anchor="t" lIns="0" rIns="0" tIns="0" bIns="0">
-            <a:spAutoFit/>
-          </a:bodyPr>
-          <a:lstStyle/>
-          <a:p>
-            <a:pPr algn="r"/>
-            <a:r>
-              <a:rPr sz="950" b="0">
-                <a:solidFill>
-                  <a:srgbClr val="636363"/>
-                </a:solidFill>
-                <a:latin typeface="Arial"/>
-                <a:ea typeface="微软雅黑"/>
-              </a:rPr>
-              <a:t>B6</a:t>
             </a:r>
           </a:p>
         </p:txBody>

--- a/docs/thesis/defense/答辩PPT-北航模板版.pptx
+++ b/docs/thesis/defense/答辩PPT-北航模板版.pptx
@@ -7116,7 +7116,7 @@
                 <a:latin typeface="Arial"/>
                 <a:ea typeface="微软雅黑"/>
               </a:rPr>
-              <a:t>答辩人：[姓名]　　指导教师：[导师]　　学院：[学院]　　日期：[日期]</a:t>
+              <a:t>答辩人：高铜　　学院：北京航空航天大学</a:t>
             </a:r>
           </a:p>
         </p:txBody>
@@ -19493,7 +19493,7 @@
                 <a:latin typeface="Arial"/>
                 <a:ea typeface="微软雅黑"/>
               </a:rPr>
-              <a:t>答辩人：[姓名]</a:t>
+              <a:t>答辩人：高铜</a:t>
             </a:r>
           </a:p>
           <a:p>
@@ -19510,7 +19510,7 @@
                 <a:latin typeface="Arial"/>
                 <a:ea typeface="微软雅黑"/>
               </a:rPr>
-              <a:t>联系方式：[邮箱]</a:t>
+              <a:t>北京航空航天大学</a:t>
             </a:r>
           </a:p>
         </p:txBody>

--- a/docs/thesis/defense/答辩PPT-北航模板版.pptx
+++ b/docs/thesis/defense/答辩PPT-北航模板版.pptx
@@ -7116,7 +7116,7 @@
                 <a:latin typeface="Arial"/>
                 <a:ea typeface="微软雅黑"/>
               </a:rPr>
-              <a:t>答辩人：高铜　　学院：北京航空航天大学</a:t>
+              <a:t>答辩人：高铜</a:t>
             </a:r>
           </a:p>
         </p:txBody>
@@ -19494,23 +19494,6 @@
                 <a:ea typeface="微软雅黑"/>
               </a:rPr>
               <a:t>答辩人：高铜</a:t>
-            </a:r>
-          </a:p>
-          <a:p>
-            <a:pPr algn="ctr">
-              <a:spcBef>
-                <a:spcPts val="400"/>
-              </a:spcBef>
-            </a:pPr>
-            <a:r>
-              <a:rPr sz="1300" b="0">
-                <a:solidFill>
-                  <a:srgbClr val="636363"/>
-                </a:solidFill>
-                <a:latin typeface="Arial"/>
-                <a:ea typeface="微软雅黑"/>
-              </a:rPr>
-              <a:t>北京航空航天大学</a:t>
             </a:r>
           </a:p>
         </p:txBody>

--- a/docs/thesis/defense/答辩PPT-北航模板版.pptx
+++ b/docs/thesis/defense/答辩PPT-北航模板版.pptx
@@ -7116,7 +7116,7 @@
                 <a:latin typeface="Arial"/>
                 <a:ea typeface="微软雅黑"/>
               </a:rPr>
-              <a:t>答辩人：高铜</a:t>
+              <a:t>答辩人：高铜　　指导教师：兰雨晴 教授</a:t>
             </a:r>
           </a:p>
         </p:txBody>
@@ -19494,6 +19494,23 @@
                 <a:ea typeface="微软雅黑"/>
               </a:rPr>
               <a:t>答辩人：高铜</a:t>
+            </a:r>
+          </a:p>
+          <a:p>
+            <a:pPr algn="ctr">
+              <a:spcBef>
+                <a:spcPts val="400"/>
+              </a:spcBef>
+            </a:pPr>
+            <a:r>
+              <a:rPr sz="1300" b="0">
+                <a:solidFill>
+                  <a:srgbClr val="636363"/>
+                </a:solidFill>
+                <a:latin typeface="Arial"/>
+                <a:ea typeface="微软雅黑"/>
+              </a:rPr>
+              <a:t>指导教师：兰雨晴 教授</a:t>
             </a:r>
           </a:p>
         </p:txBody>

--- a/docs/thesis/defense/答辩PPT-北航模板版.pptx
+++ b/docs/thesis/defense/答辩PPT-北航模板版.pptx
@@ -16232,7 +16232,7 @@
                 <a:latin typeface="Arial"/>
                 <a:ea typeface="微软雅黑"/>
               </a:rPr>
-              <a:t>进程内 Binder 与 CacheAdapter；四层绑定容错与不变量 I</a:t>
+              <a:t>把 Binder 合并进 Scheduler、缓存零拷贝共享；四层容错守住至多绑定一次</a:t>
             </a:r>
           </a:p>
         </p:txBody>

--- a/docs/thesis/defense/答辩PPT-北航模板版.pptx
+++ b/docs/thesis/defense/答辩PPT-北航模板版.pptx
@@ -16196,7 +16196,7 @@
                 <a:latin typeface="Arial"/>
                 <a:ea typeface="微软雅黑"/>
               </a:rPr>
-              <a:t>两项创新</a:t>
+              <a:t>方案与证明</a:t>
             </a:r>
           </a:p>
         </p:txBody>

--- a/docs/thesis/defense/答辩PPT-北航模板版.pptx
+++ b/docs/thesis/defense/答辩PPT-北航模板版.pptx
@@ -16196,7 +16196,7 @@
                 <a:latin typeface="Arial"/>
                 <a:ea typeface="微软雅黑"/>
               </a:rPr>
-              <a:t>方案与证明</a:t>
+              <a:t>核心方案</a:t>
             </a:r>
           </a:p>
         </p:txBody>
@@ -16232,7 +16232,7 @@
                 <a:latin typeface="Arial"/>
                 <a:ea typeface="微软雅黑"/>
               </a:rPr>
-              <a:t>把 Binder 合并进 Scheduler、缓存零拷贝共享；四层容错守住至多绑定一次</a:t>
+              <a:t>把 Binder 合并进 Scheduler、缓存零拷贝共享；四层容错 + 不变量证明</a:t>
             </a:r>
           </a:p>
         </p:txBody>

--- a/docs/thesis/defense/答辩PPT-北航模板版.pptx
+++ b/docs/thesis/defense/答辩PPT-北航模板版.pptx
@@ -15761,7 +15761,7 @@
         </p:nvSpPr>
         <p:spPr>
           <a:xfrm>
-            <a:off x="566928" y="1417320"/>
+            <a:off x="566928" y="1472184"/>
             <a:ext cx="658368" cy="420624"/>
           </a:xfrm>
           <a:prstGeom prst="rect">
@@ -15797,7 +15797,7 @@
         </p:nvSpPr>
         <p:spPr>
           <a:xfrm>
-            <a:off x="1261872" y="1371600"/>
+            <a:off x="1261872" y="1426464"/>
             <a:ext cx="3154680" cy="420624"/>
           </a:xfrm>
           <a:prstGeom prst="rect">
@@ -15833,7 +15833,7 @@
         </p:nvSpPr>
         <p:spPr>
           <a:xfrm>
-            <a:off x="4480560" y="1426464"/>
+            <a:off x="4480560" y="1481328"/>
             <a:ext cx="5486400" cy="384048"/>
           </a:xfrm>
           <a:prstGeom prst="rect">
@@ -15869,7 +15869,7 @@
         </p:nvSpPr>
         <p:spPr>
           <a:xfrm>
-            <a:off x="9985248" y="1399032"/>
+            <a:off x="9985248" y="1453896"/>
             <a:ext cx="1078992" cy="384048"/>
           </a:xfrm>
           <a:prstGeom prst="rect">
@@ -15905,7 +15905,7 @@
         </p:nvSpPr>
         <p:spPr>
           <a:xfrm>
-            <a:off x="566928" y="2066543"/>
+            <a:off x="566928" y="2121408"/>
             <a:ext cx="10497312" cy="7315"/>
           </a:xfrm>
           <a:prstGeom prst="rect">
@@ -15949,7 +15949,7 @@
         </p:nvSpPr>
         <p:spPr>
           <a:xfrm>
-            <a:off x="566928" y="2203703"/>
+            <a:off x="566928" y="2423160"/>
             <a:ext cx="658368" cy="420624"/>
           </a:xfrm>
           <a:prstGeom prst="rect">
@@ -15985,7 +15985,7 @@
         </p:nvSpPr>
         <p:spPr>
           <a:xfrm>
-            <a:off x="1261872" y="2157984"/>
+            <a:off x="1261872" y="2377440"/>
             <a:ext cx="3154680" cy="420624"/>
           </a:xfrm>
           <a:prstGeom prst="rect">
@@ -16021,7 +16021,7 @@
         </p:nvSpPr>
         <p:spPr>
           <a:xfrm>
-            <a:off x="4480560" y="2212848"/>
+            <a:off x="4480560" y="2432304"/>
             <a:ext cx="5486400" cy="384048"/>
           </a:xfrm>
           <a:prstGeom prst="rect">
@@ -16057,7 +16057,7 @@
         </p:nvSpPr>
         <p:spPr>
           <a:xfrm>
-            <a:off x="9985248" y="2185415"/>
+            <a:off x="9985248" y="2404872"/>
             <a:ext cx="1078992" cy="384048"/>
           </a:xfrm>
           <a:prstGeom prst="rect">
@@ -16093,7 +16093,7 @@
         </p:nvSpPr>
         <p:spPr>
           <a:xfrm>
-            <a:off x="566928" y="2852928"/>
+            <a:off x="566928" y="3072384"/>
             <a:ext cx="10497312" cy="7315"/>
           </a:xfrm>
           <a:prstGeom prst="rect">
@@ -16137,7 +16137,7 @@
         </p:nvSpPr>
         <p:spPr>
           <a:xfrm>
-            <a:off x="566928" y="2990087"/>
+            <a:off x="566928" y="3374136"/>
             <a:ext cx="658368" cy="420624"/>
           </a:xfrm>
           <a:prstGeom prst="rect">
@@ -16173,7 +16173,7 @@
         </p:nvSpPr>
         <p:spPr>
           <a:xfrm>
-            <a:off x="1261872" y="2944368"/>
+            <a:off x="1261872" y="3328416"/>
             <a:ext cx="3154680" cy="420624"/>
           </a:xfrm>
           <a:prstGeom prst="rect">
@@ -16209,7 +16209,7 @@
         </p:nvSpPr>
         <p:spPr>
           <a:xfrm>
-            <a:off x="4480560" y="2999232"/>
+            <a:off x="4480560" y="3383280"/>
             <a:ext cx="5486400" cy="384048"/>
           </a:xfrm>
           <a:prstGeom prst="rect">
@@ -16245,7 +16245,7 @@
         </p:nvSpPr>
         <p:spPr>
           <a:xfrm>
-            <a:off x="9985248" y="2971799"/>
+            <a:off x="9985248" y="3355848"/>
             <a:ext cx="1078992" cy="384048"/>
           </a:xfrm>
           <a:prstGeom prst="rect">
@@ -16281,7 +16281,7 @@
         </p:nvSpPr>
         <p:spPr>
           <a:xfrm>
-            <a:off x="566928" y="3639311"/>
+            <a:off x="566928" y="4023360"/>
             <a:ext cx="10497312" cy="7315"/>
           </a:xfrm>
           <a:prstGeom prst="rect">
@@ -16325,7 +16325,7 @@
         </p:nvSpPr>
         <p:spPr>
           <a:xfrm>
-            <a:off x="566928" y="3776472"/>
+            <a:off x="566928" y="4325112"/>
             <a:ext cx="658368" cy="420624"/>
           </a:xfrm>
           <a:prstGeom prst="rect">
@@ -16361,7 +16361,7 @@
         </p:nvSpPr>
         <p:spPr>
           <a:xfrm>
-            <a:off x="1261872" y="3730752"/>
+            <a:off x="1261872" y="4279392"/>
             <a:ext cx="3154680" cy="420624"/>
           </a:xfrm>
           <a:prstGeom prst="rect">
@@ -16384,7 +16384,7 @@
                 <a:latin typeface="Arial"/>
                 <a:ea typeface="微软雅黑"/>
               </a:rPr>
-              <a:t>实验设计与正确性</a:t>
+              <a:t>实验与结果</a:t>
             </a:r>
           </a:p>
         </p:txBody>
@@ -16397,7 +16397,7 @@
         </p:nvSpPr>
         <p:spPr>
           <a:xfrm>
-            <a:off x="4480560" y="3785615"/>
+            <a:off x="4480560" y="4334255"/>
             <a:ext cx="5486400" cy="384048"/>
           </a:xfrm>
           <a:prstGeom prst="rect">
@@ -16420,7 +16420,7 @@
                 <a:latin typeface="Arial"/>
                 <a:ea typeface="微软雅黑"/>
               </a:rPr>
-              <a:t>16 场景 144 次 run 的编码、六项指标口径与不变量断言</a:t>
+              <a:t>144 次 run 的口径与断言；五组基线、逐场景吞吐与尾延迟、扩展与复杂负载</a:t>
             </a:r>
           </a:p>
         </p:txBody>
@@ -16433,7 +16433,7 @@
         </p:nvSpPr>
         <p:spPr>
           <a:xfrm>
-            <a:off x="9985248" y="3758184"/>
+            <a:off x="9985248" y="4306824"/>
             <a:ext cx="1078992" cy="384048"/>
           </a:xfrm>
           <a:prstGeom prst="rect">
@@ -16456,7 +16456,7 @@
                 <a:latin typeface="Arial"/>
                 <a:ea typeface="微软雅黑"/>
               </a:rPr>
-              <a:t>P13–P15</a:t>
+              <a:t>P13–P21</a:t>
             </a:r>
           </a:p>
         </p:txBody>
@@ -16469,7 +16469,7 @@
         </p:nvSpPr>
         <p:spPr>
           <a:xfrm>
-            <a:off x="566928" y="4425696"/>
+            <a:off x="566928" y="4974336"/>
             <a:ext cx="10497312" cy="7315"/>
           </a:xfrm>
           <a:prstGeom prst="rect">
@@ -16513,7 +16513,7 @@
         </p:nvSpPr>
         <p:spPr>
           <a:xfrm>
-            <a:off x="566928" y="4562855"/>
+            <a:off x="566928" y="5276088"/>
             <a:ext cx="658368" cy="420624"/>
           </a:xfrm>
           <a:prstGeom prst="rect">
@@ -16549,7 +16549,7 @@
         </p:nvSpPr>
         <p:spPr>
           <a:xfrm>
-            <a:off x="1261872" y="4517136"/>
+            <a:off x="1261872" y="5230368"/>
             <a:ext cx="3154680" cy="420624"/>
           </a:xfrm>
           <a:prstGeom prst="rect">
@@ -16572,7 +16572,7 @@
                 <a:latin typeface="Arial"/>
                 <a:ea typeface="微软雅黑"/>
               </a:rPr>
-              <a:t>性能结果</a:t>
+              <a:t>故障注入与局限</a:t>
             </a:r>
           </a:p>
         </p:txBody>
@@ -16585,7 +16585,7 @@
         </p:nvSpPr>
         <p:spPr>
           <a:xfrm>
-            <a:off x="4480560" y="4571999"/>
+            <a:off x="4480560" y="5285232"/>
             <a:ext cx="5486400" cy="384048"/>
           </a:xfrm>
           <a:prstGeom prst="rect">
@@ -16608,7 +16608,7 @@
                 <a:latin typeface="Arial"/>
                 <a:ea typeface="微软雅黑"/>
               </a:rPr>
-              <a:t>五组基线、主场景形态、逐场景吞吐与尾延迟、实例与规模扩展</a:t>
+              <a:t>Layer 0 / Layer 3 两场注入，以及三条局限与展望</a:t>
             </a:r>
           </a:p>
         </p:txBody>
@@ -16621,7 +16621,7 @@
         </p:nvSpPr>
         <p:spPr>
           <a:xfrm>
-            <a:off x="9985248" y="4544568"/>
+            <a:off x="9985248" y="5257800"/>
             <a:ext cx="1078992" cy="384048"/>
           </a:xfrm>
           <a:prstGeom prst="rect">
@@ -16644,7 +16644,7 @@
                 <a:latin typeface="Arial"/>
                 <a:ea typeface="微软雅黑"/>
               </a:rPr>
-              <a:t>P16–P21</a:t>
+              <a:t>P22–P24</a:t>
             </a:r>
           </a:p>
         </p:txBody>
@@ -16657,7 +16657,7 @@
         </p:nvSpPr>
         <p:spPr>
           <a:xfrm>
-            <a:off x="566928" y="5212079"/>
+            <a:off x="566928" y="5925312"/>
             <a:ext cx="10497312" cy="7315"/>
           </a:xfrm>
           <a:prstGeom prst="rect">
@@ -16696,194 +16696,6 @@
       <p:sp>
         <p:nvSpPr>
           <p:cNvPr id="9028" name="TextBox 9027"/>
-          <p:cNvSpPr txBox="1"/>
-          <p:nvPr/>
-        </p:nvSpPr>
-        <p:spPr>
-          <a:xfrm>
-            <a:off x="566928" y="5349240"/>
-            <a:ext cx="658368" cy="420624"/>
-          </a:xfrm>
-          <a:prstGeom prst="rect">
-            <a:avLst/>
-          </a:prstGeom>
-          <a:noFill/>
-        </p:spPr>
-        <p:txBody>
-          <a:bodyPr wrap="square" anchor="t" lIns="0" rIns="0" tIns="0" bIns="0">
-            <a:spAutoFit/>
-          </a:bodyPr>
-          <a:lstStyle/>
-          <a:p>
-            <a:pPr algn="l"/>
-            <a:r>
-              <a:rPr sz="1900" b="1">
-                <a:solidFill>
-                  <a:srgbClr val="113E6A"/>
-                </a:solidFill>
-                <a:latin typeface="Arial"/>
-                <a:ea typeface="微软雅黑"/>
-              </a:rPr>
-              <a:t>06</a:t>
-            </a:r>
-          </a:p>
-        </p:txBody>
-      </p:sp>
-      <p:sp>
-        <p:nvSpPr>
-          <p:cNvPr id="9029" name="TextBox 9028"/>
-          <p:cNvSpPr txBox="1"/>
-          <p:nvPr/>
-        </p:nvSpPr>
-        <p:spPr>
-          <a:xfrm>
-            <a:off x="1261872" y="5303520"/>
-            <a:ext cx="3154680" cy="420624"/>
-          </a:xfrm>
-          <a:prstGeom prst="rect">
-            <a:avLst/>
-          </a:prstGeom>
-          <a:noFill/>
-        </p:spPr>
-        <p:txBody>
-          <a:bodyPr wrap="square" anchor="t" lIns="0" rIns="0" tIns="0" bIns="0">
-            <a:spAutoFit/>
-          </a:bodyPr>
-          <a:lstStyle/>
-          <a:p>
-            <a:pPr algn="l"/>
-            <a:r>
-              <a:rPr sz="1700" b="1">
-                <a:solidFill>
-                  <a:srgbClr val="2E2C2C"/>
-                </a:solidFill>
-                <a:latin typeface="Arial"/>
-                <a:ea typeface="微软雅黑"/>
-              </a:rPr>
-              <a:t>故障注入与局限</a:t>
-            </a:r>
-          </a:p>
-        </p:txBody>
-      </p:sp>
-      <p:sp>
-        <p:nvSpPr>
-          <p:cNvPr id="9030" name="TextBox 9029"/>
-          <p:cNvSpPr txBox="1"/>
-          <p:nvPr/>
-        </p:nvSpPr>
-        <p:spPr>
-          <a:xfrm>
-            <a:off x="4480560" y="5358383"/>
-            <a:ext cx="5486400" cy="384048"/>
-          </a:xfrm>
-          <a:prstGeom prst="rect">
-            <a:avLst/>
-          </a:prstGeom>
-          <a:noFill/>
-        </p:spPr>
-        <p:txBody>
-          <a:bodyPr wrap="square" anchor="t" lIns="0" rIns="0" tIns="0" bIns="0">
-            <a:spAutoFit/>
-          </a:bodyPr>
-          <a:lstStyle/>
-          <a:p>
-            <a:pPr algn="l"/>
-            <a:r>
-              <a:rPr sz="1150" b="0">
-                <a:solidFill>
-                  <a:srgbClr val="636363"/>
-                </a:solidFill>
-                <a:latin typeface="Arial"/>
-                <a:ea typeface="微软雅黑"/>
-              </a:rPr>
-              <a:t>Layer 0 / Layer 3 两场注入，以及三条局限与展望</a:t>
-            </a:r>
-          </a:p>
-        </p:txBody>
-      </p:sp>
-      <p:sp>
-        <p:nvSpPr>
-          <p:cNvPr id="9031" name="TextBox 9030"/>
-          <p:cNvSpPr txBox="1"/>
-          <p:nvPr/>
-        </p:nvSpPr>
-        <p:spPr>
-          <a:xfrm>
-            <a:off x="9985248" y="5330952"/>
-            <a:ext cx="1078992" cy="384048"/>
-          </a:xfrm>
-          <a:prstGeom prst="rect">
-            <a:avLst/>
-          </a:prstGeom>
-          <a:noFill/>
-        </p:spPr>
-        <p:txBody>
-          <a:bodyPr wrap="square" anchor="t" lIns="0" rIns="0" tIns="0" bIns="0">
-            <a:spAutoFit/>
-          </a:bodyPr>
-          <a:lstStyle/>
-          <a:p>
-            <a:pPr algn="r"/>
-            <a:r>
-              <a:rPr sz="1250" b="1">
-                <a:solidFill>
-                  <a:srgbClr val="0070C0"/>
-                </a:solidFill>
-                <a:latin typeface="Arial"/>
-                <a:ea typeface="微软雅黑"/>
-              </a:rPr>
-              <a:t>P22–P24</a:t>
-            </a:r>
-          </a:p>
-        </p:txBody>
-      </p:sp>
-      <p:sp>
-        <p:nvSpPr>
-          <p:cNvPr id="9032" name="Rectangle 9031"/>
-          <p:cNvSpPr/>
-          <p:nvPr/>
-        </p:nvSpPr>
-        <p:spPr>
-          <a:xfrm>
-            <a:off x="566928" y="5998464"/>
-            <a:ext cx="10497312" cy="7315"/>
-          </a:xfrm>
-          <a:prstGeom prst="rect">
-            <a:avLst/>
-          </a:prstGeom>
-          <a:solidFill>
-            <a:srgbClr val="D9DEE5"/>
-          </a:solidFill>
-          <a:ln>
-            <a:noFill/>
-          </a:ln>
-          <a:effectLst/>
-        </p:spPr>
-        <p:style>
-          <a:lnRef idx="1">
-            <a:schemeClr val="accent1"/>
-          </a:lnRef>
-          <a:fillRef idx="3">
-            <a:schemeClr val="accent1"/>
-          </a:fillRef>
-          <a:effectRef idx="2">
-            <a:schemeClr val="accent1"/>
-          </a:effectRef>
-          <a:fontRef idx="minor">
-            <a:schemeClr val="lt1"/>
-          </a:fontRef>
-        </p:style>
-        <p:txBody>
-          <a:bodyPr rtlCol="0" anchor="ctr"/>
-          <a:lstStyle/>
-          <a:p>
-            <a:pPr algn="ctr"/>
-          </a:p>
-        </p:txBody>
-      </p:sp>
-      <p:sp>
-        <p:nvSpPr>
-          <p:cNvPr id="9033" name="TextBox 9032"/>
           <p:cNvSpPr txBox="1"/>
           <p:nvPr/>
         </p:nvSpPr>

--- a/docs/thesis/defense/答辩PPT-北航模板版.pptx
+++ b/docs/thesis/defense/答辩PPT-北航模板版.pptx
@@ -16384,7 +16384,7 @@
                 <a:latin typeface="Arial"/>
                 <a:ea typeface="微软雅黑"/>
               </a:rPr>
-              <a:t>实验与结果</a:t>
+              <a:t>实验数据与性能对比分析</a:t>
             </a:r>
           </a:p>
         </p:txBody>

--- a/docs/thesis/defense/答辩PPT-北航模板版.pptx
+++ b/docs/thesis/defense/答辩PPT-北航模板版.pptx
@@ -16420,7 +16420,7 @@
                 <a:latin typeface="Arial"/>
                 <a:ea typeface="微软雅黑"/>
               </a:rPr>
-              <a:t>144 次 run 的口径与断言；五组基线、逐场景吞吐与尾延迟、扩展与复杂负载</a:t>
+              <a:t>144 次 run 的口径与断言；吞吐、尾延迟、扩展与复杂负载、两场故障注入</a:t>
             </a:r>
           </a:p>
         </p:txBody>
@@ -16456,7 +16456,7 @@
                 <a:latin typeface="Arial"/>
                 <a:ea typeface="微软雅黑"/>
               </a:rPr>
-              <a:t>P13–P21</a:t>
+              <a:t>P13–P23</a:t>
             </a:r>
           </a:p>
         </p:txBody>
@@ -16572,7 +16572,7 @@
                 <a:latin typeface="Arial"/>
                 <a:ea typeface="微软雅黑"/>
               </a:rPr>
-              <a:t>故障注入与局限</a:t>
+              <a:t>局限与展望</a:t>
             </a:r>
           </a:p>
         </p:txBody>
@@ -16608,7 +16608,7 @@
                 <a:latin typeface="Arial"/>
                 <a:ea typeface="微软雅黑"/>
               </a:rPr>
-              <a:t>Layer 0 / Layer 3 两场注入，以及三条局限与展望</a:t>
+              <a:t>三条局限（Gang 归因、KWOK 边界、资源开销）与三个延伸方向</a:t>
             </a:r>
           </a:p>
         </p:txBody>
@@ -16644,7 +16644,7 @@
                 <a:latin typeface="Arial"/>
                 <a:ea typeface="微软雅黑"/>
               </a:rPr>
-              <a:t>P22–P24</a:t>
+              <a:t>P24</a:t>
             </a:r>
           </a:p>
         </p:txBody>

--- a/docs/thesis/defense/答辩PPT-北航模板版.pptx
+++ b/docs/thesis/defense/答辩PPT-北航模板版.pptx
@@ -16196,7 +16196,7 @@
                 <a:latin typeface="Arial"/>
                 <a:ea typeface="微软雅黑"/>
               </a:rPr>
-              <a:t>核心方案</a:t>
+              <a:t>核心方案实现</a:t>
             </a:r>
           </a:p>
         </p:txBody>

--- a/docs/thesis/defense/答辩PPT-北航模板版.pptx
+++ b/docs/thesis/defense/答辩PPT-北航模板版.pptx
@@ -15761,8 +15761,8 @@
         </p:nvSpPr>
         <p:spPr>
           <a:xfrm>
-            <a:off x="566928" y="1472184"/>
-            <a:ext cx="658368" cy="420624"/>
+            <a:off x="1005840" y="1609344"/>
+            <a:ext cx="777240" cy="475488"/>
           </a:xfrm>
           <a:prstGeom prst="rect">
             <a:avLst/>
@@ -15777,7 +15777,7 @@
           <a:p>
             <a:pPr algn="l"/>
             <a:r>
-              <a:rPr sz="1900" b="1">
+              <a:rPr sz="2200" b="1">
                 <a:solidFill>
                   <a:srgbClr val="113E6A"/>
                 </a:solidFill>
@@ -15797,8 +15797,8 @@
         </p:nvSpPr>
         <p:spPr>
           <a:xfrm>
-            <a:off x="1261872" y="1426464"/>
-            <a:ext cx="3154680" cy="420624"/>
+            <a:off x="1874519" y="1572768"/>
+            <a:ext cx="8138160" cy="548640"/>
           </a:xfrm>
           <a:prstGeom prst="rect">
             <a:avLst/>
@@ -15813,7 +15813,7 @@
           <a:p>
             <a:pPr algn="l"/>
             <a:r>
-              <a:rPr sz="1700" b="1">
+              <a:rPr sz="2400" b="1">
                 <a:solidFill>
                   <a:srgbClr val="2E2C2C"/>
                 </a:solidFill>
@@ -15827,86 +15827,14 @@
       </p:sp>
       <p:sp>
         <p:nvSpPr>
-          <p:cNvPr id="9005" name="TextBox 9004"/>
-          <p:cNvSpPr txBox="1"/>
-          <p:nvPr/>
-        </p:nvSpPr>
-        <p:spPr>
-          <a:xfrm>
-            <a:off x="4480560" y="1481328"/>
-            <a:ext cx="5486400" cy="384048"/>
-          </a:xfrm>
-          <a:prstGeom prst="rect">
-            <a:avLst/>
-          </a:prstGeom>
-          <a:noFill/>
-        </p:spPr>
-        <p:txBody>
-          <a:bodyPr wrap="square" anchor="t" lIns="0" rIns="0" tIns="0" bIns="0">
-            <a:spAutoFit/>
-          </a:bodyPr>
-          <a:lstStyle/>
-          <a:p>
-            <a:pPr algn="l"/>
-            <a:r>
-              <a:rPr sz="1150" b="0">
-                <a:solidFill>
-                  <a:srgbClr val="636363"/>
-                </a:solidFill>
-                <a:latin typeface="Arial"/>
-                <a:ea typeface="微软雅黑"/>
-              </a:rPr>
-              <a:t>万节点规模下的三个瓶颈、两条技术路线与本文的两个问题</a:t>
-            </a:r>
-          </a:p>
-        </p:txBody>
-      </p:sp>
-      <p:sp>
-        <p:nvSpPr>
-          <p:cNvPr id="9006" name="TextBox 9005"/>
-          <p:cNvSpPr txBox="1"/>
-          <p:nvPr/>
-        </p:nvSpPr>
-        <p:spPr>
-          <a:xfrm>
-            <a:off x="9985248" y="1453896"/>
-            <a:ext cx="1078992" cy="384048"/>
-          </a:xfrm>
-          <a:prstGeom prst="rect">
-            <a:avLst/>
-          </a:prstGeom>
-          <a:noFill/>
-        </p:spPr>
-        <p:txBody>
-          <a:bodyPr wrap="square" anchor="t" lIns="0" rIns="0" tIns="0" bIns="0">
-            <a:spAutoFit/>
-          </a:bodyPr>
-          <a:lstStyle/>
-          <a:p>
-            <a:pPr algn="r"/>
-            <a:r>
-              <a:rPr sz="1250" b="1">
-                <a:solidFill>
-                  <a:srgbClr val="0070C0"/>
-                </a:solidFill>
-                <a:latin typeface="Arial"/>
-                <a:ea typeface="微软雅黑"/>
-              </a:rPr>
-              <a:t>P3–P5</a:t>
-            </a:r>
-          </a:p>
-        </p:txBody>
-      </p:sp>
-      <p:sp>
-        <p:nvSpPr>
-          <p:cNvPr id="9007" name="Rectangle 9006"/>
+          <p:cNvPr id="9005" name="Rectangle 9004"/>
           <p:cNvSpPr/>
           <p:nvPr/>
         </p:nvSpPr>
         <p:spPr>
           <a:xfrm>
-            <a:off x="566928" y="2121408"/>
-            <a:ext cx="10497312" cy="7315"/>
+            <a:off x="1005840" y="2340864"/>
+            <a:ext cx="9144000" cy="7315"/>
           </a:xfrm>
           <a:prstGeom prst="rect">
             <a:avLst/>
@@ -15943,14 +15871,14 @@
       </p:sp>
       <p:sp>
         <p:nvSpPr>
-          <p:cNvPr id="9008" name="TextBox 9007"/>
+          <p:cNvPr id="9006" name="TextBox 9005"/>
           <p:cNvSpPr txBox="1"/>
           <p:nvPr/>
         </p:nvSpPr>
         <p:spPr>
           <a:xfrm>
-            <a:off x="566928" y="2423160"/>
-            <a:ext cx="658368" cy="420624"/>
+            <a:off x="1005840" y="2523744"/>
+            <a:ext cx="777240" cy="475488"/>
           </a:xfrm>
           <a:prstGeom prst="rect">
             <a:avLst/>
@@ -15965,7 +15893,7 @@
           <a:p>
             <a:pPr algn="l"/>
             <a:r>
-              <a:rPr sz="1900" b="1">
+              <a:rPr sz="2200" b="1">
                 <a:solidFill>
                   <a:srgbClr val="113E6A"/>
                 </a:solidFill>
@@ -15979,14 +15907,14 @@
       </p:sp>
       <p:sp>
         <p:nvSpPr>
-          <p:cNvPr id="9009" name="TextBox 9008"/>
+          <p:cNvPr id="9007" name="TextBox 9006"/>
           <p:cNvSpPr txBox="1"/>
           <p:nvPr/>
         </p:nvSpPr>
         <p:spPr>
           <a:xfrm>
-            <a:off x="1261872" y="2377440"/>
-            <a:ext cx="3154680" cy="420624"/>
+            <a:off x="1874519" y="2487168"/>
+            <a:ext cx="8138160" cy="548640"/>
           </a:xfrm>
           <a:prstGeom prst="rect">
             <a:avLst/>
@@ -16001,7 +15929,7 @@
           <a:p>
             <a:pPr algn="l"/>
             <a:r>
-              <a:rPr sz="1700" b="1">
+              <a:rPr sz="2400" b="1">
                 <a:solidFill>
                   <a:srgbClr val="2E2C2C"/>
                 </a:solidFill>
@@ -16015,86 +15943,14 @@
       </p:sp>
       <p:sp>
         <p:nvSpPr>
-          <p:cNvPr id="9010" name="TextBox 9009"/>
-          <p:cNvSpPr txBox="1"/>
-          <p:nvPr/>
-        </p:nvSpPr>
-        <p:spPr>
-          <a:xfrm>
-            <a:off x="4480560" y="2432304"/>
-            <a:ext cx="5486400" cy="384048"/>
-          </a:xfrm>
-          <a:prstGeom prst="rect">
-            <a:avLst/>
-          </a:prstGeom>
-          <a:noFill/>
-        </p:spPr>
-        <p:txBody>
-          <a:bodyPr wrap="square" anchor="t" lIns="0" rIns="0" tIns="0" bIns="0">
-            <a:spAutoFit/>
-          </a:bodyPr>
-          <a:lstStyle/>
-          <a:p>
-            <a:pPr algn="l"/>
-            <a:r>
-              <a:rPr sz="1150" b="0">
-                <a:solidFill>
-                  <a:srgbClr val="636363"/>
-                </a:solidFill>
-                <a:latin typeface="Arial"/>
-                <a:ea typeface="微软雅黑"/>
-              </a:rPr>
-              <a:t>Dispatcher / Scheduler / Binder 三层职责与 Pod 流转</a:t>
-            </a:r>
-          </a:p>
-        </p:txBody>
-      </p:sp>
-      <p:sp>
-        <p:nvSpPr>
-          <p:cNvPr id="9011" name="TextBox 9010"/>
-          <p:cNvSpPr txBox="1"/>
-          <p:nvPr/>
-        </p:nvSpPr>
-        <p:spPr>
-          <a:xfrm>
-            <a:off x="9985248" y="2404872"/>
-            <a:ext cx="1078992" cy="384048"/>
-          </a:xfrm>
-          <a:prstGeom prst="rect">
-            <a:avLst/>
-          </a:prstGeom>
-          <a:noFill/>
-        </p:spPr>
-        <p:txBody>
-          <a:bodyPr wrap="square" anchor="t" lIns="0" rIns="0" tIns="0" bIns="0">
-            <a:spAutoFit/>
-          </a:bodyPr>
-          <a:lstStyle/>
-          <a:p>
-            <a:pPr algn="r"/>
-            <a:r>
-              <a:rPr sz="1250" b="1">
-                <a:solidFill>
-                  <a:srgbClr val="0070C0"/>
-                </a:solidFill>
-                <a:latin typeface="Arial"/>
-                <a:ea typeface="微软雅黑"/>
-              </a:rPr>
-              <a:t>P6–P8</a:t>
-            </a:r>
-          </a:p>
-        </p:txBody>
-      </p:sp>
-      <p:sp>
-        <p:nvSpPr>
-          <p:cNvPr id="9012" name="Rectangle 9011"/>
+          <p:cNvPr id="9008" name="Rectangle 9007"/>
           <p:cNvSpPr/>
           <p:nvPr/>
         </p:nvSpPr>
         <p:spPr>
           <a:xfrm>
-            <a:off x="566928" y="3072384"/>
-            <a:ext cx="10497312" cy="7315"/>
+            <a:off x="1005840" y="3255263"/>
+            <a:ext cx="9144000" cy="7315"/>
           </a:xfrm>
           <a:prstGeom prst="rect">
             <a:avLst/>
@@ -16131,14 +15987,14 @@
       </p:sp>
       <p:sp>
         <p:nvSpPr>
-          <p:cNvPr id="9013" name="TextBox 9012"/>
+          <p:cNvPr id="9009" name="TextBox 9008"/>
           <p:cNvSpPr txBox="1"/>
           <p:nvPr/>
         </p:nvSpPr>
         <p:spPr>
           <a:xfrm>
-            <a:off x="566928" y="3374136"/>
-            <a:ext cx="658368" cy="420624"/>
+            <a:off x="1005840" y="3438144"/>
+            <a:ext cx="777240" cy="475488"/>
           </a:xfrm>
           <a:prstGeom prst="rect">
             <a:avLst/>
@@ -16153,7 +16009,7 @@
           <a:p>
             <a:pPr algn="l"/>
             <a:r>
-              <a:rPr sz="1900" b="1">
+              <a:rPr sz="2200" b="1">
                 <a:solidFill>
                   <a:srgbClr val="113E6A"/>
                 </a:solidFill>
@@ -16167,14 +16023,14 @@
       </p:sp>
       <p:sp>
         <p:nvSpPr>
-          <p:cNvPr id="9014" name="TextBox 9013"/>
+          <p:cNvPr id="9010" name="TextBox 9009"/>
           <p:cNvSpPr txBox="1"/>
           <p:nvPr/>
         </p:nvSpPr>
         <p:spPr>
           <a:xfrm>
-            <a:off x="1261872" y="3328416"/>
-            <a:ext cx="3154680" cy="420624"/>
+            <a:off x="1874519" y="3401568"/>
+            <a:ext cx="8138160" cy="548640"/>
           </a:xfrm>
           <a:prstGeom prst="rect">
             <a:avLst/>
@@ -16189,7 +16045,7 @@
           <a:p>
             <a:pPr algn="l"/>
             <a:r>
-              <a:rPr sz="1700" b="1">
+              <a:rPr sz="2400" b="1">
                 <a:solidFill>
                   <a:srgbClr val="2E2C2C"/>
                 </a:solidFill>
@@ -16203,86 +16059,14 @@
       </p:sp>
       <p:sp>
         <p:nvSpPr>
-          <p:cNvPr id="9015" name="TextBox 9014"/>
-          <p:cNvSpPr txBox="1"/>
-          <p:nvPr/>
-        </p:nvSpPr>
-        <p:spPr>
-          <a:xfrm>
-            <a:off x="4480560" y="3383280"/>
-            <a:ext cx="5486400" cy="384048"/>
-          </a:xfrm>
-          <a:prstGeom prst="rect">
-            <a:avLst/>
-          </a:prstGeom>
-          <a:noFill/>
-        </p:spPr>
-        <p:txBody>
-          <a:bodyPr wrap="square" anchor="t" lIns="0" rIns="0" tIns="0" bIns="0">
-            <a:spAutoFit/>
-          </a:bodyPr>
-          <a:lstStyle/>
-          <a:p>
-            <a:pPr algn="l"/>
-            <a:r>
-              <a:rPr sz="1150" b="0">
-                <a:solidFill>
-                  <a:srgbClr val="636363"/>
-                </a:solidFill>
-                <a:latin typeface="Arial"/>
-                <a:ea typeface="微软雅黑"/>
-              </a:rPr>
-              <a:t>把 Binder 合并进 Scheduler、缓存零拷贝共享；四层容错 + 不变量证明</a:t>
-            </a:r>
-          </a:p>
-        </p:txBody>
-      </p:sp>
-      <p:sp>
-        <p:nvSpPr>
-          <p:cNvPr id="9016" name="TextBox 9015"/>
-          <p:cNvSpPr txBox="1"/>
-          <p:nvPr/>
-        </p:nvSpPr>
-        <p:spPr>
-          <a:xfrm>
-            <a:off x="9985248" y="3355848"/>
-            <a:ext cx="1078992" cy="384048"/>
-          </a:xfrm>
-          <a:prstGeom prst="rect">
-            <a:avLst/>
-          </a:prstGeom>
-          <a:noFill/>
-        </p:spPr>
-        <p:txBody>
-          <a:bodyPr wrap="square" anchor="t" lIns="0" rIns="0" tIns="0" bIns="0">
-            <a:spAutoFit/>
-          </a:bodyPr>
-          <a:lstStyle/>
-          <a:p>
-            <a:pPr algn="r"/>
-            <a:r>
-              <a:rPr sz="1250" b="1">
-                <a:solidFill>
-                  <a:srgbClr val="0070C0"/>
-                </a:solidFill>
-                <a:latin typeface="Arial"/>
-                <a:ea typeface="微软雅黑"/>
-              </a:rPr>
-              <a:t>P9–P12</a:t>
-            </a:r>
-          </a:p>
-        </p:txBody>
-      </p:sp>
-      <p:sp>
-        <p:nvSpPr>
-          <p:cNvPr id="9017" name="Rectangle 9016"/>
+          <p:cNvPr id="9011" name="Rectangle 9010"/>
           <p:cNvSpPr/>
           <p:nvPr/>
         </p:nvSpPr>
         <p:spPr>
           <a:xfrm>
-            <a:off x="566928" y="4023360"/>
-            <a:ext cx="10497312" cy="7315"/>
+            <a:off x="1005840" y="4169663"/>
+            <a:ext cx="9144000" cy="7315"/>
           </a:xfrm>
           <a:prstGeom prst="rect">
             <a:avLst/>
@@ -16319,14 +16103,14 @@
       </p:sp>
       <p:sp>
         <p:nvSpPr>
-          <p:cNvPr id="9018" name="TextBox 9017"/>
+          <p:cNvPr id="9012" name="TextBox 9011"/>
           <p:cNvSpPr txBox="1"/>
           <p:nvPr/>
         </p:nvSpPr>
         <p:spPr>
           <a:xfrm>
-            <a:off x="566928" y="4325112"/>
-            <a:ext cx="658368" cy="420624"/>
+            <a:off x="1005840" y="4352544"/>
+            <a:ext cx="777240" cy="475488"/>
           </a:xfrm>
           <a:prstGeom prst="rect">
             <a:avLst/>
@@ -16341,7 +16125,7 @@
           <a:p>
             <a:pPr algn="l"/>
             <a:r>
-              <a:rPr sz="1900" b="1">
+              <a:rPr sz="2200" b="1">
                 <a:solidFill>
                   <a:srgbClr val="113E6A"/>
                 </a:solidFill>
@@ -16355,14 +16139,14 @@
       </p:sp>
       <p:sp>
         <p:nvSpPr>
-          <p:cNvPr id="9019" name="TextBox 9018"/>
+          <p:cNvPr id="9013" name="TextBox 9012"/>
           <p:cNvSpPr txBox="1"/>
           <p:nvPr/>
         </p:nvSpPr>
         <p:spPr>
           <a:xfrm>
-            <a:off x="1261872" y="4279392"/>
-            <a:ext cx="3154680" cy="420624"/>
+            <a:off x="1874519" y="4315968"/>
+            <a:ext cx="8138160" cy="548640"/>
           </a:xfrm>
           <a:prstGeom prst="rect">
             <a:avLst/>
@@ -16377,7 +16161,7 @@
           <a:p>
             <a:pPr algn="l"/>
             <a:r>
-              <a:rPr sz="1700" b="1">
+              <a:rPr sz="2400" b="1">
                 <a:solidFill>
                   <a:srgbClr val="2E2C2C"/>
                 </a:solidFill>
@@ -16391,86 +16175,14 @@
       </p:sp>
       <p:sp>
         <p:nvSpPr>
-          <p:cNvPr id="9020" name="TextBox 9019"/>
-          <p:cNvSpPr txBox="1"/>
-          <p:nvPr/>
-        </p:nvSpPr>
-        <p:spPr>
-          <a:xfrm>
-            <a:off x="4480560" y="4334255"/>
-            <a:ext cx="5486400" cy="384048"/>
-          </a:xfrm>
-          <a:prstGeom prst="rect">
-            <a:avLst/>
-          </a:prstGeom>
-          <a:noFill/>
-        </p:spPr>
-        <p:txBody>
-          <a:bodyPr wrap="square" anchor="t" lIns="0" rIns="0" tIns="0" bIns="0">
-            <a:spAutoFit/>
-          </a:bodyPr>
-          <a:lstStyle/>
-          <a:p>
-            <a:pPr algn="l"/>
-            <a:r>
-              <a:rPr sz="1150" b="0">
-                <a:solidFill>
-                  <a:srgbClr val="636363"/>
-                </a:solidFill>
-                <a:latin typeface="Arial"/>
-                <a:ea typeface="微软雅黑"/>
-              </a:rPr>
-              <a:t>144 次 run 的口径与断言；吞吐、尾延迟、扩展与复杂负载、两场故障注入</a:t>
-            </a:r>
-          </a:p>
-        </p:txBody>
-      </p:sp>
-      <p:sp>
-        <p:nvSpPr>
-          <p:cNvPr id="9021" name="TextBox 9020"/>
-          <p:cNvSpPr txBox="1"/>
-          <p:nvPr/>
-        </p:nvSpPr>
-        <p:spPr>
-          <a:xfrm>
-            <a:off x="9985248" y="4306824"/>
-            <a:ext cx="1078992" cy="384048"/>
-          </a:xfrm>
-          <a:prstGeom prst="rect">
-            <a:avLst/>
-          </a:prstGeom>
-          <a:noFill/>
-        </p:spPr>
-        <p:txBody>
-          <a:bodyPr wrap="square" anchor="t" lIns="0" rIns="0" tIns="0" bIns="0">
-            <a:spAutoFit/>
-          </a:bodyPr>
-          <a:lstStyle/>
-          <a:p>
-            <a:pPr algn="r"/>
-            <a:r>
-              <a:rPr sz="1250" b="1">
-                <a:solidFill>
-                  <a:srgbClr val="0070C0"/>
-                </a:solidFill>
-                <a:latin typeface="Arial"/>
-                <a:ea typeface="微软雅黑"/>
-              </a:rPr>
-              <a:t>P13–P23</a:t>
-            </a:r>
-          </a:p>
-        </p:txBody>
-      </p:sp>
-      <p:sp>
-        <p:nvSpPr>
-          <p:cNvPr id="9022" name="Rectangle 9021"/>
+          <p:cNvPr id="9014" name="Rectangle 9013"/>
           <p:cNvSpPr/>
           <p:nvPr/>
         </p:nvSpPr>
         <p:spPr>
           <a:xfrm>
-            <a:off x="566928" y="4974336"/>
-            <a:ext cx="10497312" cy="7315"/>
+            <a:off x="1005840" y="5084064"/>
+            <a:ext cx="9144000" cy="7315"/>
           </a:xfrm>
           <a:prstGeom prst="rect">
             <a:avLst/>
@@ -16507,14 +16219,14 @@
       </p:sp>
       <p:sp>
         <p:nvSpPr>
-          <p:cNvPr id="9023" name="TextBox 9022"/>
+          <p:cNvPr id="9015" name="TextBox 9014"/>
           <p:cNvSpPr txBox="1"/>
           <p:nvPr/>
         </p:nvSpPr>
         <p:spPr>
           <a:xfrm>
-            <a:off x="566928" y="5276088"/>
-            <a:ext cx="658368" cy="420624"/>
+            <a:off x="1005840" y="5266944"/>
+            <a:ext cx="777240" cy="475488"/>
           </a:xfrm>
           <a:prstGeom prst="rect">
             <a:avLst/>
@@ -16529,7 +16241,7 @@
           <a:p>
             <a:pPr algn="l"/>
             <a:r>
-              <a:rPr sz="1900" b="1">
+              <a:rPr sz="2200" b="1">
                 <a:solidFill>
                   <a:srgbClr val="113E6A"/>
                 </a:solidFill>
@@ -16543,14 +16255,14 @@
       </p:sp>
       <p:sp>
         <p:nvSpPr>
-          <p:cNvPr id="9024" name="TextBox 9023"/>
+          <p:cNvPr id="9016" name="TextBox 9015"/>
           <p:cNvSpPr txBox="1"/>
           <p:nvPr/>
         </p:nvSpPr>
         <p:spPr>
           <a:xfrm>
-            <a:off x="1261872" y="5230368"/>
-            <a:ext cx="3154680" cy="420624"/>
+            <a:off x="1874519" y="5230368"/>
+            <a:ext cx="8138160" cy="548640"/>
           </a:xfrm>
           <a:prstGeom prst="rect">
             <a:avLst/>
@@ -16565,7 +16277,7 @@
           <a:p>
             <a:pPr algn="l"/>
             <a:r>
-              <a:rPr sz="1700" b="1">
+              <a:rPr sz="2400" b="1">
                 <a:solidFill>
                   <a:srgbClr val="2E2C2C"/>
                 </a:solidFill>
@@ -16579,86 +16291,14 @@
       </p:sp>
       <p:sp>
         <p:nvSpPr>
-          <p:cNvPr id="9025" name="TextBox 9024"/>
-          <p:cNvSpPr txBox="1"/>
-          <p:nvPr/>
-        </p:nvSpPr>
-        <p:spPr>
-          <a:xfrm>
-            <a:off x="4480560" y="5285232"/>
-            <a:ext cx="5486400" cy="384048"/>
-          </a:xfrm>
-          <a:prstGeom prst="rect">
-            <a:avLst/>
-          </a:prstGeom>
-          <a:noFill/>
-        </p:spPr>
-        <p:txBody>
-          <a:bodyPr wrap="square" anchor="t" lIns="0" rIns="0" tIns="0" bIns="0">
-            <a:spAutoFit/>
-          </a:bodyPr>
-          <a:lstStyle/>
-          <a:p>
-            <a:pPr algn="l"/>
-            <a:r>
-              <a:rPr sz="1150" b="0">
-                <a:solidFill>
-                  <a:srgbClr val="636363"/>
-                </a:solidFill>
-                <a:latin typeface="Arial"/>
-                <a:ea typeface="微软雅黑"/>
-              </a:rPr>
-              <a:t>三条局限（Gang 归因、KWOK 边界、资源开销）与三个延伸方向</a:t>
-            </a:r>
-          </a:p>
-        </p:txBody>
-      </p:sp>
-      <p:sp>
-        <p:nvSpPr>
-          <p:cNvPr id="9026" name="TextBox 9025"/>
-          <p:cNvSpPr txBox="1"/>
-          <p:nvPr/>
-        </p:nvSpPr>
-        <p:spPr>
-          <a:xfrm>
-            <a:off x="9985248" y="5257800"/>
-            <a:ext cx="1078992" cy="384048"/>
-          </a:xfrm>
-          <a:prstGeom prst="rect">
-            <a:avLst/>
-          </a:prstGeom>
-          <a:noFill/>
-        </p:spPr>
-        <p:txBody>
-          <a:bodyPr wrap="square" anchor="t" lIns="0" rIns="0" tIns="0" bIns="0">
-            <a:spAutoFit/>
-          </a:bodyPr>
-          <a:lstStyle/>
-          <a:p>
-            <a:pPr algn="r"/>
-            <a:r>
-              <a:rPr sz="1250" b="1">
-                <a:solidFill>
-                  <a:srgbClr val="0070C0"/>
-                </a:solidFill>
-                <a:latin typeface="Arial"/>
-                <a:ea typeface="微软雅黑"/>
-              </a:rPr>
-              <a:t>P24</a:t>
-            </a:r>
-          </a:p>
-        </p:txBody>
-      </p:sp>
-      <p:sp>
-        <p:nvSpPr>
-          <p:cNvPr id="9027" name="Rectangle 9026"/>
+          <p:cNvPr id="9017" name="Rectangle 9016"/>
           <p:cNvSpPr/>
           <p:nvPr/>
         </p:nvSpPr>
         <p:spPr>
           <a:xfrm>
-            <a:off x="566928" y="5925312"/>
-            <a:ext cx="10497312" cy="7315"/>
+            <a:off x="1005840" y="5998464"/>
+            <a:ext cx="9144000" cy="7315"/>
           </a:xfrm>
           <a:prstGeom prst="rect">
             <a:avLst/>
@@ -16695,7 +16335,7 @@
       </p:sp>
       <p:sp>
         <p:nvSpPr>
-          <p:cNvPr id="9028" name="TextBox 9027"/>
+          <p:cNvPr id="9018" name="TextBox 9017"/>
           <p:cNvSpPr txBox="1"/>
           <p:nvPr/>
         </p:nvSpPr>

--- a/docs/thesis/defense/答辩PPT-北航模板版.pptx
+++ b/docs/thesis/defense/答辩PPT-北航模板版.pptx
@@ -1821,7 +1821,7 @@
           <a:lstStyle/>
           <a:p>
             <a:r>
-              <a:t>汇报分六段，二十分钟左右，重点在第五、六段的实验。</a:t>
+              <a:t>汇报分五段，二十分钟左右，重点在第四段的实验数据。</a:t>
             </a:r>
           </a:p>
         </p:txBody>
@@ -15820,7 +15820,7 @@
                 <a:latin typeface="Arial"/>
                 <a:ea typeface="微软雅黑"/>
               </a:rPr>
-              <a:t>研究背景与现状</a:t>
+              <a:t>研究背景与国内外研究现状</a:t>
             </a:r>
           </a:p>
         </p:txBody>

--- a/docs/thesis/defense/答辩PPT-北航模板版.pptx
+++ b/docs/thesis/defense/答辩PPT-北航模板版.pptx
@@ -16052,7 +16052,7 @@
                 <a:latin typeface="Arial"/>
                 <a:ea typeface="微软雅黑"/>
               </a:rPr>
-              <a:t>核心方案实现</a:t>
+              <a:t>研究内容与创新点</a:t>
             </a:r>
           </a:p>
         </p:txBody>

--- a/docs/thesis/defense/答辩PPT-北航模板版.pptx
+++ b/docs/thesis/defense/答辩PPT-北航模板版.pptx
@@ -15936,7 +15936,7 @@
                 <a:latin typeface="Arial"/>
                 <a:ea typeface="微软雅黑"/>
               </a:rPr>
-              <a:t>架构总览</a:t>
+              <a:t>研究内容与创新点</a:t>
             </a:r>
           </a:p>
         </p:txBody>
@@ -16052,7 +16052,7 @@
                 <a:latin typeface="Arial"/>
                 <a:ea typeface="微软雅黑"/>
               </a:rPr>
-              <a:t>研究内容与创新点</a:t>
+              <a:t>架构总览</a:t>
             </a:r>
           </a:p>
         </p:txBody>
